--- a/presentations/gen5_4_ml_decision_engine_incremental_build.pptx
+++ b/presentations/gen5_4_ml_decision_engine_incremental_build.pptx
@@ -2,22 +2,29 @@
 <file path=ppt/presentation.xml><?xml version="1.0" encoding="utf-8"?>
 <p:presentation xmlns:p="http://schemas.openxmlformats.org/presentationml/2006/main">
   <p:sldMasterIdLst>
-    <p:sldMasterId xmlns:r="http://schemas.openxmlformats.org/officeDocument/2006/relationships" id="2147483648" r:id="R887a5165dec64549"/>
+    <p:sldMasterId xmlns:r="http://schemas.openxmlformats.org/officeDocument/2006/relationships" id="2147483648" r:id="Rb707c0c617c44f5f"/>
   </p:sldMasterIdLst>
   <p:notesMasterIdLst>
-    <p:notesMasterId xmlns:r="http://schemas.openxmlformats.org/officeDocument/2006/relationships" r:id="Rdc700c6eed724d83"/>
+    <p:notesMasterId xmlns:r="http://schemas.openxmlformats.org/officeDocument/2006/relationships" r:id="R27608b05f04c46d9"/>
   </p:notesMasterIdLst>
   <p:sldIdLst>
-    <p:sldId xmlns:r="http://schemas.openxmlformats.org/officeDocument/2006/relationships" id="256" r:id="R1813de4d8fd14741"/>
-    <p:sldId xmlns:r="http://schemas.openxmlformats.org/officeDocument/2006/relationships" id="257" r:id="R4f631ccd5b854966"/>
-    <p:sldId xmlns:r="http://schemas.openxmlformats.org/officeDocument/2006/relationships" id="258" r:id="R5a607c52bd5341b1"/>
-    <p:sldId xmlns:r="http://schemas.openxmlformats.org/officeDocument/2006/relationships" id="259" r:id="R43fb36539e7e4467"/>
-    <p:sldId xmlns:r="http://schemas.openxmlformats.org/officeDocument/2006/relationships" id="260" r:id="Rd971c8a94ff94f15"/>
-    <p:sldId xmlns:r="http://schemas.openxmlformats.org/officeDocument/2006/relationships" id="261" r:id="R13e0b814fead4bb1"/>
-    <p:sldId xmlns:r="http://schemas.openxmlformats.org/officeDocument/2006/relationships" id="262" r:id="R13e2ad61cc104483"/>
-    <p:sldId xmlns:r="http://schemas.openxmlformats.org/officeDocument/2006/relationships" id="263" r:id="R3bc4374851964d35"/>
-    <p:sldId xmlns:r="http://schemas.openxmlformats.org/officeDocument/2006/relationships" id="264" r:id="R5f26bc39a55a48e5"/>
-    <p:sldId xmlns:r="http://schemas.openxmlformats.org/officeDocument/2006/relationships" id="265" r:id="Rb25315040c9a409a"/>
+    <p:sldId xmlns:r="http://schemas.openxmlformats.org/officeDocument/2006/relationships" id="256" r:id="R2aff7e8acff749d7"/>
+    <p:sldId xmlns:r="http://schemas.openxmlformats.org/officeDocument/2006/relationships" id="257" r:id="Rb7c27742628d4312"/>
+    <p:sldId xmlns:r="http://schemas.openxmlformats.org/officeDocument/2006/relationships" id="258" r:id="R6e05c5979eb048b1"/>
+    <p:sldId xmlns:r="http://schemas.openxmlformats.org/officeDocument/2006/relationships" id="259" r:id="Rc17acef321df40c8"/>
+    <p:sldId xmlns:r="http://schemas.openxmlformats.org/officeDocument/2006/relationships" id="260" r:id="R2139a1163d4946e5"/>
+    <p:sldId xmlns:r="http://schemas.openxmlformats.org/officeDocument/2006/relationships" id="261" r:id="Rcc36a9fba9514e54"/>
+    <p:sldId xmlns:r="http://schemas.openxmlformats.org/officeDocument/2006/relationships" id="262" r:id="R52e81f1b7cce450f"/>
+    <p:sldId xmlns:r="http://schemas.openxmlformats.org/officeDocument/2006/relationships" id="263" r:id="R4e9745ced60e4c5d"/>
+    <p:sldId xmlns:r="http://schemas.openxmlformats.org/officeDocument/2006/relationships" id="264" r:id="R66d61afad71b43a2"/>
+    <p:sldId xmlns:r="http://schemas.openxmlformats.org/officeDocument/2006/relationships" id="265" r:id="Rc06a3a9b543144b2"/>
+    <p:sldId xmlns:r="http://schemas.openxmlformats.org/officeDocument/2006/relationships" id="266" r:id="Rd78829dd075f4fcf"/>
+    <p:sldId xmlns:r="http://schemas.openxmlformats.org/officeDocument/2006/relationships" id="267" r:id="R296052f1e7984a01"/>
+    <p:sldId xmlns:r="http://schemas.openxmlformats.org/officeDocument/2006/relationships" id="268" r:id="R594f24f54e8f42b7"/>
+    <p:sldId xmlns:r="http://schemas.openxmlformats.org/officeDocument/2006/relationships" id="269" r:id="Rc52d03f33f0e40eb"/>
+    <p:sldId xmlns:r="http://schemas.openxmlformats.org/officeDocument/2006/relationships" id="270" r:id="R31adc33a12ac4ab6"/>
+    <p:sldId xmlns:r="http://schemas.openxmlformats.org/officeDocument/2006/relationships" id="271" r:id="R9839342601494d6d"/>
+    <p:sldId xmlns:r="http://schemas.openxmlformats.org/officeDocument/2006/relationships" id="272" r:id="Rac05c9d3386a4f5e"/>
   </p:sldIdLst>
   <p:sldSz cx="12192000" cy="6858000"/>
   <p:notesSz cx="6858000" cy="9144000"/>
@@ -638,6 +645,468 @@
 </p:notes>
 </file>
 
+<file path=ppt/notesSlides/notesSlide11.xml><?xml version="1.0" encoding="utf-8"?>
+<p:notes xmlns:p="http://schemas.openxmlformats.org/presentationml/2006/main">
+  <p:cSld>
+    <p:spTree>
+      <p:nvGrpSpPr>
+        <p:cNvPr id="1" name=""/>
+        <p:cNvGrpSpPr/>
+        <p:nvPr/>
+      </p:nvGrpSpPr>
+      <p:grpSpPr>
+        <a:xfrm xmlns:a="http://schemas.openxmlformats.org/drawingml/2006/main"/>
+      </p:grpSpPr>
+      <p:sp>
+        <p:nvSpPr>
+          <p:cNvPr id="2" name="Slide Image Placeholder 1"/>
+          <p:cNvSpPr>
+            <a:spLocks xmlns:a="http://schemas.openxmlformats.org/drawingml/2006/main" noGrp="1"/>
+          </p:cNvSpPr>
+          <p:nvPr>
+            <p:ph type="sldImg" idx="0"/>
+          </p:nvPr>
+        </p:nvSpPr>
+        <p:spPr/>
+      </p:sp>
+      <p:sp>
+        <p:nvSpPr>
+          <p:cNvPr id="3" name="Notes Placeholder 2"/>
+          <p:cNvSpPr>
+            <a:spLocks xmlns:a="http://schemas.openxmlformats.org/drawingml/2006/main" noGrp="1"/>
+          </p:cNvSpPr>
+          <p:nvPr>
+            <p:ph type="body" idx="1"/>
+          </p:nvPr>
+        </p:nvSpPr>
+        <p:spPr/>
+        <p:txBody>
+          <a:bodyPr xmlns:a="http://schemas.openxmlformats.org/drawingml/2006/main"/>
+          <a:lstStyle xmlns:a="http://schemas.openxmlformats.org/drawingml/2006/main"/>
+          <a:p xmlns:a="http://schemas.openxmlformats.org/drawingml/2006/main"/>
+        </p:txBody>
+      </p:sp>
+      <p:sp>
+        <p:nvSpPr>
+          <p:cNvPr id="4" name="Slide Number Placeholder 3"/>
+          <p:cNvSpPr>
+            <a:spLocks xmlns:a="http://schemas.openxmlformats.org/drawingml/2006/main" noGrp="1"/>
+          </p:cNvSpPr>
+          <p:nvPr>
+            <p:ph type="sldNum" idx="5"/>
+          </p:nvPr>
+        </p:nvSpPr>
+        <p:spPr/>
+        <p:txBody>
+          <a:bodyPr xmlns:a="http://schemas.openxmlformats.org/drawingml/2006/main"/>
+          <a:lstStyle xmlns:a="http://schemas.openxmlformats.org/drawingml/2006/main"/>
+          <a:p xmlns:a="http://schemas.openxmlformats.org/drawingml/2006/main"/>
+        </p:txBody>
+      </p:sp>
+    </p:spTree>
+  </p:cSld>
+  <p:clrMapOvr>
+    <a:masterClrMapping xmlns:a="http://schemas.openxmlformats.org/drawingml/2006/main"/>
+  </p:clrMapOvr>
+</p:notes>
+</file>
+
+<file path=ppt/notesSlides/notesSlide12.xml><?xml version="1.0" encoding="utf-8"?>
+<p:notes xmlns:p="http://schemas.openxmlformats.org/presentationml/2006/main">
+  <p:cSld>
+    <p:spTree>
+      <p:nvGrpSpPr>
+        <p:cNvPr id="1" name=""/>
+        <p:cNvGrpSpPr/>
+        <p:nvPr/>
+      </p:nvGrpSpPr>
+      <p:grpSpPr>
+        <a:xfrm xmlns:a="http://schemas.openxmlformats.org/drawingml/2006/main"/>
+      </p:grpSpPr>
+      <p:sp>
+        <p:nvSpPr>
+          <p:cNvPr id="2" name="Slide Image Placeholder 1"/>
+          <p:cNvSpPr>
+            <a:spLocks xmlns:a="http://schemas.openxmlformats.org/drawingml/2006/main" noGrp="1"/>
+          </p:cNvSpPr>
+          <p:nvPr>
+            <p:ph type="sldImg" idx="0"/>
+          </p:nvPr>
+        </p:nvSpPr>
+        <p:spPr/>
+      </p:sp>
+      <p:sp>
+        <p:nvSpPr>
+          <p:cNvPr id="3" name="Notes Placeholder 2"/>
+          <p:cNvSpPr>
+            <a:spLocks xmlns:a="http://schemas.openxmlformats.org/drawingml/2006/main" noGrp="1"/>
+          </p:cNvSpPr>
+          <p:nvPr>
+            <p:ph type="body" idx="1"/>
+          </p:nvPr>
+        </p:nvSpPr>
+        <p:spPr/>
+        <p:txBody>
+          <a:bodyPr xmlns:a="http://schemas.openxmlformats.org/drawingml/2006/main"/>
+          <a:lstStyle xmlns:a="http://schemas.openxmlformats.org/drawingml/2006/main"/>
+          <a:p xmlns:a="http://schemas.openxmlformats.org/drawingml/2006/main"/>
+        </p:txBody>
+      </p:sp>
+      <p:sp>
+        <p:nvSpPr>
+          <p:cNvPr id="4" name="Slide Number Placeholder 3"/>
+          <p:cNvSpPr>
+            <a:spLocks xmlns:a="http://schemas.openxmlformats.org/drawingml/2006/main" noGrp="1"/>
+          </p:cNvSpPr>
+          <p:nvPr>
+            <p:ph type="sldNum" idx="5"/>
+          </p:nvPr>
+        </p:nvSpPr>
+        <p:spPr/>
+        <p:txBody>
+          <a:bodyPr xmlns:a="http://schemas.openxmlformats.org/drawingml/2006/main"/>
+          <a:lstStyle xmlns:a="http://schemas.openxmlformats.org/drawingml/2006/main"/>
+          <a:p xmlns:a="http://schemas.openxmlformats.org/drawingml/2006/main"/>
+        </p:txBody>
+      </p:sp>
+    </p:spTree>
+  </p:cSld>
+  <p:clrMapOvr>
+    <a:masterClrMapping xmlns:a="http://schemas.openxmlformats.org/drawingml/2006/main"/>
+  </p:clrMapOvr>
+</p:notes>
+</file>
+
+<file path=ppt/notesSlides/notesSlide13.xml><?xml version="1.0" encoding="utf-8"?>
+<p:notes xmlns:p="http://schemas.openxmlformats.org/presentationml/2006/main">
+  <p:cSld>
+    <p:spTree>
+      <p:nvGrpSpPr>
+        <p:cNvPr id="1" name=""/>
+        <p:cNvGrpSpPr/>
+        <p:nvPr/>
+      </p:nvGrpSpPr>
+      <p:grpSpPr>
+        <a:xfrm xmlns:a="http://schemas.openxmlformats.org/drawingml/2006/main"/>
+      </p:grpSpPr>
+      <p:sp>
+        <p:nvSpPr>
+          <p:cNvPr id="2" name="Slide Image Placeholder 1"/>
+          <p:cNvSpPr>
+            <a:spLocks xmlns:a="http://schemas.openxmlformats.org/drawingml/2006/main" noGrp="1"/>
+          </p:cNvSpPr>
+          <p:nvPr>
+            <p:ph type="sldImg" idx="0"/>
+          </p:nvPr>
+        </p:nvSpPr>
+        <p:spPr/>
+      </p:sp>
+      <p:sp>
+        <p:nvSpPr>
+          <p:cNvPr id="3" name="Notes Placeholder 2"/>
+          <p:cNvSpPr>
+            <a:spLocks xmlns:a="http://schemas.openxmlformats.org/drawingml/2006/main" noGrp="1"/>
+          </p:cNvSpPr>
+          <p:nvPr>
+            <p:ph type="body" idx="1"/>
+          </p:nvPr>
+        </p:nvSpPr>
+        <p:spPr/>
+        <p:txBody>
+          <a:bodyPr xmlns:a="http://schemas.openxmlformats.org/drawingml/2006/main"/>
+          <a:lstStyle xmlns:a="http://schemas.openxmlformats.org/drawingml/2006/main"/>
+          <a:p xmlns:a="http://schemas.openxmlformats.org/drawingml/2006/main"/>
+        </p:txBody>
+      </p:sp>
+      <p:sp>
+        <p:nvSpPr>
+          <p:cNvPr id="4" name="Slide Number Placeholder 3"/>
+          <p:cNvSpPr>
+            <a:spLocks xmlns:a="http://schemas.openxmlformats.org/drawingml/2006/main" noGrp="1"/>
+          </p:cNvSpPr>
+          <p:nvPr>
+            <p:ph type="sldNum" idx="5"/>
+          </p:nvPr>
+        </p:nvSpPr>
+        <p:spPr/>
+        <p:txBody>
+          <a:bodyPr xmlns:a="http://schemas.openxmlformats.org/drawingml/2006/main"/>
+          <a:lstStyle xmlns:a="http://schemas.openxmlformats.org/drawingml/2006/main"/>
+          <a:p xmlns:a="http://schemas.openxmlformats.org/drawingml/2006/main"/>
+        </p:txBody>
+      </p:sp>
+    </p:spTree>
+  </p:cSld>
+  <p:clrMapOvr>
+    <a:masterClrMapping xmlns:a="http://schemas.openxmlformats.org/drawingml/2006/main"/>
+  </p:clrMapOvr>
+</p:notes>
+</file>
+
+<file path=ppt/notesSlides/notesSlide14.xml><?xml version="1.0" encoding="utf-8"?>
+<p:notes xmlns:p="http://schemas.openxmlformats.org/presentationml/2006/main">
+  <p:cSld>
+    <p:spTree>
+      <p:nvGrpSpPr>
+        <p:cNvPr id="1" name=""/>
+        <p:cNvGrpSpPr/>
+        <p:nvPr/>
+      </p:nvGrpSpPr>
+      <p:grpSpPr>
+        <a:xfrm xmlns:a="http://schemas.openxmlformats.org/drawingml/2006/main"/>
+      </p:grpSpPr>
+      <p:sp>
+        <p:nvSpPr>
+          <p:cNvPr id="2" name="Slide Image Placeholder 1"/>
+          <p:cNvSpPr>
+            <a:spLocks xmlns:a="http://schemas.openxmlformats.org/drawingml/2006/main" noGrp="1"/>
+          </p:cNvSpPr>
+          <p:nvPr>
+            <p:ph type="sldImg" idx="0"/>
+          </p:nvPr>
+        </p:nvSpPr>
+        <p:spPr/>
+      </p:sp>
+      <p:sp>
+        <p:nvSpPr>
+          <p:cNvPr id="3" name="Notes Placeholder 2"/>
+          <p:cNvSpPr>
+            <a:spLocks xmlns:a="http://schemas.openxmlformats.org/drawingml/2006/main" noGrp="1"/>
+          </p:cNvSpPr>
+          <p:nvPr>
+            <p:ph type="body" idx="1"/>
+          </p:nvPr>
+        </p:nvSpPr>
+        <p:spPr/>
+        <p:txBody>
+          <a:bodyPr xmlns:a="http://schemas.openxmlformats.org/drawingml/2006/main"/>
+          <a:lstStyle xmlns:a="http://schemas.openxmlformats.org/drawingml/2006/main"/>
+          <a:p xmlns:a="http://schemas.openxmlformats.org/drawingml/2006/main"/>
+        </p:txBody>
+      </p:sp>
+      <p:sp>
+        <p:nvSpPr>
+          <p:cNvPr id="4" name="Slide Number Placeholder 3"/>
+          <p:cNvSpPr>
+            <a:spLocks xmlns:a="http://schemas.openxmlformats.org/drawingml/2006/main" noGrp="1"/>
+          </p:cNvSpPr>
+          <p:nvPr>
+            <p:ph type="sldNum" idx="5"/>
+          </p:nvPr>
+        </p:nvSpPr>
+        <p:spPr/>
+        <p:txBody>
+          <a:bodyPr xmlns:a="http://schemas.openxmlformats.org/drawingml/2006/main"/>
+          <a:lstStyle xmlns:a="http://schemas.openxmlformats.org/drawingml/2006/main"/>
+          <a:p xmlns:a="http://schemas.openxmlformats.org/drawingml/2006/main"/>
+        </p:txBody>
+      </p:sp>
+    </p:spTree>
+  </p:cSld>
+  <p:clrMapOvr>
+    <a:masterClrMapping xmlns:a="http://schemas.openxmlformats.org/drawingml/2006/main"/>
+  </p:clrMapOvr>
+</p:notes>
+</file>
+
+<file path=ppt/notesSlides/notesSlide15.xml><?xml version="1.0" encoding="utf-8"?>
+<p:notes xmlns:p="http://schemas.openxmlformats.org/presentationml/2006/main">
+  <p:cSld>
+    <p:spTree>
+      <p:nvGrpSpPr>
+        <p:cNvPr id="1" name=""/>
+        <p:cNvGrpSpPr/>
+        <p:nvPr/>
+      </p:nvGrpSpPr>
+      <p:grpSpPr>
+        <a:xfrm xmlns:a="http://schemas.openxmlformats.org/drawingml/2006/main"/>
+      </p:grpSpPr>
+      <p:sp>
+        <p:nvSpPr>
+          <p:cNvPr id="2" name="Slide Image Placeholder 1"/>
+          <p:cNvSpPr>
+            <a:spLocks xmlns:a="http://schemas.openxmlformats.org/drawingml/2006/main" noGrp="1"/>
+          </p:cNvSpPr>
+          <p:nvPr>
+            <p:ph type="sldImg" idx="0"/>
+          </p:nvPr>
+        </p:nvSpPr>
+        <p:spPr/>
+      </p:sp>
+      <p:sp>
+        <p:nvSpPr>
+          <p:cNvPr id="3" name="Notes Placeholder 2"/>
+          <p:cNvSpPr>
+            <a:spLocks xmlns:a="http://schemas.openxmlformats.org/drawingml/2006/main" noGrp="1"/>
+          </p:cNvSpPr>
+          <p:nvPr>
+            <p:ph type="body" idx="1"/>
+          </p:nvPr>
+        </p:nvSpPr>
+        <p:spPr/>
+        <p:txBody>
+          <a:bodyPr xmlns:a="http://schemas.openxmlformats.org/drawingml/2006/main"/>
+          <a:lstStyle xmlns:a="http://schemas.openxmlformats.org/drawingml/2006/main"/>
+          <a:p xmlns:a="http://schemas.openxmlformats.org/drawingml/2006/main"/>
+        </p:txBody>
+      </p:sp>
+      <p:sp>
+        <p:nvSpPr>
+          <p:cNvPr id="4" name="Slide Number Placeholder 3"/>
+          <p:cNvSpPr>
+            <a:spLocks xmlns:a="http://schemas.openxmlformats.org/drawingml/2006/main" noGrp="1"/>
+          </p:cNvSpPr>
+          <p:nvPr>
+            <p:ph type="sldNum" idx="5"/>
+          </p:nvPr>
+        </p:nvSpPr>
+        <p:spPr/>
+        <p:txBody>
+          <a:bodyPr xmlns:a="http://schemas.openxmlformats.org/drawingml/2006/main"/>
+          <a:lstStyle xmlns:a="http://schemas.openxmlformats.org/drawingml/2006/main"/>
+          <a:p xmlns:a="http://schemas.openxmlformats.org/drawingml/2006/main"/>
+        </p:txBody>
+      </p:sp>
+    </p:spTree>
+  </p:cSld>
+  <p:clrMapOvr>
+    <a:masterClrMapping xmlns:a="http://schemas.openxmlformats.org/drawingml/2006/main"/>
+  </p:clrMapOvr>
+</p:notes>
+</file>
+
+<file path=ppt/notesSlides/notesSlide16.xml><?xml version="1.0" encoding="utf-8"?>
+<p:notes xmlns:p="http://schemas.openxmlformats.org/presentationml/2006/main">
+  <p:cSld>
+    <p:spTree>
+      <p:nvGrpSpPr>
+        <p:cNvPr id="1" name=""/>
+        <p:cNvGrpSpPr/>
+        <p:nvPr/>
+      </p:nvGrpSpPr>
+      <p:grpSpPr>
+        <a:xfrm xmlns:a="http://schemas.openxmlformats.org/drawingml/2006/main"/>
+      </p:grpSpPr>
+      <p:sp>
+        <p:nvSpPr>
+          <p:cNvPr id="2" name="Slide Image Placeholder 1"/>
+          <p:cNvSpPr>
+            <a:spLocks xmlns:a="http://schemas.openxmlformats.org/drawingml/2006/main" noGrp="1"/>
+          </p:cNvSpPr>
+          <p:nvPr>
+            <p:ph type="sldImg" idx="0"/>
+          </p:nvPr>
+        </p:nvSpPr>
+        <p:spPr/>
+      </p:sp>
+      <p:sp>
+        <p:nvSpPr>
+          <p:cNvPr id="3" name="Notes Placeholder 2"/>
+          <p:cNvSpPr>
+            <a:spLocks xmlns:a="http://schemas.openxmlformats.org/drawingml/2006/main" noGrp="1"/>
+          </p:cNvSpPr>
+          <p:nvPr>
+            <p:ph type="body" idx="1"/>
+          </p:nvPr>
+        </p:nvSpPr>
+        <p:spPr/>
+        <p:txBody>
+          <a:bodyPr xmlns:a="http://schemas.openxmlformats.org/drawingml/2006/main"/>
+          <a:lstStyle xmlns:a="http://schemas.openxmlformats.org/drawingml/2006/main"/>
+          <a:p xmlns:a="http://schemas.openxmlformats.org/drawingml/2006/main"/>
+        </p:txBody>
+      </p:sp>
+      <p:sp>
+        <p:nvSpPr>
+          <p:cNvPr id="4" name="Slide Number Placeholder 3"/>
+          <p:cNvSpPr>
+            <a:spLocks xmlns:a="http://schemas.openxmlformats.org/drawingml/2006/main" noGrp="1"/>
+          </p:cNvSpPr>
+          <p:nvPr>
+            <p:ph type="sldNum" idx="5"/>
+          </p:nvPr>
+        </p:nvSpPr>
+        <p:spPr/>
+        <p:txBody>
+          <a:bodyPr xmlns:a="http://schemas.openxmlformats.org/drawingml/2006/main"/>
+          <a:lstStyle xmlns:a="http://schemas.openxmlformats.org/drawingml/2006/main"/>
+          <a:p xmlns:a="http://schemas.openxmlformats.org/drawingml/2006/main"/>
+        </p:txBody>
+      </p:sp>
+    </p:spTree>
+  </p:cSld>
+  <p:clrMapOvr>
+    <a:masterClrMapping xmlns:a="http://schemas.openxmlformats.org/drawingml/2006/main"/>
+  </p:clrMapOvr>
+</p:notes>
+</file>
+
+<file path=ppt/notesSlides/notesSlide17.xml><?xml version="1.0" encoding="utf-8"?>
+<p:notes xmlns:p="http://schemas.openxmlformats.org/presentationml/2006/main">
+  <p:cSld>
+    <p:spTree>
+      <p:nvGrpSpPr>
+        <p:cNvPr id="1" name=""/>
+        <p:cNvGrpSpPr/>
+        <p:nvPr/>
+      </p:nvGrpSpPr>
+      <p:grpSpPr>
+        <a:xfrm xmlns:a="http://schemas.openxmlformats.org/drawingml/2006/main"/>
+      </p:grpSpPr>
+      <p:sp>
+        <p:nvSpPr>
+          <p:cNvPr id="2" name="Slide Image Placeholder 1"/>
+          <p:cNvSpPr>
+            <a:spLocks xmlns:a="http://schemas.openxmlformats.org/drawingml/2006/main" noGrp="1"/>
+          </p:cNvSpPr>
+          <p:nvPr>
+            <p:ph type="sldImg" idx="0"/>
+          </p:nvPr>
+        </p:nvSpPr>
+        <p:spPr/>
+      </p:sp>
+      <p:sp>
+        <p:nvSpPr>
+          <p:cNvPr id="3" name="Notes Placeholder 2"/>
+          <p:cNvSpPr>
+            <a:spLocks xmlns:a="http://schemas.openxmlformats.org/drawingml/2006/main" noGrp="1"/>
+          </p:cNvSpPr>
+          <p:nvPr>
+            <p:ph type="body" idx="1"/>
+          </p:nvPr>
+        </p:nvSpPr>
+        <p:spPr/>
+        <p:txBody>
+          <a:bodyPr xmlns:a="http://schemas.openxmlformats.org/drawingml/2006/main"/>
+          <a:lstStyle xmlns:a="http://schemas.openxmlformats.org/drawingml/2006/main"/>
+          <a:p xmlns:a="http://schemas.openxmlformats.org/drawingml/2006/main"/>
+        </p:txBody>
+      </p:sp>
+      <p:sp>
+        <p:nvSpPr>
+          <p:cNvPr id="4" name="Slide Number Placeholder 3"/>
+          <p:cNvSpPr>
+            <a:spLocks xmlns:a="http://schemas.openxmlformats.org/drawingml/2006/main" noGrp="1"/>
+          </p:cNvSpPr>
+          <p:nvPr>
+            <p:ph type="sldNum" idx="5"/>
+          </p:nvPr>
+        </p:nvSpPr>
+        <p:spPr/>
+        <p:txBody>
+          <a:bodyPr xmlns:a="http://schemas.openxmlformats.org/drawingml/2006/main"/>
+          <a:lstStyle xmlns:a="http://schemas.openxmlformats.org/drawingml/2006/main"/>
+          <a:p xmlns:a="http://schemas.openxmlformats.org/drawingml/2006/main"/>
+        </p:txBody>
+      </p:sp>
+    </p:spTree>
+  </p:cSld>
+  <p:clrMapOvr>
+    <a:masterClrMapping xmlns:a="http://schemas.openxmlformats.org/drawingml/2006/main"/>
+  </p:clrMapOvr>
+</p:notes>
+</file>
+
 <file path=ppt/notesSlides/notesSlide2.xml><?xml version="1.0" encoding="utf-8"?>
 <p:notes xmlns:p="http://schemas.openxmlformats.org/presentationml/2006/main">
   <p:cSld>
@@ -1204,7 +1673,7 @@
   </p:cSld>
   <p:clrMap bg1="lt1" tx1="dk1" bg2="lt2" tx2="dk2" accent1="accent1" accent2="accent2" accent3="accent3" accent4="accent4" accent5="accent5" accent6="accent6" hlink="hlink" folHlink="folHlink"/>
   <p:sldLayoutIdLst>
-    <p:sldLayoutId xmlns:r="http://schemas.openxmlformats.org/officeDocument/2006/relationships" id="2147483649" r:id="Rbc6dd20e172740a4"/>
+    <p:sldLayoutId xmlns:r="http://schemas.openxmlformats.org/officeDocument/2006/relationships" id="2147483649" r:id="R48674be5d3da4449"/>
   </p:sldLayoutIdLst>
   <p:txStyles>
     <p:titleStyle>
@@ -1755,7 +2224,7 @@
           <p:cNvPr id="1" name="">
             <a:extLst xmlns:a="http://schemas.openxmlformats.org/drawingml/2006/main">
               <a:ext uri="{FF2B5EF4-FFF2-40B4-BE49-F238E27FC236}">
-                <a16:creationId xmlns:a16="http://schemas.microsoft.com/office/drawing/2014/main" id="{51297AF3-4788-49AC-81FC-42CBA6E3E527}"/>
+                <a16:creationId xmlns:a16="http://schemas.microsoft.com/office/drawing/2014/main" id="{22DD9EAA-DED7-4A68-9ED9-7E1AFAEFB75B}"/>
               </a:ext>
             </a:extLst>
           </p:cNvPr>
@@ -1805,7 +2274,7 @@
           <p:cNvPr id="2" name="">
             <a:extLst xmlns:a="http://schemas.openxmlformats.org/drawingml/2006/main">
               <a:ext uri="{FF2B5EF4-FFF2-40B4-BE49-F238E27FC236}">
-                <a16:creationId xmlns:a16="http://schemas.microsoft.com/office/drawing/2014/main" id="{2955C1F2-35D9-405B-8D70-D86FC5782625}"/>
+                <a16:creationId xmlns:a16="http://schemas.microsoft.com/office/drawing/2014/main" id="{74D4798E-90B8-4E56-8BD3-53ED7F5EFF2A}"/>
               </a:ext>
             </a:extLst>
           </p:cNvPr>
@@ -1855,7 +2324,7 @@
           <p:cNvPr id="3" name="">
             <a:extLst xmlns:a="http://schemas.openxmlformats.org/drawingml/2006/main">
               <a:ext uri="{FF2B5EF4-FFF2-40B4-BE49-F238E27FC236}">
-                <a16:creationId xmlns:a16="http://schemas.microsoft.com/office/drawing/2014/main" id="{AA54D87C-EE50-4303-949B-2431E4CA9A12}"/>
+                <a16:creationId xmlns:a16="http://schemas.microsoft.com/office/drawing/2014/main" id="{2108B7D8-3993-4710-855B-A725AED2FBA4}"/>
               </a:ext>
             </a:extLst>
           </p:cNvPr>
@@ -1905,7 +2374,7 @@
           <p:cNvPr id="4" name="">
             <a:extLst xmlns:a="http://schemas.openxmlformats.org/drawingml/2006/main">
               <a:ext uri="{FF2B5EF4-FFF2-40B4-BE49-F238E27FC236}">
-                <a16:creationId xmlns:a16="http://schemas.microsoft.com/office/drawing/2014/main" id="{DD4AB86C-5DEA-4A31-89EE-4FF9AFD4B29B}"/>
+                <a16:creationId xmlns:a16="http://schemas.microsoft.com/office/drawing/2014/main" id="{168EF6BD-500C-47C0-9193-1F14C389A897}"/>
               </a:ext>
             </a:extLst>
           </p:cNvPr>
@@ -1936,7 +2405,7 @@
           <p:cNvPr id="5" name="">
             <a:extLst xmlns:a="http://schemas.openxmlformats.org/drawingml/2006/main">
               <a:ext uri="{FF2B5EF4-FFF2-40B4-BE49-F238E27FC236}">
-                <a16:creationId xmlns:a16="http://schemas.microsoft.com/office/drawing/2014/main" id="{7104F541-4A14-4531-BB1D-BC88603E81D0}"/>
+                <a16:creationId xmlns:a16="http://schemas.microsoft.com/office/drawing/2014/main" id="{EB2A158B-2493-48D7-B6A6-AF7D1575D2C8}"/>
               </a:ext>
             </a:extLst>
           </p:cNvPr>
@@ -1986,7 +2455,7 @@
           <p:cNvPr id="6" name="">
             <a:extLst xmlns:a="http://schemas.openxmlformats.org/drawingml/2006/main">
               <a:ext uri="{FF2B5EF4-FFF2-40B4-BE49-F238E27FC236}">
-                <a16:creationId xmlns:a16="http://schemas.microsoft.com/office/drawing/2014/main" id="{3E039810-6BCB-468C-8F60-89E07A661E8E}"/>
+                <a16:creationId xmlns:a16="http://schemas.microsoft.com/office/drawing/2014/main" id="{531B1FE1-037C-4E09-93FF-0967BE4B99BB}"/>
               </a:ext>
             </a:extLst>
           </p:cNvPr>
@@ -2017,7 +2486,7 @@
           <p:cNvPr id="7" name="">
             <a:extLst xmlns:a="http://schemas.openxmlformats.org/drawingml/2006/main">
               <a:ext uri="{FF2B5EF4-FFF2-40B4-BE49-F238E27FC236}">
-                <a16:creationId xmlns:a16="http://schemas.microsoft.com/office/drawing/2014/main" id="{2C29CA01-AA0E-405B-9745-767757C8F0A4}"/>
+                <a16:creationId xmlns:a16="http://schemas.microsoft.com/office/drawing/2014/main" id="{0645951D-59D7-481A-94F5-A566A74D08CD}"/>
               </a:ext>
             </a:extLst>
           </p:cNvPr>
@@ -2067,7 +2536,7 @@
           <p:cNvPr id="8" name="">
             <a:extLst xmlns:a="http://schemas.openxmlformats.org/drawingml/2006/main">
               <a:ext uri="{FF2B5EF4-FFF2-40B4-BE49-F238E27FC236}">
-                <a16:creationId xmlns:a16="http://schemas.microsoft.com/office/drawing/2014/main" id="{A8A24AD7-0527-42A0-AD31-3328871738B6}"/>
+                <a16:creationId xmlns:a16="http://schemas.microsoft.com/office/drawing/2014/main" id="{B5F49E97-235D-43EA-BFA4-2AA41194BC17}"/>
               </a:ext>
             </a:extLst>
           </p:cNvPr>
@@ -2149,7 +2618,7 @@
     </p:spTree>
     <p:extLst>
       <p:ext uri="{BB962C8B-B14F-4D97-AF65-F5344CB8AC3E}">
-        <p14:creationId xmlns:p14="http://schemas.microsoft.com/office/powerpoint/2010/main" val="1867606813"/>
+        <p14:creationId xmlns:p14="http://schemas.microsoft.com/office/powerpoint/2010/main" val="1741620921"/>
       </p:ext>
     </p:extLst>
   </p:cSld>
@@ -2180,7 +2649,7 @@
           <p:cNvPr id="1" name="">
             <a:extLst xmlns:a="http://schemas.openxmlformats.org/drawingml/2006/main">
               <a:ext uri="{FF2B5EF4-FFF2-40B4-BE49-F238E27FC236}">
-                <a16:creationId xmlns:a16="http://schemas.microsoft.com/office/drawing/2014/main" id="{8D67CF19-7628-457B-B841-EDBBD8D77AEE}"/>
+                <a16:creationId xmlns:a16="http://schemas.microsoft.com/office/drawing/2014/main" id="{E9433120-54E9-48E7-B64D-7D58861E3762}"/>
               </a:ext>
             </a:extLst>
           </p:cNvPr>
@@ -2230,7 +2699,7 @@
           <p:cNvPr id="2" name="">
             <a:extLst xmlns:a="http://schemas.openxmlformats.org/drawingml/2006/main">
               <a:ext uri="{FF2B5EF4-FFF2-40B4-BE49-F238E27FC236}">
-                <a16:creationId xmlns:a16="http://schemas.microsoft.com/office/drawing/2014/main" id="{6A6A8FF4-4A23-4BAB-B392-77054275CDA1}"/>
+                <a16:creationId xmlns:a16="http://schemas.microsoft.com/office/drawing/2014/main" id="{377AAB0A-234E-4BF8-8749-607462636B49}"/>
               </a:ext>
             </a:extLst>
           </p:cNvPr>
@@ -2270,7 +2739,7 @@
                   <a:srgbClr val="000000"/>
                 </a:solidFill>
               </a:rPr>
-              <a:t>The next build can fit a deliberately simple model</a:t>
+              <a:t>The next build tests a deliberately simple model</a:t>
             </a:r>
           </a:p>
         </p:txBody>
@@ -2280,7 +2749,7 @@
           <p:cNvPr id="3" name="">
             <a:extLst xmlns:a="http://schemas.openxmlformats.org/drawingml/2006/main">
               <a:ext uri="{FF2B5EF4-FFF2-40B4-BE49-F238E27FC236}">
-                <a16:creationId xmlns:a16="http://schemas.microsoft.com/office/drawing/2014/main" id="{1E40FCCE-56DD-4315-831C-11B8AAA952AA}"/>
+                <a16:creationId xmlns:a16="http://schemas.microsoft.com/office/drawing/2014/main" id="{A123B74E-EBC7-47F6-BDF4-4275072C5F00}"/>
               </a:ext>
             </a:extLst>
           </p:cNvPr>
@@ -2311,7 +2780,7 @@
           <p:cNvPr id="4" name="">
             <a:extLst xmlns:a="http://schemas.openxmlformats.org/drawingml/2006/main">
               <a:ext uri="{FF2B5EF4-FFF2-40B4-BE49-F238E27FC236}">
-                <a16:creationId xmlns:a16="http://schemas.microsoft.com/office/drawing/2014/main" id="{2DB4936B-3630-41ED-8BA2-E6CDE49480D8}"/>
+                <a16:creationId xmlns:a16="http://schemas.microsoft.com/office/drawing/2014/main" id="{22888014-DF4E-4741-A439-49705E9F56CC}"/>
               </a:ext>
             </a:extLst>
           </p:cNvPr>
@@ -2323,7 +2792,7 @@
         <p:spPr>
           <a:xfrm xmlns:a="http://schemas.openxmlformats.org/drawingml/2006/main">
             <a:off x="876300" y="2152650"/>
-            <a:ext cx="7239000" cy="685800"/>
+            <a:ext cx="7429500" cy="819150"/>
           </a:xfrm>
           <a:prstGeom xmlns:a="http://schemas.openxmlformats.org/drawingml/2006/main" prst="rect">
             <a:avLst/>
@@ -2351,7 +2820,7 @@
                   <a:srgbClr val="000000"/>
                 </a:solidFill>
               </a:rPr>
-              <a:t>ML-P0 passed the table-quality gate. The next useful slice is ML-P1: GLM logistic replay.</a:t>
+              <a:t>ML-P0 passed the table-quality gate. ML-P1 asks whether a plain GLM can turn that table into coherent daily long/flat behavior.</a:t>
             </a:r>
           </a:p>
         </p:txBody>
@@ -2361,18 +2830,18 @@
           <p:cNvPr id="5" name="">
             <a:extLst xmlns:a="http://schemas.openxmlformats.org/drawingml/2006/main">
               <a:ext uri="{FF2B5EF4-FFF2-40B4-BE49-F238E27FC236}">
-                <a16:creationId xmlns:a16="http://schemas.microsoft.com/office/drawing/2014/main" id="{7C409D97-D7E2-4345-9469-AF38C2938144}"/>
-              </a:ext>
-            </a:extLst>
-          </p:cNvPr>
-          <p:cNvSpPr>
-            <a:spLocks xmlns:a="http://schemas.openxmlformats.org/drawingml/2006/main" noGrp="1"/>
-          </p:cNvSpPr>
-          <p:nvPr/>
-        </p:nvSpPr>
-        <p:spPr>
-          <a:xfrm xmlns:a="http://schemas.openxmlformats.org/drawingml/2006/main">
-            <a:off x="1181100" y="3343275"/>
+                <a16:creationId xmlns:a16="http://schemas.microsoft.com/office/drawing/2014/main" id="{E2CB7C25-C316-4C07-B795-201F3C558FFC}"/>
+              </a:ext>
+            </a:extLst>
+          </p:cNvPr>
+          <p:cNvSpPr>
+            <a:spLocks xmlns:a="http://schemas.openxmlformats.org/drawingml/2006/main" noGrp="1"/>
+          </p:cNvSpPr>
+          <p:nvPr/>
+        </p:nvSpPr>
+        <p:spPr>
+          <a:xfrm xmlns:a="http://schemas.openxmlformats.org/drawingml/2006/main">
+            <a:off x="1181100" y="3438525"/>
             <a:ext cx="190500" cy="247650"/>
           </a:xfrm>
           <a:prstGeom xmlns:a="http://schemas.openxmlformats.org/drawingml/2006/main" prst="rect">
@@ -2411,18 +2880,18 @@
           <p:cNvPr id="6" name="">
             <a:extLst xmlns:a="http://schemas.openxmlformats.org/drawingml/2006/main">
               <a:ext uri="{FF2B5EF4-FFF2-40B4-BE49-F238E27FC236}">
-                <a16:creationId xmlns:a16="http://schemas.microsoft.com/office/drawing/2014/main" id="{A35D1A28-0127-4504-9302-3C11723FD722}"/>
-              </a:ext>
-            </a:extLst>
-          </p:cNvPr>
-          <p:cNvSpPr>
-            <a:spLocks xmlns:a="http://schemas.openxmlformats.org/drawingml/2006/main" noGrp="1"/>
-          </p:cNvSpPr>
-          <p:nvPr/>
-        </p:nvSpPr>
-        <p:spPr>
-          <a:xfrm xmlns:a="http://schemas.openxmlformats.org/drawingml/2006/main">
-            <a:off x="1447800" y="3333750"/>
+                <a16:creationId xmlns:a16="http://schemas.microsoft.com/office/drawing/2014/main" id="{008E636A-20FC-473C-8E32-BC1D34EEC805}"/>
+              </a:ext>
+            </a:extLst>
+          </p:cNvPr>
+          <p:cNvSpPr>
+            <a:spLocks xmlns:a="http://schemas.openxmlformats.org/drawingml/2006/main" noGrp="1"/>
+          </p:cNvSpPr>
+          <p:nvPr/>
+        </p:nvSpPr>
+        <p:spPr>
+          <a:xfrm xmlns:a="http://schemas.openxmlformats.org/drawingml/2006/main">
+            <a:off x="1447800" y="3429000"/>
             <a:ext cx="4686300" cy="514350"/>
           </a:xfrm>
           <a:prstGeom xmlns:a="http://schemas.openxmlformats.org/drawingml/2006/main" prst="rect">
@@ -2461,18 +2930,18 @@
           <p:cNvPr id="7" name="">
             <a:extLst xmlns:a="http://schemas.openxmlformats.org/drawingml/2006/main">
               <a:ext uri="{FF2B5EF4-FFF2-40B4-BE49-F238E27FC236}">
-                <a16:creationId xmlns:a16="http://schemas.microsoft.com/office/drawing/2014/main" id="{77C338E9-7181-49B6-8180-8D24FE131A7E}"/>
-              </a:ext>
-            </a:extLst>
-          </p:cNvPr>
-          <p:cNvSpPr>
-            <a:spLocks xmlns:a="http://schemas.openxmlformats.org/drawingml/2006/main" noGrp="1"/>
-          </p:cNvSpPr>
-          <p:nvPr/>
-        </p:nvSpPr>
-        <p:spPr>
-          <a:xfrm xmlns:a="http://schemas.openxmlformats.org/drawingml/2006/main">
-            <a:off x="1181100" y="4010025"/>
+                <a16:creationId xmlns:a16="http://schemas.microsoft.com/office/drawing/2014/main" id="{81C1E11A-DA31-4027-AF79-CB2768896CC9}"/>
+              </a:ext>
+            </a:extLst>
+          </p:cNvPr>
+          <p:cNvSpPr>
+            <a:spLocks xmlns:a="http://schemas.openxmlformats.org/drawingml/2006/main" noGrp="1"/>
+          </p:cNvSpPr>
+          <p:nvPr/>
+        </p:nvSpPr>
+        <p:spPr>
+          <a:xfrm xmlns:a="http://schemas.openxmlformats.org/drawingml/2006/main">
+            <a:off x="1181100" y="4105275"/>
             <a:ext cx="190500" cy="247650"/>
           </a:xfrm>
           <a:prstGeom xmlns:a="http://schemas.openxmlformats.org/drawingml/2006/main" prst="rect">
@@ -2511,18 +2980,18 @@
           <p:cNvPr id="8" name="">
             <a:extLst xmlns:a="http://schemas.openxmlformats.org/drawingml/2006/main">
               <a:ext uri="{FF2B5EF4-FFF2-40B4-BE49-F238E27FC236}">
-                <a16:creationId xmlns:a16="http://schemas.microsoft.com/office/drawing/2014/main" id="{0CEAB92E-BB1F-420B-8C5D-F5CC9ED498C9}"/>
-              </a:ext>
-            </a:extLst>
-          </p:cNvPr>
-          <p:cNvSpPr>
-            <a:spLocks xmlns:a="http://schemas.openxmlformats.org/drawingml/2006/main" noGrp="1"/>
-          </p:cNvSpPr>
-          <p:nvPr/>
-        </p:nvSpPr>
-        <p:spPr>
-          <a:xfrm xmlns:a="http://schemas.openxmlformats.org/drawingml/2006/main">
-            <a:off x="1447800" y="4000500"/>
+                <a16:creationId xmlns:a16="http://schemas.microsoft.com/office/drawing/2014/main" id="{070DD0C6-3850-41AD-AF31-5242E3D0E32E}"/>
+              </a:ext>
+            </a:extLst>
+          </p:cNvPr>
+          <p:cNvSpPr>
+            <a:spLocks xmlns:a="http://schemas.openxmlformats.org/drawingml/2006/main" noGrp="1"/>
+          </p:cNvSpPr>
+          <p:nvPr/>
+        </p:nvSpPr>
+        <p:spPr>
+          <a:xfrm xmlns:a="http://schemas.openxmlformats.org/drawingml/2006/main">
+            <a:off x="1447800" y="4095750"/>
             <a:ext cx="4686300" cy="514350"/>
           </a:xfrm>
           <a:prstGeom xmlns:a="http://schemas.openxmlformats.org/drawingml/2006/main" prst="rect">
@@ -2561,18 +3030,18 @@
           <p:cNvPr id="9" name="">
             <a:extLst xmlns:a="http://schemas.openxmlformats.org/drawingml/2006/main">
               <a:ext uri="{FF2B5EF4-FFF2-40B4-BE49-F238E27FC236}">
-                <a16:creationId xmlns:a16="http://schemas.microsoft.com/office/drawing/2014/main" id="{CFC93CAE-013D-4A66-BA20-4D662C5C5E1E}"/>
-              </a:ext>
-            </a:extLst>
-          </p:cNvPr>
-          <p:cNvSpPr>
-            <a:spLocks xmlns:a="http://schemas.openxmlformats.org/drawingml/2006/main" noGrp="1"/>
-          </p:cNvSpPr>
-          <p:nvPr/>
-        </p:nvSpPr>
-        <p:spPr>
-          <a:xfrm xmlns:a="http://schemas.openxmlformats.org/drawingml/2006/main">
-            <a:off x="1181100" y="4676775"/>
+                <a16:creationId xmlns:a16="http://schemas.microsoft.com/office/drawing/2014/main" id="{F2DE1AD5-1493-4952-A325-9A0E993FF858}"/>
+              </a:ext>
+            </a:extLst>
+          </p:cNvPr>
+          <p:cNvSpPr>
+            <a:spLocks xmlns:a="http://schemas.openxmlformats.org/drawingml/2006/main" noGrp="1"/>
+          </p:cNvSpPr>
+          <p:nvPr/>
+        </p:nvSpPr>
+        <p:spPr>
+          <a:xfrm xmlns:a="http://schemas.openxmlformats.org/drawingml/2006/main">
+            <a:off x="1181100" y="4772025"/>
             <a:ext cx="190500" cy="247650"/>
           </a:xfrm>
           <a:prstGeom xmlns:a="http://schemas.openxmlformats.org/drawingml/2006/main" prst="rect">
@@ -2611,18 +3080,18 @@
           <p:cNvPr id="10" name="">
             <a:extLst xmlns:a="http://schemas.openxmlformats.org/drawingml/2006/main">
               <a:ext uri="{FF2B5EF4-FFF2-40B4-BE49-F238E27FC236}">
-                <a16:creationId xmlns:a16="http://schemas.microsoft.com/office/drawing/2014/main" id="{366CA9CA-D27F-4297-8F8C-27E36F5324B1}"/>
-              </a:ext>
-            </a:extLst>
-          </p:cNvPr>
-          <p:cNvSpPr>
-            <a:spLocks xmlns:a="http://schemas.openxmlformats.org/drawingml/2006/main" noGrp="1"/>
-          </p:cNvSpPr>
-          <p:nvPr/>
-        </p:nvSpPr>
-        <p:spPr>
-          <a:xfrm xmlns:a="http://schemas.openxmlformats.org/drawingml/2006/main">
-            <a:off x="1447800" y="4667250"/>
+                <a16:creationId xmlns:a16="http://schemas.microsoft.com/office/drawing/2014/main" id="{90C25DD9-2476-4EAF-9760-8A4E9803B1D9}"/>
+              </a:ext>
+            </a:extLst>
+          </p:cNvPr>
+          <p:cNvSpPr>
+            <a:spLocks xmlns:a="http://schemas.openxmlformats.org/drawingml/2006/main" noGrp="1"/>
+          </p:cNvSpPr>
+          <p:nvPr/>
+        </p:nvSpPr>
+        <p:spPr>
+          <a:xfrm xmlns:a="http://schemas.openxmlformats.org/drawingml/2006/main">
+            <a:off x="1447800" y="4762500"/>
             <a:ext cx="4686300" cy="514350"/>
           </a:xfrm>
           <a:prstGeom xmlns:a="http://schemas.openxmlformats.org/drawingml/2006/main" prst="rect">
@@ -2651,7 +3120,7 @@
                   <a:srgbClr val="222222"/>
                 </a:solidFill>
               </a:rPr>
-              <a:t>Replay long/flat decisions with fixed or TRAIN-selected thresholds.</a:t>
+              <a:t>Replay long/flat decisions with fixed thresholds.</a:t>
             </a:r>
           </a:p>
         </p:txBody>
@@ -2661,18 +3130,18 @@
           <p:cNvPr id="11" name="">
             <a:extLst xmlns:a="http://schemas.openxmlformats.org/drawingml/2006/main">
               <a:ext uri="{FF2B5EF4-FFF2-40B4-BE49-F238E27FC236}">
-                <a16:creationId xmlns:a16="http://schemas.microsoft.com/office/drawing/2014/main" id="{E8BB212A-CE16-4EDD-9CD9-52091AC60BCF}"/>
-              </a:ext>
-            </a:extLst>
-          </p:cNvPr>
-          <p:cNvSpPr>
-            <a:spLocks xmlns:a="http://schemas.openxmlformats.org/drawingml/2006/main" noGrp="1"/>
-          </p:cNvSpPr>
-          <p:nvPr/>
-        </p:nvSpPr>
-        <p:spPr>
-          <a:xfrm xmlns:a="http://schemas.openxmlformats.org/drawingml/2006/main">
-            <a:off x="1181100" y="5343525"/>
+                <a16:creationId xmlns:a16="http://schemas.microsoft.com/office/drawing/2014/main" id="{E00CDFB8-B9C2-4BDF-90EE-82123BA8E721}"/>
+              </a:ext>
+            </a:extLst>
+          </p:cNvPr>
+          <p:cNvSpPr>
+            <a:spLocks xmlns:a="http://schemas.openxmlformats.org/drawingml/2006/main" noGrp="1"/>
+          </p:cNvSpPr>
+          <p:nvPr/>
+        </p:nvSpPr>
+        <p:spPr>
+          <a:xfrm xmlns:a="http://schemas.openxmlformats.org/drawingml/2006/main">
+            <a:off x="1181100" y="5438775"/>
             <a:ext cx="190500" cy="247650"/>
           </a:xfrm>
           <a:prstGeom xmlns:a="http://schemas.openxmlformats.org/drawingml/2006/main" prst="rect">
@@ -2711,18 +3180,18 @@
           <p:cNvPr id="12" name="">
             <a:extLst xmlns:a="http://schemas.openxmlformats.org/drawingml/2006/main">
               <a:ext uri="{FF2B5EF4-FFF2-40B4-BE49-F238E27FC236}">
-                <a16:creationId xmlns:a16="http://schemas.microsoft.com/office/drawing/2014/main" id="{6872B35B-2496-4B17-A15B-683D4A5D7491}"/>
-              </a:ext>
-            </a:extLst>
-          </p:cNvPr>
-          <p:cNvSpPr>
-            <a:spLocks xmlns:a="http://schemas.openxmlformats.org/drawingml/2006/main" noGrp="1"/>
-          </p:cNvSpPr>
-          <p:nvPr/>
-        </p:nvSpPr>
-        <p:spPr>
-          <a:xfrm xmlns:a="http://schemas.openxmlformats.org/drawingml/2006/main">
-            <a:off x="1447800" y="5334000"/>
+                <a16:creationId xmlns:a16="http://schemas.microsoft.com/office/drawing/2014/main" id="{306A68B5-1FF9-4F48-AE3D-99B240DFE1F9}"/>
+              </a:ext>
+            </a:extLst>
+          </p:cNvPr>
+          <p:cNvSpPr>
+            <a:spLocks xmlns:a="http://schemas.openxmlformats.org/drawingml/2006/main" noGrp="1"/>
+          </p:cNvSpPr>
+          <p:nvPr/>
+        </p:nvSpPr>
+        <p:spPr>
+          <a:xfrm xmlns:a="http://schemas.openxmlformats.org/drawingml/2006/main">
+            <a:off x="1447800" y="5429250"/>
             <a:ext cx="4686300" cy="514350"/>
           </a:xfrm>
           <a:prstGeom xmlns:a="http://schemas.openxmlformats.org/drawingml/2006/main" prst="rect">
@@ -2761,7 +3230,7 @@
           <p:cNvPr id="13" name="">
             <a:extLst xmlns:a="http://schemas.openxmlformats.org/drawingml/2006/main">
               <a:ext uri="{FF2B5EF4-FFF2-40B4-BE49-F238E27FC236}">
-                <a16:creationId xmlns:a16="http://schemas.microsoft.com/office/drawing/2014/main" id="{8D618258-06D8-4D21-A199-B57F7CCDBF5D}"/>
+                <a16:creationId xmlns:a16="http://schemas.microsoft.com/office/drawing/2014/main" id="{D83FF65D-7C2F-4140-9656-9C9B5B92AC23}"/>
               </a:ext>
             </a:extLst>
           </p:cNvPr>
@@ -2794,7 +3263,7 @@
           <p:cNvPr id="14" name="">
             <a:extLst xmlns:a="http://schemas.openxmlformats.org/drawingml/2006/main">
               <a:ext uri="{FF2B5EF4-FFF2-40B4-BE49-F238E27FC236}">
-                <a16:creationId xmlns:a16="http://schemas.microsoft.com/office/drawing/2014/main" id="{AA740C19-6DCC-4105-82ED-8F674763E324}"/>
+                <a16:creationId xmlns:a16="http://schemas.microsoft.com/office/drawing/2014/main" id="{CC4D7CB7-6EF8-420F-B5C5-171871E04535}"/>
               </a:ext>
             </a:extLst>
           </p:cNvPr>
@@ -2844,7 +3313,7 @@
           <p:cNvPr id="15" name="">
             <a:extLst xmlns:a="http://schemas.openxmlformats.org/drawingml/2006/main">
               <a:ext uri="{FF2B5EF4-FFF2-40B4-BE49-F238E27FC236}">
-                <a16:creationId xmlns:a16="http://schemas.microsoft.com/office/drawing/2014/main" id="{A9455E30-7B3A-4AAF-8B19-0A521AF89CB5}"/>
+                <a16:creationId xmlns:a16="http://schemas.microsoft.com/office/drawing/2014/main" id="{3109ADDB-48A8-4412-B2E4-8CAFD94E7DA1}"/>
               </a:ext>
             </a:extLst>
           </p:cNvPr>
@@ -2892,7 +3361,3000 @@
     </p:spTree>
     <p:extLst>
       <p:ext uri="{BB962C8B-B14F-4D97-AF65-F5344CB8AC3E}">
-        <p14:creationId xmlns:p14="http://schemas.microsoft.com/office/powerpoint/2010/main" val="264138324"/>
+        <p14:creationId xmlns:p14="http://schemas.microsoft.com/office/powerpoint/2010/main" val="2059781940"/>
+      </p:ext>
+    </p:extLst>
+  </p:cSld>
+</p:sld>
+</file>
+
+<file path=ppt/slides/slide11.xml><?xml version="1.0" encoding="utf-8"?>
+<p:sld xmlns:p="http://schemas.openxmlformats.org/presentationml/2006/main">
+  <p:cSld>
+    <p:bg>
+      <p:bgPr>
+        <a:solidFill xmlns:a="http://schemas.openxmlformats.org/drawingml/2006/main">
+          <a:srgbClr val="FFFFFF"/>
+        </a:solidFill>
+      </p:bgPr>
+    </p:bg>
+    <p:spTree>
+      <p:nvGrpSpPr>
+        <p:cNvPr id="1" name=""/>
+        <p:cNvGrpSpPr/>
+        <p:nvPr/>
+      </p:nvGrpSpPr>
+      <p:grpSpPr>
+        <a:xfrm xmlns:a="http://schemas.openxmlformats.org/drawingml/2006/main"/>
+      </p:grpSpPr>
+      <p:sp>
+        <p:nvSpPr>
+          <p:cNvPr id="1" name="">
+            <a:extLst xmlns:a="http://schemas.openxmlformats.org/drawingml/2006/main">
+              <a:ext uri="{FF2B5EF4-FFF2-40B4-BE49-F238E27FC236}">
+                <a16:creationId xmlns:a16="http://schemas.microsoft.com/office/drawing/2014/main" id="{BAB78496-6B8D-498C-9F6D-D0A8682DA063}"/>
+              </a:ext>
+            </a:extLst>
+          </p:cNvPr>
+          <p:cNvSpPr>
+            <a:spLocks xmlns:a="http://schemas.openxmlformats.org/drawingml/2006/main" noGrp="1"/>
+          </p:cNvSpPr>
+          <p:nvPr/>
+        </p:nvSpPr>
+        <p:spPr>
+          <a:xfrm xmlns:a="http://schemas.openxmlformats.org/drawingml/2006/main">
+            <a:off x="685800" y="495300"/>
+            <a:ext cx="4762500" cy="419100"/>
+          </a:xfrm>
+          <a:prstGeom xmlns:a="http://schemas.openxmlformats.org/drawingml/2006/main" prst="rect">
+            <a:avLst/>
+          </a:prstGeom>
+          <a:noFill xmlns:a="http://schemas.openxmlformats.org/drawingml/2006/main"/>
+          <a:ln xmlns:a="http://schemas.openxmlformats.org/drawingml/2006/main" w="0">
+            <a:noFill/>
+            <a:prstDash val="solid"/>
+          </a:ln>
+        </p:spPr>
+        <p:txBody>
+          <a:bodyPr xmlns:a="http://schemas.openxmlformats.org/drawingml/2006/main"/>
+          <a:lstStyle xmlns:a="http://schemas.openxmlformats.org/drawingml/2006/main"/>
+          <a:p xmlns:a="http://schemas.openxmlformats.org/drawingml/2006/main">
+            <a:pPr algn="l">
+              <a:defRPr sz="2400" b="1" i="0">
+                <a:solidFill>
+                  <a:srgbClr val="555555"/>
+                </a:solidFill>
+              </a:defRPr>
+            </a:pPr>
+            <a:r>
+              <a:rPr sz="2400" b="1" i="0">
+                <a:solidFill>
+                  <a:srgbClr val="555555"/>
+                </a:solidFill>
+              </a:rPr>
+              <a:t>Transition</a:t>
+            </a:r>
+          </a:p>
+        </p:txBody>
+      </p:sp>
+      <p:sp>
+        <p:nvSpPr>
+          <p:cNvPr id="2" name="">
+            <a:extLst xmlns:a="http://schemas.openxmlformats.org/drawingml/2006/main">
+              <a:ext uri="{FF2B5EF4-FFF2-40B4-BE49-F238E27FC236}">
+                <a16:creationId xmlns:a16="http://schemas.microsoft.com/office/drawing/2014/main" id="{C43701A2-ED47-4AFC-8CA8-F9E9209F1255}"/>
+              </a:ext>
+            </a:extLst>
+          </p:cNvPr>
+          <p:cNvSpPr>
+            <a:spLocks xmlns:a="http://schemas.openxmlformats.org/drawingml/2006/main" noGrp="1"/>
+          </p:cNvSpPr>
+          <p:nvPr/>
+        </p:nvSpPr>
+        <p:spPr>
+          <a:xfrm xmlns:a="http://schemas.openxmlformats.org/drawingml/2006/main">
+            <a:off x="685800" y="1600200"/>
+            <a:ext cx="8572500" cy="876300"/>
+          </a:xfrm>
+          <a:prstGeom xmlns:a="http://schemas.openxmlformats.org/drawingml/2006/main" prst="rect">
+            <a:avLst/>
+          </a:prstGeom>
+          <a:noFill xmlns:a="http://schemas.openxmlformats.org/drawingml/2006/main"/>
+          <a:ln xmlns:a="http://schemas.openxmlformats.org/drawingml/2006/main" w="0">
+            <a:noFill/>
+            <a:prstDash val="solid"/>
+          </a:ln>
+        </p:spPr>
+        <p:txBody>
+          <a:bodyPr xmlns:a="http://schemas.openxmlformats.org/drawingml/2006/main"/>
+          <a:lstStyle xmlns:a="http://schemas.openxmlformats.org/drawingml/2006/main"/>
+          <a:p xmlns:a="http://schemas.openxmlformats.org/drawingml/2006/main">
+            <a:pPr algn="l">
+              <a:defRPr sz="3900" b="1" i="0">
+                <a:solidFill>
+                  <a:srgbClr val="000000"/>
+                </a:solidFill>
+              </a:defRPr>
+            </a:pPr>
+            <a:r>
+              <a:rPr sz="3900" b="1" i="0">
+                <a:solidFill>
+                  <a:srgbClr val="000000"/>
+                </a:solidFill>
+              </a:rPr>
+              <a:t>The deck now moves from table safety to model behavior</a:t>
+            </a:r>
+          </a:p>
+        </p:txBody>
+      </p:sp>
+      <p:sp>
+        <p:nvSpPr>
+          <p:cNvPr id="3" name="">
+            <a:extLst xmlns:a="http://schemas.openxmlformats.org/drawingml/2006/main">
+              <a:ext uri="{FF2B5EF4-FFF2-40B4-BE49-F238E27FC236}">
+                <a16:creationId xmlns:a16="http://schemas.microsoft.com/office/drawing/2014/main" id="{9EBA40C5-3BC3-4CD0-BCE0-4A052156F139}"/>
+              </a:ext>
+            </a:extLst>
+          </p:cNvPr>
+          <p:cNvSpPr>
+            <a:spLocks xmlns:a="http://schemas.openxmlformats.org/drawingml/2006/main" noGrp="1"/>
+          </p:cNvSpPr>
+          <p:nvPr/>
+        </p:nvSpPr>
+        <p:spPr>
+          <a:xfrm xmlns:a="http://schemas.openxmlformats.org/drawingml/2006/main">
+            <a:off x="723900" y="3105150"/>
+            <a:ext cx="5715000" cy="19050"/>
+          </a:xfrm>
+          <a:prstGeom xmlns:a="http://schemas.openxmlformats.org/drawingml/2006/main" prst="rect">
+            <a:avLst/>
+          </a:prstGeom>
+          <a:solidFill xmlns:a="http://schemas.openxmlformats.org/drawingml/2006/main">
+            <a:srgbClr val="B8BCC4"/>
+          </a:solidFill>
+          <a:ln xmlns:a="http://schemas.openxmlformats.org/drawingml/2006/main" w="0">
+            <a:noFill/>
+            <a:prstDash val="solid"/>
+          </a:ln>
+        </p:spPr>
+      </p:sp>
+      <p:sp>
+        <p:nvSpPr>
+          <p:cNvPr id="4" name="">
+            <a:extLst xmlns:a="http://schemas.openxmlformats.org/drawingml/2006/main">
+              <a:ext uri="{FF2B5EF4-FFF2-40B4-BE49-F238E27FC236}">
+                <a16:creationId xmlns:a16="http://schemas.microsoft.com/office/drawing/2014/main" id="{1BF0108E-FFFE-4644-A73C-AB2EBF4AD59B}"/>
+              </a:ext>
+            </a:extLst>
+          </p:cNvPr>
+          <p:cNvSpPr>
+            <a:spLocks xmlns:a="http://schemas.openxmlformats.org/drawingml/2006/main" noGrp="1"/>
+          </p:cNvSpPr>
+          <p:nvPr/>
+        </p:nvSpPr>
+        <p:spPr>
+          <a:xfrm xmlns:a="http://schemas.openxmlformats.org/drawingml/2006/main">
+            <a:off x="723900" y="3467100"/>
+            <a:ext cx="7334250" cy="1066800"/>
+          </a:xfrm>
+          <a:prstGeom xmlns:a="http://schemas.openxmlformats.org/drawingml/2006/main" prst="rect">
+            <a:avLst/>
+          </a:prstGeom>
+          <a:noFill xmlns:a="http://schemas.openxmlformats.org/drawingml/2006/main"/>
+          <a:ln xmlns:a="http://schemas.openxmlformats.org/drawingml/2006/main" w="0">
+            <a:noFill/>
+            <a:prstDash val="solid"/>
+          </a:ln>
+        </p:spPr>
+        <p:txBody>
+          <a:bodyPr xmlns:a="http://schemas.openxmlformats.org/drawingml/2006/main"/>
+          <a:lstStyle xmlns:a="http://schemas.openxmlformats.org/drawingml/2006/main"/>
+          <a:p xmlns:a="http://schemas.openxmlformats.org/drawingml/2006/main">
+            <a:pPr algn="l">
+              <a:defRPr sz="1800" b="0" i="0">
+                <a:solidFill>
+                  <a:srgbClr val="222222"/>
+                </a:solidFill>
+              </a:defRPr>
+            </a:pPr>
+            <a:r>
+              <a:rPr sz="1800" b="0" i="0">
+                <a:solidFill>
+                  <a:srgbClr val="222222"/>
+                </a:solidFill>
+              </a:rPr>
+              <a:t>ML-P1 fits a GLM on TRAIN rows, freezes the model, predicts OOS h3 probability, and replays fixed-threshold long/flat decisions. This is a diagnostic model, not an allocation claim.</a:t>
+            </a:r>
+          </a:p>
+        </p:txBody>
+      </p:sp>
+      <p:sp>
+        <p:nvSpPr>
+          <p:cNvPr id="5" name="">
+            <a:extLst xmlns:a="http://schemas.openxmlformats.org/drawingml/2006/main">
+              <a:ext uri="{FF2B5EF4-FFF2-40B4-BE49-F238E27FC236}">
+                <a16:creationId xmlns:a16="http://schemas.microsoft.com/office/drawing/2014/main" id="{18F2328B-BF2F-4628-9415-1077679B85A7}"/>
+              </a:ext>
+            </a:extLst>
+          </p:cNvPr>
+          <p:cNvSpPr>
+            <a:spLocks xmlns:a="http://schemas.openxmlformats.org/drawingml/2006/main" noGrp="1"/>
+          </p:cNvSpPr>
+          <p:nvPr/>
+        </p:nvSpPr>
+        <p:spPr>
+          <a:xfrm xmlns:a="http://schemas.openxmlformats.org/drawingml/2006/main">
+            <a:off x="8801100" y="0"/>
+            <a:ext cx="3390900" cy="6858000"/>
+          </a:xfrm>
+          <a:prstGeom xmlns:a="http://schemas.openxmlformats.org/drawingml/2006/main" prst="rect">
+            <a:avLst/>
+          </a:prstGeom>
+          <a:solidFill xmlns:a="http://schemas.openxmlformats.org/drawingml/2006/main">
+            <a:srgbClr val="EDEDED"/>
+          </a:solidFill>
+          <a:ln xmlns:a="http://schemas.openxmlformats.org/drawingml/2006/main" w="0">
+            <a:noFill/>
+            <a:prstDash val="solid"/>
+          </a:ln>
+        </p:spPr>
+      </p:sp>
+      <p:sp>
+        <p:nvSpPr>
+          <p:cNvPr id="6" name="">
+            <a:extLst xmlns:a="http://schemas.openxmlformats.org/drawingml/2006/main">
+              <a:ext uri="{FF2B5EF4-FFF2-40B4-BE49-F238E27FC236}">
+                <a16:creationId xmlns:a16="http://schemas.microsoft.com/office/drawing/2014/main" id="{E59E8A10-FBF2-4ECA-B4FE-A57A7E3946D2}"/>
+              </a:ext>
+            </a:extLst>
+          </p:cNvPr>
+          <p:cNvSpPr>
+            <a:spLocks xmlns:a="http://schemas.openxmlformats.org/drawingml/2006/main" noGrp="1"/>
+          </p:cNvSpPr>
+          <p:nvPr/>
+        </p:nvSpPr>
+        <p:spPr>
+          <a:xfrm xmlns:a="http://schemas.openxmlformats.org/drawingml/2006/main">
+            <a:off x="9353550" y="2343150"/>
+            <a:ext cx="2190750" cy="438150"/>
+          </a:xfrm>
+          <a:prstGeom xmlns:a="http://schemas.openxmlformats.org/drawingml/2006/main" prst="rect">
+            <a:avLst/>
+          </a:prstGeom>
+          <a:noFill xmlns:a="http://schemas.openxmlformats.org/drawingml/2006/main"/>
+          <a:ln xmlns:a="http://schemas.openxmlformats.org/drawingml/2006/main" w="0">
+            <a:noFill/>
+            <a:prstDash val="solid"/>
+          </a:ln>
+        </p:spPr>
+        <p:txBody>
+          <a:bodyPr xmlns:a="http://schemas.openxmlformats.org/drawingml/2006/main"/>
+          <a:lstStyle xmlns:a="http://schemas.openxmlformats.org/drawingml/2006/main"/>
+          <a:p xmlns:a="http://schemas.openxmlformats.org/drawingml/2006/main">
+            <a:pPr algn="ctr">
+              <a:defRPr sz="3150" b="1" i="0">
+                <a:solidFill>
+                  <a:srgbClr val="000000"/>
+                </a:solidFill>
+              </a:defRPr>
+            </a:pPr>
+            <a:r>
+              <a:rPr sz="3150" b="1" i="0">
+                <a:solidFill>
+                  <a:srgbClr val="000000"/>
+                </a:solidFill>
+              </a:rPr>
+              <a:t>ML-P1</a:t>
+            </a:r>
+          </a:p>
+        </p:txBody>
+      </p:sp>
+      <p:sp>
+        <p:nvSpPr>
+          <p:cNvPr id="7" name="">
+            <a:extLst xmlns:a="http://schemas.openxmlformats.org/drawingml/2006/main">
+              <a:ext uri="{FF2B5EF4-FFF2-40B4-BE49-F238E27FC236}">
+                <a16:creationId xmlns:a16="http://schemas.microsoft.com/office/drawing/2014/main" id="{C1D56FAB-09FB-44F2-AA9F-6FFCDBC2433C}"/>
+              </a:ext>
+            </a:extLst>
+          </p:cNvPr>
+          <p:cNvSpPr>
+            <a:spLocks xmlns:a="http://schemas.openxmlformats.org/drawingml/2006/main" noGrp="1"/>
+          </p:cNvSpPr>
+          <p:nvPr/>
+        </p:nvSpPr>
+        <p:spPr>
+          <a:xfrm xmlns:a="http://schemas.openxmlformats.org/drawingml/2006/main">
+            <a:off x="9353550" y="3067050"/>
+            <a:ext cx="2190750" cy="342900"/>
+          </a:xfrm>
+          <a:prstGeom xmlns:a="http://schemas.openxmlformats.org/drawingml/2006/main" prst="rect">
+            <a:avLst/>
+          </a:prstGeom>
+          <a:noFill xmlns:a="http://schemas.openxmlformats.org/drawingml/2006/main"/>
+          <a:ln xmlns:a="http://schemas.openxmlformats.org/drawingml/2006/main" w="0">
+            <a:noFill/>
+            <a:prstDash val="solid"/>
+          </a:ln>
+        </p:spPr>
+        <p:txBody>
+          <a:bodyPr xmlns:a="http://schemas.openxmlformats.org/drawingml/2006/main"/>
+          <a:lstStyle xmlns:a="http://schemas.openxmlformats.org/drawingml/2006/main"/>
+          <a:p xmlns:a="http://schemas.openxmlformats.org/drawingml/2006/main">
+            <a:pPr algn="ctr">
+              <a:defRPr sz="1950" b="0" i="0">
+                <a:solidFill>
+                  <a:srgbClr val="222222"/>
+                </a:solidFill>
+              </a:defRPr>
+            </a:pPr>
+            <a:r>
+              <a:rPr sz="1950" b="0" i="0">
+                <a:solidFill>
+                  <a:srgbClr val="222222"/>
+                </a:solidFill>
+              </a:rPr>
+              <a:t>GLM replay</a:t>
+            </a:r>
+          </a:p>
+        </p:txBody>
+      </p:sp>
+    </p:spTree>
+    <p:extLst>
+      <p:ext uri="{BB962C8B-B14F-4D97-AF65-F5344CB8AC3E}">
+        <p14:creationId xmlns:p14="http://schemas.microsoft.com/office/powerpoint/2010/main" val="1272524852"/>
+      </p:ext>
+    </p:extLst>
+  </p:cSld>
+</p:sld>
+</file>
+
+<file path=ppt/slides/slide12.xml><?xml version="1.0" encoding="utf-8"?>
+<p:sld xmlns:p="http://schemas.openxmlformats.org/presentationml/2006/main">
+  <p:cSld>
+    <p:bg>
+      <p:bgPr>
+        <a:solidFill xmlns:a="http://schemas.openxmlformats.org/drawingml/2006/main">
+          <a:srgbClr val="FFFFFF"/>
+        </a:solidFill>
+      </p:bgPr>
+    </p:bg>
+    <p:spTree>
+      <p:nvGrpSpPr>
+        <p:cNvPr id="1" name=""/>
+        <p:cNvGrpSpPr/>
+        <p:nvPr/>
+      </p:nvGrpSpPr>
+      <p:grpSpPr>
+        <a:xfrm xmlns:a="http://schemas.openxmlformats.org/drawingml/2006/main"/>
+      </p:grpSpPr>
+      <p:sp>
+        <p:nvSpPr>
+          <p:cNvPr id="1" name="">
+            <a:extLst xmlns:a="http://schemas.openxmlformats.org/drawingml/2006/main">
+              <a:ext uri="{FF2B5EF4-FFF2-40B4-BE49-F238E27FC236}">
+                <a16:creationId xmlns:a16="http://schemas.microsoft.com/office/drawing/2014/main" id="{D94409FE-8D27-47EB-A7EF-5446947686A8}"/>
+              </a:ext>
+            </a:extLst>
+          </p:cNvPr>
+          <p:cNvSpPr>
+            <a:spLocks xmlns:a="http://schemas.openxmlformats.org/drawingml/2006/main" noGrp="1"/>
+          </p:cNvSpPr>
+          <p:nvPr/>
+        </p:nvSpPr>
+        <p:spPr>
+          <a:xfrm xmlns:a="http://schemas.openxmlformats.org/drawingml/2006/main">
+            <a:off x="685800" y="400050"/>
+            <a:ext cx="8572500" cy="247650"/>
+          </a:xfrm>
+          <a:prstGeom xmlns:a="http://schemas.openxmlformats.org/drawingml/2006/main" prst="rect">
+            <a:avLst/>
+          </a:prstGeom>
+          <a:noFill xmlns:a="http://schemas.openxmlformats.org/drawingml/2006/main"/>
+          <a:ln xmlns:a="http://schemas.openxmlformats.org/drawingml/2006/main" w="0">
+            <a:noFill/>
+            <a:prstDash val="solid"/>
+          </a:ln>
+        </p:spPr>
+        <p:txBody>
+          <a:bodyPr xmlns:a="http://schemas.openxmlformats.org/drawingml/2006/main"/>
+          <a:lstStyle xmlns:a="http://schemas.openxmlformats.org/drawingml/2006/main"/>
+          <a:p xmlns:a="http://schemas.openxmlformats.org/drawingml/2006/main">
+            <a:pPr algn="l">
+              <a:defRPr sz="975" b="1" i="0">
+                <a:solidFill>
+                  <a:srgbClr val="555555"/>
+                </a:solidFill>
+              </a:defRPr>
+            </a:pPr>
+            <a:r>
+              <a:rPr sz="975" b="1" i="0">
+                <a:solidFill>
+                  <a:srgbClr val="555555"/>
+                </a:solidFill>
+              </a:rPr>
+              <a:t>GEN5.4 ML DECISION ENGINE</a:t>
+            </a:r>
+          </a:p>
+        </p:txBody>
+      </p:sp>
+      <p:sp>
+        <p:nvSpPr>
+          <p:cNvPr id="2" name="">
+            <a:extLst xmlns:a="http://schemas.openxmlformats.org/drawingml/2006/main">
+              <a:ext uri="{FF2B5EF4-FFF2-40B4-BE49-F238E27FC236}">
+                <a16:creationId xmlns:a16="http://schemas.microsoft.com/office/drawing/2014/main" id="{DC3CC4F6-EEC9-4F98-AB06-2111D81B603C}"/>
+              </a:ext>
+            </a:extLst>
+          </p:cNvPr>
+          <p:cNvSpPr>
+            <a:spLocks xmlns:a="http://schemas.openxmlformats.org/drawingml/2006/main" noGrp="1"/>
+          </p:cNvSpPr>
+          <p:nvPr/>
+        </p:nvSpPr>
+        <p:spPr>
+          <a:xfrm xmlns:a="http://schemas.openxmlformats.org/drawingml/2006/main">
+            <a:off x="685800" y="723900"/>
+            <a:ext cx="10287000" cy="876300"/>
+          </a:xfrm>
+          <a:prstGeom xmlns:a="http://schemas.openxmlformats.org/drawingml/2006/main" prst="rect">
+            <a:avLst/>
+          </a:prstGeom>
+          <a:noFill xmlns:a="http://schemas.openxmlformats.org/drawingml/2006/main"/>
+          <a:ln xmlns:a="http://schemas.openxmlformats.org/drawingml/2006/main" w="0">
+            <a:noFill/>
+            <a:prstDash val="solid"/>
+          </a:ln>
+        </p:spPr>
+        <p:txBody>
+          <a:bodyPr xmlns:a="http://schemas.openxmlformats.org/drawingml/2006/main"/>
+          <a:lstStyle xmlns:a="http://schemas.openxmlformats.org/drawingml/2006/main"/>
+          <a:p xmlns:a="http://schemas.openxmlformats.org/drawingml/2006/main">
+            <a:pPr algn="l">
+              <a:defRPr sz="2850" b="1" i="0">
+                <a:solidFill>
+                  <a:srgbClr val="000000"/>
+                </a:solidFill>
+              </a:defRPr>
+            </a:pPr>
+            <a:r>
+              <a:rPr sz="2850" b="1" i="0">
+                <a:solidFill>
+                  <a:srgbClr val="000000"/>
+                </a:solidFill>
+              </a:rPr>
+              <a:t>The GLM baseline became defensive, not participatory</a:t>
+            </a:r>
+          </a:p>
+        </p:txBody>
+      </p:sp>
+      <p:sp>
+        <p:nvSpPr>
+          <p:cNvPr id="3" name="">
+            <a:extLst xmlns:a="http://schemas.openxmlformats.org/drawingml/2006/main">
+              <a:ext uri="{FF2B5EF4-FFF2-40B4-BE49-F238E27FC236}">
+                <a16:creationId xmlns:a16="http://schemas.microsoft.com/office/drawing/2014/main" id="{F6D9BC46-D8E9-4DA8-A754-002431DE46D0}"/>
+              </a:ext>
+            </a:extLst>
+          </p:cNvPr>
+          <p:cNvSpPr>
+            <a:spLocks xmlns:a="http://schemas.openxmlformats.org/drawingml/2006/main" noGrp="1"/>
+          </p:cNvSpPr>
+          <p:nvPr/>
+        </p:nvSpPr>
+        <p:spPr>
+          <a:xfrm xmlns:a="http://schemas.openxmlformats.org/drawingml/2006/main">
+            <a:off x="685800" y="1657350"/>
+            <a:ext cx="10820400" cy="19050"/>
+          </a:xfrm>
+          <a:prstGeom xmlns:a="http://schemas.openxmlformats.org/drawingml/2006/main" prst="rect">
+            <a:avLst/>
+          </a:prstGeom>
+          <a:solidFill xmlns:a="http://schemas.openxmlformats.org/drawingml/2006/main">
+            <a:srgbClr val="B8BCC4"/>
+          </a:solidFill>
+          <a:ln xmlns:a="http://schemas.openxmlformats.org/drawingml/2006/main" w="0">
+            <a:noFill/>
+            <a:prstDash val="solid"/>
+          </a:ln>
+        </p:spPr>
+      </p:sp>
+      <p:sp>
+        <p:nvSpPr>
+          <p:cNvPr id="4" name="">
+            <a:extLst xmlns:a="http://schemas.openxmlformats.org/drawingml/2006/main">
+              <a:ext uri="{FF2B5EF4-FFF2-40B4-BE49-F238E27FC236}">
+                <a16:creationId xmlns:a16="http://schemas.microsoft.com/office/drawing/2014/main" id="{9381AF91-F9B8-44CB-A9EC-936FBCE3D1AD}"/>
+              </a:ext>
+            </a:extLst>
+          </p:cNvPr>
+          <p:cNvSpPr>
+            <a:spLocks xmlns:a="http://schemas.openxmlformats.org/drawingml/2006/main" noGrp="1"/>
+          </p:cNvSpPr>
+          <p:nvPr/>
+        </p:nvSpPr>
+        <p:spPr>
+          <a:xfrm xmlns:a="http://schemas.openxmlformats.org/drawingml/2006/main">
+            <a:off x="819150" y="2152650"/>
+            <a:ext cx="2333625" cy="1200150"/>
+          </a:xfrm>
+          <a:prstGeom xmlns:a="http://schemas.openxmlformats.org/drawingml/2006/main" prst="rect">
+            <a:avLst/>
+          </a:prstGeom>
+          <a:solidFill xmlns:a="http://schemas.openxmlformats.org/drawingml/2006/main">
+            <a:srgbClr val="EDEDED"/>
+          </a:solidFill>
+          <a:ln xmlns:a="http://schemas.openxmlformats.org/drawingml/2006/main" w="9525">
+            <a:solidFill>
+              <a:srgbClr val="B8BCC4"/>
+            </a:solidFill>
+            <a:prstDash val="solid"/>
+          </a:ln>
+        </p:spPr>
+      </p:sp>
+      <p:sp>
+        <p:nvSpPr>
+          <p:cNvPr id="5" name="">
+            <a:extLst xmlns:a="http://schemas.openxmlformats.org/drawingml/2006/main">
+              <a:ext uri="{FF2B5EF4-FFF2-40B4-BE49-F238E27FC236}">
+                <a16:creationId xmlns:a16="http://schemas.microsoft.com/office/drawing/2014/main" id="{926E6486-5646-4AD0-8731-963A520563D3}"/>
+              </a:ext>
+            </a:extLst>
+          </p:cNvPr>
+          <p:cNvSpPr>
+            <a:spLocks xmlns:a="http://schemas.openxmlformats.org/drawingml/2006/main" noGrp="1"/>
+          </p:cNvSpPr>
+          <p:nvPr/>
+        </p:nvSpPr>
+        <p:spPr>
+          <a:xfrm xmlns:a="http://schemas.openxmlformats.org/drawingml/2006/main">
+            <a:off x="990600" y="2305050"/>
+            <a:ext cx="1990725" cy="171450"/>
+          </a:xfrm>
+          <a:prstGeom xmlns:a="http://schemas.openxmlformats.org/drawingml/2006/main" prst="rect">
+            <a:avLst/>
+          </a:prstGeom>
+          <a:noFill xmlns:a="http://schemas.openxmlformats.org/drawingml/2006/main"/>
+          <a:ln xmlns:a="http://schemas.openxmlformats.org/drawingml/2006/main" w="0">
+            <a:noFill/>
+            <a:prstDash val="solid"/>
+          </a:ln>
+        </p:spPr>
+        <p:txBody>
+          <a:bodyPr xmlns:a="http://schemas.openxmlformats.org/drawingml/2006/main"/>
+          <a:lstStyle xmlns:a="http://schemas.openxmlformats.org/drawingml/2006/main"/>
+          <a:p xmlns:a="http://schemas.openxmlformats.org/drawingml/2006/main">
+            <a:pPr algn="l">
+              <a:defRPr sz="900" b="1" i="0">
+                <a:solidFill>
+                  <a:srgbClr val="555555"/>
+                </a:solidFill>
+              </a:defRPr>
+            </a:pPr>
+            <a:r>
+              <a:rPr sz="900" b="1" i="0">
+                <a:solidFill>
+                  <a:srgbClr val="555555"/>
+                </a:solidFill>
+              </a:rPr>
+              <a:t>2020 ACTIVE</a:t>
+            </a:r>
+          </a:p>
+        </p:txBody>
+      </p:sp>
+      <p:sp>
+        <p:nvSpPr>
+          <p:cNvPr id="6" name="">
+            <a:extLst xmlns:a="http://schemas.openxmlformats.org/drawingml/2006/main">
+              <a:ext uri="{FF2B5EF4-FFF2-40B4-BE49-F238E27FC236}">
+                <a16:creationId xmlns:a16="http://schemas.microsoft.com/office/drawing/2014/main" id="{AC448AA7-7C54-4C6B-BBF9-7D72856BCFFE}"/>
+              </a:ext>
+            </a:extLst>
+          </p:cNvPr>
+          <p:cNvSpPr>
+            <a:spLocks xmlns:a="http://schemas.openxmlformats.org/drawingml/2006/main" noGrp="1"/>
+          </p:cNvSpPr>
+          <p:nvPr/>
+        </p:nvSpPr>
+        <p:spPr>
+          <a:xfrm xmlns:a="http://schemas.openxmlformats.org/drawingml/2006/main">
+            <a:off x="990600" y="2552700"/>
+            <a:ext cx="1990725" cy="361950"/>
+          </a:xfrm>
+          <a:prstGeom xmlns:a="http://schemas.openxmlformats.org/drawingml/2006/main" prst="rect">
+            <a:avLst/>
+          </a:prstGeom>
+          <a:noFill xmlns:a="http://schemas.openxmlformats.org/drawingml/2006/main"/>
+          <a:ln xmlns:a="http://schemas.openxmlformats.org/drawingml/2006/main" w="0">
+            <a:noFill/>
+            <a:prstDash val="solid"/>
+          </a:ln>
+        </p:spPr>
+        <p:txBody>
+          <a:bodyPr xmlns:a="http://schemas.openxmlformats.org/drawingml/2006/main"/>
+          <a:lstStyle xmlns:a="http://schemas.openxmlformats.org/drawingml/2006/main"/>
+          <a:p xmlns:a="http://schemas.openxmlformats.org/drawingml/2006/main">
+            <a:pPr algn="l">
+              <a:defRPr sz="2250" b="1" i="0">
+                <a:solidFill>
+                  <a:srgbClr val="000000"/>
+                </a:solidFill>
+              </a:defRPr>
+            </a:pPr>
+            <a:r>
+              <a:rPr sz="2250" b="1" i="0">
+                <a:solidFill>
+                  <a:srgbClr val="000000"/>
+                </a:solidFill>
+              </a:rPr>
+              <a:t>8.0%</a:t>
+            </a:r>
+          </a:p>
+        </p:txBody>
+      </p:sp>
+      <p:sp>
+        <p:nvSpPr>
+          <p:cNvPr id="7" name="">
+            <a:extLst xmlns:a="http://schemas.openxmlformats.org/drawingml/2006/main">
+              <a:ext uri="{FF2B5EF4-FFF2-40B4-BE49-F238E27FC236}">
+                <a16:creationId xmlns:a16="http://schemas.microsoft.com/office/drawing/2014/main" id="{07B95273-76CF-47FF-9E93-68188C85FA69}"/>
+              </a:ext>
+            </a:extLst>
+          </p:cNvPr>
+          <p:cNvSpPr>
+            <a:spLocks xmlns:a="http://schemas.openxmlformats.org/drawingml/2006/main" noGrp="1"/>
+          </p:cNvSpPr>
+          <p:nvPr/>
+        </p:nvSpPr>
+        <p:spPr>
+          <a:xfrm xmlns:a="http://schemas.openxmlformats.org/drawingml/2006/main">
+            <a:off x="990600" y="2971800"/>
+            <a:ext cx="1990725" cy="323850"/>
+          </a:xfrm>
+          <a:prstGeom xmlns:a="http://schemas.openxmlformats.org/drawingml/2006/main" prst="rect">
+            <a:avLst/>
+          </a:prstGeom>
+          <a:noFill xmlns:a="http://schemas.openxmlformats.org/drawingml/2006/main"/>
+          <a:ln xmlns:a="http://schemas.openxmlformats.org/drawingml/2006/main" w="0">
+            <a:noFill/>
+            <a:prstDash val="solid"/>
+          </a:ln>
+        </p:spPr>
+        <p:txBody>
+          <a:bodyPr xmlns:a="http://schemas.openxmlformats.org/drawingml/2006/main"/>
+          <a:lstStyle xmlns:a="http://schemas.openxmlformats.org/drawingml/2006/main"/>
+          <a:p xmlns:a="http://schemas.openxmlformats.org/drawingml/2006/main">
+            <a:pPr algn="l">
+              <a:defRPr sz="1125" b="0" i="0">
+                <a:solidFill>
+                  <a:srgbClr val="555555"/>
+                </a:solidFill>
+              </a:defRPr>
+            </a:pPr>
+            <a:r>
+              <a:rPr sz="1125" b="0" i="0">
+                <a:solidFill>
+                  <a:srgbClr val="555555"/>
+                </a:solidFill>
+              </a:rPr>
+              <a:t>Basket hold 214.0%</a:t>
+            </a:r>
+          </a:p>
+        </p:txBody>
+      </p:sp>
+      <p:sp>
+        <p:nvSpPr>
+          <p:cNvPr id="8" name="">
+            <a:extLst xmlns:a="http://schemas.openxmlformats.org/drawingml/2006/main">
+              <a:ext uri="{FF2B5EF4-FFF2-40B4-BE49-F238E27FC236}">
+                <a16:creationId xmlns:a16="http://schemas.microsoft.com/office/drawing/2014/main" id="{0A43E010-8C1E-4D1E-A966-1FE0651E28DD}"/>
+              </a:ext>
+            </a:extLst>
+          </p:cNvPr>
+          <p:cNvSpPr>
+            <a:spLocks xmlns:a="http://schemas.openxmlformats.org/drawingml/2006/main" noGrp="1"/>
+          </p:cNvSpPr>
+          <p:nvPr/>
+        </p:nvSpPr>
+        <p:spPr>
+          <a:xfrm xmlns:a="http://schemas.openxmlformats.org/drawingml/2006/main">
+            <a:off x="3524250" y="2152650"/>
+            <a:ext cx="2333625" cy="1200150"/>
+          </a:xfrm>
+          <a:prstGeom xmlns:a="http://schemas.openxmlformats.org/drawingml/2006/main" prst="rect">
+            <a:avLst/>
+          </a:prstGeom>
+          <a:solidFill xmlns:a="http://schemas.openxmlformats.org/drawingml/2006/main">
+            <a:srgbClr val="EDEDED"/>
+          </a:solidFill>
+          <a:ln xmlns:a="http://schemas.openxmlformats.org/drawingml/2006/main" w="9525">
+            <a:solidFill>
+              <a:srgbClr val="B8BCC4"/>
+            </a:solidFill>
+            <a:prstDash val="solid"/>
+          </a:ln>
+        </p:spPr>
+      </p:sp>
+      <p:sp>
+        <p:nvSpPr>
+          <p:cNvPr id="9" name="">
+            <a:extLst xmlns:a="http://schemas.openxmlformats.org/drawingml/2006/main">
+              <a:ext uri="{FF2B5EF4-FFF2-40B4-BE49-F238E27FC236}">
+                <a16:creationId xmlns:a16="http://schemas.microsoft.com/office/drawing/2014/main" id="{7941A2AA-93C8-475B-ABFA-82B856044C8E}"/>
+              </a:ext>
+            </a:extLst>
+          </p:cNvPr>
+          <p:cNvSpPr>
+            <a:spLocks xmlns:a="http://schemas.openxmlformats.org/drawingml/2006/main" noGrp="1"/>
+          </p:cNvSpPr>
+          <p:nvPr/>
+        </p:nvSpPr>
+        <p:spPr>
+          <a:xfrm xmlns:a="http://schemas.openxmlformats.org/drawingml/2006/main">
+            <a:off x="3695700" y="2305050"/>
+            <a:ext cx="1990725" cy="171450"/>
+          </a:xfrm>
+          <a:prstGeom xmlns:a="http://schemas.openxmlformats.org/drawingml/2006/main" prst="rect">
+            <a:avLst/>
+          </a:prstGeom>
+          <a:noFill xmlns:a="http://schemas.openxmlformats.org/drawingml/2006/main"/>
+          <a:ln xmlns:a="http://schemas.openxmlformats.org/drawingml/2006/main" w="0">
+            <a:noFill/>
+            <a:prstDash val="solid"/>
+          </a:ln>
+        </p:spPr>
+        <p:txBody>
+          <a:bodyPr xmlns:a="http://schemas.openxmlformats.org/drawingml/2006/main"/>
+          <a:lstStyle xmlns:a="http://schemas.openxmlformats.org/drawingml/2006/main"/>
+          <a:p xmlns:a="http://schemas.openxmlformats.org/drawingml/2006/main">
+            <a:pPr algn="l">
+              <a:defRPr sz="900" b="1" i="0">
+                <a:solidFill>
+                  <a:srgbClr val="555555"/>
+                </a:solidFill>
+              </a:defRPr>
+            </a:pPr>
+            <a:r>
+              <a:rPr sz="900" b="1" i="0">
+                <a:solidFill>
+                  <a:srgbClr val="555555"/>
+                </a:solidFill>
+              </a:rPr>
+              <a:t>2020 EXPOSURE</a:t>
+            </a:r>
+          </a:p>
+        </p:txBody>
+      </p:sp>
+      <p:sp>
+        <p:nvSpPr>
+          <p:cNvPr id="10" name="">
+            <a:extLst xmlns:a="http://schemas.openxmlformats.org/drawingml/2006/main">
+              <a:ext uri="{FF2B5EF4-FFF2-40B4-BE49-F238E27FC236}">
+                <a16:creationId xmlns:a16="http://schemas.microsoft.com/office/drawing/2014/main" id="{D289D85E-767F-4440-920B-3D49876A70F1}"/>
+              </a:ext>
+            </a:extLst>
+          </p:cNvPr>
+          <p:cNvSpPr>
+            <a:spLocks xmlns:a="http://schemas.openxmlformats.org/drawingml/2006/main" noGrp="1"/>
+          </p:cNvSpPr>
+          <p:nvPr/>
+        </p:nvSpPr>
+        <p:spPr>
+          <a:xfrm xmlns:a="http://schemas.openxmlformats.org/drawingml/2006/main">
+            <a:off x="3695700" y="2552700"/>
+            <a:ext cx="1990725" cy="361950"/>
+          </a:xfrm>
+          <a:prstGeom xmlns:a="http://schemas.openxmlformats.org/drawingml/2006/main" prst="rect">
+            <a:avLst/>
+          </a:prstGeom>
+          <a:noFill xmlns:a="http://schemas.openxmlformats.org/drawingml/2006/main"/>
+          <a:ln xmlns:a="http://schemas.openxmlformats.org/drawingml/2006/main" w="0">
+            <a:noFill/>
+            <a:prstDash val="solid"/>
+          </a:ln>
+        </p:spPr>
+        <p:txBody>
+          <a:bodyPr xmlns:a="http://schemas.openxmlformats.org/drawingml/2006/main"/>
+          <a:lstStyle xmlns:a="http://schemas.openxmlformats.org/drawingml/2006/main"/>
+          <a:p xmlns:a="http://schemas.openxmlformats.org/drawingml/2006/main">
+            <a:pPr algn="l">
+              <a:defRPr sz="2250" b="1" i="0">
+                <a:solidFill>
+                  <a:srgbClr val="000000"/>
+                </a:solidFill>
+              </a:defRPr>
+            </a:pPr>
+            <a:r>
+              <a:rPr sz="2250" b="1" i="0">
+                <a:solidFill>
+                  <a:srgbClr val="000000"/>
+                </a:solidFill>
+              </a:rPr>
+              <a:t>27.6%</a:t>
+            </a:r>
+          </a:p>
+        </p:txBody>
+      </p:sp>
+      <p:sp>
+        <p:nvSpPr>
+          <p:cNvPr id="11" name="">
+            <a:extLst xmlns:a="http://schemas.openxmlformats.org/drawingml/2006/main">
+              <a:ext uri="{FF2B5EF4-FFF2-40B4-BE49-F238E27FC236}">
+                <a16:creationId xmlns:a16="http://schemas.microsoft.com/office/drawing/2014/main" id="{C9914161-045C-4C05-9CC9-2ACB7023B031}"/>
+              </a:ext>
+            </a:extLst>
+          </p:cNvPr>
+          <p:cNvSpPr>
+            <a:spLocks xmlns:a="http://schemas.openxmlformats.org/drawingml/2006/main" noGrp="1"/>
+          </p:cNvSpPr>
+          <p:nvPr/>
+        </p:nvSpPr>
+        <p:spPr>
+          <a:xfrm xmlns:a="http://schemas.openxmlformats.org/drawingml/2006/main">
+            <a:off x="3695700" y="2971800"/>
+            <a:ext cx="1990725" cy="323850"/>
+          </a:xfrm>
+          <a:prstGeom xmlns:a="http://schemas.openxmlformats.org/drawingml/2006/main" prst="rect">
+            <a:avLst/>
+          </a:prstGeom>
+          <a:noFill xmlns:a="http://schemas.openxmlformats.org/drawingml/2006/main"/>
+          <a:ln xmlns:a="http://schemas.openxmlformats.org/drawingml/2006/main" w="0">
+            <a:noFill/>
+            <a:prstDash val="solid"/>
+          </a:ln>
+        </p:spPr>
+        <p:txBody>
+          <a:bodyPr xmlns:a="http://schemas.openxmlformats.org/drawingml/2006/main"/>
+          <a:lstStyle xmlns:a="http://schemas.openxmlformats.org/drawingml/2006/main"/>
+          <a:p xmlns:a="http://schemas.openxmlformats.org/drawingml/2006/main">
+            <a:pPr algn="l">
+              <a:defRPr sz="1125" b="0" i="0">
+                <a:solidFill>
+                  <a:srgbClr val="555555"/>
+                </a:solidFill>
+              </a:defRPr>
+            </a:pPr>
+            <a:r>
+              <a:rPr sz="1125" b="0" i="0">
+                <a:solidFill>
+                  <a:srgbClr val="555555"/>
+                </a:solidFill>
+              </a:rPr>
+              <a:t>Stayed flat 68.3% of decision rows.</a:t>
+            </a:r>
+          </a:p>
+        </p:txBody>
+      </p:sp>
+      <p:sp>
+        <p:nvSpPr>
+          <p:cNvPr id="12" name="">
+            <a:extLst xmlns:a="http://schemas.openxmlformats.org/drawingml/2006/main">
+              <a:ext uri="{FF2B5EF4-FFF2-40B4-BE49-F238E27FC236}">
+                <a16:creationId xmlns:a16="http://schemas.microsoft.com/office/drawing/2014/main" id="{C168FAA0-81EA-40C7-B5C5-576807DE6921}"/>
+              </a:ext>
+            </a:extLst>
+          </p:cNvPr>
+          <p:cNvSpPr>
+            <a:spLocks xmlns:a="http://schemas.openxmlformats.org/drawingml/2006/main" noGrp="1"/>
+          </p:cNvSpPr>
+          <p:nvPr/>
+        </p:nvSpPr>
+        <p:spPr>
+          <a:xfrm xmlns:a="http://schemas.openxmlformats.org/drawingml/2006/main">
+            <a:off x="6229350" y="2152650"/>
+            <a:ext cx="2333625" cy="1200150"/>
+          </a:xfrm>
+          <a:prstGeom xmlns:a="http://schemas.openxmlformats.org/drawingml/2006/main" prst="rect">
+            <a:avLst/>
+          </a:prstGeom>
+          <a:solidFill xmlns:a="http://schemas.openxmlformats.org/drawingml/2006/main">
+            <a:srgbClr val="EDEDED"/>
+          </a:solidFill>
+          <a:ln xmlns:a="http://schemas.openxmlformats.org/drawingml/2006/main" w="9525">
+            <a:solidFill>
+              <a:srgbClr val="B8BCC4"/>
+            </a:solidFill>
+            <a:prstDash val="solid"/>
+          </a:ln>
+        </p:spPr>
+      </p:sp>
+      <p:sp>
+        <p:nvSpPr>
+          <p:cNvPr id="13" name="">
+            <a:extLst xmlns:a="http://schemas.openxmlformats.org/drawingml/2006/main">
+              <a:ext uri="{FF2B5EF4-FFF2-40B4-BE49-F238E27FC236}">
+                <a16:creationId xmlns:a16="http://schemas.microsoft.com/office/drawing/2014/main" id="{4246C54F-C939-44CB-B12F-E777AF3F485F}"/>
+              </a:ext>
+            </a:extLst>
+          </p:cNvPr>
+          <p:cNvSpPr>
+            <a:spLocks xmlns:a="http://schemas.openxmlformats.org/drawingml/2006/main" noGrp="1"/>
+          </p:cNvSpPr>
+          <p:nvPr/>
+        </p:nvSpPr>
+        <p:spPr>
+          <a:xfrm xmlns:a="http://schemas.openxmlformats.org/drawingml/2006/main">
+            <a:off x="6400800" y="2305050"/>
+            <a:ext cx="1990725" cy="171450"/>
+          </a:xfrm>
+          <a:prstGeom xmlns:a="http://schemas.openxmlformats.org/drawingml/2006/main" prst="rect">
+            <a:avLst/>
+          </a:prstGeom>
+          <a:noFill xmlns:a="http://schemas.openxmlformats.org/drawingml/2006/main"/>
+          <a:ln xmlns:a="http://schemas.openxmlformats.org/drawingml/2006/main" w="0">
+            <a:noFill/>
+            <a:prstDash val="solid"/>
+          </a:ln>
+        </p:spPr>
+        <p:txBody>
+          <a:bodyPr xmlns:a="http://schemas.openxmlformats.org/drawingml/2006/main"/>
+          <a:lstStyle xmlns:a="http://schemas.openxmlformats.org/drawingml/2006/main"/>
+          <a:p xmlns:a="http://schemas.openxmlformats.org/drawingml/2006/main">
+            <a:pPr algn="l">
+              <a:defRPr sz="900" b="1" i="0">
+                <a:solidFill>
+                  <a:srgbClr val="555555"/>
+                </a:solidFill>
+              </a:defRPr>
+            </a:pPr>
+            <a:r>
+              <a:rPr sz="900" b="1" i="0">
+                <a:solidFill>
+                  <a:srgbClr val="555555"/>
+                </a:solidFill>
+              </a:rPr>
+              <a:t>2022 ACTIVE</a:t>
+            </a:r>
+          </a:p>
+        </p:txBody>
+      </p:sp>
+      <p:sp>
+        <p:nvSpPr>
+          <p:cNvPr id="14" name="">
+            <a:extLst xmlns:a="http://schemas.openxmlformats.org/drawingml/2006/main">
+              <a:ext uri="{FF2B5EF4-FFF2-40B4-BE49-F238E27FC236}">
+                <a16:creationId xmlns:a16="http://schemas.microsoft.com/office/drawing/2014/main" id="{534BA515-B339-4C53-B80A-21E57E283A49}"/>
+              </a:ext>
+            </a:extLst>
+          </p:cNvPr>
+          <p:cNvSpPr>
+            <a:spLocks xmlns:a="http://schemas.openxmlformats.org/drawingml/2006/main" noGrp="1"/>
+          </p:cNvSpPr>
+          <p:nvPr/>
+        </p:nvSpPr>
+        <p:spPr>
+          <a:xfrm xmlns:a="http://schemas.openxmlformats.org/drawingml/2006/main">
+            <a:off x="6400800" y="2552700"/>
+            <a:ext cx="1990725" cy="361950"/>
+          </a:xfrm>
+          <a:prstGeom xmlns:a="http://schemas.openxmlformats.org/drawingml/2006/main" prst="rect">
+            <a:avLst/>
+          </a:prstGeom>
+          <a:noFill xmlns:a="http://schemas.openxmlformats.org/drawingml/2006/main"/>
+          <a:ln xmlns:a="http://schemas.openxmlformats.org/drawingml/2006/main" w="0">
+            <a:noFill/>
+            <a:prstDash val="solid"/>
+          </a:ln>
+        </p:spPr>
+        <p:txBody>
+          <a:bodyPr xmlns:a="http://schemas.openxmlformats.org/drawingml/2006/main"/>
+          <a:lstStyle xmlns:a="http://schemas.openxmlformats.org/drawingml/2006/main"/>
+          <a:p xmlns:a="http://schemas.openxmlformats.org/drawingml/2006/main">
+            <a:pPr algn="l">
+              <a:defRPr sz="2250" b="1" i="0">
+                <a:solidFill>
+                  <a:srgbClr val="000000"/>
+                </a:solidFill>
+              </a:defRPr>
+            </a:pPr>
+            <a:r>
+              <a:rPr sz="2250" b="1" i="0">
+                <a:solidFill>
+                  <a:srgbClr val="000000"/>
+                </a:solidFill>
+              </a:rPr>
+              <a:t>-42.4%</a:t>
+            </a:r>
+          </a:p>
+        </p:txBody>
+      </p:sp>
+      <p:sp>
+        <p:nvSpPr>
+          <p:cNvPr id="15" name="">
+            <a:extLst xmlns:a="http://schemas.openxmlformats.org/drawingml/2006/main">
+              <a:ext uri="{FF2B5EF4-FFF2-40B4-BE49-F238E27FC236}">
+                <a16:creationId xmlns:a16="http://schemas.microsoft.com/office/drawing/2014/main" id="{3B2A0946-494D-478C-AABB-650D08EABCEE}"/>
+              </a:ext>
+            </a:extLst>
+          </p:cNvPr>
+          <p:cNvSpPr>
+            <a:spLocks xmlns:a="http://schemas.openxmlformats.org/drawingml/2006/main" noGrp="1"/>
+          </p:cNvSpPr>
+          <p:nvPr/>
+        </p:nvSpPr>
+        <p:spPr>
+          <a:xfrm xmlns:a="http://schemas.openxmlformats.org/drawingml/2006/main">
+            <a:off x="6400800" y="2971800"/>
+            <a:ext cx="1990725" cy="323850"/>
+          </a:xfrm>
+          <a:prstGeom xmlns:a="http://schemas.openxmlformats.org/drawingml/2006/main" prst="rect">
+            <a:avLst/>
+          </a:prstGeom>
+          <a:noFill xmlns:a="http://schemas.openxmlformats.org/drawingml/2006/main"/>
+          <a:ln xmlns:a="http://schemas.openxmlformats.org/drawingml/2006/main" w="0">
+            <a:noFill/>
+            <a:prstDash val="solid"/>
+          </a:ln>
+        </p:spPr>
+        <p:txBody>
+          <a:bodyPr xmlns:a="http://schemas.openxmlformats.org/drawingml/2006/main"/>
+          <a:lstStyle xmlns:a="http://schemas.openxmlformats.org/drawingml/2006/main"/>
+          <a:p xmlns:a="http://schemas.openxmlformats.org/drawingml/2006/main">
+            <a:pPr algn="l">
+              <a:defRPr sz="1125" b="0" i="0">
+                <a:solidFill>
+                  <a:srgbClr val="555555"/>
+                </a:solidFill>
+              </a:defRPr>
+            </a:pPr>
+            <a:r>
+              <a:rPr sz="1125" b="0" i="0">
+                <a:solidFill>
+                  <a:srgbClr val="555555"/>
+                </a:solidFill>
+              </a:rPr>
+              <a:t>Basket hold -54.2%</a:t>
+            </a:r>
+          </a:p>
+        </p:txBody>
+      </p:sp>
+      <p:sp>
+        <p:nvSpPr>
+          <p:cNvPr id="16" name="">
+            <a:extLst xmlns:a="http://schemas.openxmlformats.org/drawingml/2006/main">
+              <a:ext uri="{FF2B5EF4-FFF2-40B4-BE49-F238E27FC236}">
+                <a16:creationId xmlns:a16="http://schemas.microsoft.com/office/drawing/2014/main" id="{2C301819-07BA-4164-87F1-05CAF99C69F3}"/>
+              </a:ext>
+            </a:extLst>
+          </p:cNvPr>
+          <p:cNvSpPr>
+            <a:spLocks xmlns:a="http://schemas.openxmlformats.org/drawingml/2006/main" noGrp="1"/>
+          </p:cNvSpPr>
+          <p:nvPr/>
+        </p:nvSpPr>
+        <p:spPr>
+          <a:xfrm xmlns:a="http://schemas.openxmlformats.org/drawingml/2006/main">
+            <a:off x="8934450" y="2152650"/>
+            <a:ext cx="2333625" cy="1200150"/>
+          </a:xfrm>
+          <a:prstGeom xmlns:a="http://schemas.openxmlformats.org/drawingml/2006/main" prst="rect">
+            <a:avLst/>
+          </a:prstGeom>
+          <a:solidFill xmlns:a="http://schemas.openxmlformats.org/drawingml/2006/main">
+            <a:srgbClr val="EDEDED"/>
+          </a:solidFill>
+          <a:ln xmlns:a="http://schemas.openxmlformats.org/drawingml/2006/main" w="9525">
+            <a:solidFill>
+              <a:srgbClr val="B8BCC4"/>
+            </a:solidFill>
+            <a:prstDash val="solid"/>
+          </a:ln>
+        </p:spPr>
+      </p:sp>
+      <p:sp>
+        <p:nvSpPr>
+          <p:cNvPr id="17" name="">
+            <a:extLst xmlns:a="http://schemas.openxmlformats.org/drawingml/2006/main">
+              <a:ext uri="{FF2B5EF4-FFF2-40B4-BE49-F238E27FC236}">
+                <a16:creationId xmlns:a16="http://schemas.microsoft.com/office/drawing/2014/main" id="{8CC08740-0A01-4C0C-9D92-27EDDA824070}"/>
+              </a:ext>
+            </a:extLst>
+          </p:cNvPr>
+          <p:cNvSpPr>
+            <a:spLocks xmlns:a="http://schemas.openxmlformats.org/drawingml/2006/main" noGrp="1"/>
+          </p:cNvSpPr>
+          <p:nvPr/>
+        </p:nvSpPr>
+        <p:spPr>
+          <a:xfrm xmlns:a="http://schemas.openxmlformats.org/drawingml/2006/main">
+            <a:off x="9105900" y="2305050"/>
+            <a:ext cx="1990725" cy="171450"/>
+          </a:xfrm>
+          <a:prstGeom xmlns:a="http://schemas.openxmlformats.org/drawingml/2006/main" prst="rect">
+            <a:avLst/>
+          </a:prstGeom>
+          <a:noFill xmlns:a="http://schemas.openxmlformats.org/drawingml/2006/main"/>
+          <a:ln xmlns:a="http://schemas.openxmlformats.org/drawingml/2006/main" w="0">
+            <a:noFill/>
+            <a:prstDash val="solid"/>
+          </a:ln>
+        </p:spPr>
+        <p:txBody>
+          <a:bodyPr xmlns:a="http://schemas.openxmlformats.org/drawingml/2006/main"/>
+          <a:lstStyle xmlns:a="http://schemas.openxmlformats.org/drawingml/2006/main"/>
+          <a:p xmlns:a="http://schemas.openxmlformats.org/drawingml/2006/main">
+            <a:pPr algn="l">
+              <a:defRPr sz="900" b="1" i="0">
+                <a:solidFill>
+                  <a:srgbClr val="555555"/>
+                </a:solidFill>
+              </a:defRPr>
+            </a:pPr>
+            <a:r>
+              <a:rPr sz="900" b="1" i="0">
+                <a:solidFill>
+                  <a:srgbClr val="555555"/>
+                </a:solidFill>
+              </a:rPr>
+              <a:t>LEAKAGE AUDIT</a:t>
+            </a:r>
+          </a:p>
+        </p:txBody>
+      </p:sp>
+      <p:sp>
+        <p:nvSpPr>
+          <p:cNvPr id="18" name="">
+            <a:extLst xmlns:a="http://schemas.openxmlformats.org/drawingml/2006/main">
+              <a:ext uri="{FF2B5EF4-FFF2-40B4-BE49-F238E27FC236}">
+                <a16:creationId xmlns:a16="http://schemas.microsoft.com/office/drawing/2014/main" id="{E8FBA8DF-C648-4BC9-A4F5-5D8A119013C1}"/>
+              </a:ext>
+            </a:extLst>
+          </p:cNvPr>
+          <p:cNvSpPr>
+            <a:spLocks xmlns:a="http://schemas.openxmlformats.org/drawingml/2006/main" noGrp="1"/>
+          </p:cNvSpPr>
+          <p:nvPr/>
+        </p:nvSpPr>
+        <p:spPr>
+          <a:xfrm xmlns:a="http://schemas.openxmlformats.org/drawingml/2006/main">
+            <a:off x="9105900" y="2552700"/>
+            <a:ext cx="1990725" cy="361950"/>
+          </a:xfrm>
+          <a:prstGeom xmlns:a="http://schemas.openxmlformats.org/drawingml/2006/main" prst="rect">
+            <a:avLst/>
+          </a:prstGeom>
+          <a:noFill xmlns:a="http://schemas.openxmlformats.org/drawingml/2006/main"/>
+          <a:ln xmlns:a="http://schemas.openxmlformats.org/drawingml/2006/main" w="0">
+            <a:noFill/>
+            <a:prstDash val="solid"/>
+          </a:ln>
+        </p:spPr>
+        <p:txBody>
+          <a:bodyPr xmlns:a="http://schemas.openxmlformats.org/drawingml/2006/main"/>
+          <a:lstStyle xmlns:a="http://schemas.openxmlformats.org/drawingml/2006/main"/>
+          <a:p xmlns:a="http://schemas.openxmlformats.org/drawingml/2006/main">
+            <a:pPr algn="l">
+              <a:defRPr sz="2250" b="1" i="0">
+                <a:solidFill>
+                  <a:srgbClr val="000000"/>
+                </a:solidFill>
+              </a:defRPr>
+            </a:pPr>
+            <a:r>
+              <a:rPr sz="2250" b="1" i="0">
+                <a:solidFill>
+                  <a:srgbClr val="000000"/>
+                </a:solidFill>
+              </a:rPr>
+              <a:t>All PASS</a:t>
+            </a:r>
+          </a:p>
+        </p:txBody>
+      </p:sp>
+      <p:sp>
+        <p:nvSpPr>
+          <p:cNvPr id="19" name="">
+            <a:extLst xmlns:a="http://schemas.openxmlformats.org/drawingml/2006/main">
+              <a:ext uri="{FF2B5EF4-FFF2-40B4-BE49-F238E27FC236}">
+                <a16:creationId xmlns:a16="http://schemas.microsoft.com/office/drawing/2014/main" id="{3E482B9E-055E-4018-A6F8-7335BAFBE52B}"/>
+              </a:ext>
+            </a:extLst>
+          </p:cNvPr>
+          <p:cNvSpPr>
+            <a:spLocks xmlns:a="http://schemas.openxmlformats.org/drawingml/2006/main" noGrp="1"/>
+          </p:cNvSpPr>
+          <p:nvPr/>
+        </p:nvSpPr>
+        <p:spPr>
+          <a:xfrm xmlns:a="http://schemas.openxmlformats.org/drawingml/2006/main">
+            <a:off x="9105900" y="2971800"/>
+            <a:ext cx="1990725" cy="323850"/>
+          </a:xfrm>
+          <a:prstGeom xmlns:a="http://schemas.openxmlformats.org/drawingml/2006/main" prst="rect">
+            <a:avLst/>
+          </a:prstGeom>
+          <a:noFill xmlns:a="http://schemas.openxmlformats.org/drawingml/2006/main"/>
+          <a:ln xmlns:a="http://schemas.openxmlformats.org/drawingml/2006/main" w="0">
+            <a:noFill/>
+            <a:prstDash val="solid"/>
+          </a:ln>
+        </p:spPr>
+        <p:txBody>
+          <a:bodyPr xmlns:a="http://schemas.openxmlformats.org/drawingml/2006/main"/>
+          <a:lstStyle xmlns:a="http://schemas.openxmlformats.org/drawingml/2006/main"/>
+          <a:p xmlns:a="http://schemas.openxmlformats.org/drawingml/2006/main">
+            <a:pPr algn="l">
+              <a:defRPr sz="1125" b="0" i="0">
+                <a:solidFill>
+                  <a:srgbClr val="555555"/>
+                </a:solidFill>
+              </a:defRPr>
+            </a:pPr>
+            <a:r>
+              <a:rPr sz="1125" b="0" i="0">
+                <a:solidFill>
+                  <a:srgbClr val="555555"/>
+                </a:solidFill>
+              </a:rPr>
+              <a:t>TRAIN fit only; OOS prediction only.</a:t>
+            </a:r>
+          </a:p>
+        </p:txBody>
+      </p:sp>
+      <p:sp>
+        <p:nvSpPr>
+          <p:cNvPr id="20" name="">
+            <a:extLst xmlns:a="http://schemas.openxmlformats.org/drawingml/2006/main">
+              <a:ext uri="{FF2B5EF4-FFF2-40B4-BE49-F238E27FC236}">
+                <a16:creationId xmlns:a16="http://schemas.microsoft.com/office/drawing/2014/main" id="{577B79E9-1BB6-4C1E-A96D-1790E0B2EE54}"/>
+              </a:ext>
+            </a:extLst>
+          </p:cNvPr>
+          <p:cNvSpPr>
+            <a:spLocks xmlns:a="http://schemas.openxmlformats.org/drawingml/2006/main" noGrp="1"/>
+          </p:cNvSpPr>
+          <p:nvPr/>
+        </p:nvSpPr>
+        <p:spPr>
+          <a:xfrm xmlns:a="http://schemas.openxmlformats.org/drawingml/2006/main">
+            <a:off x="1066800" y="4095750"/>
+            <a:ext cx="9334500" cy="800100"/>
+          </a:xfrm>
+          <a:prstGeom xmlns:a="http://schemas.openxmlformats.org/drawingml/2006/main" prst="rect">
+            <a:avLst/>
+          </a:prstGeom>
+          <a:noFill xmlns:a="http://schemas.openxmlformats.org/drawingml/2006/main"/>
+          <a:ln xmlns:a="http://schemas.openxmlformats.org/drawingml/2006/main" w="0">
+            <a:noFill/>
+            <a:prstDash val="solid"/>
+          </a:ln>
+        </p:spPr>
+        <p:txBody>
+          <a:bodyPr xmlns:a="http://schemas.openxmlformats.org/drawingml/2006/main"/>
+          <a:lstStyle xmlns:a="http://schemas.openxmlformats.org/drawingml/2006/main"/>
+          <a:p xmlns:a="http://schemas.openxmlformats.org/drawingml/2006/main">
+            <a:pPr algn="ctr">
+              <a:defRPr sz="2100" b="1" i="0">
+                <a:solidFill>
+                  <a:srgbClr val="000000"/>
+                </a:solidFill>
+              </a:defRPr>
+            </a:pPr>
+            <a:r>
+              <a:rPr sz="2100" b="1" i="0">
+                <a:solidFill>
+                  <a:srgbClr val="000000"/>
+                </a:solidFill>
+              </a:rPr>
+              <a:t>The first GLM replay proves the mechanics, but not the alpha thesis. It missed most of the 2020 rally and was useful mainly as partial 2022 defense.</a:t>
+            </a:r>
+          </a:p>
+        </p:txBody>
+      </p:sp>
+    </p:spTree>
+    <p:extLst>
+      <p:ext uri="{BB962C8B-B14F-4D97-AF65-F5344CB8AC3E}">
+        <p14:creationId xmlns:p14="http://schemas.microsoft.com/office/powerpoint/2010/main" val="1722505646"/>
+      </p:ext>
+    </p:extLst>
+  </p:cSld>
+</p:sld>
+</file>
+
+<file path=ppt/slides/slide13.xml><?xml version="1.0" encoding="utf-8"?>
+<p:sld xmlns:p="http://schemas.openxmlformats.org/presentationml/2006/main">
+  <p:cSld>
+    <p:bg>
+      <p:bgPr>
+        <a:solidFill xmlns:a="http://schemas.openxmlformats.org/drawingml/2006/main">
+          <a:srgbClr val="FFFFFF"/>
+        </a:solidFill>
+      </p:bgPr>
+    </p:bg>
+    <p:spTree>
+      <p:nvGrpSpPr>
+        <p:cNvPr id="1" name=""/>
+        <p:cNvGrpSpPr/>
+        <p:nvPr/>
+      </p:nvGrpSpPr>
+      <p:grpSpPr>
+        <a:xfrm xmlns:a="http://schemas.openxmlformats.org/drawingml/2006/main"/>
+      </p:grpSpPr>
+      <p:sp>
+        <p:nvSpPr>
+          <p:cNvPr id="1" name="">
+            <a:extLst xmlns:a="http://schemas.openxmlformats.org/drawingml/2006/main">
+              <a:ext uri="{FF2B5EF4-FFF2-40B4-BE49-F238E27FC236}">
+                <a16:creationId xmlns:a16="http://schemas.microsoft.com/office/drawing/2014/main" id="{223799F1-D6BF-4BC1-93A5-BD6951CEC742}"/>
+              </a:ext>
+            </a:extLst>
+          </p:cNvPr>
+          <p:cNvSpPr>
+            <a:spLocks xmlns:a="http://schemas.openxmlformats.org/drawingml/2006/main" noGrp="1"/>
+          </p:cNvSpPr>
+          <p:nvPr/>
+        </p:nvSpPr>
+        <p:spPr>
+          <a:xfrm xmlns:a="http://schemas.openxmlformats.org/drawingml/2006/main">
+            <a:off x="685800" y="400050"/>
+            <a:ext cx="8572500" cy="247650"/>
+          </a:xfrm>
+          <a:prstGeom xmlns:a="http://schemas.openxmlformats.org/drawingml/2006/main" prst="rect">
+            <a:avLst/>
+          </a:prstGeom>
+          <a:noFill xmlns:a="http://schemas.openxmlformats.org/drawingml/2006/main"/>
+          <a:ln xmlns:a="http://schemas.openxmlformats.org/drawingml/2006/main" w="0">
+            <a:noFill/>
+            <a:prstDash val="solid"/>
+          </a:ln>
+        </p:spPr>
+        <p:txBody>
+          <a:bodyPr xmlns:a="http://schemas.openxmlformats.org/drawingml/2006/main"/>
+          <a:lstStyle xmlns:a="http://schemas.openxmlformats.org/drawingml/2006/main"/>
+          <a:p xmlns:a="http://schemas.openxmlformats.org/drawingml/2006/main">
+            <a:pPr algn="l">
+              <a:defRPr sz="975" b="1" i="0">
+                <a:solidFill>
+                  <a:srgbClr val="555555"/>
+                </a:solidFill>
+              </a:defRPr>
+            </a:pPr>
+            <a:r>
+              <a:rPr sz="975" b="1" i="0">
+                <a:solidFill>
+                  <a:srgbClr val="555555"/>
+                </a:solidFill>
+              </a:rPr>
+              <a:t>GEN5.4 ML DECISION ENGINE</a:t>
+            </a:r>
+          </a:p>
+        </p:txBody>
+      </p:sp>
+      <p:sp>
+        <p:nvSpPr>
+          <p:cNvPr id="2" name="">
+            <a:extLst xmlns:a="http://schemas.openxmlformats.org/drawingml/2006/main">
+              <a:ext uri="{FF2B5EF4-FFF2-40B4-BE49-F238E27FC236}">
+                <a16:creationId xmlns:a16="http://schemas.microsoft.com/office/drawing/2014/main" id="{6A34D0D8-8461-41CD-BD0B-0E16C6C85D76}"/>
+              </a:ext>
+            </a:extLst>
+          </p:cNvPr>
+          <p:cNvSpPr>
+            <a:spLocks xmlns:a="http://schemas.openxmlformats.org/drawingml/2006/main" noGrp="1"/>
+          </p:cNvSpPr>
+          <p:nvPr/>
+        </p:nvSpPr>
+        <p:spPr>
+          <a:xfrm xmlns:a="http://schemas.openxmlformats.org/drawingml/2006/main">
+            <a:off x="685800" y="723900"/>
+            <a:ext cx="10287000" cy="876300"/>
+          </a:xfrm>
+          <a:prstGeom xmlns:a="http://schemas.openxmlformats.org/drawingml/2006/main" prst="rect">
+            <a:avLst/>
+          </a:prstGeom>
+          <a:noFill xmlns:a="http://schemas.openxmlformats.org/drawingml/2006/main"/>
+          <a:ln xmlns:a="http://schemas.openxmlformats.org/drawingml/2006/main" w="0">
+            <a:noFill/>
+            <a:prstDash val="solid"/>
+          </a:ln>
+        </p:spPr>
+        <p:txBody>
+          <a:bodyPr xmlns:a="http://schemas.openxmlformats.org/drawingml/2006/main"/>
+          <a:lstStyle xmlns:a="http://schemas.openxmlformats.org/drawingml/2006/main"/>
+          <a:p xmlns:a="http://schemas.openxmlformats.org/drawingml/2006/main">
+            <a:pPr algn="l">
+              <a:defRPr sz="2850" b="1" i="0">
+                <a:solidFill>
+                  <a:srgbClr val="000000"/>
+                </a:solidFill>
+              </a:defRPr>
+            </a:pPr>
+            <a:r>
+              <a:rPr sz="2850" b="1" i="0">
+                <a:solidFill>
+                  <a:srgbClr val="000000"/>
+                </a:solidFill>
+              </a:rPr>
+              <a:t>The equity curve shows the same participation problem we have been chasing</a:t>
+            </a:r>
+          </a:p>
+        </p:txBody>
+      </p:sp>
+      <p:sp>
+        <p:nvSpPr>
+          <p:cNvPr id="3" name="">
+            <a:extLst xmlns:a="http://schemas.openxmlformats.org/drawingml/2006/main">
+              <a:ext uri="{FF2B5EF4-FFF2-40B4-BE49-F238E27FC236}">
+                <a16:creationId xmlns:a16="http://schemas.microsoft.com/office/drawing/2014/main" id="{25761B01-669B-41B5-8EC0-D8DEC8317240}"/>
+              </a:ext>
+            </a:extLst>
+          </p:cNvPr>
+          <p:cNvSpPr>
+            <a:spLocks xmlns:a="http://schemas.openxmlformats.org/drawingml/2006/main" noGrp="1"/>
+          </p:cNvSpPr>
+          <p:nvPr/>
+        </p:nvSpPr>
+        <p:spPr>
+          <a:xfrm xmlns:a="http://schemas.openxmlformats.org/drawingml/2006/main">
+            <a:off x="685800" y="1657350"/>
+            <a:ext cx="10820400" cy="19050"/>
+          </a:xfrm>
+          <a:prstGeom xmlns:a="http://schemas.openxmlformats.org/drawingml/2006/main" prst="rect">
+            <a:avLst/>
+          </a:prstGeom>
+          <a:solidFill xmlns:a="http://schemas.openxmlformats.org/drawingml/2006/main">
+            <a:srgbClr val="B8BCC4"/>
+          </a:solidFill>
+          <a:ln xmlns:a="http://schemas.openxmlformats.org/drawingml/2006/main" w="0">
+            <a:noFill/>
+            <a:prstDash val="solid"/>
+          </a:ln>
+        </p:spPr>
+      </p:sp>
+      <p:pic>
+        <p:nvPicPr>
+          <p:cNvPr id="10" name=""/>
+          <p:cNvPicPr>
+            <a:picLocks xmlns:a="http://schemas.openxmlformats.org/drawingml/2006/main" noChangeAspect="1"/>
+          </p:cNvPicPr>
+          <p:nvPr/>
+        </p:nvPicPr>
+        <p:blipFill>
+          <a:blip xmlns:r="http://schemas.openxmlformats.org/officeDocument/2006/relationships" xmlns:a="http://schemas.openxmlformats.org/drawingml/2006/main" r:embed="Rdb4ccd48a1ef407b"/>
+          <a:stretch xmlns:a="http://schemas.openxmlformats.org/drawingml/2006/main"/>
+        </p:blipFill>
+        <p:spPr>
+          <a:xfrm xmlns:a="http://schemas.openxmlformats.org/drawingml/2006/main">
+            <a:off x="868680" y="2000250"/>
+            <a:ext cx="6835140" cy="3943350"/>
+          </a:xfrm>
+          <a:prstGeom xmlns:a="http://schemas.openxmlformats.org/drawingml/2006/main" prst="rect">
+            <a:avLst/>
+          </a:prstGeom>
+        </p:spPr>
+      </p:pic>
+      <p:sp>
+        <p:nvSpPr>
+          <p:cNvPr id="5" name="">
+            <a:extLst xmlns:a="http://schemas.openxmlformats.org/drawingml/2006/main">
+              <a:ext uri="{FF2B5EF4-FFF2-40B4-BE49-F238E27FC236}">
+                <a16:creationId xmlns:a16="http://schemas.microsoft.com/office/drawing/2014/main" id="{D31C325D-BE86-44D5-8410-932A9DB6227A}"/>
+              </a:ext>
+            </a:extLst>
+          </p:cNvPr>
+          <p:cNvSpPr>
+            <a:spLocks xmlns:a="http://schemas.openxmlformats.org/drawingml/2006/main" noGrp="1"/>
+          </p:cNvSpPr>
+          <p:nvPr/>
+        </p:nvSpPr>
+        <p:spPr>
+          <a:xfrm xmlns:a="http://schemas.openxmlformats.org/drawingml/2006/main">
+            <a:off x="8477250" y="2133600"/>
+            <a:ext cx="2476500" cy="304800"/>
+          </a:xfrm>
+          <a:prstGeom xmlns:a="http://schemas.openxmlformats.org/drawingml/2006/main" prst="rect">
+            <a:avLst/>
+          </a:prstGeom>
+          <a:noFill xmlns:a="http://schemas.openxmlformats.org/drawingml/2006/main"/>
+          <a:ln xmlns:a="http://schemas.openxmlformats.org/drawingml/2006/main" w="0">
+            <a:noFill/>
+            <a:prstDash val="solid"/>
+          </a:ln>
+        </p:spPr>
+        <p:txBody>
+          <a:bodyPr xmlns:a="http://schemas.openxmlformats.org/drawingml/2006/main"/>
+          <a:lstStyle xmlns:a="http://schemas.openxmlformats.org/drawingml/2006/main"/>
+          <a:p xmlns:a="http://schemas.openxmlformats.org/drawingml/2006/main">
+            <a:pPr algn="l">
+              <a:defRPr sz="1950" b="1" i="0">
+                <a:solidFill>
+                  <a:srgbClr val="222222"/>
+                </a:solidFill>
+              </a:defRPr>
+            </a:pPr>
+            <a:r>
+              <a:rPr sz="1950" b="1" i="0">
+                <a:solidFill>
+                  <a:srgbClr val="222222"/>
+                </a:solidFill>
+              </a:rPr>
+              <a:t>Interpretation</a:t>
+            </a:r>
+          </a:p>
+        </p:txBody>
+      </p:sp>
+      <p:sp>
+        <p:nvSpPr>
+          <p:cNvPr id="6" name="">
+            <a:extLst xmlns:a="http://schemas.openxmlformats.org/drawingml/2006/main">
+              <a:ext uri="{FF2B5EF4-FFF2-40B4-BE49-F238E27FC236}">
+                <a16:creationId xmlns:a16="http://schemas.microsoft.com/office/drawing/2014/main" id="{56E8C882-7CB3-42D9-80C2-5A28F72CFBC6}"/>
+              </a:ext>
+            </a:extLst>
+          </p:cNvPr>
+          <p:cNvSpPr>
+            <a:spLocks xmlns:a="http://schemas.openxmlformats.org/drawingml/2006/main" noGrp="1"/>
+          </p:cNvSpPr>
+          <p:nvPr/>
+        </p:nvSpPr>
+        <p:spPr>
+          <a:xfrm xmlns:a="http://schemas.openxmlformats.org/drawingml/2006/main">
+            <a:off x="8477250" y="2686050"/>
+            <a:ext cx="2571750" cy="2095500"/>
+          </a:xfrm>
+          <a:prstGeom xmlns:a="http://schemas.openxmlformats.org/drawingml/2006/main" prst="rect">
+            <a:avLst/>
+          </a:prstGeom>
+          <a:noFill xmlns:a="http://schemas.openxmlformats.org/drawingml/2006/main"/>
+          <a:ln xmlns:a="http://schemas.openxmlformats.org/drawingml/2006/main" w="0">
+            <a:noFill/>
+            <a:prstDash val="solid"/>
+          </a:ln>
+        </p:spPr>
+        <p:txBody>
+          <a:bodyPr xmlns:a="http://schemas.openxmlformats.org/drawingml/2006/main"/>
+          <a:lstStyle xmlns:a="http://schemas.openxmlformats.org/drawingml/2006/main"/>
+          <a:p xmlns:a="http://schemas.openxmlformats.org/drawingml/2006/main">
+            <a:pPr algn="l">
+              <a:defRPr sz="1650" b="0" i="0">
+                <a:solidFill>
+                  <a:srgbClr val="222222"/>
+                </a:solidFill>
+              </a:defRPr>
+            </a:pPr>
+            <a:r>
+              <a:rPr sz="1650" b="0" i="0">
+                <a:solidFill>
+                  <a:srgbClr val="222222"/>
+                </a:solidFill>
+              </a:rPr>
+              <a:t>In 2020, the model stayed too cautious while the basket compounded aggressively. In 2022, the model preserved capital relative to the falling basket, but it was still not cleanly risk-off.</a:t>
+            </a:r>
+          </a:p>
+        </p:txBody>
+      </p:sp>
+    </p:spTree>
+    <p:extLst>
+      <p:ext uri="{BB962C8B-B14F-4D97-AF65-F5344CB8AC3E}">
+        <p14:creationId xmlns:p14="http://schemas.microsoft.com/office/powerpoint/2010/main" val="1009614114"/>
+      </p:ext>
+    </p:extLst>
+  </p:cSld>
+</p:sld>
+</file>
+
+<file path=ppt/slides/slide14.xml><?xml version="1.0" encoding="utf-8"?>
+<p:sld xmlns:p="http://schemas.openxmlformats.org/presentationml/2006/main">
+  <p:cSld>
+    <p:bg>
+      <p:bgPr>
+        <a:solidFill xmlns:a="http://schemas.openxmlformats.org/drawingml/2006/main">
+          <a:srgbClr val="FFFFFF"/>
+        </a:solidFill>
+      </p:bgPr>
+    </p:bg>
+    <p:spTree>
+      <p:nvGrpSpPr>
+        <p:cNvPr id="1" name=""/>
+        <p:cNvGrpSpPr/>
+        <p:nvPr/>
+      </p:nvGrpSpPr>
+      <p:grpSpPr>
+        <a:xfrm xmlns:a="http://schemas.openxmlformats.org/drawingml/2006/main"/>
+      </p:grpSpPr>
+      <p:sp>
+        <p:nvSpPr>
+          <p:cNvPr id="1" name="">
+            <a:extLst xmlns:a="http://schemas.openxmlformats.org/drawingml/2006/main">
+              <a:ext uri="{FF2B5EF4-FFF2-40B4-BE49-F238E27FC236}">
+                <a16:creationId xmlns:a16="http://schemas.microsoft.com/office/drawing/2014/main" id="{6C634AD6-EF0A-4918-AEA4-BBF8C9881F9F}"/>
+              </a:ext>
+            </a:extLst>
+          </p:cNvPr>
+          <p:cNvSpPr>
+            <a:spLocks xmlns:a="http://schemas.openxmlformats.org/drawingml/2006/main" noGrp="1"/>
+          </p:cNvSpPr>
+          <p:nvPr/>
+        </p:nvSpPr>
+        <p:spPr>
+          <a:xfrm xmlns:a="http://schemas.openxmlformats.org/drawingml/2006/main">
+            <a:off x="685800" y="400050"/>
+            <a:ext cx="8572500" cy="247650"/>
+          </a:xfrm>
+          <a:prstGeom xmlns:a="http://schemas.openxmlformats.org/drawingml/2006/main" prst="rect">
+            <a:avLst/>
+          </a:prstGeom>
+          <a:noFill xmlns:a="http://schemas.openxmlformats.org/drawingml/2006/main"/>
+          <a:ln xmlns:a="http://schemas.openxmlformats.org/drawingml/2006/main" w="0">
+            <a:noFill/>
+            <a:prstDash val="solid"/>
+          </a:ln>
+        </p:spPr>
+        <p:txBody>
+          <a:bodyPr xmlns:a="http://schemas.openxmlformats.org/drawingml/2006/main"/>
+          <a:lstStyle xmlns:a="http://schemas.openxmlformats.org/drawingml/2006/main"/>
+          <a:p xmlns:a="http://schemas.openxmlformats.org/drawingml/2006/main">
+            <a:pPr algn="l">
+              <a:defRPr sz="975" b="1" i="0">
+                <a:solidFill>
+                  <a:srgbClr val="555555"/>
+                </a:solidFill>
+              </a:defRPr>
+            </a:pPr>
+            <a:r>
+              <a:rPr sz="975" b="1" i="0">
+                <a:solidFill>
+                  <a:srgbClr val="555555"/>
+                </a:solidFill>
+              </a:rPr>
+              <a:t>GEN5.4 ML DECISION ENGINE</a:t>
+            </a:r>
+          </a:p>
+        </p:txBody>
+      </p:sp>
+      <p:sp>
+        <p:nvSpPr>
+          <p:cNvPr id="2" name="">
+            <a:extLst xmlns:a="http://schemas.openxmlformats.org/drawingml/2006/main">
+              <a:ext uri="{FF2B5EF4-FFF2-40B4-BE49-F238E27FC236}">
+                <a16:creationId xmlns:a16="http://schemas.microsoft.com/office/drawing/2014/main" id="{4589C4A9-22E5-4BA8-8646-7ECB09F8273D}"/>
+              </a:ext>
+            </a:extLst>
+          </p:cNvPr>
+          <p:cNvSpPr>
+            <a:spLocks xmlns:a="http://schemas.openxmlformats.org/drawingml/2006/main" noGrp="1"/>
+          </p:cNvSpPr>
+          <p:nvPr/>
+        </p:nvSpPr>
+        <p:spPr>
+          <a:xfrm xmlns:a="http://schemas.openxmlformats.org/drawingml/2006/main">
+            <a:off x="685800" y="723900"/>
+            <a:ext cx="10287000" cy="876300"/>
+          </a:xfrm>
+          <a:prstGeom xmlns:a="http://schemas.openxmlformats.org/drawingml/2006/main" prst="rect">
+            <a:avLst/>
+          </a:prstGeom>
+          <a:noFill xmlns:a="http://schemas.openxmlformats.org/drawingml/2006/main"/>
+          <a:ln xmlns:a="http://schemas.openxmlformats.org/drawingml/2006/main" w="0">
+            <a:noFill/>
+            <a:prstDash val="solid"/>
+          </a:ln>
+        </p:spPr>
+        <p:txBody>
+          <a:bodyPr xmlns:a="http://schemas.openxmlformats.org/drawingml/2006/main"/>
+          <a:lstStyle xmlns:a="http://schemas.openxmlformats.org/drawingml/2006/main"/>
+          <a:p xmlns:a="http://schemas.openxmlformats.org/drawingml/2006/main">
+            <a:pPr algn="l">
+              <a:defRPr sz="2850" b="1" i="0">
+                <a:solidFill>
+                  <a:srgbClr val="000000"/>
+                </a:solidFill>
+              </a:defRPr>
+            </a:pPr>
+            <a:r>
+              <a:rPr sz="2850" b="1" i="0">
+                <a:solidFill>
+                  <a:srgbClr val="000000"/>
+                </a:solidFill>
+              </a:rPr>
+              <a:t>Probability trade tapes show what the policy actually did</a:t>
+            </a:r>
+          </a:p>
+        </p:txBody>
+      </p:sp>
+      <p:sp>
+        <p:nvSpPr>
+          <p:cNvPr id="3" name="">
+            <a:extLst xmlns:a="http://schemas.openxmlformats.org/drawingml/2006/main">
+              <a:ext uri="{FF2B5EF4-FFF2-40B4-BE49-F238E27FC236}">
+                <a16:creationId xmlns:a16="http://schemas.microsoft.com/office/drawing/2014/main" id="{05D8BBAD-784A-4C55-AD4C-530DA7210E76}"/>
+              </a:ext>
+            </a:extLst>
+          </p:cNvPr>
+          <p:cNvSpPr>
+            <a:spLocks xmlns:a="http://schemas.openxmlformats.org/drawingml/2006/main" noGrp="1"/>
+          </p:cNvSpPr>
+          <p:nvPr/>
+        </p:nvSpPr>
+        <p:spPr>
+          <a:xfrm xmlns:a="http://schemas.openxmlformats.org/drawingml/2006/main">
+            <a:off x="685800" y="1657350"/>
+            <a:ext cx="10820400" cy="19050"/>
+          </a:xfrm>
+          <a:prstGeom xmlns:a="http://schemas.openxmlformats.org/drawingml/2006/main" prst="rect">
+            <a:avLst/>
+          </a:prstGeom>
+          <a:solidFill xmlns:a="http://schemas.openxmlformats.org/drawingml/2006/main">
+            <a:srgbClr val="B8BCC4"/>
+          </a:solidFill>
+          <a:ln xmlns:a="http://schemas.openxmlformats.org/drawingml/2006/main" w="0">
+            <a:noFill/>
+            <a:prstDash val="solid"/>
+          </a:ln>
+        </p:spPr>
+      </p:sp>
+      <p:pic>
+        <p:nvPicPr>
+          <p:cNvPr id="10" name=""/>
+          <p:cNvPicPr>
+            <a:picLocks xmlns:a="http://schemas.openxmlformats.org/drawingml/2006/main" noChangeAspect="1"/>
+          </p:cNvPicPr>
+          <p:nvPr/>
+        </p:nvPicPr>
+        <p:blipFill>
+          <a:blip xmlns:r="http://schemas.openxmlformats.org/officeDocument/2006/relationships" xmlns:a="http://schemas.openxmlformats.org/drawingml/2006/main" r:embed="R3d44d20a57bd4082"/>
+          <a:stretch xmlns:a="http://schemas.openxmlformats.org/drawingml/2006/main"/>
+        </p:blipFill>
+        <p:spPr>
+          <a:xfrm xmlns:a="http://schemas.openxmlformats.org/drawingml/2006/main">
+            <a:off x="1038785" y="2000250"/>
+            <a:ext cx="6494929" cy="3943350"/>
+          </a:xfrm>
+          <a:prstGeom xmlns:a="http://schemas.openxmlformats.org/drawingml/2006/main" prst="rect">
+            <a:avLst/>
+          </a:prstGeom>
+        </p:spPr>
+      </p:pic>
+      <p:sp>
+        <p:nvSpPr>
+          <p:cNvPr id="5" name="">
+            <a:extLst xmlns:a="http://schemas.openxmlformats.org/drawingml/2006/main">
+              <a:ext uri="{FF2B5EF4-FFF2-40B4-BE49-F238E27FC236}">
+                <a16:creationId xmlns:a16="http://schemas.microsoft.com/office/drawing/2014/main" id="{73DA46D4-0353-4A50-9CB7-4EDB70E56449}"/>
+              </a:ext>
+            </a:extLst>
+          </p:cNvPr>
+          <p:cNvSpPr>
+            <a:spLocks xmlns:a="http://schemas.openxmlformats.org/drawingml/2006/main" noGrp="1"/>
+          </p:cNvSpPr>
+          <p:nvPr/>
+        </p:nvSpPr>
+        <p:spPr>
+          <a:xfrm xmlns:a="http://schemas.openxmlformats.org/drawingml/2006/main">
+            <a:off x="8477250" y="2133600"/>
+            <a:ext cx="2571750" cy="304800"/>
+          </a:xfrm>
+          <a:prstGeom xmlns:a="http://schemas.openxmlformats.org/drawingml/2006/main" prst="rect">
+            <a:avLst/>
+          </a:prstGeom>
+          <a:noFill xmlns:a="http://schemas.openxmlformats.org/drawingml/2006/main"/>
+          <a:ln xmlns:a="http://schemas.openxmlformats.org/drawingml/2006/main" w="0">
+            <a:noFill/>
+            <a:prstDash val="solid"/>
+          </a:ln>
+        </p:spPr>
+        <p:txBody>
+          <a:bodyPr xmlns:a="http://schemas.openxmlformats.org/drawingml/2006/main"/>
+          <a:lstStyle xmlns:a="http://schemas.openxmlformats.org/drawingml/2006/main"/>
+          <a:p xmlns:a="http://schemas.openxmlformats.org/drawingml/2006/main">
+            <a:pPr algn="l">
+              <a:defRPr sz="1950" b="1" i="0">
+                <a:solidFill>
+                  <a:srgbClr val="222222"/>
+                </a:solidFill>
+              </a:defRPr>
+            </a:pPr>
+            <a:r>
+              <a:rPr sz="1950" b="1" i="0">
+                <a:solidFill>
+                  <a:srgbClr val="222222"/>
+                </a:solidFill>
+              </a:rPr>
+              <a:t>What this reveals</a:t>
+            </a:r>
+          </a:p>
+        </p:txBody>
+      </p:sp>
+      <p:sp>
+        <p:nvSpPr>
+          <p:cNvPr id="6" name="">
+            <a:extLst xmlns:a="http://schemas.openxmlformats.org/drawingml/2006/main">
+              <a:ext uri="{FF2B5EF4-FFF2-40B4-BE49-F238E27FC236}">
+                <a16:creationId xmlns:a16="http://schemas.microsoft.com/office/drawing/2014/main" id="{885340DF-2D6C-47CE-8A1A-E075562DF56A}"/>
+              </a:ext>
+            </a:extLst>
+          </p:cNvPr>
+          <p:cNvSpPr>
+            <a:spLocks xmlns:a="http://schemas.openxmlformats.org/drawingml/2006/main" noGrp="1"/>
+          </p:cNvSpPr>
+          <p:nvPr/>
+        </p:nvSpPr>
+        <p:spPr>
+          <a:xfrm xmlns:a="http://schemas.openxmlformats.org/drawingml/2006/main">
+            <a:off x="8477250" y="2705100"/>
+            <a:ext cx="2571750" cy="2095500"/>
+          </a:xfrm>
+          <a:prstGeom xmlns:a="http://schemas.openxmlformats.org/drawingml/2006/main" prst="rect">
+            <a:avLst/>
+          </a:prstGeom>
+          <a:noFill xmlns:a="http://schemas.openxmlformats.org/drawingml/2006/main"/>
+          <a:ln xmlns:a="http://schemas.openxmlformats.org/drawingml/2006/main" w="0">
+            <a:noFill/>
+            <a:prstDash val="solid"/>
+          </a:ln>
+        </p:spPr>
+        <p:txBody>
+          <a:bodyPr xmlns:a="http://schemas.openxmlformats.org/drawingml/2006/main"/>
+          <a:lstStyle xmlns:a="http://schemas.openxmlformats.org/drawingml/2006/main"/>
+          <a:p xmlns:a="http://schemas.openxmlformats.org/drawingml/2006/main">
+            <a:pPr algn="l">
+              <a:defRPr sz="1650" b="0" i="0">
+                <a:solidFill>
+                  <a:srgbClr val="222222"/>
+                </a:solidFill>
+              </a:defRPr>
+            </a:pPr>
+            <a:r>
+              <a:rPr sz="1650" b="0" i="0">
+                <a:solidFill>
+                  <a:srgbClr val="222222"/>
+                </a:solidFill>
+              </a:rPr>
+              <a:t>The probability trace is now an inspectable decision surface. We can see whether missed upside comes from low predicted probabilities, high thresholds, or replay mechanics.</a:t>
+            </a:r>
+          </a:p>
+        </p:txBody>
+      </p:sp>
+    </p:spTree>
+    <p:extLst>
+      <p:ext uri="{BB962C8B-B14F-4D97-AF65-F5344CB8AC3E}">
+        <p14:creationId xmlns:p14="http://schemas.microsoft.com/office/powerpoint/2010/main" val="1178976824"/>
+      </p:ext>
+    </p:extLst>
+  </p:cSld>
+</p:sld>
+</file>
+
+<file path=ppt/slides/slide15.xml><?xml version="1.0" encoding="utf-8"?>
+<p:sld xmlns:p="http://schemas.openxmlformats.org/presentationml/2006/main">
+  <p:cSld>
+    <p:bg>
+      <p:bgPr>
+        <a:solidFill xmlns:a="http://schemas.openxmlformats.org/drawingml/2006/main">
+          <a:srgbClr val="FFFFFF"/>
+        </a:solidFill>
+      </p:bgPr>
+    </p:bg>
+    <p:spTree>
+      <p:nvGrpSpPr>
+        <p:cNvPr id="1" name=""/>
+        <p:cNvGrpSpPr/>
+        <p:nvPr/>
+      </p:nvGrpSpPr>
+      <p:grpSpPr>
+        <a:xfrm xmlns:a="http://schemas.openxmlformats.org/drawingml/2006/main"/>
+      </p:grpSpPr>
+      <p:sp>
+        <p:nvSpPr>
+          <p:cNvPr id="1" name="">
+            <a:extLst xmlns:a="http://schemas.openxmlformats.org/drawingml/2006/main">
+              <a:ext uri="{FF2B5EF4-FFF2-40B4-BE49-F238E27FC236}">
+                <a16:creationId xmlns:a16="http://schemas.microsoft.com/office/drawing/2014/main" id="{267BF6E0-143E-42B9-8D8A-A902B14E8C20}"/>
+              </a:ext>
+            </a:extLst>
+          </p:cNvPr>
+          <p:cNvSpPr>
+            <a:spLocks xmlns:a="http://schemas.openxmlformats.org/drawingml/2006/main" noGrp="1"/>
+          </p:cNvSpPr>
+          <p:nvPr/>
+        </p:nvSpPr>
+        <p:spPr>
+          <a:xfrm xmlns:a="http://schemas.openxmlformats.org/drawingml/2006/main">
+            <a:off x="685800" y="400050"/>
+            <a:ext cx="8572500" cy="247650"/>
+          </a:xfrm>
+          <a:prstGeom xmlns:a="http://schemas.openxmlformats.org/drawingml/2006/main" prst="rect">
+            <a:avLst/>
+          </a:prstGeom>
+          <a:noFill xmlns:a="http://schemas.openxmlformats.org/drawingml/2006/main"/>
+          <a:ln xmlns:a="http://schemas.openxmlformats.org/drawingml/2006/main" w="0">
+            <a:noFill/>
+            <a:prstDash val="solid"/>
+          </a:ln>
+        </p:spPr>
+        <p:txBody>
+          <a:bodyPr xmlns:a="http://schemas.openxmlformats.org/drawingml/2006/main"/>
+          <a:lstStyle xmlns:a="http://schemas.openxmlformats.org/drawingml/2006/main"/>
+          <a:p xmlns:a="http://schemas.openxmlformats.org/drawingml/2006/main">
+            <a:pPr algn="l">
+              <a:defRPr sz="975" b="1" i="0">
+                <a:solidFill>
+                  <a:srgbClr val="555555"/>
+                </a:solidFill>
+              </a:defRPr>
+            </a:pPr>
+            <a:r>
+              <a:rPr sz="975" b="1" i="0">
+                <a:solidFill>
+                  <a:srgbClr val="555555"/>
+                </a:solidFill>
+              </a:rPr>
+              <a:t>GEN5.4 ML DECISION ENGINE</a:t>
+            </a:r>
+          </a:p>
+        </p:txBody>
+      </p:sp>
+      <p:sp>
+        <p:nvSpPr>
+          <p:cNvPr id="2" name="">
+            <a:extLst xmlns:a="http://schemas.openxmlformats.org/drawingml/2006/main">
+              <a:ext uri="{FF2B5EF4-FFF2-40B4-BE49-F238E27FC236}">
+                <a16:creationId xmlns:a16="http://schemas.microsoft.com/office/drawing/2014/main" id="{27DF5611-408C-4B57-AF5B-15B7B5F2B405}"/>
+              </a:ext>
+            </a:extLst>
+          </p:cNvPr>
+          <p:cNvSpPr>
+            <a:spLocks xmlns:a="http://schemas.openxmlformats.org/drawingml/2006/main" noGrp="1"/>
+          </p:cNvSpPr>
+          <p:nvPr/>
+        </p:nvSpPr>
+        <p:spPr>
+          <a:xfrm xmlns:a="http://schemas.openxmlformats.org/drawingml/2006/main">
+            <a:off x="685800" y="723900"/>
+            <a:ext cx="10287000" cy="876300"/>
+          </a:xfrm>
+          <a:prstGeom xmlns:a="http://schemas.openxmlformats.org/drawingml/2006/main" prst="rect">
+            <a:avLst/>
+          </a:prstGeom>
+          <a:noFill xmlns:a="http://schemas.openxmlformats.org/drawingml/2006/main"/>
+          <a:ln xmlns:a="http://schemas.openxmlformats.org/drawingml/2006/main" w="0">
+            <a:noFill/>
+            <a:prstDash val="solid"/>
+          </a:ln>
+        </p:spPr>
+        <p:txBody>
+          <a:bodyPr xmlns:a="http://schemas.openxmlformats.org/drawingml/2006/main"/>
+          <a:lstStyle xmlns:a="http://schemas.openxmlformats.org/drawingml/2006/main"/>
+          <a:p xmlns:a="http://schemas.openxmlformats.org/drawingml/2006/main">
+            <a:pPr algn="l">
+              <a:defRPr sz="2850" b="1" i="0">
+                <a:solidFill>
+                  <a:srgbClr val="000000"/>
+                </a:solidFill>
+              </a:defRPr>
+            </a:pPr>
+            <a:r>
+              <a:rPr sz="2850" b="1" i="0">
+                <a:solidFill>
+                  <a:srgbClr val="000000"/>
+                </a:solidFill>
+              </a:rPr>
+              <a:t>The diagnostics point to threshold and calibration questions</a:t>
+            </a:r>
+          </a:p>
+        </p:txBody>
+      </p:sp>
+      <p:sp>
+        <p:nvSpPr>
+          <p:cNvPr id="3" name="">
+            <a:extLst xmlns:a="http://schemas.openxmlformats.org/drawingml/2006/main">
+              <a:ext uri="{FF2B5EF4-FFF2-40B4-BE49-F238E27FC236}">
+                <a16:creationId xmlns:a16="http://schemas.microsoft.com/office/drawing/2014/main" id="{467C111F-3567-4A5A-829D-0E25ACC75EDA}"/>
+              </a:ext>
+            </a:extLst>
+          </p:cNvPr>
+          <p:cNvSpPr>
+            <a:spLocks xmlns:a="http://schemas.openxmlformats.org/drawingml/2006/main" noGrp="1"/>
+          </p:cNvSpPr>
+          <p:nvPr/>
+        </p:nvSpPr>
+        <p:spPr>
+          <a:xfrm xmlns:a="http://schemas.openxmlformats.org/drawingml/2006/main">
+            <a:off x="685800" y="1657350"/>
+            <a:ext cx="10820400" cy="19050"/>
+          </a:xfrm>
+          <a:prstGeom xmlns:a="http://schemas.openxmlformats.org/drawingml/2006/main" prst="rect">
+            <a:avLst/>
+          </a:prstGeom>
+          <a:solidFill xmlns:a="http://schemas.openxmlformats.org/drawingml/2006/main">
+            <a:srgbClr val="B8BCC4"/>
+          </a:solidFill>
+          <a:ln xmlns:a="http://schemas.openxmlformats.org/drawingml/2006/main" w="0">
+            <a:noFill/>
+            <a:prstDash val="solid"/>
+          </a:ln>
+        </p:spPr>
+      </p:sp>
+      <p:pic>
+        <p:nvPicPr>
+          <p:cNvPr id="10" name=""/>
+          <p:cNvPicPr>
+            <a:picLocks xmlns:a="http://schemas.openxmlformats.org/drawingml/2006/main" noChangeAspect="1"/>
+          </p:cNvPicPr>
+          <p:nvPr/>
+        </p:nvPicPr>
+        <p:blipFill>
+          <a:blip xmlns:r="http://schemas.openxmlformats.org/officeDocument/2006/relationships" xmlns:a="http://schemas.openxmlformats.org/drawingml/2006/main" r:embed="R3bb354eaefd94b65"/>
+          <a:stretch xmlns:a="http://schemas.openxmlformats.org/drawingml/2006/main"/>
+        </p:blipFill>
+        <p:spPr>
+          <a:xfrm xmlns:a="http://schemas.openxmlformats.org/drawingml/2006/main">
+            <a:off x="704850" y="2415381"/>
+            <a:ext cx="4762500" cy="2579688"/>
+          </a:xfrm>
+          <a:prstGeom xmlns:a="http://schemas.openxmlformats.org/drawingml/2006/main" prst="rect">
+            <a:avLst/>
+          </a:prstGeom>
+        </p:spPr>
+      </p:pic>
+      <p:pic>
+        <p:nvPicPr>
+          <p:cNvPr id="11" name=""/>
+          <p:cNvPicPr>
+            <a:picLocks xmlns:a="http://schemas.openxmlformats.org/drawingml/2006/main" noChangeAspect="1"/>
+          </p:cNvPicPr>
+          <p:nvPr/>
+        </p:nvPicPr>
+        <p:blipFill>
+          <a:blip xmlns:r="http://schemas.openxmlformats.org/officeDocument/2006/relationships" xmlns:a="http://schemas.openxmlformats.org/drawingml/2006/main" r:embed="R7c7901c779094e86"/>
+          <a:stretch xmlns:a="http://schemas.openxmlformats.org/drawingml/2006/main"/>
+        </p:blipFill>
+        <p:spPr>
+          <a:xfrm xmlns:a="http://schemas.openxmlformats.org/drawingml/2006/main">
+            <a:off x="5962650" y="2415381"/>
+            <a:ext cx="4762500" cy="2579688"/>
+          </a:xfrm>
+          <a:prstGeom xmlns:a="http://schemas.openxmlformats.org/drawingml/2006/main" prst="rect">
+            <a:avLst/>
+          </a:prstGeom>
+        </p:spPr>
+      </p:pic>
+      <p:sp>
+        <p:nvSpPr>
+          <p:cNvPr id="6" name="">
+            <a:extLst xmlns:a="http://schemas.openxmlformats.org/drawingml/2006/main">
+              <a:ext uri="{FF2B5EF4-FFF2-40B4-BE49-F238E27FC236}">
+                <a16:creationId xmlns:a16="http://schemas.microsoft.com/office/drawing/2014/main" id="{32515E30-2D23-42CE-A7B4-559F846E6F2D}"/>
+              </a:ext>
+            </a:extLst>
+          </p:cNvPr>
+          <p:cNvSpPr>
+            <a:spLocks xmlns:a="http://schemas.openxmlformats.org/drawingml/2006/main" noGrp="1"/>
+          </p:cNvSpPr>
+          <p:nvPr/>
+        </p:nvSpPr>
+        <p:spPr>
+          <a:xfrm xmlns:a="http://schemas.openxmlformats.org/drawingml/2006/main">
+            <a:off x="1104900" y="5753100"/>
+            <a:ext cx="9334500" cy="400050"/>
+          </a:xfrm>
+          <a:prstGeom xmlns:a="http://schemas.openxmlformats.org/drawingml/2006/main" prst="rect">
+            <a:avLst/>
+          </a:prstGeom>
+          <a:noFill xmlns:a="http://schemas.openxmlformats.org/drawingml/2006/main"/>
+          <a:ln xmlns:a="http://schemas.openxmlformats.org/drawingml/2006/main" w="0">
+            <a:noFill/>
+            <a:prstDash val="solid"/>
+          </a:ln>
+        </p:spPr>
+        <p:txBody>
+          <a:bodyPr xmlns:a="http://schemas.openxmlformats.org/drawingml/2006/main"/>
+          <a:lstStyle xmlns:a="http://schemas.openxmlformats.org/drawingml/2006/main"/>
+          <a:p xmlns:a="http://schemas.openxmlformats.org/drawingml/2006/main">
+            <a:pPr algn="ctr">
+              <a:defRPr sz="1500" b="0" i="0">
+                <a:solidFill>
+                  <a:srgbClr val="555555"/>
+                </a:solidFill>
+              </a:defRPr>
+            </a:pPr>
+            <a:r>
+              <a:rPr sz="1500" b="0" i="0">
+                <a:solidFill>
+                  <a:srgbClr val="555555"/>
+                </a:solidFill>
+              </a:rPr>
+              <a:t>Fixed thresholds are intentionally crude. The next improvement should be TRAIN-only threshold selection and probability calibration, not a rush to a more complex model.</a:t>
+            </a:r>
+          </a:p>
+        </p:txBody>
+      </p:sp>
+    </p:spTree>
+    <p:extLst>
+      <p:ext uri="{BB962C8B-B14F-4D97-AF65-F5344CB8AC3E}">
+        <p14:creationId xmlns:p14="http://schemas.microsoft.com/office/powerpoint/2010/main" val="1806072866"/>
+      </p:ext>
+    </p:extLst>
+  </p:cSld>
+</p:sld>
+</file>
+
+<file path=ppt/slides/slide16.xml><?xml version="1.0" encoding="utf-8"?>
+<p:sld xmlns:p="http://schemas.openxmlformats.org/presentationml/2006/main">
+  <p:cSld>
+    <p:bg>
+      <p:bgPr>
+        <a:solidFill xmlns:a="http://schemas.openxmlformats.org/drawingml/2006/main">
+          <a:srgbClr val="FFFFFF"/>
+        </a:solidFill>
+      </p:bgPr>
+    </p:bg>
+    <p:spTree>
+      <p:nvGrpSpPr>
+        <p:cNvPr id="1" name=""/>
+        <p:cNvGrpSpPr/>
+        <p:nvPr/>
+      </p:nvGrpSpPr>
+      <p:grpSpPr>
+        <a:xfrm xmlns:a="http://schemas.openxmlformats.org/drawingml/2006/main"/>
+      </p:grpSpPr>
+      <p:sp>
+        <p:nvSpPr>
+          <p:cNvPr id="1" name="">
+            <a:extLst xmlns:a="http://schemas.openxmlformats.org/drawingml/2006/main">
+              <a:ext uri="{FF2B5EF4-FFF2-40B4-BE49-F238E27FC236}">
+                <a16:creationId xmlns:a16="http://schemas.microsoft.com/office/drawing/2014/main" id="{642CA9DE-E36F-4458-B86D-7DBD6C3E34C9}"/>
+              </a:ext>
+            </a:extLst>
+          </p:cNvPr>
+          <p:cNvSpPr>
+            <a:spLocks xmlns:a="http://schemas.openxmlformats.org/drawingml/2006/main" noGrp="1"/>
+          </p:cNvSpPr>
+          <p:nvPr/>
+        </p:nvSpPr>
+        <p:spPr>
+          <a:xfrm xmlns:a="http://schemas.openxmlformats.org/drawingml/2006/main">
+            <a:off x="685800" y="400050"/>
+            <a:ext cx="8572500" cy="247650"/>
+          </a:xfrm>
+          <a:prstGeom xmlns:a="http://schemas.openxmlformats.org/drawingml/2006/main" prst="rect">
+            <a:avLst/>
+          </a:prstGeom>
+          <a:noFill xmlns:a="http://schemas.openxmlformats.org/drawingml/2006/main"/>
+          <a:ln xmlns:a="http://schemas.openxmlformats.org/drawingml/2006/main" w="0">
+            <a:noFill/>
+            <a:prstDash val="solid"/>
+          </a:ln>
+        </p:spPr>
+        <p:txBody>
+          <a:bodyPr xmlns:a="http://schemas.openxmlformats.org/drawingml/2006/main"/>
+          <a:lstStyle xmlns:a="http://schemas.openxmlformats.org/drawingml/2006/main"/>
+          <a:p xmlns:a="http://schemas.openxmlformats.org/drawingml/2006/main">
+            <a:pPr algn="l">
+              <a:defRPr sz="975" b="1" i="0">
+                <a:solidFill>
+                  <a:srgbClr val="555555"/>
+                </a:solidFill>
+              </a:defRPr>
+            </a:pPr>
+            <a:r>
+              <a:rPr sz="975" b="1" i="0">
+                <a:solidFill>
+                  <a:srgbClr val="555555"/>
+                </a:solidFill>
+              </a:rPr>
+              <a:t>GEN5.4 ML DECISION ENGINE</a:t>
+            </a:r>
+          </a:p>
+        </p:txBody>
+      </p:sp>
+      <p:sp>
+        <p:nvSpPr>
+          <p:cNvPr id="2" name="">
+            <a:extLst xmlns:a="http://schemas.openxmlformats.org/drawingml/2006/main">
+              <a:ext uri="{FF2B5EF4-FFF2-40B4-BE49-F238E27FC236}">
+                <a16:creationId xmlns:a16="http://schemas.microsoft.com/office/drawing/2014/main" id="{FAB409D2-306A-4801-BA1E-2B9398E43528}"/>
+              </a:ext>
+            </a:extLst>
+          </p:cNvPr>
+          <p:cNvSpPr>
+            <a:spLocks xmlns:a="http://schemas.openxmlformats.org/drawingml/2006/main" noGrp="1"/>
+          </p:cNvSpPr>
+          <p:nvPr/>
+        </p:nvSpPr>
+        <p:spPr>
+          <a:xfrm xmlns:a="http://schemas.openxmlformats.org/drawingml/2006/main">
+            <a:off x="685800" y="723900"/>
+            <a:ext cx="10287000" cy="876300"/>
+          </a:xfrm>
+          <a:prstGeom xmlns:a="http://schemas.openxmlformats.org/drawingml/2006/main" prst="rect">
+            <a:avLst/>
+          </a:prstGeom>
+          <a:noFill xmlns:a="http://schemas.openxmlformats.org/drawingml/2006/main"/>
+          <a:ln xmlns:a="http://schemas.openxmlformats.org/drawingml/2006/main" w="0">
+            <a:noFill/>
+            <a:prstDash val="solid"/>
+          </a:ln>
+        </p:spPr>
+        <p:txBody>
+          <a:bodyPr xmlns:a="http://schemas.openxmlformats.org/drawingml/2006/main"/>
+          <a:lstStyle xmlns:a="http://schemas.openxmlformats.org/drawingml/2006/main"/>
+          <a:p xmlns:a="http://schemas.openxmlformats.org/drawingml/2006/main">
+            <a:pPr algn="l">
+              <a:defRPr sz="2850" b="1" i="0">
+                <a:solidFill>
+                  <a:srgbClr val="000000"/>
+                </a:solidFill>
+              </a:defRPr>
+            </a:pPr>
+            <a:r>
+              <a:rPr sz="2850" b="1" i="0">
+                <a:solidFill>
+                  <a:srgbClr val="000000"/>
+                </a:solidFill>
+              </a:rPr>
+              <a:t>The coefficient audit keeps the simple model explainable</a:t>
+            </a:r>
+          </a:p>
+        </p:txBody>
+      </p:sp>
+      <p:sp>
+        <p:nvSpPr>
+          <p:cNvPr id="3" name="">
+            <a:extLst xmlns:a="http://schemas.openxmlformats.org/drawingml/2006/main">
+              <a:ext uri="{FF2B5EF4-FFF2-40B4-BE49-F238E27FC236}">
+                <a16:creationId xmlns:a16="http://schemas.microsoft.com/office/drawing/2014/main" id="{5AEF41AD-3F7C-44BF-BA72-34B85539F54E}"/>
+              </a:ext>
+            </a:extLst>
+          </p:cNvPr>
+          <p:cNvSpPr>
+            <a:spLocks xmlns:a="http://schemas.openxmlformats.org/drawingml/2006/main" noGrp="1"/>
+          </p:cNvSpPr>
+          <p:nvPr/>
+        </p:nvSpPr>
+        <p:spPr>
+          <a:xfrm xmlns:a="http://schemas.openxmlformats.org/drawingml/2006/main">
+            <a:off x="685800" y="1657350"/>
+            <a:ext cx="10820400" cy="19050"/>
+          </a:xfrm>
+          <a:prstGeom xmlns:a="http://schemas.openxmlformats.org/drawingml/2006/main" prst="rect">
+            <a:avLst/>
+          </a:prstGeom>
+          <a:solidFill xmlns:a="http://schemas.openxmlformats.org/drawingml/2006/main">
+            <a:srgbClr val="B8BCC4"/>
+          </a:solidFill>
+          <a:ln xmlns:a="http://schemas.openxmlformats.org/drawingml/2006/main" w="0">
+            <a:noFill/>
+            <a:prstDash val="solid"/>
+          </a:ln>
+        </p:spPr>
+      </p:sp>
+      <p:pic>
+        <p:nvPicPr>
+          <p:cNvPr id="10" name=""/>
+          <p:cNvPicPr>
+            <a:picLocks xmlns:a="http://schemas.openxmlformats.org/drawingml/2006/main" noChangeAspect="1"/>
+          </p:cNvPicPr>
+          <p:nvPr/>
+        </p:nvPicPr>
+        <p:blipFill>
+          <a:blip xmlns:r="http://schemas.openxmlformats.org/officeDocument/2006/relationships" xmlns:a="http://schemas.openxmlformats.org/drawingml/2006/main" r:embed="R56ce0e7682184027"/>
+          <a:stretch xmlns:a="http://schemas.openxmlformats.org/drawingml/2006/main"/>
+        </p:blipFill>
+        <p:spPr>
+          <a:xfrm xmlns:a="http://schemas.openxmlformats.org/drawingml/2006/main">
+            <a:off x="1371600" y="2038350"/>
+            <a:ext cx="5448300" cy="3714750"/>
+          </a:xfrm>
+          <a:prstGeom xmlns:a="http://schemas.openxmlformats.org/drawingml/2006/main" prst="rect">
+            <a:avLst/>
+          </a:prstGeom>
+        </p:spPr>
+      </p:pic>
+      <p:sp>
+        <p:nvSpPr>
+          <p:cNvPr id="5" name="">
+            <a:extLst xmlns:a="http://schemas.openxmlformats.org/drawingml/2006/main">
+              <a:ext uri="{FF2B5EF4-FFF2-40B4-BE49-F238E27FC236}">
+                <a16:creationId xmlns:a16="http://schemas.microsoft.com/office/drawing/2014/main" id="{16F48DE2-BBCC-4DA0-99D7-98119485A152}"/>
+              </a:ext>
+            </a:extLst>
+          </p:cNvPr>
+          <p:cNvSpPr>
+            <a:spLocks xmlns:a="http://schemas.openxmlformats.org/drawingml/2006/main" noGrp="1"/>
+          </p:cNvSpPr>
+          <p:nvPr/>
+        </p:nvSpPr>
+        <p:spPr>
+          <a:xfrm xmlns:a="http://schemas.openxmlformats.org/drawingml/2006/main">
+            <a:off x="8096250" y="2133600"/>
+            <a:ext cx="2857500" cy="323850"/>
+          </a:xfrm>
+          <a:prstGeom xmlns:a="http://schemas.openxmlformats.org/drawingml/2006/main" prst="rect">
+            <a:avLst/>
+          </a:prstGeom>
+          <a:noFill xmlns:a="http://schemas.openxmlformats.org/drawingml/2006/main"/>
+          <a:ln xmlns:a="http://schemas.openxmlformats.org/drawingml/2006/main" w="0">
+            <a:noFill/>
+            <a:prstDash val="solid"/>
+          </a:ln>
+        </p:spPr>
+        <p:txBody>
+          <a:bodyPr xmlns:a="http://schemas.openxmlformats.org/drawingml/2006/main"/>
+          <a:lstStyle xmlns:a="http://schemas.openxmlformats.org/drawingml/2006/main"/>
+          <a:p xmlns:a="http://schemas.openxmlformats.org/drawingml/2006/main">
+            <a:pPr algn="l">
+              <a:defRPr sz="1950" b="1" i="0">
+                <a:solidFill>
+                  <a:srgbClr val="222222"/>
+                </a:solidFill>
+              </a:defRPr>
+            </a:pPr>
+            <a:r>
+              <a:rPr sz="1950" b="1" i="0">
+                <a:solidFill>
+                  <a:srgbClr val="222222"/>
+                </a:solidFill>
+              </a:rPr>
+              <a:t>Why GLM still earns its keep</a:t>
+            </a:r>
+          </a:p>
+        </p:txBody>
+      </p:sp>
+      <p:sp>
+        <p:nvSpPr>
+          <p:cNvPr id="6" name="">
+            <a:extLst xmlns:a="http://schemas.openxmlformats.org/drawingml/2006/main">
+              <a:ext uri="{FF2B5EF4-FFF2-40B4-BE49-F238E27FC236}">
+                <a16:creationId xmlns:a16="http://schemas.microsoft.com/office/drawing/2014/main" id="{33D6C3B4-8EB8-4551-840A-454ECA07CC94}"/>
+              </a:ext>
+            </a:extLst>
+          </p:cNvPr>
+          <p:cNvSpPr>
+            <a:spLocks xmlns:a="http://schemas.openxmlformats.org/drawingml/2006/main" noGrp="1"/>
+          </p:cNvSpPr>
+          <p:nvPr/>
+        </p:nvSpPr>
+        <p:spPr>
+          <a:xfrm xmlns:a="http://schemas.openxmlformats.org/drawingml/2006/main">
+            <a:off x="8096250" y="2743200"/>
+            <a:ext cx="2724150" cy="2000250"/>
+          </a:xfrm>
+          <a:prstGeom xmlns:a="http://schemas.openxmlformats.org/drawingml/2006/main" prst="rect">
+            <a:avLst/>
+          </a:prstGeom>
+          <a:noFill xmlns:a="http://schemas.openxmlformats.org/drawingml/2006/main"/>
+          <a:ln xmlns:a="http://schemas.openxmlformats.org/drawingml/2006/main" w="0">
+            <a:noFill/>
+            <a:prstDash val="solid"/>
+          </a:ln>
+        </p:spPr>
+        <p:txBody>
+          <a:bodyPr xmlns:a="http://schemas.openxmlformats.org/drawingml/2006/main"/>
+          <a:lstStyle xmlns:a="http://schemas.openxmlformats.org/drawingml/2006/main"/>
+          <a:p xmlns:a="http://schemas.openxmlformats.org/drawingml/2006/main">
+            <a:pPr algn="l">
+              <a:defRPr sz="1650" b="0" i="0">
+                <a:solidFill>
+                  <a:srgbClr val="222222"/>
+                </a:solidFill>
+              </a:defRPr>
+            </a:pPr>
+            <a:r>
+              <a:rPr sz="1650" b="0" i="0">
+                <a:solidFill>
+                  <a:srgbClr val="222222"/>
+                </a:solidFill>
+              </a:rPr>
+              <a:t>Even when performance is underwhelming, coefficients expose what the model is leaning on. That makes GLM a useful diagnostic bridge before XGBoost.</a:t>
+            </a:r>
+          </a:p>
+        </p:txBody>
+      </p:sp>
+    </p:spTree>
+    <p:extLst>
+      <p:ext uri="{BB962C8B-B14F-4D97-AF65-F5344CB8AC3E}">
+        <p14:creationId xmlns:p14="http://schemas.microsoft.com/office/powerpoint/2010/main" val="1372516781"/>
+      </p:ext>
+    </p:extLst>
+  </p:cSld>
+</p:sld>
+</file>
+
+<file path=ppt/slides/slide17.xml><?xml version="1.0" encoding="utf-8"?>
+<p:sld xmlns:p="http://schemas.openxmlformats.org/presentationml/2006/main">
+  <p:cSld>
+    <p:bg>
+      <p:bgPr>
+        <a:solidFill xmlns:a="http://schemas.openxmlformats.org/drawingml/2006/main">
+          <a:srgbClr val="FFFFFF"/>
+        </a:solidFill>
+      </p:bgPr>
+    </p:bg>
+    <p:spTree>
+      <p:nvGrpSpPr>
+        <p:cNvPr id="1" name=""/>
+        <p:cNvGrpSpPr/>
+        <p:nvPr/>
+      </p:nvGrpSpPr>
+      <p:grpSpPr>
+        <a:xfrm xmlns:a="http://schemas.openxmlformats.org/drawingml/2006/main"/>
+      </p:grpSpPr>
+      <p:sp>
+        <p:nvSpPr>
+          <p:cNvPr id="1" name="">
+            <a:extLst xmlns:a="http://schemas.openxmlformats.org/drawingml/2006/main">
+              <a:ext uri="{FF2B5EF4-FFF2-40B4-BE49-F238E27FC236}">
+                <a16:creationId xmlns:a16="http://schemas.microsoft.com/office/drawing/2014/main" id="{B70F0E02-B4B5-495B-9E85-6D703003DEED}"/>
+              </a:ext>
+            </a:extLst>
+          </p:cNvPr>
+          <p:cNvSpPr>
+            <a:spLocks xmlns:a="http://schemas.openxmlformats.org/drawingml/2006/main" noGrp="1"/>
+          </p:cNvSpPr>
+          <p:nvPr/>
+        </p:nvSpPr>
+        <p:spPr>
+          <a:xfrm xmlns:a="http://schemas.openxmlformats.org/drawingml/2006/main">
+            <a:off x="685800" y="400050"/>
+            <a:ext cx="8572500" cy="247650"/>
+          </a:xfrm>
+          <a:prstGeom xmlns:a="http://schemas.openxmlformats.org/drawingml/2006/main" prst="rect">
+            <a:avLst/>
+          </a:prstGeom>
+          <a:noFill xmlns:a="http://schemas.openxmlformats.org/drawingml/2006/main"/>
+          <a:ln xmlns:a="http://schemas.openxmlformats.org/drawingml/2006/main" w="0">
+            <a:noFill/>
+            <a:prstDash val="solid"/>
+          </a:ln>
+        </p:spPr>
+        <p:txBody>
+          <a:bodyPr xmlns:a="http://schemas.openxmlformats.org/drawingml/2006/main"/>
+          <a:lstStyle xmlns:a="http://schemas.openxmlformats.org/drawingml/2006/main"/>
+          <a:p xmlns:a="http://schemas.openxmlformats.org/drawingml/2006/main">
+            <a:pPr algn="l">
+              <a:defRPr sz="975" b="1" i="0">
+                <a:solidFill>
+                  <a:srgbClr val="555555"/>
+                </a:solidFill>
+              </a:defRPr>
+            </a:pPr>
+            <a:r>
+              <a:rPr sz="975" b="1" i="0">
+                <a:solidFill>
+                  <a:srgbClr val="555555"/>
+                </a:solidFill>
+              </a:rPr>
+              <a:t>GEN5.4 ML DECISION ENGINE</a:t>
+            </a:r>
+          </a:p>
+        </p:txBody>
+      </p:sp>
+      <p:sp>
+        <p:nvSpPr>
+          <p:cNvPr id="2" name="">
+            <a:extLst xmlns:a="http://schemas.openxmlformats.org/drawingml/2006/main">
+              <a:ext uri="{FF2B5EF4-FFF2-40B4-BE49-F238E27FC236}">
+                <a16:creationId xmlns:a16="http://schemas.microsoft.com/office/drawing/2014/main" id="{CF831CC8-E204-4CDB-B3A3-A5BD45E5E571}"/>
+              </a:ext>
+            </a:extLst>
+          </p:cNvPr>
+          <p:cNvSpPr>
+            <a:spLocks xmlns:a="http://schemas.openxmlformats.org/drawingml/2006/main" noGrp="1"/>
+          </p:cNvSpPr>
+          <p:nvPr/>
+        </p:nvSpPr>
+        <p:spPr>
+          <a:xfrm xmlns:a="http://schemas.openxmlformats.org/drawingml/2006/main">
+            <a:off x="685800" y="723900"/>
+            <a:ext cx="10287000" cy="876300"/>
+          </a:xfrm>
+          <a:prstGeom xmlns:a="http://schemas.openxmlformats.org/drawingml/2006/main" prst="rect">
+            <a:avLst/>
+          </a:prstGeom>
+          <a:noFill xmlns:a="http://schemas.openxmlformats.org/drawingml/2006/main"/>
+          <a:ln xmlns:a="http://schemas.openxmlformats.org/drawingml/2006/main" w="0">
+            <a:noFill/>
+            <a:prstDash val="solid"/>
+          </a:ln>
+        </p:spPr>
+        <p:txBody>
+          <a:bodyPr xmlns:a="http://schemas.openxmlformats.org/drawingml/2006/main"/>
+          <a:lstStyle xmlns:a="http://schemas.openxmlformats.org/drawingml/2006/main"/>
+          <a:p xmlns:a="http://schemas.openxmlformats.org/drawingml/2006/main">
+            <a:pPr algn="l">
+              <a:defRPr sz="2850" b="1" i="0">
+                <a:solidFill>
+                  <a:srgbClr val="000000"/>
+                </a:solidFill>
+              </a:defRPr>
+            </a:pPr>
+            <a:r>
+              <a:rPr sz="2850" b="1" i="0">
+                <a:solidFill>
+                  <a:srgbClr val="000000"/>
+                </a:solidFill>
+              </a:rPr>
+              <a:t>The next slice should improve the decision policy before model complexity</a:t>
+            </a:r>
+          </a:p>
+        </p:txBody>
+      </p:sp>
+      <p:sp>
+        <p:nvSpPr>
+          <p:cNvPr id="3" name="">
+            <a:extLst xmlns:a="http://schemas.openxmlformats.org/drawingml/2006/main">
+              <a:ext uri="{FF2B5EF4-FFF2-40B4-BE49-F238E27FC236}">
+                <a16:creationId xmlns:a16="http://schemas.microsoft.com/office/drawing/2014/main" id="{69B448A7-543C-46F8-BF47-33BDCEE7D56E}"/>
+              </a:ext>
+            </a:extLst>
+          </p:cNvPr>
+          <p:cNvSpPr>
+            <a:spLocks xmlns:a="http://schemas.openxmlformats.org/drawingml/2006/main" noGrp="1"/>
+          </p:cNvSpPr>
+          <p:nvPr/>
+        </p:nvSpPr>
+        <p:spPr>
+          <a:xfrm xmlns:a="http://schemas.openxmlformats.org/drawingml/2006/main">
+            <a:off x="685800" y="1657350"/>
+            <a:ext cx="10820400" cy="19050"/>
+          </a:xfrm>
+          <a:prstGeom xmlns:a="http://schemas.openxmlformats.org/drawingml/2006/main" prst="rect">
+            <a:avLst/>
+          </a:prstGeom>
+          <a:solidFill xmlns:a="http://schemas.openxmlformats.org/drawingml/2006/main">
+            <a:srgbClr val="B8BCC4"/>
+          </a:solidFill>
+          <a:ln xmlns:a="http://schemas.openxmlformats.org/drawingml/2006/main" w="0">
+            <a:noFill/>
+            <a:prstDash val="solid"/>
+          </a:ln>
+        </p:spPr>
+      </p:sp>
+      <p:sp>
+        <p:nvSpPr>
+          <p:cNvPr id="4" name="">
+            <a:extLst xmlns:a="http://schemas.openxmlformats.org/drawingml/2006/main">
+              <a:ext uri="{FF2B5EF4-FFF2-40B4-BE49-F238E27FC236}">
+                <a16:creationId xmlns:a16="http://schemas.microsoft.com/office/drawing/2014/main" id="{5C1A2757-358E-4795-AF5B-FD84C9FD8433}"/>
+              </a:ext>
+            </a:extLst>
+          </p:cNvPr>
+          <p:cNvSpPr>
+            <a:spLocks xmlns:a="http://schemas.openxmlformats.org/drawingml/2006/main" noGrp="1"/>
+          </p:cNvSpPr>
+          <p:nvPr/>
+        </p:nvSpPr>
+        <p:spPr>
+          <a:xfrm xmlns:a="http://schemas.openxmlformats.org/drawingml/2006/main">
+            <a:off x="876300" y="2133600"/>
+            <a:ext cx="8953500" cy="819150"/>
+          </a:xfrm>
+          <a:prstGeom xmlns:a="http://schemas.openxmlformats.org/drawingml/2006/main" prst="rect">
+            <a:avLst/>
+          </a:prstGeom>
+          <a:noFill xmlns:a="http://schemas.openxmlformats.org/drawingml/2006/main"/>
+          <a:ln xmlns:a="http://schemas.openxmlformats.org/drawingml/2006/main" w="0">
+            <a:noFill/>
+            <a:prstDash val="solid"/>
+          </a:ln>
+        </p:spPr>
+        <p:txBody>
+          <a:bodyPr xmlns:a="http://schemas.openxmlformats.org/drawingml/2006/main"/>
+          <a:lstStyle xmlns:a="http://schemas.openxmlformats.org/drawingml/2006/main"/>
+          <a:p xmlns:a="http://schemas.openxmlformats.org/drawingml/2006/main">
+            <a:pPr algn="l">
+              <a:defRPr sz="2250" b="1" i="0">
+                <a:solidFill>
+                  <a:srgbClr val="000000"/>
+                </a:solidFill>
+              </a:defRPr>
+            </a:pPr>
+            <a:r>
+              <a:rPr sz="2250" b="1" i="0">
+                <a:solidFill>
+                  <a:srgbClr val="000000"/>
+                </a:solidFill>
+              </a:rPr>
+              <a:t>ML-P1 worked mechanically and exposed a familiar failure mode: too little upside participation in 2020, partial defense in 2022.</a:t>
+            </a:r>
+          </a:p>
+        </p:txBody>
+      </p:sp>
+      <p:sp>
+        <p:nvSpPr>
+          <p:cNvPr id="5" name="">
+            <a:extLst xmlns:a="http://schemas.openxmlformats.org/drawingml/2006/main">
+              <a:ext uri="{FF2B5EF4-FFF2-40B4-BE49-F238E27FC236}">
+                <a16:creationId xmlns:a16="http://schemas.microsoft.com/office/drawing/2014/main" id="{84E21A71-3346-4484-B58D-C43DDED0DAE6}"/>
+              </a:ext>
+            </a:extLst>
+          </p:cNvPr>
+          <p:cNvSpPr>
+            <a:spLocks xmlns:a="http://schemas.openxmlformats.org/drawingml/2006/main" noGrp="1"/>
+          </p:cNvSpPr>
+          <p:nvPr/>
+        </p:nvSpPr>
+        <p:spPr>
+          <a:xfrm xmlns:a="http://schemas.openxmlformats.org/drawingml/2006/main">
+            <a:off x="1219200" y="3457575"/>
+            <a:ext cx="190500" cy="247650"/>
+          </a:xfrm>
+          <a:prstGeom xmlns:a="http://schemas.openxmlformats.org/drawingml/2006/main" prst="rect">
+            <a:avLst/>
+          </a:prstGeom>
+          <a:noFill xmlns:a="http://schemas.openxmlformats.org/drawingml/2006/main"/>
+          <a:ln xmlns:a="http://schemas.openxmlformats.org/drawingml/2006/main" w="0">
+            <a:noFill/>
+            <a:prstDash val="solid"/>
+          </a:ln>
+        </p:spPr>
+        <p:txBody>
+          <a:bodyPr xmlns:a="http://schemas.openxmlformats.org/drawingml/2006/main"/>
+          <a:lstStyle xmlns:a="http://schemas.openxmlformats.org/drawingml/2006/main"/>
+          <a:p xmlns:a="http://schemas.openxmlformats.org/drawingml/2006/main">
+            <a:pPr algn="l">
+              <a:defRPr sz="1575" b="1" i="0">
+                <a:solidFill>
+                  <a:srgbClr val="FF6B35"/>
+                </a:solidFill>
+              </a:defRPr>
+            </a:pPr>
+            <a:r>
+              <a:rPr sz="1575" b="1" i="0">
+                <a:solidFill>
+                  <a:srgbClr val="FF6B35"/>
+                </a:solidFill>
+              </a:rPr>
+              <a:t>-</a:t>
+            </a:r>
+          </a:p>
+        </p:txBody>
+      </p:sp>
+      <p:sp>
+        <p:nvSpPr>
+          <p:cNvPr id="6" name="">
+            <a:extLst xmlns:a="http://schemas.openxmlformats.org/drawingml/2006/main">
+              <a:ext uri="{FF2B5EF4-FFF2-40B4-BE49-F238E27FC236}">
+                <a16:creationId xmlns:a16="http://schemas.microsoft.com/office/drawing/2014/main" id="{017FD423-A7FB-4B1D-94AF-B8F783EEA01E}"/>
+              </a:ext>
+            </a:extLst>
+          </p:cNvPr>
+          <p:cNvSpPr>
+            <a:spLocks xmlns:a="http://schemas.openxmlformats.org/drawingml/2006/main" noGrp="1"/>
+          </p:cNvSpPr>
+          <p:nvPr/>
+        </p:nvSpPr>
+        <p:spPr>
+          <a:xfrm xmlns:a="http://schemas.openxmlformats.org/drawingml/2006/main">
+            <a:off x="1485900" y="3448050"/>
+            <a:ext cx="6591300" cy="514350"/>
+          </a:xfrm>
+          <a:prstGeom xmlns:a="http://schemas.openxmlformats.org/drawingml/2006/main" prst="rect">
+            <a:avLst/>
+          </a:prstGeom>
+          <a:noFill xmlns:a="http://schemas.openxmlformats.org/drawingml/2006/main"/>
+          <a:ln xmlns:a="http://schemas.openxmlformats.org/drawingml/2006/main" w="0">
+            <a:noFill/>
+            <a:prstDash val="solid"/>
+          </a:ln>
+        </p:spPr>
+        <p:txBody>
+          <a:bodyPr xmlns:a="http://schemas.openxmlformats.org/drawingml/2006/main"/>
+          <a:lstStyle xmlns:a="http://schemas.openxmlformats.org/drawingml/2006/main"/>
+          <a:p xmlns:a="http://schemas.openxmlformats.org/drawingml/2006/main">
+            <a:pPr algn="l">
+              <a:defRPr sz="1575" b="0" i="0">
+                <a:solidFill>
+                  <a:srgbClr val="222222"/>
+                </a:solidFill>
+              </a:defRPr>
+            </a:pPr>
+            <a:r>
+              <a:rPr sz="1575" b="0" i="0">
+                <a:solidFill>
+                  <a:srgbClr val="222222"/>
+                </a:solidFill>
+              </a:rPr>
+              <a:t>Add TRAIN-only threshold selection or calibration before XGBoost.</a:t>
+            </a:r>
+          </a:p>
+        </p:txBody>
+      </p:sp>
+      <p:sp>
+        <p:nvSpPr>
+          <p:cNvPr id="7" name="">
+            <a:extLst xmlns:a="http://schemas.openxmlformats.org/drawingml/2006/main">
+              <a:ext uri="{FF2B5EF4-FFF2-40B4-BE49-F238E27FC236}">
+                <a16:creationId xmlns:a16="http://schemas.microsoft.com/office/drawing/2014/main" id="{355CCE95-6906-441B-AB28-8A5100E63196}"/>
+              </a:ext>
+            </a:extLst>
+          </p:cNvPr>
+          <p:cNvSpPr>
+            <a:spLocks xmlns:a="http://schemas.openxmlformats.org/drawingml/2006/main" noGrp="1"/>
+          </p:cNvSpPr>
+          <p:nvPr/>
+        </p:nvSpPr>
+        <p:spPr>
+          <a:xfrm xmlns:a="http://schemas.openxmlformats.org/drawingml/2006/main">
+            <a:off x="1219200" y="4124325"/>
+            <a:ext cx="190500" cy="247650"/>
+          </a:xfrm>
+          <a:prstGeom xmlns:a="http://schemas.openxmlformats.org/drawingml/2006/main" prst="rect">
+            <a:avLst/>
+          </a:prstGeom>
+          <a:noFill xmlns:a="http://schemas.openxmlformats.org/drawingml/2006/main"/>
+          <a:ln xmlns:a="http://schemas.openxmlformats.org/drawingml/2006/main" w="0">
+            <a:noFill/>
+            <a:prstDash val="solid"/>
+          </a:ln>
+        </p:spPr>
+        <p:txBody>
+          <a:bodyPr xmlns:a="http://schemas.openxmlformats.org/drawingml/2006/main"/>
+          <a:lstStyle xmlns:a="http://schemas.openxmlformats.org/drawingml/2006/main"/>
+          <a:p xmlns:a="http://schemas.openxmlformats.org/drawingml/2006/main">
+            <a:pPr algn="l">
+              <a:defRPr sz="1575" b="1" i="0">
+                <a:solidFill>
+                  <a:srgbClr val="FF6B35"/>
+                </a:solidFill>
+              </a:defRPr>
+            </a:pPr>
+            <a:r>
+              <a:rPr sz="1575" b="1" i="0">
+                <a:solidFill>
+                  <a:srgbClr val="FF6B35"/>
+                </a:solidFill>
+              </a:rPr>
+              <a:t>-</a:t>
+            </a:r>
+          </a:p>
+        </p:txBody>
+      </p:sp>
+      <p:sp>
+        <p:nvSpPr>
+          <p:cNvPr id="8" name="">
+            <a:extLst xmlns:a="http://schemas.openxmlformats.org/drawingml/2006/main">
+              <a:ext uri="{FF2B5EF4-FFF2-40B4-BE49-F238E27FC236}">
+                <a16:creationId xmlns:a16="http://schemas.microsoft.com/office/drawing/2014/main" id="{6EE7B62B-1697-47D3-A422-CCD27A606808}"/>
+              </a:ext>
+            </a:extLst>
+          </p:cNvPr>
+          <p:cNvSpPr>
+            <a:spLocks xmlns:a="http://schemas.openxmlformats.org/drawingml/2006/main" noGrp="1"/>
+          </p:cNvSpPr>
+          <p:nvPr/>
+        </p:nvSpPr>
+        <p:spPr>
+          <a:xfrm xmlns:a="http://schemas.openxmlformats.org/drawingml/2006/main">
+            <a:off x="1485900" y="4114800"/>
+            <a:ext cx="6591300" cy="514350"/>
+          </a:xfrm>
+          <a:prstGeom xmlns:a="http://schemas.openxmlformats.org/drawingml/2006/main" prst="rect">
+            <a:avLst/>
+          </a:prstGeom>
+          <a:noFill xmlns:a="http://schemas.openxmlformats.org/drawingml/2006/main"/>
+          <a:ln xmlns:a="http://schemas.openxmlformats.org/drawingml/2006/main" w="0">
+            <a:noFill/>
+            <a:prstDash val="solid"/>
+          </a:ln>
+        </p:spPr>
+        <p:txBody>
+          <a:bodyPr xmlns:a="http://schemas.openxmlformats.org/drawingml/2006/main"/>
+          <a:lstStyle xmlns:a="http://schemas.openxmlformats.org/drawingml/2006/main"/>
+          <a:p xmlns:a="http://schemas.openxmlformats.org/drawingml/2006/main">
+            <a:pPr algn="l">
+              <a:defRPr sz="1575" b="0" i="0">
+                <a:solidFill>
+                  <a:srgbClr val="222222"/>
+                </a:solidFill>
+              </a:defRPr>
+            </a:pPr>
+            <a:r>
+              <a:rPr sz="1575" b="0" i="0">
+                <a:solidFill>
+                  <a:srgbClr val="222222"/>
+                </a:solidFill>
+              </a:rPr>
+              <a:t>Compare fixed thresholds against a more permissive participation policy.</a:t>
+            </a:r>
+          </a:p>
+        </p:txBody>
+      </p:sp>
+      <p:sp>
+        <p:nvSpPr>
+          <p:cNvPr id="9" name="">
+            <a:extLst xmlns:a="http://schemas.openxmlformats.org/drawingml/2006/main">
+              <a:ext uri="{FF2B5EF4-FFF2-40B4-BE49-F238E27FC236}">
+                <a16:creationId xmlns:a16="http://schemas.microsoft.com/office/drawing/2014/main" id="{CE139752-EEE6-475C-AF2B-BD0455694AED}"/>
+              </a:ext>
+            </a:extLst>
+          </p:cNvPr>
+          <p:cNvSpPr>
+            <a:spLocks xmlns:a="http://schemas.openxmlformats.org/drawingml/2006/main" noGrp="1"/>
+          </p:cNvSpPr>
+          <p:nvPr/>
+        </p:nvSpPr>
+        <p:spPr>
+          <a:xfrm xmlns:a="http://schemas.openxmlformats.org/drawingml/2006/main">
+            <a:off x="1219200" y="4791075"/>
+            <a:ext cx="190500" cy="247650"/>
+          </a:xfrm>
+          <a:prstGeom xmlns:a="http://schemas.openxmlformats.org/drawingml/2006/main" prst="rect">
+            <a:avLst/>
+          </a:prstGeom>
+          <a:noFill xmlns:a="http://schemas.openxmlformats.org/drawingml/2006/main"/>
+          <a:ln xmlns:a="http://schemas.openxmlformats.org/drawingml/2006/main" w="0">
+            <a:noFill/>
+            <a:prstDash val="solid"/>
+          </a:ln>
+        </p:spPr>
+        <p:txBody>
+          <a:bodyPr xmlns:a="http://schemas.openxmlformats.org/drawingml/2006/main"/>
+          <a:lstStyle xmlns:a="http://schemas.openxmlformats.org/drawingml/2006/main"/>
+          <a:p xmlns:a="http://schemas.openxmlformats.org/drawingml/2006/main">
+            <a:pPr algn="l">
+              <a:defRPr sz="1575" b="1" i="0">
+                <a:solidFill>
+                  <a:srgbClr val="FF6B35"/>
+                </a:solidFill>
+              </a:defRPr>
+            </a:pPr>
+            <a:r>
+              <a:rPr sz="1575" b="1" i="0">
+                <a:solidFill>
+                  <a:srgbClr val="FF6B35"/>
+                </a:solidFill>
+              </a:rPr>
+              <a:t>-</a:t>
+            </a:r>
+          </a:p>
+        </p:txBody>
+      </p:sp>
+      <p:sp>
+        <p:nvSpPr>
+          <p:cNvPr id="10" name="">
+            <a:extLst xmlns:a="http://schemas.openxmlformats.org/drawingml/2006/main">
+              <a:ext uri="{FF2B5EF4-FFF2-40B4-BE49-F238E27FC236}">
+                <a16:creationId xmlns:a16="http://schemas.microsoft.com/office/drawing/2014/main" id="{36265261-C1F9-4417-93DE-B3199706EB62}"/>
+              </a:ext>
+            </a:extLst>
+          </p:cNvPr>
+          <p:cNvSpPr>
+            <a:spLocks xmlns:a="http://schemas.openxmlformats.org/drawingml/2006/main" noGrp="1"/>
+          </p:cNvSpPr>
+          <p:nvPr/>
+        </p:nvSpPr>
+        <p:spPr>
+          <a:xfrm xmlns:a="http://schemas.openxmlformats.org/drawingml/2006/main">
+            <a:off x="1485900" y="4781550"/>
+            <a:ext cx="6591300" cy="514350"/>
+          </a:xfrm>
+          <a:prstGeom xmlns:a="http://schemas.openxmlformats.org/drawingml/2006/main" prst="rect">
+            <a:avLst/>
+          </a:prstGeom>
+          <a:noFill xmlns:a="http://schemas.openxmlformats.org/drawingml/2006/main"/>
+          <a:ln xmlns:a="http://schemas.openxmlformats.org/drawingml/2006/main" w="0">
+            <a:noFill/>
+            <a:prstDash val="solid"/>
+          </a:ln>
+        </p:spPr>
+        <p:txBody>
+          <a:bodyPr xmlns:a="http://schemas.openxmlformats.org/drawingml/2006/main"/>
+          <a:lstStyle xmlns:a="http://schemas.openxmlformats.org/drawingml/2006/main"/>
+          <a:p xmlns:a="http://schemas.openxmlformats.org/drawingml/2006/main">
+            <a:pPr algn="l">
+              <a:defRPr sz="1575" b="0" i="0">
+                <a:solidFill>
+                  <a:srgbClr val="222222"/>
+                </a:solidFill>
+              </a:defRPr>
+            </a:pPr>
+            <a:r>
+              <a:rPr sz="1575" b="0" i="0">
+                <a:solidFill>
+                  <a:srgbClr val="222222"/>
+                </a:solidFill>
+              </a:rPr>
+              <a:t>Keep probability trade tapes as the required visual audit for every ML replay.</a:t>
+            </a:r>
+          </a:p>
+        </p:txBody>
+      </p:sp>
+      <p:sp>
+        <p:nvSpPr>
+          <p:cNvPr id="11" name="">
+            <a:extLst xmlns:a="http://schemas.openxmlformats.org/drawingml/2006/main">
+              <a:ext uri="{FF2B5EF4-FFF2-40B4-BE49-F238E27FC236}">
+                <a16:creationId xmlns:a16="http://schemas.microsoft.com/office/drawing/2014/main" id="{7725340E-E51E-4B3E-84C3-015B5152A235}"/>
+              </a:ext>
+            </a:extLst>
+          </p:cNvPr>
+          <p:cNvSpPr>
+            <a:spLocks xmlns:a="http://schemas.openxmlformats.org/drawingml/2006/main" noGrp="1"/>
+          </p:cNvSpPr>
+          <p:nvPr/>
+        </p:nvSpPr>
+        <p:spPr>
+          <a:xfrm xmlns:a="http://schemas.openxmlformats.org/drawingml/2006/main">
+            <a:off x="1219200" y="5457825"/>
+            <a:ext cx="190500" cy="247650"/>
+          </a:xfrm>
+          <a:prstGeom xmlns:a="http://schemas.openxmlformats.org/drawingml/2006/main" prst="rect">
+            <a:avLst/>
+          </a:prstGeom>
+          <a:noFill xmlns:a="http://schemas.openxmlformats.org/drawingml/2006/main"/>
+          <a:ln xmlns:a="http://schemas.openxmlformats.org/drawingml/2006/main" w="0">
+            <a:noFill/>
+            <a:prstDash val="solid"/>
+          </a:ln>
+        </p:spPr>
+        <p:txBody>
+          <a:bodyPr xmlns:a="http://schemas.openxmlformats.org/drawingml/2006/main"/>
+          <a:lstStyle xmlns:a="http://schemas.openxmlformats.org/drawingml/2006/main"/>
+          <a:p xmlns:a="http://schemas.openxmlformats.org/drawingml/2006/main">
+            <a:pPr algn="l">
+              <a:defRPr sz="1575" b="1" i="0">
+                <a:solidFill>
+                  <a:srgbClr val="FF6B35"/>
+                </a:solidFill>
+              </a:defRPr>
+            </a:pPr>
+            <a:r>
+              <a:rPr sz="1575" b="1" i="0">
+                <a:solidFill>
+                  <a:srgbClr val="FF6B35"/>
+                </a:solidFill>
+              </a:rPr>
+              <a:t>-</a:t>
+            </a:r>
+          </a:p>
+        </p:txBody>
+      </p:sp>
+      <p:sp>
+        <p:nvSpPr>
+          <p:cNvPr id="12" name="">
+            <a:extLst xmlns:a="http://schemas.openxmlformats.org/drawingml/2006/main">
+              <a:ext uri="{FF2B5EF4-FFF2-40B4-BE49-F238E27FC236}">
+                <a16:creationId xmlns:a16="http://schemas.microsoft.com/office/drawing/2014/main" id="{53AFDD3D-0A17-4F21-9F6D-0A16A249F7A1}"/>
+              </a:ext>
+            </a:extLst>
+          </p:cNvPr>
+          <p:cNvSpPr>
+            <a:spLocks xmlns:a="http://schemas.openxmlformats.org/drawingml/2006/main" noGrp="1"/>
+          </p:cNvSpPr>
+          <p:nvPr/>
+        </p:nvSpPr>
+        <p:spPr>
+          <a:xfrm xmlns:a="http://schemas.openxmlformats.org/drawingml/2006/main">
+            <a:off x="1485900" y="5448300"/>
+            <a:ext cx="6591300" cy="514350"/>
+          </a:xfrm>
+          <a:prstGeom xmlns:a="http://schemas.openxmlformats.org/drawingml/2006/main" prst="rect">
+            <a:avLst/>
+          </a:prstGeom>
+          <a:noFill xmlns:a="http://schemas.openxmlformats.org/drawingml/2006/main"/>
+          <a:ln xmlns:a="http://schemas.openxmlformats.org/drawingml/2006/main" w="0">
+            <a:noFill/>
+            <a:prstDash val="solid"/>
+          </a:ln>
+        </p:spPr>
+        <p:txBody>
+          <a:bodyPr xmlns:a="http://schemas.openxmlformats.org/drawingml/2006/main"/>
+          <a:lstStyle xmlns:a="http://schemas.openxmlformats.org/drawingml/2006/main"/>
+          <a:p xmlns:a="http://schemas.openxmlformats.org/drawingml/2006/main">
+            <a:pPr algn="l">
+              <a:defRPr sz="1575" b="0" i="0">
+                <a:solidFill>
+                  <a:srgbClr val="222222"/>
+                </a:solidFill>
+              </a:defRPr>
+            </a:pPr>
+            <a:r>
+              <a:rPr sz="1575" b="0" i="0">
+                <a:solidFill>
+                  <a:srgbClr val="222222"/>
+                </a:solidFill>
+              </a:rPr>
+              <a:t>Only then add XGBoost as a nonlinear challenger.</a:t>
+            </a:r>
+          </a:p>
+        </p:txBody>
+      </p:sp>
+    </p:spTree>
+    <p:extLst>
+      <p:ext uri="{BB962C8B-B14F-4D97-AF65-F5344CB8AC3E}">
+        <p14:creationId xmlns:p14="http://schemas.microsoft.com/office/powerpoint/2010/main" val="1600121359"/>
       </p:ext>
     </p:extLst>
   </p:cSld>
@@ -2923,7 +6385,7 @@
           <p:cNvPr id="1" name="">
             <a:extLst xmlns:a="http://schemas.openxmlformats.org/drawingml/2006/main">
               <a:ext uri="{FF2B5EF4-FFF2-40B4-BE49-F238E27FC236}">
-                <a16:creationId xmlns:a16="http://schemas.microsoft.com/office/drawing/2014/main" id="{2D3D3116-F229-4A30-A630-8DE89C6E88C7}"/>
+                <a16:creationId xmlns:a16="http://schemas.microsoft.com/office/drawing/2014/main" id="{E36542FA-F233-4D13-B547-F790B39EB006}"/>
               </a:ext>
             </a:extLst>
           </p:cNvPr>
@@ -2973,7 +6435,7 @@
           <p:cNvPr id="2" name="">
             <a:extLst xmlns:a="http://schemas.openxmlformats.org/drawingml/2006/main">
               <a:ext uri="{FF2B5EF4-FFF2-40B4-BE49-F238E27FC236}">
-                <a16:creationId xmlns:a16="http://schemas.microsoft.com/office/drawing/2014/main" id="{38628281-9CC2-4DD8-88EB-A0468660007F}"/>
+                <a16:creationId xmlns:a16="http://schemas.microsoft.com/office/drawing/2014/main" id="{98AA86FC-52B0-4F43-B0A0-88CB7483313E}"/>
               </a:ext>
             </a:extLst>
           </p:cNvPr>
@@ -3023,7 +6485,7 @@
           <p:cNvPr id="3" name="">
             <a:extLst xmlns:a="http://schemas.openxmlformats.org/drawingml/2006/main">
               <a:ext uri="{FF2B5EF4-FFF2-40B4-BE49-F238E27FC236}">
-                <a16:creationId xmlns:a16="http://schemas.microsoft.com/office/drawing/2014/main" id="{881A57B8-713A-447B-844F-D95492082D65}"/>
+                <a16:creationId xmlns:a16="http://schemas.microsoft.com/office/drawing/2014/main" id="{E2D7AF07-2065-454F-B243-B3F7F8DD9F31}"/>
               </a:ext>
             </a:extLst>
           </p:cNvPr>
@@ -3054,7 +6516,7 @@
           <p:cNvPr id="4" name="">
             <a:extLst xmlns:a="http://schemas.openxmlformats.org/drawingml/2006/main">
               <a:ext uri="{FF2B5EF4-FFF2-40B4-BE49-F238E27FC236}">
-                <a16:creationId xmlns:a16="http://schemas.microsoft.com/office/drawing/2014/main" id="{D87F8008-CB0D-44DE-B7C5-E272E8F17BCF}"/>
+                <a16:creationId xmlns:a16="http://schemas.microsoft.com/office/drawing/2014/main" id="{75839C31-D04D-41CE-96C0-64F2392A2050}"/>
               </a:ext>
             </a:extLst>
           </p:cNvPr>
@@ -3104,7 +6566,7 @@
           <p:cNvPr id="5" name="">
             <a:extLst xmlns:a="http://schemas.openxmlformats.org/drawingml/2006/main">
               <a:ext uri="{FF2B5EF4-FFF2-40B4-BE49-F238E27FC236}">
-                <a16:creationId xmlns:a16="http://schemas.microsoft.com/office/drawing/2014/main" id="{BEE8D60B-C168-4ABC-9A87-9132EF04188D}"/>
+                <a16:creationId xmlns:a16="http://schemas.microsoft.com/office/drawing/2014/main" id="{B250E0EF-7F93-4459-A211-4CFE69A12981}"/>
               </a:ext>
             </a:extLst>
           </p:cNvPr>
@@ -3154,7 +6616,7 @@
           <p:cNvPr id="6" name="">
             <a:extLst xmlns:a="http://schemas.openxmlformats.org/drawingml/2006/main">
               <a:ext uri="{FF2B5EF4-FFF2-40B4-BE49-F238E27FC236}">
-                <a16:creationId xmlns:a16="http://schemas.microsoft.com/office/drawing/2014/main" id="{FB8B5DF2-70F6-4276-BE2A-ABE57AF99C17}"/>
+                <a16:creationId xmlns:a16="http://schemas.microsoft.com/office/drawing/2014/main" id="{5BCB7FBC-677F-437E-93EB-CD384D83AF80}"/>
               </a:ext>
             </a:extLst>
           </p:cNvPr>
@@ -3204,7 +6666,7 @@
           <p:cNvPr id="7" name="">
             <a:extLst xmlns:a="http://schemas.openxmlformats.org/drawingml/2006/main">
               <a:ext uri="{FF2B5EF4-FFF2-40B4-BE49-F238E27FC236}">
-                <a16:creationId xmlns:a16="http://schemas.microsoft.com/office/drawing/2014/main" id="{824033C1-8FE9-492D-A4F6-BE644C5B53DC}"/>
+                <a16:creationId xmlns:a16="http://schemas.microsoft.com/office/drawing/2014/main" id="{9DEDB69F-E2E1-418B-AD5A-A33102B57D37}"/>
               </a:ext>
             </a:extLst>
           </p:cNvPr>
@@ -3254,7 +6716,7 @@
           <p:cNvPr id="8" name="">
             <a:extLst xmlns:a="http://schemas.openxmlformats.org/drawingml/2006/main">
               <a:ext uri="{FF2B5EF4-FFF2-40B4-BE49-F238E27FC236}">
-                <a16:creationId xmlns:a16="http://schemas.microsoft.com/office/drawing/2014/main" id="{697EEC48-24A1-4BBD-BE40-9C9727D73362}"/>
+                <a16:creationId xmlns:a16="http://schemas.microsoft.com/office/drawing/2014/main" id="{1C7143CA-8817-4B70-967B-FC3C5C42BC77}"/>
               </a:ext>
             </a:extLst>
           </p:cNvPr>
@@ -3304,7 +6766,7 @@
           <p:cNvPr id="9" name="">
             <a:extLst xmlns:a="http://schemas.openxmlformats.org/drawingml/2006/main">
               <a:ext uri="{FF2B5EF4-FFF2-40B4-BE49-F238E27FC236}">
-                <a16:creationId xmlns:a16="http://schemas.microsoft.com/office/drawing/2014/main" id="{748FEEF0-8819-44ED-AE3F-EDC6C5BD7233}"/>
+                <a16:creationId xmlns:a16="http://schemas.microsoft.com/office/drawing/2014/main" id="{6E9353EA-877B-42E2-8D32-A03D4691FE17}"/>
               </a:ext>
             </a:extLst>
           </p:cNvPr>
@@ -3354,7 +6816,7 @@
           <p:cNvPr id="10" name="">
             <a:extLst xmlns:a="http://schemas.openxmlformats.org/drawingml/2006/main">
               <a:ext uri="{FF2B5EF4-FFF2-40B4-BE49-F238E27FC236}">
-                <a16:creationId xmlns:a16="http://schemas.microsoft.com/office/drawing/2014/main" id="{E31CB908-B65D-4A08-B161-783952FE4D61}"/>
+                <a16:creationId xmlns:a16="http://schemas.microsoft.com/office/drawing/2014/main" id="{E828698A-FED4-4922-8C52-91F54AB4E579}"/>
               </a:ext>
             </a:extLst>
           </p:cNvPr>
@@ -3387,7 +6849,7 @@
           <p:cNvPr id="11" name="">
             <a:extLst xmlns:a="http://schemas.openxmlformats.org/drawingml/2006/main">
               <a:ext uri="{FF2B5EF4-FFF2-40B4-BE49-F238E27FC236}">
-                <a16:creationId xmlns:a16="http://schemas.microsoft.com/office/drawing/2014/main" id="{D4D48257-C940-4336-9DD6-B157190440B2}"/>
+                <a16:creationId xmlns:a16="http://schemas.microsoft.com/office/drawing/2014/main" id="{87E6B38D-58F5-400D-B2B6-B077881A3ABD}"/>
               </a:ext>
             </a:extLst>
           </p:cNvPr>
@@ -3420,7 +6882,7 @@
           <p:cNvPr id="12" name="">
             <a:extLst xmlns:a="http://schemas.openxmlformats.org/drawingml/2006/main">
               <a:ext uri="{FF2B5EF4-FFF2-40B4-BE49-F238E27FC236}">
-                <a16:creationId xmlns:a16="http://schemas.microsoft.com/office/drawing/2014/main" id="{205071EB-FF8A-4211-9A7D-4642F5AE1158}"/>
+                <a16:creationId xmlns:a16="http://schemas.microsoft.com/office/drawing/2014/main" id="{30D3DFC3-3A91-4721-A77F-628DA1591DED}"/>
               </a:ext>
             </a:extLst>
           </p:cNvPr>
@@ -3453,7 +6915,7 @@
           <p:cNvPr id="13" name="">
             <a:extLst xmlns:a="http://schemas.openxmlformats.org/drawingml/2006/main">
               <a:ext uri="{FF2B5EF4-FFF2-40B4-BE49-F238E27FC236}">
-                <a16:creationId xmlns:a16="http://schemas.microsoft.com/office/drawing/2014/main" id="{2A037570-6BAF-48A2-999B-56E72FF6111A}"/>
+                <a16:creationId xmlns:a16="http://schemas.microsoft.com/office/drawing/2014/main" id="{E7E9F800-B400-4D11-8EC7-C9616CED9795}"/>
               </a:ext>
             </a:extLst>
           </p:cNvPr>
@@ -3503,7 +6965,7 @@
           <p:cNvPr id="14" name="">
             <a:extLst xmlns:a="http://schemas.openxmlformats.org/drawingml/2006/main">
               <a:ext uri="{FF2B5EF4-FFF2-40B4-BE49-F238E27FC236}">
-                <a16:creationId xmlns:a16="http://schemas.microsoft.com/office/drawing/2014/main" id="{D97737ED-1952-41D4-838F-561B42464F8F}"/>
+                <a16:creationId xmlns:a16="http://schemas.microsoft.com/office/drawing/2014/main" id="{79948B6A-BADE-4BF8-B8DF-BB211E818ABF}"/>
               </a:ext>
             </a:extLst>
           </p:cNvPr>
@@ -3553,7 +7015,7 @@
           <p:cNvPr id="15" name="">
             <a:extLst xmlns:a="http://schemas.openxmlformats.org/drawingml/2006/main">
               <a:ext uri="{FF2B5EF4-FFF2-40B4-BE49-F238E27FC236}">
-                <a16:creationId xmlns:a16="http://schemas.microsoft.com/office/drawing/2014/main" id="{8B2C933E-6213-4D53-8316-EF34CCA7B498}"/>
+                <a16:creationId xmlns:a16="http://schemas.microsoft.com/office/drawing/2014/main" id="{C162CA3C-445E-4EAA-9B6D-A672FAD83D07}"/>
               </a:ext>
             </a:extLst>
           </p:cNvPr>
@@ -3603,7 +7065,7 @@
           <p:cNvPr id="16" name="">
             <a:extLst xmlns:a="http://schemas.openxmlformats.org/drawingml/2006/main">
               <a:ext uri="{FF2B5EF4-FFF2-40B4-BE49-F238E27FC236}">
-                <a16:creationId xmlns:a16="http://schemas.microsoft.com/office/drawing/2014/main" id="{BC2BAF09-C017-47F6-90E1-7CA1E5715175}"/>
+                <a16:creationId xmlns:a16="http://schemas.microsoft.com/office/drawing/2014/main" id="{9D1B2354-CB80-4D3A-AAA4-253B5F40F867}"/>
               </a:ext>
             </a:extLst>
           </p:cNvPr>
@@ -3651,7 +7113,7 @@
     </p:spTree>
     <p:extLst>
       <p:ext uri="{BB962C8B-B14F-4D97-AF65-F5344CB8AC3E}">
-        <p14:creationId xmlns:p14="http://schemas.microsoft.com/office/powerpoint/2010/main" val="1175299945"/>
+        <p14:creationId xmlns:p14="http://schemas.microsoft.com/office/powerpoint/2010/main" val="1145742833"/>
       </p:ext>
     </p:extLst>
   </p:cSld>
@@ -3682,7 +7144,7 @@
           <p:cNvPr id="1" name="">
             <a:extLst xmlns:a="http://schemas.openxmlformats.org/drawingml/2006/main">
               <a:ext uri="{FF2B5EF4-FFF2-40B4-BE49-F238E27FC236}">
-                <a16:creationId xmlns:a16="http://schemas.microsoft.com/office/drawing/2014/main" id="{2FB1C057-855C-4AA3-A837-951ED1A3D2B2}"/>
+                <a16:creationId xmlns:a16="http://schemas.microsoft.com/office/drawing/2014/main" id="{3C11B574-C1F3-44C2-BFDD-F21961BF1C3E}"/>
               </a:ext>
             </a:extLst>
           </p:cNvPr>
@@ -3732,7 +7194,7 @@
           <p:cNvPr id="2" name="">
             <a:extLst xmlns:a="http://schemas.openxmlformats.org/drawingml/2006/main">
               <a:ext uri="{FF2B5EF4-FFF2-40B4-BE49-F238E27FC236}">
-                <a16:creationId xmlns:a16="http://schemas.microsoft.com/office/drawing/2014/main" id="{D5AB3119-8A38-4DA0-97D7-B300655E78CA}"/>
+                <a16:creationId xmlns:a16="http://schemas.microsoft.com/office/drawing/2014/main" id="{A7CB5D9B-0291-4EE9-82E6-2642158D5577}"/>
               </a:ext>
             </a:extLst>
           </p:cNvPr>
@@ -3782,7 +7244,7 @@
           <p:cNvPr id="3" name="">
             <a:extLst xmlns:a="http://schemas.openxmlformats.org/drawingml/2006/main">
               <a:ext uri="{FF2B5EF4-FFF2-40B4-BE49-F238E27FC236}">
-                <a16:creationId xmlns:a16="http://schemas.microsoft.com/office/drawing/2014/main" id="{F5D82727-81A2-4CE3-AE7A-4DE953BEE4F1}"/>
+                <a16:creationId xmlns:a16="http://schemas.microsoft.com/office/drawing/2014/main" id="{1D87F613-3AF1-4682-AD3A-060509D7BF5D}"/>
               </a:ext>
             </a:extLst>
           </p:cNvPr>
@@ -3813,7 +7275,7 @@
           <p:cNvPr id="4" name="">
             <a:extLst xmlns:a="http://schemas.openxmlformats.org/drawingml/2006/main">
               <a:ext uri="{FF2B5EF4-FFF2-40B4-BE49-F238E27FC236}">
-                <a16:creationId xmlns:a16="http://schemas.microsoft.com/office/drawing/2014/main" id="{5D8F4142-FAA8-48C0-83DE-56CCE8E60E4C}"/>
+                <a16:creationId xmlns:a16="http://schemas.microsoft.com/office/drawing/2014/main" id="{F6616A57-8C91-4C73-A3BB-E60F55BB43D8}"/>
               </a:ext>
             </a:extLst>
           </p:cNvPr>
@@ -3846,7 +7308,7 @@
           <p:cNvPr id="5" name="">
             <a:extLst xmlns:a="http://schemas.openxmlformats.org/drawingml/2006/main">
               <a:ext uri="{FF2B5EF4-FFF2-40B4-BE49-F238E27FC236}">
-                <a16:creationId xmlns:a16="http://schemas.microsoft.com/office/drawing/2014/main" id="{24A87B9D-2B67-4B84-9702-94936EC10420}"/>
+                <a16:creationId xmlns:a16="http://schemas.microsoft.com/office/drawing/2014/main" id="{6D9D3AF4-5757-43E5-A418-F71F569A0FBD}"/>
               </a:ext>
             </a:extLst>
           </p:cNvPr>
@@ -3896,7 +7358,7 @@
           <p:cNvPr id="6" name="">
             <a:extLst xmlns:a="http://schemas.openxmlformats.org/drawingml/2006/main">
               <a:ext uri="{FF2B5EF4-FFF2-40B4-BE49-F238E27FC236}">
-                <a16:creationId xmlns:a16="http://schemas.microsoft.com/office/drawing/2014/main" id="{D5D5DF54-0268-4F3E-8558-62D14DC4554B}"/>
+                <a16:creationId xmlns:a16="http://schemas.microsoft.com/office/drawing/2014/main" id="{C6A3C248-60D4-4990-9D39-DBB1829C406B}"/>
               </a:ext>
             </a:extLst>
           </p:cNvPr>
@@ -3946,7 +7408,7 @@
           <p:cNvPr id="7" name="">
             <a:extLst xmlns:a="http://schemas.openxmlformats.org/drawingml/2006/main">
               <a:ext uri="{FF2B5EF4-FFF2-40B4-BE49-F238E27FC236}">
-                <a16:creationId xmlns:a16="http://schemas.microsoft.com/office/drawing/2014/main" id="{889D5642-9F6A-499B-B025-4BB4A70D6491}"/>
+                <a16:creationId xmlns:a16="http://schemas.microsoft.com/office/drawing/2014/main" id="{7ACC55DD-3E8C-4F28-B518-55C3AC04973A}"/>
               </a:ext>
             </a:extLst>
           </p:cNvPr>
@@ -3996,7 +7458,7 @@
           <p:cNvPr id="8" name="">
             <a:extLst xmlns:a="http://schemas.openxmlformats.org/drawingml/2006/main">
               <a:ext uri="{FF2B5EF4-FFF2-40B4-BE49-F238E27FC236}">
-                <a16:creationId xmlns:a16="http://schemas.microsoft.com/office/drawing/2014/main" id="{9FDF4B8C-70E6-454A-8DF1-0D91AB2E417F}"/>
+                <a16:creationId xmlns:a16="http://schemas.microsoft.com/office/drawing/2014/main" id="{9F403F99-7F34-4602-829A-03CB9FF6A0CE}"/>
               </a:ext>
             </a:extLst>
           </p:cNvPr>
@@ -4029,7 +7491,7 @@
           <p:cNvPr id="9" name="">
             <a:extLst xmlns:a="http://schemas.openxmlformats.org/drawingml/2006/main">
               <a:ext uri="{FF2B5EF4-FFF2-40B4-BE49-F238E27FC236}">
-                <a16:creationId xmlns:a16="http://schemas.microsoft.com/office/drawing/2014/main" id="{057C8727-2616-44EB-868D-4417E3F123D9}"/>
+                <a16:creationId xmlns:a16="http://schemas.microsoft.com/office/drawing/2014/main" id="{874F63C7-771C-454F-9587-47CCD93648EA}"/>
               </a:ext>
             </a:extLst>
           </p:cNvPr>
@@ -4079,7 +7541,7 @@
           <p:cNvPr id="10" name="">
             <a:extLst xmlns:a="http://schemas.openxmlformats.org/drawingml/2006/main">
               <a:ext uri="{FF2B5EF4-FFF2-40B4-BE49-F238E27FC236}">
-                <a16:creationId xmlns:a16="http://schemas.microsoft.com/office/drawing/2014/main" id="{70E1E100-0E42-4645-8826-CEFA30C36687}"/>
+                <a16:creationId xmlns:a16="http://schemas.microsoft.com/office/drawing/2014/main" id="{10B9D2F1-223D-4225-8DC0-EC935AB32A6B}"/>
               </a:ext>
             </a:extLst>
           </p:cNvPr>
@@ -4129,7 +7591,7 @@
           <p:cNvPr id="11" name="">
             <a:extLst xmlns:a="http://schemas.openxmlformats.org/drawingml/2006/main">
               <a:ext uri="{FF2B5EF4-FFF2-40B4-BE49-F238E27FC236}">
-                <a16:creationId xmlns:a16="http://schemas.microsoft.com/office/drawing/2014/main" id="{92F541B4-8A66-408C-AC62-69CC4536833E}"/>
+                <a16:creationId xmlns:a16="http://schemas.microsoft.com/office/drawing/2014/main" id="{E10288E7-C5CD-42FB-8ED6-33039496AEDD}"/>
               </a:ext>
             </a:extLst>
           </p:cNvPr>
@@ -4179,7 +7641,7 @@
           <p:cNvPr id="12" name="">
             <a:extLst xmlns:a="http://schemas.openxmlformats.org/drawingml/2006/main">
               <a:ext uri="{FF2B5EF4-FFF2-40B4-BE49-F238E27FC236}">
-                <a16:creationId xmlns:a16="http://schemas.microsoft.com/office/drawing/2014/main" id="{F541CC6A-1171-4B27-877A-69F96E55AEF2}"/>
+                <a16:creationId xmlns:a16="http://schemas.microsoft.com/office/drawing/2014/main" id="{800C4630-44AC-4DA9-B90B-B460F1B27BB6}"/>
               </a:ext>
             </a:extLst>
           </p:cNvPr>
@@ -4212,7 +7674,7 @@
           <p:cNvPr id="13" name="">
             <a:extLst xmlns:a="http://schemas.openxmlformats.org/drawingml/2006/main">
               <a:ext uri="{FF2B5EF4-FFF2-40B4-BE49-F238E27FC236}">
-                <a16:creationId xmlns:a16="http://schemas.microsoft.com/office/drawing/2014/main" id="{1C1BCFF0-CD06-4266-B3A5-D8C62C4883AE}"/>
+                <a16:creationId xmlns:a16="http://schemas.microsoft.com/office/drawing/2014/main" id="{10C2F5D8-D422-41F7-BF1F-01D5C340A4CB}"/>
               </a:ext>
             </a:extLst>
           </p:cNvPr>
@@ -4262,7 +7724,7 @@
           <p:cNvPr id="14" name="">
             <a:extLst xmlns:a="http://schemas.openxmlformats.org/drawingml/2006/main">
               <a:ext uri="{FF2B5EF4-FFF2-40B4-BE49-F238E27FC236}">
-                <a16:creationId xmlns:a16="http://schemas.microsoft.com/office/drawing/2014/main" id="{65E65122-5FDA-4CC4-8196-23017A4E794A}"/>
+                <a16:creationId xmlns:a16="http://schemas.microsoft.com/office/drawing/2014/main" id="{30B92D43-FD4C-450D-9C1F-7DF0B33ADF71}"/>
               </a:ext>
             </a:extLst>
           </p:cNvPr>
@@ -4312,7 +7774,7 @@
           <p:cNvPr id="15" name="">
             <a:extLst xmlns:a="http://schemas.openxmlformats.org/drawingml/2006/main">
               <a:ext uri="{FF2B5EF4-FFF2-40B4-BE49-F238E27FC236}">
-                <a16:creationId xmlns:a16="http://schemas.microsoft.com/office/drawing/2014/main" id="{2E8A504E-E2AA-41D0-85E4-EDB7E3B0B7F2}"/>
+                <a16:creationId xmlns:a16="http://schemas.microsoft.com/office/drawing/2014/main" id="{C2CA55F2-5160-42FD-8A8F-D749DCEFA3CD}"/>
               </a:ext>
             </a:extLst>
           </p:cNvPr>
@@ -4362,7 +7824,7 @@
           <p:cNvPr id="16" name="">
             <a:extLst xmlns:a="http://schemas.openxmlformats.org/drawingml/2006/main">
               <a:ext uri="{FF2B5EF4-FFF2-40B4-BE49-F238E27FC236}">
-                <a16:creationId xmlns:a16="http://schemas.microsoft.com/office/drawing/2014/main" id="{038C03F5-1FAE-43F1-94EE-3D88C153612D}"/>
+                <a16:creationId xmlns:a16="http://schemas.microsoft.com/office/drawing/2014/main" id="{1EDC3B2B-7968-4B81-BE81-0B1A266EE0E0}"/>
               </a:ext>
             </a:extLst>
           </p:cNvPr>
@@ -4412,7 +7874,7 @@
           <p:cNvPr id="17" name="">
             <a:extLst xmlns:a="http://schemas.openxmlformats.org/drawingml/2006/main">
               <a:ext uri="{FF2B5EF4-FFF2-40B4-BE49-F238E27FC236}">
-                <a16:creationId xmlns:a16="http://schemas.microsoft.com/office/drawing/2014/main" id="{87191720-EB7D-4509-B923-874D74BF6AD1}"/>
+                <a16:creationId xmlns:a16="http://schemas.microsoft.com/office/drawing/2014/main" id="{8A129D36-D038-419E-93E2-BA40532DB466}"/>
               </a:ext>
             </a:extLst>
           </p:cNvPr>
@@ -4462,7 +7924,7 @@
           <p:cNvPr id="18" name="">
             <a:extLst xmlns:a="http://schemas.openxmlformats.org/drawingml/2006/main">
               <a:ext uri="{FF2B5EF4-FFF2-40B4-BE49-F238E27FC236}">
-                <a16:creationId xmlns:a16="http://schemas.microsoft.com/office/drawing/2014/main" id="{5C37FC3D-D5C2-4743-907B-40CF51418EDC}"/>
+                <a16:creationId xmlns:a16="http://schemas.microsoft.com/office/drawing/2014/main" id="{3AD45CF1-64AB-42E1-A81F-87A2D5FD29C3}"/>
               </a:ext>
             </a:extLst>
           </p:cNvPr>
@@ -4512,7 +7974,7 @@
           <p:cNvPr id="19" name="">
             <a:extLst xmlns:a="http://schemas.openxmlformats.org/drawingml/2006/main">
               <a:ext uri="{FF2B5EF4-FFF2-40B4-BE49-F238E27FC236}">
-                <a16:creationId xmlns:a16="http://schemas.microsoft.com/office/drawing/2014/main" id="{633F3DAB-A622-4F49-BB4F-2AF38191A1CE}"/>
+                <a16:creationId xmlns:a16="http://schemas.microsoft.com/office/drawing/2014/main" id="{F3986E6B-B807-48ED-91F4-46CD332D4E09}"/>
               </a:ext>
             </a:extLst>
           </p:cNvPr>
@@ -4562,7 +8024,7 @@
           <p:cNvPr id="20" name="">
             <a:extLst xmlns:a="http://schemas.openxmlformats.org/drawingml/2006/main">
               <a:ext uri="{FF2B5EF4-FFF2-40B4-BE49-F238E27FC236}">
-                <a16:creationId xmlns:a16="http://schemas.microsoft.com/office/drawing/2014/main" id="{DB79FEE1-EC1E-4DF5-ABC4-ABFBF8F48921}"/>
+                <a16:creationId xmlns:a16="http://schemas.microsoft.com/office/drawing/2014/main" id="{B32FF8A3-725A-4BBF-89EE-F53E78CC35A3}"/>
               </a:ext>
             </a:extLst>
           </p:cNvPr>
@@ -4612,7 +8074,7 @@
           <p:cNvPr id="21" name="">
             <a:extLst xmlns:a="http://schemas.openxmlformats.org/drawingml/2006/main">
               <a:ext uri="{FF2B5EF4-FFF2-40B4-BE49-F238E27FC236}">
-                <a16:creationId xmlns:a16="http://schemas.microsoft.com/office/drawing/2014/main" id="{B3D204E1-BC7C-4AEF-AF68-1B6B2625D9E8}"/>
+                <a16:creationId xmlns:a16="http://schemas.microsoft.com/office/drawing/2014/main" id="{0876B1BC-A436-4FB1-BB4D-A2CBFF9B3948}"/>
               </a:ext>
             </a:extLst>
           </p:cNvPr>
@@ -4662,7 +8124,7 @@
           <p:cNvPr id="22" name="">
             <a:extLst xmlns:a="http://schemas.openxmlformats.org/drawingml/2006/main">
               <a:ext uri="{FF2B5EF4-FFF2-40B4-BE49-F238E27FC236}">
-                <a16:creationId xmlns:a16="http://schemas.microsoft.com/office/drawing/2014/main" id="{5BA2E5E4-F386-46ED-8182-9999E6D2725C}"/>
+                <a16:creationId xmlns:a16="http://schemas.microsoft.com/office/drawing/2014/main" id="{2BFF81E5-AC0C-4CFA-9B6E-21F1F303FB3A}"/>
               </a:ext>
             </a:extLst>
           </p:cNvPr>
@@ -4712,7 +8174,7 @@
           <p:cNvPr id="23" name="">
             <a:extLst xmlns:a="http://schemas.openxmlformats.org/drawingml/2006/main">
               <a:ext uri="{FF2B5EF4-FFF2-40B4-BE49-F238E27FC236}">
-                <a16:creationId xmlns:a16="http://schemas.microsoft.com/office/drawing/2014/main" id="{467D0BE3-ADB4-466A-9057-3622303F631A}"/>
+                <a16:creationId xmlns:a16="http://schemas.microsoft.com/office/drawing/2014/main" id="{BEF7CF42-7C61-43D1-85B3-239D6AD0007D}"/>
               </a:ext>
             </a:extLst>
           </p:cNvPr>
@@ -4760,7 +8222,7 @@
     </p:spTree>
     <p:extLst>
       <p:ext uri="{BB962C8B-B14F-4D97-AF65-F5344CB8AC3E}">
-        <p14:creationId xmlns:p14="http://schemas.microsoft.com/office/powerpoint/2010/main" val="1208145346"/>
+        <p14:creationId xmlns:p14="http://schemas.microsoft.com/office/powerpoint/2010/main" val="283073382"/>
       </p:ext>
     </p:extLst>
   </p:cSld>
@@ -4791,7 +8253,7 @@
           <p:cNvPr id="1" name="">
             <a:extLst xmlns:a="http://schemas.openxmlformats.org/drawingml/2006/main">
               <a:ext uri="{FF2B5EF4-FFF2-40B4-BE49-F238E27FC236}">
-                <a16:creationId xmlns:a16="http://schemas.microsoft.com/office/drawing/2014/main" id="{BE4CEDAC-272D-4918-9A3B-598010D83738}"/>
+                <a16:creationId xmlns:a16="http://schemas.microsoft.com/office/drawing/2014/main" id="{67558621-DBF2-4D73-917B-D15E0817111A}"/>
               </a:ext>
             </a:extLst>
           </p:cNvPr>
@@ -4841,7 +8303,7 @@
           <p:cNvPr id="2" name="">
             <a:extLst xmlns:a="http://schemas.openxmlformats.org/drawingml/2006/main">
               <a:ext uri="{FF2B5EF4-FFF2-40B4-BE49-F238E27FC236}">
-                <a16:creationId xmlns:a16="http://schemas.microsoft.com/office/drawing/2014/main" id="{7787CB41-355A-492E-B96C-0D7A7067087F}"/>
+                <a16:creationId xmlns:a16="http://schemas.microsoft.com/office/drawing/2014/main" id="{E5E9B7F3-496E-4356-BC9E-958257962B04}"/>
               </a:ext>
             </a:extLst>
           </p:cNvPr>
@@ -4891,7 +8353,7 @@
           <p:cNvPr id="3" name="">
             <a:extLst xmlns:a="http://schemas.openxmlformats.org/drawingml/2006/main">
               <a:ext uri="{FF2B5EF4-FFF2-40B4-BE49-F238E27FC236}">
-                <a16:creationId xmlns:a16="http://schemas.microsoft.com/office/drawing/2014/main" id="{1D3B2DB3-2C45-456E-B31A-F641157D2FB7}"/>
+                <a16:creationId xmlns:a16="http://schemas.microsoft.com/office/drawing/2014/main" id="{95C6FBB8-BA3D-4842-AE40-2D270782464A}"/>
               </a:ext>
             </a:extLst>
           </p:cNvPr>
@@ -4926,7 +8388,7 @@
           <p:nvPr/>
         </p:nvPicPr>
         <p:blipFill>
-          <a:blip xmlns:r="http://schemas.openxmlformats.org/officeDocument/2006/relationships" xmlns:a="http://schemas.openxmlformats.org/drawingml/2006/main" r:embed="R45b38e8f8a94467d"/>
+          <a:blip xmlns:r="http://schemas.openxmlformats.org/officeDocument/2006/relationships" xmlns:a="http://schemas.openxmlformats.org/drawingml/2006/main" r:embed="Rb2781d92ac6f4ae2"/>
           <a:stretch xmlns:a="http://schemas.openxmlformats.org/drawingml/2006/main"/>
         </p:blipFill>
         <p:spPr>
@@ -4944,7 +8406,7 @@
           <p:cNvPr id="5" name="">
             <a:extLst xmlns:a="http://schemas.openxmlformats.org/drawingml/2006/main">
               <a:ext uri="{FF2B5EF4-FFF2-40B4-BE49-F238E27FC236}">
-                <a16:creationId xmlns:a16="http://schemas.microsoft.com/office/drawing/2014/main" id="{26DAA6D3-43DF-466A-BF8D-FF709AFE0D6F}"/>
+                <a16:creationId xmlns:a16="http://schemas.microsoft.com/office/drawing/2014/main" id="{D683C9EE-2243-4DB7-AF8F-03EDED947A7F}"/>
               </a:ext>
             </a:extLst>
           </p:cNvPr>
@@ -4994,7 +8456,7 @@
           <p:cNvPr id="6" name="">
             <a:extLst xmlns:a="http://schemas.openxmlformats.org/drawingml/2006/main">
               <a:ext uri="{FF2B5EF4-FFF2-40B4-BE49-F238E27FC236}">
-                <a16:creationId xmlns:a16="http://schemas.microsoft.com/office/drawing/2014/main" id="{420D03E2-44BA-45E4-8F2A-952FD3EDDD69}"/>
+                <a16:creationId xmlns:a16="http://schemas.microsoft.com/office/drawing/2014/main" id="{21EBB7B0-9EA4-45D5-87A9-5EACBA1F6FB5}"/>
               </a:ext>
             </a:extLst>
           </p:cNvPr>
@@ -5042,7 +8504,7 @@
     </p:spTree>
     <p:extLst>
       <p:ext uri="{BB962C8B-B14F-4D97-AF65-F5344CB8AC3E}">
-        <p14:creationId xmlns:p14="http://schemas.microsoft.com/office/powerpoint/2010/main" val="2131488481"/>
+        <p14:creationId xmlns:p14="http://schemas.microsoft.com/office/powerpoint/2010/main" val="1359632138"/>
       </p:ext>
     </p:extLst>
   </p:cSld>
@@ -5073,7 +8535,7 @@
           <p:cNvPr id="1" name="">
             <a:extLst xmlns:a="http://schemas.openxmlformats.org/drawingml/2006/main">
               <a:ext uri="{FF2B5EF4-FFF2-40B4-BE49-F238E27FC236}">
-                <a16:creationId xmlns:a16="http://schemas.microsoft.com/office/drawing/2014/main" id="{D627DB27-E8B8-4530-9E0A-4535BB65A4AA}"/>
+                <a16:creationId xmlns:a16="http://schemas.microsoft.com/office/drawing/2014/main" id="{2062BF1D-E943-43D1-BC96-A2D9D66CCD13}"/>
               </a:ext>
             </a:extLst>
           </p:cNvPr>
@@ -5123,7 +8585,7 @@
           <p:cNvPr id="2" name="">
             <a:extLst xmlns:a="http://schemas.openxmlformats.org/drawingml/2006/main">
               <a:ext uri="{FF2B5EF4-FFF2-40B4-BE49-F238E27FC236}">
-                <a16:creationId xmlns:a16="http://schemas.microsoft.com/office/drawing/2014/main" id="{59CDD211-29E8-45F1-9BB7-EE9F7D34F629}"/>
+                <a16:creationId xmlns:a16="http://schemas.microsoft.com/office/drawing/2014/main" id="{0FA8E4B3-59D8-42EA-9528-0D837A5E61DC}"/>
               </a:ext>
             </a:extLst>
           </p:cNvPr>
@@ -5173,7 +8635,7 @@
           <p:cNvPr id="3" name="">
             <a:extLst xmlns:a="http://schemas.openxmlformats.org/drawingml/2006/main">
               <a:ext uri="{FF2B5EF4-FFF2-40B4-BE49-F238E27FC236}">
-                <a16:creationId xmlns:a16="http://schemas.microsoft.com/office/drawing/2014/main" id="{E10D44A4-D104-4DCB-80B2-A0379AA05490}"/>
+                <a16:creationId xmlns:a16="http://schemas.microsoft.com/office/drawing/2014/main" id="{1752EB5F-2B85-4D80-9E43-BC85AE4AB711}"/>
               </a:ext>
             </a:extLst>
           </p:cNvPr>
@@ -5208,7 +8670,7 @@
           <p:nvPr/>
         </p:nvPicPr>
         <p:blipFill>
-          <a:blip xmlns:r="http://schemas.openxmlformats.org/officeDocument/2006/relationships" xmlns:a="http://schemas.openxmlformats.org/drawingml/2006/main" r:embed="Rafbb8db577794480"/>
+          <a:blip xmlns:r="http://schemas.openxmlformats.org/officeDocument/2006/relationships" xmlns:a="http://schemas.openxmlformats.org/drawingml/2006/main" r:embed="Rd48cbabb66624634"/>
           <a:stretch xmlns:a="http://schemas.openxmlformats.org/drawingml/2006/main"/>
         </p:blipFill>
         <p:spPr>
@@ -5226,7 +8688,7 @@
           <p:cNvPr id="5" name="">
             <a:extLst xmlns:a="http://schemas.openxmlformats.org/drawingml/2006/main">
               <a:ext uri="{FF2B5EF4-FFF2-40B4-BE49-F238E27FC236}">
-                <a16:creationId xmlns:a16="http://schemas.microsoft.com/office/drawing/2014/main" id="{47DE1D6A-B564-48CF-9CA9-B6691F4D5673}"/>
+                <a16:creationId xmlns:a16="http://schemas.microsoft.com/office/drawing/2014/main" id="{7FFBB2C4-59DB-43F1-9B43-0D588CDABB3A}"/>
               </a:ext>
             </a:extLst>
           </p:cNvPr>
@@ -5276,7 +8738,7 @@
           <p:cNvPr id="6" name="">
             <a:extLst xmlns:a="http://schemas.openxmlformats.org/drawingml/2006/main">
               <a:ext uri="{FF2B5EF4-FFF2-40B4-BE49-F238E27FC236}">
-                <a16:creationId xmlns:a16="http://schemas.microsoft.com/office/drawing/2014/main" id="{F49A6A01-F2A1-43B8-93FE-912D601EC899}"/>
+                <a16:creationId xmlns:a16="http://schemas.microsoft.com/office/drawing/2014/main" id="{B128D558-C29B-4E43-B0D5-442ABEF7773D}"/>
               </a:ext>
             </a:extLst>
           </p:cNvPr>
@@ -5326,7 +8788,7 @@
           <p:cNvPr id="7" name="">
             <a:extLst xmlns:a="http://schemas.openxmlformats.org/drawingml/2006/main">
               <a:ext uri="{FF2B5EF4-FFF2-40B4-BE49-F238E27FC236}">
-                <a16:creationId xmlns:a16="http://schemas.microsoft.com/office/drawing/2014/main" id="{1DED3548-4465-4395-B498-8D17B85467E8}"/>
+                <a16:creationId xmlns:a16="http://schemas.microsoft.com/office/drawing/2014/main" id="{FE87E29F-E4A5-4C99-AC38-3EBB0379A1E2}"/>
               </a:ext>
             </a:extLst>
           </p:cNvPr>
@@ -5376,7 +8838,7 @@
           <p:cNvPr id="8" name="">
             <a:extLst xmlns:a="http://schemas.openxmlformats.org/drawingml/2006/main">
               <a:ext uri="{FF2B5EF4-FFF2-40B4-BE49-F238E27FC236}">
-                <a16:creationId xmlns:a16="http://schemas.microsoft.com/office/drawing/2014/main" id="{0A2E44DB-D737-4312-B79F-51C24DC960D2}"/>
+                <a16:creationId xmlns:a16="http://schemas.microsoft.com/office/drawing/2014/main" id="{1407C223-C106-4223-BADA-30C50F3AB022}"/>
               </a:ext>
             </a:extLst>
           </p:cNvPr>
@@ -5426,7 +8888,7 @@
           <p:cNvPr id="9" name="">
             <a:extLst xmlns:a="http://schemas.openxmlformats.org/drawingml/2006/main">
               <a:ext uri="{FF2B5EF4-FFF2-40B4-BE49-F238E27FC236}">
-                <a16:creationId xmlns:a16="http://schemas.microsoft.com/office/drawing/2014/main" id="{F966C680-EE38-44DA-BD50-274D1ABA055F}"/>
+                <a16:creationId xmlns:a16="http://schemas.microsoft.com/office/drawing/2014/main" id="{CF15DBFE-3B24-4233-8645-1D7BCCC33DD9}"/>
               </a:ext>
             </a:extLst>
           </p:cNvPr>
@@ -5474,7 +8936,7 @@
     </p:spTree>
     <p:extLst>
       <p:ext uri="{BB962C8B-B14F-4D97-AF65-F5344CB8AC3E}">
-        <p14:creationId xmlns:p14="http://schemas.microsoft.com/office/powerpoint/2010/main" val="1397441991"/>
+        <p14:creationId xmlns:p14="http://schemas.microsoft.com/office/powerpoint/2010/main" val="84248713"/>
       </p:ext>
     </p:extLst>
   </p:cSld>
@@ -5505,7 +8967,7 @@
           <p:cNvPr id="1" name="">
             <a:extLst xmlns:a="http://schemas.openxmlformats.org/drawingml/2006/main">
               <a:ext uri="{FF2B5EF4-FFF2-40B4-BE49-F238E27FC236}">
-                <a16:creationId xmlns:a16="http://schemas.microsoft.com/office/drawing/2014/main" id="{BD8CE286-173C-4059-8D60-6C213853AC9A}"/>
+                <a16:creationId xmlns:a16="http://schemas.microsoft.com/office/drawing/2014/main" id="{47A552C9-2C95-4129-8038-484434E3CA8B}"/>
               </a:ext>
             </a:extLst>
           </p:cNvPr>
@@ -5555,7 +9017,7 @@
           <p:cNvPr id="2" name="">
             <a:extLst xmlns:a="http://schemas.openxmlformats.org/drawingml/2006/main">
               <a:ext uri="{FF2B5EF4-FFF2-40B4-BE49-F238E27FC236}">
-                <a16:creationId xmlns:a16="http://schemas.microsoft.com/office/drawing/2014/main" id="{8C57CF57-E1B3-442B-87BF-2E31AC3EB1F5}"/>
+                <a16:creationId xmlns:a16="http://schemas.microsoft.com/office/drawing/2014/main" id="{E0314130-4464-482D-9300-51DDD1A85025}"/>
               </a:ext>
             </a:extLst>
           </p:cNvPr>
@@ -5605,7 +9067,7 @@
           <p:cNvPr id="3" name="">
             <a:extLst xmlns:a="http://schemas.openxmlformats.org/drawingml/2006/main">
               <a:ext uri="{FF2B5EF4-FFF2-40B4-BE49-F238E27FC236}">
-                <a16:creationId xmlns:a16="http://schemas.microsoft.com/office/drawing/2014/main" id="{470EDB80-C3C6-4922-8830-C14D9F411F2D}"/>
+                <a16:creationId xmlns:a16="http://schemas.microsoft.com/office/drawing/2014/main" id="{985557C4-1100-4616-8AB3-5AF8BD78D17F}"/>
               </a:ext>
             </a:extLst>
           </p:cNvPr>
@@ -5640,7 +9102,7 @@
           <p:nvPr/>
         </p:nvPicPr>
         <p:blipFill>
-          <a:blip xmlns:r="http://schemas.openxmlformats.org/officeDocument/2006/relationships" xmlns:a="http://schemas.openxmlformats.org/drawingml/2006/main" r:embed="R8caca0b3c8a349d6"/>
+          <a:blip xmlns:r="http://schemas.openxmlformats.org/officeDocument/2006/relationships" xmlns:a="http://schemas.openxmlformats.org/drawingml/2006/main" r:embed="R2e63199a85354e8a"/>
           <a:stretch xmlns:a="http://schemas.openxmlformats.org/drawingml/2006/main"/>
         </p:blipFill>
         <p:spPr>
@@ -5662,7 +9124,7 @@
           <p:nvPr/>
         </p:nvPicPr>
         <p:blipFill>
-          <a:blip xmlns:r="http://schemas.openxmlformats.org/officeDocument/2006/relationships" xmlns:a="http://schemas.openxmlformats.org/drawingml/2006/main" r:embed="R7e8ffa8ceb7c4a83"/>
+          <a:blip xmlns:r="http://schemas.openxmlformats.org/officeDocument/2006/relationships" xmlns:a="http://schemas.openxmlformats.org/drawingml/2006/main" r:embed="R285caf0581ef4807"/>
           <a:stretch xmlns:a="http://schemas.openxmlformats.org/drawingml/2006/main"/>
         </p:blipFill>
         <p:spPr>
@@ -5680,7 +9142,7 @@
           <p:cNvPr id="6" name="">
             <a:extLst xmlns:a="http://schemas.openxmlformats.org/drawingml/2006/main">
               <a:ext uri="{FF2B5EF4-FFF2-40B4-BE49-F238E27FC236}">
-                <a16:creationId xmlns:a16="http://schemas.microsoft.com/office/drawing/2014/main" id="{FDD40F44-47E4-48C7-A68D-1951F8334E5A}"/>
+                <a16:creationId xmlns:a16="http://schemas.microsoft.com/office/drawing/2014/main" id="{6892F3D6-E61A-4ABD-A16F-EA7D39989BC4}"/>
               </a:ext>
             </a:extLst>
           </p:cNvPr>
@@ -5728,7 +9190,7 @@
     </p:spTree>
     <p:extLst>
       <p:ext uri="{BB962C8B-B14F-4D97-AF65-F5344CB8AC3E}">
-        <p14:creationId xmlns:p14="http://schemas.microsoft.com/office/powerpoint/2010/main" val="703810571"/>
+        <p14:creationId xmlns:p14="http://schemas.microsoft.com/office/powerpoint/2010/main" val="2145780310"/>
       </p:ext>
     </p:extLst>
   </p:cSld>
@@ -5759,7 +9221,7 @@
           <p:cNvPr id="1" name="">
             <a:extLst xmlns:a="http://schemas.openxmlformats.org/drawingml/2006/main">
               <a:ext uri="{FF2B5EF4-FFF2-40B4-BE49-F238E27FC236}">
-                <a16:creationId xmlns:a16="http://schemas.microsoft.com/office/drawing/2014/main" id="{6A92B035-1A71-4186-93CA-F6F18439A633}"/>
+                <a16:creationId xmlns:a16="http://schemas.microsoft.com/office/drawing/2014/main" id="{FF945AB4-9652-4D23-B473-9DC19589EF78}"/>
               </a:ext>
             </a:extLst>
           </p:cNvPr>
@@ -5809,7 +9271,7 @@
           <p:cNvPr id="2" name="">
             <a:extLst xmlns:a="http://schemas.openxmlformats.org/drawingml/2006/main">
               <a:ext uri="{FF2B5EF4-FFF2-40B4-BE49-F238E27FC236}">
-                <a16:creationId xmlns:a16="http://schemas.microsoft.com/office/drawing/2014/main" id="{C8E16806-76CC-4B15-9CE0-0919F96D026C}"/>
+                <a16:creationId xmlns:a16="http://schemas.microsoft.com/office/drawing/2014/main" id="{E0643663-21DD-4992-93E4-F4ECA1DEF43D}"/>
               </a:ext>
             </a:extLst>
           </p:cNvPr>
@@ -5859,7 +9321,7 @@
           <p:cNvPr id="3" name="">
             <a:extLst xmlns:a="http://schemas.openxmlformats.org/drawingml/2006/main">
               <a:ext uri="{FF2B5EF4-FFF2-40B4-BE49-F238E27FC236}">
-                <a16:creationId xmlns:a16="http://schemas.microsoft.com/office/drawing/2014/main" id="{ED37A337-A36D-4D36-9DFA-872AFB70213C}"/>
+                <a16:creationId xmlns:a16="http://schemas.microsoft.com/office/drawing/2014/main" id="{3796EC5E-F207-42E4-8C75-9D007C512A3B}"/>
               </a:ext>
             </a:extLst>
           </p:cNvPr>
@@ -5894,7 +9356,7 @@
           <p:nvPr/>
         </p:nvPicPr>
         <p:blipFill>
-          <a:blip xmlns:r="http://schemas.openxmlformats.org/officeDocument/2006/relationships" xmlns:a="http://schemas.openxmlformats.org/drawingml/2006/main" r:embed="R35aaee48819d4a2d"/>
+          <a:blip xmlns:r="http://schemas.openxmlformats.org/officeDocument/2006/relationships" xmlns:a="http://schemas.openxmlformats.org/drawingml/2006/main" r:embed="R041723920c6f4a3a"/>
           <a:stretch xmlns:a="http://schemas.openxmlformats.org/drawingml/2006/main"/>
         </p:blipFill>
         <p:spPr>
@@ -5912,7 +9374,7 @@
           <p:cNvPr id="5" name="">
             <a:extLst xmlns:a="http://schemas.openxmlformats.org/drawingml/2006/main">
               <a:ext uri="{FF2B5EF4-FFF2-40B4-BE49-F238E27FC236}">
-                <a16:creationId xmlns:a16="http://schemas.microsoft.com/office/drawing/2014/main" id="{4BDB4D6B-982A-4F72-AABA-1AF0E0F0AB5C}"/>
+                <a16:creationId xmlns:a16="http://schemas.microsoft.com/office/drawing/2014/main" id="{8057A7B9-6179-41BD-8DF5-D5FC8CF1C6A8}"/>
               </a:ext>
             </a:extLst>
           </p:cNvPr>
@@ -5962,7 +9424,7 @@
           <p:cNvPr id="6" name="">
             <a:extLst xmlns:a="http://schemas.openxmlformats.org/drawingml/2006/main">
               <a:ext uri="{FF2B5EF4-FFF2-40B4-BE49-F238E27FC236}">
-                <a16:creationId xmlns:a16="http://schemas.microsoft.com/office/drawing/2014/main" id="{3F2849C3-107B-4900-8659-3662692153F8}"/>
+                <a16:creationId xmlns:a16="http://schemas.microsoft.com/office/drawing/2014/main" id="{416B2653-493C-4521-BB8D-9C36593577C7}"/>
               </a:ext>
             </a:extLst>
           </p:cNvPr>
@@ -6010,7 +9472,7 @@
     </p:spTree>
     <p:extLst>
       <p:ext uri="{BB962C8B-B14F-4D97-AF65-F5344CB8AC3E}">
-        <p14:creationId xmlns:p14="http://schemas.microsoft.com/office/powerpoint/2010/main" val="1937255442"/>
+        <p14:creationId xmlns:p14="http://schemas.microsoft.com/office/powerpoint/2010/main" val="1764599846"/>
       </p:ext>
     </p:extLst>
   </p:cSld>
@@ -6041,7 +9503,7 @@
           <p:cNvPr id="1" name="">
             <a:extLst xmlns:a="http://schemas.openxmlformats.org/drawingml/2006/main">
               <a:ext uri="{FF2B5EF4-FFF2-40B4-BE49-F238E27FC236}">
-                <a16:creationId xmlns:a16="http://schemas.microsoft.com/office/drawing/2014/main" id="{967F1554-FA34-4C4B-A449-AC4A1C75E0A5}"/>
+                <a16:creationId xmlns:a16="http://schemas.microsoft.com/office/drawing/2014/main" id="{21763562-DC6A-49B1-88D0-B48B6A453911}"/>
               </a:ext>
             </a:extLst>
           </p:cNvPr>
@@ -6091,7 +9553,7 @@
           <p:cNvPr id="2" name="">
             <a:extLst xmlns:a="http://schemas.openxmlformats.org/drawingml/2006/main">
               <a:ext uri="{FF2B5EF4-FFF2-40B4-BE49-F238E27FC236}">
-                <a16:creationId xmlns:a16="http://schemas.microsoft.com/office/drawing/2014/main" id="{7308F579-54F9-4D9A-81CC-1DB1EB3BF8A5}"/>
+                <a16:creationId xmlns:a16="http://schemas.microsoft.com/office/drawing/2014/main" id="{A6089CB9-54DF-4506-A248-93C6CFF38369}"/>
               </a:ext>
             </a:extLst>
           </p:cNvPr>
@@ -6141,7 +9603,7 @@
           <p:cNvPr id="3" name="">
             <a:extLst xmlns:a="http://schemas.openxmlformats.org/drawingml/2006/main">
               <a:ext uri="{FF2B5EF4-FFF2-40B4-BE49-F238E27FC236}">
-                <a16:creationId xmlns:a16="http://schemas.microsoft.com/office/drawing/2014/main" id="{4C9FB5D5-574C-4658-A21A-C426B2DBD9D0}"/>
+                <a16:creationId xmlns:a16="http://schemas.microsoft.com/office/drawing/2014/main" id="{123AC082-A088-4B4E-AF3A-D1446AC0B734}"/>
               </a:ext>
             </a:extLst>
           </p:cNvPr>
@@ -6176,7 +9638,7 @@
           <p:nvPr/>
         </p:nvPicPr>
         <p:blipFill>
-          <a:blip xmlns:r="http://schemas.openxmlformats.org/officeDocument/2006/relationships" xmlns:a="http://schemas.openxmlformats.org/drawingml/2006/main" r:embed="R54715c4ed7054f56"/>
+          <a:blip xmlns:r="http://schemas.openxmlformats.org/officeDocument/2006/relationships" xmlns:a="http://schemas.openxmlformats.org/drawingml/2006/main" r:embed="Rb6097a288f9e44d8"/>
           <a:stretch xmlns:a="http://schemas.openxmlformats.org/drawingml/2006/main"/>
         </p:blipFill>
         <p:spPr>
@@ -6194,7 +9656,7 @@
           <p:cNvPr id="5" name="">
             <a:extLst xmlns:a="http://schemas.openxmlformats.org/drawingml/2006/main">
               <a:ext uri="{FF2B5EF4-FFF2-40B4-BE49-F238E27FC236}">
-                <a16:creationId xmlns:a16="http://schemas.microsoft.com/office/drawing/2014/main" id="{231B6546-058C-4FBE-ACC2-ACD9FDDC9AB6}"/>
+                <a16:creationId xmlns:a16="http://schemas.microsoft.com/office/drawing/2014/main" id="{1BA55CEB-AA0D-4A33-A502-E96C60FDE8FA}"/>
               </a:ext>
             </a:extLst>
           </p:cNvPr>
@@ -6244,7 +9706,7 @@
           <p:cNvPr id="6" name="">
             <a:extLst xmlns:a="http://schemas.openxmlformats.org/drawingml/2006/main">
               <a:ext uri="{FF2B5EF4-FFF2-40B4-BE49-F238E27FC236}">
-                <a16:creationId xmlns:a16="http://schemas.microsoft.com/office/drawing/2014/main" id="{A9CF3C8D-3616-4904-978B-FEA70047DC7B}"/>
+                <a16:creationId xmlns:a16="http://schemas.microsoft.com/office/drawing/2014/main" id="{9D1095F9-DE1D-453D-A8CE-B48598375D70}"/>
               </a:ext>
             </a:extLst>
           </p:cNvPr>
@@ -6292,7 +9754,7 @@
     </p:spTree>
     <p:extLst>
       <p:ext uri="{BB962C8B-B14F-4D97-AF65-F5344CB8AC3E}">
-        <p14:creationId xmlns:p14="http://schemas.microsoft.com/office/powerpoint/2010/main" val="1092751670"/>
+        <p14:creationId xmlns:p14="http://schemas.microsoft.com/office/powerpoint/2010/main" val="1271054265"/>
       </p:ext>
     </p:extLst>
   </p:cSld>
@@ -6323,7 +9785,7 @@
           <p:cNvPr id="1" name="">
             <a:extLst xmlns:a="http://schemas.openxmlformats.org/drawingml/2006/main">
               <a:ext uri="{FF2B5EF4-FFF2-40B4-BE49-F238E27FC236}">
-                <a16:creationId xmlns:a16="http://schemas.microsoft.com/office/drawing/2014/main" id="{68446D6A-ACBF-4580-B1FB-D02C4651160F}"/>
+                <a16:creationId xmlns:a16="http://schemas.microsoft.com/office/drawing/2014/main" id="{65C7D25F-8534-4CA8-8A63-1D7FAFB2C164}"/>
               </a:ext>
             </a:extLst>
           </p:cNvPr>
@@ -6373,7 +9835,7 @@
           <p:cNvPr id="2" name="">
             <a:extLst xmlns:a="http://schemas.openxmlformats.org/drawingml/2006/main">
               <a:ext uri="{FF2B5EF4-FFF2-40B4-BE49-F238E27FC236}">
-                <a16:creationId xmlns:a16="http://schemas.microsoft.com/office/drawing/2014/main" id="{3E6EA4A1-90DA-4AA9-91A1-BA7CB639C7E4}"/>
+                <a16:creationId xmlns:a16="http://schemas.microsoft.com/office/drawing/2014/main" id="{4A87B3F8-240C-4A58-8289-31D2FF30681F}"/>
               </a:ext>
             </a:extLst>
           </p:cNvPr>
@@ -6423,7 +9885,7 @@
           <p:cNvPr id="3" name="">
             <a:extLst xmlns:a="http://schemas.openxmlformats.org/drawingml/2006/main">
               <a:ext uri="{FF2B5EF4-FFF2-40B4-BE49-F238E27FC236}">
-                <a16:creationId xmlns:a16="http://schemas.microsoft.com/office/drawing/2014/main" id="{B9599219-FB0F-4265-83C0-2D4BDAD21A10}"/>
+                <a16:creationId xmlns:a16="http://schemas.microsoft.com/office/drawing/2014/main" id="{0BBC8194-93C2-40C1-9E80-0C8231F063D1}"/>
               </a:ext>
             </a:extLst>
           </p:cNvPr>
@@ -6458,7 +9920,7 @@
           <p:nvPr/>
         </p:nvPicPr>
         <p:blipFill>
-          <a:blip xmlns:r="http://schemas.openxmlformats.org/officeDocument/2006/relationships" xmlns:a="http://schemas.openxmlformats.org/drawingml/2006/main" r:embed="Rd01ec63977b44f35"/>
+          <a:blip xmlns:r="http://schemas.openxmlformats.org/officeDocument/2006/relationships" xmlns:a="http://schemas.openxmlformats.org/drawingml/2006/main" r:embed="R143e6562c1864d33"/>
           <a:stretch xmlns:a="http://schemas.openxmlformats.org/drawingml/2006/main"/>
         </p:blipFill>
         <p:spPr>
@@ -6476,7 +9938,7 @@
           <p:cNvPr id="5" name="">
             <a:extLst xmlns:a="http://schemas.openxmlformats.org/drawingml/2006/main">
               <a:ext uri="{FF2B5EF4-FFF2-40B4-BE49-F238E27FC236}">
-                <a16:creationId xmlns:a16="http://schemas.microsoft.com/office/drawing/2014/main" id="{BCA550AA-9150-409F-8EA6-8BE7C4B0208C}"/>
+                <a16:creationId xmlns:a16="http://schemas.microsoft.com/office/drawing/2014/main" id="{8048E2A4-C1B1-4F8D-B887-50AA7EECD31F}"/>
               </a:ext>
             </a:extLst>
           </p:cNvPr>
@@ -6526,7 +9988,7 @@
           <p:cNvPr id="6" name="">
             <a:extLst xmlns:a="http://schemas.openxmlformats.org/drawingml/2006/main">
               <a:ext uri="{FF2B5EF4-FFF2-40B4-BE49-F238E27FC236}">
-                <a16:creationId xmlns:a16="http://schemas.microsoft.com/office/drawing/2014/main" id="{F3AF0545-61FA-4730-B052-E238AE8F40BC}"/>
+                <a16:creationId xmlns:a16="http://schemas.microsoft.com/office/drawing/2014/main" id="{ADAE09F9-ECE6-4A98-A3CA-328753551038}"/>
               </a:ext>
             </a:extLst>
           </p:cNvPr>
@@ -6574,7 +10036,7 @@
     </p:spTree>
     <p:extLst>
       <p:ext uri="{BB962C8B-B14F-4D97-AF65-F5344CB8AC3E}">
-        <p14:creationId xmlns:p14="http://schemas.microsoft.com/office/powerpoint/2010/main" val="1687094444"/>
+        <p14:creationId xmlns:p14="http://schemas.microsoft.com/office/powerpoint/2010/main" val="730828306"/>
       </p:ext>
     </p:extLst>
   </p:cSld>

--- a/presentations/gen5_4_ml_decision_engine_incremental_build.pptx
+++ b/presentations/gen5_4_ml_decision_engine_incremental_build.pptx
@@ -2,29 +2,35 @@
 <file path=ppt/presentation.xml><?xml version="1.0" encoding="utf-8"?>
 <p:presentation xmlns:p="http://schemas.openxmlformats.org/presentationml/2006/main">
   <p:sldMasterIdLst>
-    <p:sldMasterId xmlns:r="http://schemas.openxmlformats.org/officeDocument/2006/relationships" id="2147483648" r:id="Rb707c0c617c44f5f"/>
+    <p:sldMasterId xmlns:r="http://schemas.openxmlformats.org/officeDocument/2006/relationships" id="2147483648" r:id="R6d41729f27f342ac"/>
   </p:sldMasterIdLst>
   <p:notesMasterIdLst>
-    <p:notesMasterId xmlns:r="http://schemas.openxmlformats.org/officeDocument/2006/relationships" r:id="R27608b05f04c46d9"/>
+    <p:notesMasterId xmlns:r="http://schemas.openxmlformats.org/officeDocument/2006/relationships" r:id="R043d61efd29a47bc"/>
   </p:notesMasterIdLst>
   <p:sldIdLst>
-    <p:sldId xmlns:r="http://schemas.openxmlformats.org/officeDocument/2006/relationships" id="256" r:id="R2aff7e8acff749d7"/>
-    <p:sldId xmlns:r="http://schemas.openxmlformats.org/officeDocument/2006/relationships" id="257" r:id="Rb7c27742628d4312"/>
-    <p:sldId xmlns:r="http://schemas.openxmlformats.org/officeDocument/2006/relationships" id="258" r:id="R6e05c5979eb048b1"/>
-    <p:sldId xmlns:r="http://schemas.openxmlformats.org/officeDocument/2006/relationships" id="259" r:id="Rc17acef321df40c8"/>
-    <p:sldId xmlns:r="http://schemas.openxmlformats.org/officeDocument/2006/relationships" id="260" r:id="R2139a1163d4946e5"/>
-    <p:sldId xmlns:r="http://schemas.openxmlformats.org/officeDocument/2006/relationships" id="261" r:id="Rcc36a9fba9514e54"/>
-    <p:sldId xmlns:r="http://schemas.openxmlformats.org/officeDocument/2006/relationships" id="262" r:id="R52e81f1b7cce450f"/>
-    <p:sldId xmlns:r="http://schemas.openxmlformats.org/officeDocument/2006/relationships" id="263" r:id="R4e9745ced60e4c5d"/>
-    <p:sldId xmlns:r="http://schemas.openxmlformats.org/officeDocument/2006/relationships" id="264" r:id="R66d61afad71b43a2"/>
-    <p:sldId xmlns:r="http://schemas.openxmlformats.org/officeDocument/2006/relationships" id="265" r:id="Rc06a3a9b543144b2"/>
-    <p:sldId xmlns:r="http://schemas.openxmlformats.org/officeDocument/2006/relationships" id="266" r:id="Rd78829dd075f4fcf"/>
-    <p:sldId xmlns:r="http://schemas.openxmlformats.org/officeDocument/2006/relationships" id="267" r:id="R296052f1e7984a01"/>
-    <p:sldId xmlns:r="http://schemas.openxmlformats.org/officeDocument/2006/relationships" id="268" r:id="R594f24f54e8f42b7"/>
-    <p:sldId xmlns:r="http://schemas.openxmlformats.org/officeDocument/2006/relationships" id="269" r:id="Rc52d03f33f0e40eb"/>
-    <p:sldId xmlns:r="http://schemas.openxmlformats.org/officeDocument/2006/relationships" id="270" r:id="R31adc33a12ac4ab6"/>
-    <p:sldId xmlns:r="http://schemas.openxmlformats.org/officeDocument/2006/relationships" id="271" r:id="R9839342601494d6d"/>
-    <p:sldId xmlns:r="http://schemas.openxmlformats.org/officeDocument/2006/relationships" id="272" r:id="Rac05c9d3386a4f5e"/>
+    <p:sldId xmlns:r="http://schemas.openxmlformats.org/officeDocument/2006/relationships" id="256" r:id="R4eba74f325d04d1c"/>
+    <p:sldId xmlns:r="http://schemas.openxmlformats.org/officeDocument/2006/relationships" id="257" r:id="R193a6581455145c3"/>
+    <p:sldId xmlns:r="http://schemas.openxmlformats.org/officeDocument/2006/relationships" id="258" r:id="R0a3df4233f5b43a8"/>
+    <p:sldId xmlns:r="http://schemas.openxmlformats.org/officeDocument/2006/relationships" id="259" r:id="R5dc8012d94534b84"/>
+    <p:sldId xmlns:r="http://schemas.openxmlformats.org/officeDocument/2006/relationships" id="260" r:id="Rde70e23c898f4b5e"/>
+    <p:sldId xmlns:r="http://schemas.openxmlformats.org/officeDocument/2006/relationships" id="261" r:id="R35e9d67dbdf847d2"/>
+    <p:sldId xmlns:r="http://schemas.openxmlformats.org/officeDocument/2006/relationships" id="262" r:id="Rb9fb15f0a42646c7"/>
+    <p:sldId xmlns:r="http://schemas.openxmlformats.org/officeDocument/2006/relationships" id="263" r:id="R8aa8334d5d864572"/>
+    <p:sldId xmlns:r="http://schemas.openxmlformats.org/officeDocument/2006/relationships" id="264" r:id="R7b7c552059f64007"/>
+    <p:sldId xmlns:r="http://schemas.openxmlformats.org/officeDocument/2006/relationships" id="265" r:id="Re12480b505c24f72"/>
+    <p:sldId xmlns:r="http://schemas.openxmlformats.org/officeDocument/2006/relationships" id="266" r:id="R8aac13fd05be4331"/>
+    <p:sldId xmlns:r="http://schemas.openxmlformats.org/officeDocument/2006/relationships" id="267" r:id="Rde8455fe5f814c61"/>
+    <p:sldId xmlns:r="http://schemas.openxmlformats.org/officeDocument/2006/relationships" id="268" r:id="R67711544fc154a50"/>
+    <p:sldId xmlns:r="http://schemas.openxmlformats.org/officeDocument/2006/relationships" id="269" r:id="Rfb6450fbba1d4c2a"/>
+    <p:sldId xmlns:r="http://schemas.openxmlformats.org/officeDocument/2006/relationships" id="270" r:id="R41d0f0615e6b4fa7"/>
+    <p:sldId xmlns:r="http://schemas.openxmlformats.org/officeDocument/2006/relationships" id="271" r:id="Rf775f735c7034712"/>
+    <p:sldId xmlns:r="http://schemas.openxmlformats.org/officeDocument/2006/relationships" id="272" r:id="R8151a4f4f3ca4fed"/>
+    <p:sldId xmlns:r="http://schemas.openxmlformats.org/officeDocument/2006/relationships" id="273" r:id="R51fed3a7319642f5"/>
+    <p:sldId xmlns:r="http://schemas.openxmlformats.org/officeDocument/2006/relationships" id="274" r:id="Ra6d2a73654a548a4"/>
+    <p:sldId xmlns:r="http://schemas.openxmlformats.org/officeDocument/2006/relationships" id="275" r:id="Ra394ba65e9304e85"/>
+    <p:sldId xmlns:r="http://schemas.openxmlformats.org/officeDocument/2006/relationships" id="276" r:id="R962fbe9229794304"/>
+    <p:sldId xmlns:r="http://schemas.openxmlformats.org/officeDocument/2006/relationships" id="277" r:id="R51aa217391e64253"/>
+    <p:sldId xmlns:r="http://schemas.openxmlformats.org/officeDocument/2006/relationships" id="278" r:id="R53630d97e41e4f27"/>
   </p:sldIdLst>
   <p:sldSz cx="12192000" cy="6858000"/>
   <p:notesSz cx="6858000" cy="9144000"/>
@@ -1107,7 +1113,403 @@
 </p:notes>
 </file>
 
+<file path=ppt/notesSlides/notesSlide18.xml><?xml version="1.0" encoding="utf-8"?>
+<p:notes xmlns:p="http://schemas.openxmlformats.org/presentationml/2006/main">
+  <p:cSld>
+    <p:spTree>
+      <p:nvGrpSpPr>
+        <p:cNvPr id="1" name=""/>
+        <p:cNvGrpSpPr/>
+        <p:nvPr/>
+      </p:nvGrpSpPr>
+      <p:grpSpPr>
+        <a:xfrm xmlns:a="http://schemas.openxmlformats.org/drawingml/2006/main"/>
+      </p:grpSpPr>
+      <p:sp>
+        <p:nvSpPr>
+          <p:cNvPr id="2" name="Slide Image Placeholder 1"/>
+          <p:cNvSpPr>
+            <a:spLocks xmlns:a="http://schemas.openxmlformats.org/drawingml/2006/main" noGrp="1"/>
+          </p:cNvSpPr>
+          <p:nvPr>
+            <p:ph type="sldImg" idx="0"/>
+          </p:nvPr>
+        </p:nvSpPr>
+        <p:spPr/>
+      </p:sp>
+      <p:sp>
+        <p:nvSpPr>
+          <p:cNvPr id="3" name="Notes Placeholder 2"/>
+          <p:cNvSpPr>
+            <a:spLocks xmlns:a="http://schemas.openxmlformats.org/drawingml/2006/main" noGrp="1"/>
+          </p:cNvSpPr>
+          <p:nvPr>
+            <p:ph type="body" idx="1"/>
+          </p:nvPr>
+        </p:nvSpPr>
+        <p:spPr/>
+        <p:txBody>
+          <a:bodyPr xmlns:a="http://schemas.openxmlformats.org/drawingml/2006/main"/>
+          <a:lstStyle xmlns:a="http://schemas.openxmlformats.org/drawingml/2006/main"/>
+          <a:p xmlns:a="http://schemas.openxmlformats.org/drawingml/2006/main"/>
+        </p:txBody>
+      </p:sp>
+      <p:sp>
+        <p:nvSpPr>
+          <p:cNvPr id="4" name="Slide Number Placeholder 3"/>
+          <p:cNvSpPr>
+            <a:spLocks xmlns:a="http://schemas.openxmlformats.org/drawingml/2006/main" noGrp="1"/>
+          </p:cNvSpPr>
+          <p:nvPr>
+            <p:ph type="sldNum" idx="5"/>
+          </p:nvPr>
+        </p:nvSpPr>
+        <p:spPr/>
+        <p:txBody>
+          <a:bodyPr xmlns:a="http://schemas.openxmlformats.org/drawingml/2006/main"/>
+          <a:lstStyle xmlns:a="http://schemas.openxmlformats.org/drawingml/2006/main"/>
+          <a:p xmlns:a="http://schemas.openxmlformats.org/drawingml/2006/main"/>
+        </p:txBody>
+      </p:sp>
+    </p:spTree>
+  </p:cSld>
+  <p:clrMapOvr>
+    <a:masterClrMapping xmlns:a="http://schemas.openxmlformats.org/drawingml/2006/main"/>
+  </p:clrMapOvr>
+</p:notes>
+</file>
+
+<file path=ppt/notesSlides/notesSlide19.xml><?xml version="1.0" encoding="utf-8"?>
+<p:notes xmlns:p="http://schemas.openxmlformats.org/presentationml/2006/main">
+  <p:cSld>
+    <p:spTree>
+      <p:nvGrpSpPr>
+        <p:cNvPr id="1" name=""/>
+        <p:cNvGrpSpPr/>
+        <p:nvPr/>
+      </p:nvGrpSpPr>
+      <p:grpSpPr>
+        <a:xfrm xmlns:a="http://schemas.openxmlformats.org/drawingml/2006/main"/>
+      </p:grpSpPr>
+      <p:sp>
+        <p:nvSpPr>
+          <p:cNvPr id="2" name="Slide Image Placeholder 1"/>
+          <p:cNvSpPr>
+            <a:spLocks xmlns:a="http://schemas.openxmlformats.org/drawingml/2006/main" noGrp="1"/>
+          </p:cNvSpPr>
+          <p:nvPr>
+            <p:ph type="sldImg" idx="0"/>
+          </p:nvPr>
+        </p:nvSpPr>
+        <p:spPr/>
+      </p:sp>
+      <p:sp>
+        <p:nvSpPr>
+          <p:cNvPr id="3" name="Notes Placeholder 2"/>
+          <p:cNvSpPr>
+            <a:spLocks xmlns:a="http://schemas.openxmlformats.org/drawingml/2006/main" noGrp="1"/>
+          </p:cNvSpPr>
+          <p:nvPr>
+            <p:ph type="body" idx="1"/>
+          </p:nvPr>
+        </p:nvSpPr>
+        <p:spPr/>
+        <p:txBody>
+          <a:bodyPr xmlns:a="http://schemas.openxmlformats.org/drawingml/2006/main"/>
+          <a:lstStyle xmlns:a="http://schemas.openxmlformats.org/drawingml/2006/main"/>
+          <a:p xmlns:a="http://schemas.openxmlformats.org/drawingml/2006/main"/>
+        </p:txBody>
+      </p:sp>
+      <p:sp>
+        <p:nvSpPr>
+          <p:cNvPr id="4" name="Slide Number Placeholder 3"/>
+          <p:cNvSpPr>
+            <a:spLocks xmlns:a="http://schemas.openxmlformats.org/drawingml/2006/main" noGrp="1"/>
+          </p:cNvSpPr>
+          <p:nvPr>
+            <p:ph type="sldNum" idx="5"/>
+          </p:nvPr>
+        </p:nvSpPr>
+        <p:spPr/>
+        <p:txBody>
+          <a:bodyPr xmlns:a="http://schemas.openxmlformats.org/drawingml/2006/main"/>
+          <a:lstStyle xmlns:a="http://schemas.openxmlformats.org/drawingml/2006/main"/>
+          <a:p xmlns:a="http://schemas.openxmlformats.org/drawingml/2006/main"/>
+        </p:txBody>
+      </p:sp>
+    </p:spTree>
+  </p:cSld>
+  <p:clrMapOvr>
+    <a:masterClrMapping xmlns:a="http://schemas.openxmlformats.org/drawingml/2006/main"/>
+  </p:clrMapOvr>
+</p:notes>
+</file>
+
 <file path=ppt/notesSlides/notesSlide2.xml><?xml version="1.0" encoding="utf-8"?>
+<p:notes xmlns:p="http://schemas.openxmlformats.org/presentationml/2006/main">
+  <p:cSld>
+    <p:spTree>
+      <p:nvGrpSpPr>
+        <p:cNvPr id="1" name=""/>
+        <p:cNvGrpSpPr/>
+        <p:nvPr/>
+      </p:nvGrpSpPr>
+      <p:grpSpPr>
+        <a:xfrm xmlns:a="http://schemas.openxmlformats.org/drawingml/2006/main"/>
+      </p:grpSpPr>
+      <p:sp>
+        <p:nvSpPr>
+          <p:cNvPr id="2" name="Slide Image Placeholder 1"/>
+          <p:cNvSpPr>
+            <a:spLocks xmlns:a="http://schemas.openxmlformats.org/drawingml/2006/main" noGrp="1"/>
+          </p:cNvSpPr>
+          <p:nvPr>
+            <p:ph type="sldImg" idx="0"/>
+          </p:nvPr>
+        </p:nvSpPr>
+        <p:spPr/>
+      </p:sp>
+      <p:sp>
+        <p:nvSpPr>
+          <p:cNvPr id="3" name="Notes Placeholder 2"/>
+          <p:cNvSpPr>
+            <a:spLocks xmlns:a="http://schemas.openxmlformats.org/drawingml/2006/main" noGrp="1"/>
+          </p:cNvSpPr>
+          <p:nvPr>
+            <p:ph type="body" idx="1"/>
+          </p:nvPr>
+        </p:nvSpPr>
+        <p:spPr/>
+        <p:txBody>
+          <a:bodyPr xmlns:a="http://schemas.openxmlformats.org/drawingml/2006/main"/>
+          <a:lstStyle xmlns:a="http://schemas.openxmlformats.org/drawingml/2006/main"/>
+          <a:p xmlns:a="http://schemas.openxmlformats.org/drawingml/2006/main"/>
+        </p:txBody>
+      </p:sp>
+      <p:sp>
+        <p:nvSpPr>
+          <p:cNvPr id="4" name="Slide Number Placeholder 3"/>
+          <p:cNvSpPr>
+            <a:spLocks xmlns:a="http://schemas.openxmlformats.org/drawingml/2006/main" noGrp="1"/>
+          </p:cNvSpPr>
+          <p:nvPr>
+            <p:ph type="sldNum" idx="5"/>
+          </p:nvPr>
+        </p:nvSpPr>
+        <p:spPr/>
+        <p:txBody>
+          <a:bodyPr xmlns:a="http://schemas.openxmlformats.org/drawingml/2006/main"/>
+          <a:lstStyle xmlns:a="http://schemas.openxmlformats.org/drawingml/2006/main"/>
+          <a:p xmlns:a="http://schemas.openxmlformats.org/drawingml/2006/main"/>
+        </p:txBody>
+      </p:sp>
+    </p:spTree>
+  </p:cSld>
+  <p:clrMapOvr>
+    <a:masterClrMapping xmlns:a="http://schemas.openxmlformats.org/drawingml/2006/main"/>
+  </p:clrMapOvr>
+</p:notes>
+</file>
+
+<file path=ppt/notesSlides/notesSlide20.xml><?xml version="1.0" encoding="utf-8"?>
+<p:notes xmlns:p="http://schemas.openxmlformats.org/presentationml/2006/main">
+  <p:cSld>
+    <p:spTree>
+      <p:nvGrpSpPr>
+        <p:cNvPr id="1" name=""/>
+        <p:cNvGrpSpPr/>
+        <p:nvPr/>
+      </p:nvGrpSpPr>
+      <p:grpSpPr>
+        <a:xfrm xmlns:a="http://schemas.openxmlformats.org/drawingml/2006/main"/>
+      </p:grpSpPr>
+      <p:sp>
+        <p:nvSpPr>
+          <p:cNvPr id="2" name="Slide Image Placeholder 1"/>
+          <p:cNvSpPr>
+            <a:spLocks xmlns:a="http://schemas.openxmlformats.org/drawingml/2006/main" noGrp="1"/>
+          </p:cNvSpPr>
+          <p:nvPr>
+            <p:ph type="sldImg" idx="0"/>
+          </p:nvPr>
+        </p:nvSpPr>
+        <p:spPr/>
+      </p:sp>
+      <p:sp>
+        <p:nvSpPr>
+          <p:cNvPr id="3" name="Notes Placeholder 2"/>
+          <p:cNvSpPr>
+            <a:spLocks xmlns:a="http://schemas.openxmlformats.org/drawingml/2006/main" noGrp="1"/>
+          </p:cNvSpPr>
+          <p:nvPr>
+            <p:ph type="body" idx="1"/>
+          </p:nvPr>
+        </p:nvSpPr>
+        <p:spPr/>
+        <p:txBody>
+          <a:bodyPr xmlns:a="http://schemas.openxmlformats.org/drawingml/2006/main"/>
+          <a:lstStyle xmlns:a="http://schemas.openxmlformats.org/drawingml/2006/main"/>
+          <a:p xmlns:a="http://schemas.openxmlformats.org/drawingml/2006/main"/>
+        </p:txBody>
+      </p:sp>
+      <p:sp>
+        <p:nvSpPr>
+          <p:cNvPr id="4" name="Slide Number Placeholder 3"/>
+          <p:cNvSpPr>
+            <a:spLocks xmlns:a="http://schemas.openxmlformats.org/drawingml/2006/main" noGrp="1"/>
+          </p:cNvSpPr>
+          <p:nvPr>
+            <p:ph type="sldNum" idx="5"/>
+          </p:nvPr>
+        </p:nvSpPr>
+        <p:spPr/>
+        <p:txBody>
+          <a:bodyPr xmlns:a="http://schemas.openxmlformats.org/drawingml/2006/main"/>
+          <a:lstStyle xmlns:a="http://schemas.openxmlformats.org/drawingml/2006/main"/>
+          <a:p xmlns:a="http://schemas.openxmlformats.org/drawingml/2006/main"/>
+        </p:txBody>
+      </p:sp>
+    </p:spTree>
+  </p:cSld>
+  <p:clrMapOvr>
+    <a:masterClrMapping xmlns:a="http://schemas.openxmlformats.org/drawingml/2006/main"/>
+  </p:clrMapOvr>
+</p:notes>
+</file>
+
+<file path=ppt/notesSlides/notesSlide21.xml><?xml version="1.0" encoding="utf-8"?>
+<p:notes xmlns:p="http://schemas.openxmlformats.org/presentationml/2006/main">
+  <p:cSld>
+    <p:spTree>
+      <p:nvGrpSpPr>
+        <p:cNvPr id="1" name=""/>
+        <p:cNvGrpSpPr/>
+        <p:nvPr/>
+      </p:nvGrpSpPr>
+      <p:grpSpPr>
+        <a:xfrm xmlns:a="http://schemas.openxmlformats.org/drawingml/2006/main"/>
+      </p:grpSpPr>
+      <p:sp>
+        <p:nvSpPr>
+          <p:cNvPr id="2" name="Slide Image Placeholder 1"/>
+          <p:cNvSpPr>
+            <a:spLocks xmlns:a="http://schemas.openxmlformats.org/drawingml/2006/main" noGrp="1"/>
+          </p:cNvSpPr>
+          <p:nvPr>
+            <p:ph type="sldImg" idx="0"/>
+          </p:nvPr>
+        </p:nvSpPr>
+        <p:spPr/>
+      </p:sp>
+      <p:sp>
+        <p:nvSpPr>
+          <p:cNvPr id="3" name="Notes Placeholder 2"/>
+          <p:cNvSpPr>
+            <a:spLocks xmlns:a="http://schemas.openxmlformats.org/drawingml/2006/main" noGrp="1"/>
+          </p:cNvSpPr>
+          <p:nvPr>
+            <p:ph type="body" idx="1"/>
+          </p:nvPr>
+        </p:nvSpPr>
+        <p:spPr/>
+        <p:txBody>
+          <a:bodyPr xmlns:a="http://schemas.openxmlformats.org/drawingml/2006/main"/>
+          <a:lstStyle xmlns:a="http://schemas.openxmlformats.org/drawingml/2006/main"/>
+          <a:p xmlns:a="http://schemas.openxmlformats.org/drawingml/2006/main"/>
+        </p:txBody>
+      </p:sp>
+      <p:sp>
+        <p:nvSpPr>
+          <p:cNvPr id="4" name="Slide Number Placeholder 3"/>
+          <p:cNvSpPr>
+            <a:spLocks xmlns:a="http://schemas.openxmlformats.org/drawingml/2006/main" noGrp="1"/>
+          </p:cNvSpPr>
+          <p:nvPr>
+            <p:ph type="sldNum" idx="5"/>
+          </p:nvPr>
+        </p:nvSpPr>
+        <p:spPr/>
+        <p:txBody>
+          <a:bodyPr xmlns:a="http://schemas.openxmlformats.org/drawingml/2006/main"/>
+          <a:lstStyle xmlns:a="http://schemas.openxmlformats.org/drawingml/2006/main"/>
+          <a:p xmlns:a="http://schemas.openxmlformats.org/drawingml/2006/main"/>
+        </p:txBody>
+      </p:sp>
+    </p:spTree>
+  </p:cSld>
+  <p:clrMapOvr>
+    <a:masterClrMapping xmlns:a="http://schemas.openxmlformats.org/drawingml/2006/main"/>
+  </p:clrMapOvr>
+</p:notes>
+</file>
+
+<file path=ppt/notesSlides/notesSlide22.xml><?xml version="1.0" encoding="utf-8"?>
+<p:notes xmlns:p="http://schemas.openxmlformats.org/presentationml/2006/main">
+  <p:cSld>
+    <p:spTree>
+      <p:nvGrpSpPr>
+        <p:cNvPr id="1" name=""/>
+        <p:cNvGrpSpPr/>
+        <p:nvPr/>
+      </p:nvGrpSpPr>
+      <p:grpSpPr>
+        <a:xfrm xmlns:a="http://schemas.openxmlformats.org/drawingml/2006/main"/>
+      </p:grpSpPr>
+      <p:sp>
+        <p:nvSpPr>
+          <p:cNvPr id="2" name="Slide Image Placeholder 1"/>
+          <p:cNvSpPr>
+            <a:spLocks xmlns:a="http://schemas.openxmlformats.org/drawingml/2006/main" noGrp="1"/>
+          </p:cNvSpPr>
+          <p:nvPr>
+            <p:ph type="sldImg" idx="0"/>
+          </p:nvPr>
+        </p:nvSpPr>
+        <p:spPr/>
+      </p:sp>
+      <p:sp>
+        <p:nvSpPr>
+          <p:cNvPr id="3" name="Notes Placeholder 2"/>
+          <p:cNvSpPr>
+            <a:spLocks xmlns:a="http://schemas.openxmlformats.org/drawingml/2006/main" noGrp="1"/>
+          </p:cNvSpPr>
+          <p:nvPr>
+            <p:ph type="body" idx="1"/>
+          </p:nvPr>
+        </p:nvSpPr>
+        <p:spPr/>
+        <p:txBody>
+          <a:bodyPr xmlns:a="http://schemas.openxmlformats.org/drawingml/2006/main"/>
+          <a:lstStyle xmlns:a="http://schemas.openxmlformats.org/drawingml/2006/main"/>
+          <a:p xmlns:a="http://schemas.openxmlformats.org/drawingml/2006/main"/>
+        </p:txBody>
+      </p:sp>
+      <p:sp>
+        <p:nvSpPr>
+          <p:cNvPr id="4" name="Slide Number Placeholder 3"/>
+          <p:cNvSpPr>
+            <a:spLocks xmlns:a="http://schemas.openxmlformats.org/drawingml/2006/main" noGrp="1"/>
+          </p:cNvSpPr>
+          <p:nvPr>
+            <p:ph type="sldNum" idx="5"/>
+          </p:nvPr>
+        </p:nvSpPr>
+        <p:spPr/>
+        <p:txBody>
+          <a:bodyPr xmlns:a="http://schemas.openxmlformats.org/drawingml/2006/main"/>
+          <a:lstStyle xmlns:a="http://schemas.openxmlformats.org/drawingml/2006/main"/>
+          <a:p xmlns:a="http://schemas.openxmlformats.org/drawingml/2006/main"/>
+        </p:txBody>
+      </p:sp>
+    </p:spTree>
+  </p:cSld>
+  <p:clrMapOvr>
+    <a:masterClrMapping xmlns:a="http://schemas.openxmlformats.org/drawingml/2006/main"/>
+  </p:clrMapOvr>
+</p:notes>
+</file>
+
+<file path=ppt/notesSlides/notesSlide23.xml><?xml version="1.0" encoding="utf-8"?>
 <p:notes xmlns:p="http://schemas.openxmlformats.org/presentationml/2006/main">
   <p:cSld>
     <p:spTree>
@@ -1673,7 +2075,7 @@
   </p:cSld>
   <p:clrMap bg1="lt1" tx1="dk1" bg2="lt2" tx2="dk2" accent1="accent1" accent2="accent2" accent3="accent3" accent4="accent4" accent5="accent5" accent6="accent6" hlink="hlink" folHlink="folHlink"/>
   <p:sldLayoutIdLst>
-    <p:sldLayoutId xmlns:r="http://schemas.openxmlformats.org/officeDocument/2006/relationships" id="2147483649" r:id="R48674be5d3da4449"/>
+    <p:sldLayoutId xmlns:r="http://schemas.openxmlformats.org/officeDocument/2006/relationships" id="2147483649" r:id="Re940d0972a354b1b"/>
   </p:sldLayoutIdLst>
   <p:txStyles>
     <p:titleStyle>
@@ -2224,7 +2626,7 @@
           <p:cNvPr id="1" name="">
             <a:extLst xmlns:a="http://schemas.openxmlformats.org/drawingml/2006/main">
               <a:ext uri="{FF2B5EF4-FFF2-40B4-BE49-F238E27FC236}">
-                <a16:creationId xmlns:a16="http://schemas.microsoft.com/office/drawing/2014/main" id="{22DD9EAA-DED7-4A68-9ED9-7E1AFAEFB75B}"/>
+                <a16:creationId xmlns:a16="http://schemas.microsoft.com/office/drawing/2014/main" id="{59BB3E52-9162-40E8-AE58-C6DEA8BB3053}"/>
               </a:ext>
             </a:extLst>
           </p:cNvPr>
@@ -2274,7 +2676,7 @@
           <p:cNvPr id="2" name="">
             <a:extLst xmlns:a="http://schemas.openxmlformats.org/drawingml/2006/main">
               <a:ext uri="{FF2B5EF4-FFF2-40B4-BE49-F238E27FC236}">
-                <a16:creationId xmlns:a16="http://schemas.microsoft.com/office/drawing/2014/main" id="{74D4798E-90B8-4E56-8BD3-53ED7F5EFF2A}"/>
+                <a16:creationId xmlns:a16="http://schemas.microsoft.com/office/drawing/2014/main" id="{38976D15-4D07-43E2-92B1-48D91A5B7404}"/>
               </a:ext>
             </a:extLst>
           </p:cNvPr>
@@ -2324,7 +2726,7 @@
           <p:cNvPr id="3" name="">
             <a:extLst xmlns:a="http://schemas.openxmlformats.org/drawingml/2006/main">
               <a:ext uri="{FF2B5EF4-FFF2-40B4-BE49-F238E27FC236}">
-                <a16:creationId xmlns:a16="http://schemas.microsoft.com/office/drawing/2014/main" id="{2108B7D8-3993-4710-855B-A725AED2FBA4}"/>
+                <a16:creationId xmlns:a16="http://schemas.microsoft.com/office/drawing/2014/main" id="{0D7755E5-19CD-49ED-AC67-B73AECF8A498}"/>
               </a:ext>
             </a:extLst>
           </p:cNvPr>
@@ -2374,7 +2776,7 @@
           <p:cNvPr id="4" name="">
             <a:extLst xmlns:a="http://schemas.openxmlformats.org/drawingml/2006/main">
               <a:ext uri="{FF2B5EF4-FFF2-40B4-BE49-F238E27FC236}">
-                <a16:creationId xmlns:a16="http://schemas.microsoft.com/office/drawing/2014/main" id="{168EF6BD-500C-47C0-9193-1F14C389A897}"/>
+                <a16:creationId xmlns:a16="http://schemas.microsoft.com/office/drawing/2014/main" id="{6160136D-5195-45F5-A72D-CCF9B768D391}"/>
               </a:ext>
             </a:extLst>
           </p:cNvPr>
@@ -2405,7 +2807,7 @@
           <p:cNvPr id="5" name="">
             <a:extLst xmlns:a="http://schemas.openxmlformats.org/drawingml/2006/main">
               <a:ext uri="{FF2B5EF4-FFF2-40B4-BE49-F238E27FC236}">
-                <a16:creationId xmlns:a16="http://schemas.microsoft.com/office/drawing/2014/main" id="{EB2A158B-2493-48D7-B6A6-AF7D1575D2C8}"/>
+                <a16:creationId xmlns:a16="http://schemas.microsoft.com/office/drawing/2014/main" id="{AFC51EA1-60C4-4523-9A9F-610C30AD4EF4}"/>
               </a:ext>
             </a:extLst>
           </p:cNvPr>
@@ -2455,7 +2857,7 @@
           <p:cNvPr id="6" name="">
             <a:extLst xmlns:a="http://schemas.openxmlformats.org/drawingml/2006/main">
               <a:ext uri="{FF2B5EF4-FFF2-40B4-BE49-F238E27FC236}">
-                <a16:creationId xmlns:a16="http://schemas.microsoft.com/office/drawing/2014/main" id="{531B1FE1-037C-4E09-93FF-0967BE4B99BB}"/>
+                <a16:creationId xmlns:a16="http://schemas.microsoft.com/office/drawing/2014/main" id="{2640BD6F-79DD-491F-B873-3E51361F9D97}"/>
               </a:ext>
             </a:extLst>
           </p:cNvPr>
@@ -2486,7 +2888,7 @@
           <p:cNvPr id="7" name="">
             <a:extLst xmlns:a="http://schemas.openxmlformats.org/drawingml/2006/main">
               <a:ext uri="{FF2B5EF4-FFF2-40B4-BE49-F238E27FC236}">
-                <a16:creationId xmlns:a16="http://schemas.microsoft.com/office/drawing/2014/main" id="{0645951D-59D7-481A-94F5-A566A74D08CD}"/>
+                <a16:creationId xmlns:a16="http://schemas.microsoft.com/office/drawing/2014/main" id="{DAB0027C-26D8-40BA-A3DB-ABC4E2A986DC}"/>
               </a:ext>
             </a:extLst>
           </p:cNvPr>
@@ -2536,7 +2938,7 @@
           <p:cNvPr id="8" name="">
             <a:extLst xmlns:a="http://schemas.openxmlformats.org/drawingml/2006/main">
               <a:ext uri="{FF2B5EF4-FFF2-40B4-BE49-F238E27FC236}">
-                <a16:creationId xmlns:a16="http://schemas.microsoft.com/office/drawing/2014/main" id="{B5F49E97-235D-43EA-BFA4-2AA41194BC17}"/>
+                <a16:creationId xmlns:a16="http://schemas.microsoft.com/office/drawing/2014/main" id="{5E7BEF9E-8944-423C-968B-58A9006D79F1}"/>
               </a:ext>
             </a:extLst>
           </p:cNvPr>
@@ -2618,7 +3020,7 @@
     </p:spTree>
     <p:extLst>
       <p:ext uri="{BB962C8B-B14F-4D97-AF65-F5344CB8AC3E}">
-        <p14:creationId xmlns:p14="http://schemas.microsoft.com/office/powerpoint/2010/main" val="1741620921"/>
+        <p14:creationId xmlns:p14="http://schemas.microsoft.com/office/powerpoint/2010/main" val="1689252231"/>
       </p:ext>
     </p:extLst>
   </p:cSld>
@@ -2649,7 +3051,7 @@
           <p:cNvPr id="1" name="">
             <a:extLst xmlns:a="http://schemas.openxmlformats.org/drawingml/2006/main">
               <a:ext uri="{FF2B5EF4-FFF2-40B4-BE49-F238E27FC236}">
-                <a16:creationId xmlns:a16="http://schemas.microsoft.com/office/drawing/2014/main" id="{E9433120-54E9-48E7-B64D-7D58861E3762}"/>
+                <a16:creationId xmlns:a16="http://schemas.microsoft.com/office/drawing/2014/main" id="{7385A021-9C60-4029-AA59-CEA877CB382E}"/>
               </a:ext>
             </a:extLst>
           </p:cNvPr>
@@ -2699,7 +3101,7 @@
           <p:cNvPr id="2" name="">
             <a:extLst xmlns:a="http://schemas.openxmlformats.org/drawingml/2006/main">
               <a:ext uri="{FF2B5EF4-FFF2-40B4-BE49-F238E27FC236}">
-                <a16:creationId xmlns:a16="http://schemas.microsoft.com/office/drawing/2014/main" id="{377AAB0A-234E-4BF8-8749-607462636B49}"/>
+                <a16:creationId xmlns:a16="http://schemas.microsoft.com/office/drawing/2014/main" id="{BF64F2CB-0818-483E-80D8-A4963800CD29}"/>
               </a:ext>
             </a:extLst>
           </p:cNvPr>
@@ -2749,7 +3151,7 @@
           <p:cNvPr id="3" name="">
             <a:extLst xmlns:a="http://schemas.openxmlformats.org/drawingml/2006/main">
               <a:ext uri="{FF2B5EF4-FFF2-40B4-BE49-F238E27FC236}">
-                <a16:creationId xmlns:a16="http://schemas.microsoft.com/office/drawing/2014/main" id="{A123B74E-EBC7-47F6-BDF4-4275072C5F00}"/>
+                <a16:creationId xmlns:a16="http://schemas.microsoft.com/office/drawing/2014/main" id="{45A51AFB-8D32-4984-A2A4-E245F6222A52}"/>
               </a:ext>
             </a:extLst>
           </p:cNvPr>
@@ -2780,7 +3182,7 @@
           <p:cNvPr id="4" name="">
             <a:extLst xmlns:a="http://schemas.openxmlformats.org/drawingml/2006/main">
               <a:ext uri="{FF2B5EF4-FFF2-40B4-BE49-F238E27FC236}">
-                <a16:creationId xmlns:a16="http://schemas.microsoft.com/office/drawing/2014/main" id="{22888014-DF4E-4741-A439-49705E9F56CC}"/>
+                <a16:creationId xmlns:a16="http://schemas.microsoft.com/office/drawing/2014/main" id="{82FEA1D7-D43E-4826-BC85-571A3E78AC3C}"/>
               </a:ext>
             </a:extLst>
           </p:cNvPr>
@@ -2830,7 +3232,7 @@
           <p:cNvPr id="5" name="">
             <a:extLst xmlns:a="http://schemas.openxmlformats.org/drawingml/2006/main">
               <a:ext uri="{FF2B5EF4-FFF2-40B4-BE49-F238E27FC236}">
-                <a16:creationId xmlns:a16="http://schemas.microsoft.com/office/drawing/2014/main" id="{E2CB7C25-C316-4C07-B795-201F3C558FFC}"/>
+                <a16:creationId xmlns:a16="http://schemas.microsoft.com/office/drawing/2014/main" id="{2D323D4A-DFCA-42B2-BC89-449A4DCF46CB}"/>
               </a:ext>
             </a:extLst>
           </p:cNvPr>
@@ -2880,7 +3282,7 @@
           <p:cNvPr id="6" name="">
             <a:extLst xmlns:a="http://schemas.openxmlformats.org/drawingml/2006/main">
               <a:ext uri="{FF2B5EF4-FFF2-40B4-BE49-F238E27FC236}">
-                <a16:creationId xmlns:a16="http://schemas.microsoft.com/office/drawing/2014/main" id="{008E636A-20FC-473C-8E32-BC1D34EEC805}"/>
+                <a16:creationId xmlns:a16="http://schemas.microsoft.com/office/drawing/2014/main" id="{144591CE-BF27-447B-AC11-0F77CCF6D3FA}"/>
               </a:ext>
             </a:extLst>
           </p:cNvPr>
@@ -2930,7 +3332,7 @@
           <p:cNvPr id="7" name="">
             <a:extLst xmlns:a="http://schemas.openxmlformats.org/drawingml/2006/main">
               <a:ext uri="{FF2B5EF4-FFF2-40B4-BE49-F238E27FC236}">
-                <a16:creationId xmlns:a16="http://schemas.microsoft.com/office/drawing/2014/main" id="{81C1E11A-DA31-4027-AF79-CB2768896CC9}"/>
+                <a16:creationId xmlns:a16="http://schemas.microsoft.com/office/drawing/2014/main" id="{2FE2F7B3-6722-46C6-AE1D-6D55784A5D40}"/>
               </a:ext>
             </a:extLst>
           </p:cNvPr>
@@ -2980,7 +3382,7 @@
           <p:cNvPr id="8" name="">
             <a:extLst xmlns:a="http://schemas.openxmlformats.org/drawingml/2006/main">
               <a:ext uri="{FF2B5EF4-FFF2-40B4-BE49-F238E27FC236}">
-                <a16:creationId xmlns:a16="http://schemas.microsoft.com/office/drawing/2014/main" id="{070DD0C6-3850-41AD-AF31-5242E3D0E32E}"/>
+                <a16:creationId xmlns:a16="http://schemas.microsoft.com/office/drawing/2014/main" id="{88B88587-6F76-4CAC-9028-F1F4AEBC0797}"/>
               </a:ext>
             </a:extLst>
           </p:cNvPr>
@@ -3030,7 +3432,7 @@
           <p:cNvPr id="9" name="">
             <a:extLst xmlns:a="http://schemas.openxmlformats.org/drawingml/2006/main">
               <a:ext uri="{FF2B5EF4-FFF2-40B4-BE49-F238E27FC236}">
-                <a16:creationId xmlns:a16="http://schemas.microsoft.com/office/drawing/2014/main" id="{F2DE1AD5-1493-4952-A325-9A0E993FF858}"/>
+                <a16:creationId xmlns:a16="http://schemas.microsoft.com/office/drawing/2014/main" id="{81188256-06B7-4159-A280-42578B36C10C}"/>
               </a:ext>
             </a:extLst>
           </p:cNvPr>
@@ -3080,7 +3482,7 @@
           <p:cNvPr id="10" name="">
             <a:extLst xmlns:a="http://schemas.openxmlformats.org/drawingml/2006/main">
               <a:ext uri="{FF2B5EF4-FFF2-40B4-BE49-F238E27FC236}">
-                <a16:creationId xmlns:a16="http://schemas.microsoft.com/office/drawing/2014/main" id="{90C25DD9-2476-4EAF-9760-8A4E9803B1D9}"/>
+                <a16:creationId xmlns:a16="http://schemas.microsoft.com/office/drawing/2014/main" id="{2A4309AB-94AB-408F-8D68-4ED044358569}"/>
               </a:ext>
             </a:extLst>
           </p:cNvPr>
@@ -3130,7 +3532,7 @@
           <p:cNvPr id="11" name="">
             <a:extLst xmlns:a="http://schemas.openxmlformats.org/drawingml/2006/main">
               <a:ext uri="{FF2B5EF4-FFF2-40B4-BE49-F238E27FC236}">
-                <a16:creationId xmlns:a16="http://schemas.microsoft.com/office/drawing/2014/main" id="{E00CDFB8-B9C2-4BDF-90EE-82123BA8E721}"/>
+                <a16:creationId xmlns:a16="http://schemas.microsoft.com/office/drawing/2014/main" id="{0FFD3B68-D515-4FBD-9976-4D07F45CE8B8}"/>
               </a:ext>
             </a:extLst>
           </p:cNvPr>
@@ -3180,7 +3582,7 @@
           <p:cNvPr id="12" name="">
             <a:extLst xmlns:a="http://schemas.openxmlformats.org/drawingml/2006/main">
               <a:ext uri="{FF2B5EF4-FFF2-40B4-BE49-F238E27FC236}">
-                <a16:creationId xmlns:a16="http://schemas.microsoft.com/office/drawing/2014/main" id="{306A68B5-1FF9-4F48-AE3D-99B240DFE1F9}"/>
+                <a16:creationId xmlns:a16="http://schemas.microsoft.com/office/drawing/2014/main" id="{9C4A2045-944D-47CC-8EB4-01F168C63C4F}"/>
               </a:ext>
             </a:extLst>
           </p:cNvPr>
@@ -3230,7 +3632,7 @@
           <p:cNvPr id="13" name="">
             <a:extLst xmlns:a="http://schemas.openxmlformats.org/drawingml/2006/main">
               <a:ext uri="{FF2B5EF4-FFF2-40B4-BE49-F238E27FC236}">
-                <a16:creationId xmlns:a16="http://schemas.microsoft.com/office/drawing/2014/main" id="{D83FF65D-7C2F-4140-9656-9C9B5B92AC23}"/>
+                <a16:creationId xmlns:a16="http://schemas.microsoft.com/office/drawing/2014/main" id="{0E23F1EB-F0A8-43A0-9AB8-C6036008466F}"/>
               </a:ext>
             </a:extLst>
           </p:cNvPr>
@@ -3263,7 +3665,7 @@
           <p:cNvPr id="14" name="">
             <a:extLst xmlns:a="http://schemas.openxmlformats.org/drawingml/2006/main">
               <a:ext uri="{FF2B5EF4-FFF2-40B4-BE49-F238E27FC236}">
-                <a16:creationId xmlns:a16="http://schemas.microsoft.com/office/drawing/2014/main" id="{CC4D7CB7-6EF8-420F-B5C5-171871E04535}"/>
+                <a16:creationId xmlns:a16="http://schemas.microsoft.com/office/drawing/2014/main" id="{C8004F40-7D42-4AB6-8C8D-5CDF4F0857A5}"/>
               </a:ext>
             </a:extLst>
           </p:cNvPr>
@@ -3313,7 +3715,7 @@
           <p:cNvPr id="15" name="">
             <a:extLst xmlns:a="http://schemas.openxmlformats.org/drawingml/2006/main">
               <a:ext uri="{FF2B5EF4-FFF2-40B4-BE49-F238E27FC236}">
-                <a16:creationId xmlns:a16="http://schemas.microsoft.com/office/drawing/2014/main" id="{3109ADDB-48A8-4412-B2E4-8CAFD94E7DA1}"/>
+                <a16:creationId xmlns:a16="http://schemas.microsoft.com/office/drawing/2014/main" id="{EFC7893A-A3EA-4063-BCF9-7264573C62A5}"/>
               </a:ext>
             </a:extLst>
           </p:cNvPr>
@@ -3361,7 +3763,7 @@
     </p:spTree>
     <p:extLst>
       <p:ext uri="{BB962C8B-B14F-4D97-AF65-F5344CB8AC3E}">
-        <p14:creationId xmlns:p14="http://schemas.microsoft.com/office/powerpoint/2010/main" val="2059781940"/>
+        <p14:creationId xmlns:p14="http://schemas.microsoft.com/office/powerpoint/2010/main" val="400742922"/>
       </p:ext>
     </p:extLst>
   </p:cSld>
@@ -3392,7 +3794,7 @@
           <p:cNvPr id="1" name="">
             <a:extLst xmlns:a="http://schemas.openxmlformats.org/drawingml/2006/main">
               <a:ext uri="{FF2B5EF4-FFF2-40B4-BE49-F238E27FC236}">
-                <a16:creationId xmlns:a16="http://schemas.microsoft.com/office/drawing/2014/main" id="{BAB78496-6B8D-498C-9F6D-D0A8682DA063}"/>
+                <a16:creationId xmlns:a16="http://schemas.microsoft.com/office/drawing/2014/main" id="{4211F84F-FA20-4763-9A66-4EAA48070BD8}"/>
               </a:ext>
             </a:extLst>
           </p:cNvPr>
@@ -3442,7 +3844,7 @@
           <p:cNvPr id="2" name="">
             <a:extLst xmlns:a="http://schemas.openxmlformats.org/drawingml/2006/main">
               <a:ext uri="{FF2B5EF4-FFF2-40B4-BE49-F238E27FC236}">
-                <a16:creationId xmlns:a16="http://schemas.microsoft.com/office/drawing/2014/main" id="{C43701A2-ED47-4AFC-8CA8-F9E9209F1255}"/>
+                <a16:creationId xmlns:a16="http://schemas.microsoft.com/office/drawing/2014/main" id="{92432B98-F985-4CD7-97B7-C36E70664DC3}"/>
               </a:ext>
             </a:extLst>
           </p:cNvPr>
@@ -3492,7 +3894,7 @@
           <p:cNvPr id="3" name="">
             <a:extLst xmlns:a="http://schemas.openxmlformats.org/drawingml/2006/main">
               <a:ext uri="{FF2B5EF4-FFF2-40B4-BE49-F238E27FC236}">
-                <a16:creationId xmlns:a16="http://schemas.microsoft.com/office/drawing/2014/main" id="{9EBA40C5-3BC3-4CD0-BCE0-4A052156F139}"/>
+                <a16:creationId xmlns:a16="http://schemas.microsoft.com/office/drawing/2014/main" id="{ED203186-2BAD-4ED9-A00D-CD2C82C612C7}"/>
               </a:ext>
             </a:extLst>
           </p:cNvPr>
@@ -3523,7 +3925,7 @@
           <p:cNvPr id="4" name="">
             <a:extLst xmlns:a="http://schemas.openxmlformats.org/drawingml/2006/main">
               <a:ext uri="{FF2B5EF4-FFF2-40B4-BE49-F238E27FC236}">
-                <a16:creationId xmlns:a16="http://schemas.microsoft.com/office/drawing/2014/main" id="{1BF0108E-FFFE-4644-A73C-AB2EBF4AD59B}"/>
+                <a16:creationId xmlns:a16="http://schemas.microsoft.com/office/drawing/2014/main" id="{3ACE3083-E3CC-4ACF-9B57-6F47F2FD7DCC}"/>
               </a:ext>
             </a:extLst>
           </p:cNvPr>
@@ -3573,7 +3975,7 @@
           <p:cNvPr id="5" name="">
             <a:extLst xmlns:a="http://schemas.openxmlformats.org/drawingml/2006/main">
               <a:ext uri="{FF2B5EF4-FFF2-40B4-BE49-F238E27FC236}">
-                <a16:creationId xmlns:a16="http://schemas.microsoft.com/office/drawing/2014/main" id="{18F2328B-BF2F-4628-9415-1077679B85A7}"/>
+                <a16:creationId xmlns:a16="http://schemas.microsoft.com/office/drawing/2014/main" id="{8289A70F-51F6-4E4E-ACE5-3491869587C3}"/>
               </a:ext>
             </a:extLst>
           </p:cNvPr>
@@ -3604,7 +4006,7 @@
           <p:cNvPr id="6" name="">
             <a:extLst xmlns:a="http://schemas.openxmlformats.org/drawingml/2006/main">
               <a:ext uri="{FF2B5EF4-FFF2-40B4-BE49-F238E27FC236}">
-                <a16:creationId xmlns:a16="http://schemas.microsoft.com/office/drawing/2014/main" id="{E59E8A10-FBF2-4ECA-B4FE-A57A7E3946D2}"/>
+                <a16:creationId xmlns:a16="http://schemas.microsoft.com/office/drawing/2014/main" id="{6472C047-305F-4CD7-943E-CF04FD1AA1D6}"/>
               </a:ext>
             </a:extLst>
           </p:cNvPr>
@@ -3654,7 +4056,7 @@
           <p:cNvPr id="7" name="">
             <a:extLst xmlns:a="http://schemas.openxmlformats.org/drawingml/2006/main">
               <a:ext uri="{FF2B5EF4-FFF2-40B4-BE49-F238E27FC236}">
-                <a16:creationId xmlns:a16="http://schemas.microsoft.com/office/drawing/2014/main" id="{C1D56FAB-09FB-44F2-AA9F-6FFCDBC2433C}"/>
+                <a16:creationId xmlns:a16="http://schemas.microsoft.com/office/drawing/2014/main" id="{EABEA74D-9CF9-4CCE-9A12-6DCE038D844D}"/>
               </a:ext>
             </a:extLst>
           </p:cNvPr>
@@ -3702,7 +4104,7 @@
     </p:spTree>
     <p:extLst>
       <p:ext uri="{BB962C8B-B14F-4D97-AF65-F5344CB8AC3E}">
-        <p14:creationId xmlns:p14="http://schemas.microsoft.com/office/powerpoint/2010/main" val="1272524852"/>
+        <p14:creationId xmlns:p14="http://schemas.microsoft.com/office/powerpoint/2010/main" val="459008695"/>
       </p:ext>
     </p:extLst>
   </p:cSld>
@@ -3733,7 +4135,7 @@
           <p:cNvPr id="1" name="">
             <a:extLst xmlns:a="http://schemas.openxmlformats.org/drawingml/2006/main">
               <a:ext uri="{FF2B5EF4-FFF2-40B4-BE49-F238E27FC236}">
-                <a16:creationId xmlns:a16="http://schemas.microsoft.com/office/drawing/2014/main" id="{D94409FE-8D27-47EB-A7EF-5446947686A8}"/>
+                <a16:creationId xmlns:a16="http://schemas.microsoft.com/office/drawing/2014/main" id="{18326ED2-0C5D-44BF-9032-3741CAF5737A}"/>
               </a:ext>
             </a:extLst>
           </p:cNvPr>
@@ -3783,7 +4185,7 @@
           <p:cNvPr id="2" name="">
             <a:extLst xmlns:a="http://schemas.openxmlformats.org/drawingml/2006/main">
               <a:ext uri="{FF2B5EF4-FFF2-40B4-BE49-F238E27FC236}">
-                <a16:creationId xmlns:a16="http://schemas.microsoft.com/office/drawing/2014/main" id="{DC3CC4F6-EEC9-4F98-AB06-2111D81B603C}"/>
+                <a16:creationId xmlns:a16="http://schemas.microsoft.com/office/drawing/2014/main" id="{020CBFED-5DE1-438D-A2AB-1B5428D39152}"/>
               </a:ext>
             </a:extLst>
           </p:cNvPr>
@@ -3833,7 +4235,7 @@
           <p:cNvPr id="3" name="">
             <a:extLst xmlns:a="http://schemas.openxmlformats.org/drawingml/2006/main">
               <a:ext uri="{FF2B5EF4-FFF2-40B4-BE49-F238E27FC236}">
-                <a16:creationId xmlns:a16="http://schemas.microsoft.com/office/drawing/2014/main" id="{F6D9BC46-D8E9-4DA8-A754-002431DE46D0}"/>
+                <a16:creationId xmlns:a16="http://schemas.microsoft.com/office/drawing/2014/main" id="{EC9AD9DB-BA18-4907-862E-69CA40ACB85D}"/>
               </a:ext>
             </a:extLst>
           </p:cNvPr>
@@ -3864,7 +4266,7 @@
           <p:cNvPr id="4" name="">
             <a:extLst xmlns:a="http://schemas.openxmlformats.org/drawingml/2006/main">
               <a:ext uri="{FF2B5EF4-FFF2-40B4-BE49-F238E27FC236}">
-                <a16:creationId xmlns:a16="http://schemas.microsoft.com/office/drawing/2014/main" id="{9381AF91-F9B8-44CB-A9EC-936FBCE3D1AD}"/>
+                <a16:creationId xmlns:a16="http://schemas.microsoft.com/office/drawing/2014/main" id="{B62CF4CA-03ED-409B-A72E-F994C2A7446B}"/>
               </a:ext>
             </a:extLst>
           </p:cNvPr>
@@ -3876,7 +4278,7 @@
         <p:spPr>
           <a:xfrm xmlns:a="http://schemas.openxmlformats.org/drawingml/2006/main">
             <a:off x="819150" y="2152650"/>
-            <a:ext cx="2333625" cy="1200150"/>
+            <a:ext cx="2333625" cy="1428750"/>
           </a:xfrm>
           <a:prstGeom xmlns:a="http://schemas.openxmlformats.org/drawingml/2006/main" prst="rect">
             <a:avLst/>
@@ -3897,7 +4299,7 @@
           <p:cNvPr id="5" name="">
             <a:extLst xmlns:a="http://schemas.openxmlformats.org/drawingml/2006/main">
               <a:ext uri="{FF2B5EF4-FFF2-40B4-BE49-F238E27FC236}">
-                <a16:creationId xmlns:a16="http://schemas.microsoft.com/office/drawing/2014/main" id="{926E6486-5646-4AD0-8731-963A520563D3}"/>
+                <a16:creationId xmlns:a16="http://schemas.microsoft.com/office/drawing/2014/main" id="{AB7EAB94-8874-484C-BC4E-E92A281CD231}"/>
               </a:ext>
             </a:extLst>
           </p:cNvPr>
@@ -3947,7 +4349,7 @@
           <p:cNvPr id="6" name="">
             <a:extLst xmlns:a="http://schemas.openxmlformats.org/drawingml/2006/main">
               <a:ext uri="{FF2B5EF4-FFF2-40B4-BE49-F238E27FC236}">
-                <a16:creationId xmlns:a16="http://schemas.microsoft.com/office/drawing/2014/main" id="{AC448AA7-7C54-4C6B-BBF9-7D72856BCFFE}"/>
+                <a16:creationId xmlns:a16="http://schemas.microsoft.com/office/drawing/2014/main" id="{B558EE7F-3E14-48B2-BF6A-431CFF1F5A27}"/>
               </a:ext>
             </a:extLst>
           </p:cNvPr>
@@ -3997,7 +4399,7 @@
           <p:cNvPr id="7" name="">
             <a:extLst xmlns:a="http://schemas.openxmlformats.org/drawingml/2006/main">
               <a:ext uri="{FF2B5EF4-FFF2-40B4-BE49-F238E27FC236}">
-                <a16:creationId xmlns:a16="http://schemas.microsoft.com/office/drawing/2014/main" id="{07B95273-76CF-47FF-9E93-68188C85FA69}"/>
+                <a16:creationId xmlns:a16="http://schemas.microsoft.com/office/drawing/2014/main" id="{A548452D-CAA2-447D-9DAB-4D6F7AC63B31}"/>
               </a:ext>
             </a:extLst>
           </p:cNvPr>
@@ -4009,7 +4411,7 @@
         <p:spPr>
           <a:xfrm xmlns:a="http://schemas.openxmlformats.org/drawingml/2006/main">
             <a:off x="990600" y="2971800"/>
-            <a:ext cx="1990725" cy="323850"/>
+            <a:ext cx="1990725" cy="552450"/>
           </a:xfrm>
           <a:prstGeom xmlns:a="http://schemas.openxmlformats.org/drawingml/2006/main" prst="rect">
             <a:avLst/>
@@ -4047,7 +4449,7 @@
           <p:cNvPr id="8" name="">
             <a:extLst xmlns:a="http://schemas.openxmlformats.org/drawingml/2006/main">
               <a:ext uri="{FF2B5EF4-FFF2-40B4-BE49-F238E27FC236}">
-                <a16:creationId xmlns:a16="http://schemas.microsoft.com/office/drawing/2014/main" id="{0A43E010-8C1E-4D1E-A966-1FE0651E28DD}"/>
+                <a16:creationId xmlns:a16="http://schemas.microsoft.com/office/drawing/2014/main" id="{6F7EA969-5AA0-49B7-A17C-A752BCCED253}"/>
               </a:ext>
             </a:extLst>
           </p:cNvPr>
@@ -4059,7 +4461,7 @@
         <p:spPr>
           <a:xfrm xmlns:a="http://schemas.openxmlformats.org/drawingml/2006/main">
             <a:off x="3524250" y="2152650"/>
-            <a:ext cx="2333625" cy="1200150"/>
+            <a:ext cx="2333625" cy="1428750"/>
           </a:xfrm>
           <a:prstGeom xmlns:a="http://schemas.openxmlformats.org/drawingml/2006/main" prst="rect">
             <a:avLst/>
@@ -4080,7 +4482,7 @@
           <p:cNvPr id="9" name="">
             <a:extLst xmlns:a="http://schemas.openxmlformats.org/drawingml/2006/main">
               <a:ext uri="{FF2B5EF4-FFF2-40B4-BE49-F238E27FC236}">
-                <a16:creationId xmlns:a16="http://schemas.microsoft.com/office/drawing/2014/main" id="{7941A2AA-93C8-475B-ABFA-82B856044C8E}"/>
+                <a16:creationId xmlns:a16="http://schemas.microsoft.com/office/drawing/2014/main" id="{03AE1B82-D94C-4D70-B78B-05BFFF9E631F}"/>
               </a:ext>
             </a:extLst>
           </p:cNvPr>
@@ -4130,7 +4532,7 @@
           <p:cNvPr id="10" name="">
             <a:extLst xmlns:a="http://schemas.openxmlformats.org/drawingml/2006/main">
               <a:ext uri="{FF2B5EF4-FFF2-40B4-BE49-F238E27FC236}">
-                <a16:creationId xmlns:a16="http://schemas.microsoft.com/office/drawing/2014/main" id="{D289D85E-767F-4440-920B-3D49876A70F1}"/>
+                <a16:creationId xmlns:a16="http://schemas.microsoft.com/office/drawing/2014/main" id="{92264780-4677-4C96-AF56-C193C9833763}"/>
               </a:ext>
             </a:extLst>
           </p:cNvPr>
@@ -4180,7 +4582,7 @@
           <p:cNvPr id="11" name="">
             <a:extLst xmlns:a="http://schemas.openxmlformats.org/drawingml/2006/main">
               <a:ext uri="{FF2B5EF4-FFF2-40B4-BE49-F238E27FC236}">
-                <a16:creationId xmlns:a16="http://schemas.microsoft.com/office/drawing/2014/main" id="{C9914161-045C-4C05-9CC9-2ACB7023B031}"/>
+                <a16:creationId xmlns:a16="http://schemas.microsoft.com/office/drawing/2014/main" id="{E6E5551B-3A4B-4EF9-8100-2CC005A3D3D7}"/>
               </a:ext>
             </a:extLst>
           </p:cNvPr>
@@ -4192,7 +4594,7 @@
         <p:spPr>
           <a:xfrm xmlns:a="http://schemas.openxmlformats.org/drawingml/2006/main">
             <a:off x="3695700" y="2971800"/>
-            <a:ext cx="1990725" cy="323850"/>
+            <a:ext cx="1990725" cy="552450"/>
           </a:xfrm>
           <a:prstGeom xmlns:a="http://schemas.openxmlformats.org/drawingml/2006/main" prst="rect">
             <a:avLst/>
@@ -4230,7 +4632,7 @@
           <p:cNvPr id="12" name="">
             <a:extLst xmlns:a="http://schemas.openxmlformats.org/drawingml/2006/main">
               <a:ext uri="{FF2B5EF4-FFF2-40B4-BE49-F238E27FC236}">
-                <a16:creationId xmlns:a16="http://schemas.microsoft.com/office/drawing/2014/main" id="{C168FAA0-81EA-40C7-B5C5-576807DE6921}"/>
+                <a16:creationId xmlns:a16="http://schemas.microsoft.com/office/drawing/2014/main" id="{CE184D7A-E7A9-42F8-8F28-F0427547DCB2}"/>
               </a:ext>
             </a:extLst>
           </p:cNvPr>
@@ -4242,7 +4644,7 @@
         <p:spPr>
           <a:xfrm xmlns:a="http://schemas.openxmlformats.org/drawingml/2006/main">
             <a:off x="6229350" y="2152650"/>
-            <a:ext cx="2333625" cy="1200150"/>
+            <a:ext cx="2333625" cy="1428750"/>
           </a:xfrm>
           <a:prstGeom xmlns:a="http://schemas.openxmlformats.org/drawingml/2006/main" prst="rect">
             <a:avLst/>
@@ -4263,7 +4665,7 @@
           <p:cNvPr id="13" name="">
             <a:extLst xmlns:a="http://schemas.openxmlformats.org/drawingml/2006/main">
               <a:ext uri="{FF2B5EF4-FFF2-40B4-BE49-F238E27FC236}">
-                <a16:creationId xmlns:a16="http://schemas.microsoft.com/office/drawing/2014/main" id="{4246C54F-C939-44CB-B12F-E777AF3F485F}"/>
+                <a16:creationId xmlns:a16="http://schemas.microsoft.com/office/drawing/2014/main" id="{BE74687A-78B9-47C2-85C5-8EC20206CD92}"/>
               </a:ext>
             </a:extLst>
           </p:cNvPr>
@@ -4313,7 +4715,7 @@
           <p:cNvPr id="14" name="">
             <a:extLst xmlns:a="http://schemas.openxmlformats.org/drawingml/2006/main">
               <a:ext uri="{FF2B5EF4-FFF2-40B4-BE49-F238E27FC236}">
-                <a16:creationId xmlns:a16="http://schemas.microsoft.com/office/drawing/2014/main" id="{534BA515-B339-4C53-B80A-21E57E283A49}"/>
+                <a16:creationId xmlns:a16="http://schemas.microsoft.com/office/drawing/2014/main" id="{969C08B4-4571-49EC-BB16-E23F3E23FD8C}"/>
               </a:ext>
             </a:extLst>
           </p:cNvPr>
@@ -4363,7 +4765,7 @@
           <p:cNvPr id="15" name="">
             <a:extLst xmlns:a="http://schemas.openxmlformats.org/drawingml/2006/main">
               <a:ext uri="{FF2B5EF4-FFF2-40B4-BE49-F238E27FC236}">
-                <a16:creationId xmlns:a16="http://schemas.microsoft.com/office/drawing/2014/main" id="{3B2A0946-494D-478C-AABB-650D08EABCEE}"/>
+                <a16:creationId xmlns:a16="http://schemas.microsoft.com/office/drawing/2014/main" id="{009054D5-9C14-4B65-90A3-2A13C2032F38}"/>
               </a:ext>
             </a:extLst>
           </p:cNvPr>
@@ -4375,7 +4777,7 @@
         <p:spPr>
           <a:xfrm xmlns:a="http://schemas.openxmlformats.org/drawingml/2006/main">
             <a:off x="6400800" y="2971800"/>
-            <a:ext cx="1990725" cy="323850"/>
+            <a:ext cx="1990725" cy="552450"/>
           </a:xfrm>
           <a:prstGeom xmlns:a="http://schemas.openxmlformats.org/drawingml/2006/main" prst="rect">
             <a:avLst/>
@@ -4413,7 +4815,7 @@
           <p:cNvPr id="16" name="">
             <a:extLst xmlns:a="http://schemas.openxmlformats.org/drawingml/2006/main">
               <a:ext uri="{FF2B5EF4-FFF2-40B4-BE49-F238E27FC236}">
-                <a16:creationId xmlns:a16="http://schemas.microsoft.com/office/drawing/2014/main" id="{2C301819-07BA-4164-87F1-05CAF99C69F3}"/>
+                <a16:creationId xmlns:a16="http://schemas.microsoft.com/office/drawing/2014/main" id="{18B7F644-FE00-480F-AA59-BBD22705E3E9}"/>
               </a:ext>
             </a:extLst>
           </p:cNvPr>
@@ -4425,7 +4827,7 @@
         <p:spPr>
           <a:xfrm xmlns:a="http://schemas.openxmlformats.org/drawingml/2006/main">
             <a:off x="8934450" y="2152650"/>
-            <a:ext cx="2333625" cy="1200150"/>
+            <a:ext cx="2333625" cy="1428750"/>
           </a:xfrm>
           <a:prstGeom xmlns:a="http://schemas.openxmlformats.org/drawingml/2006/main" prst="rect">
             <a:avLst/>
@@ -4446,7 +4848,7 @@
           <p:cNvPr id="17" name="">
             <a:extLst xmlns:a="http://schemas.openxmlformats.org/drawingml/2006/main">
               <a:ext uri="{FF2B5EF4-FFF2-40B4-BE49-F238E27FC236}">
-                <a16:creationId xmlns:a16="http://schemas.microsoft.com/office/drawing/2014/main" id="{8CC08740-0A01-4C0C-9D92-27EDDA824070}"/>
+                <a16:creationId xmlns:a16="http://schemas.microsoft.com/office/drawing/2014/main" id="{5F1B45B4-CF71-410B-83B4-5FB2FDBFBC37}"/>
               </a:ext>
             </a:extLst>
           </p:cNvPr>
@@ -4496,7 +4898,7 @@
           <p:cNvPr id="18" name="">
             <a:extLst xmlns:a="http://schemas.openxmlformats.org/drawingml/2006/main">
               <a:ext uri="{FF2B5EF4-FFF2-40B4-BE49-F238E27FC236}">
-                <a16:creationId xmlns:a16="http://schemas.microsoft.com/office/drawing/2014/main" id="{E8FBA8DF-C648-4BC9-A4F5-5D8A119013C1}"/>
+                <a16:creationId xmlns:a16="http://schemas.microsoft.com/office/drawing/2014/main" id="{F20FB1DA-8365-49A2-A149-B952245BFF10}"/>
               </a:ext>
             </a:extLst>
           </p:cNvPr>
@@ -4546,7 +4948,7 @@
           <p:cNvPr id="19" name="">
             <a:extLst xmlns:a="http://schemas.openxmlformats.org/drawingml/2006/main">
               <a:ext uri="{FF2B5EF4-FFF2-40B4-BE49-F238E27FC236}">
-                <a16:creationId xmlns:a16="http://schemas.microsoft.com/office/drawing/2014/main" id="{3E482B9E-055E-4018-A6F8-7335BAFBE52B}"/>
+                <a16:creationId xmlns:a16="http://schemas.microsoft.com/office/drawing/2014/main" id="{A096E9ED-07A2-4F5C-86C2-EAD1F08475BC}"/>
               </a:ext>
             </a:extLst>
           </p:cNvPr>
@@ -4558,7 +4960,7 @@
         <p:spPr>
           <a:xfrm xmlns:a="http://schemas.openxmlformats.org/drawingml/2006/main">
             <a:off x="9105900" y="2971800"/>
-            <a:ext cx="1990725" cy="323850"/>
+            <a:ext cx="1990725" cy="552450"/>
           </a:xfrm>
           <a:prstGeom xmlns:a="http://schemas.openxmlformats.org/drawingml/2006/main" prst="rect">
             <a:avLst/>
@@ -4596,7 +4998,7 @@
           <p:cNvPr id="20" name="">
             <a:extLst xmlns:a="http://schemas.openxmlformats.org/drawingml/2006/main">
               <a:ext uri="{FF2B5EF4-FFF2-40B4-BE49-F238E27FC236}">
-                <a16:creationId xmlns:a16="http://schemas.microsoft.com/office/drawing/2014/main" id="{577B79E9-1BB6-4C1E-A96D-1790E0B2EE54}"/>
+                <a16:creationId xmlns:a16="http://schemas.microsoft.com/office/drawing/2014/main" id="{6219B49B-9873-4C54-9AD3-2C0C021463ED}"/>
               </a:ext>
             </a:extLst>
           </p:cNvPr>
@@ -4644,7 +5046,7 @@
     </p:spTree>
     <p:extLst>
       <p:ext uri="{BB962C8B-B14F-4D97-AF65-F5344CB8AC3E}">
-        <p14:creationId xmlns:p14="http://schemas.microsoft.com/office/powerpoint/2010/main" val="1722505646"/>
+        <p14:creationId xmlns:p14="http://schemas.microsoft.com/office/powerpoint/2010/main" val="1014400353"/>
       </p:ext>
     </p:extLst>
   </p:cSld>
@@ -4675,7 +5077,7 @@
           <p:cNvPr id="1" name="">
             <a:extLst xmlns:a="http://schemas.openxmlformats.org/drawingml/2006/main">
               <a:ext uri="{FF2B5EF4-FFF2-40B4-BE49-F238E27FC236}">
-                <a16:creationId xmlns:a16="http://schemas.microsoft.com/office/drawing/2014/main" id="{223799F1-D6BF-4BC1-93A5-BD6951CEC742}"/>
+                <a16:creationId xmlns:a16="http://schemas.microsoft.com/office/drawing/2014/main" id="{DFFEAB07-6A74-482F-BCB9-25BCB18B96DB}"/>
               </a:ext>
             </a:extLst>
           </p:cNvPr>
@@ -4725,7 +5127,7 @@
           <p:cNvPr id="2" name="">
             <a:extLst xmlns:a="http://schemas.openxmlformats.org/drawingml/2006/main">
               <a:ext uri="{FF2B5EF4-FFF2-40B4-BE49-F238E27FC236}">
-                <a16:creationId xmlns:a16="http://schemas.microsoft.com/office/drawing/2014/main" id="{6A34D0D8-8461-41CD-BD0B-0E16C6C85D76}"/>
+                <a16:creationId xmlns:a16="http://schemas.microsoft.com/office/drawing/2014/main" id="{E742E6A5-0500-4B7B-B6DC-6B5DA87421B9}"/>
               </a:ext>
             </a:extLst>
           </p:cNvPr>
@@ -4775,7 +5177,7 @@
           <p:cNvPr id="3" name="">
             <a:extLst xmlns:a="http://schemas.openxmlformats.org/drawingml/2006/main">
               <a:ext uri="{FF2B5EF4-FFF2-40B4-BE49-F238E27FC236}">
-                <a16:creationId xmlns:a16="http://schemas.microsoft.com/office/drawing/2014/main" id="{25761B01-669B-41B5-8EC0-D8DEC8317240}"/>
+                <a16:creationId xmlns:a16="http://schemas.microsoft.com/office/drawing/2014/main" id="{42B7F470-7E50-496C-A9B8-2D0CA4719876}"/>
               </a:ext>
             </a:extLst>
           </p:cNvPr>
@@ -4810,7 +5212,7 @@
           <p:nvPr/>
         </p:nvPicPr>
         <p:blipFill>
-          <a:blip xmlns:r="http://schemas.openxmlformats.org/officeDocument/2006/relationships" xmlns:a="http://schemas.openxmlformats.org/drawingml/2006/main" r:embed="Rdb4ccd48a1ef407b"/>
+          <a:blip xmlns:r="http://schemas.openxmlformats.org/officeDocument/2006/relationships" xmlns:a="http://schemas.openxmlformats.org/drawingml/2006/main" r:embed="R3199541267de4371"/>
           <a:stretch xmlns:a="http://schemas.openxmlformats.org/drawingml/2006/main"/>
         </p:blipFill>
         <p:spPr>
@@ -4828,7 +5230,7 @@
           <p:cNvPr id="5" name="">
             <a:extLst xmlns:a="http://schemas.openxmlformats.org/drawingml/2006/main">
               <a:ext uri="{FF2B5EF4-FFF2-40B4-BE49-F238E27FC236}">
-                <a16:creationId xmlns:a16="http://schemas.microsoft.com/office/drawing/2014/main" id="{D31C325D-BE86-44D5-8410-932A9DB6227A}"/>
+                <a16:creationId xmlns:a16="http://schemas.microsoft.com/office/drawing/2014/main" id="{584FFD6A-287D-4047-B123-CDBC09A39521}"/>
               </a:ext>
             </a:extLst>
           </p:cNvPr>
@@ -4878,7 +5280,7 @@
           <p:cNvPr id="6" name="">
             <a:extLst xmlns:a="http://schemas.openxmlformats.org/drawingml/2006/main">
               <a:ext uri="{FF2B5EF4-FFF2-40B4-BE49-F238E27FC236}">
-                <a16:creationId xmlns:a16="http://schemas.microsoft.com/office/drawing/2014/main" id="{56E8C882-7CB3-42D9-80C2-5A28F72CFBC6}"/>
+                <a16:creationId xmlns:a16="http://schemas.microsoft.com/office/drawing/2014/main" id="{7026A023-D6D0-4D66-B542-E0B9DA54D75B}"/>
               </a:ext>
             </a:extLst>
           </p:cNvPr>
@@ -4926,7 +5328,7 @@
     </p:spTree>
     <p:extLst>
       <p:ext uri="{BB962C8B-B14F-4D97-AF65-F5344CB8AC3E}">
-        <p14:creationId xmlns:p14="http://schemas.microsoft.com/office/powerpoint/2010/main" val="1009614114"/>
+        <p14:creationId xmlns:p14="http://schemas.microsoft.com/office/powerpoint/2010/main" val="89913412"/>
       </p:ext>
     </p:extLst>
   </p:cSld>
@@ -4957,7 +5359,7 @@
           <p:cNvPr id="1" name="">
             <a:extLst xmlns:a="http://schemas.openxmlformats.org/drawingml/2006/main">
               <a:ext uri="{FF2B5EF4-FFF2-40B4-BE49-F238E27FC236}">
-                <a16:creationId xmlns:a16="http://schemas.microsoft.com/office/drawing/2014/main" id="{6C634AD6-EF0A-4918-AEA4-BBF8C9881F9F}"/>
+                <a16:creationId xmlns:a16="http://schemas.microsoft.com/office/drawing/2014/main" id="{442D9A59-504B-460E-95C1-75AA28CB624D}"/>
               </a:ext>
             </a:extLst>
           </p:cNvPr>
@@ -5007,7 +5409,7 @@
           <p:cNvPr id="2" name="">
             <a:extLst xmlns:a="http://schemas.openxmlformats.org/drawingml/2006/main">
               <a:ext uri="{FF2B5EF4-FFF2-40B4-BE49-F238E27FC236}">
-                <a16:creationId xmlns:a16="http://schemas.microsoft.com/office/drawing/2014/main" id="{4589C4A9-22E5-4BA8-8646-7ECB09F8273D}"/>
+                <a16:creationId xmlns:a16="http://schemas.microsoft.com/office/drawing/2014/main" id="{3694F35A-D713-4214-B030-70BD6B4ADF65}"/>
               </a:ext>
             </a:extLst>
           </p:cNvPr>
@@ -5057,7 +5459,7 @@
           <p:cNvPr id="3" name="">
             <a:extLst xmlns:a="http://schemas.openxmlformats.org/drawingml/2006/main">
               <a:ext uri="{FF2B5EF4-FFF2-40B4-BE49-F238E27FC236}">
-                <a16:creationId xmlns:a16="http://schemas.microsoft.com/office/drawing/2014/main" id="{05D8BBAD-784A-4C55-AD4C-530DA7210E76}"/>
+                <a16:creationId xmlns:a16="http://schemas.microsoft.com/office/drawing/2014/main" id="{32146D89-AF59-4B09-B036-48F8C8021EE7}"/>
               </a:ext>
             </a:extLst>
           </p:cNvPr>
@@ -5092,7 +5494,7 @@
           <p:nvPr/>
         </p:nvPicPr>
         <p:blipFill>
-          <a:blip xmlns:r="http://schemas.openxmlformats.org/officeDocument/2006/relationships" xmlns:a="http://schemas.openxmlformats.org/drawingml/2006/main" r:embed="R3d44d20a57bd4082"/>
+          <a:blip xmlns:r="http://schemas.openxmlformats.org/officeDocument/2006/relationships" xmlns:a="http://schemas.openxmlformats.org/drawingml/2006/main" r:embed="R82e98b5ef37c4671"/>
           <a:stretch xmlns:a="http://schemas.openxmlformats.org/drawingml/2006/main"/>
         </p:blipFill>
         <p:spPr>
@@ -5110,7 +5512,7 @@
           <p:cNvPr id="5" name="">
             <a:extLst xmlns:a="http://schemas.openxmlformats.org/drawingml/2006/main">
               <a:ext uri="{FF2B5EF4-FFF2-40B4-BE49-F238E27FC236}">
-                <a16:creationId xmlns:a16="http://schemas.microsoft.com/office/drawing/2014/main" id="{73DA46D4-0353-4A50-9CB7-4EDB70E56449}"/>
+                <a16:creationId xmlns:a16="http://schemas.microsoft.com/office/drawing/2014/main" id="{D5F9B0B7-A021-4DCB-97D7-605D7CC12044}"/>
               </a:ext>
             </a:extLst>
           </p:cNvPr>
@@ -5160,7 +5562,7 @@
           <p:cNvPr id="6" name="">
             <a:extLst xmlns:a="http://schemas.openxmlformats.org/drawingml/2006/main">
               <a:ext uri="{FF2B5EF4-FFF2-40B4-BE49-F238E27FC236}">
-                <a16:creationId xmlns:a16="http://schemas.microsoft.com/office/drawing/2014/main" id="{885340DF-2D6C-47CE-8A1A-E075562DF56A}"/>
+                <a16:creationId xmlns:a16="http://schemas.microsoft.com/office/drawing/2014/main" id="{F1B34223-F11B-4060-8668-16E6B1B995B6}"/>
               </a:ext>
             </a:extLst>
           </p:cNvPr>
@@ -5208,7 +5610,7 @@
     </p:spTree>
     <p:extLst>
       <p:ext uri="{BB962C8B-B14F-4D97-AF65-F5344CB8AC3E}">
-        <p14:creationId xmlns:p14="http://schemas.microsoft.com/office/powerpoint/2010/main" val="1178976824"/>
+        <p14:creationId xmlns:p14="http://schemas.microsoft.com/office/powerpoint/2010/main" val="1883694481"/>
       </p:ext>
     </p:extLst>
   </p:cSld>
@@ -5239,7 +5641,7 @@
           <p:cNvPr id="1" name="">
             <a:extLst xmlns:a="http://schemas.openxmlformats.org/drawingml/2006/main">
               <a:ext uri="{FF2B5EF4-FFF2-40B4-BE49-F238E27FC236}">
-                <a16:creationId xmlns:a16="http://schemas.microsoft.com/office/drawing/2014/main" id="{267BF6E0-143E-42B9-8D8A-A902B14E8C20}"/>
+                <a16:creationId xmlns:a16="http://schemas.microsoft.com/office/drawing/2014/main" id="{7084002D-9CB1-4E18-900B-ABF9BE045AF5}"/>
               </a:ext>
             </a:extLst>
           </p:cNvPr>
@@ -5289,7 +5691,7 @@
           <p:cNvPr id="2" name="">
             <a:extLst xmlns:a="http://schemas.openxmlformats.org/drawingml/2006/main">
               <a:ext uri="{FF2B5EF4-FFF2-40B4-BE49-F238E27FC236}">
-                <a16:creationId xmlns:a16="http://schemas.microsoft.com/office/drawing/2014/main" id="{27DF5611-408C-4B57-AF5B-15B7B5F2B405}"/>
+                <a16:creationId xmlns:a16="http://schemas.microsoft.com/office/drawing/2014/main" id="{031D970B-BBFA-41C3-B4E6-04E8CDCCB151}"/>
               </a:ext>
             </a:extLst>
           </p:cNvPr>
@@ -5339,7 +5741,7 @@
           <p:cNvPr id="3" name="">
             <a:extLst xmlns:a="http://schemas.openxmlformats.org/drawingml/2006/main">
               <a:ext uri="{FF2B5EF4-FFF2-40B4-BE49-F238E27FC236}">
-                <a16:creationId xmlns:a16="http://schemas.microsoft.com/office/drawing/2014/main" id="{467C111F-3567-4A5A-829D-0E25ACC75EDA}"/>
+                <a16:creationId xmlns:a16="http://schemas.microsoft.com/office/drawing/2014/main" id="{34509383-1AC5-43C1-8431-7D85E95D2FBB}"/>
               </a:ext>
             </a:extLst>
           </p:cNvPr>
@@ -5374,7 +5776,7 @@
           <p:nvPr/>
         </p:nvPicPr>
         <p:blipFill>
-          <a:blip xmlns:r="http://schemas.openxmlformats.org/officeDocument/2006/relationships" xmlns:a="http://schemas.openxmlformats.org/drawingml/2006/main" r:embed="R3bb354eaefd94b65"/>
+          <a:blip xmlns:r="http://schemas.openxmlformats.org/officeDocument/2006/relationships" xmlns:a="http://schemas.openxmlformats.org/drawingml/2006/main" r:embed="Rbfc5507bbc3f42a1"/>
           <a:stretch xmlns:a="http://schemas.openxmlformats.org/drawingml/2006/main"/>
         </p:blipFill>
         <p:spPr>
@@ -5396,7 +5798,7 @@
           <p:nvPr/>
         </p:nvPicPr>
         <p:blipFill>
-          <a:blip xmlns:r="http://schemas.openxmlformats.org/officeDocument/2006/relationships" xmlns:a="http://schemas.openxmlformats.org/drawingml/2006/main" r:embed="R7c7901c779094e86"/>
+          <a:blip xmlns:r="http://schemas.openxmlformats.org/officeDocument/2006/relationships" xmlns:a="http://schemas.openxmlformats.org/drawingml/2006/main" r:embed="Rb30187a4fa2c4d77"/>
           <a:stretch xmlns:a="http://schemas.openxmlformats.org/drawingml/2006/main"/>
         </p:blipFill>
         <p:spPr>
@@ -5414,7 +5816,7 @@
           <p:cNvPr id="6" name="">
             <a:extLst xmlns:a="http://schemas.openxmlformats.org/drawingml/2006/main">
               <a:ext uri="{FF2B5EF4-FFF2-40B4-BE49-F238E27FC236}">
-                <a16:creationId xmlns:a16="http://schemas.microsoft.com/office/drawing/2014/main" id="{32515E30-2D23-42CE-A7B4-559F846E6F2D}"/>
+                <a16:creationId xmlns:a16="http://schemas.microsoft.com/office/drawing/2014/main" id="{CCA7F3D0-81B4-4E46-9925-29F41E116426}"/>
               </a:ext>
             </a:extLst>
           </p:cNvPr>
@@ -5462,7 +5864,7 @@
     </p:spTree>
     <p:extLst>
       <p:ext uri="{BB962C8B-B14F-4D97-AF65-F5344CB8AC3E}">
-        <p14:creationId xmlns:p14="http://schemas.microsoft.com/office/powerpoint/2010/main" val="1806072866"/>
+        <p14:creationId xmlns:p14="http://schemas.microsoft.com/office/powerpoint/2010/main" val="214338291"/>
       </p:ext>
     </p:extLst>
   </p:cSld>
@@ -5493,7 +5895,7 @@
           <p:cNvPr id="1" name="">
             <a:extLst xmlns:a="http://schemas.openxmlformats.org/drawingml/2006/main">
               <a:ext uri="{FF2B5EF4-FFF2-40B4-BE49-F238E27FC236}">
-                <a16:creationId xmlns:a16="http://schemas.microsoft.com/office/drawing/2014/main" id="{642CA9DE-E36F-4458-B86D-7DBD6C3E34C9}"/>
+                <a16:creationId xmlns:a16="http://schemas.microsoft.com/office/drawing/2014/main" id="{FD89FFC0-65E4-47C6-938B-8D5E0E52B3BE}"/>
               </a:ext>
             </a:extLst>
           </p:cNvPr>
@@ -5543,7 +5945,7 @@
           <p:cNvPr id="2" name="">
             <a:extLst xmlns:a="http://schemas.openxmlformats.org/drawingml/2006/main">
               <a:ext uri="{FF2B5EF4-FFF2-40B4-BE49-F238E27FC236}">
-                <a16:creationId xmlns:a16="http://schemas.microsoft.com/office/drawing/2014/main" id="{FAB409D2-306A-4801-BA1E-2B9398E43528}"/>
+                <a16:creationId xmlns:a16="http://schemas.microsoft.com/office/drawing/2014/main" id="{B7D6939B-0C66-4ADB-A6A6-887B95EF5089}"/>
               </a:ext>
             </a:extLst>
           </p:cNvPr>
@@ -5593,7 +5995,7 @@
           <p:cNvPr id="3" name="">
             <a:extLst xmlns:a="http://schemas.openxmlformats.org/drawingml/2006/main">
               <a:ext uri="{FF2B5EF4-FFF2-40B4-BE49-F238E27FC236}">
-                <a16:creationId xmlns:a16="http://schemas.microsoft.com/office/drawing/2014/main" id="{5AEF41AD-3F7C-44BF-BA72-34B85539F54E}"/>
+                <a16:creationId xmlns:a16="http://schemas.microsoft.com/office/drawing/2014/main" id="{9D9ED347-0490-4E2C-AE4C-644A213E9CDA}"/>
               </a:ext>
             </a:extLst>
           </p:cNvPr>
@@ -5628,7 +6030,7 @@
           <p:nvPr/>
         </p:nvPicPr>
         <p:blipFill>
-          <a:blip xmlns:r="http://schemas.openxmlformats.org/officeDocument/2006/relationships" xmlns:a="http://schemas.openxmlformats.org/drawingml/2006/main" r:embed="R56ce0e7682184027"/>
+          <a:blip xmlns:r="http://schemas.openxmlformats.org/officeDocument/2006/relationships" xmlns:a="http://schemas.openxmlformats.org/drawingml/2006/main" r:embed="Rf914140a42104ff2"/>
           <a:stretch xmlns:a="http://schemas.openxmlformats.org/drawingml/2006/main"/>
         </p:blipFill>
         <p:spPr>
@@ -5646,7 +6048,7 @@
           <p:cNvPr id="5" name="">
             <a:extLst xmlns:a="http://schemas.openxmlformats.org/drawingml/2006/main">
               <a:ext uri="{FF2B5EF4-FFF2-40B4-BE49-F238E27FC236}">
-                <a16:creationId xmlns:a16="http://schemas.microsoft.com/office/drawing/2014/main" id="{16F48DE2-BBCC-4DA0-99D7-98119485A152}"/>
+                <a16:creationId xmlns:a16="http://schemas.microsoft.com/office/drawing/2014/main" id="{D309C644-BB0C-4E78-95DC-FA37C91BF075}"/>
               </a:ext>
             </a:extLst>
           </p:cNvPr>
@@ -5696,7 +6098,7 @@
           <p:cNvPr id="6" name="">
             <a:extLst xmlns:a="http://schemas.openxmlformats.org/drawingml/2006/main">
               <a:ext uri="{FF2B5EF4-FFF2-40B4-BE49-F238E27FC236}">
-                <a16:creationId xmlns:a16="http://schemas.microsoft.com/office/drawing/2014/main" id="{33D6C3B4-8EB8-4551-840A-454ECA07CC94}"/>
+                <a16:creationId xmlns:a16="http://schemas.microsoft.com/office/drawing/2014/main" id="{A5F4AEB9-4EE4-480A-8EEB-FF6DDCF23B94}"/>
               </a:ext>
             </a:extLst>
           </p:cNvPr>
@@ -5744,7 +6146,7 @@
     </p:spTree>
     <p:extLst>
       <p:ext uri="{BB962C8B-B14F-4D97-AF65-F5344CB8AC3E}">
-        <p14:creationId xmlns:p14="http://schemas.microsoft.com/office/powerpoint/2010/main" val="1372516781"/>
+        <p14:creationId xmlns:p14="http://schemas.microsoft.com/office/powerpoint/2010/main" val="1428667124"/>
       </p:ext>
     </p:extLst>
   </p:cSld>
@@ -5775,7 +6177,7 @@
           <p:cNvPr id="1" name="">
             <a:extLst xmlns:a="http://schemas.openxmlformats.org/drawingml/2006/main">
               <a:ext uri="{FF2B5EF4-FFF2-40B4-BE49-F238E27FC236}">
-                <a16:creationId xmlns:a16="http://schemas.microsoft.com/office/drawing/2014/main" id="{B70F0E02-B4B5-495B-9E85-6D703003DEED}"/>
+                <a16:creationId xmlns:a16="http://schemas.microsoft.com/office/drawing/2014/main" id="{19C03A69-E0D5-4558-B92A-3E78C3DF8EE6}"/>
               </a:ext>
             </a:extLst>
           </p:cNvPr>
@@ -5825,7 +6227,7 @@
           <p:cNvPr id="2" name="">
             <a:extLst xmlns:a="http://schemas.openxmlformats.org/drawingml/2006/main">
               <a:ext uri="{FF2B5EF4-FFF2-40B4-BE49-F238E27FC236}">
-                <a16:creationId xmlns:a16="http://schemas.microsoft.com/office/drawing/2014/main" id="{CF831CC8-E204-4CDB-B3A3-A5BD45E5E571}"/>
+                <a16:creationId xmlns:a16="http://schemas.microsoft.com/office/drawing/2014/main" id="{31484649-EC46-4AE9-9598-2F8C8D900941}"/>
               </a:ext>
             </a:extLst>
           </p:cNvPr>
@@ -5875,7 +6277,7 @@
           <p:cNvPr id="3" name="">
             <a:extLst xmlns:a="http://schemas.openxmlformats.org/drawingml/2006/main">
               <a:ext uri="{FF2B5EF4-FFF2-40B4-BE49-F238E27FC236}">
-                <a16:creationId xmlns:a16="http://schemas.microsoft.com/office/drawing/2014/main" id="{69B448A7-543C-46F8-BF47-33BDCEE7D56E}"/>
+                <a16:creationId xmlns:a16="http://schemas.microsoft.com/office/drawing/2014/main" id="{E0562B35-8C1F-42AE-9584-4D47D85908CE}"/>
               </a:ext>
             </a:extLst>
           </p:cNvPr>
@@ -5906,7 +6308,7 @@
           <p:cNvPr id="4" name="">
             <a:extLst xmlns:a="http://schemas.openxmlformats.org/drawingml/2006/main">
               <a:ext uri="{FF2B5EF4-FFF2-40B4-BE49-F238E27FC236}">
-                <a16:creationId xmlns:a16="http://schemas.microsoft.com/office/drawing/2014/main" id="{5C1A2757-358E-4795-AF5B-FD84C9FD8433}"/>
+                <a16:creationId xmlns:a16="http://schemas.microsoft.com/office/drawing/2014/main" id="{3DFAE681-AEEF-4D4A-BD13-6346AA5695B9}"/>
               </a:ext>
             </a:extLst>
           </p:cNvPr>
@@ -5956,7 +6358,7 @@
           <p:cNvPr id="5" name="">
             <a:extLst xmlns:a="http://schemas.openxmlformats.org/drawingml/2006/main">
               <a:ext uri="{FF2B5EF4-FFF2-40B4-BE49-F238E27FC236}">
-                <a16:creationId xmlns:a16="http://schemas.microsoft.com/office/drawing/2014/main" id="{84E21A71-3346-4484-B58D-C43DDED0DAE6}"/>
+                <a16:creationId xmlns:a16="http://schemas.microsoft.com/office/drawing/2014/main" id="{121D3E9E-B15C-4CEB-AF0A-FA55243C0635}"/>
               </a:ext>
             </a:extLst>
           </p:cNvPr>
@@ -6006,7 +6408,7 @@
           <p:cNvPr id="6" name="">
             <a:extLst xmlns:a="http://schemas.openxmlformats.org/drawingml/2006/main">
               <a:ext uri="{FF2B5EF4-FFF2-40B4-BE49-F238E27FC236}">
-                <a16:creationId xmlns:a16="http://schemas.microsoft.com/office/drawing/2014/main" id="{017FD423-A7FB-4B1D-94AF-B8F783EEA01E}"/>
+                <a16:creationId xmlns:a16="http://schemas.microsoft.com/office/drawing/2014/main" id="{2E3959AD-9F29-4594-9BE8-9BECC6246A02}"/>
               </a:ext>
             </a:extLst>
           </p:cNvPr>
@@ -6056,7 +6458,7 @@
           <p:cNvPr id="7" name="">
             <a:extLst xmlns:a="http://schemas.openxmlformats.org/drawingml/2006/main">
               <a:ext uri="{FF2B5EF4-FFF2-40B4-BE49-F238E27FC236}">
-                <a16:creationId xmlns:a16="http://schemas.microsoft.com/office/drawing/2014/main" id="{355CCE95-6906-441B-AB28-8A5100E63196}"/>
+                <a16:creationId xmlns:a16="http://schemas.microsoft.com/office/drawing/2014/main" id="{CBF60CA4-5420-400E-B6C4-86E131DB6982}"/>
               </a:ext>
             </a:extLst>
           </p:cNvPr>
@@ -6106,7 +6508,7 @@
           <p:cNvPr id="8" name="">
             <a:extLst xmlns:a="http://schemas.openxmlformats.org/drawingml/2006/main">
               <a:ext uri="{FF2B5EF4-FFF2-40B4-BE49-F238E27FC236}">
-                <a16:creationId xmlns:a16="http://schemas.microsoft.com/office/drawing/2014/main" id="{6EE7B62B-1697-47D3-A422-CCD27A606808}"/>
+                <a16:creationId xmlns:a16="http://schemas.microsoft.com/office/drawing/2014/main" id="{B5E6935C-555F-4656-AB6E-8FBEC6C969C4}"/>
               </a:ext>
             </a:extLst>
           </p:cNvPr>
@@ -6156,7 +6558,7 @@
           <p:cNvPr id="9" name="">
             <a:extLst xmlns:a="http://schemas.openxmlformats.org/drawingml/2006/main">
               <a:ext uri="{FF2B5EF4-FFF2-40B4-BE49-F238E27FC236}">
-                <a16:creationId xmlns:a16="http://schemas.microsoft.com/office/drawing/2014/main" id="{CE139752-EEE6-475C-AF2B-BD0455694AED}"/>
+                <a16:creationId xmlns:a16="http://schemas.microsoft.com/office/drawing/2014/main" id="{1E751A89-82DA-4B25-8160-83C87B76F734}"/>
               </a:ext>
             </a:extLst>
           </p:cNvPr>
@@ -6206,7 +6608,7 @@
           <p:cNvPr id="10" name="">
             <a:extLst xmlns:a="http://schemas.openxmlformats.org/drawingml/2006/main">
               <a:ext uri="{FF2B5EF4-FFF2-40B4-BE49-F238E27FC236}">
-                <a16:creationId xmlns:a16="http://schemas.microsoft.com/office/drawing/2014/main" id="{36265261-C1F9-4417-93DE-B3199706EB62}"/>
+                <a16:creationId xmlns:a16="http://schemas.microsoft.com/office/drawing/2014/main" id="{81B6EE59-C676-4EA8-A9CB-0D965DF5026E}"/>
               </a:ext>
             </a:extLst>
           </p:cNvPr>
@@ -6256,7 +6658,7 @@
           <p:cNvPr id="11" name="">
             <a:extLst xmlns:a="http://schemas.openxmlformats.org/drawingml/2006/main">
               <a:ext uri="{FF2B5EF4-FFF2-40B4-BE49-F238E27FC236}">
-                <a16:creationId xmlns:a16="http://schemas.microsoft.com/office/drawing/2014/main" id="{7725340E-E51E-4B3E-84C3-015B5152A235}"/>
+                <a16:creationId xmlns:a16="http://schemas.microsoft.com/office/drawing/2014/main" id="{468D56C0-EAE6-4F22-A248-715C4652467B}"/>
               </a:ext>
             </a:extLst>
           </p:cNvPr>
@@ -6306,7 +6708,7 @@
           <p:cNvPr id="12" name="">
             <a:extLst xmlns:a="http://schemas.openxmlformats.org/drawingml/2006/main">
               <a:ext uri="{FF2B5EF4-FFF2-40B4-BE49-F238E27FC236}">
-                <a16:creationId xmlns:a16="http://schemas.microsoft.com/office/drawing/2014/main" id="{53AFDD3D-0A17-4F21-9F6D-0A16A249F7A1}"/>
+                <a16:creationId xmlns:a16="http://schemas.microsoft.com/office/drawing/2014/main" id="{22499567-7C26-4CC2-8890-C2BD041627BF}"/>
               </a:ext>
             </a:extLst>
           </p:cNvPr>
@@ -6354,7 +6756,1290 @@
     </p:spTree>
     <p:extLst>
       <p:ext uri="{BB962C8B-B14F-4D97-AF65-F5344CB8AC3E}">
-        <p14:creationId xmlns:p14="http://schemas.microsoft.com/office/powerpoint/2010/main" val="1600121359"/>
+        <p14:creationId xmlns:p14="http://schemas.microsoft.com/office/powerpoint/2010/main" val="708450153"/>
+      </p:ext>
+    </p:extLst>
+  </p:cSld>
+</p:sld>
+</file>
+
+<file path=ppt/slides/slide18.xml><?xml version="1.0" encoding="utf-8"?>
+<p:sld xmlns:p="http://schemas.openxmlformats.org/presentationml/2006/main">
+  <p:cSld>
+    <p:bg>
+      <p:bgPr>
+        <a:solidFill xmlns:a="http://schemas.openxmlformats.org/drawingml/2006/main">
+          <a:srgbClr val="FFFFFF"/>
+        </a:solidFill>
+      </p:bgPr>
+    </p:bg>
+    <p:spTree>
+      <p:nvGrpSpPr>
+        <p:cNvPr id="1" name=""/>
+        <p:cNvGrpSpPr/>
+        <p:nvPr/>
+      </p:nvGrpSpPr>
+      <p:grpSpPr>
+        <a:xfrm xmlns:a="http://schemas.openxmlformats.org/drawingml/2006/main"/>
+      </p:grpSpPr>
+      <p:sp>
+        <p:nvSpPr>
+          <p:cNvPr id="1" name="">
+            <a:extLst xmlns:a="http://schemas.openxmlformats.org/drawingml/2006/main">
+              <a:ext uri="{FF2B5EF4-FFF2-40B4-BE49-F238E27FC236}">
+                <a16:creationId xmlns:a16="http://schemas.microsoft.com/office/drawing/2014/main" id="{34E8EC29-958E-478F-BFBE-157BB981A44E}"/>
+              </a:ext>
+            </a:extLst>
+          </p:cNvPr>
+          <p:cNvSpPr>
+            <a:spLocks xmlns:a="http://schemas.openxmlformats.org/drawingml/2006/main" noGrp="1"/>
+          </p:cNvSpPr>
+          <p:nvPr/>
+        </p:nvSpPr>
+        <p:spPr>
+          <a:xfrm xmlns:a="http://schemas.openxmlformats.org/drawingml/2006/main">
+            <a:off x="685800" y="495300"/>
+            <a:ext cx="4762500" cy="419100"/>
+          </a:xfrm>
+          <a:prstGeom xmlns:a="http://schemas.openxmlformats.org/drawingml/2006/main" prst="rect">
+            <a:avLst/>
+          </a:prstGeom>
+          <a:noFill xmlns:a="http://schemas.openxmlformats.org/drawingml/2006/main"/>
+          <a:ln xmlns:a="http://schemas.openxmlformats.org/drawingml/2006/main" w="0">
+            <a:noFill/>
+            <a:prstDash val="solid"/>
+          </a:ln>
+        </p:spPr>
+        <p:txBody>
+          <a:bodyPr xmlns:a="http://schemas.openxmlformats.org/drawingml/2006/main"/>
+          <a:lstStyle xmlns:a="http://schemas.openxmlformats.org/drawingml/2006/main"/>
+          <a:p xmlns:a="http://schemas.openxmlformats.org/drawingml/2006/main">
+            <a:pPr algn="l">
+              <a:defRPr sz="2400" b="1" i="0">
+                <a:solidFill>
+                  <a:srgbClr val="555555"/>
+                </a:solidFill>
+              </a:defRPr>
+            </a:pPr>
+            <a:r>
+              <a:rPr sz="2400" b="1" i="0">
+                <a:solidFill>
+                  <a:srgbClr val="555555"/>
+                </a:solidFill>
+              </a:rPr>
+              <a:t>Transition</a:t>
+            </a:r>
+          </a:p>
+        </p:txBody>
+      </p:sp>
+      <p:sp>
+        <p:nvSpPr>
+          <p:cNvPr id="2" name="">
+            <a:extLst xmlns:a="http://schemas.openxmlformats.org/drawingml/2006/main">
+              <a:ext uri="{FF2B5EF4-FFF2-40B4-BE49-F238E27FC236}">
+                <a16:creationId xmlns:a16="http://schemas.microsoft.com/office/drawing/2014/main" id="{F0E955BF-E15D-47A3-9BA9-7C4478E5BF56}"/>
+              </a:ext>
+            </a:extLst>
+          </p:cNvPr>
+          <p:cNvSpPr>
+            <a:spLocks xmlns:a="http://schemas.openxmlformats.org/drawingml/2006/main" noGrp="1"/>
+          </p:cNvSpPr>
+          <p:nvPr/>
+        </p:nvSpPr>
+        <p:spPr>
+          <a:xfrm xmlns:a="http://schemas.openxmlformats.org/drawingml/2006/main">
+            <a:off x="685800" y="1600200"/>
+            <a:ext cx="8572500" cy="876300"/>
+          </a:xfrm>
+          <a:prstGeom xmlns:a="http://schemas.openxmlformats.org/drawingml/2006/main" prst="rect">
+            <a:avLst/>
+          </a:prstGeom>
+          <a:noFill xmlns:a="http://schemas.openxmlformats.org/drawingml/2006/main"/>
+          <a:ln xmlns:a="http://schemas.openxmlformats.org/drawingml/2006/main" w="0">
+            <a:noFill/>
+            <a:prstDash val="solid"/>
+          </a:ln>
+        </p:spPr>
+        <p:txBody>
+          <a:bodyPr xmlns:a="http://schemas.openxmlformats.org/drawingml/2006/main"/>
+          <a:lstStyle xmlns:a="http://schemas.openxmlformats.org/drawingml/2006/main"/>
+          <a:p xmlns:a="http://schemas.openxmlformats.org/drawingml/2006/main">
+            <a:pPr algn="l">
+              <a:defRPr sz="3900" b="1" i="0">
+                <a:solidFill>
+                  <a:srgbClr val="000000"/>
+                </a:solidFill>
+              </a:defRPr>
+            </a:pPr>
+            <a:r>
+              <a:rPr sz="3900" b="1" i="0">
+                <a:solidFill>
+                  <a:srgbClr val="000000"/>
+                </a:solidFill>
+              </a:rPr>
+              <a:t>Threshold policy is the first decision layer to audit</a:t>
+            </a:r>
+          </a:p>
+        </p:txBody>
+      </p:sp>
+      <p:sp>
+        <p:nvSpPr>
+          <p:cNvPr id="3" name="">
+            <a:extLst xmlns:a="http://schemas.openxmlformats.org/drawingml/2006/main">
+              <a:ext uri="{FF2B5EF4-FFF2-40B4-BE49-F238E27FC236}">
+                <a16:creationId xmlns:a16="http://schemas.microsoft.com/office/drawing/2014/main" id="{C2144B4B-2DAE-405D-8314-B2CCEAE0B943}"/>
+              </a:ext>
+            </a:extLst>
+          </p:cNvPr>
+          <p:cNvSpPr>
+            <a:spLocks xmlns:a="http://schemas.openxmlformats.org/drawingml/2006/main" noGrp="1"/>
+          </p:cNvSpPr>
+          <p:nvPr/>
+        </p:nvSpPr>
+        <p:spPr>
+          <a:xfrm xmlns:a="http://schemas.openxmlformats.org/drawingml/2006/main">
+            <a:off x="723900" y="3105150"/>
+            <a:ext cx="5715000" cy="19050"/>
+          </a:xfrm>
+          <a:prstGeom xmlns:a="http://schemas.openxmlformats.org/drawingml/2006/main" prst="rect">
+            <a:avLst/>
+          </a:prstGeom>
+          <a:solidFill xmlns:a="http://schemas.openxmlformats.org/drawingml/2006/main">
+            <a:srgbClr val="B8BCC4"/>
+          </a:solidFill>
+          <a:ln xmlns:a="http://schemas.openxmlformats.org/drawingml/2006/main" w="0">
+            <a:noFill/>
+            <a:prstDash val="solid"/>
+          </a:ln>
+        </p:spPr>
+      </p:sp>
+      <p:sp>
+        <p:nvSpPr>
+          <p:cNvPr id="4" name="">
+            <a:extLst xmlns:a="http://schemas.openxmlformats.org/drawingml/2006/main">
+              <a:ext uri="{FF2B5EF4-FFF2-40B4-BE49-F238E27FC236}">
+                <a16:creationId xmlns:a16="http://schemas.microsoft.com/office/drawing/2014/main" id="{2BBEFD98-4ADB-4CB2-9B9A-644485754F61}"/>
+              </a:ext>
+            </a:extLst>
+          </p:cNvPr>
+          <p:cNvSpPr>
+            <a:spLocks xmlns:a="http://schemas.openxmlformats.org/drawingml/2006/main" noGrp="1"/>
+          </p:cNvSpPr>
+          <p:nvPr/>
+        </p:nvSpPr>
+        <p:spPr>
+          <a:xfrm xmlns:a="http://schemas.openxmlformats.org/drawingml/2006/main">
+            <a:off x="723900" y="3467100"/>
+            <a:ext cx="7524750" cy="1066800"/>
+          </a:xfrm>
+          <a:prstGeom xmlns:a="http://schemas.openxmlformats.org/drawingml/2006/main" prst="rect">
+            <a:avLst/>
+          </a:prstGeom>
+          <a:noFill xmlns:a="http://schemas.openxmlformats.org/drawingml/2006/main"/>
+          <a:ln xmlns:a="http://schemas.openxmlformats.org/drawingml/2006/main" w="0">
+            <a:noFill/>
+            <a:prstDash val="solid"/>
+          </a:ln>
+        </p:spPr>
+        <p:txBody>
+          <a:bodyPr xmlns:a="http://schemas.openxmlformats.org/drawingml/2006/main"/>
+          <a:lstStyle xmlns:a="http://schemas.openxmlformats.org/drawingml/2006/main"/>
+          <a:p xmlns:a="http://schemas.openxmlformats.org/drawingml/2006/main">
+            <a:pPr algn="l">
+              <a:defRPr sz="1800" b="0" i="0">
+                <a:solidFill>
+                  <a:srgbClr val="222222"/>
+                </a:solidFill>
+              </a:defRPr>
+            </a:pPr>
+            <a:r>
+              <a:rPr sz="1800" b="0" i="0">
+                <a:solidFill>
+                  <a:srgbClr val="222222"/>
+                </a:solidFill>
+              </a:rPr>
+              <a:t>ML-P1b keeps the GLM fixed and changes only the rule that converts probability into long/flat exposure. Thresholds are chosen before OOS replay using TRAIN data only.</a:t>
+            </a:r>
+          </a:p>
+        </p:txBody>
+      </p:sp>
+      <p:sp>
+        <p:nvSpPr>
+          <p:cNvPr id="5" name="">
+            <a:extLst xmlns:a="http://schemas.openxmlformats.org/drawingml/2006/main">
+              <a:ext uri="{FF2B5EF4-FFF2-40B4-BE49-F238E27FC236}">
+                <a16:creationId xmlns:a16="http://schemas.microsoft.com/office/drawing/2014/main" id="{53B0E8F9-2E9C-455B-9EC0-39A65E836BAA}"/>
+              </a:ext>
+            </a:extLst>
+          </p:cNvPr>
+          <p:cNvSpPr>
+            <a:spLocks xmlns:a="http://schemas.openxmlformats.org/drawingml/2006/main" noGrp="1"/>
+          </p:cNvSpPr>
+          <p:nvPr/>
+        </p:nvSpPr>
+        <p:spPr>
+          <a:xfrm xmlns:a="http://schemas.openxmlformats.org/drawingml/2006/main">
+            <a:off x="8801100" y="0"/>
+            <a:ext cx="3390900" cy="6858000"/>
+          </a:xfrm>
+          <a:prstGeom xmlns:a="http://schemas.openxmlformats.org/drawingml/2006/main" prst="rect">
+            <a:avLst/>
+          </a:prstGeom>
+          <a:solidFill xmlns:a="http://schemas.openxmlformats.org/drawingml/2006/main">
+            <a:srgbClr val="EDEDED"/>
+          </a:solidFill>
+          <a:ln xmlns:a="http://schemas.openxmlformats.org/drawingml/2006/main" w="0">
+            <a:noFill/>
+            <a:prstDash val="solid"/>
+          </a:ln>
+        </p:spPr>
+      </p:sp>
+      <p:sp>
+        <p:nvSpPr>
+          <p:cNvPr id="6" name="">
+            <a:extLst xmlns:a="http://schemas.openxmlformats.org/drawingml/2006/main">
+              <a:ext uri="{FF2B5EF4-FFF2-40B4-BE49-F238E27FC236}">
+                <a16:creationId xmlns:a16="http://schemas.microsoft.com/office/drawing/2014/main" id="{9C834491-50DD-49A3-BC25-70465B35FBBE}"/>
+              </a:ext>
+            </a:extLst>
+          </p:cNvPr>
+          <p:cNvSpPr>
+            <a:spLocks xmlns:a="http://schemas.openxmlformats.org/drawingml/2006/main" noGrp="1"/>
+          </p:cNvSpPr>
+          <p:nvPr/>
+        </p:nvSpPr>
+        <p:spPr>
+          <a:xfrm xmlns:a="http://schemas.openxmlformats.org/drawingml/2006/main">
+            <a:off x="9353550" y="2343150"/>
+            <a:ext cx="2190750" cy="438150"/>
+          </a:xfrm>
+          <a:prstGeom xmlns:a="http://schemas.openxmlformats.org/drawingml/2006/main" prst="rect">
+            <a:avLst/>
+          </a:prstGeom>
+          <a:noFill xmlns:a="http://schemas.openxmlformats.org/drawingml/2006/main"/>
+          <a:ln xmlns:a="http://schemas.openxmlformats.org/drawingml/2006/main" w="0">
+            <a:noFill/>
+            <a:prstDash val="solid"/>
+          </a:ln>
+        </p:spPr>
+        <p:txBody>
+          <a:bodyPr xmlns:a="http://schemas.openxmlformats.org/drawingml/2006/main"/>
+          <a:lstStyle xmlns:a="http://schemas.openxmlformats.org/drawingml/2006/main"/>
+          <a:p xmlns:a="http://schemas.openxmlformats.org/drawingml/2006/main">
+            <a:pPr algn="ctr">
+              <a:defRPr sz="3150" b="1" i="0">
+                <a:solidFill>
+                  <a:srgbClr val="000000"/>
+                </a:solidFill>
+              </a:defRPr>
+            </a:pPr>
+            <a:r>
+              <a:rPr sz="3150" b="1" i="0">
+                <a:solidFill>
+                  <a:srgbClr val="000000"/>
+                </a:solidFill>
+              </a:rPr>
+              <a:t>ML-P1b</a:t>
+            </a:r>
+          </a:p>
+        </p:txBody>
+      </p:sp>
+      <p:sp>
+        <p:nvSpPr>
+          <p:cNvPr id="7" name="">
+            <a:extLst xmlns:a="http://schemas.openxmlformats.org/drawingml/2006/main">
+              <a:ext uri="{FF2B5EF4-FFF2-40B4-BE49-F238E27FC236}">
+                <a16:creationId xmlns:a16="http://schemas.microsoft.com/office/drawing/2014/main" id="{690CCFC5-62A0-48B4-A915-333252D6DA56}"/>
+              </a:ext>
+            </a:extLst>
+          </p:cNvPr>
+          <p:cNvSpPr>
+            <a:spLocks xmlns:a="http://schemas.openxmlformats.org/drawingml/2006/main" noGrp="1"/>
+          </p:cNvSpPr>
+          <p:nvPr/>
+        </p:nvSpPr>
+        <p:spPr>
+          <a:xfrm xmlns:a="http://schemas.openxmlformats.org/drawingml/2006/main">
+            <a:off x="9067800" y="3067050"/>
+            <a:ext cx="2762250" cy="400050"/>
+          </a:xfrm>
+          <a:prstGeom xmlns:a="http://schemas.openxmlformats.org/drawingml/2006/main" prst="rect">
+            <a:avLst/>
+          </a:prstGeom>
+          <a:noFill xmlns:a="http://schemas.openxmlformats.org/drawingml/2006/main"/>
+          <a:ln xmlns:a="http://schemas.openxmlformats.org/drawingml/2006/main" w="0">
+            <a:noFill/>
+            <a:prstDash val="solid"/>
+          </a:ln>
+        </p:spPr>
+        <p:txBody>
+          <a:bodyPr xmlns:a="http://schemas.openxmlformats.org/drawingml/2006/main"/>
+          <a:lstStyle xmlns:a="http://schemas.openxmlformats.org/drawingml/2006/main"/>
+          <a:p xmlns:a="http://schemas.openxmlformats.org/drawingml/2006/main">
+            <a:pPr algn="ctr">
+              <a:defRPr sz="1875" b="0" i="0">
+                <a:solidFill>
+                  <a:srgbClr val="222222"/>
+                </a:solidFill>
+              </a:defRPr>
+            </a:pPr>
+            <a:r>
+              <a:rPr sz="1875" b="0" i="0">
+                <a:solidFill>
+                  <a:srgbClr val="222222"/>
+                </a:solidFill>
+              </a:rPr>
+              <a:t>Threshold diagnostic</a:t>
+            </a:r>
+          </a:p>
+        </p:txBody>
+      </p:sp>
+    </p:spTree>
+    <p:extLst>
+      <p:ext uri="{BB962C8B-B14F-4D97-AF65-F5344CB8AC3E}">
+        <p14:creationId xmlns:p14="http://schemas.microsoft.com/office/powerpoint/2010/main" val="224704740"/>
+      </p:ext>
+    </p:extLst>
+  </p:cSld>
+</p:sld>
+</file>
+
+<file path=ppt/slides/slide19.xml><?xml version="1.0" encoding="utf-8"?>
+<p:sld xmlns:p="http://schemas.openxmlformats.org/presentationml/2006/main">
+  <p:cSld>
+    <p:bg>
+      <p:bgPr>
+        <a:solidFill xmlns:a="http://schemas.openxmlformats.org/drawingml/2006/main">
+          <a:srgbClr val="FFFFFF"/>
+        </a:solidFill>
+      </p:bgPr>
+    </p:bg>
+    <p:spTree>
+      <p:nvGrpSpPr>
+        <p:cNvPr id="1" name=""/>
+        <p:cNvGrpSpPr/>
+        <p:nvPr/>
+      </p:nvGrpSpPr>
+      <p:grpSpPr>
+        <a:xfrm xmlns:a="http://schemas.openxmlformats.org/drawingml/2006/main"/>
+      </p:grpSpPr>
+      <p:sp>
+        <p:nvSpPr>
+          <p:cNvPr id="1" name="">
+            <a:extLst xmlns:a="http://schemas.openxmlformats.org/drawingml/2006/main">
+              <a:ext uri="{FF2B5EF4-FFF2-40B4-BE49-F238E27FC236}">
+                <a16:creationId xmlns:a16="http://schemas.microsoft.com/office/drawing/2014/main" id="{67FF79A3-3E11-41F8-94A6-05B5A854F5CB}"/>
+              </a:ext>
+            </a:extLst>
+          </p:cNvPr>
+          <p:cNvSpPr>
+            <a:spLocks xmlns:a="http://schemas.openxmlformats.org/drawingml/2006/main" noGrp="1"/>
+          </p:cNvSpPr>
+          <p:nvPr/>
+        </p:nvSpPr>
+        <p:spPr>
+          <a:xfrm xmlns:a="http://schemas.openxmlformats.org/drawingml/2006/main">
+            <a:off x="685800" y="400050"/>
+            <a:ext cx="8572500" cy="247650"/>
+          </a:xfrm>
+          <a:prstGeom xmlns:a="http://schemas.openxmlformats.org/drawingml/2006/main" prst="rect">
+            <a:avLst/>
+          </a:prstGeom>
+          <a:noFill xmlns:a="http://schemas.openxmlformats.org/drawingml/2006/main"/>
+          <a:ln xmlns:a="http://schemas.openxmlformats.org/drawingml/2006/main" w="0">
+            <a:noFill/>
+            <a:prstDash val="solid"/>
+          </a:ln>
+        </p:spPr>
+        <p:txBody>
+          <a:bodyPr xmlns:a="http://schemas.openxmlformats.org/drawingml/2006/main"/>
+          <a:lstStyle xmlns:a="http://schemas.openxmlformats.org/drawingml/2006/main"/>
+          <a:p xmlns:a="http://schemas.openxmlformats.org/drawingml/2006/main">
+            <a:pPr algn="l">
+              <a:defRPr sz="975" b="1" i="0">
+                <a:solidFill>
+                  <a:srgbClr val="555555"/>
+                </a:solidFill>
+              </a:defRPr>
+            </a:pPr>
+            <a:r>
+              <a:rPr sz="975" b="1" i="0">
+                <a:solidFill>
+                  <a:srgbClr val="555555"/>
+                </a:solidFill>
+              </a:rPr>
+              <a:t>GEN5.4 ML DECISION ENGINE</a:t>
+            </a:r>
+          </a:p>
+        </p:txBody>
+      </p:sp>
+      <p:sp>
+        <p:nvSpPr>
+          <p:cNvPr id="2" name="">
+            <a:extLst xmlns:a="http://schemas.openxmlformats.org/drawingml/2006/main">
+              <a:ext uri="{FF2B5EF4-FFF2-40B4-BE49-F238E27FC236}">
+                <a16:creationId xmlns:a16="http://schemas.microsoft.com/office/drawing/2014/main" id="{0E5BCF7C-0491-452A-97F2-4574A3475A79}"/>
+              </a:ext>
+            </a:extLst>
+          </p:cNvPr>
+          <p:cNvSpPr>
+            <a:spLocks xmlns:a="http://schemas.openxmlformats.org/drawingml/2006/main" noGrp="1"/>
+          </p:cNvSpPr>
+          <p:nvPr/>
+        </p:nvSpPr>
+        <p:spPr>
+          <a:xfrm xmlns:a="http://schemas.openxmlformats.org/drawingml/2006/main">
+            <a:off x="685800" y="723900"/>
+            <a:ext cx="10287000" cy="876300"/>
+          </a:xfrm>
+          <a:prstGeom xmlns:a="http://schemas.openxmlformats.org/drawingml/2006/main" prst="rect">
+            <a:avLst/>
+          </a:prstGeom>
+          <a:noFill xmlns:a="http://schemas.openxmlformats.org/drawingml/2006/main"/>
+          <a:ln xmlns:a="http://schemas.openxmlformats.org/drawingml/2006/main" w="0">
+            <a:noFill/>
+            <a:prstDash val="solid"/>
+          </a:ln>
+        </p:spPr>
+        <p:txBody>
+          <a:bodyPr xmlns:a="http://schemas.openxmlformats.org/drawingml/2006/main"/>
+          <a:lstStyle xmlns:a="http://schemas.openxmlformats.org/drawingml/2006/main"/>
+          <a:p xmlns:a="http://schemas.openxmlformats.org/drawingml/2006/main">
+            <a:pPr algn="l">
+              <a:defRPr sz="2850" b="1" i="0">
+                <a:solidFill>
+                  <a:srgbClr val="000000"/>
+                </a:solidFill>
+              </a:defRPr>
+            </a:pPr>
+            <a:r>
+              <a:rPr sz="2850" b="1" i="0">
+                <a:solidFill>
+                  <a:srgbClr val="000000"/>
+                </a:solidFill>
+              </a:rPr>
+              <a:t>The participation policy helped, but not enough</a:t>
+            </a:r>
+          </a:p>
+        </p:txBody>
+      </p:sp>
+      <p:sp>
+        <p:nvSpPr>
+          <p:cNvPr id="3" name="">
+            <a:extLst xmlns:a="http://schemas.openxmlformats.org/drawingml/2006/main">
+              <a:ext uri="{FF2B5EF4-FFF2-40B4-BE49-F238E27FC236}">
+                <a16:creationId xmlns:a16="http://schemas.microsoft.com/office/drawing/2014/main" id="{96CD3460-6782-4834-8F14-75ADCB2B908C}"/>
+              </a:ext>
+            </a:extLst>
+          </p:cNvPr>
+          <p:cNvSpPr>
+            <a:spLocks xmlns:a="http://schemas.openxmlformats.org/drawingml/2006/main" noGrp="1"/>
+          </p:cNvSpPr>
+          <p:nvPr/>
+        </p:nvSpPr>
+        <p:spPr>
+          <a:xfrm xmlns:a="http://schemas.openxmlformats.org/drawingml/2006/main">
+            <a:off x="685800" y="1657350"/>
+            <a:ext cx="10820400" cy="19050"/>
+          </a:xfrm>
+          <a:prstGeom xmlns:a="http://schemas.openxmlformats.org/drawingml/2006/main" prst="rect">
+            <a:avLst/>
+          </a:prstGeom>
+          <a:solidFill xmlns:a="http://schemas.openxmlformats.org/drawingml/2006/main">
+            <a:srgbClr val="B8BCC4"/>
+          </a:solidFill>
+          <a:ln xmlns:a="http://schemas.openxmlformats.org/drawingml/2006/main" w="0">
+            <a:noFill/>
+            <a:prstDash val="solid"/>
+          </a:ln>
+        </p:spPr>
+      </p:sp>
+      <p:sp>
+        <p:nvSpPr>
+          <p:cNvPr id="4" name="">
+            <a:extLst xmlns:a="http://schemas.openxmlformats.org/drawingml/2006/main">
+              <a:ext uri="{FF2B5EF4-FFF2-40B4-BE49-F238E27FC236}">
+                <a16:creationId xmlns:a16="http://schemas.microsoft.com/office/drawing/2014/main" id="{7ADDECE5-B9E2-4F4E-B2D4-EE31D121644F}"/>
+              </a:ext>
+            </a:extLst>
+          </p:cNvPr>
+          <p:cNvSpPr>
+            <a:spLocks xmlns:a="http://schemas.openxmlformats.org/drawingml/2006/main" noGrp="1"/>
+          </p:cNvSpPr>
+          <p:nvPr/>
+        </p:nvSpPr>
+        <p:spPr>
+          <a:xfrm xmlns:a="http://schemas.openxmlformats.org/drawingml/2006/main">
+            <a:off x="704850" y="2152650"/>
+            <a:ext cx="2333625" cy="1428750"/>
+          </a:xfrm>
+          <a:prstGeom xmlns:a="http://schemas.openxmlformats.org/drawingml/2006/main" prst="rect">
+            <a:avLst/>
+          </a:prstGeom>
+          <a:solidFill xmlns:a="http://schemas.openxmlformats.org/drawingml/2006/main">
+            <a:srgbClr val="EDEDED"/>
+          </a:solidFill>
+          <a:ln xmlns:a="http://schemas.openxmlformats.org/drawingml/2006/main" w="9525">
+            <a:solidFill>
+              <a:srgbClr val="B8BCC4"/>
+            </a:solidFill>
+            <a:prstDash val="solid"/>
+          </a:ln>
+        </p:spPr>
+      </p:sp>
+      <p:sp>
+        <p:nvSpPr>
+          <p:cNvPr id="5" name="">
+            <a:extLst xmlns:a="http://schemas.openxmlformats.org/drawingml/2006/main">
+              <a:ext uri="{FF2B5EF4-FFF2-40B4-BE49-F238E27FC236}">
+                <a16:creationId xmlns:a16="http://schemas.microsoft.com/office/drawing/2014/main" id="{DC6C26FA-5CA5-4618-9D04-6F5179C9B167}"/>
+              </a:ext>
+            </a:extLst>
+          </p:cNvPr>
+          <p:cNvSpPr>
+            <a:spLocks xmlns:a="http://schemas.openxmlformats.org/drawingml/2006/main" noGrp="1"/>
+          </p:cNvSpPr>
+          <p:nvPr/>
+        </p:nvSpPr>
+        <p:spPr>
+          <a:xfrm xmlns:a="http://schemas.openxmlformats.org/drawingml/2006/main">
+            <a:off x="876300" y="2305050"/>
+            <a:ext cx="1990725" cy="171450"/>
+          </a:xfrm>
+          <a:prstGeom xmlns:a="http://schemas.openxmlformats.org/drawingml/2006/main" prst="rect">
+            <a:avLst/>
+          </a:prstGeom>
+          <a:noFill xmlns:a="http://schemas.openxmlformats.org/drawingml/2006/main"/>
+          <a:ln xmlns:a="http://schemas.openxmlformats.org/drawingml/2006/main" w="0">
+            <a:noFill/>
+            <a:prstDash val="solid"/>
+          </a:ln>
+        </p:spPr>
+        <p:txBody>
+          <a:bodyPr xmlns:a="http://schemas.openxmlformats.org/drawingml/2006/main"/>
+          <a:lstStyle xmlns:a="http://schemas.openxmlformats.org/drawingml/2006/main"/>
+          <a:p xmlns:a="http://schemas.openxmlformats.org/drawingml/2006/main">
+            <a:pPr algn="l">
+              <a:defRPr sz="900" b="1" i="0">
+                <a:solidFill>
+                  <a:srgbClr val="555555"/>
+                </a:solidFill>
+              </a:defRPr>
+            </a:pPr>
+            <a:r>
+              <a:rPr sz="900" b="1" i="0">
+                <a:solidFill>
+                  <a:srgbClr val="555555"/>
+                </a:solidFill>
+              </a:rPr>
+              <a:t>POLICIES TESTED</a:t>
+            </a:r>
+          </a:p>
+        </p:txBody>
+      </p:sp>
+      <p:sp>
+        <p:nvSpPr>
+          <p:cNvPr id="6" name="">
+            <a:extLst xmlns:a="http://schemas.openxmlformats.org/drawingml/2006/main">
+              <a:ext uri="{FF2B5EF4-FFF2-40B4-BE49-F238E27FC236}">
+                <a16:creationId xmlns:a16="http://schemas.microsoft.com/office/drawing/2014/main" id="{94E3BCC9-B0B2-4357-B1AF-F4D3006ED677}"/>
+              </a:ext>
+            </a:extLst>
+          </p:cNvPr>
+          <p:cNvSpPr>
+            <a:spLocks xmlns:a="http://schemas.openxmlformats.org/drawingml/2006/main" noGrp="1"/>
+          </p:cNvSpPr>
+          <p:nvPr/>
+        </p:nvSpPr>
+        <p:spPr>
+          <a:xfrm xmlns:a="http://schemas.openxmlformats.org/drawingml/2006/main">
+            <a:off x="876300" y="2552700"/>
+            <a:ext cx="1990725" cy="361950"/>
+          </a:xfrm>
+          <a:prstGeom xmlns:a="http://schemas.openxmlformats.org/drawingml/2006/main" prst="rect">
+            <a:avLst/>
+          </a:prstGeom>
+          <a:noFill xmlns:a="http://schemas.openxmlformats.org/drawingml/2006/main"/>
+          <a:ln xmlns:a="http://schemas.openxmlformats.org/drawingml/2006/main" w="0">
+            <a:noFill/>
+            <a:prstDash val="solid"/>
+          </a:ln>
+        </p:spPr>
+        <p:txBody>
+          <a:bodyPr xmlns:a="http://schemas.openxmlformats.org/drawingml/2006/main"/>
+          <a:lstStyle xmlns:a="http://schemas.openxmlformats.org/drawingml/2006/main"/>
+          <a:p xmlns:a="http://schemas.openxmlformats.org/drawingml/2006/main">
+            <a:pPr algn="l">
+              <a:defRPr sz="2250" b="1" i="0">
+                <a:solidFill>
+                  <a:srgbClr val="000000"/>
+                </a:solidFill>
+              </a:defRPr>
+            </a:pPr>
+            <a:r>
+              <a:rPr sz="2250" b="1" i="0">
+                <a:solidFill>
+                  <a:srgbClr val="000000"/>
+                </a:solidFill>
+              </a:rPr>
+              <a:t>3</a:t>
+            </a:r>
+          </a:p>
+        </p:txBody>
+      </p:sp>
+      <p:sp>
+        <p:nvSpPr>
+          <p:cNvPr id="7" name="">
+            <a:extLst xmlns:a="http://schemas.openxmlformats.org/drawingml/2006/main">
+              <a:ext uri="{FF2B5EF4-FFF2-40B4-BE49-F238E27FC236}">
+                <a16:creationId xmlns:a16="http://schemas.microsoft.com/office/drawing/2014/main" id="{CAFCB317-1862-42E5-A944-1F091BACBCCA}"/>
+              </a:ext>
+            </a:extLst>
+          </p:cNvPr>
+          <p:cNvSpPr>
+            <a:spLocks xmlns:a="http://schemas.openxmlformats.org/drawingml/2006/main" noGrp="1"/>
+          </p:cNvSpPr>
+          <p:nvPr/>
+        </p:nvSpPr>
+        <p:spPr>
+          <a:xfrm xmlns:a="http://schemas.openxmlformats.org/drawingml/2006/main">
+            <a:off x="876300" y="2971800"/>
+            <a:ext cx="1990725" cy="552450"/>
+          </a:xfrm>
+          <a:prstGeom xmlns:a="http://schemas.openxmlformats.org/drawingml/2006/main" prst="rect">
+            <a:avLst/>
+          </a:prstGeom>
+          <a:noFill xmlns:a="http://schemas.openxmlformats.org/drawingml/2006/main"/>
+          <a:ln xmlns:a="http://schemas.openxmlformats.org/drawingml/2006/main" w="0">
+            <a:noFill/>
+            <a:prstDash val="solid"/>
+          </a:ln>
+        </p:spPr>
+        <p:txBody>
+          <a:bodyPr xmlns:a="http://schemas.openxmlformats.org/drawingml/2006/main"/>
+          <a:lstStyle xmlns:a="http://schemas.openxmlformats.org/drawingml/2006/main"/>
+          <a:p xmlns:a="http://schemas.openxmlformats.org/drawingml/2006/main">
+            <a:pPr algn="l">
+              <a:defRPr sz="1125" b="0" i="0">
+                <a:solidFill>
+                  <a:srgbClr val="555555"/>
+                </a:solidFill>
+              </a:defRPr>
+            </a:pPr>
+            <a:r>
+              <a:rPr sz="1125" b="0" i="0">
+                <a:solidFill>
+                  <a:srgbClr val="555555"/>
+                </a:solidFill>
+              </a:rPr>
+              <a:t>Fixed, TRAIN quantile, and TRAIN forward-return grid.</a:t>
+            </a:r>
+          </a:p>
+        </p:txBody>
+      </p:sp>
+      <p:sp>
+        <p:nvSpPr>
+          <p:cNvPr id="8" name="">
+            <a:extLst xmlns:a="http://schemas.openxmlformats.org/drawingml/2006/main">
+              <a:ext uri="{FF2B5EF4-FFF2-40B4-BE49-F238E27FC236}">
+                <a16:creationId xmlns:a16="http://schemas.microsoft.com/office/drawing/2014/main" id="{6EB706B0-1881-4EA5-9AF2-2F5F5D36A679}"/>
+              </a:ext>
+            </a:extLst>
+          </p:cNvPr>
+          <p:cNvSpPr>
+            <a:spLocks xmlns:a="http://schemas.openxmlformats.org/drawingml/2006/main" noGrp="1"/>
+          </p:cNvSpPr>
+          <p:nvPr/>
+        </p:nvSpPr>
+        <p:spPr>
+          <a:xfrm xmlns:a="http://schemas.openxmlformats.org/drawingml/2006/main">
+            <a:off x="3409950" y="2152650"/>
+            <a:ext cx="2333625" cy="1428750"/>
+          </a:xfrm>
+          <a:prstGeom xmlns:a="http://schemas.openxmlformats.org/drawingml/2006/main" prst="rect">
+            <a:avLst/>
+          </a:prstGeom>
+          <a:solidFill xmlns:a="http://schemas.openxmlformats.org/drawingml/2006/main">
+            <a:srgbClr val="EDEDED"/>
+          </a:solidFill>
+          <a:ln xmlns:a="http://schemas.openxmlformats.org/drawingml/2006/main" w="9525">
+            <a:solidFill>
+              <a:srgbClr val="B8BCC4"/>
+            </a:solidFill>
+            <a:prstDash val="solid"/>
+          </a:ln>
+        </p:spPr>
+      </p:sp>
+      <p:sp>
+        <p:nvSpPr>
+          <p:cNvPr id="9" name="">
+            <a:extLst xmlns:a="http://schemas.openxmlformats.org/drawingml/2006/main">
+              <a:ext uri="{FF2B5EF4-FFF2-40B4-BE49-F238E27FC236}">
+                <a16:creationId xmlns:a16="http://schemas.microsoft.com/office/drawing/2014/main" id="{3A06383F-AF2B-4CB4-BA3F-CCE8BB06A11B}"/>
+              </a:ext>
+            </a:extLst>
+          </p:cNvPr>
+          <p:cNvSpPr>
+            <a:spLocks xmlns:a="http://schemas.openxmlformats.org/drawingml/2006/main" noGrp="1"/>
+          </p:cNvSpPr>
+          <p:nvPr/>
+        </p:nvSpPr>
+        <p:spPr>
+          <a:xfrm xmlns:a="http://schemas.openxmlformats.org/drawingml/2006/main">
+            <a:off x="3581400" y="2305050"/>
+            <a:ext cx="1990725" cy="171450"/>
+          </a:xfrm>
+          <a:prstGeom xmlns:a="http://schemas.openxmlformats.org/drawingml/2006/main" prst="rect">
+            <a:avLst/>
+          </a:prstGeom>
+          <a:noFill xmlns:a="http://schemas.openxmlformats.org/drawingml/2006/main"/>
+          <a:ln xmlns:a="http://schemas.openxmlformats.org/drawingml/2006/main" w="0">
+            <a:noFill/>
+            <a:prstDash val="solid"/>
+          </a:ln>
+        </p:spPr>
+        <p:txBody>
+          <a:bodyPr xmlns:a="http://schemas.openxmlformats.org/drawingml/2006/main"/>
+          <a:lstStyle xmlns:a="http://schemas.openxmlformats.org/drawingml/2006/main"/>
+          <a:p xmlns:a="http://schemas.openxmlformats.org/drawingml/2006/main">
+            <a:pPr algn="l">
+              <a:defRPr sz="900" b="1" i="0">
+                <a:solidFill>
+                  <a:srgbClr val="555555"/>
+                </a:solidFill>
+              </a:defRPr>
+            </a:pPr>
+            <a:r>
+              <a:rPr sz="900" b="1" i="0">
+                <a:solidFill>
+                  <a:srgbClr val="555555"/>
+                </a:solidFill>
+              </a:rPr>
+              <a:t>GUARDRAILS</a:t>
+            </a:r>
+          </a:p>
+        </p:txBody>
+      </p:sp>
+      <p:sp>
+        <p:nvSpPr>
+          <p:cNvPr id="10" name="">
+            <a:extLst xmlns:a="http://schemas.openxmlformats.org/drawingml/2006/main">
+              <a:ext uri="{FF2B5EF4-FFF2-40B4-BE49-F238E27FC236}">
+                <a16:creationId xmlns:a16="http://schemas.microsoft.com/office/drawing/2014/main" id="{4A75C703-94FD-480B-93F9-45FDA640892B}"/>
+              </a:ext>
+            </a:extLst>
+          </p:cNvPr>
+          <p:cNvSpPr>
+            <a:spLocks xmlns:a="http://schemas.openxmlformats.org/drawingml/2006/main" noGrp="1"/>
+          </p:cNvSpPr>
+          <p:nvPr/>
+        </p:nvSpPr>
+        <p:spPr>
+          <a:xfrm xmlns:a="http://schemas.openxmlformats.org/drawingml/2006/main">
+            <a:off x="3581400" y="2552700"/>
+            <a:ext cx="1990725" cy="361950"/>
+          </a:xfrm>
+          <a:prstGeom xmlns:a="http://schemas.openxmlformats.org/drawingml/2006/main" prst="rect">
+            <a:avLst/>
+          </a:prstGeom>
+          <a:noFill xmlns:a="http://schemas.openxmlformats.org/drawingml/2006/main"/>
+          <a:ln xmlns:a="http://schemas.openxmlformats.org/drawingml/2006/main" w="0">
+            <a:noFill/>
+            <a:prstDash val="solid"/>
+          </a:ln>
+        </p:spPr>
+        <p:txBody>
+          <a:bodyPr xmlns:a="http://schemas.openxmlformats.org/drawingml/2006/main"/>
+          <a:lstStyle xmlns:a="http://schemas.openxmlformats.org/drawingml/2006/main"/>
+          <a:p xmlns:a="http://schemas.openxmlformats.org/drawingml/2006/main">
+            <a:pPr algn="l">
+              <a:defRPr sz="2250" b="1" i="0">
+                <a:solidFill>
+                  <a:srgbClr val="000000"/>
+                </a:solidFill>
+              </a:defRPr>
+            </a:pPr>
+            <a:r>
+              <a:rPr sz="2250" b="1" i="0">
+                <a:solidFill>
+                  <a:srgbClr val="000000"/>
+                </a:solidFill>
+              </a:rPr>
+              <a:t>All PASS</a:t>
+            </a:r>
+          </a:p>
+        </p:txBody>
+      </p:sp>
+      <p:sp>
+        <p:nvSpPr>
+          <p:cNvPr id="11" name="">
+            <a:extLst xmlns:a="http://schemas.openxmlformats.org/drawingml/2006/main">
+              <a:ext uri="{FF2B5EF4-FFF2-40B4-BE49-F238E27FC236}">
+                <a16:creationId xmlns:a16="http://schemas.microsoft.com/office/drawing/2014/main" id="{43BE98BE-D69A-4F0D-BBA3-F40A53AAE7D4}"/>
+              </a:ext>
+            </a:extLst>
+          </p:cNvPr>
+          <p:cNvSpPr>
+            <a:spLocks xmlns:a="http://schemas.openxmlformats.org/drawingml/2006/main" noGrp="1"/>
+          </p:cNvSpPr>
+          <p:nvPr/>
+        </p:nvSpPr>
+        <p:spPr>
+          <a:xfrm xmlns:a="http://schemas.openxmlformats.org/drawingml/2006/main">
+            <a:off x="3581400" y="2971800"/>
+            <a:ext cx="1990725" cy="552450"/>
+          </a:xfrm>
+          <a:prstGeom xmlns:a="http://schemas.openxmlformats.org/drawingml/2006/main" prst="rect">
+            <a:avLst/>
+          </a:prstGeom>
+          <a:noFill xmlns:a="http://schemas.openxmlformats.org/drawingml/2006/main"/>
+          <a:ln xmlns:a="http://schemas.openxmlformats.org/drawingml/2006/main" w="0">
+            <a:noFill/>
+            <a:prstDash val="solid"/>
+          </a:ln>
+        </p:spPr>
+        <p:txBody>
+          <a:bodyPr xmlns:a="http://schemas.openxmlformats.org/drawingml/2006/main"/>
+          <a:lstStyle xmlns:a="http://schemas.openxmlformats.org/drawingml/2006/main"/>
+          <a:p xmlns:a="http://schemas.openxmlformats.org/drawingml/2006/main">
+            <a:pPr algn="l">
+              <a:defRPr sz="1125" b="0" i="0">
+                <a:solidFill>
+                  <a:srgbClr val="555555"/>
+                </a:solidFill>
+              </a:defRPr>
+            </a:pPr>
+            <a:r>
+              <a:rPr sz="1125" b="0" i="0">
+                <a:solidFill>
+                  <a:srgbClr val="555555"/>
+                </a:solidFill>
+              </a:rPr>
+              <a:t>Fit and policy selection stay inside TRAIN.</a:t>
+            </a:r>
+          </a:p>
+        </p:txBody>
+      </p:sp>
+      <p:sp>
+        <p:nvSpPr>
+          <p:cNvPr id="12" name="">
+            <a:extLst xmlns:a="http://schemas.openxmlformats.org/drawingml/2006/main">
+              <a:ext uri="{FF2B5EF4-FFF2-40B4-BE49-F238E27FC236}">
+                <a16:creationId xmlns:a16="http://schemas.microsoft.com/office/drawing/2014/main" id="{EB5FF88D-DF49-4827-97F3-52D8333E209C}"/>
+              </a:ext>
+            </a:extLst>
+          </p:cNvPr>
+          <p:cNvSpPr>
+            <a:spLocks xmlns:a="http://schemas.openxmlformats.org/drawingml/2006/main" noGrp="1"/>
+          </p:cNvSpPr>
+          <p:nvPr/>
+        </p:nvSpPr>
+        <p:spPr>
+          <a:xfrm xmlns:a="http://schemas.openxmlformats.org/drawingml/2006/main">
+            <a:off x="6115050" y="2152650"/>
+            <a:ext cx="2333625" cy="1428750"/>
+          </a:xfrm>
+          <a:prstGeom xmlns:a="http://schemas.openxmlformats.org/drawingml/2006/main" prst="rect">
+            <a:avLst/>
+          </a:prstGeom>
+          <a:solidFill xmlns:a="http://schemas.openxmlformats.org/drawingml/2006/main">
+            <a:srgbClr val="EDEDED"/>
+          </a:solidFill>
+          <a:ln xmlns:a="http://schemas.openxmlformats.org/drawingml/2006/main" w="9525">
+            <a:solidFill>
+              <a:srgbClr val="B8BCC4"/>
+            </a:solidFill>
+            <a:prstDash val="solid"/>
+          </a:ln>
+        </p:spPr>
+      </p:sp>
+      <p:sp>
+        <p:nvSpPr>
+          <p:cNvPr id="13" name="">
+            <a:extLst xmlns:a="http://schemas.openxmlformats.org/drawingml/2006/main">
+              <a:ext uri="{FF2B5EF4-FFF2-40B4-BE49-F238E27FC236}">
+                <a16:creationId xmlns:a16="http://schemas.microsoft.com/office/drawing/2014/main" id="{DB5EFE55-7FA1-460B-9CCB-FAC41DC5E905}"/>
+              </a:ext>
+            </a:extLst>
+          </p:cNvPr>
+          <p:cNvSpPr>
+            <a:spLocks xmlns:a="http://schemas.openxmlformats.org/drawingml/2006/main" noGrp="1"/>
+          </p:cNvSpPr>
+          <p:nvPr/>
+        </p:nvSpPr>
+        <p:spPr>
+          <a:xfrm xmlns:a="http://schemas.openxmlformats.org/drawingml/2006/main">
+            <a:off x="6286500" y="2305050"/>
+            <a:ext cx="1990725" cy="171450"/>
+          </a:xfrm>
+          <a:prstGeom xmlns:a="http://schemas.openxmlformats.org/drawingml/2006/main" prst="rect">
+            <a:avLst/>
+          </a:prstGeom>
+          <a:noFill xmlns:a="http://schemas.openxmlformats.org/drawingml/2006/main"/>
+          <a:ln xmlns:a="http://schemas.openxmlformats.org/drawingml/2006/main" w="0">
+            <a:noFill/>
+            <a:prstDash val="solid"/>
+          </a:ln>
+        </p:spPr>
+        <p:txBody>
+          <a:bodyPr xmlns:a="http://schemas.openxmlformats.org/drawingml/2006/main"/>
+          <a:lstStyle xmlns:a="http://schemas.openxmlformats.org/drawingml/2006/main"/>
+          <a:p xmlns:a="http://schemas.openxmlformats.org/drawingml/2006/main">
+            <a:pPr algn="l">
+              <a:defRPr sz="900" b="1" i="0">
+                <a:solidFill>
+                  <a:srgbClr val="555555"/>
+                </a:solidFill>
+              </a:defRPr>
+            </a:pPr>
+            <a:r>
+              <a:rPr sz="900" b="1" i="0">
+                <a:solidFill>
+                  <a:srgbClr val="555555"/>
+                </a:solidFill>
+              </a:rPr>
+              <a:t>2020 GRID RETURN</a:t>
+            </a:r>
+          </a:p>
+        </p:txBody>
+      </p:sp>
+      <p:sp>
+        <p:nvSpPr>
+          <p:cNvPr id="14" name="">
+            <a:extLst xmlns:a="http://schemas.openxmlformats.org/drawingml/2006/main">
+              <a:ext uri="{FF2B5EF4-FFF2-40B4-BE49-F238E27FC236}">
+                <a16:creationId xmlns:a16="http://schemas.microsoft.com/office/drawing/2014/main" id="{209F3205-A369-4F53-81AA-0784AAC944BB}"/>
+              </a:ext>
+            </a:extLst>
+          </p:cNvPr>
+          <p:cNvSpPr>
+            <a:spLocks xmlns:a="http://schemas.openxmlformats.org/drawingml/2006/main" noGrp="1"/>
+          </p:cNvSpPr>
+          <p:nvPr/>
+        </p:nvSpPr>
+        <p:spPr>
+          <a:xfrm xmlns:a="http://schemas.openxmlformats.org/drawingml/2006/main">
+            <a:off x="6286500" y="2552700"/>
+            <a:ext cx="1990725" cy="361950"/>
+          </a:xfrm>
+          <a:prstGeom xmlns:a="http://schemas.openxmlformats.org/drawingml/2006/main" prst="rect">
+            <a:avLst/>
+          </a:prstGeom>
+          <a:noFill xmlns:a="http://schemas.openxmlformats.org/drawingml/2006/main"/>
+          <a:ln xmlns:a="http://schemas.openxmlformats.org/drawingml/2006/main" w="0">
+            <a:noFill/>
+            <a:prstDash val="solid"/>
+          </a:ln>
+        </p:spPr>
+        <p:txBody>
+          <a:bodyPr xmlns:a="http://schemas.openxmlformats.org/drawingml/2006/main"/>
+          <a:lstStyle xmlns:a="http://schemas.openxmlformats.org/drawingml/2006/main"/>
+          <a:p xmlns:a="http://schemas.openxmlformats.org/drawingml/2006/main">
+            <a:pPr algn="l">
+              <a:defRPr sz="2250" b="1" i="0">
+                <a:solidFill>
+                  <a:srgbClr val="000000"/>
+                </a:solidFill>
+              </a:defRPr>
+            </a:pPr>
+            <a:r>
+              <a:rPr sz="2250" b="1" i="0">
+                <a:solidFill>
+                  <a:srgbClr val="000000"/>
+                </a:solidFill>
+              </a:rPr>
+              <a:t>30.0%</a:t>
+            </a:r>
+          </a:p>
+        </p:txBody>
+      </p:sp>
+      <p:sp>
+        <p:nvSpPr>
+          <p:cNvPr id="15" name="">
+            <a:extLst xmlns:a="http://schemas.openxmlformats.org/drawingml/2006/main">
+              <a:ext uri="{FF2B5EF4-FFF2-40B4-BE49-F238E27FC236}">
+                <a16:creationId xmlns:a16="http://schemas.microsoft.com/office/drawing/2014/main" id="{0E8ADDF2-425B-4C83-8D70-ABF76F09CD38}"/>
+              </a:ext>
+            </a:extLst>
+          </p:cNvPr>
+          <p:cNvSpPr>
+            <a:spLocks xmlns:a="http://schemas.openxmlformats.org/drawingml/2006/main" noGrp="1"/>
+          </p:cNvSpPr>
+          <p:nvPr/>
+        </p:nvSpPr>
+        <p:spPr>
+          <a:xfrm xmlns:a="http://schemas.openxmlformats.org/drawingml/2006/main">
+            <a:off x="6286500" y="2971800"/>
+            <a:ext cx="1990725" cy="552450"/>
+          </a:xfrm>
+          <a:prstGeom xmlns:a="http://schemas.openxmlformats.org/drawingml/2006/main" prst="rect">
+            <a:avLst/>
+          </a:prstGeom>
+          <a:noFill xmlns:a="http://schemas.openxmlformats.org/drawingml/2006/main"/>
+          <a:ln xmlns:a="http://schemas.openxmlformats.org/drawingml/2006/main" w="0">
+            <a:noFill/>
+            <a:prstDash val="solid"/>
+          </a:ln>
+        </p:spPr>
+        <p:txBody>
+          <a:bodyPr xmlns:a="http://schemas.openxmlformats.org/drawingml/2006/main"/>
+          <a:lstStyle xmlns:a="http://schemas.openxmlformats.org/drawingml/2006/main"/>
+          <a:p xmlns:a="http://schemas.openxmlformats.org/drawingml/2006/main">
+            <a:pPr algn="l">
+              <a:defRPr sz="1125" b="0" i="0">
+                <a:solidFill>
+                  <a:srgbClr val="555555"/>
+                </a:solidFill>
+              </a:defRPr>
+            </a:pPr>
+            <a:r>
+              <a:rPr sz="1125" b="0" i="0">
+                <a:solidFill>
+                  <a:srgbClr val="555555"/>
+                </a:solidFill>
+              </a:rPr>
+              <a:t>Fixed was 8.0%; basket hold was 214.0%.</a:t>
+            </a:r>
+          </a:p>
+        </p:txBody>
+      </p:sp>
+      <p:sp>
+        <p:nvSpPr>
+          <p:cNvPr id="16" name="">
+            <a:extLst xmlns:a="http://schemas.openxmlformats.org/drawingml/2006/main">
+              <a:ext uri="{FF2B5EF4-FFF2-40B4-BE49-F238E27FC236}">
+                <a16:creationId xmlns:a16="http://schemas.microsoft.com/office/drawing/2014/main" id="{C5FA5CCA-529F-4297-9EB7-008FDB830341}"/>
+              </a:ext>
+            </a:extLst>
+          </p:cNvPr>
+          <p:cNvSpPr>
+            <a:spLocks xmlns:a="http://schemas.openxmlformats.org/drawingml/2006/main" noGrp="1"/>
+          </p:cNvSpPr>
+          <p:nvPr/>
+        </p:nvSpPr>
+        <p:spPr>
+          <a:xfrm xmlns:a="http://schemas.openxmlformats.org/drawingml/2006/main">
+            <a:off x="8820150" y="2152650"/>
+            <a:ext cx="2333625" cy="1428750"/>
+          </a:xfrm>
+          <a:prstGeom xmlns:a="http://schemas.openxmlformats.org/drawingml/2006/main" prst="rect">
+            <a:avLst/>
+          </a:prstGeom>
+          <a:solidFill xmlns:a="http://schemas.openxmlformats.org/drawingml/2006/main">
+            <a:srgbClr val="EDEDED"/>
+          </a:solidFill>
+          <a:ln xmlns:a="http://schemas.openxmlformats.org/drawingml/2006/main" w="9525">
+            <a:solidFill>
+              <a:srgbClr val="B8BCC4"/>
+            </a:solidFill>
+            <a:prstDash val="solid"/>
+          </a:ln>
+        </p:spPr>
+      </p:sp>
+      <p:sp>
+        <p:nvSpPr>
+          <p:cNvPr id="17" name="">
+            <a:extLst xmlns:a="http://schemas.openxmlformats.org/drawingml/2006/main">
+              <a:ext uri="{FF2B5EF4-FFF2-40B4-BE49-F238E27FC236}">
+                <a16:creationId xmlns:a16="http://schemas.microsoft.com/office/drawing/2014/main" id="{A8330618-2B36-451B-B5FA-98E98F3E4B2F}"/>
+              </a:ext>
+            </a:extLst>
+          </p:cNvPr>
+          <p:cNvSpPr>
+            <a:spLocks xmlns:a="http://schemas.openxmlformats.org/drawingml/2006/main" noGrp="1"/>
+          </p:cNvSpPr>
+          <p:nvPr/>
+        </p:nvSpPr>
+        <p:spPr>
+          <a:xfrm xmlns:a="http://schemas.openxmlformats.org/drawingml/2006/main">
+            <a:off x="8991600" y="2305050"/>
+            <a:ext cx="1990725" cy="171450"/>
+          </a:xfrm>
+          <a:prstGeom xmlns:a="http://schemas.openxmlformats.org/drawingml/2006/main" prst="rect">
+            <a:avLst/>
+          </a:prstGeom>
+          <a:noFill xmlns:a="http://schemas.openxmlformats.org/drawingml/2006/main"/>
+          <a:ln xmlns:a="http://schemas.openxmlformats.org/drawingml/2006/main" w="0">
+            <a:noFill/>
+            <a:prstDash val="solid"/>
+          </a:ln>
+        </p:spPr>
+        <p:txBody>
+          <a:bodyPr xmlns:a="http://schemas.openxmlformats.org/drawingml/2006/main"/>
+          <a:lstStyle xmlns:a="http://schemas.openxmlformats.org/drawingml/2006/main"/>
+          <a:p xmlns:a="http://schemas.openxmlformats.org/drawingml/2006/main">
+            <a:pPr algn="l">
+              <a:defRPr sz="900" b="1" i="0">
+                <a:solidFill>
+                  <a:srgbClr val="555555"/>
+                </a:solidFill>
+              </a:defRPr>
+            </a:pPr>
+            <a:r>
+              <a:rPr sz="900" b="1" i="0">
+                <a:solidFill>
+                  <a:srgbClr val="555555"/>
+                </a:solidFill>
+              </a:rPr>
+              <a:t>2022 QUANTILE RETURN</a:t>
+            </a:r>
+          </a:p>
+        </p:txBody>
+      </p:sp>
+      <p:sp>
+        <p:nvSpPr>
+          <p:cNvPr id="18" name="">
+            <a:extLst xmlns:a="http://schemas.openxmlformats.org/drawingml/2006/main">
+              <a:ext uri="{FF2B5EF4-FFF2-40B4-BE49-F238E27FC236}">
+                <a16:creationId xmlns:a16="http://schemas.microsoft.com/office/drawing/2014/main" id="{22187A75-6FDF-4C32-B600-FC6FCBC29DAB}"/>
+              </a:ext>
+            </a:extLst>
+          </p:cNvPr>
+          <p:cNvSpPr>
+            <a:spLocks xmlns:a="http://schemas.openxmlformats.org/drawingml/2006/main" noGrp="1"/>
+          </p:cNvSpPr>
+          <p:nvPr/>
+        </p:nvSpPr>
+        <p:spPr>
+          <a:xfrm xmlns:a="http://schemas.openxmlformats.org/drawingml/2006/main">
+            <a:off x="8991600" y="2552700"/>
+            <a:ext cx="1990725" cy="361950"/>
+          </a:xfrm>
+          <a:prstGeom xmlns:a="http://schemas.openxmlformats.org/drawingml/2006/main" prst="rect">
+            <a:avLst/>
+          </a:prstGeom>
+          <a:noFill xmlns:a="http://schemas.openxmlformats.org/drawingml/2006/main"/>
+          <a:ln xmlns:a="http://schemas.openxmlformats.org/drawingml/2006/main" w="0">
+            <a:noFill/>
+            <a:prstDash val="solid"/>
+          </a:ln>
+        </p:spPr>
+        <p:txBody>
+          <a:bodyPr xmlns:a="http://schemas.openxmlformats.org/drawingml/2006/main"/>
+          <a:lstStyle xmlns:a="http://schemas.openxmlformats.org/drawingml/2006/main"/>
+          <a:p xmlns:a="http://schemas.openxmlformats.org/drawingml/2006/main">
+            <a:pPr algn="l">
+              <a:defRPr sz="2250" b="1" i="0">
+                <a:solidFill>
+                  <a:srgbClr val="000000"/>
+                </a:solidFill>
+              </a:defRPr>
+            </a:pPr>
+            <a:r>
+              <a:rPr sz="2250" b="1" i="0">
+                <a:solidFill>
+                  <a:srgbClr val="000000"/>
+                </a:solidFill>
+              </a:rPr>
+              <a:t>-39.5%</a:t>
+            </a:r>
+          </a:p>
+        </p:txBody>
+      </p:sp>
+      <p:sp>
+        <p:nvSpPr>
+          <p:cNvPr id="19" name="">
+            <a:extLst xmlns:a="http://schemas.openxmlformats.org/drawingml/2006/main">
+              <a:ext uri="{FF2B5EF4-FFF2-40B4-BE49-F238E27FC236}">
+                <a16:creationId xmlns:a16="http://schemas.microsoft.com/office/drawing/2014/main" id="{EA9799A9-97F7-4DD2-9684-0427FFF566F3}"/>
+              </a:ext>
+            </a:extLst>
+          </p:cNvPr>
+          <p:cNvSpPr>
+            <a:spLocks xmlns:a="http://schemas.openxmlformats.org/drawingml/2006/main" noGrp="1"/>
+          </p:cNvSpPr>
+          <p:nvPr/>
+        </p:nvSpPr>
+        <p:spPr>
+          <a:xfrm xmlns:a="http://schemas.openxmlformats.org/drawingml/2006/main">
+            <a:off x="8991600" y="2971800"/>
+            <a:ext cx="1990725" cy="552450"/>
+          </a:xfrm>
+          <a:prstGeom xmlns:a="http://schemas.openxmlformats.org/drawingml/2006/main" prst="rect">
+            <a:avLst/>
+          </a:prstGeom>
+          <a:noFill xmlns:a="http://schemas.openxmlformats.org/drawingml/2006/main"/>
+          <a:ln xmlns:a="http://schemas.openxmlformats.org/drawingml/2006/main" w="0">
+            <a:noFill/>
+            <a:prstDash val="solid"/>
+          </a:ln>
+        </p:spPr>
+        <p:txBody>
+          <a:bodyPr xmlns:a="http://schemas.openxmlformats.org/drawingml/2006/main"/>
+          <a:lstStyle xmlns:a="http://schemas.openxmlformats.org/drawingml/2006/main"/>
+          <a:p xmlns:a="http://schemas.openxmlformats.org/drawingml/2006/main">
+            <a:pPr algn="l">
+              <a:defRPr sz="1125" b="0" i="0">
+                <a:solidFill>
+                  <a:srgbClr val="555555"/>
+                </a:solidFill>
+              </a:defRPr>
+            </a:pPr>
+            <a:r>
+              <a:rPr sz="1125" b="0" i="0">
+                <a:solidFill>
+                  <a:srgbClr val="555555"/>
+                </a:solidFill>
+              </a:rPr>
+              <a:t>Fixed was -42.4%; basket hold was -54.2%.</a:t>
+            </a:r>
+          </a:p>
+        </p:txBody>
+      </p:sp>
+      <p:sp>
+        <p:nvSpPr>
+          <p:cNvPr id="20" name="">
+            <a:extLst xmlns:a="http://schemas.openxmlformats.org/drawingml/2006/main">
+              <a:ext uri="{FF2B5EF4-FFF2-40B4-BE49-F238E27FC236}">
+                <a16:creationId xmlns:a16="http://schemas.microsoft.com/office/drawing/2014/main" id="{234ED678-F0BD-443D-BBED-C8ED70AA8C1E}"/>
+              </a:ext>
+            </a:extLst>
+          </p:cNvPr>
+          <p:cNvSpPr>
+            <a:spLocks xmlns:a="http://schemas.openxmlformats.org/drawingml/2006/main" noGrp="1"/>
+          </p:cNvSpPr>
+          <p:nvPr/>
+        </p:nvSpPr>
+        <p:spPr>
+          <a:xfrm xmlns:a="http://schemas.openxmlformats.org/drawingml/2006/main">
+            <a:off x="1066800" y="4095750"/>
+            <a:ext cx="9334500" cy="914400"/>
+          </a:xfrm>
+          <a:prstGeom xmlns:a="http://schemas.openxmlformats.org/drawingml/2006/main" prst="rect">
+            <a:avLst/>
+          </a:prstGeom>
+          <a:noFill xmlns:a="http://schemas.openxmlformats.org/drawingml/2006/main"/>
+          <a:ln xmlns:a="http://schemas.openxmlformats.org/drawingml/2006/main" w="0">
+            <a:noFill/>
+            <a:prstDash val="solid"/>
+          </a:ln>
+        </p:spPr>
+        <p:txBody>
+          <a:bodyPr xmlns:a="http://schemas.openxmlformats.org/drawingml/2006/main"/>
+          <a:lstStyle xmlns:a="http://schemas.openxmlformats.org/drawingml/2006/main"/>
+          <a:p xmlns:a="http://schemas.openxmlformats.org/drawingml/2006/main">
+            <a:pPr algn="ctr">
+              <a:defRPr sz="2100" b="1" i="0">
+                <a:solidFill>
+                  <a:srgbClr val="000000"/>
+                </a:solidFill>
+              </a:defRPr>
+            </a:pPr>
+            <a:r>
+              <a:rPr sz="2100" b="1" i="0">
+                <a:solidFill>
+                  <a:srgbClr val="000000"/>
+                </a:solidFill>
+              </a:rPr>
+              <a:t>The grid policy raised 2020 exposure and return, which confirms threshold choice matters. It still left most of the high-beta rally unowned, so the problem is not just the original 0.55 / 0.50 cutoff.</a:t>
+            </a:r>
+          </a:p>
+        </p:txBody>
+      </p:sp>
+    </p:spTree>
+    <p:extLst>
+      <p:ext uri="{BB962C8B-B14F-4D97-AF65-F5344CB8AC3E}">
+        <p14:creationId xmlns:p14="http://schemas.microsoft.com/office/powerpoint/2010/main" val="1609177328"/>
       </p:ext>
     </p:extLst>
   </p:cSld>
@@ -6385,7 +8070,7 @@
           <p:cNvPr id="1" name="">
             <a:extLst xmlns:a="http://schemas.openxmlformats.org/drawingml/2006/main">
               <a:ext uri="{FF2B5EF4-FFF2-40B4-BE49-F238E27FC236}">
-                <a16:creationId xmlns:a16="http://schemas.microsoft.com/office/drawing/2014/main" id="{E36542FA-F233-4D13-B547-F790B39EB006}"/>
+                <a16:creationId xmlns:a16="http://schemas.microsoft.com/office/drawing/2014/main" id="{CAA4FAD7-0BF6-42B1-8AA3-D50B4649B2F7}"/>
               </a:ext>
             </a:extLst>
           </p:cNvPr>
@@ -6435,7 +8120,7 @@
           <p:cNvPr id="2" name="">
             <a:extLst xmlns:a="http://schemas.openxmlformats.org/drawingml/2006/main">
               <a:ext uri="{FF2B5EF4-FFF2-40B4-BE49-F238E27FC236}">
-                <a16:creationId xmlns:a16="http://schemas.microsoft.com/office/drawing/2014/main" id="{98AA86FC-52B0-4F43-B0A0-88CB7483313E}"/>
+                <a16:creationId xmlns:a16="http://schemas.microsoft.com/office/drawing/2014/main" id="{92AFED92-0C86-47B4-BFFC-4FF382A05AF3}"/>
               </a:ext>
             </a:extLst>
           </p:cNvPr>
@@ -6485,7 +8170,7 @@
           <p:cNvPr id="3" name="">
             <a:extLst xmlns:a="http://schemas.openxmlformats.org/drawingml/2006/main">
               <a:ext uri="{FF2B5EF4-FFF2-40B4-BE49-F238E27FC236}">
-                <a16:creationId xmlns:a16="http://schemas.microsoft.com/office/drawing/2014/main" id="{E2D7AF07-2065-454F-B243-B3F7F8DD9F31}"/>
+                <a16:creationId xmlns:a16="http://schemas.microsoft.com/office/drawing/2014/main" id="{625BF5F8-34D1-41D3-9BF3-D6885FE15D22}"/>
               </a:ext>
             </a:extLst>
           </p:cNvPr>
@@ -6516,7 +8201,7 @@
           <p:cNvPr id="4" name="">
             <a:extLst xmlns:a="http://schemas.openxmlformats.org/drawingml/2006/main">
               <a:ext uri="{FF2B5EF4-FFF2-40B4-BE49-F238E27FC236}">
-                <a16:creationId xmlns:a16="http://schemas.microsoft.com/office/drawing/2014/main" id="{75839C31-D04D-41CE-96C0-64F2392A2050}"/>
+                <a16:creationId xmlns:a16="http://schemas.microsoft.com/office/drawing/2014/main" id="{F7A92931-E2E9-49F5-A345-EEE8B8F69469}"/>
               </a:ext>
             </a:extLst>
           </p:cNvPr>
@@ -6566,7 +8251,7 @@
           <p:cNvPr id="5" name="">
             <a:extLst xmlns:a="http://schemas.openxmlformats.org/drawingml/2006/main">
               <a:ext uri="{FF2B5EF4-FFF2-40B4-BE49-F238E27FC236}">
-                <a16:creationId xmlns:a16="http://schemas.microsoft.com/office/drawing/2014/main" id="{B250E0EF-7F93-4459-A211-4CFE69A12981}"/>
+                <a16:creationId xmlns:a16="http://schemas.microsoft.com/office/drawing/2014/main" id="{EA00084F-8DFC-455A-9203-64D9AA7AAD3F}"/>
               </a:ext>
             </a:extLst>
           </p:cNvPr>
@@ -6616,7 +8301,7 @@
           <p:cNvPr id="6" name="">
             <a:extLst xmlns:a="http://schemas.openxmlformats.org/drawingml/2006/main">
               <a:ext uri="{FF2B5EF4-FFF2-40B4-BE49-F238E27FC236}">
-                <a16:creationId xmlns:a16="http://schemas.microsoft.com/office/drawing/2014/main" id="{5BCB7FBC-677F-437E-93EB-CD384D83AF80}"/>
+                <a16:creationId xmlns:a16="http://schemas.microsoft.com/office/drawing/2014/main" id="{B1876AB4-97B5-40DC-93A3-D8480D2474C2}"/>
               </a:ext>
             </a:extLst>
           </p:cNvPr>
@@ -6666,7 +8351,7 @@
           <p:cNvPr id="7" name="">
             <a:extLst xmlns:a="http://schemas.openxmlformats.org/drawingml/2006/main">
               <a:ext uri="{FF2B5EF4-FFF2-40B4-BE49-F238E27FC236}">
-                <a16:creationId xmlns:a16="http://schemas.microsoft.com/office/drawing/2014/main" id="{9DEDB69F-E2E1-418B-AD5A-A33102B57D37}"/>
+                <a16:creationId xmlns:a16="http://schemas.microsoft.com/office/drawing/2014/main" id="{11CE9A5B-1E28-44FE-B9BA-30472B4EFB39}"/>
               </a:ext>
             </a:extLst>
           </p:cNvPr>
@@ -6716,7 +8401,7 @@
           <p:cNvPr id="8" name="">
             <a:extLst xmlns:a="http://schemas.openxmlformats.org/drawingml/2006/main">
               <a:ext uri="{FF2B5EF4-FFF2-40B4-BE49-F238E27FC236}">
-                <a16:creationId xmlns:a16="http://schemas.microsoft.com/office/drawing/2014/main" id="{1C7143CA-8817-4B70-967B-FC3C5C42BC77}"/>
+                <a16:creationId xmlns:a16="http://schemas.microsoft.com/office/drawing/2014/main" id="{F6A92327-D574-48D4-BB4F-EE496044892E}"/>
               </a:ext>
             </a:extLst>
           </p:cNvPr>
@@ -6766,7 +8451,7 @@
           <p:cNvPr id="9" name="">
             <a:extLst xmlns:a="http://schemas.openxmlformats.org/drawingml/2006/main">
               <a:ext uri="{FF2B5EF4-FFF2-40B4-BE49-F238E27FC236}">
-                <a16:creationId xmlns:a16="http://schemas.microsoft.com/office/drawing/2014/main" id="{6E9353EA-877B-42E2-8D32-A03D4691FE17}"/>
+                <a16:creationId xmlns:a16="http://schemas.microsoft.com/office/drawing/2014/main" id="{64D04879-EFC3-41EC-B171-19A811AC954C}"/>
               </a:ext>
             </a:extLst>
           </p:cNvPr>
@@ -6816,7 +8501,7 @@
           <p:cNvPr id="10" name="">
             <a:extLst xmlns:a="http://schemas.openxmlformats.org/drawingml/2006/main">
               <a:ext uri="{FF2B5EF4-FFF2-40B4-BE49-F238E27FC236}">
-                <a16:creationId xmlns:a16="http://schemas.microsoft.com/office/drawing/2014/main" id="{E828698A-FED4-4922-8C52-91F54AB4E579}"/>
+                <a16:creationId xmlns:a16="http://schemas.microsoft.com/office/drawing/2014/main" id="{0F9D01AC-E525-49D7-BB64-F8F4EBDEC847}"/>
               </a:ext>
             </a:extLst>
           </p:cNvPr>
@@ -6849,7 +8534,7 @@
           <p:cNvPr id="11" name="">
             <a:extLst xmlns:a="http://schemas.openxmlformats.org/drawingml/2006/main">
               <a:ext uri="{FF2B5EF4-FFF2-40B4-BE49-F238E27FC236}">
-                <a16:creationId xmlns:a16="http://schemas.microsoft.com/office/drawing/2014/main" id="{87E6B38D-58F5-400D-B2B6-B077881A3ABD}"/>
+                <a16:creationId xmlns:a16="http://schemas.microsoft.com/office/drawing/2014/main" id="{DC0343DD-D2A1-4986-B752-B3C7A0E12220}"/>
               </a:ext>
             </a:extLst>
           </p:cNvPr>
@@ -6882,7 +8567,7 @@
           <p:cNvPr id="12" name="">
             <a:extLst xmlns:a="http://schemas.openxmlformats.org/drawingml/2006/main">
               <a:ext uri="{FF2B5EF4-FFF2-40B4-BE49-F238E27FC236}">
-                <a16:creationId xmlns:a16="http://schemas.microsoft.com/office/drawing/2014/main" id="{30D3DFC3-3A91-4721-A77F-628DA1591DED}"/>
+                <a16:creationId xmlns:a16="http://schemas.microsoft.com/office/drawing/2014/main" id="{5094260E-FD8E-4742-82F4-4E1792BBB3B2}"/>
               </a:ext>
             </a:extLst>
           </p:cNvPr>
@@ -6915,7 +8600,7 @@
           <p:cNvPr id="13" name="">
             <a:extLst xmlns:a="http://schemas.openxmlformats.org/drawingml/2006/main">
               <a:ext uri="{FF2B5EF4-FFF2-40B4-BE49-F238E27FC236}">
-                <a16:creationId xmlns:a16="http://schemas.microsoft.com/office/drawing/2014/main" id="{E7E9F800-B400-4D11-8EC7-C9616CED9795}"/>
+                <a16:creationId xmlns:a16="http://schemas.microsoft.com/office/drawing/2014/main" id="{A3381E17-B9D3-4B02-A894-64D4532BCC96}"/>
               </a:ext>
             </a:extLst>
           </p:cNvPr>
@@ -6965,7 +8650,7 @@
           <p:cNvPr id="14" name="">
             <a:extLst xmlns:a="http://schemas.openxmlformats.org/drawingml/2006/main">
               <a:ext uri="{FF2B5EF4-FFF2-40B4-BE49-F238E27FC236}">
-                <a16:creationId xmlns:a16="http://schemas.microsoft.com/office/drawing/2014/main" id="{79948B6A-BADE-4BF8-B8DF-BB211E818ABF}"/>
+                <a16:creationId xmlns:a16="http://schemas.microsoft.com/office/drawing/2014/main" id="{87B13125-BD62-414A-8AB9-B1E04B09DCA5}"/>
               </a:ext>
             </a:extLst>
           </p:cNvPr>
@@ -7015,7 +8700,7 @@
           <p:cNvPr id="15" name="">
             <a:extLst xmlns:a="http://schemas.openxmlformats.org/drawingml/2006/main">
               <a:ext uri="{FF2B5EF4-FFF2-40B4-BE49-F238E27FC236}">
-                <a16:creationId xmlns:a16="http://schemas.microsoft.com/office/drawing/2014/main" id="{C162CA3C-445E-4EAA-9B6D-A672FAD83D07}"/>
+                <a16:creationId xmlns:a16="http://schemas.microsoft.com/office/drawing/2014/main" id="{6F5904BD-3B3E-4B7E-AE42-F2B953FC49BD}"/>
               </a:ext>
             </a:extLst>
           </p:cNvPr>
@@ -7065,7 +8750,7 @@
           <p:cNvPr id="16" name="">
             <a:extLst xmlns:a="http://schemas.openxmlformats.org/drawingml/2006/main">
               <a:ext uri="{FF2B5EF4-FFF2-40B4-BE49-F238E27FC236}">
-                <a16:creationId xmlns:a16="http://schemas.microsoft.com/office/drawing/2014/main" id="{9D1B2354-CB80-4D3A-AAA4-253B5F40F867}"/>
+                <a16:creationId xmlns:a16="http://schemas.microsoft.com/office/drawing/2014/main" id="{46FE5833-15AF-44DA-B30C-84E2ABCA21A8}"/>
               </a:ext>
             </a:extLst>
           </p:cNvPr>
@@ -7113,7 +8798,1435 @@
     </p:spTree>
     <p:extLst>
       <p:ext uri="{BB962C8B-B14F-4D97-AF65-F5344CB8AC3E}">
-        <p14:creationId xmlns:p14="http://schemas.microsoft.com/office/powerpoint/2010/main" val="1145742833"/>
+        <p14:creationId xmlns:p14="http://schemas.microsoft.com/office/powerpoint/2010/main" val="1952985074"/>
+      </p:ext>
+    </p:extLst>
+  </p:cSld>
+</p:sld>
+</file>
+
+<file path=ppt/slides/slide20.xml><?xml version="1.0" encoding="utf-8"?>
+<p:sld xmlns:p="http://schemas.openxmlformats.org/presentationml/2006/main">
+  <p:cSld>
+    <p:bg>
+      <p:bgPr>
+        <a:solidFill xmlns:a="http://schemas.openxmlformats.org/drawingml/2006/main">
+          <a:srgbClr val="FFFFFF"/>
+        </a:solidFill>
+      </p:bgPr>
+    </p:bg>
+    <p:spTree>
+      <p:nvGrpSpPr>
+        <p:cNvPr id="1" name=""/>
+        <p:cNvGrpSpPr/>
+        <p:nvPr/>
+      </p:nvGrpSpPr>
+      <p:grpSpPr>
+        <a:xfrm xmlns:a="http://schemas.openxmlformats.org/drawingml/2006/main"/>
+      </p:grpSpPr>
+      <p:sp>
+        <p:nvSpPr>
+          <p:cNvPr id="1" name="">
+            <a:extLst xmlns:a="http://schemas.openxmlformats.org/drawingml/2006/main">
+              <a:ext uri="{FF2B5EF4-FFF2-40B4-BE49-F238E27FC236}">
+                <a16:creationId xmlns:a16="http://schemas.microsoft.com/office/drawing/2014/main" id="{4C10A2AE-8C81-42EF-899A-9F1ECFE8B079}"/>
+              </a:ext>
+            </a:extLst>
+          </p:cNvPr>
+          <p:cNvSpPr>
+            <a:spLocks xmlns:a="http://schemas.openxmlformats.org/drawingml/2006/main" noGrp="1"/>
+          </p:cNvSpPr>
+          <p:nvPr/>
+        </p:nvSpPr>
+        <p:spPr>
+          <a:xfrm xmlns:a="http://schemas.openxmlformats.org/drawingml/2006/main">
+            <a:off x="685800" y="400050"/>
+            <a:ext cx="8572500" cy="247650"/>
+          </a:xfrm>
+          <a:prstGeom xmlns:a="http://schemas.openxmlformats.org/drawingml/2006/main" prst="rect">
+            <a:avLst/>
+          </a:prstGeom>
+          <a:noFill xmlns:a="http://schemas.openxmlformats.org/drawingml/2006/main"/>
+          <a:ln xmlns:a="http://schemas.openxmlformats.org/drawingml/2006/main" w="0">
+            <a:noFill/>
+            <a:prstDash val="solid"/>
+          </a:ln>
+        </p:spPr>
+        <p:txBody>
+          <a:bodyPr xmlns:a="http://schemas.openxmlformats.org/drawingml/2006/main"/>
+          <a:lstStyle xmlns:a="http://schemas.openxmlformats.org/drawingml/2006/main"/>
+          <a:p xmlns:a="http://schemas.openxmlformats.org/drawingml/2006/main">
+            <a:pPr algn="l">
+              <a:defRPr sz="975" b="1" i="0">
+                <a:solidFill>
+                  <a:srgbClr val="555555"/>
+                </a:solidFill>
+              </a:defRPr>
+            </a:pPr>
+            <a:r>
+              <a:rPr sz="975" b="1" i="0">
+                <a:solidFill>
+                  <a:srgbClr val="555555"/>
+                </a:solidFill>
+              </a:rPr>
+              <a:t>GEN5.4 ML DECISION ENGINE</a:t>
+            </a:r>
+          </a:p>
+        </p:txBody>
+      </p:sp>
+      <p:sp>
+        <p:nvSpPr>
+          <p:cNvPr id="2" name="">
+            <a:extLst xmlns:a="http://schemas.openxmlformats.org/drawingml/2006/main">
+              <a:ext uri="{FF2B5EF4-FFF2-40B4-BE49-F238E27FC236}">
+                <a16:creationId xmlns:a16="http://schemas.microsoft.com/office/drawing/2014/main" id="{A534B043-895F-4B4D-8A47-3E4A572722CB}"/>
+              </a:ext>
+            </a:extLst>
+          </p:cNvPr>
+          <p:cNvSpPr>
+            <a:spLocks xmlns:a="http://schemas.openxmlformats.org/drawingml/2006/main" noGrp="1"/>
+          </p:cNvSpPr>
+          <p:nvPr/>
+        </p:nvSpPr>
+        <p:spPr>
+          <a:xfrm xmlns:a="http://schemas.openxmlformats.org/drawingml/2006/main">
+            <a:off x="685800" y="723900"/>
+            <a:ext cx="10287000" cy="876300"/>
+          </a:xfrm>
+          <a:prstGeom xmlns:a="http://schemas.openxmlformats.org/drawingml/2006/main" prst="rect">
+            <a:avLst/>
+          </a:prstGeom>
+          <a:noFill xmlns:a="http://schemas.openxmlformats.org/drawingml/2006/main"/>
+          <a:ln xmlns:a="http://schemas.openxmlformats.org/drawingml/2006/main" w="0">
+            <a:noFill/>
+            <a:prstDash val="solid"/>
+          </a:ln>
+        </p:spPr>
+        <p:txBody>
+          <a:bodyPr xmlns:a="http://schemas.openxmlformats.org/drawingml/2006/main"/>
+          <a:lstStyle xmlns:a="http://schemas.openxmlformats.org/drawingml/2006/main"/>
+          <a:p xmlns:a="http://schemas.openxmlformats.org/drawingml/2006/main">
+            <a:pPr algn="l">
+              <a:defRPr sz="2850" b="1" i="0">
+                <a:solidFill>
+                  <a:srgbClr val="000000"/>
+                </a:solidFill>
+              </a:defRPr>
+            </a:pPr>
+            <a:r>
+              <a:rPr sz="2850" b="1" i="0">
+                <a:solidFill>
+                  <a:srgbClr val="000000"/>
+                </a:solidFill>
+              </a:rPr>
+              <a:t>The equity curves show a better but still underpowered rally response</a:t>
+            </a:r>
+          </a:p>
+        </p:txBody>
+      </p:sp>
+      <p:sp>
+        <p:nvSpPr>
+          <p:cNvPr id="3" name="">
+            <a:extLst xmlns:a="http://schemas.openxmlformats.org/drawingml/2006/main">
+              <a:ext uri="{FF2B5EF4-FFF2-40B4-BE49-F238E27FC236}">
+                <a16:creationId xmlns:a16="http://schemas.microsoft.com/office/drawing/2014/main" id="{EC11EACE-9AF2-448E-9921-758DA69E0594}"/>
+              </a:ext>
+            </a:extLst>
+          </p:cNvPr>
+          <p:cNvSpPr>
+            <a:spLocks xmlns:a="http://schemas.openxmlformats.org/drawingml/2006/main" noGrp="1"/>
+          </p:cNvSpPr>
+          <p:nvPr/>
+        </p:nvSpPr>
+        <p:spPr>
+          <a:xfrm xmlns:a="http://schemas.openxmlformats.org/drawingml/2006/main">
+            <a:off x="685800" y="1657350"/>
+            <a:ext cx="10820400" cy="19050"/>
+          </a:xfrm>
+          <a:prstGeom xmlns:a="http://schemas.openxmlformats.org/drawingml/2006/main" prst="rect">
+            <a:avLst/>
+          </a:prstGeom>
+          <a:solidFill xmlns:a="http://schemas.openxmlformats.org/drawingml/2006/main">
+            <a:srgbClr val="B8BCC4"/>
+          </a:solidFill>
+          <a:ln xmlns:a="http://schemas.openxmlformats.org/drawingml/2006/main" w="0">
+            <a:noFill/>
+            <a:prstDash val="solid"/>
+          </a:ln>
+        </p:spPr>
+      </p:sp>
+      <p:pic>
+        <p:nvPicPr>
+          <p:cNvPr id="10" name=""/>
+          <p:cNvPicPr>
+            <a:picLocks xmlns:a="http://schemas.openxmlformats.org/drawingml/2006/main" noChangeAspect="1"/>
+          </p:cNvPicPr>
+          <p:nvPr/>
+        </p:nvPicPr>
+        <p:blipFill>
+          <a:blip xmlns:r="http://schemas.openxmlformats.org/officeDocument/2006/relationships" xmlns:a="http://schemas.openxmlformats.org/drawingml/2006/main" r:embed="R7a44aacfeb704639"/>
+          <a:stretch xmlns:a="http://schemas.openxmlformats.org/drawingml/2006/main"/>
+        </p:blipFill>
+        <p:spPr>
+          <a:xfrm xmlns:a="http://schemas.openxmlformats.org/drawingml/2006/main">
+            <a:off x="835819" y="2000250"/>
+            <a:ext cx="6900863" cy="3943350"/>
+          </a:xfrm>
+          <a:prstGeom xmlns:a="http://schemas.openxmlformats.org/drawingml/2006/main" prst="rect">
+            <a:avLst/>
+          </a:prstGeom>
+        </p:spPr>
+      </p:pic>
+      <p:sp>
+        <p:nvSpPr>
+          <p:cNvPr id="5" name="">
+            <a:extLst xmlns:a="http://schemas.openxmlformats.org/drawingml/2006/main">
+              <a:ext uri="{FF2B5EF4-FFF2-40B4-BE49-F238E27FC236}">
+                <a16:creationId xmlns:a16="http://schemas.microsoft.com/office/drawing/2014/main" id="{B7C22DC2-87DE-4465-87EF-978435631070}"/>
+              </a:ext>
+            </a:extLst>
+          </p:cNvPr>
+          <p:cNvSpPr>
+            <a:spLocks xmlns:a="http://schemas.openxmlformats.org/drawingml/2006/main" noGrp="1"/>
+          </p:cNvSpPr>
+          <p:nvPr/>
+        </p:nvSpPr>
+        <p:spPr>
+          <a:xfrm xmlns:a="http://schemas.openxmlformats.org/drawingml/2006/main">
+            <a:off x="8477250" y="2133600"/>
+            <a:ext cx="2571750" cy="304800"/>
+          </a:xfrm>
+          <a:prstGeom xmlns:a="http://schemas.openxmlformats.org/drawingml/2006/main" prst="rect">
+            <a:avLst/>
+          </a:prstGeom>
+          <a:noFill xmlns:a="http://schemas.openxmlformats.org/drawingml/2006/main"/>
+          <a:ln xmlns:a="http://schemas.openxmlformats.org/drawingml/2006/main" w="0">
+            <a:noFill/>
+            <a:prstDash val="solid"/>
+          </a:ln>
+        </p:spPr>
+        <p:txBody>
+          <a:bodyPr xmlns:a="http://schemas.openxmlformats.org/drawingml/2006/main"/>
+          <a:lstStyle xmlns:a="http://schemas.openxmlformats.org/drawingml/2006/main"/>
+          <a:p xmlns:a="http://schemas.openxmlformats.org/drawingml/2006/main">
+            <a:pPr algn="l">
+              <a:defRPr sz="1950" b="1" i="0">
+                <a:solidFill>
+                  <a:srgbClr val="222222"/>
+                </a:solidFill>
+              </a:defRPr>
+            </a:pPr>
+            <a:r>
+              <a:rPr sz="1950" b="1" i="0">
+                <a:solidFill>
+                  <a:srgbClr val="222222"/>
+                </a:solidFill>
+              </a:rPr>
+              <a:t>What changed</a:t>
+            </a:r>
+          </a:p>
+        </p:txBody>
+      </p:sp>
+      <p:sp>
+        <p:nvSpPr>
+          <p:cNvPr id="6" name="">
+            <a:extLst xmlns:a="http://schemas.openxmlformats.org/drawingml/2006/main">
+              <a:ext uri="{FF2B5EF4-FFF2-40B4-BE49-F238E27FC236}">
+                <a16:creationId xmlns:a16="http://schemas.microsoft.com/office/drawing/2014/main" id="{64693799-1AA4-46DD-8844-F7194C729862}"/>
+              </a:ext>
+            </a:extLst>
+          </p:cNvPr>
+          <p:cNvSpPr>
+            <a:spLocks xmlns:a="http://schemas.openxmlformats.org/drawingml/2006/main" noGrp="1"/>
+          </p:cNvSpPr>
+          <p:nvPr/>
+        </p:nvSpPr>
+        <p:spPr>
+          <a:xfrm xmlns:a="http://schemas.openxmlformats.org/drawingml/2006/main">
+            <a:off x="8477250" y="2705100"/>
+            <a:ext cx="2705100" cy="2095500"/>
+          </a:xfrm>
+          <a:prstGeom xmlns:a="http://schemas.openxmlformats.org/drawingml/2006/main" prst="rect">
+            <a:avLst/>
+          </a:prstGeom>
+          <a:noFill xmlns:a="http://schemas.openxmlformats.org/drawingml/2006/main"/>
+          <a:ln xmlns:a="http://schemas.openxmlformats.org/drawingml/2006/main" w="0">
+            <a:noFill/>
+            <a:prstDash val="solid"/>
+          </a:ln>
+        </p:spPr>
+        <p:txBody>
+          <a:bodyPr xmlns:a="http://schemas.openxmlformats.org/drawingml/2006/main"/>
+          <a:lstStyle xmlns:a="http://schemas.openxmlformats.org/drawingml/2006/main"/>
+          <a:p xmlns:a="http://schemas.openxmlformats.org/drawingml/2006/main">
+            <a:pPr algn="l">
+              <a:defRPr sz="1650" b="0" i="0">
+                <a:solidFill>
+                  <a:srgbClr val="222222"/>
+                </a:solidFill>
+              </a:defRPr>
+            </a:pPr>
+            <a:r>
+              <a:rPr sz="1650" b="0" i="0">
+                <a:solidFill>
+                  <a:srgbClr val="222222"/>
+                </a:solidFill>
+              </a:rPr>
+              <a:t>The TRAIN grid policy lifted 2020 exposure from 27.6% to 34.8% and return from 8.0% to 30.0%. It still lagged the basket by -184.0%.</a:t>
+            </a:r>
+          </a:p>
+        </p:txBody>
+      </p:sp>
+    </p:spTree>
+    <p:extLst>
+      <p:ext uri="{BB962C8B-B14F-4D97-AF65-F5344CB8AC3E}">
+        <p14:creationId xmlns:p14="http://schemas.microsoft.com/office/powerpoint/2010/main" val="1298937151"/>
+      </p:ext>
+    </p:extLst>
+  </p:cSld>
+</p:sld>
+</file>
+
+<file path=ppt/slides/slide21.xml><?xml version="1.0" encoding="utf-8"?>
+<p:sld xmlns:p="http://schemas.openxmlformats.org/presentationml/2006/main">
+  <p:cSld>
+    <p:bg>
+      <p:bgPr>
+        <a:solidFill xmlns:a="http://schemas.openxmlformats.org/drawingml/2006/main">
+          <a:srgbClr val="FFFFFF"/>
+        </a:solidFill>
+      </p:bgPr>
+    </p:bg>
+    <p:spTree>
+      <p:nvGrpSpPr>
+        <p:cNvPr id="1" name=""/>
+        <p:cNvGrpSpPr/>
+        <p:nvPr/>
+      </p:nvGrpSpPr>
+      <p:grpSpPr>
+        <a:xfrm xmlns:a="http://schemas.openxmlformats.org/drawingml/2006/main"/>
+      </p:grpSpPr>
+      <p:sp>
+        <p:nvSpPr>
+          <p:cNvPr id="1" name="">
+            <a:extLst xmlns:a="http://schemas.openxmlformats.org/drawingml/2006/main">
+              <a:ext uri="{FF2B5EF4-FFF2-40B4-BE49-F238E27FC236}">
+                <a16:creationId xmlns:a16="http://schemas.microsoft.com/office/drawing/2014/main" id="{BCF0FBBD-D988-4492-8E98-AE0F074632C0}"/>
+              </a:ext>
+            </a:extLst>
+          </p:cNvPr>
+          <p:cNvSpPr>
+            <a:spLocks xmlns:a="http://schemas.openxmlformats.org/drawingml/2006/main" noGrp="1"/>
+          </p:cNvSpPr>
+          <p:nvPr/>
+        </p:nvSpPr>
+        <p:spPr>
+          <a:xfrm xmlns:a="http://schemas.openxmlformats.org/drawingml/2006/main">
+            <a:off x="685800" y="400050"/>
+            <a:ext cx="8572500" cy="247650"/>
+          </a:xfrm>
+          <a:prstGeom xmlns:a="http://schemas.openxmlformats.org/drawingml/2006/main" prst="rect">
+            <a:avLst/>
+          </a:prstGeom>
+          <a:noFill xmlns:a="http://schemas.openxmlformats.org/drawingml/2006/main"/>
+          <a:ln xmlns:a="http://schemas.openxmlformats.org/drawingml/2006/main" w="0">
+            <a:noFill/>
+            <a:prstDash val="solid"/>
+          </a:ln>
+        </p:spPr>
+        <p:txBody>
+          <a:bodyPr xmlns:a="http://schemas.openxmlformats.org/drawingml/2006/main"/>
+          <a:lstStyle xmlns:a="http://schemas.openxmlformats.org/drawingml/2006/main"/>
+          <a:p xmlns:a="http://schemas.openxmlformats.org/drawingml/2006/main">
+            <a:pPr algn="l">
+              <a:defRPr sz="975" b="1" i="0">
+                <a:solidFill>
+                  <a:srgbClr val="555555"/>
+                </a:solidFill>
+              </a:defRPr>
+            </a:pPr>
+            <a:r>
+              <a:rPr sz="975" b="1" i="0">
+                <a:solidFill>
+                  <a:srgbClr val="555555"/>
+                </a:solidFill>
+              </a:rPr>
+              <a:t>GEN5.4 ML DECISION ENGINE</a:t>
+            </a:r>
+          </a:p>
+        </p:txBody>
+      </p:sp>
+      <p:sp>
+        <p:nvSpPr>
+          <p:cNvPr id="2" name="">
+            <a:extLst xmlns:a="http://schemas.openxmlformats.org/drawingml/2006/main">
+              <a:ext uri="{FF2B5EF4-FFF2-40B4-BE49-F238E27FC236}">
+                <a16:creationId xmlns:a16="http://schemas.microsoft.com/office/drawing/2014/main" id="{A41327A0-7A27-42C2-BF57-6B055337311D}"/>
+              </a:ext>
+            </a:extLst>
+          </p:cNvPr>
+          <p:cNvSpPr>
+            <a:spLocks xmlns:a="http://schemas.openxmlformats.org/drawingml/2006/main" noGrp="1"/>
+          </p:cNvSpPr>
+          <p:nvPr/>
+        </p:nvSpPr>
+        <p:spPr>
+          <a:xfrm xmlns:a="http://schemas.openxmlformats.org/drawingml/2006/main">
+            <a:off x="685800" y="723900"/>
+            <a:ext cx="10287000" cy="876300"/>
+          </a:xfrm>
+          <a:prstGeom xmlns:a="http://schemas.openxmlformats.org/drawingml/2006/main" prst="rect">
+            <a:avLst/>
+          </a:prstGeom>
+          <a:noFill xmlns:a="http://schemas.openxmlformats.org/drawingml/2006/main"/>
+          <a:ln xmlns:a="http://schemas.openxmlformats.org/drawingml/2006/main" w="0">
+            <a:noFill/>
+            <a:prstDash val="solid"/>
+          </a:ln>
+        </p:spPr>
+        <p:txBody>
+          <a:bodyPr xmlns:a="http://schemas.openxmlformats.org/drawingml/2006/main"/>
+          <a:lstStyle xmlns:a="http://schemas.openxmlformats.org/drawingml/2006/main"/>
+          <a:p xmlns:a="http://schemas.openxmlformats.org/drawingml/2006/main">
+            <a:pPr algn="l">
+              <a:defRPr sz="2850" b="1" i="0">
+                <a:solidFill>
+                  <a:srgbClr val="000000"/>
+                </a:solidFill>
+              </a:defRPr>
+            </a:pPr>
+            <a:r>
+              <a:rPr sz="2850" b="1" i="0">
+                <a:solidFill>
+                  <a:srgbClr val="000000"/>
+                </a:solidFill>
+              </a:rPr>
+              <a:t>The selected thresholds explain the behavior change</a:t>
+            </a:r>
+          </a:p>
+        </p:txBody>
+      </p:sp>
+      <p:sp>
+        <p:nvSpPr>
+          <p:cNvPr id="3" name="">
+            <a:extLst xmlns:a="http://schemas.openxmlformats.org/drawingml/2006/main">
+              <a:ext uri="{FF2B5EF4-FFF2-40B4-BE49-F238E27FC236}">
+                <a16:creationId xmlns:a16="http://schemas.microsoft.com/office/drawing/2014/main" id="{2B9F3B9E-881B-4C58-B5F1-5E161C3E7D3B}"/>
+              </a:ext>
+            </a:extLst>
+          </p:cNvPr>
+          <p:cNvSpPr>
+            <a:spLocks xmlns:a="http://schemas.openxmlformats.org/drawingml/2006/main" noGrp="1"/>
+          </p:cNvSpPr>
+          <p:nvPr/>
+        </p:nvSpPr>
+        <p:spPr>
+          <a:xfrm xmlns:a="http://schemas.openxmlformats.org/drawingml/2006/main">
+            <a:off x="685800" y="1657350"/>
+            <a:ext cx="10820400" cy="19050"/>
+          </a:xfrm>
+          <a:prstGeom xmlns:a="http://schemas.openxmlformats.org/drawingml/2006/main" prst="rect">
+            <a:avLst/>
+          </a:prstGeom>
+          <a:solidFill xmlns:a="http://schemas.openxmlformats.org/drawingml/2006/main">
+            <a:srgbClr val="B8BCC4"/>
+          </a:solidFill>
+          <a:ln xmlns:a="http://schemas.openxmlformats.org/drawingml/2006/main" w="0">
+            <a:noFill/>
+            <a:prstDash val="solid"/>
+          </a:ln>
+        </p:spPr>
+      </p:sp>
+      <p:pic>
+        <p:nvPicPr>
+          <p:cNvPr id="10" name=""/>
+          <p:cNvPicPr>
+            <a:picLocks xmlns:a="http://schemas.openxmlformats.org/drawingml/2006/main" noChangeAspect="1"/>
+          </p:cNvPicPr>
+          <p:nvPr/>
+        </p:nvPicPr>
+        <p:blipFill>
+          <a:blip xmlns:r="http://schemas.openxmlformats.org/officeDocument/2006/relationships" xmlns:a="http://schemas.openxmlformats.org/drawingml/2006/main" r:embed="Rd98ddd17608a4c74"/>
+          <a:stretch xmlns:a="http://schemas.openxmlformats.org/drawingml/2006/main"/>
+        </p:blipFill>
+        <p:spPr>
+          <a:xfrm xmlns:a="http://schemas.openxmlformats.org/drawingml/2006/main">
+            <a:off x="704850" y="2423013"/>
+            <a:ext cx="4762500" cy="2564423"/>
+          </a:xfrm>
+          <a:prstGeom xmlns:a="http://schemas.openxmlformats.org/drawingml/2006/main" prst="rect">
+            <a:avLst/>
+          </a:prstGeom>
+        </p:spPr>
+      </p:pic>
+      <p:pic>
+        <p:nvPicPr>
+          <p:cNvPr id="11" name=""/>
+          <p:cNvPicPr>
+            <a:picLocks xmlns:a="http://schemas.openxmlformats.org/drawingml/2006/main" noChangeAspect="1"/>
+          </p:cNvPicPr>
+          <p:nvPr/>
+        </p:nvPicPr>
+        <p:blipFill>
+          <a:blip xmlns:r="http://schemas.openxmlformats.org/officeDocument/2006/relationships" xmlns:a="http://schemas.openxmlformats.org/drawingml/2006/main" r:embed="Ra7d703bb8ba34158"/>
+          <a:stretch xmlns:a="http://schemas.openxmlformats.org/drawingml/2006/main"/>
+        </p:blipFill>
+        <p:spPr>
+          <a:xfrm xmlns:a="http://schemas.openxmlformats.org/drawingml/2006/main">
+            <a:off x="5962650" y="2382308"/>
+            <a:ext cx="4762500" cy="2645833"/>
+          </a:xfrm>
+          <a:prstGeom xmlns:a="http://schemas.openxmlformats.org/drawingml/2006/main" prst="rect">
+            <a:avLst/>
+          </a:prstGeom>
+        </p:spPr>
+      </p:pic>
+      <p:sp>
+        <p:nvSpPr>
+          <p:cNvPr id="6" name="">
+            <a:extLst xmlns:a="http://schemas.openxmlformats.org/drawingml/2006/main">
+              <a:ext uri="{FF2B5EF4-FFF2-40B4-BE49-F238E27FC236}">
+                <a16:creationId xmlns:a16="http://schemas.microsoft.com/office/drawing/2014/main" id="{BB8C1535-43A3-484B-8C31-56A83797EA9D}"/>
+              </a:ext>
+            </a:extLst>
+          </p:cNvPr>
+          <p:cNvSpPr>
+            <a:spLocks xmlns:a="http://schemas.openxmlformats.org/drawingml/2006/main" noGrp="1"/>
+          </p:cNvSpPr>
+          <p:nvPr/>
+        </p:nvSpPr>
+        <p:spPr>
+          <a:xfrm xmlns:a="http://schemas.openxmlformats.org/drawingml/2006/main">
+            <a:off x="1104900" y="5753100"/>
+            <a:ext cx="9334500" cy="457200"/>
+          </a:xfrm>
+          <a:prstGeom xmlns:a="http://schemas.openxmlformats.org/drawingml/2006/main" prst="rect">
+            <a:avLst/>
+          </a:prstGeom>
+          <a:noFill xmlns:a="http://schemas.openxmlformats.org/drawingml/2006/main"/>
+          <a:ln xmlns:a="http://schemas.openxmlformats.org/drawingml/2006/main" w="0">
+            <a:noFill/>
+            <a:prstDash val="solid"/>
+          </a:ln>
+        </p:spPr>
+        <p:txBody>
+          <a:bodyPr xmlns:a="http://schemas.openxmlformats.org/drawingml/2006/main"/>
+          <a:lstStyle xmlns:a="http://schemas.openxmlformats.org/drawingml/2006/main"/>
+          <a:p xmlns:a="http://schemas.openxmlformats.org/drawingml/2006/main">
+            <a:pPr algn="ctr">
+              <a:defRPr sz="1500" b="0" i="0">
+                <a:solidFill>
+                  <a:srgbClr val="555555"/>
+                </a:solidFill>
+              </a:defRPr>
+            </a:pPr>
+            <a:r>
+              <a:rPr sz="1500" b="0" i="0">
+                <a:solidFill>
+                  <a:srgbClr val="555555"/>
+                </a:solidFill>
+              </a:rPr>
+              <a:t>The grid policy's average TRAIN entry threshold was 0.54, with a TRAIN proxy exposure target around 69.7%. That made it more permissive in 2020, but also more exposed in 2022.</a:t>
+            </a:r>
+          </a:p>
+        </p:txBody>
+      </p:sp>
+    </p:spTree>
+    <p:extLst>
+      <p:ext uri="{BB962C8B-B14F-4D97-AF65-F5344CB8AC3E}">
+        <p14:creationId xmlns:p14="http://schemas.microsoft.com/office/powerpoint/2010/main" val="101883177"/>
+      </p:ext>
+    </p:extLst>
+  </p:cSld>
+</p:sld>
+</file>
+
+<file path=ppt/slides/slide22.xml><?xml version="1.0" encoding="utf-8"?>
+<p:sld xmlns:p="http://schemas.openxmlformats.org/presentationml/2006/main">
+  <p:cSld>
+    <p:bg>
+      <p:bgPr>
+        <a:solidFill xmlns:a="http://schemas.openxmlformats.org/drawingml/2006/main">
+          <a:srgbClr val="FFFFFF"/>
+        </a:solidFill>
+      </p:bgPr>
+    </p:bg>
+    <p:spTree>
+      <p:nvGrpSpPr>
+        <p:cNvPr id="1" name=""/>
+        <p:cNvGrpSpPr/>
+        <p:nvPr/>
+      </p:nvGrpSpPr>
+      <p:grpSpPr>
+        <a:xfrm xmlns:a="http://schemas.openxmlformats.org/drawingml/2006/main"/>
+      </p:grpSpPr>
+      <p:sp>
+        <p:nvSpPr>
+          <p:cNvPr id="1" name="">
+            <a:extLst xmlns:a="http://schemas.openxmlformats.org/drawingml/2006/main">
+              <a:ext uri="{FF2B5EF4-FFF2-40B4-BE49-F238E27FC236}">
+                <a16:creationId xmlns:a16="http://schemas.microsoft.com/office/drawing/2014/main" id="{A02C6740-30F1-4D36-93A2-BB0F049895AC}"/>
+              </a:ext>
+            </a:extLst>
+          </p:cNvPr>
+          <p:cNvSpPr>
+            <a:spLocks xmlns:a="http://schemas.openxmlformats.org/drawingml/2006/main" noGrp="1"/>
+          </p:cNvSpPr>
+          <p:nvPr/>
+        </p:nvSpPr>
+        <p:spPr>
+          <a:xfrm xmlns:a="http://schemas.openxmlformats.org/drawingml/2006/main">
+            <a:off x="685800" y="400050"/>
+            <a:ext cx="8572500" cy="247650"/>
+          </a:xfrm>
+          <a:prstGeom xmlns:a="http://schemas.openxmlformats.org/drawingml/2006/main" prst="rect">
+            <a:avLst/>
+          </a:prstGeom>
+          <a:noFill xmlns:a="http://schemas.openxmlformats.org/drawingml/2006/main"/>
+          <a:ln xmlns:a="http://schemas.openxmlformats.org/drawingml/2006/main" w="0">
+            <a:noFill/>
+            <a:prstDash val="solid"/>
+          </a:ln>
+        </p:spPr>
+        <p:txBody>
+          <a:bodyPr xmlns:a="http://schemas.openxmlformats.org/drawingml/2006/main"/>
+          <a:lstStyle xmlns:a="http://schemas.openxmlformats.org/drawingml/2006/main"/>
+          <a:p xmlns:a="http://schemas.openxmlformats.org/drawingml/2006/main">
+            <a:pPr algn="l">
+              <a:defRPr sz="975" b="1" i="0">
+                <a:solidFill>
+                  <a:srgbClr val="555555"/>
+                </a:solidFill>
+              </a:defRPr>
+            </a:pPr>
+            <a:r>
+              <a:rPr sz="975" b="1" i="0">
+                <a:solidFill>
+                  <a:srgbClr val="555555"/>
+                </a:solidFill>
+              </a:rPr>
+              <a:t>GEN5.4 ML DECISION ENGINE</a:t>
+            </a:r>
+          </a:p>
+        </p:txBody>
+      </p:sp>
+      <p:sp>
+        <p:nvSpPr>
+          <p:cNvPr id="2" name="">
+            <a:extLst xmlns:a="http://schemas.openxmlformats.org/drawingml/2006/main">
+              <a:ext uri="{FF2B5EF4-FFF2-40B4-BE49-F238E27FC236}">
+                <a16:creationId xmlns:a16="http://schemas.microsoft.com/office/drawing/2014/main" id="{69727F43-7D1B-4582-A8B5-AD28A3ACB605}"/>
+              </a:ext>
+            </a:extLst>
+          </p:cNvPr>
+          <p:cNvSpPr>
+            <a:spLocks xmlns:a="http://schemas.openxmlformats.org/drawingml/2006/main" noGrp="1"/>
+          </p:cNvSpPr>
+          <p:nvPr/>
+        </p:nvSpPr>
+        <p:spPr>
+          <a:xfrm xmlns:a="http://schemas.openxmlformats.org/drawingml/2006/main">
+            <a:off x="685800" y="723900"/>
+            <a:ext cx="10287000" cy="876300"/>
+          </a:xfrm>
+          <a:prstGeom xmlns:a="http://schemas.openxmlformats.org/drawingml/2006/main" prst="rect">
+            <a:avLst/>
+          </a:prstGeom>
+          <a:noFill xmlns:a="http://schemas.openxmlformats.org/drawingml/2006/main"/>
+          <a:ln xmlns:a="http://schemas.openxmlformats.org/drawingml/2006/main" w="0">
+            <a:noFill/>
+            <a:prstDash val="solid"/>
+          </a:ln>
+        </p:spPr>
+        <p:txBody>
+          <a:bodyPr xmlns:a="http://schemas.openxmlformats.org/drawingml/2006/main"/>
+          <a:lstStyle xmlns:a="http://schemas.openxmlformats.org/drawingml/2006/main"/>
+          <a:p xmlns:a="http://schemas.openxmlformats.org/drawingml/2006/main">
+            <a:pPr algn="l">
+              <a:defRPr sz="2850" b="1" i="0">
+                <a:solidFill>
+                  <a:srgbClr val="000000"/>
+                </a:solidFill>
+              </a:defRPr>
+            </a:pPr>
+            <a:r>
+              <a:rPr sz="2850" b="1" i="0">
+                <a:solidFill>
+                  <a:srgbClr val="000000"/>
+                </a:solidFill>
+              </a:rPr>
+              <a:t>Probability tapes show that the model rarely loved the rally early enough</a:t>
+            </a:r>
+          </a:p>
+        </p:txBody>
+      </p:sp>
+      <p:sp>
+        <p:nvSpPr>
+          <p:cNvPr id="3" name="">
+            <a:extLst xmlns:a="http://schemas.openxmlformats.org/drawingml/2006/main">
+              <a:ext uri="{FF2B5EF4-FFF2-40B4-BE49-F238E27FC236}">
+                <a16:creationId xmlns:a16="http://schemas.microsoft.com/office/drawing/2014/main" id="{E8CF2791-57E7-4AC8-B93D-5321E68F3526}"/>
+              </a:ext>
+            </a:extLst>
+          </p:cNvPr>
+          <p:cNvSpPr>
+            <a:spLocks xmlns:a="http://schemas.openxmlformats.org/drawingml/2006/main" noGrp="1"/>
+          </p:cNvSpPr>
+          <p:nvPr/>
+        </p:nvSpPr>
+        <p:spPr>
+          <a:xfrm xmlns:a="http://schemas.openxmlformats.org/drawingml/2006/main">
+            <a:off x="685800" y="1657350"/>
+            <a:ext cx="10820400" cy="19050"/>
+          </a:xfrm>
+          <a:prstGeom xmlns:a="http://schemas.openxmlformats.org/drawingml/2006/main" prst="rect">
+            <a:avLst/>
+          </a:prstGeom>
+          <a:solidFill xmlns:a="http://schemas.openxmlformats.org/drawingml/2006/main">
+            <a:srgbClr val="B8BCC4"/>
+          </a:solidFill>
+          <a:ln xmlns:a="http://schemas.openxmlformats.org/drawingml/2006/main" w="0">
+            <a:noFill/>
+            <a:prstDash val="solid"/>
+          </a:ln>
+        </p:spPr>
+      </p:sp>
+      <p:pic>
+        <p:nvPicPr>
+          <p:cNvPr id="10" name=""/>
+          <p:cNvPicPr>
+            <a:picLocks xmlns:a="http://schemas.openxmlformats.org/drawingml/2006/main" noChangeAspect="1"/>
+          </p:cNvPicPr>
+          <p:nvPr/>
+        </p:nvPicPr>
+        <p:blipFill>
+          <a:blip xmlns:r="http://schemas.openxmlformats.org/officeDocument/2006/relationships" xmlns:a="http://schemas.openxmlformats.org/drawingml/2006/main" r:embed="R83abcb0ad649416f"/>
+          <a:stretch xmlns:a="http://schemas.openxmlformats.org/drawingml/2006/main"/>
+        </p:blipFill>
+        <p:spPr>
+          <a:xfrm xmlns:a="http://schemas.openxmlformats.org/drawingml/2006/main">
+            <a:off x="1038785" y="2000250"/>
+            <a:ext cx="6494929" cy="3943350"/>
+          </a:xfrm>
+          <a:prstGeom xmlns:a="http://schemas.openxmlformats.org/drawingml/2006/main" prst="rect">
+            <a:avLst/>
+          </a:prstGeom>
+        </p:spPr>
+      </p:pic>
+      <p:sp>
+        <p:nvSpPr>
+          <p:cNvPr id="5" name="">
+            <a:extLst xmlns:a="http://schemas.openxmlformats.org/drawingml/2006/main">
+              <a:ext uri="{FF2B5EF4-FFF2-40B4-BE49-F238E27FC236}">
+                <a16:creationId xmlns:a16="http://schemas.microsoft.com/office/drawing/2014/main" id="{A34E1FB5-5D95-4D38-A0B4-49271EE1E532}"/>
+              </a:ext>
+            </a:extLst>
+          </p:cNvPr>
+          <p:cNvSpPr>
+            <a:spLocks xmlns:a="http://schemas.openxmlformats.org/drawingml/2006/main" noGrp="1"/>
+          </p:cNvSpPr>
+          <p:nvPr/>
+        </p:nvSpPr>
+        <p:spPr>
+          <a:xfrm xmlns:a="http://schemas.openxmlformats.org/drawingml/2006/main">
+            <a:off x="8477250" y="2133600"/>
+            <a:ext cx="2571750" cy="304800"/>
+          </a:xfrm>
+          <a:prstGeom xmlns:a="http://schemas.openxmlformats.org/drawingml/2006/main" prst="rect">
+            <a:avLst/>
+          </a:prstGeom>
+          <a:noFill xmlns:a="http://schemas.openxmlformats.org/drawingml/2006/main"/>
+          <a:ln xmlns:a="http://schemas.openxmlformats.org/drawingml/2006/main" w="0">
+            <a:noFill/>
+            <a:prstDash val="solid"/>
+          </a:ln>
+        </p:spPr>
+        <p:txBody>
+          <a:bodyPr xmlns:a="http://schemas.openxmlformats.org/drawingml/2006/main"/>
+          <a:lstStyle xmlns:a="http://schemas.openxmlformats.org/drawingml/2006/main"/>
+          <a:p xmlns:a="http://schemas.openxmlformats.org/drawingml/2006/main">
+            <a:pPr algn="l">
+              <a:defRPr sz="1950" b="1" i="0">
+                <a:solidFill>
+                  <a:srgbClr val="222222"/>
+                </a:solidFill>
+              </a:defRPr>
+            </a:pPr>
+            <a:r>
+              <a:rPr sz="1950" b="1" i="0">
+                <a:solidFill>
+                  <a:srgbClr val="222222"/>
+                </a:solidFill>
+              </a:rPr>
+              <a:t>Why this matters</a:t>
+            </a:r>
+          </a:p>
+        </p:txBody>
+      </p:sp>
+      <p:sp>
+        <p:nvSpPr>
+          <p:cNvPr id="6" name="">
+            <a:extLst xmlns:a="http://schemas.openxmlformats.org/drawingml/2006/main">
+              <a:ext uri="{FF2B5EF4-FFF2-40B4-BE49-F238E27FC236}">
+                <a16:creationId xmlns:a16="http://schemas.microsoft.com/office/drawing/2014/main" id="{9538687C-79B2-43E1-9DA7-B640CB6B3B42}"/>
+              </a:ext>
+            </a:extLst>
+          </p:cNvPr>
+          <p:cNvSpPr>
+            <a:spLocks xmlns:a="http://schemas.openxmlformats.org/drawingml/2006/main" noGrp="1"/>
+          </p:cNvSpPr>
+          <p:nvPr/>
+        </p:nvSpPr>
+        <p:spPr>
+          <a:xfrm xmlns:a="http://schemas.openxmlformats.org/drawingml/2006/main">
+            <a:off x="8477250" y="2705100"/>
+            <a:ext cx="2705100" cy="2286000"/>
+          </a:xfrm>
+          <a:prstGeom xmlns:a="http://schemas.openxmlformats.org/drawingml/2006/main" prst="rect">
+            <a:avLst/>
+          </a:prstGeom>
+          <a:noFill xmlns:a="http://schemas.openxmlformats.org/drawingml/2006/main"/>
+          <a:ln xmlns:a="http://schemas.openxmlformats.org/drawingml/2006/main" w="0">
+            <a:noFill/>
+            <a:prstDash val="solid"/>
+          </a:ln>
+        </p:spPr>
+        <p:txBody>
+          <a:bodyPr xmlns:a="http://schemas.openxmlformats.org/drawingml/2006/main"/>
+          <a:lstStyle xmlns:a="http://schemas.openxmlformats.org/drawingml/2006/main"/>
+          <a:p xmlns:a="http://schemas.openxmlformats.org/drawingml/2006/main">
+            <a:pPr algn="l">
+              <a:defRPr sz="1650" b="0" i="0">
+                <a:solidFill>
+                  <a:srgbClr val="222222"/>
+                </a:solidFill>
+              </a:defRPr>
+            </a:pPr>
+            <a:r>
+              <a:rPr sz="1650" b="0" i="0">
+                <a:solidFill>
+                  <a:srgbClr val="222222"/>
+                </a:solidFill>
+              </a:rPr>
+              <a:t>Lowering thresholds creates more entries, but the probability trace still spends long rally stretches below the entry line. The next question is whether calibration, labels, or model class can rank those days better.</a:t>
+            </a:r>
+          </a:p>
+        </p:txBody>
+      </p:sp>
+    </p:spTree>
+    <p:extLst>
+      <p:ext uri="{BB962C8B-B14F-4D97-AF65-F5344CB8AC3E}">
+        <p14:creationId xmlns:p14="http://schemas.microsoft.com/office/powerpoint/2010/main" val="782373323"/>
+      </p:ext>
+    </p:extLst>
+  </p:cSld>
+</p:sld>
+</file>
+
+<file path=ppt/slides/slide23.xml><?xml version="1.0" encoding="utf-8"?>
+<p:sld xmlns:p="http://schemas.openxmlformats.org/presentationml/2006/main">
+  <p:cSld>
+    <p:bg>
+      <p:bgPr>
+        <a:solidFill xmlns:a="http://schemas.openxmlformats.org/drawingml/2006/main">
+          <a:srgbClr val="FFFFFF"/>
+        </a:solidFill>
+      </p:bgPr>
+    </p:bg>
+    <p:spTree>
+      <p:nvGrpSpPr>
+        <p:cNvPr id="1" name=""/>
+        <p:cNvGrpSpPr/>
+        <p:nvPr/>
+      </p:nvGrpSpPr>
+      <p:grpSpPr>
+        <a:xfrm xmlns:a="http://schemas.openxmlformats.org/drawingml/2006/main"/>
+      </p:grpSpPr>
+      <p:sp>
+        <p:nvSpPr>
+          <p:cNvPr id="1" name="">
+            <a:extLst xmlns:a="http://schemas.openxmlformats.org/drawingml/2006/main">
+              <a:ext uri="{FF2B5EF4-FFF2-40B4-BE49-F238E27FC236}">
+                <a16:creationId xmlns:a16="http://schemas.microsoft.com/office/drawing/2014/main" id="{FD17ADD5-5D4A-41E5-AF9E-1020C0C460AF}"/>
+              </a:ext>
+            </a:extLst>
+          </p:cNvPr>
+          <p:cNvSpPr>
+            <a:spLocks xmlns:a="http://schemas.openxmlformats.org/drawingml/2006/main" noGrp="1"/>
+          </p:cNvSpPr>
+          <p:nvPr/>
+        </p:nvSpPr>
+        <p:spPr>
+          <a:xfrm xmlns:a="http://schemas.openxmlformats.org/drawingml/2006/main">
+            <a:off x="685800" y="400050"/>
+            <a:ext cx="8572500" cy="247650"/>
+          </a:xfrm>
+          <a:prstGeom xmlns:a="http://schemas.openxmlformats.org/drawingml/2006/main" prst="rect">
+            <a:avLst/>
+          </a:prstGeom>
+          <a:noFill xmlns:a="http://schemas.openxmlformats.org/drawingml/2006/main"/>
+          <a:ln xmlns:a="http://schemas.openxmlformats.org/drawingml/2006/main" w="0">
+            <a:noFill/>
+            <a:prstDash val="solid"/>
+          </a:ln>
+        </p:spPr>
+        <p:txBody>
+          <a:bodyPr xmlns:a="http://schemas.openxmlformats.org/drawingml/2006/main"/>
+          <a:lstStyle xmlns:a="http://schemas.openxmlformats.org/drawingml/2006/main"/>
+          <a:p xmlns:a="http://schemas.openxmlformats.org/drawingml/2006/main">
+            <a:pPr algn="l">
+              <a:defRPr sz="975" b="1" i="0">
+                <a:solidFill>
+                  <a:srgbClr val="555555"/>
+                </a:solidFill>
+              </a:defRPr>
+            </a:pPr>
+            <a:r>
+              <a:rPr sz="975" b="1" i="0">
+                <a:solidFill>
+                  <a:srgbClr val="555555"/>
+                </a:solidFill>
+              </a:rPr>
+              <a:t>GEN5.4 ML DECISION ENGINE</a:t>
+            </a:r>
+          </a:p>
+        </p:txBody>
+      </p:sp>
+      <p:sp>
+        <p:nvSpPr>
+          <p:cNvPr id="2" name="">
+            <a:extLst xmlns:a="http://schemas.openxmlformats.org/drawingml/2006/main">
+              <a:ext uri="{FF2B5EF4-FFF2-40B4-BE49-F238E27FC236}">
+                <a16:creationId xmlns:a16="http://schemas.microsoft.com/office/drawing/2014/main" id="{FACCF5EB-DC5F-416A-B583-92492EDC6880}"/>
+              </a:ext>
+            </a:extLst>
+          </p:cNvPr>
+          <p:cNvSpPr>
+            <a:spLocks xmlns:a="http://schemas.openxmlformats.org/drawingml/2006/main" noGrp="1"/>
+          </p:cNvSpPr>
+          <p:nvPr/>
+        </p:nvSpPr>
+        <p:spPr>
+          <a:xfrm xmlns:a="http://schemas.openxmlformats.org/drawingml/2006/main">
+            <a:off x="685800" y="723900"/>
+            <a:ext cx="10287000" cy="876300"/>
+          </a:xfrm>
+          <a:prstGeom xmlns:a="http://schemas.openxmlformats.org/drawingml/2006/main" prst="rect">
+            <a:avLst/>
+          </a:prstGeom>
+          <a:noFill xmlns:a="http://schemas.openxmlformats.org/drawingml/2006/main"/>
+          <a:ln xmlns:a="http://schemas.openxmlformats.org/drawingml/2006/main" w="0">
+            <a:noFill/>
+            <a:prstDash val="solid"/>
+          </a:ln>
+        </p:spPr>
+        <p:txBody>
+          <a:bodyPr xmlns:a="http://schemas.openxmlformats.org/drawingml/2006/main"/>
+          <a:lstStyle xmlns:a="http://schemas.openxmlformats.org/drawingml/2006/main"/>
+          <a:p xmlns:a="http://schemas.openxmlformats.org/drawingml/2006/main">
+            <a:pPr algn="l">
+              <a:defRPr sz="2850" b="1" i="0">
+                <a:solidFill>
+                  <a:srgbClr val="000000"/>
+                </a:solidFill>
+              </a:defRPr>
+            </a:pPr>
+            <a:r>
+              <a:rPr sz="2850" b="1" i="0">
+                <a:solidFill>
+                  <a:srgbClr val="000000"/>
+                </a:solidFill>
+              </a:rPr>
+              <a:t>The next ML slice should test probability quality, not just more exposure</a:t>
+            </a:r>
+          </a:p>
+        </p:txBody>
+      </p:sp>
+      <p:sp>
+        <p:nvSpPr>
+          <p:cNvPr id="3" name="">
+            <a:extLst xmlns:a="http://schemas.openxmlformats.org/drawingml/2006/main">
+              <a:ext uri="{FF2B5EF4-FFF2-40B4-BE49-F238E27FC236}">
+                <a16:creationId xmlns:a16="http://schemas.microsoft.com/office/drawing/2014/main" id="{8099C2E4-2E99-47E9-BB55-FD15713B3DED}"/>
+              </a:ext>
+            </a:extLst>
+          </p:cNvPr>
+          <p:cNvSpPr>
+            <a:spLocks xmlns:a="http://schemas.openxmlformats.org/drawingml/2006/main" noGrp="1"/>
+          </p:cNvSpPr>
+          <p:nvPr/>
+        </p:nvSpPr>
+        <p:spPr>
+          <a:xfrm xmlns:a="http://schemas.openxmlformats.org/drawingml/2006/main">
+            <a:off x="685800" y="1657350"/>
+            <a:ext cx="10820400" cy="19050"/>
+          </a:xfrm>
+          <a:prstGeom xmlns:a="http://schemas.openxmlformats.org/drawingml/2006/main" prst="rect">
+            <a:avLst/>
+          </a:prstGeom>
+          <a:solidFill xmlns:a="http://schemas.openxmlformats.org/drawingml/2006/main">
+            <a:srgbClr val="B8BCC4"/>
+          </a:solidFill>
+          <a:ln xmlns:a="http://schemas.openxmlformats.org/drawingml/2006/main" w="0">
+            <a:noFill/>
+            <a:prstDash val="solid"/>
+          </a:ln>
+        </p:spPr>
+      </p:sp>
+      <p:sp>
+        <p:nvSpPr>
+          <p:cNvPr id="4" name="">
+            <a:extLst xmlns:a="http://schemas.openxmlformats.org/drawingml/2006/main">
+              <a:ext uri="{FF2B5EF4-FFF2-40B4-BE49-F238E27FC236}">
+                <a16:creationId xmlns:a16="http://schemas.microsoft.com/office/drawing/2014/main" id="{F7D8E924-5023-4E7D-84D9-15B959710D10}"/>
+              </a:ext>
+            </a:extLst>
+          </p:cNvPr>
+          <p:cNvSpPr>
+            <a:spLocks xmlns:a="http://schemas.openxmlformats.org/drawingml/2006/main" noGrp="1"/>
+          </p:cNvSpPr>
+          <p:nvPr/>
+        </p:nvSpPr>
+        <p:spPr>
+          <a:xfrm xmlns:a="http://schemas.openxmlformats.org/drawingml/2006/main">
+            <a:off x="876300" y="2133600"/>
+            <a:ext cx="9334500" cy="914400"/>
+          </a:xfrm>
+          <a:prstGeom xmlns:a="http://schemas.openxmlformats.org/drawingml/2006/main" prst="rect">
+            <a:avLst/>
+          </a:prstGeom>
+          <a:noFill xmlns:a="http://schemas.openxmlformats.org/drawingml/2006/main"/>
+          <a:ln xmlns:a="http://schemas.openxmlformats.org/drawingml/2006/main" w="0">
+            <a:noFill/>
+            <a:prstDash val="solid"/>
+          </a:ln>
+        </p:spPr>
+        <p:txBody>
+          <a:bodyPr xmlns:a="http://schemas.openxmlformats.org/drawingml/2006/main"/>
+          <a:lstStyle xmlns:a="http://schemas.openxmlformats.org/drawingml/2006/main"/>
+          <a:p xmlns:a="http://schemas.openxmlformats.org/drawingml/2006/main">
+            <a:pPr algn="l">
+              <a:defRPr sz="2250" b="1" i="0">
+                <a:solidFill>
+                  <a:srgbClr val="000000"/>
+                </a:solidFill>
+              </a:defRPr>
+            </a:pPr>
+            <a:r>
+              <a:rPr sz="2250" b="1" i="0">
+                <a:solidFill>
+                  <a:srgbClr val="000000"/>
+                </a:solidFill>
+              </a:rPr>
+              <a:t>ML-P1b showed that threshold policy is real, but it did not close the alpha gap. The forward-return grid made the model participate more, yet still undercaptured 2020 and weakened 2022 defense.</a:t>
+            </a:r>
+          </a:p>
+        </p:txBody>
+      </p:sp>
+      <p:sp>
+        <p:nvSpPr>
+          <p:cNvPr id="5" name="">
+            <a:extLst xmlns:a="http://schemas.openxmlformats.org/drawingml/2006/main">
+              <a:ext uri="{FF2B5EF4-FFF2-40B4-BE49-F238E27FC236}">
+                <a16:creationId xmlns:a16="http://schemas.microsoft.com/office/drawing/2014/main" id="{22CB1683-7DEC-42D1-98B1-611B1D1FB937}"/>
+              </a:ext>
+            </a:extLst>
+          </p:cNvPr>
+          <p:cNvSpPr>
+            <a:spLocks xmlns:a="http://schemas.openxmlformats.org/drawingml/2006/main" noGrp="1"/>
+          </p:cNvSpPr>
+          <p:nvPr/>
+        </p:nvSpPr>
+        <p:spPr>
+          <a:xfrm xmlns:a="http://schemas.openxmlformats.org/drawingml/2006/main">
+            <a:off x="1219200" y="3571875"/>
+            <a:ext cx="190500" cy="247650"/>
+          </a:xfrm>
+          <a:prstGeom xmlns:a="http://schemas.openxmlformats.org/drawingml/2006/main" prst="rect">
+            <a:avLst/>
+          </a:prstGeom>
+          <a:noFill xmlns:a="http://schemas.openxmlformats.org/drawingml/2006/main"/>
+          <a:ln xmlns:a="http://schemas.openxmlformats.org/drawingml/2006/main" w="0">
+            <a:noFill/>
+            <a:prstDash val="solid"/>
+          </a:ln>
+        </p:spPr>
+        <p:txBody>
+          <a:bodyPr xmlns:a="http://schemas.openxmlformats.org/drawingml/2006/main"/>
+          <a:lstStyle xmlns:a="http://schemas.openxmlformats.org/drawingml/2006/main"/>
+          <a:p xmlns:a="http://schemas.openxmlformats.org/drawingml/2006/main">
+            <a:pPr algn="l">
+              <a:defRPr sz="1575" b="1" i="0">
+                <a:solidFill>
+                  <a:srgbClr val="FF6B35"/>
+                </a:solidFill>
+              </a:defRPr>
+            </a:pPr>
+            <a:r>
+              <a:rPr sz="1575" b="1" i="0">
+                <a:solidFill>
+                  <a:srgbClr val="FF6B35"/>
+                </a:solidFill>
+              </a:rPr>
+              <a:t>-</a:t>
+            </a:r>
+          </a:p>
+        </p:txBody>
+      </p:sp>
+      <p:sp>
+        <p:nvSpPr>
+          <p:cNvPr id="6" name="">
+            <a:extLst xmlns:a="http://schemas.openxmlformats.org/drawingml/2006/main">
+              <a:ext uri="{FF2B5EF4-FFF2-40B4-BE49-F238E27FC236}">
+                <a16:creationId xmlns:a16="http://schemas.microsoft.com/office/drawing/2014/main" id="{03C43DC1-AAFC-4802-AE58-1FF985943875}"/>
+              </a:ext>
+            </a:extLst>
+          </p:cNvPr>
+          <p:cNvSpPr>
+            <a:spLocks xmlns:a="http://schemas.openxmlformats.org/drawingml/2006/main" noGrp="1"/>
+          </p:cNvSpPr>
+          <p:nvPr/>
+        </p:nvSpPr>
+        <p:spPr>
+          <a:xfrm xmlns:a="http://schemas.openxmlformats.org/drawingml/2006/main">
+            <a:off x="1485900" y="3562350"/>
+            <a:ext cx="6972300" cy="514350"/>
+          </a:xfrm>
+          <a:prstGeom xmlns:a="http://schemas.openxmlformats.org/drawingml/2006/main" prst="rect">
+            <a:avLst/>
+          </a:prstGeom>
+          <a:noFill xmlns:a="http://schemas.openxmlformats.org/drawingml/2006/main"/>
+          <a:ln xmlns:a="http://schemas.openxmlformats.org/drawingml/2006/main" w="0">
+            <a:noFill/>
+            <a:prstDash val="solid"/>
+          </a:ln>
+        </p:spPr>
+        <p:txBody>
+          <a:bodyPr xmlns:a="http://schemas.openxmlformats.org/drawingml/2006/main"/>
+          <a:lstStyle xmlns:a="http://schemas.openxmlformats.org/drawingml/2006/main"/>
+          <a:p xmlns:a="http://schemas.openxmlformats.org/drawingml/2006/main">
+            <a:pPr algn="l">
+              <a:defRPr sz="1575" b="0" i="0">
+                <a:solidFill>
+                  <a:srgbClr val="222222"/>
+                </a:solidFill>
+              </a:defRPr>
+            </a:pPr>
+            <a:r>
+              <a:rPr sz="1575" b="0" i="0">
+                <a:solidFill>
+                  <a:srgbClr val="222222"/>
+                </a:solidFill>
+              </a:rPr>
+              <a:t>Keep the continuous annual replay and policy audit as the required ML comparison surface.</a:t>
+            </a:r>
+          </a:p>
+        </p:txBody>
+      </p:sp>
+      <p:sp>
+        <p:nvSpPr>
+          <p:cNvPr id="7" name="">
+            <a:extLst xmlns:a="http://schemas.openxmlformats.org/drawingml/2006/main">
+              <a:ext uri="{FF2B5EF4-FFF2-40B4-BE49-F238E27FC236}">
+                <a16:creationId xmlns:a16="http://schemas.microsoft.com/office/drawing/2014/main" id="{CC89853D-2069-4E08-B945-B92476F420BC}"/>
+              </a:ext>
+            </a:extLst>
+          </p:cNvPr>
+          <p:cNvSpPr>
+            <a:spLocks xmlns:a="http://schemas.openxmlformats.org/drawingml/2006/main" noGrp="1"/>
+          </p:cNvSpPr>
+          <p:nvPr/>
+        </p:nvSpPr>
+        <p:spPr>
+          <a:xfrm xmlns:a="http://schemas.openxmlformats.org/drawingml/2006/main">
+            <a:off x="1219200" y="4238625"/>
+            <a:ext cx="190500" cy="247650"/>
+          </a:xfrm>
+          <a:prstGeom xmlns:a="http://schemas.openxmlformats.org/drawingml/2006/main" prst="rect">
+            <a:avLst/>
+          </a:prstGeom>
+          <a:noFill xmlns:a="http://schemas.openxmlformats.org/drawingml/2006/main"/>
+          <a:ln xmlns:a="http://schemas.openxmlformats.org/drawingml/2006/main" w="0">
+            <a:noFill/>
+            <a:prstDash val="solid"/>
+          </a:ln>
+        </p:spPr>
+        <p:txBody>
+          <a:bodyPr xmlns:a="http://schemas.openxmlformats.org/drawingml/2006/main"/>
+          <a:lstStyle xmlns:a="http://schemas.openxmlformats.org/drawingml/2006/main"/>
+          <a:p xmlns:a="http://schemas.openxmlformats.org/drawingml/2006/main">
+            <a:pPr algn="l">
+              <a:defRPr sz="1575" b="1" i="0">
+                <a:solidFill>
+                  <a:srgbClr val="FF6B35"/>
+                </a:solidFill>
+              </a:defRPr>
+            </a:pPr>
+            <a:r>
+              <a:rPr sz="1575" b="1" i="0">
+                <a:solidFill>
+                  <a:srgbClr val="FF6B35"/>
+                </a:solidFill>
+              </a:rPr>
+              <a:t>-</a:t>
+            </a:r>
+          </a:p>
+        </p:txBody>
+      </p:sp>
+      <p:sp>
+        <p:nvSpPr>
+          <p:cNvPr id="8" name="">
+            <a:extLst xmlns:a="http://schemas.openxmlformats.org/drawingml/2006/main">
+              <a:ext uri="{FF2B5EF4-FFF2-40B4-BE49-F238E27FC236}">
+                <a16:creationId xmlns:a16="http://schemas.microsoft.com/office/drawing/2014/main" id="{BCF2FBFA-E31F-42C4-9153-204B36F93D05}"/>
+              </a:ext>
+            </a:extLst>
+          </p:cNvPr>
+          <p:cNvSpPr>
+            <a:spLocks xmlns:a="http://schemas.openxmlformats.org/drawingml/2006/main" noGrp="1"/>
+          </p:cNvSpPr>
+          <p:nvPr/>
+        </p:nvSpPr>
+        <p:spPr>
+          <a:xfrm xmlns:a="http://schemas.openxmlformats.org/drawingml/2006/main">
+            <a:off x="1485900" y="4229100"/>
+            <a:ext cx="6972300" cy="514350"/>
+          </a:xfrm>
+          <a:prstGeom xmlns:a="http://schemas.openxmlformats.org/drawingml/2006/main" prst="rect">
+            <a:avLst/>
+          </a:prstGeom>
+          <a:noFill xmlns:a="http://schemas.openxmlformats.org/drawingml/2006/main"/>
+          <a:ln xmlns:a="http://schemas.openxmlformats.org/drawingml/2006/main" w="0">
+            <a:noFill/>
+            <a:prstDash val="solid"/>
+          </a:ln>
+        </p:spPr>
+        <p:txBody>
+          <a:bodyPr xmlns:a="http://schemas.openxmlformats.org/drawingml/2006/main"/>
+          <a:lstStyle xmlns:a="http://schemas.openxmlformats.org/drawingml/2006/main"/>
+          <a:p xmlns:a="http://schemas.openxmlformats.org/drawingml/2006/main">
+            <a:pPr algn="l">
+              <a:defRPr sz="1575" b="0" i="0">
+                <a:solidFill>
+                  <a:srgbClr val="222222"/>
+                </a:solidFill>
+              </a:defRPr>
+            </a:pPr>
+            <a:r>
+              <a:rPr sz="1575" b="0" i="0">
+                <a:solidFill>
+                  <a:srgbClr val="222222"/>
+                </a:solidFill>
+              </a:rPr>
+              <a:t>Next test should compare label horizons or probability calibration before adding XGBoost.</a:t>
+            </a:r>
+          </a:p>
+        </p:txBody>
+      </p:sp>
+      <p:sp>
+        <p:nvSpPr>
+          <p:cNvPr id="9" name="">
+            <a:extLst xmlns:a="http://schemas.openxmlformats.org/drawingml/2006/main">
+              <a:ext uri="{FF2B5EF4-FFF2-40B4-BE49-F238E27FC236}">
+                <a16:creationId xmlns:a16="http://schemas.microsoft.com/office/drawing/2014/main" id="{5400AD03-C32F-45E7-951B-0D1D5C3C6E8C}"/>
+              </a:ext>
+            </a:extLst>
+          </p:cNvPr>
+          <p:cNvSpPr>
+            <a:spLocks xmlns:a="http://schemas.openxmlformats.org/drawingml/2006/main" noGrp="1"/>
+          </p:cNvSpPr>
+          <p:nvPr/>
+        </p:nvSpPr>
+        <p:spPr>
+          <a:xfrm xmlns:a="http://schemas.openxmlformats.org/drawingml/2006/main">
+            <a:off x="1219200" y="4905375"/>
+            <a:ext cx="190500" cy="247650"/>
+          </a:xfrm>
+          <a:prstGeom xmlns:a="http://schemas.openxmlformats.org/drawingml/2006/main" prst="rect">
+            <a:avLst/>
+          </a:prstGeom>
+          <a:noFill xmlns:a="http://schemas.openxmlformats.org/drawingml/2006/main"/>
+          <a:ln xmlns:a="http://schemas.openxmlformats.org/drawingml/2006/main" w="0">
+            <a:noFill/>
+            <a:prstDash val="solid"/>
+          </a:ln>
+        </p:spPr>
+        <p:txBody>
+          <a:bodyPr xmlns:a="http://schemas.openxmlformats.org/drawingml/2006/main"/>
+          <a:lstStyle xmlns:a="http://schemas.openxmlformats.org/drawingml/2006/main"/>
+          <a:p xmlns:a="http://schemas.openxmlformats.org/drawingml/2006/main">
+            <a:pPr algn="l">
+              <a:defRPr sz="1575" b="1" i="0">
+                <a:solidFill>
+                  <a:srgbClr val="FF6B35"/>
+                </a:solidFill>
+              </a:defRPr>
+            </a:pPr>
+            <a:r>
+              <a:rPr sz="1575" b="1" i="0">
+                <a:solidFill>
+                  <a:srgbClr val="FF6B35"/>
+                </a:solidFill>
+              </a:rPr>
+              <a:t>-</a:t>
+            </a:r>
+          </a:p>
+        </p:txBody>
+      </p:sp>
+      <p:sp>
+        <p:nvSpPr>
+          <p:cNvPr id="10" name="">
+            <a:extLst xmlns:a="http://schemas.openxmlformats.org/drawingml/2006/main">
+              <a:ext uri="{FF2B5EF4-FFF2-40B4-BE49-F238E27FC236}">
+                <a16:creationId xmlns:a16="http://schemas.microsoft.com/office/drawing/2014/main" id="{8A42FCEE-7FEC-4686-BE9A-999C8D7C5B73}"/>
+              </a:ext>
+            </a:extLst>
+          </p:cNvPr>
+          <p:cNvSpPr>
+            <a:spLocks xmlns:a="http://schemas.openxmlformats.org/drawingml/2006/main" noGrp="1"/>
+          </p:cNvSpPr>
+          <p:nvPr/>
+        </p:nvSpPr>
+        <p:spPr>
+          <a:xfrm xmlns:a="http://schemas.openxmlformats.org/drawingml/2006/main">
+            <a:off x="1485900" y="4895850"/>
+            <a:ext cx="6972300" cy="514350"/>
+          </a:xfrm>
+          <a:prstGeom xmlns:a="http://schemas.openxmlformats.org/drawingml/2006/main" prst="rect">
+            <a:avLst/>
+          </a:prstGeom>
+          <a:noFill xmlns:a="http://schemas.openxmlformats.org/drawingml/2006/main"/>
+          <a:ln xmlns:a="http://schemas.openxmlformats.org/drawingml/2006/main" w="0">
+            <a:noFill/>
+            <a:prstDash val="solid"/>
+          </a:ln>
+        </p:spPr>
+        <p:txBody>
+          <a:bodyPr xmlns:a="http://schemas.openxmlformats.org/drawingml/2006/main"/>
+          <a:lstStyle xmlns:a="http://schemas.openxmlformats.org/drawingml/2006/main"/>
+          <a:p xmlns:a="http://schemas.openxmlformats.org/drawingml/2006/main">
+            <a:pPr algn="l">
+              <a:defRPr sz="1575" b="0" i="0">
+                <a:solidFill>
+                  <a:srgbClr val="222222"/>
+                </a:solidFill>
+              </a:defRPr>
+            </a:pPr>
+            <a:r>
+              <a:rPr sz="1575" b="0" i="0">
+                <a:solidFill>
+                  <a:srgbClr val="222222"/>
+                </a:solidFill>
+              </a:rPr>
+              <a:t>If XGBoost comes next, it should be judged on better ranking and timing, not merely higher exposure.</a:t>
+            </a:r>
+          </a:p>
+        </p:txBody>
+      </p:sp>
+      <p:sp>
+        <p:nvSpPr>
+          <p:cNvPr id="11" name="">
+            <a:extLst xmlns:a="http://schemas.openxmlformats.org/drawingml/2006/main">
+              <a:ext uri="{FF2B5EF4-FFF2-40B4-BE49-F238E27FC236}">
+                <a16:creationId xmlns:a16="http://schemas.microsoft.com/office/drawing/2014/main" id="{0D890192-E41C-475C-B34B-0C8F3E1312DA}"/>
+              </a:ext>
+            </a:extLst>
+          </p:cNvPr>
+          <p:cNvSpPr>
+            <a:spLocks xmlns:a="http://schemas.openxmlformats.org/drawingml/2006/main" noGrp="1"/>
+          </p:cNvSpPr>
+          <p:nvPr/>
+        </p:nvSpPr>
+        <p:spPr>
+          <a:xfrm xmlns:a="http://schemas.openxmlformats.org/drawingml/2006/main">
+            <a:off x="1219200" y="5572125"/>
+            <a:ext cx="190500" cy="247650"/>
+          </a:xfrm>
+          <a:prstGeom xmlns:a="http://schemas.openxmlformats.org/drawingml/2006/main" prst="rect">
+            <a:avLst/>
+          </a:prstGeom>
+          <a:noFill xmlns:a="http://schemas.openxmlformats.org/drawingml/2006/main"/>
+          <a:ln xmlns:a="http://schemas.openxmlformats.org/drawingml/2006/main" w="0">
+            <a:noFill/>
+            <a:prstDash val="solid"/>
+          </a:ln>
+        </p:spPr>
+        <p:txBody>
+          <a:bodyPr xmlns:a="http://schemas.openxmlformats.org/drawingml/2006/main"/>
+          <a:lstStyle xmlns:a="http://schemas.openxmlformats.org/drawingml/2006/main"/>
+          <a:p xmlns:a="http://schemas.openxmlformats.org/drawingml/2006/main">
+            <a:pPr algn="l">
+              <a:defRPr sz="1575" b="1" i="0">
+                <a:solidFill>
+                  <a:srgbClr val="FF6B35"/>
+                </a:solidFill>
+              </a:defRPr>
+            </a:pPr>
+            <a:r>
+              <a:rPr sz="1575" b="1" i="0">
+                <a:solidFill>
+                  <a:srgbClr val="FF6B35"/>
+                </a:solidFill>
+              </a:rPr>
+              <a:t>-</a:t>
+            </a:r>
+          </a:p>
+        </p:txBody>
+      </p:sp>
+      <p:sp>
+        <p:nvSpPr>
+          <p:cNvPr id="12" name="">
+            <a:extLst xmlns:a="http://schemas.openxmlformats.org/drawingml/2006/main">
+              <a:ext uri="{FF2B5EF4-FFF2-40B4-BE49-F238E27FC236}">
+                <a16:creationId xmlns:a16="http://schemas.microsoft.com/office/drawing/2014/main" id="{EA38F89B-66AD-452F-AA64-21C07064DA1A}"/>
+              </a:ext>
+            </a:extLst>
+          </p:cNvPr>
+          <p:cNvSpPr>
+            <a:spLocks xmlns:a="http://schemas.openxmlformats.org/drawingml/2006/main" noGrp="1"/>
+          </p:cNvSpPr>
+          <p:nvPr/>
+        </p:nvSpPr>
+        <p:spPr>
+          <a:xfrm xmlns:a="http://schemas.openxmlformats.org/drawingml/2006/main">
+            <a:off x="1485900" y="5562600"/>
+            <a:ext cx="6972300" cy="514350"/>
+          </a:xfrm>
+          <a:prstGeom xmlns:a="http://schemas.openxmlformats.org/drawingml/2006/main" prst="rect">
+            <a:avLst/>
+          </a:prstGeom>
+          <a:noFill xmlns:a="http://schemas.openxmlformats.org/drawingml/2006/main"/>
+          <a:ln xmlns:a="http://schemas.openxmlformats.org/drawingml/2006/main" w="0">
+            <a:noFill/>
+            <a:prstDash val="solid"/>
+          </a:ln>
+        </p:spPr>
+        <p:txBody>
+          <a:bodyPr xmlns:a="http://schemas.openxmlformats.org/drawingml/2006/main"/>
+          <a:lstStyle xmlns:a="http://schemas.openxmlformats.org/drawingml/2006/main"/>
+          <a:p xmlns:a="http://schemas.openxmlformats.org/drawingml/2006/main">
+            <a:pPr algn="l">
+              <a:defRPr sz="1575" b="0" i="0">
+                <a:solidFill>
+                  <a:srgbClr val="222222"/>
+                </a:solidFill>
+              </a:defRPr>
+            </a:pPr>
+            <a:r>
+              <a:rPr sz="1575" b="0" i="0">
+                <a:solidFill>
+                  <a:srgbClr val="222222"/>
+                </a:solidFill>
+              </a:rPr>
+              <a:t>Watch the 2022 tradeoff: grid exposure rose to 67.4% while return fell to -48.4%.</a:t>
+            </a:r>
+          </a:p>
+        </p:txBody>
+      </p:sp>
+    </p:spTree>
+    <p:extLst>
+      <p:ext uri="{BB962C8B-B14F-4D97-AF65-F5344CB8AC3E}">
+        <p14:creationId xmlns:p14="http://schemas.microsoft.com/office/powerpoint/2010/main" val="672011009"/>
       </p:ext>
     </p:extLst>
   </p:cSld>
@@ -7144,7 +10257,7 @@
           <p:cNvPr id="1" name="">
             <a:extLst xmlns:a="http://schemas.openxmlformats.org/drawingml/2006/main">
               <a:ext uri="{FF2B5EF4-FFF2-40B4-BE49-F238E27FC236}">
-                <a16:creationId xmlns:a16="http://schemas.microsoft.com/office/drawing/2014/main" id="{3C11B574-C1F3-44C2-BFDD-F21961BF1C3E}"/>
+                <a16:creationId xmlns:a16="http://schemas.microsoft.com/office/drawing/2014/main" id="{A1A1DE9B-2883-44C3-AE0C-093FE00A77E9}"/>
               </a:ext>
             </a:extLst>
           </p:cNvPr>
@@ -7194,7 +10307,7 @@
           <p:cNvPr id="2" name="">
             <a:extLst xmlns:a="http://schemas.openxmlformats.org/drawingml/2006/main">
               <a:ext uri="{FF2B5EF4-FFF2-40B4-BE49-F238E27FC236}">
-                <a16:creationId xmlns:a16="http://schemas.microsoft.com/office/drawing/2014/main" id="{A7CB5D9B-0291-4EE9-82E6-2642158D5577}"/>
+                <a16:creationId xmlns:a16="http://schemas.microsoft.com/office/drawing/2014/main" id="{3AE87DAD-B9A8-4510-9365-363B99B9B0D6}"/>
               </a:ext>
             </a:extLst>
           </p:cNvPr>
@@ -7244,7 +10357,7 @@
           <p:cNvPr id="3" name="">
             <a:extLst xmlns:a="http://schemas.openxmlformats.org/drawingml/2006/main">
               <a:ext uri="{FF2B5EF4-FFF2-40B4-BE49-F238E27FC236}">
-                <a16:creationId xmlns:a16="http://schemas.microsoft.com/office/drawing/2014/main" id="{1D87F613-3AF1-4682-AD3A-060509D7BF5D}"/>
+                <a16:creationId xmlns:a16="http://schemas.microsoft.com/office/drawing/2014/main" id="{29262F3E-589C-4A9F-9E2B-4F18647454EC}"/>
               </a:ext>
             </a:extLst>
           </p:cNvPr>
@@ -7275,7 +10388,7 @@
           <p:cNvPr id="4" name="">
             <a:extLst xmlns:a="http://schemas.openxmlformats.org/drawingml/2006/main">
               <a:ext uri="{FF2B5EF4-FFF2-40B4-BE49-F238E27FC236}">
-                <a16:creationId xmlns:a16="http://schemas.microsoft.com/office/drawing/2014/main" id="{F6616A57-8C91-4C73-A3BB-E60F55BB43D8}"/>
+                <a16:creationId xmlns:a16="http://schemas.microsoft.com/office/drawing/2014/main" id="{40F9C970-CE3B-4568-AEE1-D6F2A7FBC059}"/>
               </a:ext>
             </a:extLst>
           </p:cNvPr>
@@ -7287,7 +10400,7 @@
         <p:spPr>
           <a:xfrm xmlns:a="http://schemas.openxmlformats.org/drawingml/2006/main">
             <a:off x="876300" y="2190750"/>
-            <a:ext cx="2857500" cy="1200150"/>
+            <a:ext cx="2857500" cy="1428750"/>
           </a:xfrm>
           <a:prstGeom xmlns:a="http://schemas.openxmlformats.org/drawingml/2006/main" prst="rect">
             <a:avLst/>
@@ -7308,7 +10421,7 @@
           <p:cNvPr id="5" name="">
             <a:extLst xmlns:a="http://schemas.openxmlformats.org/drawingml/2006/main">
               <a:ext uri="{FF2B5EF4-FFF2-40B4-BE49-F238E27FC236}">
-                <a16:creationId xmlns:a16="http://schemas.microsoft.com/office/drawing/2014/main" id="{6D9D3AF4-5757-43E5-A418-F71F569A0FBD}"/>
+                <a16:creationId xmlns:a16="http://schemas.microsoft.com/office/drawing/2014/main" id="{A9B9C2DE-C2DC-4108-A01B-7A7E7685F33D}"/>
               </a:ext>
             </a:extLst>
           </p:cNvPr>
@@ -7358,7 +10471,7 @@
           <p:cNvPr id="6" name="">
             <a:extLst xmlns:a="http://schemas.openxmlformats.org/drawingml/2006/main">
               <a:ext uri="{FF2B5EF4-FFF2-40B4-BE49-F238E27FC236}">
-                <a16:creationId xmlns:a16="http://schemas.microsoft.com/office/drawing/2014/main" id="{C6A3C248-60D4-4990-9D39-DBB1829C406B}"/>
+                <a16:creationId xmlns:a16="http://schemas.microsoft.com/office/drawing/2014/main" id="{F47EDEA3-DA16-40AF-922F-0282DF735A1B}"/>
               </a:ext>
             </a:extLst>
           </p:cNvPr>
@@ -7408,7 +10521,7 @@
           <p:cNvPr id="7" name="">
             <a:extLst xmlns:a="http://schemas.openxmlformats.org/drawingml/2006/main">
               <a:ext uri="{FF2B5EF4-FFF2-40B4-BE49-F238E27FC236}">
-                <a16:creationId xmlns:a16="http://schemas.microsoft.com/office/drawing/2014/main" id="{7ACC55DD-3E8C-4F28-B518-55C3AC04973A}"/>
+                <a16:creationId xmlns:a16="http://schemas.microsoft.com/office/drawing/2014/main" id="{F6EA13BE-F47C-4262-B586-BDCBECF95DB1}"/>
               </a:ext>
             </a:extLst>
           </p:cNvPr>
@@ -7420,7 +10533,7 @@
         <p:spPr>
           <a:xfrm xmlns:a="http://schemas.openxmlformats.org/drawingml/2006/main">
             <a:off x="1047750" y="3009900"/>
-            <a:ext cx="2514600" cy="323850"/>
+            <a:ext cx="2514600" cy="552450"/>
           </a:xfrm>
           <a:prstGeom xmlns:a="http://schemas.openxmlformats.org/drawingml/2006/main" prst="rect">
             <a:avLst/>
@@ -7458,7 +10571,7 @@
           <p:cNvPr id="8" name="">
             <a:extLst xmlns:a="http://schemas.openxmlformats.org/drawingml/2006/main">
               <a:ext uri="{FF2B5EF4-FFF2-40B4-BE49-F238E27FC236}">
-                <a16:creationId xmlns:a16="http://schemas.microsoft.com/office/drawing/2014/main" id="{9F403F99-7F34-4602-829A-03CB9FF6A0CE}"/>
+                <a16:creationId xmlns:a16="http://schemas.microsoft.com/office/drawing/2014/main" id="{484862F7-734C-4774-8BE4-8D081EA179DA}"/>
               </a:ext>
             </a:extLst>
           </p:cNvPr>
@@ -7470,7 +10583,7 @@
         <p:spPr>
           <a:xfrm xmlns:a="http://schemas.openxmlformats.org/drawingml/2006/main">
             <a:off x="4667250" y="2190750"/>
-            <a:ext cx="2857500" cy="1200150"/>
+            <a:ext cx="2857500" cy="1428750"/>
           </a:xfrm>
           <a:prstGeom xmlns:a="http://schemas.openxmlformats.org/drawingml/2006/main" prst="rect">
             <a:avLst/>
@@ -7491,7 +10604,7 @@
           <p:cNvPr id="9" name="">
             <a:extLst xmlns:a="http://schemas.openxmlformats.org/drawingml/2006/main">
               <a:ext uri="{FF2B5EF4-FFF2-40B4-BE49-F238E27FC236}">
-                <a16:creationId xmlns:a16="http://schemas.microsoft.com/office/drawing/2014/main" id="{874F63C7-771C-454F-9587-47CCD93648EA}"/>
+                <a16:creationId xmlns:a16="http://schemas.microsoft.com/office/drawing/2014/main" id="{88020B65-549E-4C4C-A4EE-A13B1B6F7E64}"/>
               </a:ext>
             </a:extLst>
           </p:cNvPr>
@@ -7541,7 +10654,7 @@
           <p:cNvPr id="10" name="">
             <a:extLst xmlns:a="http://schemas.openxmlformats.org/drawingml/2006/main">
               <a:ext uri="{FF2B5EF4-FFF2-40B4-BE49-F238E27FC236}">
-                <a16:creationId xmlns:a16="http://schemas.microsoft.com/office/drawing/2014/main" id="{10B9D2F1-223D-4225-8DC0-EC935AB32A6B}"/>
+                <a16:creationId xmlns:a16="http://schemas.microsoft.com/office/drawing/2014/main" id="{8DF3CFCB-9E4E-4448-9121-E179A6A6446B}"/>
               </a:ext>
             </a:extLst>
           </p:cNvPr>
@@ -7591,7 +10704,7 @@
           <p:cNvPr id="11" name="">
             <a:extLst xmlns:a="http://schemas.openxmlformats.org/drawingml/2006/main">
               <a:ext uri="{FF2B5EF4-FFF2-40B4-BE49-F238E27FC236}">
-                <a16:creationId xmlns:a16="http://schemas.microsoft.com/office/drawing/2014/main" id="{E10288E7-C5CD-42FB-8ED6-33039496AEDD}"/>
+                <a16:creationId xmlns:a16="http://schemas.microsoft.com/office/drawing/2014/main" id="{E1082171-DDC1-480B-9B0C-B7888CEA09A7}"/>
               </a:ext>
             </a:extLst>
           </p:cNvPr>
@@ -7603,7 +10716,7 @@
         <p:spPr>
           <a:xfrm xmlns:a="http://schemas.openxmlformats.org/drawingml/2006/main">
             <a:off x="4838700" y="3009900"/>
-            <a:ext cx="2514600" cy="323850"/>
+            <a:ext cx="2514600" cy="552450"/>
           </a:xfrm>
           <a:prstGeom xmlns:a="http://schemas.openxmlformats.org/drawingml/2006/main" prst="rect">
             <a:avLst/>
@@ -7641,7 +10754,7 @@
           <p:cNvPr id="12" name="">
             <a:extLst xmlns:a="http://schemas.openxmlformats.org/drawingml/2006/main">
               <a:ext uri="{FF2B5EF4-FFF2-40B4-BE49-F238E27FC236}">
-                <a16:creationId xmlns:a16="http://schemas.microsoft.com/office/drawing/2014/main" id="{800C4630-44AC-4DA9-B90B-B460F1B27BB6}"/>
+                <a16:creationId xmlns:a16="http://schemas.microsoft.com/office/drawing/2014/main" id="{59EF25BC-22A2-47E0-B43A-649AA5B3A7F6}"/>
               </a:ext>
             </a:extLst>
           </p:cNvPr>
@@ -7653,7 +10766,7 @@
         <p:spPr>
           <a:xfrm xmlns:a="http://schemas.openxmlformats.org/drawingml/2006/main">
             <a:off x="8458200" y="2190750"/>
-            <a:ext cx="2857500" cy="1200150"/>
+            <a:ext cx="2857500" cy="1428750"/>
           </a:xfrm>
           <a:prstGeom xmlns:a="http://schemas.openxmlformats.org/drawingml/2006/main" prst="rect">
             <a:avLst/>
@@ -7674,7 +10787,7 @@
           <p:cNvPr id="13" name="">
             <a:extLst xmlns:a="http://schemas.openxmlformats.org/drawingml/2006/main">
               <a:ext uri="{FF2B5EF4-FFF2-40B4-BE49-F238E27FC236}">
-                <a16:creationId xmlns:a16="http://schemas.microsoft.com/office/drawing/2014/main" id="{10C2F5D8-D422-41F7-BF1F-01D5C340A4CB}"/>
+                <a16:creationId xmlns:a16="http://schemas.microsoft.com/office/drawing/2014/main" id="{C608CE68-3175-4AFD-981D-F6B6987ED796}"/>
               </a:ext>
             </a:extLst>
           </p:cNvPr>
@@ -7724,7 +10837,7 @@
           <p:cNvPr id="14" name="">
             <a:extLst xmlns:a="http://schemas.openxmlformats.org/drawingml/2006/main">
               <a:ext uri="{FF2B5EF4-FFF2-40B4-BE49-F238E27FC236}">
-                <a16:creationId xmlns:a16="http://schemas.microsoft.com/office/drawing/2014/main" id="{30B92D43-FD4C-450D-9C1F-7DF0B33ADF71}"/>
+                <a16:creationId xmlns:a16="http://schemas.microsoft.com/office/drawing/2014/main" id="{8C08F2C7-C230-48AE-BF1D-9384FAD02393}"/>
               </a:ext>
             </a:extLst>
           </p:cNvPr>
@@ -7774,7 +10887,7 @@
           <p:cNvPr id="15" name="">
             <a:extLst xmlns:a="http://schemas.openxmlformats.org/drawingml/2006/main">
               <a:ext uri="{FF2B5EF4-FFF2-40B4-BE49-F238E27FC236}">
-                <a16:creationId xmlns:a16="http://schemas.microsoft.com/office/drawing/2014/main" id="{C2CA55F2-5160-42FD-8A8F-D749DCEFA3CD}"/>
+                <a16:creationId xmlns:a16="http://schemas.microsoft.com/office/drawing/2014/main" id="{FC5B4A0A-04F8-482A-9315-390D62E16B5A}"/>
               </a:ext>
             </a:extLst>
           </p:cNvPr>
@@ -7786,7 +10899,7 @@
         <p:spPr>
           <a:xfrm xmlns:a="http://schemas.openxmlformats.org/drawingml/2006/main">
             <a:off x="8629650" y="3009900"/>
-            <a:ext cx="2514600" cy="323850"/>
+            <a:ext cx="2514600" cy="552450"/>
           </a:xfrm>
           <a:prstGeom xmlns:a="http://schemas.openxmlformats.org/drawingml/2006/main" prst="rect">
             <a:avLst/>
@@ -7824,7 +10937,7 @@
           <p:cNvPr id="16" name="">
             <a:extLst xmlns:a="http://schemas.openxmlformats.org/drawingml/2006/main">
               <a:ext uri="{FF2B5EF4-FFF2-40B4-BE49-F238E27FC236}">
-                <a16:creationId xmlns:a16="http://schemas.microsoft.com/office/drawing/2014/main" id="{1EDC3B2B-7968-4B81-BE81-0B1A266EE0E0}"/>
+                <a16:creationId xmlns:a16="http://schemas.microsoft.com/office/drawing/2014/main" id="{A1F2E1A7-D3D1-4BAD-9B58-E0FC726CECEB}"/>
               </a:ext>
             </a:extLst>
           </p:cNvPr>
@@ -7874,7 +10987,7 @@
           <p:cNvPr id="17" name="">
             <a:extLst xmlns:a="http://schemas.openxmlformats.org/drawingml/2006/main">
               <a:ext uri="{FF2B5EF4-FFF2-40B4-BE49-F238E27FC236}">
-                <a16:creationId xmlns:a16="http://schemas.microsoft.com/office/drawing/2014/main" id="{8A129D36-D038-419E-93E2-BA40532DB466}"/>
+                <a16:creationId xmlns:a16="http://schemas.microsoft.com/office/drawing/2014/main" id="{7E446C2F-FC9A-4C41-A95B-76BF7A9B3271}"/>
               </a:ext>
             </a:extLst>
           </p:cNvPr>
@@ -7924,7 +11037,7 @@
           <p:cNvPr id="18" name="">
             <a:extLst xmlns:a="http://schemas.openxmlformats.org/drawingml/2006/main">
               <a:ext uri="{FF2B5EF4-FFF2-40B4-BE49-F238E27FC236}">
-                <a16:creationId xmlns:a16="http://schemas.microsoft.com/office/drawing/2014/main" id="{3AD45CF1-64AB-42E1-A81F-87A2D5FD29C3}"/>
+                <a16:creationId xmlns:a16="http://schemas.microsoft.com/office/drawing/2014/main" id="{B252D230-A173-4E08-AE81-8468C574B7E0}"/>
               </a:ext>
             </a:extLst>
           </p:cNvPr>
@@ -7974,7 +11087,7 @@
           <p:cNvPr id="19" name="">
             <a:extLst xmlns:a="http://schemas.openxmlformats.org/drawingml/2006/main">
               <a:ext uri="{FF2B5EF4-FFF2-40B4-BE49-F238E27FC236}">
-                <a16:creationId xmlns:a16="http://schemas.microsoft.com/office/drawing/2014/main" id="{F3986E6B-B807-48ED-91F4-46CD332D4E09}"/>
+                <a16:creationId xmlns:a16="http://schemas.microsoft.com/office/drawing/2014/main" id="{01F0FABC-9EBF-4847-AAFD-64719C30B221}"/>
               </a:ext>
             </a:extLst>
           </p:cNvPr>
@@ -8024,7 +11137,7 @@
           <p:cNvPr id="20" name="">
             <a:extLst xmlns:a="http://schemas.openxmlformats.org/drawingml/2006/main">
               <a:ext uri="{FF2B5EF4-FFF2-40B4-BE49-F238E27FC236}">
-                <a16:creationId xmlns:a16="http://schemas.microsoft.com/office/drawing/2014/main" id="{B32FF8A3-725A-4BBF-89EE-F53E78CC35A3}"/>
+                <a16:creationId xmlns:a16="http://schemas.microsoft.com/office/drawing/2014/main" id="{35B1DB1C-E803-4022-8CBD-42D9F2C9B1F8}"/>
               </a:ext>
             </a:extLst>
           </p:cNvPr>
@@ -8074,7 +11187,7 @@
           <p:cNvPr id="21" name="">
             <a:extLst xmlns:a="http://schemas.openxmlformats.org/drawingml/2006/main">
               <a:ext uri="{FF2B5EF4-FFF2-40B4-BE49-F238E27FC236}">
-                <a16:creationId xmlns:a16="http://schemas.microsoft.com/office/drawing/2014/main" id="{0876B1BC-A436-4FB1-BB4D-A2CBFF9B3948}"/>
+                <a16:creationId xmlns:a16="http://schemas.microsoft.com/office/drawing/2014/main" id="{85FBB00B-371C-4B2E-9E29-F45824547D40}"/>
               </a:ext>
             </a:extLst>
           </p:cNvPr>
@@ -8124,7 +11237,7 @@
           <p:cNvPr id="22" name="">
             <a:extLst xmlns:a="http://schemas.openxmlformats.org/drawingml/2006/main">
               <a:ext uri="{FF2B5EF4-FFF2-40B4-BE49-F238E27FC236}">
-                <a16:creationId xmlns:a16="http://schemas.microsoft.com/office/drawing/2014/main" id="{2BFF81E5-AC0C-4CFA-9B6E-21F1F303FB3A}"/>
+                <a16:creationId xmlns:a16="http://schemas.microsoft.com/office/drawing/2014/main" id="{B57423C7-E917-42E5-8E69-B1FF861746D1}"/>
               </a:ext>
             </a:extLst>
           </p:cNvPr>
@@ -8174,7 +11287,7 @@
           <p:cNvPr id="23" name="">
             <a:extLst xmlns:a="http://schemas.openxmlformats.org/drawingml/2006/main">
               <a:ext uri="{FF2B5EF4-FFF2-40B4-BE49-F238E27FC236}">
-                <a16:creationId xmlns:a16="http://schemas.microsoft.com/office/drawing/2014/main" id="{BEF7CF42-7C61-43D1-85B3-239D6AD0007D}"/>
+                <a16:creationId xmlns:a16="http://schemas.microsoft.com/office/drawing/2014/main" id="{835C1339-EA84-4BF0-BA8A-A8216D688442}"/>
               </a:ext>
             </a:extLst>
           </p:cNvPr>
@@ -8222,7 +11335,7 @@
     </p:spTree>
     <p:extLst>
       <p:ext uri="{BB962C8B-B14F-4D97-AF65-F5344CB8AC3E}">
-        <p14:creationId xmlns:p14="http://schemas.microsoft.com/office/powerpoint/2010/main" val="283073382"/>
+        <p14:creationId xmlns:p14="http://schemas.microsoft.com/office/powerpoint/2010/main" val="1180259244"/>
       </p:ext>
     </p:extLst>
   </p:cSld>
@@ -8253,7 +11366,7 @@
           <p:cNvPr id="1" name="">
             <a:extLst xmlns:a="http://schemas.openxmlformats.org/drawingml/2006/main">
               <a:ext uri="{FF2B5EF4-FFF2-40B4-BE49-F238E27FC236}">
-                <a16:creationId xmlns:a16="http://schemas.microsoft.com/office/drawing/2014/main" id="{67558621-DBF2-4D73-917B-D15E0817111A}"/>
+                <a16:creationId xmlns:a16="http://schemas.microsoft.com/office/drawing/2014/main" id="{DBC1B214-6146-4764-AA7F-A99598AE04B6}"/>
               </a:ext>
             </a:extLst>
           </p:cNvPr>
@@ -8303,7 +11416,7 @@
           <p:cNvPr id="2" name="">
             <a:extLst xmlns:a="http://schemas.openxmlformats.org/drawingml/2006/main">
               <a:ext uri="{FF2B5EF4-FFF2-40B4-BE49-F238E27FC236}">
-                <a16:creationId xmlns:a16="http://schemas.microsoft.com/office/drawing/2014/main" id="{E5E9B7F3-496E-4356-BC9E-958257962B04}"/>
+                <a16:creationId xmlns:a16="http://schemas.microsoft.com/office/drawing/2014/main" id="{B96EB98F-3684-4769-B7BC-77AA9E0A39BB}"/>
               </a:ext>
             </a:extLst>
           </p:cNvPr>
@@ -8353,7 +11466,7 @@
           <p:cNvPr id="3" name="">
             <a:extLst xmlns:a="http://schemas.openxmlformats.org/drawingml/2006/main">
               <a:ext uri="{FF2B5EF4-FFF2-40B4-BE49-F238E27FC236}">
-                <a16:creationId xmlns:a16="http://schemas.microsoft.com/office/drawing/2014/main" id="{95C6FBB8-BA3D-4842-AE40-2D270782464A}"/>
+                <a16:creationId xmlns:a16="http://schemas.microsoft.com/office/drawing/2014/main" id="{F97BF7E6-EF90-4CA4-8982-95B2F589C516}"/>
               </a:ext>
             </a:extLst>
           </p:cNvPr>
@@ -8388,7 +11501,7 @@
           <p:nvPr/>
         </p:nvPicPr>
         <p:blipFill>
-          <a:blip xmlns:r="http://schemas.openxmlformats.org/officeDocument/2006/relationships" xmlns:a="http://schemas.openxmlformats.org/drawingml/2006/main" r:embed="Rb2781d92ac6f4ae2"/>
+          <a:blip xmlns:r="http://schemas.openxmlformats.org/officeDocument/2006/relationships" xmlns:a="http://schemas.openxmlformats.org/drawingml/2006/main" r:embed="Rd0cae3e91e884ee8"/>
           <a:stretch xmlns:a="http://schemas.openxmlformats.org/drawingml/2006/main"/>
         </p:blipFill>
         <p:spPr>
@@ -8406,7 +11519,7 @@
           <p:cNvPr id="5" name="">
             <a:extLst xmlns:a="http://schemas.openxmlformats.org/drawingml/2006/main">
               <a:ext uri="{FF2B5EF4-FFF2-40B4-BE49-F238E27FC236}">
-                <a16:creationId xmlns:a16="http://schemas.microsoft.com/office/drawing/2014/main" id="{D683C9EE-2243-4DB7-AF8F-03EDED947A7F}"/>
+                <a16:creationId xmlns:a16="http://schemas.microsoft.com/office/drawing/2014/main" id="{80654221-CF9C-451E-82EC-E9161A53E9D1}"/>
               </a:ext>
             </a:extLst>
           </p:cNvPr>
@@ -8456,7 +11569,7 @@
           <p:cNvPr id="6" name="">
             <a:extLst xmlns:a="http://schemas.openxmlformats.org/drawingml/2006/main">
               <a:ext uri="{FF2B5EF4-FFF2-40B4-BE49-F238E27FC236}">
-                <a16:creationId xmlns:a16="http://schemas.microsoft.com/office/drawing/2014/main" id="{21EBB7B0-9EA4-45D5-87A9-5EACBA1F6FB5}"/>
+                <a16:creationId xmlns:a16="http://schemas.microsoft.com/office/drawing/2014/main" id="{C923F815-86BA-4D33-96B6-17ACFECE378A}"/>
               </a:ext>
             </a:extLst>
           </p:cNvPr>
@@ -8504,7 +11617,7 @@
     </p:spTree>
     <p:extLst>
       <p:ext uri="{BB962C8B-B14F-4D97-AF65-F5344CB8AC3E}">
-        <p14:creationId xmlns:p14="http://schemas.microsoft.com/office/powerpoint/2010/main" val="1359632138"/>
+        <p14:creationId xmlns:p14="http://schemas.microsoft.com/office/powerpoint/2010/main" val="397574986"/>
       </p:ext>
     </p:extLst>
   </p:cSld>
@@ -8535,7 +11648,7 @@
           <p:cNvPr id="1" name="">
             <a:extLst xmlns:a="http://schemas.openxmlformats.org/drawingml/2006/main">
               <a:ext uri="{FF2B5EF4-FFF2-40B4-BE49-F238E27FC236}">
-                <a16:creationId xmlns:a16="http://schemas.microsoft.com/office/drawing/2014/main" id="{2062BF1D-E943-43D1-BC96-A2D9D66CCD13}"/>
+                <a16:creationId xmlns:a16="http://schemas.microsoft.com/office/drawing/2014/main" id="{33A49778-0DC4-4BAE-961F-97F82944949C}"/>
               </a:ext>
             </a:extLst>
           </p:cNvPr>
@@ -8585,7 +11698,7 @@
           <p:cNvPr id="2" name="">
             <a:extLst xmlns:a="http://schemas.openxmlformats.org/drawingml/2006/main">
               <a:ext uri="{FF2B5EF4-FFF2-40B4-BE49-F238E27FC236}">
-                <a16:creationId xmlns:a16="http://schemas.microsoft.com/office/drawing/2014/main" id="{0FA8E4B3-59D8-42EA-9528-0D837A5E61DC}"/>
+                <a16:creationId xmlns:a16="http://schemas.microsoft.com/office/drawing/2014/main" id="{84998785-9145-4FCE-A54F-5E8865DF29C2}"/>
               </a:ext>
             </a:extLst>
           </p:cNvPr>
@@ -8635,7 +11748,7 @@
           <p:cNvPr id="3" name="">
             <a:extLst xmlns:a="http://schemas.openxmlformats.org/drawingml/2006/main">
               <a:ext uri="{FF2B5EF4-FFF2-40B4-BE49-F238E27FC236}">
-                <a16:creationId xmlns:a16="http://schemas.microsoft.com/office/drawing/2014/main" id="{1752EB5F-2B85-4D80-9E43-BC85AE4AB711}"/>
+                <a16:creationId xmlns:a16="http://schemas.microsoft.com/office/drawing/2014/main" id="{689F875F-0750-4433-8F47-72914CBDCA1C}"/>
               </a:ext>
             </a:extLst>
           </p:cNvPr>
@@ -8670,7 +11783,7 @@
           <p:nvPr/>
         </p:nvPicPr>
         <p:blipFill>
-          <a:blip xmlns:r="http://schemas.openxmlformats.org/officeDocument/2006/relationships" xmlns:a="http://schemas.openxmlformats.org/drawingml/2006/main" r:embed="Rd48cbabb66624634"/>
+          <a:blip xmlns:r="http://schemas.openxmlformats.org/officeDocument/2006/relationships" xmlns:a="http://schemas.openxmlformats.org/drawingml/2006/main" r:embed="Rc358e62a2eae43d0"/>
           <a:stretch xmlns:a="http://schemas.openxmlformats.org/drawingml/2006/main"/>
         </p:blipFill>
         <p:spPr>
@@ -8688,7 +11801,7 @@
           <p:cNvPr id="5" name="">
             <a:extLst xmlns:a="http://schemas.openxmlformats.org/drawingml/2006/main">
               <a:ext uri="{FF2B5EF4-FFF2-40B4-BE49-F238E27FC236}">
-                <a16:creationId xmlns:a16="http://schemas.microsoft.com/office/drawing/2014/main" id="{7FFBB2C4-59DB-43F1-9B43-0D588CDABB3A}"/>
+                <a16:creationId xmlns:a16="http://schemas.microsoft.com/office/drawing/2014/main" id="{A8E681E7-870B-4C89-9820-9400A077D089}"/>
               </a:ext>
             </a:extLst>
           </p:cNvPr>
@@ -8738,7 +11851,7 @@
           <p:cNvPr id="6" name="">
             <a:extLst xmlns:a="http://schemas.openxmlformats.org/drawingml/2006/main">
               <a:ext uri="{FF2B5EF4-FFF2-40B4-BE49-F238E27FC236}">
-                <a16:creationId xmlns:a16="http://schemas.microsoft.com/office/drawing/2014/main" id="{B128D558-C29B-4E43-B0D5-442ABEF7773D}"/>
+                <a16:creationId xmlns:a16="http://schemas.microsoft.com/office/drawing/2014/main" id="{DF022C8C-A4E9-4944-901E-CDC712F6E770}"/>
               </a:ext>
             </a:extLst>
           </p:cNvPr>
@@ -8788,7 +11901,7 @@
           <p:cNvPr id="7" name="">
             <a:extLst xmlns:a="http://schemas.openxmlformats.org/drawingml/2006/main">
               <a:ext uri="{FF2B5EF4-FFF2-40B4-BE49-F238E27FC236}">
-                <a16:creationId xmlns:a16="http://schemas.microsoft.com/office/drawing/2014/main" id="{FE87E29F-E4A5-4C99-AC38-3EBB0379A1E2}"/>
+                <a16:creationId xmlns:a16="http://schemas.microsoft.com/office/drawing/2014/main" id="{C05BAF81-DD5C-48A0-99F5-5FC24CB8D9E7}"/>
               </a:ext>
             </a:extLst>
           </p:cNvPr>
@@ -8838,7 +11951,7 @@
           <p:cNvPr id="8" name="">
             <a:extLst xmlns:a="http://schemas.openxmlformats.org/drawingml/2006/main">
               <a:ext uri="{FF2B5EF4-FFF2-40B4-BE49-F238E27FC236}">
-                <a16:creationId xmlns:a16="http://schemas.microsoft.com/office/drawing/2014/main" id="{1407C223-C106-4223-BADA-30C50F3AB022}"/>
+                <a16:creationId xmlns:a16="http://schemas.microsoft.com/office/drawing/2014/main" id="{BDB79631-3684-407E-BA29-ACB6C1398777}"/>
               </a:ext>
             </a:extLst>
           </p:cNvPr>
@@ -8888,7 +12001,7 @@
           <p:cNvPr id="9" name="">
             <a:extLst xmlns:a="http://schemas.openxmlformats.org/drawingml/2006/main">
               <a:ext uri="{FF2B5EF4-FFF2-40B4-BE49-F238E27FC236}">
-                <a16:creationId xmlns:a16="http://schemas.microsoft.com/office/drawing/2014/main" id="{CF15DBFE-3B24-4233-8645-1D7BCCC33DD9}"/>
+                <a16:creationId xmlns:a16="http://schemas.microsoft.com/office/drawing/2014/main" id="{BA28C531-02EB-4B6C-AD4A-EB136170C2E0}"/>
               </a:ext>
             </a:extLst>
           </p:cNvPr>
@@ -8936,7 +12049,7 @@
     </p:spTree>
     <p:extLst>
       <p:ext uri="{BB962C8B-B14F-4D97-AF65-F5344CB8AC3E}">
-        <p14:creationId xmlns:p14="http://schemas.microsoft.com/office/powerpoint/2010/main" val="84248713"/>
+        <p14:creationId xmlns:p14="http://schemas.microsoft.com/office/powerpoint/2010/main" val="1899949632"/>
       </p:ext>
     </p:extLst>
   </p:cSld>
@@ -8967,7 +12080,7 @@
           <p:cNvPr id="1" name="">
             <a:extLst xmlns:a="http://schemas.openxmlformats.org/drawingml/2006/main">
               <a:ext uri="{FF2B5EF4-FFF2-40B4-BE49-F238E27FC236}">
-                <a16:creationId xmlns:a16="http://schemas.microsoft.com/office/drawing/2014/main" id="{47A552C9-2C95-4129-8038-484434E3CA8B}"/>
+                <a16:creationId xmlns:a16="http://schemas.microsoft.com/office/drawing/2014/main" id="{17922E52-8030-40D3-AF53-E9E4800AAB6F}"/>
               </a:ext>
             </a:extLst>
           </p:cNvPr>
@@ -9017,7 +12130,7 @@
           <p:cNvPr id="2" name="">
             <a:extLst xmlns:a="http://schemas.openxmlformats.org/drawingml/2006/main">
               <a:ext uri="{FF2B5EF4-FFF2-40B4-BE49-F238E27FC236}">
-                <a16:creationId xmlns:a16="http://schemas.microsoft.com/office/drawing/2014/main" id="{E0314130-4464-482D-9300-51DDD1A85025}"/>
+                <a16:creationId xmlns:a16="http://schemas.microsoft.com/office/drawing/2014/main" id="{2DF0F1A9-2846-4A2B-BEC7-C31643FCE090}"/>
               </a:ext>
             </a:extLst>
           </p:cNvPr>
@@ -9067,7 +12180,7 @@
           <p:cNvPr id="3" name="">
             <a:extLst xmlns:a="http://schemas.openxmlformats.org/drawingml/2006/main">
               <a:ext uri="{FF2B5EF4-FFF2-40B4-BE49-F238E27FC236}">
-                <a16:creationId xmlns:a16="http://schemas.microsoft.com/office/drawing/2014/main" id="{985557C4-1100-4616-8AB3-5AF8BD78D17F}"/>
+                <a16:creationId xmlns:a16="http://schemas.microsoft.com/office/drawing/2014/main" id="{BCDE0107-795F-45EC-A323-E5E754F60BDD}"/>
               </a:ext>
             </a:extLst>
           </p:cNvPr>
@@ -9102,7 +12215,7 @@
           <p:nvPr/>
         </p:nvPicPr>
         <p:blipFill>
-          <a:blip xmlns:r="http://schemas.openxmlformats.org/officeDocument/2006/relationships" xmlns:a="http://schemas.openxmlformats.org/drawingml/2006/main" r:embed="R2e63199a85354e8a"/>
+          <a:blip xmlns:r="http://schemas.openxmlformats.org/officeDocument/2006/relationships" xmlns:a="http://schemas.openxmlformats.org/drawingml/2006/main" r:embed="R867ffcad5f8d4eb0"/>
           <a:stretch xmlns:a="http://schemas.openxmlformats.org/drawingml/2006/main"/>
         </p:blipFill>
         <p:spPr>
@@ -9124,7 +12237,7 @@
           <p:nvPr/>
         </p:nvPicPr>
         <p:blipFill>
-          <a:blip xmlns:r="http://schemas.openxmlformats.org/officeDocument/2006/relationships" xmlns:a="http://schemas.openxmlformats.org/drawingml/2006/main" r:embed="R285caf0581ef4807"/>
+          <a:blip xmlns:r="http://schemas.openxmlformats.org/officeDocument/2006/relationships" xmlns:a="http://schemas.openxmlformats.org/drawingml/2006/main" r:embed="R097264eae7724fdf"/>
           <a:stretch xmlns:a="http://schemas.openxmlformats.org/drawingml/2006/main"/>
         </p:blipFill>
         <p:spPr>
@@ -9142,7 +12255,7 @@
           <p:cNvPr id="6" name="">
             <a:extLst xmlns:a="http://schemas.openxmlformats.org/drawingml/2006/main">
               <a:ext uri="{FF2B5EF4-FFF2-40B4-BE49-F238E27FC236}">
-                <a16:creationId xmlns:a16="http://schemas.microsoft.com/office/drawing/2014/main" id="{6892F3D6-E61A-4ABD-A16F-EA7D39989BC4}"/>
+                <a16:creationId xmlns:a16="http://schemas.microsoft.com/office/drawing/2014/main" id="{CDE2534B-A02B-4FE8-9130-36F73EE50FA9}"/>
               </a:ext>
             </a:extLst>
           </p:cNvPr>
@@ -9190,7 +12303,7 @@
     </p:spTree>
     <p:extLst>
       <p:ext uri="{BB962C8B-B14F-4D97-AF65-F5344CB8AC3E}">
-        <p14:creationId xmlns:p14="http://schemas.microsoft.com/office/powerpoint/2010/main" val="2145780310"/>
+        <p14:creationId xmlns:p14="http://schemas.microsoft.com/office/powerpoint/2010/main" val="379807712"/>
       </p:ext>
     </p:extLst>
   </p:cSld>
@@ -9221,7 +12334,7 @@
           <p:cNvPr id="1" name="">
             <a:extLst xmlns:a="http://schemas.openxmlformats.org/drawingml/2006/main">
               <a:ext uri="{FF2B5EF4-FFF2-40B4-BE49-F238E27FC236}">
-                <a16:creationId xmlns:a16="http://schemas.microsoft.com/office/drawing/2014/main" id="{FF945AB4-9652-4D23-B473-9DC19589EF78}"/>
+                <a16:creationId xmlns:a16="http://schemas.microsoft.com/office/drawing/2014/main" id="{C8993EC3-7D5F-458C-8607-911E97EFE4CF}"/>
               </a:ext>
             </a:extLst>
           </p:cNvPr>
@@ -9271,7 +12384,7 @@
           <p:cNvPr id="2" name="">
             <a:extLst xmlns:a="http://schemas.openxmlformats.org/drawingml/2006/main">
               <a:ext uri="{FF2B5EF4-FFF2-40B4-BE49-F238E27FC236}">
-                <a16:creationId xmlns:a16="http://schemas.microsoft.com/office/drawing/2014/main" id="{E0643663-21DD-4992-93E4-F4ECA1DEF43D}"/>
+                <a16:creationId xmlns:a16="http://schemas.microsoft.com/office/drawing/2014/main" id="{D6959B8B-3CEF-4456-AA62-AC60686EAD87}"/>
               </a:ext>
             </a:extLst>
           </p:cNvPr>
@@ -9321,7 +12434,7 @@
           <p:cNvPr id="3" name="">
             <a:extLst xmlns:a="http://schemas.openxmlformats.org/drawingml/2006/main">
               <a:ext uri="{FF2B5EF4-FFF2-40B4-BE49-F238E27FC236}">
-                <a16:creationId xmlns:a16="http://schemas.microsoft.com/office/drawing/2014/main" id="{3796EC5E-F207-42E4-8C75-9D007C512A3B}"/>
+                <a16:creationId xmlns:a16="http://schemas.microsoft.com/office/drawing/2014/main" id="{F32CF3EC-8F97-4B03-B3A1-3A0F7991B661}"/>
               </a:ext>
             </a:extLst>
           </p:cNvPr>
@@ -9356,7 +12469,7 @@
           <p:nvPr/>
         </p:nvPicPr>
         <p:blipFill>
-          <a:blip xmlns:r="http://schemas.openxmlformats.org/officeDocument/2006/relationships" xmlns:a="http://schemas.openxmlformats.org/drawingml/2006/main" r:embed="R041723920c6f4a3a"/>
+          <a:blip xmlns:r="http://schemas.openxmlformats.org/officeDocument/2006/relationships" xmlns:a="http://schemas.openxmlformats.org/drawingml/2006/main" r:embed="R7329df2c40af4213"/>
           <a:stretch xmlns:a="http://schemas.openxmlformats.org/drawingml/2006/main"/>
         </p:blipFill>
         <p:spPr>
@@ -9374,7 +12487,7 @@
           <p:cNvPr id="5" name="">
             <a:extLst xmlns:a="http://schemas.openxmlformats.org/drawingml/2006/main">
               <a:ext uri="{FF2B5EF4-FFF2-40B4-BE49-F238E27FC236}">
-                <a16:creationId xmlns:a16="http://schemas.microsoft.com/office/drawing/2014/main" id="{8057A7B9-6179-41BD-8DF5-D5FC8CF1C6A8}"/>
+                <a16:creationId xmlns:a16="http://schemas.microsoft.com/office/drawing/2014/main" id="{7619CEC8-A47B-40E8-B0D4-E1C429568030}"/>
               </a:ext>
             </a:extLst>
           </p:cNvPr>
@@ -9424,7 +12537,7 @@
           <p:cNvPr id="6" name="">
             <a:extLst xmlns:a="http://schemas.openxmlformats.org/drawingml/2006/main">
               <a:ext uri="{FF2B5EF4-FFF2-40B4-BE49-F238E27FC236}">
-                <a16:creationId xmlns:a16="http://schemas.microsoft.com/office/drawing/2014/main" id="{416B2653-493C-4521-BB8D-9C36593577C7}"/>
+                <a16:creationId xmlns:a16="http://schemas.microsoft.com/office/drawing/2014/main" id="{2E5380D4-5343-4706-989C-CBF57C3124BF}"/>
               </a:ext>
             </a:extLst>
           </p:cNvPr>
@@ -9472,7 +12585,7 @@
     </p:spTree>
     <p:extLst>
       <p:ext uri="{BB962C8B-B14F-4D97-AF65-F5344CB8AC3E}">
-        <p14:creationId xmlns:p14="http://schemas.microsoft.com/office/powerpoint/2010/main" val="1764599846"/>
+        <p14:creationId xmlns:p14="http://schemas.microsoft.com/office/powerpoint/2010/main" val="258425809"/>
       </p:ext>
     </p:extLst>
   </p:cSld>
@@ -9503,7 +12616,7 @@
           <p:cNvPr id="1" name="">
             <a:extLst xmlns:a="http://schemas.openxmlformats.org/drawingml/2006/main">
               <a:ext uri="{FF2B5EF4-FFF2-40B4-BE49-F238E27FC236}">
-                <a16:creationId xmlns:a16="http://schemas.microsoft.com/office/drawing/2014/main" id="{21763562-DC6A-49B1-88D0-B48B6A453911}"/>
+                <a16:creationId xmlns:a16="http://schemas.microsoft.com/office/drawing/2014/main" id="{CED06015-3DEE-4987-BEE4-7D3CB55AF8CE}"/>
               </a:ext>
             </a:extLst>
           </p:cNvPr>
@@ -9553,7 +12666,7 @@
           <p:cNvPr id="2" name="">
             <a:extLst xmlns:a="http://schemas.openxmlformats.org/drawingml/2006/main">
               <a:ext uri="{FF2B5EF4-FFF2-40B4-BE49-F238E27FC236}">
-                <a16:creationId xmlns:a16="http://schemas.microsoft.com/office/drawing/2014/main" id="{A6089CB9-54DF-4506-A248-93C6CFF38369}"/>
+                <a16:creationId xmlns:a16="http://schemas.microsoft.com/office/drawing/2014/main" id="{F79B0D3B-B7D0-47F1-B3E5-C6B1D1527276}"/>
               </a:ext>
             </a:extLst>
           </p:cNvPr>
@@ -9603,7 +12716,7 @@
           <p:cNvPr id="3" name="">
             <a:extLst xmlns:a="http://schemas.openxmlformats.org/drawingml/2006/main">
               <a:ext uri="{FF2B5EF4-FFF2-40B4-BE49-F238E27FC236}">
-                <a16:creationId xmlns:a16="http://schemas.microsoft.com/office/drawing/2014/main" id="{123AC082-A088-4B4E-AF3A-D1446AC0B734}"/>
+                <a16:creationId xmlns:a16="http://schemas.microsoft.com/office/drawing/2014/main" id="{7C2F7EAA-78BC-4DD0-8209-37E3A12453AC}"/>
               </a:ext>
             </a:extLst>
           </p:cNvPr>
@@ -9638,7 +12751,7 @@
           <p:nvPr/>
         </p:nvPicPr>
         <p:blipFill>
-          <a:blip xmlns:r="http://schemas.openxmlformats.org/officeDocument/2006/relationships" xmlns:a="http://schemas.openxmlformats.org/drawingml/2006/main" r:embed="Rb6097a288f9e44d8"/>
+          <a:blip xmlns:r="http://schemas.openxmlformats.org/officeDocument/2006/relationships" xmlns:a="http://schemas.openxmlformats.org/drawingml/2006/main" r:embed="Rb8bd0dd0b5e14e7e"/>
           <a:stretch xmlns:a="http://schemas.openxmlformats.org/drawingml/2006/main"/>
         </p:blipFill>
         <p:spPr>
@@ -9656,7 +12769,7 @@
           <p:cNvPr id="5" name="">
             <a:extLst xmlns:a="http://schemas.openxmlformats.org/drawingml/2006/main">
               <a:ext uri="{FF2B5EF4-FFF2-40B4-BE49-F238E27FC236}">
-                <a16:creationId xmlns:a16="http://schemas.microsoft.com/office/drawing/2014/main" id="{1BA55CEB-AA0D-4A33-A502-E96C60FDE8FA}"/>
+                <a16:creationId xmlns:a16="http://schemas.microsoft.com/office/drawing/2014/main" id="{67210EEC-B266-43DD-B01B-9A178D2AE458}"/>
               </a:ext>
             </a:extLst>
           </p:cNvPr>
@@ -9706,7 +12819,7 @@
           <p:cNvPr id="6" name="">
             <a:extLst xmlns:a="http://schemas.openxmlformats.org/drawingml/2006/main">
               <a:ext uri="{FF2B5EF4-FFF2-40B4-BE49-F238E27FC236}">
-                <a16:creationId xmlns:a16="http://schemas.microsoft.com/office/drawing/2014/main" id="{9D1095F9-DE1D-453D-A8CE-B48598375D70}"/>
+                <a16:creationId xmlns:a16="http://schemas.microsoft.com/office/drawing/2014/main" id="{59AC4BD4-2C25-4094-8747-F27400D7809D}"/>
               </a:ext>
             </a:extLst>
           </p:cNvPr>
@@ -9754,7 +12867,7 @@
     </p:spTree>
     <p:extLst>
       <p:ext uri="{BB962C8B-B14F-4D97-AF65-F5344CB8AC3E}">
-        <p14:creationId xmlns:p14="http://schemas.microsoft.com/office/powerpoint/2010/main" val="1271054265"/>
+        <p14:creationId xmlns:p14="http://schemas.microsoft.com/office/powerpoint/2010/main" val="1172100279"/>
       </p:ext>
     </p:extLst>
   </p:cSld>
@@ -9785,7 +12898,7 @@
           <p:cNvPr id="1" name="">
             <a:extLst xmlns:a="http://schemas.openxmlformats.org/drawingml/2006/main">
               <a:ext uri="{FF2B5EF4-FFF2-40B4-BE49-F238E27FC236}">
-                <a16:creationId xmlns:a16="http://schemas.microsoft.com/office/drawing/2014/main" id="{65C7D25F-8534-4CA8-8A63-1D7FAFB2C164}"/>
+                <a16:creationId xmlns:a16="http://schemas.microsoft.com/office/drawing/2014/main" id="{0954314F-4212-4C8F-BA46-430FA85F6AB2}"/>
               </a:ext>
             </a:extLst>
           </p:cNvPr>
@@ -9835,7 +12948,7 @@
           <p:cNvPr id="2" name="">
             <a:extLst xmlns:a="http://schemas.openxmlformats.org/drawingml/2006/main">
               <a:ext uri="{FF2B5EF4-FFF2-40B4-BE49-F238E27FC236}">
-                <a16:creationId xmlns:a16="http://schemas.microsoft.com/office/drawing/2014/main" id="{4A87B3F8-240C-4A58-8289-31D2FF30681F}"/>
+                <a16:creationId xmlns:a16="http://schemas.microsoft.com/office/drawing/2014/main" id="{59E977BA-DA8E-4F40-8666-CE90F67D3CE6}"/>
               </a:ext>
             </a:extLst>
           </p:cNvPr>
@@ -9885,7 +12998,7 @@
           <p:cNvPr id="3" name="">
             <a:extLst xmlns:a="http://schemas.openxmlformats.org/drawingml/2006/main">
               <a:ext uri="{FF2B5EF4-FFF2-40B4-BE49-F238E27FC236}">
-                <a16:creationId xmlns:a16="http://schemas.microsoft.com/office/drawing/2014/main" id="{0BBC8194-93C2-40C1-9E80-0C8231F063D1}"/>
+                <a16:creationId xmlns:a16="http://schemas.microsoft.com/office/drawing/2014/main" id="{3DF779C3-C95C-404C-943D-E80AF756DCB9}"/>
               </a:ext>
             </a:extLst>
           </p:cNvPr>
@@ -9920,7 +13033,7 @@
           <p:nvPr/>
         </p:nvPicPr>
         <p:blipFill>
-          <a:blip xmlns:r="http://schemas.openxmlformats.org/officeDocument/2006/relationships" xmlns:a="http://schemas.openxmlformats.org/drawingml/2006/main" r:embed="R143e6562c1864d33"/>
+          <a:blip xmlns:r="http://schemas.openxmlformats.org/officeDocument/2006/relationships" xmlns:a="http://schemas.openxmlformats.org/drawingml/2006/main" r:embed="R0dc2c4da3862492d"/>
           <a:stretch xmlns:a="http://schemas.openxmlformats.org/drawingml/2006/main"/>
         </p:blipFill>
         <p:spPr>
@@ -9938,7 +13051,7 @@
           <p:cNvPr id="5" name="">
             <a:extLst xmlns:a="http://schemas.openxmlformats.org/drawingml/2006/main">
               <a:ext uri="{FF2B5EF4-FFF2-40B4-BE49-F238E27FC236}">
-                <a16:creationId xmlns:a16="http://schemas.microsoft.com/office/drawing/2014/main" id="{8048E2A4-C1B1-4F8D-B887-50AA7EECD31F}"/>
+                <a16:creationId xmlns:a16="http://schemas.microsoft.com/office/drawing/2014/main" id="{FB84B190-E954-4506-9E68-09892F020881}"/>
               </a:ext>
             </a:extLst>
           </p:cNvPr>
@@ -9988,7 +13101,7 @@
           <p:cNvPr id="6" name="">
             <a:extLst xmlns:a="http://schemas.openxmlformats.org/drawingml/2006/main">
               <a:ext uri="{FF2B5EF4-FFF2-40B4-BE49-F238E27FC236}">
-                <a16:creationId xmlns:a16="http://schemas.microsoft.com/office/drawing/2014/main" id="{ADAE09F9-ECE6-4A98-A3CA-328753551038}"/>
+                <a16:creationId xmlns:a16="http://schemas.microsoft.com/office/drawing/2014/main" id="{DD36A641-710D-466D-A682-21C83768C2D1}"/>
               </a:ext>
             </a:extLst>
           </p:cNvPr>
@@ -10036,7 +13149,7 @@
     </p:spTree>
     <p:extLst>
       <p:ext uri="{BB962C8B-B14F-4D97-AF65-F5344CB8AC3E}">
-        <p14:creationId xmlns:p14="http://schemas.microsoft.com/office/powerpoint/2010/main" val="730828306"/>
+        <p14:creationId xmlns:p14="http://schemas.microsoft.com/office/powerpoint/2010/main" val="1465508923"/>
       </p:ext>
     </p:extLst>
   </p:cSld>

--- a/presentations/gen5_4_ml_decision_engine_incremental_build.pptx
+++ b/presentations/gen5_4_ml_decision_engine_incremental_build.pptx
@@ -2,35 +2,40 @@
 <file path=ppt/presentation.xml><?xml version="1.0" encoding="utf-8"?>
 <p:presentation xmlns:p="http://schemas.openxmlformats.org/presentationml/2006/main">
   <p:sldMasterIdLst>
-    <p:sldMasterId xmlns:r="http://schemas.openxmlformats.org/officeDocument/2006/relationships" id="2147483648" r:id="R6d41729f27f342ac"/>
+    <p:sldMasterId xmlns:r="http://schemas.openxmlformats.org/officeDocument/2006/relationships" id="2147483648" r:id="R820a2aa7ebd74476"/>
   </p:sldMasterIdLst>
   <p:notesMasterIdLst>
-    <p:notesMasterId xmlns:r="http://schemas.openxmlformats.org/officeDocument/2006/relationships" r:id="R043d61efd29a47bc"/>
+    <p:notesMasterId xmlns:r="http://schemas.openxmlformats.org/officeDocument/2006/relationships" r:id="R42316b72199646cb"/>
   </p:notesMasterIdLst>
   <p:sldIdLst>
-    <p:sldId xmlns:r="http://schemas.openxmlformats.org/officeDocument/2006/relationships" id="256" r:id="R4eba74f325d04d1c"/>
-    <p:sldId xmlns:r="http://schemas.openxmlformats.org/officeDocument/2006/relationships" id="257" r:id="R193a6581455145c3"/>
-    <p:sldId xmlns:r="http://schemas.openxmlformats.org/officeDocument/2006/relationships" id="258" r:id="R0a3df4233f5b43a8"/>
-    <p:sldId xmlns:r="http://schemas.openxmlformats.org/officeDocument/2006/relationships" id="259" r:id="R5dc8012d94534b84"/>
-    <p:sldId xmlns:r="http://schemas.openxmlformats.org/officeDocument/2006/relationships" id="260" r:id="Rde70e23c898f4b5e"/>
-    <p:sldId xmlns:r="http://schemas.openxmlformats.org/officeDocument/2006/relationships" id="261" r:id="R35e9d67dbdf847d2"/>
-    <p:sldId xmlns:r="http://schemas.openxmlformats.org/officeDocument/2006/relationships" id="262" r:id="Rb9fb15f0a42646c7"/>
-    <p:sldId xmlns:r="http://schemas.openxmlformats.org/officeDocument/2006/relationships" id="263" r:id="R8aa8334d5d864572"/>
-    <p:sldId xmlns:r="http://schemas.openxmlformats.org/officeDocument/2006/relationships" id="264" r:id="R7b7c552059f64007"/>
-    <p:sldId xmlns:r="http://schemas.openxmlformats.org/officeDocument/2006/relationships" id="265" r:id="Re12480b505c24f72"/>
-    <p:sldId xmlns:r="http://schemas.openxmlformats.org/officeDocument/2006/relationships" id="266" r:id="R8aac13fd05be4331"/>
-    <p:sldId xmlns:r="http://schemas.openxmlformats.org/officeDocument/2006/relationships" id="267" r:id="Rde8455fe5f814c61"/>
-    <p:sldId xmlns:r="http://schemas.openxmlformats.org/officeDocument/2006/relationships" id="268" r:id="R67711544fc154a50"/>
-    <p:sldId xmlns:r="http://schemas.openxmlformats.org/officeDocument/2006/relationships" id="269" r:id="Rfb6450fbba1d4c2a"/>
-    <p:sldId xmlns:r="http://schemas.openxmlformats.org/officeDocument/2006/relationships" id="270" r:id="R41d0f0615e6b4fa7"/>
-    <p:sldId xmlns:r="http://schemas.openxmlformats.org/officeDocument/2006/relationships" id="271" r:id="Rf775f735c7034712"/>
-    <p:sldId xmlns:r="http://schemas.openxmlformats.org/officeDocument/2006/relationships" id="272" r:id="R8151a4f4f3ca4fed"/>
-    <p:sldId xmlns:r="http://schemas.openxmlformats.org/officeDocument/2006/relationships" id="273" r:id="R51fed3a7319642f5"/>
-    <p:sldId xmlns:r="http://schemas.openxmlformats.org/officeDocument/2006/relationships" id="274" r:id="Ra6d2a73654a548a4"/>
-    <p:sldId xmlns:r="http://schemas.openxmlformats.org/officeDocument/2006/relationships" id="275" r:id="Ra394ba65e9304e85"/>
-    <p:sldId xmlns:r="http://schemas.openxmlformats.org/officeDocument/2006/relationships" id="276" r:id="R962fbe9229794304"/>
-    <p:sldId xmlns:r="http://schemas.openxmlformats.org/officeDocument/2006/relationships" id="277" r:id="R51aa217391e64253"/>
-    <p:sldId xmlns:r="http://schemas.openxmlformats.org/officeDocument/2006/relationships" id="278" r:id="R53630d97e41e4f27"/>
+    <p:sldId xmlns:r="http://schemas.openxmlformats.org/officeDocument/2006/relationships" id="256" r:id="Raf950ac80d6045eb"/>
+    <p:sldId xmlns:r="http://schemas.openxmlformats.org/officeDocument/2006/relationships" id="257" r:id="R743c2e1955a2406e"/>
+    <p:sldId xmlns:r="http://schemas.openxmlformats.org/officeDocument/2006/relationships" id="258" r:id="Rd91c9e62826f4456"/>
+    <p:sldId xmlns:r="http://schemas.openxmlformats.org/officeDocument/2006/relationships" id="259" r:id="R5c5af58dd20b4c3f"/>
+    <p:sldId xmlns:r="http://schemas.openxmlformats.org/officeDocument/2006/relationships" id="260" r:id="Rf3a001ae9eae491e"/>
+    <p:sldId xmlns:r="http://schemas.openxmlformats.org/officeDocument/2006/relationships" id="261" r:id="R802d22e11e7b4a95"/>
+    <p:sldId xmlns:r="http://schemas.openxmlformats.org/officeDocument/2006/relationships" id="262" r:id="R7daeb7077d854041"/>
+    <p:sldId xmlns:r="http://schemas.openxmlformats.org/officeDocument/2006/relationships" id="263" r:id="Reb7c16b5c2d645c9"/>
+    <p:sldId xmlns:r="http://schemas.openxmlformats.org/officeDocument/2006/relationships" id="264" r:id="R3662f7c50905420d"/>
+    <p:sldId xmlns:r="http://schemas.openxmlformats.org/officeDocument/2006/relationships" id="265" r:id="R08ef14c4ef154c9a"/>
+    <p:sldId xmlns:r="http://schemas.openxmlformats.org/officeDocument/2006/relationships" id="266" r:id="R58dc2e036a00445c"/>
+    <p:sldId xmlns:r="http://schemas.openxmlformats.org/officeDocument/2006/relationships" id="267" r:id="Ra09e18b5edbd4348"/>
+    <p:sldId xmlns:r="http://schemas.openxmlformats.org/officeDocument/2006/relationships" id="268" r:id="R15e13ff0e61c455f"/>
+    <p:sldId xmlns:r="http://schemas.openxmlformats.org/officeDocument/2006/relationships" id="269" r:id="R3586ecf25ebf4114"/>
+    <p:sldId xmlns:r="http://schemas.openxmlformats.org/officeDocument/2006/relationships" id="270" r:id="R753442f163074c02"/>
+    <p:sldId xmlns:r="http://schemas.openxmlformats.org/officeDocument/2006/relationships" id="271" r:id="R7637da7bea7e446e"/>
+    <p:sldId xmlns:r="http://schemas.openxmlformats.org/officeDocument/2006/relationships" id="272" r:id="Re04013194c6f4c90"/>
+    <p:sldId xmlns:r="http://schemas.openxmlformats.org/officeDocument/2006/relationships" id="273" r:id="R647533aba2544e72"/>
+    <p:sldId xmlns:r="http://schemas.openxmlformats.org/officeDocument/2006/relationships" id="274" r:id="R68955c33752141e8"/>
+    <p:sldId xmlns:r="http://schemas.openxmlformats.org/officeDocument/2006/relationships" id="275" r:id="R1063cf8f93954009"/>
+    <p:sldId xmlns:r="http://schemas.openxmlformats.org/officeDocument/2006/relationships" id="276" r:id="Rf480dd31bbc9445b"/>
+    <p:sldId xmlns:r="http://schemas.openxmlformats.org/officeDocument/2006/relationships" id="277" r:id="Rbb83113e246e4b8d"/>
+    <p:sldId xmlns:r="http://schemas.openxmlformats.org/officeDocument/2006/relationships" id="278" r:id="R6c00aa1f5b6f4c98"/>
+    <p:sldId xmlns:r="http://schemas.openxmlformats.org/officeDocument/2006/relationships" id="279" r:id="Rbbcae295eabc473a"/>
+    <p:sldId xmlns:r="http://schemas.openxmlformats.org/officeDocument/2006/relationships" id="280" r:id="R4fdd036733e3433a"/>
+    <p:sldId xmlns:r="http://schemas.openxmlformats.org/officeDocument/2006/relationships" id="281" r:id="R231a60c531684af2"/>
+    <p:sldId xmlns:r="http://schemas.openxmlformats.org/officeDocument/2006/relationships" id="282" r:id="R8d39e877a5894962"/>
+    <p:sldId xmlns:r="http://schemas.openxmlformats.org/officeDocument/2006/relationships" id="283" r:id="R1fbad01af49a41f3"/>
   </p:sldIdLst>
   <p:sldSz cx="12192000" cy="6858000"/>
   <p:notesSz cx="6858000" cy="9144000"/>
@@ -1575,6 +1580,336 @@
 </p:notes>
 </file>
 
+<file path=ppt/notesSlides/notesSlide24.xml><?xml version="1.0" encoding="utf-8"?>
+<p:notes xmlns:p="http://schemas.openxmlformats.org/presentationml/2006/main">
+  <p:cSld>
+    <p:spTree>
+      <p:nvGrpSpPr>
+        <p:cNvPr id="1" name=""/>
+        <p:cNvGrpSpPr/>
+        <p:nvPr/>
+      </p:nvGrpSpPr>
+      <p:grpSpPr>
+        <a:xfrm xmlns:a="http://schemas.openxmlformats.org/drawingml/2006/main"/>
+      </p:grpSpPr>
+      <p:sp>
+        <p:nvSpPr>
+          <p:cNvPr id="2" name="Slide Image Placeholder 1"/>
+          <p:cNvSpPr>
+            <a:spLocks xmlns:a="http://schemas.openxmlformats.org/drawingml/2006/main" noGrp="1"/>
+          </p:cNvSpPr>
+          <p:nvPr>
+            <p:ph type="sldImg" idx="0"/>
+          </p:nvPr>
+        </p:nvSpPr>
+        <p:spPr/>
+      </p:sp>
+      <p:sp>
+        <p:nvSpPr>
+          <p:cNvPr id="3" name="Notes Placeholder 2"/>
+          <p:cNvSpPr>
+            <a:spLocks xmlns:a="http://schemas.openxmlformats.org/drawingml/2006/main" noGrp="1"/>
+          </p:cNvSpPr>
+          <p:nvPr>
+            <p:ph type="body" idx="1"/>
+          </p:nvPr>
+        </p:nvSpPr>
+        <p:spPr/>
+        <p:txBody>
+          <a:bodyPr xmlns:a="http://schemas.openxmlformats.org/drawingml/2006/main"/>
+          <a:lstStyle xmlns:a="http://schemas.openxmlformats.org/drawingml/2006/main"/>
+          <a:p xmlns:a="http://schemas.openxmlformats.org/drawingml/2006/main"/>
+        </p:txBody>
+      </p:sp>
+      <p:sp>
+        <p:nvSpPr>
+          <p:cNvPr id="4" name="Slide Number Placeholder 3"/>
+          <p:cNvSpPr>
+            <a:spLocks xmlns:a="http://schemas.openxmlformats.org/drawingml/2006/main" noGrp="1"/>
+          </p:cNvSpPr>
+          <p:nvPr>
+            <p:ph type="sldNum" idx="5"/>
+          </p:nvPr>
+        </p:nvSpPr>
+        <p:spPr/>
+        <p:txBody>
+          <a:bodyPr xmlns:a="http://schemas.openxmlformats.org/drawingml/2006/main"/>
+          <a:lstStyle xmlns:a="http://schemas.openxmlformats.org/drawingml/2006/main"/>
+          <a:p xmlns:a="http://schemas.openxmlformats.org/drawingml/2006/main"/>
+        </p:txBody>
+      </p:sp>
+    </p:spTree>
+  </p:cSld>
+  <p:clrMapOvr>
+    <a:masterClrMapping xmlns:a="http://schemas.openxmlformats.org/drawingml/2006/main"/>
+  </p:clrMapOvr>
+</p:notes>
+</file>
+
+<file path=ppt/notesSlides/notesSlide25.xml><?xml version="1.0" encoding="utf-8"?>
+<p:notes xmlns:p="http://schemas.openxmlformats.org/presentationml/2006/main">
+  <p:cSld>
+    <p:spTree>
+      <p:nvGrpSpPr>
+        <p:cNvPr id="1" name=""/>
+        <p:cNvGrpSpPr/>
+        <p:nvPr/>
+      </p:nvGrpSpPr>
+      <p:grpSpPr>
+        <a:xfrm xmlns:a="http://schemas.openxmlformats.org/drawingml/2006/main"/>
+      </p:grpSpPr>
+      <p:sp>
+        <p:nvSpPr>
+          <p:cNvPr id="2" name="Slide Image Placeholder 1"/>
+          <p:cNvSpPr>
+            <a:spLocks xmlns:a="http://schemas.openxmlformats.org/drawingml/2006/main" noGrp="1"/>
+          </p:cNvSpPr>
+          <p:nvPr>
+            <p:ph type="sldImg" idx="0"/>
+          </p:nvPr>
+        </p:nvSpPr>
+        <p:spPr/>
+      </p:sp>
+      <p:sp>
+        <p:nvSpPr>
+          <p:cNvPr id="3" name="Notes Placeholder 2"/>
+          <p:cNvSpPr>
+            <a:spLocks xmlns:a="http://schemas.openxmlformats.org/drawingml/2006/main" noGrp="1"/>
+          </p:cNvSpPr>
+          <p:nvPr>
+            <p:ph type="body" idx="1"/>
+          </p:nvPr>
+        </p:nvSpPr>
+        <p:spPr/>
+        <p:txBody>
+          <a:bodyPr xmlns:a="http://schemas.openxmlformats.org/drawingml/2006/main"/>
+          <a:lstStyle xmlns:a="http://schemas.openxmlformats.org/drawingml/2006/main"/>
+          <a:p xmlns:a="http://schemas.openxmlformats.org/drawingml/2006/main"/>
+        </p:txBody>
+      </p:sp>
+      <p:sp>
+        <p:nvSpPr>
+          <p:cNvPr id="4" name="Slide Number Placeholder 3"/>
+          <p:cNvSpPr>
+            <a:spLocks xmlns:a="http://schemas.openxmlformats.org/drawingml/2006/main" noGrp="1"/>
+          </p:cNvSpPr>
+          <p:nvPr>
+            <p:ph type="sldNum" idx="5"/>
+          </p:nvPr>
+        </p:nvSpPr>
+        <p:spPr/>
+        <p:txBody>
+          <a:bodyPr xmlns:a="http://schemas.openxmlformats.org/drawingml/2006/main"/>
+          <a:lstStyle xmlns:a="http://schemas.openxmlformats.org/drawingml/2006/main"/>
+          <a:p xmlns:a="http://schemas.openxmlformats.org/drawingml/2006/main"/>
+        </p:txBody>
+      </p:sp>
+    </p:spTree>
+  </p:cSld>
+  <p:clrMapOvr>
+    <a:masterClrMapping xmlns:a="http://schemas.openxmlformats.org/drawingml/2006/main"/>
+  </p:clrMapOvr>
+</p:notes>
+</file>
+
+<file path=ppt/notesSlides/notesSlide26.xml><?xml version="1.0" encoding="utf-8"?>
+<p:notes xmlns:p="http://schemas.openxmlformats.org/presentationml/2006/main">
+  <p:cSld>
+    <p:spTree>
+      <p:nvGrpSpPr>
+        <p:cNvPr id="1" name=""/>
+        <p:cNvGrpSpPr/>
+        <p:nvPr/>
+      </p:nvGrpSpPr>
+      <p:grpSpPr>
+        <a:xfrm xmlns:a="http://schemas.openxmlformats.org/drawingml/2006/main"/>
+      </p:grpSpPr>
+      <p:sp>
+        <p:nvSpPr>
+          <p:cNvPr id="2" name="Slide Image Placeholder 1"/>
+          <p:cNvSpPr>
+            <a:spLocks xmlns:a="http://schemas.openxmlformats.org/drawingml/2006/main" noGrp="1"/>
+          </p:cNvSpPr>
+          <p:nvPr>
+            <p:ph type="sldImg" idx="0"/>
+          </p:nvPr>
+        </p:nvSpPr>
+        <p:spPr/>
+      </p:sp>
+      <p:sp>
+        <p:nvSpPr>
+          <p:cNvPr id="3" name="Notes Placeholder 2"/>
+          <p:cNvSpPr>
+            <a:spLocks xmlns:a="http://schemas.openxmlformats.org/drawingml/2006/main" noGrp="1"/>
+          </p:cNvSpPr>
+          <p:nvPr>
+            <p:ph type="body" idx="1"/>
+          </p:nvPr>
+        </p:nvSpPr>
+        <p:spPr/>
+        <p:txBody>
+          <a:bodyPr xmlns:a="http://schemas.openxmlformats.org/drawingml/2006/main"/>
+          <a:lstStyle xmlns:a="http://schemas.openxmlformats.org/drawingml/2006/main"/>
+          <a:p xmlns:a="http://schemas.openxmlformats.org/drawingml/2006/main"/>
+        </p:txBody>
+      </p:sp>
+      <p:sp>
+        <p:nvSpPr>
+          <p:cNvPr id="4" name="Slide Number Placeholder 3"/>
+          <p:cNvSpPr>
+            <a:spLocks xmlns:a="http://schemas.openxmlformats.org/drawingml/2006/main" noGrp="1"/>
+          </p:cNvSpPr>
+          <p:nvPr>
+            <p:ph type="sldNum" idx="5"/>
+          </p:nvPr>
+        </p:nvSpPr>
+        <p:spPr/>
+        <p:txBody>
+          <a:bodyPr xmlns:a="http://schemas.openxmlformats.org/drawingml/2006/main"/>
+          <a:lstStyle xmlns:a="http://schemas.openxmlformats.org/drawingml/2006/main"/>
+          <a:p xmlns:a="http://schemas.openxmlformats.org/drawingml/2006/main"/>
+        </p:txBody>
+      </p:sp>
+    </p:spTree>
+  </p:cSld>
+  <p:clrMapOvr>
+    <a:masterClrMapping xmlns:a="http://schemas.openxmlformats.org/drawingml/2006/main"/>
+  </p:clrMapOvr>
+</p:notes>
+</file>
+
+<file path=ppt/notesSlides/notesSlide27.xml><?xml version="1.0" encoding="utf-8"?>
+<p:notes xmlns:p="http://schemas.openxmlformats.org/presentationml/2006/main">
+  <p:cSld>
+    <p:spTree>
+      <p:nvGrpSpPr>
+        <p:cNvPr id="1" name=""/>
+        <p:cNvGrpSpPr/>
+        <p:nvPr/>
+      </p:nvGrpSpPr>
+      <p:grpSpPr>
+        <a:xfrm xmlns:a="http://schemas.openxmlformats.org/drawingml/2006/main"/>
+      </p:grpSpPr>
+      <p:sp>
+        <p:nvSpPr>
+          <p:cNvPr id="2" name="Slide Image Placeholder 1"/>
+          <p:cNvSpPr>
+            <a:spLocks xmlns:a="http://schemas.openxmlformats.org/drawingml/2006/main" noGrp="1"/>
+          </p:cNvSpPr>
+          <p:nvPr>
+            <p:ph type="sldImg" idx="0"/>
+          </p:nvPr>
+        </p:nvSpPr>
+        <p:spPr/>
+      </p:sp>
+      <p:sp>
+        <p:nvSpPr>
+          <p:cNvPr id="3" name="Notes Placeholder 2"/>
+          <p:cNvSpPr>
+            <a:spLocks xmlns:a="http://schemas.openxmlformats.org/drawingml/2006/main" noGrp="1"/>
+          </p:cNvSpPr>
+          <p:nvPr>
+            <p:ph type="body" idx="1"/>
+          </p:nvPr>
+        </p:nvSpPr>
+        <p:spPr/>
+        <p:txBody>
+          <a:bodyPr xmlns:a="http://schemas.openxmlformats.org/drawingml/2006/main"/>
+          <a:lstStyle xmlns:a="http://schemas.openxmlformats.org/drawingml/2006/main"/>
+          <a:p xmlns:a="http://schemas.openxmlformats.org/drawingml/2006/main"/>
+        </p:txBody>
+      </p:sp>
+      <p:sp>
+        <p:nvSpPr>
+          <p:cNvPr id="4" name="Slide Number Placeholder 3"/>
+          <p:cNvSpPr>
+            <a:spLocks xmlns:a="http://schemas.openxmlformats.org/drawingml/2006/main" noGrp="1"/>
+          </p:cNvSpPr>
+          <p:nvPr>
+            <p:ph type="sldNum" idx="5"/>
+          </p:nvPr>
+        </p:nvSpPr>
+        <p:spPr/>
+        <p:txBody>
+          <a:bodyPr xmlns:a="http://schemas.openxmlformats.org/drawingml/2006/main"/>
+          <a:lstStyle xmlns:a="http://schemas.openxmlformats.org/drawingml/2006/main"/>
+          <a:p xmlns:a="http://schemas.openxmlformats.org/drawingml/2006/main"/>
+        </p:txBody>
+      </p:sp>
+    </p:spTree>
+  </p:cSld>
+  <p:clrMapOvr>
+    <a:masterClrMapping xmlns:a="http://schemas.openxmlformats.org/drawingml/2006/main"/>
+  </p:clrMapOvr>
+</p:notes>
+</file>
+
+<file path=ppt/notesSlides/notesSlide28.xml><?xml version="1.0" encoding="utf-8"?>
+<p:notes xmlns:p="http://schemas.openxmlformats.org/presentationml/2006/main">
+  <p:cSld>
+    <p:spTree>
+      <p:nvGrpSpPr>
+        <p:cNvPr id="1" name=""/>
+        <p:cNvGrpSpPr/>
+        <p:nvPr/>
+      </p:nvGrpSpPr>
+      <p:grpSpPr>
+        <a:xfrm xmlns:a="http://schemas.openxmlformats.org/drawingml/2006/main"/>
+      </p:grpSpPr>
+      <p:sp>
+        <p:nvSpPr>
+          <p:cNvPr id="2" name="Slide Image Placeholder 1"/>
+          <p:cNvSpPr>
+            <a:spLocks xmlns:a="http://schemas.openxmlformats.org/drawingml/2006/main" noGrp="1"/>
+          </p:cNvSpPr>
+          <p:nvPr>
+            <p:ph type="sldImg" idx="0"/>
+          </p:nvPr>
+        </p:nvSpPr>
+        <p:spPr/>
+      </p:sp>
+      <p:sp>
+        <p:nvSpPr>
+          <p:cNvPr id="3" name="Notes Placeholder 2"/>
+          <p:cNvSpPr>
+            <a:spLocks xmlns:a="http://schemas.openxmlformats.org/drawingml/2006/main" noGrp="1"/>
+          </p:cNvSpPr>
+          <p:nvPr>
+            <p:ph type="body" idx="1"/>
+          </p:nvPr>
+        </p:nvSpPr>
+        <p:spPr/>
+        <p:txBody>
+          <a:bodyPr xmlns:a="http://schemas.openxmlformats.org/drawingml/2006/main"/>
+          <a:lstStyle xmlns:a="http://schemas.openxmlformats.org/drawingml/2006/main"/>
+          <a:p xmlns:a="http://schemas.openxmlformats.org/drawingml/2006/main"/>
+        </p:txBody>
+      </p:sp>
+      <p:sp>
+        <p:nvSpPr>
+          <p:cNvPr id="4" name="Slide Number Placeholder 3"/>
+          <p:cNvSpPr>
+            <a:spLocks xmlns:a="http://schemas.openxmlformats.org/drawingml/2006/main" noGrp="1"/>
+          </p:cNvSpPr>
+          <p:nvPr>
+            <p:ph type="sldNum" idx="5"/>
+          </p:nvPr>
+        </p:nvSpPr>
+        <p:spPr/>
+        <p:txBody>
+          <a:bodyPr xmlns:a="http://schemas.openxmlformats.org/drawingml/2006/main"/>
+          <a:lstStyle xmlns:a="http://schemas.openxmlformats.org/drawingml/2006/main"/>
+          <a:p xmlns:a="http://schemas.openxmlformats.org/drawingml/2006/main"/>
+        </p:txBody>
+      </p:sp>
+    </p:spTree>
+  </p:cSld>
+  <p:clrMapOvr>
+    <a:masterClrMapping xmlns:a="http://schemas.openxmlformats.org/drawingml/2006/main"/>
+  </p:clrMapOvr>
+</p:notes>
+</file>
+
 <file path=ppt/notesSlides/notesSlide3.xml><?xml version="1.0" encoding="utf-8"?>
 <p:notes xmlns:p="http://schemas.openxmlformats.org/presentationml/2006/main">
   <p:cSld>
@@ -2075,7 +2410,7 @@
   </p:cSld>
   <p:clrMap bg1="lt1" tx1="dk1" bg2="lt2" tx2="dk2" accent1="accent1" accent2="accent2" accent3="accent3" accent4="accent4" accent5="accent5" accent6="accent6" hlink="hlink" folHlink="folHlink"/>
   <p:sldLayoutIdLst>
-    <p:sldLayoutId xmlns:r="http://schemas.openxmlformats.org/officeDocument/2006/relationships" id="2147483649" r:id="Re940d0972a354b1b"/>
+    <p:sldLayoutId xmlns:r="http://schemas.openxmlformats.org/officeDocument/2006/relationships" id="2147483649" r:id="R5fb20ba6b7f84734"/>
   </p:sldLayoutIdLst>
   <p:txStyles>
     <p:titleStyle>
@@ -2626,7 +2961,7 @@
           <p:cNvPr id="1" name="">
             <a:extLst xmlns:a="http://schemas.openxmlformats.org/drawingml/2006/main">
               <a:ext uri="{FF2B5EF4-FFF2-40B4-BE49-F238E27FC236}">
-                <a16:creationId xmlns:a16="http://schemas.microsoft.com/office/drawing/2014/main" id="{59BB3E52-9162-40E8-AE58-C6DEA8BB3053}"/>
+                <a16:creationId xmlns:a16="http://schemas.microsoft.com/office/drawing/2014/main" id="{375BA8F1-83BA-4433-A27D-A7FF11F05AE6}"/>
               </a:ext>
             </a:extLst>
           </p:cNvPr>
@@ -2676,7 +3011,7 @@
           <p:cNvPr id="2" name="">
             <a:extLst xmlns:a="http://schemas.openxmlformats.org/drawingml/2006/main">
               <a:ext uri="{FF2B5EF4-FFF2-40B4-BE49-F238E27FC236}">
-                <a16:creationId xmlns:a16="http://schemas.microsoft.com/office/drawing/2014/main" id="{38976D15-4D07-43E2-92B1-48D91A5B7404}"/>
+                <a16:creationId xmlns:a16="http://schemas.microsoft.com/office/drawing/2014/main" id="{031F30FA-D0BF-4B91-8FE0-1D1339BA3CBD}"/>
               </a:ext>
             </a:extLst>
           </p:cNvPr>
@@ -2726,7 +3061,7 @@
           <p:cNvPr id="3" name="">
             <a:extLst xmlns:a="http://schemas.openxmlformats.org/drawingml/2006/main">
               <a:ext uri="{FF2B5EF4-FFF2-40B4-BE49-F238E27FC236}">
-                <a16:creationId xmlns:a16="http://schemas.microsoft.com/office/drawing/2014/main" id="{0D7755E5-19CD-49ED-AC67-B73AECF8A498}"/>
+                <a16:creationId xmlns:a16="http://schemas.microsoft.com/office/drawing/2014/main" id="{E6B33008-2EA1-4F97-81B1-B3FD24339DE5}"/>
               </a:ext>
             </a:extLst>
           </p:cNvPr>
@@ -2776,7 +3111,7 @@
           <p:cNvPr id="4" name="">
             <a:extLst xmlns:a="http://schemas.openxmlformats.org/drawingml/2006/main">
               <a:ext uri="{FF2B5EF4-FFF2-40B4-BE49-F238E27FC236}">
-                <a16:creationId xmlns:a16="http://schemas.microsoft.com/office/drawing/2014/main" id="{6160136D-5195-45F5-A72D-CCF9B768D391}"/>
+                <a16:creationId xmlns:a16="http://schemas.microsoft.com/office/drawing/2014/main" id="{C34B17EA-A020-498F-A22C-E2BA8F35C21C}"/>
               </a:ext>
             </a:extLst>
           </p:cNvPr>
@@ -2807,7 +3142,7 @@
           <p:cNvPr id="5" name="">
             <a:extLst xmlns:a="http://schemas.openxmlformats.org/drawingml/2006/main">
               <a:ext uri="{FF2B5EF4-FFF2-40B4-BE49-F238E27FC236}">
-                <a16:creationId xmlns:a16="http://schemas.microsoft.com/office/drawing/2014/main" id="{AFC51EA1-60C4-4523-9A9F-610C30AD4EF4}"/>
+                <a16:creationId xmlns:a16="http://schemas.microsoft.com/office/drawing/2014/main" id="{58ED9401-5425-4F85-B769-B52ACAD8C3AC}"/>
               </a:ext>
             </a:extLst>
           </p:cNvPr>
@@ -2857,7 +3192,7 @@
           <p:cNvPr id="6" name="">
             <a:extLst xmlns:a="http://schemas.openxmlformats.org/drawingml/2006/main">
               <a:ext uri="{FF2B5EF4-FFF2-40B4-BE49-F238E27FC236}">
-                <a16:creationId xmlns:a16="http://schemas.microsoft.com/office/drawing/2014/main" id="{2640BD6F-79DD-491F-B873-3E51361F9D97}"/>
+                <a16:creationId xmlns:a16="http://schemas.microsoft.com/office/drawing/2014/main" id="{54691BDA-CB25-4517-BCD2-9D44AD70514F}"/>
               </a:ext>
             </a:extLst>
           </p:cNvPr>
@@ -2888,7 +3223,7 @@
           <p:cNvPr id="7" name="">
             <a:extLst xmlns:a="http://schemas.openxmlformats.org/drawingml/2006/main">
               <a:ext uri="{FF2B5EF4-FFF2-40B4-BE49-F238E27FC236}">
-                <a16:creationId xmlns:a16="http://schemas.microsoft.com/office/drawing/2014/main" id="{DAB0027C-26D8-40BA-A3DB-ABC4E2A986DC}"/>
+                <a16:creationId xmlns:a16="http://schemas.microsoft.com/office/drawing/2014/main" id="{7D05D8BB-2DE2-4155-A311-D94DF0A140BD}"/>
               </a:ext>
             </a:extLst>
           </p:cNvPr>
@@ -2938,7 +3273,7 @@
           <p:cNvPr id="8" name="">
             <a:extLst xmlns:a="http://schemas.openxmlformats.org/drawingml/2006/main">
               <a:ext uri="{FF2B5EF4-FFF2-40B4-BE49-F238E27FC236}">
-                <a16:creationId xmlns:a16="http://schemas.microsoft.com/office/drawing/2014/main" id="{5E7BEF9E-8944-423C-968B-58A9006D79F1}"/>
+                <a16:creationId xmlns:a16="http://schemas.microsoft.com/office/drawing/2014/main" id="{09323640-925F-4B49-9C3D-2040416A2F09}"/>
               </a:ext>
             </a:extLst>
           </p:cNvPr>
@@ -3020,7 +3355,7 @@
     </p:spTree>
     <p:extLst>
       <p:ext uri="{BB962C8B-B14F-4D97-AF65-F5344CB8AC3E}">
-        <p14:creationId xmlns:p14="http://schemas.microsoft.com/office/powerpoint/2010/main" val="1689252231"/>
+        <p14:creationId xmlns:p14="http://schemas.microsoft.com/office/powerpoint/2010/main" val="1289969961"/>
       </p:ext>
     </p:extLst>
   </p:cSld>
@@ -3051,7 +3386,7 @@
           <p:cNvPr id="1" name="">
             <a:extLst xmlns:a="http://schemas.openxmlformats.org/drawingml/2006/main">
               <a:ext uri="{FF2B5EF4-FFF2-40B4-BE49-F238E27FC236}">
-                <a16:creationId xmlns:a16="http://schemas.microsoft.com/office/drawing/2014/main" id="{7385A021-9C60-4029-AA59-CEA877CB382E}"/>
+                <a16:creationId xmlns:a16="http://schemas.microsoft.com/office/drawing/2014/main" id="{F6FEC922-09A7-4DAB-83AE-8035DA85FE2B}"/>
               </a:ext>
             </a:extLst>
           </p:cNvPr>
@@ -3101,7 +3436,7 @@
           <p:cNvPr id="2" name="">
             <a:extLst xmlns:a="http://schemas.openxmlformats.org/drawingml/2006/main">
               <a:ext uri="{FF2B5EF4-FFF2-40B4-BE49-F238E27FC236}">
-                <a16:creationId xmlns:a16="http://schemas.microsoft.com/office/drawing/2014/main" id="{BF64F2CB-0818-483E-80D8-A4963800CD29}"/>
+                <a16:creationId xmlns:a16="http://schemas.microsoft.com/office/drawing/2014/main" id="{99AAA046-E15F-48F9-91A0-03DA7715D03F}"/>
               </a:ext>
             </a:extLst>
           </p:cNvPr>
@@ -3151,7 +3486,7 @@
           <p:cNvPr id="3" name="">
             <a:extLst xmlns:a="http://schemas.openxmlformats.org/drawingml/2006/main">
               <a:ext uri="{FF2B5EF4-FFF2-40B4-BE49-F238E27FC236}">
-                <a16:creationId xmlns:a16="http://schemas.microsoft.com/office/drawing/2014/main" id="{45A51AFB-8D32-4984-A2A4-E245F6222A52}"/>
+                <a16:creationId xmlns:a16="http://schemas.microsoft.com/office/drawing/2014/main" id="{35C305EB-2DD8-4D8C-9593-332567A977C3}"/>
               </a:ext>
             </a:extLst>
           </p:cNvPr>
@@ -3182,7 +3517,7 @@
           <p:cNvPr id="4" name="">
             <a:extLst xmlns:a="http://schemas.openxmlformats.org/drawingml/2006/main">
               <a:ext uri="{FF2B5EF4-FFF2-40B4-BE49-F238E27FC236}">
-                <a16:creationId xmlns:a16="http://schemas.microsoft.com/office/drawing/2014/main" id="{82FEA1D7-D43E-4826-BC85-571A3E78AC3C}"/>
+                <a16:creationId xmlns:a16="http://schemas.microsoft.com/office/drawing/2014/main" id="{5E8C827F-9003-4C60-B9F2-D695FA2D272E}"/>
               </a:ext>
             </a:extLst>
           </p:cNvPr>
@@ -3232,7 +3567,7 @@
           <p:cNvPr id="5" name="">
             <a:extLst xmlns:a="http://schemas.openxmlformats.org/drawingml/2006/main">
               <a:ext uri="{FF2B5EF4-FFF2-40B4-BE49-F238E27FC236}">
-                <a16:creationId xmlns:a16="http://schemas.microsoft.com/office/drawing/2014/main" id="{2D323D4A-DFCA-42B2-BC89-449A4DCF46CB}"/>
+                <a16:creationId xmlns:a16="http://schemas.microsoft.com/office/drawing/2014/main" id="{17B33211-3454-4410-A819-9BA6A60ADA0C}"/>
               </a:ext>
             </a:extLst>
           </p:cNvPr>
@@ -3282,7 +3617,7 @@
           <p:cNvPr id="6" name="">
             <a:extLst xmlns:a="http://schemas.openxmlformats.org/drawingml/2006/main">
               <a:ext uri="{FF2B5EF4-FFF2-40B4-BE49-F238E27FC236}">
-                <a16:creationId xmlns:a16="http://schemas.microsoft.com/office/drawing/2014/main" id="{144591CE-BF27-447B-AC11-0F77CCF6D3FA}"/>
+                <a16:creationId xmlns:a16="http://schemas.microsoft.com/office/drawing/2014/main" id="{A4909803-690E-4937-9EBC-2962DDFB9A7C}"/>
               </a:ext>
             </a:extLst>
           </p:cNvPr>
@@ -3332,7 +3667,7 @@
           <p:cNvPr id="7" name="">
             <a:extLst xmlns:a="http://schemas.openxmlformats.org/drawingml/2006/main">
               <a:ext uri="{FF2B5EF4-FFF2-40B4-BE49-F238E27FC236}">
-                <a16:creationId xmlns:a16="http://schemas.microsoft.com/office/drawing/2014/main" id="{2FE2F7B3-6722-46C6-AE1D-6D55784A5D40}"/>
+                <a16:creationId xmlns:a16="http://schemas.microsoft.com/office/drawing/2014/main" id="{08FBBD49-6B6F-408A-A7E1-8E17D1B700EE}"/>
               </a:ext>
             </a:extLst>
           </p:cNvPr>
@@ -3382,7 +3717,7 @@
           <p:cNvPr id="8" name="">
             <a:extLst xmlns:a="http://schemas.openxmlformats.org/drawingml/2006/main">
               <a:ext uri="{FF2B5EF4-FFF2-40B4-BE49-F238E27FC236}">
-                <a16:creationId xmlns:a16="http://schemas.microsoft.com/office/drawing/2014/main" id="{88B88587-6F76-4CAC-9028-F1F4AEBC0797}"/>
+                <a16:creationId xmlns:a16="http://schemas.microsoft.com/office/drawing/2014/main" id="{57441C91-BA69-4502-8DAD-2AD952ACBDDB}"/>
               </a:ext>
             </a:extLst>
           </p:cNvPr>
@@ -3432,7 +3767,7 @@
           <p:cNvPr id="9" name="">
             <a:extLst xmlns:a="http://schemas.openxmlformats.org/drawingml/2006/main">
               <a:ext uri="{FF2B5EF4-FFF2-40B4-BE49-F238E27FC236}">
-                <a16:creationId xmlns:a16="http://schemas.microsoft.com/office/drawing/2014/main" id="{81188256-06B7-4159-A280-42578B36C10C}"/>
+                <a16:creationId xmlns:a16="http://schemas.microsoft.com/office/drawing/2014/main" id="{5955BF1E-0BEA-4C75-BEBA-AD5DA197B67B}"/>
               </a:ext>
             </a:extLst>
           </p:cNvPr>
@@ -3482,7 +3817,7 @@
           <p:cNvPr id="10" name="">
             <a:extLst xmlns:a="http://schemas.openxmlformats.org/drawingml/2006/main">
               <a:ext uri="{FF2B5EF4-FFF2-40B4-BE49-F238E27FC236}">
-                <a16:creationId xmlns:a16="http://schemas.microsoft.com/office/drawing/2014/main" id="{2A4309AB-94AB-408F-8D68-4ED044358569}"/>
+                <a16:creationId xmlns:a16="http://schemas.microsoft.com/office/drawing/2014/main" id="{7E0C3A5C-4F4D-47C6-A371-D7B0B4930207}"/>
               </a:ext>
             </a:extLst>
           </p:cNvPr>
@@ -3532,7 +3867,7 @@
           <p:cNvPr id="11" name="">
             <a:extLst xmlns:a="http://schemas.openxmlformats.org/drawingml/2006/main">
               <a:ext uri="{FF2B5EF4-FFF2-40B4-BE49-F238E27FC236}">
-                <a16:creationId xmlns:a16="http://schemas.microsoft.com/office/drawing/2014/main" id="{0FFD3B68-D515-4FBD-9976-4D07F45CE8B8}"/>
+                <a16:creationId xmlns:a16="http://schemas.microsoft.com/office/drawing/2014/main" id="{24E7E280-F366-40CB-B19E-3308052AE85A}"/>
               </a:ext>
             </a:extLst>
           </p:cNvPr>
@@ -3582,7 +3917,7 @@
           <p:cNvPr id="12" name="">
             <a:extLst xmlns:a="http://schemas.openxmlformats.org/drawingml/2006/main">
               <a:ext uri="{FF2B5EF4-FFF2-40B4-BE49-F238E27FC236}">
-                <a16:creationId xmlns:a16="http://schemas.microsoft.com/office/drawing/2014/main" id="{9C4A2045-944D-47CC-8EB4-01F168C63C4F}"/>
+                <a16:creationId xmlns:a16="http://schemas.microsoft.com/office/drawing/2014/main" id="{555BDD9D-C198-4642-B8D4-9A8EB068167B}"/>
               </a:ext>
             </a:extLst>
           </p:cNvPr>
@@ -3632,7 +3967,7 @@
           <p:cNvPr id="13" name="">
             <a:extLst xmlns:a="http://schemas.openxmlformats.org/drawingml/2006/main">
               <a:ext uri="{FF2B5EF4-FFF2-40B4-BE49-F238E27FC236}">
-                <a16:creationId xmlns:a16="http://schemas.microsoft.com/office/drawing/2014/main" id="{0E23F1EB-F0A8-43A0-9AB8-C6036008466F}"/>
+                <a16:creationId xmlns:a16="http://schemas.microsoft.com/office/drawing/2014/main" id="{2E4CF4A6-4D7A-4A79-8A7A-5A0C0BB4D702}"/>
               </a:ext>
             </a:extLst>
           </p:cNvPr>
@@ -3665,7 +4000,7 @@
           <p:cNvPr id="14" name="">
             <a:extLst xmlns:a="http://schemas.openxmlformats.org/drawingml/2006/main">
               <a:ext uri="{FF2B5EF4-FFF2-40B4-BE49-F238E27FC236}">
-                <a16:creationId xmlns:a16="http://schemas.microsoft.com/office/drawing/2014/main" id="{C8004F40-7D42-4AB6-8C8D-5CDF4F0857A5}"/>
+                <a16:creationId xmlns:a16="http://schemas.microsoft.com/office/drawing/2014/main" id="{7969C4DB-125C-4353-9F18-7C3BDB539534}"/>
               </a:ext>
             </a:extLst>
           </p:cNvPr>
@@ -3715,7 +4050,7 @@
           <p:cNvPr id="15" name="">
             <a:extLst xmlns:a="http://schemas.openxmlformats.org/drawingml/2006/main">
               <a:ext uri="{FF2B5EF4-FFF2-40B4-BE49-F238E27FC236}">
-                <a16:creationId xmlns:a16="http://schemas.microsoft.com/office/drawing/2014/main" id="{EFC7893A-A3EA-4063-BCF9-7264573C62A5}"/>
+                <a16:creationId xmlns:a16="http://schemas.microsoft.com/office/drawing/2014/main" id="{554AF9F1-E73D-4487-8F72-E84A334B7C67}"/>
               </a:ext>
             </a:extLst>
           </p:cNvPr>
@@ -3763,7 +4098,7 @@
     </p:spTree>
     <p:extLst>
       <p:ext uri="{BB962C8B-B14F-4D97-AF65-F5344CB8AC3E}">
-        <p14:creationId xmlns:p14="http://schemas.microsoft.com/office/powerpoint/2010/main" val="400742922"/>
+        <p14:creationId xmlns:p14="http://schemas.microsoft.com/office/powerpoint/2010/main" val="2076303701"/>
       </p:ext>
     </p:extLst>
   </p:cSld>
@@ -3794,7 +4129,7 @@
           <p:cNvPr id="1" name="">
             <a:extLst xmlns:a="http://schemas.openxmlformats.org/drawingml/2006/main">
               <a:ext uri="{FF2B5EF4-FFF2-40B4-BE49-F238E27FC236}">
-                <a16:creationId xmlns:a16="http://schemas.microsoft.com/office/drawing/2014/main" id="{4211F84F-FA20-4763-9A66-4EAA48070BD8}"/>
+                <a16:creationId xmlns:a16="http://schemas.microsoft.com/office/drawing/2014/main" id="{79C1DC97-86D1-4701-B46B-70033E7CD485}"/>
               </a:ext>
             </a:extLst>
           </p:cNvPr>
@@ -3844,7 +4179,7 @@
           <p:cNvPr id="2" name="">
             <a:extLst xmlns:a="http://schemas.openxmlformats.org/drawingml/2006/main">
               <a:ext uri="{FF2B5EF4-FFF2-40B4-BE49-F238E27FC236}">
-                <a16:creationId xmlns:a16="http://schemas.microsoft.com/office/drawing/2014/main" id="{92432B98-F985-4CD7-97B7-C36E70664DC3}"/>
+                <a16:creationId xmlns:a16="http://schemas.microsoft.com/office/drawing/2014/main" id="{E05FDA1C-5196-4E79-A947-9BE31EB532AE}"/>
               </a:ext>
             </a:extLst>
           </p:cNvPr>
@@ -3894,7 +4229,7 @@
           <p:cNvPr id="3" name="">
             <a:extLst xmlns:a="http://schemas.openxmlformats.org/drawingml/2006/main">
               <a:ext uri="{FF2B5EF4-FFF2-40B4-BE49-F238E27FC236}">
-                <a16:creationId xmlns:a16="http://schemas.microsoft.com/office/drawing/2014/main" id="{ED203186-2BAD-4ED9-A00D-CD2C82C612C7}"/>
+                <a16:creationId xmlns:a16="http://schemas.microsoft.com/office/drawing/2014/main" id="{634DBC1F-2C9A-4601-AC59-529A139AF22D}"/>
               </a:ext>
             </a:extLst>
           </p:cNvPr>
@@ -3925,7 +4260,7 @@
           <p:cNvPr id="4" name="">
             <a:extLst xmlns:a="http://schemas.openxmlformats.org/drawingml/2006/main">
               <a:ext uri="{FF2B5EF4-FFF2-40B4-BE49-F238E27FC236}">
-                <a16:creationId xmlns:a16="http://schemas.microsoft.com/office/drawing/2014/main" id="{3ACE3083-E3CC-4ACF-9B57-6F47F2FD7DCC}"/>
+                <a16:creationId xmlns:a16="http://schemas.microsoft.com/office/drawing/2014/main" id="{73DAC413-5C9E-42D4-806B-3D41B40DE6FA}"/>
               </a:ext>
             </a:extLst>
           </p:cNvPr>
@@ -3975,7 +4310,7 @@
           <p:cNvPr id="5" name="">
             <a:extLst xmlns:a="http://schemas.openxmlformats.org/drawingml/2006/main">
               <a:ext uri="{FF2B5EF4-FFF2-40B4-BE49-F238E27FC236}">
-                <a16:creationId xmlns:a16="http://schemas.microsoft.com/office/drawing/2014/main" id="{8289A70F-51F6-4E4E-ACE5-3491869587C3}"/>
+                <a16:creationId xmlns:a16="http://schemas.microsoft.com/office/drawing/2014/main" id="{65F270D3-E5FB-4004-B15D-3936BACAE6E9}"/>
               </a:ext>
             </a:extLst>
           </p:cNvPr>
@@ -4006,7 +4341,7 @@
           <p:cNvPr id="6" name="">
             <a:extLst xmlns:a="http://schemas.openxmlformats.org/drawingml/2006/main">
               <a:ext uri="{FF2B5EF4-FFF2-40B4-BE49-F238E27FC236}">
-                <a16:creationId xmlns:a16="http://schemas.microsoft.com/office/drawing/2014/main" id="{6472C047-305F-4CD7-943E-CF04FD1AA1D6}"/>
+                <a16:creationId xmlns:a16="http://schemas.microsoft.com/office/drawing/2014/main" id="{4DAF1990-8671-489E-9B4E-BACC9CD3FFB8}"/>
               </a:ext>
             </a:extLst>
           </p:cNvPr>
@@ -4056,7 +4391,7 @@
           <p:cNvPr id="7" name="">
             <a:extLst xmlns:a="http://schemas.openxmlformats.org/drawingml/2006/main">
               <a:ext uri="{FF2B5EF4-FFF2-40B4-BE49-F238E27FC236}">
-                <a16:creationId xmlns:a16="http://schemas.microsoft.com/office/drawing/2014/main" id="{EABEA74D-9CF9-4CCE-9A12-6DCE038D844D}"/>
+                <a16:creationId xmlns:a16="http://schemas.microsoft.com/office/drawing/2014/main" id="{7D6B4E2B-47F4-46B8-AEC5-F9BD35201675}"/>
               </a:ext>
             </a:extLst>
           </p:cNvPr>
@@ -4104,7 +4439,7 @@
     </p:spTree>
     <p:extLst>
       <p:ext uri="{BB962C8B-B14F-4D97-AF65-F5344CB8AC3E}">
-        <p14:creationId xmlns:p14="http://schemas.microsoft.com/office/powerpoint/2010/main" val="459008695"/>
+        <p14:creationId xmlns:p14="http://schemas.microsoft.com/office/powerpoint/2010/main" val="277598795"/>
       </p:ext>
     </p:extLst>
   </p:cSld>
@@ -4135,7 +4470,7 @@
           <p:cNvPr id="1" name="">
             <a:extLst xmlns:a="http://schemas.openxmlformats.org/drawingml/2006/main">
               <a:ext uri="{FF2B5EF4-FFF2-40B4-BE49-F238E27FC236}">
-                <a16:creationId xmlns:a16="http://schemas.microsoft.com/office/drawing/2014/main" id="{18326ED2-0C5D-44BF-9032-3741CAF5737A}"/>
+                <a16:creationId xmlns:a16="http://schemas.microsoft.com/office/drawing/2014/main" id="{B661EB0C-8364-4434-8B5C-98E968FB0266}"/>
               </a:ext>
             </a:extLst>
           </p:cNvPr>
@@ -4185,7 +4520,7 @@
           <p:cNvPr id="2" name="">
             <a:extLst xmlns:a="http://schemas.openxmlformats.org/drawingml/2006/main">
               <a:ext uri="{FF2B5EF4-FFF2-40B4-BE49-F238E27FC236}">
-                <a16:creationId xmlns:a16="http://schemas.microsoft.com/office/drawing/2014/main" id="{020CBFED-5DE1-438D-A2AB-1B5428D39152}"/>
+                <a16:creationId xmlns:a16="http://schemas.microsoft.com/office/drawing/2014/main" id="{FD363B35-F425-4023-ABB1-4C638DD0BF26}"/>
               </a:ext>
             </a:extLst>
           </p:cNvPr>
@@ -4235,7 +4570,7 @@
           <p:cNvPr id="3" name="">
             <a:extLst xmlns:a="http://schemas.openxmlformats.org/drawingml/2006/main">
               <a:ext uri="{FF2B5EF4-FFF2-40B4-BE49-F238E27FC236}">
-                <a16:creationId xmlns:a16="http://schemas.microsoft.com/office/drawing/2014/main" id="{EC9AD9DB-BA18-4907-862E-69CA40ACB85D}"/>
+                <a16:creationId xmlns:a16="http://schemas.microsoft.com/office/drawing/2014/main" id="{EB7BA89A-E07D-455D-81CE-602734FF8A26}"/>
               </a:ext>
             </a:extLst>
           </p:cNvPr>
@@ -4266,7 +4601,7 @@
           <p:cNvPr id="4" name="">
             <a:extLst xmlns:a="http://schemas.openxmlformats.org/drawingml/2006/main">
               <a:ext uri="{FF2B5EF4-FFF2-40B4-BE49-F238E27FC236}">
-                <a16:creationId xmlns:a16="http://schemas.microsoft.com/office/drawing/2014/main" id="{B62CF4CA-03ED-409B-A72E-F994C2A7446B}"/>
+                <a16:creationId xmlns:a16="http://schemas.microsoft.com/office/drawing/2014/main" id="{5DA38868-0E58-4267-A2A4-6F25F29689F5}"/>
               </a:ext>
             </a:extLst>
           </p:cNvPr>
@@ -4299,7 +4634,7 @@
           <p:cNvPr id="5" name="">
             <a:extLst xmlns:a="http://schemas.openxmlformats.org/drawingml/2006/main">
               <a:ext uri="{FF2B5EF4-FFF2-40B4-BE49-F238E27FC236}">
-                <a16:creationId xmlns:a16="http://schemas.microsoft.com/office/drawing/2014/main" id="{AB7EAB94-8874-484C-BC4E-E92A281CD231}"/>
+                <a16:creationId xmlns:a16="http://schemas.microsoft.com/office/drawing/2014/main" id="{778EF9CC-99B7-48AF-B164-702573BDC188}"/>
               </a:ext>
             </a:extLst>
           </p:cNvPr>
@@ -4349,7 +4684,7 @@
           <p:cNvPr id="6" name="">
             <a:extLst xmlns:a="http://schemas.openxmlformats.org/drawingml/2006/main">
               <a:ext uri="{FF2B5EF4-FFF2-40B4-BE49-F238E27FC236}">
-                <a16:creationId xmlns:a16="http://schemas.microsoft.com/office/drawing/2014/main" id="{B558EE7F-3E14-48B2-BF6A-431CFF1F5A27}"/>
+                <a16:creationId xmlns:a16="http://schemas.microsoft.com/office/drawing/2014/main" id="{825EF281-D3D9-4D30-9F34-0976B9B796EB}"/>
               </a:ext>
             </a:extLst>
           </p:cNvPr>
@@ -4399,7 +4734,7 @@
           <p:cNvPr id="7" name="">
             <a:extLst xmlns:a="http://schemas.openxmlformats.org/drawingml/2006/main">
               <a:ext uri="{FF2B5EF4-FFF2-40B4-BE49-F238E27FC236}">
-                <a16:creationId xmlns:a16="http://schemas.microsoft.com/office/drawing/2014/main" id="{A548452D-CAA2-447D-9DAB-4D6F7AC63B31}"/>
+                <a16:creationId xmlns:a16="http://schemas.microsoft.com/office/drawing/2014/main" id="{70BEDE40-75E4-4801-9523-6225C8DB1CAD}"/>
               </a:ext>
             </a:extLst>
           </p:cNvPr>
@@ -4449,7 +4784,7 @@
           <p:cNvPr id="8" name="">
             <a:extLst xmlns:a="http://schemas.openxmlformats.org/drawingml/2006/main">
               <a:ext uri="{FF2B5EF4-FFF2-40B4-BE49-F238E27FC236}">
-                <a16:creationId xmlns:a16="http://schemas.microsoft.com/office/drawing/2014/main" id="{6F7EA969-5AA0-49B7-A17C-A752BCCED253}"/>
+                <a16:creationId xmlns:a16="http://schemas.microsoft.com/office/drawing/2014/main" id="{074A318F-3F52-422A-98F0-26C9B177DEBF}"/>
               </a:ext>
             </a:extLst>
           </p:cNvPr>
@@ -4482,7 +4817,7 @@
           <p:cNvPr id="9" name="">
             <a:extLst xmlns:a="http://schemas.openxmlformats.org/drawingml/2006/main">
               <a:ext uri="{FF2B5EF4-FFF2-40B4-BE49-F238E27FC236}">
-                <a16:creationId xmlns:a16="http://schemas.microsoft.com/office/drawing/2014/main" id="{03AE1B82-D94C-4D70-B78B-05BFFF9E631F}"/>
+                <a16:creationId xmlns:a16="http://schemas.microsoft.com/office/drawing/2014/main" id="{1EB63324-F700-4760-868A-B6BB5C5C9CCA}"/>
               </a:ext>
             </a:extLst>
           </p:cNvPr>
@@ -4532,7 +4867,7 @@
           <p:cNvPr id="10" name="">
             <a:extLst xmlns:a="http://schemas.openxmlformats.org/drawingml/2006/main">
               <a:ext uri="{FF2B5EF4-FFF2-40B4-BE49-F238E27FC236}">
-                <a16:creationId xmlns:a16="http://schemas.microsoft.com/office/drawing/2014/main" id="{92264780-4677-4C96-AF56-C193C9833763}"/>
+                <a16:creationId xmlns:a16="http://schemas.microsoft.com/office/drawing/2014/main" id="{0F608604-2886-4675-848A-6099376268D6}"/>
               </a:ext>
             </a:extLst>
           </p:cNvPr>
@@ -4582,7 +4917,7 @@
           <p:cNvPr id="11" name="">
             <a:extLst xmlns:a="http://schemas.openxmlformats.org/drawingml/2006/main">
               <a:ext uri="{FF2B5EF4-FFF2-40B4-BE49-F238E27FC236}">
-                <a16:creationId xmlns:a16="http://schemas.microsoft.com/office/drawing/2014/main" id="{E6E5551B-3A4B-4EF9-8100-2CC005A3D3D7}"/>
+                <a16:creationId xmlns:a16="http://schemas.microsoft.com/office/drawing/2014/main" id="{B063F92F-84BF-4479-8F85-FB6676463CFF}"/>
               </a:ext>
             </a:extLst>
           </p:cNvPr>
@@ -4632,7 +4967,7 @@
           <p:cNvPr id="12" name="">
             <a:extLst xmlns:a="http://schemas.openxmlformats.org/drawingml/2006/main">
               <a:ext uri="{FF2B5EF4-FFF2-40B4-BE49-F238E27FC236}">
-                <a16:creationId xmlns:a16="http://schemas.microsoft.com/office/drawing/2014/main" id="{CE184D7A-E7A9-42F8-8F28-F0427547DCB2}"/>
+                <a16:creationId xmlns:a16="http://schemas.microsoft.com/office/drawing/2014/main" id="{8602793E-6514-4255-86FF-408BCF0FFE56}"/>
               </a:ext>
             </a:extLst>
           </p:cNvPr>
@@ -4665,7 +5000,7 @@
           <p:cNvPr id="13" name="">
             <a:extLst xmlns:a="http://schemas.openxmlformats.org/drawingml/2006/main">
               <a:ext uri="{FF2B5EF4-FFF2-40B4-BE49-F238E27FC236}">
-                <a16:creationId xmlns:a16="http://schemas.microsoft.com/office/drawing/2014/main" id="{BE74687A-78B9-47C2-85C5-8EC20206CD92}"/>
+                <a16:creationId xmlns:a16="http://schemas.microsoft.com/office/drawing/2014/main" id="{96CDB35B-FF71-4CAC-90E9-D33014ECED84}"/>
               </a:ext>
             </a:extLst>
           </p:cNvPr>
@@ -4715,7 +5050,7 @@
           <p:cNvPr id="14" name="">
             <a:extLst xmlns:a="http://schemas.openxmlformats.org/drawingml/2006/main">
               <a:ext uri="{FF2B5EF4-FFF2-40B4-BE49-F238E27FC236}">
-                <a16:creationId xmlns:a16="http://schemas.microsoft.com/office/drawing/2014/main" id="{969C08B4-4571-49EC-BB16-E23F3E23FD8C}"/>
+                <a16:creationId xmlns:a16="http://schemas.microsoft.com/office/drawing/2014/main" id="{BAC8300F-839A-47BC-B734-C9C025768EC1}"/>
               </a:ext>
             </a:extLst>
           </p:cNvPr>
@@ -4765,7 +5100,7 @@
           <p:cNvPr id="15" name="">
             <a:extLst xmlns:a="http://schemas.openxmlformats.org/drawingml/2006/main">
               <a:ext uri="{FF2B5EF4-FFF2-40B4-BE49-F238E27FC236}">
-                <a16:creationId xmlns:a16="http://schemas.microsoft.com/office/drawing/2014/main" id="{009054D5-9C14-4B65-90A3-2A13C2032F38}"/>
+                <a16:creationId xmlns:a16="http://schemas.microsoft.com/office/drawing/2014/main" id="{18830405-41F1-4E3A-8B1E-13FB9674A229}"/>
               </a:ext>
             </a:extLst>
           </p:cNvPr>
@@ -4815,7 +5150,7 @@
           <p:cNvPr id="16" name="">
             <a:extLst xmlns:a="http://schemas.openxmlformats.org/drawingml/2006/main">
               <a:ext uri="{FF2B5EF4-FFF2-40B4-BE49-F238E27FC236}">
-                <a16:creationId xmlns:a16="http://schemas.microsoft.com/office/drawing/2014/main" id="{18B7F644-FE00-480F-AA59-BBD22705E3E9}"/>
+                <a16:creationId xmlns:a16="http://schemas.microsoft.com/office/drawing/2014/main" id="{C35C39C9-DC94-4F31-9195-78DEC603B9AD}"/>
               </a:ext>
             </a:extLst>
           </p:cNvPr>
@@ -4848,7 +5183,7 @@
           <p:cNvPr id="17" name="">
             <a:extLst xmlns:a="http://schemas.openxmlformats.org/drawingml/2006/main">
               <a:ext uri="{FF2B5EF4-FFF2-40B4-BE49-F238E27FC236}">
-                <a16:creationId xmlns:a16="http://schemas.microsoft.com/office/drawing/2014/main" id="{5F1B45B4-CF71-410B-83B4-5FB2FDBFBC37}"/>
+                <a16:creationId xmlns:a16="http://schemas.microsoft.com/office/drawing/2014/main" id="{53B664BA-6CA5-4171-9E47-F15B51DDC849}"/>
               </a:ext>
             </a:extLst>
           </p:cNvPr>
@@ -4898,7 +5233,7 @@
           <p:cNvPr id="18" name="">
             <a:extLst xmlns:a="http://schemas.openxmlformats.org/drawingml/2006/main">
               <a:ext uri="{FF2B5EF4-FFF2-40B4-BE49-F238E27FC236}">
-                <a16:creationId xmlns:a16="http://schemas.microsoft.com/office/drawing/2014/main" id="{F20FB1DA-8365-49A2-A149-B952245BFF10}"/>
+                <a16:creationId xmlns:a16="http://schemas.microsoft.com/office/drawing/2014/main" id="{26419702-10D9-4C4F-9D5F-99E5040233E8}"/>
               </a:ext>
             </a:extLst>
           </p:cNvPr>
@@ -4948,7 +5283,7 @@
           <p:cNvPr id="19" name="">
             <a:extLst xmlns:a="http://schemas.openxmlformats.org/drawingml/2006/main">
               <a:ext uri="{FF2B5EF4-FFF2-40B4-BE49-F238E27FC236}">
-                <a16:creationId xmlns:a16="http://schemas.microsoft.com/office/drawing/2014/main" id="{A096E9ED-07A2-4F5C-86C2-EAD1F08475BC}"/>
+                <a16:creationId xmlns:a16="http://schemas.microsoft.com/office/drawing/2014/main" id="{5378FD80-EC12-4080-8EA5-42ED199536CB}"/>
               </a:ext>
             </a:extLst>
           </p:cNvPr>
@@ -4998,7 +5333,7 @@
           <p:cNvPr id="20" name="">
             <a:extLst xmlns:a="http://schemas.openxmlformats.org/drawingml/2006/main">
               <a:ext uri="{FF2B5EF4-FFF2-40B4-BE49-F238E27FC236}">
-                <a16:creationId xmlns:a16="http://schemas.microsoft.com/office/drawing/2014/main" id="{6219B49B-9873-4C54-9AD3-2C0C021463ED}"/>
+                <a16:creationId xmlns:a16="http://schemas.microsoft.com/office/drawing/2014/main" id="{000F2EC5-3AB9-46EF-B79E-C625A2077612}"/>
               </a:ext>
             </a:extLst>
           </p:cNvPr>
@@ -5046,7 +5381,7 @@
     </p:spTree>
     <p:extLst>
       <p:ext uri="{BB962C8B-B14F-4D97-AF65-F5344CB8AC3E}">
-        <p14:creationId xmlns:p14="http://schemas.microsoft.com/office/powerpoint/2010/main" val="1014400353"/>
+        <p14:creationId xmlns:p14="http://schemas.microsoft.com/office/powerpoint/2010/main" val="1095523923"/>
       </p:ext>
     </p:extLst>
   </p:cSld>
@@ -5077,7 +5412,7 @@
           <p:cNvPr id="1" name="">
             <a:extLst xmlns:a="http://schemas.openxmlformats.org/drawingml/2006/main">
               <a:ext uri="{FF2B5EF4-FFF2-40B4-BE49-F238E27FC236}">
-                <a16:creationId xmlns:a16="http://schemas.microsoft.com/office/drawing/2014/main" id="{DFFEAB07-6A74-482F-BCB9-25BCB18B96DB}"/>
+                <a16:creationId xmlns:a16="http://schemas.microsoft.com/office/drawing/2014/main" id="{527BE9FD-D638-4F91-B315-81388C3A90D5}"/>
               </a:ext>
             </a:extLst>
           </p:cNvPr>
@@ -5127,7 +5462,7 @@
           <p:cNvPr id="2" name="">
             <a:extLst xmlns:a="http://schemas.openxmlformats.org/drawingml/2006/main">
               <a:ext uri="{FF2B5EF4-FFF2-40B4-BE49-F238E27FC236}">
-                <a16:creationId xmlns:a16="http://schemas.microsoft.com/office/drawing/2014/main" id="{E742E6A5-0500-4B7B-B6DC-6B5DA87421B9}"/>
+                <a16:creationId xmlns:a16="http://schemas.microsoft.com/office/drawing/2014/main" id="{010253B1-BD7C-438B-AA1D-6DAFC02D13A2}"/>
               </a:ext>
             </a:extLst>
           </p:cNvPr>
@@ -5177,7 +5512,7 @@
           <p:cNvPr id="3" name="">
             <a:extLst xmlns:a="http://schemas.openxmlformats.org/drawingml/2006/main">
               <a:ext uri="{FF2B5EF4-FFF2-40B4-BE49-F238E27FC236}">
-                <a16:creationId xmlns:a16="http://schemas.microsoft.com/office/drawing/2014/main" id="{42B7F470-7E50-496C-A9B8-2D0CA4719876}"/>
+                <a16:creationId xmlns:a16="http://schemas.microsoft.com/office/drawing/2014/main" id="{252C1173-DAF0-4E9F-BAA7-984F14118244}"/>
               </a:ext>
             </a:extLst>
           </p:cNvPr>
@@ -5212,7 +5547,7 @@
           <p:nvPr/>
         </p:nvPicPr>
         <p:blipFill>
-          <a:blip xmlns:r="http://schemas.openxmlformats.org/officeDocument/2006/relationships" xmlns:a="http://schemas.openxmlformats.org/drawingml/2006/main" r:embed="R3199541267de4371"/>
+          <a:blip xmlns:r="http://schemas.openxmlformats.org/officeDocument/2006/relationships" xmlns:a="http://schemas.openxmlformats.org/drawingml/2006/main" r:embed="R56a00dd8732a4c53"/>
           <a:stretch xmlns:a="http://schemas.openxmlformats.org/drawingml/2006/main"/>
         </p:blipFill>
         <p:spPr>
@@ -5230,7 +5565,7 @@
           <p:cNvPr id="5" name="">
             <a:extLst xmlns:a="http://schemas.openxmlformats.org/drawingml/2006/main">
               <a:ext uri="{FF2B5EF4-FFF2-40B4-BE49-F238E27FC236}">
-                <a16:creationId xmlns:a16="http://schemas.microsoft.com/office/drawing/2014/main" id="{584FFD6A-287D-4047-B123-CDBC09A39521}"/>
+                <a16:creationId xmlns:a16="http://schemas.microsoft.com/office/drawing/2014/main" id="{B3861A80-2244-468A-A7BF-E7FCAE279F37}"/>
               </a:ext>
             </a:extLst>
           </p:cNvPr>
@@ -5280,7 +5615,7 @@
           <p:cNvPr id="6" name="">
             <a:extLst xmlns:a="http://schemas.openxmlformats.org/drawingml/2006/main">
               <a:ext uri="{FF2B5EF4-FFF2-40B4-BE49-F238E27FC236}">
-                <a16:creationId xmlns:a16="http://schemas.microsoft.com/office/drawing/2014/main" id="{7026A023-D6D0-4D66-B542-E0B9DA54D75B}"/>
+                <a16:creationId xmlns:a16="http://schemas.microsoft.com/office/drawing/2014/main" id="{A0E82B30-816E-4618-94F3-323B92BB799B}"/>
               </a:ext>
             </a:extLst>
           </p:cNvPr>
@@ -5328,7 +5663,7 @@
     </p:spTree>
     <p:extLst>
       <p:ext uri="{BB962C8B-B14F-4D97-AF65-F5344CB8AC3E}">
-        <p14:creationId xmlns:p14="http://schemas.microsoft.com/office/powerpoint/2010/main" val="89913412"/>
+        <p14:creationId xmlns:p14="http://schemas.microsoft.com/office/powerpoint/2010/main" val="300929152"/>
       </p:ext>
     </p:extLst>
   </p:cSld>
@@ -5359,7 +5694,7 @@
           <p:cNvPr id="1" name="">
             <a:extLst xmlns:a="http://schemas.openxmlformats.org/drawingml/2006/main">
               <a:ext uri="{FF2B5EF4-FFF2-40B4-BE49-F238E27FC236}">
-                <a16:creationId xmlns:a16="http://schemas.microsoft.com/office/drawing/2014/main" id="{442D9A59-504B-460E-95C1-75AA28CB624D}"/>
+                <a16:creationId xmlns:a16="http://schemas.microsoft.com/office/drawing/2014/main" id="{DDBA3BBC-11A7-4BF4-A49F-98EA20A40A88}"/>
               </a:ext>
             </a:extLst>
           </p:cNvPr>
@@ -5409,7 +5744,7 @@
           <p:cNvPr id="2" name="">
             <a:extLst xmlns:a="http://schemas.openxmlformats.org/drawingml/2006/main">
               <a:ext uri="{FF2B5EF4-FFF2-40B4-BE49-F238E27FC236}">
-                <a16:creationId xmlns:a16="http://schemas.microsoft.com/office/drawing/2014/main" id="{3694F35A-D713-4214-B030-70BD6B4ADF65}"/>
+                <a16:creationId xmlns:a16="http://schemas.microsoft.com/office/drawing/2014/main" id="{BC92DC09-F10A-4974-BAD2-710BDDA37A35}"/>
               </a:ext>
             </a:extLst>
           </p:cNvPr>
@@ -5459,7 +5794,7 @@
           <p:cNvPr id="3" name="">
             <a:extLst xmlns:a="http://schemas.openxmlformats.org/drawingml/2006/main">
               <a:ext uri="{FF2B5EF4-FFF2-40B4-BE49-F238E27FC236}">
-                <a16:creationId xmlns:a16="http://schemas.microsoft.com/office/drawing/2014/main" id="{32146D89-AF59-4B09-B036-48F8C8021EE7}"/>
+                <a16:creationId xmlns:a16="http://schemas.microsoft.com/office/drawing/2014/main" id="{29DF5EA3-0093-4D65-A9FD-E7CC78FA8C19}"/>
               </a:ext>
             </a:extLst>
           </p:cNvPr>
@@ -5494,7 +5829,7 @@
           <p:nvPr/>
         </p:nvPicPr>
         <p:blipFill>
-          <a:blip xmlns:r="http://schemas.openxmlformats.org/officeDocument/2006/relationships" xmlns:a="http://schemas.openxmlformats.org/drawingml/2006/main" r:embed="R82e98b5ef37c4671"/>
+          <a:blip xmlns:r="http://schemas.openxmlformats.org/officeDocument/2006/relationships" xmlns:a="http://schemas.openxmlformats.org/drawingml/2006/main" r:embed="R8092e845dbab4125"/>
           <a:stretch xmlns:a="http://schemas.openxmlformats.org/drawingml/2006/main"/>
         </p:blipFill>
         <p:spPr>
@@ -5512,7 +5847,7 @@
           <p:cNvPr id="5" name="">
             <a:extLst xmlns:a="http://schemas.openxmlformats.org/drawingml/2006/main">
               <a:ext uri="{FF2B5EF4-FFF2-40B4-BE49-F238E27FC236}">
-                <a16:creationId xmlns:a16="http://schemas.microsoft.com/office/drawing/2014/main" id="{D5F9B0B7-A021-4DCB-97D7-605D7CC12044}"/>
+                <a16:creationId xmlns:a16="http://schemas.microsoft.com/office/drawing/2014/main" id="{E969591B-7B71-4FF5-A97F-C51F7A5A33A8}"/>
               </a:ext>
             </a:extLst>
           </p:cNvPr>
@@ -5562,7 +5897,7 @@
           <p:cNvPr id="6" name="">
             <a:extLst xmlns:a="http://schemas.openxmlformats.org/drawingml/2006/main">
               <a:ext uri="{FF2B5EF4-FFF2-40B4-BE49-F238E27FC236}">
-                <a16:creationId xmlns:a16="http://schemas.microsoft.com/office/drawing/2014/main" id="{F1B34223-F11B-4060-8668-16E6B1B995B6}"/>
+                <a16:creationId xmlns:a16="http://schemas.microsoft.com/office/drawing/2014/main" id="{5F21AB65-A6B1-4224-B81D-19B8A16C7DA0}"/>
               </a:ext>
             </a:extLst>
           </p:cNvPr>
@@ -5610,7 +5945,7 @@
     </p:spTree>
     <p:extLst>
       <p:ext uri="{BB962C8B-B14F-4D97-AF65-F5344CB8AC3E}">
-        <p14:creationId xmlns:p14="http://schemas.microsoft.com/office/powerpoint/2010/main" val="1883694481"/>
+        <p14:creationId xmlns:p14="http://schemas.microsoft.com/office/powerpoint/2010/main" val="1692029032"/>
       </p:ext>
     </p:extLst>
   </p:cSld>
@@ -5641,7 +5976,7 @@
           <p:cNvPr id="1" name="">
             <a:extLst xmlns:a="http://schemas.openxmlformats.org/drawingml/2006/main">
               <a:ext uri="{FF2B5EF4-FFF2-40B4-BE49-F238E27FC236}">
-                <a16:creationId xmlns:a16="http://schemas.microsoft.com/office/drawing/2014/main" id="{7084002D-9CB1-4E18-900B-ABF9BE045AF5}"/>
+                <a16:creationId xmlns:a16="http://schemas.microsoft.com/office/drawing/2014/main" id="{C68F20FB-7F08-481C-A092-4A1CE6BD5796}"/>
               </a:ext>
             </a:extLst>
           </p:cNvPr>
@@ -5691,7 +6026,7 @@
           <p:cNvPr id="2" name="">
             <a:extLst xmlns:a="http://schemas.openxmlformats.org/drawingml/2006/main">
               <a:ext uri="{FF2B5EF4-FFF2-40B4-BE49-F238E27FC236}">
-                <a16:creationId xmlns:a16="http://schemas.microsoft.com/office/drawing/2014/main" id="{031D970B-BBFA-41C3-B4E6-04E8CDCCB151}"/>
+                <a16:creationId xmlns:a16="http://schemas.microsoft.com/office/drawing/2014/main" id="{531FD37E-992B-472C-BAA8-F453B251B0B7}"/>
               </a:ext>
             </a:extLst>
           </p:cNvPr>
@@ -5741,7 +6076,7 @@
           <p:cNvPr id="3" name="">
             <a:extLst xmlns:a="http://schemas.openxmlformats.org/drawingml/2006/main">
               <a:ext uri="{FF2B5EF4-FFF2-40B4-BE49-F238E27FC236}">
-                <a16:creationId xmlns:a16="http://schemas.microsoft.com/office/drawing/2014/main" id="{34509383-1AC5-43C1-8431-7D85E95D2FBB}"/>
+                <a16:creationId xmlns:a16="http://schemas.microsoft.com/office/drawing/2014/main" id="{56BFD39F-C9C8-4446-A0E4-DA9D6820EFC1}"/>
               </a:ext>
             </a:extLst>
           </p:cNvPr>
@@ -5776,7 +6111,7 @@
           <p:nvPr/>
         </p:nvPicPr>
         <p:blipFill>
-          <a:blip xmlns:r="http://schemas.openxmlformats.org/officeDocument/2006/relationships" xmlns:a="http://schemas.openxmlformats.org/drawingml/2006/main" r:embed="Rbfc5507bbc3f42a1"/>
+          <a:blip xmlns:r="http://schemas.openxmlformats.org/officeDocument/2006/relationships" xmlns:a="http://schemas.openxmlformats.org/drawingml/2006/main" r:embed="Rd72a1126f1664360"/>
           <a:stretch xmlns:a="http://schemas.openxmlformats.org/drawingml/2006/main"/>
         </p:blipFill>
         <p:spPr>
@@ -5798,7 +6133,7 @@
           <p:nvPr/>
         </p:nvPicPr>
         <p:blipFill>
-          <a:blip xmlns:r="http://schemas.openxmlformats.org/officeDocument/2006/relationships" xmlns:a="http://schemas.openxmlformats.org/drawingml/2006/main" r:embed="Rb30187a4fa2c4d77"/>
+          <a:blip xmlns:r="http://schemas.openxmlformats.org/officeDocument/2006/relationships" xmlns:a="http://schemas.openxmlformats.org/drawingml/2006/main" r:embed="R6c824feb19654d50"/>
           <a:stretch xmlns:a="http://schemas.openxmlformats.org/drawingml/2006/main"/>
         </p:blipFill>
         <p:spPr>
@@ -5816,7 +6151,7 @@
           <p:cNvPr id="6" name="">
             <a:extLst xmlns:a="http://schemas.openxmlformats.org/drawingml/2006/main">
               <a:ext uri="{FF2B5EF4-FFF2-40B4-BE49-F238E27FC236}">
-                <a16:creationId xmlns:a16="http://schemas.microsoft.com/office/drawing/2014/main" id="{CCA7F3D0-81B4-4E46-9925-29F41E116426}"/>
+                <a16:creationId xmlns:a16="http://schemas.microsoft.com/office/drawing/2014/main" id="{D1208543-8FA1-400F-B550-21CB2D89E52E}"/>
               </a:ext>
             </a:extLst>
           </p:cNvPr>
@@ -5864,7 +6199,7 @@
     </p:spTree>
     <p:extLst>
       <p:ext uri="{BB962C8B-B14F-4D97-AF65-F5344CB8AC3E}">
-        <p14:creationId xmlns:p14="http://schemas.microsoft.com/office/powerpoint/2010/main" val="214338291"/>
+        <p14:creationId xmlns:p14="http://schemas.microsoft.com/office/powerpoint/2010/main" val="1851820085"/>
       </p:ext>
     </p:extLst>
   </p:cSld>
@@ -5895,7 +6230,7 @@
           <p:cNvPr id="1" name="">
             <a:extLst xmlns:a="http://schemas.openxmlformats.org/drawingml/2006/main">
               <a:ext uri="{FF2B5EF4-FFF2-40B4-BE49-F238E27FC236}">
-                <a16:creationId xmlns:a16="http://schemas.microsoft.com/office/drawing/2014/main" id="{FD89FFC0-65E4-47C6-938B-8D5E0E52B3BE}"/>
+                <a16:creationId xmlns:a16="http://schemas.microsoft.com/office/drawing/2014/main" id="{3ECD242A-0EF7-4AB1-9F75-F72DD6C4D3B7}"/>
               </a:ext>
             </a:extLst>
           </p:cNvPr>
@@ -5945,7 +6280,7 @@
           <p:cNvPr id="2" name="">
             <a:extLst xmlns:a="http://schemas.openxmlformats.org/drawingml/2006/main">
               <a:ext uri="{FF2B5EF4-FFF2-40B4-BE49-F238E27FC236}">
-                <a16:creationId xmlns:a16="http://schemas.microsoft.com/office/drawing/2014/main" id="{B7D6939B-0C66-4ADB-A6A6-887B95EF5089}"/>
+                <a16:creationId xmlns:a16="http://schemas.microsoft.com/office/drawing/2014/main" id="{CB7F671F-9F19-4570-8BDE-9245BD3DF731}"/>
               </a:ext>
             </a:extLst>
           </p:cNvPr>
@@ -5995,7 +6330,7 @@
           <p:cNvPr id="3" name="">
             <a:extLst xmlns:a="http://schemas.openxmlformats.org/drawingml/2006/main">
               <a:ext uri="{FF2B5EF4-FFF2-40B4-BE49-F238E27FC236}">
-                <a16:creationId xmlns:a16="http://schemas.microsoft.com/office/drawing/2014/main" id="{9D9ED347-0490-4E2C-AE4C-644A213E9CDA}"/>
+                <a16:creationId xmlns:a16="http://schemas.microsoft.com/office/drawing/2014/main" id="{F49ECA31-E70F-49D5-AEA3-7AAF72C62AFE}"/>
               </a:ext>
             </a:extLst>
           </p:cNvPr>
@@ -6030,7 +6365,7 @@
           <p:nvPr/>
         </p:nvPicPr>
         <p:blipFill>
-          <a:blip xmlns:r="http://schemas.openxmlformats.org/officeDocument/2006/relationships" xmlns:a="http://schemas.openxmlformats.org/drawingml/2006/main" r:embed="Rf914140a42104ff2"/>
+          <a:blip xmlns:r="http://schemas.openxmlformats.org/officeDocument/2006/relationships" xmlns:a="http://schemas.openxmlformats.org/drawingml/2006/main" r:embed="Re760b13abf564906"/>
           <a:stretch xmlns:a="http://schemas.openxmlformats.org/drawingml/2006/main"/>
         </p:blipFill>
         <p:spPr>
@@ -6048,7 +6383,7 @@
           <p:cNvPr id="5" name="">
             <a:extLst xmlns:a="http://schemas.openxmlformats.org/drawingml/2006/main">
               <a:ext uri="{FF2B5EF4-FFF2-40B4-BE49-F238E27FC236}">
-                <a16:creationId xmlns:a16="http://schemas.microsoft.com/office/drawing/2014/main" id="{D309C644-BB0C-4E78-95DC-FA37C91BF075}"/>
+                <a16:creationId xmlns:a16="http://schemas.microsoft.com/office/drawing/2014/main" id="{36D5550F-2FA3-4184-821C-75CE76F2A15F}"/>
               </a:ext>
             </a:extLst>
           </p:cNvPr>
@@ -6098,7 +6433,7 @@
           <p:cNvPr id="6" name="">
             <a:extLst xmlns:a="http://schemas.openxmlformats.org/drawingml/2006/main">
               <a:ext uri="{FF2B5EF4-FFF2-40B4-BE49-F238E27FC236}">
-                <a16:creationId xmlns:a16="http://schemas.microsoft.com/office/drawing/2014/main" id="{A5F4AEB9-4EE4-480A-8EEB-FF6DDCF23B94}"/>
+                <a16:creationId xmlns:a16="http://schemas.microsoft.com/office/drawing/2014/main" id="{4AFCA1CC-A26B-43A1-939E-8B2F83BEAA76}"/>
               </a:ext>
             </a:extLst>
           </p:cNvPr>
@@ -6146,7 +6481,7 @@
     </p:spTree>
     <p:extLst>
       <p:ext uri="{BB962C8B-B14F-4D97-AF65-F5344CB8AC3E}">
-        <p14:creationId xmlns:p14="http://schemas.microsoft.com/office/powerpoint/2010/main" val="1428667124"/>
+        <p14:creationId xmlns:p14="http://schemas.microsoft.com/office/powerpoint/2010/main" val="1521300924"/>
       </p:ext>
     </p:extLst>
   </p:cSld>
@@ -6177,7 +6512,7 @@
           <p:cNvPr id="1" name="">
             <a:extLst xmlns:a="http://schemas.openxmlformats.org/drawingml/2006/main">
               <a:ext uri="{FF2B5EF4-FFF2-40B4-BE49-F238E27FC236}">
-                <a16:creationId xmlns:a16="http://schemas.microsoft.com/office/drawing/2014/main" id="{19C03A69-E0D5-4558-B92A-3E78C3DF8EE6}"/>
+                <a16:creationId xmlns:a16="http://schemas.microsoft.com/office/drawing/2014/main" id="{703A54E9-DBC6-42F0-AFA8-9260BCE42130}"/>
               </a:ext>
             </a:extLst>
           </p:cNvPr>
@@ -6227,7 +6562,7 @@
           <p:cNvPr id="2" name="">
             <a:extLst xmlns:a="http://schemas.openxmlformats.org/drawingml/2006/main">
               <a:ext uri="{FF2B5EF4-FFF2-40B4-BE49-F238E27FC236}">
-                <a16:creationId xmlns:a16="http://schemas.microsoft.com/office/drawing/2014/main" id="{31484649-EC46-4AE9-9598-2F8C8D900941}"/>
+                <a16:creationId xmlns:a16="http://schemas.microsoft.com/office/drawing/2014/main" id="{A85222E3-F781-4BD6-8F4C-C5B8BC29B55B}"/>
               </a:ext>
             </a:extLst>
           </p:cNvPr>
@@ -6277,7 +6612,7 @@
           <p:cNvPr id="3" name="">
             <a:extLst xmlns:a="http://schemas.openxmlformats.org/drawingml/2006/main">
               <a:ext uri="{FF2B5EF4-FFF2-40B4-BE49-F238E27FC236}">
-                <a16:creationId xmlns:a16="http://schemas.microsoft.com/office/drawing/2014/main" id="{E0562B35-8C1F-42AE-9584-4D47D85908CE}"/>
+                <a16:creationId xmlns:a16="http://schemas.microsoft.com/office/drawing/2014/main" id="{216C8070-C994-4266-A913-06E61E6B0635}"/>
               </a:ext>
             </a:extLst>
           </p:cNvPr>
@@ -6308,7 +6643,7 @@
           <p:cNvPr id="4" name="">
             <a:extLst xmlns:a="http://schemas.openxmlformats.org/drawingml/2006/main">
               <a:ext uri="{FF2B5EF4-FFF2-40B4-BE49-F238E27FC236}">
-                <a16:creationId xmlns:a16="http://schemas.microsoft.com/office/drawing/2014/main" id="{3DFAE681-AEEF-4D4A-BD13-6346AA5695B9}"/>
+                <a16:creationId xmlns:a16="http://schemas.microsoft.com/office/drawing/2014/main" id="{07539993-B23E-4773-B1B8-D444F1312FAD}"/>
               </a:ext>
             </a:extLst>
           </p:cNvPr>
@@ -6358,7 +6693,7 @@
           <p:cNvPr id="5" name="">
             <a:extLst xmlns:a="http://schemas.openxmlformats.org/drawingml/2006/main">
               <a:ext uri="{FF2B5EF4-FFF2-40B4-BE49-F238E27FC236}">
-                <a16:creationId xmlns:a16="http://schemas.microsoft.com/office/drawing/2014/main" id="{121D3E9E-B15C-4CEB-AF0A-FA55243C0635}"/>
+                <a16:creationId xmlns:a16="http://schemas.microsoft.com/office/drawing/2014/main" id="{F5E6C041-FA33-48D7-8080-E7BF1A3DA6A4}"/>
               </a:ext>
             </a:extLst>
           </p:cNvPr>
@@ -6408,7 +6743,7 @@
           <p:cNvPr id="6" name="">
             <a:extLst xmlns:a="http://schemas.openxmlformats.org/drawingml/2006/main">
               <a:ext uri="{FF2B5EF4-FFF2-40B4-BE49-F238E27FC236}">
-                <a16:creationId xmlns:a16="http://schemas.microsoft.com/office/drawing/2014/main" id="{2E3959AD-9F29-4594-9BE8-9BECC6246A02}"/>
+                <a16:creationId xmlns:a16="http://schemas.microsoft.com/office/drawing/2014/main" id="{1ECCC67A-EF9B-40B0-B7D9-A8DBDEBF029E}"/>
               </a:ext>
             </a:extLst>
           </p:cNvPr>
@@ -6458,7 +6793,7 @@
           <p:cNvPr id="7" name="">
             <a:extLst xmlns:a="http://schemas.openxmlformats.org/drawingml/2006/main">
               <a:ext uri="{FF2B5EF4-FFF2-40B4-BE49-F238E27FC236}">
-                <a16:creationId xmlns:a16="http://schemas.microsoft.com/office/drawing/2014/main" id="{CBF60CA4-5420-400E-B6C4-86E131DB6982}"/>
+                <a16:creationId xmlns:a16="http://schemas.microsoft.com/office/drawing/2014/main" id="{81182939-B82F-4634-869A-FB4A75A0C256}"/>
               </a:ext>
             </a:extLst>
           </p:cNvPr>
@@ -6508,7 +6843,7 @@
           <p:cNvPr id="8" name="">
             <a:extLst xmlns:a="http://schemas.openxmlformats.org/drawingml/2006/main">
               <a:ext uri="{FF2B5EF4-FFF2-40B4-BE49-F238E27FC236}">
-                <a16:creationId xmlns:a16="http://schemas.microsoft.com/office/drawing/2014/main" id="{B5E6935C-555F-4656-AB6E-8FBEC6C969C4}"/>
+                <a16:creationId xmlns:a16="http://schemas.microsoft.com/office/drawing/2014/main" id="{BE3606F4-344E-48E0-8BEF-66DC25B023BF}"/>
               </a:ext>
             </a:extLst>
           </p:cNvPr>
@@ -6558,7 +6893,7 @@
           <p:cNvPr id="9" name="">
             <a:extLst xmlns:a="http://schemas.openxmlformats.org/drawingml/2006/main">
               <a:ext uri="{FF2B5EF4-FFF2-40B4-BE49-F238E27FC236}">
-                <a16:creationId xmlns:a16="http://schemas.microsoft.com/office/drawing/2014/main" id="{1E751A89-82DA-4B25-8160-83C87B76F734}"/>
+                <a16:creationId xmlns:a16="http://schemas.microsoft.com/office/drawing/2014/main" id="{5C1AAAB2-718C-43BA-9B21-6E6FC9859CEF}"/>
               </a:ext>
             </a:extLst>
           </p:cNvPr>
@@ -6608,7 +6943,7 @@
           <p:cNvPr id="10" name="">
             <a:extLst xmlns:a="http://schemas.openxmlformats.org/drawingml/2006/main">
               <a:ext uri="{FF2B5EF4-FFF2-40B4-BE49-F238E27FC236}">
-                <a16:creationId xmlns:a16="http://schemas.microsoft.com/office/drawing/2014/main" id="{81B6EE59-C676-4EA8-A9CB-0D965DF5026E}"/>
+                <a16:creationId xmlns:a16="http://schemas.microsoft.com/office/drawing/2014/main" id="{0E5A181C-A97B-48A4-97C5-E5C135942D7D}"/>
               </a:ext>
             </a:extLst>
           </p:cNvPr>
@@ -6658,7 +6993,7 @@
           <p:cNvPr id="11" name="">
             <a:extLst xmlns:a="http://schemas.openxmlformats.org/drawingml/2006/main">
               <a:ext uri="{FF2B5EF4-FFF2-40B4-BE49-F238E27FC236}">
-                <a16:creationId xmlns:a16="http://schemas.microsoft.com/office/drawing/2014/main" id="{468D56C0-EAE6-4F22-A248-715C4652467B}"/>
+                <a16:creationId xmlns:a16="http://schemas.microsoft.com/office/drawing/2014/main" id="{E4482D36-0F62-4A9F-B4C2-FE9EF930E233}"/>
               </a:ext>
             </a:extLst>
           </p:cNvPr>
@@ -6708,7 +7043,7 @@
           <p:cNvPr id="12" name="">
             <a:extLst xmlns:a="http://schemas.openxmlformats.org/drawingml/2006/main">
               <a:ext uri="{FF2B5EF4-FFF2-40B4-BE49-F238E27FC236}">
-                <a16:creationId xmlns:a16="http://schemas.microsoft.com/office/drawing/2014/main" id="{22499567-7C26-4CC2-8890-C2BD041627BF}"/>
+                <a16:creationId xmlns:a16="http://schemas.microsoft.com/office/drawing/2014/main" id="{4E57724A-F078-4E34-8278-0D3B7C11822A}"/>
               </a:ext>
             </a:extLst>
           </p:cNvPr>
@@ -6756,7 +7091,7 @@
     </p:spTree>
     <p:extLst>
       <p:ext uri="{BB962C8B-B14F-4D97-AF65-F5344CB8AC3E}">
-        <p14:creationId xmlns:p14="http://schemas.microsoft.com/office/powerpoint/2010/main" val="708450153"/>
+        <p14:creationId xmlns:p14="http://schemas.microsoft.com/office/powerpoint/2010/main" val="579019017"/>
       </p:ext>
     </p:extLst>
   </p:cSld>
@@ -6787,7 +7122,7 @@
           <p:cNvPr id="1" name="">
             <a:extLst xmlns:a="http://schemas.openxmlformats.org/drawingml/2006/main">
               <a:ext uri="{FF2B5EF4-FFF2-40B4-BE49-F238E27FC236}">
-                <a16:creationId xmlns:a16="http://schemas.microsoft.com/office/drawing/2014/main" id="{34E8EC29-958E-478F-BFBE-157BB981A44E}"/>
+                <a16:creationId xmlns:a16="http://schemas.microsoft.com/office/drawing/2014/main" id="{5D80B4F1-E84B-45B6-8C00-91BEA00BD3E3}"/>
               </a:ext>
             </a:extLst>
           </p:cNvPr>
@@ -6837,7 +7172,7 @@
           <p:cNvPr id="2" name="">
             <a:extLst xmlns:a="http://schemas.openxmlformats.org/drawingml/2006/main">
               <a:ext uri="{FF2B5EF4-FFF2-40B4-BE49-F238E27FC236}">
-                <a16:creationId xmlns:a16="http://schemas.microsoft.com/office/drawing/2014/main" id="{F0E955BF-E15D-47A3-9BA9-7C4478E5BF56}"/>
+                <a16:creationId xmlns:a16="http://schemas.microsoft.com/office/drawing/2014/main" id="{379844A0-0F33-4744-8E18-27BEB922CD1E}"/>
               </a:ext>
             </a:extLst>
           </p:cNvPr>
@@ -6887,7 +7222,7 @@
           <p:cNvPr id="3" name="">
             <a:extLst xmlns:a="http://schemas.openxmlformats.org/drawingml/2006/main">
               <a:ext uri="{FF2B5EF4-FFF2-40B4-BE49-F238E27FC236}">
-                <a16:creationId xmlns:a16="http://schemas.microsoft.com/office/drawing/2014/main" id="{C2144B4B-2DAE-405D-8314-B2CCEAE0B943}"/>
+                <a16:creationId xmlns:a16="http://schemas.microsoft.com/office/drawing/2014/main" id="{FA4C49DE-EE52-427B-9DC7-531B9CF8B97B}"/>
               </a:ext>
             </a:extLst>
           </p:cNvPr>
@@ -6918,7 +7253,7 @@
           <p:cNvPr id="4" name="">
             <a:extLst xmlns:a="http://schemas.openxmlformats.org/drawingml/2006/main">
               <a:ext uri="{FF2B5EF4-FFF2-40B4-BE49-F238E27FC236}">
-                <a16:creationId xmlns:a16="http://schemas.microsoft.com/office/drawing/2014/main" id="{2BBEFD98-4ADB-4CB2-9B9A-644485754F61}"/>
+                <a16:creationId xmlns:a16="http://schemas.microsoft.com/office/drawing/2014/main" id="{CAE31F0E-8852-42AA-A8B3-4B1052A2E325}"/>
               </a:ext>
             </a:extLst>
           </p:cNvPr>
@@ -6968,7 +7303,7 @@
           <p:cNvPr id="5" name="">
             <a:extLst xmlns:a="http://schemas.openxmlformats.org/drawingml/2006/main">
               <a:ext uri="{FF2B5EF4-FFF2-40B4-BE49-F238E27FC236}">
-                <a16:creationId xmlns:a16="http://schemas.microsoft.com/office/drawing/2014/main" id="{53B0E8F9-2E9C-455B-9EC0-39A65E836BAA}"/>
+                <a16:creationId xmlns:a16="http://schemas.microsoft.com/office/drawing/2014/main" id="{A9879A3C-FC92-40CF-A741-D27F26C20054}"/>
               </a:ext>
             </a:extLst>
           </p:cNvPr>
@@ -6999,7 +7334,7 @@
           <p:cNvPr id="6" name="">
             <a:extLst xmlns:a="http://schemas.openxmlformats.org/drawingml/2006/main">
               <a:ext uri="{FF2B5EF4-FFF2-40B4-BE49-F238E27FC236}">
-                <a16:creationId xmlns:a16="http://schemas.microsoft.com/office/drawing/2014/main" id="{9C834491-50DD-49A3-BC25-70465B35FBBE}"/>
+                <a16:creationId xmlns:a16="http://schemas.microsoft.com/office/drawing/2014/main" id="{DAC87A87-BF0C-47CC-B3FD-D766DB1AB1DD}"/>
               </a:ext>
             </a:extLst>
           </p:cNvPr>
@@ -7049,7 +7384,7 @@
           <p:cNvPr id="7" name="">
             <a:extLst xmlns:a="http://schemas.openxmlformats.org/drawingml/2006/main">
               <a:ext uri="{FF2B5EF4-FFF2-40B4-BE49-F238E27FC236}">
-                <a16:creationId xmlns:a16="http://schemas.microsoft.com/office/drawing/2014/main" id="{690CCFC5-62A0-48B4-A915-333252D6DA56}"/>
+                <a16:creationId xmlns:a16="http://schemas.microsoft.com/office/drawing/2014/main" id="{A406F5E5-12DA-4001-835A-98C897EA0AC5}"/>
               </a:ext>
             </a:extLst>
           </p:cNvPr>
@@ -7097,7 +7432,7 @@
     </p:spTree>
     <p:extLst>
       <p:ext uri="{BB962C8B-B14F-4D97-AF65-F5344CB8AC3E}">
-        <p14:creationId xmlns:p14="http://schemas.microsoft.com/office/powerpoint/2010/main" val="224704740"/>
+        <p14:creationId xmlns:p14="http://schemas.microsoft.com/office/powerpoint/2010/main" val="2081928199"/>
       </p:ext>
     </p:extLst>
   </p:cSld>
@@ -7128,7 +7463,7 @@
           <p:cNvPr id="1" name="">
             <a:extLst xmlns:a="http://schemas.openxmlformats.org/drawingml/2006/main">
               <a:ext uri="{FF2B5EF4-FFF2-40B4-BE49-F238E27FC236}">
-                <a16:creationId xmlns:a16="http://schemas.microsoft.com/office/drawing/2014/main" id="{67FF79A3-3E11-41F8-94A6-05B5A854F5CB}"/>
+                <a16:creationId xmlns:a16="http://schemas.microsoft.com/office/drawing/2014/main" id="{0CB1D330-7C38-4940-A775-05303DFC9279}"/>
               </a:ext>
             </a:extLst>
           </p:cNvPr>
@@ -7178,7 +7513,7 @@
           <p:cNvPr id="2" name="">
             <a:extLst xmlns:a="http://schemas.openxmlformats.org/drawingml/2006/main">
               <a:ext uri="{FF2B5EF4-FFF2-40B4-BE49-F238E27FC236}">
-                <a16:creationId xmlns:a16="http://schemas.microsoft.com/office/drawing/2014/main" id="{0E5BCF7C-0491-452A-97F2-4574A3475A79}"/>
+                <a16:creationId xmlns:a16="http://schemas.microsoft.com/office/drawing/2014/main" id="{47F7015F-6130-4FF6-9F2C-984FFD34CDCD}"/>
               </a:ext>
             </a:extLst>
           </p:cNvPr>
@@ -7228,7 +7563,7 @@
           <p:cNvPr id="3" name="">
             <a:extLst xmlns:a="http://schemas.openxmlformats.org/drawingml/2006/main">
               <a:ext uri="{FF2B5EF4-FFF2-40B4-BE49-F238E27FC236}">
-                <a16:creationId xmlns:a16="http://schemas.microsoft.com/office/drawing/2014/main" id="{96CD3460-6782-4834-8F14-75ADCB2B908C}"/>
+                <a16:creationId xmlns:a16="http://schemas.microsoft.com/office/drawing/2014/main" id="{028CE1EC-D337-45B4-8402-F161171B714C}"/>
               </a:ext>
             </a:extLst>
           </p:cNvPr>
@@ -7259,7 +7594,7 @@
           <p:cNvPr id="4" name="">
             <a:extLst xmlns:a="http://schemas.openxmlformats.org/drawingml/2006/main">
               <a:ext uri="{FF2B5EF4-FFF2-40B4-BE49-F238E27FC236}">
-                <a16:creationId xmlns:a16="http://schemas.microsoft.com/office/drawing/2014/main" id="{7ADDECE5-B9E2-4F4E-B2D4-EE31D121644F}"/>
+                <a16:creationId xmlns:a16="http://schemas.microsoft.com/office/drawing/2014/main" id="{FA77F218-A91A-4FE6-9016-77F131EE9A2B}"/>
               </a:ext>
             </a:extLst>
           </p:cNvPr>
@@ -7292,7 +7627,7 @@
           <p:cNvPr id="5" name="">
             <a:extLst xmlns:a="http://schemas.openxmlformats.org/drawingml/2006/main">
               <a:ext uri="{FF2B5EF4-FFF2-40B4-BE49-F238E27FC236}">
-                <a16:creationId xmlns:a16="http://schemas.microsoft.com/office/drawing/2014/main" id="{DC6C26FA-5CA5-4618-9D04-6F5179C9B167}"/>
+                <a16:creationId xmlns:a16="http://schemas.microsoft.com/office/drawing/2014/main" id="{92B14DD7-93E9-4243-A0D3-061783F02735}"/>
               </a:ext>
             </a:extLst>
           </p:cNvPr>
@@ -7342,7 +7677,7 @@
           <p:cNvPr id="6" name="">
             <a:extLst xmlns:a="http://schemas.openxmlformats.org/drawingml/2006/main">
               <a:ext uri="{FF2B5EF4-FFF2-40B4-BE49-F238E27FC236}">
-                <a16:creationId xmlns:a16="http://schemas.microsoft.com/office/drawing/2014/main" id="{94E3BCC9-B0B2-4357-B1AF-F4D3006ED677}"/>
+                <a16:creationId xmlns:a16="http://schemas.microsoft.com/office/drawing/2014/main" id="{4E51E5D0-22E1-49BF-A279-E755D9406170}"/>
               </a:ext>
             </a:extLst>
           </p:cNvPr>
@@ -7392,7 +7727,7 @@
           <p:cNvPr id="7" name="">
             <a:extLst xmlns:a="http://schemas.openxmlformats.org/drawingml/2006/main">
               <a:ext uri="{FF2B5EF4-FFF2-40B4-BE49-F238E27FC236}">
-                <a16:creationId xmlns:a16="http://schemas.microsoft.com/office/drawing/2014/main" id="{CAFCB317-1862-42E5-A944-1F091BACBCCA}"/>
+                <a16:creationId xmlns:a16="http://schemas.microsoft.com/office/drawing/2014/main" id="{383C5DFC-1B07-496C-B705-A6A3357F6761}"/>
               </a:ext>
             </a:extLst>
           </p:cNvPr>
@@ -7442,7 +7777,7 @@
           <p:cNvPr id="8" name="">
             <a:extLst xmlns:a="http://schemas.openxmlformats.org/drawingml/2006/main">
               <a:ext uri="{FF2B5EF4-FFF2-40B4-BE49-F238E27FC236}">
-                <a16:creationId xmlns:a16="http://schemas.microsoft.com/office/drawing/2014/main" id="{6EB706B0-1881-4EA5-9AF2-2F5F5D36A679}"/>
+                <a16:creationId xmlns:a16="http://schemas.microsoft.com/office/drawing/2014/main" id="{81E3B9F6-ED6B-4BA3-A65F-CB1AD07C4821}"/>
               </a:ext>
             </a:extLst>
           </p:cNvPr>
@@ -7475,7 +7810,7 @@
           <p:cNvPr id="9" name="">
             <a:extLst xmlns:a="http://schemas.openxmlformats.org/drawingml/2006/main">
               <a:ext uri="{FF2B5EF4-FFF2-40B4-BE49-F238E27FC236}">
-                <a16:creationId xmlns:a16="http://schemas.microsoft.com/office/drawing/2014/main" id="{3A06383F-AF2B-4CB4-BA3F-CCE8BB06A11B}"/>
+                <a16:creationId xmlns:a16="http://schemas.microsoft.com/office/drawing/2014/main" id="{3083CA6A-5F29-4347-BD22-F504F37D8E1B}"/>
               </a:ext>
             </a:extLst>
           </p:cNvPr>
@@ -7525,7 +7860,7 @@
           <p:cNvPr id="10" name="">
             <a:extLst xmlns:a="http://schemas.openxmlformats.org/drawingml/2006/main">
               <a:ext uri="{FF2B5EF4-FFF2-40B4-BE49-F238E27FC236}">
-                <a16:creationId xmlns:a16="http://schemas.microsoft.com/office/drawing/2014/main" id="{4A75C703-94FD-480B-93F9-45FDA640892B}"/>
+                <a16:creationId xmlns:a16="http://schemas.microsoft.com/office/drawing/2014/main" id="{4734B834-5D50-47B4-9136-8CDE233D0B30}"/>
               </a:ext>
             </a:extLst>
           </p:cNvPr>
@@ -7575,7 +7910,7 @@
           <p:cNvPr id="11" name="">
             <a:extLst xmlns:a="http://schemas.openxmlformats.org/drawingml/2006/main">
               <a:ext uri="{FF2B5EF4-FFF2-40B4-BE49-F238E27FC236}">
-                <a16:creationId xmlns:a16="http://schemas.microsoft.com/office/drawing/2014/main" id="{43BE98BE-D69A-4F0D-BBA3-F40A53AAE7D4}"/>
+                <a16:creationId xmlns:a16="http://schemas.microsoft.com/office/drawing/2014/main" id="{C814E08D-F92F-4251-9E22-BC358EEF07D6}"/>
               </a:ext>
             </a:extLst>
           </p:cNvPr>
@@ -7625,7 +7960,7 @@
           <p:cNvPr id="12" name="">
             <a:extLst xmlns:a="http://schemas.openxmlformats.org/drawingml/2006/main">
               <a:ext uri="{FF2B5EF4-FFF2-40B4-BE49-F238E27FC236}">
-                <a16:creationId xmlns:a16="http://schemas.microsoft.com/office/drawing/2014/main" id="{EB5FF88D-DF49-4827-97F3-52D8333E209C}"/>
+                <a16:creationId xmlns:a16="http://schemas.microsoft.com/office/drawing/2014/main" id="{2CB7ECD4-000C-4B3D-A8FB-171695FB4760}"/>
               </a:ext>
             </a:extLst>
           </p:cNvPr>
@@ -7658,7 +7993,7 @@
           <p:cNvPr id="13" name="">
             <a:extLst xmlns:a="http://schemas.openxmlformats.org/drawingml/2006/main">
               <a:ext uri="{FF2B5EF4-FFF2-40B4-BE49-F238E27FC236}">
-                <a16:creationId xmlns:a16="http://schemas.microsoft.com/office/drawing/2014/main" id="{DB5EFE55-7FA1-460B-9CCB-FAC41DC5E905}"/>
+                <a16:creationId xmlns:a16="http://schemas.microsoft.com/office/drawing/2014/main" id="{2889AF98-146F-4630-9A1C-A7D02B35BCE7}"/>
               </a:ext>
             </a:extLst>
           </p:cNvPr>
@@ -7708,7 +8043,7 @@
           <p:cNvPr id="14" name="">
             <a:extLst xmlns:a="http://schemas.openxmlformats.org/drawingml/2006/main">
               <a:ext uri="{FF2B5EF4-FFF2-40B4-BE49-F238E27FC236}">
-                <a16:creationId xmlns:a16="http://schemas.microsoft.com/office/drawing/2014/main" id="{209F3205-A369-4F53-81AA-0784AAC944BB}"/>
+                <a16:creationId xmlns:a16="http://schemas.microsoft.com/office/drawing/2014/main" id="{E1D1D053-EA50-45B1-B06F-976DDFDF5B29}"/>
               </a:ext>
             </a:extLst>
           </p:cNvPr>
@@ -7758,7 +8093,7 @@
           <p:cNvPr id="15" name="">
             <a:extLst xmlns:a="http://schemas.openxmlformats.org/drawingml/2006/main">
               <a:ext uri="{FF2B5EF4-FFF2-40B4-BE49-F238E27FC236}">
-                <a16:creationId xmlns:a16="http://schemas.microsoft.com/office/drawing/2014/main" id="{0E8ADDF2-425B-4C83-8D70-ABF76F09CD38}"/>
+                <a16:creationId xmlns:a16="http://schemas.microsoft.com/office/drawing/2014/main" id="{4DDA383B-857D-4324-8586-A196629D9709}"/>
               </a:ext>
             </a:extLst>
           </p:cNvPr>
@@ -7808,7 +8143,7 @@
           <p:cNvPr id="16" name="">
             <a:extLst xmlns:a="http://schemas.openxmlformats.org/drawingml/2006/main">
               <a:ext uri="{FF2B5EF4-FFF2-40B4-BE49-F238E27FC236}">
-                <a16:creationId xmlns:a16="http://schemas.microsoft.com/office/drawing/2014/main" id="{C5FA5CCA-529F-4297-9EB7-008FDB830341}"/>
+                <a16:creationId xmlns:a16="http://schemas.microsoft.com/office/drawing/2014/main" id="{6F05A8CD-EF09-4892-BB26-5E9B2B758E2C}"/>
               </a:ext>
             </a:extLst>
           </p:cNvPr>
@@ -7841,7 +8176,7 @@
           <p:cNvPr id="17" name="">
             <a:extLst xmlns:a="http://schemas.openxmlformats.org/drawingml/2006/main">
               <a:ext uri="{FF2B5EF4-FFF2-40B4-BE49-F238E27FC236}">
-                <a16:creationId xmlns:a16="http://schemas.microsoft.com/office/drawing/2014/main" id="{A8330618-2B36-451B-B5FA-98E98F3E4B2F}"/>
+                <a16:creationId xmlns:a16="http://schemas.microsoft.com/office/drawing/2014/main" id="{545DE8A8-8A43-4457-B9DD-A87577E24A16}"/>
               </a:ext>
             </a:extLst>
           </p:cNvPr>
@@ -7891,7 +8226,7 @@
           <p:cNvPr id="18" name="">
             <a:extLst xmlns:a="http://schemas.openxmlformats.org/drawingml/2006/main">
               <a:ext uri="{FF2B5EF4-FFF2-40B4-BE49-F238E27FC236}">
-                <a16:creationId xmlns:a16="http://schemas.microsoft.com/office/drawing/2014/main" id="{22187A75-6FDF-4C32-B600-FC6FCBC29DAB}"/>
+                <a16:creationId xmlns:a16="http://schemas.microsoft.com/office/drawing/2014/main" id="{911399A4-C179-4A0C-95C6-624906E91938}"/>
               </a:ext>
             </a:extLst>
           </p:cNvPr>
@@ -7941,7 +8276,7 @@
           <p:cNvPr id="19" name="">
             <a:extLst xmlns:a="http://schemas.openxmlformats.org/drawingml/2006/main">
               <a:ext uri="{FF2B5EF4-FFF2-40B4-BE49-F238E27FC236}">
-                <a16:creationId xmlns:a16="http://schemas.microsoft.com/office/drawing/2014/main" id="{EA9799A9-97F7-4DD2-9684-0427FFF566F3}"/>
+                <a16:creationId xmlns:a16="http://schemas.microsoft.com/office/drawing/2014/main" id="{C44CAAD5-FA5D-4FB5-85E6-866E4AC4829C}"/>
               </a:ext>
             </a:extLst>
           </p:cNvPr>
@@ -7991,7 +8326,7 @@
           <p:cNvPr id="20" name="">
             <a:extLst xmlns:a="http://schemas.openxmlformats.org/drawingml/2006/main">
               <a:ext uri="{FF2B5EF4-FFF2-40B4-BE49-F238E27FC236}">
-                <a16:creationId xmlns:a16="http://schemas.microsoft.com/office/drawing/2014/main" id="{234ED678-F0BD-443D-BBED-C8ED70AA8C1E}"/>
+                <a16:creationId xmlns:a16="http://schemas.microsoft.com/office/drawing/2014/main" id="{CB37597C-3144-4970-AD23-A197ABC81661}"/>
               </a:ext>
             </a:extLst>
           </p:cNvPr>
@@ -8039,7 +8374,7 @@
     </p:spTree>
     <p:extLst>
       <p:ext uri="{BB962C8B-B14F-4D97-AF65-F5344CB8AC3E}">
-        <p14:creationId xmlns:p14="http://schemas.microsoft.com/office/powerpoint/2010/main" val="1609177328"/>
+        <p14:creationId xmlns:p14="http://schemas.microsoft.com/office/powerpoint/2010/main" val="659627763"/>
       </p:ext>
     </p:extLst>
   </p:cSld>
@@ -8070,7 +8405,7 @@
           <p:cNvPr id="1" name="">
             <a:extLst xmlns:a="http://schemas.openxmlformats.org/drawingml/2006/main">
               <a:ext uri="{FF2B5EF4-FFF2-40B4-BE49-F238E27FC236}">
-                <a16:creationId xmlns:a16="http://schemas.microsoft.com/office/drawing/2014/main" id="{CAA4FAD7-0BF6-42B1-8AA3-D50B4649B2F7}"/>
+                <a16:creationId xmlns:a16="http://schemas.microsoft.com/office/drawing/2014/main" id="{89BC11AF-A45B-4B81-9624-FBEFDD16A6D7}"/>
               </a:ext>
             </a:extLst>
           </p:cNvPr>
@@ -8120,7 +8455,7 @@
           <p:cNvPr id="2" name="">
             <a:extLst xmlns:a="http://schemas.openxmlformats.org/drawingml/2006/main">
               <a:ext uri="{FF2B5EF4-FFF2-40B4-BE49-F238E27FC236}">
-                <a16:creationId xmlns:a16="http://schemas.microsoft.com/office/drawing/2014/main" id="{92AFED92-0C86-47B4-BFFC-4FF382A05AF3}"/>
+                <a16:creationId xmlns:a16="http://schemas.microsoft.com/office/drawing/2014/main" id="{2677F4D4-4786-42DD-A812-D1BF1C247B80}"/>
               </a:ext>
             </a:extLst>
           </p:cNvPr>
@@ -8170,7 +8505,7 @@
           <p:cNvPr id="3" name="">
             <a:extLst xmlns:a="http://schemas.openxmlformats.org/drawingml/2006/main">
               <a:ext uri="{FF2B5EF4-FFF2-40B4-BE49-F238E27FC236}">
-                <a16:creationId xmlns:a16="http://schemas.microsoft.com/office/drawing/2014/main" id="{625BF5F8-34D1-41D3-9BF3-D6885FE15D22}"/>
+                <a16:creationId xmlns:a16="http://schemas.microsoft.com/office/drawing/2014/main" id="{D65A4EEE-1A24-4100-BA5B-570CC07B81E4}"/>
               </a:ext>
             </a:extLst>
           </p:cNvPr>
@@ -8201,7 +8536,7 @@
           <p:cNvPr id="4" name="">
             <a:extLst xmlns:a="http://schemas.openxmlformats.org/drawingml/2006/main">
               <a:ext uri="{FF2B5EF4-FFF2-40B4-BE49-F238E27FC236}">
-                <a16:creationId xmlns:a16="http://schemas.microsoft.com/office/drawing/2014/main" id="{F7A92931-E2E9-49F5-A345-EEE8B8F69469}"/>
+                <a16:creationId xmlns:a16="http://schemas.microsoft.com/office/drawing/2014/main" id="{6AFBC26F-1BD2-4459-9EF9-70C9EC0D4D23}"/>
               </a:ext>
             </a:extLst>
           </p:cNvPr>
@@ -8251,7 +8586,7 @@
           <p:cNvPr id="5" name="">
             <a:extLst xmlns:a="http://schemas.openxmlformats.org/drawingml/2006/main">
               <a:ext uri="{FF2B5EF4-FFF2-40B4-BE49-F238E27FC236}">
-                <a16:creationId xmlns:a16="http://schemas.microsoft.com/office/drawing/2014/main" id="{EA00084F-8DFC-455A-9203-64D9AA7AAD3F}"/>
+                <a16:creationId xmlns:a16="http://schemas.microsoft.com/office/drawing/2014/main" id="{37A49CA7-4E9C-4DD1-BF45-377325EFDC86}"/>
               </a:ext>
             </a:extLst>
           </p:cNvPr>
@@ -8301,7 +8636,7 @@
           <p:cNvPr id="6" name="">
             <a:extLst xmlns:a="http://schemas.openxmlformats.org/drawingml/2006/main">
               <a:ext uri="{FF2B5EF4-FFF2-40B4-BE49-F238E27FC236}">
-                <a16:creationId xmlns:a16="http://schemas.microsoft.com/office/drawing/2014/main" id="{B1876AB4-97B5-40DC-93A3-D8480D2474C2}"/>
+                <a16:creationId xmlns:a16="http://schemas.microsoft.com/office/drawing/2014/main" id="{46FFC13B-A746-4823-93EA-57550C53C1F8}"/>
               </a:ext>
             </a:extLst>
           </p:cNvPr>
@@ -8351,7 +8686,7 @@
           <p:cNvPr id="7" name="">
             <a:extLst xmlns:a="http://schemas.openxmlformats.org/drawingml/2006/main">
               <a:ext uri="{FF2B5EF4-FFF2-40B4-BE49-F238E27FC236}">
-                <a16:creationId xmlns:a16="http://schemas.microsoft.com/office/drawing/2014/main" id="{11CE9A5B-1E28-44FE-B9BA-30472B4EFB39}"/>
+                <a16:creationId xmlns:a16="http://schemas.microsoft.com/office/drawing/2014/main" id="{6A73D06A-7D57-48A0-B1A0-7D989BE50734}"/>
               </a:ext>
             </a:extLst>
           </p:cNvPr>
@@ -8401,7 +8736,7 @@
           <p:cNvPr id="8" name="">
             <a:extLst xmlns:a="http://schemas.openxmlformats.org/drawingml/2006/main">
               <a:ext uri="{FF2B5EF4-FFF2-40B4-BE49-F238E27FC236}">
-                <a16:creationId xmlns:a16="http://schemas.microsoft.com/office/drawing/2014/main" id="{F6A92327-D574-48D4-BB4F-EE496044892E}"/>
+                <a16:creationId xmlns:a16="http://schemas.microsoft.com/office/drawing/2014/main" id="{34348B25-AC3A-4ADF-871F-87BDA0623ABE}"/>
               </a:ext>
             </a:extLst>
           </p:cNvPr>
@@ -8451,7 +8786,7 @@
           <p:cNvPr id="9" name="">
             <a:extLst xmlns:a="http://schemas.openxmlformats.org/drawingml/2006/main">
               <a:ext uri="{FF2B5EF4-FFF2-40B4-BE49-F238E27FC236}">
-                <a16:creationId xmlns:a16="http://schemas.microsoft.com/office/drawing/2014/main" id="{64D04879-EFC3-41EC-B171-19A811AC954C}"/>
+                <a16:creationId xmlns:a16="http://schemas.microsoft.com/office/drawing/2014/main" id="{C356D056-F412-4258-AAB3-C73E2F445E25}"/>
               </a:ext>
             </a:extLst>
           </p:cNvPr>
@@ -8501,7 +8836,7 @@
           <p:cNvPr id="10" name="">
             <a:extLst xmlns:a="http://schemas.openxmlformats.org/drawingml/2006/main">
               <a:ext uri="{FF2B5EF4-FFF2-40B4-BE49-F238E27FC236}">
-                <a16:creationId xmlns:a16="http://schemas.microsoft.com/office/drawing/2014/main" id="{0F9D01AC-E525-49D7-BB64-F8F4EBDEC847}"/>
+                <a16:creationId xmlns:a16="http://schemas.microsoft.com/office/drawing/2014/main" id="{95C65994-5C35-4120-886D-1D20DD257C31}"/>
               </a:ext>
             </a:extLst>
           </p:cNvPr>
@@ -8534,7 +8869,7 @@
           <p:cNvPr id="11" name="">
             <a:extLst xmlns:a="http://schemas.openxmlformats.org/drawingml/2006/main">
               <a:ext uri="{FF2B5EF4-FFF2-40B4-BE49-F238E27FC236}">
-                <a16:creationId xmlns:a16="http://schemas.microsoft.com/office/drawing/2014/main" id="{DC0343DD-D2A1-4986-B752-B3C7A0E12220}"/>
+                <a16:creationId xmlns:a16="http://schemas.microsoft.com/office/drawing/2014/main" id="{95E3AF6A-A9E0-4EC6-B155-A57E5FEDDD2C}"/>
               </a:ext>
             </a:extLst>
           </p:cNvPr>
@@ -8567,7 +8902,7 @@
           <p:cNvPr id="12" name="">
             <a:extLst xmlns:a="http://schemas.openxmlformats.org/drawingml/2006/main">
               <a:ext uri="{FF2B5EF4-FFF2-40B4-BE49-F238E27FC236}">
-                <a16:creationId xmlns:a16="http://schemas.microsoft.com/office/drawing/2014/main" id="{5094260E-FD8E-4742-82F4-4E1792BBB3B2}"/>
+                <a16:creationId xmlns:a16="http://schemas.microsoft.com/office/drawing/2014/main" id="{EF463E1F-0DB0-4508-A7DA-78D2DD1DD658}"/>
               </a:ext>
             </a:extLst>
           </p:cNvPr>
@@ -8600,7 +8935,7 @@
           <p:cNvPr id="13" name="">
             <a:extLst xmlns:a="http://schemas.openxmlformats.org/drawingml/2006/main">
               <a:ext uri="{FF2B5EF4-FFF2-40B4-BE49-F238E27FC236}">
-                <a16:creationId xmlns:a16="http://schemas.microsoft.com/office/drawing/2014/main" id="{A3381E17-B9D3-4B02-A894-64D4532BCC96}"/>
+                <a16:creationId xmlns:a16="http://schemas.microsoft.com/office/drawing/2014/main" id="{0BCABA5D-6024-4452-A3F6-879FB20F1B02}"/>
               </a:ext>
             </a:extLst>
           </p:cNvPr>
@@ -8650,7 +8985,7 @@
           <p:cNvPr id="14" name="">
             <a:extLst xmlns:a="http://schemas.openxmlformats.org/drawingml/2006/main">
               <a:ext uri="{FF2B5EF4-FFF2-40B4-BE49-F238E27FC236}">
-                <a16:creationId xmlns:a16="http://schemas.microsoft.com/office/drawing/2014/main" id="{87B13125-BD62-414A-8AB9-B1E04B09DCA5}"/>
+                <a16:creationId xmlns:a16="http://schemas.microsoft.com/office/drawing/2014/main" id="{4EE53DBF-DA12-412F-A2FC-7F803F18F3B8}"/>
               </a:ext>
             </a:extLst>
           </p:cNvPr>
@@ -8700,7 +9035,7 @@
           <p:cNvPr id="15" name="">
             <a:extLst xmlns:a="http://schemas.openxmlformats.org/drawingml/2006/main">
               <a:ext uri="{FF2B5EF4-FFF2-40B4-BE49-F238E27FC236}">
-                <a16:creationId xmlns:a16="http://schemas.microsoft.com/office/drawing/2014/main" id="{6F5904BD-3B3E-4B7E-AE42-F2B953FC49BD}"/>
+                <a16:creationId xmlns:a16="http://schemas.microsoft.com/office/drawing/2014/main" id="{D72B10E9-5138-474B-A5D1-B04DA2E8B48E}"/>
               </a:ext>
             </a:extLst>
           </p:cNvPr>
@@ -8750,7 +9085,7 @@
           <p:cNvPr id="16" name="">
             <a:extLst xmlns:a="http://schemas.openxmlformats.org/drawingml/2006/main">
               <a:ext uri="{FF2B5EF4-FFF2-40B4-BE49-F238E27FC236}">
-                <a16:creationId xmlns:a16="http://schemas.microsoft.com/office/drawing/2014/main" id="{46FE5833-15AF-44DA-B30C-84E2ABCA21A8}"/>
+                <a16:creationId xmlns:a16="http://schemas.microsoft.com/office/drawing/2014/main" id="{045E8782-0308-4C7F-9B55-4BF9AC9836E4}"/>
               </a:ext>
             </a:extLst>
           </p:cNvPr>
@@ -8798,7 +9133,7 @@
     </p:spTree>
     <p:extLst>
       <p:ext uri="{BB962C8B-B14F-4D97-AF65-F5344CB8AC3E}">
-        <p14:creationId xmlns:p14="http://schemas.microsoft.com/office/powerpoint/2010/main" val="1952985074"/>
+        <p14:creationId xmlns:p14="http://schemas.microsoft.com/office/powerpoint/2010/main" val="1769648124"/>
       </p:ext>
     </p:extLst>
   </p:cSld>
@@ -8829,7 +9164,7 @@
           <p:cNvPr id="1" name="">
             <a:extLst xmlns:a="http://schemas.openxmlformats.org/drawingml/2006/main">
               <a:ext uri="{FF2B5EF4-FFF2-40B4-BE49-F238E27FC236}">
-                <a16:creationId xmlns:a16="http://schemas.microsoft.com/office/drawing/2014/main" id="{4C10A2AE-8C81-42EF-899A-9F1ECFE8B079}"/>
+                <a16:creationId xmlns:a16="http://schemas.microsoft.com/office/drawing/2014/main" id="{F42E1616-55A9-4602-BA2A-79E704325656}"/>
               </a:ext>
             </a:extLst>
           </p:cNvPr>
@@ -8879,7 +9214,7 @@
           <p:cNvPr id="2" name="">
             <a:extLst xmlns:a="http://schemas.openxmlformats.org/drawingml/2006/main">
               <a:ext uri="{FF2B5EF4-FFF2-40B4-BE49-F238E27FC236}">
-                <a16:creationId xmlns:a16="http://schemas.microsoft.com/office/drawing/2014/main" id="{A534B043-895F-4B4D-8A47-3E4A572722CB}"/>
+                <a16:creationId xmlns:a16="http://schemas.microsoft.com/office/drawing/2014/main" id="{0C389C9A-4CA1-429E-8540-DAC34CFC7651}"/>
               </a:ext>
             </a:extLst>
           </p:cNvPr>
@@ -8929,7 +9264,7 @@
           <p:cNvPr id="3" name="">
             <a:extLst xmlns:a="http://schemas.openxmlformats.org/drawingml/2006/main">
               <a:ext uri="{FF2B5EF4-FFF2-40B4-BE49-F238E27FC236}">
-                <a16:creationId xmlns:a16="http://schemas.microsoft.com/office/drawing/2014/main" id="{EC11EACE-9AF2-448E-9921-758DA69E0594}"/>
+                <a16:creationId xmlns:a16="http://schemas.microsoft.com/office/drawing/2014/main" id="{3D1B59C9-DA98-468F-A879-48DD0380C4CE}"/>
               </a:ext>
             </a:extLst>
           </p:cNvPr>
@@ -8964,7 +9299,7 @@
           <p:nvPr/>
         </p:nvPicPr>
         <p:blipFill>
-          <a:blip xmlns:r="http://schemas.openxmlformats.org/officeDocument/2006/relationships" xmlns:a="http://schemas.openxmlformats.org/drawingml/2006/main" r:embed="R7a44aacfeb704639"/>
+          <a:blip xmlns:r="http://schemas.openxmlformats.org/officeDocument/2006/relationships" xmlns:a="http://schemas.openxmlformats.org/drawingml/2006/main" r:embed="Re5d030a019ff41cf"/>
           <a:stretch xmlns:a="http://schemas.openxmlformats.org/drawingml/2006/main"/>
         </p:blipFill>
         <p:spPr>
@@ -8982,7 +9317,7 @@
           <p:cNvPr id="5" name="">
             <a:extLst xmlns:a="http://schemas.openxmlformats.org/drawingml/2006/main">
               <a:ext uri="{FF2B5EF4-FFF2-40B4-BE49-F238E27FC236}">
-                <a16:creationId xmlns:a16="http://schemas.microsoft.com/office/drawing/2014/main" id="{B7C22DC2-87DE-4465-87EF-978435631070}"/>
+                <a16:creationId xmlns:a16="http://schemas.microsoft.com/office/drawing/2014/main" id="{68B1A1BD-F69B-4450-A617-2DFE7DFFC285}"/>
               </a:ext>
             </a:extLst>
           </p:cNvPr>
@@ -9032,7 +9367,7 @@
           <p:cNvPr id="6" name="">
             <a:extLst xmlns:a="http://schemas.openxmlformats.org/drawingml/2006/main">
               <a:ext uri="{FF2B5EF4-FFF2-40B4-BE49-F238E27FC236}">
-                <a16:creationId xmlns:a16="http://schemas.microsoft.com/office/drawing/2014/main" id="{64693799-1AA4-46DD-8844-F7194C729862}"/>
+                <a16:creationId xmlns:a16="http://schemas.microsoft.com/office/drawing/2014/main" id="{5E4F176F-9A50-4E47-AF35-EC0D4A5AA8C5}"/>
               </a:ext>
             </a:extLst>
           </p:cNvPr>
@@ -9080,7 +9415,7 @@
     </p:spTree>
     <p:extLst>
       <p:ext uri="{BB962C8B-B14F-4D97-AF65-F5344CB8AC3E}">
-        <p14:creationId xmlns:p14="http://schemas.microsoft.com/office/powerpoint/2010/main" val="1298937151"/>
+        <p14:creationId xmlns:p14="http://schemas.microsoft.com/office/powerpoint/2010/main" val="861415631"/>
       </p:ext>
     </p:extLst>
   </p:cSld>
@@ -9111,7 +9446,7 @@
           <p:cNvPr id="1" name="">
             <a:extLst xmlns:a="http://schemas.openxmlformats.org/drawingml/2006/main">
               <a:ext uri="{FF2B5EF4-FFF2-40B4-BE49-F238E27FC236}">
-                <a16:creationId xmlns:a16="http://schemas.microsoft.com/office/drawing/2014/main" id="{BCF0FBBD-D988-4492-8E98-AE0F074632C0}"/>
+                <a16:creationId xmlns:a16="http://schemas.microsoft.com/office/drawing/2014/main" id="{39712732-0F22-417D-B71F-1DDE3E420A32}"/>
               </a:ext>
             </a:extLst>
           </p:cNvPr>
@@ -9161,7 +9496,7 @@
           <p:cNvPr id="2" name="">
             <a:extLst xmlns:a="http://schemas.openxmlformats.org/drawingml/2006/main">
               <a:ext uri="{FF2B5EF4-FFF2-40B4-BE49-F238E27FC236}">
-                <a16:creationId xmlns:a16="http://schemas.microsoft.com/office/drawing/2014/main" id="{A41327A0-7A27-42C2-BF57-6B055337311D}"/>
+                <a16:creationId xmlns:a16="http://schemas.microsoft.com/office/drawing/2014/main" id="{93A3FE99-2F09-4DA4-9FA7-23FB4350D382}"/>
               </a:ext>
             </a:extLst>
           </p:cNvPr>
@@ -9211,7 +9546,7 @@
           <p:cNvPr id="3" name="">
             <a:extLst xmlns:a="http://schemas.openxmlformats.org/drawingml/2006/main">
               <a:ext uri="{FF2B5EF4-FFF2-40B4-BE49-F238E27FC236}">
-                <a16:creationId xmlns:a16="http://schemas.microsoft.com/office/drawing/2014/main" id="{2B9F3B9E-881B-4C58-B5F1-5E161C3E7D3B}"/>
+                <a16:creationId xmlns:a16="http://schemas.microsoft.com/office/drawing/2014/main" id="{D656B06C-7967-4C46-9599-31AE600EFE6B}"/>
               </a:ext>
             </a:extLst>
           </p:cNvPr>
@@ -9246,7 +9581,7 @@
           <p:nvPr/>
         </p:nvPicPr>
         <p:blipFill>
-          <a:blip xmlns:r="http://schemas.openxmlformats.org/officeDocument/2006/relationships" xmlns:a="http://schemas.openxmlformats.org/drawingml/2006/main" r:embed="Rd98ddd17608a4c74"/>
+          <a:blip xmlns:r="http://schemas.openxmlformats.org/officeDocument/2006/relationships" xmlns:a="http://schemas.openxmlformats.org/drawingml/2006/main" r:embed="R3db6e3123d264707"/>
           <a:stretch xmlns:a="http://schemas.openxmlformats.org/drawingml/2006/main"/>
         </p:blipFill>
         <p:spPr>
@@ -9268,7 +9603,7 @@
           <p:nvPr/>
         </p:nvPicPr>
         <p:blipFill>
-          <a:blip xmlns:r="http://schemas.openxmlformats.org/officeDocument/2006/relationships" xmlns:a="http://schemas.openxmlformats.org/drawingml/2006/main" r:embed="Ra7d703bb8ba34158"/>
+          <a:blip xmlns:r="http://schemas.openxmlformats.org/officeDocument/2006/relationships" xmlns:a="http://schemas.openxmlformats.org/drawingml/2006/main" r:embed="Re5f358983e60457b"/>
           <a:stretch xmlns:a="http://schemas.openxmlformats.org/drawingml/2006/main"/>
         </p:blipFill>
         <p:spPr>
@@ -9286,7 +9621,7 @@
           <p:cNvPr id="6" name="">
             <a:extLst xmlns:a="http://schemas.openxmlformats.org/drawingml/2006/main">
               <a:ext uri="{FF2B5EF4-FFF2-40B4-BE49-F238E27FC236}">
-                <a16:creationId xmlns:a16="http://schemas.microsoft.com/office/drawing/2014/main" id="{BB8C1535-43A3-484B-8C31-56A83797EA9D}"/>
+                <a16:creationId xmlns:a16="http://schemas.microsoft.com/office/drawing/2014/main" id="{A8D655EA-8FD5-4779-ACA4-E436F7D6A5B4}"/>
               </a:ext>
             </a:extLst>
           </p:cNvPr>
@@ -9334,7 +9669,7 @@
     </p:spTree>
     <p:extLst>
       <p:ext uri="{BB962C8B-B14F-4D97-AF65-F5344CB8AC3E}">
-        <p14:creationId xmlns:p14="http://schemas.microsoft.com/office/powerpoint/2010/main" val="101883177"/>
+        <p14:creationId xmlns:p14="http://schemas.microsoft.com/office/powerpoint/2010/main" val="1618401512"/>
       </p:ext>
     </p:extLst>
   </p:cSld>
@@ -9365,7 +9700,7 @@
           <p:cNvPr id="1" name="">
             <a:extLst xmlns:a="http://schemas.openxmlformats.org/drawingml/2006/main">
               <a:ext uri="{FF2B5EF4-FFF2-40B4-BE49-F238E27FC236}">
-                <a16:creationId xmlns:a16="http://schemas.microsoft.com/office/drawing/2014/main" id="{A02C6740-30F1-4D36-93A2-BB0F049895AC}"/>
+                <a16:creationId xmlns:a16="http://schemas.microsoft.com/office/drawing/2014/main" id="{C226A1DB-9E5D-45DD-A052-4A4C7476D70A}"/>
               </a:ext>
             </a:extLst>
           </p:cNvPr>
@@ -9415,7 +9750,7 @@
           <p:cNvPr id="2" name="">
             <a:extLst xmlns:a="http://schemas.openxmlformats.org/drawingml/2006/main">
               <a:ext uri="{FF2B5EF4-FFF2-40B4-BE49-F238E27FC236}">
-                <a16:creationId xmlns:a16="http://schemas.microsoft.com/office/drawing/2014/main" id="{69727F43-7D1B-4582-A8B5-AD28A3ACB605}"/>
+                <a16:creationId xmlns:a16="http://schemas.microsoft.com/office/drawing/2014/main" id="{E3FA5AB6-0757-4FFD-A729-B408AEF95073}"/>
               </a:ext>
             </a:extLst>
           </p:cNvPr>
@@ -9465,7 +9800,7 @@
           <p:cNvPr id="3" name="">
             <a:extLst xmlns:a="http://schemas.openxmlformats.org/drawingml/2006/main">
               <a:ext uri="{FF2B5EF4-FFF2-40B4-BE49-F238E27FC236}">
-                <a16:creationId xmlns:a16="http://schemas.microsoft.com/office/drawing/2014/main" id="{E8CF2791-57E7-4AC8-B93D-5321E68F3526}"/>
+                <a16:creationId xmlns:a16="http://schemas.microsoft.com/office/drawing/2014/main" id="{CA614CEC-A54D-4B47-82CD-089B211D05B8}"/>
               </a:ext>
             </a:extLst>
           </p:cNvPr>
@@ -9500,7 +9835,7 @@
           <p:nvPr/>
         </p:nvPicPr>
         <p:blipFill>
-          <a:blip xmlns:r="http://schemas.openxmlformats.org/officeDocument/2006/relationships" xmlns:a="http://schemas.openxmlformats.org/drawingml/2006/main" r:embed="R83abcb0ad649416f"/>
+          <a:blip xmlns:r="http://schemas.openxmlformats.org/officeDocument/2006/relationships" xmlns:a="http://schemas.openxmlformats.org/drawingml/2006/main" r:embed="R6dcce4bc3f2d4210"/>
           <a:stretch xmlns:a="http://schemas.openxmlformats.org/drawingml/2006/main"/>
         </p:blipFill>
         <p:spPr>
@@ -9518,7 +9853,7 @@
           <p:cNvPr id="5" name="">
             <a:extLst xmlns:a="http://schemas.openxmlformats.org/drawingml/2006/main">
               <a:ext uri="{FF2B5EF4-FFF2-40B4-BE49-F238E27FC236}">
-                <a16:creationId xmlns:a16="http://schemas.microsoft.com/office/drawing/2014/main" id="{A34E1FB5-5D95-4D38-A0B4-49271EE1E532}"/>
+                <a16:creationId xmlns:a16="http://schemas.microsoft.com/office/drawing/2014/main" id="{D560BF53-EA3B-47ED-A9F2-F97E7D310ACA}"/>
               </a:ext>
             </a:extLst>
           </p:cNvPr>
@@ -9568,7 +9903,7 @@
           <p:cNvPr id="6" name="">
             <a:extLst xmlns:a="http://schemas.openxmlformats.org/drawingml/2006/main">
               <a:ext uri="{FF2B5EF4-FFF2-40B4-BE49-F238E27FC236}">
-                <a16:creationId xmlns:a16="http://schemas.microsoft.com/office/drawing/2014/main" id="{9538687C-79B2-43E1-9DA7-B640CB6B3B42}"/>
+                <a16:creationId xmlns:a16="http://schemas.microsoft.com/office/drawing/2014/main" id="{C87B4152-D48E-4F68-B64B-CC442FF4EFE8}"/>
               </a:ext>
             </a:extLst>
           </p:cNvPr>
@@ -9616,7 +9951,7 @@
     </p:spTree>
     <p:extLst>
       <p:ext uri="{BB962C8B-B14F-4D97-AF65-F5344CB8AC3E}">
-        <p14:creationId xmlns:p14="http://schemas.microsoft.com/office/powerpoint/2010/main" val="782373323"/>
+        <p14:creationId xmlns:p14="http://schemas.microsoft.com/office/powerpoint/2010/main" val="1361978371"/>
       </p:ext>
     </p:extLst>
   </p:cSld>
@@ -9647,7 +9982,7 @@
           <p:cNvPr id="1" name="">
             <a:extLst xmlns:a="http://schemas.openxmlformats.org/drawingml/2006/main">
               <a:ext uri="{FF2B5EF4-FFF2-40B4-BE49-F238E27FC236}">
-                <a16:creationId xmlns:a16="http://schemas.microsoft.com/office/drawing/2014/main" id="{FD17ADD5-5D4A-41E5-AF9E-1020C0C460AF}"/>
+                <a16:creationId xmlns:a16="http://schemas.microsoft.com/office/drawing/2014/main" id="{42B1D8D2-D440-433A-B7C8-F831AA272D1A}"/>
               </a:ext>
             </a:extLst>
           </p:cNvPr>
@@ -9697,7 +10032,7 @@
           <p:cNvPr id="2" name="">
             <a:extLst xmlns:a="http://schemas.openxmlformats.org/drawingml/2006/main">
               <a:ext uri="{FF2B5EF4-FFF2-40B4-BE49-F238E27FC236}">
-                <a16:creationId xmlns:a16="http://schemas.microsoft.com/office/drawing/2014/main" id="{FACCF5EB-DC5F-416A-B583-92492EDC6880}"/>
+                <a16:creationId xmlns:a16="http://schemas.microsoft.com/office/drawing/2014/main" id="{017BF554-23A2-4C7C-930D-A4D287E6B1A5}"/>
               </a:ext>
             </a:extLst>
           </p:cNvPr>
@@ -9747,7 +10082,7 @@
           <p:cNvPr id="3" name="">
             <a:extLst xmlns:a="http://schemas.openxmlformats.org/drawingml/2006/main">
               <a:ext uri="{FF2B5EF4-FFF2-40B4-BE49-F238E27FC236}">
-                <a16:creationId xmlns:a16="http://schemas.microsoft.com/office/drawing/2014/main" id="{8099C2E4-2E99-47E9-BB55-FD15713B3DED}"/>
+                <a16:creationId xmlns:a16="http://schemas.microsoft.com/office/drawing/2014/main" id="{0B3A1587-7228-40FC-B483-3C337EAF919A}"/>
               </a:ext>
             </a:extLst>
           </p:cNvPr>
@@ -9778,7 +10113,7 @@
           <p:cNvPr id="4" name="">
             <a:extLst xmlns:a="http://schemas.openxmlformats.org/drawingml/2006/main">
               <a:ext uri="{FF2B5EF4-FFF2-40B4-BE49-F238E27FC236}">
-                <a16:creationId xmlns:a16="http://schemas.microsoft.com/office/drawing/2014/main" id="{F7D8E924-5023-4E7D-84D9-15B959710D10}"/>
+                <a16:creationId xmlns:a16="http://schemas.microsoft.com/office/drawing/2014/main" id="{DD2171A0-065E-4C61-99A3-A6C728BF7FB1}"/>
               </a:ext>
             </a:extLst>
           </p:cNvPr>
@@ -9828,7 +10163,7 @@
           <p:cNvPr id="5" name="">
             <a:extLst xmlns:a="http://schemas.openxmlformats.org/drawingml/2006/main">
               <a:ext uri="{FF2B5EF4-FFF2-40B4-BE49-F238E27FC236}">
-                <a16:creationId xmlns:a16="http://schemas.microsoft.com/office/drawing/2014/main" id="{22CB1683-7DEC-42D1-98B1-611B1D1FB937}"/>
+                <a16:creationId xmlns:a16="http://schemas.microsoft.com/office/drawing/2014/main" id="{68B85CFA-959E-4C42-AC99-17FAD5C09044}"/>
               </a:ext>
             </a:extLst>
           </p:cNvPr>
@@ -9878,7 +10213,7 @@
           <p:cNvPr id="6" name="">
             <a:extLst xmlns:a="http://schemas.openxmlformats.org/drawingml/2006/main">
               <a:ext uri="{FF2B5EF4-FFF2-40B4-BE49-F238E27FC236}">
-                <a16:creationId xmlns:a16="http://schemas.microsoft.com/office/drawing/2014/main" id="{03C43DC1-AAFC-4802-AE58-1FF985943875}"/>
+                <a16:creationId xmlns:a16="http://schemas.microsoft.com/office/drawing/2014/main" id="{EA22FDCA-8D7B-490E-9A81-03553073D2D4}"/>
               </a:ext>
             </a:extLst>
           </p:cNvPr>
@@ -9928,7 +10263,7 @@
           <p:cNvPr id="7" name="">
             <a:extLst xmlns:a="http://schemas.openxmlformats.org/drawingml/2006/main">
               <a:ext uri="{FF2B5EF4-FFF2-40B4-BE49-F238E27FC236}">
-                <a16:creationId xmlns:a16="http://schemas.microsoft.com/office/drawing/2014/main" id="{CC89853D-2069-4E08-B945-B92476F420BC}"/>
+                <a16:creationId xmlns:a16="http://schemas.microsoft.com/office/drawing/2014/main" id="{F8BA4D0D-8EE0-41F4-84CB-29BA2EE24C72}"/>
               </a:ext>
             </a:extLst>
           </p:cNvPr>
@@ -9978,7 +10313,7 @@
           <p:cNvPr id="8" name="">
             <a:extLst xmlns:a="http://schemas.openxmlformats.org/drawingml/2006/main">
               <a:ext uri="{FF2B5EF4-FFF2-40B4-BE49-F238E27FC236}">
-                <a16:creationId xmlns:a16="http://schemas.microsoft.com/office/drawing/2014/main" id="{BCF2FBFA-E31F-42C4-9153-204B36F93D05}"/>
+                <a16:creationId xmlns:a16="http://schemas.microsoft.com/office/drawing/2014/main" id="{14026BD5-1301-4FF4-A424-23CA8C645A47}"/>
               </a:ext>
             </a:extLst>
           </p:cNvPr>
@@ -10028,7 +10363,7 @@
           <p:cNvPr id="9" name="">
             <a:extLst xmlns:a="http://schemas.openxmlformats.org/drawingml/2006/main">
               <a:ext uri="{FF2B5EF4-FFF2-40B4-BE49-F238E27FC236}">
-                <a16:creationId xmlns:a16="http://schemas.microsoft.com/office/drawing/2014/main" id="{5400AD03-C32F-45E7-951B-0D1D5C3C6E8C}"/>
+                <a16:creationId xmlns:a16="http://schemas.microsoft.com/office/drawing/2014/main" id="{CD39C826-70A3-4BB4-AD56-35F9E32BD251}"/>
               </a:ext>
             </a:extLst>
           </p:cNvPr>
@@ -10078,7 +10413,7 @@
           <p:cNvPr id="10" name="">
             <a:extLst xmlns:a="http://schemas.openxmlformats.org/drawingml/2006/main">
               <a:ext uri="{FF2B5EF4-FFF2-40B4-BE49-F238E27FC236}">
-                <a16:creationId xmlns:a16="http://schemas.microsoft.com/office/drawing/2014/main" id="{8A42FCEE-7FEC-4686-BE9A-999C8D7C5B73}"/>
+                <a16:creationId xmlns:a16="http://schemas.microsoft.com/office/drawing/2014/main" id="{2C15CA20-47E7-4225-83FD-D5E5CED07008}"/>
               </a:ext>
             </a:extLst>
           </p:cNvPr>
@@ -10128,7 +10463,7 @@
           <p:cNvPr id="11" name="">
             <a:extLst xmlns:a="http://schemas.openxmlformats.org/drawingml/2006/main">
               <a:ext uri="{FF2B5EF4-FFF2-40B4-BE49-F238E27FC236}">
-                <a16:creationId xmlns:a16="http://schemas.microsoft.com/office/drawing/2014/main" id="{0D890192-E41C-475C-B34B-0C8F3E1312DA}"/>
+                <a16:creationId xmlns:a16="http://schemas.microsoft.com/office/drawing/2014/main" id="{7D48D42A-1B88-46D6-BFAA-3A622195A77B}"/>
               </a:ext>
             </a:extLst>
           </p:cNvPr>
@@ -10178,7 +10513,7 @@
           <p:cNvPr id="12" name="">
             <a:extLst xmlns:a="http://schemas.openxmlformats.org/drawingml/2006/main">
               <a:ext uri="{FF2B5EF4-FFF2-40B4-BE49-F238E27FC236}">
-                <a16:creationId xmlns:a16="http://schemas.microsoft.com/office/drawing/2014/main" id="{EA38F89B-66AD-452F-AA64-21C07064DA1A}"/>
+                <a16:creationId xmlns:a16="http://schemas.microsoft.com/office/drawing/2014/main" id="{7E42543C-5FD8-4455-AB54-D8AA7BF55A19}"/>
               </a:ext>
             </a:extLst>
           </p:cNvPr>
@@ -10226,7 +10561,2464 @@
     </p:spTree>
     <p:extLst>
       <p:ext uri="{BB962C8B-B14F-4D97-AF65-F5344CB8AC3E}">
-        <p14:creationId xmlns:p14="http://schemas.microsoft.com/office/powerpoint/2010/main" val="672011009"/>
+        <p14:creationId xmlns:p14="http://schemas.microsoft.com/office/powerpoint/2010/main" val="2077289620"/>
+      </p:ext>
+    </p:extLst>
+  </p:cSld>
+</p:sld>
+</file>
+
+<file path=ppt/slides/slide24.xml><?xml version="1.0" encoding="utf-8"?>
+<p:sld xmlns:p="http://schemas.openxmlformats.org/presentationml/2006/main">
+  <p:cSld>
+    <p:bg>
+      <p:bgPr>
+        <a:solidFill xmlns:a="http://schemas.openxmlformats.org/drawingml/2006/main">
+          <a:srgbClr val="FFFFFF"/>
+        </a:solidFill>
+      </p:bgPr>
+    </p:bg>
+    <p:spTree>
+      <p:nvGrpSpPr>
+        <p:cNvPr id="1" name=""/>
+        <p:cNvGrpSpPr/>
+        <p:nvPr/>
+      </p:nvGrpSpPr>
+      <p:grpSpPr>
+        <a:xfrm xmlns:a="http://schemas.openxmlformats.org/drawingml/2006/main"/>
+      </p:grpSpPr>
+      <p:sp>
+        <p:nvSpPr>
+          <p:cNvPr id="1" name="">
+            <a:extLst xmlns:a="http://schemas.openxmlformats.org/drawingml/2006/main">
+              <a:ext uri="{FF2B5EF4-FFF2-40B4-BE49-F238E27FC236}">
+                <a16:creationId xmlns:a16="http://schemas.microsoft.com/office/drawing/2014/main" id="{618403A9-5205-42AD-9E0A-CD6689E6E99F}"/>
+              </a:ext>
+            </a:extLst>
+          </p:cNvPr>
+          <p:cNvSpPr>
+            <a:spLocks xmlns:a="http://schemas.openxmlformats.org/drawingml/2006/main" noGrp="1"/>
+          </p:cNvSpPr>
+          <p:nvPr/>
+        </p:nvSpPr>
+        <p:spPr>
+          <a:xfrm xmlns:a="http://schemas.openxmlformats.org/drawingml/2006/main">
+            <a:off x="685800" y="495300"/>
+            <a:ext cx="4762500" cy="419100"/>
+          </a:xfrm>
+          <a:prstGeom xmlns:a="http://schemas.openxmlformats.org/drawingml/2006/main" prst="rect">
+            <a:avLst/>
+          </a:prstGeom>
+          <a:noFill xmlns:a="http://schemas.openxmlformats.org/drawingml/2006/main"/>
+          <a:ln xmlns:a="http://schemas.openxmlformats.org/drawingml/2006/main" w="0">
+            <a:noFill/>
+            <a:prstDash val="solid"/>
+          </a:ln>
+        </p:spPr>
+        <p:txBody>
+          <a:bodyPr xmlns:a="http://schemas.openxmlformats.org/drawingml/2006/main"/>
+          <a:lstStyle xmlns:a="http://schemas.openxmlformats.org/drawingml/2006/main"/>
+          <a:p xmlns:a="http://schemas.openxmlformats.org/drawingml/2006/main">
+            <a:pPr algn="l">
+              <a:defRPr sz="2400" b="1" i="0">
+                <a:solidFill>
+                  <a:srgbClr val="555555"/>
+                </a:solidFill>
+              </a:defRPr>
+            </a:pPr>
+            <a:r>
+              <a:rPr sz="2400" b="1" i="0">
+                <a:solidFill>
+                  <a:srgbClr val="555555"/>
+                </a:solidFill>
+              </a:rPr>
+              <a:t>Transition</a:t>
+            </a:r>
+          </a:p>
+        </p:txBody>
+      </p:sp>
+      <p:sp>
+        <p:nvSpPr>
+          <p:cNvPr id="2" name="">
+            <a:extLst xmlns:a="http://schemas.openxmlformats.org/drawingml/2006/main">
+              <a:ext uri="{FF2B5EF4-FFF2-40B4-BE49-F238E27FC236}">
+                <a16:creationId xmlns:a16="http://schemas.microsoft.com/office/drawing/2014/main" id="{B54185A5-A562-4698-8FDA-6FCCD2B7F32F}"/>
+              </a:ext>
+            </a:extLst>
+          </p:cNvPr>
+          <p:cNvSpPr>
+            <a:spLocks xmlns:a="http://schemas.openxmlformats.org/drawingml/2006/main" noGrp="1"/>
+          </p:cNvSpPr>
+          <p:nvPr/>
+        </p:nvSpPr>
+        <p:spPr>
+          <a:xfrm xmlns:a="http://schemas.openxmlformats.org/drawingml/2006/main">
+            <a:off x="685800" y="1600200"/>
+            <a:ext cx="8953500" cy="876300"/>
+          </a:xfrm>
+          <a:prstGeom xmlns:a="http://schemas.openxmlformats.org/drawingml/2006/main" prst="rect">
+            <a:avLst/>
+          </a:prstGeom>
+          <a:noFill xmlns:a="http://schemas.openxmlformats.org/drawingml/2006/main"/>
+          <a:ln xmlns:a="http://schemas.openxmlformats.org/drawingml/2006/main" w="0">
+            <a:noFill/>
+            <a:prstDash val="solid"/>
+          </a:ln>
+        </p:spPr>
+        <p:txBody>
+          <a:bodyPr xmlns:a="http://schemas.openxmlformats.org/drawingml/2006/main"/>
+          <a:lstStyle xmlns:a="http://schemas.openxmlformats.org/drawingml/2006/main"/>
+          <a:p xmlns:a="http://schemas.openxmlformats.org/drawingml/2006/main">
+            <a:pPr algn="l">
+              <a:defRPr sz="3900" b="1" i="0">
+                <a:solidFill>
+                  <a:srgbClr val="000000"/>
+                </a:solidFill>
+              </a:defRPr>
+            </a:pPr>
+            <a:r>
+              <a:rPr sz="3900" b="1" i="0">
+                <a:solidFill>
+                  <a:srgbClr val="000000"/>
+                </a:solidFill>
+              </a:rPr>
+              <a:t>The next question is whether the label itself is too blunt</a:t>
+            </a:r>
+          </a:p>
+        </p:txBody>
+      </p:sp>
+      <p:sp>
+        <p:nvSpPr>
+          <p:cNvPr id="3" name="">
+            <a:extLst xmlns:a="http://schemas.openxmlformats.org/drawingml/2006/main">
+              <a:ext uri="{FF2B5EF4-FFF2-40B4-BE49-F238E27FC236}">
+                <a16:creationId xmlns:a16="http://schemas.microsoft.com/office/drawing/2014/main" id="{07CE1FB5-6776-4C24-B086-D511E3C6D385}"/>
+              </a:ext>
+            </a:extLst>
+          </p:cNvPr>
+          <p:cNvSpPr>
+            <a:spLocks xmlns:a="http://schemas.openxmlformats.org/drawingml/2006/main" noGrp="1"/>
+          </p:cNvSpPr>
+          <p:nvPr/>
+        </p:nvSpPr>
+        <p:spPr>
+          <a:xfrm xmlns:a="http://schemas.openxmlformats.org/drawingml/2006/main">
+            <a:off x="723900" y="3105150"/>
+            <a:ext cx="5715000" cy="19050"/>
+          </a:xfrm>
+          <a:prstGeom xmlns:a="http://schemas.openxmlformats.org/drawingml/2006/main" prst="rect">
+            <a:avLst/>
+          </a:prstGeom>
+          <a:solidFill xmlns:a="http://schemas.openxmlformats.org/drawingml/2006/main">
+            <a:srgbClr val="B8BCC4"/>
+          </a:solidFill>
+          <a:ln xmlns:a="http://schemas.openxmlformats.org/drawingml/2006/main" w="0">
+            <a:noFill/>
+            <a:prstDash val="solid"/>
+          </a:ln>
+        </p:spPr>
+      </p:sp>
+      <p:sp>
+        <p:nvSpPr>
+          <p:cNvPr id="4" name="">
+            <a:extLst xmlns:a="http://schemas.openxmlformats.org/drawingml/2006/main">
+              <a:ext uri="{FF2B5EF4-FFF2-40B4-BE49-F238E27FC236}">
+                <a16:creationId xmlns:a16="http://schemas.microsoft.com/office/drawing/2014/main" id="{E261BC01-2DEA-4C71-A260-34560F08D0C3}"/>
+              </a:ext>
+            </a:extLst>
+          </p:cNvPr>
+          <p:cNvSpPr>
+            <a:spLocks xmlns:a="http://schemas.openxmlformats.org/drawingml/2006/main" noGrp="1"/>
+          </p:cNvSpPr>
+          <p:nvPr/>
+        </p:nvSpPr>
+        <p:spPr>
+          <a:xfrm xmlns:a="http://schemas.openxmlformats.org/drawingml/2006/main">
+            <a:off x="723900" y="3467100"/>
+            <a:ext cx="7524750" cy="1066800"/>
+          </a:xfrm>
+          <a:prstGeom xmlns:a="http://schemas.openxmlformats.org/drawingml/2006/main" prst="rect">
+            <a:avLst/>
+          </a:prstGeom>
+          <a:noFill xmlns:a="http://schemas.openxmlformats.org/drawingml/2006/main"/>
+          <a:ln xmlns:a="http://schemas.openxmlformats.org/drawingml/2006/main" w="0">
+            <a:noFill/>
+            <a:prstDash val="solid"/>
+          </a:ln>
+        </p:spPr>
+        <p:txBody>
+          <a:bodyPr xmlns:a="http://schemas.openxmlformats.org/drawingml/2006/main"/>
+          <a:lstStyle xmlns:a="http://schemas.openxmlformats.org/drawingml/2006/main"/>
+          <a:p xmlns:a="http://schemas.openxmlformats.org/drawingml/2006/main">
+            <a:pPr algn="l">
+              <a:defRPr sz="1800" b="0" i="0">
+                <a:solidFill>
+                  <a:srgbClr val="222222"/>
+                </a:solidFill>
+              </a:defRPr>
+            </a:pPr>
+            <a:r>
+              <a:rPr sz="1800" b="0" i="0">
+                <a:solidFill>
+                  <a:srgbClr val="222222"/>
+                </a:solidFill>
+              </a:rPr>
+              <a:t>ML-P1c compares h1, h3, and h5 next-open labels while keeping the GLM, feature set, TRAIN-only policy selection, and continuous annual replay surface fixed.</a:t>
+            </a:r>
+          </a:p>
+        </p:txBody>
+      </p:sp>
+      <p:sp>
+        <p:nvSpPr>
+          <p:cNvPr id="5" name="">
+            <a:extLst xmlns:a="http://schemas.openxmlformats.org/drawingml/2006/main">
+              <a:ext uri="{FF2B5EF4-FFF2-40B4-BE49-F238E27FC236}">
+                <a16:creationId xmlns:a16="http://schemas.microsoft.com/office/drawing/2014/main" id="{B8E653C9-E23C-4DC1-B962-9148AD917DB3}"/>
+              </a:ext>
+            </a:extLst>
+          </p:cNvPr>
+          <p:cNvSpPr>
+            <a:spLocks xmlns:a="http://schemas.openxmlformats.org/drawingml/2006/main" noGrp="1"/>
+          </p:cNvSpPr>
+          <p:nvPr/>
+        </p:nvSpPr>
+        <p:spPr>
+          <a:xfrm xmlns:a="http://schemas.openxmlformats.org/drawingml/2006/main">
+            <a:off x="8801100" y="0"/>
+            <a:ext cx="3390900" cy="6858000"/>
+          </a:xfrm>
+          <a:prstGeom xmlns:a="http://schemas.openxmlformats.org/drawingml/2006/main" prst="rect">
+            <a:avLst/>
+          </a:prstGeom>
+          <a:solidFill xmlns:a="http://schemas.openxmlformats.org/drawingml/2006/main">
+            <a:srgbClr val="EDEDED"/>
+          </a:solidFill>
+          <a:ln xmlns:a="http://schemas.openxmlformats.org/drawingml/2006/main" w="0">
+            <a:noFill/>
+            <a:prstDash val="solid"/>
+          </a:ln>
+        </p:spPr>
+      </p:sp>
+      <p:sp>
+        <p:nvSpPr>
+          <p:cNvPr id="6" name="">
+            <a:extLst xmlns:a="http://schemas.openxmlformats.org/drawingml/2006/main">
+              <a:ext uri="{FF2B5EF4-FFF2-40B4-BE49-F238E27FC236}">
+                <a16:creationId xmlns:a16="http://schemas.microsoft.com/office/drawing/2014/main" id="{AE7D4868-9198-45BB-A5CC-E545379B5BBB}"/>
+              </a:ext>
+            </a:extLst>
+          </p:cNvPr>
+          <p:cNvSpPr>
+            <a:spLocks xmlns:a="http://schemas.openxmlformats.org/drawingml/2006/main" noGrp="1"/>
+          </p:cNvSpPr>
+          <p:nvPr/>
+        </p:nvSpPr>
+        <p:spPr>
+          <a:xfrm xmlns:a="http://schemas.openxmlformats.org/drawingml/2006/main">
+            <a:off x="9353550" y="2343150"/>
+            <a:ext cx="2190750" cy="438150"/>
+          </a:xfrm>
+          <a:prstGeom xmlns:a="http://schemas.openxmlformats.org/drawingml/2006/main" prst="rect">
+            <a:avLst/>
+          </a:prstGeom>
+          <a:noFill xmlns:a="http://schemas.openxmlformats.org/drawingml/2006/main"/>
+          <a:ln xmlns:a="http://schemas.openxmlformats.org/drawingml/2006/main" w="0">
+            <a:noFill/>
+            <a:prstDash val="solid"/>
+          </a:ln>
+        </p:spPr>
+        <p:txBody>
+          <a:bodyPr xmlns:a="http://schemas.openxmlformats.org/drawingml/2006/main"/>
+          <a:lstStyle xmlns:a="http://schemas.openxmlformats.org/drawingml/2006/main"/>
+          <a:p xmlns:a="http://schemas.openxmlformats.org/drawingml/2006/main">
+            <a:pPr algn="ctr">
+              <a:defRPr sz="3150" b="1" i="0">
+                <a:solidFill>
+                  <a:srgbClr val="000000"/>
+                </a:solidFill>
+              </a:defRPr>
+            </a:pPr>
+            <a:r>
+              <a:rPr sz="3150" b="1" i="0">
+                <a:solidFill>
+                  <a:srgbClr val="000000"/>
+                </a:solidFill>
+              </a:rPr>
+              <a:t>ML-P1c</a:t>
+            </a:r>
+          </a:p>
+        </p:txBody>
+      </p:sp>
+      <p:sp>
+        <p:nvSpPr>
+          <p:cNvPr id="7" name="">
+            <a:extLst xmlns:a="http://schemas.openxmlformats.org/drawingml/2006/main">
+              <a:ext uri="{FF2B5EF4-FFF2-40B4-BE49-F238E27FC236}">
+                <a16:creationId xmlns:a16="http://schemas.microsoft.com/office/drawing/2014/main" id="{54B93021-9401-4852-91D3-B0349D8F63B3}"/>
+              </a:ext>
+            </a:extLst>
+          </p:cNvPr>
+          <p:cNvSpPr>
+            <a:spLocks xmlns:a="http://schemas.openxmlformats.org/drawingml/2006/main" noGrp="1"/>
+          </p:cNvSpPr>
+          <p:nvPr/>
+        </p:nvSpPr>
+        <p:spPr>
+          <a:xfrm xmlns:a="http://schemas.openxmlformats.org/drawingml/2006/main">
+            <a:off x="9067800" y="3067050"/>
+            <a:ext cx="2762250" cy="400050"/>
+          </a:xfrm>
+          <a:prstGeom xmlns:a="http://schemas.openxmlformats.org/drawingml/2006/main" prst="rect">
+            <a:avLst/>
+          </a:prstGeom>
+          <a:noFill xmlns:a="http://schemas.openxmlformats.org/drawingml/2006/main"/>
+          <a:ln xmlns:a="http://schemas.openxmlformats.org/drawingml/2006/main" w="0">
+            <a:noFill/>
+            <a:prstDash val="solid"/>
+          </a:ln>
+        </p:spPr>
+        <p:txBody>
+          <a:bodyPr xmlns:a="http://schemas.openxmlformats.org/drawingml/2006/main"/>
+          <a:lstStyle xmlns:a="http://schemas.openxmlformats.org/drawingml/2006/main"/>
+          <a:p xmlns:a="http://schemas.openxmlformats.org/drawingml/2006/main">
+            <a:pPr algn="ctr">
+              <a:defRPr sz="1875" b="0" i="0">
+                <a:solidFill>
+                  <a:srgbClr val="222222"/>
+                </a:solidFill>
+              </a:defRPr>
+            </a:pPr>
+            <a:r>
+              <a:rPr sz="1875" b="0" i="0">
+                <a:solidFill>
+                  <a:srgbClr val="222222"/>
+                </a:solidFill>
+              </a:rPr>
+              <a:t>Label horizon</a:t>
+            </a:r>
+          </a:p>
+        </p:txBody>
+      </p:sp>
+    </p:spTree>
+    <p:extLst>
+      <p:ext uri="{BB962C8B-B14F-4D97-AF65-F5344CB8AC3E}">
+        <p14:creationId xmlns:p14="http://schemas.microsoft.com/office/powerpoint/2010/main" val="868067634"/>
+      </p:ext>
+    </p:extLst>
+  </p:cSld>
+</p:sld>
+</file>
+
+<file path=ppt/slides/slide25.xml><?xml version="1.0" encoding="utf-8"?>
+<p:sld xmlns:p="http://schemas.openxmlformats.org/presentationml/2006/main">
+  <p:cSld>
+    <p:bg>
+      <p:bgPr>
+        <a:solidFill xmlns:a="http://schemas.openxmlformats.org/drawingml/2006/main">
+          <a:srgbClr val="FFFFFF"/>
+        </a:solidFill>
+      </p:bgPr>
+    </p:bg>
+    <p:spTree>
+      <p:nvGrpSpPr>
+        <p:cNvPr id="1" name=""/>
+        <p:cNvGrpSpPr/>
+        <p:nvPr/>
+      </p:nvGrpSpPr>
+      <p:grpSpPr>
+        <a:xfrm xmlns:a="http://schemas.openxmlformats.org/drawingml/2006/main"/>
+      </p:grpSpPr>
+      <p:sp>
+        <p:nvSpPr>
+          <p:cNvPr id="1" name="">
+            <a:extLst xmlns:a="http://schemas.openxmlformats.org/drawingml/2006/main">
+              <a:ext uri="{FF2B5EF4-FFF2-40B4-BE49-F238E27FC236}">
+                <a16:creationId xmlns:a16="http://schemas.microsoft.com/office/drawing/2014/main" id="{5B3FC0A9-CAC9-4536-8C2E-B16EEFB60788}"/>
+              </a:ext>
+            </a:extLst>
+          </p:cNvPr>
+          <p:cNvSpPr>
+            <a:spLocks xmlns:a="http://schemas.openxmlformats.org/drawingml/2006/main" noGrp="1"/>
+          </p:cNvSpPr>
+          <p:nvPr/>
+        </p:nvSpPr>
+        <p:spPr>
+          <a:xfrm xmlns:a="http://schemas.openxmlformats.org/drawingml/2006/main">
+            <a:off x="685800" y="400050"/>
+            <a:ext cx="8572500" cy="247650"/>
+          </a:xfrm>
+          <a:prstGeom xmlns:a="http://schemas.openxmlformats.org/drawingml/2006/main" prst="rect">
+            <a:avLst/>
+          </a:prstGeom>
+          <a:noFill xmlns:a="http://schemas.openxmlformats.org/drawingml/2006/main"/>
+          <a:ln xmlns:a="http://schemas.openxmlformats.org/drawingml/2006/main" w="0">
+            <a:noFill/>
+            <a:prstDash val="solid"/>
+          </a:ln>
+        </p:spPr>
+        <p:txBody>
+          <a:bodyPr xmlns:a="http://schemas.openxmlformats.org/drawingml/2006/main"/>
+          <a:lstStyle xmlns:a="http://schemas.openxmlformats.org/drawingml/2006/main"/>
+          <a:p xmlns:a="http://schemas.openxmlformats.org/drawingml/2006/main">
+            <a:pPr algn="l">
+              <a:defRPr sz="975" b="1" i="0">
+                <a:solidFill>
+                  <a:srgbClr val="555555"/>
+                </a:solidFill>
+              </a:defRPr>
+            </a:pPr>
+            <a:r>
+              <a:rPr sz="975" b="1" i="0">
+                <a:solidFill>
+                  <a:srgbClr val="555555"/>
+                </a:solidFill>
+              </a:rPr>
+              <a:t>GEN5.4 ML DECISION ENGINE</a:t>
+            </a:r>
+          </a:p>
+        </p:txBody>
+      </p:sp>
+      <p:sp>
+        <p:nvSpPr>
+          <p:cNvPr id="2" name="">
+            <a:extLst xmlns:a="http://schemas.openxmlformats.org/drawingml/2006/main">
+              <a:ext uri="{FF2B5EF4-FFF2-40B4-BE49-F238E27FC236}">
+                <a16:creationId xmlns:a16="http://schemas.microsoft.com/office/drawing/2014/main" id="{75E03B17-9A63-4A85-9955-C8797ADDD261}"/>
+              </a:ext>
+            </a:extLst>
+          </p:cNvPr>
+          <p:cNvSpPr>
+            <a:spLocks xmlns:a="http://schemas.openxmlformats.org/drawingml/2006/main" noGrp="1"/>
+          </p:cNvSpPr>
+          <p:nvPr/>
+        </p:nvSpPr>
+        <p:spPr>
+          <a:xfrm xmlns:a="http://schemas.openxmlformats.org/drawingml/2006/main">
+            <a:off x="685800" y="723900"/>
+            <a:ext cx="10287000" cy="876300"/>
+          </a:xfrm>
+          <a:prstGeom xmlns:a="http://schemas.openxmlformats.org/drawingml/2006/main" prst="rect">
+            <a:avLst/>
+          </a:prstGeom>
+          <a:noFill xmlns:a="http://schemas.openxmlformats.org/drawingml/2006/main"/>
+          <a:ln xmlns:a="http://schemas.openxmlformats.org/drawingml/2006/main" w="0">
+            <a:noFill/>
+            <a:prstDash val="solid"/>
+          </a:ln>
+        </p:spPr>
+        <p:txBody>
+          <a:bodyPr xmlns:a="http://schemas.openxmlformats.org/drawingml/2006/main"/>
+          <a:lstStyle xmlns:a="http://schemas.openxmlformats.org/drawingml/2006/main"/>
+          <a:p xmlns:a="http://schemas.openxmlformats.org/drawingml/2006/main">
+            <a:pPr algn="l">
+              <a:defRPr sz="2850" b="1" i="0">
+                <a:solidFill>
+                  <a:srgbClr val="000000"/>
+                </a:solidFill>
+              </a:defRPr>
+            </a:pPr>
+            <a:r>
+              <a:rPr sz="2850" b="1" i="0">
+                <a:solidFill>
+                  <a:srgbClr val="000000"/>
+                </a:solidFill>
+              </a:rPr>
+              <a:t>The one-day label improved participation, but not enough</a:t>
+            </a:r>
+          </a:p>
+        </p:txBody>
+      </p:sp>
+      <p:sp>
+        <p:nvSpPr>
+          <p:cNvPr id="3" name="">
+            <a:extLst xmlns:a="http://schemas.openxmlformats.org/drawingml/2006/main">
+              <a:ext uri="{FF2B5EF4-FFF2-40B4-BE49-F238E27FC236}">
+                <a16:creationId xmlns:a16="http://schemas.microsoft.com/office/drawing/2014/main" id="{71725794-55FA-4764-A1B2-AC04F012DAEA}"/>
+              </a:ext>
+            </a:extLst>
+          </p:cNvPr>
+          <p:cNvSpPr>
+            <a:spLocks xmlns:a="http://schemas.openxmlformats.org/drawingml/2006/main" noGrp="1"/>
+          </p:cNvSpPr>
+          <p:nvPr/>
+        </p:nvSpPr>
+        <p:spPr>
+          <a:xfrm xmlns:a="http://schemas.openxmlformats.org/drawingml/2006/main">
+            <a:off x="685800" y="1657350"/>
+            <a:ext cx="10820400" cy="19050"/>
+          </a:xfrm>
+          <a:prstGeom xmlns:a="http://schemas.openxmlformats.org/drawingml/2006/main" prst="rect">
+            <a:avLst/>
+          </a:prstGeom>
+          <a:solidFill xmlns:a="http://schemas.openxmlformats.org/drawingml/2006/main">
+            <a:srgbClr val="B8BCC4"/>
+          </a:solidFill>
+          <a:ln xmlns:a="http://schemas.openxmlformats.org/drawingml/2006/main" w="0">
+            <a:noFill/>
+            <a:prstDash val="solid"/>
+          </a:ln>
+        </p:spPr>
+      </p:sp>
+      <p:sp>
+        <p:nvSpPr>
+          <p:cNvPr id="4" name="">
+            <a:extLst xmlns:a="http://schemas.openxmlformats.org/drawingml/2006/main">
+              <a:ext uri="{FF2B5EF4-FFF2-40B4-BE49-F238E27FC236}">
+                <a16:creationId xmlns:a16="http://schemas.microsoft.com/office/drawing/2014/main" id="{9927B74E-7CC5-45A8-B7FE-9B60C6859F81}"/>
+              </a:ext>
+            </a:extLst>
+          </p:cNvPr>
+          <p:cNvSpPr>
+            <a:spLocks xmlns:a="http://schemas.openxmlformats.org/drawingml/2006/main" noGrp="1"/>
+          </p:cNvSpPr>
+          <p:nvPr/>
+        </p:nvSpPr>
+        <p:spPr>
+          <a:xfrm xmlns:a="http://schemas.openxmlformats.org/drawingml/2006/main">
+            <a:off x="704850" y="2152650"/>
+            <a:ext cx="2333625" cy="1428750"/>
+          </a:xfrm>
+          <a:prstGeom xmlns:a="http://schemas.openxmlformats.org/drawingml/2006/main" prst="rect">
+            <a:avLst/>
+          </a:prstGeom>
+          <a:solidFill xmlns:a="http://schemas.openxmlformats.org/drawingml/2006/main">
+            <a:srgbClr val="EDEDED"/>
+          </a:solidFill>
+          <a:ln xmlns:a="http://schemas.openxmlformats.org/drawingml/2006/main" w="9525">
+            <a:solidFill>
+              <a:srgbClr val="B8BCC4"/>
+            </a:solidFill>
+            <a:prstDash val="solid"/>
+          </a:ln>
+        </p:spPr>
+      </p:sp>
+      <p:sp>
+        <p:nvSpPr>
+          <p:cNvPr id="5" name="">
+            <a:extLst xmlns:a="http://schemas.openxmlformats.org/drawingml/2006/main">
+              <a:ext uri="{FF2B5EF4-FFF2-40B4-BE49-F238E27FC236}">
+                <a16:creationId xmlns:a16="http://schemas.microsoft.com/office/drawing/2014/main" id="{2B7D866C-35B0-4204-9B29-B046F3BF6384}"/>
+              </a:ext>
+            </a:extLst>
+          </p:cNvPr>
+          <p:cNvSpPr>
+            <a:spLocks xmlns:a="http://schemas.openxmlformats.org/drawingml/2006/main" noGrp="1"/>
+          </p:cNvSpPr>
+          <p:nvPr/>
+        </p:nvSpPr>
+        <p:spPr>
+          <a:xfrm xmlns:a="http://schemas.openxmlformats.org/drawingml/2006/main">
+            <a:off x="876300" y="2305050"/>
+            <a:ext cx="1990725" cy="171450"/>
+          </a:xfrm>
+          <a:prstGeom xmlns:a="http://schemas.openxmlformats.org/drawingml/2006/main" prst="rect">
+            <a:avLst/>
+          </a:prstGeom>
+          <a:noFill xmlns:a="http://schemas.openxmlformats.org/drawingml/2006/main"/>
+          <a:ln xmlns:a="http://schemas.openxmlformats.org/drawingml/2006/main" w="0">
+            <a:noFill/>
+            <a:prstDash val="solid"/>
+          </a:ln>
+        </p:spPr>
+        <p:txBody>
+          <a:bodyPr xmlns:a="http://schemas.openxmlformats.org/drawingml/2006/main"/>
+          <a:lstStyle xmlns:a="http://schemas.openxmlformats.org/drawingml/2006/main"/>
+          <a:p xmlns:a="http://schemas.openxmlformats.org/drawingml/2006/main">
+            <a:pPr algn="l">
+              <a:defRPr sz="900" b="1" i="0">
+                <a:solidFill>
+                  <a:srgbClr val="555555"/>
+                </a:solidFill>
+              </a:defRPr>
+            </a:pPr>
+            <a:r>
+              <a:rPr sz="900" b="1" i="0">
+                <a:solidFill>
+                  <a:srgbClr val="555555"/>
+                </a:solidFill>
+              </a:rPr>
+              <a:t>GUARDRAILS</a:t>
+            </a:r>
+          </a:p>
+        </p:txBody>
+      </p:sp>
+      <p:sp>
+        <p:nvSpPr>
+          <p:cNvPr id="6" name="">
+            <a:extLst xmlns:a="http://schemas.openxmlformats.org/drawingml/2006/main">
+              <a:ext uri="{FF2B5EF4-FFF2-40B4-BE49-F238E27FC236}">
+                <a16:creationId xmlns:a16="http://schemas.microsoft.com/office/drawing/2014/main" id="{5C0EB27F-2A14-4F47-B043-E2CCE82BA891}"/>
+              </a:ext>
+            </a:extLst>
+          </p:cNvPr>
+          <p:cNvSpPr>
+            <a:spLocks xmlns:a="http://schemas.openxmlformats.org/drawingml/2006/main" noGrp="1"/>
+          </p:cNvSpPr>
+          <p:nvPr/>
+        </p:nvSpPr>
+        <p:spPr>
+          <a:xfrm xmlns:a="http://schemas.openxmlformats.org/drawingml/2006/main">
+            <a:off x="876300" y="2552700"/>
+            <a:ext cx="1990725" cy="361950"/>
+          </a:xfrm>
+          <a:prstGeom xmlns:a="http://schemas.openxmlformats.org/drawingml/2006/main" prst="rect">
+            <a:avLst/>
+          </a:prstGeom>
+          <a:noFill xmlns:a="http://schemas.openxmlformats.org/drawingml/2006/main"/>
+          <a:ln xmlns:a="http://schemas.openxmlformats.org/drawingml/2006/main" w="0">
+            <a:noFill/>
+            <a:prstDash val="solid"/>
+          </a:ln>
+        </p:spPr>
+        <p:txBody>
+          <a:bodyPr xmlns:a="http://schemas.openxmlformats.org/drawingml/2006/main"/>
+          <a:lstStyle xmlns:a="http://schemas.openxmlformats.org/drawingml/2006/main"/>
+          <a:p xmlns:a="http://schemas.openxmlformats.org/drawingml/2006/main">
+            <a:pPr algn="l">
+              <a:defRPr sz="2250" b="1" i="0">
+                <a:solidFill>
+                  <a:srgbClr val="000000"/>
+                </a:solidFill>
+              </a:defRPr>
+            </a:pPr>
+            <a:r>
+              <a:rPr sz="2250" b="1" i="0">
+                <a:solidFill>
+                  <a:srgbClr val="000000"/>
+                </a:solidFill>
+              </a:rPr>
+              <a:t>All PASS</a:t>
+            </a:r>
+          </a:p>
+        </p:txBody>
+      </p:sp>
+      <p:sp>
+        <p:nvSpPr>
+          <p:cNvPr id="7" name="">
+            <a:extLst xmlns:a="http://schemas.openxmlformats.org/drawingml/2006/main">
+              <a:ext uri="{FF2B5EF4-FFF2-40B4-BE49-F238E27FC236}">
+                <a16:creationId xmlns:a16="http://schemas.microsoft.com/office/drawing/2014/main" id="{12A4178D-D982-4F42-81D1-11B62F1ED551}"/>
+              </a:ext>
+            </a:extLst>
+          </p:cNvPr>
+          <p:cNvSpPr>
+            <a:spLocks xmlns:a="http://schemas.openxmlformats.org/drawingml/2006/main" noGrp="1"/>
+          </p:cNvSpPr>
+          <p:nvPr/>
+        </p:nvSpPr>
+        <p:spPr>
+          <a:xfrm xmlns:a="http://schemas.openxmlformats.org/drawingml/2006/main">
+            <a:off x="876300" y="2971800"/>
+            <a:ext cx="1990725" cy="552450"/>
+          </a:xfrm>
+          <a:prstGeom xmlns:a="http://schemas.openxmlformats.org/drawingml/2006/main" prst="rect">
+            <a:avLst/>
+          </a:prstGeom>
+          <a:noFill xmlns:a="http://schemas.openxmlformats.org/drawingml/2006/main"/>
+          <a:ln xmlns:a="http://schemas.openxmlformats.org/drawingml/2006/main" w="0">
+            <a:noFill/>
+            <a:prstDash val="solid"/>
+          </a:ln>
+        </p:spPr>
+        <p:txBody>
+          <a:bodyPr xmlns:a="http://schemas.openxmlformats.org/drawingml/2006/main"/>
+          <a:lstStyle xmlns:a="http://schemas.openxmlformats.org/drawingml/2006/main"/>
+          <a:p xmlns:a="http://schemas.openxmlformats.org/drawingml/2006/main">
+            <a:pPr algn="l">
+              <a:defRPr sz="1125" b="0" i="0">
+                <a:solidFill>
+                  <a:srgbClr val="555555"/>
+                </a:solidFill>
+              </a:defRPr>
+            </a:pPr>
+            <a:r>
+              <a:rPr sz="1125" b="0" i="0">
+                <a:solidFill>
+                  <a:srgbClr val="555555"/>
+                </a:solidFill>
+              </a:rPr>
+              <a:t>Fit, labels, and policy selection stay inside TRAIN.</a:t>
+            </a:r>
+          </a:p>
+        </p:txBody>
+      </p:sp>
+      <p:sp>
+        <p:nvSpPr>
+          <p:cNvPr id="8" name="">
+            <a:extLst xmlns:a="http://schemas.openxmlformats.org/drawingml/2006/main">
+              <a:ext uri="{FF2B5EF4-FFF2-40B4-BE49-F238E27FC236}">
+                <a16:creationId xmlns:a16="http://schemas.microsoft.com/office/drawing/2014/main" id="{DA7A135F-A8C8-4406-B31A-19ADE2747C39}"/>
+              </a:ext>
+            </a:extLst>
+          </p:cNvPr>
+          <p:cNvSpPr>
+            <a:spLocks xmlns:a="http://schemas.openxmlformats.org/drawingml/2006/main" noGrp="1"/>
+          </p:cNvSpPr>
+          <p:nvPr/>
+        </p:nvSpPr>
+        <p:spPr>
+          <a:xfrm xmlns:a="http://schemas.openxmlformats.org/drawingml/2006/main">
+            <a:off x="3409950" y="2152650"/>
+            <a:ext cx="2333625" cy="1428750"/>
+          </a:xfrm>
+          <a:prstGeom xmlns:a="http://schemas.openxmlformats.org/drawingml/2006/main" prst="rect">
+            <a:avLst/>
+          </a:prstGeom>
+          <a:solidFill xmlns:a="http://schemas.openxmlformats.org/drawingml/2006/main">
+            <a:srgbClr val="EDEDED"/>
+          </a:solidFill>
+          <a:ln xmlns:a="http://schemas.openxmlformats.org/drawingml/2006/main" w="9525">
+            <a:solidFill>
+              <a:srgbClr val="B8BCC4"/>
+            </a:solidFill>
+            <a:prstDash val="solid"/>
+          </a:ln>
+        </p:spPr>
+      </p:sp>
+      <p:sp>
+        <p:nvSpPr>
+          <p:cNvPr id="9" name="">
+            <a:extLst xmlns:a="http://schemas.openxmlformats.org/drawingml/2006/main">
+              <a:ext uri="{FF2B5EF4-FFF2-40B4-BE49-F238E27FC236}">
+                <a16:creationId xmlns:a16="http://schemas.microsoft.com/office/drawing/2014/main" id="{5165BBD3-BA5D-44D1-B16E-1FA5B11441CB}"/>
+              </a:ext>
+            </a:extLst>
+          </p:cNvPr>
+          <p:cNvSpPr>
+            <a:spLocks xmlns:a="http://schemas.openxmlformats.org/drawingml/2006/main" noGrp="1"/>
+          </p:cNvSpPr>
+          <p:nvPr/>
+        </p:nvSpPr>
+        <p:spPr>
+          <a:xfrm xmlns:a="http://schemas.openxmlformats.org/drawingml/2006/main">
+            <a:off x="3581400" y="2305050"/>
+            <a:ext cx="1990725" cy="171450"/>
+          </a:xfrm>
+          <a:prstGeom xmlns:a="http://schemas.openxmlformats.org/drawingml/2006/main" prst="rect">
+            <a:avLst/>
+          </a:prstGeom>
+          <a:noFill xmlns:a="http://schemas.openxmlformats.org/drawingml/2006/main"/>
+          <a:ln xmlns:a="http://schemas.openxmlformats.org/drawingml/2006/main" w="0">
+            <a:noFill/>
+            <a:prstDash val="solid"/>
+          </a:ln>
+        </p:spPr>
+        <p:txBody>
+          <a:bodyPr xmlns:a="http://schemas.openxmlformats.org/drawingml/2006/main"/>
+          <a:lstStyle xmlns:a="http://schemas.openxmlformats.org/drawingml/2006/main"/>
+          <a:p xmlns:a="http://schemas.openxmlformats.org/drawingml/2006/main">
+            <a:pPr algn="l">
+              <a:defRPr sz="900" b="1" i="0">
+                <a:solidFill>
+                  <a:srgbClr val="555555"/>
+                </a:solidFill>
+              </a:defRPr>
+            </a:pPr>
+            <a:r>
+              <a:rPr sz="900" b="1" i="0">
+                <a:solidFill>
+                  <a:srgbClr val="555555"/>
+                </a:solidFill>
+              </a:rPr>
+              <a:t>2020 H1 RETURN</a:t>
+            </a:r>
+          </a:p>
+        </p:txBody>
+      </p:sp>
+      <p:sp>
+        <p:nvSpPr>
+          <p:cNvPr id="10" name="">
+            <a:extLst xmlns:a="http://schemas.openxmlformats.org/drawingml/2006/main">
+              <a:ext uri="{FF2B5EF4-FFF2-40B4-BE49-F238E27FC236}">
+                <a16:creationId xmlns:a16="http://schemas.microsoft.com/office/drawing/2014/main" id="{6017CA6F-963C-4B4E-8B05-E7DA6DE84446}"/>
+              </a:ext>
+            </a:extLst>
+          </p:cNvPr>
+          <p:cNvSpPr>
+            <a:spLocks xmlns:a="http://schemas.openxmlformats.org/drawingml/2006/main" noGrp="1"/>
+          </p:cNvSpPr>
+          <p:nvPr/>
+        </p:nvSpPr>
+        <p:spPr>
+          <a:xfrm xmlns:a="http://schemas.openxmlformats.org/drawingml/2006/main">
+            <a:off x="3581400" y="2552700"/>
+            <a:ext cx="1990725" cy="361950"/>
+          </a:xfrm>
+          <a:prstGeom xmlns:a="http://schemas.openxmlformats.org/drawingml/2006/main" prst="rect">
+            <a:avLst/>
+          </a:prstGeom>
+          <a:noFill xmlns:a="http://schemas.openxmlformats.org/drawingml/2006/main"/>
+          <a:ln xmlns:a="http://schemas.openxmlformats.org/drawingml/2006/main" w="0">
+            <a:noFill/>
+            <a:prstDash val="solid"/>
+          </a:ln>
+        </p:spPr>
+        <p:txBody>
+          <a:bodyPr xmlns:a="http://schemas.openxmlformats.org/drawingml/2006/main"/>
+          <a:lstStyle xmlns:a="http://schemas.openxmlformats.org/drawingml/2006/main"/>
+          <a:p xmlns:a="http://schemas.openxmlformats.org/drawingml/2006/main">
+            <a:pPr algn="l">
+              <a:defRPr sz="2250" b="1" i="0">
+                <a:solidFill>
+                  <a:srgbClr val="000000"/>
+                </a:solidFill>
+              </a:defRPr>
+            </a:pPr>
+            <a:r>
+              <a:rPr sz="2250" b="1" i="0">
+                <a:solidFill>
+                  <a:srgbClr val="000000"/>
+                </a:solidFill>
+              </a:rPr>
+              <a:t>54.0%</a:t>
+            </a:r>
+          </a:p>
+        </p:txBody>
+      </p:sp>
+      <p:sp>
+        <p:nvSpPr>
+          <p:cNvPr id="11" name="">
+            <a:extLst xmlns:a="http://schemas.openxmlformats.org/drawingml/2006/main">
+              <a:ext uri="{FF2B5EF4-FFF2-40B4-BE49-F238E27FC236}">
+                <a16:creationId xmlns:a16="http://schemas.microsoft.com/office/drawing/2014/main" id="{A207FF1A-FA4A-467B-B8D0-72CE199CCD80}"/>
+              </a:ext>
+            </a:extLst>
+          </p:cNvPr>
+          <p:cNvSpPr>
+            <a:spLocks xmlns:a="http://schemas.openxmlformats.org/drawingml/2006/main" noGrp="1"/>
+          </p:cNvSpPr>
+          <p:nvPr/>
+        </p:nvSpPr>
+        <p:spPr>
+          <a:xfrm xmlns:a="http://schemas.openxmlformats.org/drawingml/2006/main">
+            <a:off x="3581400" y="2971800"/>
+            <a:ext cx="1990725" cy="552450"/>
+          </a:xfrm>
+          <a:prstGeom xmlns:a="http://schemas.openxmlformats.org/drawingml/2006/main" prst="rect">
+            <a:avLst/>
+          </a:prstGeom>
+          <a:noFill xmlns:a="http://schemas.openxmlformats.org/drawingml/2006/main"/>
+          <a:ln xmlns:a="http://schemas.openxmlformats.org/drawingml/2006/main" w="0">
+            <a:noFill/>
+            <a:prstDash val="solid"/>
+          </a:ln>
+        </p:spPr>
+        <p:txBody>
+          <a:bodyPr xmlns:a="http://schemas.openxmlformats.org/drawingml/2006/main"/>
+          <a:lstStyle xmlns:a="http://schemas.openxmlformats.org/drawingml/2006/main"/>
+          <a:p xmlns:a="http://schemas.openxmlformats.org/drawingml/2006/main">
+            <a:pPr algn="l">
+              <a:defRPr sz="1125" b="0" i="0">
+                <a:solidFill>
+                  <a:srgbClr val="555555"/>
+                </a:solidFill>
+              </a:defRPr>
+            </a:pPr>
+            <a:r>
+              <a:rPr sz="1125" b="0" i="0">
+                <a:solidFill>
+                  <a:srgbClr val="555555"/>
+                </a:solidFill>
+              </a:rPr>
+              <a:t>Basket hold was 225.2%.</a:t>
+            </a:r>
+          </a:p>
+        </p:txBody>
+      </p:sp>
+      <p:sp>
+        <p:nvSpPr>
+          <p:cNvPr id="12" name="">
+            <a:extLst xmlns:a="http://schemas.openxmlformats.org/drawingml/2006/main">
+              <a:ext uri="{FF2B5EF4-FFF2-40B4-BE49-F238E27FC236}">
+                <a16:creationId xmlns:a16="http://schemas.microsoft.com/office/drawing/2014/main" id="{0CC092A6-82DB-40BA-8EC9-F9DAD350CB98}"/>
+              </a:ext>
+            </a:extLst>
+          </p:cNvPr>
+          <p:cNvSpPr>
+            <a:spLocks xmlns:a="http://schemas.openxmlformats.org/drawingml/2006/main" noGrp="1"/>
+          </p:cNvSpPr>
+          <p:nvPr/>
+        </p:nvSpPr>
+        <p:spPr>
+          <a:xfrm xmlns:a="http://schemas.openxmlformats.org/drawingml/2006/main">
+            <a:off x="6115050" y="2152650"/>
+            <a:ext cx="2333625" cy="1428750"/>
+          </a:xfrm>
+          <a:prstGeom xmlns:a="http://schemas.openxmlformats.org/drawingml/2006/main" prst="rect">
+            <a:avLst/>
+          </a:prstGeom>
+          <a:solidFill xmlns:a="http://schemas.openxmlformats.org/drawingml/2006/main">
+            <a:srgbClr val="EDEDED"/>
+          </a:solidFill>
+          <a:ln xmlns:a="http://schemas.openxmlformats.org/drawingml/2006/main" w="9525">
+            <a:solidFill>
+              <a:srgbClr val="B8BCC4"/>
+            </a:solidFill>
+            <a:prstDash val="solid"/>
+          </a:ln>
+        </p:spPr>
+      </p:sp>
+      <p:sp>
+        <p:nvSpPr>
+          <p:cNvPr id="13" name="">
+            <a:extLst xmlns:a="http://schemas.openxmlformats.org/drawingml/2006/main">
+              <a:ext uri="{FF2B5EF4-FFF2-40B4-BE49-F238E27FC236}">
+                <a16:creationId xmlns:a16="http://schemas.microsoft.com/office/drawing/2014/main" id="{BDC48653-4231-427A-B1D8-2A63CFBA7DE1}"/>
+              </a:ext>
+            </a:extLst>
+          </p:cNvPr>
+          <p:cNvSpPr>
+            <a:spLocks xmlns:a="http://schemas.openxmlformats.org/drawingml/2006/main" noGrp="1"/>
+          </p:cNvSpPr>
+          <p:nvPr/>
+        </p:nvSpPr>
+        <p:spPr>
+          <a:xfrm xmlns:a="http://schemas.openxmlformats.org/drawingml/2006/main">
+            <a:off x="6286500" y="2305050"/>
+            <a:ext cx="1990725" cy="171450"/>
+          </a:xfrm>
+          <a:prstGeom xmlns:a="http://schemas.openxmlformats.org/drawingml/2006/main" prst="rect">
+            <a:avLst/>
+          </a:prstGeom>
+          <a:noFill xmlns:a="http://schemas.openxmlformats.org/drawingml/2006/main"/>
+          <a:ln xmlns:a="http://schemas.openxmlformats.org/drawingml/2006/main" w="0">
+            <a:noFill/>
+            <a:prstDash val="solid"/>
+          </a:ln>
+        </p:spPr>
+        <p:txBody>
+          <a:bodyPr xmlns:a="http://schemas.openxmlformats.org/drawingml/2006/main"/>
+          <a:lstStyle xmlns:a="http://schemas.openxmlformats.org/drawingml/2006/main"/>
+          <a:p xmlns:a="http://schemas.openxmlformats.org/drawingml/2006/main">
+            <a:pPr algn="l">
+              <a:defRPr sz="900" b="1" i="0">
+                <a:solidFill>
+                  <a:srgbClr val="555555"/>
+                </a:solidFill>
+              </a:defRPr>
+            </a:pPr>
+            <a:r>
+              <a:rPr sz="900" b="1" i="0">
+                <a:solidFill>
+                  <a:srgbClr val="555555"/>
+                </a:solidFill>
+              </a:rPr>
+              <a:t>2020 H3 RETURN</a:t>
+            </a:r>
+          </a:p>
+        </p:txBody>
+      </p:sp>
+      <p:sp>
+        <p:nvSpPr>
+          <p:cNvPr id="14" name="">
+            <a:extLst xmlns:a="http://schemas.openxmlformats.org/drawingml/2006/main">
+              <a:ext uri="{FF2B5EF4-FFF2-40B4-BE49-F238E27FC236}">
+                <a16:creationId xmlns:a16="http://schemas.microsoft.com/office/drawing/2014/main" id="{9F317584-0976-4963-9A31-E57122E0C002}"/>
+              </a:ext>
+            </a:extLst>
+          </p:cNvPr>
+          <p:cNvSpPr>
+            <a:spLocks xmlns:a="http://schemas.openxmlformats.org/drawingml/2006/main" noGrp="1"/>
+          </p:cNvSpPr>
+          <p:nvPr/>
+        </p:nvSpPr>
+        <p:spPr>
+          <a:xfrm xmlns:a="http://schemas.openxmlformats.org/drawingml/2006/main">
+            <a:off x="6286500" y="2552700"/>
+            <a:ext cx="1990725" cy="361950"/>
+          </a:xfrm>
+          <a:prstGeom xmlns:a="http://schemas.openxmlformats.org/drawingml/2006/main" prst="rect">
+            <a:avLst/>
+          </a:prstGeom>
+          <a:noFill xmlns:a="http://schemas.openxmlformats.org/drawingml/2006/main"/>
+          <a:ln xmlns:a="http://schemas.openxmlformats.org/drawingml/2006/main" w="0">
+            <a:noFill/>
+            <a:prstDash val="solid"/>
+          </a:ln>
+        </p:spPr>
+        <p:txBody>
+          <a:bodyPr xmlns:a="http://schemas.openxmlformats.org/drawingml/2006/main"/>
+          <a:lstStyle xmlns:a="http://schemas.openxmlformats.org/drawingml/2006/main"/>
+          <a:p xmlns:a="http://schemas.openxmlformats.org/drawingml/2006/main">
+            <a:pPr algn="l">
+              <a:defRPr sz="2250" b="1" i="0">
+                <a:solidFill>
+                  <a:srgbClr val="000000"/>
+                </a:solidFill>
+              </a:defRPr>
+            </a:pPr>
+            <a:r>
+              <a:rPr sz="2250" b="1" i="0">
+                <a:solidFill>
+                  <a:srgbClr val="000000"/>
+                </a:solidFill>
+              </a:rPr>
+              <a:t>30.0%</a:t>
+            </a:r>
+          </a:p>
+        </p:txBody>
+      </p:sp>
+      <p:sp>
+        <p:nvSpPr>
+          <p:cNvPr id="15" name="">
+            <a:extLst xmlns:a="http://schemas.openxmlformats.org/drawingml/2006/main">
+              <a:ext uri="{FF2B5EF4-FFF2-40B4-BE49-F238E27FC236}">
+                <a16:creationId xmlns:a16="http://schemas.microsoft.com/office/drawing/2014/main" id="{C4E5292A-9A42-4482-A84E-E6C27B6CFA30}"/>
+              </a:ext>
+            </a:extLst>
+          </p:cNvPr>
+          <p:cNvSpPr>
+            <a:spLocks xmlns:a="http://schemas.openxmlformats.org/drawingml/2006/main" noGrp="1"/>
+          </p:cNvSpPr>
+          <p:nvPr/>
+        </p:nvSpPr>
+        <p:spPr>
+          <a:xfrm xmlns:a="http://schemas.openxmlformats.org/drawingml/2006/main">
+            <a:off x="6286500" y="2971800"/>
+            <a:ext cx="1990725" cy="552450"/>
+          </a:xfrm>
+          <a:prstGeom xmlns:a="http://schemas.openxmlformats.org/drawingml/2006/main" prst="rect">
+            <a:avLst/>
+          </a:prstGeom>
+          <a:noFill xmlns:a="http://schemas.openxmlformats.org/drawingml/2006/main"/>
+          <a:ln xmlns:a="http://schemas.openxmlformats.org/drawingml/2006/main" w="0">
+            <a:noFill/>
+            <a:prstDash val="solid"/>
+          </a:ln>
+        </p:spPr>
+        <p:txBody>
+          <a:bodyPr xmlns:a="http://schemas.openxmlformats.org/drawingml/2006/main"/>
+          <a:lstStyle xmlns:a="http://schemas.openxmlformats.org/drawingml/2006/main"/>
+          <a:p xmlns:a="http://schemas.openxmlformats.org/drawingml/2006/main">
+            <a:pPr algn="l">
+              <a:defRPr sz="1125" b="0" i="0">
+                <a:solidFill>
+                  <a:srgbClr val="555555"/>
+                </a:solidFill>
+              </a:defRPr>
+            </a:pPr>
+            <a:r>
+              <a:rPr sz="1125" b="0" i="0">
+                <a:solidFill>
+                  <a:srgbClr val="555555"/>
+                </a:solidFill>
+              </a:rPr>
+              <a:t>Same policy surface returned 30.0%.</a:t>
+            </a:r>
+          </a:p>
+        </p:txBody>
+      </p:sp>
+      <p:sp>
+        <p:nvSpPr>
+          <p:cNvPr id="16" name="">
+            <a:extLst xmlns:a="http://schemas.openxmlformats.org/drawingml/2006/main">
+              <a:ext uri="{FF2B5EF4-FFF2-40B4-BE49-F238E27FC236}">
+                <a16:creationId xmlns:a16="http://schemas.microsoft.com/office/drawing/2014/main" id="{80FABF14-0CC0-4D39-8F67-C31002B1E47F}"/>
+              </a:ext>
+            </a:extLst>
+          </p:cNvPr>
+          <p:cNvSpPr>
+            <a:spLocks xmlns:a="http://schemas.openxmlformats.org/drawingml/2006/main" noGrp="1"/>
+          </p:cNvSpPr>
+          <p:nvPr/>
+        </p:nvSpPr>
+        <p:spPr>
+          <a:xfrm xmlns:a="http://schemas.openxmlformats.org/drawingml/2006/main">
+            <a:off x="8820150" y="2152650"/>
+            <a:ext cx="2333625" cy="1428750"/>
+          </a:xfrm>
+          <a:prstGeom xmlns:a="http://schemas.openxmlformats.org/drawingml/2006/main" prst="rect">
+            <a:avLst/>
+          </a:prstGeom>
+          <a:solidFill xmlns:a="http://schemas.openxmlformats.org/drawingml/2006/main">
+            <a:srgbClr val="EDEDED"/>
+          </a:solidFill>
+          <a:ln xmlns:a="http://schemas.openxmlformats.org/drawingml/2006/main" w="9525">
+            <a:solidFill>
+              <a:srgbClr val="B8BCC4"/>
+            </a:solidFill>
+            <a:prstDash val="solid"/>
+          </a:ln>
+        </p:spPr>
+      </p:sp>
+      <p:sp>
+        <p:nvSpPr>
+          <p:cNvPr id="17" name="">
+            <a:extLst xmlns:a="http://schemas.openxmlformats.org/drawingml/2006/main">
+              <a:ext uri="{FF2B5EF4-FFF2-40B4-BE49-F238E27FC236}">
+                <a16:creationId xmlns:a16="http://schemas.microsoft.com/office/drawing/2014/main" id="{47B72BF2-1BD6-4A35-8058-CD9E4773FA5D}"/>
+              </a:ext>
+            </a:extLst>
+          </p:cNvPr>
+          <p:cNvSpPr>
+            <a:spLocks xmlns:a="http://schemas.openxmlformats.org/drawingml/2006/main" noGrp="1"/>
+          </p:cNvSpPr>
+          <p:nvPr/>
+        </p:nvSpPr>
+        <p:spPr>
+          <a:xfrm xmlns:a="http://schemas.openxmlformats.org/drawingml/2006/main">
+            <a:off x="8991600" y="2305050"/>
+            <a:ext cx="1990725" cy="171450"/>
+          </a:xfrm>
+          <a:prstGeom xmlns:a="http://schemas.openxmlformats.org/drawingml/2006/main" prst="rect">
+            <a:avLst/>
+          </a:prstGeom>
+          <a:noFill xmlns:a="http://schemas.openxmlformats.org/drawingml/2006/main"/>
+          <a:ln xmlns:a="http://schemas.openxmlformats.org/drawingml/2006/main" w="0">
+            <a:noFill/>
+            <a:prstDash val="solid"/>
+          </a:ln>
+        </p:spPr>
+        <p:txBody>
+          <a:bodyPr xmlns:a="http://schemas.openxmlformats.org/drawingml/2006/main"/>
+          <a:lstStyle xmlns:a="http://schemas.openxmlformats.org/drawingml/2006/main"/>
+          <a:p xmlns:a="http://schemas.openxmlformats.org/drawingml/2006/main">
+            <a:pPr algn="l">
+              <a:defRPr sz="900" b="1" i="0">
+                <a:solidFill>
+                  <a:srgbClr val="555555"/>
+                </a:solidFill>
+              </a:defRPr>
+            </a:pPr>
+            <a:r>
+              <a:rPr sz="900" b="1" i="0">
+                <a:solidFill>
+                  <a:srgbClr val="555555"/>
+                </a:solidFill>
+              </a:rPr>
+              <a:t>2020 H5 RETURN</a:t>
+            </a:r>
+          </a:p>
+        </p:txBody>
+      </p:sp>
+      <p:sp>
+        <p:nvSpPr>
+          <p:cNvPr id="18" name="">
+            <a:extLst xmlns:a="http://schemas.openxmlformats.org/drawingml/2006/main">
+              <a:ext uri="{FF2B5EF4-FFF2-40B4-BE49-F238E27FC236}">
+                <a16:creationId xmlns:a16="http://schemas.microsoft.com/office/drawing/2014/main" id="{6EA7361D-8A2A-442F-A88D-BE0159B522E1}"/>
+              </a:ext>
+            </a:extLst>
+          </p:cNvPr>
+          <p:cNvSpPr>
+            <a:spLocks xmlns:a="http://schemas.openxmlformats.org/drawingml/2006/main" noGrp="1"/>
+          </p:cNvSpPr>
+          <p:nvPr/>
+        </p:nvSpPr>
+        <p:spPr>
+          <a:xfrm xmlns:a="http://schemas.openxmlformats.org/drawingml/2006/main">
+            <a:off x="8991600" y="2552700"/>
+            <a:ext cx="1990725" cy="361950"/>
+          </a:xfrm>
+          <a:prstGeom xmlns:a="http://schemas.openxmlformats.org/drawingml/2006/main" prst="rect">
+            <a:avLst/>
+          </a:prstGeom>
+          <a:noFill xmlns:a="http://schemas.openxmlformats.org/drawingml/2006/main"/>
+          <a:ln xmlns:a="http://schemas.openxmlformats.org/drawingml/2006/main" w="0">
+            <a:noFill/>
+            <a:prstDash val="solid"/>
+          </a:ln>
+        </p:spPr>
+        <p:txBody>
+          <a:bodyPr xmlns:a="http://schemas.openxmlformats.org/drawingml/2006/main"/>
+          <a:lstStyle xmlns:a="http://schemas.openxmlformats.org/drawingml/2006/main"/>
+          <a:p xmlns:a="http://schemas.openxmlformats.org/drawingml/2006/main">
+            <a:pPr algn="l">
+              <a:defRPr sz="2250" b="1" i="0">
+                <a:solidFill>
+                  <a:srgbClr val="000000"/>
+                </a:solidFill>
+              </a:defRPr>
+            </a:pPr>
+            <a:r>
+              <a:rPr sz="2250" b="1" i="0">
+                <a:solidFill>
+                  <a:srgbClr val="000000"/>
+                </a:solidFill>
+              </a:rPr>
+              <a:t>9.6%</a:t>
+            </a:r>
+          </a:p>
+        </p:txBody>
+      </p:sp>
+      <p:sp>
+        <p:nvSpPr>
+          <p:cNvPr id="19" name="">
+            <a:extLst xmlns:a="http://schemas.openxmlformats.org/drawingml/2006/main">
+              <a:ext uri="{FF2B5EF4-FFF2-40B4-BE49-F238E27FC236}">
+                <a16:creationId xmlns:a16="http://schemas.microsoft.com/office/drawing/2014/main" id="{8C0C65B4-7E29-4936-B184-E372216A65E1}"/>
+              </a:ext>
+            </a:extLst>
+          </p:cNvPr>
+          <p:cNvSpPr>
+            <a:spLocks xmlns:a="http://schemas.openxmlformats.org/drawingml/2006/main" noGrp="1"/>
+          </p:cNvSpPr>
+          <p:nvPr/>
+        </p:nvSpPr>
+        <p:spPr>
+          <a:xfrm xmlns:a="http://schemas.openxmlformats.org/drawingml/2006/main">
+            <a:off x="8991600" y="2971800"/>
+            <a:ext cx="1990725" cy="552450"/>
+          </a:xfrm>
+          <a:prstGeom xmlns:a="http://schemas.openxmlformats.org/drawingml/2006/main" prst="rect">
+            <a:avLst/>
+          </a:prstGeom>
+          <a:noFill xmlns:a="http://schemas.openxmlformats.org/drawingml/2006/main"/>
+          <a:ln xmlns:a="http://schemas.openxmlformats.org/drawingml/2006/main" w="0">
+            <a:noFill/>
+            <a:prstDash val="solid"/>
+          </a:ln>
+        </p:spPr>
+        <p:txBody>
+          <a:bodyPr xmlns:a="http://schemas.openxmlformats.org/drawingml/2006/main"/>
+          <a:lstStyle xmlns:a="http://schemas.openxmlformats.org/drawingml/2006/main"/>
+          <a:p xmlns:a="http://schemas.openxmlformats.org/drawingml/2006/main">
+            <a:pPr algn="l">
+              <a:defRPr sz="1125" b="0" i="0">
+                <a:solidFill>
+                  <a:srgbClr val="555555"/>
+                </a:solidFill>
+              </a:defRPr>
+            </a:pPr>
+            <a:r>
+              <a:rPr sz="1125" b="0" i="0">
+                <a:solidFill>
+                  <a:srgbClr val="555555"/>
+                </a:solidFill>
+              </a:rPr>
+              <a:t>Longer label fell back to 9.6%.</a:t>
+            </a:r>
+          </a:p>
+        </p:txBody>
+      </p:sp>
+      <p:sp>
+        <p:nvSpPr>
+          <p:cNvPr id="20" name="">
+            <a:extLst xmlns:a="http://schemas.openxmlformats.org/drawingml/2006/main">
+              <a:ext uri="{FF2B5EF4-FFF2-40B4-BE49-F238E27FC236}">
+                <a16:creationId xmlns:a16="http://schemas.microsoft.com/office/drawing/2014/main" id="{4ED68682-BCA1-45E9-B7C1-6126EDDB84B5}"/>
+              </a:ext>
+            </a:extLst>
+          </p:cNvPr>
+          <p:cNvSpPr>
+            <a:spLocks xmlns:a="http://schemas.openxmlformats.org/drawingml/2006/main" noGrp="1"/>
+          </p:cNvSpPr>
+          <p:nvPr/>
+        </p:nvSpPr>
+        <p:spPr>
+          <a:xfrm xmlns:a="http://schemas.openxmlformats.org/drawingml/2006/main">
+            <a:off x="1066800" y="4095750"/>
+            <a:ext cx="9334500" cy="914400"/>
+          </a:xfrm>
+          <a:prstGeom xmlns:a="http://schemas.openxmlformats.org/drawingml/2006/main" prst="rect">
+            <a:avLst/>
+          </a:prstGeom>
+          <a:noFill xmlns:a="http://schemas.openxmlformats.org/drawingml/2006/main"/>
+          <a:ln xmlns:a="http://schemas.openxmlformats.org/drawingml/2006/main" w="0">
+            <a:noFill/>
+            <a:prstDash val="solid"/>
+          </a:ln>
+        </p:spPr>
+        <p:txBody>
+          <a:bodyPr xmlns:a="http://schemas.openxmlformats.org/drawingml/2006/main"/>
+          <a:lstStyle xmlns:a="http://schemas.openxmlformats.org/drawingml/2006/main"/>
+          <a:p xmlns:a="http://schemas.openxmlformats.org/drawingml/2006/main">
+            <a:pPr algn="ctr">
+              <a:defRPr sz="2100" b="1" i="0">
+                <a:solidFill>
+                  <a:srgbClr val="000000"/>
+                </a:solidFill>
+              </a:defRPr>
+            </a:pPr>
+            <a:r>
+              <a:rPr sz="2100" b="1" i="0">
+                <a:solidFill>
+                  <a:srgbClr val="000000"/>
+                </a:solidFill>
+              </a:rPr>
+              <a:t>h1 is the best GLM horizon in the 2020 rally, lifting the TRAIN-grid lane to 54.0%. That is real improvement, but it still leaves most of the basket rally uncaptured.</a:t>
+            </a:r>
+          </a:p>
+        </p:txBody>
+      </p:sp>
+    </p:spTree>
+    <p:extLst>
+      <p:ext uri="{BB962C8B-B14F-4D97-AF65-F5344CB8AC3E}">
+        <p14:creationId xmlns:p14="http://schemas.microsoft.com/office/powerpoint/2010/main" val="761728969"/>
+      </p:ext>
+    </p:extLst>
+  </p:cSld>
+</p:sld>
+</file>
+
+<file path=ppt/slides/slide26.xml><?xml version="1.0" encoding="utf-8"?>
+<p:sld xmlns:p="http://schemas.openxmlformats.org/presentationml/2006/main">
+  <p:cSld>
+    <p:bg>
+      <p:bgPr>
+        <a:solidFill xmlns:a="http://schemas.openxmlformats.org/drawingml/2006/main">
+          <a:srgbClr val="FFFFFF"/>
+        </a:solidFill>
+      </p:bgPr>
+    </p:bg>
+    <p:spTree>
+      <p:nvGrpSpPr>
+        <p:cNvPr id="1" name=""/>
+        <p:cNvGrpSpPr/>
+        <p:nvPr/>
+      </p:nvGrpSpPr>
+      <p:grpSpPr>
+        <a:xfrm xmlns:a="http://schemas.openxmlformats.org/drawingml/2006/main"/>
+      </p:grpSpPr>
+      <p:sp>
+        <p:nvSpPr>
+          <p:cNvPr id="1" name="">
+            <a:extLst xmlns:a="http://schemas.openxmlformats.org/drawingml/2006/main">
+              <a:ext uri="{FF2B5EF4-FFF2-40B4-BE49-F238E27FC236}">
+                <a16:creationId xmlns:a16="http://schemas.microsoft.com/office/drawing/2014/main" id="{59F3FA0E-68A0-495B-AD0E-13238DA5CB05}"/>
+              </a:ext>
+            </a:extLst>
+          </p:cNvPr>
+          <p:cNvSpPr>
+            <a:spLocks xmlns:a="http://schemas.openxmlformats.org/drawingml/2006/main" noGrp="1"/>
+          </p:cNvSpPr>
+          <p:nvPr/>
+        </p:nvSpPr>
+        <p:spPr>
+          <a:xfrm xmlns:a="http://schemas.openxmlformats.org/drawingml/2006/main">
+            <a:off x="685800" y="400050"/>
+            <a:ext cx="8572500" cy="247650"/>
+          </a:xfrm>
+          <a:prstGeom xmlns:a="http://schemas.openxmlformats.org/drawingml/2006/main" prst="rect">
+            <a:avLst/>
+          </a:prstGeom>
+          <a:noFill xmlns:a="http://schemas.openxmlformats.org/drawingml/2006/main"/>
+          <a:ln xmlns:a="http://schemas.openxmlformats.org/drawingml/2006/main" w="0">
+            <a:noFill/>
+            <a:prstDash val="solid"/>
+          </a:ln>
+        </p:spPr>
+        <p:txBody>
+          <a:bodyPr xmlns:a="http://schemas.openxmlformats.org/drawingml/2006/main"/>
+          <a:lstStyle xmlns:a="http://schemas.openxmlformats.org/drawingml/2006/main"/>
+          <a:p xmlns:a="http://schemas.openxmlformats.org/drawingml/2006/main">
+            <a:pPr algn="l">
+              <a:defRPr sz="975" b="1" i="0">
+                <a:solidFill>
+                  <a:srgbClr val="555555"/>
+                </a:solidFill>
+              </a:defRPr>
+            </a:pPr>
+            <a:r>
+              <a:rPr sz="975" b="1" i="0">
+                <a:solidFill>
+                  <a:srgbClr val="555555"/>
+                </a:solidFill>
+              </a:rPr>
+              <a:t>GEN5.4 ML DECISION ENGINE</a:t>
+            </a:r>
+          </a:p>
+        </p:txBody>
+      </p:sp>
+      <p:sp>
+        <p:nvSpPr>
+          <p:cNvPr id="2" name="">
+            <a:extLst xmlns:a="http://schemas.openxmlformats.org/drawingml/2006/main">
+              <a:ext uri="{FF2B5EF4-FFF2-40B4-BE49-F238E27FC236}">
+                <a16:creationId xmlns:a16="http://schemas.microsoft.com/office/drawing/2014/main" id="{8FDCC519-DEC0-41D2-BFF1-A540E6CD6D3B}"/>
+              </a:ext>
+            </a:extLst>
+          </p:cNvPr>
+          <p:cNvSpPr>
+            <a:spLocks xmlns:a="http://schemas.openxmlformats.org/drawingml/2006/main" noGrp="1"/>
+          </p:cNvSpPr>
+          <p:nvPr/>
+        </p:nvSpPr>
+        <p:spPr>
+          <a:xfrm xmlns:a="http://schemas.openxmlformats.org/drawingml/2006/main">
+            <a:off x="685800" y="723900"/>
+            <a:ext cx="10287000" cy="876300"/>
+          </a:xfrm>
+          <a:prstGeom xmlns:a="http://schemas.openxmlformats.org/drawingml/2006/main" prst="rect">
+            <a:avLst/>
+          </a:prstGeom>
+          <a:noFill xmlns:a="http://schemas.openxmlformats.org/drawingml/2006/main"/>
+          <a:ln xmlns:a="http://schemas.openxmlformats.org/drawingml/2006/main" w="0">
+            <a:noFill/>
+            <a:prstDash val="solid"/>
+          </a:ln>
+        </p:spPr>
+        <p:txBody>
+          <a:bodyPr xmlns:a="http://schemas.openxmlformats.org/drawingml/2006/main"/>
+          <a:lstStyle xmlns:a="http://schemas.openxmlformats.org/drawingml/2006/main"/>
+          <a:p xmlns:a="http://schemas.openxmlformats.org/drawingml/2006/main">
+            <a:pPr algn="l">
+              <a:defRPr sz="2850" b="1" i="0">
+                <a:solidFill>
+                  <a:srgbClr val="000000"/>
+                </a:solidFill>
+              </a:defRPr>
+            </a:pPr>
+            <a:r>
+              <a:rPr sz="2850" b="1" i="0">
+                <a:solidFill>
+                  <a:srgbClr val="000000"/>
+                </a:solidFill>
+              </a:rPr>
+              <a:t>The equity curves show why h1 is useful but not sufficient</a:t>
+            </a:r>
+          </a:p>
+        </p:txBody>
+      </p:sp>
+      <p:sp>
+        <p:nvSpPr>
+          <p:cNvPr id="3" name="">
+            <a:extLst xmlns:a="http://schemas.openxmlformats.org/drawingml/2006/main">
+              <a:ext uri="{FF2B5EF4-FFF2-40B4-BE49-F238E27FC236}">
+                <a16:creationId xmlns:a16="http://schemas.microsoft.com/office/drawing/2014/main" id="{18D01A58-B714-4630-AAE7-B4F7178EEF51}"/>
+              </a:ext>
+            </a:extLst>
+          </p:cNvPr>
+          <p:cNvSpPr>
+            <a:spLocks xmlns:a="http://schemas.openxmlformats.org/drawingml/2006/main" noGrp="1"/>
+          </p:cNvSpPr>
+          <p:nvPr/>
+        </p:nvSpPr>
+        <p:spPr>
+          <a:xfrm xmlns:a="http://schemas.openxmlformats.org/drawingml/2006/main">
+            <a:off x="685800" y="1657350"/>
+            <a:ext cx="10820400" cy="19050"/>
+          </a:xfrm>
+          <a:prstGeom xmlns:a="http://schemas.openxmlformats.org/drawingml/2006/main" prst="rect">
+            <a:avLst/>
+          </a:prstGeom>
+          <a:solidFill xmlns:a="http://schemas.openxmlformats.org/drawingml/2006/main">
+            <a:srgbClr val="B8BCC4"/>
+          </a:solidFill>
+          <a:ln xmlns:a="http://schemas.openxmlformats.org/drawingml/2006/main" w="0">
+            <a:noFill/>
+            <a:prstDash val="solid"/>
+          </a:ln>
+        </p:spPr>
+      </p:sp>
+      <p:pic>
+        <p:nvPicPr>
+          <p:cNvPr id="10" name=""/>
+          <p:cNvPicPr>
+            <a:picLocks xmlns:a="http://schemas.openxmlformats.org/drawingml/2006/main" noChangeAspect="1"/>
+          </p:cNvPicPr>
+          <p:nvPr/>
+        </p:nvPicPr>
+        <p:blipFill>
+          <a:blip xmlns:r="http://schemas.openxmlformats.org/officeDocument/2006/relationships" xmlns:a="http://schemas.openxmlformats.org/drawingml/2006/main" r:embed="R064ce2657cb04104"/>
+          <a:stretch xmlns:a="http://schemas.openxmlformats.org/drawingml/2006/main"/>
+        </p:blipFill>
+        <p:spPr>
+          <a:xfrm xmlns:a="http://schemas.openxmlformats.org/drawingml/2006/main">
+            <a:off x="835819" y="2000250"/>
+            <a:ext cx="6900863" cy="3943350"/>
+          </a:xfrm>
+          <a:prstGeom xmlns:a="http://schemas.openxmlformats.org/drawingml/2006/main" prst="rect">
+            <a:avLst/>
+          </a:prstGeom>
+        </p:spPr>
+      </p:pic>
+      <p:sp>
+        <p:nvSpPr>
+          <p:cNvPr id="5" name="">
+            <a:extLst xmlns:a="http://schemas.openxmlformats.org/drawingml/2006/main">
+              <a:ext uri="{FF2B5EF4-FFF2-40B4-BE49-F238E27FC236}">
+                <a16:creationId xmlns:a16="http://schemas.microsoft.com/office/drawing/2014/main" id="{4F96ABB3-3A90-4B10-9708-FA98EFB26C37}"/>
+              </a:ext>
+            </a:extLst>
+          </p:cNvPr>
+          <p:cNvSpPr>
+            <a:spLocks xmlns:a="http://schemas.openxmlformats.org/drawingml/2006/main" noGrp="1"/>
+          </p:cNvSpPr>
+          <p:nvPr/>
+        </p:nvSpPr>
+        <p:spPr>
+          <a:xfrm xmlns:a="http://schemas.openxmlformats.org/drawingml/2006/main">
+            <a:off x="8477250" y="2133600"/>
+            <a:ext cx="2571750" cy="304800"/>
+          </a:xfrm>
+          <a:prstGeom xmlns:a="http://schemas.openxmlformats.org/drawingml/2006/main" prst="rect">
+            <a:avLst/>
+          </a:prstGeom>
+          <a:noFill xmlns:a="http://schemas.openxmlformats.org/drawingml/2006/main"/>
+          <a:ln xmlns:a="http://schemas.openxmlformats.org/drawingml/2006/main" w="0">
+            <a:noFill/>
+            <a:prstDash val="solid"/>
+          </a:ln>
+        </p:spPr>
+        <p:txBody>
+          <a:bodyPr xmlns:a="http://schemas.openxmlformats.org/drawingml/2006/main"/>
+          <a:lstStyle xmlns:a="http://schemas.openxmlformats.org/drawingml/2006/main"/>
+          <a:p xmlns:a="http://schemas.openxmlformats.org/drawingml/2006/main">
+            <a:pPr algn="l">
+              <a:defRPr sz="1950" b="1" i="0">
+                <a:solidFill>
+                  <a:srgbClr val="222222"/>
+                </a:solidFill>
+              </a:defRPr>
+            </a:pPr>
+            <a:r>
+              <a:rPr sz="1950" b="1" i="0">
+                <a:solidFill>
+                  <a:srgbClr val="222222"/>
+                </a:solidFill>
+              </a:rPr>
+              <a:t>What changed</a:t>
+            </a:r>
+          </a:p>
+        </p:txBody>
+      </p:sp>
+      <p:sp>
+        <p:nvSpPr>
+          <p:cNvPr id="6" name="">
+            <a:extLst xmlns:a="http://schemas.openxmlformats.org/drawingml/2006/main">
+              <a:ext uri="{FF2B5EF4-FFF2-40B4-BE49-F238E27FC236}">
+                <a16:creationId xmlns:a16="http://schemas.microsoft.com/office/drawing/2014/main" id="{0B4E5558-B3F8-4D31-AF27-8A0D33F5F5B9}"/>
+              </a:ext>
+            </a:extLst>
+          </p:cNvPr>
+          <p:cNvSpPr>
+            <a:spLocks xmlns:a="http://schemas.openxmlformats.org/drawingml/2006/main" noGrp="1"/>
+          </p:cNvSpPr>
+          <p:nvPr/>
+        </p:nvSpPr>
+        <p:spPr>
+          <a:xfrm xmlns:a="http://schemas.openxmlformats.org/drawingml/2006/main">
+            <a:off x="8477250" y="2705100"/>
+            <a:ext cx="2705100" cy="2381250"/>
+          </a:xfrm>
+          <a:prstGeom xmlns:a="http://schemas.openxmlformats.org/drawingml/2006/main" prst="rect">
+            <a:avLst/>
+          </a:prstGeom>
+          <a:noFill xmlns:a="http://schemas.openxmlformats.org/drawingml/2006/main"/>
+          <a:ln xmlns:a="http://schemas.openxmlformats.org/drawingml/2006/main" w="0">
+            <a:noFill/>
+            <a:prstDash val="solid"/>
+          </a:ln>
+        </p:spPr>
+        <p:txBody>
+          <a:bodyPr xmlns:a="http://schemas.openxmlformats.org/drawingml/2006/main"/>
+          <a:lstStyle xmlns:a="http://schemas.openxmlformats.org/drawingml/2006/main"/>
+          <a:p xmlns:a="http://schemas.openxmlformats.org/drawingml/2006/main">
+            <a:pPr algn="l">
+              <a:defRPr sz="1650" b="0" i="0">
+                <a:solidFill>
+                  <a:srgbClr val="222222"/>
+                </a:solidFill>
+              </a:defRPr>
+            </a:pPr>
+            <a:r>
+              <a:rPr sz="1650" b="0" i="0">
+                <a:solidFill>
+                  <a:srgbClr val="222222"/>
+                </a:solidFill>
+              </a:rPr>
+              <a:t>h1 had the strongest 2020 participation at 43.0% exposure and 54.0% return. In 2022, no horizon solved defense: h1 returned -49.7%, h3 -48.4%, and h5 -42.4%.</a:t>
+            </a:r>
+          </a:p>
+        </p:txBody>
+      </p:sp>
+    </p:spTree>
+    <p:extLst>
+      <p:ext uri="{BB962C8B-B14F-4D97-AF65-F5344CB8AC3E}">
+        <p14:creationId xmlns:p14="http://schemas.microsoft.com/office/powerpoint/2010/main" val="876311893"/>
+      </p:ext>
+    </p:extLst>
+  </p:cSld>
+</p:sld>
+</file>
+
+<file path=ppt/slides/slide27.xml><?xml version="1.0" encoding="utf-8"?>
+<p:sld xmlns:p="http://schemas.openxmlformats.org/presentationml/2006/main">
+  <p:cSld>
+    <p:bg>
+      <p:bgPr>
+        <a:solidFill xmlns:a="http://schemas.openxmlformats.org/drawingml/2006/main">
+          <a:srgbClr val="FFFFFF"/>
+        </a:solidFill>
+      </p:bgPr>
+    </p:bg>
+    <p:spTree>
+      <p:nvGrpSpPr>
+        <p:cNvPr id="1" name=""/>
+        <p:cNvGrpSpPr/>
+        <p:nvPr/>
+      </p:nvGrpSpPr>
+      <p:grpSpPr>
+        <a:xfrm xmlns:a="http://schemas.openxmlformats.org/drawingml/2006/main"/>
+      </p:grpSpPr>
+      <p:sp>
+        <p:nvSpPr>
+          <p:cNvPr id="1" name="">
+            <a:extLst xmlns:a="http://schemas.openxmlformats.org/drawingml/2006/main">
+              <a:ext uri="{FF2B5EF4-FFF2-40B4-BE49-F238E27FC236}">
+                <a16:creationId xmlns:a16="http://schemas.microsoft.com/office/drawing/2014/main" id="{C025F8D2-A27E-4170-86F5-755DA66119B6}"/>
+              </a:ext>
+            </a:extLst>
+          </p:cNvPr>
+          <p:cNvSpPr>
+            <a:spLocks xmlns:a="http://schemas.openxmlformats.org/drawingml/2006/main" noGrp="1"/>
+          </p:cNvSpPr>
+          <p:nvPr/>
+        </p:nvSpPr>
+        <p:spPr>
+          <a:xfrm xmlns:a="http://schemas.openxmlformats.org/drawingml/2006/main">
+            <a:off x="685800" y="400050"/>
+            <a:ext cx="8572500" cy="247650"/>
+          </a:xfrm>
+          <a:prstGeom xmlns:a="http://schemas.openxmlformats.org/drawingml/2006/main" prst="rect">
+            <a:avLst/>
+          </a:prstGeom>
+          <a:noFill xmlns:a="http://schemas.openxmlformats.org/drawingml/2006/main"/>
+          <a:ln xmlns:a="http://schemas.openxmlformats.org/drawingml/2006/main" w="0">
+            <a:noFill/>
+            <a:prstDash val="solid"/>
+          </a:ln>
+        </p:spPr>
+        <p:txBody>
+          <a:bodyPr xmlns:a="http://schemas.openxmlformats.org/drawingml/2006/main"/>
+          <a:lstStyle xmlns:a="http://schemas.openxmlformats.org/drawingml/2006/main"/>
+          <a:p xmlns:a="http://schemas.openxmlformats.org/drawingml/2006/main">
+            <a:pPr algn="l">
+              <a:defRPr sz="975" b="1" i="0">
+                <a:solidFill>
+                  <a:srgbClr val="555555"/>
+                </a:solidFill>
+              </a:defRPr>
+            </a:pPr>
+            <a:r>
+              <a:rPr sz="975" b="1" i="0">
+                <a:solidFill>
+                  <a:srgbClr val="555555"/>
+                </a:solidFill>
+              </a:rPr>
+              <a:t>GEN5.4 ML DECISION ENGINE</a:t>
+            </a:r>
+          </a:p>
+        </p:txBody>
+      </p:sp>
+      <p:sp>
+        <p:nvSpPr>
+          <p:cNvPr id="2" name="">
+            <a:extLst xmlns:a="http://schemas.openxmlformats.org/drawingml/2006/main">
+              <a:ext uri="{FF2B5EF4-FFF2-40B4-BE49-F238E27FC236}">
+                <a16:creationId xmlns:a16="http://schemas.microsoft.com/office/drawing/2014/main" id="{64592A2A-3EE8-4A3A-9196-343044A7EDF1}"/>
+              </a:ext>
+            </a:extLst>
+          </p:cNvPr>
+          <p:cNvSpPr>
+            <a:spLocks xmlns:a="http://schemas.openxmlformats.org/drawingml/2006/main" noGrp="1"/>
+          </p:cNvSpPr>
+          <p:nvPr/>
+        </p:nvSpPr>
+        <p:spPr>
+          <a:xfrm xmlns:a="http://schemas.openxmlformats.org/drawingml/2006/main">
+            <a:off x="685800" y="723900"/>
+            <a:ext cx="10287000" cy="876300"/>
+          </a:xfrm>
+          <a:prstGeom xmlns:a="http://schemas.openxmlformats.org/drawingml/2006/main" prst="rect">
+            <a:avLst/>
+          </a:prstGeom>
+          <a:noFill xmlns:a="http://schemas.openxmlformats.org/drawingml/2006/main"/>
+          <a:ln xmlns:a="http://schemas.openxmlformats.org/drawingml/2006/main" w="0">
+            <a:noFill/>
+            <a:prstDash val="solid"/>
+          </a:ln>
+        </p:spPr>
+        <p:txBody>
+          <a:bodyPr xmlns:a="http://schemas.openxmlformats.org/drawingml/2006/main"/>
+          <a:lstStyle xmlns:a="http://schemas.openxmlformats.org/drawingml/2006/main"/>
+          <a:p xmlns:a="http://schemas.openxmlformats.org/drawingml/2006/main">
+            <a:pPr algn="l">
+              <a:defRPr sz="2850" b="1" i="0">
+                <a:solidFill>
+                  <a:srgbClr val="000000"/>
+                </a:solidFill>
+              </a:defRPr>
+            </a:pPr>
+            <a:r>
+              <a:rPr sz="2850" b="1" i="0">
+                <a:solidFill>
+                  <a:srgbClr val="000000"/>
+                </a:solidFill>
+              </a:rPr>
+              <a:t>The ranking audit argues against more GLM-only tinkering</a:t>
+            </a:r>
+          </a:p>
+        </p:txBody>
+      </p:sp>
+      <p:sp>
+        <p:nvSpPr>
+          <p:cNvPr id="3" name="">
+            <a:extLst xmlns:a="http://schemas.openxmlformats.org/drawingml/2006/main">
+              <a:ext uri="{FF2B5EF4-FFF2-40B4-BE49-F238E27FC236}">
+                <a16:creationId xmlns:a16="http://schemas.microsoft.com/office/drawing/2014/main" id="{AA4B746E-D629-4736-85D9-E789B2115F3C}"/>
+              </a:ext>
+            </a:extLst>
+          </p:cNvPr>
+          <p:cNvSpPr>
+            <a:spLocks xmlns:a="http://schemas.openxmlformats.org/drawingml/2006/main" noGrp="1"/>
+          </p:cNvSpPr>
+          <p:nvPr/>
+        </p:nvSpPr>
+        <p:spPr>
+          <a:xfrm xmlns:a="http://schemas.openxmlformats.org/drawingml/2006/main">
+            <a:off x="685800" y="1657350"/>
+            <a:ext cx="10820400" cy="19050"/>
+          </a:xfrm>
+          <a:prstGeom xmlns:a="http://schemas.openxmlformats.org/drawingml/2006/main" prst="rect">
+            <a:avLst/>
+          </a:prstGeom>
+          <a:solidFill xmlns:a="http://schemas.openxmlformats.org/drawingml/2006/main">
+            <a:srgbClr val="B8BCC4"/>
+          </a:solidFill>
+          <a:ln xmlns:a="http://schemas.openxmlformats.org/drawingml/2006/main" w="0">
+            <a:noFill/>
+            <a:prstDash val="solid"/>
+          </a:ln>
+        </p:spPr>
+      </p:sp>
+      <p:pic>
+        <p:nvPicPr>
+          <p:cNvPr id="10" name=""/>
+          <p:cNvPicPr>
+            <a:picLocks xmlns:a="http://schemas.openxmlformats.org/drawingml/2006/main" noChangeAspect="1"/>
+          </p:cNvPicPr>
+          <p:nvPr/>
+        </p:nvPicPr>
+        <p:blipFill>
+          <a:blip xmlns:r="http://schemas.openxmlformats.org/officeDocument/2006/relationships" xmlns:a="http://schemas.openxmlformats.org/drawingml/2006/main" r:embed="Rab7b3773562f4b2b"/>
+          <a:stretch xmlns:a="http://schemas.openxmlformats.org/drawingml/2006/main"/>
+        </p:blipFill>
+        <p:spPr>
+          <a:xfrm xmlns:a="http://schemas.openxmlformats.org/drawingml/2006/main">
+            <a:off x="704850" y="2214196"/>
+            <a:ext cx="5715000" cy="3077308"/>
+          </a:xfrm>
+          <a:prstGeom xmlns:a="http://schemas.openxmlformats.org/drawingml/2006/main" prst="rect">
+            <a:avLst/>
+          </a:prstGeom>
+        </p:spPr>
+      </p:pic>
+      <p:sp>
+        <p:nvSpPr>
+          <p:cNvPr id="5" name="">
+            <a:extLst xmlns:a="http://schemas.openxmlformats.org/drawingml/2006/main">
+              <a:ext uri="{FF2B5EF4-FFF2-40B4-BE49-F238E27FC236}">
+                <a16:creationId xmlns:a16="http://schemas.microsoft.com/office/drawing/2014/main" id="{579161D5-3989-490B-9AE2-A03C6F5A9B28}"/>
+              </a:ext>
+            </a:extLst>
+          </p:cNvPr>
+          <p:cNvSpPr>
+            <a:spLocks xmlns:a="http://schemas.openxmlformats.org/drawingml/2006/main" noGrp="1"/>
+          </p:cNvSpPr>
+          <p:nvPr/>
+        </p:nvSpPr>
+        <p:spPr>
+          <a:xfrm xmlns:a="http://schemas.openxmlformats.org/drawingml/2006/main">
+            <a:off x="7105650" y="2133600"/>
+            <a:ext cx="2857500" cy="323850"/>
+          </a:xfrm>
+          <a:prstGeom xmlns:a="http://schemas.openxmlformats.org/drawingml/2006/main" prst="rect">
+            <a:avLst/>
+          </a:prstGeom>
+          <a:noFill xmlns:a="http://schemas.openxmlformats.org/drawingml/2006/main"/>
+          <a:ln xmlns:a="http://schemas.openxmlformats.org/drawingml/2006/main" w="0">
+            <a:noFill/>
+            <a:prstDash val="solid"/>
+          </a:ln>
+        </p:spPr>
+        <p:txBody>
+          <a:bodyPr xmlns:a="http://schemas.openxmlformats.org/drawingml/2006/main"/>
+          <a:lstStyle xmlns:a="http://schemas.openxmlformats.org/drawingml/2006/main"/>
+          <a:p xmlns:a="http://schemas.openxmlformats.org/drawingml/2006/main">
+            <a:pPr algn="l">
+              <a:defRPr sz="1950" b="1" i="0">
+                <a:solidFill>
+                  <a:srgbClr val="222222"/>
+                </a:solidFill>
+              </a:defRPr>
+            </a:pPr>
+            <a:r>
+              <a:rPr sz="1950" b="1" i="0">
+                <a:solidFill>
+                  <a:srgbClr val="222222"/>
+                </a:solidFill>
+              </a:rPr>
+              <a:t>What it means</a:t>
+            </a:r>
+          </a:p>
+        </p:txBody>
+      </p:sp>
+      <p:sp>
+        <p:nvSpPr>
+          <p:cNvPr id="6" name="">
+            <a:extLst xmlns:a="http://schemas.openxmlformats.org/drawingml/2006/main">
+              <a:ext uri="{FF2B5EF4-FFF2-40B4-BE49-F238E27FC236}">
+                <a16:creationId xmlns:a16="http://schemas.microsoft.com/office/drawing/2014/main" id="{68FBA296-7985-49CC-9F7D-E1E972883102}"/>
+              </a:ext>
+            </a:extLst>
+          </p:cNvPr>
+          <p:cNvSpPr>
+            <a:spLocks xmlns:a="http://schemas.openxmlformats.org/drawingml/2006/main" noGrp="1"/>
+          </p:cNvSpPr>
+          <p:nvPr/>
+        </p:nvSpPr>
+        <p:spPr>
+          <a:xfrm xmlns:a="http://schemas.openxmlformats.org/drawingml/2006/main">
+            <a:off x="7105650" y="2743200"/>
+            <a:ext cx="3143250" cy="2000250"/>
+          </a:xfrm>
+          <a:prstGeom xmlns:a="http://schemas.openxmlformats.org/drawingml/2006/main" prst="rect">
+            <a:avLst/>
+          </a:prstGeom>
+          <a:noFill xmlns:a="http://schemas.openxmlformats.org/drawingml/2006/main"/>
+          <a:ln xmlns:a="http://schemas.openxmlformats.org/drawingml/2006/main" w="0">
+            <a:noFill/>
+            <a:prstDash val="solid"/>
+          </a:ln>
+        </p:spPr>
+        <p:txBody>
+          <a:bodyPr xmlns:a="http://schemas.openxmlformats.org/drawingml/2006/main"/>
+          <a:lstStyle xmlns:a="http://schemas.openxmlformats.org/drawingml/2006/main"/>
+          <a:p xmlns:a="http://schemas.openxmlformats.org/drawingml/2006/main">
+            <a:pPr algn="l">
+              <a:defRPr sz="1650" b="0" i="0">
+                <a:solidFill>
+                  <a:srgbClr val="222222"/>
+                </a:solidFill>
+              </a:defRPr>
+            </a:pPr>
+            <a:r>
+              <a:rPr sz="1650" b="0" i="0">
+                <a:solidFill>
+                  <a:srgbClr val="222222"/>
+                </a:solidFill>
+              </a:rPr>
+              <a:t>The best 2020 AUC was h1 at 0.520. h3 was 0.485 and h5 was 0.427. That is weak ranking, not just a threshold issue.</a:t>
+            </a:r>
+          </a:p>
+        </p:txBody>
+      </p:sp>
+    </p:spTree>
+    <p:extLst>
+      <p:ext uri="{BB962C8B-B14F-4D97-AF65-F5344CB8AC3E}">
+        <p14:creationId xmlns:p14="http://schemas.microsoft.com/office/powerpoint/2010/main" val="6636850"/>
+      </p:ext>
+    </p:extLst>
+  </p:cSld>
+</p:sld>
+</file>
+
+<file path=ppt/slides/slide28.xml><?xml version="1.0" encoding="utf-8"?>
+<p:sld xmlns:p="http://schemas.openxmlformats.org/presentationml/2006/main">
+  <p:cSld>
+    <p:bg>
+      <p:bgPr>
+        <a:solidFill xmlns:a="http://schemas.openxmlformats.org/drawingml/2006/main">
+          <a:srgbClr val="FFFFFF"/>
+        </a:solidFill>
+      </p:bgPr>
+    </p:bg>
+    <p:spTree>
+      <p:nvGrpSpPr>
+        <p:cNvPr id="1" name=""/>
+        <p:cNvGrpSpPr/>
+        <p:nvPr/>
+      </p:nvGrpSpPr>
+      <p:grpSpPr>
+        <a:xfrm xmlns:a="http://schemas.openxmlformats.org/drawingml/2006/main"/>
+      </p:grpSpPr>
+      <p:sp>
+        <p:nvSpPr>
+          <p:cNvPr id="1" name="">
+            <a:extLst xmlns:a="http://schemas.openxmlformats.org/drawingml/2006/main">
+              <a:ext uri="{FF2B5EF4-FFF2-40B4-BE49-F238E27FC236}">
+                <a16:creationId xmlns:a16="http://schemas.microsoft.com/office/drawing/2014/main" id="{26C3E94C-3A32-4BC1-8DA6-29B37308F246}"/>
+              </a:ext>
+            </a:extLst>
+          </p:cNvPr>
+          <p:cNvSpPr>
+            <a:spLocks xmlns:a="http://schemas.openxmlformats.org/drawingml/2006/main" noGrp="1"/>
+          </p:cNvSpPr>
+          <p:nvPr/>
+        </p:nvSpPr>
+        <p:spPr>
+          <a:xfrm xmlns:a="http://schemas.openxmlformats.org/drawingml/2006/main">
+            <a:off x="685800" y="400050"/>
+            <a:ext cx="8572500" cy="247650"/>
+          </a:xfrm>
+          <a:prstGeom xmlns:a="http://schemas.openxmlformats.org/drawingml/2006/main" prst="rect">
+            <a:avLst/>
+          </a:prstGeom>
+          <a:noFill xmlns:a="http://schemas.openxmlformats.org/drawingml/2006/main"/>
+          <a:ln xmlns:a="http://schemas.openxmlformats.org/drawingml/2006/main" w="0">
+            <a:noFill/>
+            <a:prstDash val="solid"/>
+          </a:ln>
+        </p:spPr>
+        <p:txBody>
+          <a:bodyPr xmlns:a="http://schemas.openxmlformats.org/drawingml/2006/main"/>
+          <a:lstStyle xmlns:a="http://schemas.openxmlformats.org/drawingml/2006/main"/>
+          <a:p xmlns:a="http://schemas.openxmlformats.org/drawingml/2006/main">
+            <a:pPr algn="l">
+              <a:defRPr sz="975" b="1" i="0">
+                <a:solidFill>
+                  <a:srgbClr val="555555"/>
+                </a:solidFill>
+              </a:defRPr>
+            </a:pPr>
+            <a:r>
+              <a:rPr sz="975" b="1" i="0">
+                <a:solidFill>
+                  <a:srgbClr val="555555"/>
+                </a:solidFill>
+              </a:rPr>
+              <a:t>GEN5.4 ML DECISION ENGINE</a:t>
+            </a:r>
+          </a:p>
+        </p:txBody>
+      </p:sp>
+      <p:sp>
+        <p:nvSpPr>
+          <p:cNvPr id="2" name="">
+            <a:extLst xmlns:a="http://schemas.openxmlformats.org/drawingml/2006/main">
+              <a:ext uri="{FF2B5EF4-FFF2-40B4-BE49-F238E27FC236}">
+                <a16:creationId xmlns:a16="http://schemas.microsoft.com/office/drawing/2014/main" id="{74499957-CF4F-4863-B419-AC30A73BF409}"/>
+              </a:ext>
+            </a:extLst>
+          </p:cNvPr>
+          <p:cNvSpPr>
+            <a:spLocks xmlns:a="http://schemas.openxmlformats.org/drawingml/2006/main" noGrp="1"/>
+          </p:cNvSpPr>
+          <p:nvPr/>
+        </p:nvSpPr>
+        <p:spPr>
+          <a:xfrm xmlns:a="http://schemas.openxmlformats.org/drawingml/2006/main">
+            <a:off x="685800" y="723900"/>
+            <a:ext cx="10287000" cy="876300"/>
+          </a:xfrm>
+          <a:prstGeom xmlns:a="http://schemas.openxmlformats.org/drawingml/2006/main" prst="rect">
+            <a:avLst/>
+          </a:prstGeom>
+          <a:noFill xmlns:a="http://schemas.openxmlformats.org/drawingml/2006/main"/>
+          <a:ln xmlns:a="http://schemas.openxmlformats.org/drawingml/2006/main" w="0">
+            <a:noFill/>
+            <a:prstDash val="solid"/>
+          </a:ln>
+        </p:spPr>
+        <p:txBody>
+          <a:bodyPr xmlns:a="http://schemas.openxmlformats.org/drawingml/2006/main"/>
+          <a:lstStyle xmlns:a="http://schemas.openxmlformats.org/drawingml/2006/main"/>
+          <a:p xmlns:a="http://schemas.openxmlformats.org/drawingml/2006/main">
+            <a:pPr algn="l">
+              <a:defRPr sz="2850" b="1" i="0">
+                <a:solidFill>
+                  <a:srgbClr val="000000"/>
+                </a:solidFill>
+              </a:defRPr>
+            </a:pPr>
+            <a:r>
+              <a:rPr sz="2850" b="1" i="0">
+                <a:solidFill>
+                  <a:srgbClr val="000000"/>
+                </a:solidFill>
+              </a:rPr>
+              <a:t>This is a clean gate into XGBoost rather than an excuse to keep circling</a:t>
+            </a:r>
+          </a:p>
+        </p:txBody>
+      </p:sp>
+      <p:sp>
+        <p:nvSpPr>
+          <p:cNvPr id="3" name="">
+            <a:extLst xmlns:a="http://schemas.openxmlformats.org/drawingml/2006/main">
+              <a:ext uri="{FF2B5EF4-FFF2-40B4-BE49-F238E27FC236}">
+                <a16:creationId xmlns:a16="http://schemas.microsoft.com/office/drawing/2014/main" id="{A4B5CBF7-33E2-49C2-9C89-DDE3DE2937AD}"/>
+              </a:ext>
+            </a:extLst>
+          </p:cNvPr>
+          <p:cNvSpPr>
+            <a:spLocks xmlns:a="http://schemas.openxmlformats.org/drawingml/2006/main" noGrp="1"/>
+          </p:cNvSpPr>
+          <p:nvPr/>
+        </p:nvSpPr>
+        <p:spPr>
+          <a:xfrm xmlns:a="http://schemas.openxmlformats.org/drawingml/2006/main">
+            <a:off x="685800" y="1657350"/>
+            <a:ext cx="10820400" cy="19050"/>
+          </a:xfrm>
+          <a:prstGeom xmlns:a="http://schemas.openxmlformats.org/drawingml/2006/main" prst="rect">
+            <a:avLst/>
+          </a:prstGeom>
+          <a:solidFill xmlns:a="http://schemas.openxmlformats.org/drawingml/2006/main">
+            <a:srgbClr val="B8BCC4"/>
+          </a:solidFill>
+          <a:ln xmlns:a="http://schemas.openxmlformats.org/drawingml/2006/main" w="0">
+            <a:noFill/>
+            <a:prstDash val="solid"/>
+          </a:ln>
+        </p:spPr>
+      </p:sp>
+      <p:sp>
+        <p:nvSpPr>
+          <p:cNvPr id="4" name="">
+            <a:extLst xmlns:a="http://schemas.openxmlformats.org/drawingml/2006/main">
+              <a:ext uri="{FF2B5EF4-FFF2-40B4-BE49-F238E27FC236}">
+                <a16:creationId xmlns:a16="http://schemas.microsoft.com/office/drawing/2014/main" id="{5A6DE3E8-B7A4-4FD2-8E06-BDF5F2982757}"/>
+              </a:ext>
+            </a:extLst>
+          </p:cNvPr>
+          <p:cNvSpPr>
+            <a:spLocks xmlns:a="http://schemas.openxmlformats.org/drawingml/2006/main" noGrp="1"/>
+          </p:cNvSpPr>
+          <p:nvPr/>
+        </p:nvSpPr>
+        <p:spPr>
+          <a:xfrm xmlns:a="http://schemas.openxmlformats.org/drawingml/2006/main">
+            <a:off x="876300" y="2133600"/>
+            <a:ext cx="9334500" cy="914400"/>
+          </a:xfrm>
+          <a:prstGeom xmlns:a="http://schemas.openxmlformats.org/drawingml/2006/main" prst="rect">
+            <a:avLst/>
+          </a:prstGeom>
+          <a:noFill xmlns:a="http://schemas.openxmlformats.org/drawingml/2006/main"/>
+          <a:ln xmlns:a="http://schemas.openxmlformats.org/drawingml/2006/main" w="0">
+            <a:noFill/>
+            <a:prstDash val="solid"/>
+          </a:ln>
+        </p:spPr>
+        <p:txBody>
+          <a:bodyPr xmlns:a="http://schemas.openxmlformats.org/drawingml/2006/main"/>
+          <a:lstStyle xmlns:a="http://schemas.openxmlformats.org/drawingml/2006/main"/>
+          <a:p xmlns:a="http://schemas.openxmlformats.org/drawingml/2006/main">
+            <a:pPr algn="l">
+              <a:defRPr sz="2250" b="1" i="0">
+                <a:solidFill>
+                  <a:srgbClr val="000000"/>
+                </a:solidFill>
+              </a:defRPr>
+            </a:pPr>
+            <a:r>
+              <a:rPr sz="2250" b="1" i="0">
+                <a:solidFill>
+                  <a:srgbClr val="000000"/>
+                </a:solidFill>
+              </a:rPr>
+              <a:t>The GLM path has now answered the basic plumbing questions: features and labels are leakage-safe, replay works, thresholds matter, and h1 is the strongest horizon so far. The remaining obstacle is probability ranking quality.</a:t>
+            </a:r>
+          </a:p>
+        </p:txBody>
+      </p:sp>
+      <p:sp>
+        <p:nvSpPr>
+          <p:cNvPr id="5" name="">
+            <a:extLst xmlns:a="http://schemas.openxmlformats.org/drawingml/2006/main">
+              <a:ext uri="{FF2B5EF4-FFF2-40B4-BE49-F238E27FC236}">
+                <a16:creationId xmlns:a16="http://schemas.microsoft.com/office/drawing/2014/main" id="{A2D321D6-4E52-4832-B416-811D9BE350DE}"/>
+              </a:ext>
+            </a:extLst>
+          </p:cNvPr>
+          <p:cNvSpPr>
+            <a:spLocks xmlns:a="http://schemas.openxmlformats.org/drawingml/2006/main" noGrp="1"/>
+          </p:cNvSpPr>
+          <p:nvPr/>
+        </p:nvSpPr>
+        <p:spPr>
+          <a:xfrm xmlns:a="http://schemas.openxmlformats.org/drawingml/2006/main">
+            <a:off x="1219200" y="3571875"/>
+            <a:ext cx="190500" cy="247650"/>
+          </a:xfrm>
+          <a:prstGeom xmlns:a="http://schemas.openxmlformats.org/drawingml/2006/main" prst="rect">
+            <a:avLst/>
+          </a:prstGeom>
+          <a:noFill xmlns:a="http://schemas.openxmlformats.org/drawingml/2006/main"/>
+          <a:ln xmlns:a="http://schemas.openxmlformats.org/drawingml/2006/main" w="0">
+            <a:noFill/>
+            <a:prstDash val="solid"/>
+          </a:ln>
+        </p:spPr>
+        <p:txBody>
+          <a:bodyPr xmlns:a="http://schemas.openxmlformats.org/drawingml/2006/main"/>
+          <a:lstStyle xmlns:a="http://schemas.openxmlformats.org/drawingml/2006/main"/>
+          <a:p xmlns:a="http://schemas.openxmlformats.org/drawingml/2006/main">
+            <a:pPr algn="l">
+              <a:defRPr sz="1575" b="1" i="0">
+                <a:solidFill>
+                  <a:srgbClr val="FF6B35"/>
+                </a:solidFill>
+              </a:defRPr>
+            </a:pPr>
+            <a:r>
+              <a:rPr sz="1575" b="1" i="0">
+                <a:solidFill>
+                  <a:srgbClr val="FF6B35"/>
+                </a:solidFill>
+              </a:rPr>
+              <a:t>-</a:t>
+            </a:r>
+          </a:p>
+        </p:txBody>
+      </p:sp>
+      <p:sp>
+        <p:nvSpPr>
+          <p:cNvPr id="6" name="">
+            <a:extLst xmlns:a="http://schemas.openxmlformats.org/drawingml/2006/main">
+              <a:ext uri="{FF2B5EF4-FFF2-40B4-BE49-F238E27FC236}">
+                <a16:creationId xmlns:a16="http://schemas.microsoft.com/office/drawing/2014/main" id="{7F54AA3F-2467-43B2-925B-DB289F67F03D}"/>
+              </a:ext>
+            </a:extLst>
+          </p:cNvPr>
+          <p:cNvSpPr>
+            <a:spLocks xmlns:a="http://schemas.openxmlformats.org/drawingml/2006/main" noGrp="1"/>
+          </p:cNvSpPr>
+          <p:nvPr/>
+        </p:nvSpPr>
+        <p:spPr>
+          <a:xfrm xmlns:a="http://schemas.openxmlformats.org/drawingml/2006/main">
+            <a:off x="1485900" y="3562350"/>
+            <a:ext cx="7162800" cy="514350"/>
+          </a:xfrm>
+          <a:prstGeom xmlns:a="http://schemas.openxmlformats.org/drawingml/2006/main" prst="rect">
+            <a:avLst/>
+          </a:prstGeom>
+          <a:noFill xmlns:a="http://schemas.openxmlformats.org/drawingml/2006/main"/>
+          <a:ln xmlns:a="http://schemas.openxmlformats.org/drawingml/2006/main" w="0">
+            <a:noFill/>
+            <a:prstDash val="solid"/>
+          </a:ln>
+        </p:spPr>
+        <p:txBody>
+          <a:bodyPr xmlns:a="http://schemas.openxmlformats.org/drawingml/2006/main"/>
+          <a:lstStyle xmlns:a="http://schemas.openxmlformats.org/drawingml/2006/main"/>
+          <a:p xmlns:a="http://schemas.openxmlformats.org/drawingml/2006/main">
+            <a:pPr algn="l">
+              <a:defRPr sz="1575" b="0" i="0">
+                <a:solidFill>
+                  <a:srgbClr val="222222"/>
+                </a:solidFill>
+              </a:defRPr>
+            </a:pPr>
+            <a:r>
+              <a:rPr sz="1575" b="0" i="0">
+                <a:solidFill>
+                  <a:srgbClr val="222222"/>
+                </a:solidFill>
+              </a:rPr>
+              <a:t>Keep h1 as the first XGBoost challenger label unless a calibration-only check is explicitly useful.</a:t>
+            </a:r>
+          </a:p>
+        </p:txBody>
+      </p:sp>
+      <p:sp>
+        <p:nvSpPr>
+          <p:cNvPr id="7" name="">
+            <a:extLst xmlns:a="http://schemas.openxmlformats.org/drawingml/2006/main">
+              <a:ext uri="{FF2B5EF4-FFF2-40B4-BE49-F238E27FC236}">
+                <a16:creationId xmlns:a16="http://schemas.microsoft.com/office/drawing/2014/main" id="{838DF90E-50C2-4359-BB38-A2CF5962B105}"/>
+              </a:ext>
+            </a:extLst>
+          </p:cNvPr>
+          <p:cNvSpPr>
+            <a:spLocks xmlns:a="http://schemas.openxmlformats.org/drawingml/2006/main" noGrp="1"/>
+          </p:cNvSpPr>
+          <p:nvPr/>
+        </p:nvSpPr>
+        <p:spPr>
+          <a:xfrm xmlns:a="http://schemas.openxmlformats.org/drawingml/2006/main">
+            <a:off x="1219200" y="4238625"/>
+            <a:ext cx="190500" cy="247650"/>
+          </a:xfrm>
+          <a:prstGeom xmlns:a="http://schemas.openxmlformats.org/drawingml/2006/main" prst="rect">
+            <a:avLst/>
+          </a:prstGeom>
+          <a:noFill xmlns:a="http://schemas.openxmlformats.org/drawingml/2006/main"/>
+          <a:ln xmlns:a="http://schemas.openxmlformats.org/drawingml/2006/main" w="0">
+            <a:noFill/>
+            <a:prstDash val="solid"/>
+          </a:ln>
+        </p:spPr>
+        <p:txBody>
+          <a:bodyPr xmlns:a="http://schemas.openxmlformats.org/drawingml/2006/main"/>
+          <a:lstStyle xmlns:a="http://schemas.openxmlformats.org/drawingml/2006/main"/>
+          <a:p xmlns:a="http://schemas.openxmlformats.org/drawingml/2006/main">
+            <a:pPr algn="l">
+              <a:defRPr sz="1575" b="1" i="0">
+                <a:solidFill>
+                  <a:srgbClr val="FF6B35"/>
+                </a:solidFill>
+              </a:defRPr>
+            </a:pPr>
+            <a:r>
+              <a:rPr sz="1575" b="1" i="0">
+                <a:solidFill>
+                  <a:srgbClr val="FF6B35"/>
+                </a:solidFill>
+              </a:rPr>
+              <a:t>-</a:t>
+            </a:r>
+          </a:p>
+        </p:txBody>
+      </p:sp>
+      <p:sp>
+        <p:nvSpPr>
+          <p:cNvPr id="8" name="">
+            <a:extLst xmlns:a="http://schemas.openxmlformats.org/drawingml/2006/main">
+              <a:ext uri="{FF2B5EF4-FFF2-40B4-BE49-F238E27FC236}">
+                <a16:creationId xmlns:a16="http://schemas.microsoft.com/office/drawing/2014/main" id="{30B3D294-1F61-40C7-A8F3-9517272898AB}"/>
+              </a:ext>
+            </a:extLst>
+          </p:cNvPr>
+          <p:cNvSpPr>
+            <a:spLocks xmlns:a="http://schemas.openxmlformats.org/drawingml/2006/main" noGrp="1"/>
+          </p:cNvSpPr>
+          <p:nvPr/>
+        </p:nvSpPr>
+        <p:spPr>
+          <a:xfrm xmlns:a="http://schemas.openxmlformats.org/drawingml/2006/main">
+            <a:off x="1485900" y="4229100"/>
+            <a:ext cx="7162800" cy="514350"/>
+          </a:xfrm>
+          <a:prstGeom xmlns:a="http://schemas.openxmlformats.org/drawingml/2006/main" prst="rect">
+            <a:avLst/>
+          </a:prstGeom>
+          <a:noFill xmlns:a="http://schemas.openxmlformats.org/drawingml/2006/main"/>
+          <a:ln xmlns:a="http://schemas.openxmlformats.org/drawingml/2006/main" w="0">
+            <a:noFill/>
+            <a:prstDash val="solid"/>
+          </a:ln>
+        </p:spPr>
+        <p:txBody>
+          <a:bodyPr xmlns:a="http://schemas.openxmlformats.org/drawingml/2006/main"/>
+          <a:lstStyle xmlns:a="http://schemas.openxmlformats.org/drawingml/2006/main"/>
+          <a:p xmlns:a="http://schemas.openxmlformats.org/drawingml/2006/main">
+            <a:pPr algn="l">
+              <a:defRPr sz="1575" b="0" i="0">
+                <a:solidFill>
+                  <a:srgbClr val="222222"/>
+                </a:solidFill>
+              </a:defRPr>
+            </a:pPr>
+            <a:r>
+              <a:rPr sz="1575" b="0" i="0">
+                <a:solidFill>
+                  <a:srgbClr val="222222"/>
+                </a:solidFill>
+              </a:rPr>
+              <a:t>Do not run a broad GLM threshold search; P1b already showed the limit of exposure tuning.</a:t>
+            </a:r>
+          </a:p>
+        </p:txBody>
+      </p:sp>
+      <p:sp>
+        <p:nvSpPr>
+          <p:cNvPr id="9" name="">
+            <a:extLst xmlns:a="http://schemas.openxmlformats.org/drawingml/2006/main">
+              <a:ext uri="{FF2B5EF4-FFF2-40B4-BE49-F238E27FC236}">
+                <a16:creationId xmlns:a16="http://schemas.microsoft.com/office/drawing/2014/main" id="{107DFF7B-D528-4146-9845-374CFAC3CDEF}"/>
+              </a:ext>
+            </a:extLst>
+          </p:cNvPr>
+          <p:cNvSpPr>
+            <a:spLocks xmlns:a="http://schemas.openxmlformats.org/drawingml/2006/main" noGrp="1"/>
+          </p:cNvSpPr>
+          <p:nvPr/>
+        </p:nvSpPr>
+        <p:spPr>
+          <a:xfrm xmlns:a="http://schemas.openxmlformats.org/drawingml/2006/main">
+            <a:off x="1219200" y="4905375"/>
+            <a:ext cx="190500" cy="247650"/>
+          </a:xfrm>
+          <a:prstGeom xmlns:a="http://schemas.openxmlformats.org/drawingml/2006/main" prst="rect">
+            <a:avLst/>
+          </a:prstGeom>
+          <a:noFill xmlns:a="http://schemas.openxmlformats.org/drawingml/2006/main"/>
+          <a:ln xmlns:a="http://schemas.openxmlformats.org/drawingml/2006/main" w="0">
+            <a:noFill/>
+            <a:prstDash val="solid"/>
+          </a:ln>
+        </p:spPr>
+        <p:txBody>
+          <a:bodyPr xmlns:a="http://schemas.openxmlformats.org/drawingml/2006/main"/>
+          <a:lstStyle xmlns:a="http://schemas.openxmlformats.org/drawingml/2006/main"/>
+          <a:p xmlns:a="http://schemas.openxmlformats.org/drawingml/2006/main">
+            <a:pPr algn="l">
+              <a:defRPr sz="1575" b="1" i="0">
+                <a:solidFill>
+                  <a:srgbClr val="FF6B35"/>
+                </a:solidFill>
+              </a:defRPr>
+            </a:pPr>
+            <a:r>
+              <a:rPr sz="1575" b="1" i="0">
+                <a:solidFill>
+                  <a:srgbClr val="FF6B35"/>
+                </a:solidFill>
+              </a:rPr>
+              <a:t>-</a:t>
+            </a:r>
+          </a:p>
+        </p:txBody>
+      </p:sp>
+      <p:sp>
+        <p:nvSpPr>
+          <p:cNvPr id="10" name="">
+            <a:extLst xmlns:a="http://schemas.openxmlformats.org/drawingml/2006/main">
+              <a:ext uri="{FF2B5EF4-FFF2-40B4-BE49-F238E27FC236}">
+                <a16:creationId xmlns:a16="http://schemas.microsoft.com/office/drawing/2014/main" id="{5D7EB39A-7EB1-427B-93F9-502638EBAE95}"/>
+              </a:ext>
+            </a:extLst>
+          </p:cNvPr>
+          <p:cNvSpPr>
+            <a:spLocks xmlns:a="http://schemas.openxmlformats.org/drawingml/2006/main" noGrp="1"/>
+          </p:cNvSpPr>
+          <p:nvPr/>
+        </p:nvSpPr>
+        <p:spPr>
+          <a:xfrm xmlns:a="http://schemas.openxmlformats.org/drawingml/2006/main">
+            <a:off x="1485900" y="4895850"/>
+            <a:ext cx="7162800" cy="514350"/>
+          </a:xfrm>
+          <a:prstGeom xmlns:a="http://schemas.openxmlformats.org/drawingml/2006/main" prst="rect">
+            <a:avLst/>
+          </a:prstGeom>
+          <a:noFill xmlns:a="http://schemas.openxmlformats.org/drawingml/2006/main"/>
+          <a:ln xmlns:a="http://schemas.openxmlformats.org/drawingml/2006/main" w="0">
+            <a:noFill/>
+            <a:prstDash val="solid"/>
+          </a:ln>
+        </p:spPr>
+        <p:txBody>
+          <a:bodyPr xmlns:a="http://schemas.openxmlformats.org/drawingml/2006/main"/>
+          <a:lstStyle xmlns:a="http://schemas.openxmlformats.org/drawingml/2006/main"/>
+          <a:p xmlns:a="http://schemas.openxmlformats.org/drawingml/2006/main">
+            <a:pPr algn="l">
+              <a:defRPr sz="1575" b="0" i="0">
+                <a:solidFill>
+                  <a:srgbClr val="222222"/>
+                </a:solidFill>
+              </a:defRPr>
+            </a:pPr>
+            <a:r>
+              <a:rPr sz="1575" b="0" i="0">
+                <a:solidFill>
+                  <a:srgbClr val="222222"/>
+                </a:solidFill>
+              </a:rPr>
+              <a:t>Judge XGBoost on ranking, timing, replay return versus basket hold, drawdown, and probability tapes.</a:t>
+            </a:r>
+          </a:p>
+        </p:txBody>
+      </p:sp>
+      <p:sp>
+        <p:nvSpPr>
+          <p:cNvPr id="11" name="">
+            <a:extLst xmlns:a="http://schemas.openxmlformats.org/drawingml/2006/main">
+              <a:ext uri="{FF2B5EF4-FFF2-40B4-BE49-F238E27FC236}">
+                <a16:creationId xmlns:a16="http://schemas.microsoft.com/office/drawing/2014/main" id="{735C71A4-67CC-4C02-B8E1-4550D2A4B5DA}"/>
+              </a:ext>
+            </a:extLst>
+          </p:cNvPr>
+          <p:cNvSpPr>
+            <a:spLocks xmlns:a="http://schemas.openxmlformats.org/drawingml/2006/main" noGrp="1"/>
+          </p:cNvSpPr>
+          <p:nvPr/>
+        </p:nvSpPr>
+        <p:spPr>
+          <a:xfrm xmlns:a="http://schemas.openxmlformats.org/drawingml/2006/main">
+            <a:off x="1219200" y="5572125"/>
+            <a:ext cx="190500" cy="247650"/>
+          </a:xfrm>
+          <a:prstGeom xmlns:a="http://schemas.openxmlformats.org/drawingml/2006/main" prst="rect">
+            <a:avLst/>
+          </a:prstGeom>
+          <a:noFill xmlns:a="http://schemas.openxmlformats.org/drawingml/2006/main"/>
+          <a:ln xmlns:a="http://schemas.openxmlformats.org/drawingml/2006/main" w="0">
+            <a:noFill/>
+            <a:prstDash val="solid"/>
+          </a:ln>
+        </p:spPr>
+        <p:txBody>
+          <a:bodyPr xmlns:a="http://schemas.openxmlformats.org/drawingml/2006/main"/>
+          <a:lstStyle xmlns:a="http://schemas.openxmlformats.org/drawingml/2006/main"/>
+          <a:p xmlns:a="http://schemas.openxmlformats.org/drawingml/2006/main">
+            <a:pPr algn="l">
+              <a:defRPr sz="1575" b="1" i="0">
+                <a:solidFill>
+                  <a:srgbClr val="FF6B35"/>
+                </a:solidFill>
+              </a:defRPr>
+            </a:pPr>
+            <a:r>
+              <a:rPr sz="1575" b="1" i="0">
+                <a:solidFill>
+                  <a:srgbClr val="FF6B35"/>
+                </a:solidFill>
+              </a:rPr>
+              <a:t>-</a:t>
+            </a:r>
+          </a:p>
+        </p:txBody>
+      </p:sp>
+      <p:sp>
+        <p:nvSpPr>
+          <p:cNvPr id="12" name="">
+            <a:extLst xmlns:a="http://schemas.openxmlformats.org/drawingml/2006/main">
+              <a:ext uri="{FF2B5EF4-FFF2-40B4-BE49-F238E27FC236}">
+                <a16:creationId xmlns:a16="http://schemas.microsoft.com/office/drawing/2014/main" id="{3DBD6354-BB39-43F9-A537-76BC473CDD6D}"/>
+              </a:ext>
+            </a:extLst>
+          </p:cNvPr>
+          <p:cNvSpPr>
+            <a:spLocks xmlns:a="http://schemas.openxmlformats.org/drawingml/2006/main" noGrp="1"/>
+          </p:cNvSpPr>
+          <p:nvPr/>
+        </p:nvSpPr>
+        <p:spPr>
+          <a:xfrm xmlns:a="http://schemas.openxmlformats.org/drawingml/2006/main">
+            <a:off x="1485900" y="5562600"/>
+            <a:ext cx="7162800" cy="514350"/>
+          </a:xfrm>
+          <a:prstGeom xmlns:a="http://schemas.openxmlformats.org/drawingml/2006/main" prst="rect">
+            <a:avLst/>
+          </a:prstGeom>
+          <a:noFill xmlns:a="http://schemas.openxmlformats.org/drawingml/2006/main"/>
+          <a:ln xmlns:a="http://schemas.openxmlformats.org/drawingml/2006/main" w="0">
+            <a:noFill/>
+            <a:prstDash val="solid"/>
+          </a:ln>
+        </p:spPr>
+        <p:txBody>
+          <a:bodyPr xmlns:a="http://schemas.openxmlformats.org/drawingml/2006/main"/>
+          <a:lstStyle xmlns:a="http://schemas.openxmlformats.org/drawingml/2006/main"/>
+          <a:p xmlns:a="http://schemas.openxmlformats.org/drawingml/2006/main">
+            <a:pPr algn="l">
+              <a:defRPr sz="1575" b="0" i="0">
+                <a:solidFill>
+                  <a:srgbClr val="222222"/>
+                </a:solidFill>
+              </a:defRPr>
+            </a:pPr>
+            <a:r>
+              <a:rPr sz="1575" b="0" i="0">
+                <a:solidFill>
+                  <a:srgbClr val="222222"/>
+                </a:solidFill>
+              </a:rPr>
+              <a:t>If XGBoost cannot improve ranking, backtrack to feature design rather than deeper model knobs.</a:t>
+            </a:r>
+          </a:p>
+        </p:txBody>
+      </p:sp>
+    </p:spTree>
+    <p:extLst>
+      <p:ext uri="{BB962C8B-B14F-4D97-AF65-F5344CB8AC3E}">
+        <p14:creationId xmlns:p14="http://schemas.microsoft.com/office/powerpoint/2010/main" val="913620739"/>
       </p:ext>
     </p:extLst>
   </p:cSld>
@@ -10257,7 +13049,7 @@
           <p:cNvPr id="1" name="">
             <a:extLst xmlns:a="http://schemas.openxmlformats.org/drawingml/2006/main">
               <a:ext uri="{FF2B5EF4-FFF2-40B4-BE49-F238E27FC236}">
-                <a16:creationId xmlns:a16="http://schemas.microsoft.com/office/drawing/2014/main" id="{A1A1DE9B-2883-44C3-AE0C-093FE00A77E9}"/>
+                <a16:creationId xmlns:a16="http://schemas.microsoft.com/office/drawing/2014/main" id="{8E3EBCFA-E1A1-49A2-B4D2-C9C7C7CE0C8E}"/>
               </a:ext>
             </a:extLst>
           </p:cNvPr>
@@ -10307,7 +13099,7 @@
           <p:cNvPr id="2" name="">
             <a:extLst xmlns:a="http://schemas.openxmlformats.org/drawingml/2006/main">
               <a:ext uri="{FF2B5EF4-FFF2-40B4-BE49-F238E27FC236}">
-                <a16:creationId xmlns:a16="http://schemas.microsoft.com/office/drawing/2014/main" id="{3AE87DAD-B9A8-4510-9365-363B99B9B0D6}"/>
+                <a16:creationId xmlns:a16="http://schemas.microsoft.com/office/drawing/2014/main" id="{39ED6D28-0226-470B-99A0-8902D08B3D62}"/>
               </a:ext>
             </a:extLst>
           </p:cNvPr>
@@ -10357,7 +13149,7 @@
           <p:cNvPr id="3" name="">
             <a:extLst xmlns:a="http://schemas.openxmlformats.org/drawingml/2006/main">
               <a:ext uri="{FF2B5EF4-FFF2-40B4-BE49-F238E27FC236}">
-                <a16:creationId xmlns:a16="http://schemas.microsoft.com/office/drawing/2014/main" id="{29262F3E-589C-4A9F-9E2B-4F18647454EC}"/>
+                <a16:creationId xmlns:a16="http://schemas.microsoft.com/office/drawing/2014/main" id="{49728BD6-2C18-4956-AC77-914D234C37DD}"/>
               </a:ext>
             </a:extLst>
           </p:cNvPr>
@@ -10388,7 +13180,7 @@
           <p:cNvPr id="4" name="">
             <a:extLst xmlns:a="http://schemas.openxmlformats.org/drawingml/2006/main">
               <a:ext uri="{FF2B5EF4-FFF2-40B4-BE49-F238E27FC236}">
-                <a16:creationId xmlns:a16="http://schemas.microsoft.com/office/drawing/2014/main" id="{40F9C970-CE3B-4568-AEE1-D6F2A7FBC059}"/>
+                <a16:creationId xmlns:a16="http://schemas.microsoft.com/office/drawing/2014/main" id="{7181A55D-1529-4736-A9B9-4D05C5DF4F51}"/>
               </a:ext>
             </a:extLst>
           </p:cNvPr>
@@ -10421,7 +13213,7 @@
           <p:cNvPr id="5" name="">
             <a:extLst xmlns:a="http://schemas.openxmlformats.org/drawingml/2006/main">
               <a:ext uri="{FF2B5EF4-FFF2-40B4-BE49-F238E27FC236}">
-                <a16:creationId xmlns:a16="http://schemas.microsoft.com/office/drawing/2014/main" id="{A9B9C2DE-C2DC-4108-A01B-7A7E7685F33D}"/>
+                <a16:creationId xmlns:a16="http://schemas.microsoft.com/office/drawing/2014/main" id="{8ADBAA84-0C3F-4988-A434-CD466B35E0F4}"/>
               </a:ext>
             </a:extLst>
           </p:cNvPr>
@@ -10471,7 +13263,7 @@
           <p:cNvPr id="6" name="">
             <a:extLst xmlns:a="http://schemas.openxmlformats.org/drawingml/2006/main">
               <a:ext uri="{FF2B5EF4-FFF2-40B4-BE49-F238E27FC236}">
-                <a16:creationId xmlns:a16="http://schemas.microsoft.com/office/drawing/2014/main" id="{F47EDEA3-DA16-40AF-922F-0282DF735A1B}"/>
+                <a16:creationId xmlns:a16="http://schemas.microsoft.com/office/drawing/2014/main" id="{53F3BDDB-A5B9-4A2F-81A5-67D772C8F173}"/>
               </a:ext>
             </a:extLst>
           </p:cNvPr>
@@ -10521,7 +13313,7 @@
           <p:cNvPr id="7" name="">
             <a:extLst xmlns:a="http://schemas.openxmlformats.org/drawingml/2006/main">
               <a:ext uri="{FF2B5EF4-FFF2-40B4-BE49-F238E27FC236}">
-                <a16:creationId xmlns:a16="http://schemas.microsoft.com/office/drawing/2014/main" id="{F6EA13BE-F47C-4262-B586-BDCBECF95DB1}"/>
+                <a16:creationId xmlns:a16="http://schemas.microsoft.com/office/drawing/2014/main" id="{FB59A5B0-9FE5-4C1A-9C85-D12703DDCB7A}"/>
               </a:ext>
             </a:extLst>
           </p:cNvPr>
@@ -10571,7 +13363,7 @@
           <p:cNvPr id="8" name="">
             <a:extLst xmlns:a="http://schemas.openxmlformats.org/drawingml/2006/main">
               <a:ext uri="{FF2B5EF4-FFF2-40B4-BE49-F238E27FC236}">
-                <a16:creationId xmlns:a16="http://schemas.microsoft.com/office/drawing/2014/main" id="{484862F7-734C-4774-8BE4-8D081EA179DA}"/>
+                <a16:creationId xmlns:a16="http://schemas.microsoft.com/office/drawing/2014/main" id="{766BFD79-8ED4-42C0-9CBF-12BBAD6FA246}"/>
               </a:ext>
             </a:extLst>
           </p:cNvPr>
@@ -10604,7 +13396,7 @@
           <p:cNvPr id="9" name="">
             <a:extLst xmlns:a="http://schemas.openxmlformats.org/drawingml/2006/main">
               <a:ext uri="{FF2B5EF4-FFF2-40B4-BE49-F238E27FC236}">
-                <a16:creationId xmlns:a16="http://schemas.microsoft.com/office/drawing/2014/main" id="{88020B65-549E-4C4C-A4EE-A13B1B6F7E64}"/>
+                <a16:creationId xmlns:a16="http://schemas.microsoft.com/office/drawing/2014/main" id="{4B326F79-3E93-4AE5-AF41-06FC6D1C7959}"/>
               </a:ext>
             </a:extLst>
           </p:cNvPr>
@@ -10654,7 +13446,7 @@
           <p:cNvPr id="10" name="">
             <a:extLst xmlns:a="http://schemas.openxmlformats.org/drawingml/2006/main">
               <a:ext uri="{FF2B5EF4-FFF2-40B4-BE49-F238E27FC236}">
-                <a16:creationId xmlns:a16="http://schemas.microsoft.com/office/drawing/2014/main" id="{8DF3CFCB-9E4E-4448-9121-E179A6A6446B}"/>
+                <a16:creationId xmlns:a16="http://schemas.microsoft.com/office/drawing/2014/main" id="{AA2D5DAD-E706-40C2-B402-FC750886656D}"/>
               </a:ext>
             </a:extLst>
           </p:cNvPr>
@@ -10704,7 +13496,7 @@
           <p:cNvPr id="11" name="">
             <a:extLst xmlns:a="http://schemas.openxmlformats.org/drawingml/2006/main">
               <a:ext uri="{FF2B5EF4-FFF2-40B4-BE49-F238E27FC236}">
-                <a16:creationId xmlns:a16="http://schemas.microsoft.com/office/drawing/2014/main" id="{E1082171-DDC1-480B-9B0C-B7888CEA09A7}"/>
+                <a16:creationId xmlns:a16="http://schemas.microsoft.com/office/drawing/2014/main" id="{E88E5A7F-C033-4848-892C-98D74571FFAB}"/>
               </a:ext>
             </a:extLst>
           </p:cNvPr>
@@ -10754,7 +13546,7 @@
           <p:cNvPr id="12" name="">
             <a:extLst xmlns:a="http://schemas.openxmlformats.org/drawingml/2006/main">
               <a:ext uri="{FF2B5EF4-FFF2-40B4-BE49-F238E27FC236}">
-                <a16:creationId xmlns:a16="http://schemas.microsoft.com/office/drawing/2014/main" id="{59EF25BC-22A2-47E0-B43A-649AA5B3A7F6}"/>
+                <a16:creationId xmlns:a16="http://schemas.microsoft.com/office/drawing/2014/main" id="{2413EBA7-5445-4050-86D9-138EBC8866AE}"/>
               </a:ext>
             </a:extLst>
           </p:cNvPr>
@@ -10787,7 +13579,7 @@
           <p:cNvPr id="13" name="">
             <a:extLst xmlns:a="http://schemas.openxmlformats.org/drawingml/2006/main">
               <a:ext uri="{FF2B5EF4-FFF2-40B4-BE49-F238E27FC236}">
-                <a16:creationId xmlns:a16="http://schemas.microsoft.com/office/drawing/2014/main" id="{C608CE68-3175-4AFD-981D-F6B6987ED796}"/>
+                <a16:creationId xmlns:a16="http://schemas.microsoft.com/office/drawing/2014/main" id="{1F9DFE6E-798C-4460-B0B4-12A7B3CB0226}"/>
               </a:ext>
             </a:extLst>
           </p:cNvPr>
@@ -10837,7 +13629,7 @@
           <p:cNvPr id="14" name="">
             <a:extLst xmlns:a="http://schemas.openxmlformats.org/drawingml/2006/main">
               <a:ext uri="{FF2B5EF4-FFF2-40B4-BE49-F238E27FC236}">
-                <a16:creationId xmlns:a16="http://schemas.microsoft.com/office/drawing/2014/main" id="{8C08F2C7-C230-48AE-BF1D-9384FAD02393}"/>
+                <a16:creationId xmlns:a16="http://schemas.microsoft.com/office/drawing/2014/main" id="{8B70044B-E875-4052-B2CA-9945A57BD8D3}"/>
               </a:ext>
             </a:extLst>
           </p:cNvPr>
@@ -10887,7 +13679,7 @@
           <p:cNvPr id="15" name="">
             <a:extLst xmlns:a="http://schemas.openxmlformats.org/drawingml/2006/main">
               <a:ext uri="{FF2B5EF4-FFF2-40B4-BE49-F238E27FC236}">
-                <a16:creationId xmlns:a16="http://schemas.microsoft.com/office/drawing/2014/main" id="{FC5B4A0A-04F8-482A-9315-390D62E16B5A}"/>
+                <a16:creationId xmlns:a16="http://schemas.microsoft.com/office/drawing/2014/main" id="{2CE2A3BC-1371-4BB2-AABA-3F8F1F7A4B5D}"/>
               </a:ext>
             </a:extLst>
           </p:cNvPr>
@@ -10937,7 +13729,7 @@
           <p:cNvPr id="16" name="">
             <a:extLst xmlns:a="http://schemas.openxmlformats.org/drawingml/2006/main">
               <a:ext uri="{FF2B5EF4-FFF2-40B4-BE49-F238E27FC236}">
-                <a16:creationId xmlns:a16="http://schemas.microsoft.com/office/drawing/2014/main" id="{A1F2E1A7-D3D1-4BAD-9B58-E0FC726CECEB}"/>
+                <a16:creationId xmlns:a16="http://schemas.microsoft.com/office/drawing/2014/main" id="{8661EF84-177B-455C-81AA-17D4FBC5C019}"/>
               </a:ext>
             </a:extLst>
           </p:cNvPr>
@@ -10987,7 +13779,7 @@
           <p:cNvPr id="17" name="">
             <a:extLst xmlns:a="http://schemas.openxmlformats.org/drawingml/2006/main">
               <a:ext uri="{FF2B5EF4-FFF2-40B4-BE49-F238E27FC236}">
-                <a16:creationId xmlns:a16="http://schemas.microsoft.com/office/drawing/2014/main" id="{7E446C2F-FC9A-4C41-A95B-76BF7A9B3271}"/>
+                <a16:creationId xmlns:a16="http://schemas.microsoft.com/office/drawing/2014/main" id="{8A0D76CB-5508-4AB4-AEF3-F266B5BEBBD7}"/>
               </a:ext>
             </a:extLst>
           </p:cNvPr>
@@ -11037,7 +13829,7 @@
           <p:cNvPr id="18" name="">
             <a:extLst xmlns:a="http://schemas.openxmlformats.org/drawingml/2006/main">
               <a:ext uri="{FF2B5EF4-FFF2-40B4-BE49-F238E27FC236}">
-                <a16:creationId xmlns:a16="http://schemas.microsoft.com/office/drawing/2014/main" id="{B252D230-A173-4E08-AE81-8468C574B7E0}"/>
+                <a16:creationId xmlns:a16="http://schemas.microsoft.com/office/drawing/2014/main" id="{0E3E8CEF-7ABE-4BB1-9BDF-084A82F2DFA6}"/>
               </a:ext>
             </a:extLst>
           </p:cNvPr>
@@ -11087,7 +13879,7 @@
           <p:cNvPr id="19" name="">
             <a:extLst xmlns:a="http://schemas.openxmlformats.org/drawingml/2006/main">
               <a:ext uri="{FF2B5EF4-FFF2-40B4-BE49-F238E27FC236}">
-                <a16:creationId xmlns:a16="http://schemas.microsoft.com/office/drawing/2014/main" id="{01F0FABC-9EBF-4847-AAFD-64719C30B221}"/>
+                <a16:creationId xmlns:a16="http://schemas.microsoft.com/office/drawing/2014/main" id="{12D422D3-8F18-4299-9076-6DD0BBEEC2DC}"/>
               </a:ext>
             </a:extLst>
           </p:cNvPr>
@@ -11137,7 +13929,7 @@
           <p:cNvPr id="20" name="">
             <a:extLst xmlns:a="http://schemas.openxmlformats.org/drawingml/2006/main">
               <a:ext uri="{FF2B5EF4-FFF2-40B4-BE49-F238E27FC236}">
-                <a16:creationId xmlns:a16="http://schemas.microsoft.com/office/drawing/2014/main" id="{35B1DB1C-E803-4022-8CBD-42D9F2C9B1F8}"/>
+                <a16:creationId xmlns:a16="http://schemas.microsoft.com/office/drawing/2014/main" id="{EB281D6B-8D9D-416C-98F1-F7C909B43EF1}"/>
               </a:ext>
             </a:extLst>
           </p:cNvPr>
@@ -11187,7 +13979,7 @@
           <p:cNvPr id="21" name="">
             <a:extLst xmlns:a="http://schemas.openxmlformats.org/drawingml/2006/main">
               <a:ext uri="{FF2B5EF4-FFF2-40B4-BE49-F238E27FC236}">
-                <a16:creationId xmlns:a16="http://schemas.microsoft.com/office/drawing/2014/main" id="{85FBB00B-371C-4B2E-9E29-F45824547D40}"/>
+                <a16:creationId xmlns:a16="http://schemas.microsoft.com/office/drawing/2014/main" id="{7E5AFCD7-F803-458D-9F69-D9F4519031CF}"/>
               </a:ext>
             </a:extLst>
           </p:cNvPr>
@@ -11237,7 +14029,7 @@
           <p:cNvPr id="22" name="">
             <a:extLst xmlns:a="http://schemas.openxmlformats.org/drawingml/2006/main">
               <a:ext uri="{FF2B5EF4-FFF2-40B4-BE49-F238E27FC236}">
-                <a16:creationId xmlns:a16="http://schemas.microsoft.com/office/drawing/2014/main" id="{B57423C7-E917-42E5-8E69-B1FF861746D1}"/>
+                <a16:creationId xmlns:a16="http://schemas.microsoft.com/office/drawing/2014/main" id="{9DA72713-82A6-46B4-8D3F-1C106003E5E1}"/>
               </a:ext>
             </a:extLst>
           </p:cNvPr>
@@ -11287,7 +14079,7 @@
           <p:cNvPr id="23" name="">
             <a:extLst xmlns:a="http://schemas.openxmlformats.org/drawingml/2006/main">
               <a:ext uri="{FF2B5EF4-FFF2-40B4-BE49-F238E27FC236}">
-                <a16:creationId xmlns:a16="http://schemas.microsoft.com/office/drawing/2014/main" id="{835C1339-EA84-4BF0-BA8A-A8216D688442}"/>
+                <a16:creationId xmlns:a16="http://schemas.microsoft.com/office/drawing/2014/main" id="{E5912E7A-9D48-43CE-A498-9996E03B3F81}"/>
               </a:ext>
             </a:extLst>
           </p:cNvPr>
@@ -11335,7 +14127,7 @@
     </p:spTree>
     <p:extLst>
       <p:ext uri="{BB962C8B-B14F-4D97-AF65-F5344CB8AC3E}">
-        <p14:creationId xmlns:p14="http://schemas.microsoft.com/office/powerpoint/2010/main" val="1180259244"/>
+        <p14:creationId xmlns:p14="http://schemas.microsoft.com/office/powerpoint/2010/main" val="1394013420"/>
       </p:ext>
     </p:extLst>
   </p:cSld>
@@ -11366,7 +14158,7 @@
           <p:cNvPr id="1" name="">
             <a:extLst xmlns:a="http://schemas.openxmlformats.org/drawingml/2006/main">
               <a:ext uri="{FF2B5EF4-FFF2-40B4-BE49-F238E27FC236}">
-                <a16:creationId xmlns:a16="http://schemas.microsoft.com/office/drawing/2014/main" id="{DBC1B214-6146-4764-AA7F-A99598AE04B6}"/>
+                <a16:creationId xmlns:a16="http://schemas.microsoft.com/office/drawing/2014/main" id="{68ED586E-CC15-4DAA-8280-64EBD349AF29}"/>
               </a:ext>
             </a:extLst>
           </p:cNvPr>
@@ -11416,7 +14208,7 @@
           <p:cNvPr id="2" name="">
             <a:extLst xmlns:a="http://schemas.openxmlformats.org/drawingml/2006/main">
               <a:ext uri="{FF2B5EF4-FFF2-40B4-BE49-F238E27FC236}">
-                <a16:creationId xmlns:a16="http://schemas.microsoft.com/office/drawing/2014/main" id="{B96EB98F-3684-4769-B7BC-77AA9E0A39BB}"/>
+                <a16:creationId xmlns:a16="http://schemas.microsoft.com/office/drawing/2014/main" id="{37CF659B-CF18-41E1-9E3B-1DAA7D11AF9F}"/>
               </a:ext>
             </a:extLst>
           </p:cNvPr>
@@ -11466,7 +14258,7 @@
           <p:cNvPr id="3" name="">
             <a:extLst xmlns:a="http://schemas.openxmlformats.org/drawingml/2006/main">
               <a:ext uri="{FF2B5EF4-FFF2-40B4-BE49-F238E27FC236}">
-                <a16:creationId xmlns:a16="http://schemas.microsoft.com/office/drawing/2014/main" id="{F97BF7E6-EF90-4CA4-8982-95B2F589C516}"/>
+                <a16:creationId xmlns:a16="http://schemas.microsoft.com/office/drawing/2014/main" id="{EF93C7DE-175E-448A-975F-187649CE2FF9}"/>
               </a:ext>
             </a:extLst>
           </p:cNvPr>
@@ -11501,7 +14293,7 @@
           <p:nvPr/>
         </p:nvPicPr>
         <p:blipFill>
-          <a:blip xmlns:r="http://schemas.openxmlformats.org/officeDocument/2006/relationships" xmlns:a="http://schemas.openxmlformats.org/drawingml/2006/main" r:embed="Rd0cae3e91e884ee8"/>
+          <a:blip xmlns:r="http://schemas.openxmlformats.org/officeDocument/2006/relationships" xmlns:a="http://schemas.openxmlformats.org/drawingml/2006/main" r:embed="Rafae538ec8bd483b"/>
           <a:stretch xmlns:a="http://schemas.openxmlformats.org/drawingml/2006/main"/>
         </p:blipFill>
         <p:spPr>
@@ -11519,7 +14311,7 @@
           <p:cNvPr id="5" name="">
             <a:extLst xmlns:a="http://schemas.openxmlformats.org/drawingml/2006/main">
               <a:ext uri="{FF2B5EF4-FFF2-40B4-BE49-F238E27FC236}">
-                <a16:creationId xmlns:a16="http://schemas.microsoft.com/office/drawing/2014/main" id="{80654221-CF9C-451E-82EC-E9161A53E9D1}"/>
+                <a16:creationId xmlns:a16="http://schemas.microsoft.com/office/drawing/2014/main" id="{D72AEC32-A982-4FD6-80FF-E6EC5FDF7F33}"/>
               </a:ext>
             </a:extLst>
           </p:cNvPr>
@@ -11569,7 +14361,7 @@
           <p:cNvPr id="6" name="">
             <a:extLst xmlns:a="http://schemas.openxmlformats.org/drawingml/2006/main">
               <a:ext uri="{FF2B5EF4-FFF2-40B4-BE49-F238E27FC236}">
-                <a16:creationId xmlns:a16="http://schemas.microsoft.com/office/drawing/2014/main" id="{C923F815-86BA-4D33-96B6-17ACFECE378A}"/>
+                <a16:creationId xmlns:a16="http://schemas.microsoft.com/office/drawing/2014/main" id="{FCE8A45E-39D1-4B0F-8EE7-D6A41507138A}"/>
               </a:ext>
             </a:extLst>
           </p:cNvPr>
@@ -11617,7 +14409,7 @@
     </p:spTree>
     <p:extLst>
       <p:ext uri="{BB962C8B-B14F-4D97-AF65-F5344CB8AC3E}">
-        <p14:creationId xmlns:p14="http://schemas.microsoft.com/office/powerpoint/2010/main" val="397574986"/>
+        <p14:creationId xmlns:p14="http://schemas.microsoft.com/office/powerpoint/2010/main" val="1090723574"/>
       </p:ext>
     </p:extLst>
   </p:cSld>
@@ -11648,7 +14440,7 @@
           <p:cNvPr id="1" name="">
             <a:extLst xmlns:a="http://schemas.openxmlformats.org/drawingml/2006/main">
               <a:ext uri="{FF2B5EF4-FFF2-40B4-BE49-F238E27FC236}">
-                <a16:creationId xmlns:a16="http://schemas.microsoft.com/office/drawing/2014/main" id="{33A49778-0DC4-4BAE-961F-97F82944949C}"/>
+                <a16:creationId xmlns:a16="http://schemas.microsoft.com/office/drawing/2014/main" id="{7832EC6B-D6E4-47AF-AE09-CC770C631A86}"/>
               </a:ext>
             </a:extLst>
           </p:cNvPr>
@@ -11698,7 +14490,7 @@
           <p:cNvPr id="2" name="">
             <a:extLst xmlns:a="http://schemas.openxmlformats.org/drawingml/2006/main">
               <a:ext uri="{FF2B5EF4-FFF2-40B4-BE49-F238E27FC236}">
-                <a16:creationId xmlns:a16="http://schemas.microsoft.com/office/drawing/2014/main" id="{84998785-9145-4FCE-A54F-5E8865DF29C2}"/>
+                <a16:creationId xmlns:a16="http://schemas.microsoft.com/office/drawing/2014/main" id="{37F4A26F-8D69-49C3-B638-DF217F4425CA}"/>
               </a:ext>
             </a:extLst>
           </p:cNvPr>
@@ -11748,7 +14540,7 @@
           <p:cNvPr id="3" name="">
             <a:extLst xmlns:a="http://schemas.openxmlformats.org/drawingml/2006/main">
               <a:ext uri="{FF2B5EF4-FFF2-40B4-BE49-F238E27FC236}">
-                <a16:creationId xmlns:a16="http://schemas.microsoft.com/office/drawing/2014/main" id="{689F875F-0750-4433-8F47-72914CBDCA1C}"/>
+                <a16:creationId xmlns:a16="http://schemas.microsoft.com/office/drawing/2014/main" id="{4B0083C0-1E5F-4A68-9BDD-5FA001751826}"/>
               </a:ext>
             </a:extLst>
           </p:cNvPr>
@@ -11783,7 +14575,7 @@
           <p:nvPr/>
         </p:nvPicPr>
         <p:blipFill>
-          <a:blip xmlns:r="http://schemas.openxmlformats.org/officeDocument/2006/relationships" xmlns:a="http://schemas.openxmlformats.org/drawingml/2006/main" r:embed="Rc358e62a2eae43d0"/>
+          <a:blip xmlns:r="http://schemas.openxmlformats.org/officeDocument/2006/relationships" xmlns:a="http://schemas.openxmlformats.org/drawingml/2006/main" r:embed="Rf4d006d2053f4ce1"/>
           <a:stretch xmlns:a="http://schemas.openxmlformats.org/drawingml/2006/main"/>
         </p:blipFill>
         <p:spPr>
@@ -11801,7 +14593,7 @@
           <p:cNvPr id="5" name="">
             <a:extLst xmlns:a="http://schemas.openxmlformats.org/drawingml/2006/main">
               <a:ext uri="{FF2B5EF4-FFF2-40B4-BE49-F238E27FC236}">
-                <a16:creationId xmlns:a16="http://schemas.microsoft.com/office/drawing/2014/main" id="{A8E681E7-870B-4C89-9820-9400A077D089}"/>
+                <a16:creationId xmlns:a16="http://schemas.microsoft.com/office/drawing/2014/main" id="{F250F90E-C140-4CEE-87EC-E4ACDB4BD71B}"/>
               </a:ext>
             </a:extLst>
           </p:cNvPr>
@@ -11851,7 +14643,7 @@
           <p:cNvPr id="6" name="">
             <a:extLst xmlns:a="http://schemas.openxmlformats.org/drawingml/2006/main">
               <a:ext uri="{FF2B5EF4-FFF2-40B4-BE49-F238E27FC236}">
-                <a16:creationId xmlns:a16="http://schemas.microsoft.com/office/drawing/2014/main" id="{DF022C8C-A4E9-4944-901E-CDC712F6E770}"/>
+                <a16:creationId xmlns:a16="http://schemas.microsoft.com/office/drawing/2014/main" id="{3D70E579-F0C6-4D75-9FC0-982EC9870190}"/>
               </a:ext>
             </a:extLst>
           </p:cNvPr>
@@ -11901,7 +14693,7 @@
           <p:cNvPr id="7" name="">
             <a:extLst xmlns:a="http://schemas.openxmlformats.org/drawingml/2006/main">
               <a:ext uri="{FF2B5EF4-FFF2-40B4-BE49-F238E27FC236}">
-                <a16:creationId xmlns:a16="http://schemas.microsoft.com/office/drawing/2014/main" id="{C05BAF81-DD5C-48A0-99F5-5FC24CB8D9E7}"/>
+                <a16:creationId xmlns:a16="http://schemas.microsoft.com/office/drawing/2014/main" id="{EA485FC0-2598-4B1B-BFBD-45974EFF0DA1}"/>
               </a:ext>
             </a:extLst>
           </p:cNvPr>
@@ -11951,7 +14743,7 @@
           <p:cNvPr id="8" name="">
             <a:extLst xmlns:a="http://schemas.openxmlformats.org/drawingml/2006/main">
               <a:ext uri="{FF2B5EF4-FFF2-40B4-BE49-F238E27FC236}">
-                <a16:creationId xmlns:a16="http://schemas.microsoft.com/office/drawing/2014/main" id="{BDB79631-3684-407E-BA29-ACB6C1398777}"/>
+                <a16:creationId xmlns:a16="http://schemas.microsoft.com/office/drawing/2014/main" id="{DFFE78DF-389B-4B4A-9412-A927BE6E0B93}"/>
               </a:ext>
             </a:extLst>
           </p:cNvPr>
@@ -12001,7 +14793,7 @@
           <p:cNvPr id="9" name="">
             <a:extLst xmlns:a="http://schemas.openxmlformats.org/drawingml/2006/main">
               <a:ext uri="{FF2B5EF4-FFF2-40B4-BE49-F238E27FC236}">
-                <a16:creationId xmlns:a16="http://schemas.microsoft.com/office/drawing/2014/main" id="{BA28C531-02EB-4B6C-AD4A-EB136170C2E0}"/>
+                <a16:creationId xmlns:a16="http://schemas.microsoft.com/office/drawing/2014/main" id="{1D402320-2469-4E97-A50F-C381666F7E16}"/>
               </a:ext>
             </a:extLst>
           </p:cNvPr>
@@ -12049,7 +14841,7 @@
     </p:spTree>
     <p:extLst>
       <p:ext uri="{BB962C8B-B14F-4D97-AF65-F5344CB8AC3E}">
-        <p14:creationId xmlns:p14="http://schemas.microsoft.com/office/powerpoint/2010/main" val="1899949632"/>
+        <p14:creationId xmlns:p14="http://schemas.microsoft.com/office/powerpoint/2010/main" val="1179381928"/>
       </p:ext>
     </p:extLst>
   </p:cSld>
@@ -12080,7 +14872,7 @@
           <p:cNvPr id="1" name="">
             <a:extLst xmlns:a="http://schemas.openxmlformats.org/drawingml/2006/main">
               <a:ext uri="{FF2B5EF4-FFF2-40B4-BE49-F238E27FC236}">
-                <a16:creationId xmlns:a16="http://schemas.microsoft.com/office/drawing/2014/main" id="{17922E52-8030-40D3-AF53-E9E4800AAB6F}"/>
+                <a16:creationId xmlns:a16="http://schemas.microsoft.com/office/drawing/2014/main" id="{6EB70300-44DE-4654-8499-C4E58BE777ED}"/>
               </a:ext>
             </a:extLst>
           </p:cNvPr>
@@ -12130,7 +14922,7 @@
           <p:cNvPr id="2" name="">
             <a:extLst xmlns:a="http://schemas.openxmlformats.org/drawingml/2006/main">
               <a:ext uri="{FF2B5EF4-FFF2-40B4-BE49-F238E27FC236}">
-                <a16:creationId xmlns:a16="http://schemas.microsoft.com/office/drawing/2014/main" id="{2DF0F1A9-2846-4A2B-BEC7-C31643FCE090}"/>
+                <a16:creationId xmlns:a16="http://schemas.microsoft.com/office/drawing/2014/main" id="{B282FA0C-DCC5-4478-B855-5CF2EF925C8D}"/>
               </a:ext>
             </a:extLst>
           </p:cNvPr>
@@ -12180,7 +14972,7 @@
           <p:cNvPr id="3" name="">
             <a:extLst xmlns:a="http://schemas.openxmlformats.org/drawingml/2006/main">
               <a:ext uri="{FF2B5EF4-FFF2-40B4-BE49-F238E27FC236}">
-                <a16:creationId xmlns:a16="http://schemas.microsoft.com/office/drawing/2014/main" id="{BCDE0107-795F-45EC-A323-E5E754F60BDD}"/>
+                <a16:creationId xmlns:a16="http://schemas.microsoft.com/office/drawing/2014/main" id="{FABB38D3-EA7C-4C3E-963F-AD28927DA1D6}"/>
               </a:ext>
             </a:extLst>
           </p:cNvPr>
@@ -12215,7 +15007,7 @@
           <p:nvPr/>
         </p:nvPicPr>
         <p:blipFill>
-          <a:blip xmlns:r="http://schemas.openxmlformats.org/officeDocument/2006/relationships" xmlns:a="http://schemas.openxmlformats.org/drawingml/2006/main" r:embed="R867ffcad5f8d4eb0"/>
+          <a:blip xmlns:r="http://schemas.openxmlformats.org/officeDocument/2006/relationships" xmlns:a="http://schemas.openxmlformats.org/drawingml/2006/main" r:embed="R21b0743a7fc44e91"/>
           <a:stretch xmlns:a="http://schemas.openxmlformats.org/drawingml/2006/main"/>
         </p:blipFill>
         <p:spPr>
@@ -12237,7 +15029,7 @@
           <p:nvPr/>
         </p:nvPicPr>
         <p:blipFill>
-          <a:blip xmlns:r="http://schemas.openxmlformats.org/officeDocument/2006/relationships" xmlns:a="http://schemas.openxmlformats.org/drawingml/2006/main" r:embed="R097264eae7724fdf"/>
+          <a:blip xmlns:r="http://schemas.openxmlformats.org/officeDocument/2006/relationships" xmlns:a="http://schemas.openxmlformats.org/drawingml/2006/main" r:embed="R89433265204045ce"/>
           <a:stretch xmlns:a="http://schemas.openxmlformats.org/drawingml/2006/main"/>
         </p:blipFill>
         <p:spPr>
@@ -12255,7 +15047,7 @@
           <p:cNvPr id="6" name="">
             <a:extLst xmlns:a="http://schemas.openxmlformats.org/drawingml/2006/main">
               <a:ext uri="{FF2B5EF4-FFF2-40B4-BE49-F238E27FC236}">
-                <a16:creationId xmlns:a16="http://schemas.microsoft.com/office/drawing/2014/main" id="{CDE2534B-A02B-4FE8-9130-36F73EE50FA9}"/>
+                <a16:creationId xmlns:a16="http://schemas.microsoft.com/office/drawing/2014/main" id="{CA282EA3-7E1B-429F-8B12-A405F8BFEC31}"/>
               </a:ext>
             </a:extLst>
           </p:cNvPr>
@@ -12303,7 +15095,7 @@
     </p:spTree>
     <p:extLst>
       <p:ext uri="{BB962C8B-B14F-4D97-AF65-F5344CB8AC3E}">
-        <p14:creationId xmlns:p14="http://schemas.microsoft.com/office/powerpoint/2010/main" val="379807712"/>
+        <p14:creationId xmlns:p14="http://schemas.microsoft.com/office/powerpoint/2010/main" val="1041826418"/>
       </p:ext>
     </p:extLst>
   </p:cSld>
@@ -12334,7 +15126,7 @@
           <p:cNvPr id="1" name="">
             <a:extLst xmlns:a="http://schemas.openxmlformats.org/drawingml/2006/main">
               <a:ext uri="{FF2B5EF4-FFF2-40B4-BE49-F238E27FC236}">
-                <a16:creationId xmlns:a16="http://schemas.microsoft.com/office/drawing/2014/main" id="{C8993EC3-7D5F-458C-8607-911E97EFE4CF}"/>
+                <a16:creationId xmlns:a16="http://schemas.microsoft.com/office/drawing/2014/main" id="{E12F0D9E-4292-4AA0-AD18-191CCEF68207}"/>
               </a:ext>
             </a:extLst>
           </p:cNvPr>
@@ -12384,7 +15176,7 @@
           <p:cNvPr id="2" name="">
             <a:extLst xmlns:a="http://schemas.openxmlformats.org/drawingml/2006/main">
               <a:ext uri="{FF2B5EF4-FFF2-40B4-BE49-F238E27FC236}">
-                <a16:creationId xmlns:a16="http://schemas.microsoft.com/office/drawing/2014/main" id="{D6959B8B-3CEF-4456-AA62-AC60686EAD87}"/>
+                <a16:creationId xmlns:a16="http://schemas.microsoft.com/office/drawing/2014/main" id="{15E1FDF8-359C-4A52-9A53-E810E9EDCE55}"/>
               </a:ext>
             </a:extLst>
           </p:cNvPr>
@@ -12434,7 +15226,7 @@
           <p:cNvPr id="3" name="">
             <a:extLst xmlns:a="http://schemas.openxmlformats.org/drawingml/2006/main">
               <a:ext uri="{FF2B5EF4-FFF2-40B4-BE49-F238E27FC236}">
-                <a16:creationId xmlns:a16="http://schemas.microsoft.com/office/drawing/2014/main" id="{F32CF3EC-8F97-4B03-B3A1-3A0F7991B661}"/>
+                <a16:creationId xmlns:a16="http://schemas.microsoft.com/office/drawing/2014/main" id="{E80A0AD5-B5B4-489E-9E98-A90E6CF9E14E}"/>
               </a:ext>
             </a:extLst>
           </p:cNvPr>
@@ -12469,7 +15261,7 @@
           <p:nvPr/>
         </p:nvPicPr>
         <p:blipFill>
-          <a:blip xmlns:r="http://schemas.openxmlformats.org/officeDocument/2006/relationships" xmlns:a="http://schemas.openxmlformats.org/drawingml/2006/main" r:embed="R7329df2c40af4213"/>
+          <a:blip xmlns:r="http://schemas.openxmlformats.org/officeDocument/2006/relationships" xmlns:a="http://schemas.openxmlformats.org/drawingml/2006/main" r:embed="Recb4cfd2912a40ef"/>
           <a:stretch xmlns:a="http://schemas.openxmlformats.org/drawingml/2006/main"/>
         </p:blipFill>
         <p:spPr>
@@ -12487,7 +15279,7 @@
           <p:cNvPr id="5" name="">
             <a:extLst xmlns:a="http://schemas.openxmlformats.org/drawingml/2006/main">
               <a:ext uri="{FF2B5EF4-FFF2-40B4-BE49-F238E27FC236}">
-                <a16:creationId xmlns:a16="http://schemas.microsoft.com/office/drawing/2014/main" id="{7619CEC8-A47B-40E8-B0D4-E1C429568030}"/>
+                <a16:creationId xmlns:a16="http://schemas.microsoft.com/office/drawing/2014/main" id="{8D81F1CB-737F-4BA6-A2BE-3AB8CFC24261}"/>
               </a:ext>
             </a:extLst>
           </p:cNvPr>
@@ -12537,7 +15329,7 @@
           <p:cNvPr id="6" name="">
             <a:extLst xmlns:a="http://schemas.openxmlformats.org/drawingml/2006/main">
               <a:ext uri="{FF2B5EF4-FFF2-40B4-BE49-F238E27FC236}">
-                <a16:creationId xmlns:a16="http://schemas.microsoft.com/office/drawing/2014/main" id="{2E5380D4-5343-4706-989C-CBF57C3124BF}"/>
+                <a16:creationId xmlns:a16="http://schemas.microsoft.com/office/drawing/2014/main" id="{A8DC66E1-9847-4621-9E45-E09601BE1627}"/>
               </a:ext>
             </a:extLst>
           </p:cNvPr>
@@ -12585,7 +15377,7 @@
     </p:spTree>
     <p:extLst>
       <p:ext uri="{BB962C8B-B14F-4D97-AF65-F5344CB8AC3E}">
-        <p14:creationId xmlns:p14="http://schemas.microsoft.com/office/powerpoint/2010/main" val="258425809"/>
+        <p14:creationId xmlns:p14="http://schemas.microsoft.com/office/powerpoint/2010/main" val="648752573"/>
       </p:ext>
     </p:extLst>
   </p:cSld>
@@ -12616,7 +15408,7 @@
           <p:cNvPr id="1" name="">
             <a:extLst xmlns:a="http://schemas.openxmlformats.org/drawingml/2006/main">
               <a:ext uri="{FF2B5EF4-FFF2-40B4-BE49-F238E27FC236}">
-                <a16:creationId xmlns:a16="http://schemas.microsoft.com/office/drawing/2014/main" id="{CED06015-3DEE-4987-BEE4-7D3CB55AF8CE}"/>
+                <a16:creationId xmlns:a16="http://schemas.microsoft.com/office/drawing/2014/main" id="{46E82D87-5909-4449-A5F1-9D1F56B54517}"/>
               </a:ext>
             </a:extLst>
           </p:cNvPr>
@@ -12666,7 +15458,7 @@
           <p:cNvPr id="2" name="">
             <a:extLst xmlns:a="http://schemas.openxmlformats.org/drawingml/2006/main">
               <a:ext uri="{FF2B5EF4-FFF2-40B4-BE49-F238E27FC236}">
-                <a16:creationId xmlns:a16="http://schemas.microsoft.com/office/drawing/2014/main" id="{F79B0D3B-B7D0-47F1-B3E5-C6B1D1527276}"/>
+                <a16:creationId xmlns:a16="http://schemas.microsoft.com/office/drawing/2014/main" id="{342CDE90-A5AD-4C0D-83DB-BC4A942AABF7}"/>
               </a:ext>
             </a:extLst>
           </p:cNvPr>
@@ -12716,7 +15508,7 @@
           <p:cNvPr id="3" name="">
             <a:extLst xmlns:a="http://schemas.openxmlformats.org/drawingml/2006/main">
               <a:ext uri="{FF2B5EF4-FFF2-40B4-BE49-F238E27FC236}">
-                <a16:creationId xmlns:a16="http://schemas.microsoft.com/office/drawing/2014/main" id="{7C2F7EAA-78BC-4DD0-8209-37E3A12453AC}"/>
+                <a16:creationId xmlns:a16="http://schemas.microsoft.com/office/drawing/2014/main" id="{43C73D05-8F9B-42A0-81D8-BC17E1E3C62C}"/>
               </a:ext>
             </a:extLst>
           </p:cNvPr>
@@ -12751,7 +15543,7 @@
           <p:nvPr/>
         </p:nvPicPr>
         <p:blipFill>
-          <a:blip xmlns:r="http://schemas.openxmlformats.org/officeDocument/2006/relationships" xmlns:a="http://schemas.openxmlformats.org/drawingml/2006/main" r:embed="Rb8bd0dd0b5e14e7e"/>
+          <a:blip xmlns:r="http://schemas.openxmlformats.org/officeDocument/2006/relationships" xmlns:a="http://schemas.openxmlformats.org/drawingml/2006/main" r:embed="R97918f5886644425"/>
           <a:stretch xmlns:a="http://schemas.openxmlformats.org/drawingml/2006/main"/>
         </p:blipFill>
         <p:spPr>
@@ -12769,7 +15561,7 @@
           <p:cNvPr id="5" name="">
             <a:extLst xmlns:a="http://schemas.openxmlformats.org/drawingml/2006/main">
               <a:ext uri="{FF2B5EF4-FFF2-40B4-BE49-F238E27FC236}">
-                <a16:creationId xmlns:a16="http://schemas.microsoft.com/office/drawing/2014/main" id="{67210EEC-B266-43DD-B01B-9A178D2AE458}"/>
+                <a16:creationId xmlns:a16="http://schemas.microsoft.com/office/drawing/2014/main" id="{B84BBCC9-733B-4372-A424-7FDFEAC515A2}"/>
               </a:ext>
             </a:extLst>
           </p:cNvPr>
@@ -12819,7 +15611,7 @@
           <p:cNvPr id="6" name="">
             <a:extLst xmlns:a="http://schemas.openxmlformats.org/drawingml/2006/main">
               <a:ext uri="{FF2B5EF4-FFF2-40B4-BE49-F238E27FC236}">
-                <a16:creationId xmlns:a16="http://schemas.microsoft.com/office/drawing/2014/main" id="{59AC4BD4-2C25-4094-8747-F27400D7809D}"/>
+                <a16:creationId xmlns:a16="http://schemas.microsoft.com/office/drawing/2014/main" id="{7D87C5E9-355B-4C5D-A90A-FE4B76BF2141}"/>
               </a:ext>
             </a:extLst>
           </p:cNvPr>
@@ -12867,7 +15659,7 @@
     </p:spTree>
     <p:extLst>
       <p:ext uri="{BB962C8B-B14F-4D97-AF65-F5344CB8AC3E}">
-        <p14:creationId xmlns:p14="http://schemas.microsoft.com/office/powerpoint/2010/main" val="1172100279"/>
+        <p14:creationId xmlns:p14="http://schemas.microsoft.com/office/powerpoint/2010/main" val="502205706"/>
       </p:ext>
     </p:extLst>
   </p:cSld>
@@ -12898,7 +15690,7 @@
           <p:cNvPr id="1" name="">
             <a:extLst xmlns:a="http://schemas.openxmlformats.org/drawingml/2006/main">
               <a:ext uri="{FF2B5EF4-FFF2-40B4-BE49-F238E27FC236}">
-                <a16:creationId xmlns:a16="http://schemas.microsoft.com/office/drawing/2014/main" id="{0954314F-4212-4C8F-BA46-430FA85F6AB2}"/>
+                <a16:creationId xmlns:a16="http://schemas.microsoft.com/office/drawing/2014/main" id="{7C44B808-3085-49A0-A978-1F758D32ABF8}"/>
               </a:ext>
             </a:extLst>
           </p:cNvPr>
@@ -12948,7 +15740,7 @@
           <p:cNvPr id="2" name="">
             <a:extLst xmlns:a="http://schemas.openxmlformats.org/drawingml/2006/main">
               <a:ext uri="{FF2B5EF4-FFF2-40B4-BE49-F238E27FC236}">
-                <a16:creationId xmlns:a16="http://schemas.microsoft.com/office/drawing/2014/main" id="{59E977BA-DA8E-4F40-8666-CE90F67D3CE6}"/>
+                <a16:creationId xmlns:a16="http://schemas.microsoft.com/office/drawing/2014/main" id="{3E0E6750-F9D3-4431-83B0-777679B26CA5}"/>
               </a:ext>
             </a:extLst>
           </p:cNvPr>
@@ -12998,7 +15790,7 @@
           <p:cNvPr id="3" name="">
             <a:extLst xmlns:a="http://schemas.openxmlformats.org/drawingml/2006/main">
               <a:ext uri="{FF2B5EF4-FFF2-40B4-BE49-F238E27FC236}">
-                <a16:creationId xmlns:a16="http://schemas.microsoft.com/office/drawing/2014/main" id="{3DF779C3-C95C-404C-943D-E80AF756DCB9}"/>
+                <a16:creationId xmlns:a16="http://schemas.microsoft.com/office/drawing/2014/main" id="{84F05C60-4AF1-480D-A3B6-98BFDE05EAE5}"/>
               </a:ext>
             </a:extLst>
           </p:cNvPr>
@@ -13033,7 +15825,7 @@
           <p:nvPr/>
         </p:nvPicPr>
         <p:blipFill>
-          <a:blip xmlns:r="http://schemas.openxmlformats.org/officeDocument/2006/relationships" xmlns:a="http://schemas.openxmlformats.org/drawingml/2006/main" r:embed="R0dc2c4da3862492d"/>
+          <a:blip xmlns:r="http://schemas.openxmlformats.org/officeDocument/2006/relationships" xmlns:a="http://schemas.openxmlformats.org/drawingml/2006/main" r:embed="Rd608452280084a72"/>
           <a:stretch xmlns:a="http://schemas.openxmlformats.org/drawingml/2006/main"/>
         </p:blipFill>
         <p:spPr>
@@ -13051,7 +15843,7 @@
           <p:cNvPr id="5" name="">
             <a:extLst xmlns:a="http://schemas.openxmlformats.org/drawingml/2006/main">
               <a:ext uri="{FF2B5EF4-FFF2-40B4-BE49-F238E27FC236}">
-                <a16:creationId xmlns:a16="http://schemas.microsoft.com/office/drawing/2014/main" id="{FB84B190-E954-4506-9E68-09892F020881}"/>
+                <a16:creationId xmlns:a16="http://schemas.microsoft.com/office/drawing/2014/main" id="{0F640CD4-B527-45D4-8C38-F212CCDC668F}"/>
               </a:ext>
             </a:extLst>
           </p:cNvPr>
@@ -13101,7 +15893,7 @@
           <p:cNvPr id="6" name="">
             <a:extLst xmlns:a="http://schemas.openxmlformats.org/drawingml/2006/main">
               <a:ext uri="{FF2B5EF4-FFF2-40B4-BE49-F238E27FC236}">
-                <a16:creationId xmlns:a16="http://schemas.microsoft.com/office/drawing/2014/main" id="{DD36A641-710D-466D-A682-21C83768C2D1}"/>
+                <a16:creationId xmlns:a16="http://schemas.microsoft.com/office/drawing/2014/main" id="{D72E1E18-8F39-42CF-81AF-B2AB1670396C}"/>
               </a:ext>
             </a:extLst>
           </p:cNvPr>
@@ -13149,7 +15941,7 @@
     </p:spTree>
     <p:extLst>
       <p:ext uri="{BB962C8B-B14F-4D97-AF65-F5344CB8AC3E}">
-        <p14:creationId xmlns:p14="http://schemas.microsoft.com/office/powerpoint/2010/main" val="1465508923"/>
+        <p14:creationId xmlns:p14="http://schemas.microsoft.com/office/powerpoint/2010/main" val="1296954859"/>
       </p:ext>
     </p:extLst>
   </p:cSld>

--- a/presentations/gen5_4_ml_decision_engine_incremental_build.pptx
+++ b/presentations/gen5_4_ml_decision_engine_incremental_build.pptx
@@ -2,40 +2,48 @@
 <file path=ppt/presentation.xml><?xml version="1.0" encoding="utf-8"?>
 <p:presentation xmlns:p="http://schemas.openxmlformats.org/presentationml/2006/main">
   <p:sldMasterIdLst>
-    <p:sldMasterId xmlns:r="http://schemas.openxmlformats.org/officeDocument/2006/relationships" id="2147483648" r:id="R820a2aa7ebd74476"/>
+    <p:sldMasterId xmlns:r="http://schemas.openxmlformats.org/officeDocument/2006/relationships" id="2147483648" r:id="R210cbdbc50624a17"/>
   </p:sldMasterIdLst>
   <p:notesMasterIdLst>
-    <p:notesMasterId xmlns:r="http://schemas.openxmlformats.org/officeDocument/2006/relationships" r:id="R42316b72199646cb"/>
+    <p:notesMasterId xmlns:r="http://schemas.openxmlformats.org/officeDocument/2006/relationships" r:id="Rbe1accf9d96044d3"/>
   </p:notesMasterIdLst>
   <p:sldIdLst>
-    <p:sldId xmlns:r="http://schemas.openxmlformats.org/officeDocument/2006/relationships" id="256" r:id="Raf950ac80d6045eb"/>
-    <p:sldId xmlns:r="http://schemas.openxmlformats.org/officeDocument/2006/relationships" id="257" r:id="R743c2e1955a2406e"/>
-    <p:sldId xmlns:r="http://schemas.openxmlformats.org/officeDocument/2006/relationships" id="258" r:id="Rd91c9e62826f4456"/>
-    <p:sldId xmlns:r="http://schemas.openxmlformats.org/officeDocument/2006/relationships" id="259" r:id="R5c5af58dd20b4c3f"/>
-    <p:sldId xmlns:r="http://schemas.openxmlformats.org/officeDocument/2006/relationships" id="260" r:id="Rf3a001ae9eae491e"/>
-    <p:sldId xmlns:r="http://schemas.openxmlformats.org/officeDocument/2006/relationships" id="261" r:id="R802d22e11e7b4a95"/>
-    <p:sldId xmlns:r="http://schemas.openxmlformats.org/officeDocument/2006/relationships" id="262" r:id="R7daeb7077d854041"/>
-    <p:sldId xmlns:r="http://schemas.openxmlformats.org/officeDocument/2006/relationships" id="263" r:id="Reb7c16b5c2d645c9"/>
-    <p:sldId xmlns:r="http://schemas.openxmlformats.org/officeDocument/2006/relationships" id="264" r:id="R3662f7c50905420d"/>
-    <p:sldId xmlns:r="http://schemas.openxmlformats.org/officeDocument/2006/relationships" id="265" r:id="R08ef14c4ef154c9a"/>
-    <p:sldId xmlns:r="http://schemas.openxmlformats.org/officeDocument/2006/relationships" id="266" r:id="R58dc2e036a00445c"/>
-    <p:sldId xmlns:r="http://schemas.openxmlformats.org/officeDocument/2006/relationships" id="267" r:id="Ra09e18b5edbd4348"/>
-    <p:sldId xmlns:r="http://schemas.openxmlformats.org/officeDocument/2006/relationships" id="268" r:id="R15e13ff0e61c455f"/>
-    <p:sldId xmlns:r="http://schemas.openxmlformats.org/officeDocument/2006/relationships" id="269" r:id="R3586ecf25ebf4114"/>
-    <p:sldId xmlns:r="http://schemas.openxmlformats.org/officeDocument/2006/relationships" id="270" r:id="R753442f163074c02"/>
-    <p:sldId xmlns:r="http://schemas.openxmlformats.org/officeDocument/2006/relationships" id="271" r:id="R7637da7bea7e446e"/>
-    <p:sldId xmlns:r="http://schemas.openxmlformats.org/officeDocument/2006/relationships" id="272" r:id="Re04013194c6f4c90"/>
-    <p:sldId xmlns:r="http://schemas.openxmlformats.org/officeDocument/2006/relationships" id="273" r:id="R647533aba2544e72"/>
-    <p:sldId xmlns:r="http://schemas.openxmlformats.org/officeDocument/2006/relationships" id="274" r:id="R68955c33752141e8"/>
-    <p:sldId xmlns:r="http://schemas.openxmlformats.org/officeDocument/2006/relationships" id="275" r:id="R1063cf8f93954009"/>
-    <p:sldId xmlns:r="http://schemas.openxmlformats.org/officeDocument/2006/relationships" id="276" r:id="Rf480dd31bbc9445b"/>
-    <p:sldId xmlns:r="http://schemas.openxmlformats.org/officeDocument/2006/relationships" id="277" r:id="Rbb83113e246e4b8d"/>
-    <p:sldId xmlns:r="http://schemas.openxmlformats.org/officeDocument/2006/relationships" id="278" r:id="R6c00aa1f5b6f4c98"/>
-    <p:sldId xmlns:r="http://schemas.openxmlformats.org/officeDocument/2006/relationships" id="279" r:id="Rbbcae295eabc473a"/>
-    <p:sldId xmlns:r="http://schemas.openxmlformats.org/officeDocument/2006/relationships" id="280" r:id="R4fdd036733e3433a"/>
-    <p:sldId xmlns:r="http://schemas.openxmlformats.org/officeDocument/2006/relationships" id="281" r:id="R231a60c531684af2"/>
-    <p:sldId xmlns:r="http://schemas.openxmlformats.org/officeDocument/2006/relationships" id="282" r:id="R8d39e877a5894962"/>
-    <p:sldId xmlns:r="http://schemas.openxmlformats.org/officeDocument/2006/relationships" id="283" r:id="R1fbad01af49a41f3"/>
+    <p:sldId xmlns:r="http://schemas.openxmlformats.org/officeDocument/2006/relationships" id="256" r:id="Rcd1cf3fbc9414d75"/>
+    <p:sldId xmlns:r="http://schemas.openxmlformats.org/officeDocument/2006/relationships" id="257" r:id="R050d394bd8c24bba"/>
+    <p:sldId xmlns:r="http://schemas.openxmlformats.org/officeDocument/2006/relationships" id="258" r:id="R6e34ee7770b540c0"/>
+    <p:sldId xmlns:r="http://schemas.openxmlformats.org/officeDocument/2006/relationships" id="259" r:id="Rf6941a1941e44bfa"/>
+    <p:sldId xmlns:r="http://schemas.openxmlformats.org/officeDocument/2006/relationships" id="260" r:id="R21dfb9d1346d466e"/>
+    <p:sldId xmlns:r="http://schemas.openxmlformats.org/officeDocument/2006/relationships" id="261" r:id="R483a03fdfe2f4019"/>
+    <p:sldId xmlns:r="http://schemas.openxmlformats.org/officeDocument/2006/relationships" id="262" r:id="Rf943f159075a4635"/>
+    <p:sldId xmlns:r="http://schemas.openxmlformats.org/officeDocument/2006/relationships" id="263" r:id="Ra66ef152f58f4d18"/>
+    <p:sldId xmlns:r="http://schemas.openxmlformats.org/officeDocument/2006/relationships" id="264" r:id="Rb032f9f669034ebd"/>
+    <p:sldId xmlns:r="http://schemas.openxmlformats.org/officeDocument/2006/relationships" id="265" r:id="R3ad86645946f445a"/>
+    <p:sldId xmlns:r="http://schemas.openxmlformats.org/officeDocument/2006/relationships" id="266" r:id="Ra0a05137979045e6"/>
+    <p:sldId xmlns:r="http://schemas.openxmlformats.org/officeDocument/2006/relationships" id="267" r:id="R65d002e21b564e5e"/>
+    <p:sldId xmlns:r="http://schemas.openxmlformats.org/officeDocument/2006/relationships" id="268" r:id="Rf386ab8af39d4c38"/>
+    <p:sldId xmlns:r="http://schemas.openxmlformats.org/officeDocument/2006/relationships" id="269" r:id="R857af94b6c374f76"/>
+    <p:sldId xmlns:r="http://schemas.openxmlformats.org/officeDocument/2006/relationships" id="270" r:id="Re02b3ea304e74178"/>
+    <p:sldId xmlns:r="http://schemas.openxmlformats.org/officeDocument/2006/relationships" id="271" r:id="Rcca8b618e7b646d8"/>
+    <p:sldId xmlns:r="http://schemas.openxmlformats.org/officeDocument/2006/relationships" id="272" r:id="R43a2644c1c704577"/>
+    <p:sldId xmlns:r="http://schemas.openxmlformats.org/officeDocument/2006/relationships" id="273" r:id="R5f8e393eeb8c4caa"/>
+    <p:sldId xmlns:r="http://schemas.openxmlformats.org/officeDocument/2006/relationships" id="274" r:id="R2a3400a53eac41e6"/>
+    <p:sldId xmlns:r="http://schemas.openxmlformats.org/officeDocument/2006/relationships" id="275" r:id="R0612392fc4434a1b"/>
+    <p:sldId xmlns:r="http://schemas.openxmlformats.org/officeDocument/2006/relationships" id="276" r:id="R1ec18d7a137545b0"/>
+    <p:sldId xmlns:r="http://schemas.openxmlformats.org/officeDocument/2006/relationships" id="277" r:id="R52b5bb9df89f4eb9"/>
+    <p:sldId xmlns:r="http://schemas.openxmlformats.org/officeDocument/2006/relationships" id="278" r:id="R74cadfc739484b4c"/>
+    <p:sldId xmlns:r="http://schemas.openxmlformats.org/officeDocument/2006/relationships" id="279" r:id="R8076aa45df4d409a"/>
+    <p:sldId xmlns:r="http://schemas.openxmlformats.org/officeDocument/2006/relationships" id="280" r:id="R595379aff2994c7d"/>
+    <p:sldId xmlns:r="http://schemas.openxmlformats.org/officeDocument/2006/relationships" id="281" r:id="R91d25e538690458e"/>
+    <p:sldId xmlns:r="http://schemas.openxmlformats.org/officeDocument/2006/relationships" id="282" r:id="R9313c6f396184cd5"/>
+    <p:sldId xmlns:r="http://schemas.openxmlformats.org/officeDocument/2006/relationships" id="283" r:id="R78d1a06edbf74c50"/>
+    <p:sldId xmlns:r="http://schemas.openxmlformats.org/officeDocument/2006/relationships" id="284" r:id="R846b9105f3914523"/>
+    <p:sldId xmlns:r="http://schemas.openxmlformats.org/officeDocument/2006/relationships" id="285" r:id="R6d9930efa91246c6"/>
+    <p:sldId xmlns:r="http://schemas.openxmlformats.org/officeDocument/2006/relationships" id="286" r:id="Ra6e1e22c158342fe"/>
+    <p:sldId xmlns:r="http://schemas.openxmlformats.org/officeDocument/2006/relationships" id="287" r:id="R6e1f4ab6096b48ad"/>
+    <p:sldId xmlns:r="http://schemas.openxmlformats.org/officeDocument/2006/relationships" id="288" r:id="R4524b5a5d8e6420c"/>
+    <p:sldId xmlns:r="http://schemas.openxmlformats.org/officeDocument/2006/relationships" id="289" r:id="R4b410d0bd3054fd4"/>
+    <p:sldId xmlns:r="http://schemas.openxmlformats.org/officeDocument/2006/relationships" id="290" r:id="R3b8a5886e6d84af6"/>
+    <p:sldId xmlns:r="http://schemas.openxmlformats.org/officeDocument/2006/relationships" id="291" r:id="R8f35863919da49ec"/>
   </p:sldIdLst>
   <p:sldSz cx="12192000" cy="6858000"/>
   <p:notesSz cx="6858000" cy="9144000"/>
@@ -1910,7 +1918,535 @@
 </p:notes>
 </file>
 
+<file path=ppt/notesSlides/notesSlide29.xml><?xml version="1.0" encoding="utf-8"?>
+<p:notes xmlns:p="http://schemas.openxmlformats.org/presentationml/2006/main">
+  <p:cSld>
+    <p:spTree>
+      <p:nvGrpSpPr>
+        <p:cNvPr id="1" name=""/>
+        <p:cNvGrpSpPr/>
+        <p:nvPr/>
+      </p:nvGrpSpPr>
+      <p:grpSpPr>
+        <a:xfrm xmlns:a="http://schemas.openxmlformats.org/drawingml/2006/main"/>
+      </p:grpSpPr>
+      <p:sp>
+        <p:nvSpPr>
+          <p:cNvPr id="2" name="Slide Image Placeholder 1"/>
+          <p:cNvSpPr>
+            <a:spLocks xmlns:a="http://schemas.openxmlformats.org/drawingml/2006/main" noGrp="1"/>
+          </p:cNvSpPr>
+          <p:nvPr>
+            <p:ph type="sldImg" idx="0"/>
+          </p:nvPr>
+        </p:nvSpPr>
+        <p:spPr/>
+      </p:sp>
+      <p:sp>
+        <p:nvSpPr>
+          <p:cNvPr id="3" name="Notes Placeholder 2"/>
+          <p:cNvSpPr>
+            <a:spLocks xmlns:a="http://schemas.openxmlformats.org/drawingml/2006/main" noGrp="1"/>
+          </p:cNvSpPr>
+          <p:nvPr>
+            <p:ph type="body" idx="1"/>
+          </p:nvPr>
+        </p:nvSpPr>
+        <p:spPr/>
+        <p:txBody>
+          <a:bodyPr xmlns:a="http://schemas.openxmlformats.org/drawingml/2006/main"/>
+          <a:lstStyle xmlns:a="http://schemas.openxmlformats.org/drawingml/2006/main"/>
+          <a:p xmlns:a="http://schemas.openxmlformats.org/drawingml/2006/main"/>
+        </p:txBody>
+      </p:sp>
+      <p:sp>
+        <p:nvSpPr>
+          <p:cNvPr id="4" name="Slide Number Placeholder 3"/>
+          <p:cNvSpPr>
+            <a:spLocks xmlns:a="http://schemas.openxmlformats.org/drawingml/2006/main" noGrp="1"/>
+          </p:cNvSpPr>
+          <p:nvPr>
+            <p:ph type="sldNum" idx="5"/>
+          </p:nvPr>
+        </p:nvSpPr>
+        <p:spPr/>
+        <p:txBody>
+          <a:bodyPr xmlns:a="http://schemas.openxmlformats.org/drawingml/2006/main"/>
+          <a:lstStyle xmlns:a="http://schemas.openxmlformats.org/drawingml/2006/main"/>
+          <a:p xmlns:a="http://schemas.openxmlformats.org/drawingml/2006/main"/>
+        </p:txBody>
+      </p:sp>
+    </p:spTree>
+  </p:cSld>
+  <p:clrMapOvr>
+    <a:masterClrMapping xmlns:a="http://schemas.openxmlformats.org/drawingml/2006/main"/>
+  </p:clrMapOvr>
+</p:notes>
+</file>
+
 <file path=ppt/notesSlides/notesSlide3.xml><?xml version="1.0" encoding="utf-8"?>
+<p:notes xmlns:p="http://schemas.openxmlformats.org/presentationml/2006/main">
+  <p:cSld>
+    <p:spTree>
+      <p:nvGrpSpPr>
+        <p:cNvPr id="1" name=""/>
+        <p:cNvGrpSpPr/>
+        <p:nvPr/>
+      </p:nvGrpSpPr>
+      <p:grpSpPr>
+        <a:xfrm xmlns:a="http://schemas.openxmlformats.org/drawingml/2006/main"/>
+      </p:grpSpPr>
+      <p:sp>
+        <p:nvSpPr>
+          <p:cNvPr id="2" name="Slide Image Placeholder 1"/>
+          <p:cNvSpPr>
+            <a:spLocks xmlns:a="http://schemas.openxmlformats.org/drawingml/2006/main" noGrp="1"/>
+          </p:cNvSpPr>
+          <p:nvPr>
+            <p:ph type="sldImg" idx="0"/>
+          </p:nvPr>
+        </p:nvSpPr>
+        <p:spPr/>
+      </p:sp>
+      <p:sp>
+        <p:nvSpPr>
+          <p:cNvPr id="3" name="Notes Placeholder 2"/>
+          <p:cNvSpPr>
+            <a:spLocks xmlns:a="http://schemas.openxmlformats.org/drawingml/2006/main" noGrp="1"/>
+          </p:cNvSpPr>
+          <p:nvPr>
+            <p:ph type="body" idx="1"/>
+          </p:nvPr>
+        </p:nvSpPr>
+        <p:spPr/>
+        <p:txBody>
+          <a:bodyPr xmlns:a="http://schemas.openxmlformats.org/drawingml/2006/main"/>
+          <a:lstStyle xmlns:a="http://schemas.openxmlformats.org/drawingml/2006/main"/>
+          <a:p xmlns:a="http://schemas.openxmlformats.org/drawingml/2006/main"/>
+        </p:txBody>
+      </p:sp>
+      <p:sp>
+        <p:nvSpPr>
+          <p:cNvPr id="4" name="Slide Number Placeholder 3"/>
+          <p:cNvSpPr>
+            <a:spLocks xmlns:a="http://schemas.openxmlformats.org/drawingml/2006/main" noGrp="1"/>
+          </p:cNvSpPr>
+          <p:nvPr>
+            <p:ph type="sldNum" idx="5"/>
+          </p:nvPr>
+        </p:nvSpPr>
+        <p:spPr/>
+        <p:txBody>
+          <a:bodyPr xmlns:a="http://schemas.openxmlformats.org/drawingml/2006/main"/>
+          <a:lstStyle xmlns:a="http://schemas.openxmlformats.org/drawingml/2006/main"/>
+          <a:p xmlns:a="http://schemas.openxmlformats.org/drawingml/2006/main"/>
+        </p:txBody>
+      </p:sp>
+    </p:spTree>
+  </p:cSld>
+  <p:clrMapOvr>
+    <a:masterClrMapping xmlns:a="http://schemas.openxmlformats.org/drawingml/2006/main"/>
+  </p:clrMapOvr>
+</p:notes>
+</file>
+
+<file path=ppt/notesSlides/notesSlide30.xml><?xml version="1.0" encoding="utf-8"?>
+<p:notes xmlns:p="http://schemas.openxmlformats.org/presentationml/2006/main">
+  <p:cSld>
+    <p:spTree>
+      <p:nvGrpSpPr>
+        <p:cNvPr id="1" name=""/>
+        <p:cNvGrpSpPr/>
+        <p:nvPr/>
+      </p:nvGrpSpPr>
+      <p:grpSpPr>
+        <a:xfrm xmlns:a="http://schemas.openxmlformats.org/drawingml/2006/main"/>
+      </p:grpSpPr>
+      <p:sp>
+        <p:nvSpPr>
+          <p:cNvPr id="2" name="Slide Image Placeholder 1"/>
+          <p:cNvSpPr>
+            <a:spLocks xmlns:a="http://schemas.openxmlformats.org/drawingml/2006/main" noGrp="1"/>
+          </p:cNvSpPr>
+          <p:nvPr>
+            <p:ph type="sldImg" idx="0"/>
+          </p:nvPr>
+        </p:nvSpPr>
+        <p:spPr/>
+      </p:sp>
+      <p:sp>
+        <p:nvSpPr>
+          <p:cNvPr id="3" name="Notes Placeholder 2"/>
+          <p:cNvSpPr>
+            <a:spLocks xmlns:a="http://schemas.openxmlformats.org/drawingml/2006/main" noGrp="1"/>
+          </p:cNvSpPr>
+          <p:nvPr>
+            <p:ph type="body" idx="1"/>
+          </p:nvPr>
+        </p:nvSpPr>
+        <p:spPr/>
+        <p:txBody>
+          <a:bodyPr xmlns:a="http://schemas.openxmlformats.org/drawingml/2006/main"/>
+          <a:lstStyle xmlns:a="http://schemas.openxmlformats.org/drawingml/2006/main"/>
+          <a:p xmlns:a="http://schemas.openxmlformats.org/drawingml/2006/main"/>
+        </p:txBody>
+      </p:sp>
+      <p:sp>
+        <p:nvSpPr>
+          <p:cNvPr id="4" name="Slide Number Placeholder 3"/>
+          <p:cNvSpPr>
+            <a:spLocks xmlns:a="http://schemas.openxmlformats.org/drawingml/2006/main" noGrp="1"/>
+          </p:cNvSpPr>
+          <p:nvPr>
+            <p:ph type="sldNum" idx="5"/>
+          </p:nvPr>
+        </p:nvSpPr>
+        <p:spPr/>
+        <p:txBody>
+          <a:bodyPr xmlns:a="http://schemas.openxmlformats.org/drawingml/2006/main"/>
+          <a:lstStyle xmlns:a="http://schemas.openxmlformats.org/drawingml/2006/main"/>
+          <a:p xmlns:a="http://schemas.openxmlformats.org/drawingml/2006/main"/>
+        </p:txBody>
+      </p:sp>
+    </p:spTree>
+  </p:cSld>
+  <p:clrMapOvr>
+    <a:masterClrMapping xmlns:a="http://schemas.openxmlformats.org/drawingml/2006/main"/>
+  </p:clrMapOvr>
+</p:notes>
+</file>
+
+<file path=ppt/notesSlides/notesSlide31.xml><?xml version="1.0" encoding="utf-8"?>
+<p:notes xmlns:p="http://schemas.openxmlformats.org/presentationml/2006/main">
+  <p:cSld>
+    <p:spTree>
+      <p:nvGrpSpPr>
+        <p:cNvPr id="1" name=""/>
+        <p:cNvGrpSpPr/>
+        <p:nvPr/>
+      </p:nvGrpSpPr>
+      <p:grpSpPr>
+        <a:xfrm xmlns:a="http://schemas.openxmlformats.org/drawingml/2006/main"/>
+      </p:grpSpPr>
+      <p:sp>
+        <p:nvSpPr>
+          <p:cNvPr id="2" name="Slide Image Placeholder 1"/>
+          <p:cNvSpPr>
+            <a:spLocks xmlns:a="http://schemas.openxmlformats.org/drawingml/2006/main" noGrp="1"/>
+          </p:cNvSpPr>
+          <p:nvPr>
+            <p:ph type="sldImg" idx="0"/>
+          </p:nvPr>
+        </p:nvSpPr>
+        <p:spPr/>
+      </p:sp>
+      <p:sp>
+        <p:nvSpPr>
+          <p:cNvPr id="3" name="Notes Placeholder 2"/>
+          <p:cNvSpPr>
+            <a:spLocks xmlns:a="http://schemas.openxmlformats.org/drawingml/2006/main" noGrp="1"/>
+          </p:cNvSpPr>
+          <p:nvPr>
+            <p:ph type="body" idx="1"/>
+          </p:nvPr>
+        </p:nvSpPr>
+        <p:spPr/>
+        <p:txBody>
+          <a:bodyPr xmlns:a="http://schemas.openxmlformats.org/drawingml/2006/main"/>
+          <a:lstStyle xmlns:a="http://schemas.openxmlformats.org/drawingml/2006/main"/>
+          <a:p xmlns:a="http://schemas.openxmlformats.org/drawingml/2006/main"/>
+        </p:txBody>
+      </p:sp>
+      <p:sp>
+        <p:nvSpPr>
+          <p:cNvPr id="4" name="Slide Number Placeholder 3"/>
+          <p:cNvSpPr>
+            <a:spLocks xmlns:a="http://schemas.openxmlformats.org/drawingml/2006/main" noGrp="1"/>
+          </p:cNvSpPr>
+          <p:nvPr>
+            <p:ph type="sldNum" idx="5"/>
+          </p:nvPr>
+        </p:nvSpPr>
+        <p:spPr/>
+        <p:txBody>
+          <a:bodyPr xmlns:a="http://schemas.openxmlformats.org/drawingml/2006/main"/>
+          <a:lstStyle xmlns:a="http://schemas.openxmlformats.org/drawingml/2006/main"/>
+          <a:p xmlns:a="http://schemas.openxmlformats.org/drawingml/2006/main"/>
+        </p:txBody>
+      </p:sp>
+    </p:spTree>
+  </p:cSld>
+  <p:clrMapOvr>
+    <a:masterClrMapping xmlns:a="http://schemas.openxmlformats.org/drawingml/2006/main"/>
+  </p:clrMapOvr>
+</p:notes>
+</file>
+
+<file path=ppt/notesSlides/notesSlide32.xml><?xml version="1.0" encoding="utf-8"?>
+<p:notes xmlns:p="http://schemas.openxmlformats.org/presentationml/2006/main">
+  <p:cSld>
+    <p:spTree>
+      <p:nvGrpSpPr>
+        <p:cNvPr id="1" name=""/>
+        <p:cNvGrpSpPr/>
+        <p:nvPr/>
+      </p:nvGrpSpPr>
+      <p:grpSpPr>
+        <a:xfrm xmlns:a="http://schemas.openxmlformats.org/drawingml/2006/main"/>
+      </p:grpSpPr>
+      <p:sp>
+        <p:nvSpPr>
+          <p:cNvPr id="2" name="Slide Image Placeholder 1"/>
+          <p:cNvSpPr>
+            <a:spLocks xmlns:a="http://schemas.openxmlformats.org/drawingml/2006/main" noGrp="1"/>
+          </p:cNvSpPr>
+          <p:nvPr>
+            <p:ph type="sldImg" idx="0"/>
+          </p:nvPr>
+        </p:nvSpPr>
+        <p:spPr/>
+      </p:sp>
+      <p:sp>
+        <p:nvSpPr>
+          <p:cNvPr id="3" name="Notes Placeholder 2"/>
+          <p:cNvSpPr>
+            <a:spLocks xmlns:a="http://schemas.openxmlformats.org/drawingml/2006/main" noGrp="1"/>
+          </p:cNvSpPr>
+          <p:nvPr>
+            <p:ph type="body" idx="1"/>
+          </p:nvPr>
+        </p:nvSpPr>
+        <p:spPr/>
+        <p:txBody>
+          <a:bodyPr xmlns:a="http://schemas.openxmlformats.org/drawingml/2006/main"/>
+          <a:lstStyle xmlns:a="http://schemas.openxmlformats.org/drawingml/2006/main"/>
+          <a:p xmlns:a="http://schemas.openxmlformats.org/drawingml/2006/main"/>
+        </p:txBody>
+      </p:sp>
+      <p:sp>
+        <p:nvSpPr>
+          <p:cNvPr id="4" name="Slide Number Placeholder 3"/>
+          <p:cNvSpPr>
+            <a:spLocks xmlns:a="http://schemas.openxmlformats.org/drawingml/2006/main" noGrp="1"/>
+          </p:cNvSpPr>
+          <p:nvPr>
+            <p:ph type="sldNum" idx="5"/>
+          </p:nvPr>
+        </p:nvSpPr>
+        <p:spPr/>
+        <p:txBody>
+          <a:bodyPr xmlns:a="http://schemas.openxmlformats.org/drawingml/2006/main"/>
+          <a:lstStyle xmlns:a="http://schemas.openxmlformats.org/drawingml/2006/main"/>
+          <a:p xmlns:a="http://schemas.openxmlformats.org/drawingml/2006/main"/>
+        </p:txBody>
+      </p:sp>
+    </p:spTree>
+  </p:cSld>
+  <p:clrMapOvr>
+    <a:masterClrMapping xmlns:a="http://schemas.openxmlformats.org/drawingml/2006/main"/>
+  </p:clrMapOvr>
+</p:notes>
+</file>
+
+<file path=ppt/notesSlides/notesSlide33.xml><?xml version="1.0" encoding="utf-8"?>
+<p:notes xmlns:p="http://schemas.openxmlformats.org/presentationml/2006/main">
+  <p:cSld>
+    <p:spTree>
+      <p:nvGrpSpPr>
+        <p:cNvPr id="1" name=""/>
+        <p:cNvGrpSpPr/>
+        <p:nvPr/>
+      </p:nvGrpSpPr>
+      <p:grpSpPr>
+        <a:xfrm xmlns:a="http://schemas.openxmlformats.org/drawingml/2006/main"/>
+      </p:grpSpPr>
+      <p:sp>
+        <p:nvSpPr>
+          <p:cNvPr id="2" name="Slide Image Placeholder 1"/>
+          <p:cNvSpPr>
+            <a:spLocks xmlns:a="http://schemas.openxmlformats.org/drawingml/2006/main" noGrp="1"/>
+          </p:cNvSpPr>
+          <p:nvPr>
+            <p:ph type="sldImg" idx="0"/>
+          </p:nvPr>
+        </p:nvSpPr>
+        <p:spPr/>
+      </p:sp>
+      <p:sp>
+        <p:nvSpPr>
+          <p:cNvPr id="3" name="Notes Placeholder 2"/>
+          <p:cNvSpPr>
+            <a:spLocks xmlns:a="http://schemas.openxmlformats.org/drawingml/2006/main" noGrp="1"/>
+          </p:cNvSpPr>
+          <p:nvPr>
+            <p:ph type="body" idx="1"/>
+          </p:nvPr>
+        </p:nvSpPr>
+        <p:spPr/>
+        <p:txBody>
+          <a:bodyPr xmlns:a="http://schemas.openxmlformats.org/drawingml/2006/main"/>
+          <a:lstStyle xmlns:a="http://schemas.openxmlformats.org/drawingml/2006/main"/>
+          <a:p xmlns:a="http://schemas.openxmlformats.org/drawingml/2006/main"/>
+        </p:txBody>
+      </p:sp>
+      <p:sp>
+        <p:nvSpPr>
+          <p:cNvPr id="4" name="Slide Number Placeholder 3"/>
+          <p:cNvSpPr>
+            <a:spLocks xmlns:a="http://schemas.openxmlformats.org/drawingml/2006/main" noGrp="1"/>
+          </p:cNvSpPr>
+          <p:nvPr>
+            <p:ph type="sldNum" idx="5"/>
+          </p:nvPr>
+        </p:nvSpPr>
+        <p:spPr/>
+        <p:txBody>
+          <a:bodyPr xmlns:a="http://schemas.openxmlformats.org/drawingml/2006/main"/>
+          <a:lstStyle xmlns:a="http://schemas.openxmlformats.org/drawingml/2006/main"/>
+          <a:p xmlns:a="http://schemas.openxmlformats.org/drawingml/2006/main"/>
+        </p:txBody>
+      </p:sp>
+    </p:spTree>
+  </p:cSld>
+  <p:clrMapOvr>
+    <a:masterClrMapping xmlns:a="http://schemas.openxmlformats.org/drawingml/2006/main"/>
+  </p:clrMapOvr>
+</p:notes>
+</file>
+
+<file path=ppt/notesSlides/notesSlide34.xml><?xml version="1.0" encoding="utf-8"?>
+<p:notes xmlns:p="http://schemas.openxmlformats.org/presentationml/2006/main">
+  <p:cSld>
+    <p:spTree>
+      <p:nvGrpSpPr>
+        <p:cNvPr id="1" name=""/>
+        <p:cNvGrpSpPr/>
+        <p:nvPr/>
+      </p:nvGrpSpPr>
+      <p:grpSpPr>
+        <a:xfrm xmlns:a="http://schemas.openxmlformats.org/drawingml/2006/main"/>
+      </p:grpSpPr>
+      <p:sp>
+        <p:nvSpPr>
+          <p:cNvPr id="2" name="Slide Image Placeholder 1"/>
+          <p:cNvSpPr>
+            <a:spLocks xmlns:a="http://schemas.openxmlformats.org/drawingml/2006/main" noGrp="1"/>
+          </p:cNvSpPr>
+          <p:nvPr>
+            <p:ph type="sldImg" idx="0"/>
+          </p:nvPr>
+        </p:nvSpPr>
+        <p:spPr/>
+      </p:sp>
+      <p:sp>
+        <p:nvSpPr>
+          <p:cNvPr id="3" name="Notes Placeholder 2"/>
+          <p:cNvSpPr>
+            <a:spLocks xmlns:a="http://schemas.openxmlformats.org/drawingml/2006/main" noGrp="1"/>
+          </p:cNvSpPr>
+          <p:nvPr>
+            <p:ph type="body" idx="1"/>
+          </p:nvPr>
+        </p:nvSpPr>
+        <p:spPr/>
+        <p:txBody>
+          <a:bodyPr xmlns:a="http://schemas.openxmlformats.org/drawingml/2006/main"/>
+          <a:lstStyle xmlns:a="http://schemas.openxmlformats.org/drawingml/2006/main"/>
+          <a:p xmlns:a="http://schemas.openxmlformats.org/drawingml/2006/main"/>
+        </p:txBody>
+      </p:sp>
+      <p:sp>
+        <p:nvSpPr>
+          <p:cNvPr id="4" name="Slide Number Placeholder 3"/>
+          <p:cNvSpPr>
+            <a:spLocks xmlns:a="http://schemas.openxmlformats.org/drawingml/2006/main" noGrp="1"/>
+          </p:cNvSpPr>
+          <p:nvPr>
+            <p:ph type="sldNum" idx="5"/>
+          </p:nvPr>
+        </p:nvSpPr>
+        <p:spPr/>
+        <p:txBody>
+          <a:bodyPr xmlns:a="http://schemas.openxmlformats.org/drawingml/2006/main"/>
+          <a:lstStyle xmlns:a="http://schemas.openxmlformats.org/drawingml/2006/main"/>
+          <a:p xmlns:a="http://schemas.openxmlformats.org/drawingml/2006/main"/>
+        </p:txBody>
+      </p:sp>
+    </p:spTree>
+  </p:cSld>
+  <p:clrMapOvr>
+    <a:masterClrMapping xmlns:a="http://schemas.openxmlformats.org/drawingml/2006/main"/>
+  </p:clrMapOvr>
+</p:notes>
+</file>
+
+<file path=ppt/notesSlides/notesSlide35.xml><?xml version="1.0" encoding="utf-8"?>
+<p:notes xmlns:p="http://schemas.openxmlformats.org/presentationml/2006/main">
+  <p:cSld>
+    <p:spTree>
+      <p:nvGrpSpPr>
+        <p:cNvPr id="1" name=""/>
+        <p:cNvGrpSpPr/>
+        <p:nvPr/>
+      </p:nvGrpSpPr>
+      <p:grpSpPr>
+        <a:xfrm xmlns:a="http://schemas.openxmlformats.org/drawingml/2006/main"/>
+      </p:grpSpPr>
+      <p:sp>
+        <p:nvSpPr>
+          <p:cNvPr id="2" name="Slide Image Placeholder 1"/>
+          <p:cNvSpPr>
+            <a:spLocks xmlns:a="http://schemas.openxmlformats.org/drawingml/2006/main" noGrp="1"/>
+          </p:cNvSpPr>
+          <p:nvPr>
+            <p:ph type="sldImg" idx="0"/>
+          </p:nvPr>
+        </p:nvSpPr>
+        <p:spPr/>
+      </p:sp>
+      <p:sp>
+        <p:nvSpPr>
+          <p:cNvPr id="3" name="Notes Placeholder 2"/>
+          <p:cNvSpPr>
+            <a:spLocks xmlns:a="http://schemas.openxmlformats.org/drawingml/2006/main" noGrp="1"/>
+          </p:cNvSpPr>
+          <p:nvPr>
+            <p:ph type="body" idx="1"/>
+          </p:nvPr>
+        </p:nvSpPr>
+        <p:spPr/>
+        <p:txBody>
+          <a:bodyPr xmlns:a="http://schemas.openxmlformats.org/drawingml/2006/main"/>
+          <a:lstStyle xmlns:a="http://schemas.openxmlformats.org/drawingml/2006/main"/>
+          <a:p xmlns:a="http://schemas.openxmlformats.org/drawingml/2006/main"/>
+        </p:txBody>
+      </p:sp>
+      <p:sp>
+        <p:nvSpPr>
+          <p:cNvPr id="4" name="Slide Number Placeholder 3"/>
+          <p:cNvSpPr>
+            <a:spLocks xmlns:a="http://schemas.openxmlformats.org/drawingml/2006/main" noGrp="1"/>
+          </p:cNvSpPr>
+          <p:nvPr>
+            <p:ph type="sldNum" idx="5"/>
+          </p:nvPr>
+        </p:nvSpPr>
+        <p:spPr/>
+        <p:txBody>
+          <a:bodyPr xmlns:a="http://schemas.openxmlformats.org/drawingml/2006/main"/>
+          <a:lstStyle xmlns:a="http://schemas.openxmlformats.org/drawingml/2006/main"/>
+          <a:p xmlns:a="http://schemas.openxmlformats.org/drawingml/2006/main"/>
+        </p:txBody>
+      </p:sp>
+    </p:spTree>
+  </p:cSld>
+  <p:clrMapOvr>
+    <a:masterClrMapping xmlns:a="http://schemas.openxmlformats.org/drawingml/2006/main"/>
+  </p:clrMapOvr>
+</p:notes>
+</file>
+
+<file path=ppt/notesSlides/notesSlide36.xml><?xml version="1.0" encoding="utf-8"?>
 <p:notes xmlns:p="http://schemas.openxmlformats.org/presentationml/2006/main">
   <p:cSld>
     <p:spTree>
@@ -2410,7 +2946,7 @@
   </p:cSld>
   <p:clrMap bg1="lt1" tx1="dk1" bg2="lt2" tx2="dk2" accent1="accent1" accent2="accent2" accent3="accent3" accent4="accent4" accent5="accent5" accent6="accent6" hlink="hlink" folHlink="folHlink"/>
   <p:sldLayoutIdLst>
-    <p:sldLayoutId xmlns:r="http://schemas.openxmlformats.org/officeDocument/2006/relationships" id="2147483649" r:id="R5fb20ba6b7f84734"/>
+    <p:sldLayoutId xmlns:r="http://schemas.openxmlformats.org/officeDocument/2006/relationships" id="2147483649" r:id="R7c5dd287f451403c"/>
   </p:sldLayoutIdLst>
   <p:txStyles>
     <p:titleStyle>
@@ -2961,7 +3497,7 @@
           <p:cNvPr id="1" name="">
             <a:extLst xmlns:a="http://schemas.openxmlformats.org/drawingml/2006/main">
               <a:ext uri="{FF2B5EF4-FFF2-40B4-BE49-F238E27FC236}">
-                <a16:creationId xmlns:a16="http://schemas.microsoft.com/office/drawing/2014/main" id="{375BA8F1-83BA-4433-A27D-A7FF11F05AE6}"/>
+                <a16:creationId xmlns:a16="http://schemas.microsoft.com/office/drawing/2014/main" id="{4AC58E21-B849-4CD4-8408-25658A659B4B}"/>
               </a:ext>
             </a:extLst>
           </p:cNvPr>
@@ -3011,7 +3547,7 @@
           <p:cNvPr id="2" name="">
             <a:extLst xmlns:a="http://schemas.openxmlformats.org/drawingml/2006/main">
               <a:ext uri="{FF2B5EF4-FFF2-40B4-BE49-F238E27FC236}">
-                <a16:creationId xmlns:a16="http://schemas.microsoft.com/office/drawing/2014/main" id="{031F30FA-D0BF-4B91-8FE0-1D1339BA3CBD}"/>
+                <a16:creationId xmlns:a16="http://schemas.microsoft.com/office/drawing/2014/main" id="{1DAA9E41-094B-49A8-92EB-15689240C093}"/>
               </a:ext>
             </a:extLst>
           </p:cNvPr>
@@ -3061,7 +3597,7 @@
           <p:cNvPr id="3" name="">
             <a:extLst xmlns:a="http://schemas.openxmlformats.org/drawingml/2006/main">
               <a:ext uri="{FF2B5EF4-FFF2-40B4-BE49-F238E27FC236}">
-                <a16:creationId xmlns:a16="http://schemas.microsoft.com/office/drawing/2014/main" id="{E6B33008-2EA1-4F97-81B1-B3FD24339DE5}"/>
+                <a16:creationId xmlns:a16="http://schemas.microsoft.com/office/drawing/2014/main" id="{06B5D47B-BAB0-443D-9DDA-6CF4AF8D59DC}"/>
               </a:ext>
             </a:extLst>
           </p:cNvPr>
@@ -3111,7 +3647,7 @@
           <p:cNvPr id="4" name="">
             <a:extLst xmlns:a="http://schemas.openxmlformats.org/drawingml/2006/main">
               <a:ext uri="{FF2B5EF4-FFF2-40B4-BE49-F238E27FC236}">
-                <a16:creationId xmlns:a16="http://schemas.microsoft.com/office/drawing/2014/main" id="{C34B17EA-A020-498F-A22C-E2BA8F35C21C}"/>
+                <a16:creationId xmlns:a16="http://schemas.microsoft.com/office/drawing/2014/main" id="{3EBDD181-4F57-458B-872D-BF08D2961E23}"/>
               </a:ext>
             </a:extLst>
           </p:cNvPr>
@@ -3142,7 +3678,7 @@
           <p:cNvPr id="5" name="">
             <a:extLst xmlns:a="http://schemas.openxmlformats.org/drawingml/2006/main">
               <a:ext uri="{FF2B5EF4-FFF2-40B4-BE49-F238E27FC236}">
-                <a16:creationId xmlns:a16="http://schemas.microsoft.com/office/drawing/2014/main" id="{58ED9401-5425-4F85-B769-B52ACAD8C3AC}"/>
+                <a16:creationId xmlns:a16="http://schemas.microsoft.com/office/drawing/2014/main" id="{212B35E1-A322-43E4-97A0-F362B920DE1D}"/>
               </a:ext>
             </a:extLst>
           </p:cNvPr>
@@ -3192,7 +3728,7 @@
           <p:cNvPr id="6" name="">
             <a:extLst xmlns:a="http://schemas.openxmlformats.org/drawingml/2006/main">
               <a:ext uri="{FF2B5EF4-FFF2-40B4-BE49-F238E27FC236}">
-                <a16:creationId xmlns:a16="http://schemas.microsoft.com/office/drawing/2014/main" id="{54691BDA-CB25-4517-BCD2-9D44AD70514F}"/>
+                <a16:creationId xmlns:a16="http://schemas.microsoft.com/office/drawing/2014/main" id="{E5891D7D-E767-4395-8CD1-3E3CEE21CB96}"/>
               </a:ext>
             </a:extLst>
           </p:cNvPr>
@@ -3223,7 +3759,7 @@
           <p:cNvPr id="7" name="">
             <a:extLst xmlns:a="http://schemas.openxmlformats.org/drawingml/2006/main">
               <a:ext uri="{FF2B5EF4-FFF2-40B4-BE49-F238E27FC236}">
-                <a16:creationId xmlns:a16="http://schemas.microsoft.com/office/drawing/2014/main" id="{7D05D8BB-2DE2-4155-A311-D94DF0A140BD}"/>
+                <a16:creationId xmlns:a16="http://schemas.microsoft.com/office/drawing/2014/main" id="{72FCFC9C-D433-467B-9C04-1E4557B94AD3}"/>
               </a:ext>
             </a:extLst>
           </p:cNvPr>
@@ -3273,7 +3809,7 @@
           <p:cNvPr id="8" name="">
             <a:extLst xmlns:a="http://schemas.openxmlformats.org/drawingml/2006/main">
               <a:ext uri="{FF2B5EF4-FFF2-40B4-BE49-F238E27FC236}">
-                <a16:creationId xmlns:a16="http://schemas.microsoft.com/office/drawing/2014/main" id="{09323640-925F-4B49-9C3D-2040416A2F09}"/>
+                <a16:creationId xmlns:a16="http://schemas.microsoft.com/office/drawing/2014/main" id="{CEEF37DF-A642-4C69-B453-2DB6269D7AB9}"/>
               </a:ext>
             </a:extLst>
           </p:cNvPr>
@@ -3355,7 +3891,7 @@
     </p:spTree>
     <p:extLst>
       <p:ext uri="{BB962C8B-B14F-4D97-AF65-F5344CB8AC3E}">
-        <p14:creationId xmlns:p14="http://schemas.microsoft.com/office/powerpoint/2010/main" val="1289969961"/>
+        <p14:creationId xmlns:p14="http://schemas.microsoft.com/office/powerpoint/2010/main" val="464419618"/>
       </p:ext>
     </p:extLst>
   </p:cSld>
@@ -3386,7 +3922,7 @@
           <p:cNvPr id="1" name="">
             <a:extLst xmlns:a="http://schemas.openxmlformats.org/drawingml/2006/main">
               <a:ext uri="{FF2B5EF4-FFF2-40B4-BE49-F238E27FC236}">
-                <a16:creationId xmlns:a16="http://schemas.microsoft.com/office/drawing/2014/main" id="{F6FEC922-09A7-4DAB-83AE-8035DA85FE2B}"/>
+                <a16:creationId xmlns:a16="http://schemas.microsoft.com/office/drawing/2014/main" id="{08E8B2D0-A45B-4DC1-BB79-888FDB6918FD}"/>
               </a:ext>
             </a:extLst>
           </p:cNvPr>
@@ -3436,7 +3972,7 @@
           <p:cNvPr id="2" name="">
             <a:extLst xmlns:a="http://schemas.openxmlformats.org/drawingml/2006/main">
               <a:ext uri="{FF2B5EF4-FFF2-40B4-BE49-F238E27FC236}">
-                <a16:creationId xmlns:a16="http://schemas.microsoft.com/office/drawing/2014/main" id="{99AAA046-E15F-48F9-91A0-03DA7715D03F}"/>
+                <a16:creationId xmlns:a16="http://schemas.microsoft.com/office/drawing/2014/main" id="{D4EDC0FB-CEDF-44D5-9711-356051FDBCF3}"/>
               </a:ext>
             </a:extLst>
           </p:cNvPr>
@@ -3486,7 +4022,7 @@
           <p:cNvPr id="3" name="">
             <a:extLst xmlns:a="http://schemas.openxmlformats.org/drawingml/2006/main">
               <a:ext uri="{FF2B5EF4-FFF2-40B4-BE49-F238E27FC236}">
-                <a16:creationId xmlns:a16="http://schemas.microsoft.com/office/drawing/2014/main" id="{35C305EB-2DD8-4D8C-9593-332567A977C3}"/>
+                <a16:creationId xmlns:a16="http://schemas.microsoft.com/office/drawing/2014/main" id="{398D9163-3EA8-4313-A1C8-D294849F1683}"/>
               </a:ext>
             </a:extLst>
           </p:cNvPr>
@@ -3517,7 +4053,7 @@
           <p:cNvPr id="4" name="">
             <a:extLst xmlns:a="http://schemas.openxmlformats.org/drawingml/2006/main">
               <a:ext uri="{FF2B5EF4-FFF2-40B4-BE49-F238E27FC236}">
-                <a16:creationId xmlns:a16="http://schemas.microsoft.com/office/drawing/2014/main" id="{5E8C827F-9003-4C60-B9F2-D695FA2D272E}"/>
+                <a16:creationId xmlns:a16="http://schemas.microsoft.com/office/drawing/2014/main" id="{CB432C31-7CD7-4866-8C79-8152B7ADE56D}"/>
               </a:ext>
             </a:extLst>
           </p:cNvPr>
@@ -3567,7 +4103,7 @@
           <p:cNvPr id="5" name="">
             <a:extLst xmlns:a="http://schemas.openxmlformats.org/drawingml/2006/main">
               <a:ext uri="{FF2B5EF4-FFF2-40B4-BE49-F238E27FC236}">
-                <a16:creationId xmlns:a16="http://schemas.microsoft.com/office/drawing/2014/main" id="{17B33211-3454-4410-A819-9BA6A60ADA0C}"/>
+                <a16:creationId xmlns:a16="http://schemas.microsoft.com/office/drawing/2014/main" id="{6CD87F2C-7711-4C33-B5DC-3E1723F35736}"/>
               </a:ext>
             </a:extLst>
           </p:cNvPr>
@@ -3617,7 +4153,7 @@
           <p:cNvPr id="6" name="">
             <a:extLst xmlns:a="http://schemas.openxmlformats.org/drawingml/2006/main">
               <a:ext uri="{FF2B5EF4-FFF2-40B4-BE49-F238E27FC236}">
-                <a16:creationId xmlns:a16="http://schemas.microsoft.com/office/drawing/2014/main" id="{A4909803-690E-4937-9EBC-2962DDFB9A7C}"/>
+                <a16:creationId xmlns:a16="http://schemas.microsoft.com/office/drawing/2014/main" id="{1A36502B-FC74-449C-88EB-EDB62100187F}"/>
               </a:ext>
             </a:extLst>
           </p:cNvPr>
@@ -3667,7 +4203,7 @@
           <p:cNvPr id="7" name="">
             <a:extLst xmlns:a="http://schemas.openxmlformats.org/drawingml/2006/main">
               <a:ext uri="{FF2B5EF4-FFF2-40B4-BE49-F238E27FC236}">
-                <a16:creationId xmlns:a16="http://schemas.microsoft.com/office/drawing/2014/main" id="{08FBBD49-6B6F-408A-A7E1-8E17D1B700EE}"/>
+                <a16:creationId xmlns:a16="http://schemas.microsoft.com/office/drawing/2014/main" id="{2AEEE61F-ED55-47BB-BD10-71FEEA345BD3}"/>
               </a:ext>
             </a:extLst>
           </p:cNvPr>
@@ -3717,7 +4253,7 @@
           <p:cNvPr id="8" name="">
             <a:extLst xmlns:a="http://schemas.openxmlformats.org/drawingml/2006/main">
               <a:ext uri="{FF2B5EF4-FFF2-40B4-BE49-F238E27FC236}">
-                <a16:creationId xmlns:a16="http://schemas.microsoft.com/office/drawing/2014/main" id="{57441C91-BA69-4502-8DAD-2AD952ACBDDB}"/>
+                <a16:creationId xmlns:a16="http://schemas.microsoft.com/office/drawing/2014/main" id="{78D1A5A5-4D21-4733-AEBA-10C1185433E8}"/>
               </a:ext>
             </a:extLst>
           </p:cNvPr>
@@ -3767,7 +4303,7 @@
           <p:cNvPr id="9" name="">
             <a:extLst xmlns:a="http://schemas.openxmlformats.org/drawingml/2006/main">
               <a:ext uri="{FF2B5EF4-FFF2-40B4-BE49-F238E27FC236}">
-                <a16:creationId xmlns:a16="http://schemas.microsoft.com/office/drawing/2014/main" id="{5955BF1E-0BEA-4C75-BEBA-AD5DA197B67B}"/>
+                <a16:creationId xmlns:a16="http://schemas.microsoft.com/office/drawing/2014/main" id="{42E35DC9-A389-4957-BC45-F87BDD4AAE30}"/>
               </a:ext>
             </a:extLst>
           </p:cNvPr>
@@ -3817,7 +4353,7 @@
           <p:cNvPr id="10" name="">
             <a:extLst xmlns:a="http://schemas.openxmlformats.org/drawingml/2006/main">
               <a:ext uri="{FF2B5EF4-FFF2-40B4-BE49-F238E27FC236}">
-                <a16:creationId xmlns:a16="http://schemas.microsoft.com/office/drawing/2014/main" id="{7E0C3A5C-4F4D-47C6-A371-D7B0B4930207}"/>
+                <a16:creationId xmlns:a16="http://schemas.microsoft.com/office/drawing/2014/main" id="{6C553747-CB8D-4504-9A90-8896849C98C5}"/>
               </a:ext>
             </a:extLst>
           </p:cNvPr>
@@ -3867,7 +4403,7 @@
           <p:cNvPr id="11" name="">
             <a:extLst xmlns:a="http://schemas.openxmlformats.org/drawingml/2006/main">
               <a:ext uri="{FF2B5EF4-FFF2-40B4-BE49-F238E27FC236}">
-                <a16:creationId xmlns:a16="http://schemas.microsoft.com/office/drawing/2014/main" id="{24E7E280-F366-40CB-B19E-3308052AE85A}"/>
+                <a16:creationId xmlns:a16="http://schemas.microsoft.com/office/drawing/2014/main" id="{E3D80C63-9FE6-4289-BE3F-0AB6B058BFBB}"/>
               </a:ext>
             </a:extLst>
           </p:cNvPr>
@@ -3917,7 +4453,7 @@
           <p:cNvPr id="12" name="">
             <a:extLst xmlns:a="http://schemas.openxmlformats.org/drawingml/2006/main">
               <a:ext uri="{FF2B5EF4-FFF2-40B4-BE49-F238E27FC236}">
-                <a16:creationId xmlns:a16="http://schemas.microsoft.com/office/drawing/2014/main" id="{555BDD9D-C198-4642-B8D4-9A8EB068167B}"/>
+                <a16:creationId xmlns:a16="http://schemas.microsoft.com/office/drawing/2014/main" id="{91BBC516-9872-44F7-B927-DD8499772B83}"/>
               </a:ext>
             </a:extLst>
           </p:cNvPr>
@@ -3967,7 +4503,7 @@
           <p:cNvPr id="13" name="">
             <a:extLst xmlns:a="http://schemas.openxmlformats.org/drawingml/2006/main">
               <a:ext uri="{FF2B5EF4-FFF2-40B4-BE49-F238E27FC236}">
-                <a16:creationId xmlns:a16="http://schemas.microsoft.com/office/drawing/2014/main" id="{2E4CF4A6-4D7A-4A79-8A7A-5A0C0BB4D702}"/>
+                <a16:creationId xmlns:a16="http://schemas.microsoft.com/office/drawing/2014/main" id="{15F7BAFD-D574-4EEB-A4C0-3074756E87FA}"/>
               </a:ext>
             </a:extLst>
           </p:cNvPr>
@@ -4000,7 +4536,7 @@
           <p:cNvPr id="14" name="">
             <a:extLst xmlns:a="http://schemas.openxmlformats.org/drawingml/2006/main">
               <a:ext uri="{FF2B5EF4-FFF2-40B4-BE49-F238E27FC236}">
-                <a16:creationId xmlns:a16="http://schemas.microsoft.com/office/drawing/2014/main" id="{7969C4DB-125C-4353-9F18-7C3BDB539534}"/>
+                <a16:creationId xmlns:a16="http://schemas.microsoft.com/office/drawing/2014/main" id="{3BE0FF4E-C200-4835-835B-6310886E2B48}"/>
               </a:ext>
             </a:extLst>
           </p:cNvPr>
@@ -4050,7 +4586,7 @@
           <p:cNvPr id="15" name="">
             <a:extLst xmlns:a="http://schemas.openxmlformats.org/drawingml/2006/main">
               <a:ext uri="{FF2B5EF4-FFF2-40B4-BE49-F238E27FC236}">
-                <a16:creationId xmlns:a16="http://schemas.microsoft.com/office/drawing/2014/main" id="{554AF9F1-E73D-4487-8F72-E84A334B7C67}"/>
+                <a16:creationId xmlns:a16="http://schemas.microsoft.com/office/drawing/2014/main" id="{FBDCF793-DC58-4D51-93C9-186C6D8C0EA8}"/>
               </a:ext>
             </a:extLst>
           </p:cNvPr>
@@ -4098,7 +4634,7 @@
     </p:spTree>
     <p:extLst>
       <p:ext uri="{BB962C8B-B14F-4D97-AF65-F5344CB8AC3E}">
-        <p14:creationId xmlns:p14="http://schemas.microsoft.com/office/powerpoint/2010/main" val="2076303701"/>
+        <p14:creationId xmlns:p14="http://schemas.microsoft.com/office/powerpoint/2010/main" val="1422869723"/>
       </p:ext>
     </p:extLst>
   </p:cSld>
@@ -4129,7 +4665,7 @@
           <p:cNvPr id="1" name="">
             <a:extLst xmlns:a="http://schemas.openxmlformats.org/drawingml/2006/main">
               <a:ext uri="{FF2B5EF4-FFF2-40B4-BE49-F238E27FC236}">
-                <a16:creationId xmlns:a16="http://schemas.microsoft.com/office/drawing/2014/main" id="{79C1DC97-86D1-4701-B46B-70033E7CD485}"/>
+                <a16:creationId xmlns:a16="http://schemas.microsoft.com/office/drawing/2014/main" id="{847EF166-DD25-4BA8-B95E-8C6C62AA7184}"/>
               </a:ext>
             </a:extLst>
           </p:cNvPr>
@@ -4179,7 +4715,7 @@
           <p:cNvPr id="2" name="">
             <a:extLst xmlns:a="http://schemas.openxmlformats.org/drawingml/2006/main">
               <a:ext uri="{FF2B5EF4-FFF2-40B4-BE49-F238E27FC236}">
-                <a16:creationId xmlns:a16="http://schemas.microsoft.com/office/drawing/2014/main" id="{E05FDA1C-5196-4E79-A947-9BE31EB532AE}"/>
+                <a16:creationId xmlns:a16="http://schemas.microsoft.com/office/drawing/2014/main" id="{45FFB83A-46A3-486B-A9BC-CCED69987ADF}"/>
               </a:ext>
             </a:extLst>
           </p:cNvPr>
@@ -4229,7 +4765,7 @@
           <p:cNvPr id="3" name="">
             <a:extLst xmlns:a="http://schemas.openxmlformats.org/drawingml/2006/main">
               <a:ext uri="{FF2B5EF4-FFF2-40B4-BE49-F238E27FC236}">
-                <a16:creationId xmlns:a16="http://schemas.microsoft.com/office/drawing/2014/main" id="{634DBC1F-2C9A-4601-AC59-529A139AF22D}"/>
+                <a16:creationId xmlns:a16="http://schemas.microsoft.com/office/drawing/2014/main" id="{55C29D2C-4CCA-4B09-9FB0-3CBEB81E69BC}"/>
               </a:ext>
             </a:extLst>
           </p:cNvPr>
@@ -4260,7 +4796,7 @@
           <p:cNvPr id="4" name="">
             <a:extLst xmlns:a="http://schemas.openxmlformats.org/drawingml/2006/main">
               <a:ext uri="{FF2B5EF4-FFF2-40B4-BE49-F238E27FC236}">
-                <a16:creationId xmlns:a16="http://schemas.microsoft.com/office/drawing/2014/main" id="{73DAC413-5C9E-42D4-806B-3D41B40DE6FA}"/>
+                <a16:creationId xmlns:a16="http://schemas.microsoft.com/office/drawing/2014/main" id="{58BF041B-1DC5-4018-9098-43F997A45428}"/>
               </a:ext>
             </a:extLst>
           </p:cNvPr>
@@ -4310,7 +4846,7 @@
           <p:cNvPr id="5" name="">
             <a:extLst xmlns:a="http://schemas.openxmlformats.org/drawingml/2006/main">
               <a:ext uri="{FF2B5EF4-FFF2-40B4-BE49-F238E27FC236}">
-                <a16:creationId xmlns:a16="http://schemas.microsoft.com/office/drawing/2014/main" id="{65F270D3-E5FB-4004-B15D-3936BACAE6E9}"/>
+                <a16:creationId xmlns:a16="http://schemas.microsoft.com/office/drawing/2014/main" id="{CA75A590-27A6-4F99-BBBC-D35E6D8E32A3}"/>
               </a:ext>
             </a:extLst>
           </p:cNvPr>
@@ -4341,7 +4877,7 @@
           <p:cNvPr id="6" name="">
             <a:extLst xmlns:a="http://schemas.openxmlformats.org/drawingml/2006/main">
               <a:ext uri="{FF2B5EF4-FFF2-40B4-BE49-F238E27FC236}">
-                <a16:creationId xmlns:a16="http://schemas.microsoft.com/office/drawing/2014/main" id="{4DAF1990-8671-489E-9B4E-BACC9CD3FFB8}"/>
+                <a16:creationId xmlns:a16="http://schemas.microsoft.com/office/drawing/2014/main" id="{81F7F82A-33E8-4B6A-A4F8-3A9F9066B2C2}"/>
               </a:ext>
             </a:extLst>
           </p:cNvPr>
@@ -4391,7 +4927,7 @@
           <p:cNvPr id="7" name="">
             <a:extLst xmlns:a="http://schemas.openxmlformats.org/drawingml/2006/main">
               <a:ext uri="{FF2B5EF4-FFF2-40B4-BE49-F238E27FC236}">
-                <a16:creationId xmlns:a16="http://schemas.microsoft.com/office/drawing/2014/main" id="{7D6B4E2B-47F4-46B8-AEC5-F9BD35201675}"/>
+                <a16:creationId xmlns:a16="http://schemas.microsoft.com/office/drawing/2014/main" id="{178015D9-13AC-4459-B6F2-C90D55C5F0D5}"/>
               </a:ext>
             </a:extLst>
           </p:cNvPr>
@@ -4439,7 +4975,7 @@
     </p:spTree>
     <p:extLst>
       <p:ext uri="{BB962C8B-B14F-4D97-AF65-F5344CB8AC3E}">
-        <p14:creationId xmlns:p14="http://schemas.microsoft.com/office/powerpoint/2010/main" val="277598795"/>
+        <p14:creationId xmlns:p14="http://schemas.microsoft.com/office/powerpoint/2010/main" val="220894965"/>
       </p:ext>
     </p:extLst>
   </p:cSld>
@@ -4470,7 +5006,7 @@
           <p:cNvPr id="1" name="">
             <a:extLst xmlns:a="http://schemas.openxmlformats.org/drawingml/2006/main">
               <a:ext uri="{FF2B5EF4-FFF2-40B4-BE49-F238E27FC236}">
-                <a16:creationId xmlns:a16="http://schemas.microsoft.com/office/drawing/2014/main" id="{B661EB0C-8364-4434-8B5C-98E968FB0266}"/>
+                <a16:creationId xmlns:a16="http://schemas.microsoft.com/office/drawing/2014/main" id="{59FE4D1E-E142-477B-B554-F57F40C4E2ED}"/>
               </a:ext>
             </a:extLst>
           </p:cNvPr>
@@ -4520,7 +5056,7 @@
           <p:cNvPr id="2" name="">
             <a:extLst xmlns:a="http://schemas.openxmlformats.org/drawingml/2006/main">
               <a:ext uri="{FF2B5EF4-FFF2-40B4-BE49-F238E27FC236}">
-                <a16:creationId xmlns:a16="http://schemas.microsoft.com/office/drawing/2014/main" id="{FD363B35-F425-4023-ABB1-4C638DD0BF26}"/>
+                <a16:creationId xmlns:a16="http://schemas.microsoft.com/office/drawing/2014/main" id="{636E0FD1-EB26-48DC-957D-9F2B844558D8}"/>
               </a:ext>
             </a:extLst>
           </p:cNvPr>
@@ -4570,7 +5106,7 @@
           <p:cNvPr id="3" name="">
             <a:extLst xmlns:a="http://schemas.openxmlformats.org/drawingml/2006/main">
               <a:ext uri="{FF2B5EF4-FFF2-40B4-BE49-F238E27FC236}">
-                <a16:creationId xmlns:a16="http://schemas.microsoft.com/office/drawing/2014/main" id="{EB7BA89A-E07D-455D-81CE-602734FF8A26}"/>
+                <a16:creationId xmlns:a16="http://schemas.microsoft.com/office/drawing/2014/main" id="{67117A02-03BB-4860-B696-61BB95040559}"/>
               </a:ext>
             </a:extLst>
           </p:cNvPr>
@@ -4601,7 +5137,7 @@
           <p:cNvPr id="4" name="">
             <a:extLst xmlns:a="http://schemas.openxmlformats.org/drawingml/2006/main">
               <a:ext uri="{FF2B5EF4-FFF2-40B4-BE49-F238E27FC236}">
-                <a16:creationId xmlns:a16="http://schemas.microsoft.com/office/drawing/2014/main" id="{5DA38868-0E58-4267-A2A4-6F25F29689F5}"/>
+                <a16:creationId xmlns:a16="http://schemas.microsoft.com/office/drawing/2014/main" id="{C139B758-0A3C-4AB9-8B22-9F564B4AB114}"/>
               </a:ext>
             </a:extLst>
           </p:cNvPr>
@@ -4634,7 +5170,7 @@
           <p:cNvPr id="5" name="">
             <a:extLst xmlns:a="http://schemas.openxmlformats.org/drawingml/2006/main">
               <a:ext uri="{FF2B5EF4-FFF2-40B4-BE49-F238E27FC236}">
-                <a16:creationId xmlns:a16="http://schemas.microsoft.com/office/drawing/2014/main" id="{778EF9CC-99B7-48AF-B164-702573BDC188}"/>
+                <a16:creationId xmlns:a16="http://schemas.microsoft.com/office/drawing/2014/main" id="{3811AE7C-3B93-4004-A8B4-7036089A9697}"/>
               </a:ext>
             </a:extLst>
           </p:cNvPr>
@@ -4684,7 +5220,7 @@
           <p:cNvPr id="6" name="">
             <a:extLst xmlns:a="http://schemas.openxmlformats.org/drawingml/2006/main">
               <a:ext uri="{FF2B5EF4-FFF2-40B4-BE49-F238E27FC236}">
-                <a16:creationId xmlns:a16="http://schemas.microsoft.com/office/drawing/2014/main" id="{825EF281-D3D9-4D30-9F34-0976B9B796EB}"/>
+                <a16:creationId xmlns:a16="http://schemas.microsoft.com/office/drawing/2014/main" id="{86A0D85D-E65E-4E89-BD21-ABD7734C541D}"/>
               </a:ext>
             </a:extLst>
           </p:cNvPr>
@@ -4734,7 +5270,7 @@
           <p:cNvPr id="7" name="">
             <a:extLst xmlns:a="http://schemas.openxmlformats.org/drawingml/2006/main">
               <a:ext uri="{FF2B5EF4-FFF2-40B4-BE49-F238E27FC236}">
-                <a16:creationId xmlns:a16="http://schemas.microsoft.com/office/drawing/2014/main" id="{70BEDE40-75E4-4801-9523-6225C8DB1CAD}"/>
+                <a16:creationId xmlns:a16="http://schemas.microsoft.com/office/drawing/2014/main" id="{1E0E74B2-641A-4354-9080-2FABD46D5E2A}"/>
               </a:ext>
             </a:extLst>
           </p:cNvPr>
@@ -4784,7 +5320,7 @@
           <p:cNvPr id="8" name="">
             <a:extLst xmlns:a="http://schemas.openxmlformats.org/drawingml/2006/main">
               <a:ext uri="{FF2B5EF4-FFF2-40B4-BE49-F238E27FC236}">
-                <a16:creationId xmlns:a16="http://schemas.microsoft.com/office/drawing/2014/main" id="{074A318F-3F52-422A-98F0-26C9B177DEBF}"/>
+                <a16:creationId xmlns:a16="http://schemas.microsoft.com/office/drawing/2014/main" id="{FA52892C-2609-48A0-8A3B-C5DEDD90CEA6}"/>
               </a:ext>
             </a:extLst>
           </p:cNvPr>
@@ -4817,7 +5353,7 @@
           <p:cNvPr id="9" name="">
             <a:extLst xmlns:a="http://schemas.openxmlformats.org/drawingml/2006/main">
               <a:ext uri="{FF2B5EF4-FFF2-40B4-BE49-F238E27FC236}">
-                <a16:creationId xmlns:a16="http://schemas.microsoft.com/office/drawing/2014/main" id="{1EB63324-F700-4760-868A-B6BB5C5C9CCA}"/>
+                <a16:creationId xmlns:a16="http://schemas.microsoft.com/office/drawing/2014/main" id="{9CB39689-620C-4A6E-9004-EC9793C233BC}"/>
               </a:ext>
             </a:extLst>
           </p:cNvPr>
@@ -4867,7 +5403,7 @@
           <p:cNvPr id="10" name="">
             <a:extLst xmlns:a="http://schemas.openxmlformats.org/drawingml/2006/main">
               <a:ext uri="{FF2B5EF4-FFF2-40B4-BE49-F238E27FC236}">
-                <a16:creationId xmlns:a16="http://schemas.microsoft.com/office/drawing/2014/main" id="{0F608604-2886-4675-848A-6099376268D6}"/>
+                <a16:creationId xmlns:a16="http://schemas.microsoft.com/office/drawing/2014/main" id="{F98B9989-1F4D-40D2-8CD0-B5A99CFE0A14}"/>
               </a:ext>
             </a:extLst>
           </p:cNvPr>
@@ -4917,7 +5453,7 @@
           <p:cNvPr id="11" name="">
             <a:extLst xmlns:a="http://schemas.openxmlformats.org/drawingml/2006/main">
               <a:ext uri="{FF2B5EF4-FFF2-40B4-BE49-F238E27FC236}">
-                <a16:creationId xmlns:a16="http://schemas.microsoft.com/office/drawing/2014/main" id="{B063F92F-84BF-4479-8F85-FB6676463CFF}"/>
+                <a16:creationId xmlns:a16="http://schemas.microsoft.com/office/drawing/2014/main" id="{0ED8BB00-D579-42D6-B1AB-ACB4F02C5DE1}"/>
               </a:ext>
             </a:extLst>
           </p:cNvPr>
@@ -4967,7 +5503,7 @@
           <p:cNvPr id="12" name="">
             <a:extLst xmlns:a="http://schemas.openxmlformats.org/drawingml/2006/main">
               <a:ext uri="{FF2B5EF4-FFF2-40B4-BE49-F238E27FC236}">
-                <a16:creationId xmlns:a16="http://schemas.microsoft.com/office/drawing/2014/main" id="{8602793E-6514-4255-86FF-408BCF0FFE56}"/>
+                <a16:creationId xmlns:a16="http://schemas.microsoft.com/office/drawing/2014/main" id="{D4556D60-71D8-4BD0-99E5-0C8B08984E9C}"/>
               </a:ext>
             </a:extLst>
           </p:cNvPr>
@@ -5000,7 +5536,7 @@
           <p:cNvPr id="13" name="">
             <a:extLst xmlns:a="http://schemas.openxmlformats.org/drawingml/2006/main">
               <a:ext uri="{FF2B5EF4-FFF2-40B4-BE49-F238E27FC236}">
-                <a16:creationId xmlns:a16="http://schemas.microsoft.com/office/drawing/2014/main" id="{96CDB35B-FF71-4CAC-90E9-D33014ECED84}"/>
+                <a16:creationId xmlns:a16="http://schemas.microsoft.com/office/drawing/2014/main" id="{77D475BC-7331-49E9-BC80-B1271F1691A1}"/>
               </a:ext>
             </a:extLst>
           </p:cNvPr>
@@ -5050,7 +5586,7 @@
           <p:cNvPr id="14" name="">
             <a:extLst xmlns:a="http://schemas.openxmlformats.org/drawingml/2006/main">
               <a:ext uri="{FF2B5EF4-FFF2-40B4-BE49-F238E27FC236}">
-                <a16:creationId xmlns:a16="http://schemas.microsoft.com/office/drawing/2014/main" id="{BAC8300F-839A-47BC-B734-C9C025768EC1}"/>
+                <a16:creationId xmlns:a16="http://schemas.microsoft.com/office/drawing/2014/main" id="{89924463-998A-4C4A-98B2-A0DA1B27498D}"/>
               </a:ext>
             </a:extLst>
           </p:cNvPr>
@@ -5100,7 +5636,7 @@
           <p:cNvPr id="15" name="">
             <a:extLst xmlns:a="http://schemas.openxmlformats.org/drawingml/2006/main">
               <a:ext uri="{FF2B5EF4-FFF2-40B4-BE49-F238E27FC236}">
-                <a16:creationId xmlns:a16="http://schemas.microsoft.com/office/drawing/2014/main" id="{18830405-41F1-4E3A-8B1E-13FB9674A229}"/>
+                <a16:creationId xmlns:a16="http://schemas.microsoft.com/office/drawing/2014/main" id="{8BB7F8E0-17EC-4666-ACB4-522F4686CD04}"/>
               </a:ext>
             </a:extLst>
           </p:cNvPr>
@@ -5150,7 +5686,7 @@
           <p:cNvPr id="16" name="">
             <a:extLst xmlns:a="http://schemas.openxmlformats.org/drawingml/2006/main">
               <a:ext uri="{FF2B5EF4-FFF2-40B4-BE49-F238E27FC236}">
-                <a16:creationId xmlns:a16="http://schemas.microsoft.com/office/drawing/2014/main" id="{C35C39C9-DC94-4F31-9195-78DEC603B9AD}"/>
+                <a16:creationId xmlns:a16="http://schemas.microsoft.com/office/drawing/2014/main" id="{3F9CDF91-D6DF-4A62-B91F-4FFBCC39680C}"/>
               </a:ext>
             </a:extLst>
           </p:cNvPr>
@@ -5183,7 +5719,7 @@
           <p:cNvPr id="17" name="">
             <a:extLst xmlns:a="http://schemas.openxmlformats.org/drawingml/2006/main">
               <a:ext uri="{FF2B5EF4-FFF2-40B4-BE49-F238E27FC236}">
-                <a16:creationId xmlns:a16="http://schemas.microsoft.com/office/drawing/2014/main" id="{53B664BA-6CA5-4171-9E47-F15B51DDC849}"/>
+                <a16:creationId xmlns:a16="http://schemas.microsoft.com/office/drawing/2014/main" id="{EB37D428-4A63-4A7B-AB43-F625CCAB9325}"/>
               </a:ext>
             </a:extLst>
           </p:cNvPr>
@@ -5233,7 +5769,7 @@
           <p:cNvPr id="18" name="">
             <a:extLst xmlns:a="http://schemas.openxmlformats.org/drawingml/2006/main">
               <a:ext uri="{FF2B5EF4-FFF2-40B4-BE49-F238E27FC236}">
-                <a16:creationId xmlns:a16="http://schemas.microsoft.com/office/drawing/2014/main" id="{26419702-10D9-4C4F-9D5F-99E5040233E8}"/>
+                <a16:creationId xmlns:a16="http://schemas.microsoft.com/office/drawing/2014/main" id="{1307D886-A834-48E5-B06B-147C00DE8734}"/>
               </a:ext>
             </a:extLst>
           </p:cNvPr>
@@ -5283,7 +5819,7 @@
           <p:cNvPr id="19" name="">
             <a:extLst xmlns:a="http://schemas.openxmlformats.org/drawingml/2006/main">
               <a:ext uri="{FF2B5EF4-FFF2-40B4-BE49-F238E27FC236}">
-                <a16:creationId xmlns:a16="http://schemas.microsoft.com/office/drawing/2014/main" id="{5378FD80-EC12-4080-8EA5-42ED199536CB}"/>
+                <a16:creationId xmlns:a16="http://schemas.microsoft.com/office/drawing/2014/main" id="{05840028-DAED-4A80-9FD8-6D7F48B8A129}"/>
               </a:ext>
             </a:extLst>
           </p:cNvPr>
@@ -5333,7 +5869,7 @@
           <p:cNvPr id="20" name="">
             <a:extLst xmlns:a="http://schemas.openxmlformats.org/drawingml/2006/main">
               <a:ext uri="{FF2B5EF4-FFF2-40B4-BE49-F238E27FC236}">
-                <a16:creationId xmlns:a16="http://schemas.microsoft.com/office/drawing/2014/main" id="{000F2EC5-3AB9-46EF-B79E-C625A2077612}"/>
+                <a16:creationId xmlns:a16="http://schemas.microsoft.com/office/drawing/2014/main" id="{73C69E42-A0F0-45C3-9D85-282CB01E4E09}"/>
               </a:ext>
             </a:extLst>
           </p:cNvPr>
@@ -5381,7 +5917,7 @@
     </p:spTree>
     <p:extLst>
       <p:ext uri="{BB962C8B-B14F-4D97-AF65-F5344CB8AC3E}">
-        <p14:creationId xmlns:p14="http://schemas.microsoft.com/office/powerpoint/2010/main" val="1095523923"/>
+        <p14:creationId xmlns:p14="http://schemas.microsoft.com/office/powerpoint/2010/main" val="1648061046"/>
       </p:ext>
     </p:extLst>
   </p:cSld>
@@ -5412,7 +5948,7 @@
           <p:cNvPr id="1" name="">
             <a:extLst xmlns:a="http://schemas.openxmlformats.org/drawingml/2006/main">
               <a:ext uri="{FF2B5EF4-FFF2-40B4-BE49-F238E27FC236}">
-                <a16:creationId xmlns:a16="http://schemas.microsoft.com/office/drawing/2014/main" id="{527BE9FD-D638-4F91-B315-81388C3A90D5}"/>
+                <a16:creationId xmlns:a16="http://schemas.microsoft.com/office/drawing/2014/main" id="{8F23C24B-0DCF-4D9E-9666-2FADEFECF68A}"/>
               </a:ext>
             </a:extLst>
           </p:cNvPr>
@@ -5462,7 +5998,7 @@
           <p:cNvPr id="2" name="">
             <a:extLst xmlns:a="http://schemas.openxmlformats.org/drawingml/2006/main">
               <a:ext uri="{FF2B5EF4-FFF2-40B4-BE49-F238E27FC236}">
-                <a16:creationId xmlns:a16="http://schemas.microsoft.com/office/drawing/2014/main" id="{010253B1-BD7C-438B-AA1D-6DAFC02D13A2}"/>
+                <a16:creationId xmlns:a16="http://schemas.microsoft.com/office/drawing/2014/main" id="{0EEA1C91-433A-48D6-B41D-86F1BB7F6956}"/>
               </a:ext>
             </a:extLst>
           </p:cNvPr>
@@ -5512,7 +6048,7 @@
           <p:cNvPr id="3" name="">
             <a:extLst xmlns:a="http://schemas.openxmlformats.org/drawingml/2006/main">
               <a:ext uri="{FF2B5EF4-FFF2-40B4-BE49-F238E27FC236}">
-                <a16:creationId xmlns:a16="http://schemas.microsoft.com/office/drawing/2014/main" id="{252C1173-DAF0-4E9F-BAA7-984F14118244}"/>
+                <a16:creationId xmlns:a16="http://schemas.microsoft.com/office/drawing/2014/main" id="{B8A81F3F-E997-4354-8577-A4312B3B57F4}"/>
               </a:ext>
             </a:extLst>
           </p:cNvPr>
@@ -5547,7 +6083,7 @@
           <p:nvPr/>
         </p:nvPicPr>
         <p:blipFill>
-          <a:blip xmlns:r="http://schemas.openxmlformats.org/officeDocument/2006/relationships" xmlns:a="http://schemas.openxmlformats.org/drawingml/2006/main" r:embed="R56a00dd8732a4c53"/>
+          <a:blip xmlns:r="http://schemas.openxmlformats.org/officeDocument/2006/relationships" xmlns:a="http://schemas.openxmlformats.org/drawingml/2006/main" r:embed="Rd4860d62c64649c8"/>
           <a:stretch xmlns:a="http://schemas.openxmlformats.org/drawingml/2006/main"/>
         </p:blipFill>
         <p:spPr>
@@ -5565,7 +6101,7 @@
           <p:cNvPr id="5" name="">
             <a:extLst xmlns:a="http://schemas.openxmlformats.org/drawingml/2006/main">
               <a:ext uri="{FF2B5EF4-FFF2-40B4-BE49-F238E27FC236}">
-                <a16:creationId xmlns:a16="http://schemas.microsoft.com/office/drawing/2014/main" id="{B3861A80-2244-468A-A7BF-E7FCAE279F37}"/>
+                <a16:creationId xmlns:a16="http://schemas.microsoft.com/office/drawing/2014/main" id="{EBAB97B9-1ECE-44EE-90CE-DEC3749A19CF}"/>
               </a:ext>
             </a:extLst>
           </p:cNvPr>
@@ -5615,7 +6151,7 @@
           <p:cNvPr id="6" name="">
             <a:extLst xmlns:a="http://schemas.openxmlformats.org/drawingml/2006/main">
               <a:ext uri="{FF2B5EF4-FFF2-40B4-BE49-F238E27FC236}">
-                <a16:creationId xmlns:a16="http://schemas.microsoft.com/office/drawing/2014/main" id="{A0E82B30-816E-4618-94F3-323B92BB799B}"/>
+                <a16:creationId xmlns:a16="http://schemas.microsoft.com/office/drawing/2014/main" id="{B4166768-B894-4944-91F9-D780B9752758}"/>
               </a:ext>
             </a:extLst>
           </p:cNvPr>
@@ -5663,7 +6199,7 @@
     </p:spTree>
     <p:extLst>
       <p:ext uri="{BB962C8B-B14F-4D97-AF65-F5344CB8AC3E}">
-        <p14:creationId xmlns:p14="http://schemas.microsoft.com/office/powerpoint/2010/main" val="300929152"/>
+        <p14:creationId xmlns:p14="http://schemas.microsoft.com/office/powerpoint/2010/main" val="1654548250"/>
       </p:ext>
     </p:extLst>
   </p:cSld>
@@ -5694,7 +6230,7 @@
           <p:cNvPr id="1" name="">
             <a:extLst xmlns:a="http://schemas.openxmlformats.org/drawingml/2006/main">
               <a:ext uri="{FF2B5EF4-FFF2-40B4-BE49-F238E27FC236}">
-                <a16:creationId xmlns:a16="http://schemas.microsoft.com/office/drawing/2014/main" id="{DDBA3BBC-11A7-4BF4-A49F-98EA20A40A88}"/>
+                <a16:creationId xmlns:a16="http://schemas.microsoft.com/office/drawing/2014/main" id="{B3544F32-411C-49CA-B183-CE74C51E296B}"/>
               </a:ext>
             </a:extLst>
           </p:cNvPr>
@@ -5744,7 +6280,7 @@
           <p:cNvPr id="2" name="">
             <a:extLst xmlns:a="http://schemas.openxmlformats.org/drawingml/2006/main">
               <a:ext uri="{FF2B5EF4-FFF2-40B4-BE49-F238E27FC236}">
-                <a16:creationId xmlns:a16="http://schemas.microsoft.com/office/drawing/2014/main" id="{BC92DC09-F10A-4974-BAD2-710BDDA37A35}"/>
+                <a16:creationId xmlns:a16="http://schemas.microsoft.com/office/drawing/2014/main" id="{AA837AD3-F86E-41F7-948D-628DAF02C47B}"/>
               </a:ext>
             </a:extLst>
           </p:cNvPr>
@@ -5794,7 +6330,7 @@
           <p:cNvPr id="3" name="">
             <a:extLst xmlns:a="http://schemas.openxmlformats.org/drawingml/2006/main">
               <a:ext uri="{FF2B5EF4-FFF2-40B4-BE49-F238E27FC236}">
-                <a16:creationId xmlns:a16="http://schemas.microsoft.com/office/drawing/2014/main" id="{29DF5EA3-0093-4D65-A9FD-E7CC78FA8C19}"/>
+                <a16:creationId xmlns:a16="http://schemas.microsoft.com/office/drawing/2014/main" id="{DB9132EF-19A5-4660-A44F-2734226368BB}"/>
               </a:ext>
             </a:extLst>
           </p:cNvPr>
@@ -5829,7 +6365,7 @@
           <p:nvPr/>
         </p:nvPicPr>
         <p:blipFill>
-          <a:blip xmlns:r="http://schemas.openxmlformats.org/officeDocument/2006/relationships" xmlns:a="http://schemas.openxmlformats.org/drawingml/2006/main" r:embed="R8092e845dbab4125"/>
+          <a:blip xmlns:r="http://schemas.openxmlformats.org/officeDocument/2006/relationships" xmlns:a="http://schemas.openxmlformats.org/drawingml/2006/main" r:embed="Rc8a51b44b08d4a43"/>
           <a:stretch xmlns:a="http://schemas.openxmlformats.org/drawingml/2006/main"/>
         </p:blipFill>
         <p:spPr>
@@ -5847,7 +6383,7 @@
           <p:cNvPr id="5" name="">
             <a:extLst xmlns:a="http://schemas.openxmlformats.org/drawingml/2006/main">
               <a:ext uri="{FF2B5EF4-FFF2-40B4-BE49-F238E27FC236}">
-                <a16:creationId xmlns:a16="http://schemas.microsoft.com/office/drawing/2014/main" id="{E969591B-7B71-4FF5-A97F-C51F7A5A33A8}"/>
+                <a16:creationId xmlns:a16="http://schemas.microsoft.com/office/drawing/2014/main" id="{FA293B3F-B35D-48D9-AB71-CCE58CAD0FF0}"/>
               </a:ext>
             </a:extLst>
           </p:cNvPr>
@@ -5897,7 +6433,7 @@
           <p:cNvPr id="6" name="">
             <a:extLst xmlns:a="http://schemas.openxmlformats.org/drawingml/2006/main">
               <a:ext uri="{FF2B5EF4-FFF2-40B4-BE49-F238E27FC236}">
-                <a16:creationId xmlns:a16="http://schemas.microsoft.com/office/drawing/2014/main" id="{5F21AB65-A6B1-4224-B81D-19B8A16C7DA0}"/>
+                <a16:creationId xmlns:a16="http://schemas.microsoft.com/office/drawing/2014/main" id="{79CC46FE-534D-4604-8442-F48D94C33275}"/>
               </a:ext>
             </a:extLst>
           </p:cNvPr>
@@ -5945,7 +6481,7 @@
     </p:spTree>
     <p:extLst>
       <p:ext uri="{BB962C8B-B14F-4D97-AF65-F5344CB8AC3E}">
-        <p14:creationId xmlns:p14="http://schemas.microsoft.com/office/powerpoint/2010/main" val="1692029032"/>
+        <p14:creationId xmlns:p14="http://schemas.microsoft.com/office/powerpoint/2010/main" val="1632104643"/>
       </p:ext>
     </p:extLst>
   </p:cSld>
@@ -5976,7 +6512,7 @@
           <p:cNvPr id="1" name="">
             <a:extLst xmlns:a="http://schemas.openxmlformats.org/drawingml/2006/main">
               <a:ext uri="{FF2B5EF4-FFF2-40B4-BE49-F238E27FC236}">
-                <a16:creationId xmlns:a16="http://schemas.microsoft.com/office/drawing/2014/main" id="{C68F20FB-7F08-481C-A092-4A1CE6BD5796}"/>
+                <a16:creationId xmlns:a16="http://schemas.microsoft.com/office/drawing/2014/main" id="{D8B3302A-9619-41B2-99B1-3124D53F2DE8}"/>
               </a:ext>
             </a:extLst>
           </p:cNvPr>
@@ -6026,7 +6562,7 @@
           <p:cNvPr id="2" name="">
             <a:extLst xmlns:a="http://schemas.openxmlformats.org/drawingml/2006/main">
               <a:ext uri="{FF2B5EF4-FFF2-40B4-BE49-F238E27FC236}">
-                <a16:creationId xmlns:a16="http://schemas.microsoft.com/office/drawing/2014/main" id="{531FD37E-992B-472C-BAA8-F453B251B0B7}"/>
+                <a16:creationId xmlns:a16="http://schemas.microsoft.com/office/drawing/2014/main" id="{B371F908-B256-462C-8EF1-0FB500514CC5}"/>
               </a:ext>
             </a:extLst>
           </p:cNvPr>
@@ -6076,7 +6612,7 @@
           <p:cNvPr id="3" name="">
             <a:extLst xmlns:a="http://schemas.openxmlformats.org/drawingml/2006/main">
               <a:ext uri="{FF2B5EF4-FFF2-40B4-BE49-F238E27FC236}">
-                <a16:creationId xmlns:a16="http://schemas.microsoft.com/office/drawing/2014/main" id="{56BFD39F-C9C8-4446-A0E4-DA9D6820EFC1}"/>
+                <a16:creationId xmlns:a16="http://schemas.microsoft.com/office/drawing/2014/main" id="{D70795A6-8104-4B6B-8D4B-ED40BB826353}"/>
               </a:ext>
             </a:extLst>
           </p:cNvPr>
@@ -6111,7 +6647,7 @@
           <p:nvPr/>
         </p:nvPicPr>
         <p:blipFill>
-          <a:blip xmlns:r="http://schemas.openxmlformats.org/officeDocument/2006/relationships" xmlns:a="http://schemas.openxmlformats.org/drawingml/2006/main" r:embed="Rd72a1126f1664360"/>
+          <a:blip xmlns:r="http://schemas.openxmlformats.org/officeDocument/2006/relationships" xmlns:a="http://schemas.openxmlformats.org/drawingml/2006/main" r:embed="Rf5889f8fc48c4737"/>
           <a:stretch xmlns:a="http://schemas.openxmlformats.org/drawingml/2006/main"/>
         </p:blipFill>
         <p:spPr>
@@ -6133,7 +6669,7 @@
           <p:nvPr/>
         </p:nvPicPr>
         <p:blipFill>
-          <a:blip xmlns:r="http://schemas.openxmlformats.org/officeDocument/2006/relationships" xmlns:a="http://schemas.openxmlformats.org/drawingml/2006/main" r:embed="R6c824feb19654d50"/>
+          <a:blip xmlns:r="http://schemas.openxmlformats.org/officeDocument/2006/relationships" xmlns:a="http://schemas.openxmlformats.org/drawingml/2006/main" r:embed="R437dc80016fd4e7b"/>
           <a:stretch xmlns:a="http://schemas.openxmlformats.org/drawingml/2006/main"/>
         </p:blipFill>
         <p:spPr>
@@ -6151,7 +6687,7 @@
           <p:cNvPr id="6" name="">
             <a:extLst xmlns:a="http://schemas.openxmlformats.org/drawingml/2006/main">
               <a:ext uri="{FF2B5EF4-FFF2-40B4-BE49-F238E27FC236}">
-                <a16:creationId xmlns:a16="http://schemas.microsoft.com/office/drawing/2014/main" id="{D1208543-8FA1-400F-B550-21CB2D89E52E}"/>
+                <a16:creationId xmlns:a16="http://schemas.microsoft.com/office/drawing/2014/main" id="{CFB9156B-8ED7-4548-AD4C-8F49586EC368}"/>
               </a:ext>
             </a:extLst>
           </p:cNvPr>
@@ -6199,7 +6735,7 @@
     </p:spTree>
     <p:extLst>
       <p:ext uri="{BB962C8B-B14F-4D97-AF65-F5344CB8AC3E}">
-        <p14:creationId xmlns:p14="http://schemas.microsoft.com/office/powerpoint/2010/main" val="1851820085"/>
+        <p14:creationId xmlns:p14="http://schemas.microsoft.com/office/powerpoint/2010/main" val="1744376519"/>
       </p:ext>
     </p:extLst>
   </p:cSld>
@@ -6230,7 +6766,7 @@
           <p:cNvPr id="1" name="">
             <a:extLst xmlns:a="http://schemas.openxmlformats.org/drawingml/2006/main">
               <a:ext uri="{FF2B5EF4-FFF2-40B4-BE49-F238E27FC236}">
-                <a16:creationId xmlns:a16="http://schemas.microsoft.com/office/drawing/2014/main" id="{3ECD242A-0EF7-4AB1-9F75-F72DD6C4D3B7}"/>
+                <a16:creationId xmlns:a16="http://schemas.microsoft.com/office/drawing/2014/main" id="{4C6214A6-0023-440E-8C98-03C719A0E8F9}"/>
               </a:ext>
             </a:extLst>
           </p:cNvPr>
@@ -6280,7 +6816,7 @@
           <p:cNvPr id="2" name="">
             <a:extLst xmlns:a="http://schemas.openxmlformats.org/drawingml/2006/main">
               <a:ext uri="{FF2B5EF4-FFF2-40B4-BE49-F238E27FC236}">
-                <a16:creationId xmlns:a16="http://schemas.microsoft.com/office/drawing/2014/main" id="{CB7F671F-9F19-4570-8BDE-9245BD3DF731}"/>
+                <a16:creationId xmlns:a16="http://schemas.microsoft.com/office/drawing/2014/main" id="{85BAE570-B4E0-4E2F-8684-656DB0B6A1F9}"/>
               </a:ext>
             </a:extLst>
           </p:cNvPr>
@@ -6330,7 +6866,7 @@
           <p:cNvPr id="3" name="">
             <a:extLst xmlns:a="http://schemas.openxmlformats.org/drawingml/2006/main">
               <a:ext uri="{FF2B5EF4-FFF2-40B4-BE49-F238E27FC236}">
-                <a16:creationId xmlns:a16="http://schemas.microsoft.com/office/drawing/2014/main" id="{F49ECA31-E70F-49D5-AEA3-7AAF72C62AFE}"/>
+                <a16:creationId xmlns:a16="http://schemas.microsoft.com/office/drawing/2014/main" id="{611846D7-88A0-4F1D-A0F0-6E6A23416B17}"/>
               </a:ext>
             </a:extLst>
           </p:cNvPr>
@@ -6365,7 +6901,7 @@
           <p:nvPr/>
         </p:nvPicPr>
         <p:blipFill>
-          <a:blip xmlns:r="http://schemas.openxmlformats.org/officeDocument/2006/relationships" xmlns:a="http://schemas.openxmlformats.org/drawingml/2006/main" r:embed="Re760b13abf564906"/>
+          <a:blip xmlns:r="http://schemas.openxmlformats.org/officeDocument/2006/relationships" xmlns:a="http://schemas.openxmlformats.org/drawingml/2006/main" r:embed="R2cb59ebd9033478a"/>
           <a:stretch xmlns:a="http://schemas.openxmlformats.org/drawingml/2006/main"/>
         </p:blipFill>
         <p:spPr>
@@ -6383,7 +6919,7 @@
           <p:cNvPr id="5" name="">
             <a:extLst xmlns:a="http://schemas.openxmlformats.org/drawingml/2006/main">
               <a:ext uri="{FF2B5EF4-FFF2-40B4-BE49-F238E27FC236}">
-                <a16:creationId xmlns:a16="http://schemas.microsoft.com/office/drawing/2014/main" id="{36D5550F-2FA3-4184-821C-75CE76F2A15F}"/>
+                <a16:creationId xmlns:a16="http://schemas.microsoft.com/office/drawing/2014/main" id="{5E3D7641-1626-4DD1-8E6B-ABF002572600}"/>
               </a:ext>
             </a:extLst>
           </p:cNvPr>
@@ -6433,7 +6969,7 @@
           <p:cNvPr id="6" name="">
             <a:extLst xmlns:a="http://schemas.openxmlformats.org/drawingml/2006/main">
               <a:ext uri="{FF2B5EF4-FFF2-40B4-BE49-F238E27FC236}">
-                <a16:creationId xmlns:a16="http://schemas.microsoft.com/office/drawing/2014/main" id="{4AFCA1CC-A26B-43A1-939E-8B2F83BEAA76}"/>
+                <a16:creationId xmlns:a16="http://schemas.microsoft.com/office/drawing/2014/main" id="{ADBA6CF6-8FB8-4405-AE04-422444E89621}"/>
               </a:ext>
             </a:extLst>
           </p:cNvPr>
@@ -6481,7 +7017,7 @@
     </p:spTree>
     <p:extLst>
       <p:ext uri="{BB962C8B-B14F-4D97-AF65-F5344CB8AC3E}">
-        <p14:creationId xmlns:p14="http://schemas.microsoft.com/office/powerpoint/2010/main" val="1521300924"/>
+        <p14:creationId xmlns:p14="http://schemas.microsoft.com/office/powerpoint/2010/main" val="1629589890"/>
       </p:ext>
     </p:extLst>
   </p:cSld>
@@ -6512,7 +7048,7 @@
           <p:cNvPr id="1" name="">
             <a:extLst xmlns:a="http://schemas.openxmlformats.org/drawingml/2006/main">
               <a:ext uri="{FF2B5EF4-FFF2-40B4-BE49-F238E27FC236}">
-                <a16:creationId xmlns:a16="http://schemas.microsoft.com/office/drawing/2014/main" id="{703A54E9-DBC6-42F0-AFA8-9260BCE42130}"/>
+                <a16:creationId xmlns:a16="http://schemas.microsoft.com/office/drawing/2014/main" id="{C8718E57-A1C6-420E-B7E4-E8C6CC972D59}"/>
               </a:ext>
             </a:extLst>
           </p:cNvPr>
@@ -6562,7 +7098,7 @@
           <p:cNvPr id="2" name="">
             <a:extLst xmlns:a="http://schemas.openxmlformats.org/drawingml/2006/main">
               <a:ext uri="{FF2B5EF4-FFF2-40B4-BE49-F238E27FC236}">
-                <a16:creationId xmlns:a16="http://schemas.microsoft.com/office/drawing/2014/main" id="{A85222E3-F781-4BD6-8F4C-C5B8BC29B55B}"/>
+                <a16:creationId xmlns:a16="http://schemas.microsoft.com/office/drawing/2014/main" id="{84F20A69-3689-418F-9B02-96B749581240}"/>
               </a:ext>
             </a:extLst>
           </p:cNvPr>
@@ -6612,7 +7148,7 @@
           <p:cNvPr id="3" name="">
             <a:extLst xmlns:a="http://schemas.openxmlformats.org/drawingml/2006/main">
               <a:ext uri="{FF2B5EF4-FFF2-40B4-BE49-F238E27FC236}">
-                <a16:creationId xmlns:a16="http://schemas.microsoft.com/office/drawing/2014/main" id="{216C8070-C994-4266-A913-06E61E6B0635}"/>
+                <a16:creationId xmlns:a16="http://schemas.microsoft.com/office/drawing/2014/main" id="{406F7076-871C-4234-BFFB-51FB46A0E796}"/>
               </a:ext>
             </a:extLst>
           </p:cNvPr>
@@ -6643,7 +7179,7 @@
           <p:cNvPr id="4" name="">
             <a:extLst xmlns:a="http://schemas.openxmlformats.org/drawingml/2006/main">
               <a:ext uri="{FF2B5EF4-FFF2-40B4-BE49-F238E27FC236}">
-                <a16:creationId xmlns:a16="http://schemas.microsoft.com/office/drawing/2014/main" id="{07539993-B23E-4773-B1B8-D444F1312FAD}"/>
+                <a16:creationId xmlns:a16="http://schemas.microsoft.com/office/drawing/2014/main" id="{5FE9DFEB-788F-4760-B044-F95DAEA7C718}"/>
               </a:ext>
             </a:extLst>
           </p:cNvPr>
@@ -6693,7 +7229,7 @@
           <p:cNvPr id="5" name="">
             <a:extLst xmlns:a="http://schemas.openxmlformats.org/drawingml/2006/main">
               <a:ext uri="{FF2B5EF4-FFF2-40B4-BE49-F238E27FC236}">
-                <a16:creationId xmlns:a16="http://schemas.microsoft.com/office/drawing/2014/main" id="{F5E6C041-FA33-48D7-8080-E7BF1A3DA6A4}"/>
+                <a16:creationId xmlns:a16="http://schemas.microsoft.com/office/drawing/2014/main" id="{7F3F3C6C-A0CC-47B8-8D80-74E24CC9EA26}"/>
               </a:ext>
             </a:extLst>
           </p:cNvPr>
@@ -6743,7 +7279,7 @@
           <p:cNvPr id="6" name="">
             <a:extLst xmlns:a="http://schemas.openxmlformats.org/drawingml/2006/main">
               <a:ext uri="{FF2B5EF4-FFF2-40B4-BE49-F238E27FC236}">
-                <a16:creationId xmlns:a16="http://schemas.microsoft.com/office/drawing/2014/main" id="{1ECCC67A-EF9B-40B0-B7D9-A8DBDEBF029E}"/>
+                <a16:creationId xmlns:a16="http://schemas.microsoft.com/office/drawing/2014/main" id="{ED43AE7B-F1EA-403E-9552-47DADDBD6594}"/>
               </a:ext>
             </a:extLst>
           </p:cNvPr>
@@ -6793,7 +7329,7 @@
           <p:cNvPr id="7" name="">
             <a:extLst xmlns:a="http://schemas.openxmlformats.org/drawingml/2006/main">
               <a:ext uri="{FF2B5EF4-FFF2-40B4-BE49-F238E27FC236}">
-                <a16:creationId xmlns:a16="http://schemas.microsoft.com/office/drawing/2014/main" id="{81182939-B82F-4634-869A-FB4A75A0C256}"/>
+                <a16:creationId xmlns:a16="http://schemas.microsoft.com/office/drawing/2014/main" id="{58297E14-09AF-49C5-AD4F-F9D8A3E1AD33}"/>
               </a:ext>
             </a:extLst>
           </p:cNvPr>
@@ -6843,7 +7379,7 @@
           <p:cNvPr id="8" name="">
             <a:extLst xmlns:a="http://schemas.openxmlformats.org/drawingml/2006/main">
               <a:ext uri="{FF2B5EF4-FFF2-40B4-BE49-F238E27FC236}">
-                <a16:creationId xmlns:a16="http://schemas.microsoft.com/office/drawing/2014/main" id="{BE3606F4-344E-48E0-8BEF-66DC25B023BF}"/>
+                <a16:creationId xmlns:a16="http://schemas.microsoft.com/office/drawing/2014/main" id="{684D977B-D40E-41BA-814C-C671219C3DC2}"/>
               </a:ext>
             </a:extLst>
           </p:cNvPr>
@@ -6893,7 +7429,7 @@
           <p:cNvPr id="9" name="">
             <a:extLst xmlns:a="http://schemas.openxmlformats.org/drawingml/2006/main">
               <a:ext uri="{FF2B5EF4-FFF2-40B4-BE49-F238E27FC236}">
-                <a16:creationId xmlns:a16="http://schemas.microsoft.com/office/drawing/2014/main" id="{5C1AAAB2-718C-43BA-9B21-6E6FC9859CEF}"/>
+                <a16:creationId xmlns:a16="http://schemas.microsoft.com/office/drawing/2014/main" id="{3F882801-270F-4C7A-ACE4-CAF9B8303B00}"/>
               </a:ext>
             </a:extLst>
           </p:cNvPr>
@@ -6943,7 +7479,7 @@
           <p:cNvPr id="10" name="">
             <a:extLst xmlns:a="http://schemas.openxmlformats.org/drawingml/2006/main">
               <a:ext uri="{FF2B5EF4-FFF2-40B4-BE49-F238E27FC236}">
-                <a16:creationId xmlns:a16="http://schemas.microsoft.com/office/drawing/2014/main" id="{0E5A181C-A97B-48A4-97C5-E5C135942D7D}"/>
+                <a16:creationId xmlns:a16="http://schemas.microsoft.com/office/drawing/2014/main" id="{5E18439B-52F7-47EA-98E5-A98A01E5C0BE}"/>
               </a:ext>
             </a:extLst>
           </p:cNvPr>
@@ -6993,7 +7529,7 @@
           <p:cNvPr id="11" name="">
             <a:extLst xmlns:a="http://schemas.openxmlformats.org/drawingml/2006/main">
               <a:ext uri="{FF2B5EF4-FFF2-40B4-BE49-F238E27FC236}">
-                <a16:creationId xmlns:a16="http://schemas.microsoft.com/office/drawing/2014/main" id="{E4482D36-0F62-4A9F-B4C2-FE9EF930E233}"/>
+                <a16:creationId xmlns:a16="http://schemas.microsoft.com/office/drawing/2014/main" id="{2CCFA4B4-976E-4BE8-8FBC-E3B539AD239B}"/>
               </a:ext>
             </a:extLst>
           </p:cNvPr>
@@ -7043,7 +7579,7 @@
           <p:cNvPr id="12" name="">
             <a:extLst xmlns:a="http://schemas.openxmlformats.org/drawingml/2006/main">
               <a:ext uri="{FF2B5EF4-FFF2-40B4-BE49-F238E27FC236}">
-                <a16:creationId xmlns:a16="http://schemas.microsoft.com/office/drawing/2014/main" id="{4E57724A-F078-4E34-8278-0D3B7C11822A}"/>
+                <a16:creationId xmlns:a16="http://schemas.microsoft.com/office/drawing/2014/main" id="{0D4B1B60-4FB3-4A29-9A18-6B0B8D2D8866}"/>
               </a:ext>
             </a:extLst>
           </p:cNvPr>
@@ -7091,7 +7627,7 @@
     </p:spTree>
     <p:extLst>
       <p:ext uri="{BB962C8B-B14F-4D97-AF65-F5344CB8AC3E}">
-        <p14:creationId xmlns:p14="http://schemas.microsoft.com/office/powerpoint/2010/main" val="579019017"/>
+        <p14:creationId xmlns:p14="http://schemas.microsoft.com/office/powerpoint/2010/main" val="501552947"/>
       </p:ext>
     </p:extLst>
   </p:cSld>
@@ -7122,7 +7658,7 @@
           <p:cNvPr id="1" name="">
             <a:extLst xmlns:a="http://schemas.openxmlformats.org/drawingml/2006/main">
               <a:ext uri="{FF2B5EF4-FFF2-40B4-BE49-F238E27FC236}">
-                <a16:creationId xmlns:a16="http://schemas.microsoft.com/office/drawing/2014/main" id="{5D80B4F1-E84B-45B6-8C00-91BEA00BD3E3}"/>
+                <a16:creationId xmlns:a16="http://schemas.microsoft.com/office/drawing/2014/main" id="{87A72768-16BA-4DAF-A7C1-BD3E38895409}"/>
               </a:ext>
             </a:extLst>
           </p:cNvPr>
@@ -7172,7 +7708,7 @@
           <p:cNvPr id="2" name="">
             <a:extLst xmlns:a="http://schemas.openxmlformats.org/drawingml/2006/main">
               <a:ext uri="{FF2B5EF4-FFF2-40B4-BE49-F238E27FC236}">
-                <a16:creationId xmlns:a16="http://schemas.microsoft.com/office/drawing/2014/main" id="{379844A0-0F33-4744-8E18-27BEB922CD1E}"/>
+                <a16:creationId xmlns:a16="http://schemas.microsoft.com/office/drawing/2014/main" id="{93B5966C-9487-4B04-88EE-D91DB7206F29}"/>
               </a:ext>
             </a:extLst>
           </p:cNvPr>
@@ -7222,7 +7758,7 @@
           <p:cNvPr id="3" name="">
             <a:extLst xmlns:a="http://schemas.openxmlformats.org/drawingml/2006/main">
               <a:ext uri="{FF2B5EF4-FFF2-40B4-BE49-F238E27FC236}">
-                <a16:creationId xmlns:a16="http://schemas.microsoft.com/office/drawing/2014/main" id="{FA4C49DE-EE52-427B-9DC7-531B9CF8B97B}"/>
+                <a16:creationId xmlns:a16="http://schemas.microsoft.com/office/drawing/2014/main" id="{97ACBE62-FE26-4692-B63B-65B3F4D8D4F4}"/>
               </a:ext>
             </a:extLst>
           </p:cNvPr>
@@ -7253,7 +7789,7 @@
           <p:cNvPr id="4" name="">
             <a:extLst xmlns:a="http://schemas.openxmlformats.org/drawingml/2006/main">
               <a:ext uri="{FF2B5EF4-FFF2-40B4-BE49-F238E27FC236}">
-                <a16:creationId xmlns:a16="http://schemas.microsoft.com/office/drawing/2014/main" id="{CAE31F0E-8852-42AA-A8B3-4B1052A2E325}"/>
+                <a16:creationId xmlns:a16="http://schemas.microsoft.com/office/drawing/2014/main" id="{3D1856B7-5E72-4937-99EB-0BF9D9745A36}"/>
               </a:ext>
             </a:extLst>
           </p:cNvPr>
@@ -7303,7 +7839,7 @@
           <p:cNvPr id="5" name="">
             <a:extLst xmlns:a="http://schemas.openxmlformats.org/drawingml/2006/main">
               <a:ext uri="{FF2B5EF4-FFF2-40B4-BE49-F238E27FC236}">
-                <a16:creationId xmlns:a16="http://schemas.microsoft.com/office/drawing/2014/main" id="{A9879A3C-FC92-40CF-A741-D27F26C20054}"/>
+                <a16:creationId xmlns:a16="http://schemas.microsoft.com/office/drawing/2014/main" id="{EFC75BF0-80C9-4E96-86C7-53B8527A302D}"/>
               </a:ext>
             </a:extLst>
           </p:cNvPr>
@@ -7334,7 +7870,7 @@
           <p:cNvPr id="6" name="">
             <a:extLst xmlns:a="http://schemas.openxmlformats.org/drawingml/2006/main">
               <a:ext uri="{FF2B5EF4-FFF2-40B4-BE49-F238E27FC236}">
-                <a16:creationId xmlns:a16="http://schemas.microsoft.com/office/drawing/2014/main" id="{DAC87A87-BF0C-47CC-B3FD-D766DB1AB1DD}"/>
+                <a16:creationId xmlns:a16="http://schemas.microsoft.com/office/drawing/2014/main" id="{158E9EEA-D4CF-46AD-885A-5E5744FCF6EA}"/>
               </a:ext>
             </a:extLst>
           </p:cNvPr>
@@ -7384,7 +7920,7 @@
           <p:cNvPr id="7" name="">
             <a:extLst xmlns:a="http://schemas.openxmlformats.org/drawingml/2006/main">
               <a:ext uri="{FF2B5EF4-FFF2-40B4-BE49-F238E27FC236}">
-                <a16:creationId xmlns:a16="http://schemas.microsoft.com/office/drawing/2014/main" id="{A406F5E5-12DA-4001-835A-98C897EA0AC5}"/>
+                <a16:creationId xmlns:a16="http://schemas.microsoft.com/office/drawing/2014/main" id="{A42A2734-D768-42E8-A986-AD808D659AA8}"/>
               </a:ext>
             </a:extLst>
           </p:cNvPr>
@@ -7432,7 +7968,7 @@
     </p:spTree>
     <p:extLst>
       <p:ext uri="{BB962C8B-B14F-4D97-AF65-F5344CB8AC3E}">
-        <p14:creationId xmlns:p14="http://schemas.microsoft.com/office/powerpoint/2010/main" val="2081928199"/>
+        <p14:creationId xmlns:p14="http://schemas.microsoft.com/office/powerpoint/2010/main" val="1487414856"/>
       </p:ext>
     </p:extLst>
   </p:cSld>
@@ -7463,7 +7999,7 @@
           <p:cNvPr id="1" name="">
             <a:extLst xmlns:a="http://schemas.openxmlformats.org/drawingml/2006/main">
               <a:ext uri="{FF2B5EF4-FFF2-40B4-BE49-F238E27FC236}">
-                <a16:creationId xmlns:a16="http://schemas.microsoft.com/office/drawing/2014/main" id="{0CB1D330-7C38-4940-A775-05303DFC9279}"/>
+                <a16:creationId xmlns:a16="http://schemas.microsoft.com/office/drawing/2014/main" id="{8FF44ADA-C81E-4DE1-86CB-5A74C38ADBB9}"/>
               </a:ext>
             </a:extLst>
           </p:cNvPr>
@@ -7513,7 +8049,7 @@
           <p:cNvPr id="2" name="">
             <a:extLst xmlns:a="http://schemas.openxmlformats.org/drawingml/2006/main">
               <a:ext uri="{FF2B5EF4-FFF2-40B4-BE49-F238E27FC236}">
-                <a16:creationId xmlns:a16="http://schemas.microsoft.com/office/drawing/2014/main" id="{47F7015F-6130-4FF6-9F2C-984FFD34CDCD}"/>
+                <a16:creationId xmlns:a16="http://schemas.microsoft.com/office/drawing/2014/main" id="{2C3A8A2E-9DBD-4B0D-A7BE-8E6B658E145E}"/>
               </a:ext>
             </a:extLst>
           </p:cNvPr>
@@ -7563,7 +8099,7 @@
           <p:cNvPr id="3" name="">
             <a:extLst xmlns:a="http://schemas.openxmlformats.org/drawingml/2006/main">
               <a:ext uri="{FF2B5EF4-FFF2-40B4-BE49-F238E27FC236}">
-                <a16:creationId xmlns:a16="http://schemas.microsoft.com/office/drawing/2014/main" id="{028CE1EC-D337-45B4-8402-F161171B714C}"/>
+                <a16:creationId xmlns:a16="http://schemas.microsoft.com/office/drawing/2014/main" id="{60DFE17C-A77E-470B-B29F-0043C82022AE}"/>
               </a:ext>
             </a:extLst>
           </p:cNvPr>
@@ -7594,7 +8130,7 @@
           <p:cNvPr id="4" name="">
             <a:extLst xmlns:a="http://schemas.openxmlformats.org/drawingml/2006/main">
               <a:ext uri="{FF2B5EF4-FFF2-40B4-BE49-F238E27FC236}">
-                <a16:creationId xmlns:a16="http://schemas.microsoft.com/office/drawing/2014/main" id="{FA77F218-A91A-4FE6-9016-77F131EE9A2B}"/>
+                <a16:creationId xmlns:a16="http://schemas.microsoft.com/office/drawing/2014/main" id="{7016ACE7-9004-479E-AFF3-792D27480848}"/>
               </a:ext>
             </a:extLst>
           </p:cNvPr>
@@ -7627,7 +8163,7 @@
           <p:cNvPr id="5" name="">
             <a:extLst xmlns:a="http://schemas.openxmlformats.org/drawingml/2006/main">
               <a:ext uri="{FF2B5EF4-FFF2-40B4-BE49-F238E27FC236}">
-                <a16:creationId xmlns:a16="http://schemas.microsoft.com/office/drawing/2014/main" id="{92B14DD7-93E9-4243-A0D3-061783F02735}"/>
+                <a16:creationId xmlns:a16="http://schemas.microsoft.com/office/drawing/2014/main" id="{0303A4B3-43E3-4219-A82C-B9C984FDE5F2}"/>
               </a:ext>
             </a:extLst>
           </p:cNvPr>
@@ -7677,7 +8213,7 @@
           <p:cNvPr id="6" name="">
             <a:extLst xmlns:a="http://schemas.openxmlformats.org/drawingml/2006/main">
               <a:ext uri="{FF2B5EF4-FFF2-40B4-BE49-F238E27FC236}">
-                <a16:creationId xmlns:a16="http://schemas.microsoft.com/office/drawing/2014/main" id="{4E51E5D0-22E1-49BF-A279-E755D9406170}"/>
+                <a16:creationId xmlns:a16="http://schemas.microsoft.com/office/drawing/2014/main" id="{A4204E7E-4FBC-4980-9421-6EF772AA709C}"/>
               </a:ext>
             </a:extLst>
           </p:cNvPr>
@@ -7727,7 +8263,7 @@
           <p:cNvPr id="7" name="">
             <a:extLst xmlns:a="http://schemas.openxmlformats.org/drawingml/2006/main">
               <a:ext uri="{FF2B5EF4-FFF2-40B4-BE49-F238E27FC236}">
-                <a16:creationId xmlns:a16="http://schemas.microsoft.com/office/drawing/2014/main" id="{383C5DFC-1B07-496C-B705-A6A3357F6761}"/>
+                <a16:creationId xmlns:a16="http://schemas.microsoft.com/office/drawing/2014/main" id="{1CC24F79-587D-46E2-8EC6-7A29522A9369}"/>
               </a:ext>
             </a:extLst>
           </p:cNvPr>
@@ -7777,7 +8313,7 @@
           <p:cNvPr id="8" name="">
             <a:extLst xmlns:a="http://schemas.openxmlformats.org/drawingml/2006/main">
               <a:ext uri="{FF2B5EF4-FFF2-40B4-BE49-F238E27FC236}">
-                <a16:creationId xmlns:a16="http://schemas.microsoft.com/office/drawing/2014/main" id="{81E3B9F6-ED6B-4BA3-A65F-CB1AD07C4821}"/>
+                <a16:creationId xmlns:a16="http://schemas.microsoft.com/office/drawing/2014/main" id="{549C43F5-61B5-40CE-82DE-A595D6311F78}"/>
               </a:ext>
             </a:extLst>
           </p:cNvPr>
@@ -7810,7 +8346,7 @@
           <p:cNvPr id="9" name="">
             <a:extLst xmlns:a="http://schemas.openxmlformats.org/drawingml/2006/main">
               <a:ext uri="{FF2B5EF4-FFF2-40B4-BE49-F238E27FC236}">
-                <a16:creationId xmlns:a16="http://schemas.microsoft.com/office/drawing/2014/main" id="{3083CA6A-5F29-4347-BD22-F504F37D8E1B}"/>
+                <a16:creationId xmlns:a16="http://schemas.microsoft.com/office/drawing/2014/main" id="{51020638-AF39-4068-93EC-62D4D95BD5D3}"/>
               </a:ext>
             </a:extLst>
           </p:cNvPr>
@@ -7860,7 +8396,7 @@
           <p:cNvPr id="10" name="">
             <a:extLst xmlns:a="http://schemas.openxmlformats.org/drawingml/2006/main">
               <a:ext uri="{FF2B5EF4-FFF2-40B4-BE49-F238E27FC236}">
-                <a16:creationId xmlns:a16="http://schemas.microsoft.com/office/drawing/2014/main" id="{4734B834-5D50-47B4-9136-8CDE233D0B30}"/>
+                <a16:creationId xmlns:a16="http://schemas.microsoft.com/office/drawing/2014/main" id="{B5471F5C-44CD-4245-90C8-540AEFBD0774}"/>
               </a:ext>
             </a:extLst>
           </p:cNvPr>
@@ -7910,7 +8446,7 @@
           <p:cNvPr id="11" name="">
             <a:extLst xmlns:a="http://schemas.openxmlformats.org/drawingml/2006/main">
               <a:ext uri="{FF2B5EF4-FFF2-40B4-BE49-F238E27FC236}">
-                <a16:creationId xmlns:a16="http://schemas.microsoft.com/office/drawing/2014/main" id="{C814E08D-F92F-4251-9E22-BC358EEF07D6}"/>
+                <a16:creationId xmlns:a16="http://schemas.microsoft.com/office/drawing/2014/main" id="{4E13CA4D-34E2-4223-909D-38C0E071FB45}"/>
               </a:ext>
             </a:extLst>
           </p:cNvPr>
@@ -7960,7 +8496,7 @@
           <p:cNvPr id="12" name="">
             <a:extLst xmlns:a="http://schemas.openxmlformats.org/drawingml/2006/main">
               <a:ext uri="{FF2B5EF4-FFF2-40B4-BE49-F238E27FC236}">
-                <a16:creationId xmlns:a16="http://schemas.microsoft.com/office/drawing/2014/main" id="{2CB7ECD4-000C-4B3D-A8FB-171695FB4760}"/>
+                <a16:creationId xmlns:a16="http://schemas.microsoft.com/office/drawing/2014/main" id="{A4CED986-2B53-44FD-B38C-505A7091046C}"/>
               </a:ext>
             </a:extLst>
           </p:cNvPr>
@@ -7993,7 +8529,7 @@
           <p:cNvPr id="13" name="">
             <a:extLst xmlns:a="http://schemas.openxmlformats.org/drawingml/2006/main">
               <a:ext uri="{FF2B5EF4-FFF2-40B4-BE49-F238E27FC236}">
-                <a16:creationId xmlns:a16="http://schemas.microsoft.com/office/drawing/2014/main" id="{2889AF98-146F-4630-9A1C-A7D02B35BCE7}"/>
+                <a16:creationId xmlns:a16="http://schemas.microsoft.com/office/drawing/2014/main" id="{4B8440AD-5099-463D-BB3B-F1A26A9E742F}"/>
               </a:ext>
             </a:extLst>
           </p:cNvPr>
@@ -8043,7 +8579,7 @@
           <p:cNvPr id="14" name="">
             <a:extLst xmlns:a="http://schemas.openxmlformats.org/drawingml/2006/main">
               <a:ext uri="{FF2B5EF4-FFF2-40B4-BE49-F238E27FC236}">
-                <a16:creationId xmlns:a16="http://schemas.microsoft.com/office/drawing/2014/main" id="{E1D1D053-EA50-45B1-B06F-976DDFDF5B29}"/>
+                <a16:creationId xmlns:a16="http://schemas.microsoft.com/office/drawing/2014/main" id="{1A85DCFC-B04D-43E2-8699-34BB557A1E36}"/>
               </a:ext>
             </a:extLst>
           </p:cNvPr>
@@ -8093,7 +8629,7 @@
           <p:cNvPr id="15" name="">
             <a:extLst xmlns:a="http://schemas.openxmlformats.org/drawingml/2006/main">
               <a:ext uri="{FF2B5EF4-FFF2-40B4-BE49-F238E27FC236}">
-                <a16:creationId xmlns:a16="http://schemas.microsoft.com/office/drawing/2014/main" id="{4DDA383B-857D-4324-8586-A196629D9709}"/>
+                <a16:creationId xmlns:a16="http://schemas.microsoft.com/office/drawing/2014/main" id="{557BE171-8AC9-4C8A-B54A-7FE5EFCE3ED2}"/>
               </a:ext>
             </a:extLst>
           </p:cNvPr>
@@ -8143,7 +8679,7 @@
           <p:cNvPr id="16" name="">
             <a:extLst xmlns:a="http://schemas.openxmlformats.org/drawingml/2006/main">
               <a:ext uri="{FF2B5EF4-FFF2-40B4-BE49-F238E27FC236}">
-                <a16:creationId xmlns:a16="http://schemas.microsoft.com/office/drawing/2014/main" id="{6F05A8CD-EF09-4892-BB26-5E9B2B758E2C}"/>
+                <a16:creationId xmlns:a16="http://schemas.microsoft.com/office/drawing/2014/main" id="{5C11B46F-7147-43B2-84F3-485FBBD34EFC}"/>
               </a:ext>
             </a:extLst>
           </p:cNvPr>
@@ -8176,7 +8712,7 @@
           <p:cNvPr id="17" name="">
             <a:extLst xmlns:a="http://schemas.openxmlformats.org/drawingml/2006/main">
               <a:ext uri="{FF2B5EF4-FFF2-40B4-BE49-F238E27FC236}">
-                <a16:creationId xmlns:a16="http://schemas.microsoft.com/office/drawing/2014/main" id="{545DE8A8-8A43-4457-B9DD-A87577E24A16}"/>
+                <a16:creationId xmlns:a16="http://schemas.microsoft.com/office/drawing/2014/main" id="{0A9B1CF4-C8F1-49DA-BA48-1B93700B2246}"/>
               </a:ext>
             </a:extLst>
           </p:cNvPr>
@@ -8226,7 +8762,7 @@
           <p:cNvPr id="18" name="">
             <a:extLst xmlns:a="http://schemas.openxmlformats.org/drawingml/2006/main">
               <a:ext uri="{FF2B5EF4-FFF2-40B4-BE49-F238E27FC236}">
-                <a16:creationId xmlns:a16="http://schemas.microsoft.com/office/drawing/2014/main" id="{911399A4-C179-4A0C-95C6-624906E91938}"/>
+                <a16:creationId xmlns:a16="http://schemas.microsoft.com/office/drawing/2014/main" id="{2B5AC19B-662A-45D7-BCE7-AB1179898C67}"/>
               </a:ext>
             </a:extLst>
           </p:cNvPr>
@@ -8276,7 +8812,7 @@
           <p:cNvPr id="19" name="">
             <a:extLst xmlns:a="http://schemas.openxmlformats.org/drawingml/2006/main">
               <a:ext uri="{FF2B5EF4-FFF2-40B4-BE49-F238E27FC236}">
-                <a16:creationId xmlns:a16="http://schemas.microsoft.com/office/drawing/2014/main" id="{C44CAAD5-FA5D-4FB5-85E6-866E4AC4829C}"/>
+                <a16:creationId xmlns:a16="http://schemas.microsoft.com/office/drawing/2014/main" id="{96BB9457-C140-4B4D-8E60-1E31A16236E3}"/>
               </a:ext>
             </a:extLst>
           </p:cNvPr>
@@ -8326,7 +8862,7 @@
           <p:cNvPr id="20" name="">
             <a:extLst xmlns:a="http://schemas.openxmlformats.org/drawingml/2006/main">
               <a:ext uri="{FF2B5EF4-FFF2-40B4-BE49-F238E27FC236}">
-                <a16:creationId xmlns:a16="http://schemas.microsoft.com/office/drawing/2014/main" id="{CB37597C-3144-4970-AD23-A197ABC81661}"/>
+                <a16:creationId xmlns:a16="http://schemas.microsoft.com/office/drawing/2014/main" id="{015A7983-469C-49C5-9F71-80FEEF63BAF6}"/>
               </a:ext>
             </a:extLst>
           </p:cNvPr>
@@ -8374,7 +8910,7 @@
     </p:spTree>
     <p:extLst>
       <p:ext uri="{BB962C8B-B14F-4D97-AF65-F5344CB8AC3E}">
-        <p14:creationId xmlns:p14="http://schemas.microsoft.com/office/powerpoint/2010/main" val="659627763"/>
+        <p14:creationId xmlns:p14="http://schemas.microsoft.com/office/powerpoint/2010/main" val="602702028"/>
       </p:ext>
     </p:extLst>
   </p:cSld>
@@ -8405,7 +8941,7 @@
           <p:cNvPr id="1" name="">
             <a:extLst xmlns:a="http://schemas.openxmlformats.org/drawingml/2006/main">
               <a:ext uri="{FF2B5EF4-FFF2-40B4-BE49-F238E27FC236}">
-                <a16:creationId xmlns:a16="http://schemas.microsoft.com/office/drawing/2014/main" id="{89BC11AF-A45B-4B81-9624-FBEFDD16A6D7}"/>
+                <a16:creationId xmlns:a16="http://schemas.microsoft.com/office/drawing/2014/main" id="{0D049490-8861-4F41-9281-726553F743CA}"/>
               </a:ext>
             </a:extLst>
           </p:cNvPr>
@@ -8455,7 +8991,7 @@
           <p:cNvPr id="2" name="">
             <a:extLst xmlns:a="http://schemas.openxmlformats.org/drawingml/2006/main">
               <a:ext uri="{FF2B5EF4-FFF2-40B4-BE49-F238E27FC236}">
-                <a16:creationId xmlns:a16="http://schemas.microsoft.com/office/drawing/2014/main" id="{2677F4D4-4786-42DD-A812-D1BF1C247B80}"/>
+                <a16:creationId xmlns:a16="http://schemas.microsoft.com/office/drawing/2014/main" id="{22F69975-C9A8-4AC1-A16B-1C681B9CCED2}"/>
               </a:ext>
             </a:extLst>
           </p:cNvPr>
@@ -8505,7 +9041,7 @@
           <p:cNvPr id="3" name="">
             <a:extLst xmlns:a="http://schemas.openxmlformats.org/drawingml/2006/main">
               <a:ext uri="{FF2B5EF4-FFF2-40B4-BE49-F238E27FC236}">
-                <a16:creationId xmlns:a16="http://schemas.microsoft.com/office/drawing/2014/main" id="{D65A4EEE-1A24-4100-BA5B-570CC07B81E4}"/>
+                <a16:creationId xmlns:a16="http://schemas.microsoft.com/office/drawing/2014/main" id="{E07EFAB0-699D-4E0A-B3D0-934DDE090FC2}"/>
               </a:ext>
             </a:extLst>
           </p:cNvPr>
@@ -8536,7 +9072,7 @@
           <p:cNvPr id="4" name="">
             <a:extLst xmlns:a="http://schemas.openxmlformats.org/drawingml/2006/main">
               <a:ext uri="{FF2B5EF4-FFF2-40B4-BE49-F238E27FC236}">
-                <a16:creationId xmlns:a16="http://schemas.microsoft.com/office/drawing/2014/main" id="{6AFBC26F-1BD2-4459-9EF9-70C9EC0D4D23}"/>
+                <a16:creationId xmlns:a16="http://schemas.microsoft.com/office/drawing/2014/main" id="{581D741F-B03E-4545-A526-45B5AB350C63}"/>
               </a:ext>
             </a:extLst>
           </p:cNvPr>
@@ -8586,7 +9122,7 @@
           <p:cNvPr id="5" name="">
             <a:extLst xmlns:a="http://schemas.openxmlformats.org/drawingml/2006/main">
               <a:ext uri="{FF2B5EF4-FFF2-40B4-BE49-F238E27FC236}">
-                <a16:creationId xmlns:a16="http://schemas.microsoft.com/office/drawing/2014/main" id="{37A49CA7-4E9C-4DD1-BF45-377325EFDC86}"/>
+                <a16:creationId xmlns:a16="http://schemas.microsoft.com/office/drawing/2014/main" id="{E04B20A1-64C0-4512-BA1B-63B76BB49F09}"/>
               </a:ext>
             </a:extLst>
           </p:cNvPr>
@@ -8636,7 +9172,7 @@
           <p:cNvPr id="6" name="">
             <a:extLst xmlns:a="http://schemas.openxmlformats.org/drawingml/2006/main">
               <a:ext uri="{FF2B5EF4-FFF2-40B4-BE49-F238E27FC236}">
-                <a16:creationId xmlns:a16="http://schemas.microsoft.com/office/drawing/2014/main" id="{46FFC13B-A746-4823-93EA-57550C53C1F8}"/>
+                <a16:creationId xmlns:a16="http://schemas.microsoft.com/office/drawing/2014/main" id="{15C2AA6B-E140-45A6-90E3-FC83D8715E2C}"/>
               </a:ext>
             </a:extLst>
           </p:cNvPr>
@@ -8686,7 +9222,7 @@
           <p:cNvPr id="7" name="">
             <a:extLst xmlns:a="http://schemas.openxmlformats.org/drawingml/2006/main">
               <a:ext uri="{FF2B5EF4-FFF2-40B4-BE49-F238E27FC236}">
-                <a16:creationId xmlns:a16="http://schemas.microsoft.com/office/drawing/2014/main" id="{6A73D06A-7D57-48A0-B1A0-7D989BE50734}"/>
+                <a16:creationId xmlns:a16="http://schemas.microsoft.com/office/drawing/2014/main" id="{B7AD6B99-E7F4-4A9F-AF3C-DD7F5704A319}"/>
               </a:ext>
             </a:extLst>
           </p:cNvPr>
@@ -8736,7 +9272,7 @@
           <p:cNvPr id="8" name="">
             <a:extLst xmlns:a="http://schemas.openxmlformats.org/drawingml/2006/main">
               <a:ext uri="{FF2B5EF4-FFF2-40B4-BE49-F238E27FC236}">
-                <a16:creationId xmlns:a16="http://schemas.microsoft.com/office/drawing/2014/main" id="{34348B25-AC3A-4ADF-871F-87BDA0623ABE}"/>
+                <a16:creationId xmlns:a16="http://schemas.microsoft.com/office/drawing/2014/main" id="{CD21420D-DDA9-4D84-A376-292775DAFB9A}"/>
               </a:ext>
             </a:extLst>
           </p:cNvPr>
@@ -8786,7 +9322,7 @@
           <p:cNvPr id="9" name="">
             <a:extLst xmlns:a="http://schemas.openxmlformats.org/drawingml/2006/main">
               <a:ext uri="{FF2B5EF4-FFF2-40B4-BE49-F238E27FC236}">
-                <a16:creationId xmlns:a16="http://schemas.microsoft.com/office/drawing/2014/main" id="{C356D056-F412-4258-AAB3-C73E2F445E25}"/>
+                <a16:creationId xmlns:a16="http://schemas.microsoft.com/office/drawing/2014/main" id="{1A69B65D-B46C-49A9-8EC0-E71EC9CCABC1}"/>
               </a:ext>
             </a:extLst>
           </p:cNvPr>
@@ -8836,7 +9372,7 @@
           <p:cNvPr id="10" name="">
             <a:extLst xmlns:a="http://schemas.openxmlformats.org/drawingml/2006/main">
               <a:ext uri="{FF2B5EF4-FFF2-40B4-BE49-F238E27FC236}">
-                <a16:creationId xmlns:a16="http://schemas.microsoft.com/office/drawing/2014/main" id="{95C65994-5C35-4120-886D-1D20DD257C31}"/>
+                <a16:creationId xmlns:a16="http://schemas.microsoft.com/office/drawing/2014/main" id="{6E3277D3-6135-45A7-8351-6A385B3455A0}"/>
               </a:ext>
             </a:extLst>
           </p:cNvPr>
@@ -8869,7 +9405,7 @@
           <p:cNvPr id="11" name="">
             <a:extLst xmlns:a="http://schemas.openxmlformats.org/drawingml/2006/main">
               <a:ext uri="{FF2B5EF4-FFF2-40B4-BE49-F238E27FC236}">
-                <a16:creationId xmlns:a16="http://schemas.microsoft.com/office/drawing/2014/main" id="{95E3AF6A-A9E0-4EC6-B155-A57E5FEDDD2C}"/>
+                <a16:creationId xmlns:a16="http://schemas.microsoft.com/office/drawing/2014/main" id="{DE1F8358-2545-4DD1-91DC-F1A749DB5790}"/>
               </a:ext>
             </a:extLst>
           </p:cNvPr>
@@ -8902,7 +9438,7 @@
           <p:cNvPr id="12" name="">
             <a:extLst xmlns:a="http://schemas.openxmlformats.org/drawingml/2006/main">
               <a:ext uri="{FF2B5EF4-FFF2-40B4-BE49-F238E27FC236}">
-                <a16:creationId xmlns:a16="http://schemas.microsoft.com/office/drawing/2014/main" id="{EF463E1F-0DB0-4508-A7DA-78D2DD1DD658}"/>
+                <a16:creationId xmlns:a16="http://schemas.microsoft.com/office/drawing/2014/main" id="{86A64F77-6F7A-4CDA-8E5F-210CAD661F64}"/>
               </a:ext>
             </a:extLst>
           </p:cNvPr>
@@ -8935,7 +9471,7 @@
           <p:cNvPr id="13" name="">
             <a:extLst xmlns:a="http://schemas.openxmlformats.org/drawingml/2006/main">
               <a:ext uri="{FF2B5EF4-FFF2-40B4-BE49-F238E27FC236}">
-                <a16:creationId xmlns:a16="http://schemas.microsoft.com/office/drawing/2014/main" id="{0BCABA5D-6024-4452-A3F6-879FB20F1B02}"/>
+                <a16:creationId xmlns:a16="http://schemas.microsoft.com/office/drawing/2014/main" id="{897C788A-73E6-4F2F-BACD-C46250EF5D54}"/>
               </a:ext>
             </a:extLst>
           </p:cNvPr>
@@ -8985,7 +9521,7 @@
           <p:cNvPr id="14" name="">
             <a:extLst xmlns:a="http://schemas.openxmlformats.org/drawingml/2006/main">
               <a:ext uri="{FF2B5EF4-FFF2-40B4-BE49-F238E27FC236}">
-                <a16:creationId xmlns:a16="http://schemas.microsoft.com/office/drawing/2014/main" id="{4EE53DBF-DA12-412F-A2FC-7F803F18F3B8}"/>
+                <a16:creationId xmlns:a16="http://schemas.microsoft.com/office/drawing/2014/main" id="{58CAFED2-3C24-450C-97F4-D0C434B9130F}"/>
               </a:ext>
             </a:extLst>
           </p:cNvPr>
@@ -9035,7 +9571,7 @@
           <p:cNvPr id="15" name="">
             <a:extLst xmlns:a="http://schemas.openxmlformats.org/drawingml/2006/main">
               <a:ext uri="{FF2B5EF4-FFF2-40B4-BE49-F238E27FC236}">
-                <a16:creationId xmlns:a16="http://schemas.microsoft.com/office/drawing/2014/main" id="{D72B10E9-5138-474B-A5D1-B04DA2E8B48E}"/>
+                <a16:creationId xmlns:a16="http://schemas.microsoft.com/office/drawing/2014/main" id="{DE04ED57-257E-4FA2-BFFC-7C1BCFFF02DC}"/>
               </a:ext>
             </a:extLst>
           </p:cNvPr>
@@ -9085,7 +9621,7 @@
           <p:cNvPr id="16" name="">
             <a:extLst xmlns:a="http://schemas.openxmlformats.org/drawingml/2006/main">
               <a:ext uri="{FF2B5EF4-FFF2-40B4-BE49-F238E27FC236}">
-                <a16:creationId xmlns:a16="http://schemas.microsoft.com/office/drawing/2014/main" id="{045E8782-0308-4C7F-9B55-4BF9AC9836E4}"/>
+                <a16:creationId xmlns:a16="http://schemas.microsoft.com/office/drawing/2014/main" id="{F1528A3C-68CD-4C3D-B32D-B822CC68F52D}"/>
               </a:ext>
             </a:extLst>
           </p:cNvPr>
@@ -9133,7 +9669,7 @@
     </p:spTree>
     <p:extLst>
       <p:ext uri="{BB962C8B-B14F-4D97-AF65-F5344CB8AC3E}">
-        <p14:creationId xmlns:p14="http://schemas.microsoft.com/office/powerpoint/2010/main" val="1769648124"/>
+        <p14:creationId xmlns:p14="http://schemas.microsoft.com/office/powerpoint/2010/main" val="1192435302"/>
       </p:ext>
     </p:extLst>
   </p:cSld>
@@ -9164,7 +9700,7 @@
           <p:cNvPr id="1" name="">
             <a:extLst xmlns:a="http://schemas.openxmlformats.org/drawingml/2006/main">
               <a:ext uri="{FF2B5EF4-FFF2-40B4-BE49-F238E27FC236}">
-                <a16:creationId xmlns:a16="http://schemas.microsoft.com/office/drawing/2014/main" id="{F42E1616-55A9-4602-BA2A-79E704325656}"/>
+                <a16:creationId xmlns:a16="http://schemas.microsoft.com/office/drawing/2014/main" id="{39EA3D16-2AD6-4064-94F7-D23290D0EE3B}"/>
               </a:ext>
             </a:extLst>
           </p:cNvPr>
@@ -9214,7 +9750,7 @@
           <p:cNvPr id="2" name="">
             <a:extLst xmlns:a="http://schemas.openxmlformats.org/drawingml/2006/main">
               <a:ext uri="{FF2B5EF4-FFF2-40B4-BE49-F238E27FC236}">
-                <a16:creationId xmlns:a16="http://schemas.microsoft.com/office/drawing/2014/main" id="{0C389C9A-4CA1-429E-8540-DAC34CFC7651}"/>
+                <a16:creationId xmlns:a16="http://schemas.microsoft.com/office/drawing/2014/main" id="{BEB5E871-86B5-4A88-B110-5734C7B30100}"/>
               </a:ext>
             </a:extLst>
           </p:cNvPr>
@@ -9264,7 +9800,7 @@
           <p:cNvPr id="3" name="">
             <a:extLst xmlns:a="http://schemas.openxmlformats.org/drawingml/2006/main">
               <a:ext uri="{FF2B5EF4-FFF2-40B4-BE49-F238E27FC236}">
-                <a16:creationId xmlns:a16="http://schemas.microsoft.com/office/drawing/2014/main" id="{3D1B59C9-DA98-468F-A879-48DD0380C4CE}"/>
+                <a16:creationId xmlns:a16="http://schemas.microsoft.com/office/drawing/2014/main" id="{8399AFBB-C56C-42E9-A9CB-1BFEF2292D40}"/>
               </a:ext>
             </a:extLst>
           </p:cNvPr>
@@ -9299,7 +9835,7 @@
           <p:nvPr/>
         </p:nvPicPr>
         <p:blipFill>
-          <a:blip xmlns:r="http://schemas.openxmlformats.org/officeDocument/2006/relationships" xmlns:a="http://schemas.openxmlformats.org/drawingml/2006/main" r:embed="Re5d030a019ff41cf"/>
+          <a:blip xmlns:r="http://schemas.openxmlformats.org/officeDocument/2006/relationships" xmlns:a="http://schemas.openxmlformats.org/drawingml/2006/main" r:embed="Red2c0b97260e46e8"/>
           <a:stretch xmlns:a="http://schemas.openxmlformats.org/drawingml/2006/main"/>
         </p:blipFill>
         <p:spPr>
@@ -9317,7 +9853,7 @@
           <p:cNvPr id="5" name="">
             <a:extLst xmlns:a="http://schemas.openxmlformats.org/drawingml/2006/main">
               <a:ext uri="{FF2B5EF4-FFF2-40B4-BE49-F238E27FC236}">
-                <a16:creationId xmlns:a16="http://schemas.microsoft.com/office/drawing/2014/main" id="{68B1A1BD-F69B-4450-A617-2DFE7DFFC285}"/>
+                <a16:creationId xmlns:a16="http://schemas.microsoft.com/office/drawing/2014/main" id="{79BBE7FC-269B-4671-842B-D074058AC32D}"/>
               </a:ext>
             </a:extLst>
           </p:cNvPr>
@@ -9367,7 +9903,7 @@
           <p:cNvPr id="6" name="">
             <a:extLst xmlns:a="http://schemas.openxmlformats.org/drawingml/2006/main">
               <a:ext uri="{FF2B5EF4-FFF2-40B4-BE49-F238E27FC236}">
-                <a16:creationId xmlns:a16="http://schemas.microsoft.com/office/drawing/2014/main" id="{5E4F176F-9A50-4E47-AF35-EC0D4A5AA8C5}"/>
+                <a16:creationId xmlns:a16="http://schemas.microsoft.com/office/drawing/2014/main" id="{E9A5396C-0D25-48D3-B3B6-AEC12C308987}"/>
               </a:ext>
             </a:extLst>
           </p:cNvPr>
@@ -9415,7 +9951,7 @@
     </p:spTree>
     <p:extLst>
       <p:ext uri="{BB962C8B-B14F-4D97-AF65-F5344CB8AC3E}">
-        <p14:creationId xmlns:p14="http://schemas.microsoft.com/office/powerpoint/2010/main" val="861415631"/>
+        <p14:creationId xmlns:p14="http://schemas.microsoft.com/office/powerpoint/2010/main" val="1215483237"/>
       </p:ext>
     </p:extLst>
   </p:cSld>
@@ -9446,7 +9982,7 @@
           <p:cNvPr id="1" name="">
             <a:extLst xmlns:a="http://schemas.openxmlformats.org/drawingml/2006/main">
               <a:ext uri="{FF2B5EF4-FFF2-40B4-BE49-F238E27FC236}">
-                <a16:creationId xmlns:a16="http://schemas.microsoft.com/office/drawing/2014/main" id="{39712732-0F22-417D-B71F-1DDE3E420A32}"/>
+                <a16:creationId xmlns:a16="http://schemas.microsoft.com/office/drawing/2014/main" id="{6BEC1E41-BD3E-48DA-BAD6-9806D8442B62}"/>
               </a:ext>
             </a:extLst>
           </p:cNvPr>
@@ -9496,7 +10032,7 @@
           <p:cNvPr id="2" name="">
             <a:extLst xmlns:a="http://schemas.openxmlformats.org/drawingml/2006/main">
               <a:ext uri="{FF2B5EF4-FFF2-40B4-BE49-F238E27FC236}">
-                <a16:creationId xmlns:a16="http://schemas.microsoft.com/office/drawing/2014/main" id="{93A3FE99-2F09-4DA4-9FA7-23FB4350D382}"/>
+                <a16:creationId xmlns:a16="http://schemas.microsoft.com/office/drawing/2014/main" id="{293C5AFB-7DF1-4AF5-BBE6-F55DEC7CC324}"/>
               </a:ext>
             </a:extLst>
           </p:cNvPr>
@@ -9546,7 +10082,7 @@
           <p:cNvPr id="3" name="">
             <a:extLst xmlns:a="http://schemas.openxmlformats.org/drawingml/2006/main">
               <a:ext uri="{FF2B5EF4-FFF2-40B4-BE49-F238E27FC236}">
-                <a16:creationId xmlns:a16="http://schemas.microsoft.com/office/drawing/2014/main" id="{D656B06C-7967-4C46-9599-31AE600EFE6B}"/>
+                <a16:creationId xmlns:a16="http://schemas.microsoft.com/office/drawing/2014/main" id="{EAEE2772-0636-4422-A853-774329A4CA4C}"/>
               </a:ext>
             </a:extLst>
           </p:cNvPr>
@@ -9581,7 +10117,7 @@
           <p:nvPr/>
         </p:nvPicPr>
         <p:blipFill>
-          <a:blip xmlns:r="http://schemas.openxmlformats.org/officeDocument/2006/relationships" xmlns:a="http://schemas.openxmlformats.org/drawingml/2006/main" r:embed="R3db6e3123d264707"/>
+          <a:blip xmlns:r="http://schemas.openxmlformats.org/officeDocument/2006/relationships" xmlns:a="http://schemas.openxmlformats.org/drawingml/2006/main" r:embed="R74f4f4a6725b48fd"/>
           <a:stretch xmlns:a="http://schemas.openxmlformats.org/drawingml/2006/main"/>
         </p:blipFill>
         <p:spPr>
@@ -9603,7 +10139,7 @@
           <p:nvPr/>
         </p:nvPicPr>
         <p:blipFill>
-          <a:blip xmlns:r="http://schemas.openxmlformats.org/officeDocument/2006/relationships" xmlns:a="http://schemas.openxmlformats.org/drawingml/2006/main" r:embed="Re5f358983e60457b"/>
+          <a:blip xmlns:r="http://schemas.openxmlformats.org/officeDocument/2006/relationships" xmlns:a="http://schemas.openxmlformats.org/drawingml/2006/main" r:embed="R4979f97f487348b2"/>
           <a:stretch xmlns:a="http://schemas.openxmlformats.org/drawingml/2006/main"/>
         </p:blipFill>
         <p:spPr>
@@ -9621,7 +10157,7 @@
           <p:cNvPr id="6" name="">
             <a:extLst xmlns:a="http://schemas.openxmlformats.org/drawingml/2006/main">
               <a:ext uri="{FF2B5EF4-FFF2-40B4-BE49-F238E27FC236}">
-                <a16:creationId xmlns:a16="http://schemas.microsoft.com/office/drawing/2014/main" id="{A8D655EA-8FD5-4779-ACA4-E436F7D6A5B4}"/>
+                <a16:creationId xmlns:a16="http://schemas.microsoft.com/office/drawing/2014/main" id="{4D3A7121-8A9D-4405-826E-99EED9169DD8}"/>
               </a:ext>
             </a:extLst>
           </p:cNvPr>
@@ -9669,7 +10205,7 @@
     </p:spTree>
     <p:extLst>
       <p:ext uri="{BB962C8B-B14F-4D97-AF65-F5344CB8AC3E}">
-        <p14:creationId xmlns:p14="http://schemas.microsoft.com/office/powerpoint/2010/main" val="1618401512"/>
+        <p14:creationId xmlns:p14="http://schemas.microsoft.com/office/powerpoint/2010/main" val="1625061653"/>
       </p:ext>
     </p:extLst>
   </p:cSld>
@@ -9700,7 +10236,7 @@
           <p:cNvPr id="1" name="">
             <a:extLst xmlns:a="http://schemas.openxmlformats.org/drawingml/2006/main">
               <a:ext uri="{FF2B5EF4-FFF2-40B4-BE49-F238E27FC236}">
-                <a16:creationId xmlns:a16="http://schemas.microsoft.com/office/drawing/2014/main" id="{C226A1DB-9E5D-45DD-A052-4A4C7476D70A}"/>
+                <a16:creationId xmlns:a16="http://schemas.microsoft.com/office/drawing/2014/main" id="{CDB14283-20A8-4A5A-B8B9-AF38CAA4FE20}"/>
               </a:ext>
             </a:extLst>
           </p:cNvPr>
@@ -9750,7 +10286,7 @@
           <p:cNvPr id="2" name="">
             <a:extLst xmlns:a="http://schemas.openxmlformats.org/drawingml/2006/main">
               <a:ext uri="{FF2B5EF4-FFF2-40B4-BE49-F238E27FC236}">
-                <a16:creationId xmlns:a16="http://schemas.microsoft.com/office/drawing/2014/main" id="{E3FA5AB6-0757-4FFD-A729-B408AEF95073}"/>
+                <a16:creationId xmlns:a16="http://schemas.microsoft.com/office/drawing/2014/main" id="{11C968D0-B31C-4F51-B38D-D083104BD030}"/>
               </a:ext>
             </a:extLst>
           </p:cNvPr>
@@ -9800,7 +10336,7 @@
           <p:cNvPr id="3" name="">
             <a:extLst xmlns:a="http://schemas.openxmlformats.org/drawingml/2006/main">
               <a:ext uri="{FF2B5EF4-FFF2-40B4-BE49-F238E27FC236}">
-                <a16:creationId xmlns:a16="http://schemas.microsoft.com/office/drawing/2014/main" id="{CA614CEC-A54D-4B47-82CD-089B211D05B8}"/>
+                <a16:creationId xmlns:a16="http://schemas.microsoft.com/office/drawing/2014/main" id="{26495EF2-8CAC-4A40-B8E5-91A2ADD0339C}"/>
               </a:ext>
             </a:extLst>
           </p:cNvPr>
@@ -9835,7 +10371,7 @@
           <p:nvPr/>
         </p:nvPicPr>
         <p:blipFill>
-          <a:blip xmlns:r="http://schemas.openxmlformats.org/officeDocument/2006/relationships" xmlns:a="http://schemas.openxmlformats.org/drawingml/2006/main" r:embed="R6dcce4bc3f2d4210"/>
+          <a:blip xmlns:r="http://schemas.openxmlformats.org/officeDocument/2006/relationships" xmlns:a="http://schemas.openxmlformats.org/drawingml/2006/main" r:embed="Rdb6dda1638f9458e"/>
           <a:stretch xmlns:a="http://schemas.openxmlformats.org/drawingml/2006/main"/>
         </p:blipFill>
         <p:spPr>
@@ -9853,7 +10389,7 @@
           <p:cNvPr id="5" name="">
             <a:extLst xmlns:a="http://schemas.openxmlformats.org/drawingml/2006/main">
               <a:ext uri="{FF2B5EF4-FFF2-40B4-BE49-F238E27FC236}">
-                <a16:creationId xmlns:a16="http://schemas.microsoft.com/office/drawing/2014/main" id="{D560BF53-EA3B-47ED-A9F2-F97E7D310ACA}"/>
+                <a16:creationId xmlns:a16="http://schemas.microsoft.com/office/drawing/2014/main" id="{0BFBB584-6585-4EC1-B94F-1D3F937C5F84}"/>
               </a:ext>
             </a:extLst>
           </p:cNvPr>
@@ -9903,7 +10439,7 @@
           <p:cNvPr id="6" name="">
             <a:extLst xmlns:a="http://schemas.openxmlformats.org/drawingml/2006/main">
               <a:ext uri="{FF2B5EF4-FFF2-40B4-BE49-F238E27FC236}">
-                <a16:creationId xmlns:a16="http://schemas.microsoft.com/office/drawing/2014/main" id="{C87B4152-D48E-4F68-B64B-CC442FF4EFE8}"/>
+                <a16:creationId xmlns:a16="http://schemas.microsoft.com/office/drawing/2014/main" id="{AD70BBBF-6960-45FC-B2A0-5B60BEC3C721}"/>
               </a:ext>
             </a:extLst>
           </p:cNvPr>
@@ -9951,7 +10487,7 @@
     </p:spTree>
     <p:extLst>
       <p:ext uri="{BB962C8B-B14F-4D97-AF65-F5344CB8AC3E}">
-        <p14:creationId xmlns:p14="http://schemas.microsoft.com/office/powerpoint/2010/main" val="1361978371"/>
+        <p14:creationId xmlns:p14="http://schemas.microsoft.com/office/powerpoint/2010/main" val="1125210070"/>
       </p:ext>
     </p:extLst>
   </p:cSld>
@@ -9982,7 +10518,7 @@
           <p:cNvPr id="1" name="">
             <a:extLst xmlns:a="http://schemas.openxmlformats.org/drawingml/2006/main">
               <a:ext uri="{FF2B5EF4-FFF2-40B4-BE49-F238E27FC236}">
-                <a16:creationId xmlns:a16="http://schemas.microsoft.com/office/drawing/2014/main" id="{42B1D8D2-D440-433A-B7C8-F831AA272D1A}"/>
+                <a16:creationId xmlns:a16="http://schemas.microsoft.com/office/drawing/2014/main" id="{C3FEE63E-0C86-45E1-A061-0AE24EAD89D5}"/>
               </a:ext>
             </a:extLst>
           </p:cNvPr>
@@ -10032,7 +10568,7 @@
           <p:cNvPr id="2" name="">
             <a:extLst xmlns:a="http://schemas.openxmlformats.org/drawingml/2006/main">
               <a:ext uri="{FF2B5EF4-FFF2-40B4-BE49-F238E27FC236}">
-                <a16:creationId xmlns:a16="http://schemas.microsoft.com/office/drawing/2014/main" id="{017BF554-23A2-4C7C-930D-A4D287E6B1A5}"/>
+                <a16:creationId xmlns:a16="http://schemas.microsoft.com/office/drawing/2014/main" id="{1B3288CD-8B87-441E-846A-41A7E732529C}"/>
               </a:ext>
             </a:extLst>
           </p:cNvPr>
@@ -10082,7 +10618,7 @@
           <p:cNvPr id="3" name="">
             <a:extLst xmlns:a="http://schemas.openxmlformats.org/drawingml/2006/main">
               <a:ext uri="{FF2B5EF4-FFF2-40B4-BE49-F238E27FC236}">
-                <a16:creationId xmlns:a16="http://schemas.microsoft.com/office/drawing/2014/main" id="{0B3A1587-7228-40FC-B483-3C337EAF919A}"/>
+                <a16:creationId xmlns:a16="http://schemas.microsoft.com/office/drawing/2014/main" id="{63D9984A-DD3E-4D28-B171-25E2BBDD6C05}"/>
               </a:ext>
             </a:extLst>
           </p:cNvPr>
@@ -10113,7 +10649,7 @@
           <p:cNvPr id="4" name="">
             <a:extLst xmlns:a="http://schemas.openxmlformats.org/drawingml/2006/main">
               <a:ext uri="{FF2B5EF4-FFF2-40B4-BE49-F238E27FC236}">
-                <a16:creationId xmlns:a16="http://schemas.microsoft.com/office/drawing/2014/main" id="{DD2171A0-065E-4C61-99A3-A6C728BF7FB1}"/>
+                <a16:creationId xmlns:a16="http://schemas.microsoft.com/office/drawing/2014/main" id="{E12C4FE8-1D26-491C-9D62-A560DA264D94}"/>
               </a:ext>
             </a:extLst>
           </p:cNvPr>
@@ -10163,7 +10699,7 @@
           <p:cNvPr id="5" name="">
             <a:extLst xmlns:a="http://schemas.openxmlformats.org/drawingml/2006/main">
               <a:ext uri="{FF2B5EF4-FFF2-40B4-BE49-F238E27FC236}">
-                <a16:creationId xmlns:a16="http://schemas.microsoft.com/office/drawing/2014/main" id="{68B85CFA-959E-4C42-AC99-17FAD5C09044}"/>
+                <a16:creationId xmlns:a16="http://schemas.microsoft.com/office/drawing/2014/main" id="{A2DAD506-04BA-47A1-B368-294159C30319}"/>
               </a:ext>
             </a:extLst>
           </p:cNvPr>
@@ -10213,7 +10749,7 @@
           <p:cNvPr id="6" name="">
             <a:extLst xmlns:a="http://schemas.openxmlformats.org/drawingml/2006/main">
               <a:ext uri="{FF2B5EF4-FFF2-40B4-BE49-F238E27FC236}">
-                <a16:creationId xmlns:a16="http://schemas.microsoft.com/office/drawing/2014/main" id="{EA22FDCA-8D7B-490E-9A81-03553073D2D4}"/>
+                <a16:creationId xmlns:a16="http://schemas.microsoft.com/office/drawing/2014/main" id="{3D1425B2-E5EC-4BED-9771-C826108FB28E}"/>
               </a:ext>
             </a:extLst>
           </p:cNvPr>
@@ -10263,7 +10799,7 @@
           <p:cNvPr id="7" name="">
             <a:extLst xmlns:a="http://schemas.openxmlformats.org/drawingml/2006/main">
               <a:ext uri="{FF2B5EF4-FFF2-40B4-BE49-F238E27FC236}">
-                <a16:creationId xmlns:a16="http://schemas.microsoft.com/office/drawing/2014/main" id="{F8BA4D0D-8EE0-41F4-84CB-29BA2EE24C72}"/>
+                <a16:creationId xmlns:a16="http://schemas.microsoft.com/office/drawing/2014/main" id="{C0F3F487-22B1-4B74-81B3-131F479BA47E}"/>
               </a:ext>
             </a:extLst>
           </p:cNvPr>
@@ -10313,7 +10849,7 @@
           <p:cNvPr id="8" name="">
             <a:extLst xmlns:a="http://schemas.openxmlformats.org/drawingml/2006/main">
               <a:ext uri="{FF2B5EF4-FFF2-40B4-BE49-F238E27FC236}">
-                <a16:creationId xmlns:a16="http://schemas.microsoft.com/office/drawing/2014/main" id="{14026BD5-1301-4FF4-A424-23CA8C645A47}"/>
+                <a16:creationId xmlns:a16="http://schemas.microsoft.com/office/drawing/2014/main" id="{6BF52F7D-1CB4-4CBC-9F4B-75A863EC92B7}"/>
               </a:ext>
             </a:extLst>
           </p:cNvPr>
@@ -10363,7 +10899,7 @@
           <p:cNvPr id="9" name="">
             <a:extLst xmlns:a="http://schemas.openxmlformats.org/drawingml/2006/main">
               <a:ext uri="{FF2B5EF4-FFF2-40B4-BE49-F238E27FC236}">
-                <a16:creationId xmlns:a16="http://schemas.microsoft.com/office/drawing/2014/main" id="{CD39C826-70A3-4BB4-AD56-35F9E32BD251}"/>
+                <a16:creationId xmlns:a16="http://schemas.microsoft.com/office/drawing/2014/main" id="{D912C38F-7931-4C6B-AF29-65B956041582}"/>
               </a:ext>
             </a:extLst>
           </p:cNvPr>
@@ -10413,7 +10949,7 @@
           <p:cNvPr id="10" name="">
             <a:extLst xmlns:a="http://schemas.openxmlformats.org/drawingml/2006/main">
               <a:ext uri="{FF2B5EF4-FFF2-40B4-BE49-F238E27FC236}">
-                <a16:creationId xmlns:a16="http://schemas.microsoft.com/office/drawing/2014/main" id="{2C15CA20-47E7-4225-83FD-D5E5CED07008}"/>
+                <a16:creationId xmlns:a16="http://schemas.microsoft.com/office/drawing/2014/main" id="{8148B945-06F9-48B6-B29E-90B87B58DD74}"/>
               </a:ext>
             </a:extLst>
           </p:cNvPr>
@@ -10463,7 +10999,7 @@
           <p:cNvPr id="11" name="">
             <a:extLst xmlns:a="http://schemas.openxmlformats.org/drawingml/2006/main">
               <a:ext uri="{FF2B5EF4-FFF2-40B4-BE49-F238E27FC236}">
-                <a16:creationId xmlns:a16="http://schemas.microsoft.com/office/drawing/2014/main" id="{7D48D42A-1B88-46D6-BFAA-3A622195A77B}"/>
+                <a16:creationId xmlns:a16="http://schemas.microsoft.com/office/drawing/2014/main" id="{2780FF0D-115C-4A45-9615-6585DD75649B}"/>
               </a:ext>
             </a:extLst>
           </p:cNvPr>
@@ -10513,7 +11049,7 @@
           <p:cNvPr id="12" name="">
             <a:extLst xmlns:a="http://schemas.openxmlformats.org/drawingml/2006/main">
               <a:ext uri="{FF2B5EF4-FFF2-40B4-BE49-F238E27FC236}">
-                <a16:creationId xmlns:a16="http://schemas.microsoft.com/office/drawing/2014/main" id="{7E42543C-5FD8-4455-AB54-D8AA7BF55A19}"/>
+                <a16:creationId xmlns:a16="http://schemas.microsoft.com/office/drawing/2014/main" id="{7ECF0B8E-28C1-47FC-BD88-E5B7C4A43CE4}"/>
               </a:ext>
             </a:extLst>
           </p:cNvPr>
@@ -10561,7 +11097,7 @@
     </p:spTree>
     <p:extLst>
       <p:ext uri="{BB962C8B-B14F-4D97-AF65-F5344CB8AC3E}">
-        <p14:creationId xmlns:p14="http://schemas.microsoft.com/office/powerpoint/2010/main" val="2077289620"/>
+        <p14:creationId xmlns:p14="http://schemas.microsoft.com/office/powerpoint/2010/main" val="1968377516"/>
       </p:ext>
     </p:extLst>
   </p:cSld>
@@ -10592,7 +11128,7 @@
           <p:cNvPr id="1" name="">
             <a:extLst xmlns:a="http://schemas.openxmlformats.org/drawingml/2006/main">
               <a:ext uri="{FF2B5EF4-FFF2-40B4-BE49-F238E27FC236}">
-                <a16:creationId xmlns:a16="http://schemas.microsoft.com/office/drawing/2014/main" id="{618403A9-5205-42AD-9E0A-CD6689E6E99F}"/>
+                <a16:creationId xmlns:a16="http://schemas.microsoft.com/office/drawing/2014/main" id="{F16DDCAA-B0AA-4EA6-8E39-D88037E535A0}"/>
               </a:ext>
             </a:extLst>
           </p:cNvPr>
@@ -10642,7 +11178,7 @@
           <p:cNvPr id="2" name="">
             <a:extLst xmlns:a="http://schemas.openxmlformats.org/drawingml/2006/main">
               <a:ext uri="{FF2B5EF4-FFF2-40B4-BE49-F238E27FC236}">
-                <a16:creationId xmlns:a16="http://schemas.microsoft.com/office/drawing/2014/main" id="{B54185A5-A562-4698-8FDA-6FCCD2B7F32F}"/>
+                <a16:creationId xmlns:a16="http://schemas.microsoft.com/office/drawing/2014/main" id="{414933C0-8A13-498C-9797-B703253D65A9}"/>
               </a:ext>
             </a:extLst>
           </p:cNvPr>
@@ -10692,7 +11228,7 @@
           <p:cNvPr id="3" name="">
             <a:extLst xmlns:a="http://schemas.openxmlformats.org/drawingml/2006/main">
               <a:ext uri="{FF2B5EF4-FFF2-40B4-BE49-F238E27FC236}">
-                <a16:creationId xmlns:a16="http://schemas.microsoft.com/office/drawing/2014/main" id="{07CE1FB5-6776-4C24-B086-D511E3C6D385}"/>
+                <a16:creationId xmlns:a16="http://schemas.microsoft.com/office/drawing/2014/main" id="{2F972CD3-425C-4197-9DE7-DA322EB90CA5}"/>
               </a:ext>
             </a:extLst>
           </p:cNvPr>
@@ -10723,7 +11259,7 @@
           <p:cNvPr id="4" name="">
             <a:extLst xmlns:a="http://schemas.openxmlformats.org/drawingml/2006/main">
               <a:ext uri="{FF2B5EF4-FFF2-40B4-BE49-F238E27FC236}">
-                <a16:creationId xmlns:a16="http://schemas.microsoft.com/office/drawing/2014/main" id="{E261BC01-2DEA-4C71-A260-34560F08D0C3}"/>
+                <a16:creationId xmlns:a16="http://schemas.microsoft.com/office/drawing/2014/main" id="{928C4468-EDE2-40A7-ABB7-42652E7883DB}"/>
               </a:ext>
             </a:extLst>
           </p:cNvPr>
@@ -10773,7 +11309,7 @@
           <p:cNvPr id="5" name="">
             <a:extLst xmlns:a="http://schemas.openxmlformats.org/drawingml/2006/main">
               <a:ext uri="{FF2B5EF4-FFF2-40B4-BE49-F238E27FC236}">
-                <a16:creationId xmlns:a16="http://schemas.microsoft.com/office/drawing/2014/main" id="{B8E653C9-E23C-4DC1-B962-9148AD917DB3}"/>
+                <a16:creationId xmlns:a16="http://schemas.microsoft.com/office/drawing/2014/main" id="{2593E4C9-26CE-4959-A2D5-CF1116F554FC}"/>
               </a:ext>
             </a:extLst>
           </p:cNvPr>
@@ -10804,7 +11340,7 @@
           <p:cNvPr id="6" name="">
             <a:extLst xmlns:a="http://schemas.openxmlformats.org/drawingml/2006/main">
               <a:ext uri="{FF2B5EF4-FFF2-40B4-BE49-F238E27FC236}">
-                <a16:creationId xmlns:a16="http://schemas.microsoft.com/office/drawing/2014/main" id="{AE7D4868-9198-45BB-A5CC-E545379B5BBB}"/>
+                <a16:creationId xmlns:a16="http://schemas.microsoft.com/office/drawing/2014/main" id="{58A8F2E8-0A91-49E6-A66F-3CB4FC29221D}"/>
               </a:ext>
             </a:extLst>
           </p:cNvPr>
@@ -10854,7 +11390,7 @@
           <p:cNvPr id="7" name="">
             <a:extLst xmlns:a="http://schemas.openxmlformats.org/drawingml/2006/main">
               <a:ext uri="{FF2B5EF4-FFF2-40B4-BE49-F238E27FC236}">
-                <a16:creationId xmlns:a16="http://schemas.microsoft.com/office/drawing/2014/main" id="{54B93021-9401-4852-91D3-B0349D8F63B3}"/>
+                <a16:creationId xmlns:a16="http://schemas.microsoft.com/office/drawing/2014/main" id="{DA800798-AAB4-444B-8F85-DEBC01AE08BE}"/>
               </a:ext>
             </a:extLst>
           </p:cNvPr>
@@ -10902,7 +11438,7 @@
     </p:spTree>
     <p:extLst>
       <p:ext uri="{BB962C8B-B14F-4D97-AF65-F5344CB8AC3E}">
-        <p14:creationId xmlns:p14="http://schemas.microsoft.com/office/powerpoint/2010/main" val="868067634"/>
+        <p14:creationId xmlns:p14="http://schemas.microsoft.com/office/powerpoint/2010/main" val="7418988"/>
       </p:ext>
     </p:extLst>
   </p:cSld>
@@ -10933,7 +11469,7 @@
           <p:cNvPr id="1" name="">
             <a:extLst xmlns:a="http://schemas.openxmlformats.org/drawingml/2006/main">
               <a:ext uri="{FF2B5EF4-FFF2-40B4-BE49-F238E27FC236}">
-                <a16:creationId xmlns:a16="http://schemas.microsoft.com/office/drawing/2014/main" id="{5B3FC0A9-CAC9-4536-8C2E-B16EEFB60788}"/>
+                <a16:creationId xmlns:a16="http://schemas.microsoft.com/office/drawing/2014/main" id="{73A3BF8D-CD1A-4A31-8AF8-933F529EEE02}"/>
               </a:ext>
             </a:extLst>
           </p:cNvPr>
@@ -10983,7 +11519,7 @@
           <p:cNvPr id="2" name="">
             <a:extLst xmlns:a="http://schemas.openxmlformats.org/drawingml/2006/main">
               <a:ext uri="{FF2B5EF4-FFF2-40B4-BE49-F238E27FC236}">
-                <a16:creationId xmlns:a16="http://schemas.microsoft.com/office/drawing/2014/main" id="{75E03B17-9A63-4A85-9955-C8797ADDD261}"/>
+                <a16:creationId xmlns:a16="http://schemas.microsoft.com/office/drawing/2014/main" id="{AE9393DE-7C02-4DF8-B50C-49B916B4079F}"/>
               </a:ext>
             </a:extLst>
           </p:cNvPr>
@@ -11033,7 +11569,7 @@
           <p:cNvPr id="3" name="">
             <a:extLst xmlns:a="http://schemas.openxmlformats.org/drawingml/2006/main">
               <a:ext uri="{FF2B5EF4-FFF2-40B4-BE49-F238E27FC236}">
-                <a16:creationId xmlns:a16="http://schemas.microsoft.com/office/drawing/2014/main" id="{71725794-55FA-4764-A1B2-AC04F012DAEA}"/>
+                <a16:creationId xmlns:a16="http://schemas.microsoft.com/office/drawing/2014/main" id="{6EBE5A27-91C2-4D7B-935B-E28B6183ED7E}"/>
               </a:ext>
             </a:extLst>
           </p:cNvPr>
@@ -11064,7 +11600,7 @@
           <p:cNvPr id="4" name="">
             <a:extLst xmlns:a="http://schemas.openxmlformats.org/drawingml/2006/main">
               <a:ext uri="{FF2B5EF4-FFF2-40B4-BE49-F238E27FC236}">
-                <a16:creationId xmlns:a16="http://schemas.microsoft.com/office/drawing/2014/main" id="{9927B74E-7CC5-45A8-B7FE-9B60C6859F81}"/>
+                <a16:creationId xmlns:a16="http://schemas.microsoft.com/office/drawing/2014/main" id="{6102E30F-5901-4BEC-8535-11687790754F}"/>
               </a:ext>
             </a:extLst>
           </p:cNvPr>
@@ -11097,7 +11633,7 @@
           <p:cNvPr id="5" name="">
             <a:extLst xmlns:a="http://schemas.openxmlformats.org/drawingml/2006/main">
               <a:ext uri="{FF2B5EF4-FFF2-40B4-BE49-F238E27FC236}">
-                <a16:creationId xmlns:a16="http://schemas.microsoft.com/office/drawing/2014/main" id="{2B7D866C-35B0-4204-9B29-B046F3BF6384}"/>
+                <a16:creationId xmlns:a16="http://schemas.microsoft.com/office/drawing/2014/main" id="{DCA7B3AB-8633-470B-96BE-2E0F3994C024}"/>
               </a:ext>
             </a:extLst>
           </p:cNvPr>
@@ -11147,7 +11683,7 @@
           <p:cNvPr id="6" name="">
             <a:extLst xmlns:a="http://schemas.openxmlformats.org/drawingml/2006/main">
               <a:ext uri="{FF2B5EF4-FFF2-40B4-BE49-F238E27FC236}">
-                <a16:creationId xmlns:a16="http://schemas.microsoft.com/office/drawing/2014/main" id="{5C0EB27F-2A14-4F47-B043-E2CCE82BA891}"/>
+                <a16:creationId xmlns:a16="http://schemas.microsoft.com/office/drawing/2014/main" id="{8206F347-BD62-4523-BDF6-7298B4BB47C6}"/>
               </a:ext>
             </a:extLst>
           </p:cNvPr>
@@ -11197,7 +11733,7 @@
           <p:cNvPr id="7" name="">
             <a:extLst xmlns:a="http://schemas.openxmlformats.org/drawingml/2006/main">
               <a:ext uri="{FF2B5EF4-FFF2-40B4-BE49-F238E27FC236}">
-                <a16:creationId xmlns:a16="http://schemas.microsoft.com/office/drawing/2014/main" id="{12A4178D-D982-4F42-81D1-11B62F1ED551}"/>
+                <a16:creationId xmlns:a16="http://schemas.microsoft.com/office/drawing/2014/main" id="{E3855A05-4B90-40AC-B009-6306CA112EA3}"/>
               </a:ext>
             </a:extLst>
           </p:cNvPr>
@@ -11247,7 +11783,7 @@
           <p:cNvPr id="8" name="">
             <a:extLst xmlns:a="http://schemas.openxmlformats.org/drawingml/2006/main">
               <a:ext uri="{FF2B5EF4-FFF2-40B4-BE49-F238E27FC236}">
-                <a16:creationId xmlns:a16="http://schemas.microsoft.com/office/drawing/2014/main" id="{DA7A135F-A8C8-4406-B31A-19ADE2747C39}"/>
+                <a16:creationId xmlns:a16="http://schemas.microsoft.com/office/drawing/2014/main" id="{41653FDB-7595-403E-A56A-7F1B1FCCEACA}"/>
               </a:ext>
             </a:extLst>
           </p:cNvPr>
@@ -11280,7 +11816,7 @@
           <p:cNvPr id="9" name="">
             <a:extLst xmlns:a="http://schemas.openxmlformats.org/drawingml/2006/main">
               <a:ext uri="{FF2B5EF4-FFF2-40B4-BE49-F238E27FC236}">
-                <a16:creationId xmlns:a16="http://schemas.microsoft.com/office/drawing/2014/main" id="{5165BBD3-BA5D-44D1-B16E-1FA5B11441CB}"/>
+                <a16:creationId xmlns:a16="http://schemas.microsoft.com/office/drawing/2014/main" id="{35031389-DCF8-46F9-8964-0E592CE8CF72}"/>
               </a:ext>
             </a:extLst>
           </p:cNvPr>
@@ -11330,7 +11866,7 @@
           <p:cNvPr id="10" name="">
             <a:extLst xmlns:a="http://schemas.openxmlformats.org/drawingml/2006/main">
               <a:ext uri="{FF2B5EF4-FFF2-40B4-BE49-F238E27FC236}">
-                <a16:creationId xmlns:a16="http://schemas.microsoft.com/office/drawing/2014/main" id="{6017CA6F-963C-4B4E-8B05-E7DA6DE84446}"/>
+                <a16:creationId xmlns:a16="http://schemas.microsoft.com/office/drawing/2014/main" id="{209BDAEC-73A7-4685-BDF4-0A60437C7415}"/>
               </a:ext>
             </a:extLst>
           </p:cNvPr>
@@ -11380,7 +11916,7 @@
           <p:cNvPr id="11" name="">
             <a:extLst xmlns:a="http://schemas.openxmlformats.org/drawingml/2006/main">
               <a:ext uri="{FF2B5EF4-FFF2-40B4-BE49-F238E27FC236}">
-                <a16:creationId xmlns:a16="http://schemas.microsoft.com/office/drawing/2014/main" id="{A207FF1A-FA4A-467B-B8D0-72CE199CCD80}"/>
+                <a16:creationId xmlns:a16="http://schemas.microsoft.com/office/drawing/2014/main" id="{36B77C03-FC74-408F-90B5-A36CB06F9739}"/>
               </a:ext>
             </a:extLst>
           </p:cNvPr>
@@ -11430,7 +11966,7 @@
           <p:cNvPr id="12" name="">
             <a:extLst xmlns:a="http://schemas.openxmlformats.org/drawingml/2006/main">
               <a:ext uri="{FF2B5EF4-FFF2-40B4-BE49-F238E27FC236}">
-                <a16:creationId xmlns:a16="http://schemas.microsoft.com/office/drawing/2014/main" id="{0CC092A6-82DB-40BA-8EC9-F9DAD350CB98}"/>
+                <a16:creationId xmlns:a16="http://schemas.microsoft.com/office/drawing/2014/main" id="{E577B038-BE38-4F6F-880E-068B25708BB9}"/>
               </a:ext>
             </a:extLst>
           </p:cNvPr>
@@ -11463,7 +11999,7 @@
           <p:cNvPr id="13" name="">
             <a:extLst xmlns:a="http://schemas.openxmlformats.org/drawingml/2006/main">
               <a:ext uri="{FF2B5EF4-FFF2-40B4-BE49-F238E27FC236}">
-                <a16:creationId xmlns:a16="http://schemas.microsoft.com/office/drawing/2014/main" id="{BDC48653-4231-427A-B1D8-2A63CFBA7DE1}"/>
+                <a16:creationId xmlns:a16="http://schemas.microsoft.com/office/drawing/2014/main" id="{606594F0-64BA-480E-812F-E45C5D7290ED}"/>
               </a:ext>
             </a:extLst>
           </p:cNvPr>
@@ -11513,7 +12049,7 @@
           <p:cNvPr id="14" name="">
             <a:extLst xmlns:a="http://schemas.openxmlformats.org/drawingml/2006/main">
               <a:ext uri="{FF2B5EF4-FFF2-40B4-BE49-F238E27FC236}">
-                <a16:creationId xmlns:a16="http://schemas.microsoft.com/office/drawing/2014/main" id="{9F317584-0976-4963-9A31-E57122E0C002}"/>
+                <a16:creationId xmlns:a16="http://schemas.microsoft.com/office/drawing/2014/main" id="{9F4FC7B4-C1C3-4D90-A525-D6EA3647AE8A}"/>
               </a:ext>
             </a:extLst>
           </p:cNvPr>
@@ -11563,7 +12099,7 @@
           <p:cNvPr id="15" name="">
             <a:extLst xmlns:a="http://schemas.openxmlformats.org/drawingml/2006/main">
               <a:ext uri="{FF2B5EF4-FFF2-40B4-BE49-F238E27FC236}">
-                <a16:creationId xmlns:a16="http://schemas.microsoft.com/office/drawing/2014/main" id="{C4E5292A-9A42-4482-A84E-E6C27B6CFA30}"/>
+                <a16:creationId xmlns:a16="http://schemas.microsoft.com/office/drawing/2014/main" id="{988A4AE1-3F7C-49E0-9F13-0B6019EFE2BD}"/>
               </a:ext>
             </a:extLst>
           </p:cNvPr>
@@ -11613,7 +12149,7 @@
           <p:cNvPr id="16" name="">
             <a:extLst xmlns:a="http://schemas.openxmlformats.org/drawingml/2006/main">
               <a:ext uri="{FF2B5EF4-FFF2-40B4-BE49-F238E27FC236}">
-                <a16:creationId xmlns:a16="http://schemas.microsoft.com/office/drawing/2014/main" id="{80FABF14-0CC0-4D39-8F67-C31002B1E47F}"/>
+                <a16:creationId xmlns:a16="http://schemas.microsoft.com/office/drawing/2014/main" id="{9366B413-4F19-49D8-825D-A723742C6967}"/>
               </a:ext>
             </a:extLst>
           </p:cNvPr>
@@ -11646,7 +12182,7 @@
           <p:cNvPr id="17" name="">
             <a:extLst xmlns:a="http://schemas.openxmlformats.org/drawingml/2006/main">
               <a:ext uri="{FF2B5EF4-FFF2-40B4-BE49-F238E27FC236}">
-                <a16:creationId xmlns:a16="http://schemas.microsoft.com/office/drawing/2014/main" id="{47B72BF2-1BD6-4A35-8058-CD9E4773FA5D}"/>
+                <a16:creationId xmlns:a16="http://schemas.microsoft.com/office/drawing/2014/main" id="{D377EBD0-5A44-495D-8FD1-23EDFBDD929D}"/>
               </a:ext>
             </a:extLst>
           </p:cNvPr>
@@ -11696,7 +12232,7 @@
           <p:cNvPr id="18" name="">
             <a:extLst xmlns:a="http://schemas.openxmlformats.org/drawingml/2006/main">
               <a:ext uri="{FF2B5EF4-FFF2-40B4-BE49-F238E27FC236}">
-                <a16:creationId xmlns:a16="http://schemas.microsoft.com/office/drawing/2014/main" id="{6EA7361D-8A2A-442F-A88D-BE0159B522E1}"/>
+                <a16:creationId xmlns:a16="http://schemas.microsoft.com/office/drawing/2014/main" id="{BF2C6606-9945-49A1-AEE6-A5B41CB6B580}"/>
               </a:ext>
             </a:extLst>
           </p:cNvPr>
@@ -11746,7 +12282,7 @@
           <p:cNvPr id="19" name="">
             <a:extLst xmlns:a="http://schemas.openxmlformats.org/drawingml/2006/main">
               <a:ext uri="{FF2B5EF4-FFF2-40B4-BE49-F238E27FC236}">
-                <a16:creationId xmlns:a16="http://schemas.microsoft.com/office/drawing/2014/main" id="{8C0C65B4-7E29-4936-B184-E372216A65E1}"/>
+                <a16:creationId xmlns:a16="http://schemas.microsoft.com/office/drawing/2014/main" id="{18EDBB62-B53A-4E9F-89D0-07D675172704}"/>
               </a:ext>
             </a:extLst>
           </p:cNvPr>
@@ -11796,7 +12332,7 @@
           <p:cNvPr id="20" name="">
             <a:extLst xmlns:a="http://schemas.openxmlformats.org/drawingml/2006/main">
               <a:ext uri="{FF2B5EF4-FFF2-40B4-BE49-F238E27FC236}">
-                <a16:creationId xmlns:a16="http://schemas.microsoft.com/office/drawing/2014/main" id="{4ED68682-BCA1-45E9-B7C1-6126EDDB84B5}"/>
+                <a16:creationId xmlns:a16="http://schemas.microsoft.com/office/drawing/2014/main" id="{5C323FDD-2B39-424A-A711-4B3F37C9BE61}"/>
               </a:ext>
             </a:extLst>
           </p:cNvPr>
@@ -11844,7 +12380,7 @@
     </p:spTree>
     <p:extLst>
       <p:ext uri="{BB962C8B-B14F-4D97-AF65-F5344CB8AC3E}">
-        <p14:creationId xmlns:p14="http://schemas.microsoft.com/office/powerpoint/2010/main" val="761728969"/>
+        <p14:creationId xmlns:p14="http://schemas.microsoft.com/office/powerpoint/2010/main" val="1266431356"/>
       </p:ext>
     </p:extLst>
   </p:cSld>
@@ -11875,7 +12411,7 @@
           <p:cNvPr id="1" name="">
             <a:extLst xmlns:a="http://schemas.openxmlformats.org/drawingml/2006/main">
               <a:ext uri="{FF2B5EF4-FFF2-40B4-BE49-F238E27FC236}">
-                <a16:creationId xmlns:a16="http://schemas.microsoft.com/office/drawing/2014/main" id="{59F3FA0E-68A0-495B-AD0E-13238DA5CB05}"/>
+                <a16:creationId xmlns:a16="http://schemas.microsoft.com/office/drawing/2014/main" id="{042E6AF5-00A5-4BDD-8F33-44FFDA9785C9}"/>
               </a:ext>
             </a:extLst>
           </p:cNvPr>
@@ -11925,7 +12461,7 @@
           <p:cNvPr id="2" name="">
             <a:extLst xmlns:a="http://schemas.openxmlformats.org/drawingml/2006/main">
               <a:ext uri="{FF2B5EF4-FFF2-40B4-BE49-F238E27FC236}">
-                <a16:creationId xmlns:a16="http://schemas.microsoft.com/office/drawing/2014/main" id="{8FDCC519-DEC0-41D2-BFF1-A540E6CD6D3B}"/>
+                <a16:creationId xmlns:a16="http://schemas.microsoft.com/office/drawing/2014/main" id="{0BCA293E-534E-4340-A2A9-AB06EB2F8464}"/>
               </a:ext>
             </a:extLst>
           </p:cNvPr>
@@ -11975,7 +12511,7 @@
           <p:cNvPr id="3" name="">
             <a:extLst xmlns:a="http://schemas.openxmlformats.org/drawingml/2006/main">
               <a:ext uri="{FF2B5EF4-FFF2-40B4-BE49-F238E27FC236}">
-                <a16:creationId xmlns:a16="http://schemas.microsoft.com/office/drawing/2014/main" id="{18D01A58-B714-4630-AAE7-B4F7178EEF51}"/>
+                <a16:creationId xmlns:a16="http://schemas.microsoft.com/office/drawing/2014/main" id="{88B62A8E-3A97-4CBC-9781-0DC50F52AA8F}"/>
               </a:ext>
             </a:extLst>
           </p:cNvPr>
@@ -12010,7 +12546,7 @@
           <p:nvPr/>
         </p:nvPicPr>
         <p:blipFill>
-          <a:blip xmlns:r="http://schemas.openxmlformats.org/officeDocument/2006/relationships" xmlns:a="http://schemas.openxmlformats.org/drawingml/2006/main" r:embed="R064ce2657cb04104"/>
+          <a:blip xmlns:r="http://schemas.openxmlformats.org/officeDocument/2006/relationships" xmlns:a="http://schemas.openxmlformats.org/drawingml/2006/main" r:embed="Rc9121b1acef14f1e"/>
           <a:stretch xmlns:a="http://schemas.openxmlformats.org/drawingml/2006/main"/>
         </p:blipFill>
         <p:spPr>
@@ -12028,7 +12564,7 @@
           <p:cNvPr id="5" name="">
             <a:extLst xmlns:a="http://schemas.openxmlformats.org/drawingml/2006/main">
               <a:ext uri="{FF2B5EF4-FFF2-40B4-BE49-F238E27FC236}">
-                <a16:creationId xmlns:a16="http://schemas.microsoft.com/office/drawing/2014/main" id="{4F96ABB3-3A90-4B10-9708-FA98EFB26C37}"/>
+                <a16:creationId xmlns:a16="http://schemas.microsoft.com/office/drawing/2014/main" id="{D927CA25-24BC-43C2-B8B3-24AAE7253141}"/>
               </a:ext>
             </a:extLst>
           </p:cNvPr>
@@ -12078,7 +12614,7 @@
           <p:cNvPr id="6" name="">
             <a:extLst xmlns:a="http://schemas.openxmlformats.org/drawingml/2006/main">
               <a:ext uri="{FF2B5EF4-FFF2-40B4-BE49-F238E27FC236}">
-                <a16:creationId xmlns:a16="http://schemas.microsoft.com/office/drawing/2014/main" id="{0B4E5558-B3F8-4D31-AF27-8A0D33F5F5B9}"/>
+                <a16:creationId xmlns:a16="http://schemas.microsoft.com/office/drawing/2014/main" id="{B805B31D-85AB-43A3-9D34-21DC7845FF1C}"/>
               </a:ext>
             </a:extLst>
           </p:cNvPr>
@@ -12126,7 +12662,7 @@
     </p:spTree>
     <p:extLst>
       <p:ext uri="{BB962C8B-B14F-4D97-AF65-F5344CB8AC3E}">
-        <p14:creationId xmlns:p14="http://schemas.microsoft.com/office/powerpoint/2010/main" val="876311893"/>
+        <p14:creationId xmlns:p14="http://schemas.microsoft.com/office/powerpoint/2010/main" val="1327570951"/>
       </p:ext>
     </p:extLst>
   </p:cSld>
@@ -12157,7 +12693,7 @@
           <p:cNvPr id="1" name="">
             <a:extLst xmlns:a="http://schemas.openxmlformats.org/drawingml/2006/main">
               <a:ext uri="{FF2B5EF4-FFF2-40B4-BE49-F238E27FC236}">
-                <a16:creationId xmlns:a16="http://schemas.microsoft.com/office/drawing/2014/main" id="{C025F8D2-A27E-4170-86F5-755DA66119B6}"/>
+                <a16:creationId xmlns:a16="http://schemas.microsoft.com/office/drawing/2014/main" id="{AFB2C253-6E66-411E-83EA-D5BF7AAE0541}"/>
               </a:ext>
             </a:extLst>
           </p:cNvPr>
@@ -12207,7 +12743,7 @@
           <p:cNvPr id="2" name="">
             <a:extLst xmlns:a="http://schemas.openxmlformats.org/drawingml/2006/main">
               <a:ext uri="{FF2B5EF4-FFF2-40B4-BE49-F238E27FC236}">
-                <a16:creationId xmlns:a16="http://schemas.microsoft.com/office/drawing/2014/main" id="{64592A2A-3EE8-4A3A-9196-343044A7EDF1}"/>
+                <a16:creationId xmlns:a16="http://schemas.microsoft.com/office/drawing/2014/main" id="{96F42C0B-84EB-48EF-AA1D-87649FEBA06F}"/>
               </a:ext>
             </a:extLst>
           </p:cNvPr>
@@ -12257,7 +12793,7 @@
           <p:cNvPr id="3" name="">
             <a:extLst xmlns:a="http://schemas.openxmlformats.org/drawingml/2006/main">
               <a:ext uri="{FF2B5EF4-FFF2-40B4-BE49-F238E27FC236}">
-                <a16:creationId xmlns:a16="http://schemas.microsoft.com/office/drawing/2014/main" id="{AA4B746E-D629-4736-85D9-E789B2115F3C}"/>
+                <a16:creationId xmlns:a16="http://schemas.microsoft.com/office/drawing/2014/main" id="{C7332B66-3316-454C-B3A9-CF873076E88E}"/>
               </a:ext>
             </a:extLst>
           </p:cNvPr>
@@ -12292,7 +12828,7 @@
           <p:nvPr/>
         </p:nvPicPr>
         <p:blipFill>
-          <a:blip xmlns:r="http://schemas.openxmlformats.org/officeDocument/2006/relationships" xmlns:a="http://schemas.openxmlformats.org/drawingml/2006/main" r:embed="Rab7b3773562f4b2b"/>
+          <a:blip xmlns:r="http://schemas.openxmlformats.org/officeDocument/2006/relationships" xmlns:a="http://schemas.openxmlformats.org/drawingml/2006/main" r:embed="R0afd3c6b0ad34fbf"/>
           <a:stretch xmlns:a="http://schemas.openxmlformats.org/drawingml/2006/main"/>
         </p:blipFill>
         <p:spPr>
@@ -12310,7 +12846,7 @@
           <p:cNvPr id="5" name="">
             <a:extLst xmlns:a="http://schemas.openxmlformats.org/drawingml/2006/main">
               <a:ext uri="{FF2B5EF4-FFF2-40B4-BE49-F238E27FC236}">
-                <a16:creationId xmlns:a16="http://schemas.microsoft.com/office/drawing/2014/main" id="{579161D5-3989-490B-9AE2-A03C6F5A9B28}"/>
+                <a16:creationId xmlns:a16="http://schemas.microsoft.com/office/drawing/2014/main" id="{189139F0-3642-4D33-B898-1237B5A626A9}"/>
               </a:ext>
             </a:extLst>
           </p:cNvPr>
@@ -12360,7 +12896,7 @@
           <p:cNvPr id="6" name="">
             <a:extLst xmlns:a="http://schemas.openxmlformats.org/drawingml/2006/main">
               <a:ext uri="{FF2B5EF4-FFF2-40B4-BE49-F238E27FC236}">
-                <a16:creationId xmlns:a16="http://schemas.microsoft.com/office/drawing/2014/main" id="{68FBA296-7985-49CC-9F7D-E1E972883102}"/>
+                <a16:creationId xmlns:a16="http://schemas.microsoft.com/office/drawing/2014/main" id="{F6068E1E-A5BC-4AB7-977D-E572714956FC}"/>
               </a:ext>
             </a:extLst>
           </p:cNvPr>
@@ -12408,7 +12944,7 @@
     </p:spTree>
     <p:extLst>
       <p:ext uri="{BB962C8B-B14F-4D97-AF65-F5344CB8AC3E}">
-        <p14:creationId xmlns:p14="http://schemas.microsoft.com/office/powerpoint/2010/main" val="6636850"/>
+        <p14:creationId xmlns:p14="http://schemas.microsoft.com/office/powerpoint/2010/main" val="1155534976"/>
       </p:ext>
     </p:extLst>
   </p:cSld>
@@ -12439,7 +12975,7 @@
           <p:cNvPr id="1" name="">
             <a:extLst xmlns:a="http://schemas.openxmlformats.org/drawingml/2006/main">
               <a:ext uri="{FF2B5EF4-FFF2-40B4-BE49-F238E27FC236}">
-                <a16:creationId xmlns:a16="http://schemas.microsoft.com/office/drawing/2014/main" id="{26C3E94C-3A32-4BC1-8DA6-29B37308F246}"/>
+                <a16:creationId xmlns:a16="http://schemas.microsoft.com/office/drawing/2014/main" id="{6C171874-4690-46BE-AA81-D81329F5BEA0}"/>
               </a:ext>
             </a:extLst>
           </p:cNvPr>
@@ -12489,7 +13025,7 @@
           <p:cNvPr id="2" name="">
             <a:extLst xmlns:a="http://schemas.openxmlformats.org/drawingml/2006/main">
               <a:ext uri="{FF2B5EF4-FFF2-40B4-BE49-F238E27FC236}">
-                <a16:creationId xmlns:a16="http://schemas.microsoft.com/office/drawing/2014/main" id="{74499957-CF4F-4863-B419-AC30A73BF409}"/>
+                <a16:creationId xmlns:a16="http://schemas.microsoft.com/office/drawing/2014/main" id="{DA2300AE-A3E0-4A94-971A-EE9C619A15CD}"/>
               </a:ext>
             </a:extLst>
           </p:cNvPr>
@@ -12539,7 +13075,7 @@
           <p:cNvPr id="3" name="">
             <a:extLst xmlns:a="http://schemas.openxmlformats.org/drawingml/2006/main">
               <a:ext uri="{FF2B5EF4-FFF2-40B4-BE49-F238E27FC236}">
-                <a16:creationId xmlns:a16="http://schemas.microsoft.com/office/drawing/2014/main" id="{A4B5CBF7-33E2-49C2-9C89-DDE3DE2937AD}"/>
+                <a16:creationId xmlns:a16="http://schemas.microsoft.com/office/drawing/2014/main" id="{1449B165-B486-4787-8078-C818D3CB7831}"/>
               </a:ext>
             </a:extLst>
           </p:cNvPr>
@@ -12570,7 +13106,7 @@
           <p:cNvPr id="4" name="">
             <a:extLst xmlns:a="http://schemas.openxmlformats.org/drawingml/2006/main">
               <a:ext uri="{FF2B5EF4-FFF2-40B4-BE49-F238E27FC236}">
-                <a16:creationId xmlns:a16="http://schemas.microsoft.com/office/drawing/2014/main" id="{5A6DE3E8-B7A4-4FD2-8E06-BDF5F2982757}"/>
+                <a16:creationId xmlns:a16="http://schemas.microsoft.com/office/drawing/2014/main" id="{A4EF84E8-6A74-4E16-BF13-EAE9CF15E4DD}"/>
               </a:ext>
             </a:extLst>
           </p:cNvPr>
@@ -12620,7 +13156,7 @@
           <p:cNvPr id="5" name="">
             <a:extLst xmlns:a="http://schemas.openxmlformats.org/drawingml/2006/main">
               <a:ext uri="{FF2B5EF4-FFF2-40B4-BE49-F238E27FC236}">
-                <a16:creationId xmlns:a16="http://schemas.microsoft.com/office/drawing/2014/main" id="{A2D321D6-4E52-4832-B416-811D9BE350DE}"/>
+                <a16:creationId xmlns:a16="http://schemas.microsoft.com/office/drawing/2014/main" id="{86C88D9D-AFD5-4214-B913-B2A2A6FE8459}"/>
               </a:ext>
             </a:extLst>
           </p:cNvPr>
@@ -12670,7 +13206,7 @@
           <p:cNvPr id="6" name="">
             <a:extLst xmlns:a="http://schemas.openxmlformats.org/drawingml/2006/main">
               <a:ext uri="{FF2B5EF4-FFF2-40B4-BE49-F238E27FC236}">
-                <a16:creationId xmlns:a16="http://schemas.microsoft.com/office/drawing/2014/main" id="{7F54AA3F-2467-43B2-925B-DB289F67F03D}"/>
+                <a16:creationId xmlns:a16="http://schemas.microsoft.com/office/drawing/2014/main" id="{DFEBA364-3247-4358-8817-3A2CBFCEBF04}"/>
               </a:ext>
             </a:extLst>
           </p:cNvPr>
@@ -12720,7 +13256,7 @@
           <p:cNvPr id="7" name="">
             <a:extLst xmlns:a="http://schemas.openxmlformats.org/drawingml/2006/main">
               <a:ext uri="{FF2B5EF4-FFF2-40B4-BE49-F238E27FC236}">
-                <a16:creationId xmlns:a16="http://schemas.microsoft.com/office/drawing/2014/main" id="{838DF90E-50C2-4359-BB38-A2CF5962B105}"/>
+                <a16:creationId xmlns:a16="http://schemas.microsoft.com/office/drawing/2014/main" id="{916D9001-B1D3-48F4-B66E-23637F615D84}"/>
               </a:ext>
             </a:extLst>
           </p:cNvPr>
@@ -12770,7 +13306,7 @@
           <p:cNvPr id="8" name="">
             <a:extLst xmlns:a="http://schemas.openxmlformats.org/drawingml/2006/main">
               <a:ext uri="{FF2B5EF4-FFF2-40B4-BE49-F238E27FC236}">
-                <a16:creationId xmlns:a16="http://schemas.microsoft.com/office/drawing/2014/main" id="{30B3D294-1F61-40C7-A8F3-9517272898AB}"/>
+                <a16:creationId xmlns:a16="http://schemas.microsoft.com/office/drawing/2014/main" id="{F34B81FE-3A4F-4DF0-B19F-EE8C4DA7924E}"/>
               </a:ext>
             </a:extLst>
           </p:cNvPr>
@@ -12820,7 +13356,7 @@
           <p:cNvPr id="9" name="">
             <a:extLst xmlns:a="http://schemas.openxmlformats.org/drawingml/2006/main">
               <a:ext uri="{FF2B5EF4-FFF2-40B4-BE49-F238E27FC236}">
-                <a16:creationId xmlns:a16="http://schemas.microsoft.com/office/drawing/2014/main" id="{107DFF7B-D528-4146-9845-374CFAC3CDEF}"/>
+                <a16:creationId xmlns:a16="http://schemas.microsoft.com/office/drawing/2014/main" id="{5E9E256E-39A3-47D8-9189-E12E853E8EAC}"/>
               </a:ext>
             </a:extLst>
           </p:cNvPr>
@@ -12870,7 +13406,7 @@
           <p:cNvPr id="10" name="">
             <a:extLst xmlns:a="http://schemas.openxmlformats.org/drawingml/2006/main">
               <a:ext uri="{FF2B5EF4-FFF2-40B4-BE49-F238E27FC236}">
-                <a16:creationId xmlns:a16="http://schemas.microsoft.com/office/drawing/2014/main" id="{5D7EB39A-7EB1-427B-93F9-502638EBAE95}"/>
+                <a16:creationId xmlns:a16="http://schemas.microsoft.com/office/drawing/2014/main" id="{303FE544-D326-4645-AA61-036C586EA4E8}"/>
               </a:ext>
             </a:extLst>
           </p:cNvPr>
@@ -12920,7 +13456,7 @@
           <p:cNvPr id="11" name="">
             <a:extLst xmlns:a="http://schemas.openxmlformats.org/drawingml/2006/main">
               <a:ext uri="{FF2B5EF4-FFF2-40B4-BE49-F238E27FC236}">
-                <a16:creationId xmlns:a16="http://schemas.microsoft.com/office/drawing/2014/main" id="{735C71A4-67CC-4C02-B8E1-4550D2A4B5DA}"/>
+                <a16:creationId xmlns:a16="http://schemas.microsoft.com/office/drawing/2014/main" id="{91C1E131-8355-4CFD-8F29-956171D6A2C1}"/>
               </a:ext>
             </a:extLst>
           </p:cNvPr>
@@ -12970,7 +13506,7 @@
           <p:cNvPr id="12" name="">
             <a:extLst xmlns:a="http://schemas.openxmlformats.org/drawingml/2006/main">
               <a:ext uri="{FF2B5EF4-FFF2-40B4-BE49-F238E27FC236}">
-                <a16:creationId xmlns:a16="http://schemas.microsoft.com/office/drawing/2014/main" id="{3DBD6354-BB39-43F9-A537-76BC473CDD6D}"/>
+                <a16:creationId xmlns:a16="http://schemas.microsoft.com/office/drawing/2014/main" id="{B515CC94-9DBA-4BC0-8475-9AECDC8D4726}"/>
               </a:ext>
             </a:extLst>
           </p:cNvPr>
@@ -13018,7 +13554,348 @@
     </p:spTree>
     <p:extLst>
       <p:ext uri="{BB962C8B-B14F-4D97-AF65-F5344CB8AC3E}">
-        <p14:creationId xmlns:p14="http://schemas.microsoft.com/office/powerpoint/2010/main" val="913620739"/>
+        <p14:creationId xmlns:p14="http://schemas.microsoft.com/office/powerpoint/2010/main" val="227027468"/>
+      </p:ext>
+    </p:extLst>
+  </p:cSld>
+</p:sld>
+</file>
+
+<file path=ppt/slides/slide29.xml><?xml version="1.0" encoding="utf-8"?>
+<p:sld xmlns:p="http://schemas.openxmlformats.org/presentationml/2006/main">
+  <p:cSld>
+    <p:bg>
+      <p:bgPr>
+        <a:solidFill xmlns:a="http://schemas.openxmlformats.org/drawingml/2006/main">
+          <a:srgbClr val="FFFFFF"/>
+        </a:solidFill>
+      </p:bgPr>
+    </p:bg>
+    <p:spTree>
+      <p:nvGrpSpPr>
+        <p:cNvPr id="1" name=""/>
+        <p:cNvGrpSpPr/>
+        <p:nvPr/>
+      </p:nvGrpSpPr>
+      <p:grpSpPr>
+        <a:xfrm xmlns:a="http://schemas.openxmlformats.org/drawingml/2006/main"/>
+      </p:grpSpPr>
+      <p:sp>
+        <p:nvSpPr>
+          <p:cNvPr id="1" name="">
+            <a:extLst xmlns:a="http://schemas.openxmlformats.org/drawingml/2006/main">
+              <a:ext uri="{FF2B5EF4-FFF2-40B4-BE49-F238E27FC236}">
+                <a16:creationId xmlns:a16="http://schemas.microsoft.com/office/drawing/2014/main" id="{D41E4329-A972-4610-AE71-6297CAC2A82B}"/>
+              </a:ext>
+            </a:extLst>
+          </p:cNvPr>
+          <p:cNvSpPr>
+            <a:spLocks xmlns:a="http://schemas.openxmlformats.org/drawingml/2006/main" noGrp="1"/>
+          </p:cNvSpPr>
+          <p:nvPr/>
+        </p:nvSpPr>
+        <p:spPr>
+          <a:xfrm xmlns:a="http://schemas.openxmlformats.org/drawingml/2006/main">
+            <a:off x="685800" y="495300"/>
+            <a:ext cx="4762500" cy="419100"/>
+          </a:xfrm>
+          <a:prstGeom xmlns:a="http://schemas.openxmlformats.org/drawingml/2006/main" prst="rect">
+            <a:avLst/>
+          </a:prstGeom>
+          <a:noFill xmlns:a="http://schemas.openxmlformats.org/drawingml/2006/main"/>
+          <a:ln xmlns:a="http://schemas.openxmlformats.org/drawingml/2006/main" w="0">
+            <a:noFill/>
+            <a:prstDash val="solid"/>
+          </a:ln>
+        </p:spPr>
+        <p:txBody>
+          <a:bodyPr xmlns:a="http://schemas.openxmlformats.org/drawingml/2006/main"/>
+          <a:lstStyle xmlns:a="http://schemas.openxmlformats.org/drawingml/2006/main"/>
+          <a:p xmlns:a="http://schemas.openxmlformats.org/drawingml/2006/main">
+            <a:pPr algn="l">
+              <a:defRPr sz="2400" b="1" i="0">
+                <a:solidFill>
+                  <a:srgbClr val="555555"/>
+                </a:solidFill>
+              </a:defRPr>
+            </a:pPr>
+            <a:r>
+              <a:rPr sz="2400" b="1" i="0">
+                <a:solidFill>
+                  <a:srgbClr val="555555"/>
+                </a:solidFill>
+              </a:rPr>
+              <a:t>Transition</a:t>
+            </a:r>
+          </a:p>
+        </p:txBody>
+      </p:sp>
+      <p:sp>
+        <p:nvSpPr>
+          <p:cNvPr id="2" name="">
+            <a:extLst xmlns:a="http://schemas.openxmlformats.org/drawingml/2006/main">
+              <a:ext uri="{FF2B5EF4-FFF2-40B4-BE49-F238E27FC236}">
+                <a16:creationId xmlns:a16="http://schemas.microsoft.com/office/drawing/2014/main" id="{5043A149-C0A4-4E8B-A0F5-0D8B27CE6DF3}"/>
+              </a:ext>
+            </a:extLst>
+          </p:cNvPr>
+          <p:cNvSpPr>
+            <a:spLocks xmlns:a="http://schemas.openxmlformats.org/drawingml/2006/main" noGrp="1"/>
+          </p:cNvSpPr>
+          <p:nvPr/>
+        </p:nvSpPr>
+        <p:spPr>
+          <a:xfrm xmlns:a="http://schemas.openxmlformats.org/drawingml/2006/main">
+            <a:off x="685800" y="1600200"/>
+            <a:ext cx="7810500" cy="914400"/>
+          </a:xfrm>
+          <a:prstGeom xmlns:a="http://schemas.openxmlformats.org/drawingml/2006/main" prst="rect">
+            <a:avLst/>
+          </a:prstGeom>
+          <a:noFill xmlns:a="http://schemas.openxmlformats.org/drawingml/2006/main"/>
+          <a:ln xmlns:a="http://schemas.openxmlformats.org/drawingml/2006/main" w="0">
+            <a:noFill/>
+            <a:prstDash val="solid"/>
+          </a:ln>
+        </p:spPr>
+        <p:txBody>
+          <a:bodyPr xmlns:a="http://schemas.openxmlformats.org/drawingml/2006/main"/>
+          <a:lstStyle xmlns:a="http://schemas.openxmlformats.org/drawingml/2006/main"/>
+          <a:p xmlns:a="http://schemas.openxmlformats.org/drawingml/2006/main">
+            <a:pPr algn="l">
+              <a:defRPr sz="3600" b="1" i="0">
+                <a:solidFill>
+                  <a:srgbClr val="000000"/>
+                </a:solidFill>
+              </a:defRPr>
+            </a:pPr>
+            <a:r>
+              <a:rPr sz="3600" b="1" i="0">
+                <a:solidFill>
+                  <a:srgbClr val="000000"/>
+                </a:solidFill>
+              </a:rPr>
+              <a:t>The first nonlinear challenger tests XGBoost</a:t>
+            </a:r>
+          </a:p>
+        </p:txBody>
+      </p:sp>
+      <p:sp>
+        <p:nvSpPr>
+          <p:cNvPr id="3" name="">
+            <a:extLst xmlns:a="http://schemas.openxmlformats.org/drawingml/2006/main">
+              <a:ext uri="{FF2B5EF4-FFF2-40B4-BE49-F238E27FC236}">
+                <a16:creationId xmlns:a16="http://schemas.microsoft.com/office/drawing/2014/main" id="{F52D9B47-D396-4A75-ACFB-74519907F311}"/>
+              </a:ext>
+            </a:extLst>
+          </p:cNvPr>
+          <p:cNvSpPr>
+            <a:spLocks xmlns:a="http://schemas.openxmlformats.org/drawingml/2006/main" noGrp="1"/>
+          </p:cNvSpPr>
+          <p:nvPr/>
+        </p:nvSpPr>
+        <p:spPr>
+          <a:xfrm xmlns:a="http://schemas.openxmlformats.org/drawingml/2006/main">
+            <a:off x="723900" y="3105150"/>
+            <a:ext cx="5715000" cy="19050"/>
+          </a:xfrm>
+          <a:prstGeom xmlns:a="http://schemas.openxmlformats.org/drawingml/2006/main" prst="rect">
+            <a:avLst/>
+          </a:prstGeom>
+          <a:solidFill xmlns:a="http://schemas.openxmlformats.org/drawingml/2006/main">
+            <a:srgbClr val="B8BCC4"/>
+          </a:solidFill>
+          <a:ln xmlns:a="http://schemas.openxmlformats.org/drawingml/2006/main" w="0">
+            <a:noFill/>
+            <a:prstDash val="solid"/>
+          </a:ln>
+        </p:spPr>
+      </p:sp>
+      <p:sp>
+        <p:nvSpPr>
+          <p:cNvPr id="4" name="">
+            <a:extLst xmlns:a="http://schemas.openxmlformats.org/drawingml/2006/main">
+              <a:ext uri="{FF2B5EF4-FFF2-40B4-BE49-F238E27FC236}">
+                <a16:creationId xmlns:a16="http://schemas.microsoft.com/office/drawing/2014/main" id="{91986A5C-FB1F-49B4-8B87-655A94CEA673}"/>
+              </a:ext>
+            </a:extLst>
+          </p:cNvPr>
+          <p:cNvSpPr>
+            <a:spLocks xmlns:a="http://schemas.openxmlformats.org/drawingml/2006/main" noGrp="1"/>
+          </p:cNvSpPr>
+          <p:nvPr/>
+        </p:nvSpPr>
+        <p:spPr>
+          <a:xfrm xmlns:a="http://schemas.openxmlformats.org/drawingml/2006/main">
+            <a:off x="723900" y="3467100"/>
+            <a:ext cx="7524750" cy="1066800"/>
+          </a:xfrm>
+          <a:prstGeom xmlns:a="http://schemas.openxmlformats.org/drawingml/2006/main" prst="rect">
+            <a:avLst/>
+          </a:prstGeom>
+          <a:noFill xmlns:a="http://schemas.openxmlformats.org/drawingml/2006/main"/>
+          <a:ln xmlns:a="http://schemas.openxmlformats.org/drawingml/2006/main" w="0">
+            <a:noFill/>
+            <a:prstDash val="solid"/>
+          </a:ln>
+        </p:spPr>
+        <p:txBody>
+          <a:bodyPr xmlns:a="http://schemas.openxmlformats.org/drawingml/2006/main"/>
+          <a:lstStyle xmlns:a="http://schemas.openxmlformats.org/drawingml/2006/main"/>
+          <a:p xmlns:a="http://schemas.openxmlformats.org/drawingml/2006/main">
+            <a:pPr algn="l">
+              <a:defRPr sz="1800" b="0" i="0">
+                <a:solidFill>
+                  <a:srgbClr val="222222"/>
+                </a:solidFill>
+              </a:defRPr>
+            </a:pPr>
+            <a:r>
+              <a:rPr sz="1800" b="0" i="0">
+                <a:solidFill>
+                  <a:srgbClr val="222222"/>
+                </a:solidFill>
+              </a:rPr>
+              <a:t>ML-P2 keeps the h1 label, feature table, TRAIN-only threshold selection, and annual replay fixed. Only the model class changes: GLM control versus conservative XGBoost.</a:t>
+            </a:r>
+          </a:p>
+        </p:txBody>
+      </p:sp>
+      <p:sp>
+        <p:nvSpPr>
+          <p:cNvPr id="5" name="">
+            <a:extLst xmlns:a="http://schemas.openxmlformats.org/drawingml/2006/main">
+              <a:ext uri="{FF2B5EF4-FFF2-40B4-BE49-F238E27FC236}">
+                <a16:creationId xmlns:a16="http://schemas.microsoft.com/office/drawing/2014/main" id="{CD7FB6C6-BCEF-47DB-97BC-9C10D86B665A}"/>
+              </a:ext>
+            </a:extLst>
+          </p:cNvPr>
+          <p:cNvSpPr>
+            <a:spLocks xmlns:a="http://schemas.openxmlformats.org/drawingml/2006/main" noGrp="1"/>
+          </p:cNvSpPr>
+          <p:nvPr/>
+        </p:nvSpPr>
+        <p:spPr>
+          <a:xfrm xmlns:a="http://schemas.openxmlformats.org/drawingml/2006/main">
+            <a:off x="8801100" y="0"/>
+            <a:ext cx="3390900" cy="6858000"/>
+          </a:xfrm>
+          <a:prstGeom xmlns:a="http://schemas.openxmlformats.org/drawingml/2006/main" prst="rect">
+            <a:avLst/>
+          </a:prstGeom>
+          <a:solidFill xmlns:a="http://schemas.openxmlformats.org/drawingml/2006/main">
+            <a:srgbClr val="EDEDED"/>
+          </a:solidFill>
+          <a:ln xmlns:a="http://schemas.openxmlformats.org/drawingml/2006/main" w="0">
+            <a:noFill/>
+            <a:prstDash val="solid"/>
+          </a:ln>
+        </p:spPr>
+      </p:sp>
+      <p:sp>
+        <p:nvSpPr>
+          <p:cNvPr id="6" name="">
+            <a:extLst xmlns:a="http://schemas.openxmlformats.org/drawingml/2006/main">
+              <a:ext uri="{FF2B5EF4-FFF2-40B4-BE49-F238E27FC236}">
+                <a16:creationId xmlns:a16="http://schemas.microsoft.com/office/drawing/2014/main" id="{2488C0C3-C983-4639-9948-42AB236E6189}"/>
+              </a:ext>
+            </a:extLst>
+          </p:cNvPr>
+          <p:cNvSpPr>
+            <a:spLocks xmlns:a="http://schemas.openxmlformats.org/drawingml/2006/main" noGrp="1"/>
+          </p:cNvSpPr>
+          <p:nvPr/>
+        </p:nvSpPr>
+        <p:spPr>
+          <a:xfrm xmlns:a="http://schemas.openxmlformats.org/drawingml/2006/main">
+            <a:off x="9353550" y="2343150"/>
+            <a:ext cx="2190750" cy="438150"/>
+          </a:xfrm>
+          <a:prstGeom xmlns:a="http://schemas.openxmlformats.org/drawingml/2006/main" prst="rect">
+            <a:avLst/>
+          </a:prstGeom>
+          <a:noFill xmlns:a="http://schemas.openxmlformats.org/drawingml/2006/main"/>
+          <a:ln xmlns:a="http://schemas.openxmlformats.org/drawingml/2006/main" w="0">
+            <a:noFill/>
+            <a:prstDash val="solid"/>
+          </a:ln>
+        </p:spPr>
+        <p:txBody>
+          <a:bodyPr xmlns:a="http://schemas.openxmlformats.org/drawingml/2006/main"/>
+          <a:lstStyle xmlns:a="http://schemas.openxmlformats.org/drawingml/2006/main"/>
+          <a:p xmlns:a="http://schemas.openxmlformats.org/drawingml/2006/main">
+            <a:pPr algn="ctr">
+              <a:defRPr sz="3150" b="1" i="0">
+                <a:solidFill>
+                  <a:srgbClr val="000000"/>
+                </a:solidFill>
+              </a:defRPr>
+            </a:pPr>
+            <a:r>
+              <a:rPr sz="3150" b="1" i="0">
+                <a:solidFill>
+                  <a:srgbClr val="000000"/>
+                </a:solidFill>
+              </a:rPr>
+              <a:t>ML-P2</a:t>
+            </a:r>
+          </a:p>
+        </p:txBody>
+      </p:sp>
+      <p:sp>
+        <p:nvSpPr>
+          <p:cNvPr id="7" name="">
+            <a:extLst xmlns:a="http://schemas.openxmlformats.org/drawingml/2006/main">
+              <a:ext uri="{FF2B5EF4-FFF2-40B4-BE49-F238E27FC236}">
+                <a16:creationId xmlns:a16="http://schemas.microsoft.com/office/drawing/2014/main" id="{44CEF218-47F3-4485-8407-7F016E920976}"/>
+              </a:ext>
+            </a:extLst>
+          </p:cNvPr>
+          <p:cNvSpPr>
+            <a:spLocks xmlns:a="http://schemas.openxmlformats.org/drawingml/2006/main" noGrp="1"/>
+          </p:cNvSpPr>
+          <p:nvPr/>
+        </p:nvSpPr>
+        <p:spPr>
+          <a:xfrm xmlns:a="http://schemas.openxmlformats.org/drawingml/2006/main">
+            <a:off x="8991600" y="3067050"/>
+            <a:ext cx="2914650" cy="400050"/>
+          </a:xfrm>
+          <a:prstGeom xmlns:a="http://schemas.openxmlformats.org/drawingml/2006/main" prst="rect">
+            <a:avLst/>
+          </a:prstGeom>
+          <a:noFill xmlns:a="http://schemas.openxmlformats.org/drawingml/2006/main"/>
+          <a:ln xmlns:a="http://schemas.openxmlformats.org/drawingml/2006/main" w="0">
+            <a:noFill/>
+            <a:prstDash val="solid"/>
+          </a:ln>
+        </p:spPr>
+        <p:txBody>
+          <a:bodyPr xmlns:a="http://schemas.openxmlformats.org/drawingml/2006/main"/>
+          <a:lstStyle xmlns:a="http://schemas.openxmlformats.org/drawingml/2006/main"/>
+          <a:p xmlns:a="http://schemas.openxmlformats.org/drawingml/2006/main">
+            <a:pPr algn="ctr">
+              <a:defRPr sz="1875" b="0" i="0">
+                <a:solidFill>
+                  <a:srgbClr val="222222"/>
+                </a:solidFill>
+              </a:defRPr>
+            </a:pPr>
+            <a:r>
+              <a:rPr sz="1875" b="0" i="0">
+                <a:solidFill>
+                  <a:srgbClr val="222222"/>
+                </a:solidFill>
+              </a:rPr>
+              <a:t>XGBoost challenger</a:t>
+            </a:r>
+          </a:p>
+        </p:txBody>
+      </p:sp>
+    </p:spTree>
+    <p:extLst>
+      <p:ext uri="{BB962C8B-B14F-4D97-AF65-F5344CB8AC3E}">
+        <p14:creationId xmlns:p14="http://schemas.microsoft.com/office/powerpoint/2010/main" val="2048978277"/>
       </p:ext>
     </p:extLst>
   </p:cSld>
@@ -13049,7 +13926,7 @@
           <p:cNvPr id="1" name="">
             <a:extLst xmlns:a="http://schemas.openxmlformats.org/drawingml/2006/main">
               <a:ext uri="{FF2B5EF4-FFF2-40B4-BE49-F238E27FC236}">
-                <a16:creationId xmlns:a16="http://schemas.microsoft.com/office/drawing/2014/main" id="{8E3EBCFA-E1A1-49A2-B4D2-C9C7C7CE0C8E}"/>
+                <a16:creationId xmlns:a16="http://schemas.microsoft.com/office/drawing/2014/main" id="{B703396F-DA32-4816-8940-38659C07149D}"/>
               </a:ext>
             </a:extLst>
           </p:cNvPr>
@@ -13099,7 +13976,7 @@
           <p:cNvPr id="2" name="">
             <a:extLst xmlns:a="http://schemas.openxmlformats.org/drawingml/2006/main">
               <a:ext uri="{FF2B5EF4-FFF2-40B4-BE49-F238E27FC236}">
-                <a16:creationId xmlns:a16="http://schemas.microsoft.com/office/drawing/2014/main" id="{39ED6D28-0226-470B-99A0-8902D08B3D62}"/>
+                <a16:creationId xmlns:a16="http://schemas.microsoft.com/office/drawing/2014/main" id="{75D120C2-F8FE-4D0E-887D-F527B1BB9F1A}"/>
               </a:ext>
             </a:extLst>
           </p:cNvPr>
@@ -13149,7 +14026,7 @@
           <p:cNvPr id="3" name="">
             <a:extLst xmlns:a="http://schemas.openxmlformats.org/drawingml/2006/main">
               <a:ext uri="{FF2B5EF4-FFF2-40B4-BE49-F238E27FC236}">
-                <a16:creationId xmlns:a16="http://schemas.microsoft.com/office/drawing/2014/main" id="{49728BD6-2C18-4956-AC77-914D234C37DD}"/>
+                <a16:creationId xmlns:a16="http://schemas.microsoft.com/office/drawing/2014/main" id="{04B55839-0D19-42C1-AD2B-EFABA534B01B}"/>
               </a:ext>
             </a:extLst>
           </p:cNvPr>
@@ -13180,7 +14057,7 @@
           <p:cNvPr id="4" name="">
             <a:extLst xmlns:a="http://schemas.openxmlformats.org/drawingml/2006/main">
               <a:ext uri="{FF2B5EF4-FFF2-40B4-BE49-F238E27FC236}">
-                <a16:creationId xmlns:a16="http://schemas.microsoft.com/office/drawing/2014/main" id="{7181A55D-1529-4736-A9B9-4D05C5DF4F51}"/>
+                <a16:creationId xmlns:a16="http://schemas.microsoft.com/office/drawing/2014/main" id="{C4D184C5-3F00-4174-9738-0D78FE520DEC}"/>
               </a:ext>
             </a:extLst>
           </p:cNvPr>
@@ -13213,7 +14090,7 @@
           <p:cNvPr id="5" name="">
             <a:extLst xmlns:a="http://schemas.openxmlformats.org/drawingml/2006/main">
               <a:ext uri="{FF2B5EF4-FFF2-40B4-BE49-F238E27FC236}">
-                <a16:creationId xmlns:a16="http://schemas.microsoft.com/office/drawing/2014/main" id="{8ADBAA84-0C3F-4988-A434-CD466B35E0F4}"/>
+                <a16:creationId xmlns:a16="http://schemas.microsoft.com/office/drawing/2014/main" id="{BAA5D350-446F-4338-8121-DDA419218167}"/>
               </a:ext>
             </a:extLst>
           </p:cNvPr>
@@ -13263,7 +14140,7 @@
           <p:cNvPr id="6" name="">
             <a:extLst xmlns:a="http://schemas.openxmlformats.org/drawingml/2006/main">
               <a:ext uri="{FF2B5EF4-FFF2-40B4-BE49-F238E27FC236}">
-                <a16:creationId xmlns:a16="http://schemas.microsoft.com/office/drawing/2014/main" id="{53F3BDDB-A5B9-4A2F-81A5-67D772C8F173}"/>
+                <a16:creationId xmlns:a16="http://schemas.microsoft.com/office/drawing/2014/main" id="{EC60889F-9EB9-4E46-8A64-F78D96EF726F}"/>
               </a:ext>
             </a:extLst>
           </p:cNvPr>
@@ -13313,7 +14190,7 @@
           <p:cNvPr id="7" name="">
             <a:extLst xmlns:a="http://schemas.openxmlformats.org/drawingml/2006/main">
               <a:ext uri="{FF2B5EF4-FFF2-40B4-BE49-F238E27FC236}">
-                <a16:creationId xmlns:a16="http://schemas.microsoft.com/office/drawing/2014/main" id="{FB59A5B0-9FE5-4C1A-9C85-D12703DDCB7A}"/>
+                <a16:creationId xmlns:a16="http://schemas.microsoft.com/office/drawing/2014/main" id="{99794CCB-E101-4BF9-8570-B4192220BCB5}"/>
               </a:ext>
             </a:extLst>
           </p:cNvPr>
@@ -13363,7 +14240,7 @@
           <p:cNvPr id="8" name="">
             <a:extLst xmlns:a="http://schemas.openxmlformats.org/drawingml/2006/main">
               <a:ext uri="{FF2B5EF4-FFF2-40B4-BE49-F238E27FC236}">
-                <a16:creationId xmlns:a16="http://schemas.microsoft.com/office/drawing/2014/main" id="{766BFD79-8ED4-42C0-9CBF-12BBAD6FA246}"/>
+                <a16:creationId xmlns:a16="http://schemas.microsoft.com/office/drawing/2014/main" id="{CBF7390F-0004-423A-A813-2E144C0B6BCE}"/>
               </a:ext>
             </a:extLst>
           </p:cNvPr>
@@ -13396,7 +14273,7 @@
           <p:cNvPr id="9" name="">
             <a:extLst xmlns:a="http://schemas.openxmlformats.org/drawingml/2006/main">
               <a:ext uri="{FF2B5EF4-FFF2-40B4-BE49-F238E27FC236}">
-                <a16:creationId xmlns:a16="http://schemas.microsoft.com/office/drawing/2014/main" id="{4B326F79-3E93-4AE5-AF41-06FC6D1C7959}"/>
+                <a16:creationId xmlns:a16="http://schemas.microsoft.com/office/drawing/2014/main" id="{5352C6F6-F442-4401-A669-5213632792FF}"/>
               </a:ext>
             </a:extLst>
           </p:cNvPr>
@@ -13446,7 +14323,7 @@
           <p:cNvPr id="10" name="">
             <a:extLst xmlns:a="http://schemas.openxmlformats.org/drawingml/2006/main">
               <a:ext uri="{FF2B5EF4-FFF2-40B4-BE49-F238E27FC236}">
-                <a16:creationId xmlns:a16="http://schemas.microsoft.com/office/drawing/2014/main" id="{AA2D5DAD-E706-40C2-B402-FC750886656D}"/>
+                <a16:creationId xmlns:a16="http://schemas.microsoft.com/office/drawing/2014/main" id="{4DFDECC1-A2D4-4A63-BAD4-6B948F59A89D}"/>
               </a:ext>
             </a:extLst>
           </p:cNvPr>
@@ -13496,7 +14373,7 @@
           <p:cNvPr id="11" name="">
             <a:extLst xmlns:a="http://schemas.openxmlformats.org/drawingml/2006/main">
               <a:ext uri="{FF2B5EF4-FFF2-40B4-BE49-F238E27FC236}">
-                <a16:creationId xmlns:a16="http://schemas.microsoft.com/office/drawing/2014/main" id="{E88E5A7F-C033-4848-892C-98D74571FFAB}"/>
+                <a16:creationId xmlns:a16="http://schemas.microsoft.com/office/drawing/2014/main" id="{001E17CE-BED4-4252-AC9F-C4CE0F4CF26A}"/>
               </a:ext>
             </a:extLst>
           </p:cNvPr>
@@ -13546,7 +14423,7 @@
           <p:cNvPr id="12" name="">
             <a:extLst xmlns:a="http://schemas.openxmlformats.org/drawingml/2006/main">
               <a:ext uri="{FF2B5EF4-FFF2-40B4-BE49-F238E27FC236}">
-                <a16:creationId xmlns:a16="http://schemas.microsoft.com/office/drawing/2014/main" id="{2413EBA7-5445-4050-86D9-138EBC8866AE}"/>
+                <a16:creationId xmlns:a16="http://schemas.microsoft.com/office/drawing/2014/main" id="{1CFE8A20-A0F2-4704-A8D1-1136F50E6D8E}"/>
               </a:ext>
             </a:extLst>
           </p:cNvPr>
@@ -13579,7 +14456,7 @@
           <p:cNvPr id="13" name="">
             <a:extLst xmlns:a="http://schemas.openxmlformats.org/drawingml/2006/main">
               <a:ext uri="{FF2B5EF4-FFF2-40B4-BE49-F238E27FC236}">
-                <a16:creationId xmlns:a16="http://schemas.microsoft.com/office/drawing/2014/main" id="{1F9DFE6E-798C-4460-B0B4-12A7B3CB0226}"/>
+                <a16:creationId xmlns:a16="http://schemas.microsoft.com/office/drawing/2014/main" id="{C086E16D-EA4F-4B9F-ADF9-E4BFB9E138E6}"/>
               </a:ext>
             </a:extLst>
           </p:cNvPr>
@@ -13629,7 +14506,7 @@
           <p:cNvPr id="14" name="">
             <a:extLst xmlns:a="http://schemas.openxmlformats.org/drawingml/2006/main">
               <a:ext uri="{FF2B5EF4-FFF2-40B4-BE49-F238E27FC236}">
-                <a16:creationId xmlns:a16="http://schemas.microsoft.com/office/drawing/2014/main" id="{8B70044B-E875-4052-B2CA-9945A57BD8D3}"/>
+                <a16:creationId xmlns:a16="http://schemas.microsoft.com/office/drawing/2014/main" id="{BE505779-3B81-4747-9158-F6387FC86B4E}"/>
               </a:ext>
             </a:extLst>
           </p:cNvPr>
@@ -13679,7 +14556,7 @@
           <p:cNvPr id="15" name="">
             <a:extLst xmlns:a="http://schemas.openxmlformats.org/drawingml/2006/main">
               <a:ext uri="{FF2B5EF4-FFF2-40B4-BE49-F238E27FC236}">
-                <a16:creationId xmlns:a16="http://schemas.microsoft.com/office/drawing/2014/main" id="{2CE2A3BC-1371-4BB2-AABA-3F8F1F7A4B5D}"/>
+                <a16:creationId xmlns:a16="http://schemas.microsoft.com/office/drawing/2014/main" id="{58D448CC-1252-4777-8B83-1636CEB09083}"/>
               </a:ext>
             </a:extLst>
           </p:cNvPr>
@@ -13729,7 +14606,7 @@
           <p:cNvPr id="16" name="">
             <a:extLst xmlns:a="http://schemas.openxmlformats.org/drawingml/2006/main">
               <a:ext uri="{FF2B5EF4-FFF2-40B4-BE49-F238E27FC236}">
-                <a16:creationId xmlns:a16="http://schemas.microsoft.com/office/drawing/2014/main" id="{8661EF84-177B-455C-81AA-17D4FBC5C019}"/>
+                <a16:creationId xmlns:a16="http://schemas.microsoft.com/office/drawing/2014/main" id="{1B7E3366-5FB4-4759-89DA-B091077678CF}"/>
               </a:ext>
             </a:extLst>
           </p:cNvPr>
@@ -13779,7 +14656,7 @@
           <p:cNvPr id="17" name="">
             <a:extLst xmlns:a="http://schemas.openxmlformats.org/drawingml/2006/main">
               <a:ext uri="{FF2B5EF4-FFF2-40B4-BE49-F238E27FC236}">
-                <a16:creationId xmlns:a16="http://schemas.microsoft.com/office/drawing/2014/main" id="{8A0D76CB-5508-4AB4-AEF3-F266B5BEBBD7}"/>
+                <a16:creationId xmlns:a16="http://schemas.microsoft.com/office/drawing/2014/main" id="{5B111745-5AD9-478B-8EC7-0C599A40F738}"/>
               </a:ext>
             </a:extLst>
           </p:cNvPr>
@@ -13829,7 +14706,7 @@
           <p:cNvPr id="18" name="">
             <a:extLst xmlns:a="http://schemas.openxmlformats.org/drawingml/2006/main">
               <a:ext uri="{FF2B5EF4-FFF2-40B4-BE49-F238E27FC236}">
-                <a16:creationId xmlns:a16="http://schemas.microsoft.com/office/drawing/2014/main" id="{0E3E8CEF-7ABE-4BB1-9BDF-084A82F2DFA6}"/>
+                <a16:creationId xmlns:a16="http://schemas.microsoft.com/office/drawing/2014/main" id="{510F93A9-2712-4E03-B83B-D371C3941C4B}"/>
               </a:ext>
             </a:extLst>
           </p:cNvPr>
@@ -13879,7 +14756,7 @@
           <p:cNvPr id="19" name="">
             <a:extLst xmlns:a="http://schemas.openxmlformats.org/drawingml/2006/main">
               <a:ext uri="{FF2B5EF4-FFF2-40B4-BE49-F238E27FC236}">
-                <a16:creationId xmlns:a16="http://schemas.microsoft.com/office/drawing/2014/main" id="{12D422D3-8F18-4299-9076-6DD0BBEEC2DC}"/>
+                <a16:creationId xmlns:a16="http://schemas.microsoft.com/office/drawing/2014/main" id="{1C363D8B-8C13-4CDD-85BE-86C8713AA692}"/>
               </a:ext>
             </a:extLst>
           </p:cNvPr>
@@ -13929,7 +14806,7 @@
           <p:cNvPr id="20" name="">
             <a:extLst xmlns:a="http://schemas.openxmlformats.org/drawingml/2006/main">
               <a:ext uri="{FF2B5EF4-FFF2-40B4-BE49-F238E27FC236}">
-                <a16:creationId xmlns:a16="http://schemas.microsoft.com/office/drawing/2014/main" id="{EB281D6B-8D9D-416C-98F1-F7C909B43EF1}"/>
+                <a16:creationId xmlns:a16="http://schemas.microsoft.com/office/drawing/2014/main" id="{365CE471-95ED-439E-9B47-C8068193BCB5}"/>
               </a:ext>
             </a:extLst>
           </p:cNvPr>
@@ -13979,7 +14856,7 @@
           <p:cNvPr id="21" name="">
             <a:extLst xmlns:a="http://schemas.openxmlformats.org/drawingml/2006/main">
               <a:ext uri="{FF2B5EF4-FFF2-40B4-BE49-F238E27FC236}">
-                <a16:creationId xmlns:a16="http://schemas.microsoft.com/office/drawing/2014/main" id="{7E5AFCD7-F803-458D-9F69-D9F4519031CF}"/>
+                <a16:creationId xmlns:a16="http://schemas.microsoft.com/office/drawing/2014/main" id="{482133E8-E56A-49F0-B430-6BB90118DE6A}"/>
               </a:ext>
             </a:extLst>
           </p:cNvPr>
@@ -14029,7 +14906,7 @@
           <p:cNvPr id="22" name="">
             <a:extLst xmlns:a="http://schemas.openxmlformats.org/drawingml/2006/main">
               <a:ext uri="{FF2B5EF4-FFF2-40B4-BE49-F238E27FC236}">
-                <a16:creationId xmlns:a16="http://schemas.microsoft.com/office/drawing/2014/main" id="{9DA72713-82A6-46B4-8D3F-1C106003E5E1}"/>
+                <a16:creationId xmlns:a16="http://schemas.microsoft.com/office/drawing/2014/main" id="{8CADA75D-D9CD-49EB-9018-32C478A944EE}"/>
               </a:ext>
             </a:extLst>
           </p:cNvPr>
@@ -14079,7 +14956,7 @@
           <p:cNvPr id="23" name="">
             <a:extLst xmlns:a="http://schemas.openxmlformats.org/drawingml/2006/main">
               <a:ext uri="{FF2B5EF4-FFF2-40B4-BE49-F238E27FC236}">
-                <a16:creationId xmlns:a16="http://schemas.microsoft.com/office/drawing/2014/main" id="{E5912E7A-9D48-43CE-A498-9996E03B3F81}"/>
+                <a16:creationId xmlns:a16="http://schemas.microsoft.com/office/drawing/2014/main" id="{CF283583-C8B8-431C-921E-0D40B81B07CE}"/>
               </a:ext>
             </a:extLst>
           </p:cNvPr>
@@ -14127,7 +15004,3409 @@
     </p:spTree>
     <p:extLst>
       <p:ext uri="{BB962C8B-B14F-4D97-AF65-F5344CB8AC3E}">
-        <p14:creationId xmlns:p14="http://schemas.microsoft.com/office/powerpoint/2010/main" val="1394013420"/>
+        <p14:creationId xmlns:p14="http://schemas.microsoft.com/office/powerpoint/2010/main" val="795345639"/>
+      </p:ext>
+    </p:extLst>
+  </p:cSld>
+</p:sld>
+</file>
+
+<file path=ppt/slides/slide30.xml><?xml version="1.0" encoding="utf-8"?>
+<p:sld xmlns:p="http://schemas.openxmlformats.org/presentationml/2006/main">
+  <p:cSld>
+    <p:bg>
+      <p:bgPr>
+        <a:solidFill xmlns:a="http://schemas.openxmlformats.org/drawingml/2006/main">
+          <a:srgbClr val="FFFFFF"/>
+        </a:solidFill>
+      </p:bgPr>
+    </p:bg>
+    <p:spTree>
+      <p:nvGrpSpPr>
+        <p:cNvPr id="1" name=""/>
+        <p:cNvGrpSpPr/>
+        <p:nvPr/>
+      </p:nvGrpSpPr>
+      <p:grpSpPr>
+        <a:xfrm xmlns:a="http://schemas.openxmlformats.org/drawingml/2006/main"/>
+      </p:grpSpPr>
+      <p:sp>
+        <p:nvSpPr>
+          <p:cNvPr id="1" name="">
+            <a:extLst xmlns:a="http://schemas.openxmlformats.org/drawingml/2006/main">
+              <a:ext uri="{FF2B5EF4-FFF2-40B4-BE49-F238E27FC236}">
+                <a16:creationId xmlns:a16="http://schemas.microsoft.com/office/drawing/2014/main" id="{A9AD6EF6-0C64-4A40-B16E-AB35726FEC32}"/>
+              </a:ext>
+            </a:extLst>
+          </p:cNvPr>
+          <p:cNvSpPr>
+            <a:spLocks xmlns:a="http://schemas.openxmlformats.org/drawingml/2006/main" noGrp="1"/>
+          </p:cNvSpPr>
+          <p:nvPr/>
+        </p:nvSpPr>
+        <p:spPr>
+          <a:xfrm xmlns:a="http://schemas.openxmlformats.org/drawingml/2006/main">
+            <a:off x="685800" y="400050"/>
+            <a:ext cx="8572500" cy="247650"/>
+          </a:xfrm>
+          <a:prstGeom xmlns:a="http://schemas.openxmlformats.org/drawingml/2006/main" prst="rect">
+            <a:avLst/>
+          </a:prstGeom>
+          <a:noFill xmlns:a="http://schemas.openxmlformats.org/drawingml/2006/main"/>
+          <a:ln xmlns:a="http://schemas.openxmlformats.org/drawingml/2006/main" w="0">
+            <a:noFill/>
+            <a:prstDash val="solid"/>
+          </a:ln>
+        </p:spPr>
+        <p:txBody>
+          <a:bodyPr xmlns:a="http://schemas.openxmlformats.org/drawingml/2006/main"/>
+          <a:lstStyle xmlns:a="http://schemas.openxmlformats.org/drawingml/2006/main"/>
+          <a:p xmlns:a="http://schemas.openxmlformats.org/drawingml/2006/main">
+            <a:pPr algn="l">
+              <a:defRPr sz="975" b="1" i="0">
+                <a:solidFill>
+                  <a:srgbClr val="555555"/>
+                </a:solidFill>
+              </a:defRPr>
+            </a:pPr>
+            <a:r>
+              <a:rPr sz="975" b="1" i="0">
+                <a:solidFill>
+                  <a:srgbClr val="555555"/>
+                </a:solidFill>
+              </a:rPr>
+              <a:t>GEN5.4 ML DECISION ENGINE</a:t>
+            </a:r>
+          </a:p>
+        </p:txBody>
+      </p:sp>
+      <p:sp>
+        <p:nvSpPr>
+          <p:cNvPr id="2" name="">
+            <a:extLst xmlns:a="http://schemas.openxmlformats.org/drawingml/2006/main">
+              <a:ext uri="{FF2B5EF4-FFF2-40B4-BE49-F238E27FC236}">
+                <a16:creationId xmlns:a16="http://schemas.microsoft.com/office/drawing/2014/main" id="{DA61A90D-7375-431D-90B0-3B087F2AD5E6}"/>
+              </a:ext>
+            </a:extLst>
+          </p:cNvPr>
+          <p:cNvSpPr>
+            <a:spLocks xmlns:a="http://schemas.openxmlformats.org/drawingml/2006/main" noGrp="1"/>
+          </p:cNvSpPr>
+          <p:nvPr/>
+        </p:nvSpPr>
+        <p:spPr>
+          <a:xfrm xmlns:a="http://schemas.openxmlformats.org/drawingml/2006/main">
+            <a:off x="685800" y="723900"/>
+            <a:ext cx="10287000" cy="876300"/>
+          </a:xfrm>
+          <a:prstGeom xmlns:a="http://schemas.openxmlformats.org/drawingml/2006/main" prst="rect">
+            <a:avLst/>
+          </a:prstGeom>
+          <a:noFill xmlns:a="http://schemas.openxmlformats.org/drawingml/2006/main"/>
+          <a:ln xmlns:a="http://schemas.openxmlformats.org/drawingml/2006/main" w="0">
+            <a:noFill/>
+            <a:prstDash val="solid"/>
+          </a:ln>
+        </p:spPr>
+        <p:txBody>
+          <a:bodyPr xmlns:a="http://schemas.openxmlformats.org/drawingml/2006/main"/>
+          <a:lstStyle xmlns:a="http://schemas.openxmlformats.org/drawingml/2006/main"/>
+          <a:p xmlns:a="http://schemas.openxmlformats.org/drawingml/2006/main">
+            <a:pPr algn="l">
+              <a:defRPr sz="2850" b="1" i="0">
+                <a:solidFill>
+                  <a:srgbClr val="000000"/>
+                </a:solidFill>
+              </a:defRPr>
+            </a:pPr>
+            <a:r>
+              <a:rPr sz="2850" b="1" i="0">
+                <a:solidFill>
+                  <a:srgbClr val="000000"/>
+                </a:solidFill>
+              </a:rPr>
+              <a:t>GLM is a straight-line lens; XGBoost is a conditional lens</a:t>
+            </a:r>
+          </a:p>
+        </p:txBody>
+      </p:sp>
+      <p:sp>
+        <p:nvSpPr>
+          <p:cNvPr id="3" name="">
+            <a:extLst xmlns:a="http://schemas.openxmlformats.org/drawingml/2006/main">
+              <a:ext uri="{FF2B5EF4-FFF2-40B4-BE49-F238E27FC236}">
+                <a16:creationId xmlns:a16="http://schemas.microsoft.com/office/drawing/2014/main" id="{51A9471C-08A3-46B3-8800-C473B0636E8F}"/>
+              </a:ext>
+            </a:extLst>
+          </p:cNvPr>
+          <p:cNvSpPr>
+            <a:spLocks xmlns:a="http://schemas.openxmlformats.org/drawingml/2006/main" noGrp="1"/>
+          </p:cNvSpPr>
+          <p:nvPr/>
+        </p:nvSpPr>
+        <p:spPr>
+          <a:xfrm xmlns:a="http://schemas.openxmlformats.org/drawingml/2006/main">
+            <a:off x="685800" y="1657350"/>
+            <a:ext cx="10820400" cy="19050"/>
+          </a:xfrm>
+          <a:prstGeom xmlns:a="http://schemas.openxmlformats.org/drawingml/2006/main" prst="rect">
+            <a:avLst/>
+          </a:prstGeom>
+          <a:solidFill xmlns:a="http://schemas.openxmlformats.org/drawingml/2006/main">
+            <a:srgbClr val="B8BCC4"/>
+          </a:solidFill>
+          <a:ln xmlns:a="http://schemas.openxmlformats.org/drawingml/2006/main" w="0">
+            <a:noFill/>
+            <a:prstDash val="solid"/>
+          </a:ln>
+        </p:spPr>
+      </p:sp>
+      <p:sp>
+        <p:nvSpPr>
+          <p:cNvPr id="4" name="">
+            <a:extLst xmlns:a="http://schemas.openxmlformats.org/drawingml/2006/main">
+              <a:ext uri="{FF2B5EF4-FFF2-40B4-BE49-F238E27FC236}">
+                <a16:creationId xmlns:a16="http://schemas.microsoft.com/office/drawing/2014/main" id="{6766BBFF-47DD-495F-8570-67F7E19BFC9D}"/>
+              </a:ext>
+            </a:extLst>
+          </p:cNvPr>
+          <p:cNvSpPr>
+            <a:spLocks xmlns:a="http://schemas.openxmlformats.org/drawingml/2006/main" noGrp="1"/>
+          </p:cNvSpPr>
+          <p:nvPr/>
+        </p:nvSpPr>
+        <p:spPr>
+          <a:xfrm xmlns:a="http://schemas.openxmlformats.org/drawingml/2006/main">
+            <a:off x="876300" y="2114550"/>
+            <a:ext cx="4476750" cy="952500"/>
+          </a:xfrm>
+          <a:prstGeom xmlns:a="http://schemas.openxmlformats.org/drawingml/2006/main" prst="rect">
+            <a:avLst/>
+          </a:prstGeom>
+          <a:noFill xmlns:a="http://schemas.openxmlformats.org/drawingml/2006/main"/>
+          <a:ln xmlns:a="http://schemas.openxmlformats.org/drawingml/2006/main" w="0">
+            <a:noFill/>
+            <a:prstDash val="solid"/>
+          </a:ln>
+        </p:spPr>
+        <p:txBody>
+          <a:bodyPr xmlns:a="http://schemas.openxmlformats.org/drawingml/2006/main"/>
+          <a:lstStyle xmlns:a="http://schemas.openxmlformats.org/drawingml/2006/main"/>
+          <a:p xmlns:a="http://schemas.openxmlformats.org/drawingml/2006/main">
+            <a:pPr algn="l">
+              <a:defRPr sz="1875" b="1" i="0">
+                <a:solidFill>
+                  <a:srgbClr val="000000"/>
+                </a:solidFill>
+              </a:defRPr>
+            </a:pPr>
+            <a:r>
+              <a:rPr sz="1875" b="1" i="0">
+                <a:solidFill>
+                  <a:srgbClr val="000000"/>
+                </a:solidFill>
+              </a:rPr>
+              <a:t>The GLM asks whether a mostly linear combination of today’s features predicts a favorable next-open h1 outcome.</a:t>
+            </a:r>
+          </a:p>
+        </p:txBody>
+      </p:sp>
+      <p:sp>
+        <p:nvSpPr>
+          <p:cNvPr id="5" name="">
+            <a:extLst xmlns:a="http://schemas.openxmlformats.org/drawingml/2006/main">
+              <a:ext uri="{FF2B5EF4-FFF2-40B4-BE49-F238E27FC236}">
+                <a16:creationId xmlns:a16="http://schemas.microsoft.com/office/drawing/2014/main" id="{D8FC1EA8-13AF-481B-8DC6-C1B318B65092}"/>
+              </a:ext>
+            </a:extLst>
+          </p:cNvPr>
+          <p:cNvSpPr>
+            <a:spLocks xmlns:a="http://schemas.openxmlformats.org/drawingml/2006/main" noGrp="1"/>
+          </p:cNvSpPr>
+          <p:nvPr/>
+        </p:nvSpPr>
+        <p:spPr>
+          <a:xfrm xmlns:a="http://schemas.openxmlformats.org/drawingml/2006/main">
+            <a:off x="6572250" y="2114550"/>
+            <a:ext cx="4191000" cy="1066800"/>
+          </a:xfrm>
+          <a:prstGeom xmlns:a="http://schemas.openxmlformats.org/drawingml/2006/main" prst="rect">
+            <a:avLst/>
+          </a:prstGeom>
+          <a:noFill xmlns:a="http://schemas.openxmlformats.org/drawingml/2006/main"/>
+          <a:ln xmlns:a="http://schemas.openxmlformats.org/drawingml/2006/main" w="0">
+            <a:noFill/>
+            <a:prstDash val="solid"/>
+          </a:ln>
+        </p:spPr>
+        <p:txBody>
+          <a:bodyPr xmlns:a="http://schemas.openxmlformats.org/drawingml/2006/main"/>
+          <a:lstStyle xmlns:a="http://schemas.openxmlformats.org/drawingml/2006/main"/>
+          <a:p xmlns:a="http://schemas.openxmlformats.org/drawingml/2006/main">
+            <a:pPr algn="l">
+              <a:defRPr sz="1875" b="1" i="0">
+                <a:solidFill>
+                  <a:srgbClr val="000000"/>
+                </a:solidFill>
+              </a:defRPr>
+            </a:pPr>
+            <a:r>
+              <a:rPr sz="1875" b="1" i="0">
+                <a:solidFill>
+                  <a:srgbClr val="000000"/>
+                </a:solidFill>
+              </a:rPr>
+              <a:t>XGBoost can learn conditional pockets, thresholds, and interactions without us hand-writing every combination.</a:t>
+            </a:r>
+          </a:p>
+        </p:txBody>
+      </p:sp>
+      <p:sp>
+        <p:nvSpPr>
+          <p:cNvPr id="6" name="">
+            <a:extLst xmlns:a="http://schemas.openxmlformats.org/drawingml/2006/main">
+              <a:ext uri="{FF2B5EF4-FFF2-40B4-BE49-F238E27FC236}">
+                <a16:creationId xmlns:a16="http://schemas.microsoft.com/office/drawing/2014/main" id="{3BF63A40-090C-4825-9C3E-4485AE1EBA13}"/>
+              </a:ext>
+            </a:extLst>
+          </p:cNvPr>
+          <p:cNvSpPr>
+            <a:spLocks xmlns:a="http://schemas.openxmlformats.org/drawingml/2006/main" noGrp="1"/>
+          </p:cNvSpPr>
+          <p:nvPr/>
+        </p:nvSpPr>
+        <p:spPr>
+          <a:xfrm xmlns:a="http://schemas.openxmlformats.org/drawingml/2006/main">
+            <a:off x="876300" y="3733800"/>
+            <a:ext cx="4095750" cy="19050"/>
+          </a:xfrm>
+          <a:prstGeom xmlns:a="http://schemas.openxmlformats.org/drawingml/2006/main" prst="rect">
+            <a:avLst/>
+          </a:prstGeom>
+          <a:solidFill xmlns:a="http://schemas.openxmlformats.org/drawingml/2006/main">
+            <a:srgbClr val="B8BCC4"/>
+          </a:solidFill>
+          <a:ln xmlns:a="http://schemas.openxmlformats.org/drawingml/2006/main" w="0">
+            <a:noFill/>
+            <a:prstDash val="solid"/>
+          </a:ln>
+        </p:spPr>
+      </p:sp>
+      <p:sp>
+        <p:nvSpPr>
+          <p:cNvPr id="7" name="">
+            <a:extLst xmlns:a="http://schemas.openxmlformats.org/drawingml/2006/main">
+              <a:ext uri="{FF2B5EF4-FFF2-40B4-BE49-F238E27FC236}">
+                <a16:creationId xmlns:a16="http://schemas.microsoft.com/office/drawing/2014/main" id="{949CD6F1-DBD7-4574-B22C-B910EEB74FAF}"/>
+              </a:ext>
+            </a:extLst>
+          </p:cNvPr>
+          <p:cNvSpPr>
+            <a:spLocks xmlns:a="http://schemas.openxmlformats.org/drawingml/2006/main" noGrp="1"/>
+          </p:cNvSpPr>
+          <p:nvPr/>
+        </p:nvSpPr>
+        <p:spPr>
+          <a:xfrm xmlns:a="http://schemas.openxmlformats.org/drawingml/2006/main">
+            <a:off x="6572250" y="3733800"/>
+            <a:ext cx="4095750" cy="19050"/>
+          </a:xfrm>
+          <a:prstGeom xmlns:a="http://schemas.openxmlformats.org/drawingml/2006/main" prst="rect">
+            <a:avLst/>
+          </a:prstGeom>
+          <a:solidFill xmlns:a="http://schemas.openxmlformats.org/drawingml/2006/main">
+            <a:srgbClr val="B8BCC4"/>
+          </a:solidFill>
+          <a:ln xmlns:a="http://schemas.openxmlformats.org/drawingml/2006/main" w="0">
+            <a:noFill/>
+            <a:prstDash val="solid"/>
+          </a:ln>
+        </p:spPr>
+      </p:sp>
+      <p:sp>
+        <p:nvSpPr>
+          <p:cNvPr id="8" name="">
+            <a:extLst xmlns:a="http://schemas.openxmlformats.org/drawingml/2006/main">
+              <a:ext uri="{FF2B5EF4-FFF2-40B4-BE49-F238E27FC236}">
+                <a16:creationId xmlns:a16="http://schemas.microsoft.com/office/drawing/2014/main" id="{ACC05A14-7AED-4067-9790-AB07EA724001}"/>
+              </a:ext>
+            </a:extLst>
+          </p:cNvPr>
+          <p:cNvSpPr>
+            <a:spLocks xmlns:a="http://schemas.openxmlformats.org/drawingml/2006/main" noGrp="1"/>
+          </p:cNvSpPr>
+          <p:nvPr/>
+        </p:nvSpPr>
+        <p:spPr>
+          <a:xfrm xmlns:a="http://schemas.openxmlformats.org/drawingml/2006/main">
+            <a:off x="1047750" y="4124325"/>
+            <a:ext cx="190500" cy="247650"/>
+          </a:xfrm>
+          <a:prstGeom xmlns:a="http://schemas.openxmlformats.org/drawingml/2006/main" prst="rect">
+            <a:avLst/>
+          </a:prstGeom>
+          <a:noFill xmlns:a="http://schemas.openxmlformats.org/drawingml/2006/main"/>
+          <a:ln xmlns:a="http://schemas.openxmlformats.org/drawingml/2006/main" w="0">
+            <a:noFill/>
+            <a:prstDash val="solid"/>
+          </a:ln>
+        </p:spPr>
+        <p:txBody>
+          <a:bodyPr xmlns:a="http://schemas.openxmlformats.org/drawingml/2006/main"/>
+          <a:lstStyle xmlns:a="http://schemas.openxmlformats.org/drawingml/2006/main"/>
+          <a:p xmlns:a="http://schemas.openxmlformats.org/drawingml/2006/main">
+            <a:pPr algn="l">
+              <a:defRPr sz="1575" b="1" i="0">
+                <a:solidFill>
+                  <a:srgbClr val="FF6B35"/>
+                </a:solidFill>
+              </a:defRPr>
+            </a:pPr>
+            <a:r>
+              <a:rPr sz="1575" b="1" i="0">
+                <a:solidFill>
+                  <a:srgbClr val="FF6B35"/>
+                </a:solidFill>
+              </a:rPr>
+              <a:t>-</a:t>
+            </a:r>
+          </a:p>
+        </p:txBody>
+      </p:sp>
+      <p:sp>
+        <p:nvSpPr>
+          <p:cNvPr id="9" name="">
+            <a:extLst xmlns:a="http://schemas.openxmlformats.org/drawingml/2006/main">
+              <a:ext uri="{FF2B5EF4-FFF2-40B4-BE49-F238E27FC236}">
+                <a16:creationId xmlns:a16="http://schemas.microsoft.com/office/drawing/2014/main" id="{80A35E87-AA60-49CA-8424-8A70BFD520A4}"/>
+              </a:ext>
+            </a:extLst>
+          </p:cNvPr>
+          <p:cNvSpPr>
+            <a:spLocks xmlns:a="http://schemas.openxmlformats.org/drawingml/2006/main" noGrp="1"/>
+          </p:cNvSpPr>
+          <p:nvPr/>
+        </p:nvSpPr>
+        <p:spPr>
+          <a:xfrm xmlns:a="http://schemas.openxmlformats.org/drawingml/2006/main">
+            <a:off x="1314450" y="4114800"/>
+            <a:ext cx="4210050" cy="514350"/>
+          </a:xfrm>
+          <a:prstGeom xmlns:a="http://schemas.openxmlformats.org/drawingml/2006/main" prst="rect">
+            <a:avLst/>
+          </a:prstGeom>
+          <a:noFill xmlns:a="http://schemas.openxmlformats.org/drawingml/2006/main"/>
+          <a:ln xmlns:a="http://schemas.openxmlformats.org/drawingml/2006/main" w="0">
+            <a:noFill/>
+            <a:prstDash val="solid"/>
+          </a:ln>
+        </p:spPr>
+        <p:txBody>
+          <a:bodyPr xmlns:a="http://schemas.openxmlformats.org/drawingml/2006/main"/>
+          <a:lstStyle xmlns:a="http://schemas.openxmlformats.org/drawingml/2006/main"/>
+          <a:p xmlns:a="http://schemas.openxmlformats.org/drawingml/2006/main">
+            <a:pPr algn="l">
+              <a:defRPr sz="1575" b="0" i="0">
+                <a:solidFill>
+                  <a:srgbClr val="222222"/>
+                </a:solidFill>
+              </a:defRPr>
+            </a:pPr>
+            <a:r>
+              <a:rPr sz="1575" b="0" i="0">
+                <a:solidFill>
+                  <a:srgbClr val="222222"/>
+                </a:solidFill>
+              </a:rPr>
+              <a:t>Good for proving the plumbing and exposing simple directional effects.</a:t>
+            </a:r>
+          </a:p>
+        </p:txBody>
+      </p:sp>
+      <p:sp>
+        <p:nvSpPr>
+          <p:cNvPr id="10" name="">
+            <a:extLst xmlns:a="http://schemas.openxmlformats.org/drawingml/2006/main">
+              <a:ext uri="{FF2B5EF4-FFF2-40B4-BE49-F238E27FC236}">
+                <a16:creationId xmlns:a16="http://schemas.microsoft.com/office/drawing/2014/main" id="{194F0E1F-3F78-47CF-AF86-A24DF4CCFAAB}"/>
+              </a:ext>
+            </a:extLst>
+          </p:cNvPr>
+          <p:cNvSpPr>
+            <a:spLocks xmlns:a="http://schemas.openxmlformats.org/drawingml/2006/main" noGrp="1"/>
+          </p:cNvSpPr>
+          <p:nvPr/>
+        </p:nvSpPr>
+        <p:spPr>
+          <a:xfrm xmlns:a="http://schemas.openxmlformats.org/drawingml/2006/main">
+            <a:off x="1047750" y="4962525"/>
+            <a:ext cx="190500" cy="247650"/>
+          </a:xfrm>
+          <a:prstGeom xmlns:a="http://schemas.openxmlformats.org/drawingml/2006/main" prst="rect">
+            <a:avLst/>
+          </a:prstGeom>
+          <a:noFill xmlns:a="http://schemas.openxmlformats.org/drawingml/2006/main"/>
+          <a:ln xmlns:a="http://schemas.openxmlformats.org/drawingml/2006/main" w="0">
+            <a:noFill/>
+            <a:prstDash val="solid"/>
+          </a:ln>
+        </p:spPr>
+        <p:txBody>
+          <a:bodyPr xmlns:a="http://schemas.openxmlformats.org/drawingml/2006/main"/>
+          <a:lstStyle xmlns:a="http://schemas.openxmlformats.org/drawingml/2006/main"/>
+          <a:p xmlns:a="http://schemas.openxmlformats.org/drawingml/2006/main">
+            <a:pPr algn="l">
+              <a:defRPr sz="1575" b="1" i="0">
+                <a:solidFill>
+                  <a:srgbClr val="FF6B35"/>
+                </a:solidFill>
+              </a:defRPr>
+            </a:pPr>
+            <a:r>
+              <a:rPr sz="1575" b="1" i="0">
+                <a:solidFill>
+                  <a:srgbClr val="FF6B35"/>
+                </a:solidFill>
+              </a:rPr>
+              <a:t>-</a:t>
+            </a:r>
+          </a:p>
+        </p:txBody>
+      </p:sp>
+      <p:sp>
+        <p:nvSpPr>
+          <p:cNvPr id="11" name="">
+            <a:extLst xmlns:a="http://schemas.openxmlformats.org/drawingml/2006/main">
+              <a:ext uri="{FF2B5EF4-FFF2-40B4-BE49-F238E27FC236}">
+                <a16:creationId xmlns:a16="http://schemas.microsoft.com/office/drawing/2014/main" id="{ADE94675-343B-4100-81AC-CAE458CFE4B8}"/>
+              </a:ext>
+            </a:extLst>
+          </p:cNvPr>
+          <p:cNvSpPr>
+            <a:spLocks xmlns:a="http://schemas.openxmlformats.org/drawingml/2006/main" noGrp="1"/>
+          </p:cNvSpPr>
+          <p:nvPr/>
+        </p:nvSpPr>
+        <p:spPr>
+          <a:xfrm xmlns:a="http://schemas.openxmlformats.org/drawingml/2006/main">
+            <a:off x="1314450" y="4953000"/>
+            <a:ext cx="4210050" cy="514350"/>
+          </a:xfrm>
+          <a:prstGeom xmlns:a="http://schemas.openxmlformats.org/drawingml/2006/main" prst="rect">
+            <a:avLst/>
+          </a:prstGeom>
+          <a:noFill xmlns:a="http://schemas.openxmlformats.org/drawingml/2006/main"/>
+          <a:ln xmlns:a="http://schemas.openxmlformats.org/drawingml/2006/main" w="0">
+            <a:noFill/>
+            <a:prstDash val="solid"/>
+          </a:ln>
+        </p:spPr>
+        <p:txBody>
+          <a:bodyPr xmlns:a="http://schemas.openxmlformats.org/drawingml/2006/main"/>
+          <a:lstStyle xmlns:a="http://schemas.openxmlformats.org/drawingml/2006/main"/>
+          <a:p xmlns:a="http://schemas.openxmlformats.org/drawingml/2006/main">
+            <a:pPr algn="l">
+              <a:defRPr sz="1575" b="0" i="0">
+                <a:solidFill>
+                  <a:srgbClr val="222222"/>
+                </a:solidFill>
+              </a:defRPr>
+            </a:pPr>
+            <a:r>
+              <a:rPr sz="1575" b="0" i="0">
+                <a:solidFill>
+                  <a:srgbClr val="222222"/>
+                </a:solidFill>
+              </a:rPr>
+              <a:t>Can average away useful conditions when a feature is good in one regime and bad in another.</a:t>
+            </a:r>
+          </a:p>
+        </p:txBody>
+      </p:sp>
+      <p:sp>
+        <p:nvSpPr>
+          <p:cNvPr id="12" name="">
+            <a:extLst xmlns:a="http://schemas.openxmlformats.org/drawingml/2006/main">
+              <a:ext uri="{FF2B5EF4-FFF2-40B4-BE49-F238E27FC236}">
+                <a16:creationId xmlns:a16="http://schemas.microsoft.com/office/drawing/2014/main" id="{29DA1D1E-6602-45AE-8A3F-912B4FF6B91C}"/>
+              </a:ext>
+            </a:extLst>
+          </p:cNvPr>
+          <p:cNvSpPr>
+            <a:spLocks xmlns:a="http://schemas.openxmlformats.org/drawingml/2006/main" noGrp="1"/>
+          </p:cNvSpPr>
+          <p:nvPr/>
+        </p:nvSpPr>
+        <p:spPr>
+          <a:xfrm xmlns:a="http://schemas.openxmlformats.org/drawingml/2006/main">
+            <a:off x="6743700" y="4124325"/>
+            <a:ext cx="190500" cy="247650"/>
+          </a:xfrm>
+          <a:prstGeom xmlns:a="http://schemas.openxmlformats.org/drawingml/2006/main" prst="rect">
+            <a:avLst/>
+          </a:prstGeom>
+          <a:noFill xmlns:a="http://schemas.openxmlformats.org/drawingml/2006/main"/>
+          <a:ln xmlns:a="http://schemas.openxmlformats.org/drawingml/2006/main" w="0">
+            <a:noFill/>
+            <a:prstDash val="solid"/>
+          </a:ln>
+        </p:spPr>
+        <p:txBody>
+          <a:bodyPr xmlns:a="http://schemas.openxmlformats.org/drawingml/2006/main"/>
+          <a:lstStyle xmlns:a="http://schemas.openxmlformats.org/drawingml/2006/main"/>
+          <a:p xmlns:a="http://schemas.openxmlformats.org/drawingml/2006/main">
+            <a:pPr algn="l">
+              <a:defRPr sz="1575" b="1" i="0">
+                <a:solidFill>
+                  <a:srgbClr val="FF6B35"/>
+                </a:solidFill>
+              </a:defRPr>
+            </a:pPr>
+            <a:r>
+              <a:rPr sz="1575" b="1" i="0">
+                <a:solidFill>
+                  <a:srgbClr val="FF6B35"/>
+                </a:solidFill>
+              </a:rPr>
+              <a:t>-</a:t>
+            </a:r>
+          </a:p>
+        </p:txBody>
+      </p:sp>
+      <p:sp>
+        <p:nvSpPr>
+          <p:cNvPr id="13" name="">
+            <a:extLst xmlns:a="http://schemas.openxmlformats.org/drawingml/2006/main">
+              <a:ext uri="{FF2B5EF4-FFF2-40B4-BE49-F238E27FC236}">
+                <a16:creationId xmlns:a16="http://schemas.microsoft.com/office/drawing/2014/main" id="{6C357CBD-2EAE-4868-A948-6333BB6858B3}"/>
+              </a:ext>
+            </a:extLst>
+          </p:cNvPr>
+          <p:cNvSpPr>
+            <a:spLocks xmlns:a="http://schemas.openxmlformats.org/drawingml/2006/main" noGrp="1"/>
+          </p:cNvSpPr>
+          <p:nvPr/>
+        </p:nvSpPr>
+        <p:spPr>
+          <a:xfrm xmlns:a="http://schemas.openxmlformats.org/drawingml/2006/main">
+            <a:off x="7010400" y="4114800"/>
+            <a:ext cx="4210050" cy="514350"/>
+          </a:xfrm>
+          <a:prstGeom xmlns:a="http://schemas.openxmlformats.org/drawingml/2006/main" prst="rect">
+            <a:avLst/>
+          </a:prstGeom>
+          <a:noFill xmlns:a="http://schemas.openxmlformats.org/drawingml/2006/main"/>
+          <a:ln xmlns:a="http://schemas.openxmlformats.org/drawingml/2006/main" w="0">
+            <a:noFill/>
+            <a:prstDash val="solid"/>
+          </a:ln>
+        </p:spPr>
+        <p:txBody>
+          <a:bodyPr xmlns:a="http://schemas.openxmlformats.org/drawingml/2006/main"/>
+          <a:lstStyle xmlns:a="http://schemas.openxmlformats.org/drawingml/2006/main"/>
+          <a:p xmlns:a="http://schemas.openxmlformats.org/drawingml/2006/main">
+            <a:pPr algn="l">
+              <a:defRPr sz="1575" b="0" i="0">
+                <a:solidFill>
+                  <a:srgbClr val="222222"/>
+                </a:solidFill>
+              </a:defRPr>
+            </a:pPr>
+            <a:r>
+              <a:rPr sz="1575" b="0" i="0">
+                <a:solidFill>
+                  <a:srgbClr val="222222"/>
+                </a:solidFill>
+              </a:rPr>
+              <a:t>Can express rules like momentum only matters with supportive market context.</a:t>
+            </a:r>
+          </a:p>
+        </p:txBody>
+      </p:sp>
+      <p:sp>
+        <p:nvSpPr>
+          <p:cNvPr id="14" name="">
+            <a:extLst xmlns:a="http://schemas.openxmlformats.org/drawingml/2006/main">
+              <a:ext uri="{FF2B5EF4-FFF2-40B4-BE49-F238E27FC236}">
+                <a16:creationId xmlns:a16="http://schemas.microsoft.com/office/drawing/2014/main" id="{6DA06DC1-0695-4D14-8114-02D614DD9E04}"/>
+              </a:ext>
+            </a:extLst>
+          </p:cNvPr>
+          <p:cNvSpPr>
+            <a:spLocks xmlns:a="http://schemas.openxmlformats.org/drawingml/2006/main" noGrp="1"/>
+          </p:cNvSpPr>
+          <p:nvPr/>
+        </p:nvSpPr>
+        <p:spPr>
+          <a:xfrm xmlns:a="http://schemas.openxmlformats.org/drawingml/2006/main">
+            <a:off x="6743700" y="4962525"/>
+            <a:ext cx="190500" cy="247650"/>
+          </a:xfrm>
+          <a:prstGeom xmlns:a="http://schemas.openxmlformats.org/drawingml/2006/main" prst="rect">
+            <a:avLst/>
+          </a:prstGeom>
+          <a:noFill xmlns:a="http://schemas.openxmlformats.org/drawingml/2006/main"/>
+          <a:ln xmlns:a="http://schemas.openxmlformats.org/drawingml/2006/main" w="0">
+            <a:noFill/>
+            <a:prstDash val="solid"/>
+          </a:ln>
+        </p:spPr>
+        <p:txBody>
+          <a:bodyPr xmlns:a="http://schemas.openxmlformats.org/drawingml/2006/main"/>
+          <a:lstStyle xmlns:a="http://schemas.openxmlformats.org/drawingml/2006/main"/>
+          <a:p xmlns:a="http://schemas.openxmlformats.org/drawingml/2006/main">
+            <a:pPr algn="l">
+              <a:defRPr sz="1575" b="1" i="0">
+                <a:solidFill>
+                  <a:srgbClr val="FF6B35"/>
+                </a:solidFill>
+              </a:defRPr>
+            </a:pPr>
+            <a:r>
+              <a:rPr sz="1575" b="1" i="0">
+                <a:solidFill>
+                  <a:srgbClr val="FF6B35"/>
+                </a:solidFill>
+              </a:rPr>
+              <a:t>-</a:t>
+            </a:r>
+          </a:p>
+        </p:txBody>
+      </p:sp>
+      <p:sp>
+        <p:nvSpPr>
+          <p:cNvPr id="15" name="">
+            <a:extLst xmlns:a="http://schemas.openxmlformats.org/drawingml/2006/main">
+              <a:ext uri="{FF2B5EF4-FFF2-40B4-BE49-F238E27FC236}">
+                <a16:creationId xmlns:a16="http://schemas.microsoft.com/office/drawing/2014/main" id="{5FAD8F76-9B93-4981-8EC6-42C2B8950F1E}"/>
+              </a:ext>
+            </a:extLst>
+          </p:cNvPr>
+          <p:cNvSpPr>
+            <a:spLocks xmlns:a="http://schemas.openxmlformats.org/drawingml/2006/main" noGrp="1"/>
+          </p:cNvSpPr>
+          <p:nvPr/>
+        </p:nvSpPr>
+        <p:spPr>
+          <a:xfrm xmlns:a="http://schemas.openxmlformats.org/drawingml/2006/main">
+            <a:off x="7010400" y="4953000"/>
+            <a:ext cx="4210050" cy="514350"/>
+          </a:xfrm>
+          <a:prstGeom xmlns:a="http://schemas.openxmlformats.org/drawingml/2006/main" prst="rect">
+            <a:avLst/>
+          </a:prstGeom>
+          <a:noFill xmlns:a="http://schemas.openxmlformats.org/drawingml/2006/main"/>
+          <a:ln xmlns:a="http://schemas.openxmlformats.org/drawingml/2006/main" w="0">
+            <a:noFill/>
+            <a:prstDash val="solid"/>
+          </a:ln>
+        </p:spPr>
+        <p:txBody>
+          <a:bodyPr xmlns:a="http://schemas.openxmlformats.org/drawingml/2006/main"/>
+          <a:lstStyle xmlns:a="http://schemas.openxmlformats.org/drawingml/2006/main"/>
+          <a:p xmlns:a="http://schemas.openxmlformats.org/drawingml/2006/main">
+            <a:pPr algn="l">
+              <a:defRPr sz="1575" b="0" i="0">
+                <a:solidFill>
+                  <a:srgbClr val="222222"/>
+                </a:solidFill>
+              </a:defRPr>
+            </a:pPr>
+            <a:r>
+              <a:rPr sz="1575" b="0" i="0">
+                <a:solidFill>
+                  <a:srgbClr val="222222"/>
+                </a:solidFill>
+              </a:rPr>
+              <a:t>Must be judged carefully, because extra flexibility can overfit if we start tuning too many knobs.</a:t>
+            </a:r>
+          </a:p>
+        </p:txBody>
+      </p:sp>
+    </p:spTree>
+    <p:extLst>
+      <p:ext uri="{BB962C8B-B14F-4D97-AF65-F5344CB8AC3E}">
+        <p14:creationId xmlns:p14="http://schemas.microsoft.com/office/powerpoint/2010/main" val="2064540952"/>
+      </p:ext>
+    </p:extLst>
+  </p:cSld>
+</p:sld>
+</file>
+
+<file path=ppt/slides/slide31.xml><?xml version="1.0" encoding="utf-8"?>
+<p:sld xmlns:p="http://schemas.openxmlformats.org/presentationml/2006/main">
+  <p:cSld>
+    <p:bg>
+      <p:bgPr>
+        <a:solidFill xmlns:a="http://schemas.openxmlformats.org/drawingml/2006/main">
+          <a:srgbClr val="FFFFFF"/>
+        </a:solidFill>
+      </p:bgPr>
+    </p:bg>
+    <p:spTree>
+      <p:nvGrpSpPr>
+        <p:cNvPr id="1" name=""/>
+        <p:cNvGrpSpPr/>
+        <p:nvPr/>
+      </p:nvGrpSpPr>
+      <p:grpSpPr>
+        <a:xfrm xmlns:a="http://schemas.openxmlformats.org/drawingml/2006/main"/>
+      </p:grpSpPr>
+      <p:sp>
+        <p:nvSpPr>
+          <p:cNvPr id="1" name="">
+            <a:extLst xmlns:a="http://schemas.openxmlformats.org/drawingml/2006/main">
+              <a:ext uri="{FF2B5EF4-FFF2-40B4-BE49-F238E27FC236}">
+                <a16:creationId xmlns:a16="http://schemas.microsoft.com/office/drawing/2014/main" id="{2AEC2C2C-486E-4374-B0FC-B4E912C8FB84}"/>
+              </a:ext>
+            </a:extLst>
+          </p:cNvPr>
+          <p:cNvSpPr>
+            <a:spLocks xmlns:a="http://schemas.openxmlformats.org/drawingml/2006/main" noGrp="1"/>
+          </p:cNvSpPr>
+          <p:nvPr/>
+        </p:nvSpPr>
+        <p:spPr>
+          <a:xfrm xmlns:a="http://schemas.openxmlformats.org/drawingml/2006/main">
+            <a:off x="685800" y="400050"/>
+            <a:ext cx="8572500" cy="247650"/>
+          </a:xfrm>
+          <a:prstGeom xmlns:a="http://schemas.openxmlformats.org/drawingml/2006/main" prst="rect">
+            <a:avLst/>
+          </a:prstGeom>
+          <a:noFill xmlns:a="http://schemas.openxmlformats.org/drawingml/2006/main"/>
+          <a:ln xmlns:a="http://schemas.openxmlformats.org/drawingml/2006/main" w="0">
+            <a:noFill/>
+            <a:prstDash val="solid"/>
+          </a:ln>
+        </p:spPr>
+        <p:txBody>
+          <a:bodyPr xmlns:a="http://schemas.openxmlformats.org/drawingml/2006/main"/>
+          <a:lstStyle xmlns:a="http://schemas.openxmlformats.org/drawingml/2006/main"/>
+          <a:p xmlns:a="http://schemas.openxmlformats.org/drawingml/2006/main">
+            <a:pPr algn="l">
+              <a:defRPr sz="975" b="1" i="0">
+                <a:solidFill>
+                  <a:srgbClr val="555555"/>
+                </a:solidFill>
+              </a:defRPr>
+            </a:pPr>
+            <a:r>
+              <a:rPr sz="975" b="1" i="0">
+                <a:solidFill>
+                  <a:srgbClr val="555555"/>
+                </a:solidFill>
+              </a:rPr>
+              <a:t>GEN5.4 ML DECISION ENGINE</a:t>
+            </a:r>
+          </a:p>
+        </p:txBody>
+      </p:sp>
+      <p:sp>
+        <p:nvSpPr>
+          <p:cNvPr id="2" name="">
+            <a:extLst xmlns:a="http://schemas.openxmlformats.org/drawingml/2006/main">
+              <a:ext uri="{FF2B5EF4-FFF2-40B4-BE49-F238E27FC236}">
+                <a16:creationId xmlns:a16="http://schemas.microsoft.com/office/drawing/2014/main" id="{83E8B660-E94E-4080-B6F0-88E6FE0E2678}"/>
+              </a:ext>
+            </a:extLst>
+          </p:cNvPr>
+          <p:cNvSpPr>
+            <a:spLocks xmlns:a="http://schemas.openxmlformats.org/drawingml/2006/main" noGrp="1"/>
+          </p:cNvSpPr>
+          <p:nvPr/>
+        </p:nvSpPr>
+        <p:spPr>
+          <a:xfrm xmlns:a="http://schemas.openxmlformats.org/drawingml/2006/main">
+            <a:off x="685800" y="723900"/>
+            <a:ext cx="10287000" cy="876300"/>
+          </a:xfrm>
+          <a:prstGeom xmlns:a="http://schemas.openxmlformats.org/drawingml/2006/main" prst="rect">
+            <a:avLst/>
+          </a:prstGeom>
+          <a:noFill xmlns:a="http://schemas.openxmlformats.org/drawingml/2006/main"/>
+          <a:ln xmlns:a="http://schemas.openxmlformats.org/drawingml/2006/main" w="0">
+            <a:noFill/>
+            <a:prstDash val="solid"/>
+          </a:ln>
+        </p:spPr>
+        <p:txBody>
+          <a:bodyPr xmlns:a="http://schemas.openxmlformats.org/drawingml/2006/main"/>
+          <a:lstStyle xmlns:a="http://schemas.openxmlformats.org/drawingml/2006/main"/>
+          <a:p xmlns:a="http://schemas.openxmlformats.org/drawingml/2006/main">
+            <a:pPr algn="l">
+              <a:defRPr sz="2850" b="1" i="0">
+                <a:solidFill>
+                  <a:srgbClr val="000000"/>
+                </a:solidFill>
+              </a:defRPr>
+            </a:pPr>
+            <a:r>
+              <a:rPr sz="2850" b="1" i="0">
+                <a:solidFill>
+                  <a:srgbClr val="000000"/>
+                </a:solidFill>
+              </a:rPr>
+              <a:t>XGBoost improved the replay, but it still did not beat the 2020 basket</a:t>
+            </a:r>
+          </a:p>
+        </p:txBody>
+      </p:sp>
+      <p:sp>
+        <p:nvSpPr>
+          <p:cNvPr id="3" name="">
+            <a:extLst xmlns:a="http://schemas.openxmlformats.org/drawingml/2006/main">
+              <a:ext uri="{FF2B5EF4-FFF2-40B4-BE49-F238E27FC236}">
+                <a16:creationId xmlns:a16="http://schemas.microsoft.com/office/drawing/2014/main" id="{02852B1A-5CD1-4D16-95DD-9F3833994896}"/>
+              </a:ext>
+            </a:extLst>
+          </p:cNvPr>
+          <p:cNvSpPr>
+            <a:spLocks xmlns:a="http://schemas.openxmlformats.org/drawingml/2006/main" noGrp="1"/>
+          </p:cNvSpPr>
+          <p:nvPr/>
+        </p:nvSpPr>
+        <p:spPr>
+          <a:xfrm xmlns:a="http://schemas.openxmlformats.org/drawingml/2006/main">
+            <a:off x="685800" y="1657350"/>
+            <a:ext cx="10820400" cy="19050"/>
+          </a:xfrm>
+          <a:prstGeom xmlns:a="http://schemas.openxmlformats.org/drawingml/2006/main" prst="rect">
+            <a:avLst/>
+          </a:prstGeom>
+          <a:solidFill xmlns:a="http://schemas.openxmlformats.org/drawingml/2006/main">
+            <a:srgbClr val="B8BCC4"/>
+          </a:solidFill>
+          <a:ln xmlns:a="http://schemas.openxmlformats.org/drawingml/2006/main" w="0">
+            <a:noFill/>
+            <a:prstDash val="solid"/>
+          </a:ln>
+        </p:spPr>
+      </p:sp>
+      <p:sp>
+        <p:nvSpPr>
+          <p:cNvPr id="4" name="">
+            <a:extLst xmlns:a="http://schemas.openxmlformats.org/drawingml/2006/main">
+              <a:ext uri="{FF2B5EF4-FFF2-40B4-BE49-F238E27FC236}">
+                <a16:creationId xmlns:a16="http://schemas.microsoft.com/office/drawing/2014/main" id="{85B17045-B285-4A51-9FE0-8C2387A2CEE0}"/>
+              </a:ext>
+            </a:extLst>
+          </p:cNvPr>
+          <p:cNvSpPr>
+            <a:spLocks xmlns:a="http://schemas.openxmlformats.org/drawingml/2006/main" noGrp="1"/>
+          </p:cNvSpPr>
+          <p:nvPr/>
+        </p:nvSpPr>
+        <p:spPr>
+          <a:xfrm xmlns:a="http://schemas.openxmlformats.org/drawingml/2006/main">
+            <a:off x="704850" y="2152650"/>
+            <a:ext cx="2333625" cy="1428750"/>
+          </a:xfrm>
+          <a:prstGeom xmlns:a="http://schemas.openxmlformats.org/drawingml/2006/main" prst="rect">
+            <a:avLst/>
+          </a:prstGeom>
+          <a:solidFill xmlns:a="http://schemas.openxmlformats.org/drawingml/2006/main">
+            <a:srgbClr val="EDEDED"/>
+          </a:solidFill>
+          <a:ln xmlns:a="http://schemas.openxmlformats.org/drawingml/2006/main" w="9525">
+            <a:solidFill>
+              <a:srgbClr val="B8BCC4"/>
+            </a:solidFill>
+            <a:prstDash val="solid"/>
+          </a:ln>
+        </p:spPr>
+      </p:sp>
+      <p:sp>
+        <p:nvSpPr>
+          <p:cNvPr id="5" name="">
+            <a:extLst xmlns:a="http://schemas.openxmlformats.org/drawingml/2006/main">
+              <a:ext uri="{FF2B5EF4-FFF2-40B4-BE49-F238E27FC236}">
+                <a16:creationId xmlns:a16="http://schemas.microsoft.com/office/drawing/2014/main" id="{76F53DC4-BBC5-4073-907F-4D4A3246608C}"/>
+              </a:ext>
+            </a:extLst>
+          </p:cNvPr>
+          <p:cNvSpPr>
+            <a:spLocks xmlns:a="http://schemas.openxmlformats.org/drawingml/2006/main" noGrp="1"/>
+          </p:cNvSpPr>
+          <p:nvPr/>
+        </p:nvSpPr>
+        <p:spPr>
+          <a:xfrm xmlns:a="http://schemas.openxmlformats.org/drawingml/2006/main">
+            <a:off x="876300" y="2305050"/>
+            <a:ext cx="1990725" cy="171450"/>
+          </a:xfrm>
+          <a:prstGeom xmlns:a="http://schemas.openxmlformats.org/drawingml/2006/main" prst="rect">
+            <a:avLst/>
+          </a:prstGeom>
+          <a:noFill xmlns:a="http://schemas.openxmlformats.org/drawingml/2006/main"/>
+          <a:ln xmlns:a="http://schemas.openxmlformats.org/drawingml/2006/main" w="0">
+            <a:noFill/>
+            <a:prstDash val="solid"/>
+          </a:ln>
+        </p:spPr>
+        <p:txBody>
+          <a:bodyPr xmlns:a="http://schemas.openxmlformats.org/drawingml/2006/main"/>
+          <a:lstStyle xmlns:a="http://schemas.openxmlformats.org/drawingml/2006/main"/>
+          <a:p xmlns:a="http://schemas.openxmlformats.org/drawingml/2006/main">
+            <a:pPr algn="l">
+              <a:defRPr sz="900" b="1" i="0">
+                <a:solidFill>
+                  <a:srgbClr val="555555"/>
+                </a:solidFill>
+              </a:defRPr>
+            </a:pPr>
+            <a:r>
+              <a:rPr sz="900" b="1" i="0">
+                <a:solidFill>
+                  <a:srgbClr val="555555"/>
+                </a:solidFill>
+              </a:rPr>
+              <a:t>GUARDRAILS</a:t>
+            </a:r>
+          </a:p>
+        </p:txBody>
+      </p:sp>
+      <p:sp>
+        <p:nvSpPr>
+          <p:cNvPr id="6" name="">
+            <a:extLst xmlns:a="http://schemas.openxmlformats.org/drawingml/2006/main">
+              <a:ext uri="{FF2B5EF4-FFF2-40B4-BE49-F238E27FC236}">
+                <a16:creationId xmlns:a16="http://schemas.microsoft.com/office/drawing/2014/main" id="{9FA7775B-44E9-4431-894B-881ECBBA55C9}"/>
+              </a:ext>
+            </a:extLst>
+          </p:cNvPr>
+          <p:cNvSpPr>
+            <a:spLocks xmlns:a="http://schemas.openxmlformats.org/drawingml/2006/main" noGrp="1"/>
+          </p:cNvSpPr>
+          <p:nvPr/>
+        </p:nvSpPr>
+        <p:spPr>
+          <a:xfrm xmlns:a="http://schemas.openxmlformats.org/drawingml/2006/main">
+            <a:off x="876300" y="2552700"/>
+            <a:ext cx="1990725" cy="361950"/>
+          </a:xfrm>
+          <a:prstGeom xmlns:a="http://schemas.openxmlformats.org/drawingml/2006/main" prst="rect">
+            <a:avLst/>
+          </a:prstGeom>
+          <a:noFill xmlns:a="http://schemas.openxmlformats.org/drawingml/2006/main"/>
+          <a:ln xmlns:a="http://schemas.openxmlformats.org/drawingml/2006/main" w="0">
+            <a:noFill/>
+            <a:prstDash val="solid"/>
+          </a:ln>
+        </p:spPr>
+        <p:txBody>
+          <a:bodyPr xmlns:a="http://schemas.openxmlformats.org/drawingml/2006/main"/>
+          <a:lstStyle xmlns:a="http://schemas.openxmlformats.org/drawingml/2006/main"/>
+          <a:p xmlns:a="http://schemas.openxmlformats.org/drawingml/2006/main">
+            <a:pPr algn="l">
+              <a:defRPr sz="2250" b="1" i="0">
+                <a:solidFill>
+                  <a:srgbClr val="000000"/>
+                </a:solidFill>
+              </a:defRPr>
+            </a:pPr>
+            <a:r>
+              <a:rPr sz="2250" b="1" i="0">
+                <a:solidFill>
+                  <a:srgbClr val="000000"/>
+                </a:solidFill>
+              </a:rPr>
+              <a:t>All PASS</a:t>
+            </a:r>
+          </a:p>
+        </p:txBody>
+      </p:sp>
+      <p:sp>
+        <p:nvSpPr>
+          <p:cNvPr id="7" name="">
+            <a:extLst xmlns:a="http://schemas.openxmlformats.org/drawingml/2006/main">
+              <a:ext uri="{FF2B5EF4-FFF2-40B4-BE49-F238E27FC236}">
+                <a16:creationId xmlns:a16="http://schemas.microsoft.com/office/drawing/2014/main" id="{6AD995BB-73F9-4D21-9FCE-7C4394C9AE3D}"/>
+              </a:ext>
+            </a:extLst>
+          </p:cNvPr>
+          <p:cNvSpPr>
+            <a:spLocks xmlns:a="http://schemas.openxmlformats.org/drawingml/2006/main" noGrp="1"/>
+          </p:cNvSpPr>
+          <p:nvPr/>
+        </p:nvSpPr>
+        <p:spPr>
+          <a:xfrm xmlns:a="http://schemas.openxmlformats.org/drawingml/2006/main">
+            <a:off x="876300" y="2971800"/>
+            <a:ext cx="1990725" cy="552450"/>
+          </a:xfrm>
+          <a:prstGeom xmlns:a="http://schemas.openxmlformats.org/drawingml/2006/main" prst="rect">
+            <a:avLst/>
+          </a:prstGeom>
+          <a:noFill xmlns:a="http://schemas.openxmlformats.org/drawingml/2006/main"/>
+          <a:ln xmlns:a="http://schemas.openxmlformats.org/drawingml/2006/main" w="0">
+            <a:noFill/>
+            <a:prstDash val="solid"/>
+          </a:ln>
+        </p:spPr>
+        <p:txBody>
+          <a:bodyPr xmlns:a="http://schemas.openxmlformats.org/drawingml/2006/main"/>
+          <a:lstStyle xmlns:a="http://schemas.openxmlformats.org/drawingml/2006/main"/>
+          <a:p xmlns:a="http://schemas.openxmlformats.org/drawingml/2006/main">
+            <a:pPr algn="l">
+              <a:defRPr sz="1125" b="0" i="0">
+                <a:solidFill>
+                  <a:srgbClr val="555555"/>
+                </a:solidFill>
+              </a:defRPr>
+            </a:pPr>
+            <a:r>
+              <a:rPr sz="1125" b="0" i="0">
+                <a:solidFill>
+                  <a:srgbClr val="555555"/>
+                </a:solidFill>
+              </a:rPr>
+              <a:t>Fit, params, and thresholds stay inside TRAIN.</a:t>
+            </a:r>
+          </a:p>
+        </p:txBody>
+      </p:sp>
+      <p:sp>
+        <p:nvSpPr>
+          <p:cNvPr id="8" name="">
+            <a:extLst xmlns:a="http://schemas.openxmlformats.org/drawingml/2006/main">
+              <a:ext uri="{FF2B5EF4-FFF2-40B4-BE49-F238E27FC236}">
+                <a16:creationId xmlns:a16="http://schemas.microsoft.com/office/drawing/2014/main" id="{817C6A63-8559-41E9-87A7-9D4232370D25}"/>
+              </a:ext>
+            </a:extLst>
+          </p:cNvPr>
+          <p:cNvSpPr>
+            <a:spLocks xmlns:a="http://schemas.openxmlformats.org/drawingml/2006/main" noGrp="1"/>
+          </p:cNvSpPr>
+          <p:nvPr/>
+        </p:nvSpPr>
+        <p:spPr>
+          <a:xfrm xmlns:a="http://schemas.openxmlformats.org/drawingml/2006/main">
+            <a:off x="3409950" y="2152650"/>
+            <a:ext cx="2333625" cy="1428750"/>
+          </a:xfrm>
+          <a:prstGeom xmlns:a="http://schemas.openxmlformats.org/drawingml/2006/main" prst="rect">
+            <a:avLst/>
+          </a:prstGeom>
+          <a:solidFill xmlns:a="http://schemas.openxmlformats.org/drawingml/2006/main">
+            <a:srgbClr val="EDEDED"/>
+          </a:solidFill>
+          <a:ln xmlns:a="http://schemas.openxmlformats.org/drawingml/2006/main" w="9525">
+            <a:solidFill>
+              <a:srgbClr val="B8BCC4"/>
+            </a:solidFill>
+            <a:prstDash val="solid"/>
+          </a:ln>
+        </p:spPr>
+      </p:sp>
+      <p:sp>
+        <p:nvSpPr>
+          <p:cNvPr id="9" name="">
+            <a:extLst xmlns:a="http://schemas.openxmlformats.org/drawingml/2006/main">
+              <a:ext uri="{FF2B5EF4-FFF2-40B4-BE49-F238E27FC236}">
+                <a16:creationId xmlns:a16="http://schemas.microsoft.com/office/drawing/2014/main" id="{17D6369F-842D-4D44-A0BF-80EFE67BBA31}"/>
+              </a:ext>
+            </a:extLst>
+          </p:cNvPr>
+          <p:cNvSpPr>
+            <a:spLocks xmlns:a="http://schemas.openxmlformats.org/drawingml/2006/main" noGrp="1"/>
+          </p:cNvSpPr>
+          <p:nvPr/>
+        </p:nvSpPr>
+        <p:spPr>
+          <a:xfrm xmlns:a="http://schemas.openxmlformats.org/drawingml/2006/main">
+            <a:off x="3581400" y="2305050"/>
+            <a:ext cx="1990725" cy="171450"/>
+          </a:xfrm>
+          <a:prstGeom xmlns:a="http://schemas.openxmlformats.org/drawingml/2006/main" prst="rect">
+            <a:avLst/>
+          </a:prstGeom>
+          <a:noFill xmlns:a="http://schemas.openxmlformats.org/drawingml/2006/main"/>
+          <a:ln xmlns:a="http://schemas.openxmlformats.org/drawingml/2006/main" w="0">
+            <a:noFill/>
+            <a:prstDash val="solid"/>
+          </a:ln>
+        </p:spPr>
+        <p:txBody>
+          <a:bodyPr xmlns:a="http://schemas.openxmlformats.org/drawingml/2006/main"/>
+          <a:lstStyle xmlns:a="http://schemas.openxmlformats.org/drawingml/2006/main"/>
+          <a:p xmlns:a="http://schemas.openxmlformats.org/drawingml/2006/main">
+            <a:pPr algn="l">
+              <a:defRPr sz="900" b="1" i="0">
+                <a:solidFill>
+                  <a:srgbClr val="555555"/>
+                </a:solidFill>
+              </a:defRPr>
+            </a:pPr>
+            <a:r>
+              <a:rPr sz="900" b="1" i="0">
+                <a:solidFill>
+                  <a:srgbClr val="555555"/>
+                </a:solidFill>
+              </a:rPr>
+              <a:t>2020 XGB</a:t>
+            </a:r>
+          </a:p>
+        </p:txBody>
+      </p:sp>
+      <p:sp>
+        <p:nvSpPr>
+          <p:cNvPr id="10" name="">
+            <a:extLst xmlns:a="http://schemas.openxmlformats.org/drawingml/2006/main">
+              <a:ext uri="{FF2B5EF4-FFF2-40B4-BE49-F238E27FC236}">
+                <a16:creationId xmlns:a16="http://schemas.microsoft.com/office/drawing/2014/main" id="{A2B40512-EA1F-4576-BBB1-1C81B9572928}"/>
+              </a:ext>
+            </a:extLst>
+          </p:cNvPr>
+          <p:cNvSpPr>
+            <a:spLocks xmlns:a="http://schemas.openxmlformats.org/drawingml/2006/main" noGrp="1"/>
+          </p:cNvSpPr>
+          <p:nvPr/>
+        </p:nvSpPr>
+        <p:spPr>
+          <a:xfrm xmlns:a="http://schemas.openxmlformats.org/drawingml/2006/main">
+            <a:off x="3581400" y="2552700"/>
+            <a:ext cx="1990725" cy="361950"/>
+          </a:xfrm>
+          <a:prstGeom xmlns:a="http://schemas.openxmlformats.org/drawingml/2006/main" prst="rect">
+            <a:avLst/>
+          </a:prstGeom>
+          <a:noFill xmlns:a="http://schemas.openxmlformats.org/drawingml/2006/main"/>
+          <a:ln xmlns:a="http://schemas.openxmlformats.org/drawingml/2006/main" w="0">
+            <a:noFill/>
+            <a:prstDash val="solid"/>
+          </a:ln>
+        </p:spPr>
+        <p:txBody>
+          <a:bodyPr xmlns:a="http://schemas.openxmlformats.org/drawingml/2006/main"/>
+          <a:lstStyle xmlns:a="http://schemas.openxmlformats.org/drawingml/2006/main"/>
+          <a:p xmlns:a="http://schemas.openxmlformats.org/drawingml/2006/main">
+            <a:pPr algn="l">
+              <a:defRPr sz="2250" b="1" i="0">
+                <a:solidFill>
+                  <a:srgbClr val="000000"/>
+                </a:solidFill>
+              </a:defRPr>
+            </a:pPr>
+            <a:r>
+              <a:rPr sz="2250" b="1" i="0">
+                <a:solidFill>
+                  <a:srgbClr val="000000"/>
+                </a:solidFill>
+              </a:rPr>
+              <a:t>79.1%</a:t>
+            </a:r>
+          </a:p>
+        </p:txBody>
+      </p:sp>
+      <p:sp>
+        <p:nvSpPr>
+          <p:cNvPr id="11" name="">
+            <a:extLst xmlns:a="http://schemas.openxmlformats.org/drawingml/2006/main">
+              <a:ext uri="{FF2B5EF4-FFF2-40B4-BE49-F238E27FC236}">
+                <a16:creationId xmlns:a16="http://schemas.microsoft.com/office/drawing/2014/main" id="{D46E2D47-34E3-4845-A78D-D5BBA9E587E7}"/>
+              </a:ext>
+            </a:extLst>
+          </p:cNvPr>
+          <p:cNvSpPr>
+            <a:spLocks xmlns:a="http://schemas.openxmlformats.org/drawingml/2006/main" noGrp="1"/>
+          </p:cNvSpPr>
+          <p:nvPr/>
+        </p:nvSpPr>
+        <p:spPr>
+          <a:xfrm xmlns:a="http://schemas.openxmlformats.org/drawingml/2006/main">
+            <a:off x="3581400" y="2971800"/>
+            <a:ext cx="1990725" cy="552450"/>
+          </a:xfrm>
+          <a:prstGeom xmlns:a="http://schemas.openxmlformats.org/drawingml/2006/main" prst="rect">
+            <a:avLst/>
+          </a:prstGeom>
+          <a:noFill xmlns:a="http://schemas.openxmlformats.org/drawingml/2006/main"/>
+          <a:ln xmlns:a="http://schemas.openxmlformats.org/drawingml/2006/main" w="0">
+            <a:noFill/>
+            <a:prstDash val="solid"/>
+          </a:ln>
+        </p:spPr>
+        <p:txBody>
+          <a:bodyPr xmlns:a="http://schemas.openxmlformats.org/drawingml/2006/main"/>
+          <a:lstStyle xmlns:a="http://schemas.openxmlformats.org/drawingml/2006/main"/>
+          <a:p xmlns:a="http://schemas.openxmlformats.org/drawingml/2006/main">
+            <a:pPr algn="l">
+              <a:defRPr sz="1125" b="0" i="0">
+                <a:solidFill>
+                  <a:srgbClr val="555555"/>
+                </a:solidFill>
+              </a:defRPr>
+            </a:pPr>
+            <a:r>
+              <a:rPr sz="1125" b="0" i="0">
+                <a:solidFill>
+                  <a:srgbClr val="555555"/>
+                </a:solidFill>
+              </a:rPr>
+              <a:t>GLM was 54.0%; basket hold was 225.2%.</a:t>
+            </a:r>
+          </a:p>
+        </p:txBody>
+      </p:sp>
+      <p:sp>
+        <p:nvSpPr>
+          <p:cNvPr id="12" name="">
+            <a:extLst xmlns:a="http://schemas.openxmlformats.org/drawingml/2006/main">
+              <a:ext uri="{FF2B5EF4-FFF2-40B4-BE49-F238E27FC236}">
+                <a16:creationId xmlns:a16="http://schemas.microsoft.com/office/drawing/2014/main" id="{D277181F-CC98-458C-BD57-37FBFA06325E}"/>
+              </a:ext>
+            </a:extLst>
+          </p:cNvPr>
+          <p:cNvSpPr>
+            <a:spLocks xmlns:a="http://schemas.openxmlformats.org/drawingml/2006/main" noGrp="1"/>
+          </p:cNvSpPr>
+          <p:nvPr/>
+        </p:nvSpPr>
+        <p:spPr>
+          <a:xfrm xmlns:a="http://schemas.openxmlformats.org/drawingml/2006/main">
+            <a:off x="6115050" y="2152650"/>
+            <a:ext cx="2333625" cy="1428750"/>
+          </a:xfrm>
+          <a:prstGeom xmlns:a="http://schemas.openxmlformats.org/drawingml/2006/main" prst="rect">
+            <a:avLst/>
+          </a:prstGeom>
+          <a:solidFill xmlns:a="http://schemas.openxmlformats.org/drawingml/2006/main">
+            <a:srgbClr val="EDEDED"/>
+          </a:solidFill>
+          <a:ln xmlns:a="http://schemas.openxmlformats.org/drawingml/2006/main" w="9525">
+            <a:solidFill>
+              <a:srgbClr val="B8BCC4"/>
+            </a:solidFill>
+            <a:prstDash val="solid"/>
+          </a:ln>
+        </p:spPr>
+      </p:sp>
+      <p:sp>
+        <p:nvSpPr>
+          <p:cNvPr id="13" name="">
+            <a:extLst xmlns:a="http://schemas.openxmlformats.org/drawingml/2006/main">
+              <a:ext uri="{FF2B5EF4-FFF2-40B4-BE49-F238E27FC236}">
+                <a16:creationId xmlns:a16="http://schemas.microsoft.com/office/drawing/2014/main" id="{2A652A3F-24DE-4BC2-BBD4-4F8D987CA4A6}"/>
+              </a:ext>
+            </a:extLst>
+          </p:cNvPr>
+          <p:cNvSpPr>
+            <a:spLocks xmlns:a="http://schemas.openxmlformats.org/drawingml/2006/main" noGrp="1"/>
+          </p:cNvSpPr>
+          <p:nvPr/>
+        </p:nvSpPr>
+        <p:spPr>
+          <a:xfrm xmlns:a="http://schemas.openxmlformats.org/drawingml/2006/main">
+            <a:off x="6286500" y="2305050"/>
+            <a:ext cx="1990725" cy="171450"/>
+          </a:xfrm>
+          <a:prstGeom xmlns:a="http://schemas.openxmlformats.org/drawingml/2006/main" prst="rect">
+            <a:avLst/>
+          </a:prstGeom>
+          <a:noFill xmlns:a="http://schemas.openxmlformats.org/drawingml/2006/main"/>
+          <a:ln xmlns:a="http://schemas.openxmlformats.org/drawingml/2006/main" w="0">
+            <a:noFill/>
+            <a:prstDash val="solid"/>
+          </a:ln>
+        </p:spPr>
+        <p:txBody>
+          <a:bodyPr xmlns:a="http://schemas.openxmlformats.org/drawingml/2006/main"/>
+          <a:lstStyle xmlns:a="http://schemas.openxmlformats.org/drawingml/2006/main"/>
+          <a:p xmlns:a="http://schemas.openxmlformats.org/drawingml/2006/main">
+            <a:pPr algn="l">
+              <a:defRPr sz="900" b="1" i="0">
+                <a:solidFill>
+                  <a:srgbClr val="555555"/>
+                </a:solidFill>
+              </a:defRPr>
+            </a:pPr>
+            <a:r>
+              <a:rPr sz="900" b="1" i="0">
+                <a:solidFill>
+                  <a:srgbClr val="555555"/>
+                </a:solidFill>
+              </a:rPr>
+              <a:t>2022 XGB</a:t>
+            </a:r>
+          </a:p>
+        </p:txBody>
+      </p:sp>
+      <p:sp>
+        <p:nvSpPr>
+          <p:cNvPr id="14" name="">
+            <a:extLst xmlns:a="http://schemas.openxmlformats.org/drawingml/2006/main">
+              <a:ext uri="{FF2B5EF4-FFF2-40B4-BE49-F238E27FC236}">
+                <a16:creationId xmlns:a16="http://schemas.microsoft.com/office/drawing/2014/main" id="{30BDEEBF-3575-4FC6-A8B7-CE6BAA085F82}"/>
+              </a:ext>
+            </a:extLst>
+          </p:cNvPr>
+          <p:cNvSpPr>
+            <a:spLocks xmlns:a="http://schemas.openxmlformats.org/drawingml/2006/main" noGrp="1"/>
+          </p:cNvSpPr>
+          <p:nvPr/>
+        </p:nvSpPr>
+        <p:spPr>
+          <a:xfrm xmlns:a="http://schemas.openxmlformats.org/drawingml/2006/main">
+            <a:off x="6286500" y="2552700"/>
+            <a:ext cx="1990725" cy="361950"/>
+          </a:xfrm>
+          <a:prstGeom xmlns:a="http://schemas.openxmlformats.org/drawingml/2006/main" prst="rect">
+            <a:avLst/>
+          </a:prstGeom>
+          <a:noFill xmlns:a="http://schemas.openxmlformats.org/drawingml/2006/main"/>
+          <a:ln xmlns:a="http://schemas.openxmlformats.org/drawingml/2006/main" w="0">
+            <a:noFill/>
+            <a:prstDash val="solid"/>
+          </a:ln>
+        </p:spPr>
+        <p:txBody>
+          <a:bodyPr xmlns:a="http://schemas.openxmlformats.org/drawingml/2006/main"/>
+          <a:lstStyle xmlns:a="http://schemas.openxmlformats.org/drawingml/2006/main"/>
+          <a:p xmlns:a="http://schemas.openxmlformats.org/drawingml/2006/main">
+            <a:pPr algn="l">
+              <a:defRPr sz="2250" b="1" i="0">
+                <a:solidFill>
+                  <a:srgbClr val="000000"/>
+                </a:solidFill>
+              </a:defRPr>
+            </a:pPr>
+            <a:r>
+              <a:rPr sz="2250" b="1" i="0">
+                <a:solidFill>
+                  <a:srgbClr val="000000"/>
+                </a:solidFill>
+              </a:rPr>
+              <a:t>-41.4%</a:t>
+            </a:r>
+          </a:p>
+        </p:txBody>
+      </p:sp>
+      <p:sp>
+        <p:nvSpPr>
+          <p:cNvPr id="15" name="">
+            <a:extLst xmlns:a="http://schemas.openxmlformats.org/drawingml/2006/main">
+              <a:ext uri="{FF2B5EF4-FFF2-40B4-BE49-F238E27FC236}">
+                <a16:creationId xmlns:a16="http://schemas.microsoft.com/office/drawing/2014/main" id="{80BE8CCC-D714-4B8F-A5B9-6060DABD0FC5}"/>
+              </a:ext>
+            </a:extLst>
+          </p:cNvPr>
+          <p:cNvSpPr>
+            <a:spLocks xmlns:a="http://schemas.openxmlformats.org/drawingml/2006/main" noGrp="1"/>
+          </p:cNvSpPr>
+          <p:nvPr/>
+        </p:nvSpPr>
+        <p:spPr>
+          <a:xfrm xmlns:a="http://schemas.openxmlformats.org/drawingml/2006/main">
+            <a:off x="6286500" y="2971800"/>
+            <a:ext cx="1990725" cy="552450"/>
+          </a:xfrm>
+          <a:prstGeom xmlns:a="http://schemas.openxmlformats.org/drawingml/2006/main" prst="rect">
+            <a:avLst/>
+          </a:prstGeom>
+          <a:noFill xmlns:a="http://schemas.openxmlformats.org/drawingml/2006/main"/>
+          <a:ln xmlns:a="http://schemas.openxmlformats.org/drawingml/2006/main" w="0">
+            <a:noFill/>
+            <a:prstDash val="solid"/>
+          </a:ln>
+        </p:spPr>
+        <p:txBody>
+          <a:bodyPr xmlns:a="http://schemas.openxmlformats.org/drawingml/2006/main"/>
+          <a:lstStyle xmlns:a="http://schemas.openxmlformats.org/drawingml/2006/main"/>
+          <a:p xmlns:a="http://schemas.openxmlformats.org/drawingml/2006/main">
+            <a:pPr algn="l">
+              <a:defRPr sz="1125" b="0" i="0">
+                <a:solidFill>
+                  <a:srgbClr val="555555"/>
+                </a:solidFill>
+              </a:defRPr>
+            </a:pPr>
+            <a:r>
+              <a:rPr sz="1125" b="0" i="0">
+                <a:solidFill>
+                  <a:srgbClr val="555555"/>
+                </a:solidFill>
+              </a:rPr>
+              <a:t>GLM was -49.7%; basket hold was -53.3%.</a:t>
+            </a:r>
+          </a:p>
+        </p:txBody>
+      </p:sp>
+      <p:sp>
+        <p:nvSpPr>
+          <p:cNvPr id="16" name="">
+            <a:extLst xmlns:a="http://schemas.openxmlformats.org/drawingml/2006/main">
+              <a:ext uri="{FF2B5EF4-FFF2-40B4-BE49-F238E27FC236}">
+                <a16:creationId xmlns:a16="http://schemas.microsoft.com/office/drawing/2014/main" id="{5657871A-7F8F-4098-B590-433B03A2E926}"/>
+              </a:ext>
+            </a:extLst>
+          </p:cNvPr>
+          <p:cNvSpPr>
+            <a:spLocks xmlns:a="http://schemas.openxmlformats.org/drawingml/2006/main" noGrp="1"/>
+          </p:cNvSpPr>
+          <p:nvPr/>
+        </p:nvSpPr>
+        <p:spPr>
+          <a:xfrm xmlns:a="http://schemas.openxmlformats.org/drawingml/2006/main">
+            <a:off x="8820150" y="2152650"/>
+            <a:ext cx="2333625" cy="1428750"/>
+          </a:xfrm>
+          <a:prstGeom xmlns:a="http://schemas.openxmlformats.org/drawingml/2006/main" prst="rect">
+            <a:avLst/>
+          </a:prstGeom>
+          <a:solidFill xmlns:a="http://schemas.openxmlformats.org/drawingml/2006/main">
+            <a:srgbClr val="EDEDED"/>
+          </a:solidFill>
+          <a:ln xmlns:a="http://schemas.openxmlformats.org/drawingml/2006/main" w="9525">
+            <a:solidFill>
+              <a:srgbClr val="B8BCC4"/>
+            </a:solidFill>
+            <a:prstDash val="solid"/>
+          </a:ln>
+        </p:spPr>
+      </p:sp>
+      <p:sp>
+        <p:nvSpPr>
+          <p:cNvPr id="17" name="">
+            <a:extLst xmlns:a="http://schemas.openxmlformats.org/drawingml/2006/main">
+              <a:ext uri="{FF2B5EF4-FFF2-40B4-BE49-F238E27FC236}">
+                <a16:creationId xmlns:a16="http://schemas.microsoft.com/office/drawing/2014/main" id="{1E59BC29-2BA6-4048-ABE4-6EDC9519A2F8}"/>
+              </a:ext>
+            </a:extLst>
+          </p:cNvPr>
+          <p:cNvSpPr>
+            <a:spLocks xmlns:a="http://schemas.openxmlformats.org/drawingml/2006/main" noGrp="1"/>
+          </p:cNvSpPr>
+          <p:nvPr/>
+        </p:nvSpPr>
+        <p:spPr>
+          <a:xfrm xmlns:a="http://schemas.openxmlformats.org/drawingml/2006/main">
+            <a:off x="8991600" y="2305050"/>
+            <a:ext cx="1990725" cy="171450"/>
+          </a:xfrm>
+          <a:prstGeom xmlns:a="http://schemas.openxmlformats.org/drawingml/2006/main" prst="rect">
+            <a:avLst/>
+          </a:prstGeom>
+          <a:noFill xmlns:a="http://schemas.openxmlformats.org/drawingml/2006/main"/>
+          <a:ln xmlns:a="http://schemas.openxmlformats.org/drawingml/2006/main" w="0">
+            <a:noFill/>
+            <a:prstDash val="solid"/>
+          </a:ln>
+        </p:spPr>
+        <p:txBody>
+          <a:bodyPr xmlns:a="http://schemas.openxmlformats.org/drawingml/2006/main"/>
+          <a:lstStyle xmlns:a="http://schemas.openxmlformats.org/drawingml/2006/main"/>
+          <a:p xmlns:a="http://schemas.openxmlformats.org/drawingml/2006/main">
+            <a:pPr algn="l">
+              <a:defRPr sz="900" b="1" i="0">
+                <a:solidFill>
+                  <a:srgbClr val="555555"/>
+                </a:solidFill>
+              </a:defRPr>
+            </a:pPr>
+            <a:r>
+              <a:rPr sz="900" b="1" i="0">
+                <a:solidFill>
+                  <a:srgbClr val="555555"/>
+                </a:solidFill>
+              </a:rPr>
+              <a:t>2020 EXPOSURE</a:t>
+            </a:r>
+          </a:p>
+        </p:txBody>
+      </p:sp>
+      <p:sp>
+        <p:nvSpPr>
+          <p:cNvPr id="18" name="">
+            <a:extLst xmlns:a="http://schemas.openxmlformats.org/drawingml/2006/main">
+              <a:ext uri="{FF2B5EF4-FFF2-40B4-BE49-F238E27FC236}">
+                <a16:creationId xmlns:a16="http://schemas.microsoft.com/office/drawing/2014/main" id="{3F84859E-1A75-4B12-A3F9-08C9E12AF12A}"/>
+              </a:ext>
+            </a:extLst>
+          </p:cNvPr>
+          <p:cNvSpPr>
+            <a:spLocks xmlns:a="http://schemas.openxmlformats.org/drawingml/2006/main" noGrp="1"/>
+          </p:cNvSpPr>
+          <p:nvPr/>
+        </p:nvSpPr>
+        <p:spPr>
+          <a:xfrm xmlns:a="http://schemas.openxmlformats.org/drawingml/2006/main">
+            <a:off x="8991600" y="2552700"/>
+            <a:ext cx="1990725" cy="361950"/>
+          </a:xfrm>
+          <a:prstGeom xmlns:a="http://schemas.openxmlformats.org/drawingml/2006/main" prst="rect">
+            <a:avLst/>
+          </a:prstGeom>
+          <a:noFill xmlns:a="http://schemas.openxmlformats.org/drawingml/2006/main"/>
+          <a:ln xmlns:a="http://schemas.openxmlformats.org/drawingml/2006/main" w="0">
+            <a:noFill/>
+            <a:prstDash val="solid"/>
+          </a:ln>
+        </p:spPr>
+        <p:txBody>
+          <a:bodyPr xmlns:a="http://schemas.openxmlformats.org/drawingml/2006/main"/>
+          <a:lstStyle xmlns:a="http://schemas.openxmlformats.org/drawingml/2006/main"/>
+          <a:p xmlns:a="http://schemas.openxmlformats.org/drawingml/2006/main">
+            <a:pPr algn="l">
+              <a:defRPr sz="2250" b="1" i="0">
+                <a:solidFill>
+                  <a:srgbClr val="000000"/>
+                </a:solidFill>
+              </a:defRPr>
+            </a:pPr>
+            <a:r>
+              <a:rPr sz="2250" b="1" i="0">
+                <a:solidFill>
+                  <a:srgbClr val="000000"/>
+                </a:solidFill>
+              </a:rPr>
+              <a:t>36.9%</a:t>
+            </a:r>
+          </a:p>
+        </p:txBody>
+      </p:sp>
+      <p:sp>
+        <p:nvSpPr>
+          <p:cNvPr id="19" name="">
+            <a:extLst xmlns:a="http://schemas.openxmlformats.org/drawingml/2006/main">
+              <a:ext uri="{FF2B5EF4-FFF2-40B4-BE49-F238E27FC236}">
+                <a16:creationId xmlns:a16="http://schemas.microsoft.com/office/drawing/2014/main" id="{D1340D69-8024-4CEC-8654-7E2A0A6DC529}"/>
+              </a:ext>
+            </a:extLst>
+          </p:cNvPr>
+          <p:cNvSpPr>
+            <a:spLocks xmlns:a="http://schemas.openxmlformats.org/drawingml/2006/main" noGrp="1"/>
+          </p:cNvSpPr>
+          <p:nvPr/>
+        </p:nvSpPr>
+        <p:spPr>
+          <a:xfrm xmlns:a="http://schemas.openxmlformats.org/drawingml/2006/main">
+            <a:off x="8991600" y="2971800"/>
+            <a:ext cx="1990725" cy="552450"/>
+          </a:xfrm>
+          <a:prstGeom xmlns:a="http://schemas.openxmlformats.org/drawingml/2006/main" prst="rect">
+            <a:avLst/>
+          </a:prstGeom>
+          <a:noFill xmlns:a="http://schemas.openxmlformats.org/drawingml/2006/main"/>
+          <a:ln xmlns:a="http://schemas.openxmlformats.org/drawingml/2006/main" w="0">
+            <a:noFill/>
+            <a:prstDash val="solid"/>
+          </a:ln>
+        </p:spPr>
+        <p:txBody>
+          <a:bodyPr xmlns:a="http://schemas.openxmlformats.org/drawingml/2006/main"/>
+          <a:lstStyle xmlns:a="http://schemas.openxmlformats.org/drawingml/2006/main"/>
+          <a:p xmlns:a="http://schemas.openxmlformats.org/drawingml/2006/main">
+            <a:pPr algn="l">
+              <a:defRPr sz="1125" b="0" i="0">
+                <a:solidFill>
+                  <a:srgbClr val="555555"/>
+                </a:solidFill>
+              </a:defRPr>
+            </a:pPr>
+            <a:r>
+              <a:rPr sz="1125" b="0" i="0">
+                <a:solidFill>
+                  <a:srgbClr val="555555"/>
+                </a:solidFill>
+              </a:rPr>
+              <a:t>XGB used less exposure than GLM at 43.0%.</a:t>
+            </a:r>
+          </a:p>
+        </p:txBody>
+      </p:sp>
+      <p:sp>
+        <p:nvSpPr>
+          <p:cNvPr id="20" name="">
+            <a:extLst xmlns:a="http://schemas.openxmlformats.org/drawingml/2006/main">
+              <a:ext uri="{FF2B5EF4-FFF2-40B4-BE49-F238E27FC236}">
+                <a16:creationId xmlns:a16="http://schemas.microsoft.com/office/drawing/2014/main" id="{4F914C5D-A05A-450F-9342-E3154A1F29F2}"/>
+              </a:ext>
+            </a:extLst>
+          </p:cNvPr>
+          <p:cNvSpPr>
+            <a:spLocks xmlns:a="http://schemas.openxmlformats.org/drawingml/2006/main" noGrp="1"/>
+          </p:cNvSpPr>
+          <p:nvPr/>
+        </p:nvSpPr>
+        <p:spPr>
+          <a:xfrm xmlns:a="http://schemas.openxmlformats.org/drawingml/2006/main">
+            <a:off x="1066800" y="4095750"/>
+            <a:ext cx="9334500" cy="914400"/>
+          </a:xfrm>
+          <a:prstGeom xmlns:a="http://schemas.openxmlformats.org/drawingml/2006/main" prst="rect">
+            <a:avLst/>
+          </a:prstGeom>
+          <a:noFill xmlns:a="http://schemas.openxmlformats.org/drawingml/2006/main"/>
+          <a:ln xmlns:a="http://schemas.openxmlformats.org/drawingml/2006/main" w="0">
+            <a:noFill/>
+            <a:prstDash val="solid"/>
+          </a:ln>
+        </p:spPr>
+        <p:txBody>
+          <a:bodyPr xmlns:a="http://schemas.openxmlformats.org/drawingml/2006/main"/>
+          <a:lstStyle xmlns:a="http://schemas.openxmlformats.org/drawingml/2006/main"/>
+          <a:p xmlns:a="http://schemas.openxmlformats.org/drawingml/2006/main">
+            <a:pPr algn="ctr">
+              <a:defRPr sz="2100" b="1" i="0">
+                <a:solidFill>
+                  <a:srgbClr val="000000"/>
+                </a:solidFill>
+              </a:defRPr>
+            </a:pPr>
+            <a:r>
+              <a:rPr sz="2100" b="1" i="0">
+                <a:solidFill>
+                  <a:srgbClr val="000000"/>
+                </a:solidFill>
+              </a:rPr>
+              <a:t>This is encouraging because the nonlinear model improved return with less 2020 exposure and better 2022 defense. It is not a victory lap: 2020 still lagged basket hold by a lot.</a:t>
+            </a:r>
+          </a:p>
+        </p:txBody>
+      </p:sp>
+    </p:spTree>
+    <p:extLst>
+      <p:ext uri="{BB962C8B-B14F-4D97-AF65-F5344CB8AC3E}">
+        <p14:creationId xmlns:p14="http://schemas.microsoft.com/office/powerpoint/2010/main" val="304550693"/>
+      </p:ext>
+    </p:extLst>
+  </p:cSld>
+</p:sld>
+</file>
+
+<file path=ppt/slides/slide32.xml><?xml version="1.0" encoding="utf-8"?>
+<p:sld xmlns:p="http://schemas.openxmlformats.org/presentationml/2006/main">
+  <p:cSld>
+    <p:bg>
+      <p:bgPr>
+        <a:solidFill xmlns:a="http://schemas.openxmlformats.org/drawingml/2006/main">
+          <a:srgbClr val="FFFFFF"/>
+        </a:solidFill>
+      </p:bgPr>
+    </p:bg>
+    <p:spTree>
+      <p:nvGrpSpPr>
+        <p:cNvPr id="1" name=""/>
+        <p:cNvGrpSpPr/>
+        <p:nvPr/>
+      </p:nvGrpSpPr>
+      <p:grpSpPr>
+        <a:xfrm xmlns:a="http://schemas.openxmlformats.org/drawingml/2006/main"/>
+      </p:grpSpPr>
+      <p:sp>
+        <p:nvSpPr>
+          <p:cNvPr id="1" name="">
+            <a:extLst xmlns:a="http://schemas.openxmlformats.org/drawingml/2006/main">
+              <a:ext uri="{FF2B5EF4-FFF2-40B4-BE49-F238E27FC236}">
+                <a16:creationId xmlns:a16="http://schemas.microsoft.com/office/drawing/2014/main" id="{57977EB5-BBAA-4134-A532-3FE6D69DF830}"/>
+              </a:ext>
+            </a:extLst>
+          </p:cNvPr>
+          <p:cNvSpPr>
+            <a:spLocks xmlns:a="http://schemas.openxmlformats.org/drawingml/2006/main" noGrp="1"/>
+          </p:cNvSpPr>
+          <p:nvPr/>
+        </p:nvSpPr>
+        <p:spPr>
+          <a:xfrm xmlns:a="http://schemas.openxmlformats.org/drawingml/2006/main">
+            <a:off x="685800" y="400050"/>
+            <a:ext cx="8572500" cy="247650"/>
+          </a:xfrm>
+          <a:prstGeom xmlns:a="http://schemas.openxmlformats.org/drawingml/2006/main" prst="rect">
+            <a:avLst/>
+          </a:prstGeom>
+          <a:noFill xmlns:a="http://schemas.openxmlformats.org/drawingml/2006/main"/>
+          <a:ln xmlns:a="http://schemas.openxmlformats.org/drawingml/2006/main" w="0">
+            <a:noFill/>
+            <a:prstDash val="solid"/>
+          </a:ln>
+        </p:spPr>
+        <p:txBody>
+          <a:bodyPr xmlns:a="http://schemas.openxmlformats.org/drawingml/2006/main"/>
+          <a:lstStyle xmlns:a="http://schemas.openxmlformats.org/drawingml/2006/main"/>
+          <a:p xmlns:a="http://schemas.openxmlformats.org/drawingml/2006/main">
+            <a:pPr algn="l">
+              <a:defRPr sz="975" b="1" i="0">
+                <a:solidFill>
+                  <a:srgbClr val="555555"/>
+                </a:solidFill>
+              </a:defRPr>
+            </a:pPr>
+            <a:r>
+              <a:rPr sz="975" b="1" i="0">
+                <a:solidFill>
+                  <a:srgbClr val="555555"/>
+                </a:solidFill>
+              </a:rPr>
+              <a:t>GEN5.4 ML DECISION ENGINE</a:t>
+            </a:r>
+          </a:p>
+        </p:txBody>
+      </p:sp>
+      <p:sp>
+        <p:nvSpPr>
+          <p:cNvPr id="2" name="">
+            <a:extLst xmlns:a="http://schemas.openxmlformats.org/drawingml/2006/main">
+              <a:ext uri="{FF2B5EF4-FFF2-40B4-BE49-F238E27FC236}">
+                <a16:creationId xmlns:a16="http://schemas.microsoft.com/office/drawing/2014/main" id="{40802E73-6A64-4344-B9D8-77CEB2591111}"/>
+              </a:ext>
+            </a:extLst>
+          </p:cNvPr>
+          <p:cNvSpPr>
+            <a:spLocks xmlns:a="http://schemas.openxmlformats.org/drawingml/2006/main" noGrp="1"/>
+          </p:cNvSpPr>
+          <p:nvPr/>
+        </p:nvSpPr>
+        <p:spPr>
+          <a:xfrm xmlns:a="http://schemas.openxmlformats.org/drawingml/2006/main">
+            <a:off x="685800" y="723900"/>
+            <a:ext cx="10287000" cy="876300"/>
+          </a:xfrm>
+          <a:prstGeom xmlns:a="http://schemas.openxmlformats.org/drawingml/2006/main" prst="rect">
+            <a:avLst/>
+          </a:prstGeom>
+          <a:noFill xmlns:a="http://schemas.openxmlformats.org/drawingml/2006/main"/>
+          <a:ln xmlns:a="http://schemas.openxmlformats.org/drawingml/2006/main" w="0">
+            <a:noFill/>
+            <a:prstDash val="solid"/>
+          </a:ln>
+        </p:spPr>
+        <p:txBody>
+          <a:bodyPr xmlns:a="http://schemas.openxmlformats.org/drawingml/2006/main"/>
+          <a:lstStyle xmlns:a="http://schemas.openxmlformats.org/drawingml/2006/main"/>
+          <a:p xmlns:a="http://schemas.openxmlformats.org/drawingml/2006/main">
+            <a:pPr algn="l">
+              <a:defRPr sz="2850" b="1" i="0">
+                <a:solidFill>
+                  <a:srgbClr val="000000"/>
+                </a:solidFill>
+              </a:defRPr>
+            </a:pPr>
+            <a:r>
+              <a:rPr sz="2850" b="1" i="0">
+                <a:solidFill>
+                  <a:srgbClr val="000000"/>
+                </a:solidFill>
+              </a:rPr>
+              <a:t>The equity curves show useful improvement, not a solved system</a:t>
+            </a:r>
+          </a:p>
+        </p:txBody>
+      </p:sp>
+      <p:sp>
+        <p:nvSpPr>
+          <p:cNvPr id="3" name="">
+            <a:extLst xmlns:a="http://schemas.openxmlformats.org/drawingml/2006/main">
+              <a:ext uri="{FF2B5EF4-FFF2-40B4-BE49-F238E27FC236}">
+                <a16:creationId xmlns:a16="http://schemas.microsoft.com/office/drawing/2014/main" id="{9C78C24B-EB88-48D7-8796-4D28AFE5FA7A}"/>
+              </a:ext>
+            </a:extLst>
+          </p:cNvPr>
+          <p:cNvSpPr>
+            <a:spLocks xmlns:a="http://schemas.openxmlformats.org/drawingml/2006/main" noGrp="1"/>
+          </p:cNvSpPr>
+          <p:nvPr/>
+        </p:nvSpPr>
+        <p:spPr>
+          <a:xfrm xmlns:a="http://schemas.openxmlformats.org/drawingml/2006/main">
+            <a:off x="685800" y="1657350"/>
+            <a:ext cx="10820400" cy="19050"/>
+          </a:xfrm>
+          <a:prstGeom xmlns:a="http://schemas.openxmlformats.org/drawingml/2006/main" prst="rect">
+            <a:avLst/>
+          </a:prstGeom>
+          <a:solidFill xmlns:a="http://schemas.openxmlformats.org/drawingml/2006/main">
+            <a:srgbClr val="B8BCC4"/>
+          </a:solidFill>
+          <a:ln xmlns:a="http://schemas.openxmlformats.org/drawingml/2006/main" w="0">
+            <a:noFill/>
+            <a:prstDash val="solid"/>
+          </a:ln>
+        </p:spPr>
+      </p:sp>
+      <p:pic>
+        <p:nvPicPr>
+          <p:cNvPr id="10" name=""/>
+          <p:cNvPicPr>
+            <a:picLocks xmlns:a="http://schemas.openxmlformats.org/drawingml/2006/main" noChangeAspect="1"/>
+          </p:cNvPicPr>
+          <p:nvPr/>
+        </p:nvPicPr>
+        <p:blipFill>
+          <a:blip xmlns:r="http://schemas.openxmlformats.org/officeDocument/2006/relationships" xmlns:a="http://schemas.openxmlformats.org/drawingml/2006/main" r:embed="Rd7335232432342ad"/>
+          <a:stretch xmlns:a="http://schemas.openxmlformats.org/drawingml/2006/main"/>
+        </p:blipFill>
+        <p:spPr>
+          <a:xfrm xmlns:a="http://schemas.openxmlformats.org/drawingml/2006/main">
+            <a:off x="835819" y="2000250"/>
+            <a:ext cx="6900863" cy="3943350"/>
+          </a:xfrm>
+          <a:prstGeom xmlns:a="http://schemas.openxmlformats.org/drawingml/2006/main" prst="rect">
+            <a:avLst/>
+          </a:prstGeom>
+        </p:spPr>
+      </p:pic>
+      <p:sp>
+        <p:nvSpPr>
+          <p:cNvPr id="5" name="">
+            <a:extLst xmlns:a="http://schemas.openxmlformats.org/drawingml/2006/main">
+              <a:ext uri="{FF2B5EF4-FFF2-40B4-BE49-F238E27FC236}">
+                <a16:creationId xmlns:a16="http://schemas.microsoft.com/office/drawing/2014/main" id="{4734A07D-FFBF-45C3-8347-C99E5C3945FE}"/>
+              </a:ext>
+            </a:extLst>
+          </p:cNvPr>
+          <p:cNvSpPr>
+            <a:spLocks xmlns:a="http://schemas.openxmlformats.org/drawingml/2006/main" noGrp="1"/>
+          </p:cNvSpPr>
+          <p:nvPr/>
+        </p:nvSpPr>
+        <p:spPr>
+          <a:xfrm xmlns:a="http://schemas.openxmlformats.org/drawingml/2006/main">
+            <a:off x="8477250" y="2133600"/>
+            <a:ext cx="2571750" cy="304800"/>
+          </a:xfrm>
+          <a:prstGeom xmlns:a="http://schemas.openxmlformats.org/drawingml/2006/main" prst="rect">
+            <a:avLst/>
+          </a:prstGeom>
+          <a:noFill xmlns:a="http://schemas.openxmlformats.org/drawingml/2006/main"/>
+          <a:ln xmlns:a="http://schemas.openxmlformats.org/drawingml/2006/main" w="0">
+            <a:noFill/>
+            <a:prstDash val="solid"/>
+          </a:ln>
+        </p:spPr>
+        <p:txBody>
+          <a:bodyPr xmlns:a="http://schemas.openxmlformats.org/drawingml/2006/main"/>
+          <a:lstStyle xmlns:a="http://schemas.openxmlformats.org/drawingml/2006/main"/>
+          <a:p xmlns:a="http://schemas.openxmlformats.org/drawingml/2006/main">
+            <a:pPr algn="l">
+              <a:defRPr sz="1950" b="1" i="0">
+                <a:solidFill>
+                  <a:srgbClr val="222222"/>
+                </a:solidFill>
+              </a:defRPr>
+            </a:pPr>
+            <a:r>
+              <a:rPr sz="1950" b="1" i="0">
+                <a:solidFill>
+                  <a:srgbClr val="222222"/>
+                </a:solidFill>
+              </a:rPr>
+              <a:t>What changed</a:t>
+            </a:r>
+          </a:p>
+        </p:txBody>
+      </p:sp>
+      <p:sp>
+        <p:nvSpPr>
+          <p:cNvPr id="6" name="">
+            <a:extLst xmlns:a="http://schemas.openxmlformats.org/drawingml/2006/main">
+              <a:ext uri="{FF2B5EF4-FFF2-40B4-BE49-F238E27FC236}">
+                <a16:creationId xmlns:a16="http://schemas.microsoft.com/office/drawing/2014/main" id="{3873559E-84F0-45FC-A118-79F196E74736}"/>
+              </a:ext>
+            </a:extLst>
+          </p:cNvPr>
+          <p:cNvSpPr>
+            <a:spLocks xmlns:a="http://schemas.openxmlformats.org/drawingml/2006/main" noGrp="1"/>
+          </p:cNvSpPr>
+          <p:nvPr/>
+        </p:nvSpPr>
+        <p:spPr>
+          <a:xfrm xmlns:a="http://schemas.openxmlformats.org/drawingml/2006/main">
+            <a:off x="8477250" y="2705100"/>
+            <a:ext cx="2705100" cy="2381250"/>
+          </a:xfrm>
+          <a:prstGeom xmlns:a="http://schemas.openxmlformats.org/drawingml/2006/main" prst="rect">
+            <a:avLst/>
+          </a:prstGeom>
+          <a:noFill xmlns:a="http://schemas.openxmlformats.org/drawingml/2006/main"/>
+          <a:ln xmlns:a="http://schemas.openxmlformats.org/drawingml/2006/main" w="0">
+            <a:noFill/>
+            <a:prstDash val="solid"/>
+          </a:ln>
+        </p:spPr>
+        <p:txBody>
+          <a:bodyPr xmlns:a="http://schemas.openxmlformats.org/drawingml/2006/main"/>
+          <a:lstStyle xmlns:a="http://schemas.openxmlformats.org/drawingml/2006/main"/>
+          <a:p xmlns:a="http://schemas.openxmlformats.org/drawingml/2006/main">
+            <a:pPr algn="l">
+              <a:defRPr sz="1650" b="0" i="0">
+                <a:solidFill>
+                  <a:srgbClr val="222222"/>
+                </a:solidFill>
+              </a:defRPr>
+            </a:pPr>
+            <a:r>
+              <a:rPr sz="1650" b="0" i="0">
+                <a:solidFill>
+                  <a:srgbClr val="222222"/>
+                </a:solidFill>
+              </a:rPr>
+              <a:t>XGBoost lifted 2020 return from 54.0% to 79.1% and improved 2022 from -49.7% to -41.4%. Equal-weight hold remains the hurdle in strong bull windows.</a:t>
+            </a:r>
+          </a:p>
+        </p:txBody>
+      </p:sp>
+    </p:spTree>
+    <p:extLst>
+      <p:ext uri="{BB962C8B-B14F-4D97-AF65-F5344CB8AC3E}">
+        <p14:creationId xmlns:p14="http://schemas.microsoft.com/office/powerpoint/2010/main" val="1457097087"/>
+      </p:ext>
+    </p:extLst>
+  </p:cSld>
+</p:sld>
+</file>
+
+<file path=ppt/slides/slide33.xml><?xml version="1.0" encoding="utf-8"?>
+<p:sld xmlns:p="http://schemas.openxmlformats.org/presentationml/2006/main">
+  <p:cSld>
+    <p:bg>
+      <p:bgPr>
+        <a:solidFill xmlns:a="http://schemas.openxmlformats.org/drawingml/2006/main">
+          <a:srgbClr val="FFFFFF"/>
+        </a:solidFill>
+      </p:bgPr>
+    </p:bg>
+    <p:spTree>
+      <p:nvGrpSpPr>
+        <p:cNvPr id="1" name=""/>
+        <p:cNvGrpSpPr/>
+        <p:nvPr/>
+      </p:nvGrpSpPr>
+      <p:grpSpPr>
+        <a:xfrm xmlns:a="http://schemas.openxmlformats.org/drawingml/2006/main"/>
+      </p:grpSpPr>
+      <p:sp>
+        <p:nvSpPr>
+          <p:cNvPr id="1" name="">
+            <a:extLst xmlns:a="http://schemas.openxmlformats.org/drawingml/2006/main">
+              <a:ext uri="{FF2B5EF4-FFF2-40B4-BE49-F238E27FC236}">
+                <a16:creationId xmlns:a16="http://schemas.microsoft.com/office/drawing/2014/main" id="{FEFA8D20-07C2-43C0-A25A-9A9700B0E3A4}"/>
+              </a:ext>
+            </a:extLst>
+          </p:cNvPr>
+          <p:cNvSpPr>
+            <a:spLocks xmlns:a="http://schemas.openxmlformats.org/drawingml/2006/main" noGrp="1"/>
+          </p:cNvSpPr>
+          <p:nvPr/>
+        </p:nvSpPr>
+        <p:spPr>
+          <a:xfrm xmlns:a="http://schemas.openxmlformats.org/drawingml/2006/main">
+            <a:off x="685800" y="400050"/>
+            <a:ext cx="8572500" cy="247650"/>
+          </a:xfrm>
+          <a:prstGeom xmlns:a="http://schemas.openxmlformats.org/drawingml/2006/main" prst="rect">
+            <a:avLst/>
+          </a:prstGeom>
+          <a:noFill xmlns:a="http://schemas.openxmlformats.org/drawingml/2006/main"/>
+          <a:ln xmlns:a="http://schemas.openxmlformats.org/drawingml/2006/main" w="0">
+            <a:noFill/>
+            <a:prstDash val="solid"/>
+          </a:ln>
+        </p:spPr>
+        <p:txBody>
+          <a:bodyPr xmlns:a="http://schemas.openxmlformats.org/drawingml/2006/main"/>
+          <a:lstStyle xmlns:a="http://schemas.openxmlformats.org/drawingml/2006/main"/>
+          <a:p xmlns:a="http://schemas.openxmlformats.org/drawingml/2006/main">
+            <a:pPr algn="l">
+              <a:defRPr sz="975" b="1" i="0">
+                <a:solidFill>
+                  <a:srgbClr val="555555"/>
+                </a:solidFill>
+              </a:defRPr>
+            </a:pPr>
+            <a:r>
+              <a:rPr sz="975" b="1" i="0">
+                <a:solidFill>
+                  <a:srgbClr val="555555"/>
+                </a:solidFill>
+              </a:rPr>
+              <a:t>GEN5.4 ML DECISION ENGINE</a:t>
+            </a:r>
+          </a:p>
+        </p:txBody>
+      </p:sp>
+      <p:sp>
+        <p:nvSpPr>
+          <p:cNvPr id="2" name="">
+            <a:extLst xmlns:a="http://schemas.openxmlformats.org/drawingml/2006/main">
+              <a:ext uri="{FF2B5EF4-FFF2-40B4-BE49-F238E27FC236}">
+                <a16:creationId xmlns:a16="http://schemas.microsoft.com/office/drawing/2014/main" id="{3F37DBE0-B05D-436D-9FB5-5B6A158B3CA9}"/>
+              </a:ext>
+            </a:extLst>
+          </p:cNvPr>
+          <p:cNvSpPr>
+            <a:spLocks xmlns:a="http://schemas.openxmlformats.org/drawingml/2006/main" noGrp="1"/>
+          </p:cNvSpPr>
+          <p:nvPr/>
+        </p:nvSpPr>
+        <p:spPr>
+          <a:xfrm xmlns:a="http://schemas.openxmlformats.org/drawingml/2006/main">
+            <a:off x="685800" y="723900"/>
+            <a:ext cx="10287000" cy="876300"/>
+          </a:xfrm>
+          <a:prstGeom xmlns:a="http://schemas.openxmlformats.org/drawingml/2006/main" prst="rect">
+            <a:avLst/>
+          </a:prstGeom>
+          <a:noFill xmlns:a="http://schemas.openxmlformats.org/drawingml/2006/main"/>
+          <a:ln xmlns:a="http://schemas.openxmlformats.org/drawingml/2006/main" w="0">
+            <a:noFill/>
+            <a:prstDash val="solid"/>
+          </a:ln>
+        </p:spPr>
+        <p:txBody>
+          <a:bodyPr xmlns:a="http://schemas.openxmlformats.org/drawingml/2006/main"/>
+          <a:lstStyle xmlns:a="http://schemas.openxmlformats.org/drawingml/2006/main"/>
+          <a:p xmlns:a="http://schemas.openxmlformats.org/drawingml/2006/main">
+            <a:pPr algn="l">
+              <a:defRPr sz="2850" b="1" i="0">
+                <a:solidFill>
+                  <a:srgbClr val="000000"/>
+                </a:solidFill>
+              </a:defRPr>
+            </a:pPr>
+            <a:r>
+              <a:rPr sz="2850" b="1" i="0">
+                <a:solidFill>
+                  <a:srgbClr val="000000"/>
+                </a:solidFill>
+              </a:rPr>
+              <a:t>The ranking audit gives a caution flag</a:t>
+            </a:r>
+          </a:p>
+        </p:txBody>
+      </p:sp>
+      <p:sp>
+        <p:nvSpPr>
+          <p:cNvPr id="3" name="">
+            <a:extLst xmlns:a="http://schemas.openxmlformats.org/drawingml/2006/main">
+              <a:ext uri="{FF2B5EF4-FFF2-40B4-BE49-F238E27FC236}">
+                <a16:creationId xmlns:a16="http://schemas.microsoft.com/office/drawing/2014/main" id="{5D4DCD68-44F8-4ECE-B66B-1E202FE70C9E}"/>
+              </a:ext>
+            </a:extLst>
+          </p:cNvPr>
+          <p:cNvSpPr>
+            <a:spLocks xmlns:a="http://schemas.openxmlformats.org/drawingml/2006/main" noGrp="1"/>
+          </p:cNvSpPr>
+          <p:nvPr/>
+        </p:nvSpPr>
+        <p:spPr>
+          <a:xfrm xmlns:a="http://schemas.openxmlformats.org/drawingml/2006/main">
+            <a:off x="685800" y="1657350"/>
+            <a:ext cx="10820400" cy="19050"/>
+          </a:xfrm>
+          <a:prstGeom xmlns:a="http://schemas.openxmlformats.org/drawingml/2006/main" prst="rect">
+            <a:avLst/>
+          </a:prstGeom>
+          <a:solidFill xmlns:a="http://schemas.openxmlformats.org/drawingml/2006/main">
+            <a:srgbClr val="B8BCC4"/>
+          </a:solidFill>
+          <a:ln xmlns:a="http://schemas.openxmlformats.org/drawingml/2006/main" w="0">
+            <a:noFill/>
+            <a:prstDash val="solid"/>
+          </a:ln>
+        </p:spPr>
+      </p:sp>
+      <p:pic>
+        <p:nvPicPr>
+          <p:cNvPr id="10" name=""/>
+          <p:cNvPicPr>
+            <a:picLocks xmlns:a="http://schemas.openxmlformats.org/drawingml/2006/main" noChangeAspect="1"/>
+          </p:cNvPicPr>
+          <p:nvPr/>
+        </p:nvPicPr>
+        <p:blipFill>
+          <a:blip xmlns:r="http://schemas.openxmlformats.org/officeDocument/2006/relationships" xmlns:a="http://schemas.openxmlformats.org/drawingml/2006/main" r:embed="Rb8cd0b4869574853"/>
+          <a:stretch xmlns:a="http://schemas.openxmlformats.org/drawingml/2006/main"/>
+        </p:blipFill>
+        <p:spPr>
+          <a:xfrm xmlns:a="http://schemas.openxmlformats.org/drawingml/2006/main">
+            <a:off x="704850" y="2214196"/>
+            <a:ext cx="5715000" cy="3077308"/>
+          </a:xfrm>
+          <a:prstGeom xmlns:a="http://schemas.openxmlformats.org/drawingml/2006/main" prst="rect">
+            <a:avLst/>
+          </a:prstGeom>
+        </p:spPr>
+      </p:pic>
+      <p:sp>
+        <p:nvSpPr>
+          <p:cNvPr id="5" name="">
+            <a:extLst xmlns:a="http://schemas.openxmlformats.org/drawingml/2006/main">
+              <a:ext uri="{FF2B5EF4-FFF2-40B4-BE49-F238E27FC236}">
+                <a16:creationId xmlns:a16="http://schemas.microsoft.com/office/drawing/2014/main" id="{21F2333A-ADB0-4DE7-BD01-1E98EBDB2A92}"/>
+              </a:ext>
+            </a:extLst>
+          </p:cNvPr>
+          <p:cNvSpPr>
+            <a:spLocks xmlns:a="http://schemas.openxmlformats.org/drawingml/2006/main" noGrp="1"/>
+          </p:cNvSpPr>
+          <p:nvPr/>
+        </p:nvSpPr>
+        <p:spPr>
+          <a:xfrm xmlns:a="http://schemas.openxmlformats.org/drawingml/2006/main">
+            <a:off x="7105650" y="2133600"/>
+            <a:ext cx="3143250" cy="323850"/>
+          </a:xfrm>
+          <a:prstGeom xmlns:a="http://schemas.openxmlformats.org/drawingml/2006/main" prst="rect">
+            <a:avLst/>
+          </a:prstGeom>
+          <a:noFill xmlns:a="http://schemas.openxmlformats.org/drawingml/2006/main"/>
+          <a:ln xmlns:a="http://schemas.openxmlformats.org/drawingml/2006/main" w="0">
+            <a:noFill/>
+            <a:prstDash val="solid"/>
+          </a:ln>
+        </p:spPr>
+        <p:txBody>
+          <a:bodyPr xmlns:a="http://schemas.openxmlformats.org/drawingml/2006/main"/>
+          <a:lstStyle xmlns:a="http://schemas.openxmlformats.org/drawingml/2006/main"/>
+          <a:p xmlns:a="http://schemas.openxmlformats.org/drawingml/2006/main">
+            <a:pPr algn="l">
+              <a:defRPr sz="1950" b="1" i="0">
+                <a:solidFill>
+                  <a:srgbClr val="222222"/>
+                </a:solidFill>
+              </a:defRPr>
+            </a:pPr>
+            <a:r>
+              <a:rPr sz="1950" b="1" i="0">
+                <a:solidFill>
+                  <a:srgbClr val="222222"/>
+                </a:solidFill>
+              </a:rPr>
+              <a:t>Why this is nuanced</a:t>
+            </a:r>
+          </a:p>
+        </p:txBody>
+      </p:sp>
+      <p:sp>
+        <p:nvSpPr>
+          <p:cNvPr id="6" name="">
+            <a:extLst xmlns:a="http://schemas.openxmlformats.org/drawingml/2006/main">
+              <a:ext uri="{FF2B5EF4-FFF2-40B4-BE49-F238E27FC236}">
+                <a16:creationId xmlns:a16="http://schemas.microsoft.com/office/drawing/2014/main" id="{564A5AA4-D495-4E2B-A52A-9AE95826EC5F}"/>
+              </a:ext>
+            </a:extLst>
+          </p:cNvPr>
+          <p:cNvSpPr>
+            <a:spLocks xmlns:a="http://schemas.openxmlformats.org/drawingml/2006/main" noGrp="1"/>
+          </p:cNvSpPr>
+          <p:nvPr/>
+        </p:nvSpPr>
+        <p:spPr>
+          <a:xfrm xmlns:a="http://schemas.openxmlformats.org/drawingml/2006/main">
+            <a:off x="7105650" y="2743200"/>
+            <a:ext cx="3333750" cy="2190750"/>
+          </a:xfrm>
+          <a:prstGeom xmlns:a="http://schemas.openxmlformats.org/drawingml/2006/main" prst="rect">
+            <a:avLst/>
+          </a:prstGeom>
+          <a:noFill xmlns:a="http://schemas.openxmlformats.org/drawingml/2006/main"/>
+          <a:ln xmlns:a="http://schemas.openxmlformats.org/drawingml/2006/main" w="0">
+            <a:noFill/>
+            <a:prstDash val="solid"/>
+          </a:ln>
+        </p:spPr>
+        <p:txBody>
+          <a:bodyPr xmlns:a="http://schemas.openxmlformats.org/drawingml/2006/main"/>
+          <a:lstStyle xmlns:a="http://schemas.openxmlformats.org/drawingml/2006/main"/>
+          <a:p xmlns:a="http://schemas.openxmlformats.org/drawingml/2006/main">
+            <a:pPr algn="l">
+              <a:defRPr sz="1650" b="0" i="0">
+                <a:solidFill>
+                  <a:srgbClr val="222222"/>
+                </a:solidFill>
+              </a:defRPr>
+            </a:pPr>
+            <a:r>
+              <a:rPr sz="1650" b="0" i="0">
+                <a:solidFill>
+                  <a:srgbClr val="222222"/>
+                </a:solidFill>
+              </a:rPr>
+              <a:t>XGBoost improved replay, but its 2020 AUC was 0.511 versus GLM at 0.520. The gain may come from threshold-crossing timing and drawdown behavior rather than cleaner global ranking.</a:t>
+            </a:r>
+          </a:p>
+        </p:txBody>
+      </p:sp>
+    </p:spTree>
+    <p:extLst>
+      <p:ext uri="{BB962C8B-B14F-4D97-AF65-F5344CB8AC3E}">
+        <p14:creationId xmlns:p14="http://schemas.microsoft.com/office/powerpoint/2010/main" val="704132569"/>
+      </p:ext>
+    </p:extLst>
+  </p:cSld>
+</p:sld>
+</file>
+
+<file path=ppt/slides/slide34.xml><?xml version="1.0" encoding="utf-8"?>
+<p:sld xmlns:p="http://schemas.openxmlformats.org/presentationml/2006/main">
+  <p:cSld>
+    <p:bg>
+      <p:bgPr>
+        <a:solidFill xmlns:a="http://schemas.openxmlformats.org/drawingml/2006/main">
+          <a:srgbClr val="FFFFFF"/>
+        </a:solidFill>
+      </p:bgPr>
+    </p:bg>
+    <p:spTree>
+      <p:nvGrpSpPr>
+        <p:cNvPr id="1" name=""/>
+        <p:cNvGrpSpPr/>
+        <p:nvPr/>
+      </p:nvGrpSpPr>
+      <p:grpSpPr>
+        <a:xfrm xmlns:a="http://schemas.openxmlformats.org/drawingml/2006/main"/>
+      </p:grpSpPr>
+      <p:sp>
+        <p:nvSpPr>
+          <p:cNvPr id="1" name="">
+            <a:extLst xmlns:a="http://schemas.openxmlformats.org/drawingml/2006/main">
+              <a:ext uri="{FF2B5EF4-FFF2-40B4-BE49-F238E27FC236}">
+                <a16:creationId xmlns:a16="http://schemas.microsoft.com/office/drawing/2014/main" id="{81D5683D-697A-4659-92A7-AB6810F5E5B9}"/>
+              </a:ext>
+            </a:extLst>
+          </p:cNvPr>
+          <p:cNvSpPr>
+            <a:spLocks xmlns:a="http://schemas.openxmlformats.org/drawingml/2006/main" noGrp="1"/>
+          </p:cNvSpPr>
+          <p:nvPr/>
+        </p:nvSpPr>
+        <p:spPr>
+          <a:xfrm xmlns:a="http://schemas.openxmlformats.org/drawingml/2006/main">
+            <a:off x="685800" y="400050"/>
+            <a:ext cx="8572500" cy="247650"/>
+          </a:xfrm>
+          <a:prstGeom xmlns:a="http://schemas.openxmlformats.org/drawingml/2006/main" prst="rect">
+            <a:avLst/>
+          </a:prstGeom>
+          <a:noFill xmlns:a="http://schemas.openxmlformats.org/drawingml/2006/main"/>
+          <a:ln xmlns:a="http://schemas.openxmlformats.org/drawingml/2006/main" w="0">
+            <a:noFill/>
+            <a:prstDash val="solid"/>
+          </a:ln>
+        </p:spPr>
+        <p:txBody>
+          <a:bodyPr xmlns:a="http://schemas.openxmlformats.org/drawingml/2006/main"/>
+          <a:lstStyle xmlns:a="http://schemas.openxmlformats.org/drawingml/2006/main"/>
+          <a:p xmlns:a="http://schemas.openxmlformats.org/drawingml/2006/main">
+            <a:pPr algn="l">
+              <a:defRPr sz="975" b="1" i="0">
+                <a:solidFill>
+                  <a:srgbClr val="555555"/>
+                </a:solidFill>
+              </a:defRPr>
+            </a:pPr>
+            <a:r>
+              <a:rPr sz="975" b="1" i="0">
+                <a:solidFill>
+                  <a:srgbClr val="555555"/>
+                </a:solidFill>
+              </a:rPr>
+              <a:t>GEN5.4 ML DECISION ENGINE</a:t>
+            </a:r>
+          </a:p>
+        </p:txBody>
+      </p:sp>
+      <p:sp>
+        <p:nvSpPr>
+          <p:cNvPr id="2" name="">
+            <a:extLst xmlns:a="http://schemas.openxmlformats.org/drawingml/2006/main">
+              <a:ext uri="{FF2B5EF4-FFF2-40B4-BE49-F238E27FC236}">
+                <a16:creationId xmlns:a16="http://schemas.microsoft.com/office/drawing/2014/main" id="{8C74112C-101D-4FD1-BA83-D33001FD6F51}"/>
+              </a:ext>
+            </a:extLst>
+          </p:cNvPr>
+          <p:cNvSpPr>
+            <a:spLocks xmlns:a="http://schemas.openxmlformats.org/drawingml/2006/main" noGrp="1"/>
+          </p:cNvSpPr>
+          <p:nvPr/>
+        </p:nvSpPr>
+        <p:spPr>
+          <a:xfrm xmlns:a="http://schemas.openxmlformats.org/drawingml/2006/main">
+            <a:off x="685800" y="723900"/>
+            <a:ext cx="10287000" cy="876300"/>
+          </a:xfrm>
+          <a:prstGeom xmlns:a="http://schemas.openxmlformats.org/drawingml/2006/main" prst="rect">
+            <a:avLst/>
+          </a:prstGeom>
+          <a:noFill xmlns:a="http://schemas.openxmlformats.org/drawingml/2006/main"/>
+          <a:ln xmlns:a="http://schemas.openxmlformats.org/drawingml/2006/main" w="0">
+            <a:noFill/>
+            <a:prstDash val="solid"/>
+          </a:ln>
+        </p:spPr>
+        <p:txBody>
+          <a:bodyPr xmlns:a="http://schemas.openxmlformats.org/drawingml/2006/main"/>
+          <a:lstStyle xmlns:a="http://schemas.openxmlformats.org/drawingml/2006/main"/>
+          <a:p xmlns:a="http://schemas.openxmlformats.org/drawingml/2006/main">
+            <a:pPr algn="l">
+              <a:defRPr sz="2850" b="1" i="0">
+                <a:solidFill>
+                  <a:srgbClr val="000000"/>
+                </a:solidFill>
+              </a:defRPr>
+            </a:pPr>
+            <a:r>
+              <a:rPr sz="2850" b="1" i="0">
+                <a:solidFill>
+                  <a:srgbClr val="000000"/>
+                </a:solidFill>
+              </a:rPr>
+              <a:t>Probability tapes are now the most important audit surface</a:t>
+            </a:r>
+          </a:p>
+        </p:txBody>
+      </p:sp>
+      <p:sp>
+        <p:nvSpPr>
+          <p:cNvPr id="3" name="">
+            <a:extLst xmlns:a="http://schemas.openxmlformats.org/drawingml/2006/main">
+              <a:ext uri="{FF2B5EF4-FFF2-40B4-BE49-F238E27FC236}">
+                <a16:creationId xmlns:a16="http://schemas.microsoft.com/office/drawing/2014/main" id="{BD87C712-3D45-40B6-932E-7283B2D3F164}"/>
+              </a:ext>
+            </a:extLst>
+          </p:cNvPr>
+          <p:cNvSpPr>
+            <a:spLocks xmlns:a="http://schemas.openxmlformats.org/drawingml/2006/main" noGrp="1"/>
+          </p:cNvSpPr>
+          <p:nvPr/>
+        </p:nvSpPr>
+        <p:spPr>
+          <a:xfrm xmlns:a="http://schemas.openxmlformats.org/drawingml/2006/main">
+            <a:off x="685800" y="1657350"/>
+            <a:ext cx="10820400" cy="19050"/>
+          </a:xfrm>
+          <a:prstGeom xmlns:a="http://schemas.openxmlformats.org/drawingml/2006/main" prst="rect">
+            <a:avLst/>
+          </a:prstGeom>
+          <a:solidFill xmlns:a="http://schemas.openxmlformats.org/drawingml/2006/main">
+            <a:srgbClr val="B8BCC4"/>
+          </a:solidFill>
+          <a:ln xmlns:a="http://schemas.openxmlformats.org/drawingml/2006/main" w="0">
+            <a:noFill/>
+            <a:prstDash val="solid"/>
+          </a:ln>
+        </p:spPr>
+      </p:sp>
+      <p:pic>
+        <p:nvPicPr>
+          <p:cNvPr id="10" name=""/>
+          <p:cNvPicPr>
+            <a:picLocks xmlns:a="http://schemas.openxmlformats.org/drawingml/2006/main" noChangeAspect="1"/>
+          </p:cNvPicPr>
+          <p:nvPr/>
+        </p:nvPicPr>
+        <p:blipFill>
+          <a:blip xmlns:r="http://schemas.openxmlformats.org/officeDocument/2006/relationships" xmlns:a="http://schemas.openxmlformats.org/drawingml/2006/main" r:embed="R56201ba41a254f2d"/>
+          <a:stretch xmlns:a="http://schemas.openxmlformats.org/drawingml/2006/main"/>
+        </p:blipFill>
+        <p:spPr>
+          <a:xfrm xmlns:a="http://schemas.openxmlformats.org/drawingml/2006/main">
+            <a:off x="1038785" y="2000250"/>
+            <a:ext cx="6494929" cy="3943350"/>
+          </a:xfrm>
+          <a:prstGeom xmlns:a="http://schemas.openxmlformats.org/drawingml/2006/main" prst="rect">
+            <a:avLst/>
+          </a:prstGeom>
+        </p:spPr>
+      </p:pic>
+      <p:sp>
+        <p:nvSpPr>
+          <p:cNvPr id="5" name="">
+            <a:extLst xmlns:a="http://schemas.openxmlformats.org/drawingml/2006/main">
+              <a:ext uri="{FF2B5EF4-FFF2-40B4-BE49-F238E27FC236}">
+                <a16:creationId xmlns:a16="http://schemas.microsoft.com/office/drawing/2014/main" id="{08472E7B-40AF-40B2-86F0-76A713555BE8}"/>
+              </a:ext>
+            </a:extLst>
+          </p:cNvPr>
+          <p:cNvSpPr>
+            <a:spLocks xmlns:a="http://schemas.openxmlformats.org/drawingml/2006/main" noGrp="1"/>
+          </p:cNvSpPr>
+          <p:nvPr/>
+        </p:nvSpPr>
+        <p:spPr>
+          <a:xfrm xmlns:a="http://schemas.openxmlformats.org/drawingml/2006/main">
+            <a:off x="8477250" y="2133600"/>
+            <a:ext cx="2571750" cy="304800"/>
+          </a:xfrm>
+          <a:prstGeom xmlns:a="http://schemas.openxmlformats.org/drawingml/2006/main" prst="rect">
+            <a:avLst/>
+          </a:prstGeom>
+          <a:noFill xmlns:a="http://schemas.openxmlformats.org/drawingml/2006/main"/>
+          <a:ln xmlns:a="http://schemas.openxmlformats.org/drawingml/2006/main" w="0">
+            <a:noFill/>
+            <a:prstDash val="solid"/>
+          </a:ln>
+        </p:spPr>
+        <p:txBody>
+          <a:bodyPr xmlns:a="http://schemas.openxmlformats.org/drawingml/2006/main"/>
+          <a:lstStyle xmlns:a="http://schemas.openxmlformats.org/drawingml/2006/main"/>
+          <a:p xmlns:a="http://schemas.openxmlformats.org/drawingml/2006/main">
+            <a:pPr algn="l">
+              <a:defRPr sz="1950" b="1" i="0">
+                <a:solidFill>
+                  <a:srgbClr val="222222"/>
+                </a:solidFill>
+              </a:defRPr>
+            </a:pPr>
+            <a:r>
+              <a:rPr sz="1950" b="1" i="0">
+                <a:solidFill>
+                  <a:srgbClr val="222222"/>
+                </a:solidFill>
+              </a:rPr>
+              <a:t>What to inspect</a:t>
+            </a:r>
+          </a:p>
+        </p:txBody>
+      </p:sp>
+      <p:sp>
+        <p:nvSpPr>
+          <p:cNvPr id="6" name="">
+            <a:extLst xmlns:a="http://schemas.openxmlformats.org/drawingml/2006/main">
+              <a:ext uri="{FF2B5EF4-FFF2-40B4-BE49-F238E27FC236}">
+                <a16:creationId xmlns:a16="http://schemas.microsoft.com/office/drawing/2014/main" id="{0A68E902-D6F0-4DD7-9158-EF7CA0E813A8}"/>
+              </a:ext>
+            </a:extLst>
+          </p:cNvPr>
+          <p:cNvSpPr>
+            <a:spLocks xmlns:a="http://schemas.openxmlformats.org/drawingml/2006/main" noGrp="1"/>
+          </p:cNvSpPr>
+          <p:nvPr/>
+        </p:nvSpPr>
+        <p:spPr>
+          <a:xfrm xmlns:a="http://schemas.openxmlformats.org/drawingml/2006/main">
+            <a:off x="8477250" y="2705100"/>
+            <a:ext cx="2705100" cy="2286000"/>
+          </a:xfrm>
+          <a:prstGeom xmlns:a="http://schemas.openxmlformats.org/drawingml/2006/main" prst="rect">
+            <a:avLst/>
+          </a:prstGeom>
+          <a:noFill xmlns:a="http://schemas.openxmlformats.org/drawingml/2006/main"/>
+          <a:ln xmlns:a="http://schemas.openxmlformats.org/drawingml/2006/main" w="0">
+            <a:noFill/>
+            <a:prstDash val="solid"/>
+          </a:ln>
+        </p:spPr>
+        <p:txBody>
+          <a:bodyPr xmlns:a="http://schemas.openxmlformats.org/drawingml/2006/main"/>
+          <a:lstStyle xmlns:a="http://schemas.openxmlformats.org/drawingml/2006/main"/>
+          <a:p xmlns:a="http://schemas.openxmlformats.org/drawingml/2006/main">
+            <a:pPr algn="l">
+              <a:defRPr sz="1650" b="0" i="0">
+                <a:solidFill>
+                  <a:srgbClr val="222222"/>
+                </a:solidFill>
+              </a:defRPr>
+            </a:pPr>
+            <a:r>
+              <a:rPr sz="1650" b="0" i="0">
+                <a:solidFill>
+                  <a:srgbClr val="222222"/>
+                </a:solidFill>
+              </a:rPr>
+              <a:t>The key question is whether XGBoost changes entries and exits in places that make intuitive market sense. The tapes show a less linear probability trace and a different set of entry timings.</a:t>
+            </a:r>
+          </a:p>
+        </p:txBody>
+      </p:sp>
+    </p:spTree>
+    <p:extLst>
+      <p:ext uri="{BB962C8B-B14F-4D97-AF65-F5344CB8AC3E}">
+        <p14:creationId xmlns:p14="http://schemas.microsoft.com/office/powerpoint/2010/main" val="1267362920"/>
+      </p:ext>
+    </p:extLst>
+  </p:cSld>
+</p:sld>
+</file>
+
+<file path=ppt/slides/slide35.xml><?xml version="1.0" encoding="utf-8"?>
+<p:sld xmlns:p="http://schemas.openxmlformats.org/presentationml/2006/main">
+  <p:cSld>
+    <p:bg>
+      <p:bgPr>
+        <a:solidFill xmlns:a="http://schemas.openxmlformats.org/drawingml/2006/main">
+          <a:srgbClr val="FFFFFF"/>
+        </a:solidFill>
+      </p:bgPr>
+    </p:bg>
+    <p:spTree>
+      <p:nvGrpSpPr>
+        <p:cNvPr id="1" name=""/>
+        <p:cNvGrpSpPr/>
+        <p:nvPr/>
+      </p:nvGrpSpPr>
+      <p:grpSpPr>
+        <a:xfrm xmlns:a="http://schemas.openxmlformats.org/drawingml/2006/main"/>
+      </p:grpSpPr>
+      <p:sp>
+        <p:nvSpPr>
+          <p:cNvPr id="1" name="">
+            <a:extLst xmlns:a="http://schemas.openxmlformats.org/drawingml/2006/main">
+              <a:ext uri="{FF2B5EF4-FFF2-40B4-BE49-F238E27FC236}">
+                <a16:creationId xmlns:a16="http://schemas.microsoft.com/office/drawing/2014/main" id="{4CBDAF50-5273-46C4-82BB-234774AB04DE}"/>
+              </a:ext>
+            </a:extLst>
+          </p:cNvPr>
+          <p:cNvSpPr>
+            <a:spLocks xmlns:a="http://schemas.openxmlformats.org/drawingml/2006/main" noGrp="1"/>
+          </p:cNvSpPr>
+          <p:nvPr/>
+        </p:nvSpPr>
+        <p:spPr>
+          <a:xfrm xmlns:a="http://schemas.openxmlformats.org/drawingml/2006/main">
+            <a:off x="685800" y="400050"/>
+            <a:ext cx="8572500" cy="247650"/>
+          </a:xfrm>
+          <a:prstGeom xmlns:a="http://schemas.openxmlformats.org/drawingml/2006/main" prst="rect">
+            <a:avLst/>
+          </a:prstGeom>
+          <a:noFill xmlns:a="http://schemas.openxmlformats.org/drawingml/2006/main"/>
+          <a:ln xmlns:a="http://schemas.openxmlformats.org/drawingml/2006/main" w="0">
+            <a:noFill/>
+            <a:prstDash val="solid"/>
+          </a:ln>
+        </p:spPr>
+        <p:txBody>
+          <a:bodyPr xmlns:a="http://schemas.openxmlformats.org/drawingml/2006/main"/>
+          <a:lstStyle xmlns:a="http://schemas.openxmlformats.org/drawingml/2006/main"/>
+          <a:p xmlns:a="http://schemas.openxmlformats.org/drawingml/2006/main">
+            <a:pPr algn="l">
+              <a:defRPr sz="975" b="1" i="0">
+                <a:solidFill>
+                  <a:srgbClr val="555555"/>
+                </a:solidFill>
+              </a:defRPr>
+            </a:pPr>
+            <a:r>
+              <a:rPr sz="975" b="1" i="0">
+                <a:solidFill>
+                  <a:srgbClr val="555555"/>
+                </a:solidFill>
+              </a:rPr>
+              <a:t>GEN5.4 ML DECISION ENGINE</a:t>
+            </a:r>
+          </a:p>
+        </p:txBody>
+      </p:sp>
+      <p:sp>
+        <p:nvSpPr>
+          <p:cNvPr id="2" name="">
+            <a:extLst xmlns:a="http://schemas.openxmlformats.org/drawingml/2006/main">
+              <a:ext uri="{FF2B5EF4-FFF2-40B4-BE49-F238E27FC236}">
+                <a16:creationId xmlns:a16="http://schemas.microsoft.com/office/drawing/2014/main" id="{8D8D5B61-F424-4D25-B15B-346BB0DFCFA1}"/>
+              </a:ext>
+            </a:extLst>
+          </p:cNvPr>
+          <p:cNvSpPr>
+            <a:spLocks xmlns:a="http://schemas.openxmlformats.org/drawingml/2006/main" noGrp="1"/>
+          </p:cNvSpPr>
+          <p:nvPr/>
+        </p:nvSpPr>
+        <p:spPr>
+          <a:xfrm xmlns:a="http://schemas.openxmlformats.org/drawingml/2006/main">
+            <a:off x="685800" y="723900"/>
+            <a:ext cx="10287000" cy="876300"/>
+          </a:xfrm>
+          <a:prstGeom xmlns:a="http://schemas.openxmlformats.org/drawingml/2006/main" prst="rect">
+            <a:avLst/>
+          </a:prstGeom>
+          <a:noFill xmlns:a="http://schemas.openxmlformats.org/drawingml/2006/main"/>
+          <a:ln xmlns:a="http://schemas.openxmlformats.org/drawingml/2006/main" w="0">
+            <a:noFill/>
+            <a:prstDash val="solid"/>
+          </a:ln>
+        </p:spPr>
+        <p:txBody>
+          <a:bodyPr xmlns:a="http://schemas.openxmlformats.org/drawingml/2006/main"/>
+          <a:lstStyle xmlns:a="http://schemas.openxmlformats.org/drawingml/2006/main"/>
+          <a:p xmlns:a="http://schemas.openxmlformats.org/drawingml/2006/main">
+            <a:pPr algn="l">
+              <a:defRPr sz="2850" b="1" i="0">
+                <a:solidFill>
+                  <a:srgbClr val="000000"/>
+                </a:solidFill>
+              </a:defRPr>
+            </a:pPr>
+            <a:r>
+              <a:rPr sz="2850" b="1" i="0">
+                <a:solidFill>
+                  <a:srgbClr val="000000"/>
+                </a:solidFill>
+              </a:rPr>
+              <a:t>The feature-importance audit points back to OHLCV structure</a:t>
+            </a:r>
+          </a:p>
+        </p:txBody>
+      </p:sp>
+      <p:sp>
+        <p:nvSpPr>
+          <p:cNvPr id="3" name="">
+            <a:extLst xmlns:a="http://schemas.openxmlformats.org/drawingml/2006/main">
+              <a:ext uri="{FF2B5EF4-FFF2-40B4-BE49-F238E27FC236}">
+                <a16:creationId xmlns:a16="http://schemas.microsoft.com/office/drawing/2014/main" id="{A3AD72B9-99CE-4290-9001-02EF200EF01E}"/>
+              </a:ext>
+            </a:extLst>
+          </p:cNvPr>
+          <p:cNvSpPr>
+            <a:spLocks xmlns:a="http://schemas.openxmlformats.org/drawingml/2006/main" noGrp="1"/>
+          </p:cNvSpPr>
+          <p:nvPr/>
+        </p:nvSpPr>
+        <p:spPr>
+          <a:xfrm xmlns:a="http://schemas.openxmlformats.org/drawingml/2006/main">
+            <a:off x="685800" y="1657350"/>
+            <a:ext cx="10820400" cy="19050"/>
+          </a:xfrm>
+          <a:prstGeom xmlns:a="http://schemas.openxmlformats.org/drawingml/2006/main" prst="rect">
+            <a:avLst/>
+          </a:prstGeom>
+          <a:solidFill xmlns:a="http://schemas.openxmlformats.org/drawingml/2006/main">
+            <a:srgbClr val="B8BCC4"/>
+          </a:solidFill>
+          <a:ln xmlns:a="http://schemas.openxmlformats.org/drawingml/2006/main" w="0">
+            <a:noFill/>
+            <a:prstDash val="solid"/>
+          </a:ln>
+        </p:spPr>
+      </p:sp>
+      <p:pic>
+        <p:nvPicPr>
+          <p:cNvPr id="10" name=""/>
+          <p:cNvPicPr>
+            <a:picLocks xmlns:a="http://schemas.openxmlformats.org/drawingml/2006/main" noChangeAspect="1"/>
+          </p:cNvPicPr>
+          <p:nvPr/>
+        </p:nvPicPr>
+        <p:blipFill>
+          <a:blip xmlns:r="http://schemas.openxmlformats.org/officeDocument/2006/relationships" xmlns:a="http://schemas.openxmlformats.org/drawingml/2006/main" r:embed="R90dc2530af294746"/>
+          <a:stretch xmlns:a="http://schemas.openxmlformats.org/drawingml/2006/main"/>
+        </p:blipFill>
+        <p:spPr>
+          <a:xfrm xmlns:a="http://schemas.openxmlformats.org/drawingml/2006/main">
+            <a:off x="718457" y="2038350"/>
+            <a:ext cx="5878286" cy="3429000"/>
+          </a:xfrm>
+          <a:prstGeom xmlns:a="http://schemas.openxmlformats.org/drawingml/2006/main" prst="rect">
+            <a:avLst/>
+          </a:prstGeom>
+        </p:spPr>
+      </p:pic>
+      <p:sp>
+        <p:nvSpPr>
+          <p:cNvPr id="5" name="">
+            <a:extLst xmlns:a="http://schemas.openxmlformats.org/drawingml/2006/main">
+              <a:ext uri="{FF2B5EF4-FFF2-40B4-BE49-F238E27FC236}">
+                <a16:creationId xmlns:a16="http://schemas.microsoft.com/office/drawing/2014/main" id="{F86B1FD9-0798-43FB-8569-3C6EFD6CE757}"/>
+              </a:ext>
+            </a:extLst>
+          </p:cNvPr>
+          <p:cNvSpPr>
+            <a:spLocks xmlns:a="http://schemas.openxmlformats.org/drawingml/2006/main" noGrp="1"/>
+          </p:cNvSpPr>
+          <p:nvPr/>
+        </p:nvSpPr>
+        <p:spPr>
+          <a:xfrm xmlns:a="http://schemas.openxmlformats.org/drawingml/2006/main">
+            <a:off x="7124700" y="2133600"/>
+            <a:ext cx="2857500" cy="323850"/>
+          </a:xfrm>
+          <a:prstGeom xmlns:a="http://schemas.openxmlformats.org/drawingml/2006/main" prst="rect">
+            <a:avLst/>
+          </a:prstGeom>
+          <a:noFill xmlns:a="http://schemas.openxmlformats.org/drawingml/2006/main"/>
+          <a:ln xmlns:a="http://schemas.openxmlformats.org/drawingml/2006/main" w="0">
+            <a:noFill/>
+            <a:prstDash val="solid"/>
+          </a:ln>
+        </p:spPr>
+        <p:txBody>
+          <a:bodyPr xmlns:a="http://schemas.openxmlformats.org/drawingml/2006/main"/>
+          <a:lstStyle xmlns:a="http://schemas.openxmlformats.org/drawingml/2006/main"/>
+          <a:p xmlns:a="http://schemas.openxmlformats.org/drawingml/2006/main">
+            <a:pPr algn="l">
+              <a:defRPr sz="1950" b="1" i="0">
+                <a:solidFill>
+                  <a:srgbClr val="222222"/>
+                </a:solidFill>
+              </a:defRPr>
+            </a:pPr>
+            <a:r>
+              <a:rPr sz="1950" b="1" i="0">
+                <a:solidFill>
+                  <a:srgbClr val="222222"/>
+                </a:solidFill>
+              </a:rPr>
+              <a:t>Interpret carefully</a:t>
+            </a:r>
+          </a:p>
+        </p:txBody>
+      </p:sp>
+      <p:sp>
+        <p:nvSpPr>
+          <p:cNvPr id="6" name="">
+            <a:extLst xmlns:a="http://schemas.openxmlformats.org/drawingml/2006/main">
+              <a:ext uri="{FF2B5EF4-FFF2-40B4-BE49-F238E27FC236}">
+                <a16:creationId xmlns:a16="http://schemas.microsoft.com/office/drawing/2014/main" id="{E4D80C65-A1F9-4EB0-BA6A-D130512A9E09}"/>
+              </a:ext>
+            </a:extLst>
+          </p:cNvPr>
+          <p:cNvSpPr>
+            <a:spLocks xmlns:a="http://schemas.openxmlformats.org/drawingml/2006/main" noGrp="1"/>
+          </p:cNvSpPr>
+          <p:nvPr/>
+        </p:nvSpPr>
+        <p:spPr>
+          <a:xfrm xmlns:a="http://schemas.openxmlformats.org/drawingml/2006/main">
+            <a:off x="7124700" y="2743200"/>
+            <a:ext cx="3333750" cy="2286000"/>
+          </a:xfrm>
+          <a:prstGeom xmlns:a="http://schemas.openxmlformats.org/drawingml/2006/main" prst="rect">
+            <a:avLst/>
+          </a:prstGeom>
+          <a:noFill xmlns:a="http://schemas.openxmlformats.org/drawingml/2006/main"/>
+          <a:ln xmlns:a="http://schemas.openxmlformats.org/drawingml/2006/main" w="0">
+            <a:noFill/>
+            <a:prstDash val="solid"/>
+          </a:ln>
+        </p:spPr>
+        <p:txBody>
+          <a:bodyPr xmlns:a="http://schemas.openxmlformats.org/drawingml/2006/main"/>
+          <a:lstStyle xmlns:a="http://schemas.openxmlformats.org/drawingml/2006/main"/>
+          <a:p xmlns:a="http://schemas.openxmlformats.org/drawingml/2006/main">
+            <a:pPr algn="l">
+              <a:defRPr sz="1650" b="0" i="0">
+                <a:solidFill>
+                  <a:srgbClr val="222222"/>
+                </a:solidFill>
+              </a:defRPr>
+            </a:pPr>
+            <a:r>
+              <a:rPr sz="1650" b="0" i="0">
+                <a:solidFill>
+                  <a:srgbClr val="222222"/>
+                </a:solidFill>
+              </a:rPr>
+              <a:t>The top split-gain feature in this first run was intraday_oc_ret. Importance is not causality, but it tells us XGBoost is using candle structure, gaps, short returns, compression, and market-relative features rather than only long trend memory.</a:t>
+            </a:r>
+          </a:p>
+        </p:txBody>
+      </p:sp>
+    </p:spTree>
+    <p:extLst>
+      <p:ext uri="{BB962C8B-B14F-4D97-AF65-F5344CB8AC3E}">
+        <p14:creationId xmlns:p14="http://schemas.microsoft.com/office/powerpoint/2010/main" val="648790409"/>
+      </p:ext>
+    </p:extLst>
+  </p:cSld>
+</p:sld>
+</file>
+
+<file path=ppt/slides/slide36.xml><?xml version="1.0" encoding="utf-8"?>
+<p:sld xmlns:p="http://schemas.openxmlformats.org/presentationml/2006/main">
+  <p:cSld>
+    <p:bg>
+      <p:bgPr>
+        <a:solidFill xmlns:a="http://schemas.openxmlformats.org/drawingml/2006/main">
+          <a:srgbClr val="FFFFFF"/>
+        </a:solidFill>
+      </p:bgPr>
+    </p:bg>
+    <p:spTree>
+      <p:nvGrpSpPr>
+        <p:cNvPr id="1" name=""/>
+        <p:cNvGrpSpPr/>
+        <p:nvPr/>
+      </p:nvGrpSpPr>
+      <p:grpSpPr>
+        <a:xfrm xmlns:a="http://schemas.openxmlformats.org/drawingml/2006/main"/>
+      </p:grpSpPr>
+      <p:sp>
+        <p:nvSpPr>
+          <p:cNvPr id="1" name="">
+            <a:extLst xmlns:a="http://schemas.openxmlformats.org/drawingml/2006/main">
+              <a:ext uri="{FF2B5EF4-FFF2-40B4-BE49-F238E27FC236}">
+                <a16:creationId xmlns:a16="http://schemas.microsoft.com/office/drawing/2014/main" id="{E10CB68B-E373-4022-84AE-A35249E0086C}"/>
+              </a:ext>
+            </a:extLst>
+          </p:cNvPr>
+          <p:cNvSpPr>
+            <a:spLocks xmlns:a="http://schemas.openxmlformats.org/drawingml/2006/main" noGrp="1"/>
+          </p:cNvSpPr>
+          <p:nvPr/>
+        </p:nvSpPr>
+        <p:spPr>
+          <a:xfrm xmlns:a="http://schemas.openxmlformats.org/drawingml/2006/main">
+            <a:off x="685800" y="400050"/>
+            <a:ext cx="8572500" cy="247650"/>
+          </a:xfrm>
+          <a:prstGeom xmlns:a="http://schemas.openxmlformats.org/drawingml/2006/main" prst="rect">
+            <a:avLst/>
+          </a:prstGeom>
+          <a:noFill xmlns:a="http://schemas.openxmlformats.org/drawingml/2006/main"/>
+          <a:ln xmlns:a="http://schemas.openxmlformats.org/drawingml/2006/main" w="0">
+            <a:noFill/>
+            <a:prstDash val="solid"/>
+          </a:ln>
+        </p:spPr>
+        <p:txBody>
+          <a:bodyPr xmlns:a="http://schemas.openxmlformats.org/drawingml/2006/main"/>
+          <a:lstStyle xmlns:a="http://schemas.openxmlformats.org/drawingml/2006/main"/>
+          <a:p xmlns:a="http://schemas.openxmlformats.org/drawingml/2006/main">
+            <a:pPr algn="l">
+              <a:defRPr sz="975" b="1" i="0">
+                <a:solidFill>
+                  <a:srgbClr val="555555"/>
+                </a:solidFill>
+              </a:defRPr>
+            </a:pPr>
+            <a:r>
+              <a:rPr sz="975" b="1" i="0">
+                <a:solidFill>
+                  <a:srgbClr val="555555"/>
+                </a:solidFill>
+              </a:rPr>
+              <a:t>GEN5.4 ML DECISION ENGINE</a:t>
+            </a:r>
+          </a:p>
+        </p:txBody>
+      </p:sp>
+      <p:sp>
+        <p:nvSpPr>
+          <p:cNvPr id="2" name="">
+            <a:extLst xmlns:a="http://schemas.openxmlformats.org/drawingml/2006/main">
+              <a:ext uri="{FF2B5EF4-FFF2-40B4-BE49-F238E27FC236}">
+                <a16:creationId xmlns:a16="http://schemas.microsoft.com/office/drawing/2014/main" id="{DA4DCEC3-902D-4FDE-80F3-EF6FA07F1280}"/>
+              </a:ext>
+            </a:extLst>
+          </p:cNvPr>
+          <p:cNvSpPr>
+            <a:spLocks xmlns:a="http://schemas.openxmlformats.org/drawingml/2006/main" noGrp="1"/>
+          </p:cNvSpPr>
+          <p:nvPr/>
+        </p:nvSpPr>
+        <p:spPr>
+          <a:xfrm xmlns:a="http://schemas.openxmlformats.org/drawingml/2006/main">
+            <a:off x="685800" y="723900"/>
+            <a:ext cx="10287000" cy="876300"/>
+          </a:xfrm>
+          <a:prstGeom xmlns:a="http://schemas.openxmlformats.org/drawingml/2006/main" prst="rect">
+            <a:avLst/>
+          </a:prstGeom>
+          <a:noFill xmlns:a="http://schemas.openxmlformats.org/drawingml/2006/main"/>
+          <a:ln xmlns:a="http://schemas.openxmlformats.org/drawingml/2006/main" w="0">
+            <a:noFill/>
+            <a:prstDash val="solid"/>
+          </a:ln>
+        </p:spPr>
+        <p:txBody>
+          <a:bodyPr xmlns:a="http://schemas.openxmlformats.org/drawingml/2006/main"/>
+          <a:lstStyle xmlns:a="http://schemas.openxmlformats.org/drawingml/2006/main"/>
+          <a:p xmlns:a="http://schemas.openxmlformats.org/drawingml/2006/main">
+            <a:pPr algn="l">
+              <a:defRPr sz="2850" b="1" i="0">
+                <a:solidFill>
+                  <a:srgbClr val="000000"/>
+                </a:solidFill>
+              </a:defRPr>
+            </a:pPr>
+            <a:r>
+              <a:rPr sz="2850" b="1" i="0">
+                <a:solidFill>
+                  <a:srgbClr val="000000"/>
+                </a:solidFill>
+              </a:rPr>
+              <a:t>The next gate is small XGBoost tuning, not a large search</a:t>
+            </a:r>
+          </a:p>
+        </p:txBody>
+      </p:sp>
+      <p:sp>
+        <p:nvSpPr>
+          <p:cNvPr id="3" name="">
+            <a:extLst xmlns:a="http://schemas.openxmlformats.org/drawingml/2006/main">
+              <a:ext uri="{FF2B5EF4-FFF2-40B4-BE49-F238E27FC236}">
+                <a16:creationId xmlns:a16="http://schemas.microsoft.com/office/drawing/2014/main" id="{5C512A49-150E-40CD-8E2A-59CD62E314A7}"/>
+              </a:ext>
+            </a:extLst>
+          </p:cNvPr>
+          <p:cNvSpPr>
+            <a:spLocks xmlns:a="http://schemas.openxmlformats.org/drawingml/2006/main" noGrp="1"/>
+          </p:cNvSpPr>
+          <p:nvPr/>
+        </p:nvSpPr>
+        <p:spPr>
+          <a:xfrm xmlns:a="http://schemas.openxmlformats.org/drawingml/2006/main">
+            <a:off x="685800" y="1657350"/>
+            <a:ext cx="10820400" cy="19050"/>
+          </a:xfrm>
+          <a:prstGeom xmlns:a="http://schemas.openxmlformats.org/drawingml/2006/main" prst="rect">
+            <a:avLst/>
+          </a:prstGeom>
+          <a:solidFill xmlns:a="http://schemas.openxmlformats.org/drawingml/2006/main">
+            <a:srgbClr val="B8BCC4"/>
+          </a:solidFill>
+          <a:ln xmlns:a="http://schemas.openxmlformats.org/drawingml/2006/main" w="0">
+            <a:noFill/>
+            <a:prstDash val="solid"/>
+          </a:ln>
+        </p:spPr>
+      </p:sp>
+      <p:sp>
+        <p:nvSpPr>
+          <p:cNvPr id="4" name="">
+            <a:extLst xmlns:a="http://schemas.openxmlformats.org/drawingml/2006/main">
+              <a:ext uri="{FF2B5EF4-FFF2-40B4-BE49-F238E27FC236}">
+                <a16:creationId xmlns:a16="http://schemas.microsoft.com/office/drawing/2014/main" id="{63DBC1B6-2A6A-4E21-8086-984A50ACFCE8}"/>
+              </a:ext>
+            </a:extLst>
+          </p:cNvPr>
+          <p:cNvSpPr>
+            <a:spLocks xmlns:a="http://schemas.openxmlformats.org/drawingml/2006/main" noGrp="1"/>
+          </p:cNvSpPr>
+          <p:nvPr/>
+        </p:nvSpPr>
+        <p:spPr>
+          <a:xfrm xmlns:a="http://schemas.openxmlformats.org/drawingml/2006/main">
+            <a:off x="876300" y="2133600"/>
+            <a:ext cx="9334500" cy="914400"/>
+          </a:xfrm>
+          <a:prstGeom xmlns:a="http://schemas.openxmlformats.org/drawingml/2006/main" prst="rect">
+            <a:avLst/>
+          </a:prstGeom>
+          <a:noFill xmlns:a="http://schemas.openxmlformats.org/drawingml/2006/main"/>
+          <a:ln xmlns:a="http://schemas.openxmlformats.org/drawingml/2006/main" w="0">
+            <a:noFill/>
+            <a:prstDash val="solid"/>
+          </a:ln>
+        </p:spPr>
+        <p:txBody>
+          <a:bodyPr xmlns:a="http://schemas.openxmlformats.org/drawingml/2006/main"/>
+          <a:lstStyle xmlns:a="http://schemas.openxmlformats.org/drawingml/2006/main"/>
+          <a:p xmlns:a="http://schemas.openxmlformats.org/drawingml/2006/main">
+            <a:pPr algn="l">
+              <a:defRPr sz="2250" b="1" i="0">
+                <a:solidFill>
+                  <a:srgbClr val="000000"/>
+                </a:solidFill>
+              </a:defRPr>
+            </a:pPr>
+            <a:r>
+              <a:rPr sz="2250" b="1" i="0">
+                <a:solidFill>
+                  <a:srgbClr val="000000"/>
+                </a:solidFill>
+              </a:rPr>
+              <a:t>ML-P2 earned a cautious follow-up because replay improved in both windows under fixed model settings. The ranking audit keeps us honest: this is not yet proof that the model has solved alpha.</a:t>
+            </a:r>
+          </a:p>
+        </p:txBody>
+      </p:sp>
+      <p:sp>
+        <p:nvSpPr>
+          <p:cNvPr id="5" name="">
+            <a:extLst xmlns:a="http://schemas.openxmlformats.org/drawingml/2006/main">
+              <a:ext uri="{FF2B5EF4-FFF2-40B4-BE49-F238E27FC236}">
+                <a16:creationId xmlns:a16="http://schemas.microsoft.com/office/drawing/2014/main" id="{70A366CC-D6CD-4DEF-8DAB-B52235903C69}"/>
+              </a:ext>
+            </a:extLst>
+          </p:cNvPr>
+          <p:cNvSpPr>
+            <a:spLocks xmlns:a="http://schemas.openxmlformats.org/drawingml/2006/main" noGrp="1"/>
+          </p:cNvSpPr>
+          <p:nvPr/>
+        </p:nvSpPr>
+        <p:spPr>
+          <a:xfrm xmlns:a="http://schemas.openxmlformats.org/drawingml/2006/main">
+            <a:off x="1219200" y="3571875"/>
+            <a:ext cx="190500" cy="247650"/>
+          </a:xfrm>
+          <a:prstGeom xmlns:a="http://schemas.openxmlformats.org/drawingml/2006/main" prst="rect">
+            <a:avLst/>
+          </a:prstGeom>
+          <a:noFill xmlns:a="http://schemas.openxmlformats.org/drawingml/2006/main"/>
+          <a:ln xmlns:a="http://schemas.openxmlformats.org/drawingml/2006/main" w="0">
+            <a:noFill/>
+            <a:prstDash val="solid"/>
+          </a:ln>
+        </p:spPr>
+        <p:txBody>
+          <a:bodyPr xmlns:a="http://schemas.openxmlformats.org/drawingml/2006/main"/>
+          <a:lstStyle xmlns:a="http://schemas.openxmlformats.org/drawingml/2006/main"/>
+          <a:p xmlns:a="http://schemas.openxmlformats.org/drawingml/2006/main">
+            <a:pPr algn="l">
+              <a:defRPr sz="1575" b="1" i="0">
+                <a:solidFill>
+                  <a:srgbClr val="FF6B35"/>
+                </a:solidFill>
+              </a:defRPr>
+            </a:pPr>
+            <a:r>
+              <a:rPr sz="1575" b="1" i="0">
+                <a:solidFill>
+                  <a:srgbClr val="FF6B35"/>
+                </a:solidFill>
+              </a:rPr>
+              <a:t>-</a:t>
+            </a:r>
+          </a:p>
+        </p:txBody>
+      </p:sp>
+      <p:sp>
+        <p:nvSpPr>
+          <p:cNvPr id="6" name="">
+            <a:extLst xmlns:a="http://schemas.openxmlformats.org/drawingml/2006/main">
+              <a:ext uri="{FF2B5EF4-FFF2-40B4-BE49-F238E27FC236}">
+                <a16:creationId xmlns:a16="http://schemas.microsoft.com/office/drawing/2014/main" id="{20A37CEE-06A0-4DD7-A4D8-5A6AB7A5608C}"/>
+              </a:ext>
+            </a:extLst>
+          </p:cNvPr>
+          <p:cNvSpPr>
+            <a:spLocks xmlns:a="http://schemas.openxmlformats.org/drawingml/2006/main" noGrp="1"/>
+          </p:cNvSpPr>
+          <p:nvPr/>
+        </p:nvSpPr>
+        <p:spPr>
+          <a:xfrm xmlns:a="http://schemas.openxmlformats.org/drawingml/2006/main">
+            <a:off x="1485900" y="3562350"/>
+            <a:ext cx="7162800" cy="514350"/>
+          </a:xfrm>
+          <a:prstGeom xmlns:a="http://schemas.openxmlformats.org/drawingml/2006/main" prst="rect">
+            <a:avLst/>
+          </a:prstGeom>
+          <a:noFill xmlns:a="http://schemas.openxmlformats.org/drawingml/2006/main"/>
+          <a:ln xmlns:a="http://schemas.openxmlformats.org/drawingml/2006/main" w="0">
+            <a:noFill/>
+            <a:prstDash val="solid"/>
+          </a:ln>
+        </p:spPr>
+        <p:txBody>
+          <a:bodyPr xmlns:a="http://schemas.openxmlformats.org/drawingml/2006/main"/>
+          <a:lstStyle xmlns:a="http://schemas.openxmlformats.org/drawingml/2006/main"/>
+          <a:p xmlns:a="http://schemas.openxmlformats.org/drawingml/2006/main">
+            <a:pPr algn="l">
+              <a:defRPr sz="1575" b="0" i="0">
+                <a:solidFill>
+                  <a:srgbClr val="222222"/>
+                </a:solidFill>
+              </a:defRPr>
+            </a:pPr>
+            <a:r>
+              <a:rPr sz="1575" b="0" i="0">
+                <a:solidFill>
+                  <a:srgbClr val="222222"/>
+                </a:solidFill>
+              </a:rPr>
+              <a:t>Run one small TRAIN-only XGBoost parameter slice: depth, rounds, and minimum child weight.</a:t>
+            </a:r>
+          </a:p>
+        </p:txBody>
+      </p:sp>
+      <p:sp>
+        <p:nvSpPr>
+          <p:cNvPr id="7" name="">
+            <a:extLst xmlns:a="http://schemas.openxmlformats.org/drawingml/2006/main">
+              <a:ext uri="{FF2B5EF4-FFF2-40B4-BE49-F238E27FC236}">
+                <a16:creationId xmlns:a16="http://schemas.microsoft.com/office/drawing/2014/main" id="{78A2CF30-EC85-4618-83C9-89F4B3620DB8}"/>
+              </a:ext>
+            </a:extLst>
+          </p:cNvPr>
+          <p:cNvSpPr>
+            <a:spLocks xmlns:a="http://schemas.openxmlformats.org/drawingml/2006/main" noGrp="1"/>
+          </p:cNvSpPr>
+          <p:nvPr/>
+        </p:nvSpPr>
+        <p:spPr>
+          <a:xfrm xmlns:a="http://schemas.openxmlformats.org/drawingml/2006/main">
+            <a:off x="1219200" y="4238625"/>
+            <a:ext cx="190500" cy="247650"/>
+          </a:xfrm>
+          <a:prstGeom xmlns:a="http://schemas.openxmlformats.org/drawingml/2006/main" prst="rect">
+            <a:avLst/>
+          </a:prstGeom>
+          <a:noFill xmlns:a="http://schemas.openxmlformats.org/drawingml/2006/main"/>
+          <a:ln xmlns:a="http://schemas.openxmlformats.org/drawingml/2006/main" w="0">
+            <a:noFill/>
+            <a:prstDash val="solid"/>
+          </a:ln>
+        </p:spPr>
+        <p:txBody>
+          <a:bodyPr xmlns:a="http://schemas.openxmlformats.org/drawingml/2006/main"/>
+          <a:lstStyle xmlns:a="http://schemas.openxmlformats.org/drawingml/2006/main"/>
+          <a:p xmlns:a="http://schemas.openxmlformats.org/drawingml/2006/main">
+            <a:pPr algn="l">
+              <a:defRPr sz="1575" b="1" i="0">
+                <a:solidFill>
+                  <a:srgbClr val="FF6B35"/>
+                </a:solidFill>
+              </a:defRPr>
+            </a:pPr>
+            <a:r>
+              <a:rPr sz="1575" b="1" i="0">
+                <a:solidFill>
+                  <a:srgbClr val="FF6B35"/>
+                </a:solidFill>
+              </a:rPr>
+              <a:t>-</a:t>
+            </a:r>
+          </a:p>
+        </p:txBody>
+      </p:sp>
+      <p:sp>
+        <p:nvSpPr>
+          <p:cNvPr id="8" name="">
+            <a:extLst xmlns:a="http://schemas.openxmlformats.org/drawingml/2006/main">
+              <a:ext uri="{FF2B5EF4-FFF2-40B4-BE49-F238E27FC236}">
+                <a16:creationId xmlns:a16="http://schemas.microsoft.com/office/drawing/2014/main" id="{C59C08DA-2B7B-45C1-A588-FC4F6A20ED4F}"/>
+              </a:ext>
+            </a:extLst>
+          </p:cNvPr>
+          <p:cNvSpPr>
+            <a:spLocks xmlns:a="http://schemas.openxmlformats.org/drawingml/2006/main" noGrp="1"/>
+          </p:cNvSpPr>
+          <p:nvPr/>
+        </p:nvSpPr>
+        <p:spPr>
+          <a:xfrm xmlns:a="http://schemas.openxmlformats.org/drawingml/2006/main">
+            <a:off x="1485900" y="4229100"/>
+            <a:ext cx="7162800" cy="514350"/>
+          </a:xfrm>
+          <a:prstGeom xmlns:a="http://schemas.openxmlformats.org/drawingml/2006/main" prst="rect">
+            <a:avLst/>
+          </a:prstGeom>
+          <a:noFill xmlns:a="http://schemas.openxmlformats.org/drawingml/2006/main"/>
+          <a:ln xmlns:a="http://schemas.openxmlformats.org/drawingml/2006/main" w="0">
+            <a:noFill/>
+            <a:prstDash val="solid"/>
+          </a:ln>
+        </p:spPr>
+        <p:txBody>
+          <a:bodyPr xmlns:a="http://schemas.openxmlformats.org/drawingml/2006/main"/>
+          <a:lstStyle xmlns:a="http://schemas.openxmlformats.org/drawingml/2006/main"/>
+          <a:p xmlns:a="http://schemas.openxmlformats.org/drawingml/2006/main">
+            <a:pPr algn="l">
+              <a:defRPr sz="1575" b="0" i="0">
+                <a:solidFill>
+                  <a:srgbClr val="222222"/>
+                </a:solidFill>
+              </a:defRPr>
+            </a:pPr>
+            <a:r>
+              <a:rPr sz="1575" b="0" i="0">
+                <a:solidFill>
+                  <a:srgbClr val="222222"/>
+                </a:solidFill>
+              </a:rPr>
+              <a:t>Keep h1, features, annual replay, thresholds, benchmark, and probability tapes fixed.</a:t>
+            </a:r>
+          </a:p>
+        </p:txBody>
+      </p:sp>
+      <p:sp>
+        <p:nvSpPr>
+          <p:cNvPr id="9" name="">
+            <a:extLst xmlns:a="http://schemas.openxmlformats.org/drawingml/2006/main">
+              <a:ext uri="{FF2B5EF4-FFF2-40B4-BE49-F238E27FC236}">
+                <a16:creationId xmlns:a16="http://schemas.microsoft.com/office/drawing/2014/main" id="{6C368E5C-DE6D-4674-B8B6-8DCF1D663FE2}"/>
+              </a:ext>
+            </a:extLst>
+          </p:cNvPr>
+          <p:cNvSpPr>
+            <a:spLocks xmlns:a="http://schemas.openxmlformats.org/drawingml/2006/main" noGrp="1"/>
+          </p:cNvSpPr>
+          <p:nvPr/>
+        </p:nvSpPr>
+        <p:spPr>
+          <a:xfrm xmlns:a="http://schemas.openxmlformats.org/drawingml/2006/main">
+            <a:off x="1219200" y="4905375"/>
+            <a:ext cx="190500" cy="247650"/>
+          </a:xfrm>
+          <a:prstGeom xmlns:a="http://schemas.openxmlformats.org/drawingml/2006/main" prst="rect">
+            <a:avLst/>
+          </a:prstGeom>
+          <a:noFill xmlns:a="http://schemas.openxmlformats.org/drawingml/2006/main"/>
+          <a:ln xmlns:a="http://schemas.openxmlformats.org/drawingml/2006/main" w="0">
+            <a:noFill/>
+            <a:prstDash val="solid"/>
+          </a:ln>
+        </p:spPr>
+        <p:txBody>
+          <a:bodyPr xmlns:a="http://schemas.openxmlformats.org/drawingml/2006/main"/>
+          <a:lstStyle xmlns:a="http://schemas.openxmlformats.org/drawingml/2006/main"/>
+          <a:p xmlns:a="http://schemas.openxmlformats.org/drawingml/2006/main">
+            <a:pPr algn="l">
+              <a:defRPr sz="1575" b="1" i="0">
+                <a:solidFill>
+                  <a:srgbClr val="FF6B35"/>
+                </a:solidFill>
+              </a:defRPr>
+            </a:pPr>
+            <a:r>
+              <a:rPr sz="1575" b="1" i="0">
+                <a:solidFill>
+                  <a:srgbClr val="FF6B35"/>
+                </a:solidFill>
+              </a:rPr>
+              <a:t>-</a:t>
+            </a:r>
+          </a:p>
+        </p:txBody>
+      </p:sp>
+      <p:sp>
+        <p:nvSpPr>
+          <p:cNvPr id="10" name="">
+            <a:extLst xmlns:a="http://schemas.openxmlformats.org/drawingml/2006/main">
+              <a:ext uri="{FF2B5EF4-FFF2-40B4-BE49-F238E27FC236}">
+                <a16:creationId xmlns:a16="http://schemas.microsoft.com/office/drawing/2014/main" id="{1FF6872C-3550-4A86-A7CE-2EFFB0A73D18}"/>
+              </a:ext>
+            </a:extLst>
+          </p:cNvPr>
+          <p:cNvSpPr>
+            <a:spLocks xmlns:a="http://schemas.openxmlformats.org/drawingml/2006/main" noGrp="1"/>
+          </p:cNvSpPr>
+          <p:nvPr/>
+        </p:nvSpPr>
+        <p:spPr>
+          <a:xfrm xmlns:a="http://schemas.openxmlformats.org/drawingml/2006/main">
+            <a:off x="1485900" y="4895850"/>
+            <a:ext cx="7162800" cy="514350"/>
+          </a:xfrm>
+          <a:prstGeom xmlns:a="http://schemas.openxmlformats.org/drawingml/2006/main" prst="rect">
+            <a:avLst/>
+          </a:prstGeom>
+          <a:noFill xmlns:a="http://schemas.openxmlformats.org/drawingml/2006/main"/>
+          <a:ln xmlns:a="http://schemas.openxmlformats.org/drawingml/2006/main" w="0">
+            <a:noFill/>
+            <a:prstDash val="solid"/>
+          </a:ln>
+        </p:spPr>
+        <p:txBody>
+          <a:bodyPr xmlns:a="http://schemas.openxmlformats.org/drawingml/2006/main"/>
+          <a:lstStyle xmlns:a="http://schemas.openxmlformats.org/drawingml/2006/main"/>
+          <a:p xmlns:a="http://schemas.openxmlformats.org/drawingml/2006/main">
+            <a:pPr algn="l">
+              <a:defRPr sz="1575" b="0" i="0">
+                <a:solidFill>
+                  <a:srgbClr val="222222"/>
+                </a:solidFill>
+              </a:defRPr>
+            </a:pPr>
+            <a:r>
+              <a:rPr sz="1575" b="0" i="0">
+                <a:solidFill>
+                  <a:srgbClr val="222222"/>
+                </a:solidFill>
+              </a:rPr>
+              <a:t>Watch 2022: XGBoost AUC was 0.484, so defense may still be fragile.</a:t>
+            </a:r>
+          </a:p>
+        </p:txBody>
+      </p:sp>
+      <p:sp>
+        <p:nvSpPr>
+          <p:cNvPr id="11" name="">
+            <a:extLst xmlns:a="http://schemas.openxmlformats.org/drawingml/2006/main">
+              <a:ext uri="{FF2B5EF4-FFF2-40B4-BE49-F238E27FC236}">
+                <a16:creationId xmlns:a16="http://schemas.microsoft.com/office/drawing/2014/main" id="{5D0AD160-27E7-461C-B9DF-872C58B2EC3D}"/>
+              </a:ext>
+            </a:extLst>
+          </p:cNvPr>
+          <p:cNvSpPr>
+            <a:spLocks xmlns:a="http://schemas.openxmlformats.org/drawingml/2006/main" noGrp="1"/>
+          </p:cNvSpPr>
+          <p:nvPr/>
+        </p:nvSpPr>
+        <p:spPr>
+          <a:xfrm xmlns:a="http://schemas.openxmlformats.org/drawingml/2006/main">
+            <a:off x="1219200" y="5572125"/>
+            <a:ext cx="190500" cy="247650"/>
+          </a:xfrm>
+          <a:prstGeom xmlns:a="http://schemas.openxmlformats.org/drawingml/2006/main" prst="rect">
+            <a:avLst/>
+          </a:prstGeom>
+          <a:noFill xmlns:a="http://schemas.openxmlformats.org/drawingml/2006/main"/>
+          <a:ln xmlns:a="http://schemas.openxmlformats.org/drawingml/2006/main" w="0">
+            <a:noFill/>
+            <a:prstDash val="solid"/>
+          </a:ln>
+        </p:spPr>
+        <p:txBody>
+          <a:bodyPr xmlns:a="http://schemas.openxmlformats.org/drawingml/2006/main"/>
+          <a:lstStyle xmlns:a="http://schemas.openxmlformats.org/drawingml/2006/main"/>
+          <a:p xmlns:a="http://schemas.openxmlformats.org/drawingml/2006/main">
+            <a:pPr algn="l">
+              <a:defRPr sz="1575" b="1" i="0">
+                <a:solidFill>
+                  <a:srgbClr val="FF6B35"/>
+                </a:solidFill>
+              </a:defRPr>
+            </a:pPr>
+            <a:r>
+              <a:rPr sz="1575" b="1" i="0">
+                <a:solidFill>
+                  <a:srgbClr val="FF6B35"/>
+                </a:solidFill>
+              </a:rPr>
+              <a:t>-</a:t>
+            </a:r>
+          </a:p>
+        </p:txBody>
+      </p:sp>
+      <p:sp>
+        <p:nvSpPr>
+          <p:cNvPr id="12" name="">
+            <a:extLst xmlns:a="http://schemas.openxmlformats.org/drawingml/2006/main">
+              <a:ext uri="{FF2B5EF4-FFF2-40B4-BE49-F238E27FC236}">
+                <a16:creationId xmlns:a16="http://schemas.microsoft.com/office/drawing/2014/main" id="{E9CDE3B2-AC96-4BC3-81E0-3EE0EB66144C}"/>
+              </a:ext>
+            </a:extLst>
+          </p:cNvPr>
+          <p:cNvSpPr>
+            <a:spLocks xmlns:a="http://schemas.openxmlformats.org/drawingml/2006/main" noGrp="1"/>
+          </p:cNvSpPr>
+          <p:nvPr/>
+        </p:nvSpPr>
+        <p:spPr>
+          <a:xfrm xmlns:a="http://schemas.openxmlformats.org/drawingml/2006/main">
+            <a:off x="1485900" y="5562600"/>
+            <a:ext cx="7162800" cy="514350"/>
+          </a:xfrm>
+          <a:prstGeom xmlns:a="http://schemas.openxmlformats.org/drawingml/2006/main" prst="rect">
+            <a:avLst/>
+          </a:prstGeom>
+          <a:noFill xmlns:a="http://schemas.openxmlformats.org/drawingml/2006/main"/>
+          <a:ln xmlns:a="http://schemas.openxmlformats.org/drawingml/2006/main" w="0">
+            <a:noFill/>
+            <a:prstDash val="solid"/>
+          </a:ln>
+        </p:spPr>
+        <p:txBody>
+          <a:bodyPr xmlns:a="http://schemas.openxmlformats.org/drawingml/2006/main"/>
+          <a:lstStyle xmlns:a="http://schemas.openxmlformats.org/drawingml/2006/main"/>
+          <a:p xmlns:a="http://schemas.openxmlformats.org/drawingml/2006/main">
+            <a:pPr algn="l">
+              <a:defRPr sz="1575" b="0" i="0">
+                <a:solidFill>
+                  <a:srgbClr val="222222"/>
+                </a:solidFill>
+              </a:defRPr>
+            </a:pPr>
+            <a:r>
+              <a:rPr sz="1575" b="0" i="0">
+                <a:solidFill>
+                  <a:srgbClr val="222222"/>
+                </a:solidFill>
+              </a:rPr>
+              <a:t>If small tuning does not improve ranking or timing, return to feature design instead of widening model knobs.</a:t>
+            </a:r>
+          </a:p>
+        </p:txBody>
+      </p:sp>
+    </p:spTree>
+    <p:extLst>
+      <p:ext uri="{BB962C8B-B14F-4D97-AF65-F5344CB8AC3E}">
+        <p14:creationId xmlns:p14="http://schemas.microsoft.com/office/powerpoint/2010/main" val="1520343918"/>
       </p:ext>
     </p:extLst>
   </p:cSld>
@@ -14158,7 +18437,7 @@
           <p:cNvPr id="1" name="">
             <a:extLst xmlns:a="http://schemas.openxmlformats.org/drawingml/2006/main">
               <a:ext uri="{FF2B5EF4-FFF2-40B4-BE49-F238E27FC236}">
-                <a16:creationId xmlns:a16="http://schemas.microsoft.com/office/drawing/2014/main" id="{68ED586E-CC15-4DAA-8280-64EBD349AF29}"/>
+                <a16:creationId xmlns:a16="http://schemas.microsoft.com/office/drawing/2014/main" id="{47A1C4C0-EBFE-4281-AF30-862F3601EDDB}"/>
               </a:ext>
             </a:extLst>
           </p:cNvPr>
@@ -14208,7 +18487,7 @@
           <p:cNvPr id="2" name="">
             <a:extLst xmlns:a="http://schemas.openxmlformats.org/drawingml/2006/main">
               <a:ext uri="{FF2B5EF4-FFF2-40B4-BE49-F238E27FC236}">
-                <a16:creationId xmlns:a16="http://schemas.microsoft.com/office/drawing/2014/main" id="{37CF659B-CF18-41E1-9E3B-1DAA7D11AF9F}"/>
+                <a16:creationId xmlns:a16="http://schemas.microsoft.com/office/drawing/2014/main" id="{30900479-3637-4A37-BE2C-EDFD2D289E1C}"/>
               </a:ext>
             </a:extLst>
           </p:cNvPr>
@@ -14258,7 +18537,7 @@
           <p:cNvPr id="3" name="">
             <a:extLst xmlns:a="http://schemas.openxmlformats.org/drawingml/2006/main">
               <a:ext uri="{FF2B5EF4-FFF2-40B4-BE49-F238E27FC236}">
-                <a16:creationId xmlns:a16="http://schemas.microsoft.com/office/drawing/2014/main" id="{EF93C7DE-175E-448A-975F-187649CE2FF9}"/>
+                <a16:creationId xmlns:a16="http://schemas.microsoft.com/office/drawing/2014/main" id="{FFF70DBA-EC45-468B-AB38-5442FBFAD6F5}"/>
               </a:ext>
             </a:extLst>
           </p:cNvPr>
@@ -14293,7 +18572,7 @@
           <p:nvPr/>
         </p:nvPicPr>
         <p:blipFill>
-          <a:blip xmlns:r="http://schemas.openxmlformats.org/officeDocument/2006/relationships" xmlns:a="http://schemas.openxmlformats.org/drawingml/2006/main" r:embed="Rafae538ec8bd483b"/>
+          <a:blip xmlns:r="http://schemas.openxmlformats.org/officeDocument/2006/relationships" xmlns:a="http://schemas.openxmlformats.org/drawingml/2006/main" r:embed="Rb567a2b632454056"/>
           <a:stretch xmlns:a="http://schemas.openxmlformats.org/drawingml/2006/main"/>
         </p:blipFill>
         <p:spPr>
@@ -14311,7 +18590,7 @@
           <p:cNvPr id="5" name="">
             <a:extLst xmlns:a="http://schemas.openxmlformats.org/drawingml/2006/main">
               <a:ext uri="{FF2B5EF4-FFF2-40B4-BE49-F238E27FC236}">
-                <a16:creationId xmlns:a16="http://schemas.microsoft.com/office/drawing/2014/main" id="{D72AEC32-A982-4FD6-80FF-E6EC5FDF7F33}"/>
+                <a16:creationId xmlns:a16="http://schemas.microsoft.com/office/drawing/2014/main" id="{F2023B79-395C-44C7-88CD-5AFA6ECED22D}"/>
               </a:ext>
             </a:extLst>
           </p:cNvPr>
@@ -14361,7 +18640,7 @@
           <p:cNvPr id="6" name="">
             <a:extLst xmlns:a="http://schemas.openxmlformats.org/drawingml/2006/main">
               <a:ext uri="{FF2B5EF4-FFF2-40B4-BE49-F238E27FC236}">
-                <a16:creationId xmlns:a16="http://schemas.microsoft.com/office/drawing/2014/main" id="{FCE8A45E-39D1-4B0F-8EE7-D6A41507138A}"/>
+                <a16:creationId xmlns:a16="http://schemas.microsoft.com/office/drawing/2014/main" id="{EF781F2F-B6D7-4262-8731-6CC576652B98}"/>
               </a:ext>
             </a:extLst>
           </p:cNvPr>
@@ -14409,7 +18688,7 @@
     </p:spTree>
     <p:extLst>
       <p:ext uri="{BB962C8B-B14F-4D97-AF65-F5344CB8AC3E}">
-        <p14:creationId xmlns:p14="http://schemas.microsoft.com/office/powerpoint/2010/main" val="1090723574"/>
+        <p14:creationId xmlns:p14="http://schemas.microsoft.com/office/powerpoint/2010/main" val="2107948074"/>
       </p:ext>
     </p:extLst>
   </p:cSld>
@@ -14440,7 +18719,7 @@
           <p:cNvPr id="1" name="">
             <a:extLst xmlns:a="http://schemas.openxmlformats.org/drawingml/2006/main">
               <a:ext uri="{FF2B5EF4-FFF2-40B4-BE49-F238E27FC236}">
-                <a16:creationId xmlns:a16="http://schemas.microsoft.com/office/drawing/2014/main" id="{7832EC6B-D6E4-47AF-AE09-CC770C631A86}"/>
+                <a16:creationId xmlns:a16="http://schemas.microsoft.com/office/drawing/2014/main" id="{A3149011-1C12-4ECE-82F4-5D54D0D50365}"/>
               </a:ext>
             </a:extLst>
           </p:cNvPr>
@@ -14490,7 +18769,7 @@
           <p:cNvPr id="2" name="">
             <a:extLst xmlns:a="http://schemas.openxmlformats.org/drawingml/2006/main">
               <a:ext uri="{FF2B5EF4-FFF2-40B4-BE49-F238E27FC236}">
-                <a16:creationId xmlns:a16="http://schemas.microsoft.com/office/drawing/2014/main" id="{37F4A26F-8D69-49C3-B638-DF217F4425CA}"/>
+                <a16:creationId xmlns:a16="http://schemas.microsoft.com/office/drawing/2014/main" id="{5DEF2192-026F-4A93-864E-149B7F93F454}"/>
               </a:ext>
             </a:extLst>
           </p:cNvPr>
@@ -14540,7 +18819,7 @@
           <p:cNvPr id="3" name="">
             <a:extLst xmlns:a="http://schemas.openxmlformats.org/drawingml/2006/main">
               <a:ext uri="{FF2B5EF4-FFF2-40B4-BE49-F238E27FC236}">
-                <a16:creationId xmlns:a16="http://schemas.microsoft.com/office/drawing/2014/main" id="{4B0083C0-1E5F-4A68-9BDD-5FA001751826}"/>
+                <a16:creationId xmlns:a16="http://schemas.microsoft.com/office/drawing/2014/main" id="{17944314-9D27-4A1C-8445-4F69A6EDD13A}"/>
               </a:ext>
             </a:extLst>
           </p:cNvPr>
@@ -14575,7 +18854,7 @@
           <p:nvPr/>
         </p:nvPicPr>
         <p:blipFill>
-          <a:blip xmlns:r="http://schemas.openxmlformats.org/officeDocument/2006/relationships" xmlns:a="http://schemas.openxmlformats.org/drawingml/2006/main" r:embed="Rf4d006d2053f4ce1"/>
+          <a:blip xmlns:r="http://schemas.openxmlformats.org/officeDocument/2006/relationships" xmlns:a="http://schemas.openxmlformats.org/drawingml/2006/main" r:embed="Rbe8747974b8044ea"/>
           <a:stretch xmlns:a="http://schemas.openxmlformats.org/drawingml/2006/main"/>
         </p:blipFill>
         <p:spPr>
@@ -14593,7 +18872,7 @@
           <p:cNvPr id="5" name="">
             <a:extLst xmlns:a="http://schemas.openxmlformats.org/drawingml/2006/main">
               <a:ext uri="{FF2B5EF4-FFF2-40B4-BE49-F238E27FC236}">
-                <a16:creationId xmlns:a16="http://schemas.microsoft.com/office/drawing/2014/main" id="{F250F90E-C140-4CEE-87EC-E4ACDB4BD71B}"/>
+                <a16:creationId xmlns:a16="http://schemas.microsoft.com/office/drawing/2014/main" id="{EF90201F-F256-4B5E-BDD3-33FBC931E556}"/>
               </a:ext>
             </a:extLst>
           </p:cNvPr>
@@ -14643,7 +18922,7 @@
           <p:cNvPr id="6" name="">
             <a:extLst xmlns:a="http://schemas.openxmlformats.org/drawingml/2006/main">
               <a:ext uri="{FF2B5EF4-FFF2-40B4-BE49-F238E27FC236}">
-                <a16:creationId xmlns:a16="http://schemas.microsoft.com/office/drawing/2014/main" id="{3D70E579-F0C6-4D75-9FC0-982EC9870190}"/>
+                <a16:creationId xmlns:a16="http://schemas.microsoft.com/office/drawing/2014/main" id="{405CCA6E-AEF0-4431-B5F3-AC1BFB059B58}"/>
               </a:ext>
             </a:extLst>
           </p:cNvPr>
@@ -14693,7 +18972,7 @@
           <p:cNvPr id="7" name="">
             <a:extLst xmlns:a="http://schemas.openxmlformats.org/drawingml/2006/main">
               <a:ext uri="{FF2B5EF4-FFF2-40B4-BE49-F238E27FC236}">
-                <a16:creationId xmlns:a16="http://schemas.microsoft.com/office/drawing/2014/main" id="{EA485FC0-2598-4B1B-BFBD-45974EFF0DA1}"/>
+                <a16:creationId xmlns:a16="http://schemas.microsoft.com/office/drawing/2014/main" id="{E5F75E49-46A0-4998-8458-CFD167873384}"/>
               </a:ext>
             </a:extLst>
           </p:cNvPr>
@@ -14743,7 +19022,7 @@
           <p:cNvPr id="8" name="">
             <a:extLst xmlns:a="http://schemas.openxmlformats.org/drawingml/2006/main">
               <a:ext uri="{FF2B5EF4-FFF2-40B4-BE49-F238E27FC236}">
-                <a16:creationId xmlns:a16="http://schemas.microsoft.com/office/drawing/2014/main" id="{DFFE78DF-389B-4B4A-9412-A927BE6E0B93}"/>
+                <a16:creationId xmlns:a16="http://schemas.microsoft.com/office/drawing/2014/main" id="{087DF7CB-C511-4711-BD9F-5F4389B0949B}"/>
               </a:ext>
             </a:extLst>
           </p:cNvPr>
@@ -14793,7 +19072,7 @@
           <p:cNvPr id="9" name="">
             <a:extLst xmlns:a="http://schemas.openxmlformats.org/drawingml/2006/main">
               <a:ext uri="{FF2B5EF4-FFF2-40B4-BE49-F238E27FC236}">
-                <a16:creationId xmlns:a16="http://schemas.microsoft.com/office/drawing/2014/main" id="{1D402320-2469-4E97-A50F-C381666F7E16}"/>
+                <a16:creationId xmlns:a16="http://schemas.microsoft.com/office/drawing/2014/main" id="{30684163-3E55-499C-B609-EC806FE3133D}"/>
               </a:ext>
             </a:extLst>
           </p:cNvPr>
@@ -14841,7 +19120,7 @@
     </p:spTree>
     <p:extLst>
       <p:ext uri="{BB962C8B-B14F-4D97-AF65-F5344CB8AC3E}">
-        <p14:creationId xmlns:p14="http://schemas.microsoft.com/office/powerpoint/2010/main" val="1179381928"/>
+        <p14:creationId xmlns:p14="http://schemas.microsoft.com/office/powerpoint/2010/main" val="1414647820"/>
       </p:ext>
     </p:extLst>
   </p:cSld>
@@ -14872,7 +19151,7 @@
           <p:cNvPr id="1" name="">
             <a:extLst xmlns:a="http://schemas.openxmlformats.org/drawingml/2006/main">
               <a:ext uri="{FF2B5EF4-FFF2-40B4-BE49-F238E27FC236}">
-                <a16:creationId xmlns:a16="http://schemas.microsoft.com/office/drawing/2014/main" id="{6EB70300-44DE-4654-8499-C4E58BE777ED}"/>
+                <a16:creationId xmlns:a16="http://schemas.microsoft.com/office/drawing/2014/main" id="{A051900E-43C1-4E0F-BB10-5909B379F7AF}"/>
               </a:ext>
             </a:extLst>
           </p:cNvPr>
@@ -14922,7 +19201,7 @@
           <p:cNvPr id="2" name="">
             <a:extLst xmlns:a="http://schemas.openxmlformats.org/drawingml/2006/main">
               <a:ext uri="{FF2B5EF4-FFF2-40B4-BE49-F238E27FC236}">
-                <a16:creationId xmlns:a16="http://schemas.microsoft.com/office/drawing/2014/main" id="{B282FA0C-DCC5-4478-B855-5CF2EF925C8D}"/>
+                <a16:creationId xmlns:a16="http://schemas.microsoft.com/office/drawing/2014/main" id="{24297436-58A2-45AD-856C-FCC4339940CC}"/>
               </a:ext>
             </a:extLst>
           </p:cNvPr>
@@ -14972,7 +19251,7 @@
           <p:cNvPr id="3" name="">
             <a:extLst xmlns:a="http://schemas.openxmlformats.org/drawingml/2006/main">
               <a:ext uri="{FF2B5EF4-FFF2-40B4-BE49-F238E27FC236}">
-                <a16:creationId xmlns:a16="http://schemas.microsoft.com/office/drawing/2014/main" id="{FABB38D3-EA7C-4C3E-963F-AD28927DA1D6}"/>
+                <a16:creationId xmlns:a16="http://schemas.microsoft.com/office/drawing/2014/main" id="{DC5CB0FE-B6FD-4657-90F1-EF5B0E6E5521}"/>
               </a:ext>
             </a:extLst>
           </p:cNvPr>
@@ -15007,7 +19286,7 @@
           <p:nvPr/>
         </p:nvPicPr>
         <p:blipFill>
-          <a:blip xmlns:r="http://schemas.openxmlformats.org/officeDocument/2006/relationships" xmlns:a="http://schemas.openxmlformats.org/drawingml/2006/main" r:embed="R21b0743a7fc44e91"/>
+          <a:blip xmlns:r="http://schemas.openxmlformats.org/officeDocument/2006/relationships" xmlns:a="http://schemas.openxmlformats.org/drawingml/2006/main" r:embed="R8b0b07f2e7e14e52"/>
           <a:stretch xmlns:a="http://schemas.openxmlformats.org/drawingml/2006/main"/>
         </p:blipFill>
         <p:spPr>
@@ -15029,7 +19308,7 @@
           <p:nvPr/>
         </p:nvPicPr>
         <p:blipFill>
-          <a:blip xmlns:r="http://schemas.openxmlformats.org/officeDocument/2006/relationships" xmlns:a="http://schemas.openxmlformats.org/drawingml/2006/main" r:embed="R89433265204045ce"/>
+          <a:blip xmlns:r="http://schemas.openxmlformats.org/officeDocument/2006/relationships" xmlns:a="http://schemas.openxmlformats.org/drawingml/2006/main" r:embed="R61556078943a4bc6"/>
           <a:stretch xmlns:a="http://schemas.openxmlformats.org/drawingml/2006/main"/>
         </p:blipFill>
         <p:spPr>
@@ -15047,7 +19326,7 @@
           <p:cNvPr id="6" name="">
             <a:extLst xmlns:a="http://schemas.openxmlformats.org/drawingml/2006/main">
               <a:ext uri="{FF2B5EF4-FFF2-40B4-BE49-F238E27FC236}">
-                <a16:creationId xmlns:a16="http://schemas.microsoft.com/office/drawing/2014/main" id="{CA282EA3-7E1B-429F-8B12-A405F8BFEC31}"/>
+                <a16:creationId xmlns:a16="http://schemas.microsoft.com/office/drawing/2014/main" id="{D7495827-44D8-4D1E-B63E-FF283A6EEF7F}"/>
               </a:ext>
             </a:extLst>
           </p:cNvPr>
@@ -15095,7 +19374,7 @@
     </p:spTree>
     <p:extLst>
       <p:ext uri="{BB962C8B-B14F-4D97-AF65-F5344CB8AC3E}">
-        <p14:creationId xmlns:p14="http://schemas.microsoft.com/office/powerpoint/2010/main" val="1041826418"/>
+        <p14:creationId xmlns:p14="http://schemas.microsoft.com/office/powerpoint/2010/main" val="2054964134"/>
       </p:ext>
     </p:extLst>
   </p:cSld>
@@ -15126,7 +19405,7 @@
           <p:cNvPr id="1" name="">
             <a:extLst xmlns:a="http://schemas.openxmlformats.org/drawingml/2006/main">
               <a:ext uri="{FF2B5EF4-FFF2-40B4-BE49-F238E27FC236}">
-                <a16:creationId xmlns:a16="http://schemas.microsoft.com/office/drawing/2014/main" id="{E12F0D9E-4292-4AA0-AD18-191CCEF68207}"/>
+                <a16:creationId xmlns:a16="http://schemas.microsoft.com/office/drawing/2014/main" id="{1B843745-04D7-4B87-BB4C-026011D7D470}"/>
               </a:ext>
             </a:extLst>
           </p:cNvPr>
@@ -15176,7 +19455,7 @@
           <p:cNvPr id="2" name="">
             <a:extLst xmlns:a="http://schemas.openxmlformats.org/drawingml/2006/main">
               <a:ext uri="{FF2B5EF4-FFF2-40B4-BE49-F238E27FC236}">
-                <a16:creationId xmlns:a16="http://schemas.microsoft.com/office/drawing/2014/main" id="{15E1FDF8-359C-4A52-9A53-E810E9EDCE55}"/>
+                <a16:creationId xmlns:a16="http://schemas.microsoft.com/office/drawing/2014/main" id="{2ECCFBAC-6611-4E36-B7CC-07F350699CE9}"/>
               </a:ext>
             </a:extLst>
           </p:cNvPr>
@@ -15226,7 +19505,7 @@
           <p:cNvPr id="3" name="">
             <a:extLst xmlns:a="http://schemas.openxmlformats.org/drawingml/2006/main">
               <a:ext uri="{FF2B5EF4-FFF2-40B4-BE49-F238E27FC236}">
-                <a16:creationId xmlns:a16="http://schemas.microsoft.com/office/drawing/2014/main" id="{E80A0AD5-B5B4-489E-9E98-A90E6CF9E14E}"/>
+                <a16:creationId xmlns:a16="http://schemas.microsoft.com/office/drawing/2014/main" id="{9DCCC2A4-74D0-402C-A54C-5569B4D54D3C}"/>
               </a:ext>
             </a:extLst>
           </p:cNvPr>
@@ -15261,7 +19540,7 @@
           <p:nvPr/>
         </p:nvPicPr>
         <p:blipFill>
-          <a:blip xmlns:r="http://schemas.openxmlformats.org/officeDocument/2006/relationships" xmlns:a="http://schemas.openxmlformats.org/drawingml/2006/main" r:embed="Recb4cfd2912a40ef"/>
+          <a:blip xmlns:r="http://schemas.openxmlformats.org/officeDocument/2006/relationships" xmlns:a="http://schemas.openxmlformats.org/drawingml/2006/main" r:embed="R8a6323f4c9a74b7c"/>
           <a:stretch xmlns:a="http://schemas.openxmlformats.org/drawingml/2006/main"/>
         </p:blipFill>
         <p:spPr>
@@ -15279,7 +19558,7 @@
           <p:cNvPr id="5" name="">
             <a:extLst xmlns:a="http://schemas.openxmlformats.org/drawingml/2006/main">
               <a:ext uri="{FF2B5EF4-FFF2-40B4-BE49-F238E27FC236}">
-                <a16:creationId xmlns:a16="http://schemas.microsoft.com/office/drawing/2014/main" id="{8D81F1CB-737F-4BA6-A2BE-3AB8CFC24261}"/>
+                <a16:creationId xmlns:a16="http://schemas.microsoft.com/office/drawing/2014/main" id="{4FD92D8D-7654-4BF9-B134-408998ECAD06}"/>
               </a:ext>
             </a:extLst>
           </p:cNvPr>
@@ -15329,7 +19608,7 @@
           <p:cNvPr id="6" name="">
             <a:extLst xmlns:a="http://schemas.openxmlformats.org/drawingml/2006/main">
               <a:ext uri="{FF2B5EF4-FFF2-40B4-BE49-F238E27FC236}">
-                <a16:creationId xmlns:a16="http://schemas.microsoft.com/office/drawing/2014/main" id="{A8DC66E1-9847-4621-9E45-E09601BE1627}"/>
+                <a16:creationId xmlns:a16="http://schemas.microsoft.com/office/drawing/2014/main" id="{B0DAC201-B558-4534-B253-8FFB6F204156}"/>
               </a:ext>
             </a:extLst>
           </p:cNvPr>
@@ -15377,7 +19656,7 @@
     </p:spTree>
     <p:extLst>
       <p:ext uri="{BB962C8B-B14F-4D97-AF65-F5344CB8AC3E}">
-        <p14:creationId xmlns:p14="http://schemas.microsoft.com/office/powerpoint/2010/main" val="648752573"/>
+        <p14:creationId xmlns:p14="http://schemas.microsoft.com/office/powerpoint/2010/main" val="1623750813"/>
       </p:ext>
     </p:extLst>
   </p:cSld>
@@ -15408,7 +19687,7 @@
           <p:cNvPr id="1" name="">
             <a:extLst xmlns:a="http://schemas.openxmlformats.org/drawingml/2006/main">
               <a:ext uri="{FF2B5EF4-FFF2-40B4-BE49-F238E27FC236}">
-                <a16:creationId xmlns:a16="http://schemas.microsoft.com/office/drawing/2014/main" id="{46E82D87-5909-4449-A5F1-9D1F56B54517}"/>
+                <a16:creationId xmlns:a16="http://schemas.microsoft.com/office/drawing/2014/main" id="{E8D5A845-9995-4B9E-88D3-EB81FC8FEB84}"/>
               </a:ext>
             </a:extLst>
           </p:cNvPr>
@@ -15458,7 +19737,7 @@
           <p:cNvPr id="2" name="">
             <a:extLst xmlns:a="http://schemas.openxmlformats.org/drawingml/2006/main">
               <a:ext uri="{FF2B5EF4-FFF2-40B4-BE49-F238E27FC236}">
-                <a16:creationId xmlns:a16="http://schemas.microsoft.com/office/drawing/2014/main" id="{342CDE90-A5AD-4C0D-83DB-BC4A942AABF7}"/>
+                <a16:creationId xmlns:a16="http://schemas.microsoft.com/office/drawing/2014/main" id="{8C5FFDF8-00B4-4D45-8474-65A6371CD817}"/>
               </a:ext>
             </a:extLst>
           </p:cNvPr>
@@ -15508,7 +19787,7 @@
           <p:cNvPr id="3" name="">
             <a:extLst xmlns:a="http://schemas.openxmlformats.org/drawingml/2006/main">
               <a:ext uri="{FF2B5EF4-FFF2-40B4-BE49-F238E27FC236}">
-                <a16:creationId xmlns:a16="http://schemas.microsoft.com/office/drawing/2014/main" id="{43C73D05-8F9B-42A0-81D8-BC17E1E3C62C}"/>
+                <a16:creationId xmlns:a16="http://schemas.microsoft.com/office/drawing/2014/main" id="{863469CB-9ABA-4B0D-B685-A80C5788F75D}"/>
               </a:ext>
             </a:extLst>
           </p:cNvPr>
@@ -15543,7 +19822,7 @@
           <p:nvPr/>
         </p:nvPicPr>
         <p:blipFill>
-          <a:blip xmlns:r="http://schemas.openxmlformats.org/officeDocument/2006/relationships" xmlns:a="http://schemas.openxmlformats.org/drawingml/2006/main" r:embed="R97918f5886644425"/>
+          <a:blip xmlns:r="http://schemas.openxmlformats.org/officeDocument/2006/relationships" xmlns:a="http://schemas.openxmlformats.org/drawingml/2006/main" r:embed="R32ae7a3b6a484a70"/>
           <a:stretch xmlns:a="http://schemas.openxmlformats.org/drawingml/2006/main"/>
         </p:blipFill>
         <p:spPr>
@@ -15561,7 +19840,7 @@
           <p:cNvPr id="5" name="">
             <a:extLst xmlns:a="http://schemas.openxmlformats.org/drawingml/2006/main">
               <a:ext uri="{FF2B5EF4-FFF2-40B4-BE49-F238E27FC236}">
-                <a16:creationId xmlns:a16="http://schemas.microsoft.com/office/drawing/2014/main" id="{B84BBCC9-733B-4372-A424-7FDFEAC515A2}"/>
+                <a16:creationId xmlns:a16="http://schemas.microsoft.com/office/drawing/2014/main" id="{D1ABDFCD-B759-4DA7-B334-33DDD6E9D612}"/>
               </a:ext>
             </a:extLst>
           </p:cNvPr>
@@ -15611,7 +19890,7 @@
           <p:cNvPr id="6" name="">
             <a:extLst xmlns:a="http://schemas.openxmlformats.org/drawingml/2006/main">
               <a:ext uri="{FF2B5EF4-FFF2-40B4-BE49-F238E27FC236}">
-                <a16:creationId xmlns:a16="http://schemas.microsoft.com/office/drawing/2014/main" id="{7D87C5E9-355B-4C5D-A90A-FE4B76BF2141}"/>
+                <a16:creationId xmlns:a16="http://schemas.microsoft.com/office/drawing/2014/main" id="{3AF7937B-CC02-4D9C-9ADD-17F1F5C51F5C}"/>
               </a:ext>
             </a:extLst>
           </p:cNvPr>
@@ -15659,7 +19938,7 @@
     </p:spTree>
     <p:extLst>
       <p:ext uri="{BB962C8B-B14F-4D97-AF65-F5344CB8AC3E}">
-        <p14:creationId xmlns:p14="http://schemas.microsoft.com/office/powerpoint/2010/main" val="502205706"/>
+        <p14:creationId xmlns:p14="http://schemas.microsoft.com/office/powerpoint/2010/main" val="432373766"/>
       </p:ext>
     </p:extLst>
   </p:cSld>
@@ -15690,7 +19969,7 @@
           <p:cNvPr id="1" name="">
             <a:extLst xmlns:a="http://schemas.openxmlformats.org/drawingml/2006/main">
               <a:ext uri="{FF2B5EF4-FFF2-40B4-BE49-F238E27FC236}">
-                <a16:creationId xmlns:a16="http://schemas.microsoft.com/office/drawing/2014/main" id="{7C44B808-3085-49A0-A978-1F758D32ABF8}"/>
+                <a16:creationId xmlns:a16="http://schemas.microsoft.com/office/drawing/2014/main" id="{4D8D7EE9-3109-4454-B87A-FD6D3371CA7C}"/>
               </a:ext>
             </a:extLst>
           </p:cNvPr>
@@ -15740,7 +20019,7 @@
           <p:cNvPr id="2" name="">
             <a:extLst xmlns:a="http://schemas.openxmlformats.org/drawingml/2006/main">
               <a:ext uri="{FF2B5EF4-FFF2-40B4-BE49-F238E27FC236}">
-                <a16:creationId xmlns:a16="http://schemas.microsoft.com/office/drawing/2014/main" id="{3E0E6750-F9D3-4431-83B0-777679B26CA5}"/>
+                <a16:creationId xmlns:a16="http://schemas.microsoft.com/office/drawing/2014/main" id="{F35BB271-B260-437D-84EF-0CA6371E5284}"/>
               </a:ext>
             </a:extLst>
           </p:cNvPr>
@@ -15790,7 +20069,7 @@
           <p:cNvPr id="3" name="">
             <a:extLst xmlns:a="http://schemas.openxmlformats.org/drawingml/2006/main">
               <a:ext uri="{FF2B5EF4-FFF2-40B4-BE49-F238E27FC236}">
-                <a16:creationId xmlns:a16="http://schemas.microsoft.com/office/drawing/2014/main" id="{84F05C60-4AF1-480D-A3B6-98BFDE05EAE5}"/>
+                <a16:creationId xmlns:a16="http://schemas.microsoft.com/office/drawing/2014/main" id="{5691EBD4-B531-45F5-A19B-7BA7DA0E0D07}"/>
               </a:ext>
             </a:extLst>
           </p:cNvPr>
@@ -15825,7 +20104,7 @@
           <p:nvPr/>
         </p:nvPicPr>
         <p:blipFill>
-          <a:blip xmlns:r="http://schemas.openxmlformats.org/officeDocument/2006/relationships" xmlns:a="http://schemas.openxmlformats.org/drawingml/2006/main" r:embed="Rd608452280084a72"/>
+          <a:blip xmlns:r="http://schemas.openxmlformats.org/officeDocument/2006/relationships" xmlns:a="http://schemas.openxmlformats.org/drawingml/2006/main" r:embed="R2f966c6c499d41ba"/>
           <a:stretch xmlns:a="http://schemas.openxmlformats.org/drawingml/2006/main"/>
         </p:blipFill>
         <p:spPr>
@@ -15843,7 +20122,7 @@
           <p:cNvPr id="5" name="">
             <a:extLst xmlns:a="http://schemas.openxmlformats.org/drawingml/2006/main">
               <a:ext uri="{FF2B5EF4-FFF2-40B4-BE49-F238E27FC236}">
-                <a16:creationId xmlns:a16="http://schemas.microsoft.com/office/drawing/2014/main" id="{0F640CD4-B527-45D4-8C38-F212CCDC668F}"/>
+                <a16:creationId xmlns:a16="http://schemas.microsoft.com/office/drawing/2014/main" id="{2EAD0516-4E87-4A46-8FE6-8493A56BFFA7}"/>
               </a:ext>
             </a:extLst>
           </p:cNvPr>
@@ -15893,7 +20172,7 @@
           <p:cNvPr id="6" name="">
             <a:extLst xmlns:a="http://schemas.openxmlformats.org/drawingml/2006/main">
               <a:ext uri="{FF2B5EF4-FFF2-40B4-BE49-F238E27FC236}">
-                <a16:creationId xmlns:a16="http://schemas.microsoft.com/office/drawing/2014/main" id="{D72E1E18-8F39-42CF-81AF-B2AB1670396C}"/>
+                <a16:creationId xmlns:a16="http://schemas.microsoft.com/office/drawing/2014/main" id="{B1F104F6-D8FD-45C3-8E44-3B525B62468C}"/>
               </a:ext>
             </a:extLst>
           </p:cNvPr>
@@ -15941,7 +20220,7 @@
     </p:spTree>
     <p:extLst>
       <p:ext uri="{BB962C8B-B14F-4D97-AF65-F5344CB8AC3E}">
-        <p14:creationId xmlns:p14="http://schemas.microsoft.com/office/powerpoint/2010/main" val="1296954859"/>
+        <p14:creationId xmlns:p14="http://schemas.microsoft.com/office/powerpoint/2010/main" val="588773555"/>
       </p:ext>
     </p:extLst>
   </p:cSld>

--- a/presentations/gen5_4_ml_decision_engine_incremental_build.pptx
+++ b/presentations/gen5_4_ml_decision_engine_incremental_build.pptx
@@ -2,48 +2,56 @@
 <file path=ppt/presentation.xml><?xml version="1.0" encoding="utf-8"?>
 <p:presentation xmlns:p="http://schemas.openxmlformats.org/presentationml/2006/main">
   <p:sldMasterIdLst>
-    <p:sldMasterId xmlns:r="http://schemas.openxmlformats.org/officeDocument/2006/relationships" id="2147483648" r:id="R210cbdbc50624a17"/>
+    <p:sldMasterId xmlns:r="http://schemas.openxmlformats.org/officeDocument/2006/relationships" id="2147483648" r:id="R443dcc0c345241a4"/>
   </p:sldMasterIdLst>
   <p:notesMasterIdLst>
-    <p:notesMasterId xmlns:r="http://schemas.openxmlformats.org/officeDocument/2006/relationships" r:id="Rbe1accf9d96044d3"/>
+    <p:notesMasterId xmlns:r="http://schemas.openxmlformats.org/officeDocument/2006/relationships" r:id="Rfde275abc67e4d89"/>
   </p:notesMasterIdLst>
   <p:sldIdLst>
-    <p:sldId xmlns:r="http://schemas.openxmlformats.org/officeDocument/2006/relationships" id="256" r:id="Rcd1cf3fbc9414d75"/>
-    <p:sldId xmlns:r="http://schemas.openxmlformats.org/officeDocument/2006/relationships" id="257" r:id="R050d394bd8c24bba"/>
-    <p:sldId xmlns:r="http://schemas.openxmlformats.org/officeDocument/2006/relationships" id="258" r:id="R6e34ee7770b540c0"/>
-    <p:sldId xmlns:r="http://schemas.openxmlformats.org/officeDocument/2006/relationships" id="259" r:id="Rf6941a1941e44bfa"/>
-    <p:sldId xmlns:r="http://schemas.openxmlformats.org/officeDocument/2006/relationships" id="260" r:id="R21dfb9d1346d466e"/>
-    <p:sldId xmlns:r="http://schemas.openxmlformats.org/officeDocument/2006/relationships" id="261" r:id="R483a03fdfe2f4019"/>
-    <p:sldId xmlns:r="http://schemas.openxmlformats.org/officeDocument/2006/relationships" id="262" r:id="Rf943f159075a4635"/>
-    <p:sldId xmlns:r="http://schemas.openxmlformats.org/officeDocument/2006/relationships" id="263" r:id="Ra66ef152f58f4d18"/>
-    <p:sldId xmlns:r="http://schemas.openxmlformats.org/officeDocument/2006/relationships" id="264" r:id="Rb032f9f669034ebd"/>
-    <p:sldId xmlns:r="http://schemas.openxmlformats.org/officeDocument/2006/relationships" id="265" r:id="R3ad86645946f445a"/>
-    <p:sldId xmlns:r="http://schemas.openxmlformats.org/officeDocument/2006/relationships" id="266" r:id="Ra0a05137979045e6"/>
-    <p:sldId xmlns:r="http://schemas.openxmlformats.org/officeDocument/2006/relationships" id="267" r:id="R65d002e21b564e5e"/>
-    <p:sldId xmlns:r="http://schemas.openxmlformats.org/officeDocument/2006/relationships" id="268" r:id="Rf386ab8af39d4c38"/>
-    <p:sldId xmlns:r="http://schemas.openxmlformats.org/officeDocument/2006/relationships" id="269" r:id="R857af94b6c374f76"/>
-    <p:sldId xmlns:r="http://schemas.openxmlformats.org/officeDocument/2006/relationships" id="270" r:id="Re02b3ea304e74178"/>
-    <p:sldId xmlns:r="http://schemas.openxmlformats.org/officeDocument/2006/relationships" id="271" r:id="Rcca8b618e7b646d8"/>
-    <p:sldId xmlns:r="http://schemas.openxmlformats.org/officeDocument/2006/relationships" id="272" r:id="R43a2644c1c704577"/>
-    <p:sldId xmlns:r="http://schemas.openxmlformats.org/officeDocument/2006/relationships" id="273" r:id="R5f8e393eeb8c4caa"/>
-    <p:sldId xmlns:r="http://schemas.openxmlformats.org/officeDocument/2006/relationships" id="274" r:id="R2a3400a53eac41e6"/>
-    <p:sldId xmlns:r="http://schemas.openxmlformats.org/officeDocument/2006/relationships" id="275" r:id="R0612392fc4434a1b"/>
-    <p:sldId xmlns:r="http://schemas.openxmlformats.org/officeDocument/2006/relationships" id="276" r:id="R1ec18d7a137545b0"/>
-    <p:sldId xmlns:r="http://schemas.openxmlformats.org/officeDocument/2006/relationships" id="277" r:id="R52b5bb9df89f4eb9"/>
-    <p:sldId xmlns:r="http://schemas.openxmlformats.org/officeDocument/2006/relationships" id="278" r:id="R74cadfc739484b4c"/>
-    <p:sldId xmlns:r="http://schemas.openxmlformats.org/officeDocument/2006/relationships" id="279" r:id="R8076aa45df4d409a"/>
-    <p:sldId xmlns:r="http://schemas.openxmlformats.org/officeDocument/2006/relationships" id="280" r:id="R595379aff2994c7d"/>
-    <p:sldId xmlns:r="http://schemas.openxmlformats.org/officeDocument/2006/relationships" id="281" r:id="R91d25e538690458e"/>
-    <p:sldId xmlns:r="http://schemas.openxmlformats.org/officeDocument/2006/relationships" id="282" r:id="R9313c6f396184cd5"/>
-    <p:sldId xmlns:r="http://schemas.openxmlformats.org/officeDocument/2006/relationships" id="283" r:id="R78d1a06edbf74c50"/>
-    <p:sldId xmlns:r="http://schemas.openxmlformats.org/officeDocument/2006/relationships" id="284" r:id="R846b9105f3914523"/>
-    <p:sldId xmlns:r="http://schemas.openxmlformats.org/officeDocument/2006/relationships" id="285" r:id="R6d9930efa91246c6"/>
-    <p:sldId xmlns:r="http://schemas.openxmlformats.org/officeDocument/2006/relationships" id="286" r:id="Ra6e1e22c158342fe"/>
-    <p:sldId xmlns:r="http://schemas.openxmlformats.org/officeDocument/2006/relationships" id="287" r:id="R6e1f4ab6096b48ad"/>
-    <p:sldId xmlns:r="http://schemas.openxmlformats.org/officeDocument/2006/relationships" id="288" r:id="R4524b5a5d8e6420c"/>
-    <p:sldId xmlns:r="http://schemas.openxmlformats.org/officeDocument/2006/relationships" id="289" r:id="R4b410d0bd3054fd4"/>
-    <p:sldId xmlns:r="http://schemas.openxmlformats.org/officeDocument/2006/relationships" id="290" r:id="R3b8a5886e6d84af6"/>
-    <p:sldId xmlns:r="http://schemas.openxmlformats.org/officeDocument/2006/relationships" id="291" r:id="R8f35863919da49ec"/>
+    <p:sldId xmlns:r="http://schemas.openxmlformats.org/officeDocument/2006/relationships" id="256" r:id="R64a38ed675714420"/>
+    <p:sldId xmlns:r="http://schemas.openxmlformats.org/officeDocument/2006/relationships" id="257" r:id="R675702bc30cd4039"/>
+    <p:sldId xmlns:r="http://schemas.openxmlformats.org/officeDocument/2006/relationships" id="258" r:id="R788dc1b288064664"/>
+    <p:sldId xmlns:r="http://schemas.openxmlformats.org/officeDocument/2006/relationships" id="259" r:id="R0e07a9d766464a1d"/>
+    <p:sldId xmlns:r="http://schemas.openxmlformats.org/officeDocument/2006/relationships" id="260" r:id="Rbc8703aa569343ec"/>
+    <p:sldId xmlns:r="http://schemas.openxmlformats.org/officeDocument/2006/relationships" id="261" r:id="Rb42c4f9b7bcb4937"/>
+    <p:sldId xmlns:r="http://schemas.openxmlformats.org/officeDocument/2006/relationships" id="262" r:id="R901b1e31d25c4f18"/>
+    <p:sldId xmlns:r="http://schemas.openxmlformats.org/officeDocument/2006/relationships" id="263" r:id="Re1877f0dd7db428e"/>
+    <p:sldId xmlns:r="http://schemas.openxmlformats.org/officeDocument/2006/relationships" id="264" r:id="R9f4297e667fb4ce2"/>
+    <p:sldId xmlns:r="http://schemas.openxmlformats.org/officeDocument/2006/relationships" id="265" r:id="Rcc0fe815ecc84433"/>
+    <p:sldId xmlns:r="http://schemas.openxmlformats.org/officeDocument/2006/relationships" id="266" r:id="R63ad9ff167c74c39"/>
+    <p:sldId xmlns:r="http://schemas.openxmlformats.org/officeDocument/2006/relationships" id="267" r:id="R159fd8c424fa43e3"/>
+    <p:sldId xmlns:r="http://schemas.openxmlformats.org/officeDocument/2006/relationships" id="268" r:id="Rce6d5ec291864570"/>
+    <p:sldId xmlns:r="http://schemas.openxmlformats.org/officeDocument/2006/relationships" id="269" r:id="R5c26d005a1de4417"/>
+    <p:sldId xmlns:r="http://schemas.openxmlformats.org/officeDocument/2006/relationships" id="270" r:id="R82477d271c044734"/>
+    <p:sldId xmlns:r="http://schemas.openxmlformats.org/officeDocument/2006/relationships" id="271" r:id="Rce837acc3dd04d91"/>
+    <p:sldId xmlns:r="http://schemas.openxmlformats.org/officeDocument/2006/relationships" id="272" r:id="Rf00dd17409ab4959"/>
+    <p:sldId xmlns:r="http://schemas.openxmlformats.org/officeDocument/2006/relationships" id="273" r:id="Re02bd74632ff4d1b"/>
+    <p:sldId xmlns:r="http://schemas.openxmlformats.org/officeDocument/2006/relationships" id="274" r:id="R95004e40d7724361"/>
+    <p:sldId xmlns:r="http://schemas.openxmlformats.org/officeDocument/2006/relationships" id="275" r:id="R0b1466f026e040f0"/>
+    <p:sldId xmlns:r="http://schemas.openxmlformats.org/officeDocument/2006/relationships" id="276" r:id="Rb5c7e246093144e9"/>
+    <p:sldId xmlns:r="http://schemas.openxmlformats.org/officeDocument/2006/relationships" id="277" r:id="Rfc545e58026f401b"/>
+    <p:sldId xmlns:r="http://schemas.openxmlformats.org/officeDocument/2006/relationships" id="278" r:id="R12f5c9c6b4954c92"/>
+    <p:sldId xmlns:r="http://schemas.openxmlformats.org/officeDocument/2006/relationships" id="279" r:id="R6162882222324e7d"/>
+    <p:sldId xmlns:r="http://schemas.openxmlformats.org/officeDocument/2006/relationships" id="280" r:id="R248c0d48cc674b39"/>
+    <p:sldId xmlns:r="http://schemas.openxmlformats.org/officeDocument/2006/relationships" id="281" r:id="R4e1501ce73854f89"/>
+    <p:sldId xmlns:r="http://schemas.openxmlformats.org/officeDocument/2006/relationships" id="282" r:id="R0535968445d541b0"/>
+    <p:sldId xmlns:r="http://schemas.openxmlformats.org/officeDocument/2006/relationships" id="283" r:id="R7794c148a7c649c5"/>
+    <p:sldId xmlns:r="http://schemas.openxmlformats.org/officeDocument/2006/relationships" id="284" r:id="Rde2c4d71a7e84178"/>
+    <p:sldId xmlns:r="http://schemas.openxmlformats.org/officeDocument/2006/relationships" id="285" r:id="R8446dd441d044368"/>
+    <p:sldId xmlns:r="http://schemas.openxmlformats.org/officeDocument/2006/relationships" id="286" r:id="Rb72ba76a63274710"/>
+    <p:sldId xmlns:r="http://schemas.openxmlformats.org/officeDocument/2006/relationships" id="287" r:id="R30100c22da574a76"/>
+    <p:sldId xmlns:r="http://schemas.openxmlformats.org/officeDocument/2006/relationships" id="288" r:id="R7004667cbbb244f8"/>
+    <p:sldId xmlns:r="http://schemas.openxmlformats.org/officeDocument/2006/relationships" id="289" r:id="R68d0912afc6e4b36"/>
+    <p:sldId xmlns:r="http://schemas.openxmlformats.org/officeDocument/2006/relationships" id="290" r:id="R006a3341df9b430d"/>
+    <p:sldId xmlns:r="http://schemas.openxmlformats.org/officeDocument/2006/relationships" id="291" r:id="Rff71fc6a0a8545b9"/>
+    <p:sldId xmlns:r="http://schemas.openxmlformats.org/officeDocument/2006/relationships" id="292" r:id="R3880b4137dd04faa"/>
+    <p:sldId xmlns:r="http://schemas.openxmlformats.org/officeDocument/2006/relationships" id="293" r:id="Re06023b75bfd4d8d"/>
+    <p:sldId xmlns:r="http://schemas.openxmlformats.org/officeDocument/2006/relationships" id="294" r:id="Rcd79e3b609954b10"/>
+    <p:sldId xmlns:r="http://schemas.openxmlformats.org/officeDocument/2006/relationships" id="295" r:id="Re91fa553743d4d58"/>
+    <p:sldId xmlns:r="http://schemas.openxmlformats.org/officeDocument/2006/relationships" id="296" r:id="R9f166efd9e954523"/>
+    <p:sldId xmlns:r="http://schemas.openxmlformats.org/officeDocument/2006/relationships" id="297" r:id="Re88e180b2a444743"/>
+    <p:sldId xmlns:r="http://schemas.openxmlformats.org/officeDocument/2006/relationships" id="298" r:id="R028b8277ea85485f"/>
+    <p:sldId xmlns:r="http://schemas.openxmlformats.org/officeDocument/2006/relationships" id="299" r:id="R0dc849b3a2944eb2"/>
   </p:sldIdLst>
   <p:sldSz cx="12192000" cy="6858000"/>
   <p:notesSz cx="6858000" cy="9144000"/>
@@ -2512,7 +2520,535 @@
 </p:notes>
 </file>
 
+<file path=ppt/notesSlides/notesSlide37.xml><?xml version="1.0" encoding="utf-8"?>
+<p:notes xmlns:p="http://schemas.openxmlformats.org/presentationml/2006/main">
+  <p:cSld>
+    <p:spTree>
+      <p:nvGrpSpPr>
+        <p:cNvPr id="1" name=""/>
+        <p:cNvGrpSpPr/>
+        <p:nvPr/>
+      </p:nvGrpSpPr>
+      <p:grpSpPr>
+        <a:xfrm xmlns:a="http://schemas.openxmlformats.org/drawingml/2006/main"/>
+      </p:grpSpPr>
+      <p:sp>
+        <p:nvSpPr>
+          <p:cNvPr id="2" name="Slide Image Placeholder 1"/>
+          <p:cNvSpPr>
+            <a:spLocks xmlns:a="http://schemas.openxmlformats.org/drawingml/2006/main" noGrp="1"/>
+          </p:cNvSpPr>
+          <p:nvPr>
+            <p:ph type="sldImg" idx="0"/>
+          </p:nvPr>
+        </p:nvSpPr>
+        <p:spPr/>
+      </p:sp>
+      <p:sp>
+        <p:nvSpPr>
+          <p:cNvPr id="3" name="Notes Placeholder 2"/>
+          <p:cNvSpPr>
+            <a:spLocks xmlns:a="http://schemas.openxmlformats.org/drawingml/2006/main" noGrp="1"/>
+          </p:cNvSpPr>
+          <p:nvPr>
+            <p:ph type="body" idx="1"/>
+          </p:nvPr>
+        </p:nvSpPr>
+        <p:spPr/>
+        <p:txBody>
+          <a:bodyPr xmlns:a="http://schemas.openxmlformats.org/drawingml/2006/main"/>
+          <a:lstStyle xmlns:a="http://schemas.openxmlformats.org/drawingml/2006/main"/>
+          <a:p xmlns:a="http://schemas.openxmlformats.org/drawingml/2006/main"/>
+        </p:txBody>
+      </p:sp>
+      <p:sp>
+        <p:nvSpPr>
+          <p:cNvPr id="4" name="Slide Number Placeholder 3"/>
+          <p:cNvSpPr>
+            <a:spLocks xmlns:a="http://schemas.openxmlformats.org/drawingml/2006/main" noGrp="1"/>
+          </p:cNvSpPr>
+          <p:nvPr>
+            <p:ph type="sldNum" idx="5"/>
+          </p:nvPr>
+        </p:nvSpPr>
+        <p:spPr/>
+        <p:txBody>
+          <a:bodyPr xmlns:a="http://schemas.openxmlformats.org/drawingml/2006/main"/>
+          <a:lstStyle xmlns:a="http://schemas.openxmlformats.org/drawingml/2006/main"/>
+          <a:p xmlns:a="http://schemas.openxmlformats.org/drawingml/2006/main"/>
+        </p:txBody>
+      </p:sp>
+    </p:spTree>
+  </p:cSld>
+  <p:clrMapOvr>
+    <a:masterClrMapping xmlns:a="http://schemas.openxmlformats.org/drawingml/2006/main"/>
+  </p:clrMapOvr>
+</p:notes>
+</file>
+
+<file path=ppt/notesSlides/notesSlide38.xml><?xml version="1.0" encoding="utf-8"?>
+<p:notes xmlns:p="http://schemas.openxmlformats.org/presentationml/2006/main">
+  <p:cSld>
+    <p:spTree>
+      <p:nvGrpSpPr>
+        <p:cNvPr id="1" name=""/>
+        <p:cNvGrpSpPr/>
+        <p:nvPr/>
+      </p:nvGrpSpPr>
+      <p:grpSpPr>
+        <a:xfrm xmlns:a="http://schemas.openxmlformats.org/drawingml/2006/main"/>
+      </p:grpSpPr>
+      <p:sp>
+        <p:nvSpPr>
+          <p:cNvPr id="2" name="Slide Image Placeholder 1"/>
+          <p:cNvSpPr>
+            <a:spLocks xmlns:a="http://schemas.openxmlformats.org/drawingml/2006/main" noGrp="1"/>
+          </p:cNvSpPr>
+          <p:nvPr>
+            <p:ph type="sldImg" idx="0"/>
+          </p:nvPr>
+        </p:nvSpPr>
+        <p:spPr/>
+      </p:sp>
+      <p:sp>
+        <p:nvSpPr>
+          <p:cNvPr id="3" name="Notes Placeholder 2"/>
+          <p:cNvSpPr>
+            <a:spLocks xmlns:a="http://schemas.openxmlformats.org/drawingml/2006/main" noGrp="1"/>
+          </p:cNvSpPr>
+          <p:nvPr>
+            <p:ph type="body" idx="1"/>
+          </p:nvPr>
+        </p:nvSpPr>
+        <p:spPr/>
+        <p:txBody>
+          <a:bodyPr xmlns:a="http://schemas.openxmlformats.org/drawingml/2006/main"/>
+          <a:lstStyle xmlns:a="http://schemas.openxmlformats.org/drawingml/2006/main"/>
+          <a:p xmlns:a="http://schemas.openxmlformats.org/drawingml/2006/main"/>
+        </p:txBody>
+      </p:sp>
+      <p:sp>
+        <p:nvSpPr>
+          <p:cNvPr id="4" name="Slide Number Placeholder 3"/>
+          <p:cNvSpPr>
+            <a:spLocks xmlns:a="http://schemas.openxmlformats.org/drawingml/2006/main" noGrp="1"/>
+          </p:cNvSpPr>
+          <p:nvPr>
+            <p:ph type="sldNum" idx="5"/>
+          </p:nvPr>
+        </p:nvSpPr>
+        <p:spPr/>
+        <p:txBody>
+          <a:bodyPr xmlns:a="http://schemas.openxmlformats.org/drawingml/2006/main"/>
+          <a:lstStyle xmlns:a="http://schemas.openxmlformats.org/drawingml/2006/main"/>
+          <a:p xmlns:a="http://schemas.openxmlformats.org/drawingml/2006/main"/>
+        </p:txBody>
+      </p:sp>
+    </p:spTree>
+  </p:cSld>
+  <p:clrMapOvr>
+    <a:masterClrMapping xmlns:a="http://schemas.openxmlformats.org/drawingml/2006/main"/>
+  </p:clrMapOvr>
+</p:notes>
+</file>
+
+<file path=ppt/notesSlides/notesSlide39.xml><?xml version="1.0" encoding="utf-8"?>
+<p:notes xmlns:p="http://schemas.openxmlformats.org/presentationml/2006/main">
+  <p:cSld>
+    <p:spTree>
+      <p:nvGrpSpPr>
+        <p:cNvPr id="1" name=""/>
+        <p:cNvGrpSpPr/>
+        <p:nvPr/>
+      </p:nvGrpSpPr>
+      <p:grpSpPr>
+        <a:xfrm xmlns:a="http://schemas.openxmlformats.org/drawingml/2006/main"/>
+      </p:grpSpPr>
+      <p:sp>
+        <p:nvSpPr>
+          <p:cNvPr id="2" name="Slide Image Placeholder 1"/>
+          <p:cNvSpPr>
+            <a:spLocks xmlns:a="http://schemas.openxmlformats.org/drawingml/2006/main" noGrp="1"/>
+          </p:cNvSpPr>
+          <p:nvPr>
+            <p:ph type="sldImg" idx="0"/>
+          </p:nvPr>
+        </p:nvSpPr>
+        <p:spPr/>
+      </p:sp>
+      <p:sp>
+        <p:nvSpPr>
+          <p:cNvPr id="3" name="Notes Placeholder 2"/>
+          <p:cNvSpPr>
+            <a:spLocks xmlns:a="http://schemas.openxmlformats.org/drawingml/2006/main" noGrp="1"/>
+          </p:cNvSpPr>
+          <p:nvPr>
+            <p:ph type="body" idx="1"/>
+          </p:nvPr>
+        </p:nvSpPr>
+        <p:spPr/>
+        <p:txBody>
+          <a:bodyPr xmlns:a="http://schemas.openxmlformats.org/drawingml/2006/main"/>
+          <a:lstStyle xmlns:a="http://schemas.openxmlformats.org/drawingml/2006/main"/>
+          <a:p xmlns:a="http://schemas.openxmlformats.org/drawingml/2006/main"/>
+        </p:txBody>
+      </p:sp>
+      <p:sp>
+        <p:nvSpPr>
+          <p:cNvPr id="4" name="Slide Number Placeholder 3"/>
+          <p:cNvSpPr>
+            <a:spLocks xmlns:a="http://schemas.openxmlformats.org/drawingml/2006/main" noGrp="1"/>
+          </p:cNvSpPr>
+          <p:nvPr>
+            <p:ph type="sldNum" idx="5"/>
+          </p:nvPr>
+        </p:nvSpPr>
+        <p:spPr/>
+        <p:txBody>
+          <a:bodyPr xmlns:a="http://schemas.openxmlformats.org/drawingml/2006/main"/>
+          <a:lstStyle xmlns:a="http://schemas.openxmlformats.org/drawingml/2006/main"/>
+          <a:p xmlns:a="http://schemas.openxmlformats.org/drawingml/2006/main"/>
+        </p:txBody>
+      </p:sp>
+    </p:spTree>
+  </p:cSld>
+  <p:clrMapOvr>
+    <a:masterClrMapping xmlns:a="http://schemas.openxmlformats.org/drawingml/2006/main"/>
+  </p:clrMapOvr>
+</p:notes>
+</file>
+
 <file path=ppt/notesSlides/notesSlide4.xml><?xml version="1.0" encoding="utf-8"?>
+<p:notes xmlns:p="http://schemas.openxmlformats.org/presentationml/2006/main">
+  <p:cSld>
+    <p:spTree>
+      <p:nvGrpSpPr>
+        <p:cNvPr id="1" name=""/>
+        <p:cNvGrpSpPr/>
+        <p:nvPr/>
+      </p:nvGrpSpPr>
+      <p:grpSpPr>
+        <a:xfrm xmlns:a="http://schemas.openxmlformats.org/drawingml/2006/main"/>
+      </p:grpSpPr>
+      <p:sp>
+        <p:nvSpPr>
+          <p:cNvPr id="2" name="Slide Image Placeholder 1"/>
+          <p:cNvSpPr>
+            <a:spLocks xmlns:a="http://schemas.openxmlformats.org/drawingml/2006/main" noGrp="1"/>
+          </p:cNvSpPr>
+          <p:nvPr>
+            <p:ph type="sldImg" idx="0"/>
+          </p:nvPr>
+        </p:nvSpPr>
+        <p:spPr/>
+      </p:sp>
+      <p:sp>
+        <p:nvSpPr>
+          <p:cNvPr id="3" name="Notes Placeholder 2"/>
+          <p:cNvSpPr>
+            <a:spLocks xmlns:a="http://schemas.openxmlformats.org/drawingml/2006/main" noGrp="1"/>
+          </p:cNvSpPr>
+          <p:nvPr>
+            <p:ph type="body" idx="1"/>
+          </p:nvPr>
+        </p:nvSpPr>
+        <p:spPr/>
+        <p:txBody>
+          <a:bodyPr xmlns:a="http://schemas.openxmlformats.org/drawingml/2006/main"/>
+          <a:lstStyle xmlns:a="http://schemas.openxmlformats.org/drawingml/2006/main"/>
+          <a:p xmlns:a="http://schemas.openxmlformats.org/drawingml/2006/main"/>
+        </p:txBody>
+      </p:sp>
+      <p:sp>
+        <p:nvSpPr>
+          <p:cNvPr id="4" name="Slide Number Placeholder 3"/>
+          <p:cNvSpPr>
+            <a:spLocks xmlns:a="http://schemas.openxmlformats.org/drawingml/2006/main" noGrp="1"/>
+          </p:cNvSpPr>
+          <p:nvPr>
+            <p:ph type="sldNum" idx="5"/>
+          </p:nvPr>
+        </p:nvSpPr>
+        <p:spPr/>
+        <p:txBody>
+          <a:bodyPr xmlns:a="http://schemas.openxmlformats.org/drawingml/2006/main"/>
+          <a:lstStyle xmlns:a="http://schemas.openxmlformats.org/drawingml/2006/main"/>
+          <a:p xmlns:a="http://schemas.openxmlformats.org/drawingml/2006/main"/>
+        </p:txBody>
+      </p:sp>
+    </p:spTree>
+  </p:cSld>
+  <p:clrMapOvr>
+    <a:masterClrMapping xmlns:a="http://schemas.openxmlformats.org/drawingml/2006/main"/>
+  </p:clrMapOvr>
+</p:notes>
+</file>
+
+<file path=ppt/notesSlides/notesSlide40.xml><?xml version="1.0" encoding="utf-8"?>
+<p:notes xmlns:p="http://schemas.openxmlformats.org/presentationml/2006/main">
+  <p:cSld>
+    <p:spTree>
+      <p:nvGrpSpPr>
+        <p:cNvPr id="1" name=""/>
+        <p:cNvGrpSpPr/>
+        <p:nvPr/>
+      </p:nvGrpSpPr>
+      <p:grpSpPr>
+        <a:xfrm xmlns:a="http://schemas.openxmlformats.org/drawingml/2006/main"/>
+      </p:grpSpPr>
+      <p:sp>
+        <p:nvSpPr>
+          <p:cNvPr id="2" name="Slide Image Placeholder 1"/>
+          <p:cNvSpPr>
+            <a:spLocks xmlns:a="http://schemas.openxmlformats.org/drawingml/2006/main" noGrp="1"/>
+          </p:cNvSpPr>
+          <p:nvPr>
+            <p:ph type="sldImg" idx="0"/>
+          </p:nvPr>
+        </p:nvSpPr>
+        <p:spPr/>
+      </p:sp>
+      <p:sp>
+        <p:nvSpPr>
+          <p:cNvPr id="3" name="Notes Placeholder 2"/>
+          <p:cNvSpPr>
+            <a:spLocks xmlns:a="http://schemas.openxmlformats.org/drawingml/2006/main" noGrp="1"/>
+          </p:cNvSpPr>
+          <p:nvPr>
+            <p:ph type="body" idx="1"/>
+          </p:nvPr>
+        </p:nvSpPr>
+        <p:spPr/>
+        <p:txBody>
+          <a:bodyPr xmlns:a="http://schemas.openxmlformats.org/drawingml/2006/main"/>
+          <a:lstStyle xmlns:a="http://schemas.openxmlformats.org/drawingml/2006/main"/>
+          <a:p xmlns:a="http://schemas.openxmlformats.org/drawingml/2006/main"/>
+        </p:txBody>
+      </p:sp>
+      <p:sp>
+        <p:nvSpPr>
+          <p:cNvPr id="4" name="Slide Number Placeholder 3"/>
+          <p:cNvSpPr>
+            <a:spLocks xmlns:a="http://schemas.openxmlformats.org/drawingml/2006/main" noGrp="1"/>
+          </p:cNvSpPr>
+          <p:nvPr>
+            <p:ph type="sldNum" idx="5"/>
+          </p:nvPr>
+        </p:nvSpPr>
+        <p:spPr/>
+        <p:txBody>
+          <a:bodyPr xmlns:a="http://schemas.openxmlformats.org/drawingml/2006/main"/>
+          <a:lstStyle xmlns:a="http://schemas.openxmlformats.org/drawingml/2006/main"/>
+          <a:p xmlns:a="http://schemas.openxmlformats.org/drawingml/2006/main"/>
+        </p:txBody>
+      </p:sp>
+    </p:spTree>
+  </p:cSld>
+  <p:clrMapOvr>
+    <a:masterClrMapping xmlns:a="http://schemas.openxmlformats.org/drawingml/2006/main"/>
+  </p:clrMapOvr>
+</p:notes>
+</file>
+
+<file path=ppt/notesSlides/notesSlide41.xml><?xml version="1.0" encoding="utf-8"?>
+<p:notes xmlns:p="http://schemas.openxmlformats.org/presentationml/2006/main">
+  <p:cSld>
+    <p:spTree>
+      <p:nvGrpSpPr>
+        <p:cNvPr id="1" name=""/>
+        <p:cNvGrpSpPr/>
+        <p:nvPr/>
+      </p:nvGrpSpPr>
+      <p:grpSpPr>
+        <a:xfrm xmlns:a="http://schemas.openxmlformats.org/drawingml/2006/main"/>
+      </p:grpSpPr>
+      <p:sp>
+        <p:nvSpPr>
+          <p:cNvPr id="2" name="Slide Image Placeholder 1"/>
+          <p:cNvSpPr>
+            <a:spLocks xmlns:a="http://schemas.openxmlformats.org/drawingml/2006/main" noGrp="1"/>
+          </p:cNvSpPr>
+          <p:nvPr>
+            <p:ph type="sldImg" idx="0"/>
+          </p:nvPr>
+        </p:nvSpPr>
+        <p:spPr/>
+      </p:sp>
+      <p:sp>
+        <p:nvSpPr>
+          <p:cNvPr id="3" name="Notes Placeholder 2"/>
+          <p:cNvSpPr>
+            <a:spLocks xmlns:a="http://schemas.openxmlformats.org/drawingml/2006/main" noGrp="1"/>
+          </p:cNvSpPr>
+          <p:nvPr>
+            <p:ph type="body" idx="1"/>
+          </p:nvPr>
+        </p:nvSpPr>
+        <p:spPr/>
+        <p:txBody>
+          <a:bodyPr xmlns:a="http://schemas.openxmlformats.org/drawingml/2006/main"/>
+          <a:lstStyle xmlns:a="http://schemas.openxmlformats.org/drawingml/2006/main"/>
+          <a:p xmlns:a="http://schemas.openxmlformats.org/drawingml/2006/main"/>
+        </p:txBody>
+      </p:sp>
+      <p:sp>
+        <p:nvSpPr>
+          <p:cNvPr id="4" name="Slide Number Placeholder 3"/>
+          <p:cNvSpPr>
+            <a:spLocks xmlns:a="http://schemas.openxmlformats.org/drawingml/2006/main" noGrp="1"/>
+          </p:cNvSpPr>
+          <p:nvPr>
+            <p:ph type="sldNum" idx="5"/>
+          </p:nvPr>
+        </p:nvSpPr>
+        <p:spPr/>
+        <p:txBody>
+          <a:bodyPr xmlns:a="http://schemas.openxmlformats.org/drawingml/2006/main"/>
+          <a:lstStyle xmlns:a="http://schemas.openxmlformats.org/drawingml/2006/main"/>
+          <a:p xmlns:a="http://schemas.openxmlformats.org/drawingml/2006/main"/>
+        </p:txBody>
+      </p:sp>
+    </p:spTree>
+  </p:cSld>
+  <p:clrMapOvr>
+    <a:masterClrMapping xmlns:a="http://schemas.openxmlformats.org/drawingml/2006/main"/>
+  </p:clrMapOvr>
+</p:notes>
+</file>
+
+<file path=ppt/notesSlides/notesSlide42.xml><?xml version="1.0" encoding="utf-8"?>
+<p:notes xmlns:p="http://schemas.openxmlformats.org/presentationml/2006/main">
+  <p:cSld>
+    <p:spTree>
+      <p:nvGrpSpPr>
+        <p:cNvPr id="1" name=""/>
+        <p:cNvGrpSpPr/>
+        <p:nvPr/>
+      </p:nvGrpSpPr>
+      <p:grpSpPr>
+        <a:xfrm xmlns:a="http://schemas.openxmlformats.org/drawingml/2006/main"/>
+      </p:grpSpPr>
+      <p:sp>
+        <p:nvSpPr>
+          <p:cNvPr id="2" name="Slide Image Placeholder 1"/>
+          <p:cNvSpPr>
+            <a:spLocks xmlns:a="http://schemas.openxmlformats.org/drawingml/2006/main" noGrp="1"/>
+          </p:cNvSpPr>
+          <p:nvPr>
+            <p:ph type="sldImg" idx="0"/>
+          </p:nvPr>
+        </p:nvSpPr>
+        <p:spPr/>
+      </p:sp>
+      <p:sp>
+        <p:nvSpPr>
+          <p:cNvPr id="3" name="Notes Placeholder 2"/>
+          <p:cNvSpPr>
+            <a:spLocks xmlns:a="http://schemas.openxmlformats.org/drawingml/2006/main" noGrp="1"/>
+          </p:cNvSpPr>
+          <p:nvPr>
+            <p:ph type="body" idx="1"/>
+          </p:nvPr>
+        </p:nvSpPr>
+        <p:spPr/>
+        <p:txBody>
+          <a:bodyPr xmlns:a="http://schemas.openxmlformats.org/drawingml/2006/main"/>
+          <a:lstStyle xmlns:a="http://schemas.openxmlformats.org/drawingml/2006/main"/>
+          <a:p xmlns:a="http://schemas.openxmlformats.org/drawingml/2006/main"/>
+        </p:txBody>
+      </p:sp>
+      <p:sp>
+        <p:nvSpPr>
+          <p:cNvPr id="4" name="Slide Number Placeholder 3"/>
+          <p:cNvSpPr>
+            <a:spLocks xmlns:a="http://schemas.openxmlformats.org/drawingml/2006/main" noGrp="1"/>
+          </p:cNvSpPr>
+          <p:nvPr>
+            <p:ph type="sldNum" idx="5"/>
+          </p:nvPr>
+        </p:nvSpPr>
+        <p:spPr/>
+        <p:txBody>
+          <a:bodyPr xmlns:a="http://schemas.openxmlformats.org/drawingml/2006/main"/>
+          <a:lstStyle xmlns:a="http://schemas.openxmlformats.org/drawingml/2006/main"/>
+          <a:p xmlns:a="http://schemas.openxmlformats.org/drawingml/2006/main"/>
+        </p:txBody>
+      </p:sp>
+    </p:spTree>
+  </p:cSld>
+  <p:clrMapOvr>
+    <a:masterClrMapping xmlns:a="http://schemas.openxmlformats.org/drawingml/2006/main"/>
+  </p:clrMapOvr>
+</p:notes>
+</file>
+
+<file path=ppt/notesSlides/notesSlide43.xml><?xml version="1.0" encoding="utf-8"?>
+<p:notes xmlns:p="http://schemas.openxmlformats.org/presentationml/2006/main">
+  <p:cSld>
+    <p:spTree>
+      <p:nvGrpSpPr>
+        <p:cNvPr id="1" name=""/>
+        <p:cNvGrpSpPr/>
+        <p:nvPr/>
+      </p:nvGrpSpPr>
+      <p:grpSpPr>
+        <a:xfrm xmlns:a="http://schemas.openxmlformats.org/drawingml/2006/main"/>
+      </p:grpSpPr>
+      <p:sp>
+        <p:nvSpPr>
+          <p:cNvPr id="2" name="Slide Image Placeholder 1"/>
+          <p:cNvSpPr>
+            <a:spLocks xmlns:a="http://schemas.openxmlformats.org/drawingml/2006/main" noGrp="1"/>
+          </p:cNvSpPr>
+          <p:nvPr>
+            <p:ph type="sldImg" idx="0"/>
+          </p:nvPr>
+        </p:nvSpPr>
+        <p:spPr/>
+      </p:sp>
+      <p:sp>
+        <p:nvSpPr>
+          <p:cNvPr id="3" name="Notes Placeholder 2"/>
+          <p:cNvSpPr>
+            <a:spLocks xmlns:a="http://schemas.openxmlformats.org/drawingml/2006/main" noGrp="1"/>
+          </p:cNvSpPr>
+          <p:nvPr>
+            <p:ph type="body" idx="1"/>
+          </p:nvPr>
+        </p:nvSpPr>
+        <p:spPr/>
+        <p:txBody>
+          <a:bodyPr xmlns:a="http://schemas.openxmlformats.org/drawingml/2006/main"/>
+          <a:lstStyle xmlns:a="http://schemas.openxmlformats.org/drawingml/2006/main"/>
+          <a:p xmlns:a="http://schemas.openxmlformats.org/drawingml/2006/main"/>
+        </p:txBody>
+      </p:sp>
+      <p:sp>
+        <p:nvSpPr>
+          <p:cNvPr id="4" name="Slide Number Placeholder 3"/>
+          <p:cNvSpPr>
+            <a:spLocks xmlns:a="http://schemas.openxmlformats.org/drawingml/2006/main" noGrp="1"/>
+          </p:cNvSpPr>
+          <p:nvPr>
+            <p:ph type="sldNum" idx="5"/>
+          </p:nvPr>
+        </p:nvSpPr>
+        <p:spPr/>
+        <p:txBody>
+          <a:bodyPr xmlns:a="http://schemas.openxmlformats.org/drawingml/2006/main"/>
+          <a:lstStyle xmlns:a="http://schemas.openxmlformats.org/drawingml/2006/main"/>
+          <a:p xmlns:a="http://schemas.openxmlformats.org/drawingml/2006/main"/>
+        </p:txBody>
+      </p:sp>
+    </p:spTree>
+  </p:cSld>
+  <p:clrMapOvr>
+    <a:masterClrMapping xmlns:a="http://schemas.openxmlformats.org/drawingml/2006/main"/>
+  </p:clrMapOvr>
+</p:notes>
+</file>
+
+<file path=ppt/notesSlides/notesSlide44.xml><?xml version="1.0" encoding="utf-8"?>
 <p:notes xmlns:p="http://schemas.openxmlformats.org/presentationml/2006/main">
   <p:cSld>
     <p:spTree>
@@ -2946,7 +3482,7 @@
   </p:cSld>
   <p:clrMap bg1="lt1" tx1="dk1" bg2="lt2" tx2="dk2" accent1="accent1" accent2="accent2" accent3="accent3" accent4="accent4" accent5="accent5" accent6="accent6" hlink="hlink" folHlink="folHlink"/>
   <p:sldLayoutIdLst>
-    <p:sldLayoutId xmlns:r="http://schemas.openxmlformats.org/officeDocument/2006/relationships" id="2147483649" r:id="R7c5dd287f451403c"/>
+    <p:sldLayoutId xmlns:r="http://schemas.openxmlformats.org/officeDocument/2006/relationships" id="2147483649" r:id="Red171e3dfeaf4fcb"/>
   </p:sldLayoutIdLst>
   <p:txStyles>
     <p:titleStyle>
@@ -3497,7 +4033,7 @@
           <p:cNvPr id="1" name="">
             <a:extLst xmlns:a="http://schemas.openxmlformats.org/drawingml/2006/main">
               <a:ext uri="{FF2B5EF4-FFF2-40B4-BE49-F238E27FC236}">
-                <a16:creationId xmlns:a16="http://schemas.microsoft.com/office/drawing/2014/main" id="{4AC58E21-B849-4CD4-8408-25658A659B4B}"/>
+                <a16:creationId xmlns:a16="http://schemas.microsoft.com/office/drawing/2014/main" id="{04B637EE-310A-442C-BADF-B3B76B609D98}"/>
               </a:ext>
             </a:extLst>
           </p:cNvPr>
@@ -3547,7 +4083,7 @@
           <p:cNvPr id="2" name="">
             <a:extLst xmlns:a="http://schemas.openxmlformats.org/drawingml/2006/main">
               <a:ext uri="{FF2B5EF4-FFF2-40B4-BE49-F238E27FC236}">
-                <a16:creationId xmlns:a16="http://schemas.microsoft.com/office/drawing/2014/main" id="{1DAA9E41-094B-49A8-92EB-15689240C093}"/>
+                <a16:creationId xmlns:a16="http://schemas.microsoft.com/office/drawing/2014/main" id="{2F94D857-00CD-4FC1-8AE9-346741F6F871}"/>
               </a:ext>
             </a:extLst>
           </p:cNvPr>
@@ -3597,7 +4133,7 @@
           <p:cNvPr id="3" name="">
             <a:extLst xmlns:a="http://schemas.openxmlformats.org/drawingml/2006/main">
               <a:ext uri="{FF2B5EF4-FFF2-40B4-BE49-F238E27FC236}">
-                <a16:creationId xmlns:a16="http://schemas.microsoft.com/office/drawing/2014/main" id="{06B5D47B-BAB0-443D-9DDA-6CF4AF8D59DC}"/>
+                <a16:creationId xmlns:a16="http://schemas.microsoft.com/office/drawing/2014/main" id="{9BE73AFC-6F6A-4F69-8467-350896CABF93}"/>
               </a:ext>
             </a:extLst>
           </p:cNvPr>
@@ -3647,7 +4183,7 @@
           <p:cNvPr id="4" name="">
             <a:extLst xmlns:a="http://schemas.openxmlformats.org/drawingml/2006/main">
               <a:ext uri="{FF2B5EF4-FFF2-40B4-BE49-F238E27FC236}">
-                <a16:creationId xmlns:a16="http://schemas.microsoft.com/office/drawing/2014/main" id="{3EBDD181-4F57-458B-872D-BF08D2961E23}"/>
+                <a16:creationId xmlns:a16="http://schemas.microsoft.com/office/drawing/2014/main" id="{187BEE30-ABF3-4BF9-AF32-FF75D87FD4C0}"/>
               </a:ext>
             </a:extLst>
           </p:cNvPr>
@@ -3678,7 +4214,7 @@
           <p:cNvPr id="5" name="">
             <a:extLst xmlns:a="http://schemas.openxmlformats.org/drawingml/2006/main">
               <a:ext uri="{FF2B5EF4-FFF2-40B4-BE49-F238E27FC236}">
-                <a16:creationId xmlns:a16="http://schemas.microsoft.com/office/drawing/2014/main" id="{212B35E1-A322-43E4-97A0-F362B920DE1D}"/>
+                <a16:creationId xmlns:a16="http://schemas.microsoft.com/office/drawing/2014/main" id="{3089E26E-8709-4BCA-8815-BA37DC30AEAF}"/>
               </a:ext>
             </a:extLst>
           </p:cNvPr>
@@ -3728,7 +4264,7 @@
           <p:cNvPr id="6" name="">
             <a:extLst xmlns:a="http://schemas.openxmlformats.org/drawingml/2006/main">
               <a:ext uri="{FF2B5EF4-FFF2-40B4-BE49-F238E27FC236}">
-                <a16:creationId xmlns:a16="http://schemas.microsoft.com/office/drawing/2014/main" id="{E5891D7D-E767-4395-8CD1-3E3CEE21CB96}"/>
+                <a16:creationId xmlns:a16="http://schemas.microsoft.com/office/drawing/2014/main" id="{4AAAA12B-8611-41BB-A551-C9C9DCAE05A2}"/>
               </a:ext>
             </a:extLst>
           </p:cNvPr>
@@ -3759,7 +4295,7 @@
           <p:cNvPr id="7" name="">
             <a:extLst xmlns:a="http://schemas.openxmlformats.org/drawingml/2006/main">
               <a:ext uri="{FF2B5EF4-FFF2-40B4-BE49-F238E27FC236}">
-                <a16:creationId xmlns:a16="http://schemas.microsoft.com/office/drawing/2014/main" id="{72FCFC9C-D433-467B-9C04-1E4557B94AD3}"/>
+                <a16:creationId xmlns:a16="http://schemas.microsoft.com/office/drawing/2014/main" id="{7502375E-225F-48E1-B7F2-F80CBB780FCC}"/>
               </a:ext>
             </a:extLst>
           </p:cNvPr>
@@ -3809,7 +4345,7 @@
           <p:cNvPr id="8" name="">
             <a:extLst xmlns:a="http://schemas.openxmlformats.org/drawingml/2006/main">
               <a:ext uri="{FF2B5EF4-FFF2-40B4-BE49-F238E27FC236}">
-                <a16:creationId xmlns:a16="http://schemas.microsoft.com/office/drawing/2014/main" id="{CEEF37DF-A642-4C69-B453-2DB6269D7AB9}"/>
+                <a16:creationId xmlns:a16="http://schemas.microsoft.com/office/drawing/2014/main" id="{E2A53B15-8844-45EE-B046-18963F2C7332}"/>
               </a:ext>
             </a:extLst>
           </p:cNvPr>
@@ -3891,7 +4427,7 @@
     </p:spTree>
     <p:extLst>
       <p:ext uri="{BB962C8B-B14F-4D97-AF65-F5344CB8AC3E}">
-        <p14:creationId xmlns:p14="http://schemas.microsoft.com/office/powerpoint/2010/main" val="464419618"/>
+        <p14:creationId xmlns:p14="http://schemas.microsoft.com/office/powerpoint/2010/main" val="1762214506"/>
       </p:ext>
     </p:extLst>
   </p:cSld>
@@ -3922,7 +4458,7 @@
           <p:cNvPr id="1" name="">
             <a:extLst xmlns:a="http://schemas.openxmlformats.org/drawingml/2006/main">
               <a:ext uri="{FF2B5EF4-FFF2-40B4-BE49-F238E27FC236}">
-                <a16:creationId xmlns:a16="http://schemas.microsoft.com/office/drawing/2014/main" id="{08E8B2D0-A45B-4DC1-BB79-888FDB6918FD}"/>
+                <a16:creationId xmlns:a16="http://schemas.microsoft.com/office/drawing/2014/main" id="{3AF821DE-EE5B-4F60-85CC-90DF22F78F56}"/>
               </a:ext>
             </a:extLst>
           </p:cNvPr>
@@ -3972,7 +4508,7 @@
           <p:cNvPr id="2" name="">
             <a:extLst xmlns:a="http://schemas.openxmlformats.org/drawingml/2006/main">
               <a:ext uri="{FF2B5EF4-FFF2-40B4-BE49-F238E27FC236}">
-                <a16:creationId xmlns:a16="http://schemas.microsoft.com/office/drawing/2014/main" id="{D4EDC0FB-CEDF-44D5-9711-356051FDBCF3}"/>
+                <a16:creationId xmlns:a16="http://schemas.microsoft.com/office/drawing/2014/main" id="{64A29F68-E7B3-465F-9E39-B5ED433ED32C}"/>
               </a:ext>
             </a:extLst>
           </p:cNvPr>
@@ -4022,7 +4558,7 @@
           <p:cNvPr id="3" name="">
             <a:extLst xmlns:a="http://schemas.openxmlformats.org/drawingml/2006/main">
               <a:ext uri="{FF2B5EF4-FFF2-40B4-BE49-F238E27FC236}">
-                <a16:creationId xmlns:a16="http://schemas.microsoft.com/office/drawing/2014/main" id="{398D9163-3EA8-4313-A1C8-D294849F1683}"/>
+                <a16:creationId xmlns:a16="http://schemas.microsoft.com/office/drawing/2014/main" id="{BC627824-B600-4478-9E3F-A47023F4E131}"/>
               </a:ext>
             </a:extLst>
           </p:cNvPr>
@@ -4053,7 +4589,7 @@
           <p:cNvPr id="4" name="">
             <a:extLst xmlns:a="http://schemas.openxmlformats.org/drawingml/2006/main">
               <a:ext uri="{FF2B5EF4-FFF2-40B4-BE49-F238E27FC236}">
-                <a16:creationId xmlns:a16="http://schemas.microsoft.com/office/drawing/2014/main" id="{CB432C31-7CD7-4866-8C79-8152B7ADE56D}"/>
+                <a16:creationId xmlns:a16="http://schemas.microsoft.com/office/drawing/2014/main" id="{1341A6A3-C67F-44C2-A13D-4D9F08B7AB56}"/>
               </a:ext>
             </a:extLst>
           </p:cNvPr>
@@ -4103,7 +4639,7 @@
           <p:cNvPr id="5" name="">
             <a:extLst xmlns:a="http://schemas.openxmlformats.org/drawingml/2006/main">
               <a:ext uri="{FF2B5EF4-FFF2-40B4-BE49-F238E27FC236}">
-                <a16:creationId xmlns:a16="http://schemas.microsoft.com/office/drawing/2014/main" id="{6CD87F2C-7711-4C33-B5DC-3E1723F35736}"/>
+                <a16:creationId xmlns:a16="http://schemas.microsoft.com/office/drawing/2014/main" id="{73EE753E-E7B4-4A54-BD64-A03E260761F6}"/>
               </a:ext>
             </a:extLst>
           </p:cNvPr>
@@ -4153,7 +4689,7 @@
           <p:cNvPr id="6" name="">
             <a:extLst xmlns:a="http://schemas.openxmlformats.org/drawingml/2006/main">
               <a:ext uri="{FF2B5EF4-FFF2-40B4-BE49-F238E27FC236}">
-                <a16:creationId xmlns:a16="http://schemas.microsoft.com/office/drawing/2014/main" id="{1A36502B-FC74-449C-88EB-EDB62100187F}"/>
+                <a16:creationId xmlns:a16="http://schemas.microsoft.com/office/drawing/2014/main" id="{0F311408-5AB4-41C3-94F7-AC1C22344F05}"/>
               </a:ext>
             </a:extLst>
           </p:cNvPr>
@@ -4203,7 +4739,7 @@
           <p:cNvPr id="7" name="">
             <a:extLst xmlns:a="http://schemas.openxmlformats.org/drawingml/2006/main">
               <a:ext uri="{FF2B5EF4-FFF2-40B4-BE49-F238E27FC236}">
-                <a16:creationId xmlns:a16="http://schemas.microsoft.com/office/drawing/2014/main" id="{2AEEE61F-ED55-47BB-BD10-71FEEA345BD3}"/>
+                <a16:creationId xmlns:a16="http://schemas.microsoft.com/office/drawing/2014/main" id="{26DF8060-391F-45F5-B426-322E15F0FC11}"/>
               </a:ext>
             </a:extLst>
           </p:cNvPr>
@@ -4253,7 +4789,7 @@
           <p:cNvPr id="8" name="">
             <a:extLst xmlns:a="http://schemas.openxmlformats.org/drawingml/2006/main">
               <a:ext uri="{FF2B5EF4-FFF2-40B4-BE49-F238E27FC236}">
-                <a16:creationId xmlns:a16="http://schemas.microsoft.com/office/drawing/2014/main" id="{78D1A5A5-4D21-4733-AEBA-10C1185433E8}"/>
+                <a16:creationId xmlns:a16="http://schemas.microsoft.com/office/drawing/2014/main" id="{47130E93-D0FB-4963-B796-A7F64F3E8E54}"/>
               </a:ext>
             </a:extLst>
           </p:cNvPr>
@@ -4303,7 +4839,7 @@
           <p:cNvPr id="9" name="">
             <a:extLst xmlns:a="http://schemas.openxmlformats.org/drawingml/2006/main">
               <a:ext uri="{FF2B5EF4-FFF2-40B4-BE49-F238E27FC236}">
-                <a16:creationId xmlns:a16="http://schemas.microsoft.com/office/drawing/2014/main" id="{42E35DC9-A389-4957-BC45-F87BDD4AAE30}"/>
+                <a16:creationId xmlns:a16="http://schemas.microsoft.com/office/drawing/2014/main" id="{0B2213A7-C5A1-4791-A9B8-4C4BCB44E4BA}"/>
               </a:ext>
             </a:extLst>
           </p:cNvPr>
@@ -4353,7 +4889,7 @@
           <p:cNvPr id="10" name="">
             <a:extLst xmlns:a="http://schemas.openxmlformats.org/drawingml/2006/main">
               <a:ext uri="{FF2B5EF4-FFF2-40B4-BE49-F238E27FC236}">
-                <a16:creationId xmlns:a16="http://schemas.microsoft.com/office/drawing/2014/main" id="{6C553747-CB8D-4504-9A90-8896849C98C5}"/>
+                <a16:creationId xmlns:a16="http://schemas.microsoft.com/office/drawing/2014/main" id="{064CE93F-953F-433F-ACCA-41B03022F4C1}"/>
               </a:ext>
             </a:extLst>
           </p:cNvPr>
@@ -4403,7 +4939,7 @@
           <p:cNvPr id="11" name="">
             <a:extLst xmlns:a="http://schemas.openxmlformats.org/drawingml/2006/main">
               <a:ext uri="{FF2B5EF4-FFF2-40B4-BE49-F238E27FC236}">
-                <a16:creationId xmlns:a16="http://schemas.microsoft.com/office/drawing/2014/main" id="{E3D80C63-9FE6-4289-BE3F-0AB6B058BFBB}"/>
+                <a16:creationId xmlns:a16="http://schemas.microsoft.com/office/drawing/2014/main" id="{6FC4FBE6-A8FC-4267-8D18-60F25D7312A4}"/>
               </a:ext>
             </a:extLst>
           </p:cNvPr>
@@ -4453,7 +4989,7 @@
           <p:cNvPr id="12" name="">
             <a:extLst xmlns:a="http://schemas.openxmlformats.org/drawingml/2006/main">
               <a:ext uri="{FF2B5EF4-FFF2-40B4-BE49-F238E27FC236}">
-                <a16:creationId xmlns:a16="http://schemas.microsoft.com/office/drawing/2014/main" id="{91BBC516-9872-44F7-B927-DD8499772B83}"/>
+                <a16:creationId xmlns:a16="http://schemas.microsoft.com/office/drawing/2014/main" id="{B6B8696D-AD3B-4F7F-98C8-BA2A72BE1343}"/>
               </a:ext>
             </a:extLst>
           </p:cNvPr>
@@ -4503,7 +5039,7 @@
           <p:cNvPr id="13" name="">
             <a:extLst xmlns:a="http://schemas.openxmlformats.org/drawingml/2006/main">
               <a:ext uri="{FF2B5EF4-FFF2-40B4-BE49-F238E27FC236}">
-                <a16:creationId xmlns:a16="http://schemas.microsoft.com/office/drawing/2014/main" id="{15F7BAFD-D574-4EEB-A4C0-3074756E87FA}"/>
+                <a16:creationId xmlns:a16="http://schemas.microsoft.com/office/drawing/2014/main" id="{88CC64C6-884F-4B65-B758-2488675CDD81}"/>
               </a:ext>
             </a:extLst>
           </p:cNvPr>
@@ -4536,7 +5072,7 @@
           <p:cNvPr id="14" name="">
             <a:extLst xmlns:a="http://schemas.openxmlformats.org/drawingml/2006/main">
               <a:ext uri="{FF2B5EF4-FFF2-40B4-BE49-F238E27FC236}">
-                <a16:creationId xmlns:a16="http://schemas.microsoft.com/office/drawing/2014/main" id="{3BE0FF4E-C200-4835-835B-6310886E2B48}"/>
+                <a16:creationId xmlns:a16="http://schemas.microsoft.com/office/drawing/2014/main" id="{0EAB80C4-CD71-417E-937A-B0324F66FDE7}"/>
               </a:ext>
             </a:extLst>
           </p:cNvPr>
@@ -4586,7 +5122,7 @@
           <p:cNvPr id="15" name="">
             <a:extLst xmlns:a="http://schemas.openxmlformats.org/drawingml/2006/main">
               <a:ext uri="{FF2B5EF4-FFF2-40B4-BE49-F238E27FC236}">
-                <a16:creationId xmlns:a16="http://schemas.microsoft.com/office/drawing/2014/main" id="{FBDCF793-DC58-4D51-93C9-186C6D8C0EA8}"/>
+                <a16:creationId xmlns:a16="http://schemas.microsoft.com/office/drawing/2014/main" id="{471D9A0E-2AEA-4711-B3AB-A54563B1A821}"/>
               </a:ext>
             </a:extLst>
           </p:cNvPr>
@@ -4634,7 +5170,7 @@
     </p:spTree>
     <p:extLst>
       <p:ext uri="{BB962C8B-B14F-4D97-AF65-F5344CB8AC3E}">
-        <p14:creationId xmlns:p14="http://schemas.microsoft.com/office/powerpoint/2010/main" val="1422869723"/>
+        <p14:creationId xmlns:p14="http://schemas.microsoft.com/office/powerpoint/2010/main" val="662999225"/>
       </p:ext>
     </p:extLst>
   </p:cSld>
@@ -4665,7 +5201,7 @@
           <p:cNvPr id="1" name="">
             <a:extLst xmlns:a="http://schemas.openxmlformats.org/drawingml/2006/main">
               <a:ext uri="{FF2B5EF4-FFF2-40B4-BE49-F238E27FC236}">
-                <a16:creationId xmlns:a16="http://schemas.microsoft.com/office/drawing/2014/main" id="{847EF166-DD25-4BA8-B95E-8C6C62AA7184}"/>
+                <a16:creationId xmlns:a16="http://schemas.microsoft.com/office/drawing/2014/main" id="{3C629728-B132-470D-AA6D-DDA1AAFD63E3}"/>
               </a:ext>
             </a:extLst>
           </p:cNvPr>
@@ -4715,7 +5251,7 @@
           <p:cNvPr id="2" name="">
             <a:extLst xmlns:a="http://schemas.openxmlformats.org/drawingml/2006/main">
               <a:ext uri="{FF2B5EF4-FFF2-40B4-BE49-F238E27FC236}">
-                <a16:creationId xmlns:a16="http://schemas.microsoft.com/office/drawing/2014/main" id="{45FFB83A-46A3-486B-A9BC-CCED69987ADF}"/>
+                <a16:creationId xmlns:a16="http://schemas.microsoft.com/office/drawing/2014/main" id="{3DB10655-50CC-453E-8CB8-5B14D0429367}"/>
               </a:ext>
             </a:extLst>
           </p:cNvPr>
@@ -4765,7 +5301,7 @@
           <p:cNvPr id="3" name="">
             <a:extLst xmlns:a="http://schemas.openxmlformats.org/drawingml/2006/main">
               <a:ext uri="{FF2B5EF4-FFF2-40B4-BE49-F238E27FC236}">
-                <a16:creationId xmlns:a16="http://schemas.microsoft.com/office/drawing/2014/main" id="{55C29D2C-4CCA-4B09-9FB0-3CBEB81E69BC}"/>
+                <a16:creationId xmlns:a16="http://schemas.microsoft.com/office/drawing/2014/main" id="{0F4B74D1-8BA8-404A-B98F-7E936C954A8B}"/>
               </a:ext>
             </a:extLst>
           </p:cNvPr>
@@ -4796,7 +5332,7 @@
           <p:cNvPr id="4" name="">
             <a:extLst xmlns:a="http://schemas.openxmlformats.org/drawingml/2006/main">
               <a:ext uri="{FF2B5EF4-FFF2-40B4-BE49-F238E27FC236}">
-                <a16:creationId xmlns:a16="http://schemas.microsoft.com/office/drawing/2014/main" id="{58BF041B-1DC5-4018-9098-43F997A45428}"/>
+                <a16:creationId xmlns:a16="http://schemas.microsoft.com/office/drawing/2014/main" id="{E04ED98B-908E-4FAE-8495-91560452D16C}"/>
               </a:ext>
             </a:extLst>
           </p:cNvPr>
@@ -4846,7 +5382,7 @@
           <p:cNvPr id="5" name="">
             <a:extLst xmlns:a="http://schemas.openxmlformats.org/drawingml/2006/main">
               <a:ext uri="{FF2B5EF4-FFF2-40B4-BE49-F238E27FC236}">
-                <a16:creationId xmlns:a16="http://schemas.microsoft.com/office/drawing/2014/main" id="{CA75A590-27A6-4F99-BBBC-D35E6D8E32A3}"/>
+                <a16:creationId xmlns:a16="http://schemas.microsoft.com/office/drawing/2014/main" id="{35097D09-E45A-4E11-B7E0-EA8B73A4833D}"/>
               </a:ext>
             </a:extLst>
           </p:cNvPr>
@@ -4877,7 +5413,7 @@
           <p:cNvPr id="6" name="">
             <a:extLst xmlns:a="http://schemas.openxmlformats.org/drawingml/2006/main">
               <a:ext uri="{FF2B5EF4-FFF2-40B4-BE49-F238E27FC236}">
-                <a16:creationId xmlns:a16="http://schemas.microsoft.com/office/drawing/2014/main" id="{81F7F82A-33E8-4B6A-A4F8-3A9F9066B2C2}"/>
+                <a16:creationId xmlns:a16="http://schemas.microsoft.com/office/drawing/2014/main" id="{9588D3DF-DFD4-43F4-821D-3657164182DF}"/>
               </a:ext>
             </a:extLst>
           </p:cNvPr>
@@ -4927,7 +5463,7 @@
           <p:cNvPr id="7" name="">
             <a:extLst xmlns:a="http://schemas.openxmlformats.org/drawingml/2006/main">
               <a:ext uri="{FF2B5EF4-FFF2-40B4-BE49-F238E27FC236}">
-                <a16:creationId xmlns:a16="http://schemas.microsoft.com/office/drawing/2014/main" id="{178015D9-13AC-4459-B6F2-C90D55C5F0D5}"/>
+                <a16:creationId xmlns:a16="http://schemas.microsoft.com/office/drawing/2014/main" id="{5D1C9277-E78E-45E7-A7B6-CC8E91C14C1E}"/>
               </a:ext>
             </a:extLst>
           </p:cNvPr>
@@ -4975,7 +5511,7 @@
     </p:spTree>
     <p:extLst>
       <p:ext uri="{BB962C8B-B14F-4D97-AF65-F5344CB8AC3E}">
-        <p14:creationId xmlns:p14="http://schemas.microsoft.com/office/powerpoint/2010/main" val="220894965"/>
+        <p14:creationId xmlns:p14="http://schemas.microsoft.com/office/powerpoint/2010/main" val="58722446"/>
       </p:ext>
     </p:extLst>
   </p:cSld>
@@ -5006,7 +5542,7 @@
           <p:cNvPr id="1" name="">
             <a:extLst xmlns:a="http://schemas.openxmlformats.org/drawingml/2006/main">
               <a:ext uri="{FF2B5EF4-FFF2-40B4-BE49-F238E27FC236}">
-                <a16:creationId xmlns:a16="http://schemas.microsoft.com/office/drawing/2014/main" id="{59FE4D1E-E142-477B-B554-F57F40C4E2ED}"/>
+                <a16:creationId xmlns:a16="http://schemas.microsoft.com/office/drawing/2014/main" id="{76622E53-573D-4DCB-AF2A-B93A88820A3D}"/>
               </a:ext>
             </a:extLst>
           </p:cNvPr>
@@ -5056,7 +5592,7 @@
           <p:cNvPr id="2" name="">
             <a:extLst xmlns:a="http://schemas.openxmlformats.org/drawingml/2006/main">
               <a:ext uri="{FF2B5EF4-FFF2-40B4-BE49-F238E27FC236}">
-                <a16:creationId xmlns:a16="http://schemas.microsoft.com/office/drawing/2014/main" id="{636E0FD1-EB26-48DC-957D-9F2B844558D8}"/>
+                <a16:creationId xmlns:a16="http://schemas.microsoft.com/office/drawing/2014/main" id="{82F8DA99-913F-453E-A6A1-46B4F5AC4FDB}"/>
               </a:ext>
             </a:extLst>
           </p:cNvPr>
@@ -5106,7 +5642,7 @@
           <p:cNvPr id="3" name="">
             <a:extLst xmlns:a="http://schemas.openxmlformats.org/drawingml/2006/main">
               <a:ext uri="{FF2B5EF4-FFF2-40B4-BE49-F238E27FC236}">
-                <a16:creationId xmlns:a16="http://schemas.microsoft.com/office/drawing/2014/main" id="{67117A02-03BB-4860-B696-61BB95040559}"/>
+                <a16:creationId xmlns:a16="http://schemas.microsoft.com/office/drawing/2014/main" id="{A7D9B78D-EFC4-4C03-8386-1F283B0BC2EC}"/>
               </a:ext>
             </a:extLst>
           </p:cNvPr>
@@ -5137,7 +5673,7 @@
           <p:cNvPr id="4" name="">
             <a:extLst xmlns:a="http://schemas.openxmlformats.org/drawingml/2006/main">
               <a:ext uri="{FF2B5EF4-FFF2-40B4-BE49-F238E27FC236}">
-                <a16:creationId xmlns:a16="http://schemas.microsoft.com/office/drawing/2014/main" id="{C139B758-0A3C-4AB9-8B22-9F564B4AB114}"/>
+                <a16:creationId xmlns:a16="http://schemas.microsoft.com/office/drawing/2014/main" id="{5C616020-84E9-4957-8B34-5131520BB6E3}"/>
               </a:ext>
             </a:extLst>
           </p:cNvPr>
@@ -5170,7 +5706,7 @@
           <p:cNvPr id="5" name="">
             <a:extLst xmlns:a="http://schemas.openxmlformats.org/drawingml/2006/main">
               <a:ext uri="{FF2B5EF4-FFF2-40B4-BE49-F238E27FC236}">
-                <a16:creationId xmlns:a16="http://schemas.microsoft.com/office/drawing/2014/main" id="{3811AE7C-3B93-4004-A8B4-7036089A9697}"/>
+                <a16:creationId xmlns:a16="http://schemas.microsoft.com/office/drawing/2014/main" id="{F2BF0E76-F4C9-4526-A1C7-1B2D04386098}"/>
               </a:ext>
             </a:extLst>
           </p:cNvPr>
@@ -5220,7 +5756,7 @@
           <p:cNvPr id="6" name="">
             <a:extLst xmlns:a="http://schemas.openxmlformats.org/drawingml/2006/main">
               <a:ext uri="{FF2B5EF4-FFF2-40B4-BE49-F238E27FC236}">
-                <a16:creationId xmlns:a16="http://schemas.microsoft.com/office/drawing/2014/main" id="{86A0D85D-E65E-4E89-BD21-ABD7734C541D}"/>
+                <a16:creationId xmlns:a16="http://schemas.microsoft.com/office/drawing/2014/main" id="{F411CD99-51DA-4BB8-AD2C-1F077DC6DED6}"/>
               </a:ext>
             </a:extLst>
           </p:cNvPr>
@@ -5270,7 +5806,7 @@
           <p:cNvPr id="7" name="">
             <a:extLst xmlns:a="http://schemas.openxmlformats.org/drawingml/2006/main">
               <a:ext uri="{FF2B5EF4-FFF2-40B4-BE49-F238E27FC236}">
-                <a16:creationId xmlns:a16="http://schemas.microsoft.com/office/drawing/2014/main" id="{1E0E74B2-641A-4354-9080-2FABD46D5E2A}"/>
+                <a16:creationId xmlns:a16="http://schemas.microsoft.com/office/drawing/2014/main" id="{42068B35-7F74-48F5-8D60-6C574ADED053}"/>
               </a:ext>
             </a:extLst>
           </p:cNvPr>
@@ -5320,7 +5856,7 @@
           <p:cNvPr id="8" name="">
             <a:extLst xmlns:a="http://schemas.openxmlformats.org/drawingml/2006/main">
               <a:ext uri="{FF2B5EF4-FFF2-40B4-BE49-F238E27FC236}">
-                <a16:creationId xmlns:a16="http://schemas.microsoft.com/office/drawing/2014/main" id="{FA52892C-2609-48A0-8A3B-C5DEDD90CEA6}"/>
+                <a16:creationId xmlns:a16="http://schemas.microsoft.com/office/drawing/2014/main" id="{899765F0-2D8C-4DEF-BFAD-010F4ED5A90A}"/>
               </a:ext>
             </a:extLst>
           </p:cNvPr>
@@ -5353,7 +5889,7 @@
           <p:cNvPr id="9" name="">
             <a:extLst xmlns:a="http://schemas.openxmlformats.org/drawingml/2006/main">
               <a:ext uri="{FF2B5EF4-FFF2-40B4-BE49-F238E27FC236}">
-                <a16:creationId xmlns:a16="http://schemas.microsoft.com/office/drawing/2014/main" id="{9CB39689-620C-4A6E-9004-EC9793C233BC}"/>
+                <a16:creationId xmlns:a16="http://schemas.microsoft.com/office/drawing/2014/main" id="{D96DFC72-BE3C-45F2-92E6-036D0D14896F}"/>
               </a:ext>
             </a:extLst>
           </p:cNvPr>
@@ -5403,7 +5939,7 @@
           <p:cNvPr id="10" name="">
             <a:extLst xmlns:a="http://schemas.openxmlformats.org/drawingml/2006/main">
               <a:ext uri="{FF2B5EF4-FFF2-40B4-BE49-F238E27FC236}">
-                <a16:creationId xmlns:a16="http://schemas.microsoft.com/office/drawing/2014/main" id="{F98B9989-1F4D-40D2-8CD0-B5A99CFE0A14}"/>
+                <a16:creationId xmlns:a16="http://schemas.microsoft.com/office/drawing/2014/main" id="{45F366B5-6EAA-4BCD-8C8D-36F43241D999}"/>
               </a:ext>
             </a:extLst>
           </p:cNvPr>
@@ -5453,7 +5989,7 @@
           <p:cNvPr id="11" name="">
             <a:extLst xmlns:a="http://schemas.openxmlformats.org/drawingml/2006/main">
               <a:ext uri="{FF2B5EF4-FFF2-40B4-BE49-F238E27FC236}">
-                <a16:creationId xmlns:a16="http://schemas.microsoft.com/office/drawing/2014/main" id="{0ED8BB00-D579-42D6-B1AB-ACB4F02C5DE1}"/>
+                <a16:creationId xmlns:a16="http://schemas.microsoft.com/office/drawing/2014/main" id="{EF9583A2-E0BF-4FA0-9F1D-C112FC3E22ED}"/>
               </a:ext>
             </a:extLst>
           </p:cNvPr>
@@ -5503,7 +6039,7 @@
           <p:cNvPr id="12" name="">
             <a:extLst xmlns:a="http://schemas.openxmlformats.org/drawingml/2006/main">
               <a:ext uri="{FF2B5EF4-FFF2-40B4-BE49-F238E27FC236}">
-                <a16:creationId xmlns:a16="http://schemas.microsoft.com/office/drawing/2014/main" id="{D4556D60-71D8-4BD0-99E5-0C8B08984E9C}"/>
+                <a16:creationId xmlns:a16="http://schemas.microsoft.com/office/drawing/2014/main" id="{2343CCB5-D9C2-48A1-9978-88AAB60AEBAA}"/>
               </a:ext>
             </a:extLst>
           </p:cNvPr>
@@ -5536,7 +6072,7 @@
           <p:cNvPr id="13" name="">
             <a:extLst xmlns:a="http://schemas.openxmlformats.org/drawingml/2006/main">
               <a:ext uri="{FF2B5EF4-FFF2-40B4-BE49-F238E27FC236}">
-                <a16:creationId xmlns:a16="http://schemas.microsoft.com/office/drawing/2014/main" id="{77D475BC-7331-49E9-BC80-B1271F1691A1}"/>
+                <a16:creationId xmlns:a16="http://schemas.microsoft.com/office/drawing/2014/main" id="{4AD4083E-2259-432A-8B06-0B6A2E233A95}"/>
               </a:ext>
             </a:extLst>
           </p:cNvPr>
@@ -5586,7 +6122,7 @@
           <p:cNvPr id="14" name="">
             <a:extLst xmlns:a="http://schemas.openxmlformats.org/drawingml/2006/main">
               <a:ext uri="{FF2B5EF4-FFF2-40B4-BE49-F238E27FC236}">
-                <a16:creationId xmlns:a16="http://schemas.microsoft.com/office/drawing/2014/main" id="{89924463-998A-4C4A-98B2-A0DA1B27498D}"/>
+                <a16:creationId xmlns:a16="http://schemas.microsoft.com/office/drawing/2014/main" id="{A8E77677-AF11-484C-B690-A72394F79C2C}"/>
               </a:ext>
             </a:extLst>
           </p:cNvPr>
@@ -5636,7 +6172,7 @@
           <p:cNvPr id="15" name="">
             <a:extLst xmlns:a="http://schemas.openxmlformats.org/drawingml/2006/main">
               <a:ext uri="{FF2B5EF4-FFF2-40B4-BE49-F238E27FC236}">
-                <a16:creationId xmlns:a16="http://schemas.microsoft.com/office/drawing/2014/main" id="{8BB7F8E0-17EC-4666-ACB4-522F4686CD04}"/>
+                <a16:creationId xmlns:a16="http://schemas.microsoft.com/office/drawing/2014/main" id="{0728017B-904E-4F80-BB19-D729072CD6DE}"/>
               </a:ext>
             </a:extLst>
           </p:cNvPr>
@@ -5686,7 +6222,7 @@
           <p:cNvPr id="16" name="">
             <a:extLst xmlns:a="http://schemas.openxmlformats.org/drawingml/2006/main">
               <a:ext uri="{FF2B5EF4-FFF2-40B4-BE49-F238E27FC236}">
-                <a16:creationId xmlns:a16="http://schemas.microsoft.com/office/drawing/2014/main" id="{3F9CDF91-D6DF-4A62-B91F-4FFBCC39680C}"/>
+                <a16:creationId xmlns:a16="http://schemas.microsoft.com/office/drawing/2014/main" id="{E37B7735-2ABD-4288-B670-4CE7F90A7F34}"/>
               </a:ext>
             </a:extLst>
           </p:cNvPr>
@@ -5719,7 +6255,7 @@
           <p:cNvPr id="17" name="">
             <a:extLst xmlns:a="http://schemas.openxmlformats.org/drawingml/2006/main">
               <a:ext uri="{FF2B5EF4-FFF2-40B4-BE49-F238E27FC236}">
-                <a16:creationId xmlns:a16="http://schemas.microsoft.com/office/drawing/2014/main" id="{EB37D428-4A63-4A7B-AB43-F625CCAB9325}"/>
+                <a16:creationId xmlns:a16="http://schemas.microsoft.com/office/drawing/2014/main" id="{A11C02F7-E4A9-45EC-A5B2-741BF93B3649}"/>
               </a:ext>
             </a:extLst>
           </p:cNvPr>
@@ -5769,7 +6305,7 @@
           <p:cNvPr id="18" name="">
             <a:extLst xmlns:a="http://schemas.openxmlformats.org/drawingml/2006/main">
               <a:ext uri="{FF2B5EF4-FFF2-40B4-BE49-F238E27FC236}">
-                <a16:creationId xmlns:a16="http://schemas.microsoft.com/office/drawing/2014/main" id="{1307D886-A834-48E5-B06B-147C00DE8734}"/>
+                <a16:creationId xmlns:a16="http://schemas.microsoft.com/office/drawing/2014/main" id="{4B3CC29E-A9AD-42BF-AE9B-625E7C8142DA}"/>
               </a:ext>
             </a:extLst>
           </p:cNvPr>
@@ -5819,7 +6355,7 @@
           <p:cNvPr id="19" name="">
             <a:extLst xmlns:a="http://schemas.openxmlformats.org/drawingml/2006/main">
               <a:ext uri="{FF2B5EF4-FFF2-40B4-BE49-F238E27FC236}">
-                <a16:creationId xmlns:a16="http://schemas.microsoft.com/office/drawing/2014/main" id="{05840028-DAED-4A80-9FD8-6D7F48B8A129}"/>
+                <a16:creationId xmlns:a16="http://schemas.microsoft.com/office/drawing/2014/main" id="{663BC2F7-679B-49EB-957C-087C95AE6AED}"/>
               </a:ext>
             </a:extLst>
           </p:cNvPr>
@@ -5869,7 +6405,7 @@
           <p:cNvPr id="20" name="">
             <a:extLst xmlns:a="http://schemas.openxmlformats.org/drawingml/2006/main">
               <a:ext uri="{FF2B5EF4-FFF2-40B4-BE49-F238E27FC236}">
-                <a16:creationId xmlns:a16="http://schemas.microsoft.com/office/drawing/2014/main" id="{73C69E42-A0F0-45C3-9D85-282CB01E4E09}"/>
+                <a16:creationId xmlns:a16="http://schemas.microsoft.com/office/drawing/2014/main" id="{76447F7B-3093-4369-94DA-19224F9D913F}"/>
               </a:ext>
             </a:extLst>
           </p:cNvPr>
@@ -5917,7 +6453,7 @@
     </p:spTree>
     <p:extLst>
       <p:ext uri="{BB962C8B-B14F-4D97-AF65-F5344CB8AC3E}">
-        <p14:creationId xmlns:p14="http://schemas.microsoft.com/office/powerpoint/2010/main" val="1648061046"/>
+        <p14:creationId xmlns:p14="http://schemas.microsoft.com/office/powerpoint/2010/main" val="1504317690"/>
       </p:ext>
     </p:extLst>
   </p:cSld>
@@ -5948,7 +6484,7 @@
           <p:cNvPr id="1" name="">
             <a:extLst xmlns:a="http://schemas.openxmlformats.org/drawingml/2006/main">
               <a:ext uri="{FF2B5EF4-FFF2-40B4-BE49-F238E27FC236}">
-                <a16:creationId xmlns:a16="http://schemas.microsoft.com/office/drawing/2014/main" id="{8F23C24B-0DCF-4D9E-9666-2FADEFECF68A}"/>
+                <a16:creationId xmlns:a16="http://schemas.microsoft.com/office/drawing/2014/main" id="{5E13CFDE-48B4-4E96-B9CB-9DD6C6825D53}"/>
               </a:ext>
             </a:extLst>
           </p:cNvPr>
@@ -5998,7 +6534,7 @@
           <p:cNvPr id="2" name="">
             <a:extLst xmlns:a="http://schemas.openxmlformats.org/drawingml/2006/main">
               <a:ext uri="{FF2B5EF4-FFF2-40B4-BE49-F238E27FC236}">
-                <a16:creationId xmlns:a16="http://schemas.microsoft.com/office/drawing/2014/main" id="{0EEA1C91-433A-48D6-B41D-86F1BB7F6956}"/>
+                <a16:creationId xmlns:a16="http://schemas.microsoft.com/office/drawing/2014/main" id="{B7D52A9A-D6A1-4E06-AC91-0648311B0C63}"/>
               </a:ext>
             </a:extLst>
           </p:cNvPr>
@@ -6048,7 +6584,7 @@
           <p:cNvPr id="3" name="">
             <a:extLst xmlns:a="http://schemas.openxmlformats.org/drawingml/2006/main">
               <a:ext uri="{FF2B5EF4-FFF2-40B4-BE49-F238E27FC236}">
-                <a16:creationId xmlns:a16="http://schemas.microsoft.com/office/drawing/2014/main" id="{B8A81F3F-E997-4354-8577-A4312B3B57F4}"/>
+                <a16:creationId xmlns:a16="http://schemas.microsoft.com/office/drawing/2014/main" id="{B882CA0A-2FB1-4488-A4B1-8D1C452F4931}"/>
               </a:ext>
             </a:extLst>
           </p:cNvPr>
@@ -6083,7 +6619,7 @@
           <p:nvPr/>
         </p:nvPicPr>
         <p:blipFill>
-          <a:blip xmlns:r="http://schemas.openxmlformats.org/officeDocument/2006/relationships" xmlns:a="http://schemas.openxmlformats.org/drawingml/2006/main" r:embed="Rd4860d62c64649c8"/>
+          <a:blip xmlns:r="http://schemas.openxmlformats.org/officeDocument/2006/relationships" xmlns:a="http://schemas.openxmlformats.org/drawingml/2006/main" r:embed="Rc795d66439634ea1"/>
           <a:stretch xmlns:a="http://schemas.openxmlformats.org/drawingml/2006/main"/>
         </p:blipFill>
         <p:spPr>
@@ -6101,7 +6637,7 @@
           <p:cNvPr id="5" name="">
             <a:extLst xmlns:a="http://schemas.openxmlformats.org/drawingml/2006/main">
               <a:ext uri="{FF2B5EF4-FFF2-40B4-BE49-F238E27FC236}">
-                <a16:creationId xmlns:a16="http://schemas.microsoft.com/office/drawing/2014/main" id="{EBAB97B9-1ECE-44EE-90CE-DEC3749A19CF}"/>
+                <a16:creationId xmlns:a16="http://schemas.microsoft.com/office/drawing/2014/main" id="{5CFF714D-2DFF-4207-9DC2-3F6FC4F773ED}"/>
               </a:ext>
             </a:extLst>
           </p:cNvPr>
@@ -6151,7 +6687,7 @@
           <p:cNvPr id="6" name="">
             <a:extLst xmlns:a="http://schemas.openxmlformats.org/drawingml/2006/main">
               <a:ext uri="{FF2B5EF4-FFF2-40B4-BE49-F238E27FC236}">
-                <a16:creationId xmlns:a16="http://schemas.microsoft.com/office/drawing/2014/main" id="{B4166768-B894-4944-91F9-D780B9752758}"/>
+                <a16:creationId xmlns:a16="http://schemas.microsoft.com/office/drawing/2014/main" id="{FECDFE2F-4995-4868-952F-AE40C5776BC0}"/>
               </a:ext>
             </a:extLst>
           </p:cNvPr>
@@ -6199,7 +6735,7 @@
     </p:spTree>
     <p:extLst>
       <p:ext uri="{BB962C8B-B14F-4D97-AF65-F5344CB8AC3E}">
-        <p14:creationId xmlns:p14="http://schemas.microsoft.com/office/powerpoint/2010/main" val="1654548250"/>
+        <p14:creationId xmlns:p14="http://schemas.microsoft.com/office/powerpoint/2010/main" val="1980704343"/>
       </p:ext>
     </p:extLst>
   </p:cSld>
@@ -6230,7 +6766,7 @@
           <p:cNvPr id="1" name="">
             <a:extLst xmlns:a="http://schemas.openxmlformats.org/drawingml/2006/main">
               <a:ext uri="{FF2B5EF4-FFF2-40B4-BE49-F238E27FC236}">
-                <a16:creationId xmlns:a16="http://schemas.microsoft.com/office/drawing/2014/main" id="{B3544F32-411C-49CA-B183-CE74C51E296B}"/>
+                <a16:creationId xmlns:a16="http://schemas.microsoft.com/office/drawing/2014/main" id="{ED72F51B-7EEA-43C3-8BED-F61DD66285F4}"/>
               </a:ext>
             </a:extLst>
           </p:cNvPr>
@@ -6280,7 +6816,7 @@
           <p:cNvPr id="2" name="">
             <a:extLst xmlns:a="http://schemas.openxmlformats.org/drawingml/2006/main">
               <a:ext uri="{FF2B5EF4-FFF2-40B4-BE49-F238E27FC236}">
-                <a16:creationId xmlns:a16="http://schemas.microsoft.com/office/drawing/2014/main" id="{AA837AD3-F86E-41F7-948D-628DAF02C47B}"/>
+                <a16:creationId xmlns:a16="http://schemas.microsoft.com/office/drawing/2014/main" id="{321ED5B3-ED71-4FC4-8B04-68D2EDC92328}"/>
               </a:ext>
             </a:extLst>
           </p:cNvPr>
@@ -6330,7 +6866,7 @@
           <p:cNvPr id="3" name="">
             <a:extLst xmlns:a="http://schemas.openxmlformats.org/drawingml/2006/main">
               <a:ext uri="{FF2B5EF4-FFF2-40B4-BE49-F238E27FC236}">
-                <a16:creationId xmlns:a16="http://schemas.microsoft.com/office/drawing/2014/main" id="{DB9132EF-19A5-4660-A44F-2734226368BB}"/>
+                <a16:creationId xmlns:a16="http://schemas.microsoft.com/office/drawing/2014/main" id="{B51D9F7F-08F0-4F2A-83F7-5435D2513145}"/>
               </a:ext>
             </a:extLst>
           </p:cNvPr>
@@ -6365,7 +6901,7 @@
           <p:nvPr/>
         </p:nvPicPr>
         <p:blipFill>
-          <a:blip xmlns:r="http://schemas.openxmlformats.org/officeDocument/2006/relationships" xmlns:a="http://schemas.openxmlformats.org/drawingml/2006/main" r:embed="Rc8a51b44b08d4a43"/>
+          <a:blip xmlns:r="http://schemas.openxmlformats.org/officeDocument/2006/relationships" xmlns:a="http://schemas.openxmlformats.org/drawingml/2006/main" r:embed="R1e4d54e9d3964b7e"/>
           <a:stretch xmlns:a="http://schemas.openxmlformats.org/drawingml/2006/main"/>
         </p:blipFill>
         <p:spPr>
@@ -6383,7 +6919,7 @@
           <p:cNvPr id="5" name="">
             <a:extLst xmlns:a="http://schemas.openxmlformats.org/drawingml/2006/main">
               <a:ext uri="{FF2B5EF4-FFF2-40B4-BE49-F238E27FC236}">
-                <a16:creationId xmlns:a16="http://schemas.microsoft.com/office/drawing/2014/main" id="{FA293B3F-B35D-48D9-AB71-CCE58CAD0FF0}"/>
+                <a16:creationId xmlns:a16="http://schemas.microsoft.com/office/drawing/2014/main" id="{435B7621-DAC7-4081-B785-4CFBAD41FBE0}"/>
               </a:ext>
             </a:extLst>
           </p:cNvPr>
@@ -6433,7 +6969,7 @@
           <p:cNvPr id="6" name="">
             <a:extLst xmlns:a="http://schemas.openxmlformats.org/drawingml/2006/main">
               <a:ext uri="{FF2B5EF4-FFF2-40B4-BE49-F238E27FC236}">
-                <a16:creationId xmlns:a16="http://schemas.microsoft.com/office/drawing/2014/main" id="{79CC46FE-534D-4604-8442-F48D94C33275}"/>
+                <a16:creationId xmlns:a16="http://schemas.microsoft.com/office/drawing/2014/main" id="{9FB37D3E-CF31-4706-888F-5B6BBDF8A78C}"/>
               </a:ext>
             </a:extLst>
           </p:cNvPr>
@@ -6481,7 +7017,7 @@
     </p:spTree>
     <p:extLst>
       <p:ext uri="{BB962C8B-B14F-4D97-AF65-F5344CB8AC3E}">
-        <p14:creationId xmlns:p14="http://schemas.microsoft.com/office/powerpoint/2010/main" val="1632104643"/>
+        <p14:creationId xmlns:p14="http://schemas.microsoft.com/office/powerpoint/2010/main" val="222730053"/>
       </p:ext>
     </p:extLst>
   </p:cSld>
@@ -6512,7 +7048,7 @@
           <p:cNvPr id="1" name="">
             <a:extLst xmlns:a="http://schemas.openxmlformats.org/drawingml/2006/main">
               <a:ext uri="{FF2B5EF4-FFF2-40B4-BE49-F238E27FC236}">
-                <a16:creationId xmlns:a16="http://schemas.microsoft.com/office/drawing/2014/main" id="{D8B3302A-9619-41B2-99B1-3124D53F2DE8}"/>
+                <a16:creationId xmlns:a16="http://schemas.microsoft.com/office/drawing/2014/main" id="{4FEED3E7-AFFA-4E94-B616-E9C09C2E2965}"/>
               </a:ext>
             </a:extLst>
           </p:cNvPr>
@@ -6562,7 +7098,7 @@
           <p:cNvPr id="2" name="">
             <a:extLst xmlns:a="http://schemas.openxmlformats.org/drawingml/2006/main">
               <a:ext uri="{FF2B5EF4-FFF2-40B4-BE49-F238E27FC236}">
-                <a16:creationId xmlns:a16="http://schemas.microsoft.com/office/drawing/2014/main" id="{B371F908-B256-462C-8EF1-0FB500514CC5}"/>
+                <a16:creationId xmlns:a16="http://schemas.microsoft.com/office/drawing/2014/main" id="{BB65618C-967F-472E-A5DE-60E9D9B89800}"/>
               </a:ext>
             </a:extLst>
           </p:cNvPr>
@@ -6612,7 +7148,7 @@
           <p:cNvPr id="3" name="">
             <a:extLst xmlns:a="http://schemas.openxmlformats.org/drawingml/2006/main">
               <a:ext uri="{FF2B5EF4-FFF2-40B4-BE49-F238E27FC236}">
-                <a16:creationId xmlns:a16="http://schemas.microsoft.com/office/drawing/2014/main" id="{D70795A6-8104-4B6B-8D4B-ED40BB826353}"/>
+                <a16:creationId xmlns:a16="http://schemas.microsoft.com/office/drawing/2014/main" id="{42867275-D687-430C-AB49-CBB86B7A21A6}"/>
               </a:ext>
             </a:extLst>
           </p:cNvPr>
@@ -6647,7 +7183,7 @@
           <p:nvPr/>
         </p:nvPicPr>
         <p:blipFill>
-          <a:blip xmlns:r="http://schemas.openxmlformats.org/officeDocument/2006/relationships" xmlns:a="http://schemas.openxmlformats.org/drawingml/2006/main" r:embed="Rf5889f8fc48c4737"/>
+          <a:blip xmlns:r="http://schemas.openxmlformats.org/officeDocument/2006/relationships" xmlns:a="http://schemas.openxmlformats.org/drawingml/2006/main" r:embed="R3cca46e5e38f4451"/>
           <a:stretch xmlns:a="http://schemas.openxmlformats.org/drawingml/2006/main"/>
         </p:blipFill>
         <p:spPr>
@@ -6669,7 +7205,7 @@
           <p:nvPr/>
         </p:nvPicPr>
         <p:blipFill>
-          <a:blip xmlns:r="http://schemas.openxmlformats.org/officeDocument/2006/relationships" xmlns:a="http://schemas.openxmlformats.org/drawingml/2006/main" r:embed="R437dc80016fd4e7b"/>
+          <a:blip xmlns:r="http://schemas.openxmlformats.org/officeDocument/2006/relationships" xmlns:a="http://schemas.openxmlformats.org/drawingml/2006/main" r:embed="R6916902710fd42cf"/>
           <a:stretch xmlns:a="http://schemas.openxmlformats.org/drawingml/2006/main"/>
         </p:blipFill>
         <p:spPr>
@@ -6687,7 +7223,7 @@
           <p:cNvPr id="6" name="">
             <a:extLst xmlns:a="http://schemas.openxmlformats.org/drawingml/2006/main">
               <a:ext uri="{FF2B5EF4-FFF2-40B4-BE49-F238E27FC236}">
-                <a16:creationId xmlns:a16="http://schemas.microsoft.com/office/drawing/2014/main" id="{CFB9156B-8ED7-4548-AD4C-8F49586EC368}"/>
+                <a16:creationId xmlns:a16="http://schemas.microsoft.com/office/drawing/2014/main" id="{1EEA9D05-0E74-4878-9C5B-6F86DA7D5D9B}"/>
               </a:ext>
             </a:extLst>
           </p:cNvPr>
@@ -6735,7 +7271,7 @@
     </p:spTree>
     <p:extLst>
       <p:ext uri="{BB962C8B-B14F-4D97-AF65-F5344CB8AC3E}">
-        <p14:creationId xmlns:p14="http://schemas.microsoft.com/office/powerpoint/2010/main" val="1744376519"/>
+        <p14:creationId xmlns:p14="http://schemas.microsoft.com/office/powerpoint/2010/main" val="312915411"/>
       </p:ext>
     </p:extLst>
   </p:cSld>
@@ -6766,7 +7302,7 @@
           <p:cNvPr id="1" name="">
             <a:extLst xmlns:a="http://schemas.openxmlformats.org/drawingml/2006/main">
               <a:ext uri="{FF2B5EF4-FFF2-40B4-BE49-F238E27FC236}">
-                <a16:creationId xmlns:a16="http://schemas.microsoft.com/office/drawing/2014/main" id="{4C6214A6-0023-440E-8C98-03C719A0E8F9}"/>
+                <a16:creationId xmlns:a16="http://schemas.microsoft.com/office/drawing/2014/main" id="{31526E9B-1928-48CD-AF30-AB18D61F1492}"/>
               </a:ext>
             </a:extLst>
           </p:cNvPr>
@@ -6816,7 +7352,7 @@
           <p:cNvPr id="2" name="">
             <a:extLst xmlns:a="http://schemas.openxmlformats.org/drawingml/2006/main">
               <a:ext uri="{FF2B5EF4-FFF2-40B4-BE49-F238E27FC236}">
-                <a16:creationId xmlns:a16="http://schemas.microsoft.com/office/drawing/2014/main" id="{85BAE570-B4E0-4E2F-8684-656DB0B6A1F9}"/>
+                <a16:creationId xmlns:a16="http://schemas.microsoft.com/office/drawing/2014/main" id="{F061CD17-56DD-4DE5-B09C-38FDE06DF150}"/>
               </a:ext>
             </a:extLst>
           </p:cNvPr>
@@ -6866,7 +7402,7 @@
           <p:cNvPr id="3" name="">
             <a:extLst xmlns:a="http://schemas.openxmlformats.org/drawingml/2006/main">
               <a:ext uri="{FF2B5EF4-FFF2-40B4-BE49-F238E27FC236}">
-                <a16:creationId xmlns:a16="http://schemas.microsoft.com/office/drawing/2014/main" id="{611846D7-88A0-4F1D-A0F0-6E6A23416B17}"/>
+                <a16:creationId xmlns:a16="http://schemas.microsoft.com/office/drawing/2014/main" id="{5080F24A-A294-4BE0-B47D-8678FD28769E}"/>
               </a:ext>
             </a:extLst>
           </p:cNvPr>
@@ -6901,7 +7437,7 @@
           <p:nvPr/>
         </p:nvPicPr>
         <p:blipFill>
-          <a:blip xmlns:r="http://schemas.openxmlformats.org/officeDocument/2006/relationships" xmlns:a="http://schemas.openxmlformats.org/drawingml/2006/main" r:embed="R2cb59ebd9033478a"/>
+          <a:blip xmlns:r="http://schemas.openxmlformats.org/officeDocument/2006/relationships" xmlns:a="http://schemas.openxmlformats.org/drawingml/2006/main" r:embed="R9e82a44d8fb04334"/>
           <a:stretch xmlns:a="http://schemas.openxmlformats.org/drawingml/2006/main"/>
         </p:blipFill>
         <p:spPr>
@@ -6919,7 +7455,7 @@
           <p:cNvPr id="5" name="">
             <a:extLst xmlns:a="http://schemas.openxmlformats.org/drawingml/2006/main">
               <a:ext uri="{FF2B5EF4-FFF2-40B4-BE49-F238E27FC236}">
-                <a16:creationId xmlns:a16="http://schemas.microsoft.com/office/drawing/2014/main" id="{5E3D7641-1626-4DD1-8E6B-ABF002572600}"/>
+                <a16:creationId xmlns:a16="http://schemas.microsoft.com/office/drawing/2014/main" id="{9854CBB8-4034-4413-A12E-0B4B5D8AF208}"/>
               </a:ext>
             </a:extLst>
           </p:cNvPr>
@@ -6969,7 +7505,7 @@
           <p:cNvPr id="6" name="">
             <a:extLst xmlns:a="http://schemas.openxmlformats.org/drawingml/2006/main">
               <a:ext uri="{FF2B5EF4-FFF2-40B4-BE49-F238E27FC236}">
-                <a16:creationId xmlns:a16="http://schemas.microsoft.com/office/drawing/2014/main" id="{ADBA6CF6-8FB8-4405-AE04-422444E89621}"/>
+                <a16:creationId xmlns:a16="http://schemas.microsoft.com/office/drawing/2014/main" id="{BDD40949-E366-4340-9A6F-7571E7A437FC}"/>
               </a:ext>
             </a:extLst>
           </p:cNvPr>
@@ -7017,7 +7553,7 @@
     </p:spTree>
     <p:extLst>
       <p:ext uri="{BB962C8B-B14F-4D97-AF65-F5344CB8AC3E}">
-        <p14:creationId xmlns:p14="http://schemas.microsoft.com/office/powerpoint/2010/main" val="1629589890"/>
+        <p14:creationId xmlns:p14="http://schemas.microsoft.com/office/powerpoint/2010/main" val="1458283383"/>
       </p:ext>
     </p:extLst>
   </p:cSld>
@@ -7048,7 +7584,7 @@
           <p:cNvPr id="1" name="">
             <a:extLst xmlns:a="http://schemas.openxmlformats.org/drawingml/2006/main">
               <a:ext uri="{FF2B5EF4-FFF2-40B4-BE49-F238E27FC236}">
-                <a16:creationId xmlns:a16="http://schemas.microsoft.com/office/drawing/2014/main" id="{C8718E57-A1C6-420E-B7E4-E8C6CC972D59}"/>
+                <a16:creationId xmlns:a16="http://schemas.microsoft.com/office/drawing/2014/main" id="{42503439-6AF8-4144-A054-5DC0E55933AC}"/>
               </a:ext>
             </a:extLst>
           </p:cNvPr>
@@ -7098,7 +7634,7 @@
           <p:cNvPr id="2" name="">
             <a:extLst xmlns:a="http://schemas.openxmlformats.org/drawingml/2006/main">
               <a:ext uri="{FF2B5EF4-FFF2-40B4-BE49-F238E27FC236}">
-                <a16:creationId xmlns:a16="http://schemas.microsoft.com/office/drawing/2014/main" id="{84F20A69-3689-418F-9B02-96B749581240}"/>
+                <a16:creationId xmlns:a16="http://schemas.microsoft.com/office/drawing/2014/main" id="{A9C86ACA-CF45-472D-AB62-5AB25C825FDC}"/>
               </a:ext>
             </a:extLst>
           </p:cNvPr>
@@ -7148,7 +7684,7 @@
           <p:cNvPr id="3" name="">
             <a:extLst xmlns:a="http://schemas.openxmlformats.org/drawingml/2006/main">
               <a:ext uri="{FF2B5EF4-FFF2-40B4-BE49-F238E27FC236}">
-                <a16:creationId xmlns:a16="http://schemas.microsoft.com/office/drawing/2014/main" id="{406F7076-871C-4234-BFFB-51FB46A0E796}"/>
+                <a16:creationId xmlns:a16="http://schemas.microsoft.com/office/drawing/2014/main" id="{260ECC2D-D103-453E-A669-5A8683333767}"/>
               </a:ext>
             </a:extLst>
           </p:cNvPr>
@@ -7179,7 +7715,7 @@
           <p:cNvPr id="4" name="">
             <a:extLst xmlns:a="http://schemas.openxmlformats.org/drawingml/2006/main">
               <a:ext uri="{FF2B5EF4-FFF2-40B4-BE49-F238E27FC236}">
-                <a16:creationId xmlns:a16="http://schemas.microsoft.com/office/drawing/2014/main" id="{5FE9DFEB-788F-4760-B044-F95DAEA7C718}"/>
+                <a16:creationId xmlns:a16="http://schemas.microsoft.com/office/drawing/2014/main" id="{32FDE57C-5A88-40E6-8908-DFF802A9E82B}"/>
               </a:ext>
             </a:extLst>
           </p:cNvPr>
@@ -7229,7 +7765,7 @@
           <p:cNvPr id="5" name="">
             <a:extLst xmlns:a="http://schemas.openxmlformats.org/drawingml/2006/main">
               <a:ext uri="{FF2B5EF4-FFF2-40B4-BE49-F238E27FC236}">
-                <a16:creationId xmlns:a16="http://schemas.microsoft.com/office/drawing/2014/main" id="{7F3F3C6C-A0CC-47B8-8D80-74E24CC9EA26}"/>
+                <a16:creationId xmlns:a16="http://schemas.microsoft.com/office/drawing/2014/main" id="{D6E8D722-E0F4-4170-B83B-1F81793C3713}"/>
               </a:ext>
             </a:extLst>
           </p:cNvPr>
@@ -7279,7 +7815,7 @@
           <p:cNvPr id="6" name="">
             <a:extLst xmlns:a="http://schemas.openxmlformats.org/drawingml/2006/main">
               <a:ext uri="{FF2B5EF4-FFF2-40B4-BE49-F238E27FC236}">
-                <a16:creationId xmlns:a16="http://schemas.microsoft.com/office/drawing/2014/main" id="{ED43AE7B-F1EA-403E-9552-47DADDBD6594}"/>
+                <a16:creationId xmlns:a16="http://schemas.microsoft.com/office/drawing/2014/main" id="{3A16A609-52D3-474D-8092-E5BA8D1E07C3}"/>
               </a:ext>
             </a:extLst>
           </p:cNvPr>
@@ -7329,7 +7865,7 @@
           <p:cNvPr id="7" name="">
             <a:extLst xmlns:a="http://schemas.openxmlformats.org/drawingml/2006/main">
               <a:ext uri="{FF2B5EF4-FFF2-40B4-BE49-F238E27FC236}">
-                <a16:creationId xmlns:a16="http://schemas.microsoft.com/office/drawing/2014/main" id="{58297E14-09AF-49C5-AD4F-F9D8A3E1AD33}"/>
+                <a16:creationId xmlns:a16="http://schemas.microsoft.com/office/drawing/2014/main" id="{33FB4B06-59E9-4BEC-A52D-3D6C8BC4F52C}"/>
               </a:ext>
             </a:extLst>
           </p:cNvPr>
@@ -7379,7 +7915,7 @@
           <p:cNvPr id="8" name="">
             <a:extLst xmlns:a="http://schemas.openxmlformats.org/drawingml/2006/main">
               <a:ext uri="{FF2B5EF4-FFF2-40B4-BE49-F238E27FC236}">
-                <a16:creationId xmlns:a16="http://schemas.microsoft.com/office/drawing/2014/main" id="{684D977B-D40E-41BA-814C-C671219C3DC2}"/>
+                <a16:creationId xmlns:a16="http://schemas.microsoft.com/office/drawing/2014/main" id="{27A2BC6B-E11C-4E9B-A0D1-D6E61A79FC3E}"/>
               </a:ext>
             </a:extLst>
           </p:cNvPr>
@@ -7429,7 +7965,7 @@
           <p:cNvPr id="9" name="">
             <a:extLst xmlns:a="http://schemas.openxmlformats.org/drawingml/2006/main">
               <a:ext uri="{FF2B5EF4-FFF2-40B4-BE49-F238E27FC236}">
-                <a16:creationId xmlns:a16="http://schemas.microsoft.com/office/drawing/2014/main" id="{3F882801-270F-4C7A-ACE4-CAF9B8303B00}"/>
+                <a16:creationId xmlns:a16="http://schemas.microsoft.com/office/drawing/2014/main" id="{7E305870-BB2E-4082-86C2-E884A5C1936D}"/>
               </a:ext>
             </a:extLst>
           </p:cNvPr>
@@ -7479,7 +8015,7 @@
           <p:cNvPr id="10" name="">
             <a:extLst xmlns:a="http://schemas.openxmlformats.org/drawingml/2006/main">
               <a:ext uri="{FF2B5EF4-FFF2-40B4-BE49-F238E27FC236}">
-                <a16:creationId xmlns:a16="http://schemas.microsoft.com/office/drawing/2014/main" id="{5E18439B-52F7-47EA-98E5-A98A01E5C0BE}"/>
+                <a16:creationId xmlns:a16="http://schemas.microsoft.com/office/drawing/2014/main" id="{18942E21-A45B-4F0F-8A77-44081A523EC9}"/>
               </a:ext>
             </a:extLst>
           </p:cNvPr>
@@ -7529,7 +8065,7 @@
           <p:cNvPr id="11" name="">
             <a:extLst xmlns:a="http://schemas.openxmlformats.org/drawingml/2006/main">
               <a:ext uri="{FF2B5EF4-FFF2-40B4-BE49-F238E27FC236}">
-                <a16:creationId xmlns:a16="http://schemas.microsoft.com/office/drawing/2014/main" id="{2CCFA4B4-976E-4BE8-8FBC-E3B539AD239B}"/>
+                <a16:creationId xmlns:a16="http://schemas.microsoft.com/office/drawing/2014/main" id="{246DE046-A243-404D-9D41-D05216AC3C27}"/>
               </a:ext>
             </a:extLst>
           </p:cNvPr>
@@ -7579,7 +8115,7 @@
           <p:cNvPr id="12" name="">
             <a:extLst xmlns:a="http://schemas.openxmlformats.org/drawingml/2006/main">
               <a:ext uri="{FF2B5EF4-FFF2-40B4-BE49-F238E27FC236}">
-                <a16:creationId xmlns:a16="http://schemas.microsoft.com/office/drawing/2014/main" id="{0D4B1B60-4FB3-4A29-9A18-6B0B8D2D8866}"/>
+                <a16:creationId xmlns:a16="http://schemas.microsoft.com/office/drawing/2014/main" id="{7D7B55C1-EFAF-4F37-A42F-57610BA28B41}"/>
               </a:ext>
             </a:extLst>
           </p:cNvPr>
@@ -7627,7 +8163,7 @@
     </p:spTree>
     <p:extLst>
       <p:ext uri="{BB962C8B-B14F-4D97-AF65-F5344CB8AC3E}">
-        <p14:creationId xmlns:p14="http://schemas.microsoft.com/office/powerpoint/2010/main" val="501552947"/>
+        <p14:creationId xmlns:p14="http://schemas.microsoft.com/office/powerpoint/2010/main" val="854918231"/>
       </p:ext>
     </p:extLst>
   </p:cSld>
@@ -7658,7 +8194,7 @@
           <p:cNvPr id="1" name="">
             <a:extLst xmlns:a="http://schemas.openxmlformats.org/drawingml/2006/main">
               <a:ext uri="{FF2B5EF4-FFF2-40B4-BE49-F238E27FC236}">
-                <a16:creationId xmlns:a16="http://schemas.microsoft.com/office/drawing/2014/main" id="{87A72768-16BA-4DAF-A7C1-BD3E38895409}"/>
+                <a16:creationId xmlns:a16="http://schemas.microsoft.com/office/drawing/2014/main" id="{C1DF2860-9A6C-4C22-8058-1D5E86F80F62}"/>
               </a:ext>
             </a:extLst>
           </p:cNvPr>
@@ -7708,7 +8244,7 @@
           <p:cNvPr id="2" name="">
             <a:extLst xmlns:a="http://schemas.openxmlformats.org/drawingml/2006/main">
               <a:ext uri="{FF2B5EF4-FFF2-40B4-BE49-F238E27FC236}">
-                <a16:creationId xmlns:a16="http://schemas.microsoft.com/office/drawing/2014/main" id="{93B5966C-9487-4B04-88EE-D91DB7206F29}"/>
+                <a16:creationId xmlns:a16="http://schemas.microsoft.com/office/drawing/2014/main" id="{D0EF0B53-96AF-431B-87A4-80DEE0CCE49D}"/>
               </a:ext>
             </a:extLst>
           </p:cNvPr>
@@ -7758,7 +8294,7 @@
           <p:cNvPr id="3" name="">
             <a:extLst xmlns:a="http://schemas.openxmlformats.org/drawingml/2006/main">
               <a:ext uri="{FF2B5EF4-FFF2-40B4-BE49-F238E27FC236}">
-                <a16:creationId xmlns:a16="http://schemas.microsoft.com/office/drawing/2014/main" id="{97ACBE62-FE26-4692-B63B-65B3F4D8D4F4}"/>
+                <a16:creationId xmlns:a16="http://schemas.microsoft.com/office/drawing/2014/main" id="{1023CA16-245C-46B3-8AEF-9FD6D7E4CDC5}"/>
               </a:ext>
             </a:extLst>
           </p:cNvPr>
@@ -7789,7 +8325,7 @@
           <p:cNvPr id="4" name="">
             <a:extLst xmlns:a="http://schemas.openxmlformats.org/drawingml/2006/main">
               <a:ext uri="{FF2B5EF4-FFF2-40B4-BE49-F238E27FC236}">
-                <a16:creationId xmlns:a16="http://schemas.microsoft.com/office/drawing/2014/main" id="{3D1856B7-5E72-4937-99EB-0BF9D9745A36}"/>
+                <a16:creationId xmlns:a16="http://schemas.microsoft.com/office/drawing/2014/main" id="{4978EBCF-364B-4C5D-A1BD-EBACEAF1EAF0}"/>
               </a:ext>
             </a:extLst>
           </p:cNvPr>
@@ -7839,7 +8375,7 @@
           <p:cNvPr id="5" name="">
             <a:extLst xmlns:a="http://schemas.openxmlformats.org/drawingml/2006/main">
               <a:ext uri="{FF2B5EF4-FFF2-40B4-BE49-F238E27FC236}">
-                <a16:creationId xmlns:a16="http://schemas.microsoft.com/office/drawing/2014/main" id="{EFC75BF0-80C9-4E96-86C7-53B8527A302D}"/>
+                <a16:creationId xmlns:a16="http://schemas.microsoft.com/office/drawing/2014/main" id="{B418070B-7904-4855-8824-3A886736038A}"/>
               </a:ext>
             </a:extLst>
           </p:cNvPr>
@@ -7870,7 +8406,7 @@
           <p:cNvPr id="6" name="">
             <a:extLst xmlns:a="http://schemas.openxmlformats.org/drawingml/2006/main">
               <a:ext uri="{FF2B5EF4-FFF2-40B4-BE49-F238E27FC236}">
-                <a16:creationId xmlns:a16="http://schemas.microsoft.com/office/drawing/2014/main" id="{158E9EEA-D4CF-46AD-885A-5E5744FCF6EA}"/>
+                <a16:creationId xmlns:a16="http://schemas.microsoft.com/office/drawing/2014/main" id="{58BF3F91-8E34-4798-A064-8DE03E5261B9}"/>
               </a:ext>
             </a:extLst>
           </p:cNvPr>
@@ -7920,7 +8456,7 @@
           <p:cNvPr id="7" name="">
             <a:extLst xmlns:a="http://schemas.openxmlformats.org/drawingml/2006/main">
               <a:ext uri="{FF2B5EF4-FFF2-40B4-BE49-F238E27FC236}">
-                <a16:creationId xmlns:a16="http://schemas.microsoft.com/office/drawing/2014/main" id="{A42A2734-D768-42E8-A986-AD808D659AA8}"/>
+                <a16:creationId xmlns:a16="http://schemas.microsoft.com/office/drawing/2014/main" id="{449CC3F3-2088-486A-B8FF-DA75A4DD9B35}"/>
               </a:ext>
             </a:extLst>
           </p:cNvPr>
@@ -7968,7 +8504,7 @@
     </p:spTree>
     <p:extLst>
       <p:ext uri="{BB962C8B-B14F-4D97-AF65-F5344CB8AC3E}">
-        <p14:creationId xmlns:p14="http://schemas.microsoft.com/office/powerpoint/2010/main" val="1487414856"/>
+        <p14:creationId xmlns:p14="http://schemas.microsoft.com/office/powerpoint/2010/main" val="432250107"/>
       </p:ext>
     </p:extLst>
   </p:cSld>
@@ -7999,7 +8535,7 @@
           <p:cNvPr id="1" name="">
             <a:extLst xmlns:a="http://schemas.openxmlformats.org/drawingml/2006/main">
               <a:ext uri="{FF2B5EF4-FFF2-40B4-BE49-F238E27FC236}">
-                <a16:creationId xmlns:a16="http://schemas.microsoft.com/office/drawing/2014/main" id="{8FF44ADA-C81E-4DE1-86CB-5A74C38ADBB9}"/>
+                <a16:creationId xmlns:a16="http://schemas.microsoft.com/office/drawing/2014/main" id="{CBC4BA0E-07A6-4F16-B347-3896C01A3E80}"/>
               </a:ext>
             </a:extLst>
           </p:cNvPr>
@@ -8049,7 +8585,7 @@
           <p:cNvPr id="2" name="">
             <a:extLst xmlns:a="http://schemas.openxmlformats.org/drawingml/2006/main">
               <a:ext uri="{FF2B5EF4-FFF2-40B4-BE49-F238E27FC236}">
-                <a16:creationId xmlns:a16="http://schemas.microsoft.com/office/drawing/2014/main" id="{2C3A8A2E-9DBD-4B0D-A7BE-8E6B658E145E}"/>
+                <a16:creationId xmlns:a16="http://schemas.microsoft.com/office/drawing/2014/main" id="{A4CD531B-5430-4A59-A09C-4E7ACDC746AB}"/>
               </a:ext>
             </a:extLst>
           </p:cNvPr>
@@ -8099,7 +8635,7 @@
           <p:cNvPr id="3" name="">
             <a:extLst xmlns:a="http://schemas.openxmlformats.org/drawingml/2006/main">
               <a:ext uri="{FF2B5EF4-FFF2-40B4-BE49-F238E27FC236}">
-                <a16:creationId xmlns:a16="http://schemas.microsoft.com/office/drawing/2014/main" id="{60DFE17C-A77E-470B-B29F-0043C82022AE}"/>
+                <a16:creationId xmlns:a16="http://schemas.microsoft.com/office/drawing/2014/main" id="{A568F2E1-BF42-4D94-938B-50FD969430B0}"/>
               </a:ext>
             </a:extLst>
           </p:cNvPr>
@@ -8130,7 +8666,7 @@
           <p:cNvPr id="4" name="">
             <a:extLst xmlns:a="http://schemas.openxmlformats.org/drawingml/2006/main">
               <a:ext uri="{FF2B5EF4-FFF2-40B4-BE49-F238E27FC236}">
-                <a16:creationId xmlns:a16="http://schemas.microsoft.com/office/drawing/2014/main" id="{7016ACE7-9004-479E-AFF3-792D27480848}"/>
+                <a16:creationId xmlns:a16="http://schemas.microsoft.com/office/drawing/2014/main" id="{B873BB56-2211-4834-9A27-1F0BD273F402}"/>
               </a:ext>
             </a:extLst>
           </p:cNvPr>
@@ -8163,7 +8699,7 @@
           <p:cNvPr id="5" name="">
             <a:extLst xmlns:a="http://schemas.openxmlformats.org/drawingml/2006/main">
               <a:ext uri="{FF2B5EF4-FFF2-40B4-BE49-F238E27FC236}">
-                <a16:creationId xmlns:a16="http://schemas.microsoft.com/office/drawing/2014/main" id="{0303A4B3-43E3-4219-A82C-B9C984FDE5F2}"/>
+                <a16:creationId xmlns:a16="http://schemas.microsoft.com/office/drawing/2014/main" id="{D6DBBFDD-7365-4038-ABB3-8B22C915A2AB}"/>
               </a:ext>
             </a:extLst>
           </p:cNvPr>
@@ -8213,7 +8749,7 @@
           <p:cNvPr id="6" name="">
             <a:extLst xmlns:a="http://schemas.openxmlformats.org/drawingml/2006/main">
               <a:ext uri="{FF2B5EF4-FFF2-40B4-BE49-F238E27FC236}">
-                <a16:creationId xmlns:a16="http://schemas.microsoft.com/office/drawing/2014/main" id="{A4204E7E-4FBC-4980-9421-6EF772AA709C}"/>
+                <a16:creationId xmlns:a16="http://schemas.microsoft.com/office/drawing/2014/main" id="{5B322A78-5610-473D-83C3-48C3BBCD2B09}"/>
               </a:ext>
             </a:extLst>
           </p:cNvPr>
@@ -8263,7 +8799,7 @@
           <p:cNvPr id="7" name="">
             <a:extLst xmlns:a="http://schemas.openxmlformats.org/drawingml/2006/main">
               <a:ext uri="{FF2B5EF4-FFF2-40B4-BE49-F238E27FC236}">
-                <a16:creationId xmlns:a16="http://schemas.microsoft.com/office/drawing/2014/main" id="{1CC24F79-587D-46E2-8EC6-7A29522A9369}"/>
+                <a16:creationId xmlns:a16="http://schemas.microsoft.com/office/drawing/2014/main" id="{B68CE6D2-8024-4D27-B6B1-79C2EA76E9DF}"/>
               </a:ext>
             </a:extLst>
           </p:cNvPr>
@@ -8313,7 +8849,7 @@
           <p:cNvPr id="8" name="">
             <a:extLst xmlns:a="http://schemas.openxmlformats.org/drawingml/2006/main">
               <a:ext uri="{FF2B5EF4-FFF2-40B4-BE49-F238E27FC236}">
-                <a16:creationId xmlns:a16="http://schemas.microsoft.com/office/drawing/2014/main" id="{549C43F5-61B5-40CE-82DE-A595D6311F78}"/>
+                <a16:creationId xmlns:a16="http://schemas.microsoft.com/office/drawing/2014/main" id="{67500080-6EB3-49D1-9DFE-9D4FE39E66DA}"/>
               </a:ext>
             </a:extLst>
           </p:cNvPr>
@@ -8346,7 +8882,7 @@
           <p:cNvPr id="9" name="">
             <a:extLst xmlns:a="http://schemas.openxmlformats.org/drawingml/2006/main">
               <a:ext uri="{FF2B5EF4-FFF2-40B4-BE49-F238E27FC236}">
-                <a16:creationId xmlns:a16="http://schemas.microsoft.com/office/drawing/2014/main" id="{51020638-AF39-4068-93EC-62D4D95BD5D3}"/>
+                <a16:creationId xmlns:a16="http://schemas.microsoft.com/office/drawing/2014/main" id="{188D230A-A601-435B-880C-B067460CCA16}"/>
               </a:ext>
             </a:extLst>
           </p:cNvPr>
@@ -8396,7 +8932,7 @@
           <p:cNvPr id="10" name="">
             <a:extLst xmlns:a="http://schemas.openxmlformats.org/drawingml/2006/main">
               <a:ext uri="{FF2B5EF4-FFF2-40B4-BE49-F238E27FC236}">
-                <a16:creationId xmlns:a16="http://schemas.microsoft.com/office/drawing/2014/main" id="{B5471F5C-44CD-4245-90C8-540AEFBD0774}"/>
+                <a16:creationId xmlns:a16="http://schemas.microsoft.com/office/drawing/2014/main" id="{EAAA249D-780D-4EA1-9496-CB9988E0A3CB}"/>
               </a:ext>
             </a:extLst>
           </p:cNvPr>
@@ -8446,7 +8982,7 @@
           <p:cNvPr id="11" name="">
             <a:extLst xmlns:a="http://schemas.openxmlformats.org/drawingml/2006/main">
               <a:ext uri="{FF2B5EF4-FFF2-40B4-BE49-F238E27FC236}">
-                <a16:creationId xmlns:a16="http://schemas.microsoft.com/office/drawing/2014/main" id="{4E13CA4D-34E2-4223-909D-38C0E071FB45}"/>
+                <a16:creationId xmlns:a16="http://schemas.microsoft.com/office/drawing/2014/main" id="{8FDF15AE-E9FB-4DB2-9167-795ACD557CD3}"/>
               </a:ext>
             </a:extLst>
           </p:cNvPr>
@@ -8496,7 +9032,7 @@
           <p:cNvPr id="12" name="">
             <a:extLst xmlns:a="http://schemas.openxmlformats.org/drawingml/2006/main">
               <a:ext uri="{FF2B5EF4-FFF2-40B4-BE49-F238E27FC236}">
-                <a16:creationId xmlns:a16="http://schemas.microsoft.com/office/drawing/2014/main" id="{A4CED986-2B53-44FD-B38C-505A7091046C}"/>
+                <a16:creationId xmlns:a16="http://schemas.microsoft.com/office/drawing/2014/main" id="{40DBC703-F4D3-43D2-9382-4D09CE5AB13B}"/>
               </a:ext>
             </a:extLst>
           </p:cNvPr>
@@ -8529,7 +9065,7 @@
           <p:cNvPr id="13" name="">
             <a:extLst xmlns:a="http://schemas.openxmlformats.org/drawingml/2006/main">
               <a:ext uri="{FF2B5EF4-FFF2-40B4-BE49-F238E27FC236}">
-                <a16:creationId xmlns:a16="http://schemas.microsoft.com/office/drawing/2014/main" id="{4B8440AD-5099-463D-BB3B-F1A26A9E742F}"/>
+                <a16:creationId xmlns:a16="http://schemas.microsoft.com/office/drawing/2014/main" id="{D387E0DB-D784-4BE0-9B41-D6195F2F42BD}"/>
               </a:ext>
             </a:extLst>
           </p:cNvPr>
@@ -8579,7 +9115,7 @@
           <p:cNvPr id="14" name="">
             <a:extLst xmlns:a="http://schemas.openxmlformats.org/drawingml/2006/main">
               <a:ext uri="{FF2B5EF4-FFF2-40B4-BE49-F238E27FC236}">
-                <a16:creationId xmlns:a16="http://schemas.microsoft.com/office/drawing/2014/main" id="{1A85DCFC-B04D-43E2-8699-34BB557A1E36}"/>
+                <a16:creationId xmlns:a16="http://schemas.microsoft.com/office/drawing/2014/main" id="{B46847AD-88F1-4EA7-9F16-26E0EB4FF39B}"/>
               </a:ext>
             </a:extLst>
           </p:cNvPr>
@@ -8629,7 +9165,7 @@
           <p:cNvPr id="15" name="">
             <a:extLst xmlns:a="http://schemas.openxmlformats.org/drawingml/2006/main">
               <a:ext uri="{FF2B5EF4-FFF2-40B4-BE49-F238E27FC236}">
-                <a16:creationId xmlns:a16="http://schemas.microsoft.com/office/drawing/2014/main" id="{557BE171-8AC9-4C8A-B54A-7FE5EFCE3ED2}"/>
+                <a16:creationId xmlns:a16="http://schemas.microsoft.com/office/drawing/2014/main" id="{9AE69048-AEFA-43BA-B043-861E04992505}"/>
               </a:ext>
             </a:extLst>
           </p:cNvPr>
@@ -8679,7 +9215,7 @@
           <p:cNvPr id="16" name="">
             <a:extLst xmlns:a="http://schemas.openxmlformats.org/drawingml/2006/main">
               <a:ext uri="{FF2B5EF4-FFF2-40B4-BE49-F238E27FC236}">
-                <a16:creationId xmlns:a16="http://schemas.microsoft.com/office/drawing/2014/main" id="{5C11B46F-7147-43B2-84F3-485FBBD34EFC}"/>
+                <a16:creationId xmlns:a16="http://schemas.microsoft.com/office/drawing/2014/main" id="{DE02208A-BB7A-4D62-8F31-ABC13660ED65}"/>
               </a:ext>
             </a:extLst>
           </p:cNvPr>
@@ -8712,7 +9248,7 @@
           <p:cNvPr id="17" name="">
             <a:extLst xmlns:a="http://schemas.openxmlformats.org/drawingml/2006/main">
               <a:ext uri="{FF2B5EF4-FFF2-40B4-BE49-F238E27FC236}">
-                <a16:creationId xmlns:a16="http://schemas.microsoft.com/office/drawing/2014/main" id="{0A9B1CF4-C8F1-49DA-BA48-1B93700B2246}"/>
+                <a16:creationId xmlns:a16="http://schemas.microsoft.com/office/drawing/2014/main" id="{0A7B614C-BA3E-40FA-B2B3-862C207E36E0}"/>
               </a:ext>
             </a:extLst>
           </p:cNvPr>
@@ -8762,7 +9298,7 @@
           <p:cNvPr id="18" name="">
             <a:extLst xmlns:a="http://schemas.openxmlformats.org/drawingml/2006/main">
               <a:ext uri="{FF2B5EF4-FFF2-40B4-BE49-F238E27FC236}">
-                <a16:creationId xmlns:a16="http://schemas.microsoft.com/office/drawing/2014/main" id="{2B5AC19B-662A-45D7-BCE7-AB1179898C67}"/>
+                <a16:creationId xmlns:a16="http://schemas.microsoft.com/office/drawing/2014/main" id="{71D0DB1F-6512-4A4D-8806-A608285ED37B}"/>
               </a:ext>
             </a:extLst>
           </p:cNvPr>
@@ -8812,7 +9348,7 @@
           <p:cNvPr id="19" name="">
             <a:extLst xmlns:a="http://schemas.openxmlformats.org/drawingml/2006/main">
               <a:ext uri="{FF2B5EF4-FFF2-40B4-BE49-F238E27FC236}">
-                <a16:creationId xmlns:a16="http://schemas.microsoft.com/office/drawing/2014/main" id="{96BB9457-C140-4B4D-8E60-1E31A16236E3}"/>
+                <a16:creationId xmlns:a16="http://schemas.microsoft.com/office/drawing/2014/main" id="{5AC4CA38-76DF-4ED4-B373-3FCA15655C93}"/>
               </a:ext>
             </a:extLst>
           </p:cNvPr>
@@ -8862,7 +9398,7 @@
           <p:cNvPr id="20" name="">
             <a:extLst xmlns:a="http://schemas.openxmlformats.org/drawingml/2006/main">
               <a:ext uri="{FF2B5EF4-FFF2-40B4-BE49-F238E27FC236}">
-                <a16:creationId xmlns:a16="http://schemas.microsoft.com/office/drawing/2014/main" id="{015A7983-469C-49C5-9F71-80FEEF63BAF6}"/>
+                <a16:creationId xmlns:a16="http://schemas.microsoft.com/office/drawing/2014/main" id="{073ECB96-54F1-45CA-8C29-387350C1C500}"/>
               </a:ext>
             </a:extLst>
           </p:cNvPr>
@@ -8910,7 +9446,7 @@
     </p:spTree>
     <p:extLst>
       <p:ext uri="{BB962C8B-B14F-4D97-AF65-F5344CB8AC3E}">
-        <p14:creationId xmlns:p14="http://schemas.microsoft.com/office/powerpoint/2010/main" val="602702028"/>
+        <p14:creationId xmlns:p14="http://schemas.microsoft.com/office/powerpoint/2010/main" val="425738084"/>
       </p:ext>
     </p:extLst>
   </p:cSld>
@@ -8941,7 +9477,7 @@
           <p:cNvPr id="1" name="">
             <a:extLst xmlns:a="http://schemas.openxmlformats.org/drawingml/2006/main">
               <a:ext uri="{FF2B5EF4-FFF2-40B4-BE49-F238E27FC236}">
-                <a16:creationId xmlns:a16="http://schemas.microsoft.com/office/drawing/2014/main" id="{0D049490-8861-4F41-9281-726553F743CA}"/>
+                <a16:creationId xmlns:a16="http://schemas.microsoft.com/office/drawing/2014/main" id="{4D9A4E12-C928-4E32-89A4-18D1645F407C}"/>
               </a:ext>
             </a:extLst>
           </p:cNvPr>
@@ -8991,7 +9527,7 @@
           <p:cNvPr id="2" name="">
             <a:extLst xmlns:a="http://schemas.openxmlformats.org/drawingml/2006/main">
               <a:ext uri="{FF2B5EF4-FFF2-40B4-BE49-F238E27FC236}">
-                <a16:creationId xmlns:a16="http://schemas.microsoft.com/office/drawing/2014/main" id="{22F69975-C9A8-4AC1-A16B-1C681B9CCED2}"/>
+                <a16:creationId xmlns:a16="http://schemas.microsoft.com/office/drawing/2014/main" id="{16A1F738-D9DB-4291-A770-0AAC7EE7615F}"/>
               </a:ext>
             </a:extLst>
           </p:cNvPr>
@@ -9041,7 +9577,7 @@
           <p:cNvPr id="3" name="">
             <a:extLst xmlns:a="http://schemas.openxmlformats.org/drawingml/2006/main">
               <a:ext uri="{FF2B5EF4-FFF2-40B4-BE49-F238E27FC236}">
-                <a16:creationId xmlns:a16="http://schemas.microsoft.com/office/drawing/2014/main" id="{E07EFAB0-699D-4E0A-B3D0-934DDE090FC2}"/>
+                <a16:creationId xmlns:a16="http://schemas.microsoft.com/office/drawing/2014/main" id="{FBCBB1B8-1D82-4E81-9FD8-1C577F55607E}"/>
               </a:ext>
             </a:extLst>
           </p:cNvPr>
@@ -9072,7 +9608,7 @@
           <p:cNvPr id="4" name="">
             <a:extLst xmlns:a="http://schemas.openxmlformats.org/drawingml/2006/main">
               <a:ext uri="{FF2B5EF4-FFF2-40B4-BE49-F238E27FC236}">
-                <a16:creationId xmlns:a16="http://schemas.microsoft.com/office/drawing/2014/main" id="{581D741F-B03E-4545-A526-45B5AB350C63}"/>
+                <a16:creationId xmlns:a16="http://schemas.microsoft.com/office/drawing/2014/main" id="{87FE992E-17D7-4DAC-BB90-0A9C4C24A565}"/>
               </a:ext>
             </a:extLst>
           </p:cNvPr>
@@ -9122,7 +9658,7 @@
           <p:cNvPr id="5" name="">
             <a:extLst xmlns:a="http://schemas.openxmlformats.org/drawingml/2006/main">
               <a:ext uri="{FF2B5EF4-FFF2-40B4-BE49-F238E27FC236}">
-                <a16:creationId xmlns:a16="http://schemas.microsoft.com/office/drawing/2014/main" id="{E04B20A1-64C0-4512-BA1B-63B76BB49F09}"/>
+                <a16:creationId xmlns:a16="http://schemas.microsoft.com/office/drawing/2014/main" id="{A6BEDBEA-E5D8-4F68-906A-A344D974328D}"/>
               </a:ext>
             </a:extLst>
           </p:cNvPr>
@@ -9172,7 +9708,7 @@
           <p:cNvPr id="6" name="">
             <a:extLst xmlns:a="http://schemas.openxmlformats.org/drawingml/2006/main">
               <a:ext uri="{FF2B5EF4-FFF2-40B4-BE49-F238E27FC236}">
-                <a16:creationId xmlns:a16="http://schemas.microsoft.com/office/drawing/2014/main" id="{15C2AA6B-E140-45A6-90E3-FC83D8715E2C}"/>
+                <a16:creationId xmlns:a16="http://schemas.microsoft.com/office/drawing/2014/main" id="{12741C95-33C9-42A1-A6CE-E7ACBB5FB099}"/>
               </a:ext>
             </a:extLst>
           </p:cNvPr>
@@ -9222,7 +9758,7 @@
           <p:cNvPr id="7" name="">
             <a:extLst xmlns:a="http://schemas.openxmlformats.org/drawingml/2006/main">
               <a:ext uri="{FF2B5EF4-FFF2-40B4-BE49-F238E27FC236}">
-                <a16:creationId xmlns:a16="http://schemas.microsoft.com/office/drawing/2014/main" id="{B7AD6B99-E7F4-4A9F-AF3C-DD7F5704A319}"/>
+                <a16:creationId xmlns:a16="http://schemas.microsoft.com/office/drawing/2014/main" id="{4034728E-3D75-403E-AB20-2DB41CC58C46}"/>
               </a:ext>
             </a:extLst>
           </p:cNvPr>
@@ -9272,7 +9808,7 @@
           <p:cNvPr id="8" name="">
             <a:extLst xmlns:a="http://schemas.openxmlformats.org/drawingml/2006/main">
               <a:ext uri="{FF2B5EF4-FFF2-40B4-BE49-F238E27FC236}">
-                <a16:creationId xmlns:a16="http://schemas.microsoft.com/office/drawing/2014/main" id="{CD21420D-DDA9-4D84-A376-292775DAFB9A}"/>
+                <a16:creationId xmlns:a16="http://schemas.microsoft.com/office/drawing/2014/main" id="{6FD375CC-D490-45D7-AE6C-8EBA80F6CB43}"/>
               </a:ext>
             </a:extLst>
           </p:cNvPr>
@@ -9322,7 +9858,7 @@
           <p:cNvPr id="9" name="">
             <a:extLst xmlns:a="http://schemas.openxmlformats.org/drawingml/2006/main">
               <a:ext uri="{FF2B5EF4-FFF2-40B4-BE49-F238E27FC236}">
-                <a16:creationId xmlns:a16="http://schemas.microsoft.com/office/drawing/2014/main" id="{1A69B65D-B46C-49A9-8EC0-E71EC9CCABC1}"/>
+                <a16:creationId xmlns:a16="http://schemas.microsoft.com/office/drawing/2014/main" id="{C8AFF8B3-F5BD-4DDA-8EFD-DC6390A6F082}"/>
               </a:ext>
             </a:extLst>
           </p:cNvPr>
@@ -9372,7 +9908,7 @@
           <p:cNvPr id="10" name="">
             <a:extLst xmlns:a="http://schemas.openxmlformats.org/drawingml/2006/main">
               <a:ext uri="{FF2B5EF4-FFF2-40B4-BE49-F238E27FC236}">
-                <a16:creationId xmlns:a16="http://schemas.microsoft.com/office/drawing/2014/main" id="{6E3277D3-6135-45A7-8351-6A385B3455A0}"/>
+                <a16:creationId xmlns:a16="http://schemas.microsoft.com/office/drawing/2014/main" id="{675D1B13-D72A-490B-815A-10E8726D1E79}"/>
               </a:ext>
             </a:extLst>
           </p:cNvPr>
@@ -9405,7 +9941,7 @@
           <p:cNvPr id="11" name="">
             <a:extLst xmlns:a="http://schemas.openxmlformats.org/drawingml/2006/main">
               <a:ext uri="{FF2B5EF4-FFF2-40B4-BE49-F238E27FC236}">
-                <a16:creationId xmlns:a16="http://schemas.microsoft.com/office/drawing/2014/main" id="{DE1F8358-2545-4DD1-91DC-F1A749DB5790}"/>
+                <a16:creationId xmlns:a16="http://schemas.microsoft.com/office/drawing/2014/main" id="{850A78EE-37DE-4518-8B72-104FACEDAEFF}"/>
               </a:ext>
             </a:extLst>
           </p:cNvPr>
@@ -9438,7 +9974,7 @@
           <p:cNvPr id="12" name="">
             <a:extLst xmlns:a="http://schemas.openxmlformats.org/drawingml/2006/main">
               <a:ext uri="{FF2B5EF4-FFF2-40B4-BE49-F238E27FC236}">
-                <a16:creationId xmlns:a16="http://schemas.microsoft.com/office/drawing/2014/main" id="{86A64F77-6F7A-4CDA-8E5F-210CAD661F64}"/>
+                <a16:creationId xmlns:a16="http://schemas.microsoft.com/office/drawing/2014/main" id="{86862725-3CF8-4EB7-9238-0EFBC7865626}"/>
               </a:ext>
             </a:extLst>
           </p:cNvPr>
@@ -9471,7 +10007,7 @@
           <p:cNvPr id="13" name="">
             <a:extLst xmlns:a="http://schemas.openxmlformats.org/drawingml/2006/main">
               <a:ext uri="{FF2B5EF4-FFF2-40B4-BE49-F238E27FC236}">
-                <a16:creationId xmlns:a16="http://schemas.microsoft.com/office/drawing/2014/main" id="{897C788A-73E6-4F2F-BACD-C46250EF5D54}"/>
+                <a16:creationId xmlns:a16="http://schemas.microsoft.com/office/drawing/2014/main" id="{8863F6EE-09FB-4184-8208-0A0CA25D9FF1}"/>
               </a:ext>
             </a:extLst>
           </p:cNvPr>
@@ -9521,7 +10057,7 @@
           <p:cNvPr id="14" name="">
             <a:extLst xmlns:a="http://schemas.openxmlformats.org/drawingml/2006/main">
               <a:ext uri="{FF2B5EF4-FFF2-40B4-BE49-F238E27FC236}">
-                <a16:creationId xmlns:a16="http://schemas.microsoft.com/office/drawing/2014/main" id="{58CAFED2-3C24-450C-97F4-D0C434B9130F}"/>
+                <a16:creationId xmlns:a16="http://schemas.microsoft.com/office/drawing/2014/main" id="{36EEC72A-4684-47F0-91CC-110C3487D5EB}"/>
               </a:ext>
             </a:extLst>
           </p:cNvPr>
@@ -9571,7 +10107,7 @@
           <p:cNvPr id="15" name="">
             <a:extLst xmlns:a="http://schemas.openxmlformats.org/drawingml/2006/main">
               <a:ext uri="{FF2B5EF4-FFF2-40B4-BE49-F238E27FC236}">
-                <a16:creationId xmlns:a16="http://schemas.microsoft.com/office/drawing/2014/main" id="{DE04ED57-257E-4FA2-BFFC-7C1BCFFF02DC}"/>
+                <a16:creationId xmlns:a16="http://schemas.microsoft.com/office/drawing/2014/main" id="{C2025391-CF1F-48F8-BEEC-ADEAE875CA33}"/>
               </a:ext>
             </a:extLst>
           </p:cNvPr>
@@ -9621,7 +10157,7 @@
           <p:cNvPr id="16" name="">
             <a:extLst xmlns:a="http://schemas.openxmlformats.org/drawingml/2006/main">
               <a:ext uri="{FF2B5EF4-FFF2-40B4-BE49-F238E27FC236}">
-                <a16:creationId xmlns:a16="http://schemas.microsoft.com/office/drawing/2014/main" id="{F1528A3C-68CD-4C3D-B32D-B822CC68F52D}"/>
+                <a16:creationId xmlns:a16="http://schemas.microsoft.com/office/drawing/2014/main" id="{F13781B6-5B2D-4F9C-B0DD-345FF1273E5D}"/>
               </a:ext>
             </a:extLst>
           </p:cNvPr>
@@ -9669,7 +10205,7 @@
     </p:spTree>
     <p:extLst>
       <p:ext uri="{BB962C8B-B14F-4D97-AF65-F5344CB8AC3E}">
-        <p14:creationId xmlns:p14="http://schemas.microsoft.com/office/powerpoint/2010/main" val="1192435302"/>
+        <p14:creationId xmlns:p14="http://schemas.microsoft.com/office/powerpoint/2010/main" val="565694605"/>
       </p:ext>
     </p:extLst>
   </p:cSld>
@@ -9700,7 +10236,7 @@
           <p:cNvPr id="1" name="">
             <a:extLst xmlns:a="http://schemas.openxmlformats.org/drawingml/2006/main">
               <a:ext uri="{FF2B5EF4-FFF2-40B4-BE49-F238E27FC236}">
-                <a16:creationId xmlns:a16="http://schemas.microsoft.com/office/drawing/2014/main" id="{39EA3D16-2AD6-4064-94F7-D23290D0EE3B}"/>
+                <a16:creationId xmlns:a16="http://schemas.microsoft.com/office/drawing/2014/main" id="{D9EFFC45-F32B-4BD7-8C00-8D434861A296}"/>
               </a:ext>
             </a:extLst>
           </p:cNvPr>
@@ -9750,7 +10286,7 @@
           <p:cNvPr id="2" name="">
             <a:extLst xmlns:a="http://schemas.openxmlformats.org/drawingml/2006/main">
               <a:ext uri="{FF2B5EF4-FFF2-40B4-BE49-F238E27FC236}">
-                <a16:creationId xmlns:a16="http://schemas.microsoft.com/office/drawing/2014/main" id="{BEB5E871-86B5-4A88-B110-5734C7B30100}"/>
+                <a16:creationId xmlns:a16="http://schemas.microsoft.com/office/drawing/2014/main" id="{3054246D-7861-4E92-B901-1AE6B4D26ABE}"/>
               </a:ext>
             </a:extLst>
           </p:cNvPr>
@@ -9800,7 +10336,7 @@
           <p:cNvPr id="3" name="">
             <a:extLst xmlns:a="http://schemas.openxmlformats.org/drawingml/2006/main">
               <a:ext uri="{FF2B5EF4-FFF2-40B4-BE49-F238E27FC236}">
-                <a16:creationId xmlns:a16="http://schemas.microsoft.com/office/drawing/2014/main" id="{8399AFBB-C56C-42E9-A9CB-1BFEF2292D40}"/>
+                <a16:creationId xmlns:a16="http://schemas.microsoft.com/office/drawing/2014/main" id="{2531E7BB-BC94-4C57-BBF4-956B03EE247C}"/>
               </a:ext>
             </a:extLst>
           </p:cNvPr>
@@ -9835,7 +10371,7 @@
           <p:nvPr/>
         </p:nvPicPr>
         <p:blipFill>
-          <a:blip xmlns:r="http://schemas.openxmlformats.org/officeDocument/2006/relationships" xmlns:a="http://schemas.openxmlformats.org/drawingml/2006/main" r:embed="Red2c0b97260e46e8"/>
+          <a:blip xmlns:r="http://schemas.openxmlformats.org/officeDocument/2006/relationships" xmlns:a="http://schemas.openxmlformats.org/drawingml/2006/main" r:embed="R1f2294088a574f10"/>
           <a:stretch xmlns:a="http://schemas.openxmlformats.org/drawingml/2006/main"/>
         </p:blipFill>
         <p:spPr>
@@ -9853,7 +10389,7 @@
           <p:cNvPr id="5" name="">
             <a:extLst xmlns:a="http://schemas.openxmlformats.org/drawingml/2006/main">
               <a:ext uri="{FF2B5EF4-FFF2-40B4-BE49-F238E27FC236}">
-                <a16:creationId xmlns:a16="http://schemas.microsoft.com/office/drawing/2014/main" id="{79BBE7FC-269B-4671-842B-D074058AC32D}"/>
+                <a16:creationId xmlns:a16="http://schemas.microsoft.com/office/drawing/2014/main" id="{98E957A5-CA97-43EF-BCD9-57AB511A2587}"/>
               </a:ext>
             </a:extLst>
           </p:cNvPr>
@@ -9903,7 +10439,7 @@
           <p:cNvPr id="6" name="">
             <a:extLst xmlns:a="http://schemas.openxmlformats.org/drawingml/2006/main">
               <a:ext uri="{FF2B5EF4-FFF2-40B4-BE49-F238E27FC236}">
-                <a16:creationId xmlns:a16="http://schemas.microsoft.com/office/drawing/2014/main" id="{E9A5396C-0D25-48D3-B3B6-AEC12C308987}"/>
+                <a16:creationId xmlns:a16="http://schemas.microsoft.com/office/drawing/2014/main" id="{E913A0C4-D979-4B11-AFA5-69A7A9A06E75}"/>
               </a:ext>
             </a:extLst>
           </p:cNvPr>
@@ -9951,7 +10487,7 @@
     </p:spTree>
     <p:extLst>
       <p:ext uri="{BB962C8B-B14F-4D97-AF65-F5344CB8AC3E}">
-        <p14:creationId xmlns:p14="http://schemas.microsoft.com/office/powerpoint/2010/main" val="1215483237"/>
+        <p14:creationId xmlns:p14="http://schemas.microsoft.com/office/powerpoint/2010/main" val="1203105165"/>
       </p:ext>
     </p:extLst>
   </p:cSld>
@@ -9982,7 +10518,7 @@
           <p:cNvPr id="1" name="">
             <a:extLst xmlns:a="http://schemas.openxmlformats.org/drawingml/2006/main">
               <a:ext uri="{FF2B5EF4-FFF2-40B4-BE49-F238E27FC236}">
-                <a16:creationId xmlns:a16="http://schemas.microsoft.com/office/drawing/2014/main" id="{6BEC1E41-BD3E-48DA-BAD6-9806D8442B62}"/>
+                <a16:creationId xmlns:a16="http://schemas.microsoft.com/office/drawing/2014/main" id="{73FD0388-00B2-44BF-AB24-26C297B7A1E8}"/>
               </a:ext>
             </a:extLst>
           </p:cNvPr>
@@ -10032,7 +10568,7 @@
           <p:cNvPr id="2" name="">
             <a:extLst xmlns:a="http://schemas.openxmlformats.org/drawingml/2006/main">
               <a:ext uri="{FF2B5EF4-FFF2-40B4-BE49-F238E27FC236}">
-                <a16:creationId xmlns:a16="http://schemas.microsoft.com/office/drawing/2014/main" id="{293C5AFB-7DF1-4AF5-BBE6-F55DEC7CC324}"/>
+                <a16:creationId xmlns:a16="http://schemas.microsoft.com/office/drawing/2014/main" id="{4FC38F1A-6111-48E5-9864-E0ED2574C2D4}"/>
               </a:ext>
             </a:extLst>
           </p:cNvPr>
@@ -10082,7 +10618,7 @@
           <p:cNvPr id="3" name="">
             <a:extLst xmlns:a="http://schemas.openxmlformats.org/drawingml/2006/main">
               <a:ext uri="{FF2B5EF4-FFF2-40B4-BE49-F238E27FC236}">
-                <a16:creationId xmlns:a16="http://schemas.microsoft.com/office/drawing/2014/main" id="{EAEE2772-0636-4422-A853-774329A4CA4C}"/>
+                <a16:creationId xmlns:a16="http://schemas.microsoft.com/office/drawing/2014/main" id="{BCE33EE4-9CBD-44D4-8F7C-57E5E88C7D6B}"/>
               </a:ext>
             </a:extLst>
           </p:cNvPr>
@@ -10117,7 +10653,7 @@
           <p:nvPr/>
         </p:nvPicPr>
         <p:blipFill>
-          <a:blip xmlns:r="http://schemas.openxmlformats.org/officeDocument/2006/relationships" xmlns:a="http://schemas.openxmlformats.org/drawingml/2006/main" r:embed="R74f4f4a6725b48fd"/>
+          <a:blip xmlns:r="http://schemas.openxmlformats.org/officeDocument/2006/relationships" xmlns:a="http://schemas.openxmlformats.org/drawingml/2006/main" r:embed="R684addaa4b2b4307"/>
           <a:stretch xmlns:a="http://schemas.openxmlformats.org/drawingml/2006/main"/>
         </p:blipFill>
         <p:spPr>
@@ -10139,7 +10675,7 @@
           <p:nvPr/>
         </p:nvPicPr>
         <p:blipFill>
-          <a:blip xmlns:r="http://schemas.openxmlformats.org/officeDocument/2006/relationships" xmlns:a="http://schemas.openxmlformats.org/drawingml/2006/main" r:embed="R4979f97f487348b2"/>
+          <a:blip xmlns:r="http://schemas.openxmlformats.org/officeDocument/2006/relationships" xmlns:a="http://schemas.openxmlformats.org/drawingml/2006/main" r:embed="Rb808c91afa9e4288"/>
           <a:stretch xmlns:a="http://schemas.openxmlformats.org/drawingml/2006/main"/>
         </p:blipFill>
         <p:spPr>
@@ -10157,7 +10693,7 @@
           <p:cNvPr id="6" name="">
             <a:extLst xmlns:a="http://schemas.openxmlformats.org/drawingml/2006/main">
               <a:ext uri="{FF2B5EF4-FFF2-40B4-BE49-F238E27FC236}">
-                <a16:creationId xmlns:a16="http://schemas.microsoft.com/office/drawing/2014/main" id="{4D3A7121-8A9D-4405-826E-99EED9169DD8}"/>
+                <a16:creationId xmlns:a16="http://schemas.microsoft.com/office/drawing/2014/main" id="{787FA1E5-4B77-4C3D-A24F-1F6EE62AD95A}"/>
               </a:ext>
             </a:extLst>
           </p:cNvPr>
@@ -10205,7 +10741,7 @@
     </p:spTree>
     <p:extLst>
       <p:ext uri="{BB962C8B-B14F-4D97-AF65-F5344CB8AC3E}">
-        <p14:creationId xmlns:p14="http://schemas.microsoft.com/office/powerpoint/2010/main" val="1625061653"/>
+        <p14:creationId xmlns:p14="http://schemas.microsoft.com/office/powerpoint/2010/main" val="1927927895"/>
       </p:ext>
     </p:extLst>
   </p:cSld>
@@ -10236,7 +10772,7 @@
           <p:cNvPr id="1" name="">
             <a:extLst xmlns:a="http://schemas.openxmlformats.org/drawingml/2006/main">
               <a:ext uri="{FF2B5EF4-FFF2-40B4-BE49-F238E27FC236}">
-                <a16:creationId xmlns:a16="http://schemas.microsoft.com/office/drawing/2014/main" id="{CDB14283-20A8-4A5A-B8B9-AF38CAA4FE20}"/>
+                <a16:creationId xmlns:a16="http://schemas.microsoft.com/office/drawing/2014/main" id="{4AE726CF-30AD-4A69-80C3-293E0E83BC46}"/>
               </a:ext>
             </a:extLst>
           </p:cNvPr>
@@ -10286,7 +10822,7 @@
           <p:cNvPr id="2" name="">
             <a:extLst xmlns:a="http://schemas.openxmlformats.org/drawingml/2006/main">
               <a:ext uri="{FF2B5EF4-FFF2-40B4-BE49-F238E27FC236}">
-                <a16:creationId xmlns:a16="http://schemas.microsoft.com/office/drawing/2014/main" id="{11C968D0-B31C-4F51-B38D-D083104BD030}"/>
+                <a16:creationId xmlns:a16="http://schemas.microsoft.com/office/drawing/2014/main" id="{6B84ED7E-1F84-4C03-82A0-5BDB1D13530D}"/>
               </a:ext>
             </a:extLst>
           </p:cNvPr>
@@ -10336,7 +10872,7 @@
           <p:cNvPr id="3" name="">
             <a:extLst xmlns:a="http://schemas.openxmlformats.org/drawingml/2006/main">
               <a:ext uri="{FF2B5EF4-FFF2-40B4-BE49-F238E27FC236}">
-                <a16:creationId xmlns:a16="http://schemas.microsoft.com/office/drawing/2014/main" id="{26495EF2-8CAC-4A40-B8E5-91A2ADD0339C}"/>
+                <a16:creationId xmlns:a16="http://schemas.microsoft.com/office/drawing/2014/main" id="{F01AECB8-2309-4225-B643-C6D33EA290C7}"/>
               </a:ext>
             </a:extLst>
           </p:cNvPr>
@@ -10371,7 +10907,7 @@
           <p:nvPr/>
         </p:nvPicPr>
         <p:blipFill>
-          <a:blip xmlns:r="http://schemas.openxmlformats.org/officeDocument/2006/relationships" xmlns:a="http://schemas.openxmlformats.org/drawingml/2006/main" r:embed="Rdb6dda1638f9458e"/>
+          <a:blip xmlns:r="http://schemas.openxmlformats.org/officeDocument/2006/relationships" xmlns:a="http://schemas.openxmlformats.org/drawingml/2006/main" r:embed="Rd70cf3b1fadf42ed"/>
           <a:stretch xmlns:a="http://schemas.openxmlformats.org/drawingml/2006/main"/>
         </p:blipFill>
         <p:spPr>
@@ -10389,7 +10925,7 @@
           <p:cNvPr id="5" name="">
             <a:extLst xmlns:a="http://schemas.openxmlformats.org/drawingml/2006/main">
               <a:ext uri="{FF2B5EF4-FFF2-40B4-BE49-F238E27FC236}">
-                <a16:creationId xmlns:a16="http://schemas.microsoft.com/office/drawing/2014/main" id="{0BFBB584-6585-4EC1-B94F-1D3F937C5F84}"/>
+                <a16:creationId xmlns:a16="http://schemas.microsoft.com/office/drawing/2014/main" id="{226B9C9A-3994-4583-BDA5-6670B84E5BBD}"/>
               </a:ext>
             </a:extLst>
           </p:cNvPr>
@@ -10439,7 +10975,7 @@
           <p:cNvPr id="6" name="">
             <a:extLst xmlns:a="http://schemas.openxmlformats.org/drawingml/2006/main">
               <a:ext uri="{FF2B5EF4-FFF2-40B4-BE49-F238E27FC236}">
-                <a16:creationId xmlns:a16="http://schemas.microsoft.com/office/drawing/2014/main" id="{AD70BBBF-6960-45FC-B2A0-5B60BEC3C721}"/>
+                <a16:creationId xmlns:a16="http://schemas.microsoft.com/office/drawing/2014/main" id="{107B6D2E-7E37-4D3C-A051-D984A4C6D764}"/>
               </a:ext>
             </a:extLst>
           </p:cNvPr>
@@ -10487,7 +11023,7 @@
     </p:spTree>
     <p:extLst>
       <p:ext uri="{BB962C8B-B14F-4D97-AF65-F5344CB8AC3E}">
-        <p14:creationId xmlns:p14="http://schemas.microsoft.com/office/powerpoint/2010/main" val="1125210070"/>
+        <p14:creationId xmlns:p14="http://schemas.microsoft.com/office/powerpoint/2010/main" val="1512654558"/>
       </p:ext>
     </p:extLst>
   </p:cSld>
@@ -10518,7 +11054,7 @@
           <p:cNvPr id="1" name="">
             <a:extLst xmlns:a="http://schemas.openxmlformats.org/drawingml/2006/main">
               <a:ext uri="{FF2B5EF4-FFF2-40B4-BE49-F238E27FC236}">
-                <a16:creationId xmlns:a16="http://schemas.microsoft.com/office/drawing/2014/main" id="{C3FEE63E-0C86-45E1-A061-0AE24EAD89D5}"/>
+                <a16:creationId xmlns:a16="http://schemas.microsoft.com/office/drawing/2014/main" id="{3CABB3BF-0121-415E-A731-D97664DF1CAE}"/>
               </a:ext>
             </a:extLst>
           </p:cNvPr>
@@ -10568,7 +11104,7 @@
           <p:cNvPr id="2" name="">
             <a:extLst xmlns:a="http://schemas.openxmlformats.org/drawingml/2006/main">
               <a:ext uri="{FF2B5EF4-FFF2-40B4-BE49-F238E27FC236}">
-                <a16:creationId xmlns:a16="http://schemas.microsoft.com/office/drawing/2014/main" id="{1B3288CD-8B87-441E-846A-41A7E732529C}"/>
+                <a16:creationId xmlns:a16="http://schemas.microsoft.com/office/drawing/2014/main" id="{F5BF59D3-9AFA-4F2A-AA51-83FED8829DCD}"/>
               </a:ext>
             </a:extLst>
           </p:cNvPr>
@@ -10618,7 +11154,7 @@
           <p:cNvPr id="3" name="">
             <a:extLst xmlns:a="http://schemas.openxmlformats.org/drawingml/2006/main">
               <a:ext uri="{FF2B5EF4-FFF2-40B4-BE49-F238E27FC236}">
-                <a16:creationId xmlns:a16="http://schemas.microsoft.com/office/drawing/2014/main" id="{63D9984A-DD3E-4D28-B171-25E2BBDD6C05}"/>
+                <a16:creationId xmlns:a16="http://schemas.microsoft.com/office/drawing/2014/main" id="{E93A0015-97EA-4F58-B685-5E4A67882A1B}"/>
               </a:ext>
             </a:extLst>
           </p:cNvPr>
@@ -10649,7 +11185,7 @@
           <p:cNvPr id="4" name="">
             <a:extLst xmlns:a="http://schemas.openxmlformats.org/drawingml/2006/main">
               <a:ext uri="{FF2B5EF4-FFF2-40B4-BE49-F238E27FC236}">
-                <a16:creationId xmlns:a16="http://schemas.microsoft.com/office/drawing/2014/main" id="{E12C4FE8-1D26-491C-9D62-A560DA264D94}"/>
+                <a16:creationId xmlns:a16="http://schemas.microsoft.com/office/drawing/2014/main" id="{7F44E798-F6AD-4019-9939-F9FD32324B75}"/>
               </a:ext>
             </a:extLst>
           </p:cNvPr>
@@ -10699,7 +11235,7 @@
           <p:cNvPr id="5" name="">
             <a:extLst xmlns:a="http://schemas.openxmlformats.org/drawingml/2006/main">
               <a:ext uri="{FF2B5EF4-FFF2-40B4-BE49-F238E27FC236}">
-                <a16:creationId xmlns:a16="http://schemas.microsoft.com/office/drawing/2014/main" id="{A2DAD506-04BA-47A1-B368-294159C30319}"/>
+                <a16:creationId xmlns:a16="http://schemas.microsoft.com/office/drawing/2014/main" id="{F2C1C8E4-E07C-4E7E-A982-766F160D0404}"/>
               </a:ext>
             </a:extLst>
           </p:cNvPr>
@@ -10749,7 +11285,7 @@
           <p:cNvPr id="6" name="">
             <a:extLst xmlns:a="http://schemas.openxmlformats.org/drawingml/2006/main">
               <a:ext uri="{FF2B5EF4-FFF2-40B4-BE49-F238E27FC236}">
-                <a16:creationId xmlns:a16="http://schemas.microsoft.com/office/drawing/2014/main" id="{3D1425B2-E5EC-4BED-9771-C826108FB28E}"/>
+                <a16:creationId xmlns:a16="http://schemas.microsoft.com/office/drawing/2014/main" id="{5F7879A0-40D9-44D0-983D-34F616C93D50}"/>
               </a:ext>
             </a:extLst>
           </p:cNvPr>
@@ -10799,7 +11335,7 @@
           <p:cNvPr id="7" name="">
             <a:extLst xmlns:a="http://schemas.openxmlformats.org/drawingml/2006/main">
               <a:ext uri="{FF2B5EF4-FFF2-40B4-BE49-F238E27FC236}">
-                <a16:creationId xmlns:a16="http://schemas.microsoft.com/office/drawing/2014/main" id="{C0F3F487-22B1-4B74-81B3-131F479BA47E}"/>
+                <a16:creationId xmlns:a16="http://schemas.microsoft.com/office/drawing/2014/main" id="{E854EBE8-5B98-4F08-BA58-0A3F471DF2EB}"/>
               </a:ext>
             </a:extLst>
           </p:cNvPr>
@@ -10849,7 +11385,7 @@
           <p:cNvPr id="8" name="">
             <a:extLst xmlns:a="http://schemas.openxmlformats.org/drawingml/2006/main">
               <a:ext uri="{FF2B5EF4-FFF2-40B4-BE49-F238E27FC236}">
-                <a16:creationId xmlns:a16="http://schemas.microsoft.com/office/drawing/2014/main" id="{6BF52F7D-1CB4-4CBC-9F4B-75A863EC92B7}"/>
+                <a16:creationId xmlns:a16="http://schemas.microsoft.com/office/drawing/2014/main" id="{EAA9297D-5E1C-4127-9C95-8D9B3EF1E463}"/>
               </a:ext>
             </a:extLst>
           </p:cNvPr>
@@ -10899,7 +11435,7 @@
           <p:cNvPr id="9" name="">
             <a:extLst xmlns:a="http://schemas.openxmlformats.org/drawingml/2006/main">
               <a:ext uri="{FF2B5EF4-FFF2-40B4-BE49-F238E27FC236}">
-                <a16:creationId xmlns:a16="http://schemas.microsoft.com/office/drawing/2014/main" id="{D912C38F-7931-4C6B-AF29-65B956041582}"/>
+                <a16:creationId xmlns:a16="http://schemas.microsoft.com/office/drawing/2014/main" id="{A2DA713A-1F17-449A-9C7A-97835646EAEC}"/>
               </a:ext>
             </a:extLst>
           </p:cNvPr>
@@ -10949,7 +11485,7 @@
           <p:cNvPr id="10" name="">
             <a:extLst xmlns:a="http://schemas.openxmlformats.org/drawingml/2006/main">
               <a:ext uri="{FF2B5EF4-FFF2-40B4-BE49-F238E27FC236}">
-                <a16:creationId xmlns:a16="http://schemas.microsoft.com/office/drawing/2014/main" id="{8148B945-06F9-48B6-B29E-90B87B58DD74}"/>
+                <a16:creationId xmlns:a16="http://schemas.microsoft.com/office/drawing/2014/main" id="{57A95553-9C9A-49C8-859B-40CB14CAD8BC}"/>
               </a:ext>
             </a:extLst>
           </p:cNvPr>
@@ -10999,7 +11535,7 @@
           <p:cNvPr id="11" name="">
             <a:extLst xmlns:a="http://schemas.openxmlformats.org/drawingml/2006/main">
               <a:ext uri="{FF2B5EF4-FFF2-40B4-BE49-F238E27FC236}">
-                <a16:creationId xmlns:a16="http://schemas.microsoft.com/office/drawing/2014/main" id="{2780FF0D-115C-4A45-9615-6585DD75649B}"/>
+                <a16:creationId xmlns:a16="http://schemas.microsoft.com/office/drawing/2014/main" id="{372112F6-D798-444D-BDA0-F3EB33967B2A}"/>
               </a:ext>
             </a:extLst>
           </p:cNvPr>
@@ -11049,7 +11585,7 @@
           <p:cNvPr id="12" name="">
             <a:extLst xmlns:a="http://schemas.openxmlformats.org/drawingml/2006/main">
               <a:ext uri="{FF2B5EF4-FFF2-40B4-BE49-F238E27FC236}">
-                <a16:creationId xmlns:a16="http://schemas.microsoft.com/office/drawing/2014/main" id="{7ECF0B8E-28C1-47FC-BD88-E5B7C4A43CE4}"/>
+                <a16:creationId xmlns:a16="http://schemas.microsoft.com/office/drawing/2014/main" id="{BC6D61D4-E805-4E05-8AA1-F74C9A87FAC6}"/>
               </a:ext>
             </a:extLst>
           </p:cNvPr>
@@ -11097,7 +11633,7 @@
     </p:spTree>
     <p:extLst>
       <p:ext uri="{BB962C8B-B14F-4D97-AF65-F5344CB8AC3E}">
-        <p14:creationId xmlns:p14="http://schemas.microsoft.com/office/powerpoint/2010/main" val="1968377516"/>
+        <p14:creationId xmlns:p14="http://schemas.microsoft.com/office/powerpoint/2010/main" val="256520782"/>
       </p:ext>
     </p:extLst>
   </p:cSld>
@@ -11128,7 +11664,7 @@
           <p:cNvPr id="1" name="">
             <a:extLst xmlns:a="http://schemas.openxmlformats.org/drawingml/2006/main">
               <a:ext uri="{FF2B5EF4-FFF2-40B4-BE49-F238E27FC236}">
-                <a16:creationId xmlns:a16="http://schemas.microsoft.com/office/drawing/2014/main" id="{F16DDCAA-B0AA-4EA6-8E39-D88037E535A0}"/>
+                <a16:creationId xmlns:a16="http://schemas.microsoft.com/office/drawing/2014/main" id="{539ECA5A-D3FD-4ECE-ADA5-7C31CDAC8D87}"/>
               </a:ext>
             </a:extLst>
           </p:cNvPr>
@@ -11178,7 +11714,7 @@
           <p:cNvPr id="2" name="">
             <a:extLst xmlns:a="http://schemas.openxmlformats.org/drawingml/2006/main">
               <a:ext uri="{FF2B5EF4-FFF2-40B4-BE49-F238E27FC236}">
-                <a16:creationId xmlns:a16="http://schemas.microsoft.com/office/drawing/2014/main" id="{414933C0-8A13-498C-9797-B703253D65A9}"/>
+                <a16:creationId xmlns:a16="http://schemas.microsoft.com/office/drawing/2014/main" id="{5AB100CF-CBC2-418B-A9C7-5A48DF701048}"/>
               </a:ext>
             </a:extLst>
           </p:cNvPr>
@@ -11228,7 +11764,7 @@
           <p:cNvPr id="3" name="">
             <a:extLst xmlns:a="http://schemas.openxmlformats.org/drawingml/2006/main">
               <a:ext uri="{FF2B5EF4-FFF2-40B4-BE49-F238E27FC236}">
-                <a16:creationId xmlns:a16="http://schemas.microsoft.com/office/drawing/2014/main" id="{2F972CD3-425C-4197-9DE7-DA322EB90CA5}"/>
+                <a16:creationId xmlns:a16="http://schemas.microsoft.com/office/drawing/2014/main" id="{0BE2B5F8-37FF-4205-BF7C-B03C4C686CCE}"/>
               </a:ext>
             </a:extLst>
           </p:cNvPr>
@@ -11259,7 +11795,7 @@
           <p:cNvPr id="4" name="">
             <a:extLst xmlns:a="http://schemas.openxmlformats.org/drawingml/2006/main">
               <a:ext uri="{FF2B5EF4-FFF2-40B4-BE49-F238E27FC236}">
-                <a16:creationId xmlns:a16="http://schemas.microsoft.com/office/drawing/2014/main" id="{928C4468-EDE2-40A7-ABB7-42652E7883DB}"/>
+                <a16:creationId xmlns:a16="http://schemas.microsoft.com/office/drawing/2014/main" id="{7E28AF09-A74D-4D72-BA15-AA0EED9A302D}"/>
               </a:ext>
             </a:extLst>
           </p:cNvPr>
@@ -11309,7 +11845,7 @@
           <p:cNvPr id="5" name="">
             <a:extLst xmlns:a="http://schemas.openxmlformats.org/drawingml/2006/main">
               <a:ext uri="{FF2B5EF4-FFF2-40B4-BE49-F238E27FC236}">
-                <a16:creationId xmlns:a16="http://schemas.microsoft.com/office/drawing/2014/main" id="{2593E4C9-26CE-4959-A2D5-CF1116F554FC}"/>
+                <a16:creationId xmlns:a16="http://schemas.microsoft.com/office/drawing/2014/main" id="{FAE4C8FA-6A63-4AFC-9EF4-0AC6AC41570B}"/>
               </a:ext>
             </a:extLst>
           </p:cNvPr>
@@ -11340,7 +11876,7 @@
           <p:cNvPr id="6" name="">
             <a:extLst xmlns:a="http://schemas.openxmlformats.org/drawingml/2006/main">
               <a:ext uri="{FF2B5EF4-FFF2-40B4-BE49-F238E27FC236}">
-                <a16:creationId xmlns:a16="http://schemas.microsoft.com/office/drawing/2014/main" id="{58A8F2E8-0A91-49E6-A66F-3CB4FC29221D}"/>
+                <a16:creationId xmlns:a16="http://schemas.microsoft.com/office/drawing/2014/main" id="{630AD91B-BF9A-493B-A460-3551C63C50E3}"/>
               </a:ext>
             </a:extLst>
           </p:cNvPr>
@@ -11390,7 +11926,7 @@
           <p:cNvPr id="7" name="">
             <a:extLst xmlns:a="http://schemas.openxmlformats.org/drawingml/2006/main">
               <a:ext uri="{FF2B5EF4-FFF2-40B4-BE49-F238E27FC236}">
-                <a16:creationId xmlns:a16="http://schemas.microsoft.com/office/drawing/2014/main" id="{DA800798-AAB4-444B-8F85-DEBC01AE08BE}"/>
+                <a16:creationId xmlns:a16="http://schemas.microsoft.com/office/drawing/2014/main" id="{0FD7B5FB-1B13-49B1-B645-2682C07EA205}"/>
               </a:ext>
             </a:extLst>
           </p:cNvPr>
@@ -11438,7 +11974,7 @@
     </p:spTree>
     <p:extLst>
       <p:ext uri="{BB962C8B-B14F-4D97-AF65-F5344CB8AC3E}">
-        <p14:creationId xmlns:p14="http://schemas.microsoft.com/office/powerpoint/2010/main" val="7418988"/>
+        <p14:creationId xmlns:p14="http://schemas.microsoft.com/office/powerpoint/2010/main" val="314139023"/>
       </p:ext>
     </p:extLst>
   </p:cSld>
@@ -11469,7 +12005,7 @@
           <p:cNvPr id="1" name="">
             <a:extLst xmlns:a="http://schemas.openxmlformats.org/drawingml/2006/main">
               <a:ext uri="{FF2B5EF4-FFF2-40B4-BE49-F238E27FC236}">
-                <a16:creationId xmlns:a16="http://schemas.microsoft.com/office/drawing/2014/main" id="{73A3BF8D-CD1A-4A31-8AF8-933F529EEE02}"/>
+                <a16:creationId xmlns:a16="http://schemas.microsoft.com/office/drawing/2014/main" id="{EEECC5C1-BE7D-4C42-BC29-DBD1AAB5A69C}"/>
               </a:ext>
             </a:extLst>
           </p:cNvPr>
@@ -11519,7 +12055,7 @@
           <p:cNvPr id="2" name="">
             <a:extLst xmlns:a="http://schemas.openxmlformats.org/drawingml/2006/main">
               <a:ext uri="{FF2B5EF4-FFF2-40B4-BE49-F238E27FC236}">
-                <a16:creationId xmlns:a16="http://schemas.microsoft.com/office/drawing/2014/main" id="{AE9393DE-7C02-4DF8-B50C-49B916B4079F}"/>
+                <a16:creationId xmlns:a16="http://schemas.microsoft.com/office/drawing/2014/main" id="{B5FCCD70-8265-44E1-AD16-6AF32F59ACF8}"/>
               </a:ext>
             </a:extLst>
           </p:cNvPr>
@@ -11569,7 +12105,7 @@
           <p:cNvPr id="3" name="">
             <a:extLst xmlns:a="http://schemas.openxmlformats.org/drawingml/2006/main">
               <a:ext uri="{FF2B5EF4-FFF2-40B4-BE49-F238E27FC236}">
-                <a16:creationId xmlns:a16="http://schemas.microsoft.com/office/drawing/2014/main" id="{6EBE5A27-91C2-4D7B-935B-E28B6183ED7E}"/>
+                <a16:creationId xmlns:a16="http://schemas.microsoft.com/office/drawing/2014/main" id="{F25EF054-E7E9-4B5E-B6CA-88A8688F542C}"/>
               </a:ext>
             </a:extLst>
           </p:cNvPr>
@@ -11600,7 +12136,7 @@
           <p:cNvPr id="4" name="">
             <a:extLst xmlns:a="http://schemas.openxmlformats.org/drawingml/2006/main">
               <a:ext uri="{FF2B5EF4-FFF2-40B4-BE49-F238E27FC236}">
-                <a16:creationId xmlns:a16="http://schemas.microsoft.com/office/drawing/2014/main" id="{6102E30F-5901-4BEC-8535-11687790754F}"/>
+                <a16:creationId xmlns:a16="http://schemas.microsoft.com/office/drawing/2014/main" id="{22ED6D2B-CC3A-43A2-8A4D-6341C4F1698C}"/>
               </a:ext>
             </a:extLst>
           </p:cNvPr>
@@ -11633,7 +12169,7 @@
           <p:cNvPr id="5" name="">
             <a:extLst xmlns:a="http://schemas.openxmlformats.org/drawingml/2006/main">
               <a:ext uri="{FF2B5EF4-FFF2-40B4-BE49-F238E27FC236}">
-                <a16:creationId xmlns:a16="http://schemas.microsoft.com/office/drawing/2014/main" id="{DCA7B3AB-8633-470B-96BE-2E0F3994C024}"/>
+                <a16:creationId xmlns:a16="http://schemas.microsoft.com/office/drawing/2014/main" id="{31D2AD61-1B55-42FA-9065-C8C288EFCE87}"/>
               </a:ext>
             </a:extLst>
           </p:cNvPr>
@@ -11683,7 +12219,7 @@
           <p:cNvPr id="6" name="">
             <a:extLst xmlns:a="http://schemas.openxmlformats.org/drawingml/2006/main">
               <a:ext uri="{FF2B5EF4-FFF2-40B4-BE49-F238E27FC236}">
-                <a16:creationId xmlns:a16="http://schemas.microsoft.com/office/drawing/2014/main" id="{8206F347-BD62-4523-BDF6-7298B4BB47C6}"/>
+                <a16:creationId xmlns:a16="http://schemas.microsoft.com/office/drawing/2014/main" id="{CB3914D4-0C45-496A-BCDC-E38B6A5841ED}"/>
               </a:ext>
             </a:extLst>
           </p:cNvPr>
@@ -11733,7 +12269,7 @@
           <p:cNvPr id="7" name="">
             <a:extLst xmlns:a="http://schemas.openxmlformats.org/drawingml/2006/main">
               <a:ext uri="{FF2B5EF4-FFF2-40B4-BE49-F238E27FC236}">
-                <a16:creationId xmlns:a16="http://schemas.microsoft.com/office/drawing/2014/main" id="{E3855A05-4B90-40AC-B009-6306CA112EA3}"/>
+                <a16:creationId xmlns:a16="http://schemas.microsoft.com/office/drawing/2014/main" id="{094E9D71-C81E-46E9-9069-B0277DFF5C02}"/>
               </a:ext>
             </a:extLst>
           </p:cNvPr>
@@ -11783,7 +12319,7 @@
           <p:cNvPr id="8" name="">
             <a:extLst xmlns:a="http://schemas.openxmlformats.org/drawingml/2006/main">
               <a:ext uri="{FF2B5EF4-FFF2-40B4-BE49-F238E27FC236}">
-                <a16:creationId xmlns:a16="http://schemas.microsoft.com/office/drawing/2014/main" id="{41653FDB-7595-403E-A56A-7F1B1FCCEACA}"/>
+                <a16:creationId xmlns:a16="http://schemas.microsoft.com/office/drawing/2014/main" id="{BCFD5651-4C0E-461C-B841-6CDA6EE6B6D7}"/>
               </a:ext>
             </a:extLst>
           </p:cNvPr>
@@ -11816,7 +12352,7 @@
           <p:cNvPr id="9" name="">
             <a:extLst xmlns:a="http://schemas.openxmlformats.org/drawingml/2006/main">
               <a:ext uri="{FF2B5EF4-FFF2-40B4-BE49-F238E27FC236}">
-                <a16:creationId xmlns:a16="http://schemas.microsoft.com/office/drawing/2014/main" id="{35031389-DCF8-46F9-8964-0E592CE8CF72}"/>
+                <a16:creationId xmlns:a16="http://schemas.microsoft.com/office/drawing/2014/main" id="{E8795E83-1D33-4C68-8C32-04D50D36273C}"/>
               </a:ext>
             </a:extLst>
           </p:cNvPr>
@@ -11866,7 +12402,7 @@
           <p:cNvPr id="10" name="">
             <a:extLst xmlns:a="http://schemas.openxmlformats.org/drawingml/2006/main">
               <a:ext uri="{FF2B5EF4-FFF2-40B4-BE49-F238E27FC236}">
-                <a16:creationId xmlns:a16="http://schemas.microsoft.com/office/drawing/2014/main" id="{209BDAEC-73A7-4685-BDF4-0A60437C7415}"/>
+                <a16:creationId xmlns:a16="http://schemas.microsoft.com/office/drawing/2014/main" id="{AA1C11B5-A51C-4BFC-A6AB-41187959A9D8}"/>
               </a:ext>
             </a:extLst>
           </p:cNvPr>
@@ -11916,7 +12452,7 @@
           <p:cNvPr id="11" name="">
             <a:extLst xmlns:a="http://schemas.openxmlformats.org/drawingml/2006/main">
               <a:ext uri="{FF2B5EF4-FFF2-40B4-BE49-F238E27FC236}">
-                <a16:creationId xmlns:a16="http://schemas.microsoft.com/office/drawing/2014/main" id="{36B77C03-FC74-408F-90B5-A36CB06F9739}"/>
+                <a16:creationId xmlns:a16="http://schemas.microsoft.com/office/drawing/2014/main" id="{EC777705-FE9B-4761-94AB-26CA7E47DC6D}"/>
               </a:ext>
             </a:extLst>
           </p:cNvPr>
@@ -11966,7 +12502,7 @@
           <p:cNvPr id="12" name="">
             <a:extLst xmlns:a="http://schemas.openxmlformats.org/drawingml/2006/main">
               <a:ext uri="{FF2B5EF4-FFF2-40B4-BE49-F238E27FC236}">
-                <a16:creationId xmlns:a16="http://schemas.microsoft.com/office/drawing/2014/main" id="{E577B038-BE38-4F6F-880E-068B25708BB9}"/>
+                <a16:creationId xmlns:a16="http://schemas.microsoft.com/office/drawing/2014/main" id="{270078FC-0D17-448F-B67D-CF0C2EF58A38}"/>
               </a:ext>
             </a:extLst>
           </p:cNvPr>
@@ -11999,7 +12535,7 @@
           <p:cNvPr id="13" name="">
             <a:extLst xmlns:a="http://schemas.openxmlformats.org/drawingml/2006/main">
               <a:ext uri="{FF2B5EF4-FFF2-40B4-BE49-F238E27FC236}">
-                <a16:creationId xmlns:a16="http://schemas.microsoft.com/office/drawing/2014/main" id="{606594F0-64BA-480E-812F-E45C5D7290ED}"/>
+                <a16:creationId xmlns:a16="http://schemas.microsoft.com/office/drawing/2014/main" id="{392D14AA-85EC-4BFB-ABA2-98734C55E75A}"/>
               </a:ext>
             </a:extLst>
           </p:cNvPr>
@@ -12049,7 +12585,7 @@
           <p:cNvPr id="14" name="">
             <a:extLst xmlns:a="http://schemas.openxmlformats.org/drawingml/2006/main">
               <a:ext uri="{FF2B5EF4-FFF2-40B4-BE49-F238E27FC236}">
-                <a16:creationId xmlns:a16="http://schemas.microsoft.com/office/drawing/2014/main" id="{9F4FC7B4-C1C3-4D90-A525-D6EA3647AE8A}"/>
+                <a16:creationId xmlns:a16="http://schemas.microsoft.com/office/drawing/2014/main" id="{6E955D60-4072-490D-8CE9-4A41A8B7BC9E}"/>
               </a:ext>
             </a:extLst>
           </p:cNvPr>
@@ -12099,7 +12635,7 @@
           <p:cNvPr id="15" name="">
             <a:extLst xmlns:a="http://schemas.openxmlformats.org/drawingml/2006/main">
               <a:ext uri="{FF2B5EF4-FFF2-40B4-BE49-F238E27FC236}">
-                <a16:creationId xmlns:a16="http://schemas.microsoft.com/office/drawing/2014/main" id="{988A4AE1-3F7C-49E0-9F13-0B6019EFE2BD}"/>
+                <a16:creationId xmlns:a16="http://schemas.microsoft.com/office/drawing/2014/main" id="{E14F6EF7-3C02-4E21-93C8-967616E22017}"/>
               </a:ext>
             </a:extLst>
           </p:cNvPr>
@@ -12149,7 +12685,7 @@
           <p:cNvPr id="16" name="">
             <a:extLst xmlns:a="http://schemas.openxmlformats.org/drawingml/2006/main">
               <a:ext uri="{FF2B5EF4-FFF2-40B4-BE49-F238E27FC236}">
-                <a16:creationId xmlns:a16="http://schemas.microsoft.com/office/drawing/2014/main" id="{9366B413-4F19-49D8-825D-A723742C6967}"/>
+                <a16:creationId xmlns:a16="http://schemas.microsoft.com/office/drawing/2014/main" id="{378BAC0E-81CC-4051-8C3C-3A4470DF24DA}"/>
               </a:ext>
             </a:extLst>
           </p:cNvPr>
@@ -12182,7 +12718,7 @@
           <p:cNvPr id="17" name="">
             <a:extLst xmlns:a="http://schemas.openxmlformats.org/drawingml/2006/main">
               <a:ext uri="{FF2B5EF4-FFF2-40B4-BE49-F238E27FC236}">
-                <a16:creationId xmlns:a16="http://schemas.microsoft.com/office/drawing/2014/main" id="{D377EBD0-5A44-495D-8FD1-23EDFBDD929D}"/>
+                <a16:creationId xmlns:a16="http://schemas.microsoft.com/office/drawing/2014/main" id="{993E2033-72C8-4979-A203-6D92B49F7310}"/>
               </a:ext>
             </a:extLst>
           </p:cNvPr>
@@ -12232,7 +12768,7 @@
           <p:cNvPr id="18" name="">
             <a:extLst xmlns:a="http://schemas.openxmlformats.org/drawingml/2006/main">
               <a:ext uri="{FF2B5EF4-FFF2-40B4-BE49-F238E27FC236}">
-                <a16:creationId xmlns:a16="http://schemas.microsoft.com/office/drawing/2014/main" id="{BF2C6606-9945-49A1-AEE6-A5B41CB6B580}"/>
+                <a16:creationId xmlns:a16="http://schemas.microsoft.com/office/drawing/2014/main" id="{47FD8333-24AA-47CC-B565-41C4203D81CC}"/>
               </a:ext>
             </a:extLst>
           </p:cNvPr>
@@ -12282,7 +12818,7 @@
           <p:cNvPr id="19" name="">
             <a:extLst xmlns:a="http://schemas.openxmlformats.org/drawingml/2006/main">
               <a:ext uri="{FF2B5EF4-FFF2-40B4-BE49-F238E27FC236}">
-                <a16:creationId xmlns:a16="http://schemas.microsoft.com/office/drawing/2014/main" id="{18EDBB62-B53A-4E9F-89D0-07D675172704}"/>
+                <a16:creationId xmlns:a16="http://schemas.microsoft.com/office/drawing/2014/main" id="{2DB840E5-04EA-4325-919A-B92065C37D07}"/>
               </a:ext>
             </a:extLst>
           </p:cNvPr>
@@ -12332,7 +12868,7 @@
           <p:cNvPr id="20" name="">
             <a:extLst xmlns:a="http://schemas.openxmlformats.org/drawingml/2006/main">
               <a:ext uri="{FF2B5EF4-FFF2-40B4-BE49-F238E27FC236}">
-                <a16:creationId xmlns:a16="http://schemas.microsoft.com/office/drawing/2014/main" id="{5C323FDD-2B39-424A-A711-4B3F37C9BE61}"/>
+                <a16:creationId xmlns:a16="http://schemas.microsoft.com/office/drawing/2014/main" id="{AC85894F-208A-46A1-9F0F-7B7D35F9D051}"/>
               </a:ext>
             </a:extLst>
           </p:cNvPr>
@@ -12380,7 +12916,7 @@
     </p:spTree>
     <p:extLst>
       <p:ext uri="{BB962C8B-B14F-4D97-AF65-F5344CB8AC3E}">
-        <p14:creationId xmlns:p14="http://schemas.microsoft.com/office/powerpoint/2010/main" val="1266431356"/>
+        <p14:creationId xmlns:p14="http://schemas.microsoft.com/office/powerpoint/2010/main" val="643742071"/>
       </p:ext>
     </p:extLst>
   </p:cSld>
@@ -12411,7 +12947,7 @@
           <p:cNvPr id="1" name="">
             <a:extLst xmlns:a="http://schemas.openxmlformats.org/drawingml/2006/main">
               <a:ext uri="{FF2B5EF4-FFF2-40B4-BE49-F238E27FC236}">
-                <a16:creationId xmlns:a16="http://schemas.microsoft.com/office/drawing/2014/main" id="{042E6AF5-00A5-4BDD-8F33-44FFDA9785C9}"/>
+                <a16:creationId xmlns:a16="http://schemas.microsoft.com/office/drawing/2014/main" id="{254E472E-849E-4B2D-A249-41A24E5D9C6B}"/>
               </a:ext>
             </a:extLst>
           </p:cNvPr>
@@ -12461,7 +12997,7 @@
           <p:cNvPr id="2" name="">
             <a:extLst xmlns:a="http://schemas.openxmlformats.org/drawingml/2006/main">
               <a:ext uri="{FF2B5EF4-FFF2-40B4-BE49-F238E27FC236}">
-                <a16:creationId xmlns:a16="http://schemas.microsoft.com/office/drawing/2014/main" id="{0BCA293E-534E-4340-A2A9-AB06EB2F8464}"/>
+                <a16:creationId xmlns:a16="http://schemas.microsoft.com/office/drawing/2014/main" id="{7F4A35FC-BCF1-4EF3-AE78-59B77F6BDD13}"/>
               </a:ext>
             </a:extLst>
           </p:cNvPr>
@@ -12511,7 +13047,7 @@
           <p:cNvPr id="3" name="">
             <a:extLst xmlns:a="http://schemas.openxmlformats.org/drawingml/2006/main">
               <a:ext uri="{FF2B5EF4-FFF2-40B4-BE49-F238E27FC236}">
-                <a16:creationId xmlns:a16="http://schemas.microsoft.com/office/drawing/2014/main" id="{88B62A8E-3A97-4CBC-9781-0DC50F52AA8F}"/>
+                <a16:creationId xmlns:a16="http://schemas.microsoft.com/office/drawing/2014/main" id="{EA87EE5D-7EAC-49E5-AF49-D8401AF8AE64}"/>
               </a:ext>
             </a:extLst>
           </p:cNvPr>
@@ -12546,7 +13082,7 @@
           <p:nvPr/>
         </p:nvPicPr>
         <p:blipFill>
-          <a:blip xmlns:r="http://schemas.openxmlformats.org/officeDocument/2006/relationships" xmlns:a="http://schemas.openxmlformats.org/drawingml/2006/main" r:embed="Rc9121b1acef14f1e"/>
+          <a:blip xmlns:r="http://schemas.openxmlformats.org/officeDocument/2006/relationships" xmlns:a="http://schemas.openxmlformats.org/drawingml/2006/main" r:embed="Rc6eb5ab0b8974c4f"/>
           <a:stretch xmlns:a="http://schemas.openxmlformats.org/drawingml/2006/main"/>
         </p:blipFill>
         <p:spPr>
@@ -12564,7 +13100,7 @@
           <p:cNvPr id="5" name="">
             <a:extLst xmlns:a="http://schemas.openxmlformats.org/drawingml/2006/main">
               <a:ext uri="{FF2B5EF4-FFF2-40B4-BE49-F238E27FC236}">
-                <a16:creationId xmlns:a16="http://schemas.microsoft.com/office/drawing/2014/main" id="{D927CA25-24BC-43C2-B8B3-24AAE7253141}"/>
+                <a16:creationId xmlns:a16="http://schemas.microsoft.com/office/drawing/2014/main" id="{50A5420D-3711-424F-B058-656C69543ADF}"/>
               </a:ext>
             </a:extLst>
           </p:cNvPr>
@@ -12614,7 +13150,7 @@
           <p:cNvPr id="6" name="">
             <a:extLst xmlns:a="http://schemas.openxmlformats.org/drawingml/2006/main">
               <a:ext uri="{FF2B5EF4-FFF2-40B4-BE49-F238E27FC236}">
-                <a16:creationId xmlns:a16="http://schemas.microsoft.com/office/drawing/2014/main" id="{B805B31D-85AB-43A3-9D34-21DC7845FF1C}"/>
+                <a16:creationId xmlns:a16="http://schemas.microsoft.com/office/drawing/2014/main" id="{C3D0FBA1-0D06-40B4-B762-20CFD9AAB317}"/>
               </a:ext>
             </a:extLst>
           </p:cNvPr>
@@ -12662,7 +13198,7 @@
     </p:spTree>
     <p:extLst>
       <p:ext uri="{BB962C8B-B14F-4D97-AF65-F5344CB8AC3E}">
-        <p14:creationId xmlns:p14="http://schemas.microsoft.com/office/powerpoint/2010/main" val="1327570951"/>
+        <p14:creationId xmlns:p14="http://schemas.microsoft.com/office/powerpoint/2010/main" val="1116991212"/>
       </p:ext>
     </p:extLst>
   </p:cSld>
@@ -12693,7 +13229,7 @@
           <p:cNvPr id="1" name="">
             <a:extLst xmlns:a="http://schemas.openxmlformats.org/drawingml/2006/main">
               <a:ext uri="{FF2B5EF4-FFF2-40B4-BE49-F238E27FC236}">
-                <a16:creationId xmlns:a16="http://schemas.microsoft.com/office/drawing/2014/main" id="{AFB2C253-6E66-411E-83EA-D5BF7AAE0541}"/>
+                <a16:creationId xmlns:a16="http://schemas.microsoft.com/office/drawing/2014/main" id="{71853458-E5A8-496D-AEFE-FB7FCB6CC4C6}"/>
               </a:ext>
             </a:extLst>
           </p:cNvPr>
@@ -12743,7 +13279,7 @@
           <p:cNvPr id="2" name="">
             <a:extLst xmlns:a="http://schemas.openxmlformats.org/drawingml/2006/main">
               <a:ext uri="{FF2B5EF4-FFF2-40B4-BE49-F238E27FC236}">
-                <a16:creationId xmlns:a16="http://schemas.microsoft.com/office/drawing/2014/main" id="{96F42C0B-84EB-48EF-AA1D-87649FEBA06F}"/>
+                <a16:creationId xmlns:a16="http://schemas.microsoft.com/office/drawing/2014/main" id="{F778F465-EEFF-49F5-8D69-DB71784FF5E4}"/>
               </a:ext>
             </a:extLst>
           </p:cNvPr>
@@ -12793,7 +13329,7 @@
           <p:cNvPr id="3" name="">
             <a:extLst xmlns:a="http://schemas.openxmlformats.org/drawingml/2006/main">
               <a:ext uri="{FF2B5EF4-FFF2-40B4-BE49-F238E27FC236}">
-                <a16:creationId xmlns:a16="http://schemas.microsoft.com/office/drawing/2014/main" id="{C7332B66-3316-454C-B3A9-CF873076E88E}"/>
+                <a16:creationId xmlns:a16="http://schemas.microsoft.com/office/drawing/2014/main" id="{D15C8AF4-6A11-4D23-8569-CB26877ABC59}"/>
               </a:ext>
             </a:extLst>
           </p:cNvPr>
@@ -12828,7 +13364,7 @@
           <p:nvPr/>
         </p:nvPicPr>
         <p:blipFill>
-          <a:blip xmlns:r="http://schemas.openxmlformats.org/officeDocument/2006/relationships" xmlns:a="http://schemas.openxmlformats.org/drawingml/2006/main" r:embed="R0afd3c6b0ad34fbf"/>
+          <a:blip xmlns:r="http://schemas.openxmlformats.org/officeDocument/2006/relationships" xmlns:a="http://schemas.openxmlformats.org/drawingml/2006/main" r:embed="Rb3fa32a9afe34c8b"/>
           <a:stretch xmlns:a="http://schemas.openxmlformats.org/drawingml/2006/main"/>
         </p:blipFill>
         <p:spPr>
@@ -12846,7 +13382,7 @@
           <p:cNvPr id="5" name="">
             <a:extLst xmlns:a="http://schemas.openxmlformats.org/drawingml/2006/main">
               <a:ext uri="{FF2B5EF4-FFF2-40B4-BE49-F238E27FC236}">
-                <a16:creationId xmlns:a16="http://schemas.microsoft.com/office/drawing/2014/main" id="{189139F0-3642-4D33-B898-1237B5A626A9}"/>
+                <a16:creationId xmlns:a16="http://schemas.microsoft.com/office/drawing/2014/main" id="{0B119201-FDD5-41B9-8A8A-44D92CE49302}"/>
               </a:ext>
             </a:extLst>
           </p:cNvPr>
@@ -12896,7 +13432,7 @@
           <p:cNvPr id="6" name="">
             <a:extLst xmlns:a="http://schemas.openxmlformats.org/drawingml/2006/main">
               <a:ext uri="{FF2B5EF4-FFF2-40B4-BE49-F238E27FC236}">
-                <a16:creationId xmlns:a16="http://schemas.microsoft.com/office/drawing/2014/main" id="{F6068E1E-A5BC-4AB7-977D-E572714956FC}"/>
+                <a16:creationId xmlns:a16="http://schemas.microsoft.com/office/drawing/2014/main" id="{3A69715D-6876-446E-AC28-8E7B3EDE65C3}"/>
               </a:ext>
             </a:extLst>
           </p:cNvPr>
@@ -12944,7 +13480,7 @@
     </p:spTree>
     <p:extLst>
       <p:ext uri="{BB962C8B-B14F-4D97-AF65-F5344CB8AC3E}">
-        <p14:creationId xmlns:p14="http://schemas.microsoft.com/office/powerpoint/2010/main" val="1155534976"/>
+        <p14:creationId xmlns:p14="http://schemas.microsoft.com/office/powerpoint/2010/main" val="1512508285"/>
       </p:ext>
     </p:extLst>
   </p:cSld>
@@ -12975,7 +13511,7 @@
           <p:cNvPr id="1" name="">
             <a:extLst xmlns:a="http://schemas.openxmlformats.org/drawingml/2006/main">
               <a:ext uri="{FF2B5EF4-FFF2-40B4-BE49-F238E27FC236}">
-                <a16:creationId xmlns:a16="http://schemas.microsoft.com/office/drawing/2014/main" id="{6C171874-4690-46BE-AA81-D81329F5BEA0}"/>
+                <a16:creationId xmlns:a16="http://schemas.microsoft.com/office/drawing/2014/main" id="{3883F3A1-B29B-4071-8706-30C8184818E1}"/>
               </a:ext>
             </a:extLst>
           </p:cNvPr>
@@ -13025,7 +13561,7 @@
           <p:cNvPr id="2" name="">
             <a:extLst xmlns:a="http://schemas.openxmlformats.org/drawingml/2006/main">
               <a:ext uri="{FF2B5EF4-FFF2-40B4-BE49-F238E27FC236}">
-                <a16:creationId xmlns:a16="http://schemas.microsoft.com/office/drawing/2014/main" id="{DA2300AE-A3E0-4A94-971A-EE9C619A15CD}"/>
+                <a16:creationId xmlns:a16="http://schemas.microsoft.com/office/drawing/2014/main" id="{CEE5D7E1-879B-407B-8522-3EA70863520F}"/>
               </a:ext>
             </a:extLst>
           </p:cNvPr>
@@ -13075,7 +13611,7 @@
           <p:cNvPr id="3" name="">
             <a:extLst xmlns:a="http://schemas.openxmlformats.org/drawingml/2006/main">
               <a:ext uri="{FF2B5EF4-FFF2-40B4-BE49-F238E27FC236}">
-                <a16:creationId xmlns:a16="http://schemas.microsoft.com/office/drawing/2014/main" id="{1449B165-B486-4787-8078-C818D3CB7831}"/>
+                <a16:creationId xmlns:a16="http://schemas.microsoft.com/office/drawing/2014/main" id="{523754C9-37D3-4433-80FF-07AAFC891C11}"/>
               </a:ext>
             </a:extLst>
           </p:cNvPr>
@@ -13106,7 +13642,7 @@
           <p:cNvPr id="4" name="">
             <a:extLst xmlns:a="http://schemas.openxmlformats.org/drawingml/2006/main">
               <a:ext uri="{FF2B5EF4-FFF2-40B4-BE49-F238E27FC236}">
-                <a16:creationId xmlns:a16="http://schemas.microsoft.com/office/drawing/2014/main" id="{A4EF84E8-6A74-4E16-BF13-EAE9CF15E4DD}"/>
+                <a16:creationId xmlns:a16="http://schemas.microsoft.com/office/drawing/2014/main" id="{854EB2CD-4222-4FE1-B313-66237B3711F8}"/>
               </a:ext>
             </a:extLst>
           </p:cNvPr>
@@ -13156,7 +13692,7 @@
           <p:cNvPr id="5" name="">
             <a:extLst xmlns:a="http://schemas.openxmlformats.org/drawingml/2006/main">
               <a:ext uri="{FF2B5EF4-FFF2-40B4-BE49-F238E27FC236}">
-                <a16:creationId xmlns:a16="http://schemas.microsoft.com/office/drawing/2014/main" id="{86C88D9D-AFD5-4214-B913-B2A2A6FE8459}"/>
+                <a16:creationId xmlns:a16="http://schemas.microsoft.com/office/drawing/2014/main" id="{C71FC0AF-EA32-4A91-9F9B-59AE17D76EFA}"/>
               </a:ext>
             </a:extLst>
           </p:cNvPr>
@@ -13206,7 +13742,7 @@
           <p:cNvPr id="6" name="">
             <a:extLst xmlns:a="http://schemas.openxmlformats.org/drawingml/2006/main">
               <a:ext uri="{FF2B5EF4-FFF2-40B4-BE49-F238E27FC236}">
-                <a16:creationId xmlns:a16="http://schemas.microsoft.com/office/drawing/2014/main" id="{DFEBA364-3247-4358-8817-3A2CBFCEBF04}"/>
+                <a16:creationId xmlns:a16="http://schemas.microsoft.com/office/drawing/2014/main" id="{E827766A-4DD5-4F8C-A3E3-82CA85631D4B}"/>
               </a:ext>
             </a:extLst>
           </p:cNvPr>
@@ -13256,7 +13792,7 @@
           <p:cNvPr id="7" name="">
             <a:extLst xmlns:a="http://schemas.openxmlformats.org/drawingml/2006/main">
               <a:ext uri="{FF2B5EF4-FFF2-40B4-BE49-F238E27FC236}">
-                <a16:creationId xmlns:a16="http://schemas.microsoft.com/office/drawing/2014/main" id="{916D9001-B1D3-48F4-B66E-23637F615D84}"/>
+                <a16:creationId xmlns:a16="http://schemas.microsoft.com/office/drawing/2014/main" id="{DCB2B7D4-6EFF-49C1-A7EB-59D6E6BF128E}"/>
               </a:ext>
             </a:extLst>
           </p:cNvPr>
@@ -13306,7 +13842,7 @@
           <p:cNvPr id="8" name="">
             <a:extLst xmlns:a="http://schemas.openxmlformats.org/drawingml/2006/main">
               <a:ext uri="{FF2B5EF4-FFF2-40B4-BE49-F238E27FC236}">
-                <a16:creationId xmlns:a16="http://schemas.microsoft.com/office/drawing/2014/main" id="{F34B81FE-3A4F-4DF0-B19F-EE8C4DA7924E}"/>
+                <a16:creationId xmlns:a16="http://schemas.microsoft.com/office/drawing/2014/main" id="{74C177F2-4ACD-4480-A51F-95ABE27D4F61}"/>
               </a:ext>
             </a:extLst>
           </p:cNvPr>
@@ -13356,7 +13892,7 @@
           <p:cNvPr id="9" name="">
             <a:extLst xmlns:a="http://schemas.openxmlformats.org/drawingml/2006/main">
               <a:ext uri="{FF2B5EF4-FFF2-40B4-BE49-F238E27FC236}">
-                <a16:creationId xmlns:a16="http://schemas.microsoft.com/office/drawing/2014/main" id="{5E9E256E-39A3-47D8-9189-E12E853E8EAC}"/>
+                <a16:creationId xmlns:a16="http://schemas.microsoft.com/office/drawing/2014/main" id="{CD98EA7D-D5B3-4891-A316-3B0CC4B15479}"/>
               </a:ext>
             </a:extLst>
           </p:cNvPr>
@@ -13406,7 +13942,7 @@
           <p:cNvPr id="10" name="">
             <a:extLst xmlns:a="http://schemas.openxmlformats.org/drawingml/2006/main">
               <a:ext uri="{FF2B5EF4-FFF2-40B4-BE49-F238E27FC236}">
-                <a16:creationId xmlns:a16="http://schemas.microsoft.com/office/drawing/2014/main" id="{303FE544-D326-4645-AA61-036C586EA4E8}"/>
+                <a16:creationId xmlns:a16="http://schemas.microsoft.com/office/drawing/2014/main" id="{52141D51-6BBD-40D0-9DFD-1FFEF62BD3A0}"/>
               </a:ext>
             </a:extLst>
           </p:cNvPr>
@@ -13456,7 +13992,7 @@
           <p:cNvPr id="11" name="">
             <a:extLst xmlns:a="http://schemas.openxmlformats.org/drawingml/2006/main">
               <a:ext uri="{FF2B5EF4-FFF2-40B4-BE49-F238E27FC236}">
-                <a16:creationId xmlns:a16="http://schemas.microsoft.com/office/drawing/2014/main" id="{91C1E131-8355-4CFD-8F29-956171D6A2C1}"/>
+                <a16:creationId xmlns:a16="http://schemas.microsoft.com/office/drawing/2014/main" id="{A292502E-2F6E-4C89-BBCC-580A3CC17E75}"/>
               </a:ext>
             </a:extLst>
           </p:cNvPr>
@@ -13506,7 +14042,7 @@
           <p:cNvPr id="12" name="">
             <a:extLst xmlns:a="http://schemas.openxmlformats.org/drawingml/2006/main">
               <a:ext uri="{FF2B5EF4-FFF2-40B4-BE49-F238E27FC236}">
-                <a16:creationId xmlns:a16="http://schemas.microsoft.com/office/drawing/2014/main" id="{B515CC94-9DBA-4BC0-8475-9AECDC8D4726}"/>
+                <a16:creationId xmlns:a16="http://schemas.microsoft.com/office/drawing/2014/main" id="{4D38562D-5299-4A8A-A7D3-153E7EADF7E3}"/>
               </a:ext>
             </a:extLst>
           </p:cNvPr>
@@ -13554,7 +14090,7 @@
     </p:spTree>
     <p:extLst>
       <p:ext uri="{BB962C8B-B14F-4D97-AF65-F5344CB8AC3E}">
-        <p14:creationId xmlns:p14="http://schemas.microsoft.com/office/powerpoint/2010/main" val="227027468"/>
+        <p14:creationId xmlns:p14="http://schemas.microsoft.com/office/powerpoint/2010/main" val="113016124"/>
       </p:ext>
     </p:extLst>
   </p:cSld>
@@ -13585,7 +14121,7 @@
           <p:cNvPr id="1" name="">
             <a:extLst xmlns:a="http://schemas.openxmlformats.org/drawingml/2006/main">
               <a:ext uri="{FF2B5EF4-FFF2-40B4-BE49-F238E27FC236}">
-                <a16:creationId xmlns:a16="http://schemas.microsoft.com/office/drawing/2014/main" id="{D41E4329-A972-4610-AE71-6297CAC2A82B}"/>
+                <a16:creationId xmlns:a16="http://schemas.microsoft.com/office/drawing/2014/main" id="{58A0C013-A2C5-4AE9-9617-4F6C0F0B9A31}"/>
               </a:ext>
             </a:extLst>
           </p:cNvPr>
@@ -13635,7 +14171,7 @@
           <p:cNvPr id="2" name="">
             <a:extLst xmlns:a="http://schemas.openxmlformats.org/drawingml/2006/main">
               <a:ext uri="{FF2B5EF4-FFF2-40B4-BE49-F238E27FC236}">
-                <a16:creationId xmlns:a16="http://schemas.microsoft.com/office/drawing/2014/main" id="{5043A149-C0A4-4E8B-A0F5-0D8B27CE6DF3}"/>
+                <a16:creationId xmlns:a16="http://schemas.microsoft.com/office/drawing/2014/main" id="{C72A36F0-7B0A-49E3-9E9F-A95620313CF9}"/>
               </a:ext>
             </a:extLst>
           </p:cNvPr>
@@ -13685,7 +14221,7 @@
           <p:cNvPr id="3" name="">
             <a:extLst xmlns:a="http://schemas.openxmlformats.org/drawingml/2006/main">
               <a:ext uri="{FF2B5EF4-FFF2-40B4-BE49-F238E27FC236}">
-                <a16:creationId xmlns:a16="http://schemas.microsoft.com/office/drawing/2014/main" id="{F52D9B47-D396-4A75-ACFB-74519907F311}"/>
+                <a16:creationId xmlns:a16="http://schemas.microsoft.com/office/drawing/2014/main" id="{337C19BC-880B-48CC-A2EE-977E8FF16FF9}"/>
               </a:ext>
             </a:extLst>
           </p:cNvPr>
@@ -13716,7 +14252,7 @@
           <p:cNvPr id="4" name="">
             <a:extLst xmlns:a="http://schemas.openxmlformats.org/drawingml/2006/main">
               <a:ext uri="{FF2B5EF4-FFF2-40B4-BE49-F238E27FC236}">
-                <a16:creationId xmlns:a16="http://schemas.microsoft.com/office/drawing/2014/main" id="{91986A5C-FB1F-49B4-8B87-655A94CEA673}"/>
+                <a16:creationId xmlns:a16="http://schemas.microsoft.com/office/drawing/2014/main" id="{BF116856-3F4F-45E1-9331-83A2072D09DE}"/>
               </a:ext>
             </a:extLst>
           </p:cNvPr>
@@ -13766,7 +14302,7 @@
           <p:cNvPr id="5" name="">
             <a:extLst xmlns:a="http://schemas.openxmlformats.org/drawingml/2006/main">
               <a:ext uri="{FF2B5EF4-FFF2-40B4-BE49-F238E27FC236}">
-                <a16:creationId xmlns:a16="http://schemas.microsoft.com/office/drawing/2014/main" id="{CD7FB6C6-BCEF-47DB-97BC-9C10D86B665A}"/>
+                <a16:creationId xmlns:a16="http://schemas.microsoft.com/office/drawing/2014/main" id="{80821C44-3E2E-49D1-B2C7-2C99536B5C51}"/>
               </a:ext>
             </a:extLst>
           </p:cNvPr>
@@ -13797,7 +14333,7 @@
           <p:cNvPr id="6" name="">
             <a:extLst xmlns:a="http://schemas.openxmlformats.org/drawingml/2006/main">
               <a:ext uri="{FF2B5EF4-FFF2-40B4-BE49-F238E27FC236}">
-                <a16:creationId xmlns:a16="http://schemas.microsoft.com/office/drawing/2014/main" id="{2488C0C3-C983-4639-9948-42AB236E6189}"/>
+                <a16:creationId xmlns:a16="http://schemas.microsoft.com/office/drawing/2014/main" id="{5768A4A3-BBAF-42F3-8C76-EA8AB96CE53D}"/>
               </a:ext>
             </a:extLst>
           </p:cNvPr>
@@ -13847,7 +14383,7 @@
           <p:cNvPr id="7" name="">
             <a:extLst xmlns:a="http://schemas.openxmlformats.org/drawingml/2006/main">
               <a:ext uri="{FF2B5EF4-FFF2-40B4-BE49-F238E27FC236}">
-                <a16:creationId xmlns:a16="http://schemas.microsoft.com/office/drawing/2014/main" id="{44CEF218-47F3-4485-8407-7F016E920976}"/>
+                <a16:creationId xmlns:a16="http://schemas.microsoft.com/office/drawing/2014/main" id="{11CAA71E-9179-48B1-BE5E-DAB743A72059}"/>
               </a:ext>
             </a:extLst>
           </p:cNvPr>
@@ -13895,7 +14431,7 @@
     </p:spTree>
     <p:extLst>
       <p:ext uri="{BB962C8B-B14F-4D97-AF65-F5344CB8AC3E}">
-        <p14:creationId xmlns:p14="http://schemas.microsoft.com/office/powerpoint/2010/main" val="2048978277"/>
+        <p14:creationId xmlns:p14="http://schemas.microsoft.com/office/powerpoint/2010/main" val="162819754"/>
       </p:ext>
     </p:extLst>
   </p:cSld>
@@ -13926,7 +14462,7 @@
           <p:cNvPr id="1" name="">
             <a:extLst xmlns:a="http://schemas.openxmlformats.org/drawingml/2006/main">
               <a:ext uri="{FF2B5EF4-FFF2-40B4-BE49-F238E27FC236}">
-                <a16:creationId xmlns:a16="http://schemas.microsoft.com/office/drawing/2014/main" id="{B703396F-DA32-4816-8940-38659C07149D}"/>
+                <a16:creationId xmlns:a16="http://schemas.microsoft.com/office/drawing/2014/main" id="{EF620562-03CA-45D3-8CF6-FAEA601C3E5C}"/>
               </a:ext>
             </a:extLst>
           </p:cNvPr>
@@ -13976,7 +14512,7 @@
           <p:cNvPr id="2" name="">
             <a:extLst xmlns:a="http://schemas.openxmlformats.org/drawingml/2006/main">
               <a:ext uri="{FF2B5EF4-FFF2-40B4-BE49-F238E27FC236}">
-                <a16:creationId xmlns:a16="http://schemas.microsoft.com/office/drawing/2014/main" id="{75D120C2-F8FE-4D0E-887D-F527B1BB9F1A}"/>
+                <a16:creationId xmlns:a16="http://schemas.microsoft.com/office/drawing/2014/main" id="{1DCCFFEF-09D3-4AA1-BD15-E3C99639A1B6}"/>
               </a:ext>
             </a:extLst>
           </p:cNvPr>
@@ -14026,7 +14562,7 @@
           <p:cNvPr id="3" name="">
             <a:extLst xmlns:a="http://schemas.openxmlformats.org/drawingml/2006/main">
               <a:ext uri="{FF2B5EF4-FFF2-40B4-BE49-F238E27FC236}">
-                <a16:creationId xmlns:a16="http://schemas.microsoft.com/office/drawing/2014/main" id="{04B55839-0D19-42C1-AD2B-EFABA534B01B}"/>
+                <a16:creationId xmlns:a16="http://schemas.microsoft.com/office/drawing/2014/main" id="{001D5E59-EA74-4EDF-8DE2-79FB4CEF2F6D}"/>
               </a:ext>
             </a:extLst>
           </p:cNvPr>
@@ -14057,7 +14593,7 @@
           <p:cNvPr id="4" name="">
             <a:extLst xmlns:a="http://schemas.openxmlformats.org/drawingml/2006/main">
               <a:ext uri="{FF2B5EF4-FFF2-40B4-BE49-F238E27FC236}">
-                <a16:creationId xmlns:a16="http://schemas.microsoft.com/office/drawing/2014/main" id="{C4D184C5-3F00-4174-9738-0D78FE520DEC}"/>
+                <a16:creationId xmlns:a16="http://schemas.microsoft.com/office/drawing/2014/main" id="{B363D3C3-65BB-4800-B801-B8723E95B24A}"/>
               </a:ext>
             </a:extLst>
           </p:cNvPr>
@@ -14090,7 +14626,7 @@
           <p:cNvPr id="5" name="">
             <a:extLst xmlns:a="http://schemas.openxmlformats.org/drawingml/2006/main">
               <a:ext uri="{FF2B5EF4-FFF2-40B4-BE49-F238E27FC236}">
-                <a16:creationId xmlns:a16="http://schemas.microsoft.com/office/drawing/2014/main" id="{BAA5D350-446F-4338-8121-DDA419218167}"/>
+                <a16:creationId xmlns:a16="http://schemas.microsoft.com/office/drawing/2014/main" id="{0BB32136-3434-4217-BA6F-F06323DC8597}"/>
               </a:ext>
             </a:extLst>
           </p:cNvPr>
@@ -14140,7 +14676,7 @@
           <p:cNvPr id="6" name="">
             <a:extLst xmlns:a="http://schemas.openxmlformats.org/drawingml/2006/main">
               <a:ext uri="{FF2B5EF4-FFF2-40B4-BE49-F238E27FC236}">
-                <a16:creationId xmlns:a16="http://schemas.microsoft.com/office/drawing/2014/main" id="{EC60889F-9EB9-4E46-8A64-F78D96EF726F}"/>
+                <a16:creationId xmlns:a16="http://schemas.microsoft.com/office/drawing/2014/main" id="{174F96C9-761F-4952-8295-0F945AE67383}"/>
               </a:ext>
             </a:extLst>
           </p:cNvPr>
@@ -14190,7 +14726,7 @@
           <p:cNvPr id="7" name="">
             <a:extLst xmlns:a="http://schemas.openxmlformats.org/drawingml/2006/main">
               <a:ext uri="{FF2B5EF4-FFF2-40B4-BE49-F238E27FC236}">
-                <a16:creationId xmlns:a16="http://schemas.microsoft.com/office/drawing/2014/main" id="{99794CCB-E101-4BF9-8570-B4192220BCB5}"/>
+                <a16:creationId xmlns:a16="http://schemas.microsoft.com/office/drawing/2014/main" id="{4D0C83D3-A90A-4F75-91A5-C8DF85DEA5E1}"/>
               </a:ext>
             </a:extLst>
           </p:cNvPr>
@@ -14240,7 +14776,7 @@
           <p:cNvPr id="8" name="">
             <a:extLst xmlns:a="http://schemas.openxmlformats.org/drawingml/2006/main">
               <a:ext uri="{FF2B5EF4-FFF2-40B4-BE49-F238E27FC236}">
-                <a16:creationId xmlns:a16="http://schemas.microsoft.com/office/drawing/2014/main" id="{CBF7390F-0004-423A-A813-2E144C0B6BCE}"/>
+                <a16:creationId xmlns:a16="http://schemas.microsoft.com/office/drawing/2014/main" id="{F41369DA-13A7-44A4-9F68-40EDD4793D1E}"/>
               </a:ext>
             </a:extLst>
           </p:cNvPr>
@@ -14273,7 +14809,7 @@
           <p:cNvPr id="9" name="">
             <a:extLst xmlns:a="http://schemas.openxmlformats.org/drawingml/2006/main">
               <a:ext uri="{FF2B5EF4-FFF2-40B4-BE49-F238E27FC236}">
-                <a16:creationId xmlns:a16="http://schemas.microsoft.com/office/drawing/2014/main" id="{5352C6F6-F442-4401-A669-5213632792FF}"/>
+                <a16:creationId xmlns:a16="http://schemas.microsoft.com/office/drawing/2014/main" id="{03480468-3D01-48D6-AB78-22127A24ECF6}"/>
               </a:ext>
             </a:extLst>
           </p:cNvPr>
@@ -14323,7 +14859,7 @@
           <p:cNvPr id="10" name="">
             <a:extLst xmlns:a="http://schemas.openxmlformats.org/drawingml/2006/main">
               <a:ext uri="{FF2B5EF4-FFF2-40B4-BE49-F238E27FC236}">
-                <a16:creationId xmlns:a16="http://schemas.microsoft.com/office/drawing/2014/main" id="{4DFDECC1-A2D4-4A63-BAD4-6B948F59A89D}"/>
+                <a16:creationId xmlns:a16="http://schemas.microsoft.com/office/drawing/2014/main" id="{3ACDF9E7-17A0-4F20-9C46-3730D3BD1C38}"/>
               </a:ext>
             </a:extLst>
           </p:cNvPr>
@@ -14373,7 +14909,7 @@
           <p:cNvPr id="11" name="">
             <a:extLst xmlns:a="http://schemas.openxmlformats.org/drawingml/2006/main">
               <a:ext uri="{FF2B5EF4-FFF2-40B4-BE49-F238E27FC236}">
-                <a16:creationId xmlns:a16="http://schemas.microsoft.com/office/drawing/2014/main" id="{001E17CE-BED4-4252-AC9F-C4CE0F4CF26A}"/>
+                <a16:creationId xmlns:a16="http://schemas.microsoft.com/office/drawing/2014/main" id="{DB5145C7-6E7E-4730-A1CF-325B4D016BAB}"/>
               </a:ext>
             </a:extLst>
           </p:cNvPr>
@@ -14423,7 +14959,7 @@
           <p:cNvPr id="12" name="">
             <a:extLst xmlns:a="http://schemas.openxmlformats.org/drawingml/2006/main">
               <a:ext uri="{FF2B5EF4-FFF2-40B4-BE49-F238E27FC236}">
-                <a16:creationId xmlns:a16="http://schemas.microsoft.com/office/drawing/2014/main" id="{1CFE8A20-A0F2-4704-A8D1-1136F50E6D8E}"/>
+                <a16:creationId xmlns:a16="http://schemas.microsoft.com/office/drawing/2014/main" id="{05EB351E-CAB4-43DE-B577-C72FF7E9B7D9}"/>
               </a:ext>
             </a:extLst>
           </p:cNvPr>
@@ -14456,7 +14992,7 @@
           <p:cNvPr id="13" name="">
             <a:extLst xmlns:a="http://schemas.openxmlformats.org/drawingml/2006/main">
               <a:ext uri="{FF2B5EF4-FFF2-40B4-BE49-F238E27FC236}">
-                <a16:creationId xmlns:a16="http://schemas.microsoft.com/office/drawing/2014/main" id="{C086E16D-EA4F-4B9F-ADF9-E4BFB9E138E6}"/>
+                <a16:creationId xmlns:a16="http://schemas.microsoft.com/office/drawing/2014/main" id="{B1088081-902E-4017-88A0-00969D271DF3}"/>
               </a:ext>
             </a:extLst>
           </p:cNvPr>
@@ -14506,7 +15042,7 @@
           <p:cNvPr id="14" name="">
             <a:extLst xmlns:a="http://schemas.openxmlformats.org/drawingml/2006/main">
               <a:ext uri="{FF2B5EF4-FFF2-40B4-BE49-F238E27FC236}">
-                <a16:creationId xmlns:a16="http://schemas.microsoft.com/office/drawing/2014/main" id="{BE505779-3B81-4747-9158-F6387FC86B4E}"/>
+                <a16:creationId xmlns:a16="http://schemas.microsoft.com/office/drawing/2014/main" id="{B47E71D5-236B-45C6-93BC-DBA76C64C926}"/>
               </a:ext>
             </a:extLst>
           </p:cNvPr>
@@ -14556,7 +15092,7 @@
           <p:cNvPr id="15" name="">
             <a:extLst xmlns:a="http://schemas.openxmlformats.org/drawingml/2006/main">
               <a:ext uri="{FF2B5EF4-FFF2-40B4-BE49-F238E27FC236}">
-                <a16:creationId xmlns:a16="http://schemas.microsoft.com/office/drawing/2014/main" id="{58D448CC-1252-4777-8B83-1636CEB09083}"/>
+                <a16:creationId xmlns:a16="http://schemas.microsoft.com/office/drawing/2014/main" id="{9AF040BC-3AF9-4667-BED5-2146BC9AF13B}"/>
               </a:ext>
             </a:extLst>
           </p:cNvPr>
@@ -14606,7 +15142,7 @@
           <p:cNvPr id="16" name="">
             <a:extLst xmlns:a="http://schemas.openxmlformats.org/drawingml/2006/main">
               <a:ext uri="{FF2B5EF4-FFF2-40B4-BE49-F238E27FC236}">
-                <a16:creationId xmlns:a16="http://schemas.microsoft.com/office/drawing/2014/main" id="{1B7E3366-5FB4-4759-89DA-B091077678CF}"/>
+                <a16:creationId xmlns:a16="http://schemas.microsoft.com/office/drawing/2014/main" id="{277C303F-135C-406F-B1A5-A5DA71C9E810}"/>
               </a:ext>
             </a:extLst>
           </p:cNvPr>
@@ -14656,7 +15192,7 @@
           <p:cNvPr id="17" name="">
             <a:extLst xmlns:a="http://schemas.openxmlformats.org/drawingml/2006/main">
               <a:ext uri="{FF2B5EF4-FFF2-40B4-BE49-F238E27FC236}">
-                <a16:creationId xmlns:a16="http://schemas.microsoft.com/office/drawing/2014/main" id="{5B111745-5AD9-478B-8EC7-0C599A40F738}"/>
+                <a16:creationId xmlns:a16="http://schemas.microsoft.com/office/drawing/2014/main" id="{CC3B1064-5A19-42B5-B85D-9110905D7FB3}"/>
               </a:ext>
             </a:extLst>
           </p:cNvPr>
@@ -14706,7 +15242,7 @@
           <p:cNvPr id="18" name="">
             <a:extLst xmlns:a="http://schemas.openxmlformats.org/drawingml/2006/main">
               <a:ext uri="{FF2B5EF4-FFF2-40B4-BE49-F238E27FC236}">
-                <a16:creationId xmlns:a16="http://schemas.microsoft.com/office/drawing/2014/main" id="{510F93A9-2712-4E03-B83B-D371C3941C4B}"/>
+                <a16:creationId xmlns:a16="http://schemas.microsoft.com/office/drawing/2014/main" id="{98E676BE-43A0-487C-A2B0-EF58872E926A}"/>
               </a:ext>
             </a:extLst>
           </p:cNvPr>
@@ -14756,7 +15292,7 @@
           <p:cNvPr id="19" name="">
             <a:extLst xmlns:a="http://schemas.openxmlformats.org/drawingml/2006/main">
               <a:ext uri="{FF2B5EF4-FFF2-40B4-BE49-F238E27FC236}">
-                <a16:creationId xmlns:a16="http://schemas.microsoft.com/office/drawing/2014/main" id="{1C363D8B-8C13-4CDD-85BE-86C8713AA692}"/>
+                <a16:creationId xmlns:a16="http://schemas.microsoft.com/office/drawing/2014/main" id="{F8240598-28CA-4E52-B115-C828A8BB5A4B}"/>
               </a:ext>
             </a:extLst>
           </p:cNvPr>
@@ -14806,7 +15342,7 @@
           <p:cNvPr id="20" name="">
             <a:extLst xmlns:a="http://schemas.openxmlformats.org/drawingml/2006/main">
               <a:ext uri="{FF2B5EF4-FFF2-40B4-BE49-F238E27FC236}">
-                <a16:creationId xmlns:a16="http://schemas.microsoft.com/office/drawing/2014/main" id="{365CE471-95ED-439E-9B47-C8068193BCB5}"/>
+                <a16:creationId xmlns:a16="http://schemas.microsoft.com/office/drawing/2014/main" id="{281B4AEB-2167-481F-B931-52216F1E6AA7}"/>
               </a:ext>
             </a:extLst>
           </p:cNvPr>
@@ -14856,7 +15392,7 @@
           <p:cNvPr id="21" name="">
             <a:extLst xmlns:a="http://schemas.openxmlformats.org/drawingml/2006/main">
               <a:ext uri="{FF2B5EF4-FFF2-40B4-BE49-F238E27FC236}">
-                <a16:creationId xmlns:a16="http://schemas.microsoft.com/office/drawing/2014/main" id="{482133E8-E56A-49F0-B430-6BB90118DE6A}"/>
+                <a16:creationId xmlns:a16="http://schemas.microsoft.com/office/drawing/2014/main" id="{7D3406D9-F776-4920-9266-2B787BF965B8}"/>
               </a:ext>
             </a:extLst>
           </p:cNvPr>
@@ -14906,7 +15442,7 @@
           <p:cNvPr id="22" name="">
             <a:extLst xmlns:a="http://schemas.openxmlformats.org/drawingml/2006/main">
               <a:ext uri="{FF2B5EF4-FFF2-40B4-BE49-F238E27FC236}">
-                <a16:creationId xmlns:a16="http://schemas.microsoft.com/office/drawing/2014/main" id="{8CADA75D-D9CD-49EB-9018-32C478A944EE}"/>
+                <a16:creationId xmlns:a16="http://schemas.microsoft.com/office/drawing/2014/main" id="{CB32852C-17DB-43D3-8E45-23C9E202C4A0}"/>
               </a:ext>
             </a:extLst>
           </p:cNvPr>
@@ -14956,7 +15492,7 @@
           <p:cNvPr id="23" name="">
             <a:extLst xmlns:a="http://schemas.openxmlformats.org/drawingml/2006/main">
               <a:ext uri="{FF2B5EF4-FFF2-40B4-BE49-F238E27FC236}">
-                <a16:creationId xmlns:a16="http://schemas.microsoft.com/office/drawing/2014/main" id="{CF283583-C8B8-431C-921E-0D40B81B07CE}"/>
+                <a16:creationId xmlns:a16="http://schemas.microsoft.com/office/drawing/2014/main" id="{F27329CE-0EE7-4C05-8862-07721824D2BB}"/>
               </a:ext>
             </a:extLst>
           </p:cNvPr>
@@ -15004,7 +15540,7 @@
     </p:spTree>
     <p:extLst>
       <p:ext uri="{BB962C8B-B14F-4D97-AF65-F5344CB8AC3E}">
-        <p14:creationId xmlns:p14="http://schemas.microsoft.com/office/powerpoint/2010/main" val="795345639"/>
+        <p14:creationId xmlns:p14="http://schemas.microsoft.com/office/powerpoint/2010/main" val="183733636"/>
       </p:ext>
     </p:extLst>
   </p:cSld>
@@ -15035,7 +15571,7 @@
           <p:cNvPr id="1" name="">
             <a:extLst xmlns:a="http://schemas.openxmlformats.org/drawingml/2006/main">
               <a:ext uri="{FF2B5EF4-FFF2-40B4-BE49-F238E27FC236}">
-                <a16:creationId xmlns:a16="http://schemas.microsoft.com/office/drawing/2014/main" id="{A9AD6EF6-0C64-4A40-B16E-AB35726FEC32}"/>
+                <a16:creationId xmlns:a16="http://schemas.microsoft.com/office/drawing/2014/main" id="{BA6F3059-87CE-4D6A-ACCF-1EF0C1E92FF5}"/>
               </a:ext>
             </a:extLst>
           </p:cNvPr>
@@ -15085,7 +15621,7 @@
           <p:cNvPr id="2" name="">
             <a:extLst xmlns:a="http://schemas.openxmlformats.org/drawingml/2006/main">
               <a:ext uri="{FF2B5EF4-FFF2-40B4-BE49-F238E27FC236}">
-                <a16:creationId xmlns:a16="http://schemas.microsoft.com/office/drawing/2014/main" id="{DA61A90D-7375-431D-90B0-3B087F2AD5E6}"/>
+                <a16:creationId xmlns:a16="http://schemas.microsoft.com/office/drawing/2014/main" id="{D3BF01DD-420E-4082-AF4D-18CDD05C6D7E}"/>
               </a:ext>
             </a:extLst>
           </p:cNvPr>
@@ -15135,7 +15671,7 @@
           <p:cNvPr id="3" name="">
             <a:extLst xmlns:a="http://schemas.openxmlformats.org/drawingml/2006/main">
               <a:ext uri="{FF2B5EF4-FFF2-40B4-BE49-F238E27FC236}">
-                <a16:creationId xmlns:a16="http://schemas.microsoft.com/office/drawing/2014/main" id="{51A9471C-08A3-46B3-8800-C473B0636E8F}"/>
+                <a16:creationId xmlns:a16="http://schemas.microsoft.com/office/drawing/2014/main" id="{CCF175DE-D3E2-4400-A1D1-F5A2C1BEF439}"/>
               </a:ext>
             </a:extLst>
           </p:cNvPr>
@@ -15166,7 +15702,7 @@
           <p:cNvPr id="4" name="">
             <a:extLst xmlns:a="http://schemas.openxmlformats.org/drawingml/2006/main">
               <a:ext uri="{FF2B5EF4-FFF2-40B4-BE49-F238E27FC236}">
-                <a16:creationId xmlns:a16="http://schemas.microsoft.com/office/drawing/2014/main" id="{6766BBFF-47DD-495F-8570-67F7E19BFC9D}"/>
+                <a16:creationId xmlns:a16="http://schemas.microsoft.com/office/drawing/2014/main" id="{CC2476B1-C38D-4AF0-B200-F1DAFBED469D}"/>
               </a:ext>
             </a:extLst>
           </p:cNvPr>
@@ -15216,7 +15752,7 @@
           <p:cNvPr id="5" name="">
             <a:extLst xmlns:a="http://schemas.openxmlformats.org/drawingml/2006/main">
               <a:ext uri="{FF2B5EF4-FFF2-40B4-BE49-F238E27FC236}">
-                <a16:creationId xmlns:a16="http://schemas.microsoft.com/office/drawing/2014/main" id="{D8FC1EA8-13AF-481B-8DC6-C1B318B65092}"/>
+                <a16:creationId xmlns:a16="http://schemas.microsoft.com/office/drawing/2014/main" id="{C4D28927-CE9E-4833-B23F-C3F2CD24683B}"/>
               </a:ext>
             </a:extLst>
           </p:cNvPr>
@@ -15266,7 +15802,7 @@
           <p:cNvPr id="6" name="">
             <a:extLst xmlns:a="http://schemas.openxmlformats.org/drawingml/2006/main">
               <a:ext uri="{FF2B5EF4-FFF2-40B4-BE49-F238E27FC236}">
-                <a16:creationId xmlns:a16="http://schemas.microsoft.com/office/drawing/2014/main" id="{3BF63A40-090C-4825-9C3E-4485AE1EBA13}"/>
+                <a16:creationId xmlns:a16="http://schemas.microsoft.com/office/drawing/2014/main" id="{8DABFDB5-52C6-40CD-A4E3-8E4534A07973}"/>
               </a:ext>
             </a:extLst>
           </p:cNvPr>
@@ -15297,7 +15833,7 @@
           <p:cNvPr id="7" name="">
             <a:extLst xmlns:a="http://schemas.openxmlformats.org/drawingml/2006/main">
               <a:ext uri="{FF2B5EF4-FFF2-40B4-BE49-F238E27FC236}">
-                <a16:creationId xmlns:a16="http://schemas.microsoft.com/office/drawing/2014/main" id="{949CD6F1-DBD7-4574-B22C-B910EEB74FAF}"/>
+                <a16:creationId xmlns:a16="http://schemas.microsoft.com/office/drawing/2014/main" id="{1A2B7749-8528-4388-8AFE-7772984B02F5}"/>
               </a:ext>
             </a:extLst>
           </p:cNvPr>
@@ -15328,7 +15864,7 @@
           <p:cNvPr id="8" name="">
             <a:extLst xmlns:a="http://schemas.openxmlformats.org/drawingml/2006/main">
               <a:ext uri="{FF2B5EF4-FFF2-40B4-BE49-F238E27FC236}">
-                <a16:creationId xmlns:a16="http://schemas.microsoft.com/office/drawing/2014/main" id="{ACC05A14-7AED-4067-9790-AB07EA724001}"/>
+                <a16:creationId xmlns:a16="http://schemas.microsoft.com/office/drawing/2014/main" id="{9D545E9B-073E-41B3-AA25-0250F9CB1EB2}"/>
               </a:ext>
             </a:extLst>
           </p:cNvPr>
@@ -15378,7 +15914,7 @@
           <p:cNvPr id="9" name="">
             <a:extLst xmlns:a="http://schemas.openxmlformats.org/drawingml/2006/main">
               <a:ext uri="{FF2B5EF4-FFF2-40B4-BE49-F238E27FC236}">
-                <a16:creationId xmlns:a16="http://schemas.microsoft.com/office/drawing/2014/main" id="{80A35E87-AA60-49CA-8424-8A70BFD520A4}"/>
+                <a16:creationId xmlns:a16="http://schemas.microsoft.com/office/drawing/2014/main" id="{EF4496A3-F27B-4B48-B985-09F3EF90FABE}"/>
               </a:ext>
             </a:extLst>
           </p:cNvPr>
@@ -15428,7 +15964,7 @@
           <p:cNvPr id="10" name="">
             <a:extLst xmlns:a="http://schemas.openxmlformats.org/drawingml/2006/main">
               <a:ext uri="{FF2B5EF4-FFF2-40B4-BE49-F238E27FC236}">
-                <a16:creationId xmlns:a16="http://schemas.microsoft.com/office/drawing/2014/main" id="{194F0E1F-3F78-47CF-AF86-A24DF4CCFAAB}"/>
+                <a16:creationId xmlns:a16="http://schemas.microsoft.com/office/drawing/2014/main" id="{4C95DAA7-CD92-4722-8A94-886E180B642A}"/>
               </a:ext>
             </a:extLst>
           </p:cNvPr>
@@ -15478,7 +16014,7 @@
           <p:cNvPr id="11" name="">
             <a:extLst xmlns:a="http://schemas.openxmlformats.org/drawingml/2006/main">
               <a:ext uri="{FF2B5EF4-FFF2-40B4-BE49-F238E27FC236}">
-                <a16:creationId xmlns:a16="http://schemas.microsoft.com/office/drawing/2014/main" id="{ADE94675-343B-4100-81AC-CAE458CFE4B8}"/>
+                <a16:creationId xmlns:a16="http://schemas.microsoft.com/office/drawing/2014/main" id="{BF9C52D1-C9BE-44BB-983C-A0AF16049FE1}"/>
               </a:ext>
             </a:extLst>
           </p:cNvPr>
@@ -15528,7 +16064,7 @@
           <p:cNvPr id="12" name="">
             <a:extLst xmlns:a="http://schemas.openxmlformats.org/drawingml/2006/main">
               <a:ext uri="{FF2B5EF4-FFF2-40B4-BE49-F238E27FC236}">
-                <a16:creationId xmlns:a16="http://schemas.microsoft.com/office/drawing/2014/main" id="{29DA1D1E-6602-45AE-8A3F-912B4FF6B91C}"/>
+                <a16:creationId xmlns:a16="http://schemas.microsoft.com/office/drawing/2014/main" id="{01C732AA-FE28-4869-A11F-95E6D0B1CFE4}"/>
               </a:ext>
             </a:extLst>
           </p:cNvPr>
@@ -15578,7 +16114,7 @@
           <p:cNvPr id="13" name="">
             <a:extLst xmlns:a="http://schemas.openxmlformats.org/drawingml/2006/main">
               <a:ext uri="{FF2B5EF4-FFF2-40B4-BE49-F238E27FC236}">
-                <a16:creationId xmlns:a16="http://schemas.microsoft.com/office/drawing/2014/main" id="{6C357CBD-2EAE-4868-A948-6333BB6858B3}"/>
+                <a16:creationId xmlns:a16="http://schemas.microsoft.com/office/drawing/2014/main" id="{2C3D52A9-139B-4C9E-9931-2C10ECAD6CFB}"/>
               </a:ext>
             </a:extLst>
           </p:cNvPr>
@@ -15628,7 +16164,7 @@
           <p:cNvPr id="14" name="">
             <a:extLst xmlns:a="http://schemas.openxmlformats.org/drawingml/2006/main">
               <a:ext uri="{FF2B5EF4-FFF2-40B4-BE49-F238E27FC236}">
-                <a16:creationId xmlns:a16="http://schemas.microsoft.com/office/drawing/2014/main" id="{6DA06DC1-0695-4D14-8114-02D614DD9E04}"/>
+                <a16:creationId xmlns:a16="http://schemas.microsoft.com/office/drawing/2014/main" id="{D773A4A1-819E-4717-88B8-97CCC03DAAC6}"/>
               </a:ext>
             </a:extLst>
           </p:cNvPr>
@@ -15678,7 +16214,7 @@
           <p:cNvPr id="15" name="">
             <a:extLst xmlns:a="http://schemas.openxmlformats.org/drawingml/2006/main">
               <a:ext uri="{FF2B5EF4-FFF2-40B4-BE49-F238E27FC236}">
-                <a16:creationId xmlns:a16="http://schemas.microsoft.com/office/drawing/2014/main" id="{5FAD8F76-9B93-4981-8EC6-42C2B8950F1E}"/>
+                <a16:creationId xmlns:a16="http://schemas.microsoft.com/office/drawing/2014/main" id="{6BEB5BF9-EF71-49C7-BD54-2C38FABC6A18}"/>
               </a:ext>
             </a:extLst>
           </p:cNvPr>
@@ -15726,7 +16262,7 @@
     </p:spTree>
     <p:extLst>
       <p:ext uri="{BB962C8B-B14F-4D97-AF65-F5344CB8AC3E}">
-        <p14:creationId xmlns:p14="http://schemas.microsoft.com/office/powerpoint/2010/main" val="2064540952"/>
+        <p14:creationId xmlns:p14="http://schemas.microsoft.com/office/powerpoint/2010/main" val="1268203400"/>
       </p:ext>
     </p:extLst>
   </p:cSld>
@@ -15757,7 +16293,7 @@
           <p:cNvPr id="1" name="">
             <a:extLst xmlns:a="http://schemas.openxmlformats.org/drawingml/2006/main">
               <a:ext uri="{FF2B5EF4-FFF2-40B4-BE49-F238E27FC236}">
-                <a16:creationId xmlns:a16="http://schemas.microsoft.com/office/drawing/2014/main" id="{2AEC2C2C-486E-4374-B0FC-B4E912C8FB84}"/>
+                <a16:creationId xmlns:a16="http://schemas.microsoft.com/office/drawing/2014/main" id="{CD248A3D-5F94-4A04-9EF9-4D00E9AF515C}"/>
               </a:ext>
             </a:extLst>
           </p:cNvPr>
@@ -15807,7 +16343,7 @@
           <p:cNvPr id="2" name="">
             <a:extLst xmlns:a="http://schemas.openxmlformats.org/drawingml/2006/main">
               <a:ext uri="{FF2B5EF4-FFF2-40B4-BE49-F238E27FC236}">
-                <a16:creationId xmlns:a16="http://schemas.microsoft.com/office/drawing/2014/main" id="{83E8B660-E94E-4080-B6F0-88E6FE0E2678}"/>
+                <a16:creationId xmlns:a16="http://schemas.microsoft.com/office/drawing/2014/main" id="{5D7C6985-9560-41CB-AB54-944AEE7D476A}"/>
               </a:ext>
             </a:extLst>
           </p:cNvPr>
@@ -15857,7 +16393,7 @@
           <p:cNvPr id="3" name="">
             <a:extLst xmlns:a="http://schemas.openxmlformats.org/drawingml/2006/main">
               <a:ext uri="{FF2B5EF4-FFF2-40B4-BE49-F238E27FC236}">
-                <a16:creationId xmlns:a16="http://schemas.microsoft.com/office/drawing/2014/main" id="{02852B1A-5CD1-4D16-95DD-9F3833994896}"/>
+                <a16:creationId xmlns:a16="http://schemas.microsoft.com/office/drawing/2014/main" id="{5E33CA6F-7380-408C-8CA0-4DA72407E54B}"/>
               </a:ext>
             </a:extLst>
           </p:cNvPr>
@@ -15888,7 +16424,7 @@
           <p:cNvPr id="4" name="">
             <a:extLst xmlns:a="http://schemas.openxmlformats.org/drawingml/2006/main">
               <a:ext uri="{FF2B5EF4-FFF2-40B4-BE49-F238E27FC236}">
-                <a16:creationId xmlns:a16="http://schemas.microsoft.com/office/drawing/2014/main" id="{85B17045-B285-4A51-9FE0-8C2387A2CEE0}"/>
+                <a16:creationId xmlns:a16="http://schemas.microsoft.com/office/drawing/2014/main" id="{FABB2A9F-80CB-4D31-AE88-7C3C0E374EB9}"/>
               </a:ext>
             </a:extLst>
           </p:cNvPr>
@@ -15921,7 +16457,7 @@
           <p:cNvPr id="5" name="">
             <a:extLst xmlns:a="http://schemas.openxmlformats.org/drawingml/2006/main">
               <a:ext uri="{FF2B5EF4-FFF2-40B4-BE49-F238E27FC236}">
-                <a16:creationId xmlns:a16="http://schemas.microsoft.com/office/drawing/2014/main" id="{76F53DC4-BBC5-4073-907F-4D4A3246608C}"/>
+                <a16:creationId xmlns:a16="http://schemas.microsoft.com/office/drawing/2014/main" id="{4EA2E3D2-B3B0-4E2D-9876-D68A3C6C5C57}"/>
               </a:ext>
             </a:extLst>
           </p:cNvPr>
@@ -15971,7 +16507,7 @@
           <p:cNvPr id="6" name="">
             <a:extLst xmlns:a="http://schemas.openxmlformats.org/drawingml/2006/main">
               <a:ext uri="{FF2B5EF4-FFF2-40B4-BE49-F238E27FC236}">
-                <a16:creationId xmlns:a16="http://schemas.microsoft.com/office/drawing/2014/main" id="{9FA7775B-44E9-4431-894B-881ECBBA55C9}"/>
+                <a16:creationId xmlns:a16="http://schemas.microsoft.com/office/drawing/2014/main" id="{248AE2A1-6BBD-4CD3-BB9E-0FBB5A12124B}"/>
               </a:ext>
             </a:extLst>
           </p:cNvPr>
@@ -16021,7 +16557,7 @@
           <p:cNvPr id="7" name="">
             <a:extLst xmlns:a="http://schemas.openxmlformats.org/drawingml/2006/main">
               <a:ext uri="{FF2B5EF4-FFF2-40B4-BE49-F238E27FC236}">
-                <a16:creationId xmlns:a16="http://schemas.microsoft.com/office/drawing/2014/main" id="{6AD995BB-73F9-4D21-9FCE-7C4394C9AE3D}"/>
+                <a16:creationId xmlns:a16="http://schemas.microsoft.com/office/drawing/2014/main" id="{69085EE5-BD3D-4F75-B79F-830394E63D21}"/>
               </a:ext>
             </a:extLst>
           </p:cNvPr>
@@ -16071,7 +16607,7 @@
           <p:cNvPr id="8" name="">
             <a:extLst xmlns:a="http://schemas.openxmlformats.org/drawingml/2006/main">
               <a:ext uri="{FF2B5EF4-FFF2-40B4-BE49-F238E27FC236}">
-                <a16:creationId xmlns:a16="http://schemas.microsoft.com/office/drawing/2014/main" id="{817C6A63-8559-41E9-87A7-9D4232370D25}"/>
+                <a16:creationId xmlns:a16="http://schemas.microsoft.com/office/drawing/2014/main" id="{D5DE64B9-23E8-4552-A243-A29AA9FFEF99}"/>
               </a:ext>
             </a:extLst>
           </p:cNvPr>
@@ -16104,7 +16640,7 @@
           <p:cNvPr id="9" name="">
             <a:extLst xmlns:a="http://schemas.openxmlformats.org/drawingml/2006/main">
               <a:ext uri="{FF2B5EF4-FFF2-40B4-BE49-F238E27FC236}">
-                <a16:creationId xmlns:a16="http://schemas.microsoft.com/office/drawing/2014/main" id="{17D6369F-842D-4D44-A0BF-80EFE67BBA31}"/>
+                <a16:creationId xmlns:a16="http://schemas.microsoft.com/office/drawing/2014/main" id="{447D6848-99BD-4D53-A062-9740AD3E10AF}"/>
               </a:ext>
             </a:extLst>
           </p:cNvPr>
@@ -16154,7 +16690,7 @@
           <p:cNvPr id="10" name="">
             <a:extLst xmlns:a="http://schemas.openxmlformats.org/drawingml/2006/main">
               <a:ext uri="{FF2B5EF4-FFF2-40B4-BE49-F238E27FC236}">
-                <a16:creationId xmlns:a16="http://schemas.microsoft.com/office/drawing/2014/main" id="{A2B40512-EA1F-4576-BBB1-1C81B9572928}"/>
+                <a16:creationId xmlns:a16="http://schemas.microsoft.com/office/drawing/2014/main" id="{53F23226-B731-44D9-B327-1DF2D2D67B08}"/>
               </a:ext>
             </a:extLst>
           </p:cNvPr>
@@ -16194,7 +16730,7 @@
                   <a:srgbClr val="000000"/>
                 </a:solidFill>
               </a:rPr>
-              <a:t>79.1%</a:t>
+              <a:t>108.9%</a:t>
             </a:r>
           </a:p>
         </p:txBody>
@@ -16204,7 +16740,7 @@
           <p:cNvPr id="11" name="">
             <a:extLst xmlns:a="http://schemas.openxmlformats.org/drawingml/2006/main">
               <a:ext uri="{FF2B5EF4-FFF2-40B4-BE49-F238E27FC236}">
-                <a16:creationId xmlns:a16="http://schemas.microsoft.com/office/drawing/2014/main" id="{D46E2D47-34E3-4845-A78D-D5BBA9E587E7}"/>
+                <a16:creationId xmlns:a16="http://schemas.microsoft.com/office/drawing/2014/main" id="{DE297EE0-B849-4A99-A78F-E190095F94B9}"/>
               </a:ext>
             </a:extLst>
           </p:cNvPr>
@@ -16254,7 +16790,7 @@
           <p:cNvPr id="12" name="">
             <a:extLst xmlns:a="http://schemas.openxmlformats.org/drawingml/2006/main">
               <a:ext uri="{FF2B5EF4-FFF2-40B4-BE49-F238E27FC236}">
-                <a16:creationId xmlns:a16="http://schemas.microsoft.com/office/drawing/2014/main" id="{D277181F-CC98-458C-BD57-37FBFA06325E}"/>
+                <a16:creationId xmlns:a16="http://schemas.microsoft.com/office/drawing/2014/main" id="{DD71C8E7-C3BB-4FD5-A31D-A3A1552ABD16}"/>
               </a:ext>
             </a:extLst>
           </p:cNvPr>
@@ -16287,7 +16823,7 @@
           <p:cNvPr id="13" name="">
             <a:extLst xmlns:a="http://schemas.openxmlformats.org/drawingml/2006/main">
               <a:ext uri="{FF2B5EF4-FFF2-40B4-BE49-F238E27FC236}">
-                <a16:creationId xmlns:a16="http://schemas.microsoft.com/office/drawing/2014/main" id="{2A652A3F-24DE-4BC2-BBD4-4F8D987CA4A6}"/>
+                <a16:creationId xmlns:a16="http://schemas.microsoft.com/office/drawing/2014/main" id="{0EE663A6-79AA-4A27-93F0-3D30535390F7}"/>
               </a:ext>
             </a:extLst>
           </p:cNvPr>
@@ -16337,7 +16873,7 @@
           <p:cNvPr id="14" name="">
             <a:extLst xmlns:a="http://schemas.openxmlformats.org/drawingml/2006/main">
               <a:ext uri="{FF2B5EF4-FFF2-40B4-BE49-F238E27FC236}">
-                <a16:creationId xmlns:a16="http://schemas.microsoft.com/office/drawing/2014/main" id="{30BDEEBF-3575-4FC6-A8B7-CE6BAA085F82}"/>
+                <a16:creationId xmlns:a16="http://schemas.microsoft.com/office/drawing/2014/main" id="{CBFADCA8-ED69-4EB2-A365-6E829147A38E}"/>
               </a:ext>
             </a:extLst>
           </p:cNvPr>
@@ -16377,7 +16913,7 @@
                   <a:srgbClr val="000000"/>
                 </a:solidFill>
               </a:rPr>
-              <a:t>-41.4%</a:t>
+              <a:t>-37.8%</a:t>
             </a:r>
           </a:p>
         </p:txBody>
@@ -16387,7 +16923,7 @@
           <p:cNvPr id="15" name="">
             <a:extLst xmlns:a="http://schemas.openxmlformats.org/drawingml/2006/main">
               <a:ext uri="{FF2B5EF4-FFF2-40B4-BE49-F238E27FC236}">
-                <a16:creationId xmlns:a16="http://schemas.microsoft.com/office/drawing/2014/main" id="{80BE8CCC-D714-4B8F-A5B9-6060DABD0FC5}"/>
+                <a16:creationId xmlns:a16="http://schemas.microsoft.com/office/drawing/2014/main" id="{1BC63476-1E66-4068-806F-B125BF4B4B5F}"/>
               </a:ext>
             </a:extLst>
           </p:cNvPr>
@@ -16437,7 +16973,7 @@
           <p:cNvPr id="16" name="">
             <a:extLst xmlns:a="http://schemas.openxmlformats.org/drawingml/2006/main">
               <a:ext uri="{FF2B5EF4-FFF2-40B4-BE49-F238E27FC236}">
-                <a16:creationId xmlns:a16="http://schemas.microsoft.com/office/drawing/2014/main" id="{5657871A-7F8F-4098-B590-433B03A2E926}"/>
+                <a16:creationId xmlns:a16="http://schemas.microsoft.com/office/drawing/2014/main" id="{A7CA13CB-29E3-4A87-9CE3-DB1E76726448}"/>
               </a:ext>
             </a:extLst>
           </p:cNvPr>
@@ -16470,7 +17006,7 @@
           <p:cNvPr id="17" name="">
             <a:extLst xmlns:a="http://schemas.openxmlformats.org/drawingml/2006/main">
               <a:ext uri="{FF2B5EF4-FFF2-40B4-BE49-F238E27FC236}">
-                <a16:creationId xmlns:a16="http://schemas.microsoft.com/office/drawing/2014/main" id="{1E59BC29-2BA6-4048-ABE4-6EDC9519A2F8}"/>
+                <a16:creationId xmlns:a16="http://schemas.microsoft.com/office/drawing/2014/main" id="{A32074D8-C63B-475F-BD23-E4AA8C2853EC}"/>
               </a:ext>
             </a:extLst>
           </p:cNvPr>
@@ -16520,7 +17056,7 @@
           <p:cNvPr id="18" name="">
             <a:extLst xmlns:a="http://schemas.openxmlformats.org/drawingml/2006/main">
               <a:ext uri="{FF2B5EF4-FFF2-40B4-BE49-F238E27FC236}">
-                <a16:creationId xmlns:a16="http://schemas.microsoft.com/office/drawing/2014/main" id="{3F84859E-1A75-4B12-A3F9-08C9E12AF12A}"/>
+                <a16:creationId xmlns:a16="http://schemas.microsoft.com/office/drawing/2014/main" id="{22D68765-E77F-4789-BBF2-0A18049A788D}"/>
               </a:ext>
             </a:extLst>
           </p:cNvPr>
@@ -16560,7 +17096,7 @@
                   <a:srgbClr val="000000"/>
                 </a:solidFill>
               </a:rPr>
-              <a:t>36.9%</a:t>
+              <a:t>42.3%</a:t>
             </a:r>
           </a:p>
         </p:txBody>
@@ -16570,7 +17106,7 @@
           <p:cNvPr id="19" name="">
             <a:extLst xmlns:a="http://schemas.openxmlformats.org/drawingml/2006/main">
               <a:ext uri="{FF2B5EF4-FFF2-40B4-BE49-F238E27FC236}">
-                <a16:creationId xmlns:a16="http://schemas.microsoft.com/office/drawing/2014/main" id="{D1340D69-8024-4CEC-8654-7E2A0A6DC529}"/>
+                <a16:creationId xmlns:a16="http://schemas.microsoft.com/office/drawing/2014/main" id="{B6106C51-98E0-4E92-80FD-69FD0E1040BC}"/>
               </a:ext>
             </a:extLst>
           </p:cNvPr>
@@ -16620,7 +17156,7 @@
           <p:cNvPr id="20" name="">
             <a:extLst xmlns:a="http://schemas.openxmlformats.org/drawingml/2006/main">
               <a:ext uri="{FF2B5EF4-FFF2-40B4-BE49-F238E27FC236}">
-                <a16:creationId xmlns:a16="http://schemas.microsoft.com/office/drawing/2014/main" id="{4F914C5D-A05A-450F-9342-E3154A1F29F2}"/>
+                <a16:creationId xmlns:a16="http://schemas.microsoft.com/office/drawing/2014/main" id="{A6C23F94-C4FB-4F13-8B8A-17E2498584E1}"/>
               </a:ext>
             </a:extLst>
           </p:cNvPr>
@@ -16668,7 +17204,7 @@
     </p:spTree>
     <p:extLst>
       <p:ext uri="{BB962C8B-B14F-4D97-AF65-F5344CB8AC3E}">
-        <p14:creationId xmlns:p14="http://schemas.microsoft.com/office/powerpoint/2010/main" val="304550693"/>
+        <p14:creationId xmlns:p14="http://schemas.microsoft.com/office/powerpoint/2010/main" val="844464864"/>
       </p:ext>
     </p:extLst>
   </p:cSld>
@@ -16699,7 +17235,7 @@
           <p:cNvPr id="1" name="">
             <a:extLst xmlns:a="http://schemas.openxmlformats.org/drawingml/2006/main">
               <a:ext uri="{FF2B5EF4-FFF2-40B4-BE49-F238E27FC236}">
-                <a16:creationId xmlns:a16="http://schemas.microsoft.com/office/drawing/2014/main" id="{57977EB5-BBAA-4134-A532-3FE6D69DF830}"/>
+                <a16:creationId xmlns:a16="http://schemas.microsoft.com/office/drawing/2014/main" id="{E473B616-4B68-4DF4-8130-54B8122F6D00}"/>
               </a:ext>
             </a:extLst>
           </p:cNvPr>
@@ -16749,7 +17285,7 @@
           <p:cNvPr id="2" name="">
             <a:extLst xmlns:a="http://schemas.openxmlformats.org/drawingml/2006/main">
               <a:ext uri="{FF2B5EF4-FFF2-40B4-BE49-F238E27FC236}">
-                <a16:creationId xmlns:a16="http://schemas.microsoft.com/office/drawing/2014/main" id="{40802E73-6A64-4344-B9D8-77CEB2591111}"/>
+                <a16:creationId xmlns:a16="http://schemas.microsoft.com/office/drawing/2014/main" id="{4EC4E49E-A244-4B1B-B05B-C6C689B74AFC}"/>
               </a:ext>
             </a:extLst>
           </p:cNvPr>
@@ -16799,7 +17335,7 @@
           <p:cNvPr id="3" name="">
             <a:extLst xmlns:a="http://schemas.openxmlformats.org/drawingml/2006/main">
               <a:ext uri="{FF2B5EF4-FFF2-40B4-BE49-F238E27FC236}">
-                <a16:creationId xmlns:a16="http://schemas.microsoft.com/office/drawing/2014/main" id="{9C78C24B-EB88-48D7-8796-4D28AFE5FA7A}"/>
+                <a16:creationId xmlns:a16="http://schemas.microsoft.com/office/drawing/2014/main" id="{BADD7D4E-DEBA-46A9-8CCA-B43E3152EC0B}"/>
               </a:ext>
             </a:extLst>
           </p:cNvPr>
@@ -16834,7 +17370,7 @@
           <p:nvPr/>
         </p:nvPicPr>
         <p:blipFill>
-          <a:blip xmlns:r="http://schemas.openxmlformats.org/officeDocument/2006/relationships" xmlns:a="http://schemas.openxmlformats.org/drawingml/2006/main" r:embed="Rd7335232432342ad"/>
+          <a:blip xmlns:r="http://schemas.openxmlformats.org/officeDocument/2006/relationships" xmlns:a="http://schemas.openxmlformats.org/drawingml/2006/main" r:embed="R6d8dd4c1f02c46c4"/>
           <a:stretch xmlns:a="http://schemas.openxmlformats.org/drawingml/2006/main"/>
         </p:blipFill>
         <p:spPr>
@@ -16852,7 +17388,7 @@
           <p:cNvPr id="5" name="">
             <a:extLst xmlns:a="http://schemas.openxmlformats.org/drawingml/2006/main">
               <a:ext uri="{FF2B5EF4-FFF2-40B4-BE49-F238E27FC236}">
-                <a16:creationId xmlns:a16="http://schemas.microsoft.com/office/drawing/2014/main" id="{4734A07D-FFBF-45C3-8347-C99E5C3945FE}"/>
+                <a16:creationId xmlns:a16="http://schemas.microsoft.com/office/drawing/2014/main" id="{92692C9A-8668-4BA1-9449-518CBE2F9B2B}"/>
               </a:ext>
             </a:extLst>
           </p:cNvPr>
@@ -16902,7 +17438,7 @@
           <p:cNvPr id="6" name="">
             <a:extLst xmlns:a="http://schemas.openxmlformats.org/drawingml/2006/main">
               <a:ext uri="{FF2B5EF4-FFF2-40B4-BE49-F238E27FC236}">
-                <a16:creationId xmlns:a16="http://schemas.microsoft.com/office/drawing/2014/main" id="{3873559E-84F0-45FC-A118-79F196E74736}"/>
+                <a16:creationId xmlns:a16="http://schemas.microsoft.com/office/drawing/2014/main" id="{0EFE9E31-8BAD-45C5-BC02-701EC737AEA7}"/>
               </a:ext>
             </a:extLst>
           </p:cNvPr>
@@ -16942,7 +17478,7 @@
                   <a:srgbClr val="222222"/>
                 </a:solidFill>
               </a:rPr>
-              <a:t>XGBoost lifted 2020 return from 54.0% to 79.1% and improved 2022 from -49.7% to -41.4%. Equal-weight hold remains the hurdle in strong bull windows.</a:t>
+              <a:t>XGBoost lifted 2020 return from 54.0% to 108.9% and improved 2022 from -49.7% to -37.8%. Equal-weight hold remains the hurdle in strong bull windows.</a:t>
             </a:r>
           </a:p>
         </p:txBody>
@@ -16950,7 +17486,7 @@
     </p:spTree>
     <p:extLst>
       <p:ext uri="{BB962C8B-B14F-4D97-AF65-F5344CB8AC3E}">
-        <p14:creationId xmlns:p14="http://schemas.microsoft.com/office/powerpoint/2010/main" val="1457097087"/>
+        <p14:creationId xmlns:p14="http://schemas.microsoft.com/office/powerpoint/2010/main" val="971917695"/>
       </p:ext>
     </p:extLst>
   </p:cSld>
@@ -16981,7 +17517,7 @@
           <p:cNvPr id="1" name="">
             <a:extLst xmlns:a="http://schemas.openxmlformats.org/drawingml/2006/main">
               <a:ext uri="{FF2B5EF4-FFF2-40B4-BE49-F238E27FC236}">
-                <a16:creationId xmlns:a16="http://schemas.microsoft.com/office/drawing/2014/main" id="{FEFA8D20-07C2-43C0-A25A-9A9700B0E3A4}"/>
+                <a16:creationId xmlns:a16="http://schemas.microsoft.com/office/drawing/2014/main" id="{3180426D-32DE-461F-8E3A-5EE8EB73E2C9}"/>
               </a:ext>
             </a:extLst>
           </p:cNvPr>
@@ -17031,7 +17567,7 @@
           <p:cNvPr id="2" name="">
             <a:extLst xmlns:a="http://schemas.openxmlformats.org/drawingml/2006/main">
               <a:ext uri="{FF2B5EF4-FFF2-40B4-BE49-F238E27FC236}">
-                <a16:creationId xmlns:a16="http://schemas.microsoft.com/office/drawing/2014/main" id="{3F37DBE0-B05D-436D-9FB5-5B6A158B3CA9}"/>
+                <a16:creationId xmlns:a16="http://schemas.microsoft.com/office/drawing/2014/main" id="{0AC320CB-172F-4925-9661-04FE3F360D4F}"/>
               </a:ext>
             </a:extLst>
           </p:cNvPr>
@@ -17081,7 +17617,7 @@
           <p:cNvPr id="3" name="">
             <a:extLst xmlns:a="http://schemas.openxmlformats.org/drawingml/2006/main">
               <a:ext uri="{FF2B5EF4-FFF2-40B4-BE49-F238E27FC236}">
-                <a16:creationId xmlns:a16="http://schemas.microsoft.com/office/drawing/2014/main" id="{5D4DCD68-44F8-4ECE-B66B-1E202FE70C9E}"/>
+                <a16:creationId xmlns:a16="http://schemas.microsoft.com/office/drawing/2014/main" id="{F2008A9E-345A-4525-ACA1-C24607B0F1C4}"/>
               </a:ext>
             </a:extLst>
           </p:cNvPr>
@@ -17116,7 +17652,7 @@
           <p:nvPr/>
         </p:nvPicPr>
         <p:blipFill>
-          <a:blip xmlns:r="http://schemas.openxmlformats.org/officeDocument/2006/relationships" xmlns:a="http://schemas.openxmlformats.org/drawingml/2006/main" r:embed="Rb8cd0b4869574853"/>
+          <a:blip xmlns:r="http://schemas.openxmlformats.org/officeDocument/2006/relationships" xmlns:a="http://schemas.openxmlformats.org/drawingml/2006/main" r:embed="R585258a9f2c64910"/>
           <a:stretch xmlns:a="http://schemas.openxmlformats.org/drawingml/2006/main"/>
         </p:blipFill>
         <p:spPr>
@@ -17134,7 +17670,7 @@
           <p:cNvPr id="5" name="">
             <a:extLst xmlns:a="http://schemas.openxmlformats.org/drawingml/2006/main">
               <a:ext uri="{FF2B5EF4-FFF2-40B4-BE49-F238E27FC236}">
-                <a16:creationId xmlns:a16="http://schemas.microsoft.com/office/drawing/2014/main" id="{21F2333A-ADB0-4DE7-BD01-1E98EBDB2A92}"/>
+                <a16:creationId xmlns:a16="http://schemas.microsoft.com/office/drawing/2014/main" id="{7C5AB4E1-2FD6-4380-BCC7-6D78882CF60C}"/>
               </a:ext>
             </a:extLst>
           </p:cNvPr>
@@ -17184,7 +17720,7 @@
           <p:cNvPr id="6" name="">
             <a:extLst xmlns:a="http://schemas.openxmlformats.org/drawingml/2006/main">
               <a:ext uri="{FF2B5EF4-FFF2-40B4-BE49-F238E27FC236}">
-                <a16:creationId xmlns:a16="http://schemas.microsoft.com/office/drawing/2014/main" id="{564A5AA4-D495-4E2B-A52A-9AE95826EC5F}"/>
+                <a16:creationId xmlns:a16="http://schemas.microsoft.com/office/drawing/2014/main" id="{14AD4597-D118-4F71-8AA2-594C2F901AC6}"/>
               </a:ext>
             </a:extLst>
           </p:cNvPr>
@@ -17224,7 +17760,7 @@
                   <a:srgbClr val="222222"/>
                 </a:solidFill>
               </a:rPr>
-              <a:t>XGBoost improved replay, but its 2020 AUC was 0.511 versus GLM at 0.520. The gain may come from threshold-crossing timing and drawdown behavior rather than cleaner global ranking.</a:t>
+              <a:t>XGBoost improved replay, but its 2020 AUC was 0.510 versus GLM at 0.520. The gain may come from threshold-crossing timing and drawdown behavior rather than cleaner global ranking.</a:t>
             </a:r>
           </a:p>
         </p:txBody>
@@ -17232,7 +17768,7 @@
     </p:spTree>
     <p:extLst>
       <p:ext uri="{BB962C8B-B14F-4D97-AF65-F5344CB8AC3E}">
-        <p14:creationId xmlns:p14="http://schemas.microsoft.com/office/powerpoint/2010/main" val="704132569"/>
+        <p14:creationId xmlns:p14="http://schemas.microsoft.com/office/powerpoint/2010/main" val="1299845516"/>
       </p:ext>
     </p:extLst>
   </p:cSld>
@@ -17263,7 +17799,7 @@
           <p:cNvPr id="1" name="">
             <a:extLst xmlns:a="http://schemas.openxmlformats.org/drawingml/2006/main">
               <a:ext uri="{FF2B5EF4-FFF2-40B4-BE49-F238E27FC236}">
-                <a16:creationId xmlns:a16="http://schemas.microsoft.com/office/drawing/2014/main" id="{81D5683D-697A-4659-92A7-AB6810F5E5B9}"/>
+                <a16:creationId xmlns:a16="http://schemas.microsoft.com/office/drawing/2014/main" id="{CF1F455F-1E89-4E1F-88F8-852AEE60D82B}"/>
               </a:ext>
             </a:extLst>
           </p:cNvPr>
@@ -17313,7 +17849,7 @@
           <p:cNvPr id="2" name="">
             <a:extLst xmlns:a="http://schemas.openxmlformats.org/drawingml/2006/main">
               <a:ext uri="{FF2B5EF4-FFF2-40B4-BE49-F238E27FC236}">
-                <a16:creationId xmlns:a16="http://schemas.microsoft.com/office/drawing/2014/main" id="{8C74112C-101D-4FD1-BA83-D33001FD6F51}"/>
+                <a16:creationId xmlns:a16="http://schemas.microsoft.com/office/drawing/2014/main" id="{7D074F94-2FE6-4E63-B2D0-D83579548BE6}"/>
               </a:ext>
             </a:extLst>
           </p:cNvPr>
@@ -17363,7 +17899,7 @@
           <p:cNvPr id="3" name="">
             <a:extLst xmlns:a="http://schemas.openxmlformats.org/drawingml/2006/main">
               <a:ext uri="{FF2B5EF4-FFF2-40B4-BE49-F238E27FC236}">
-                <a16:creationId xmlns:a16="http://schemas.microsoft.com/office/drawing/2014/main" id="{BD87C712-3D45-40B6-932E-7283B2D3F164}"/>
+                <a16:creationId xmlns:a16="http://schemas.microsoft.com/office/drawing/2014/main" id="{3B7E66A3-E3EB-4429-9250-1B0807F115B9}"/>
               </a:ext>
             </a:extLst>
           </p:cNvPr>
@@ -17398,7 +17934,7 @@
           <p:nvPr/>
         </p:nvPicPr>
         <p:blipFill>
-          <a:blip xmlns:r="http://schemas.openxmlformats.org/officeDocument/2006/relationships" xmlns:a="http://schemas.openxmlformats.org/drawingml/2006/main" r:embed="R56201ba41a254f2d"/>
+          <a:blip xmlns:r="http://schemas.openxmlformats.org/officeDocument/2006/relationships" xmlns:a="http://schemas.openxmlformats.org/drawingml/2006/main" r:embed="R8b3138f890084389"/>
           <a:stretch xmlns:a="http://schemas.openxmlformats.org/drawingml/2006/main"/>
         </p:blipFill>
         <p:spPr>
@@ -17416,7 +17952,7 @@
           <p:cNvPr id="5" name="">
             <a:extLst xmlns:a="http://schemas.openxmlformats.org/drawingml/2006/main">
               <a:ext uri="{FF2B5EF4-FFF2-40B4-BE49-F238E27FC236}">
-                <a16:creationId xmlns:a16="http://schemas.microsoft.com/office/drawing/2014/main" id="{08472E7B-40AF-40B2-86F0-76A713555BE8}"/>
+                <a16:creationId xmlns:a16="http://schemas.microsoft.com/office/drawing/2014/main" id="{F7E5AB61-EBC7-4C04-AF51-AB5DBC139CF2}"/>
               </a:ext>
             </a:extLst>
           </p:cNvPr>
@@ -17466,7 +18002,7 @@
           <p:cNvPr id="6" name="">
             <a:extLst xmlns:a="http://schemas.openxmlformats.org/drawingml/2006/main">
               <a:ext uri="{FF2B5EF4-FFF2-40B4-BE49-F238E27FC236}">
-                <a16:creationId xmlns:a16="http://schemas.microsoft.com/office/drawing/2014/main" id="{0A68E902-D6F0-4DD7-9158-EF7CA0E813A8}"/>
+                <a16:creationId xmlns:a16="http://schemas.microsoft.com/office/drawing/2014/main" id="{A688A090-1530-4FCE-86EE-E7DD304EF3E2}"/>
               </a:ext>
             </a:extLst>
           </p:cNvPr>
@@ -17514,7 +18050,7 @@
     </p:spTree>
     <p:extLst>
       <p:ext uri="{BB962C8B-B14F-4D97-AF65-F5344CB8AC3E}">
-        <p14:creationId xmlns:p14="http://schemas.microsoft.com/office/powerpoint/2010/main" val="1267362920"/>
+        <p14:creationId xmlns:p14="http://schemas.microsoft.com/office/powerpoint/2010/main" val="1306313329"/>
       </p:ext>
     </p:extLst>
   </p:cSld>
@@ -17545,7 +18081,7 @@
           <p:cNvPr id="1" name="">
             <a:extLst xmlns:a="http://schemas.openxmlformats.org/drawingml/2006/main">
               <a:ext uri="{FF2B5EF4-FFF2-40B4-BE49-F238E27FC236}">
-                <a16:creationId xmlns:a16="http://schemas.microsoft.com/office/drawing/2014/main" id="{4CBDAF50-5273-46C4-82BB-234774AB04DE}"/>
+                <a16:creationId xmlns:a16="http://schemas.microsoft.com/office/drawing/2014/main" id="{97B9A805-EDEA-4750-AD52-60948612EB25}"/>
               </a:ext>
             </a:extLst>
           </p:cNvPr>
@@ -17595,7 +18131,7 @@
           <p:cNvPr id="2" name="">
             <a:extLst xmlns:a="http://schemas.openxmlformats.org/drawingml/2006/main">
               <a:ext uri="{FF2B5EF4-FFF2-40B4-BE49-F238E27FC236}">
-                <a16:creationId xmlns:a16="http://schemas.microsoft.com/office/drawing/2014/main" id="{8D8D5B61-F424-4D25-B15B-346BB0DFCFA1}"/>
+                <a16:creationId xmlns:a16="http://schemas.microsoft.com/office/drawing/2014/main" id="{07050216-4340-44A9-AA26-953AE00CD60B}"/>
               </a:ext>
             </a:extLst>
           </p:cNvPr>
@@ -17645,7 +18181,7 @@
           <p:cNvPr id="3" name="">
             <a:extLst xmlns:a="http://schemas.openxmlformats.org/drawingml/2006/main">
               <a:ext uri="{FF2B5EF4-FFF2-40B4-BE49-F238E27FC236}">
-                <a16:creationId xmlns:a16="http://schemas.microsoft.com/office/drawing/2014/main" id="{A3AD72B9-99CE-4290-9001-02EF200EF01E}"/>
+                <a16:creationId xmlns:a16="http://schemas.microsoft.com/office/drawing/2014/main" id="{B858F7DA-775E-4C62-893A-0A497A7F4E97}"/>
               </a:ext>
             </a:extLst>
           </p:cNvPr>
@@ -17680,7 +18216,7 @@
           <p:nvPr/>
         </p:nvPicPr>
         <p:blipFill>
-          <a:blip xmlns:r="http://schemas.openxmlformats.org/officeDocument/2006/relationships" xmlns:a="http://schemas.openxmlformats.org/drawingml/2006/main" r:embed="R90dc2530af294746"/>
+          <a:blip xmlns:r="http://schemas.openxmlformats.org/officeDocument/2006/relationships" xmlns:a="http://schemas.openxmlformats.org/drawingml/2006/main" r:embed="R49ea6811c00643ce"/>
           <a:stretch xmlns:a="http://schemas.openxmlformats.org/drawingml/2006/main"/>
         </p:blipFill>
         <p:spPr>
@@ -17698,7 +18234,7 @@
           <p:cNvPr id="5" name="">
             <a:extLst xmlns:a="http://schemas.openxmlformats.org/drawingml/2006/main">
               <a:ext uri="{FF2B5EF4-FFF2-40B4-BE49-F238E27FC236}">
-                <a16:creationId xmlns:a16="http://schemas.microsoft.com/office/drawing/2014/main" id="{F86B1FD9-0798-43FB-8569-3C6EFD6CE757}"/>
+                <a16:creationId xmlns:a16="http://schemas.microsoft.com/office/drawing/2014/main" id="{0C9EEBF0-4AD4-4AF2-A2B1-DF966C6009AC}"/>
               </a:ext>
             </a:extLst>
           </p:cNvPr>
@@ -17748,7 +18284,7 @@
           <p:cNvPr id="6" name="">
             <a:extLst xmlns:a="http://schemas.openxmlformats.org/drawingml/2006/main">
               <a:ext uri="{FF2B5EF4-FFF2-40B4-BE49-F238E27FC236}">
-                <a16:creationId xmlns:a16="http://schemas.microsoft.com/office/drawing/2014/main" id="{E4D80C65-A1F9-4EB0-BA6A-D130512A9E09}"/>
+                <a16:creationId xmlns:a16="http://schemas.microsoft.com/office/drawing/2014/main" id="{94566D03-B173-4900-A553-790F3D13E278}"/>
               </a:ext>
             </a:extLst>
           </p:cNvPr>
@@ -17788,7 +18324,7 @@
                   <a:srgbClr val="222222"/>
                 </a:solidFill>
               </a:rPr>
-              <a:t>The top split-gain feature in this first run was intraday_oc_ret. Importance is not causality, but it tells us XGBoost is using candle structure, gaps, short returns, compression, and market-relative features rather than only long trend memory.</a:t>
+              <a:t>The top split-gain feature in this first run was gap_open_pct. Importance is not causality, but it tells us XGBoost is using candle structure, gaps, short returns, compression, and market-relative features rather than only long trend memory.</a:t>
             </a:r>
           </a:p>
         </p:txBody>
@@ -17796,7 +18332,7 @@
     </p:spTree>
     <p:extLst>
       <p:ext uri="{BB962C8B-B14F-4D97-AF65-F5344CB8AC3E}">
-        <p14:creationId xmlns:p14="http://schemas.microsoft.com/office/powerpoint/2010/main" val="648790409"/>
+        <p14:creationId xmlns:p14="http://schemas.microsoft.com/office/powerpoint/2010/main" val="365697834"/>
       </p:ext>
     </p:extLst>
   </p:cSld>
@@ -17827,7 +18363,7 @@
           <p:cNvPr id="1" name="">
             <a:extLst xmlns:a="http://schemas.openxmlformats.org/drawingml/2006/main">
               <a:ext uri="{FF2B5EF4-FFF2-40B4-BE49-F238E27FC236}">
-                <a16:creationId xmlns:a16="http://schemas.microsoft.com/office/drawing/2014/main" id="{E10CB68B-E373-4022-84AE-A35249E0086C}"/>
+                <a16:creationId xmlns:a16="http://schemas.microsoft.com/office/drawing/2014/main" id="{6EDE9BF6-10D4-4164-8E38-AA110C9DB63B}"/>
               </a:ext>
             </a:extLst>
           </p:cNvPr>
@@ -17877,7 +18413,7 @@
           <p:cNvPr id="2" name="">
             <a:extLst xmlns:a="http://schemas.openxmlformats.org/drawingml/2006/main">
               <a:ext uri="{FF2B5EF4-FFF2-40B4-BE49-F238E27FC236}">
-                <a16:creationId xmlns:a16="http://schemas.microsoft.com/office/drawing/2014/main" id="{DA4DCEC3-902D-4FDE-80F3-EF6FA07F1280}"/>
+                <a16:creationId xmlns:a16="http://schemas.microsoft.com/office/drawing/2014/main" id="{88EBD5B7-717F-4B06-9516-B442DF211563}"/>
               </a:ext>
             </a:extLst>
           </p:cNvPr>
@@ -17927,7 +18463,7 @@
           <p:cNvPr id="3" name="">
             <a:extLst xmlns:a="http://schemas.openxmlformats.org/drawingml/2006/main">
               <a:ext uri="{FF2B5EF4-FFF2-40B4-BE49-F238E27FC236}">
-                <a16:creationId xmlns:a16="http://schemas.microsoft.com/office/drawing/2014/main" id="{5C512A49-150E-40CD-8E2A-59CD62E314A7}"/>
+                <a16:creationId xmlns:a16="http://schemas.microsoft.com/office/drawing/2014/main" id="{62933661-A873-4AB0-84A4-762AC409F69D}"/>
               </a:ext>
             </a:extLst>
           </p:cNvPr>
@@ -17958,7 +18494,7 @@
           <p:cNvPr id="4" name="">
             <a:extLst xmlns:a="http://schemas.openxmlformats.org/drawingml/2006/main">
               <a:ext uri="{FF2B5EF4-FFF2-40B4-BE49-F238E27FC236}">
-                <a16:creationId xmlns:a16="http://schemas.microsoft.com/office/drawing/2014/main" id="{63DBC1B6-2A6A-4E21-8086-984A50ACFCE8}"/>
+                <a16:creationId xmlns:a16="http://schemas.microsoft.com/office/drawing/2014/main" id="{54587C28-D149-495E-A741-538E6EA95F29}"/>
               </a:ext>
             </a:extLst>
           </p:cNvPr>
@@ -18008,7 +18544,7 @@
           <p:cNvPr id="5" name="">
             <a:extLst xmlns:a="http://schemas.openxmlformats.org/drawingml/2006/main">
               <a:ext uri="{FF2B5EF4-FFF2-40B4-BE49-F238E27FC236}">
-                <a16:creationId xmlns:a16="http://schemas.microsoft.com/office/drawing/2014/main" id="{70A366CC-D6CD-4DEF-8DAB-B52235903C69}"/>
+                <a16:creationId xmlns:a16="http://schemas.microsoft.com/office/drawing/2014/main" id="{BEFC8EEB-02D0-4942-9998-F8EBD8C91C68}"/>
               </a:ext>
             </a:extLst>
           </p:cNvPr>
@@ -18058,7 +18594,7 @@
           <p:cNvPr id="6" name="">
             <a:extLst xmlns:a="http://schemas.openxmlformats.org/drawingml/2006/main">
               <a:ext uri="{FF2B5EF4-FFF2-40B4-BE49-F238E27FC236}">
-                <a16:creationId xmlns:a16="http://schemas.microsoft.com/office/drawing/2014/main" id="{20A37CEE-06A0-4DD7-A4D8-5A6AB7A5608C}"/>
+                <a16:creationId xmlns:a16="http://schemas.microsoft.com/office/drawing/2014/main" id="{D48E3F39-2375-4ABB-BE83-4DA5E953D5F4}"/>
               </a:ext>
             </a:extLst>
           </p:cNvPr>
@@ -18108,7 +18644,7 @@
           <p:cNvPr id="7" name="">
             <a:extLst xmlns:a="http://schemas.openxmlformats.org/drawingml/2006/main">
               <a:ext uri="{FF2B5EF4-FFF2-40B4-BE49-F238E27FC236}">
-                <a16:creationId xmlns:a16="http://schemas.microsoft.com/office/drawing/2014/main" id="{78A2CF30-EC85-4618-83C9-89F4B3620DB8}"/>
+                <a16:creationId xmlns:a16="http://schemas.microsoft.com/office/drawing/2014/main" id="{19AADDCE-C664-4225-99D3-C043DCB31A8E}"/>
               </a:ext>
             </a:extLst>
           </p:cNvPr>
@@ -18158,7 +18694,7 @@
           <p:cNvPr id="8" name="">
             <a:extLst xmlns:a="http://schemas.openxmlformats.org/drawingml/2006/main">
               <a:ext uri="{FF2B5EF4-FFF2-40B4-BE49-F238E27FC236}">
-                <a16:creationId xmlns:a16="http://schemas.microsoft.com/office/drawing/2014/main" id="{C59C08DA-2B7B-45C1-A588-FC4F6A20ED4F}"/>
+                <a16:creationId xmlns:a16="http://schemas.microsoft.com/office/drawing/2014/main" id="{55C5E9CA-0579-4340-8066-CDC00EDE984D}"/>
               </a:ext>
             </a:extLst>
           </p:cNvPr>
@@ -18208,7 +18744,7 @@
           <p:cNvPr id="9" name="">
             <a:extLst xmlns:a="http://schemas.openxmlformats.org/drawingml/2006/main">
               <a:ext uri="{FF2B5EF4-FFF2-40B4-BE49-F238E27FC236}">
-                <a16:creationId xmlns:a16="http://schemas.microsoft.com/office/drawing/2014/main" id="{6C368E5C-DE6D-4674-B8B6-8DCF1D663FE2}"/>
+                <a16:creationId xmlns:a16="http://schemas.microsoft.com/office/drawing/2014/main" id="{1F60CC61-D119-4AAA-81E5-B702F651EE2D}"/>
               </a:ext>
             </a:extLst>
           </p:cNvPr>
@@ -18258,7 +18794,7 @@
           <p:cNvPr id="10" name="">
             <a:extLst xmlns:a="http://schemas.openxmlformats.org/drawingml/2006/main">
               <a:ext uri="{FF2B5EF4-FFF2-40B4-BE49-F238E27FC236}">
-                <a16:creationId xmlns:a16="http://schemas.microsoft.com/office/drawing/2014/main" id="{1FF6872C-3550-4A86-A7CE-2EFFB0A73D18}"/>
+                <a16:creationId xmlns:a16="http://schemas.microsoft.com/office/drawing/2014/main" id="{77F07401-EE63-4164-8441-98556E9ED01E}"/>
               </a:ext>
             </a:extLst>
           </p:cNvPr>
@@ -18298,7 +18834,7 @@
                   <a:srgbClr val="222222"/>
                 </a:solidFill>
               </a:rPr>
-              <a:t>Watch 2022: XGBoost AUC was 0.484, so defense may still be fragile.</a:t>
+              <a:t>Watch 2022: XGBoost AUC was 0.478, so defense may still be fragile.</a:t>
             </a:r>
           </a:p>
         </p:txBody>
@@ -18308,7 +18844,7 @@
           <p:cNvPr id="11" name="">
             <a:extLst xmlns:a="http://schemas.openxmlformats.org/drawingml/2006/main">
               <a:ext uri="{FF2B5EF4-FFF2-40B4-BE49-F238E27FC236}">
-                <a16:creationId xmlns:a16="http://schemas.microsoft.com/office/drawing/2014/main" id="{5D0AD160-27E7-461C-B9DF-872C58B2EC3D}"/>
+                <a16:creationId xmlns:a16="http://schemas.microsoft.com/office/drawing/2014/main" id="{6284E4E5-376A-48C1-9038-A0F00F42E99C}"/>
               </a:ext>
             </a:extLst>
           </p:cNvPr>
@@ -18358,7 +18894,7 @@
           <p:cNvPr id="12" name="">
             <a:extLst xmlns:a="http://schemas.openxmlformats.org/drawingml/2006/main">
               <a:ext uri="{FF2B5EF4-FFF2-40B4-BE49-F238E27FC236}">
-                <a16:creationId xmlns:a16="http://schemas.microsoft.com/office/drawing/2014/main" id="{E9CDE3B2-AC96-4BC3-81E0-3EE0EB66144C}"/>
+                <a16:creationId xmlns:a16="http://schemas.microsoft.com/office/drawing/2014/main" id="{F05CE5C9-4148-4B19-A27F-A9F16819A58C}"/>
               </a:ext>
             </a:extLst>
           </p:cNvPr>
@@ -18406,7 +18942,2249 @@
     </p:spTree>
     <p:extLst>
       <p:ext uri="{BB962C8B-B14F-4D97-AF65-F5344CB8AC3E}">
-        <p14:creationId xmlns:p14="http://schemas.microsoft.com/office/powerpoint/2010/main" val="1520343918"/>
+        <p14:creationId xmlns:p14="http://schemas.microsoft.com/office/powerpoint/2010/main" val="810159056"/>
+      </p:ext>
+    </p:extLst>
+  </p:cSld>
+</p:sld>
+</file>
+
+<file path=ppt/slides/slide37.xml><?xml version="1.0" encoding="utf-8"?>
+<p:sld xmlns:p="http://schemas.openxmlformats.org/presentationml/2006/main">
+  <p:cSld>
+    <p:bg>
+      <p:bgPr>
+        <a:solidFill xmlns:a="http://schemas.openxmlformats.org/drawingml/2006/main">
+          <a:srgbClr val="FFFFFF"/>
+        </a:solidFill>
+      </p:bgPr>
+    </p:bg>
+    <p:spTree>
+      <p:nvGrpSpPr>
+        <p:cNvPr id="1" name=""/>
+        <p:cNvGrpSpPr/>
+        <p:nvPr/>
+      </p:nvGrpSpPr>
+      <p:grpSpPr>
+        <a:xfrm xmlns:a="http://schemas.openxmlformats.org/drawingml/2006/main"/>
+      </p:grpSpPr>
+      <p:sp>
+        <p:nvSpPr>
+          <p:cNvPr id="1" name="">
+            <a:extLst xmlns:a="http://schemas.openxmlformats.org/drawingml/2006/main">
+              <a:ext uri="{FF2B5EF4-FFF2-40B4-BE49-F238E27FC236}">
+                <a16:creationId xmlns:a16="http://schemas.microsoft.com/office/drawing/2014/main" id="{88945883-830A-4EB6-A914-3DF00966AF7F}"/>
+              </a:ext>
+            </a:extLst>
+          </p:cNvPr>
+          <p:cNvSpPr>
+            <a:spLocks xmlns:a="http://schemas.openxmlformats.org/drawingml/2006/main" noGrp="1"/>
+          </p:cNvSpPr>
+          <p:nvPr/>
+        </p:nvSpPr>
+        <p:spPr>
+          <a:xfrm xmlns:a="http://schemas.openxmlformats.org/drawingml/2006/main">
+            <a:off x="685800" y="495300"/>
+            <a:ext cx="4762500" cy="419100"/>
+          </a:xfrm>
+          <a:prstGeom xmlns:a="http://schemas.openxmlformats.org/drawingml/2006/main" prst="rect">
+            <a:avLst/>
+          </a:prstGeom>
+          <a:noFill xmlns:a="http://schemas.openxmlformats.org/drawingml/2006/main"/>
+          <a:ln xmlns:a="http://schemas.openxmlformats.org/drawingml/2006/main" w="0">
+            <a:noFill/>
+            <a:prstDash val="solid"/>
+          </a:ln>
+        </p:spPr>
+        <p:txBody>
+          <a:bodyPr xmlns:a="http://schemas.openxmlformats.org/drawingml/2006/main"/>
+          <a:lstStyle xmlns:a="http://schemas.openxmlformats.org/drawingml/2006/main"/>
+          <a:p xmlns:a="http://schemas.openxmlformats.org/drawingml/2006/main">
+            <a:pPr algn="l">
+              <a:defRPr sz="2400" b="1" i="0">
+                <a:solidFill>
+                  <a:srgbClr val="555555"/>
+                </a:solidFill>
+              </a:defRPr>
+            </a:pPr>
+            <a:r>
+              <a:rPr sz="2400" b="1" i="0">
+                <a:solidFill>
+                  <a:srgbClr val="555555"/>
+                </a:solidFill>
+              </a:rPr>
+              <a:t>Transition</a:t>
+            </a:r>
+          </a:p>
+        </p:txBody>
+      </p:sp>
+      <p:sp>
+        <p:nvSpPr>
+          <p:cNvPr id="2" name="">
+            <a:extLst xmlns:a="http://schemas.openxmlformats.org/drawingml/2006/main">
+              <a:ext uri="{FF2B5EF4-FFF2-40B4-BE49-F238E27FC236}">
+                <a16:creationId xmlns:a16="http://schemas.microsoft.com/office/drawing/2014/main" id="{75DD04B4-A808-4189-95AD-812FD663C682}"/>
+              </a:ext>
+            </a:extLst>
+          </p:cNvPr>
+          <p:cNvSpPr>
+            <a:spLocks xmlns:a="http://schemas.openxmlformats.org/drawingml/2006/main" noGrp="1"/>
+          </p:cNvSpPr>
+          <p:nvPr/>
+        </p:nvSpPr>
+        <p:spPr>
+          <a:xfrm xmlns:a="http://schemas.openxmlformats.org/drawingml/2006/main">
+            <a:off x="685800" y="1524000"/>
+            <a:ext cx="7810500" cy="1143000"/>
+          </a:xfrm>
+          <a:prstGeom xmlns:a="http://schemas.openxmlformats.org/drawingml/2006/main" prst="rect">
+            <a:avLst/>
+          </a:prstGeom>
+          <a:noFill xmlns:a="http://schemas.openxmlformats.org/drawingml/2006/main"/>
+          <a:ln xmlns:a="http://schemas.openxmlformats.org/drawingml/2006/main" w="0">
+            <a:noFill/>
+            <a:prstDash val="solid"/>
+          </a:ln>
+        </p:spPr>
+        <p:txBody>
+          <a:bodyPr xmlns:a="http://schemas.openxmlformats.org/drawingml/2006/main"/>
+          <a:lstStyle xmlns:a="http://schemas.openxmlformats.org/drawingml/2006/main"/>
+          <a:p xmlns:a="http://schemas.openxmlformats.org/drawingml/2006/main">
+            <a:pPr algn="l">
+              <a:defRPr sz="3600" b="1" i="0">
+                <a:solidFill>
+                  <a:srgbClr val="000000"/>
+                </a:solidFill>
+              </a:defRPr>
+            </a:pPr>
+            <a:r>
+              <a:rPr sz="3600" b="1" i="0">
+                <a:solidFill>
+                  <a:srgbClr val="000000"/>
+                </a:solidFill>
+              </a:rPr>
+              <a:t>Now we ask whether</a:t>
+            </a:r>
+          </a:p>
+          <a:p xmlns:a="http://schemas.openxmlformats.org/drawingml/2006/main">
+            <a:pPr algn="l">
+              <a:defRPr sz="3600" b="1" i="0">
+                <a:solidFill>
+                  <a:srgbClr val="000000"/>
+                </a:solidFill>
+              </a:defRPr>
+            </a:pPr>
+            <a:r>
+              <a:rPr sz="3600" b="1" i="0">
+                <a:solidFill>
+                  <a:srgbClr val="000000"/>
+                </a:solidFill>
+              </a:rPr>
+              <a:t>XGBoost was undertuned</a:t>
+            </a:r>
+          </a:p>
+        </p:txBody>
+      </p:sp>
+      <p:sp>
+        <p:nvSpPr>
+          <p:cNvPr id="3" name="">
+            <a:extLst xmlns:a="http://schemas.openxmlformats.org/drawingml/2006/main">
+              <a:ext uri="{FF2B5EF4-FFF2-40B4-BE49-F238E27FC236}">
+                <a16:creationId xmlns:a16="http://schemas.microsoft.com/office/drawing/2014/main" id="{C89606A0-C691-44E6-9C50-B265F8132B7D}"/>
+              </a:ext>
+            </a:extLst>
+          </p:cNvPr>
+          <p:cNvSpPr>
+            <a:spLocks xmlns:a="http://schemas.openxmlformats.org/drawingml/2006/main" noGrp="1"/>
+          </p:cNvSpPr>
+          <p:nvPr/>
+        </p:nvSpPr>
+        <p:spPr>
+          <a:xfrm xmlns:a="http://schemas.openxmlformats.org/drawingml/2006/main">
+            <a:off x="723900" y="3105150"/>
+            <a:ext cx="5715000" cy="19050"/>
+          </a:xfrm>
+          <a:prstGeom xmlns:a="http://schemas.openxmlformats.org/drawingml/2006/main" prst="rect">
+            <a:avLst/>
+          </a:prstGeom>
+          <a:solidFill xmlns:a="http://schemas.openxmlformats.org/drawingml/2006/main">
+            <a:srgbClr val="B8BCC4"/>
+          </a:solidFill>
+          <a:ln xmlns:a="http://schemas.openxmlformats.org/drawingml/2006/main" w="0">
+            <a:noFill/>
+            <a:prstDash val="solid"/>
+          </a:ln>
+        </p:spPr>
+      </p:sp>
+      <p:sp>
+        <p:nvSpPr>
+          <p:cNvPr id="4" name="">
+            <a:extLst xmlns:a="http://schemas.openxmlformats.org/drawingml/2006/main">
+              <a:ext uri="{FF2B5EF4-FFF2-40B4-BE49-F238E27FC236}">
+                <a16:creationId xmlns:a16="http://schemas.microsoft.com/office/drawing/2014/main" id="{149D5274-E65F-4EB3-8A05-DCC4B261CD3C}"/>
+              </a:ext>
+            </a:extLst>
+          </p:cNvPr>
+          <p:cNvSpPr>
+            <a:spLocks xmlns:a="http://schemas.openxmlformats.org/drawingml/2006/main" noGrp="1"/>
+          </p:cNvSpPr>
+          <p:nvPr/>
+        </p:nvSpPr>
+        <p:spPr>
+          <a:xfrm xmlns:a="http://schemas.openxmlformats.org/drawingml/2006/main">
+            <a:off x="723900" y="3467100"/>
+            <a:ext cx="7524750" cy="1104900"/>
+          </a:xfrm>
+          <a:prstGeom xmlns:a="http://schemas.openxmlformats.org/drawingml/2006/main" prst="rect">
+            <a:avLst/>
+          </a:prstGeom>
+          <a:noFill xmlns:a="http://schemas.openxmlformats.org/drawingml/2006/main"/>
+          <a:ln xmlns:a="http://schemas.openxmlformats.org/drawingml/2006/main" w="0">
+            <a:noFill/>
+            <a:prstDash val="solid"/>
+          </a:ln>
+        </p:spPr>
+        <p:txBody>
+          <a:bodyPr xmlns:a="http://schemas.openxmlformats.org/drawingml/2006/main"/>
+          <a:lstStyle xmlns:a="http://schemas.openxmlformats.org/drawingml/2006/main"/>
+          <a:p xmlns:a="http://schemas.openxmlformats.org/drawingml/2006/main">
+            <a:pPr algn="l">
+              <a:defRPr sz="1800" b="0" i="0">
+                <a:solidFill>
+                  <a:srgbClr val="222222"/>
+                </a:solidFill>
+              </a:defRPr>
+            </a:pPr>
+            <a:r>
+              <a:rPr sz="1800" b="0" i="0">
+                <a:solidFill>
+                  <a:srgbClr val="222222"/>
+                </a:solidFill>
+              </a:rPr>
+              <a:t>ML-P2b keeps the ML-P2 surface fixed and changes only XGBoost depth, rounds, and minimum child weight. Parameters are selected inside each TRAIN fold before OOS replay.</a:t>
+            </a:r>
+          </a:p>
+        </p:txBody>
+      </p:sp>
+      <p:sp>
+        <p:nvSpPr>
+          <p:cNvPr id="5" name="">
+            <a:extLst xmlns:a="http://schemas.openxmlformats.org/drawingml/2006/main">
+              <a:ext uri="{FF2B5EF4-FFF2-40B4-BE49-F238E27FC236}">
+                <a16:creationId xmlns:a16="http://schemas.microsoft.com/office/drawing/2014/main" id="{A578EDC5-6E71-43FD-812C-65A44EE3A467}"/>
+              </a:ext>
+            </a:extLst>
+          </p:cNvPr>
+          <p:cNvSpPr>
+            <a:spLocks xmlns:a="http://schemas.openxmlformats.org/drawingml/2006/main" noGrp="1"/>
+          </p:cNvSpPr>
+          <p:nvPr/>
+        </p:nvSpPr>
+        <p:spPr>
+          <a:xfrm xmlns:a="http://schemas.openxmlformats.org/drawingml/2006/main">
+            <a:off x="8801100" y="0"/>
+            <a:ext cx="3390900" cy="6858000"/>
+          </a:xfrm>
+          <a:prstGeom xmlns:a="http://schemas.openxmlformats.org/drawingml/2006/main" prst="rect">
+            <a:avLst/>
+          </a:prstGeom>
+          <a:solidFill xmlns:a="http://schemas.openxmlformats.org/drawingml/2006/main">
+            <a:srgbClr val="EDEDED"/>
+          </a:solidFill>
+          <a:ln xmlns:a="http://schemas.openxmlformats.org/drawingml/2006/main" w="0">
+            <a:noFill/>
+            <a:prstDash val="solid"/>
+          </a:ln>
+        </p:spPr>
+      </p:sp>
+      <p:sp>
+        <p:nvSpPr>
+          <p:cNvPr id="6" name="">
+            <a:extLst xmlns:a="http://schemas.openxmlformats.org/drawingml/2006/main">
+              <a:ext uri="{FF2B5EF4-FFF2-40B4-BE49-F238E27FC236}">
+                <a16:creationId xmlns:a16="http://schemas.microsoft.com/office/drawing/2014/main" id="{D8ABF1EA-1D2A-41A4-84C8-4AE617D5811D}"/>
+              </a:ext>
+            </a:extLst>
+          </p:cNvPr>
+          <p:cNvSpPr>
+            <a:spLocks xmlns:a="http://schemas.openxmlformats.org/drawingml/2006/main" noGrp="1"/>
+          </p:cNvSpPr>
+          <p:nvPr/>
+        </p:nvSpPr>
+        <p:spPr>
+          <a:xfrm xmlns:a="http://schemas.openxmlformats.org/drawingml/2006/main">
+            <a:off x="9353550" y="2343150"/>
+            <a:ext cx="2190750" cy="438150"/>
+          </a:xfrm>
+          <a:prstGeom xmlns:a="http://schemas.openxmlformats.org/drawingml/2006/main" prst="rect">
+            <a:avLst/>
+          </a:prstGeom>
+          <a:noFill xmlns:a="http://schemas.openxmlformats.org/drawingml/2006/main"/>
+          <a:ln xmlns:a="http://schemas.openxmlformats.org/drawingml/2006/main" w="0">
+            <a:noFill/>
+            <a:prstDash val="solid"/>
+          </a:ln>
+        </p:spPr>
+        <p:txBody>
+          <a:bodyPr xmlns:a="http://schemas.openxmlformats.org/drawingml/2006/main"/>
+          <a:lstStyle xmlns:a="http://schemas.openxmlformats.org/drawingml/2006/main"/>
+          <a:p xmlns:a="http://schemas.openxmlformats.org/drawingml/2006/main">
+            <a:pPr algn="ctr">
+              <a:defRPr sz="3150" b="1" i="0">
+                <a:solidFill>
+                  <a:srgbClr val="000000"/>
+                </a:solidFill>
+              </a:defRPr>
+            </a:pPr>
+            <a:r>
+              <a:rPr sz="3150" b="1" i="0">
+                <a:solidFill>
+                  <a:srgbClr val="000000"/>
+                </a:solidFill>
+              </a:rPr>
+              <a:t>ML-P2b</a:t>
+            </a:r>
+          </a:p>
+        </p:txBody>
+      </p:sp>
+      <p:sp>
+        <p:nvSpPr>
+          <p:cNvPr id="7" name="">
+            <a:extLst xmlns:a="http://schemas.openxmlformats.org/drawingml/2006/main">
+              <a:ext uri="{FF2B5EF4-FFF2-40B4-BE49-F238E27FC236}">
+                <a16:creationId xmlns:a16="http://schemas.microsoft.com/office/drawing/2014/main" id="{ED963D53-7A8C-49F3-8A8E-62AF5145A0D1}"/>
+              </a:ext>
+            </a:extLst>
+          </p:cNvPr>
+          <p:cNvSpPr>
+            <a:spLocks xmlns:a="http://schemas.openxmlformats.org/drawingml/2006/main" noGrp="1"/>
+          </p:cNvSpPr>
+          <p:nvPr/>
+        </p:nvSpPr>
+        <p:spPr>
+          <a:xfrm xmlns:a="http://schemas.openxmlformats.org/drawingml/2006/main">
+            <a:off x="9067800" y="3067050"/>
+            <a:ext cx="2762250" cy="400050"/>
+          </a:xfrm>
+          <a:prstGeom xmlns:a="http://schemas.openxmlformats.org/drawingml/2006/main" prst="rect">
+            <a:avLst/>
+          </a:prstGeom>
+          <a:noFill xmlns:a="http://schemas.openxmlformats.org/drawingml/2006/main"/>
+          <a:ln xmlns:a="http://schemas.openxmlformats.org/drawingml/2006/main" w="0">
+            <a:noFill/>
+            <a:prstDash val="solid"/>
+          </a:ln>
+        </p:spPr>
+        <p:txBody>
+          <a:bodyPr xmlns:a="http://schemas.openxmlformats.org/drawingml/2006/main"/>
+          <a:lstStyle xmlns:a="http://schemas.openxmlformats.org/drawingml/2006/main"/>
+          <a:p xmlns:a="http://schemas.openxmlformats.org/drawingml/2006/main">
+            <a:pPr algn="ctr">
+              <a:defRPr sz="1875" b="0" i="0">
+                <a:solidFill>
+                  <a:srgbClr val="222222"/>
+                </a:solidFill>
+              </a:defRPr>
+            </a:pPr>
+            <a:r>
+              <a:rPr sz="1875" b="0" i="0">
+                <a:solidFill>
+                  <a:srgbClr val="222222"/>
+                </a:solidFill>
+              </a:rPr>
+              <a:t>Small TRAIN grid</a:t>
+            </a:r>
+          </a:p>
+        </p:txBody>
+      </p:sp>
+    </p:spTree>
+    <p:extLst>
+      <p:ext uri="{BB962C8B-B14F-4D97-AF65-F5344CB8AC3E}">
+        <p14:creationId xmlns:p14="http://schemas.microsoft.com/office/powerpoint/2010/main" val="609925123"/>
+      </p:ext>
+    </p:extLst>
+  </p:cSld>
+</p:sld>
+</file>
+
+<file path=ppt/slides/slide38.xml><?xml version="1.0" encoding="utf-8"?>
+<p:sld xmlns:p="http://schemas.openxmlformats.org/presentationml/2006/main">
+  <p:cSld>
+    <p:bg>
+      <p:bgPr>
+        <a:solidFill xmlns:a="http://schemas.openxmlformats.org/drawingml/2006/main">
+          <a:srgbClr val="FFFFFF"/>
+        </a:solidFill>
+      </p:bgPr>
+    </p:bg>
+    <p:spTree>
+      <p:nvGrpSpPr>
+        <p:cNvPr id="1" name=""/>
+        <p:cNvGrpSpPr/>
+        <p:nvPr/>
+      </p:nvGrpSpPr>
+      <p:grpSpPr>
+        <a:xfrm xmlns:a="http://schemas.openxmlformats.org/drawingml/2006/main"/>
+      </p:grpSpPr>
+      <p:sp>
+        <p:nvSpPr>
+          <p:cNvPr id="1" name="">
+            <a:extLst xmlns:a="http://schemas.openxmlformats.org/drawingml/2006/main">
+              <a:ext uri="{FF2B5EF4-FFF2-40B4-BE49-F238E27FC236}">
+                <a16:creationId xmlns:a16="http://schemas.microsoft.com/office/drawing/2014/main" id="{CA96E563-0DA8-484F-9E5A-34FC0C9AAB18}"/>
+              </a:ext>
+            </a:extLst>
+          </p:cNvPr>
+          <p:cNvSpPr>
+            <a:spLocks xmlns:a="http://schemas.openxmlformats.org/drawingml/2006/main" noGrp="1"/>
+          </p:cNvSpPr>
+          <p:nvPr/>
+        </p:nvSpPr>
+        <p:spPr>
+          <a:xfrm xmlns:a="http://schemas.openxmlformats.org/drawingml/2006/main">
+            <a:off x="685800" y="400050"/>
+            <a:ext cx="8572500" cy="247650"/>
+          </a:xfrm>
+          <a:prstGeom xmlns:a="http://schemas.openxmlformats.org/drawingml/2006/main" prst="rect">
+            <a:avLst/>
+          </a:prstGeom>
+          <a:noFill xmlns:a="http://schemas.openxmlformats.org/drawingml/2006/main"/>
+          <a:ln xmlns:a="http://schemas.openxmlformats.org/drawingml/2006/main" w="0">
+            <a:noFill/>
+            <a:prstDash val="solid"/>
+          </a:ln>
+        </p:spPr>
+        <p:txBody>
+          <a:bodyPr xmlns:a="http://schemas.openxmlformats.org/drawingml/2006/main"/>
+          <a:lstStyle xmlns:a="http://schemas.openxmlformats.org/drawingml/2006/main"/>
+          <a:p xmlns:a="http://schemas.openxmlformats.org/drawingml/2006/main">
+            <a:pPr algn="l">
+              <a:defRPr sz="975" b="1" i="0">
+                <a:solidFill>
+                  <a:srgbClr val="555555"/>
+                </a:solidFill>
+              </a:defRPr>
+            </a:pPr>
+            <a:r>
+              <a:rPr sz="975" b="1" i="0">
+                <a:solidFill>
+                  <a:srgbClr val="555555"/>
+                </a:solidFill>
+              </a:rPr>
+              <a:t>GEN5.4 ML DECISION ENGINE</a:t>
+            </a:r>
+          </a:p>
+        </p:txBody>
+      </p:sp>
+      <p:sp>
+        <p:nvSpPr>
+          <p:cNvPr id="2" name="">
+            <a:extLst xmlns:a="http://schemas.openxmlformats.org/drawingml/2006/main">
+              <a:ext uri="{FF2B5EF4-FFF2-40B4-BE49-F238E27FC236}">
+                <a16:creationId xmlns:a16="http://schemas.microsoft.com/office/drawing/2014/main" id="{EE757313-B8AC-43B7-BA6D-15D8A159D206}"/>
+              </a:ext>
+            </a:extLst>
+          </p:cNvPr>
+          <p:cNvSpPr>
+            <a:spLocks xmlns:a="http://schemas.openxmlformats.org/drawingml/2006/main" noGrp="1"/>
+          </p:cNvSpPr>
+          <p:nvPr/>
+        </p:nvSpPr>
+        <p:spPr>
+          <a:xfrm xmlns:a="http://schemas.openxmlformats.org/drawingml/2006/main">
+            <a:off x="685800" y="723900"/>
+            <a:ext cx="10287000" cy="876300"/>
+          </a:xfrm>
+          <a:prstGeom xmlns:a="http://schemas.openxmlformats.org/drawingml/2006/main" prst="rect">
+            <a:avLst/>
+          </a:prstGeom>
+          <a:noFill xmlns:a="http://schemas.openxmlformats.org/drawingml/2006/main"/>
+          <a:ln xmlns:a="http://schemas.openxmlformats.org/drawingml/2006/main" w="0">
+            <a:noFill/>
+            <a:prstDash val="solid"/>
+          </a:ln>
+        </p:spPr>
+        <p:txBody>
+          <a:bodyPr xmlns:a="http://schemas.openxmlformats.org/drawingml/2006/main"/>
+          <a:lstStyle xmlns:a="http://schemas.openxmlformats.org/drawingml/2006/main"/>
+          <a:p xmlns:a="http://schemas.openxmlformats.org/drawingml/2006/main">
+            <a:pPr algn="l">
+              <a:defRPr sz="2850" b="1" i="0">
+                <a:solidFill>
+                  <a:srgbClr val="000000"/>
+                </a:solidFill>
+              </a:defRPr>
+            </a:pPr>
+            <a:r>
+              <a:rPr sz="2850" b="1" i="0">
+                <a:solidFill>
+                  <a:srgbClr val="000000"/>
+                </a:solidFill>
+              </a:rPr>
+              <a:t>The TRAIN grid wanted the most flexible candidate</a:t>
+            </a:r>
+          </a:p>
+        </p:txBody>
+      </p:sp>
+      <p:sp>
+        <p:nvSpPr>
+          <p:cNvPr id="3" name="">
+            <a:extLst xmlns:a="http://schemas.openxmlformats.org/drawingml/2006/main">
+              <a:ext uri="{FF2B5EF4-FFF2-40B4-BE49-F238E27FC236}">
+                <a16:creationId xmlns:a16="http://schemas.microsoft.com/office/drawing/2014/main" id="{9B20AF24-1019-41E1-B77F-9A027C4B7EE8}"/>
+              </a:ext>
+            </a:extLst>
+          </p:cNvPr>
+          <p:cNvSpPr>
+            <a:spLocks xmlns:a="http://schemas.openxmlformats.org/drawingml/2006/main" noGrp="1"/>
+          </p:cNvSpPr>
+          <p:nvPr/>
+        </p:nvSpPr>
+        <p:spPr>
+          <a:xfrm xmlns:a="http://schemas.openxmlformats.org/drawingml/2006/main">
+            <a:off x="685800" y="1657350"/>
+            <a:ext cx="10820400" cy="19050"/>
+          </a:xfrm>
+          <a:prstGeom xmlns:a="http://schemas.openxmlformats.org/drawingml/2006/main" prst="rect">
+            <a:avLst/>
+          </a:prstGeom>
+          <a:solidFill xmlns:a="http://schemas.openxmlformats.org/drawingml/2006/main">
+            <a:srgbClr val="B8BCC4"/>
+          </a:solidFill>
+          <a:ln xmlns:a="http://schemas.openxmlformats.org/drawingml/2006/main" w="0">
+            <a:noFill/>
+            <a:prstDash val="solid"/>
+          </a:ln>
+        </p:spPr>
+      </p:sp>
+      <p:sp>
+        <p:nvSpPr>
+          <p:cNvPr id="4" name="">
+            <a:extLst xmlns:a="http://schemas.openxmlformats.org/drawingml/2006/main">
+              <a:ext uri="{FF2B5EF4-FFF2-40B4-BE49-F238E27FC236}">
+                <a16:creationId xmlns:a16="http://schemas.microsoft.com/office/drawing/2014/main" id="{8B68B1E1-EFDA-4DEB-80D2-34BB839BA623}"/>
+              </a:ext>
+            </a:extLst>
+          </p:cNvPr>
+          <p:cNvSpPr>
+            <a:spLocks xmlns:a="http://schemas.openxmlformats.org/drawingml/2006/main" noGrp="1"/>
+          </p:cNvSpPr>
+          <p:nvPr/>
+        </p:nvSpPr>
+        <p:spPr>
+          <a:xfrm xmlns:a="http://schemas.openxmlformats.org/drawingml/2006/main">
+            <a:off x="704850" y="2152650"/>
+            <a:ext cx="2333625" cy="1428750"/>
+          </a:xfrm>
+          <a:prstGeom xmlns:a="http://schemas.openxmlformats.org/drawingml/2006/main" prst="rect">
+            <a:avLst/>
+          </a:prstGeom>
+          <a:solidFill xmlns:a="http://schemas.openxmlformats.org/drawingml/2006/main">
+            <a:srgbClr val="EDEDED"/>
+          </a:solidFill>
+          <a:ln xmlns:a="http://schemas.openxmlformats.org/drawingml/2006/main" w="9525">
+            <a:solidFill>
+              <a:srgbClr val="B8BCC4"/>
+            </a:solidFill>
+            <a:prstDash val="solid"/>
+          </a:ln>
+        </p:spPr>
+      </p:sp>
+      <p:sp>
+        <p:nvSpPr>
+          <p:cNvPr id="5" name="">
+            <a:extLst xmlns:a="http://schemas.openxmlformats.org/drawingml/2006/main">
+              <a:ext uri="{FF2B5EF4-FFF2-40B4-BE49-F238E27FC236}">
+                <a16:creationId xmlns:a16="http://schemas.microsoft.com/office/drawing/2014/main" id="{BB6C15B3-1197-4ABF-BEB7-F85779F9EF77}"/>
+              </a:ext>
+            </a:extLst>
+          </p:cNvPr>
+          <p:cNvSpPr>
+            <a:spLocks xmlns:a="http://schemas.openxmlformats.org/drawingml/2006/main" noGrp="1"/>
+          </p:cNvSpPr>
+          <p:nvPr/>
+        </p:nvSpPr>
+        <p:spPr>
+          <a:xfrm xmlns:a="http://schemas.openxmlformats.org/drawingml/2006/main">
+            <a:off x="876300" y="2305050"/>
+            <a:ext cx="1990725" cy="171450"/>
+          </a:xfrm>
+          <a:prstGeom xmlns:a="http://schemas.openxmlformats.org/drawingml/2006/main" prst="rect">
+            <a:avLst/>
+          </a:prstGeom>
+          <a:noFill xmlns:a="http://schemas.openxmlformats.org/drawingml/2006/main"/>
+          <a:ln xmlns:a="http://schemas.openxmlformats.org/drawingml/2006/main" w="0">
+            <a:noFill/>
+            <a:prstDash val="solid"/>
+          </a:ln>
+        </p:spPr>
+        <p:txBody>
+          <a:bodyPr xmlns:a="http://schemas.openxmlformats.org/drawingml/2006/main"/>
+          <a:lstStyle xmlns:a="http://schemas.openxmlformats.org/drawingml/2006/main"/>
+          <a:p xmlns:a="http://schemas.openxmlformats.org/drawingml/2006/main">
+            <a:pPr algn="l">
+              <a:defRPr sz="900" b="1" i="0">
+                <a:solidFill>
+                  <a:srgbClr val="555555"/>
+                </a:solidFill>
+              </a:defRPr>
+            </a:pPr>
+            <a:r>
+              <a:rPr sz="900" b="1" i="0">
+                <a:solidFill>
+                  <a:srgbClr val="555555"/>
+                </a:solidFill>
+              </a:rPr>
+              <a:t>GUARDRAILS</a:t>
+            </a:r>
+          </a:p>
+        </p:txBody>
+      </p:sp>
+      <p:sp>
+        <p:nvSpPr>
+          <p:cNvPr id="6" name="">
+            <a:extLst xmlns:a="http://schemas.openxmlformats.org/drawingml/2006/main">
+              <a:ext uri="{FF2B5EF4-FFF2-40B4-BE49-F238E27FC236}">
+                <a16:creationId xmlns:a16="http://schemas.microsoft.com/office/drawing/2014/main" id="{7770583C-B6FF-4053-A6C8-3EC14C5F4919}"/>
+              </a:ext>
+            </a:extLst>
+          </p:cNvPr>
+          <p:cNvSpPr>
+            <a:spLocks xmlns:a="http://schemas.openxmlformats.org/drawingml/2006/main" noGrp="1"/>
+          </p:cNvSpPr>
+          <p:nvPr/>
+        </p:nvSpPr>
+        <p:spPr>
+          <a:xfrm xmlns:a="http://schemas.openxmlformats.org/drawingml/2006/main">
+            <a:off x="876300" y="2552700"/>
+            <a:ext cx="1990725" cy="361950"/>
+          </a:xfrm>
+          <a:prstGeom xmlns:a="http://schemas.openxmlformats.org/drawingml/2006/main" prst="rect">
+            <a:avLst/>
+          </a:prstGeom>
+          <a:noFill xmlns:a="http://schemas.openxmlformats.org/drawingml/2006/main"/>
+          <a:ln xmlns:a="http://schemas.openxmlformats.org/drawingml/2006/main" w="0">
+            <a:noFill/>
+            <a:prstDash val="solid"/>
+          </a:ln>
+        </p:spPr>
+        <p:txBody>
+          <a:bodyPr xmlns:a="http://schemas.openxmlformats.org/drawingml/2006/main"/>
+          <a:lstStyle xmlns:a="http://schemas.openxmlformats.org/drawingml/2006/main"/>
+          <a:p xmlns:a="http://schemas.openxmlformats.org/drawingml/2006/main">
+            <a:pPr algn="l">
+              <a:defRPr sz="2250" b="1" i="0">
+                <a:solidFill>
+                  <a:srgbClr val="000000"/>
+                </a:solidFill>
+              </a:defRPr>
+            </a:pPr>
+            <a:r>
+              <a:rPr sz="2250" b="1" i="0">
+                <a:solidFill>
+                  <a:srgbClr val="000000"/>
+                </a:solidFill>
+              </a:rPr>
+              <a:t>All PASS</a:t>
+            </a:r>
+          </a:p>
+        </p:txBody>
+      </p:sp>
+      <p:sp>
+        <p:nvSpPr>
+          <p:cNvPr id="7" name="">
+            <a:extLst xmlns:a="http://schemas.openxmlformats.org/drawingml/2006/main">
+              <a:ext uri="{FF2B5EF4-FFF2-40B4-BE49-F238E27FC236}">
+                <a16:creationId xmlns:a16="http://schemas.microsoft.com/office/drawing/2014/main" id="{E1BB997E-6775-42D9-83E5-FFCF74B60BB7}"/>
+              </a:ext>
+            </a:extLst>
+          </p:cNvPr>
+          <p:cNvSpPr>
+            <a:spLocks xmlns:a="http://schemas.openxmlformats.org/drawingml/2006/main" noGrp="1"/>
+          </p:cNvSpPr>
+          <p:nvPr/>
+        </p:nvSpPr>
+        <p:spPr>
+          <a:xfrm xmlns:a="http://schemas.openxmlformats.org/drawingml/2006/main">
+            <a:off x="876300" y="2971800"/>
+            <a:ext cx="1990725" cy="552450"/>
+          </a:xfrm>
+          <a:prstGeom xmlns:a="http://schemas.openxmlformats.org/drawingml/2006/main" prst="rect">
+            <a:avLst/>
+          </a:prstGeom>
+          <a:noFill xmlns:a="http://schemas.openxmlformats.org/drawingml/2006/main"/>
+          <a:ln xmlns:a="http://schemas.openxmlformats.org/drawingml/2006/main" w="0">
+            <a:noFill/>
+            <a:prstDash val="solid"/>
+          </a:ln>
+        </p:spPr>
+        <p:txBody>
+          <a:bodyPr xmlns:a="http://schemas.openxmlformats.org/drawingml/2006/main"/>
+          <a:lstStyle xmlns:a="http://schemas.openxmlformats.org/drawingml/2006/main"/>
+          <a:p xmlns:a="http://schemas.openxmlformats.org/drawingml/2006/main">
+            <a:pPr algn="l">
+              <a:defRPr sz="1125" b="0" i="0">
+                <a:solidFill>
+                  <a:srgbClr val="555555"/>
+                </a:solidFill>
+              </a:defRPr>
+            </a:pPr>
+            <a:r>
+              <a:rPr sz="1125" b="0" i="0">
+                <a:solidFill>
+                  <a:srgbClr val="555555"/>
+                </a:solidFill>
+              </a:rPr>
+              <a:t>Parameter and threshold choices stay inside TRAIN.</a:t>
+            </a:r>
+          </a:p>
+        </p:txBody>
+      </p:sp>
+      <p:sp>
+        <p:nvSpPr>
+          <p:cNvPr id="8" name="">
+            <a:extLst xmlns:a="http://schemas.openxmlformats.org/drawingml/2006/main">
+              <a:ext uri="{FF2B5EF4-FFF2-40B4-BE49-F238E27FC236}">
+                <a16:creationId xmlns:a16="http://schemas.microsoft.com/office/drawing/2014/main" id="{49219E67-B209-491A-8698-BCAEC4F331AC}"/>
+              </a:ext>
+            </a:extLst>
+          </p:cNvPr>
+          <p:cNvSpPr>
+            <a:spLocks xmlns:a="http://schemas.openxmlformats.org/drawingml/2006/main" noGrp="1"/>
+          </p:cNvSpPr>
+          <p:nvPr/>
+        </p:nvSpPr>
+        <p:spPr>
+          <a:xfrm xmlns:a="http://schemas.openxmlformats.org/drawingml/2006/main">
+            <a:off x="3409950" y="2152650"/>
+            <a:ext cx="2333625" cy="1428750"/>
+          </a:xfrm>
+          <a:prstGeom xmlns:a="http://schemas.openxmlformats.org/drawingml/2006/main" prst="rect">
+            <a:avLst/>
+          </a:prstGeom>
+          <a:solidFill xmlns:a="http://schemas.openxmlformats.org/drawingml/2006/main">
+            <a:srgbClr val="EDEDED"/>
+          </a:solidFill>
+          <a:ln xmlns:a="http://schemas.openxmlformats.org/drawingml/2006/main" w="9525">
+            <a:solidFill>
+              <a:srgbClr val="B8BCC4"/>
+            </a:solidFill>
+            <a:prstDash val="solid"/>
+          </a:ln>
+        </p:spPr>
+      </p:sp>
+      <p:sp>
+        <p:nvSpPr>
+          <p:cNvPr id="9" name="">
+            <a:extLst xmlns:a="http://schemas.openxmlformats.org/drawingml/2006/main">
+              <a:ext uri="{FF2B5EF4-FFF2-40B4-BE49-F238E27FC236}">
+                <a16:creationId xmlns:a16="http://schemas.microsoft.com/office/drawing/2014/main" id="{EC47D93E-02BB-4F74-8CBE-884EB9C187F6}"/>
+              </a:ext>
+            </a:extLst>
+          </p:cNvPr>
+          <p:cNvSpPr>
+            <a:spLocks xmlns:a="http://schemas.openxmlformats.org/drawingml/2006/main" noGrp="1"/>
+          </p:cNvSpPr>
+          <p:nvPr/>
+        </p:nvSpPr>
+        <p:spPr>
+          <a:xfrm xmlns:a="http://schemas.openxmlformats.org/drawingml/2006/main">
+            <a:off x="3581400" y="2305050"/>
+            <a:ext cx="1990725" cy="171450"/>
+          </a:xfrm>
+          <a:prstGeom xmlns:a="http://schemas.openxmlformats.org/drawingml/2006/main" prst="rect">
+            <a:avLst/>
+          </a:prstGeom>
+          <a:noFill xmlns:a="http://schemas.openxmlformats.org/drawingml/2006/main"/>
+          <a:ln xmlns:a="http://schemas.openxmlformats.org/drawingml/2006/main" w="0">
+            <a:noFill/>
+            <a:prstDash val="solid"/>
+          </a:ln>
+        </p:spPr>
+        <p:txBody>
+          <a:bodyPr xmlns:a="http://schemas.openxmlformats.org/drawingml/2006/main"/>
+          <a:lstStyle xmlns:a="http://schemas.openxmlformats.org/drawingml/2006/main"/>
+          <a:p xmlns:a="http://schemas.openxmlformats.org/drawingml/2006/main">
+            <a:pPr algn="l">
+              <a:defRPr sz="900" b="1" i="0">
+                <a:solidFill>
+                  <a:srgbClr val="555555"/>
+                </a:solidFill>
+              </a:defRPr>
+            </a:pPr>
+            <a:r>
+              <a:rPr sz="900" b="1" i="0">
+                <a:solidFill>
+                  <a:srgbClr val="555555"/>
+                </a:solidFill>
+              </a:rPr>
+              <a:t>SELECTED CANDIDATE</a:t>
+            </a:r>
+          </a:p>
+        </p:txBody>
+      </p:sp>
+      <p:sp>
+        <p:nvSpPr>
+          <p:cNvPr id="10" name="">
+            <a:extLst xmlns:a="http://schemas.openxmlformats.org/drawingml/2006/main">
+              <a:ext uri="{FF2B5EF4-FFF2-40B4-BE49-F238E27FC236}">
+                <a16:creationId xmlns:a16="http://schemas.microsoft.com/office/drawing/2014/main" id="{EF83735E-1747-4E1A-80A2-3B59F5A3E816}"/>
+              </a:ext>
+            </a:extLst>
+          </p:cNvPr>
+          <p:cNvSpPr>
+            <a:spLocks xmlns:a="http://schemas.openxmlformats.org/drawingml/2006/main" noGrp="1"/>
+          </p:cNvSpPr>
+          <p:nvPr/>
+        </p:nvSpPr>
+        <p:spPr>
+          <a:xfrm xmlns:a="http://schemas.openxmlformats.org/drawingml/2006/main">
+            <a:off x="3581400" y="2552700"/>
+            <a:ext cx="1990725" cy="361950"/>
+          </a:xfrm>
+          <a:prstGeom xmlns:a="http://schemas.openxmlformats.org/drawingml/2006/main" prst="rect">
+            <a:avLst/>
+          </a:prstGeom>
+          <a:noFill xmlns:a="http://schemas.openxmlformats.org/drawingml/2006/main"/>
+          <a:ln xmlns:a="http://schemas.openxmlformats.org/drawingml/2006/main" w="0">
+            <a:noFill/>
+            <a:prstDash val="solid"/>
+          </a:ln>
+        </p:spPr>
+        <p:txBody>
+          <a:bodyPr xmlns:a="http://schemas.openxmlformats.org/drawingml/2006/main"/>
+          <a:lstStyle xmlns:a="http://schemas.openxmlformats.org/drawingml/2006/main"/>
+          <a:p xmlns:a="http://schemas.openxmlformats.org/drawingml/2006/main">
+            <a:pPr algn="l">
+              <a:defRPr sz="2250" b="1" i="0">
+                <a:solidFill>
+                  <a:srgbClr val="000000"/>
+                </a:solidFill>
+              </a:defRPr>
+            </a:pPr>
+            <a:r>
+              <a:rPr sz="2250" b="1" i="0">
+                <a:solidFill>
+                  <a:srgbClr val="000000"/>
+                </a:solidFill>
+              </a:rPr>
+              <a:t>d4 r100</a:t>
+            </a:r>
+          </a:p>
+        </p:txBody>
+      </p:sp>
+      <p:sp>
+        <p:nvSpPr>
+          <p:cNvPr id="11" name="">
+            <a:extLst xmlns:a="http://schemas.openxmlformats.org/drawingml/2006/main">
+              <a:ext uri="{FF2B5EF4-FFF2-40B4-BE49-F238E27FC236}">
+                <a16:creationId xmlns:a16="http://schemas.microsoft.com/office/drawing/2014/main" id="{93C2556E-A2B4-40D9-B5AD-94E56298F152}"/>
+              </a:ext>
+            </a:extLst>
+          </p:cNvPr>
+          <p:cNvSpPr>
+            <a:spLocks xmlns:a="http://schemas.openxmlformats.org/drawingml/2006/main" noGrp="1"/>
+          </p:cNvSpPr>
+          <p:nvPr/>
+        </p:nvSpPr>
+        <p:spPr>
+          <a:xfrm xmlns:a="http://schemas.openxmlformats.org/drawingml/2006/main">
+            <a:off x="3581400" y="2971800"/>
+            <a:ext cx="1990725" cy="552450"/>
+          </a:xfrm>
+          <a:prstGeom xmlns:a="http://schemas.openxmlformats.org/drawingml/2006/main" prst="rect">
+            <a:avLst/>
+          </a:prstGeom>
+          <a:noFill xmlns:a="http://schemas.openxmlformats.org/drawingml/2006/main"/>
+          <a:ln xmlns:a="http://schemas.openxmlformats.org/drawingml/2006/main" w="0">
+            <a:noFill/>
+            <a:prstDash val="solid"/>
+          </a:ln>
+        </p:spPr>
+        <p:txBody>
+          <a:bodyPr xmlns:a="http://schemas.openxmlformats.org/drawingml/2006/main"/>
+          <a:lstStyle xmlns:a="http://schemas.openxmlformats.org/drawingml/2006/main"/>
+          <a:p xmlns:a="http://schemas.openxmlformats.org/drawingml/2006/main">
+            <a:pPr algn="l">
+              <a:defRPr sz="1125" b="0" i="0">
+                <a:solidFill>
+                  <a:srgbClr val="555555"/>
+                </a:solidFill>
+              </a:defRPr>
+            </a:pPr>
+            <a:r>
+              <a:rPr sz="1125" b="0" i="0">
+                <a:solidFill>
+                  <a:srgbClr val="555555"/>
+                </a:solidFill>
+              </a:rPr>
+              <a:t>Unique parameter candidate selected across folds.</a:t>
+            </a:r>
+          </a:p>
+        </p:txBody>
+      </p:sp>
+      <p:sp>
+        <p:nvSpPr>
+          <p:cNvPr id="12" name="">
+            <a:extLst xmlns:a="http://schemas.openxmlformats.org/drawingml/2006/main">
+              <a:ext uri="{FF2B5EF4-FFF2-40B4-BE49-F238E27FC236}">
+                <a16:creationId xmlns:a16="http://schemas.microsoft.com/office/drawing/2014/main" id="{01A04DE4-DF63-4FB3-BA3B-915BDC7379D3}"/>
+              </a:ext>
+            </a:extLst>
+          </p:cNvPr>
+          <p:cNvSpPr>
+            <a:spLocks xmlns:a="http://schemas.openxmlformats.org/drawingml/2006/main" noGrp="1"/>
+          </p:cNvSpPr>
+          <p:nvPr/>
+        </p:nvSpPr>
+        <p:spPr>
+          <a:xfrm xmlns:a="http://schemas.openxmlformats.org/drawingml/2006/main">
+            <a:off x="6115050" y="2152650"/>
+            <a:ext cx="2333625" cy="1428750"/>
+          </a:xfrm>
+          <a:prstGeom xmlns:a="http://schemas.openxmlformats.org/drawingml/2006/main" prst="rect">
+            <a:avLst/>
+          </a:prstGeom>
+          <a:solidFill xmlns:a="http://schemas.openxmlformats.org/drawingml/2006/main">
+            <a:srgbClr val="EDEDED"/>
+          </a:solidFill>
+          <a:ln xmlns:a="http://schemas.openxmlformats.org/drawingml/2006/main" w="9525">
+            <a:solidFill>
+              <a:srgbClr val="B8BCC4"/>
+            </a:solidFill>
+            <a:prstDash val="solid"/>
+          </a:ln>
+        </p:spPr>
+      </p:sp>
+      <p:sp>
+        <p:nvSpPr>
+          <p:cNvPr id="13" name="">
+            <a:extLst xmlns:a="http://schemas.openxmlformats.org/drawingml/2006/main">
+              <a:ext uri="{FF2B5EF4-FFF2-40B4-BE49-F238E27FC236}">
+                <a16:creationId xmlns:a16="http://schemas.microsoft.com/office/drawing/2014/main" id="{E5B8F069-22DD-48DF-9CCA-937993CD9BDB}"/>
+              </a:ext>
+            </a:extLst>
+          </p:cNvPr>
+          <p:cNvSpPr>
+            <a:spLocks xmlns:a="http://schemas.openxmlformats.org/drawingml/2006/main" noGrp="1"/>
+          </p:cNvSpPr>
+          <p:nvPr/>
+        </p:nvSpPr>
+        <p:spPr>
+          <a:xfrm xmlns:a="http://schemas.openxmlformats.org/drawingml/2006/main">
+            <a:off x="6286500" y="2305050"/>
+            <a:ext cx="1990725" cy="171450"/>
+          </a:xfrm>
+          <a:prstGeom xmlns:a="http://schemas.openxmlformats.org/drawingml/2006/main" prst="rect">
+            <a:avLst/>
+          </a:prstGeom>
+          <a:noFill xmlns:a="http://schemas.openxmlformats.org/drawingml/2006/main"/>
+          <a:ln xmlns:a="http://schemas.openxmlformats.org/drawingml/2006/main" w="0">
+            <a:noFill/>
+            <a:prstDash val="solid"/>
+          </a:ln>
+        </p:spPr>
+        <p:txBody>
+          <a:bodyPr xmlns:a="http://schemas.openxmlformats.org/drawingml/2006/main"/>
+          <a:lstStyle xmlns:a="http://schemas.openxmlformats.org/drawingml/2006/main"/>
+          <a:p xmlns:a="http://schemas.openxmlformats.org/drawingml/2006/main">
+            <a:pPr algn="l">
+              <a:defRPr sz="900" b="1" i="0">
+                <a:solidFill>
+                  <a:srgbClr val="555555"/>
+                </a:solidFill>
+              </a:defRPr>
+            </a:pPr>
+            <a:r>
+              <a:rPr sz="900" b="1" i="0">
+                <a:solidFill>
+                  <a:srgbClr val="555555"/>
+                </a:solidFill>
+              </a:rPr>
+              <a:t>DEPTH / ROUNDS</a:t>
+            </a:r>
+          </a:p>
+        </p:txBody>
+      </p:sp>
+      <p:sp>
+        <p:nvSpPr>
+          <p:cNvPr id="14" name="">
+            <a:extLst xmlns:a="http://schemas.openxmlformats.org/drawingml/2006/main">
+              <a:ext uri="{FF2B5EF4-FFF2-40B4-BE49-F238E27FC236}">
+                <a16:creationId xmlns:a16="http://schemas.microsoft.com/office/drawing/2014/main" id="{E0812F28-5F43-46C2-A610-93360FF5C592}"/>
+              </a:ext>
+            </a:extLst>
+          </p:cNvPr>
+          <p:cNvSpPr>
+            <a:spLocks xmlns:a="http://schemas.openxmlformats.org/drawingml/2006/main" noGrp="1"/>
+          </p:cNvSpPr>
+          <p:nvPr/>
+        </p:nvSpPr>
+        <p:spPr>
+          <a:xfrm xmlns:a="http://schemas.openxmlformats.org/drawingml/2006/main">
+            <a:off x="6286500" y="2552700"/>
+            <a:ext cx="1990725" cy="361950"/>
+          </a:xfrm>
+          <a:prstGeom xmlns:a="http://schemas.openxmlformats.org/drawingml/2006/main" prst="rect">
+            <a:avLst/>
+          </a:prstGeom>
+          <a:noFill xmlns:a="http://schemas.openxmlformats.org/drawingml/2006/main"/>
+          <a:ln xmlns:a="http://schemas.openxmlformats.org/drawingml/2006/main" w="0">
+            <a:noFill/>
+            <a:prstDash val="solid"/>
+          </a:ln>
+        </p:spPr>
+        <p:txBody>
+          <a:bodyPr xmlns:a="http://schemas.openxmlformats.org/drawingml/2006/main"/>
+          <a:lstStyle xmlns:a="http://schemas.openxmlformats.org/drawingml/2006/main"/>
+          <a:p xmlns:a="http://schemas.openxmlformats.org/drawingml/2006/main">
+            <a:pPr algn="l">
+              <a:defRPr sz="2250" b="1" i="0">
+                <a:solidFill>
+                  <a:srgbClr val="000000"/>
+                </a:solidFill>
+              </a:defRPr>
+            </a:pPr>
+            <a:r>
+              <a:rPr sz="2250" b="1" i="0">
+                <a:solidFill>
+                  <a:srgbClr val="000000"/>
+                </a:solidFill>
+              </a:rPr>
+              <a:t>4 / 100</a:t>
+            </a:r>
+          </a:p>
+        </p:txBody>
+      </p:sp>
+      <p:sp>
+        <p:nvSpPr>
+          <p:cNvPr id="15" name="">
+            <a:extLst xmlns:a="http://schemas.openxmlformats.org/drawingml/2006/main">
+              <a:ext uri="{FF2B5EF4-FFF2-40B4-BE49-F238E27FC236}">
+                <a16:creationId xmlns:a16="http://schemas.microsoft.com/office/drawing/2014/main" id="{5355C725-FB94-440E-8086-957A89922F6B}"/>
+              </a:ext>
+            </a:extLst>
+          </p:cNvPr>
+          <p:cNvSpPr>
+            <a:spLocks xmlns:a="http://schemas.openxmlformats.org/drawingml/2006/main" noGrp="1"/>
+          </p:cNvSpPr>
+          <p:nvPr/>
+        </p:nvSpPr>
+        <p:spPr>
+          <a:xfrm xmlns:a="http://schemas.openxmlformats.org/drawingml/2006/main">
+            <a:off x="6286500" y="2971800"/>
+            <a:ext cx="1990725" cy="552450"/>
+          </a:xfrm>
+          <a:prstGeom xmlns:a="http://schemas.openxmlformats.org/drawingml/2006/main" prst="rect">
+            <a:avLst/>
+          </a:prstGeom>
+          <a:noFill xmlns:a="http://schemas.openxmlformats.org/drawingml/2006/main"/>
+          <a:ln xmlns:a="http://schemas.openxmlformats.org/drawingml/2006/main" w="0">
+            <a:noFill/>
+            <a:prstDash val="solid"/>
+          </a:ln>
+        </p:spPr>
+        <p:txBody>
+          <a:bodyPr xmlns:a="http://schemas.openxmlformats.org/drawingml/2006/main"/>
+          <a:lstStyle xmlns:a="http://schemas.openxmlformats.org/drawingml/2006/main"/>
+          <a:p xmlns:a="http://schemas.openxmlformats.org/drawingml/2006/main">
+            <a:pPr algn="l">
+              <a:defRPr sz="1125" b="0" i="0">
+                <a:solidFill>
+                  <a:srgbClr val="555555"/>
+                </a:solidFill>
+              </a:defRPr>
+            </a:pPr>
+            <a:r>
+              <a:rPr sz="1125" b="0" i="0">
+                <a:solidFill>
+                  <a:srgbClr val="555555"/>
+                </a:solidFill>
+              </a:rPr>
+              <a:t>Depth and boosting rounds selected by TRAIN proxy evidence.</a:t>
+            </a:r>
+          </a:p>
+        </p:txBody>
+      </p:sp>
+      <p:sp>
+        <p:nvSpPr>
+          <p:cNvPr id="16" name="">
+            <a:extLst xmlns:a="http://schemas.openxmlformats.org/drawingml/2006/main">
+              <a:ext uri="{FF2B5EF4-FFF2-40B4-BE49-F238E27FC236}">
+                <a16:creationId xmlns:a16="http://schemas.microsoft.com/office/drawing/2014/main" id="{C8B12BD7-B57B-4B9E-92FB-F7B369B3085D}"/>
+              </a:ext>
+            </a:extLst>
+          </p:cNvPr>
+          <p:cNvSpPr>
+            <a:spLocks xmlns:a="http://schemas.openxmlformats.org/drawingml/2006/main" noGrp="1"/>
+          </p:cNvSpPr>
+          <p:nvPr/>
+        </p:nvSpPr>
+        <p:spPr>
+          <a:xfrm xmlns:a="http://schemas.openxmlformats.org/drawingml/2006/main">
+            <a:off x="8820150" y="2152650"/>
+            <a:ext cx="2333625" cy="1428750"/>
+          </a:xfrm>
+          <a:prstGeom xmlns:a="http://schemas.openxmlformats.org/drawingml/2006/main" prst="rect">
+            <a:avLst/>
+          </a:prstGeom>
+          <a:solidFill xmlns:a="http://schemas.openxmlformats.org/drawingml/2006/main">
+            <a:srgbClr val="EDEDED"/>
+          </a:solidFill>
+          <a:ln xmlns:a="http://schemas.openxmlformats.org/drawingml/2006/main" w="9525">
+            <a:solidFill>
+              <a:srgbClr val="B8BCC4"/>
+            </a:solidFill>
+            <a:prstDash val="solid"/>
+          </a:ln>
+        </p:spPr>
+      </p:sp>
+      <p:sp>
+        <p:nvSpPr>
+          <p:cNvPr id="17" name="">
+            <a:extLst xmlns:a="http://schemas.openxmlformats.org/drawingml/2006/main">
+              <a:ext uri="{FF2B5EF4-FFF2-40B4-BE49-F238E27FC236}">
+                <a16:creationId xmlns:a16="http://schemas.microsoft.com/office/drawing/2014/main" id="{D2F86187-170A-40B5-8CA6-A6E9D659E646}"/>
+              </a:ext>
+            </a:extLst>
+          </p:cNvPr>
+          <p:cNvSpPr>
+            <a:spLocks xmlns:a="http://schemas.openxmlformats.org/drawingml/2006/main" noGrp="1"/>
+          </p:cNvSpPr>
+          <p:nvPr/>
+        </p:nvSpPr>
+        <p:spPr>
+          <a:xfrm xmlns:a="http://schemas.openxmlformats.org/drawingml/2006/main">
+            <a:off x="8991600" y="2305050"/>
+            <a:ext cx="1990725" cy="171450"/>
+          </a:xfrm>
+          <a:prstGeom xmlns:a="http://schemas.openxmlformats.org/drawingml/2006/main" prst="rect">
+            <a:avLst/>
+          </a:prstGeom>
+          <a:noFill xmlns:a="http://schemas.openxmlformats.org/drawingml/2006/main"/>
+          <a:ln xmlns:a="http://schemas.openxmlformats.org/drawingml/2006/main" w="0">
+            <a:noFill/>
+            <a:prstDash val="solid"/>
+          </a:ln>
+        </p:spPr>
+        <p:txBody>
+          <a:bodyPr xmlns:a="http://schemas.openxmlformats.org/drawingml/2006/main"/>
+          <a:lstStyle xmlns:a="http://schemas.openxmlformats.org/drawingml/2006/main"/>
+          <a:p xmlns:a="http://schemas.openxmlformats.org/drawingml/2006/main">
+            <a:pPr algn="l">
+              <a:defRPr sz="900" b="1" i="0">
+                <a:solidFill>
+                  <a:srgbClr val="555555"/>
+                </a:solidFill>
+              </a:defRPr>
+            </a:pPr>
+            <a:r>
+              <a:rPr sz="900" b="1" i="0">
+                <a:solidFill>
+                  <a:srgbClr val="555555"/>
+                </a:solidFill>
+              </a:rPr>
+              <a:t>MIN CHILD</a:t>
+            </a:r>
+          </a:p>
+        </p:txBody>
+      </p:sp>
+      <p:sp>
+        <p:nvSpPr>
+          <p:cNvPr id="18" name="">
+            <a:extLst xmlns:a="http://schemas.openxmlformats.org/drawingml/2006/main">
+              <a:ext uri="{FF2B5EF4-FFF2-40B4-BE49-F238E27FC236}">
+                <a16:creationId xmlns:a16="http://schemas.microsoft.com/office/drawing/2014/main" id="{3BE8EF51-8AAB-4A74-A816-7DD748ADB581}"/>
+              </a:ext>
+            </a:extLst>
+          </p:cNvPr>
+          <p:cNvSpPr>
+            <a:spLocks xmlns:a="http://schemas.openxmlformats.org/drawingml/2006/main" noGrp="1"/>
+          </p:cNvSpPr>
+          <p:nvPr/>
+        </p:nvSpPr>
+        <p:spPr>
+          <a:xfrm xmlns:a="http://schemas.openxmlformats.org/drawingml/2006/main">
+            <a:off x="8991600" y="2552700"/>
+            <a:ext cx="1990725" cy="361950"/>
+          </a:xfrm>
+          <a:prstGeom xmlns:a="http://schemas.openxmlformats.org/drawingml/2006/main" prst="rect">
+            <a:avLst/>
+          </a:prstGeom>
+          <a:noFill xmlns:a="http://schemas.openxmlformats.org/drawingml/2006/main"/>
+          <a:ln xmlns:a="http://schemas.openxmlformats.org/drawingml/2006/main" w="0">
+            <a:noFill/>
+            <a:prstDash val="solid"/>
+          </a:ln>
+        </p:spPr>
+        <p:txBody>
+          <a:bodyPr xmlns:a="http://schemas.openxmlformats.org/drawingml/2006/main"/>
+          <a:lstStyle xmlns:a="http://schemas.openxmlformats.org/drawingml/2006/main"/>
+          <a:p xmlns:a="http://schemas.openxmlformats.org/drawingml/2006/main">
+            <a:pPr algn="l">
+              <a:defRPr sz="2250" b="1" i="0">
+                <a:solidFill>
+                  <a:srgbClr val="000000"/>
+                </a:solidFill>
+              </a:defRPr>
+            </a:pPr>
+            <a:r>
+              <a:rPr sz="2250" b="1" i="0">
+                <a:solidFill>
+                  <a:srgbClr val="000000"/>
+                </a:solidFill>
+              </a:rPr>
+              <a:t>5</a:t>
+            </a:r>
+          </a:p>
+        </p:txBody>
+      </p:sp>
+      <p:sp>
+        <p:nvSpPr>
+          <p:cNvPr id="19" name="">
+            <a:extLst xmlns:a="http://schemas.openxmlformats.org/drawingml/2006/main">
+              <a:ext uri="{FF2B5EF4-FFF2-40B4-BE49-F238E27FC236}">
+                <a16:creationId xmlns:a16="http://schemas.microsoft.com/office/drawing/2014/main" id="{7D93BBA6-3B22-4483-8501-DE30F3D04570}"/>
+              </a:ext>
+            </a:extLst>
+          </p:cNvPr>
+          <p:cNvSpPr>
+            <a:spLocks xmlns:a="http://schemas.openxmlformats.org/drawingml/2006/main" noGrp="1"/>
+          </p:cNvSpPr>
+          <p:nvPr/>
+        </p:nvSpPr>
+        <p:spPr>
+          <a:xfrm xmlns:a="http://schemas.openxmlformats.org/drawingml/2006/main">
+            <a:off x="8991600" y="2971800"/>
+            <a:ext cx="1990725" cy="552450"/>
+          </a:xfrm>
+          <a:prstGeom xmlns:a="http://schemas.openxmlformats.org/drawingml/2006/main" prst="rect">
+            <a:avLst/>
+          </a:prstGeom>
+          <a:noFill xmlns:a="http://schemas.openxmlformats.org/drawingml/2006/main"/>
+          <a:ln xmlns:a="http://schemas.openxmlformats.org/drawingml/2006/main" w="0">
+            <a:noFill/>
+            <a:prstDash val="solid"/>
+          </a:ln>
+        </p:spPr>
+        <p:txBody>
+          <a:bodyPr xmlns:a="http://schemas.openxmlformats.org/drawingml/2006/main"/>
+          <a:lstStyle xmlns:a="http://schemas.openxmlformats.org/drawingml/2006/main"/>
+          <a:p xmlns:a="http://schemas.openxmlformats.org/drawingml/2006/main">
+            <a:pPr algn="l">
+              <a:defRPr sz="1125" b="0" i="0">
+                <a:solidFill>
+                  <a:srgbClr val="555555"/>
+                </a:solidFill>
+              </a:defRPr>
+            </a:pPr>
+            <a:r>
+              <a:rPr sz="1125" b="0" i="0">
+                <a:solidFill>
+                  <a:srgbClr val="555555"/>
+                </a:solidFill>
+              </a:rPr>
+              <a:t>Minimum child weight selected by TRAIN proxy evidence.</a:t>
+            </a:r>
+          </a:p>
+        </p:txBody>
+      </p:sp>
+      <p:sp>
+        <p:nvSpPr>
+          <p:cNvPr id="20" name="">
+            <a:extLst xmlns:a="http://schemas.openxmlformats.org/drawingml/2006/main">
+              <a:ext uri="{FF2B5EF4-FFF2-40B4-BE49-F238E27FC236}">
+                <a16:creationId xmlns:a16="http://schemas.microsoft.com/office/drawing/2014/main" id="{3C5BADC4-C09B-454E-A9B0-CA7DE0D085E6}"/>
+              </a:ext>
+            </a:extLst>
+          </p:cNvPr>
+          <p:cNvSpPr>
+            <a:spLocks xmlns:a="http://schemas.openxmlformats.org/drawingml/2006/main" noGrp="1"/>
+          </p:cNvSpPr>
+          <p:nvPr/>
+        </p:nvSpPr>
+        <p:spPr>
+          <a:xfrm xmlns:a="http://schemas.openxmlformats.org/drawingml/2006/main">
+            <a:off x="1066800" y="4095750"/>
+            <a:ext cx="9334500" cy="914400"/>
+          </a:xfrm>
+          <a:prstGeom xmlns:a="http://schemas.openxmlformats.org/drawingml/2006/main" prst="rect">
+            <a:avLst/>
+          </a:prstGeom>
+          <a:noFill xmlns:a="http://schemas.openxmlformats.org/drawingml/2006/main"/>
+          <a:ln xmlns:a="http://schemas.openxmlformats.org/drawingml/2006/main" w="0">
+            <a:noFill/>
+            <a:prstDash val="solid"/>
+          </a:ln>
+        </p:spPr>
+        <p:txBody>
+          <a:bodyPr xmlns:a="http://schemas.openxmlformats.org/drawingml/2006/main"/>
+          <a:lstStyle xmlns:a="http://schemas.openxmlformats.org/drawingml/2006/main"/>
+          <a:p xmlns:a="http://schemas.openxmlformats.org/drawingml/2006/main">
+            <a:pPr algn="ctr">
+              <a:defRPr sz="2100" b="1" i="0">
+                <a:solidFill>
+                  <a:srgbClr val="000000"/>
+                </a:solidFill>
+              </a:defRPr>
+            </a:pPr>
+            <a:r>
+              <a:rPr sz="2100" b="1" i="0">
+                <a:solidFill>
+                  <a:srgbClr val="000000"/>
+                </a:solidFill>
+              </a:rPr>
+              <a:t>Every tested fold selected the same aggressive candidate: depth 4, 100 rounds, min_child_weight 5. That is a useful diagnostic, but it has to earn its keep OOS.</a:t>
+            </a:r>
+          </a:p>
+        </p:txBody>
+      </p:sp>
+    </p:spTree>
+    <p:extLst>
+      <p:ext uri="{BB962C8B-B14F-4D97-AF65-F5344CB8AC3E}">
+        <p14:creationId xmlns:p14="http://schemas.microsoft.com/office/powerpoint/2010/main" val="1816698607"/>
+      </p:ext>
+    </p:extLst>
+  </p:cSld>
+</p:sld>
+</file>
+
+<file path=ppt/slides/slide39.xml><?xml version="1.0" encoding="utf-8"?>
+<p:sld xmlns:p="http://schemas.openxmlformats.org/presentationml/2006/main">
+  <p:cSld>
+    <p:bg>
+      <p:bgPr>
+        <a:solidFill xmlns:a="http://schemas.openxmlformats.org/drawingml/2006/main">
+          <a:srgbClr val="FFFFFF"/>
+        </a:solidFill>
+      </p:bgPr>
+    </p:bg>
+    <p:spTree>
+      <p:nvGrpSpPr>
+        <p:cNvPr id="1" name=""/>
+        <p:cNvGrpSpPr/>
+        <p:nvPr/>
+      </p:nvGrpSpPr>
+      <p:grpSpPr>
+        <a:xfrm xmlns:a="http://schemas.openxmlformats.org/drawingml/2006/main"/>
+      </p:grpSpPr>
+      <p:sp>
+        <p:nvSpPr>
+          <p:cNvPr id="1" name="">
+            <a:extLst xmlns:a="http://schemas.openxmlformats.org/drawingml/2006/main">
+              <a:ext uri="{FF2B5EF4-FFF2-40B4-BE49-F238E27FC236}">
+                <a16:creationId xmlns:a16="http://schemas.microsoft.com/office/drawing/2014/main" id="{650329FA-0AE8-4620-8150-F3B145CB75F0}"/>
+              </a:ext>
+            </a:extLst>
+          </p:cNvPr>
+          <p:cNvSpPr>
+            <a:spLocks xmlns:a="http://schemas.openxmlformats.org/drawingml/2006/main" noGrp="1"/>
+          </p:cNvSpPr>
+          <p:nvPr/>
+        </p:nvSpPr>
+        <p:spPr>
+          <a:xfrm xmlns:a="http://schemas.openxmlformats.org/drawingml/2006/main">
+            <a:off x="685800" y="400050"/>
+            <a:ext cx="8572500" cy="247650"/>
+          </a:xfrm>
+          <a:prstGeom xmlns:a="http://schemas.openxmlformats.org/drawingml/2006/main" prst="rect">
+            <a:avLst/>
+          </a:prstGeom>
+          <a:noFill xmlns:a="http://schemas.openxmlformats.org/drawingml/2006/main"/>
+          <a:ln xmlns:a="http://schemas.openxmlformats.org/drawingml/2006/main" w="0">
+            <a:noFill/>
+            <a:prstDash val="solid"/>
+          </a:ln>
+        </p:spPr>
+        <p:txBody>
+          <a:bodyPr xmlns:a="http://schemas.openxmlformats.org/drawingml/2006/main"/>
+          <a:lstStyle xmlns:a="http://schemas.openxmlformats.org/drawingml/2006/main"/>
+          <a:p xmlns:a="http://schemas.openxmlformats.org/drawingml/2006/main">
+            <a:pPr algn="l">
+              <a:defRPr sz="975" b="1" i="0">
+                <a:solidFill>
+                  <a:srgbClr val="555555"/>
+                </a:solidFill>
+              </a:defRPr>
+            </a:pPr>
+            <a:r>
+              <a:rPr sz="975" b="1" i="0">
+                <a:solidFill>
+                  <a:srgbClr val="555555"/>
+                </a:solidFill>
+              </a:rPr>
+              <a:t>GEN5.4 ML DECISION ENGINE</a:t>
+            </a:r>
+          </a:p>
+        </p:txBody>
+      </p:sp>
+      <p:sp>
+        <p:nvSpPr>
+          <p:cNvPr id="2" name="">
+            <a:extLst xmlns:a="http://schemas.openxmlformats.org/drawingml/2006/main">
+              <a:ext uri="{FF2B5EF4-FFF2-40B4-BE49-F238E27FC236}">
+                <a16:creationId xmlns:a16="http://schemas.microsoft.com/office/drawing/2014/main" id="{411703BE-D16A-4F40-8243-90A624FD6A11}"/>
+              </a:ext>
+            </a:extLst>
+          </p:cNvPr>
+          <p:cNvSpPr>
+            <a:spLocks xmlns:a="http://schemas.openxmlformats.org/drawingml/2006/main" noGrp="1"/>
+          </p:cNvSpPr>
+          <p:nvPr/>
+        </p:nvSpPr>
+        <p:spPr>
+          <a:xfrm xmlns:a="http://schemas.openxmlformats.org/drawingml/2006/main">
+            <a:off x="685800" y="723900"/>
+            <a:ext cx="10287000" cy="876300"/>
+          </a:xfrm>
+          <a:prstGeom xmlns:a="http://schemas.openxmlformats.org/drawingml/2006/main" prst="rect">
+            <a:avLst/>
+          </a:prstGeom>
+          <a:noFill xmlns:a="http://schemas.openxmlformats.org/drawingml/2006/main"/>
+          <a:ln xmlns:a="http://schemas.openxmlformats.org/drawingml/2006/main" w="0">
+            <a:noFill/>
+            <a:prstDash val="solid"/>
+          </a:ln>
+        </p:spPr>
+        <p:txBody>
+          <a:bodyPr xmlns:a="http://schemas.openxmlformats.org/drawingml/2006/main"/>
+          <a:lstStyle xmlns:a="http://schemas.openxmlformats.org/drawingml/2006/main"/>
+          <a:p xmlns:a="http://schemas.openxmlformats.org/drawingml/2006/main">
+            <a:pPr algn="l">
+              <a:defRPr sz="2850" b="1" i="0">
+                <a:solidFill>
+                  <a:srgbClr val="000000"/>
+                </a:solidFill>
+              </a:defRPr>
+            </a:pPr>
+            <a:r>
+              <a:rPr sz="2850" b="1" i="0">
+                <a:solidFill>
+                  <a:srgbClr val="000000"/>
+                </a:solidFill>
+              </a:rPr>
+              <a:t>The selected grid did not improve OOS replay</a:t>
+            </a:r>
+          </a:p>
+        </p:txBody>
+      </p:sp>
+      <p:sp>
+        <p:nvSpPr>
+          <p:cNvPr id="3" name="">
+            <a:extLst xmlns:a="http://schemas.openxmlformats.org/drawingml/2006/main">
+              <a:ext uri="{FF2B5EF4-FFF2-40B4-BE49-F238E27FC236}">
+                <a16:creationId xmlns:a16="http://schemas.microsoft.com/office/drawing/2014/main" id="{0213FE8A-AD91-4315-AC55-63DD760B6E5F}"/>
+              </a:ext>
+            </a:extLst>
+          </p:cNvPr>
+          <p:cNvSpPr>
+            <a:spLocks xmlns:a="http://schemas.openxmlformats.org/drawingml/2006/main" noGrp="1"/>
+          </p:cNvSpPr>
+          <p:nvPr/>
+        </p:nvSpPr>
+        <p:spPr>
+          <a:xfrm xmlns:a="http://schemas.openxmlformats.org/drawingml/2006/main">
+            <a:off x="685800" y="1657350"/>
+            <a:ext cx="10820400" cy="19050"/>
+          </a:xfrm>
+          <a:prstGeom xmlns:a="http://schemas.openxmlformats.org/drawingml/2006/main" prst="rect">
+            <a:avLst/>
+          </a:prstGeom>
+          <a:solidFill xmlns:a="http://schemas.openxmlformats.org/drawingml/2006/main">
+            <a:srgbClr val="B8BCC4"/>
+          </a:solidFill>
+          <a:ln xmlns:a="http://schemas.openxmlformats.org/drawingml/2006/main" w="0">
+            <a:noFill/>
+            <a:prstDash val="solid"/>
+          </a:ln>
+        </p:spPr>
+      </p:sp>
+      <p:sp>
+        <p:nvSpPr>
+          <p:cNvPr id="4" name="">
+            <a:extLst xmlns:a="http://schemas.openxmlformats.org/drawingml/2006/main">
+              <a:ext uri="{FF2B5EF4-FFF2-40B4-BE49-F238E27FC236}">
+                <a16:creationId xmlns:a16="http://schemas.microsoft.com/office/drawing/2014/main" id="{A63102B0-B72F-41EF-B932-DEDD190D5542}"/>
+              </a:ext>
+            </a:extLst>
+          </p:cNvPr>
+          <p:cNvSpPr>
+            <a:spLocks xmlns:a="http://schemas.openxmlformats.org/drawingml/2006/main" noGrp="1"/>
+          </p:cNvSpPr>
+          <p:nvPr/>
+        </p:nvSpPr>
+        <p:spPr>
+          <a:xfrm xmlns:a="http://schemas.openxmlformats.org/drawingml/2006/main">
+            <a:off x="704850" y="2152650"/>
+            <a:ext cx="2333625" cy="1428750"/>
+          </a:xfrm>
+          <a:prstGeom xmlns:a="http://schemas.openxmlformats.org/drawingml/2006/main" prst="rect">
+            <a:avLst/>
+          </a:prstGeom>
+          <a:solidFill xmlns:a="http://schemas.openxmlformats.org/drawingml/2006/main">
+            <a:srgbClr val="EDEDED"/>
+          </a:solidFill>
+          <a:ln xmlns:a="http://schemas.openxmlformats.org/drawingml/2006/main" w="9525">
+            <a:solidFill>
+              <a:srgbClr val="B8BCC4"/>
+            </a:solidFill>
+            <a:prstDash val="solid"/>
+          </a:ln>
+        </p:spPr>
+      </p:sp>
+      <p:sp>
+        <p:nvSpPr>
+          <p:cNvPr id="5" name="">
+            <a:extLst xmlns:a="http://schemas.openxmlformats.org/drawingml/2006/main">
+              <a:ext uri="{FF2B5EF4-FFF2-40B4-BE49-F238E27FC236}">
+                <a16:creationId xmlns:a16="http://schemas.microsoft.com/office/drawing/2014/main" id="{83468A26-5C09-49F5-B198-64D1BBE1B1F8}"/>
+              </a:ext>
+            </a:extLst>
+          </p:cNvPr>
+          <p:cNvSpPr>
+            <a:spLocks xmlns:a="http://schemas.openxmlformats.org/drawingml/2006/main" noGrp="1"/>
+          </p:cNvSpPr>
+          <p:nvPr/>
+        </p:nvSpPr>
+        <p:spPr>
+          <a:xfrm xmlns:a="http://schemas.openxmlformats.org/drawingml/2006/main">
+            <a:off x="876300" y="2305050"/>
+            <a:ext cx="1990725" cy="171450"/>
+          </a:xfrm>
+          <a:prstGeom xmlns:a="http://schemas.openxmlformats.org/drawingml/2006/main" prst="rect">
+            <a:avLst/>
+          </a:prstGeom>
+          <a:noFill xmlns:a="http://schemas.openxmlformats.org/drawingml/2006/main"/>
+          <a:ln xmlns:a="http://schemas.openxmlformats.org/drawingml/2006/main" w="0">
+            <a:noFill/>
+            <a:prstDash val="solid"/>
+          </a:ln>
+        </p:spPr>
+        <p:txBody>
+          <a:bodyPr xmlns:a="http://schemas.openxmlformats.org/drawingml/2006/main"/>
+          <a:lstStyle xmlns:a="http://schemas.openxmlformats.org/drawingml/2006/main"/>
+          <a:p xmlns:a="http://schemas.openxmlformats.org/drawingml/2006/main">
+            <a:pPr algn="l">
+              <a:defRPr sz="900" b="1" i="0">
+                <a:solidFill>
+                  <a:srgbClr val="555555"/>
+                </a:solidFill>
+              </a:defRPr>
+            </a:pPr>
+            <a:r>
+              <a:rPr sz="900" b="1" i="0">
+                <a:solidFill>
+                  <a:srgbClr val="555555"/>
+                </a:solidFill>
+              </a:rPr>
+              <a:t>2020 FIXED XGB</a:t>
+            </a:r>
+          </a:p>
+        </p:txBody>
+      </p:sp>
+      <p:sp>
+        <p:nvSpPr>
+          <p:cNvPr id="6" name="">
+            <a:extLst xmlns:a="http://schemas.openxmlformats.org/drawingml/2006/main">
+              <a:ext uri="{FF2B5EF4-FFF2-40B4-BE49-F238E27FC236}">
+                <a16:creationId xmlns:a16="http://schemas.microsoft.com/office/drawing/2014/main" id="{B1D26CE9-4A0D-4D9D-B3A3-011625C3F081}"/>
+              </a:ext>
+            </a:extLst>
+          </p:cNvPr>
+          <p:cNvSpPr>
+            <a:spLocks xmlns:a="http://schemas.openxmlformats.org/drawingml/2006/main" noGrp="1"/>
+          </p:cNvSpPr>
+          <p:nvPr/>
+        </p:nvSpPr>
+        <p:spPr>
+          <a:xfrm xmlns:a="http://schemas.openxmlformats.org/drawingml/2006/main">
+            <a:off x="876300" y="2552700"/>
+            <a:ext cx="1990725" cy="361950"/>
+          </a:xfrm>
+          <a:prstGeom xmlns:a="http://schemas.openxmlformats.org/drawingml/2006/main" prst="rect">
+            <a:avLst/>
+          </a:prstGeom>
+          <a:noFill xmlns:a="http://schemas.openxmlformats.org/drawingml/2006/main"/>
+          <a:ln xmlns:a="http://schemas.openxmlformats.org/drawingml/2006/main" w="0">
+            <a:noFill/>
+            <a:prstDash val="solid"/>
+          </a:ln>
+        </p:spPr>
+        <p:txBody>
+          <a:bodyPr xmlns:a="http://schemas.openxmlformats.org/drawingml/2006/main"/>
+          <a:lstStyle xmlns:a="http://schemas.openxmlformats.org/drawingml/2006/main"/>
+          <a:p xmlns:a="http://schemas.openxmlformats.org/drawingml/2006/main">
+            <a:pPr algn="l">
+              <a:defRPr sz="2250" b="1" i="0">
+                <a:solidFill>
+                  <a:srgbClr val="000000"/>
+                </a:solidFill>
+              </a:defRPr>
+            </a:pPr>
+            <a:r>
+              <a:rPr sz="2250" b="1" i="0">
+                <a:solidFill>
+                  <a:srgbClr val="000000"/>
+                </a:solidFill>
+              </a:rPr>
+              <a:t>108.9%</a:t>
+            </a:r>
+          </a:p>
+        </p:txBody>
+      </p:sp>
+      <p:sp>
+        <p:nvSpPr>
+          <p:cNvPr id="7" name="">
+            <a:extLst xmlns:a="http://schemas.openxmlformats.org/drawingml/2006/main">
+              <a:ext uri="{FF2B5EF4-FFF2-40B4-BE49-F238E27FC236}">
+                <a16:creationId xmlns:a16="http://schemas.microsoft.com/office/drawing/2014/main" id="{C1DF3E98-229A-43A6-A182-2EE55E639A55}"/>
+              </a:ext>
+            </a:extLst>
+          </p:cNvPr>
+          <p:cNvSpPr>
+            <a:spLocks xmlns:a="http://schemas.openxmlformats.org/drawingml/2006/main" noGrp="1"/>
+          </p:cNvSpPr>
+          <p:nvPr/>
+        </p:nvSpPr>
+        <p:spPr>
+          <a:xfrm xmlns:a="http://schemas.openxmlformats.org/drawingml/2006/main">
+            <a:off x="876300" y="2971800"/>
+            <a:ext cx="1990725" cy="552450"/>
+          </a:xfrm>
+          <a:prstGeom xmlns:a="http://schemas.openxmlformats.org/drawingml/2006/main" prst="rect">
+            <a:avLst/>
+          </a:prstGeom>
+          <a:noFill xmlns:a="http://schemas.openxmlformats.org/drawingml/2006/main"/>
+          <a:ln xmlns:a="http://schemas.openxmlformats.org/drawingml/2006/main" w="0">
+            <a:noFill/>
+            <a:prstDash val="solid"/>
+          </a:ln>
+        </p:spPr>
+        <p:txBody>
+          <a:bodyPr xmlns:a="http://schemas.openxmlformats.org/drawingml/2006/main"/>
+          <a:lstStyle xmlns:a="http://schemas.openxmlformats.org/drawingml/2006/main"/>
+          <a:p xmlns:a="http://schemas.openxmlformats.org/drawingml/2006/main">
+            <a:pPr algn="l">
+              <a:defRPr sz="1125" b="0" i="0">
+                <a:solidFill>
+                  <a:srgbClr val="555555"/>
+                </a:solidFill>
+              </a:defRPr>
+            </a:pPr>
+            <a:r>
+              <a:rPr sz="1125" b="0" i="0">
+                <a:solidFill>
+                  <a:srgbClr val="555555"/>
+                </a:solidFill>
+              </a:rPr>
+              <a:t>Basket hold was 225.2%.</a:t>
+            </a:r>
+          </a:p>
+        </p:txBody>
+      </p:sp>
+      <p:sp>
+        <p:nvSpPr>
+          <p:cNvPr id="8" name="">
+            <a:extLst xmlns:a="http://schemas.openxmlformats.org/drawingml/2006/main">
+              <a:ext uri="{FF2B5EF4-FFF2-40B4-BE49-F238E27FC236}">
+                <a16:creationId xmlns:a16="http://schemas.microsoft.com/office/drawing/2014/main" id="{321FFE8A-4662-4C58-BAB8-CB9246C9AB77}"/>
+              </a:ext>
+            </a:extLst>
+          </p:cNvPr>
+          <p:cNvSpPr>
+            <a:spLocks xmlns:a="http://schemas.openxmlformats.org/drawingml/2006/main" noGrp="1"/>
+          </p:cNvSpPr>
+          <p:nvPr/>
+        </p:nvSpPr>
+        <p:spPr>
+          <a:xfrm xmlns:a="http://schemas.openxmlformats.org/drawingml/2006/main">
+            <a:off x="3409950" y="2152650"/>
+            <a:ext cx="2333625" cy="1428750"/>
+          </a:xfrm>
+          <a:prstGeom xmlns:a="http://schemas.openxmlformats.org/drawingml/2006/main" prst="rect">
+            <a:avLst/>
+          </a:prstGeom>
+          <a:solidFill xmlns:a="http://schemas.openxmlformats.org/drawingml/2006/main">
+            <a:srgbClr val="EDEDED"/>
+          </a:solidFill>
+          <a:ln xmlns:a="http://schemas.openxmlformats.org/drawingml/2006/main" w="9525">
+            <a:solidFill>
+              <a:srgbClr val="B8BCC4"/>
+            </a:solidFill>
+            <a:prstDash val="solid"/>
+          </a:ln>
+        </p:spPr>
+      </p:sp>
+      <p:sp>
+        <p:nvSpPr>
+          <p:cNvPr id="9" name="">
+            <a:extLst xmlns:a="http://schemas.openxmlformats.org/drawingml/2006/main">
+              <a:ext uri="{FF2B5EF4-FFF2-40B4-BE49-F238E27FC236}">
+                <a16:creationId xmlns:a16="http://schemas.microsoft.com/office/drawing/2014/main" id="{AE708642-F742-434E-B987-136B3D3C70B3}"/>
+              </a:ext>
+            </a:extLst>
+          </p:cNvPr>
+          <p:cNvSpPr>
+            <a:spLocks xmlns:a="http://schemas.openxmlformats.org/drawingml/2006/main" noGrp="1"/>
+          </p:cNvSpPr>
+          <p:nvPr/>
+        </p:nvSpPr>
+        <p:spPr>
+          <a:xfrm xmlns:a="http://schemas.openxmlformats.org/drawingml/2006/main">
+            <a:off x="3581400" y="2305050"/>
+            <a:ext cx="1990725" cy="171450"/>
+          </a:xfrm>
+          <a:prstGeom xmlns:a="http://schemas.openxmlformats.org/drawingml/2006/main" prst="rect">
+            <a:avLst/>
+          </a:prstGeom>
+          <a:noFill xmlns:a="http://schemas.openxmlformats.org/drawingml/2006/main"/>
+          <a:ln xmlns:a="http://schemas.openxmlformats.org/drawingml/2006/main" w="0">
+            <a:noFill/>
+            <a:prstDash val="solid"/>
+          </a:ln>
+        </p:spPr>
+        <p:txBody>
+          <a:bodyPr xmlns:a="http://schemas.openxmlformats.org/drawingml/2006/main"/>
+          <a:lstStyle xmlns:a="http://schemas.openxmlformats.org/drawingml/2006/main"/>
+          <a:p xmlns:a="http://schemas.openxmlformats.org/drawingml/2006/main">
+            <a:pPr algn="l">
+              <a:defRPr sz="900" b="1" i="0">
+                <a:solidFill>
+                  <a:srgbClr val="555555"/>
+                </a:solidFill>
+              </a:defRPr>
+            </a:pPr>
+            <a:r>
+              <a:rPr sz="900" b="1" i="0">
+                <a:solidFill>
+                  <a:srgbClr val="555555"/>
+                </a:solidFill>
+              </a:rPr>
+              <a:t>2020 SELECTED</a:t>
+            </a:r>
+          </a:p>
+        </p:txBody>
+      </p:sp>
+      <p:sp>
+        <p:nvSpPr>
+          <p:cNvPr id="10" name="">
+            <a:extLst xmlns:a="http://schemas.openxmlformats.org/drawingml/2006/main">
+              <a:ext uri="{FF2B5EF4-FFF2-40B4-BE49-F238E27FC236}">
+                <a16:creationId xmlns:a16="http://schemas.microsoft.com/office/drawing/2014/main" id="{538BE402-6708-44E4-892A-F4C970BFC4D8}"/>
+              </a:ext>
+            </a:extLst>
+          </p:cNvPr>
+          <p:cNvSpPr>
+            <a:spLocks xmlns:a="http://schemas.openxmlformats.org/drawingml/2006/main" noGrp="1"/>
+          </p:cNvSpPr>
+          <p:nvPr/>
+        </p:nvSpPr>
+        <p:spPr>
+          <a:xfrm xmlns:a="http://schemas.openxmlformats.org/drawingml/2006/main">
+            <a:off x="3581400" y="2552700"/>
+            <a:ext cx="1990725" cy="361950"/>
+          </a:xfrm>
+          <a:prstGeom xmlns:a="http://schemas.openxmlformats.org/drawingml/2006/main" prst="rect">
+            <a:avLst/>
+          </a:prstGeom>
+          <a:noFill xmlns:a="http://schemas.openxmlformats.org/drawingml/2006/main"/>
+          <a:ln xmlns:a="http://schemas.openxmlformats.org/drawingml/2006/main" w="0">
+            <a:noFill/>
+            <a:prstDash val="solid"/>
+          </a:ln>
+        </p:spPr>
+        <p:txBody>
+          <a:bodyPr xmlns:a="http://schemas.openxmlformats.org/drawingml/2006/main"/>
+          <a:lstStyle xmlns:a="http://schemas.openxmlformats.org/drawingml/2006/main"/>
+          <a:p xmlns:a="http://schemas.openxmlformats.org/drawingml/2006/main">
+            <a:pPr algn="l">
+              <a:defRPr sz="2250" b="1" i="0">
+                <a:solidFill>
+                  <a:srgbClr val="000000"/>
+                </a:solidFill>
+              </a:defRPr>
+            </a:pPr>
+            <a:r>
+              <a:rPr sz="2250" b="1" i="0">
+                <a:solidFill>
+                  <a:srgbClr val="000000"/>
+                </a:solidFill>
+              </a:rPr>
+              <a:t>78.1%</a:t>
+            </a:r>
+          </a:p>
+        </p:txBody>
+      </p:sp>
+      <p:sp>
+        <p:nvSpPr>
+          <p:cNvPr id="11" name="">
+            <a:extLst xmlns:a="http://schemas.openxmlformats.org/drawingml/2006/main">
+              <a:ext uri="{FF2B5EF4-FFF2-40B4-BE49-F238E27FC236}">
+                <a16:creationId xmlns:a16="http://schemas.microsoft.com/office/drawing/2014/main" id="{D8EA1247-8CF7-48BA-BA03-8238470B6B98}"/>
+              </a:ext>
+            </a:extLst>
+          </p:cNvPr>
+          <p:cNvSpPr>
+            <a:spLocks xmlns:a="http://schemas.openxmlformats.org/drawingml/2006/main" noGrp="1"/>
+          </p:cNvSpPr>
+          <p:nvPr/>
+        </p:nvSpPr>
+        <p:spPr>
+          <a:xfrm xmlns:a="http://schemas.openxmlformats.org/drawingml/2006/main">
+            <a:off x="3581400" y="2971800"/>
+            <a:ext cx="1990725" cy="552450"/>
+          </a:xfrm>
+          <a:prstGeom xmlns:a="http://schemas.openxmlformats.org/drawingml/2006/main" prst="rect">
+            <a:avLst/>
+          </a:prstGeom>
+          <a:noFill xmlns:a="http://schemas.openxmlformats.org/drawingml/2006/main"/>
+          <a:ln xmlns:a="http://schemas.openxmlformats.org/drawingml/2006/main" w="0">
+            <a:noFill/>
+            <a:prstDash val="solid"/>
+          </a:ln>
+        </p:spPr>
+        <p:txBody>
+          <a:bodyPr xmlns:a="http://schemas.openxmlformats.org/drawingml/2006/main"/>
+          <a:lstStyle xmlns:a="http://schemas.openxmlformats.org/drawingml/2006/main"/>
+          <a:p xmlns:a="http://schemas.openxmlformats.org/drawingml/2006/main">
+            <a:pPr algn="l">
+              <a:defRPr sz="1125" b="0" i="0">
+                <a:solidFill>
+                  <a:srgbClr val="555555"/>
+                </a:solidFill>
+              </a:defRPr>
+            </a:pPr>
+            <a:r>
+              <a:rPr sz="1125" b="0" i="0">
+                <a:solidFill>
+                  <a:srgbClr val="555555"/>
+                </a:solidFill>
+              </a:rPr>
+              <a:t>Fixed XGB was 108.9%.</a:t>
+            </a:r>
+          </a:p>
+        </p:txBody>
+      </p:sp>
+      <p:sp>
+        <p:nvSpPr>
+          <p:cNvPr id="12" name="">
+            <a:extLst xmlns:a="http://schemas.openxmlformats.org/drawingml/2006/main">
+              <a:ext uri="{FF2B5EF4-FFF2-40B4-BE49-F238E27FC236}">
+                <a16:creationId xmlns:a16="http://schemas.microsoft.com/office/drawing/2014/main" id="{09DFE062-FA0B-4D9B-B471-79EB758E660F}"/>
+              </a:ext>
+            </a:extLst>
+          </p:cNvPr>
+          <p:cNvSpPr>
+            <a:spLocks xmlns:a="http://schemas.openxmlformats.org/drawingml/2006/main" noGrp="1"/>
+          </p:cNvSpPr>
+          <p:nvPr/>
+        </p:nvSpPr>
+        <p:spPr>
+          <a:xfrm xmlns:a="http://schemas.openxmlformats.org/drawingml/2006/main">
+            <a:off x="6115050" y="2152650"/>
+            <a:ext cx="2333625" cy="1428750"/>
+          </a:xfrm>
+          <a:prstGeom xmlns:a="http://schemas.openxmlformats.org/drawingml/2006/main" prst="rect">
+            <a:avLst/>
+          </a:prstGeom>
+          <a:solidFill xmlns:a="http://schemas.openxmlformats.org/drawingml/2006/main">
+            <a:srgbClr val="EDEDED"/>
+          </a:solidFill>
+          <a:ln xmlns:a="http://schemas.openxmlformats.org/drawingml/2006/main" w="9525">
+            <a:solidFill>
+              <a:srgbClr val="B8BCC4"/>
+            </a:solidFill>
+            <a:prstDash val="solid"/>
+          </a:ln>
+        </p:spPr>
+      </p:sp>
+      <p:sp>
+        <p:nvSpPr>
+          <p:cNvPr id="13" name="">
+            <a:extLst xmlns:a="http://schemas.openxmlformats.org/drawingml/2006/main">
+              <a:ext uri="{FF2B5EF4-FFF2-40B4-BE49-F238E27FC236}">
+                <a16:creationId xmlns:a16="http://schemas.microsoft.com/office/drawing/2014/main" id="{0B6D31F7-2D42-44BF-B622-9A1A594731B4}"/>
+              </a:ext>
+            </a:extLst>
+          </p:cNvPr>
+          <p:cNvSpPr>
+            <a:spLocks xmlns:a="http://schemas.openxmlformats.org/drawingml/2006/main" noGrp="1"/>
+          </p:cNvSpPr>
+          <p:nvPr/>
+        </p:nvSpPr>
+        <p:spPr>
+          <a:xfrm xmlns:a="http://schemas.openxmlformats.org/drawingml/2006/main">
+            <a:off x="6286500" y="2305050"/>
+            <a:ext cx="1990725" cy="171450"/>
+          </a:xfrm>
+          <a:prstGeom xmlns:a="http://schemas.openxmlformats.org/drawingml/2006/main" prst="rect">
+            <a:avLst/>
+          </a:prstGeom>
+          <a:noFill xmlns:a="http://schemas.openxmlformats.org/drawingml/2006/main"/>
+          <a:ln xmlns:a="http://schemas.openxmlformats.org/drawingml/2006/main" w="0">
+            <a:noFill/>
+            <a:prstDash val="solid"/>
+          </a:ln>
+        </p:spPr>
+        <p:txBody>
+          <a:bodyPr xmlns:a="http://schemas.openxmlformats.org/drawingml/2006/main"/>
+          <a:lstStyle xmlns:a="http://schemas.openxmlformats.org/drawingml/2006/main"/>
+          <a:p xmlns:a="http://schemas.openxmlformats.org/drawingml/2006/main">
+            <a:pPr algn="l">
+              <a:defRPr sz="900" b="1" i="0">
+                <a:solidFill>
+                  <a:srgbClr val="555555"/>
+                </a:solidFill>
+              </a:defRPr>
+            </a:pPr>
+            <a:r>
+              <a:rPr sz="900" b="1" i="0">
+                <a:solidFill>
+                  <a:srgbClr val="555555"/>
+                </a:solidFill>
+              </a:rPr>
+              <a:t>2022 FIXED XGB</a:t>
+            </a:r>
+          </a:p>
+        </p:txBody>
+      </p:sp>
+      <p:sp>
+        <p:nvSpPr>
+          <p:cNvPr id="14" name="">
+            <a:extLst xmlns:a="http://schemas.openxmlformats.org/drawingml/2006/main">
+              <a:ext uri="{FF2B5EF4-FFF2-40B4-BE49-F238E27FC236}">
+                <a16:creationId xmlns:a16="http://schemas.microsoft.com/office/drawing/2014/main" id="{94D7E4AE-3617-4205-A7E0-4477A0D107E0}"/>
+              </a:ext>
+            </a:extLst>
+          </p:cNvPr>
+          <p:cNvSpPr>
+            <a:spLocks xmlns:a="http://schemas.openxmlformats.org/drawingml/2006/main" noGrp="1"/>
+          </p:cNvSpPr>
+          <p:nvPr/>
+        </p:nvSpPr>
+        <p:spPr>
+          <a:xfrm xmlns:a="http://schemas.openxmlformats.org/drawingml/2006/main">
+            <a:off x="6286500" y="2552700"/>
+            <a:ext cx="1990725" cy="361950"/>
+          </a:xfrm>
+          <a:prstGeom xmlns:a="http://schemas.openxmlformats.org/drawingml/2006/main" prst="rect">
+            <a:avLst/>
+          </a:prstGeom>
+          <a:noFill xmlns:a="http://schemas.openxmlformats.org/drawingml/2006/main"/>
+          <a:ln xmlns:a="http://schemas.openxmlformats.org/drawingml/2006/main" w="0">
+            <a:noFill/>
+            <a:prstDash val="solid"/>
+          </a:ln>
+        </p:spPr>
+        <p:txBody>
+          <a:bodyPr xmlns:a="http://schemas.openxmlformats.org/drawingml/2006/main"/>
+          <a:lstStyle xmlns:a="http://schemas.openxmlformats.org/drawingml/2006/main"/>
+          <a:p xmlns:a="http://schemas.openxmlformats.org/drawingml/2006/main">
+            <a:pPr algn="l">
+              <a:defRPr sz="2250" b="1" i="0">
+                <a:solidFill>
+                  <a:srgbClr val="000000"/>
+                </a:solidFill>
+              </a:defRPr>
+            </a:pPr>
+            <a:r>
+              <a:rPr sz="2250" b="1" i="0">
+                <a:solidFill>
+                  <a:srgbClr val="000000"/>
+                </a:solidFill>
+              </a:rPr>
+              <a:t>-37.8%</a:t>
+            </a:r>
+          </a:p>
+        </p:txBody>
+      </p:sp>
+      <p:sp>
+        <p:nvSpPr>
+          <p:cNvPr id="15" name="">
+            <a:extLst xmlns:a="http://schemas.openxmlformats.org/drawingml/2006/main">
+              <a:ext uri="{FF2B5EF4-FFF2-40B4-BE49-F238E27FC236}">
+                <a16:creationId xmlns:a16="http://schemas.microsoft.com/office/drawing/2014/main" id="{1ADE1B16-236D-4D40-A448-CEEB4823077E}"/>
+              </a:ext>
+            </a:extLst>
+          </p:cNvPr>
+          <p:cNvSpPr>
+            <a:spLocks xmlns:a="http://schemas.openxmlformats.org/drawingml/2006/main" noGrp="1"/>
+          </p:cNvSpPr>
+          <p:nvPr/>
+        </p:nvSpPr>
+        <p:spPr>
+          <a:xfrm xmlns:a="http://schemas.openxmlformats.org/drawingml/2006/main">
+            <a:off x="6286500" y="2971800"/>
+            <a:ext cx="1990725" cy="552450"/>
+          </a:xfrm>
+          <a:prstGeom xmlns:a="http://schemas.openxmlformats.org/drawingml/2006/main" prst="rect">
+            <a:avLst/>
+          </a:prstGeom>
+          <a:noFill xmlns:a="http://schemas.openxmlformats.org/drawingml/2006/main"/>
+          <a:ln xmlns:a="http://schemas.openxmlformats.org/drawingml/2006/main" w="0">
+            <a:noFill/>
+            <a:prstDash val="solid"/>
+          </a:ln>
+        </p:spPr>
+        <p:txBody>
+          <a:bodyPr xmlns:a="http://schemas.openxmlformats.org/drawingml/2006/main"/>
+          <a:lstStyle xmlns:a="http://schemas.openxmlformats.org/drawingml/2006/main"/>
+          <a:p xmlns:a="http://schemas.openxmlformats.org/drawingml/2006/main">
+            <a:pPr algn="l">
+              <a:defRPr sz="1125" b="0" i="0">
+                <a:solidFill>
+                  <a:srgbClr val="555555"/>
+                </a:solidFill>
+              </a:defRPr>
+            </a:pPr>
+            <a:r>
+              <a:rPr sz="1125" b="0" i="0">
+                <a:solidFill>
+                  <a:srgbClr val="555555"/>
+                </a:solidFill>
+              </a:rPr>
+              <a:t>Basket hold was -53.3%.</a:t>
+            </a:r>
+          </a:p>
+        </p:txBody>
+      </p:sp>
+      <p:sp>
+        <p:nvSpPr>
+          <p:cNvPr id="16" name="">
+            <a:extLst xmlns:a="http://schemas.openxmlformats.org/drawingml/2006/main">
+              <a:ext uri="{FF2B5EF4-FFF2-40B4-BE49-F238E27FC236}">
+                <a16:creationId xmlns:a16="http://schemas.microsoft.com/office/drawing/2014/main" id="{C16E4F18-C1B7-4FD5-852E-BF2CE7183CEE}"/>
+              </a:ext>
+            </a:extLst>
+          </p:cNvPr>
+          <p:cNvSpPr>
+            <a:spLocks xmlns:a="http://schemas.openxmlformats.org/drawingml/2006/main" noGrp="1"/>
+          </p:cNvSpPr>
+          <p:nvPr/>
+        </p:nvSpPr>
+        <p:spPr>
+          <a:xfrm xmlns:a="http://schemas.openxmlformats.org/drawingml/2006/main">
+            <a:off x="8820150" y="2152650"/>
+            <a:ext cx="2333625" cy="1428750"/>
+          </a:xfrm>
+          <a:prstGeom xmlns:a="http://schemas.openxmlformats.org/drawingml/2006/main" prst="rect">
+            <a:avLst/>
+          </a:prstGeom>
+          <a:solidFill xmlns:a="http://schemas.openxmlformats.org/drawingml/2006/main">
+            <a:srgbClr val="EDEDED"/>
+          </a:solidFill>
+          <a:ln xmlns:a="http://schemas.openxmlformats.org/drawingml/2006/main" w="9525">
+            <a:solidFill>
+              <a:srgbClr val="B8BCC4"/>
+            </a:solidFill>
+            <a:prstDash val="solid"/>
+          </a:ln>
+        </p:spPr>
+      </p:sp>
+      <p:sp>
+        <p:nvSpPr>
+          <p:cNvPr id="17" name="">
+            <a:extLst xmlns:a="http://schemas.openxmlformats.org/drawingml/2006/main">
+              <a:ext uri="{FF2B5EF4-FFF2-40B4-BE49-F238E27FC236}">
+                <a16:creationId xmlns:a16="http://schemas.microsoft.com/office/drawing/2014/main" id="{A101165C-7906-4E45-9906-78843E3DA069}"/>
+              </a:ext>
+            </a:extLst>
+          </p:cNvPr>
+          <p:cNvSpPr>
+            <a:spLocks xmlns:a="http://schemas.openxmlformats.org/drawingml/2006/main" noGrp="1"/>
+          </p:cNvSpPr>
+          <p:nvPr/>
+        </p:nvSpPr>
+        <p:spPr>
+          <a:xfrm xmlns:a="http://schemas.openxmlformats.org/drawingml/2006/main">
+            <a:off x="8991600" y="2305050"/>
+            <a:ext cx="1990725" cy="171450"/>
+          </a:xfrm>
+          <a:prstGeom xmlns:a="http://schemas.openxmlformats.org/drawingml/2006/main" prst="rect">
+            <a:avLst/>
+          </a:prstGeom>
+          <a:noFill xmlns:a="http://schemas.openxmlformats.org/drawingml/2006/main"/>
+          <a:ln xmlns:a="http://schemas.openxmlformats.org/drawingml/2006/main" w="0">
+            <a:noFill/>
+            <a:prstDash val="solid"/>
+          </a:ln>
+        </p:spPr>
+        <p:txBody>
+          <a:bodyPr xmlns:a="http://schemas.openxmlformats.org/drawingml/2006/main"/>
+          <a:lstStyle xmlns:a="http://schemas.openxmlformats.org/drawingml/2006/main"/>
+          <a:p xmlns:a="http://schemas.openxmlformats.org/drawingml/2006/main">
+            <a:pPr algn="l">
+              <a:defRPr sz="900" b="1" i="0">
+                <a:solidFill>
+                  <a:srgbClr val="555555"/>
+                </a:solidFill>
+              </a:defRPr>
+            </a:pPr>
+            <a:r>
+              <a:rPr sz="900" b="1" i="0">
+                <a:solidFill>
+                  <a:srgbClr val="555555"/>
+                </a:solidFill>
+              </a:rPr>
+              <a:t>2022 SELECTED</a:t>
+            </a:r>
+          </a:p>
+        </p:txBody>
+      </p:sp>
+      <p:sp>
+        <p:nvSpPr>
+          <p:cNvPr id="18" name="">
+            <a:extLst xmlns:a="http://schemas.openxmlformats.org/drawingml/2006/main">
+              <a:ext uri="{FF2B5EF4-FFF2-40B4-BE49-F238E27FC236}">
+                <a16:creationId xmlns:a16="http://schemas.microsoft.com/office/drawing/2014/main" id="{BB546BDE-8865-4F89-A5BD-2A129BF15019}"/>
+              </a:ext>
+            </a:extLst>
+          </p:cNvPr>
+          <p:cNvSpPr>
+            <a:spLocks xmlns:a="http://schemas.openxmlformats.org/drawingml/2006/main" noGrp="1"/>
+          </p:cNvSpPr>
+          <p:nvPr/>
+        </p:nvSpPr>
+        <p:spPr>
+          <a:xfrm xmlns:a="http://schemas.openxmlformats.org/drawingml/2006/main">
+            <a:off x="8991600" y="2552700"/>
+            <a:ext cx="1990725" cy="361950"/>
+          </a:xfrm>
+          <a:prstGeom xmlns:a="http://schemas.openxmlformats.org/drawingml/2006/main" prst="rect">
+            <a:avLst/>
+          </a:prstGeom>
+          <a:noFill xmlns:a="http://schemas.openxmlformats.org/drawingml/2006/main"/>
+          <a:ln xmlns:a="http://schemas.openxmlformats.org/drawingml/2006/main" w="0">
+            <a:noFill/>
+            <a:prstDash val="solid"/>
+          </a:ln>
+        </p:spPr>
+        <p:txBody>
+          <a:bodyPr xmlns:a="http://schemas.openxmlformats.org/drawingml/2006/main"/>
+          <a:lstStyle xmlns:a="http://schemas.openxmlformats.org/drawingml/2006/main"/>
+          <a:p xmlns:a="http://schemas.openxmlformats.org/drawingml/2006/main">
+            <a:pPr algn="l">
+              <a:defRPr sz="2250" b="1" i="0">
+                <a:solidFill>
+                  <a:srgbClr val="000000"/>
+                </a:solidFill>
+              </a:defRPr>
+            </a:pPr>
+            <a:r>
+              <a:rPr sz="2250" b="1" i="0">
+                <a:solidFill>
+                  <a:srgbClr val="000000"/>
+                </a:solidFill>
+              </a:rPr>
+              <a:t>-41.7%</a:t>
+            </a:r>
+          </a:p>
+        </p:txBody>
+      </p:sp>
+      <p:sp>
+        <p:nvSpPr>
+          <p:cNvPr id="19" name="">
+            <a:extLst xmlns:a="http://schemas.openxmlformats.org/drawingml/2006/main">
+              <a:ext uri="{FF2B5EF4-FFF2-40B4-BE49-F238E27FC236}">
+                <a16:creationId xmlns:a16="http://schemas.microsoft.com/office/drawing/2014/main" id="{E85D35F0-EE82-40A0-A202-3DD1F59D9F6D}"/>
+              </a:ext>
+            </a:extLst>
+          </p:cNvPr>
+          <p:cNvSpPr>
+            <a:spLocks xmlns:a="http://schemas.openxmlformats.org/drawingml/2006/main" noGrp="1"/>
+          </p:cNvSpPr>
+          <p:nvPr/>
+        </p:nvSpPr>
+        <p:spPr>
+          <a:xfrm xmlns:a="http://schemas.openxmlformats.org/drawingml/2006/main">
+            <a:off x="8991600" y="2971800"/>
+            <a:ext cx="1990725" cy="552450"/>
+          </a:xfrm>
+          <a:prstGeom xmlns:a="http://schemas.openxmlformats.org/drawingml/2006/main" prst="rect">
+            <a:avLst/>
+          </a:prstGeom>
+          <a:noFill xmlns:a="http://schemas.openxmlformats.org/drawingml/2006/main"/>
+          <a:ln xmlns:a="http://schemas.openxmlformats.org/drawingml/2006/main" w="0">
+            <a:noFill/>
+            <a:prstDash val="solid"/>
+          </a:ln>
+        </p:spPr>
+        <p:txBody>
+          <a:bodyPr xmlns:a="http://schemas.openxmlformats.org/drawingml/2006/main"/>
+          <a:lstStyle xmlns:a="http://schemas.openxmlformats.org/drawingml/2006/main"/>
+          <a:p xmlns:a="http://schemas.openxmlformats.org/drawingml/2006/main">
+            <a:pPr algn="l">
+              <a:defRPr sz="1125" b="0" i="0">
+                <a:solidFill>
+                  <a:srgbClr val="555555"/>
+                </a:solidFill>
+              </a:defRPr>
+            </a:pPr>
+            <a:r>
+              <a:rPr sz="1125" b="0" i="0">
+                <a:solidFill>
+                  <a:srgbClr val="555555"/>
+                </a:solidFill>
+              </a:rPr>
+              <a:t>Fixed XGB was -37.8%.</a:t>
+            </a:r>
+          </a:p>
+        </p:txBody>
+      </p:sp>
+      <p:sp>
+        <p:nvSpPr>
+          <p:cNvPr id="20" name="">
+            <a:extLst xmlns:a="http://schemas.openxmlformats.org/drawingml/2006/main">
+              <a:ext uri="{FF2B5EF4-FFF2-40B4-BE49-F238E27FC236}">
+                <a16:creationId xmlns:a16="http://schemas.microsoft.com/office/drawing/2014/main" id="{A6A3DE28-A8B2-4765-8915-16565523E4F2}"/>
+              </a:ext>
+            </a:extLst>
+          </p:cNvPr>
+          <p:cNvSpPr>
+            <a:spLocks xmlns:a="http://schemas.openxmlformats.org/drawingml/2006/main" noGrp="1"/>
+          </p:cNvSpPr>
+          <p:nvPr/>
+        </p:nvSpPr>
+        <p:spPr>
+          <a:xfrm xmlns:a="http://schemas.openxmlformats.org/drawingml/2006/main">
+            <a:off x="1066800" y="4095750"/>
+            <a:ext cx="9334500" cy="914400"/>
+          </a:xfrm>
+          <a:prstGeom xmlns:a="http://schemas.openxmlformats.org/drawingml/2006/main" prst="rect">
+            <a:avLst/>
+          </a:prstGeom>
+          <a:noFill xmlns:a="http://schemas.openxmlformats.org/drawingml/2006/main"/>
+          <a:ln xmlns:a="http://schemas.openxmlformats.org/drawingml/2006/main" w="0">
+            <a:noFill/>
+            <a:prstDash val="solid"/>
+          </a:ln>
+        </p:spPr>
+        <p:txBody>
+          <a:bodyPr xmlns:a="http://schemas.openxmlformats.org/drawingml/2006/main"/>
+          <a:lstStyle xmlns:a="http://schemas.openxmlformats.org/drawingml/2006/main"/>
+          <a:p xmlns:a="http://schemas.openxmlformats.org/drawingml/2006/main">
+            <a:pPr algn="ctr">
+              <a:defRPr sz="2100" b="1" i="0">
+                <a:solidFill>
+                  <a:srgbClr val="000000"/>
+                </a:solidFill>
+              </a:defRPr>
+            </a:pPr>
+            <a:r>
+              <a:rPr sz="2100" b="1" i="0">
+                <a:solidFill>
+                  <a:srgbClr val="000000"/>
+                </a:solidFill>
+              </a:rPr>
+              <a:t>The selected grid was worse than the fixed XGBoost control in both windows under the same TRAIN forward-return policy. This argues against widening model knobs before improving features or labels.</a:t>
+            </a:r>
+          </a:p>
+        </p:txBody>
+      </p:sp>
+    </p:spTree>
+    <p:extLst>
+      <p:ext uri="{BB962C8B-B14F-4D97-AF65-F5344CB8AC3E}">
+        <p14:creationId xmlns:p14="http://schemas.microsoft.com/office/powerpoint/2010/main" val="2127008876"/>
       </p:ext>
     </p:extLst>
   </p:cSld>
@@ -18437,7 +21215,7 @@
           <p:cNvPr id="1" name="">
             <a:extLst xmlns:a="http://schemas.openxmlformats.org/drawingml/2006/main">
               <a:ext uri="{FF2B5EF4-FFF2-40B4-BE49-F238E27FC236}">
-                <a16:creationId xmlns:a16="http://schemas.microsoft.com/office/drawing/2014/main" id="{47A1C4C0-EBFE-4281-AF30-862F3601EDDB}"/>
+                <a16:creationId xmlns:a16="http://schemas.microsoft.com/office/drawing/2014/main" id="{B845378A-A60A-4947-B946-85F65174EEDD}"/>
               </a:ext>
             </a:extLst>
           </p:cNvPr>
@@ -18487,7 +21265,7 @@
           <p:cNvPr id="2" name="">
             <a:extLst xmlns:a="http://schemas.openxmlformats.org/drawingml/2006/main">
               <a:ext uri="{FF2B5EF4-FFF2-40B4-BE49-F238E27FC236}">
-                <a16:creationId xmlns:a16="http://schemas.microsoft.com/office/drawing/2014/main" id="{30900479-3637-4A37-BE2C-EDFD2D289E1C}"/>
+                <a16:creationId xmlns:a16="http://schemas.microsoft.com/office/drawing/2014/main" id="{59BF5798-0F4E-4EE9-A6E9-F697021FE4A3}"/>
               </a:ext>
             </a:extLst>
           </p:cNvPr>
@@ -18537,7 +21315,7 @@
           <p:cNvPr id="3" name="">
             <a:extLst xmlns:a="http://schemas.openxmlformats.org/drawingml/2006/main">
               <a:ext uri="{FF2B5EF4-FFF2-40B4-BE49-F238E27FC236}">
-                <a16:creationId xmlns:a16="http://schemas.microsoft.com/office/drawing/2014/main" id="{FFF70DBA-EC45-468B-AB38-5442FBFAD6F5}"/>
+                <a16:creationId xmlns:a16="http://schemas.microsoft.com/office/drawing/2014/main" id="{939FAD8D-858B-4A8E-9888-F2ECCBE9A1E8}"/>
               </a:ext>
             </a:extLst>
           </p:cNvPr>
@@ -18572,7 +21350,7 @@
           <p:nvPr/>
         </p:nvPicPr>
         <p:blipFill>
-          <a:blip xmlns:r="http://schemas.openxmlformats.org/officeDocument/2006/relationships" xmlns:a="http://schemas.openxmlformats.org/drawingml/2006/main" r:embed="Rb567a2b632454056"/>
+          <a:blip xmlns:r="http://schemas.openxmlformats.org/officeDocument/2006/relationships" xmlns:a="http://schemas.openxmlformats.org/drawingml/2006/main" r:embed="Rfa94d19f00344773"/>
           <a:stretch xmlns:a="http://schemas.openxmlformats.org/drawingml/2006/main"/>
         </p:blipFill>
         <p:spPr>
@@ -18590,7 +21368,7 @@
           <p:cNvPr id="5" name="">
             <a:extLst xmlns:a="http://schemas.openxmlformats.org/drawingml/2006/main">
               <a:ext uri="{FF2B5EF4-FFF2-40B4-BE49-F238E27FC236}">
-                <a16:creationId xmlns:a16="http://schemas.microsoft.com/office/drawing/2014/main" id="{F2023B79-395C-44C7-88CD-5AFA6ECED22D}"/>
+                <a16:creationId xmlns:a16="http://schemas.microsoft.com/office/drawing/2014/main" id="{220763E5-131B-4242-B7A0-33BD6D7B13C7}"/>
               </a:ext>
             </a:extLst>
           </p:cNvPr>
@@ -18640,7 +21418,7 @@
           <p:cNvPr id="6" name="">
             <a:extLst xmlns:a="http://schemas.openxmlformats.org/drawingml/2006/main">
               <a:ext uri="{FF2B5EF4-FFF2-40B4-BE49-F238E27FC236}">
-                <a16:creationId xmlns:a16="http://schemas.microsoft.com/office/drawing/2014/main" id="{EF781F2F-B6D7-4262-8731-6CC576652B98}"/>
+                <a16:creationId xmlns:a16="http://schemas.microsoft.com/office/drawing/2014/main" id="{DA308196-A671-4268-8689-386599760C6A}"/>
               </a:ext>
             </a:extLst>
           </p:cNvPr>
@@ -18688,7 +21466,1745 @@
     </p:spTree>
     <p:extLst>
       <p:ext uri="{BB962C8B-B14F-4D97-AF65-F5344CB8AC3E}">
-        <p14:creationId xmlns:p14="http://schemas.microsoft.com/office/powerpoint/2010/main" val="2107948074"/>
+        <p14:creationId xmlns:p14="http://schemas.microsoft.com/office/powerpoint/2010/main" val="1872766600"/>
+      </p:ext>
+    </p:extLst>
+  </p:cSld>
+</p:sld>
+</file>
+
+<file path=ppt/slides/slide40.xml><?xml version="1.0" encoding="utf-8"?>
+<p:sld xmlns:p="http://schemas.openxmlformats.org/presentationml/2006/main">
+  <p:cSld>
+    <p:bg>
+      <p:bgPr>
+        <a:solidFill xmlns:a="http://schemas.openxmlformats.org/drawingml/2006/main">
+          <a:srgbClr val="FFFFFF"/>
+        </a:solidFill>
+      </p:bgPr>
+    </p:bg>
+    <p:spTree>
+      <p:nvGrpSpPr>
+        <p:cNvPr id="1" name=""/>
+        <p:cNvGrpSpPr/>
+        <p:nvPr/>
+      </p:nvGrpSpPr>
+      <p:grpSpPr>
+        <a:xfrm xmlns:a="http://schemas.openxmlformats.org/drawingml/2006/main"/>
+      </p:grpSpPr>
+      <p:sp>
+        <p:nvSpPr>
+          <p:cNvPr id="1" name="">
+            <a:extLst xmlns:a="http://schemas.openxmlformats.org/drawingml/2006/main">
+              <a:ext uri="{FF2B5EF4-FFF2-40B4-BE49-F238E27FC236}">
+                <a16:creationId xmlns:a16="http://schemas.microsoft.com/office/drawing/2014/main" id="{74C3ED63-6CAA-4E90-8FA1-746B5B57AA10}"/>
+              </a:ext>
+            </a:extLst>
+          </p:cNvPr>
+          <p:cNvSpPr>
+            <a:spLocks xmlns:a="http://schemas.openxmlformats.org/drawingml/2006/main" noGrp="1"/>
+          </p:cNvSpPr>
+          <p:nvPr/>
+        </p:nvSpPr>
+        <p:spPr>
+          <a:xfrm xmlns:a="http://schemas.openxmlformats.org/drawingml/2006/main">
+            <a:off x="685800" y="400050"/>
+            <a:ext cx="8572500" cy="247650"/>
+          </a:xfrm>
+          <a:prstGeom xmlns:a="http://schemas.openxmlformats.org/drawingml/2006/main" prst="rect">
+            <a:avLst/>
+          </a:prstGeom>
+          <a:noFill xmlns:a="http://schemas.openxmlformats.org/drawingml/2006/main"/>
+          <a:ln xmlns:a="http://schemas.openxmlformats.org/drawingml/2006/main" w="0">
+            <a:noFill/>
+            <a:prstDash val="solid"/>
+          </a:ln>
+        </p:spPr>
+        <p:txBody>
+          <a:bodyPr xmlns:a="http://schemas.openxmlformats.org/drawingml/2006/main"/>
+          <a:lstStyle xmlns:a="http://schemas.openxmlformats.org/drawingml/2006/main"/>
+          <a:p xmlns:a="http://schemas.openxmlformats.org/drawingml/2006/main">
+            <a:pPr algn="l">
+              <a:defRPr sz="975" b="1" i="0">
+                <a:solidFill>
+                  <a:srgbClr val="555555"/>
+                </a:solidFill>
+              </a:defRPr>
+            </a:pPr>
+            <a:r>
+              <a:rPr sz="975" b="1" i="0">
+                <a:solidFill>
+                  <a:srgbClr val="555555"/>
+                </a:solidFill>
+              </a:rPr>
+              <a:t>GEN5.4 ML DECISION ENGINE</a:t>
+            </a:r>
+          </a:p>
+        </p:txBody>
+      </p:sp>
+      <p:sp>
+        <p:nvSpPr>
+          <p:cNvPr id="2" name="">
+            <a:extLst xmlns:a="http://schemas.openxmlformats.org/drawingml/2006/main">
+              <a:ext uri="{FF2B5EF4-FFF2-40B4-BE49-F238E27FC236}">
+                <a16:creationId xmlns:a16="http://schemas.microsoft.com/office/drawing/2014/main" id="{56ECFBF5-F2AE-4E2D-8B72-0EB061695904}"/>
+              </a:ext>
+            </a:extLst>
+          </p:cNvPr>
+          <p:cNvSpPr>
+            <a:spLocks xmlns:a="http://schemas.openxmlformats.org/drawingml/2006/main" noGrp="1"/>
+          </p:cNvSpPr>
+          <p:nvPr/>
+        </p:nvSpPr>
+        <p:spPr>
+          <a:xfrm xmlns:a="http://schemas.openxmlformats.org/drawingml/2006/main">
+            <a:off x="685800" y="723900"/>
+            <a:ext cx="10287000" cy="876300"/>
+          </a:xfrm>
+          <a:prstGeom xmlns:a="http://schemas.openxmlformats.org/drawingml/2006/main" prst="rect">
+            <a:avLst/>
+          </a:prstGeom>
+          <a:noFill xmlns:a="http://schemas.openxmlformats.org/drawingml/2006/main"/>
+          <a:ln xmlns:a="http://schemas.openxmlformats.org/drawingml/2006/main" w="0">
+            <a:noFill/>
+            <a:prstDash val="solid"/>
+          </a:ln>
+        </p:spPr>
+        <p:txBody>
+          <a:bodyPr xmlns:a="http://schemas.openxmlformats.org/drawingml/2006/main"/>
+          <a:lstStyle xmlns:a="http://schemas.openxmlformats.org/drawingml/2006/main"/>
+          <a:p xmlns:a="http://schemas.openxmlformats.org/drawingml/2006/main">
+            <a:pPr algn="l">
+              <a:defRPr sz="2850" b="1" i="0">
+                <a:solidFill>
+                  <a:srgbClr val="000000"/>
+                </a:solidFill>
+              </a:defRPr>
+            </a:pPr>
+            <a:r>
+              <a:rPr sz="2850" b="1" i="0">
+                <a:solidFill>
+                  <a:srgbClr val="000000"/>
+                </a:solidFill>
+              </a:rPr>
+              <a:t>The equity curves show tuning did not solve the core tradeoff</a:t>
+            </a:r>
+          </a:p>
+        </p:txBody>
+      </p:sp>
+      <p:sp>
+        <p:nvSpPr>
+          <p:cNvPr id="3" name="">
+            <a:extLst xmlns:a="http://schemas.openxmlformats.org/drawingml/2006/main">
+              <a:ext uri="{FF2B5EF4-FFF2-40B4-BE49-F238E27FC236}">
+                <a16:creationId xmlns:a16="http://schemas.microsoft.com/office/drawing/2014/main" id="{9A154427-C3D4-43F9-A747-E54050B86004}"/>
+              </a:ext>
+            </a:extLst>
+          </p:cNvPr>
+          <p:cNvSpPr>
+            <a:spLocks xmlns:a="http://schemas.openxmlformats.org/drawingml/2006/main" noGrp="1"/>
+          </p:cNvSpPr>
+          <p:nvPr/>
+        </p:nvSpPr>
+        <p:spPr>
+          <a:xfrm xmlns:a="http://schemas.openxmlformats.org/drawingml/2006/main">
+            <a:off x="685800" y="1657350"/>
+            <a:ext cx="10820400" cy="19050"/>
+          </a:xfrm>
+          <a:prstGeom xmlns:a="http://schemas.openxmlformats.org/drawingml/2006/main" prst="rect">
+            <a:avLst/>
+          </a:prstGeom>
+          <a:solidFill xmlns:a="http://schemas.openxmlformats.org/drawingml/2006/main">
+            <a:srgbClr val="B8BCC4"/>
+          </a:solidFill>
+          <a:ln xmlns:a="http://schemas.openxmlformats.org/drawingml/2006/main" w="0">
+            <a:noFill/>
+            <a:prstDash val="solid"/>
+          </a:ln>
+        </p:spPr>
+      </p:sp>
+      <p:pic>
+        <p:nvPicPr>
+          <p:cNvPr id="10" name=""/>
+          <p:cNvPicPr>
+            <a:picLocks xmlns:a="http://schemas.openxmlformats.org/drawingml/2006/main" noChangeAspect="1"/>
+          </p:cNvPicPr>
+          <p:nvPr/>
+        </p:nvPicPr>
+        <p:blipFill>
+          <a:blip xmlns:r="http://schemas.openxmlformats.org/officeDocument/2006/relationships" xmlns:a="http://schemas.openxmlformats.org/drawingml/2006/main" r:embed="Re01f17434fe74ed0"/>
+          <a:stretch xmlns:a="http://schemas.openxmlformats.org/drawingml/2006/main"/>
+        </p:blipFill>
+        <p:spPr>
+          <a:xfrm xmlns:a="http://schemas.openxmlformats.org/drawingml/2006/main">
+            <a:off x="835819" y="2000250"/>
+            <a:ext cx="6900863" cy="3943350"/>
+          </a:xfrm>
+          <a:prstGeom xmlns:a="http://schemas.openxmlformats.org/drawingml/2006/main" prst="rect">
+            <a:avLst/>
+          </a:prstGeom>
+        </p:spPr>
+      </p:pic>
+      <p:sp>
+        <p:nvSpPr>
+          <p:cNvPr id="5" name="">
+            <a:extLst xmlns:a="http://schemas.openxmlformats.org/drawingml/2006/main">
+              <a:ext uri="{FF2B5EF4-FFF2-40B4-BE49-F238E27FC236}">
+                <a16:creationId xmlns:a16="http://schemas.microsoft.com/office/drawing/2014/main" id="{CE3F76BD-1C76-4FC0-9B36-42BF94B13C91}"/>
+              </a:ext>
+            </a:extLst>
+          </p:cNvPr>
+          <p:cNvSpPr>
+            <a:spLocks xmlns:a="http://schemas.openxmlformats.org/drawingml/2006/main" noGrp="1"/>
+          </p:cNvSpPr>
+          <p:nvPr/>
+        </p:nvSpPr>
+        <p:spPr>
+          <a:xfrm xmlns:a="http://schemas.openxmlformats.org/drawingml/2006/main">
+            <a:off x="8477250" y="2133600"/>
+            <a:ext cx="2571750" cy="304800"/>
+          </a:xfrm>
+          <a:prstGeom xmlns:a="http://schemas.openxmlformats.org/drawingml/2006/main" prst="rect">
+            <a:avLst/>
+          </a:prstGeom>
+          <a:noFill xmlns:a="http://schemas.openxmlformats.org/drawingml/2006/main"/>
+          <a:ln xmlns:a="http://schemas.openxmlformats.org/drawingml/2006/main" w="0">
+            <a:noFill/>
+            <a:prstDash val="solid"/>
+          </a:ln>
+        </p:spPr>
+        <p:txBody>
+          <a:bodyPr xmlns:a="http://schemas.openxmlformats.org/drawingml/2006/main"/>
+          <a:lstStyle xmlns:a="http://schemas.openxmlformats.org/drawingml/2006/main"/>
+          <a:p xmlns:a="http://schemas.openxmlformats.org/drawingml/2006/main">
+            <a:pPr algn="l">
+              <a:defRPr sz="1950" b="1" i="0">
+                <a:solidFill>
+                  <a:srgbClr val="222222"/>
+                </a:solidFill>
+              </a:defRPr>
+            </a:pPr>
+            <a:r>
+              <a:rPr sz="1950" b="1" i="0">
+                <a:solidFill>
+                  <a:srgbClr val="222222"/>
+                </a:solidFill>
+              </a:rPr>
+              <a:t>What changed</a:t>
+            </a:r>
+          </a:p>
+        </p:txBody>
+      </p:sp>
+      <p:sp>
+        <p:nvSpPr>
+          <p:cNvPr id="6" name="">
+            <a:extLst xmlns:a="http://schemas.openxmlformats.org/drawingml/2006/main">
+              <a:ext uri="{FF2B5EF4-FFF2-40B4-BE49-F238E27FC236}">
+                <a16:creationId xmlns:a16="http://schemas.microsoft.com/office/drawing/2014/main" id="{D7C38717-011A-4251-BEB5-45BEE804A359}"/>
+              </a:ext>
+            </a:extLst>
+          </p:cNvPr>
+          <p:cNvSpPr>
+            <a:spLocks xmlns:a="http://schemas.openxmlformats.org/drawingml/2006/main" noGrp="1"/>
+          </p:cNvSpPr>
+          <p:nvPr/>
+        </p:nvSpPr>
+        <p:spPr>
+          <a:xfrm xmlns:a="http://schemas.openxmlformats.org/drawingml/2006/main">
+            <a:off x="8477250" y="2705100"/>
+            <a:ext cx="2705100" cy="2381250"/>
+          </a:xfrm>
+          <a:prstGeom xmlns:a="http://schemas.openxmlformats.org/drawingml/2006/main" prst="rect">
+            <a:avLst/>
+          </a:prstGeom>
+          <a:noFill xmlns:a="http://schemas.openxmlformats.org/drawingml/2006/main"/>
+          <a:ln xmlns:a="http://schemas.openxmlformats.org/drawingml/2006/main" w="0">
+            <a:noFill/>
+            <a:prstDash val="solid"/>
+          </a:ln>
+        </p:spPr>
+        <p:txBody>
+          <a:bodyPr xmlns:a="http://schemas.openxmlformats.org/drawingml/2006/main"/>
+          <a:lstStyle xmlns:a="http://schemas.openxmlformats.org/drawingml/2006/main"/>
+          <a:p xmlns:a="http://schemas.openxmlformats.org/drawingml/2006/main">
+            <a:pPr algn="l">
+              <a:defRPr sz="1650" b="0" i="0">
+                <a:solidFill>
+                  <a:srgbClr val="222222"/>
+                </a:solidFill>
+              </a:defRPr>
+            </a:pPr>
+            <a:r>
+              <a:rPr sz="1650" b="0" i="0">
+                <a:solidFill>
+                  <a:srgbClr val="222222"/>
+                </a:solidFill>
+              </a:rPr>
+              <a:t>The TRAIN-selected candidate returned 78.1% in 2020 versus fixed XGB 108.9%, and -41.7% in 2022 versus fixed XGB -37.8%. It did not close the bull-window gap.</a:t>
+            </a:r>
+          </a:p>
+        </p:txBody>
+      </p:sp>
+    </p:spTree>
+    <p:extLst>
+      <p:ext uri="{BB962C8B-B14F-4D97-AF65-F5344CB8AC3E}">
+        <p14:creationId xmlns:p14="http://schemas.microsoft.com/office/powerpoint/2010/main" val="1150251435"/>
+      </p:ext>
+    </p:extLst>
+  </p:cSld>
+</p:sld>
+</file>
+
+<file path=ppt/slides/slide41.xml><?xml version="1.0" encoding="utf-8"?>
+<p:sld xmlns:p="http://schemas.openxmlformats.org/presentationml/2006/main">
+  <p:cSld>
+    <p:bg>
+      <p:bgPr>
+        <a:solidFill xmlns:a="http://schemas.openxmlformats.org/drawingml/2006/main">
+          <a:srgbClr val="FFFFFF"/>
+        </a:solidFill>
+      </p:bgPr>
+    </p:bg>
+    <p:spTree>
+      <p:nvGrpSpPr>
+        <p:cNvPr id="1" name=""/>
+        <p:cNvGrpSpPr/>
+        <p:nvPr/>
+      </p:nvGrpSpPr>
+      <p:grpSpPr>
+        <a:xfrm xmlns:a="http://schemas.openxmlformats.org/drawingml/2006/main"/>
+      </p:grpSpPr>
+      <p:sp>
+        <p:nvSpPr>
+          <p:cNvPr id="1" name="">
+            <a:extLst xmlns:a="http://schemas.openxmlformats.org/drawingml/2006/main">
+              <a:ext uri="{FF2B5EF4-FFF2-40B4-BE49-F238E27FC236}">
+                <a16:creationId xmlns:a16="http://schemas.microsoft.com/office/drawing/2014/main" id="{45E141F2-38E7-44B4-AB71-CA6049811913}"/>
+              </a:ext>
+            </a:extLst>
+          </p:cNvPr>
+          <p:cNvSpPr>
+            <a:spLocks xmlns:a="http://schemas.openxmlformats.org/drawingml/2006/main" noGrp="1"/>
+          </p:cNvSpPr>
+          <p:nvPr/>
+        </p:nvSpPr>
+        <p:spPr>
+          <a:xfrm xmlns:a="http://schemas.openxmlformats.org/drawingml/2006/main">
+            <a:off x="685800" y="400050"/>
+            <a:ext cx="8572500" cy="247650"/>
+          </a:xfrm>
+          <a:prstGeom xmlns:a="http://schemas.openxmlformats.org/drawingml/2006/main" prst="rect">
+            <a:avLst/>
+          </a:prstGeom>
+          <a:noFill xmlns:a="http://schemas.openxmlformats.org/drawingml/2006/main"/>
+          <a:ln xmlns:a="http://schemas.openxmlformats.org/drawingml/2006/main" w="0">
+            <a:noFill/>
+            <a:prstDash val="solid"/>
+          </a:ln>
+        </p:spPr>
+        <p:txBody>
+          <a:bodyPr xmlns:a="http://schemas.openxmlformats.org/drawingml/2006/main"/>
+          <a:lstStyle xmlns:a="http://schemas.openxmlformats.org/drawingml/2006/main"/>
+          <a:p xmlns:a="http://schemas.openxmlformats.org/drawingml/2006/main">
+            <a:pPr algn="l">
+              <a:defRPr sz="975" b="1" i="0">
+                <a:solidFill>
+                  <a:srgbClr val="555555"/>
+                </a:solidFill>
+              </a:defRPr>
+            </a:pPr>
+            <a:r>
+              <a:rPr sz="975" b="1" i="0">
+                <a:solidFill>
+                  <a:srgbClr val="555555"/>
+                </a:solidFill>
+              </a:rPr>
+              <a:t>GEN5.4 ML DECISION ENGINE</a:t>
+            </a:r>
+          </a:p>
+        </p:txBody>
+      </p:sp>
+      <p:sp>
+        <p:nvSpPr>
+          <p:cNvPr id="2" name="">
+            <a:extLst xmlns:a="http://schemas.openxmlformats.org/drawingml/2006/main">
+              <a:ext uri="{FF2B5EF4-FFF2-40B4-BE49-F238E27FC236}">
+                <a16:creationId xmlns:a16="http://schemas.microsoft.com/office/drawing/2014/main" id="{CBEFEE01-1FDF-4E12-BF78-2B944CCFC74E}"/>
+              </a:ext>
+            </a:extLst>
+          </p:cNvPr>
+          <p:cNvSpPr>
+            <a:spLocks xmlns:a="http://schemas.openxmlformats.org/drawingml/2006/main" noGrp="1"/>
+          </p:cNvSpPr>
+          <p:nvPr/>
+        </p:nvSpPr>
+        <p:spPr>
+          <a:xfrm xmlns:a="http://schemas.openxmlformats.org/drawingml/2006/main">
+            <a:off x="685800" y="723900"/>
+            <a:ext cx="10287000" cy="876300"/>
+          </a:xfrm>
+          <a:prstGeom xmlns:a="http://schemas.openxmlformats.org/drawingml/2006/main" prst="rect">
+            <a:avLst/>
+          </a:prstGeom>
+          <a:noFill xmlns:a="http://schemas.openxmlformats.org/drawingml/2006/main"/>
+          <a:ln xmlns:a="http://schemas.openxmlformats.org/drawingml/2006/main" w="0">
+            <a:noFill/>
+            <a:prstDash val="solid"/>
+          </a:ln>
+        </p:spPr>
+        <p:txBody>
+          <a:bodyPr xmlns:a="http://schemas.openxmlformats.org/drawingml/2006/main"/>
+          <a:lstStyle xmlns:a="http://schemas.openxmlformats.org/drawingml/2006/main"/>
+          <a:p xmlns:a="http://schemas.openxmlformats.org/drawingml/2006/main">
+            <a:pPr algn="l">
+              <a:defRPr sz="2850" b="1" i="0">
+                <a:solidFill>
+                  <a:srgbClr val="000000"/>
+                </a:solidFill>
+              </a:defRPr>
+            </a:pPr>
+            <a:r>
+              <a:rPr sz="2850" b="1" i="0">
+                <a:solidFill>
+                  <a:srgbClr val="000000"/>
+                </a:solidFill>
+              </a:rPr>
+              <a:t>Ranking quality got weaker, not stronger</a:t>
+            </a:r>
+          </a:p>
+        </p:txBody>
+      </p:sp>
+      <p:sp>
+        <p:nvSpPr>
+          <p:cNvPr id="3" name="">
+            <a:extLst xmlns:a="http://schemas.openxmlformats.org/drawingml/2006/main">
+              <a:ext uri="{FF2B5EF4-FFF2-40B4-BE49-F238E27FC236}">
+                <a16:creationId xmlns:a16="http://schemas.microsoft.com/office/drawing/2014/main" id="{4F8492EF-B825-44E2-8F32-97EDE311456C}"/>
+              </a:ext>
+            </a:extLst>
+          </p:cNvPr>
+          <p:cNvSpPr>
+            <a:spLocks xmlns:a="http://schemas.openxmlformats.org/drawingml/2006/main" noGrp="1"/>
+          </p:cNvSpPr>
+          <p:nvPr/>
+        </p:nvSpPr>
+        <p:spPr>
+          <a:xfrm xmlns:a="http://schemas.openxmlformats.org/drawingml/2006/main">
+            <a:off x="685800" y="1657350"/>
+            <a:ext cx="10820400" cy="19050"/>
+          </a:xfrm>
+          <a:prstGeom xmlns:a="http://schemas.openxmlformats.org/drawingml/2006/main" prst="rect">
+            <a:avLst/>
+          </a:prstGeom>
+          <a:solidFill xmlns:a="http://schemas.openxmlformats.org/drawingml/2006/main">
+            <a:srgbClr val="B8BCC4"/>
+          </a:solidFill>
+          <a:ln xmlns:a="http://schemas.openxmlformats.org/drawingml/2006/main" w="0">
+            <a:noFill/>
+            <a:prstDash val="solid"/>
+          </a:ln>
+        </p:spPr>
+      </p:sp>
+      <p:pic>
+        <p:nvPicPr>
+          <p:cNvPr id="10" name=""/>
+          <p:cNvPicPr>
+            <a:picLocks xmlns:a="http://schemas.openxmlformats.org/drawingml/2006/main" noChangeAspect="1"/>
+          </p:cNvPicPr>
+          <p:nvPr/>
+        </p:nvPicPr>
+        <p:blipFill>
+          <a:blip xmlns:r="http://schemas.openxmlformats.org/officeDocument/2006/relationships" xmlns:a="http://schemas.openxmlformats.org/drawingml/2006/main" r:embed="R5cc4330ed4064b17"/>
+          <a:stretch xmlns:a="http://schemas.openxmlformats.org/drawingml/2006/main"/>
+        </p:blipFill>
+        <p:spPr>
+          <a:xfrm xmlns:a="http://schemas.openxmlformats.org/drawingml/2006/main">
+            <a:off x="704850" y="2214196"/>
+            <a:ext cx="5715000" cy="3077308"/>
+          </a:xfrm>
+          <a:prstGeom xmlns:a="http://schemas.openxmlformats.org/drawingml/2006/main" prst="rect">
+            <a:avLst/>
+          </a:prstGeom>
+        </p:spPr>
+      </p:pic>
+      <p:sp>
+        <p:nvSpPr>
+          <p:cNvPr id="5" name="">
+            <a:extLst xmlns:a="http://schemas.openxmlformats.org/drawingml/2006/main">
+              <a:ext uri="{FF2B5EF4-FFF2-40B4-BE49-F238E27FC236}">
+                <a16:creationId xmlns:a16="http://schemas.microsoft.com/office/drawing/2014/main" id="{AA3529E7-501A-4D9F-9B6E-B2AD1EEDCD57}"/>
+              </a:ext>
+            </a:extLst>
+          </p:cNvPr>
+          <p:cNvSpPr>
+            <a:spLocks xmlns:a="http://schemas.openxmlformats.org/drawingml/2006/main" noGrp="1"/>
+          </p:cNvSpPr>
+          <p:nvPr/>
+        </p:nvSpPr>
+        <p:spPr>
+          <a:xfrm xmlns:a="http://schemas.openxmlformats.org/drawingml/2006/main">
+            <a:off x="7105650" y="2133600"/>
+            <a:ext cx="2857500" cy="323850"/>
+          </a:xfrm>
+          <a:prstGeom xmlns:a="http://schemas.openxmlformats.org/drawingml/2006/main" prst="rect">
+            <a:avLst/>
+          </a:prstGeom>
+          <a:noFill xmlns:a="http://schemas.openxmlformats.org/drawingml/2006/main"/>
+          <a:ln xmlns:a="http://schemas.openxmlformats.org/drawingml/2006/main" w="0">
+            <a:noFill/>
+            <a:prstDash val="solid"/>
+          </a:ln>
+        </p:spPr>
+        <p:txBody>
+          <a:bodyPr xmlns:a="http://schemas.openxmlformats.org/drawingml/2006/main"/>
+          <a:lstStyle xmlns:a="http://schemas.openxmlformats.org/drawingml/2006/main"/>
+          <a:p xmlns:a="http://schemas.openxmlformats.org/drawingml/2006/main">
+            <a:pPr algn="l">
+              <a:defRPr sz="1950" b="1" i="0">
+                <a:solidFill>
+                  <a:srgbClr val="222222"/>
+                </a:solidFill>
+              </a:defRPr>
+            </a:pPr>
+            <a:r>
+              <a:rPr sz="1950" b="1" i="0">
+                <a:solidFill>
+                  <a:srgbClr val="222222"/>
+                </a:solidFill>
+              </a:rPr>
+              <a:t>Readout</a:t>
+            </a:r>
+          </a:p>
+        </p:txBody>
+      </p:sp>
+      <p:sp>
+        <p:nvSpPr>
+          <p:cNvPr id="6" name="">
+            <a:extLst xmlns:a="http://schemas.openxmlformats.org/drawingml/2006/main">
+              <a:ext uri="{FF2B5EF4-FFF2-40B4-BE49-F238E27FC236}">
+                <a16:creationId xmlns:a16="http://schemas.microsoft.com/office/drawing/2014/main" id="{896FCA51-0E6E-477C-9510-DAFD9D58E7D4}"/>
+              </a:ext>
+            </a:extLst>
+          </p:cNvPr>
+          <p:cNvSpPr>
+            <a:spLocks xmlns:a="http://schemas.openxmlformats.org/drawingml/2006/main" noGrp="1"/>
+          </p:cNvSpPr>
+          <p:nvPr/>
+        </p:nvSpPr>
+        <p:spPr>
+          <a:xfrm xmlns:a="http://schemas.openxmlformats.org/drawingml/2006/main">
+            <a:off x="7105650" y="2743200"/>
+            <a:ext cx="3333750" cy="2190750"/>
+          </a:xfrm>
+          <a:prstGeom xmlns:a="http://schemas.openxmlformats.org/drawingml/2006/main" prst="rect">
+            <a:avLst/>
+          </a:prstGeom>
+          <a:noFill xmlns:a="http://schemas.openxmlformats.org/drawingml/2006/main"/>
+          <a:ln xmlns:a="http://schemas.openxmlformats.org/drawingml/2006/main" w="0">
+            <a:noFill/>
+            <a:prstDash val="solid"/>
+          </a:ln>
+        </p:spPr>
+        <p:txBody>
+          <a:bodyPr xmlns:a="http://schemas.openxmlformats.org/drawingml/2006/main"/>
+          <a:lstStyle xmlns:a="http://schemas.openxmlformats.org/drawingml/2006/main"/>
+          <a:p xmlns:a="http://schemas.openxmlformats.org/drawingml/2006/main">
+            <a:pPr algn="l">
+              <a:defRPr sz="1650" b="0" i="0">
+                <a:solidFill>
+                  <a:srgbClr val="222222"/>
+                </a:solidFill>
+              </a:defRPr>
+            </a:pPr>
+            <a:r>
+              <a:rPr sz="1650" b="0" i="0">
+                <a:solidFill>
+                  <a:srgbClr val="222222"/>
+                </a:solidFill>
+              </a:rPr>
+              <a:t>The selected-grid 2020 AUC was 0.489 versus fixed XGB 0.510. In 2022, selected-grid AUC was 0.481 and top-minus-bottom return separation stayed negative.</a:t>
+            </a:r>
+          </a:p>
+        </p:txBody>
+      </p:sp>
+    </p:spTree>
+    <p:extLst>
+      <p:ext uri="{BB962C8B-B14F-4D97-AF65-F5344CB8AC3E}">
+        <p14:creationId xmlns:p14="http://schemas.microsoft.com/office/powerpoint/2010/main" val="917655321"/>
+      </p:ext>
+    </p:extLst>
+  </p:cSld>
+</p:sld>
+</file>
+
+<file path=ppt/slides/slide42.xml><?xml version="1.0" encoding="utf-8"?>
+<p:sld xmlns:p="http://schemas.openxmlformats.org/presentationml/2006/main">
+  <p:cSld>
+    <p:bg>
+      <p:bgPr>
+        <a:solidFill xmlns:a="http://schemas.openxmlformats.org/drawingml/2006/main">
+          <a:srgbClr val="FFFFFF"/>
+        </a:solidFill>
+      </p:bgPr>
+    </p:bg>
+    <p:spTree>
+      <p:nvGrpSpPr>
+        <p:cNvPr id="1" name=""/>
+        <p:cNvGrpSpPr/>
+        <p:nvPr/>
+      </p:nvGrpSpPr>
+      <p:grpSpPr>
+        <a:xfrm xmlns:a="http://schemas.openxmlformats.org/drawingml/2006/main"/>
+      </p:grpSpPr>
+      <p:sp>
+        <p:nvSpPr>
+          <p:cNvPr id="1" name="">
+            <a:extLst xmlns:a="http://schemas.openxmlformats.org/drawingml/2006/main">
+              <a:ext uri="{FF2B5EF4-FFF2-40B4-BE49-F238E27FC236}">
+                <a16:creationId xmlns:a16="http://schemas.microsoft.com/office/drawing/2014/main" id="{23AC0EEF-B4BB-4340-B47B-09B954BCFE42}"/>
+              </a:ext>
+            </a:extLst>
+          </p:cNvPr>
+          <p:cNvSpPr>
+            <a:spLocks xmlns:a="http://schemas.openxmlformats.org/drawingml/2006/main" noGrp="1"/>
+          </p:cNvSpPr>
+          <p:nvPr/>
+        </p:nvSpPr>
+        <p:spPr>
+          <a:xfrm xmlns:a="http://schemas.openxmlformats.org/drawingml/2006/main">
+            <a:off x="685800" y="400050"/>
+            <a:ext cx="8572500" cy="247650"/>
+          </a:xfrm>
+          <a:prstGeom xmlns:a="http://schemas.openxmlformats.org/drawingml/2006/main" prst="rect">
+            <a:avLst/>
+          </a:prstGeom>
+          <a:noFill xmlns:a="http://schemas.openxmlformats.org/drawingml/2006/main"/>
+          <a:ln xmlns:a="http://schemas.openxmlformats.org/drawingml/2006/main" w="0">
+            <a:noFill/>
+            <a:prstDash val="solid"/>
+          </a:ln>
+        </p:spPr>
+        <p:txBody>
+          <a:bodyPr xmlns:a="http://schemas.openxmlformats.org/drawingml/2006/main"/>
+          <a:lstStyle xmlns:a="http://schemas.openxmlformats.org/drawingml/2006/main"/>
+          <a:p xmlns:a="http://schemas.openxmlformats.org/drawingml/2006/main">
+            <a:pPr algn="l">
+              <a:defRPr sz="975" b="1" i="0">
+                <a:solidFill>
+                  <a:srgbClr val="555555"/>
+                </a:solidFill>
+              </a:defRPr>
+            </a:pPr>
+            <a:r>
+              <a:rPr sz="975" b="1" i="0">
+                <a:solidFill>
+                  <a:srgbClr val="555555"/>
+                </a:solidFill>
+              </a:rPr>
+              <a:t>GEN5.4 ML DECISION ENGINE</a:t>
+            </a:r>
+          </a:p>
+        </p:txBody>
+      </p:sp>
+      <p:sp>
+        <p:nvSpPr>
+          <p:cNvPr id="2" name="">
+            <a:extLst xmlns:a="http://schemas.openxmlformats.org/drawingml/2006/main">
+              <a:ext uri="{FF2B5EF4-FFF2-40B4-BE49-F238E27FC236}">
+                <a16:creationId xmlns:a16="http://schemas.microsoft.com/office/drawing/2014/main" id="{D1B38342-E6FA-488C-8A2C-DD39A9BB1F00}"/>
+              </a:ext>
+            </a:extLst>
+          </p:cNvPr>
+          <p:cNvSpPr>
+            <a:spLocks xmlns:a="http://schemas.openxmlformats.org/drawingml/2006/main" noGrp="1"/>
+          </p:cNvSpPr>
+          <p:nvPr/>
+        </p:nvSpPr>
+        <p:spPr>
+          <a:xfrm xmlns:a="http://schemas.openxmlformats.org/drawingml/2006/main">
+            <a:off x="685800" y="723900"/>
+            <a:ext cx="10287000" cy="876300"/>
+          </a:xfrm>
+          <a:prstGeom xmlns:a="http://schemas.openxmlformats.org/drawingml/2006/main" prst="rect">
+            <a:avLst/>
+          </a:prstGeom>
+          <a:noFill xmlns:a="http://schemas.openxmlformats.org/drawingml/2006/main"/>
+          <a:ln xmlns:a="http://schemas.openxmlformats.org/drawingml/2006/main" w="0">
+            <a:noFill/>
+            <a:prstDash val="solid"/>
+          </a:ln>
+        </p:spPr>
+        <p:txBody>
+          <a:bodyPr xmlns:a="http://schemas.openxmlformats.org/drawingml/2006/main"/>
+          <a:lstStyle xmlns:a="http://schemas.openxmlformats.org/drawingml/2006/main"/>
+          <a:p xmlns:a="http://schemas.openxmlformats.org/drawingml/2006/main">
+            <a:pPr algn="l">
+              <a:defRPr sz="2850" b="1" i="0">
+                <a:solidFill>
+                  <a:srgbClr val="000000"/>
+                </a:solidFill>
+              </a:defRPr>
+            </a:pPr>
+            <a:r>
+              <a:rPr sz="2850" b="1" i="0">
+                <a:solidFill>
+                  <a:srgbClr val="000000"/>
+                </a:solidFill>
+              </a:rPr>
+              <a:t>The parameter audit is a stop sign for knob-chasing</a:t>
+            </a:r>
+          </a:p>
+        </p:txBody>
+      </p:sp>
+      <p:sp>
+        <p:nvSpPr>
+          <p:cNvPr id="3" name="">
+            <a:extLst xmlns:a="http://schemas.openxmlformats.org/drawingml/2006/main">
+              <a:ext uri="{FF2B5EF4-FFF2-40B4-BE49-F238E27FC236}">
+                <a16:creationId xmlns:a16="http://schemas.microsoft.com/office/drawing/2014/main" id="{3556B95A-A570-4696-A068-BAE6ADD09B36}"/>
+              </a:ext>
+            </a:extLst>
+          </p:cNvPr>
+          <p:cNvSpPr>
+            <a:spLocks xmlns:a="http://schemas.openxmlformats.org/drawingml/2006/main" noGrp="1"/>
+          </p:cNvSpPr>
+          <p:nvPr/>
+        </p:nvSpPr>
+        <p:spPr>
+          <a:xfrm xmlns:a="http://schemas.openxmlformats.org/drawingml/2006/main">
+            <a:off x="685800" y="1657350"/>
+            <a:ext cx="10820400" cy="19050"/>
+          </a:xfrm>
+          <a:prstGeom xmlns:a="http://schemas.openxmlformats.org/drawingml/2006/main" prst="rect">
+            <a:avLst/>
+          </a:prstGeom>
+          <a:solidFill xmlns:a="http://schemas.openxmlformats.org/drawingml/2006/main">
+            <a:srgbClr val="B8BCC4"/>
+          </a:solidFill>
+          <a:ln xmlns:a="http://schemas.openxmlformats.org/drawingml/2006/main" w="0">
+            <a:noFill/>
+            <a:prstDash val="solid"/>
+          </a:ln>
+        </p:spPr>
+      </p:sp>
+      <p:pic>
+        <p:nvPicPr>
+          <p:cNvPr id="10" name=""/>
+          <p:cNvPicPr>
+            <a:picLocks xmlns:a="http://schemas.openxmlformats.org/drawingml/2006/main" noChangeAspect="1"/>
+          </p:cNvPicPr>
+          <p:nvPr/>
+        </p:nvPicPr>
+        <p:blipFill>
+          <a:blip xmlns:r="http://schemas.openxmlformats.org/officeDocument/2006/relationships" xmlns:a="http://schemas.openxmlformats.org/drawingml/2006/main" r:embed="Rcbfc6e0a9cca4687"/>
+          <a:stretch xmlns:a="http://schemas.openxmlformats.org/drawingml/2006/main"/>
+        </p:blipFill>
+        <p:spPr>
+          <a:xfrm xmlns:a="http://schemas.openxmlformats.org/drawingml/2006/main">
+            <a:off x="704850" y="2104292"/>
+            <a:ext cx="5715000" cy="3297115"/>
+          </a:xfrm>
+          <a:prstGeom xmlns:a="http://schemas.openxmlformats.org/drawingml/2006/main" prst="rect">
+            <a:avLst/>
+          </a:prstGeom>
+        </p:spPr>
+      </p:pic>
+      <p:sp>
+        <p:nvSpPr>
+          <p:cNvPr id="5" name="">
+            <a:extLst xmlns:a="http://schemas.openxmlformats.org/drawingml/2006/main">
+              <a:ext uri="{FF2B5EF4-FFF2-40B4-BE49-F238E27FC236}">
+                <a16:creationId xmlns:a16="http://schemas.microsoft.com/office/drawing/2014/main" id="{3304694F-683E-46D1-A827-2803A12FF223}"/>
+              </a:ext>
+            </a:extLst>
+          </p:cNvPr>
+          <p:cNvSpPr>
+            <a:spLocks xmlns:a="http://schemas.openxmlformats.org/drawingml/2006/main" noGrp="1"/>
+          </p:cNvSpPr>
+          <p:nvPr/>
+        </p:nvSpPr>
+        <p:spPr>
+          <a:xfrm xmlns:a="http://schemas.openxmlformats.org/drawingml/2006/main">
+            <a:off x="7105650" y="2133600"/>
+            <a:ext cx="2857500" cy="323850"/>
+          </a:xfrm>
+          <a:prstGeom xmlns:a="http://schemas.openxmlformats.org/drawingml/2006/main" prst="rect">
+            <a:avLst/>
+          </a:prstGeom>
+          <a:noFill xmlns:a="http://schemas.openxmlformats.org/drawingml/2006/main"/>
+          <a:ln xmlns:a="http://schemas.openxmlformats.org/drawingml/2006/main" w="0">
+            <a:noFill/>
+            <a:prstDash val="solid"/>
+          </a:ln>
+        </p:spPr>
+        <p:txBody>
+          <a:bodyPr xmlns:a="http://schemas.openxmlformats.org/drawingml/2006/main"/>
+          <a:lstStyle xmlns:a="http://schemas.openxmlformats.org/drawingml/2006/main"/>
+          <a:p xmlns:a="http://schemas.openxmlformats.org/drawingml/2006/main">
+            <a:pPr algn="l">
+              <a:defRPr sz="1950" b="1" i="0">
+                <a:solidFill>
+                  <a:srgbClr val="222222"/>
+                </a:solidFill>
+              </a:defRPr>
+            </a:pPr>
+            <a:r>
+              <a:rPr sz="1950" b="1" i="0">
+                <a:solidFill>
+                  <a:srgbClr val="222222"/>
+                </a:solidFill>
+              </a:rPr>
+              <a:t>Implication</a:t>
+            </a:r>
+          </a:p>
+        </p:txBody>
+      </p:sp>
+      <p:sp>
+        <p:nvSpPr>
+          <p:cNvPr id="6" name="">
+            <a:extLst xmlns:a="http://schemas.openxmlformats.org/drawingml/2006/main">
+              <a:ext uri="{FF2B5EF4-FFF2-40B4-BE49-F238E27FC236}">
+                <a16:creationId xmlns:a16="http://schemas.microsoft.com/office/drawing/2014/main" id="{D51DFAA2-DDB9-44BB-AA03-26B66554EBEF}"/>
+              </a:ext>
+            </a:extLst>
+          </p:cNvPr>
+          <p:cNvSpPr>
+            <a:spLocks xmlns:a="http://schemas.openxmlformats.org/drawingml/2006/main" noGrp="1"/>
+          </p:cNvSpPr>
+          <p:nvPr/>
+        </p:nvSpPr>
+        <p:spPr>
+          <a:xfrm xmlns:a="http://schemas.openxmlformats.org/drawingml/2006/main">
+            <a:off x="7105650" y="2743200"/>
+            <a:ext cx="3333750" cy="2381250"/>
+          </a:xfrm>
+          <a:prstGeom xmlns:a="http://schemas.openxmlformats.org/drawingml/2006/main" prst="rect">
+            <a:avLst/>
+          </a:prstGeom>
+          <a:noFill xmlns:a="http://schemas.openxmlformats.org/drawingml/2006/main"/>
+          <a:ln xmlns:a="http://schemas.openxmlformats.org/drawingml/2006/main" w="0">
+            <a:noFill/>
+            <a:prstDash val="solid"/>
+          </a:ln>
+        </p:spPr>
+        <p:txBody>
+          <a:bodyPr xmlns:a="http://schemas.openxmlformats.org/drawingml/2006/main"/>
+          <a:lstStyle xmlns:a="http://schemas.openxmlformats.org/drawingml/2006/main"/>
+          <a:p xmlns:a="http://schemas.openxmlformats.org/drawingml/2006/main">
+            <a:pPr algn="l">
+              <a:defRPr sz="1650" b="0" i="0">
+                <a:solidFill>
+                  <a:srgbClr val="222222"/>
+                </a:solidFill>
+              </a:defRPr>
+            </a:pPr>
+            <a:r>
+              <a:rPr sz="1650" b="0" i="0">
+                <a:solidFill>
+                  <a:srgbClr val="222222"/>
+                </a:solidFill>
+              </a:rPr>
+              <a:t>The TRAIN proxy consistently prefers more flexible trees, but OOS evidence does not reward that flexibility. The next productive slice should target signal definition: richer feature design, alternative labels, or probability calibration with a specific hypothesis.</a:t>
+            </a:r>
+          </a:p>
+        </p:txBody>
+      </p:sp>
+    </p:spTree>
+    <p:extLst>
+      <p:ext uri="{BB962C8B-B14F-4D97-AF65-F5344CB8AC3E}">
+        <p14:creationId xmlns:p14="http://schemas.microsoft.com/office/powerpoint/2010/main" val="1233322614"/>
+      </p:ext>
+    </p:extLst>
+  </p:cSld>
+</p:sld>
+</file>
+
+<file path=ppt/slides/slide43.xml><?xml version="1.0" encoding="utf-8"?>
+<p:sld xmlns:p="http://schemas.openxmlformats.org/presentationml/2006/main">
+  <p:cSld>
+    <p:bg>
+      <p:bgPr>
+        <a:solidFill xmlns:a="http://schemas.openxmlformats.org/drawingml/2006/main">
+          <a:srgbClr val="FFFFFF"/>
+        </a:solidFill>
+      </p:bgPr>
+    </p:bg>
+    <p:spTree>
+      <p:nvGrpSpPr>
+        <p:cNvPr id="1" name=""/>
+        <p:cNvGrpSpPr/>
+        <p:nvPr/>
+      </p:nvGrpSpPr>
+      <p:grpSpPr>
+        <a:xfrm xmlns:a="http://schemas.openxmlformats.org/drawingml/2006/main"/>
+      </p:grpSpPr>
+      <p:sp>
+        <p:nvSpPr>
+          <p:cNvPr id="1" name="">
+            <a:extLst xmlns:a="http://schemas.openxmlformats.org/drawingml/2006/main">
+              <a:ext uri="{FF2B5EF4-FFF2-40B4-BE49-F238E27FC236}">
+                <a16:creationId xmlns:a16="http://schemas.microsoft.com/office/drawing/2014/main" id="{82CD7885-C6D3-4B48-B3C1-55959638016D}"/>
+              </a:ext>
+            </a:extLst>
+          </p:cNvPr>
+          <p:cNvSpPr>
+            <a:spLocks xmlns:a="http://schemas.openxmlformats.org/drawingml/2006/main" noGrp="1"/>
+          </p:cNvSpPr>
+          <p:nvPr/>
+        </p:nvSpPr>
+        <p:spPr>
+          <a:xfrm xmlns:a="http://schemas.openxmlformats.org/drawingml/2006/main">
+            <a:off x="685800" y="400050"/>
+            <a:ext cx="8572500" cy="247650"/>
+          </a:xfrm>
+          <a:prstGeom xmlns:a="http://schemas.openxmlformats.org/drawingml/2006/main" prst="rect">
+            <a:avLst/>
+          </a:prstGeom>
+          <a:noFill xmlns:a="http://schemas.openxmlformats.org/drawingml/2006/main"/>
+          <a:ln xmlns:a="http://schemas.openxmlformats.org/drawingml/2006/main" w="0">
+            <a:noFill/>
+            <a:prstDash val="solid"/>
+          </a:ln>
+        </p:spPr>
+        <p:txBody>
+          <a:bodyPr xmlns:a="http://schemas.openxmlformats.org/drawingml/2006/main"/>
+          <a:lstStyle xmlns:a="http://schemas.openxmlformats.org/drawingml/2006/main"/>
+          <a:p xmlns:a="http://schemas.openxmlformats.org/drawingml/2006/main">
+            <a:pPr algn="l">
+              <a:defRPr sz="975" b="1" i="0">
+                <a:solidFill>
+                  <a:srgbClr val="555555"/>
+                </a:solidFill>
+              </a:defRPr>
+            </a:pPr>
+            <a:r>
+              <a:rPr sz="975" b="1" i="0">
+                <a:solidFill>
+                  <a:srgbClr val="555555"/>
+                </a:solidFill>
+              </a:rPr>
+              <a:t>GEN5.4 ML DECISION ENGINE</a:t>
+            </a:r>
+          </a:p>
+        </p:txBody>
+      </p:sp>
+      <p:sp>
+        <p:nvSpPr>
+          <p:cNvPr id="2" name="">
+            <a:extLst xmlns:a="http://schemas.openxmlformats.org/drawingml/2006/main">
+              <a:ext uri="{FF2B5EF4-FFF2-40B4-BE49-F238E27FC236}">
+                <a16:creationId xmlns:a16="http://schemas.microsoft.com/office/drawing/2014/main" id="{8C7567BF-EA7A-4B3D-BEBE-0F27CDEA1152}"/>
+              </a:ext>
+            </a:extLst>
+          </p:cNvPr>
+          <p:cNvSpPr>
+            <a:spLocks xmlns:a="http://schemas.openxmlformats.org/drawingml/2006/main" noGrp="1"/>
+          </p:cNvSpPr>
+          <p:nvPr/>
+        </p:nvSpPr>
+        <p:spPr>
+          <a:xfrm xmlns:a="http://schemas.openxmlformats.org/drawingml/2006/main">
+            <a:off x="685800" y="723900"/>
+            <a:ext cx="10287000" cy="876300"/>
+          </a:xfrm>
+          <a:prstGeom xmlns:a="http://schemas.openxmlformats.org/drawingml/2006/main" prst="rect">
+            <a:avLst/>
+          </a:prstGeom>
+          <a:noFill xmlns:a="http://schemas.openxmlformats.org/drawingml/2006/main"/>
+          <a:ln xmlns:a="http://schemas.openxmlformats.org/drawingml/2006/main" w="0">
+            <a:noFill/>
+            <a:prstDash val="solid"/>
+          </a:ln>
+        </p:spPr>
+        <p:txBody>
+          <a:bodyPr xmlns:a="http://schemas.openxmlformats.org/drawingml/2006/main"/>
+          <a:lstStyle xmlns:a="http://schemas.openxmlformats.org/drawingml/2006/main"/>
+          <a:p xmlns:a="http://schemas.openxmlformats.org/drawingml/2006/main">
+            <a:pPr algn="l">
+              <a:defRPr sz="2850" b="1" i="0">
+                <a:solidFill>
+                  <a:srgbClr val="000000"/>
+                </a:solidFill>
+              </a:defRPr>
+            </a:pPr>
+            <a:r>
+              <a:rPr sz="2850" b="1" i="0">
+                <a:solidFill>
+                  <a:srgbClr val="000000"/>
+                </a:solidFill>
+              </a:rPr>
+              <a:t>Probability tapes confirm the model is still noisy near the boundary</a:t>
+            </a:r>
+          </a:p>
+        </p:txBody>
+      </p:sp>
+      <p:sp>
+        <p:nvSpPr>
+          <p:cNvPr id="3" name="">
+            <a:extLst xmlns:a="http://schemas.openxmlformats.org/drawingml/2006/main">
+              <a:ext uri="{FF2B5EF4-FFF2-40B4-BE49-F238E27FC236}">
+                <a16:creationId xmlns:a16="http://schemas.microsoft.com/office/drawing/2014/main" id="{CFF9DE9D-D7D2-46DC-9DF1-C8D5DF85D58E}"/>
+              </a:ext>
+            </a:extLst>
+          </p:cNvPr>
+          <p:cNvSpPr>
+            <a:spLocks xmlns:a="http://schemas.openxmlformats.org/drawingml/2006/main" noGrp="1"/>
+          </p:cNvSpPr>
+          <p:nvPr/>
+        </p:nvSpPr>
+        <p:spPr>
+          <a:xfrm xmlns:a="http://schemas.openxmlformats.org/drawingml/2006/main">
+            <a:off x="685800" y="1657350"/>
+            <a:ext cx="10820400" cy="19050"/>
+          </a:xfrm>
+          <a:prstGeom xmlns:a="http://schemas.openxmlformats.org/drawingml/2006/main" prst="rect">
+            <a:avLst/>
+          </a:prstGeom>
+          <a:solidFill xmlns:a="http://schemas.openxmlformats.org/drawingml/2006/main">
+            <a:srgbClr val="B8BCC4"/>
+          </a:solidFill>
+          <a:ln xmlns:a="http://schemas.openxmlformats.org/drawingml/2006/main" w="0">
+            <a:noFill/>
+            <a:prstDash val="solid"/>
+          </a:ln>
+        </p:spPr>
+      </p:sp>
+      <p:pic>
+        <p:nvPicPr>
+          <p:cNvPr id="10" name=""/>
+          <p:cNvPicPr>
+            <a:picLocks xmlns:a="http://schemas.openxmlformats.org/drawingml/2006/main" noChangeAspect="1"/>
+          </p:cNvPicPr>
+          <p:nvPr/>
+        </p:nvPicPr>
+        <p:blipFill>
+          <a:blip xmlns:r="http://schemas.openxmlformats.org/officeDocument/2006/relationships" xmlns:a="http://schemas.openxmlformats.org/drawingml/2006/main" r:embed="R3314fa8610cb4476"/>
+          <a:stretch xmlns:a="http://schemas.openxmlformats.org/drawingml/2006/main"/>
+        </p:blipFill>
+        <p:spPr>
+          <a:xfrm xmlns:a="http://schemas.openxmlformats.org/drawingml/2006/main">
+            <a:off x="1038785" y="2000250"/>
+            <a:ext cx="6494929" cy="3943350"/>
+          </a:xfrm>
+          <a:prstGeom xmlns:a="http://schemas.openxmlformats.org/drawingml/2006/main" prst="rect">
+            <a:avLst/>
+          </a:prstGeom>
+        </p:spPr>
+      </p:pic>
+      <p:sp>
+        <p:nvSpPr>
+          <p:cNvPr id="5" name="">
+            <a:extLst xmlns:a="http://schemas.openxmlformats.org/drawingml/2006/main">
+              <a:ext uri="{FF2B5EF4-FFF2-40B4-BE49-F238E27FC236}">
+                <a16:creationId xmlns:a16="http://schemas.microsoft.com/office/drawing/2014/main" id="{DA03751D-7E5E-4603-B6A8-550347A62612}"/>
+              </a:ext>
+            </a:extLst>
+          </p:cNvPr>
+          <p:cNvSpPr>
+            <a:spLocks xmlns:a="http://schemas.openxmlformats.org/drawingml/2006/main" noGrp="1"/>
+          </p:cNvSpPr>
+          <p:nvPr/>
+        </p:nvSpPr>
+        <p:spPr>
+          <a:xfrm xmlns:a="http://schemas.openxmlformats.org/drawingml/2006/main">
+            <a:off x="8477250" y="2133600"/>
+            <a:ext cx="2571750" cy="304800"/>
+          </a:xfrm>
+          <a:prstGeom xmlns:a="http://schemas.openxmlformats.org/drawingml/2006/main" prst="rect">
+            <a:avLst/>
+          </a:prstGeom>
+          <a:noFill xmlns:a="http://schemas.openxmlformats.org/drawingml/2006/main"/>
+          <a:ln xmlns:a="http://schemas.openxmlformats.org/drawingml/2006/main" w="0">
+            <a:noFill/>
+            <a:prstDash val="solid"/>
+          </a:ln>
+        </p:spPr>
+        <p:txBody>
+          <a:bodyPr xmlns:a="http://schemas.openxmlformats.org/drawingml/2006/main"/>
+          <a:lstStyle xmlns:a="http://schemas.openxmlformats.org/drawingml/2006/main"/>
+          <a:p xmlns:a="http://schemas.openxmlformats.org/drawingml/2006/main">
+            <a:pPr algn="l">
+              <a:defRPr sz="1950" b="1" i="0">
+                <a:solidFill>
+                  <a:srgbClr val="222222"/>
+                </a:solidFill>
+              </a:defRPr>
+            </a:pPr>
+            <a:r>
+              <a:rPr sz="1950" b="1" i="0">
+                <a:solidFill>
+                  <a:srgbClr val="222222"/>
+                </a:solidFill>
+              </a:rPr>
+              <a:t>What to inspect</a:t>
+            </a:r>
+          </a:p>
+        </p:txBody>
+      </p:sp>
+      <p:sp>
+        <p:nvSpPr>
+          <p:cNvPr id="6" name="">
+            <a:extLst xmlns:a="http://schemas.openxmlformats.org/drawingml/2006/main">
+              <a:ext uri="{FF2B5EF4-FFF2-40B4-BE49-F238E27FC236}">
+                <a16:creationId xmlns:a16="http://schemas.microsoft.com/office/drawing/2014/main" id="{7CAA214A-CE16-4C18-A85D-E62FAEDB99B6}"/>
+              </a:ext>
+            </a:extLst>
+          </p:cNvPr>
+          <p:cNvSpPr>
+            <a:spLocks xmlns:a="http://schemas.openxmlformats.org/drawingml/2006/main" noGrp="1"/>
+          </p:cNvSpPr>
+          <p:nvPr/>
+        </p:nvSpPr>
+        <p:spPr>
+          <a:xfrm xmlns:a="http://schemas.openxmlformats.org/drawingml/2006/main">
+            <a:off x="8477250" y="2705100"/>
+            <a:ext cx="2705100" cy="2286000"/>
+          </a:xfrm>
+          <a:prstGeom xmlns:a="http://schemas.openxmlformats.org/drawingml/2006/main" prst="rect">
+            <a:avLst/>
+          </a:prstGeom>
+          <a:noFill xmlns:a="http://schemas.openxmlformats.org/drawingml/2006/main"/>
+          <a:ln xmlns:a="http://schemas.openxmlformats.org/drawingml/2006/main" w="0">
+            <a:noFill/>
+            <a:prstDash val="solid"/>
+          </a:ln>
+        </p:spPr>
+        <p:txBody>
+          <a:bodyPr xmlns:a="http://schemas.openxmlformats.org/drawingml/2006/main"/>
+          <a:lstStyle xmlns:a="http://schemas.openxmlformats.org/drawingml/2006/main"/>
+          <a:p xmlns:a="http://schemas.openxmlformats.org/drawingml/2006/main">
+            <a:pPr algn="l">
+              <a:defRPr sz="1650" b="0" i="0">
+                <a:solidFill>
+                  <a:srgbClr val="222222"/>
+                </a:solidFill>
+              </a:defRPr>
+            </a:pPr>
+            <a:r>
+              <a:rPr sz="1650" b="0" i="0">
+                <a:solidFill>
+                  <a:srgbClr val="222222"/>
+                </a:solidFill>
+              </a:rPr>
+              <a:t>The selected grid changes probability texture, but it still spends too much time around the threshold rather than cleanly separating high-participation and risk-off periods.</a:t>
+            </a:r>
+          </a:p>
+        </p:txBody>
+      </p:sp>
+    </p:spTree>
+    <p:extLst>
+      <p:ext uri="{BB962C8B-B14F-4D97-AF65-F5344CB8AC3E}">
+        <p14:creationId xmlns:p14="http://schemas.microsoft.com/office/powerpoint/2010/main" val="1042807169"/>
+      </p:ext>
+    </p:extLst>
+  </p:cSld>
+</p:sld>
+</file>
+
+<file path=ppt/slides/slide44.xml><?xml version="1.0" encoding="utf-8"?>
+<p:sld xmlns:p="http://schemas.openxmlformats.org/presentationml/2006/main">
+  <p:cSld>
+    <p:bg>
+      <p:bgPr>
+        <a:solidFill xmlns:a="http://schemas.openxmlformats.org/drawingml/2006/main">
+          <a:srgbClr val="FFFFFF"/>
+        </a:solidFill>
+      </p:bgPr>
+    </p:bg>
+    <p:spTree>
+      <p:nvGrpSpPr>
+        <p:cNvPr id="1" name=""/>
+        <p:cNvGrpSpPr/>
+        <p:nvPr/>
+      </p:nvGrpSpPr>
+      <p:grpSpPr>
+        <a:xfrm xmlns:a="http://schemas.openxmlformats.org/drawingml/2006/main"/>
+      </p:grpSpPr>
+      <p:sp>
+        <p:nvSpPr>
+          <p:cNvPr id="1" name="">
+            <a:extLst xmlns:a="http://schemas.openxmlformats.org/drawingml/2006/main">
+              <a:ext uri="{FF2B5EF4-FFF2-40B4-BE49-F238E27FC236}">
+                <a16:creationId xmlns:a16="http://schemas.microsoft.com/office/drawing/2014/main" id="{C2EC06E8-97C4-480C-B01E-7DE12654DE66}"/>
+              </a:ext>
+            </a:extLst>
+          </p:cNvPr>
+          <p:cNvSpPr>
+            <a:spLocks xmlns:a="http://schemas.openxmlformats.org/drawingml/2006/main" noGrp="1"/>
+          </p:cNvSpPr>
+          <p:nvPr/>
+        </p:nvSpPr>
+        <p:spPr>
+          <a:xfrm xmlns:a="http://schemas.openxmlformats.org/drawingml/2006/main">
+            <a:off x="685800" y="400050"/>
+            <a:ext cx="8572500" cy="247650"/>
+          </a:xfrm>
+          <a:prstGeom xmlns:a="http://schemas.openxmlformats.org/drawingml/2006/main" prst="rect">
+            <a:avLst/>
+          </a:prstGeom>
+          <a:noFill xmlns:a="http://schemas.openxmlformats.org/drawingml/2006/main"/>
+          <a:ln xmlns:a="http://schemas.openxmlformats.org/drawingml/2006/main" w="0">
+            <a:noFill/>
+            <a:prstDash val="solid"/>
+          </a:ln>
+        </p:spPr>
+        <p:txBody>
+          <a:bodyPr xmlns:a="http://schemas.openxmlformats.org/drawingml/2006/main"/>
+          <a:lstStyle xmlns:a="http://schemas.openxmlformats.org/drawingml/2006/main"/>
+          <a:p xmlns:a="http://schemas.openxmlformats.org/drawingml/2006/main">
+            <a:pPr algn="l">
+              <a:defRPr sz="975" b="1" i="0">
+                <a:solidFill>
+                  <a:srgbClr val="555555"/>
+                </a:solidFill>
+              </a:defRPr>
+            </a:pPr>
+            <a:r>
+              <a:rPr sz="975" b="1" i="0">
+                <a:solidFill>
+                  <a:srgbClr val="555555"/>
+                </a:solidFill>
+              </a:rPr>
+              <a:t>GEN5.4 ML DECISION ENGINE</a:t>
+            </a:r>
+          </a:p>
+        </p:txBody>
+      </p:sp>
+      <p:sp>
+        <p:nvSpPr>
+          <p:cNvPr id="2" name="">
+            <a:extLst xmlns:a="http://schemas.openxmlformats.org/drawingml/2006/main">
+              <a:ext uri="{FF2B5EF4-FFF2-40B4-BE49-F238E27FC236}">
+                <a16:creationId xmlns:a16="http://schemas.microsoft.com/office/drawing/2014/main" id="{C9C54E29-469D-4B36-9C74-AAD2C7172DE2}"/>
+              </a:ext>
+            </a:extLst>
+          </p:cNvPr>
+          <p:cNvSpPr>
+            <a:spLocks xmlns:a="http://schemas.openxmlformats.org/drawingml/2006/main" noGrp="1"/>
+          </p:cNvSpPr>
+          <p:nvPr/>
+        </p:nvSpPr>
+        <p:spPr>
+          <a:xfrm xmlns:a="http://schemas.openxmlformats.org/drawingml/2006/main">
+            <a:off x="685800" y="723900"/>
+            <a:ext cx="10287000" cy="876300"/>
+          </a:xfrm>
+          <a:prstGeom xmlns:a="http://schemas.openxmlformats.org/drawingml/2006/main" prst="rect">
+            <a:avLst/>
+          </a:prstGeom>
+          <a:noFill xmlns:a="http://schemas.openxmlformats.org/drawingml/2006/main"/>
+          <a:ln xmlns:a="http://schemas.openxmlformats.org/drawingml/2006/main" w="0">
+            <a:noFill/>
+            <a:prstDash val="solid"/>
+          </a:ln>
+        </p:spPr>
+        <p:txBody>
+          <a:bodyPr xmlns:a="http://schemas.openxmlformats.org/drawingml/2006/main"/>
+          <a:lstStyle xmlns:a="http://schemas.openxmlformats.org/drawingml/2006/main"/>
+          <a:p xmlns:a="http://schemas.openxmlformats.org/drawingml/2006/main">
+            <a:pPr algn="l">
+              <a:defRPr sz="2850" b="1" i="0">
+                <a:solidFill>
+                  <a:srgbClr val="000000"/>
+                </a:solidFill>
+              </a:defRPr>
+            </a:pPr>
+            <a:r>
+              <a:rPr sz="2850" b="1" i="0">
+                <a:solidFill>
+                  <a:srgbClr val="000000"/>
+                </a:solidFill>
+              </a:rPr>
+              <a:t>The next ML gate should return to features and labels</a:t>
+            </a:r>
+          </a:p>
+        </p:txBody>
+      </p:sp>
+      <p:sp>
+        <p:nvSpPr>
+          <p:cNvPr id="3" name="">
+            <a:extLst xmlns:a="http://schemas.openxmlformats.org/drawingml/2006/main">
+              <a:ext uri="{FF2B5EF4-FFF2-40B4-BE49-F238E27FC236}">
+                <a16:creationId xmlns:a16="http://schemas.microsoft.com/office/drawing/2014/main" id="{A0831858-4690-4C85-A388-F489A2D2155D}"/>
+              </a:ext>
+            </a:extLst>
+          </p:cNvPr>
+          <p:cNvSpPr>
+            <a:spLocks xmlns:a="http://schemas.openxmlformats.org/drawingml/2006/main" noGrp="1"/>
+          </p:cNvSpPr>
+          <p:nvPr/>
+        </p:nvSpPr>
+        <p:spPr>
+          <a:xfrm xmlns:a="http://schemas.openxmlformats.org/drawingml/2006/main">
+            <a:off x="685800" y="1657350"/>
+            <a:ext cx="10820400" cy="19050"/>
+          </a:xfrm>
+          <a:prstGeom xmlns:a="http://schemas.openxmlformats.org/drawingml/2006/main" prst="rect">
+            <a:avLst/>
+          </a:prstGeom>
+          <a:solidFill xmlns:a="http://schemas.openxmlformats.org/drawingml/2006/main">
+            <a:srgbClr val="B8BCC4"/>
+          </a:solidFill>
+          <a:ln xmlns:a="http://schemas.openxmlformats.org/drawingml/2006/main" w="0">
+            <a:noFill/>
+            <a:prstDash val="solid"/>
+          </a:ln>
+        </p:spPr>
+      </p:sp>
+      <p:sp>
+        <p:nvSpPr>
+          <p:cNvPr id="4" name="">
+            <a:extLst xmlns:a="http://schemas.openxmlformats.org/drawingml/2006/main">
+              <a:ext uri="{FF2B5EF4-FFF2-40B4-BE49-F238E27FC236}">
+                <a16:creationId xmlns:a16="http://schemas.microsoft.com/office/drawing/2014/main" id="{1626F601-151A-40C5-B2BE-8FC42147EEFD}"/>
+              </a:ext>
+            </a:extLst>
+          </p:cNvPr>
+          <p:cNvSpPr>
+            <a:spLocks xmlns:a="http://schemas.openxmlformats.org/drawingml/2006/main" noGrp="1"/>
+          </p:cNvSpPr>
+          <p:nvPr/>
+        </p:nvSpPr>
+        <p:spPr>
+          <a:xfrm xmlns:a="http://schemas.openxmlformats.org/drawingml/2006/main">
+            <a:off x="876300" y="2133600"/>
+            <a:ext cx="9334500" cy="914400"/>
+          </a:xfrm>
+          <a:prstGeom xmlns:a="http://schemas.openxmlformats.org/drawingml/2006/main" prst="rect">
+            <a:avLst/>
+          </a:prstGeom>
+          <a:noFill xmlns:a="http://schemas.openxmlformats.org/drawingml/2006/main"/>
+          <a:ln xmlns:a="http://schemas.openxmlformats.org/drawingml/2006/main" w="0">
+            <a:noFill/>
+            <a:prstDash val="solid"/>
+          </a:ln>
+        </p:spPr>
+        <p:txBody>
+          <a:bodyPr xmlns:a="http://schemas.openxmlformats.org/drawingml/2006/main"/>
+          <a:lstStyle xmlns:a="http://schemas.openxmlformats.org/drawingml/2006/main"/>
+          <a:p xmlns:a="http://schemas.openxmlformats.org/drawingml/2006/main">
+            <a:pPr algn="l">
+              <a:defRPr sz="2250" b="1" i="0">
+                <a:solidFill>
+                  <a:srgbClr val="000000"/>
+                </a:solidFill>
+              </a:defRPr>
+            </a:pPr>
+            <a:r>
+              <a:rPr sz="2250" b="1" i="0">
+                <a:solidFill>
+                  <a:srgbClr val="000000"/>
+                </a:solidFill>
+              </a:rPr>
+              <a:t>ML-P2b answered the narrow tuning question: small TRAIN-only XGBoost parameter selection did not improve OOS ranking or replay versus the fixed control.</a:t>
+            </a:r>
+          </a:p>
+        </p:txBody>
+      </p:sp>
+      <p:sp>
+        <p:nvSpPr>
+          <p:cNvPr id="5" name="">
+            <a:extLst xmlns:a="http://schemas.openxmlformats.org/drawingml/2006/main">
+              <a:ext uri="{FF2B5EF4-FFF2-40B4-BE49-F238E27FC236}">
+                <a16:creationId xmlns:a16="http://schemas.microsoft.com/office/drawing/2014/main" id="{70F8DF23-9458-482E-8E67-8B244E218DCF}"/>
+              </a:ext>
+            </a:extLst>
+          </p:cNvPr>
+          <p:cNvSpPr>
+            <a:spLocks xmlns:a="http://schemas.openxmlformats.org/drawingml/2006/main" noGrp="1"/>
+          </p:cNvSpPr>
+          <p:nvPr/>
+        </p:nvSpPr>
+        <p:spPr>
+          <a:xfrm xmlns:a="http://schemas.openxmlformats.org/drawingml/2006/main">
+            <a:off x="1219200" y="3571875"/>
+            <a:ext cx="190500" cy="247650"/>
+          </a:xfrm>
+          <a:prstGeom xmlns:a="http://schemas.openxmlformats.org/drawingml/2006/main" prst="rect">
+            <a:avLst/>
+          </a:prstGeom>
+          <a:noFill xmlns:a="http://schemas.openxmlformats.org/drawingml/2006/main"/>
+          <a:ln xmlns:a="http://schemas.openxmlformats.org/drawingml/2006/main" w="0">
+            <a:noFill/>
+            <a:prstDash val="solid"/>
+          </a:ln>
+        </p:spPr>
+        <p:txBody>
+          <a:bodyPr xmlns:a="http://schemas.openxmlformats.org/drawingml/2006/main"/>
+          <a:lstStyle xmlns:a="http://schemas.openxmlformats.org/drawingml/2006/main"/>
+          <a:p xmlns:a="http://schemas.openxmlformats.org/drawingml/2006/main">
+            <a:pPr algn="l">
+              <a:defRPr sz="1575" b="1" i="0">
+                <a:solidFill>
+                  <a:srgbClr val="FF6B35"/>
+                </a:solidFill>
+              </a:defRPr>
+            </a:pPr>
+            <a:r>
+              <a:rPr sz="1575" b="1" i="0">
+                <a:solidFill>
+                  <a:srgbClr val="FF6B35"/>
+                </a:solidFill>
+              </a:rPr>
+              <a:t>-</a:t>
+            </a:r>
+          </a:p>
+        </p:txBody>
+      </p:sp>
+      <p:sp>
+        <p:nvSpPr>
+          <p:cNvPr id="6" name="">
+            <a:extLst xmlns:a="http://schemas.openxmlformats.org/drawingml/2006/main">
+              <a:ext uri="{FF2B5EF4-FFF2-40B4-BE49-F238E27FC236}">
+                <a16:creationId xmlns:a16="http://schemas.microsoft.com/office/drawing/2014/main" id="{12EE7116-B6A3-4F08-9D8B-5AB076C29097}"/>
+              </a:ext>
+            </a:extLst>
+          </p:cNvPr>
+          <p:cNvSpPr>
+            <a:spLocks xmlns:a="http://schemas.openxmlformats.org/drawingml/2006/main" noGrp="1"/>
+          </p:cNvSpPr>
+          <p:nvPr/>
+        </p:nvSpPr>
+        <p:spPr>
+          <a:xfrm xmlns:a="http://schemas.openxmlformats.org/drawingml/2006/main">
+            <a:off x="1485900" y="3562350"/>
+            <a:ext cx="7162800" cy="514350"/>
+          </a:xfrm>
+          <a:prstGeom xmlns:a="http://schemas.openxmlformats.org/drawingml/2006/main" prst="rect">
+            <a:avLst/>
+          </a:prstGeom>
+          <a:noFill xmlns:a="http://schemas.openxmlformats.org/drawingml/2006/main"/>
+          <a:ln xmlns:a="http://schemas.openxmlformats.org/drawingml/2006/main" w="0">
+            <a:noFill/>
+            <a:prstDash val="solid"/>
+          </a:ln>
+        </p:spPr>
+        <p:txBody>
+          <a:bodyPr xmlns:a="http://schemas.openxmlformats.org/drawingml/2006/main"/>
+          <a:lstStyle xmlns:a="http://schemas.openxmlformats.org/drawingml/2006/main"/>
+          <a:p xmlns:a="http://schemas.openxmlformats.org/drawingml/2006/main">
+            <a:pPr algn="l">
+              <a:defRPr sz="1575" b="0" i="0">
+                <a:solidFill>
+                  <a:srgbClr val="222222"/>
+                </a:solidFill>
+              </a:defRPr>
+            </a:pPr>
+            <a:r>
+              <a:rPr sz="1575" b="0" i="0">
+                <a:solidFill>
+                  <a:srgbClr val="222222"/>
+                </a:solidFill>
+              </a:rPr>
+              <a:t>Do not broaden XGBoost search yet; that would mostly increase overfit surface area.</a:t>
+            </a:r>
+          </a:p>
+        </p:txBody>
+      </p:sp>
+      <p:sp>
+        <p:nvSpPr>
+          <p:cNvPr id="7" name="">
+            <a:extLst xmlns:a="http://schemas.openxmlformats.org/drawingml/2006/main">
+              <a:ext uri="{FF2B5EF4-FFF2-40B4-BE49-F238E27FC236}">
+                <a16:creationId xmlns:a16="http://schemas.microsoft.com/office/drawing/2014/main" id="{018C3DDA-009D-4088-A857-586C8325F88C}"/>
+              </a:ext>
+            </a:extLst>
+          </p:cNvPr>
+          <p:cNvSpPr>
+            <a:spLocks xmlns:a="http://schemas.openxmlformats.org/drawingml/2006/main" noGrp="1"/>
+          </p:cNvSpPr>
+          <p:nvPr/>
+        </p:nvSpPr>
+        <p:spPr>
+          <a:xfrm xmlns:a="http://schemas.openxmlformats.org/drawingml/2006/main">
+            <a:off x="1219200" y="4238625"/>
+            <a:ext cx="190500" cy="247650"/>
+          </a:xfrm>
+          <a:prstGeom xmlns:a="http://schemas.openxmlformats.org/drawingml/2006/main" prst="rect">
+            <a:avLst/>
+          </a:prstGeom>
+          <a:noFill xmlns:a="http://schemas.openxmlformats.org/drawingml/2006/main"/>
+          <a:ln xmlns:a="http://schemas.openxmlformats.org/drawingml/2006/main" w="0">
+            <a:noFill/>
+            <a:prstDash val="solid"/>
+          </a:ln>
+        </p:spPr>
+        <p:txBody>
+          <a:bodyPr xmlns:a="http://schemas.openxmlformats.org/drawingml/2006/main"/>
+          <a:lstStyle xmlns:a="http://schemas.openxmlformats.org/drawingml/2006/main"/>
+          <a:p xmlns:a="http://schemas.openxmlformats.org/drawingml/2006/main">
+            <a:pPr algn="l">
+              <a:defRPr sz="1575" b="1" i="0">
+                <a:solidFill>
+                  <a:srgbClr val="FF6B35"/>
+                </a:solidFill>
+              </a:defRPr>
+            </a:pPr>
+            <a:r>
+              <a:rPr sz="1575" b="1" i="0">
+                <a:solidFill>
+                  <a:srgbClr val="FF6B35"/>
+                </a:solidFill>
+              </a:rPr>
+              <a:t>-</a:t>
+            </a:r>
+          </a:p>
+        </p:txBody>
+      </p:sp>
+      <p:sp>
+        <p:nvSpPr>
+          <p:cNvPr id="8" name="">
+            <a:extLst xmlns:a="http://schemas.openxmlformats.org/drawingml/2006/main">
+              <a:ext uri="{FF2B5EF4-FFF2-40B4-BE49-F238E27FC236}">
+                <a16:creationId xmlns:a16="http://schemas.microsoft.com/office/drawing/2014/main" id="{344D85A5-7E7C-4A1F-B63C-B2B5831A1A14}"/>
+              </a:ext>
+            </a:extLst>
+          </p:cNvPr>
+          <p:cNvSpPr>
+            <a:spLocks xmlns:a="http://schemas.openxmlformats.org/drawingml/2006/main" noGrp="1"/>
+          </p:cNvSpPr>
+          <p:nvPr/>
+        </p:nvSpPr>
+        <p:spPr>
+          <a:xfrm xmlns:a="http://schemas.openxmlformats.org/drawingml/2006/main">
+            <a:off x="1485900" y="4229100"/>
+            <a:ext cx="7162800" cy="514350"/>
+          </a:xfrm>
+          <a:prstGeom xmlns:a="http://schemas.openxmlformats.org/drawingml/2006/main" prst="rect">
+            <a:avLst/>
+          </a:prstGeom>
+          <a:noFill xmlns:a="http://schemas.openxmlformats.org/drawingml/2006/main"/>
+          <a:ln xmlns:a="http://schemas.openxmlformats.org/drawingml/2006/main" w="0">
+            <a:noFill/>
+            <a:prstDash val="solid"/>
+          </a:ln>
+        </p:spPr>
+        <p:txBody>
+          <a:bodyPr xmlns:a="http://schemas.openxmlformats.org/drawingml/2006/main"/>
+          <a:lstStyle xmlns:a="http://schemas.openxmlformats.org/drawingml/2006/main"/>
+          <a:p xmlns:a="http://schemas.openxmlformats.org/drawingml/2006/main">
+            <a:pPr algn="l">
+              <a:defRPr sz="1575" b="0" i="0">
+                <a:solidFill>
+                  <a:srgbClr val="222222"/>
+                </a:solidFill>
+              </a:defRPr>
+            </a:pPr>
+            <a:r>
+              <a:rPr sz="1575" b="0" i="0">
+                <a:solidFill>
+                  <a:srgbClr val="222222"/>
+                </a:solidFill>
+              </a:rPr>
+              <a:t>Next high-signal slice: feature-family ablation or richer supervised labels, still under annual continuity replay.</a:t>
+            </a:r>
+          </a:p>
+        </p:txBody>
+      </p:sp>
+      <p:sp>
+        <p:nvSpPr>
+          <p:cNvPr id="9" name="">
+            <a:extLst xmlns:a="http://schemas.openxmlformats.org/drawingml/2006/main">
+              <a:ext uri="{FF2B5EF4-FFF2-40B4-BE49-F238E27FC236}">
+                <a16:creationId xmlns:a16="http://schemas.microsoft.com/office/drawing/2014/main" id="{DA4D43D3-3A43-4F85-9E91-F37676CCF083}"/>
+              </a:ext>
+            </a:extLst>
+          </p:cNvPr>
+          <p:cNvSpPr>
+            <a:spLocks xmlns:a="http://schemas.openxmlformats.org/drawingml/2006/main" noGrp="1"/>
+          </p:cNvSpPr>
+          <p:nvPr/>
+        </p:nvSpPr>
+        <p:spPr>
+          <a:xfrm xmlns:a="http://schemas.openxmlformats.org/drawingml/2006/main">
+            <a:off x="1219200" y="4905375"/>
+            <a:ext cx="190500" cy="247650"/>
+          </a:xfrm>
+          <a:prstGeom xmlns:a="http://schemas.openxmlformats.org/drawingml/2006/main" prst="rect">
+            <a:avLst/>
+          </a:prstGeom>
+          <a:noFill xmlns:a="http://schemas.openxmlformats.org/drawingml/2006/main"/>
+          <a:ln xmlns:a="http://schemas.openxmlformats.org/drawingml/2006/main" w="0">
+            <a:noFill/>
+            <a:prstDash val="solid"/>
+          </a:ln>
+        </p:spPr>
+        <p:txBody>
+          <a:bodyPr xmlns:a="http://schemas.openxmlformats.org/drawingml/2006/main"/>
+          <a:lstStyle xmlns:a="http://schemas.openxmlformats.org/drawingml/2006/main"/>
+          <a:p xmlns:a="http://schemas.openxmlformats.org/drawingml/2006/main">
+            <a:pPr algn="l">
+              <a:defRPr sz="1575" b="1" i="0">
+                <a:solidFill>
+                  <a:srgbClr val="FF6B35"/>
+                </a:solidFill>
+              </a:defRPr>
+            </a:pPr>
+            <a:r>
+              <a:rPr sz="1575" b="1" i="0">
+                <a:solidFill>
+                  <a:srgbClr val="FF6B35"/>
+                </a:solidFill>
+              </a:rPr>
+              <a:t>-</a:t>
+            </a:r>
+          </a:p>
+        </p:txBody>
+      </p:sp>
+      <p:sp>
+        <p:nvSpPr>
+          <p:cNvPr id="10" name="">
+            <a:extLst xmlns:a="http://schemas.openxmlformats.org/drawingml/2006/main">
+              <a:ext uri="{FF2B5EF4-FFF2-40B4-BE49-F238E27FC236}">
+                <a16:creationId xmlns:a16="http://schemas.microsoft.com/office/drawing/2014/main" id="{21335F33-6C2D-425C-860C-6FFEDCBB46D5}"/>
+              </a:ext>
+            </a:extLst>
+          </p:cNvPr>
+          <p:cNvSpPr>
+            <a:spLocks xmlns:a="http://schemas.openxmlformats.org/drawingml/2006/main" noGrp="1"/>
+          </p:cNvSpPr>
+          <p:nvPr/>
+        </p:nvSpPr>
+        <p:spPr>
+          <a:xfrm xmlns:a="http://schemas.openxmlformats.org/drawingml/2006/main">
+            <a:off x="1485900" y="4895850"/>
+            <a:ext cx="7162800" cy="514350"/>
+          </a:xfrm>
+          <a:prstGeom xmlns:a="http://schemas.openxmlformats.org/drawingml/2006/main" prst="rect">
+            <a:avLst/>
+          </a:prstGeom>
+          <a:noFill xmlns:a="http://schemas.openxmlformats.org/drawingml/2006/main"/>
+          <a:ln xmlns:a="http://schemas.openxmlformats.org/drawingml/2006/main" w="0">
+            <a:noFill/>
+            <a:prstDash val="solid"/>
+          </a:ln>
+        </p:spPr>
+        <p:txBody>
+          <a:bodyPr xmlns:a="http://schemas.openxmlformats.org/drawingml/2006/main"/>
+          <a:lstStyle xmlns:a="http://schemas.openxmlformats.org/drawingml/2006/main"/>
+          <a:p xmlns:a="http://schemas.openxmlformats.org/drawingml/2006/main">
+            <a:pPr algn="l">
+              <a:defRPr sz="1575" b="0" i="0">
+                <a:solidFill>
+                  <a:srgbClr val="222222"/>
+                </a:solidFill>
+              </a:defRPr>
+            </a:pPr>
+            <a:r>
+              <a:rPr sz="1575" b="0" i="0">
+                <a:solidFill>
+                  <a:srgbClr val="222222"/>
+                </a:solidFill>
+              </a:rPr>
+              <a:t>Keep XGBoost as the nonlinear model class, but make the input/target question sharper.</a:t>
+            </a:r>
+          </a:p>
+        </p:txBody>
+      </p:sp>
+      <p:sp>
+        <p:nvSpPr>
+          <p:cNvPr id="11" name="">
+            <a:extLst xmlns:a="http://schemas.openxmlformats.org/drawingml/2006/main">
+              <a:ext uri="{FF2B5EF4-FFF2-40B4-BE49-F238E27FC236}">
+                <a16:creationId xmlns:a16="http://schemas.microsoft.com/office/drawing/2014/main" id="{1AD9D3B5-CD67-4B61-90D7-B2805AFFBE15}"/>
+              </a:ext>
+            </a:extLst>
+          </p:cNvPr>
+          <p:cNvSpPr>
+            <a:spLocks xmlns:a="http://schemas.openxmlformats.org/drawingml/2006/main" noGrp="1"/>
+          </p:cNvSpPr>
+          <p:nvPr/>
+        </p:nvSpPr>
+        <p:spPr>
+          <a:xfrm xmlns:a="http://schemas.openxmlformats.org/drawingml/2006/main">
+            <a:off x="1219200" y="5572125"/>
+            <a:ext cx="190500" cy="247650"/>
+          </a:xfrm>
+          <a:prstGeom xmlns:a="http://schemas.openxmlformats.org/drawingml/2006/main" prst="rect">
+            <a:avLst/>
+          </a:prstGeom>
+          <a:noFill xmlns:a="http://schemas.openxmlformats.org/drawingml/2006/main"/>
+          <a:ln xmlns:a="http://schemas.openxmlformats.org/drawingml/2006/main" w="0">
+            <a:noFill/>
+            <a:prstDash val="solid"/>
+          </a:ln>
+        </p:spPr>
+        <p:txBody>
+          <a:bodyPr xmlns:a="http://schemas.openxmlformats.org/drawingml/2006/main"/>
+          <a:lstStyle xmlns:a="http://schemas.openxmlformats.org/drawingml/2006/main"/>
+          <a:p xmlns:a="http://schemas.openxmlformats.org/drawingml/2006/main">
+            <a:pPr algn="l">
+              <a:defRPr sz="1575" b="1" i="0">
+                <a:solidFill>
+                  <a:srgbClr val="FF6B35"/>
+                </a:solidFill>
+              </a:defRPr>
+            </a:pPr>
+            <a:r>
+              <a:rPr sz="1575" b="1" i="0">
+                <a:solidFill>
+                  <a:srgbClr val="FF6B35"/>
+                </a:solidFill>
+              </a:rPr>
+              <a:t>-</a:t>
+            </a:r>
+          </a:p>
+        </p:txBody>
+      </p:sp>
+      <p:sp>
+        <p:nvSpPr>
+          <p:cNvPr id="12" name="">
+            <a:extLst xmlns:a="http://schemas.openxmlformats.org/drawingml/2006/main">
+              <a:ext uri="{FF2B5EF4-FFF2-40B4-BE49-F238E27FC236}">
+                <a16:creationId xmlns:a16="http://schemas.microsoft.com/office/drawing/2014/main" id="{1A1B0C11-F7BF-4818-AC77-24EDABB70B41}"/>
+              </a:ext>
+            </a:extLst>
+          </p:cNvPr>
+          <p:cNvSpPr>
+            <a:spLocks xmlns:a="http://schemas.openxmlformats.org/drawingml/2006/main" noGrp="1"/>
+          </p:cNvSpPr>
+          <p:nvPr/>
+        </p:nvSpPr>
+        <p:spPr>
+          <a:xfrm xmlns:a="http://schemas.openxmlformats.org/drawingml/2006/main">
+            <a:off x="1485900" y="5562600"/>
+            <a:ext cx="7162800" cy="514350"/>
+          </a:xfrm>
+          <a:prstGeom xmlns:a="http://schemas.openxmlformats.org/drawingml/2006/main" prst="rect">
+            <a:avLst/>
+          </a:prstGeom>
+          <a:noFill xmlns:a="http://schemas.openxmlformats.org/drawingml/2006/main"/>
+          <a:ln xmlns:a="http://schemas.openxmlformats.org/drawingml/2006/main" w="0">
+            <a:noFill/>
+            <a:prstDash val="solid"/>
+          </a:ln>
+        </p:spPr>
+        <p:txBody>
+          <a:bodyPr xmlns:a="http://schemas.openxmlformats.org/drawingml/2006/main"/>
+          <a:lstStyle xmlns:a="http://schemas.openxmlformats.org/drawingml/2006/main"/>
+          <a:p xmlns:a="http://schemas.openxmlformats.org/drawingml/2006/main">
+            <a:pPr algn="l">
+              <a:defRPr sz="1575" b="0" i="0">
+                <a:solidFill>
+                  <a:srgbClr val="222222"/>
+                </a:solidFill>
+              </a:defRPr>
+            </a:pPr>
+            <a:r>
+              <a:rPr sz="1575" b="0" i="0">
+                <a:solidFill>
+                  <a:srgbClr val="222222"/>
+                </a:solidFill>
+              </a:rPr>
+              <a:t>Live advice remains walled off; this is research-only evidence.</a:t>
+            </a:r>
+          </a:p>
+        </p:txBody>
+      </p:sp>
+    </p:spTree>
+    <p:extLst>
+      <p:ext uri="{BB962C8B-B14F-4D97-AF65-F5344CB8AC3E}">
+        <p14:creationId xmlns:p14="http://schemas.microsoft.com/office/powerpoint/2010/main" val="925440896"/>
       </p:ext>
     </p:extLst>
   </p:cSld>
@@ -18719,7 +23235,7 @@
           <p:cNvPr id="1" name="">
             <a:extLst xmlns:a="http://schemas.openxmlformats.org/drawingml/2006/main">
               <a:ext uri="{FF2B5EF4-FFF2-40B4-BE49-F238E27FC236}">
-                <a16:creationId xmlns:a16="http://schemas.microsoft.com/office/drawing/2014/main" id="{A3149011-1C12-4ECE-82F4-5D54D0D50365}"/>
+                <a16:creationId xmlns:a16="http://schemas.microsoft.com/office/drawing/2014/main" id="{6B8230F1-10F4-430C-87F5-BFC67A8EE056}"/>
               </a:ext>
             </a:extLst>
           </p:cNvPr>
@@ -18769,7 +23285,7 @@
           <p:cNvPr id="2" name="">
             <a:extLst xmlns:a="http://schemas.openxmlformats.org/drawingml/2006/main">
               <a:ext uri="{FF2B5EF4-FFF2-40B4-BE49-F238E27FC236}">
-                <a16:creationId xmlns:a16="http://schemas.microsoft.com/office/drawing/2014/main" id="{5DEF2192-026F-4A93-864E-149B7F93F454}"/>
+                <a16:creationId xmlns:a16="http://schemas.microsoft.com/office/drawing/2014/main" id="{AC5E0CEE-0EB1-4AB1-A534-8F4C73EB7161}"/>
               </a:ext>
             </a:extLst>
           </p:cNvPr>
@@ -18819,7 +23335,7 @@
           <p:cNvPr id="3" name="">
             <a:extLst xmlns:a="http://schemas.openxmlformats.org/drawingml/2006/main">
               <a:ext uri="{FF2B5EF4-FFF2-40B4-BE49-F238E27FC236}">
-                <a16:creationId xmlns:a16="http://schemas.microsoft.com/office/drawing/2014/main" id="{17944314-9D27-4A1C-8445-4F69A6EDD13A}"/>
+                <a16:creationId xmlns:a16="http://schemas.microsoft.com/office/drawing/2014/main" id="{8028B47E-3B23-4666-ABC6-DF85FE76B55D}"/>
               </a:ext>
             </a:extLst>
           </p:cNvPr>
@@ -18854,7 +23370,7 @@
           <p:nvPr/>
         </p:nvPicPr>
         <p:blipFill>
-          <a:blip xmlns:r="http://schemas.openxmlformats.org/officeDocument/2006/relationships" xmlns:a="http://schemas.openxmlformats.org/drawingml/2006/main" r:embed="Rbe8747974b8044ea"/>
+          <a:blip xmlns:r="http://schemas.openxmlformats.org/officeDocument/2006/relationships" xmlns:a="http://schemas.openxmlformats.org/drawingml/2006/main" r:embed="Rbe623fb0054b4f1a"/>
           <a:stretch xmlns:a="http://schemas.openxmlformats.org/drawingml/2006/main"/>
         </p:blipFill>
         <p:spPr>
@@ -18872,7 +23388,7 @@
           <p:cNvPr id="5" name="">
             <a:extLst xmlns:a="http://schemas.openxmlformats.org/drawingml/2006/main">
               <a:ext uri="{FF2B5EF4-FFF2-40B4-BE49-F238E27FC236}">
-                <a16:creationId xmlns:a16="http://schemas.microsoft.com/office/drawing/2014/main" id="{EF90201F-F256-4B5E-BDD3-33FBC931E556}"/>
+                <a16:creationId xmlns:a16="http://schemas.microsoft.com/office/drawing/2014/main" id="{5B3BD13B-B94C-4E48-A22C-5FF203D54184}"/>
               </a:ext>
             </a:extLst>
           </p:cNvPr>
@@ -18922,7 +23438,7 @@
           <p:cNvPr id="6" name="">
             <a:extLst xmlns:a="http://schemas.openxmlformats.org/drawingml/2006/main">
               <a:ext uri="{FF2B5EF4-FFF2-40B4-BE49-F238E27FC236}">
-                <a16:creationId xmlns:a16="http://schemas.microsoft.com/office/drawing/2014/main" id="{405CCA6E-AEF0-4431-B5F3-AC1BFB059B58}"/>
+                <a16:creationId xmlns:a16="http://schemas.microsoft.com/office/drawing/2014/main" id="{BD50FDA9-2531-49C0-AF63-F1F20DB44181}"/>
               </a:ext>
             </a:extLst>
           </p:cNvPr>
@@ -18972,7 +23488,7 @@
           <p:cNvPr id="7" name="">
             <a:extLst xmlns:a="http://schemas.openxmlformats.org/drawingml/2006/main">
               <a:ext uri="{FF2B5EF4-FFF2-40B4-BE49-F238E27FC236}">
-                <a16:creationId xmlns:a16="http://schemas.microsoft.com/office/drawing/2014/main" id="{E5F75E49-46A0-4998-8458-CFD167873384}"/>
+                <a16:creationId xmlns:a16="http://schemas.microsoft.com/office/drawing/2014/main" id="{1118BD3F-A287-446D-A23E-A06017C6D063}"/>
               </a:ext>
             </a:extLst>
           </p:cNvPr>
@@ -19022,7 +23538,7 @@
           <p:cNvPr id="8" name="">
             <a:extLst xmlns:a="http://schemas.openxmlformats.org/drawingml/2006/main">
               <a:ext uri="{FF2B5EF4-FFF2-40B4-BE49-F238E27FC236}">
-                <a16:creationId xmlns:a16="http://schemas.microsoft.com/office/drawing/2014/main" id="{087DF7CB-C511-4711-BD9F-5F4389B0949B}"/>
+                <a16:creationId xmlns:a16="http://schemas.microsoft.com/office/drawing/2014/main" id="{EB1CED3C-B243-4128-8DA4-F39193489558}"/>
               </a:ext>
             </a:extLst>
           </p:cNvPr>
@@ -19072,7 +23588,7 @@
           <p:cNvPr id="9" name="">
             <a:extLst xmlns:a="http://schemas.openxmlformats.org/drawingml/2006/main">
               <a:ext uri="{FF2B5EF4-FFF2-40B4-BE49-F238E27FC236}">
-                <a16:creationId xmlns:a16="http://schemas.microsoft.com/office/drawing/2014/main" id="{30684163-3E55-499C-B609-EC806FE3133D}"/>
+                <a16:creationId xmlns:a16="http://schemas.microsoft.com/office/drawing/2014/main" id="{BFFB5CCC-6A25-4E32-841A-82BF21F616EC}"/>
               </a:ext>
             </a:extLst>
           </p:cNvPr>
@@ -19120,7 +23636,7 @@
     </p:spTree>
     <p:extLst>
       <p:ext uri="{BB962C8B-B14F-4D97-AF65-F5344CB8AC3E}">
-        <p14:creationId xmlns:p14="http://schemas.microsoft.com/office/powerpoint/2010/main" val="1414647820"/>
+        <p14:creationId xmlns:p14="http://schemas.microsoft.com/office/powerpoint/2010/main" val="911779749"/>
       </p:ext>
     </p:extLst>
   </p:cSld>
@@ -19151,7 +23667,7 @@
           <p:cNvPr id="1" name="">
             <a:extLst xmlns:a="http://schemas.openxmlformats.org/drawingml/2006/main">
               <a:ext uri="{FF2B5EF4-FFF2-40B4-BE49-F238E27FC236}">
-                <a16:creationId xmlns:a16="http://schemas.microsoft.com/office/drawing/2014/main" id="{A051900E-43C1-4E0F-BB10-5909B379F7AF}"/>
+                <a16:creationId xmlns:a16="http://schemas.microsoft.com/office/drawing/2014/main" id="{620948D8-21F8-4FCD-AECD-AA880B1D3A64}"/>
               </a:ext>
             </a:extLst>
           </p:cNvPr>
@@ -19201,7 +23717,7 @@
           <p:cNvPr id="2" name="">
             <a:extLst xmlns:a="http://schemas.openxmlformats.org/drawingml/2006/main">
               <a:ext uri="{FF2B5EF4-FFF2-40B4-BE49-F238E27FC236}">
-                <a16:creationId xmlns:a16="http://schemas.microsoft.com/office/drawing/2014/main" id="{24297436-58A2-45AD-856C-FCC4339940CC}"/>
+                <a16:creationId xmlns:a16="http://schemas.microsoft.com/office/drawing/2014/main" id="{DB1EE0DF-BDCD-4B57-B66E-D03748811CD0}"/>
               </a:ext>
             </a:extLst>
           </p:cNvPr>
@@ -19251,7 +23767,7 @@
           <p:cNvPr id="3" name="">
             <a:extLst xmlns:a="http://schemas.openxmlformats.org/drawingml/2006/main">
               <a:ext uri="{FF2B5EF4-FFF2-40B4-BE49-F238E27FC236}">
-                <a16:creationId xmlns:a16="http://schemas.microsoft.com/office/drawing/2014/main" id="{DC5CB0FE-B6FD-4657-90F1-EF5B0E6E5521}"/>
+                <a16:creationId xmlns:a16="http://schemas.microsoft.com/office/drawing/2014/main" id="{CB00B4F7-D646-4E9D-9473-738539BDDE0C}"/>
               </a:ext>
             </a:extLst>
           </p:cNvPr>
@@ -19286,7 +23802,7 @@
           <p:nvPr/>
         </p:nvPicPr>
         <p:blipFill>
-          <a:blip xmlns:r="http://schemas.openxmlformats.org/officeDocument/2006/relationships" xmlns:a="http://schemas.openxmlformats.org/drawingml/2006/main" r:embed="R8b0b07f2e7e14e52"/>
+          <a:blip xmlns:r="http://schemas.openxmlformats.org/officeDocument/2006/relationships" xmlns:a="http://schemas.openxmlformats.org/drawingml/2006/main" r:embed="Rd8e35880de154a8a"/>
           <a:stretch xmlns:a="http://schemas.openxmlformats.org/drawingml/2006/main"/>
         </p:blipFill>
         <p:spPr>
@@ -19308,7 +23824,7 @@
           <p:nvPr/>
         </p:nvPicPr>
         <p:blipFill>
-          <a:blip xmlns:r="http://schemas.openxmlformats.org/officeDocument/2006/relationships" xmlns:a="http://schemas.openxmlformats.org/drawingml/2006/main" r:embed="R61556078943a4bc6"/>
+          <a:blip xmlns:r="http://schemas.openxmlformats.org/officeDocument/2006/relationships" xmlns:a="http://schemas.openxmlformats.org/drawingml/2006/main" r:embed="Rc67bbc1ca3e84add"/>
           <a:stretch xmlns:a="http://schemas.openxmlformats.org/drawingml/2006/main"/>
         </p:blipFill>
         <p:spPr>
@@ -19326,7 +23842,7 @@
           <p:cNvPr id="6" name="">
             <a:extLst xmlns:a="http://schemas.openxmlformats.org/drawingml/2006/main">
               <a:ext uri="{FF2B5EF4-FFF2-40B4-BE49-F238E27FC236}">
-                <a16:creationId xmlns:a16="http://schemas.microsoft.com/office/drawing/2014/main" id="{D7495827-44D8-4D1E-B63E-FF283A6EEF7F}"/>
+                <a16:creationId xmlns:a16="http://schemas.microsoft.com/office/drawing/2014/main" id="{2E7B304E-A5C1-4B6F-8665-2BEA40C2ECC6}"/>
               </a:ext>
             </a:extLst>
           </p:cNvPr>
@@ -19374,7 +23890,7 @@
     </p:spTree>
     <p:extLst>
       <p:ext uri="{BB962C8B-B14F-4D97-AF65-F5344CB8AC3E}">
-        <p14:creationId xmlns:p14="http://schemas.microsoft.com/office/powerpoint/2010/main" val="2054964134"/>
+        <p14:creationId xmlns:p14="http://schemas.microsoft.com/office/powerpoint/2010/main" val="302194327"/>
       </p:ext>
     </p:extLst>
   </p:cSld>
@@ -19405,7 +23921,7 @@
           <p:cNvPr id="1" name="">
             <a:extLst xmlns:a="http://schemas.openxmlformats.org/drawingml/2006/main">
               <a:ext uri="{FF2B5EF4-FFF2-40B4-BE49-F238E27FC236}">
-                <a16:creationId xmlns:a16="http://schemas.microsoft.com/office/drawing/2014/main" id="{1B843745-04D7-4B87-BB4C-026011D7D470}"/>
+                <a16:creationId xmlns:a16="http://schemas.microsoft.com/office/drawing/2014/main" id="{6B162F28-5104-440C-9CE4-01225EF3523E}"/>
               </a:ext>
             </a:extLst>
           </p:cNvPr>
@@ -19455,7 +23971,7 @@
           <p:cNvPr id="2" name="">
             <a:extLst xmlns:a="http://schemas.openxmlformats.org/drawingml/2006/main">
               <a:ext uri="{FF2B5EF4-FFF2-40B4-BE49-F238E27FC236}">
-                <a16:creationId xmlns:a16="http://schemas.microsoft.com/office/drawing/2014/main" id="{2ECCFBAC-6611-4E36-B7CC-07F350699CE9}"/>
+                <a16:creationId xmlns:a16="http://schemas.microsoft.com/office/drawing/2014/main" id="{7F48B1AD-15DA-4BEF-BB58-A1691995D3DF}"/>
               </a:ext>
             </a:extLst>
           </p:cNvPr>
@@ -19505,7 +24021,7 @@
           <p:cNvPr id="3" name="">
             <a:extLst xmlns:a="http://schemas.openxmlformats.org/drawingml/2006/main">
               <a:ext uri="{FF2B5EF4-FFF2-40B4-BE49-F238E27FC236}">
-                <a16:creationId xmlns:a16="http://schemas.microsoft.com/office/drawing/2014/main" id="{9DCCC2A4-74D0-402C-A54C-5569B4D54D3C}"/>
+                <a16:creationId xmlns:a16="http://schemas.microsoft.com/office/drawing/2014/main" id="{B98F5BE9-F138-4275-9DFA-2FB669EF21E0}"/>
               </a:ext>
             </a:extLst>
           </p:cNvPr>
@@ -19540,7 +24056,7 @@
           <p:nvPr/>
         </p:nvPicPr>
         <p:blipFill>
-          <a:blip xmlns:r="http://schemas.openxmlformats.org/officeDocument/2006/relationships" xmlns:a="http://schemas.openxmlformats.org/drawingml/2006/main" r:embed="R8a6323f4c9a74b7c"/>
+          <a:blip xmlns:r="http://schemas.openxmlformats.org/officeDocument/2006/relationships" xmlns:a="http://schemas.openxmlformats.org/drawingml/2006/main" r:embed="Rabc0dbb3b7c04c69"/>
           <a:stretch xmlns:a="http://schemas.openxmlformats.org/drawingml/2006/main"/>
         </p:blipFill>
         <p:spPr>
@@ -19558,7 +24074,7 @@
           <p:cNvPr id="5" name="">
             <a:extLst xmlns:a="http://schemas.openxmlformats.org/drawingml/2006/main">
               <a:ext uri="{FF2B5EF4-FFF2-40B4-BE49-F238E27FC236}">
-                <a16:creationId xmlns:a16="http://schemas.microsoft.com/office/drawing/2014/main" id="{4FD92D8D-7654-4BF9-B134-408998ECAD06}"/>
+                <a16:creationId xmlns:a16="http://schemas.microsoft.com/office/drawing/2014/main" id="{F93396A5-067A-4A2D-B4CC-5F539CD47328}"/>
               </a:ext>
             </a:extLst>
           </p:cNvPr>
@@ -19608,7 +24124,7 @@
           <p:cNvPr id="6" name="">
             <a:extLst xmlns:a="http://schemas.openxmlformats.org/drawingml/2006/main">
               <a:ext uri="{FF2B5EF4-FFF2-40B4-BE49-F238E27FC236}">
-                <a16:creationId xmlns:a16="http://schemas.microsoft.com/office/drawing/2014/main" id="{B0DAC201-B558-4534-B253-8FFB6F204156}"/>
+                <a16:creationId xmlns:a16="http://schemas.microsoft.com/office/drawing/2014/main" id="{8E761C31-C217-4C56-8EEF-47C9A82BE1AF}"/>
               </a:ext>
             </a:extLst>
           </p:cNvPr>
@@ -19656,7 +24172,7 @@
     </p:spTree>
     <p:extLst>
       <p:ext uri="{BB962C8B-B14F-4D97-AF65-F5344CB8AC3E}">
-        <p14:creationId xmlns:p14="http://schemas.microsoft.com/office/powerpoint/2010/main" val="1623750813"/>
+        <p14:creationId xmlns:p14="http://schemas.microsoft.com/office/powerpoint/2010/main" val="2142258102"/>
       </p:ext>
     </p:extLst>
   </p:cSld>
@@ -19687,7 +24203,7 @@
           <p:cNvPr id="1" name="">
             <a:extLst xmlns:a="http://schemas.openxmlformats.org/drawingml/2006/main">
               <a:ext uri="{FF2B5EF4-FFF2-40B4-BE49-F238E27FC236}">
-                <a16:creationId xmlns:a16="http://schemas.microsoft.com/office/drawing/2014/main" id="{E8D5A845-9995-4B9E-88D3-EB81FC8FEB84}"/>
+                <a16:creationId xmlns:a16="http://schemas.microsoft.com/office/drawing/2014/main" id="{8FCDDD88-F573-4AE8-A876-0C0F693CC247}"/>
               </a:ext>
             </a:extLst>
           </p:cNvPr>
@@ -19737,7 +24253,7 @@
           <p:cNvPr id="2" name="">
             <a:extLst xmlns:a="http://schemas.openxmlformats.org/drawingml/2006/main">
               <a:ext uri="{FF2B5EF4-FFF2-40B4-BE49-F238E27FC236}">
-                <a16:creationId xmlns:a16="http://schemas.microsoft.com/office/drawing/2014/main" id="{8C5FFDF8-00B4-4D45-8474-65A6371CD817}"/>
+                <a16:creationId xmlns:a16="http://schemas.microsoft.com/office/drawing/2014/main" id="{35D00195-DA8A-4E45-9375-FFA689028096}"/>
               </a:ext>
             </a:extLst>
           </p:cNvPr>
@@ -19787,7 +24303,7 @@
           <p:cNvPr id="3" name="">
             <a:extLst xmlns:a="http://schemas.openxmlformats.org/drawingml/2006/main">
               <a:ext uri="{FF2B5EF4-FFF2-40B4-BE49-F238E27FC236}">
-                <a16:creationId xmlns:a16="http://schemas.microsoft.com/office/drawing/2014/main" id="{863469CB-9ABA-4B0D-B685-A80C5788F75D}"/>
+                <a16:creationId xmlns:a16="http://schemas.microsoft.com/office/drawing/2014/main" id="{3E9D7C28-C59A-4DA4-AEBB-2857D1B5D3F6}"/>
               </a:ext>
             </a:extLst>
           </p:cNvPr>
@@ -19822,7 +24338,7 @@
           <p:nvPr/>
         </p:nvPicPr>
         <p:blipFill>
-          <a:blip xmlns:r="http://schemas.openxmlformats.org/officeDocument/2006/relationships" xmlns:a="http://schemas.openxmlformats.org/drawingml/2006/main" r:embed="R32ae7a3b6a484a70"/>
+          <a:blip xmlns:r="http://schemas.openxmlformats.org/officeDocument/2006/relationships" xmlns:a="http://schemas.openxmlformats.org/drawingml/2006/main" r:embed="R669d7a7cd07b4038"/>
           <a:stretch xmlns:a="http://schemas.openxmlformats.org/drawingml/2006/main"/>
         </p:blipFill>
         <p:spPr>
@@ -19840,7 +24356,7 @@
           <p:cNvPr id="5" name="">
             <a:extLst xmlns:a="http://schemas.openxmlformats.org/drawingml/2006/main">
               <a:ext uri="{FF2B5EF4-FFF2-40B4-BE49-F238E27FC236}">
-                <a16:creationId xmlns:a16="http://schemas.microsoft.com/office/drawing/2014/main" id="{D1ABDFCD-B759-4DA7-B334-33DDD6E9D612}"/>
+                <a16:creationId xmlns:a16="http://schemas.microsoft.com/office/drawing/2014/main" id="{766C4CA2-F9F6-41EB-969A-8AFDA5B8BCB4}"/>
               </a:ext>
             </a:extLst>
           </p:cNvPr>
@@ -19890,7 +24406,7 @@
           <p:cNvPr id="6" name="">
             <a:extLst xmlns:a="http://schemas.openxmlformats.org/drawingml/2006/main">
               <a:ext uri="{FF2B5EF4-FFF2-40B4-BE49-F238E27FC236}">
-                <a16:creationId xmlns:a16="http://schemas.microsoft.com/office/drawing/2014/main" id="{3AF7937B-CC02-4D9C-9ADD-17F1F5C51F5C}"/>
+                <a16:creationId xmlns:a16="http://schemas.microsoft.com/office/drawing/2014/main" id="{4AF8F483-373C-4C44-A737-C3326A3C6B47}"/>
               </a:ext>
             </a:extLst>
           </p:cNvPr>
@@ -19938,7 +24454,7 @@
     </p:spTree>
     <p:extLst>
       <p:ext uri="{BB962C8B-B14F-4D97-AF65-F5344CB8AC3E}">
-        <p14:creationId xmlns:p14="http://schemas.microsoft.com/office/powerpoint/2010/main" val="432373766"/>
+        <p14:creationId xmlns:p14="http://schemas.microsoft.com/office/powerpoint/2010/main" val="429744616"/>
       </p:ext>
     </p:extLst>
   </p:cSld>
@@ -19969,7 +24485,7 @@
           <p:cNvPr id="1" name="">
             <a:extLst xmlns:a="http://schemas.openxmlformats.org/drawingml/2006/main">
               <a:ext uri="{FF2B5EF4-FFF2-40B4-BE49-F238E27FC236}">
-                <a16:creationId xmlns:a16="http://schemas.microsoft.com/office/drawing/2014/main" id="{4D8D7EE9-3109-4454-B87A-FD6D3371CA7C}"/>
+                <a16:creationId xmlns:a16="http://schemas.microsoft.com/office/drawing/2014/main" id="{712E7A0E-4694-4076-9CE6-8441BB10DA93}"/>
               </a:ext>
             </a:extLst>
           </p:cNvPr>
@@ -20019,7 +24535,7 @@
           <p:cNvPr id="2" name="">
             <a:extLst xmlns:a="http://schemas.openxmlformats.org/drawingml/2006/main">
               <a:ext uri="{FF2B5EF4-FFF2-40B4-BE49-F238E27FC236}">
-                <a16:creationId xmlns:a16="http://schemas.microsoft.com/office/drawing/2014/main" id="{F35BB271-B260-437D-84EF-0CA6371E5284}"/>
+                <a16:creationId xmlns:a16="http://schemas.microsoft.com/office/drawing/2014/main" id="{7B324BFE-B4B4-412B-A743-B737D1497363}"/>
               </a:ext>
             </a:extLst>
           </p:cNvPr>
@@ -20069,7 +24585,7 @@
           <p:cNvPr id="3" name="">
             <a:extLst xmlns:a="http://schemas.openxmlformats.org/drawingml/2006/main">
               <a:ext uri="{FF2B5EF4-FFF2-40B4-BE49-F238E27FC236}">
-                <a16:creationId xmlns:a16="http://schemas.microsoft.com/office/drawing/2014/main" id="{5691EBD4-B531-45F5-A19B-7BA7DA0E0D07}"/>
+                <a16:creationId xmlns:a16="http://schemas.microsoft.com/office/drawing/2014/main" id="{707059F2-2638-4124-B7D1-2A0DF9E1FA2A}"/>
               </a:ext>
             </a:extLst>
           </p:cNvPr>
@@ -20104,7 +24620,7 @@
           <p:nvPr/>
         </p:nvPicPr>
         <p:blipFill>
-          <a:blip xmlns:r="http://schemas.openxmlformats.org/officeDocument/2006/relationships" xmlns:a="http://schemas.openxmlformats.org/drawingml/2006/main" r:embed="R2f966c6c499d41ba"/>
+          <a:blip xmlns:r="http://schemas.openxmlformats.org/officeDocument/2006/relationships" xmlns:a="http://schemas.openxmlformats.org/drawingml/2006/main" r:embed="R27cb88a2704546ea"/>
           <a:stretch xmlns:a="http://schemas.openxmlformats.org/drawingml/2006/main"/>
         </p:blipFill>
         <p:spPr>
@@ -20122,7 +24638,7 @@
           <p:cNvPr id="5" name="">
             <a:extLst xmlns:a="http://schemas.openxmlformats.org/drawingml/2006/main">
               <a:ext uri="{FF2B5EF4-FFF2-40B4-BE49-F238E27FC236}">
-                <a16:creationId xmlns:a16="http://schemas.microsoft.com/office/drawing/2014/main" id="{2EAD0516-4E87-4A46-8FE6-8493A56BFFA7}"/>
+                <a16:creationId xmlns:a16="http://schemas.microsoft.com/office/drawing/2014/main" id="{47477263-6F30-418C-83FE-42ACE9F0EBC7}"/>
               </a:ext>
             </a:extLst>
           </p:cNvPr>
@@ -20172,7 +24688,7 @@
           <p:cNvPr id="6" name="">
             <a:extLst xmlns:a="http://schemas.openxmlformats.org/drawingml/2006/main">
               <a:ext uri="{FF2B5EF4-FFF2-40B4-BE49-F238E27FC236}">
-                <a16:creationId xmlns:a16="http://schemas.microsoft.com/office/drawing/2014/main" id="{B1F104F6-D8FD-45C3-8E44-3B525B62468C}"/>
+                <a16:creationId xmlns:a16="http://schemas.microsoft.com/office/drawing/2014/main" id="{162EDD20-1B29-4173-A706-DA7712CC921A}"/>
               </a:ext>
             </a:extLst>
           </p:cNvPr>
@@ -20220,7 +24736,7 @@
     </p:spTree>
     <p:extLst>
       <p:ext uri="{BB962C8B-B14F-4D97-AF65-F5344CB8AC3E}">
-        <p14:creationId xmlns:p14="http://schemas.microsoft.com/office/powerpoint/2010/main" val="588773555"/>
+        <p14:creationId xmlns:p14="http://schemas.microsoft.com/office/powerpoint/2010/main" val="1665068041"/>
       </p:ext>
     </p:extLst>
   </p:cSld>

--- a/presentations/gen5_4_ml_decision_engine_incremental_build.pptx
+++ b/presentations/gen5_4_ml_decision_engine_incremental_build.pptx
@@ -2,56 +2,63 @@
 <file path=ppt/presentation.xml><?xml version="1.0" encoding="utf-8"?>
 <p:presentation xmlns:p="http://schemas.openxmlformats.org/presentationml/2006/main">
   <p:sldMasterIdLst>
-    <p:sldMasterId xmlns:r="http://schemas.openxmlformats.org/officeDocument/2006/relationships" id="2147483648" r:id="R443dcc0c345241a4"/>
+    <p:sldMasterId xmlns:r="http://schemas.openxmlformats.org/officeDocument/2006/relationships" id="2147483648" r:id="R3f684466c9e840aa"/>
   </p:sldMasterIdLst>
   <p:notesMasterIdLst>
-    <p:notesMasterId xmlns:r="http://schemas.openxmlformats.org/officeDocument/2006/relationships" r:id="Rfde275abc67e4d89"/>
+    <p:notesMasterId xmlns:r="http://schemas.openxmlformats.org/officeDocument/2006/relationships" r:id="R52db4ce83235481e"/>
   </p:notesMasterIdLst>
   <p:sldIdLst>
-    <p:sldId xmlns:r="http://schemas.openxmlformats.org/officeDocument/2006/relationships" id="256" r:id="R64a38ed675714420"/>
-    <p:sldId xmlns:r="http://schemas.openxmlformats.org/officeDocument/2006/relationships" id="257" r:id="R675702bc30cd4039"/>
-    <p:sldId xmlns:r="http://schemas.openxmlformats.org/officeDocument/2006/relationships" id="258" r:id="R788dc1b288064664"/>
-    <p:sldId xmlns:r="http://schemas.openxmlformats.org/officeDocument/2006/relationships" id="259" r:id="R0e07a9d766464a1d"/>
-    <p:sldId xmlns:r="http://schemas.openxmlformats.org/officeDocument/2006/relationships" id="260" r:id="Rbc8703aa569343ec"/>
-    <p:sldId xmlns:r="http://schemas.openxmlformats.org/officeDocument/2006/relationships" id="261" r:id="Rb42c4f9b7bcb4937"/>
-    <p:sldId xmlns:r="http://schemas.openxmlformats.org/officeDocument/2006/relationships" id="262" r:id="R901b1e31d25c4f18"/>
-    <p:sldId xmlns:r="http://schemas.openxmlformats.org/officeDocument/2006/relationships" id="263" r:id="Re1877f0dd7db428e"/>
-    <p:sldId xmlns:r="http://schemas.openxmlformats.org/officeDocument/2006/relationships" id="264" r:id="R9f4297e667fb4ce2"/>
-    <p:sldId xmlns:r="http://schemas.openxmlformats.org/officeDocument/2006/relationships" id="265" r:id="Rcc0fe815ecc84433"/>
-    <p:sldId xmlns:r="http://schemas.openxmlformats.org/officeDocument/2006/relationships" id="266" r:id="R63ad9ff167c74c39"/>
-    <p:sldId xmlns:r="http://schemas.openxmlformats.org/officeDocument/2006/relationships" id="267" r:id="R159fd8c424fa43e3"/>
-    <p:sldId xmlns:r="http://schemas.openxmlformats.org/officeDocument/2006/relationships" id="268" r:id="Rce6d5ec291864570"/>
-    <p:sldId xmlns:r="http://schemas.openxmlformats.org/officeDocument/2006/relationships" id="269" r:id="R5c26d005a1de4417"/>
-    <p:sldId xmlns:r="http://schemas.openxmlformats.org/officeDocument/2006/relationships" id="270" r:id="R82477d271c044734"/>
-    <p:sldId xmlns:r="http://schemas.openxmlformats.org/officeDocument/2006/relationships" id="271" r:id="Rce837acc3dd04d91"/>
-    <p:sldId xmlns:r="http://schemas.openxmlformats.org/officeDocument/2006/relationships" id="272" r:id="Rf00dd17409ab4959"/>
-    <p:sldId xmlns:r="http://schemas.openxmlformats.org/officeDocument/2006/relationships" id="273" r:id="Re02bd74632ff4d1b"/>
-    <p:sldId xmlns:r="http://schemas.openxmlformats.org/officeDocument/2006/relationships" id="274" r:id="R95004e40d7724361"/>
-    <p:sldId xmlns:r="http://schemas.openxmlformats.org/officeDocument/2006/relationships" id="275" r:id="R0b1466f026e040f0"/>
-    <p:sldId xmlns:r="http://schemas.openxmlformats.org/officeDocument/2006/relationships" id="276" r:id="Rb5c7e246093144e9"/>
-    <p:sldId xmlns:r="http://schemas.openxmlformats.org/officeDocument/2006/relationships" id="277" r:id="Rfc545e58026f401b"/>
-    <p:sldId xmlns:r="http://schemas.openxmlformats.org/officeDocument/2006/relationships" id="278" r:id="R12f5c9c6b4954c92"/>
-    <p:sldId xmlns:r="http://schemas.openxmlformats.org/officeDocument/2006/relationships" id="279" r:id="R6162882222324e7d"/>
-    <p:sldId xmlns:r="http://schemas.openxmlformats.org/officeDocument/2006/relationships" id="280" r:id="R248c0d48cc674b39"/>
-    <p:sldId xmlns:r="http://schemas.openxmlformats.org/officeDocument/2006/relationships" id="281" r:id="R4e1501ce73854f89"/>
-    <p:sldId xmlns:r="http://schemas.openxmlformats.org/officeDocument/2006/relationships" id="282" r:id="R0535968445d541b0"/>
-    <p:sldId xmlns:r="http://schemas.openxmlformats.org/officeDocument/2006/relationships" id="283" r:id="R7794c148a7c649c5"/>
-    <p:sldId xmlns:r="http://schemas.openxmlformats.org/officeDocument/2006/relationships" id="284" r:id="Rde2c4d71a7e84178"/>
-    <p:sldId xmlns:r="http://schemas.openxmlformats.org/officeDocument/2006/relationships" id="285" r:id="R8446dd441d044368"/>
-    <p:sldId xmlns:r="http://schemas.openxmlformats.org/officeDocument/2006/relationships" id="286" r:id="Rb72ba76a63274710"/>
-    <p:sldId xmlns:r="http://schemas.openxmlformats.org/officeDocument/2006/relationships" id="287" r:id="R30100c22da574a76"/>
-    <p:sldId xmlns:r="http://schemas.openxmlformats.org/officeDocument/2006/relationships" id="288" r:id="R7004667cbbb244f8"/>
-    <p:sldId xmlns:r="http://schemas.openxmlformats.org/officeDocument/2006/relationships" id="289" r:id="R68d0912afc6e4b36"/>
-    <p:sldId xmlns:r="http://schemas.openxmlformats.org/officeDocument/2006/relationships" id="290" r:id="R006a3341df9b430d"/>
-    <p:sldId xmlns:r="http://schemas.openxmlformats.org/officeDocument/2006/relationships" id="291" r:id="Rff71fc6a0a8545b9"/>
-    <p:sldId xmlns:r="http://schemas.openxmlformats.org/officeDocument/2006/relationships" id="292" r:id="R3880b4137dd04faa"/>
-    <p:sldId xmlns:r="http://schemas.openxmlformats.org/officeDocument/2006/relationships" id="293" r:id="Re06023b75bfd4d8d"/>
-    <p:sldId xmlns:r="http://schemas.openxmlformats.org/officeDocument/2006/relationships" id="294" r:id="Rcd79e3b609954b10"/>
-    <p:sldId xmlns:r="http://schemas.openxmlformats.org/officeDocument/2006/relationships" id="295" r:id="Re91fa553743d4d58"/>
-    <p:sldId xmlns:r="http://schemas.openxmlformats.org/officeDocument/2006/relationships" id="296" r:id="R9f166efd9e954523"/>
-    <p:sldId xmlns:r="http://schemas.openxmlformats.org/officeDocument/2006/relationships" id="297" r:id="Re88e180b2a444743"/>
-    <p:sldId xmlns:r="http://schemas.openxmlformats.org/officeDocument/2006/relationships" id="298" r:id="R028b8277ea85485f"/>
-    <p:sldId xmlns:r="http://schemas.openxmlformats.org/officeDocument/2006/relationships" id="299" r:id="R0dc849b3a2944eb2"/>
+    <p:sldId xmlns:r="http://schemas.openxmlformats.org/officeDocument/2006/relationships" id="256" r:id="R94d91f2e97fe47bf"/>
+    <p:sldId xmlns:r="http://schemas.openxmlformats.org/officeDocument/2006/relationships" id="257" r:id="Ra1ae0c47b7154608"/>
+    <p:sldId xmlns:r="http://schemas.openxmlformats.org/officeDocument/2006/relationships" id="258" r:id="R1cc5f711f4734a93"/>
+    <p:sldId xmlns:r="http://schemas.openxmlformats.org/officeDocument/2006/relationships" id="259" r:id="R6b43c550d0e04a7c"/>
+    <p:sldId xmlns:r="http://schemas.openxmlformats.org/officeDocument/2006/relationships" id="260" r:id="Raec188caf01449f8"/>
+    <p:sldId xmlns:r="http://schemas.openxmlformats.org/officeDocument/2006/relationships" id="261" r:id="Re6a015fba0d74549"/>
+    <p:sldId xmlns:r="http://schemas.openxmlformats.org/officeDocument/2006/relationships" id="262" r:id="R39913c7e4f5e46de"/>
+    <p:sldId xmlns:r="http://schemas.openxmlformats.org/officeDocument/2006/relationships" id="263" r:id="R75dd6cca027d4b6d"/>
+    <p:sldId xmlns:r="http://schemas.openxmlformats.org/officeDocument/2006/relationships" id="264" r:id="R9201f71b1d674a65"/>
+    <p:sldId xmlns:r="http://schemas.openxmlformats.org/officeDocument/2006/relationships" id="265" r:id="Ra32856bb2d1140fa"/>
+    <p:sldId xmlns:r="http://schemas.openxmlformats.org/officeDocument/2006/relationships" id="266" r:id="Ra21fed5597a44b8c"/>
+    <p:sldId xmlns:r="http://schemas.openxmlformats.org/officeDocument/2006/relationships" id="267" r:id="Rbc8acae96cf947ca"/>
+    <p:sldId xmlns:r="http://schemas.openxmlformats.org/officeDocument/2006/relationships" id="268" r:id="R96ec5f7e83de4615"/>
+    <p:sldId xmlns:r="http://schemas.openxmlformats.org/officeDocument/2006/relationships" id="269" r:id="R7229dfeced1747d9"/>
+    <p:sldId xmlns:r="http://schemas.openxmlformats.org/officeDocument/2006/relationships" id="270" r:id="Reaf774c6fb8e41af"/>
+    <p:sldId xmlns:r="http://schemas.openxmlformats.org/officeDocument/2006/relationships" id="271" r:id="Rf45a32e722644895"/>
+    <p:sldId xmlns:r="http://schemas.openxmlformats.org/officeDocument/2006/relationships" id="272" r:id="R090f9d2f451d494a"/>
+    <p:sldId xmlns:r="http://schemas.openxmlformats.org/officeDocument/2006/relationships" id="273" r:id="Rf6fef13860b943df"/>
+    <p:sldId xmlns:r="http://schemas.openxmlformats.org/officeDocument/2006/relationships" id="274" r:id="R7af29b6bccd5471b"/>
+    <p:sldId xmlns:r="http://schemas.openxmlformats.org/officeDocument/2006/relationships" id="275" r:id="R9a46c45ed74b423b"/>
+    <p:sldId xmlns:r="http://schemas.openxmlformats.org/officeDocument/2006/relationships" id="276" r:id="R3ff93f4e7d2b44aa"/>
+    <p:sldId xmlns:r="http://schemas.openxmlformats.org/officeDocument/2006/relationships" id="277" r:id="Rc1c5fc61aec74cce"/>
+    <p:sldId xmlns:r="http://schemas.openxmlformats.org/officeDocument/2006/relationships" id="278" r:id="R44a84de1316246b5"/>
+    <p:sldId xmlns:r="http://schemas.openxmlformats.org/officeDocument/2006/relationships" id="279" r:id="Rd344651f9ed4461a"/>
+    <p:sldId xmlns:r="http://schemas.openxmlformats.org/officeDocument/2006/relationships" id="280" r:id="R7b62ac24610f477b"/>
+    <p:sldId xmlns:r="http://schemas.openxmlformats.org/officeDocument/2006/relationships" id="281" r:id="R5ed11e64bbf94c58"/>
+    <p:sldId xmlns:r="http://schemas.openxmlformats.org/officeDocument/2006/relationships" id="282" r:id="Rde21a90d34af4c6e"/>
+    <p:sldId xmlns:r="http://schemas.openxmlformats.org/officeDocument/2006/relationships" id="283" r:id="Rea828b55391b4d4d"/>
+    <p:sldId xmlns:r="http://schemas.openxmlformats.org/officeDocument/2006/relationships" id="284" r:id="Rd801122eba0f4f43"/>
+    <p:sldId xmlns:r="http://schemas.openxmlformats.org/officeDocument/2006/relationships" id="285" r:id="Rc13b61a82e904a3f"/>
+    <p:sldId xmlns:r="http://schemas.openxmlformats.org/officeDocument/2006/relationships" id="286" r:id="Rb081869922e941b5"/>
+    <p:sldId xmlns:r="http://schemas.openxmlformats.org/officeDocument/2006/relationships" id="287" r:id="Rf328b9e1f7564e40"/>
+    <p:sldId xmlns:r="http://schemas.openxmlformats.org/officeDocument/2006/relationships" id="288" r:id="R74389726932f4b74"/>
+    <p:sldId xmlns:r="http://schemas.openxmlformats.org/officeDocument/2006/relationships" id="289" r:id="R5bb0f5ba44854f1b"/>
+    <p:sldId xmlns:r="http://schemas.openxmlformats.org/officeDocument/2006/relationships" id="290" r:id="R65734b4347b84da7"/>
+    <p:sldId xmlns:r="http://schemas.openxmlformats.org/officeDocument/2006/relationships" id="291" r:id="R717cc95563664d21"/>
+    <p:sldId xmlns:r="http://schemas.openxmlformats.org/officeDocument/2006/relationships" id="292" r:id="R188e52f5dc4e4a1f"/>
+    <p:sldId xmlns:r="http://schemas.openxmlformats.org/officeDocument/2006/relationships" id="293" r:id="R58be17a119cb491e"/>
+    <p:sldId xmlns:r="http://schemas.openxmlformats.org/officeDocument/2006/relationships" id="294" r:id="Rf9e602428fcf4e86"/>
+    <p:sldId xmlns:r="http://schemas.openxmlformats.org/officeDocument/2006/relationships" id="295" r:id="R14af1a7c291e4c3c"/>
+    <p:sldId xmlns:r="http://schemas.openxmlformats.org/officeDocument/2006/relationships" id="296" r:id="Rb4ac169bc91c4549"/>
+    <p:sldId xmlns:r="http://schemas.openxmlformats.org/officeDocument/2006/relationships" id="297" r:id="Rf3afa1b27ce049bd"/>
+    <p:sldId xmlns:r="http://schemas.openxmlformats.org/officeDocument/2006/relationships" id="298" r:id="R09cd7e17d69c4f69"/>
+    <p:sldId xmlns:r="http://schemas.openxmlformats.org/officeDocument/2006/relationships" id="299" r:id="Rfa9f942021d84720"/>
+    <p:sldId xmlns:r="http://schemas.openxmlformats.org/officeDocument/2006/relationships" id="300" r:id="R79ad6ee8a8d64252"/>
+    <p:sldId xmlns:r="http://schemas.openxmlformats.org/officeDocument/2006/relationships" id="301" r:id="R591167883be44158"/>
+    <p:sldId xmlns:r="http://schemas.openxmlformats.org/officeDocument/2006/relationships" id="302" r:id="R9a0a39b991cf4cff"/>
+    <p:sldId xmlns:r="http://schemas.openxmlformats.org/officeDocument/2006/relationships" id="303" r:id="Re432580fba8c496f"/>
+    <p:sldId xmlns:r="http://schemas.openxmlformats.org/officeDocument/2006/relationships" id="304" r:id="R235849ce18aa4f56"/>
+    <p:sldId xmlns:r="http://schemas.openxmlformats.org/officeDocument/2006/relationships" id="305" r:id="Rf5f6fae617194543"/>
+    <p:sldId xmlns:r="http://schemas.openxmlformats.org/officeDocument/2006/relationships" id="306" r:id="Rf1463e18cb704f40"/>
   </p:sldIdLst>
   <p:sldSz cx="12192000" cy="6858000"/>
   <p:notesSz cx="6858000" cy="9144000"/>
@@ -3114,7 +3121,469 @@
 </p:notes>
 </file>
 
+<file path=ppt/notesSlides/notesSlide45.xml><?xml version="1.0" encoding="utf-8"?>
+<p:notes xmlns:p="http://schemas.openxmlformats.org/presentationml/2006/main">
+  <p:cSld>
+    <p:spTree>
+      <p:nvGrpSpPr>
+        <p:cNvPr id="1" name=""/>
+        <p:cNvGrpSpPr/>
+        <p:nvPr/>
+      </p:nvGrpSpPr>
+      <p:grpSpPr>
+        <a:xfrm xmlns:a="http://schemas.openxmlformats.org/drawingml/2006/main"/>
+      </p:grpSpPr>
+      <p:sp>
+        <p:nvSpPr>
+          <p:cNvPr id="2" name="Slide Image Placeholder 1"/>
+          <p:cNvSpPr>
+            <a:spLocks xmlns:a="http://schemas.openxmlformats.org/drawingml/2006/main" noGrp="1"/>
+          </p:cNvSpPr>
+          <p:nvPr>
+            <p:ph type="sldImg" idx="0"/>
+          </p:nvPr>
+        </p:nvSpPr>
+        <p:spPr/>
+      </p:sp>
+      <p:sp>
+        <p:nvSpPr>
+          <p:cNvPr id="3" name="Notes Placeholder 2"/>
+          <p:cNvSpPr>
+            <a:spLocks xmlns:a="http://schemas.openxmlformats.org/drawingml/2006/main" noGrp="1"/>
+          </p:cNvSpPr>
+          <p:nvPr>
+            <p:ph type="body" idx="1"/>
+          </p:nvPr>
+        </p:nvSpPr>
+        <p:spPr/>
+        <p:txBody>
+          <a:bodyPr xmlns:a="http://schemas.openxmlformats.org/drawingml/2006/main"/>
+          <a:lstStyle xmlns:a="http://schemas.openxmlformats.org/drawingml/2006/main"/>
+          <a:p xmlns:a="http://schemas.openxmlformats.org/drawingml/2006/main"/>
+        </p:txBody>
+      </p:sp>
+      <p:sp>
+        <p:nvSpPr>
+          <p:cNvPr id="4" name="Slide Number Placeholder 3"/>
+          <p:cNvSpPr>
+            <a:spLocks xmlns:a="http://schemas.openxmlformats.org/drawingml/2006/main" noGrp="1"/>
+          </p:cNvSpPr>
+          <p:nvPr>
+            <p:ph type="sldNum" idx="5"/>
+          </p:nvPr>
+        </p:nvSpPr>
+        <p:spPr/>
+        <p:txBody>
+          <a:bodyPr xmlns:a="http://schemas.openxmlformats.org/drawingml/2006/main"/>
+          <a:lstStyle xmlns:a="http://schemas.openxmlformats.org/drawingml/2006/main"/>
+          <a:p xmlns:a="http://schemas.openxmlformats.org/drawingml/2006/main"/>
+        </p:txBody>
+      </p:sp>
+    </p:spTree>
+  </p:cSld>
+  <p:clrMapOvr>
+    <a:masterClrMapping xmlns:a="http://schemas.openxmlformats.org/drawingml/2006/main"/>
+  </p:clrMapOvr>
+</p:notes>
+</file>
+
+<file path=ppt/notesSlides/notesSlide46.xml><?xml version="1.0" encoding="utf-8"?>
+<p:notes xmlns:p="http://schemas.openxmlformats.org/presentationml/2006/main">
+  <p:cSld>
+    <p:spTree>
+      <p:nvGrpSpPr>
+        <p:cNvPr id="1" name=""/>
+        <p:cNvGrpSpPr/>
+        <p:nvPr/>
+      </p:nvGrpSpPr>
+      <p:grpSpPr>
+        <a:xfrm xmlns:a="http://schemas.openxmlformats.org/drawingml/2006/main"/>
+      </p:grpSpPr>
+      <p:sp>
+        <p:nvSpPr>
+          <p:cNvPr id="2" name="Slide Image Placeholder 1"/>
+          <p:cNvSpPr>
+            <a:spLocks xmlns:a="http://schemas.openxmlformats.org/drawingml/2006/main" noGrp="1"/>
+          </p:cNvSpPr>
+          <p:nvPr>
+            <p:ph type="sldImg" idx="0"/>
+          </p:nvPr>
+        </p:nvSpPr>
+        <p:spPr/>
+      </p:sp>
+      <p:sp>
+        <p:nvSpPr>
+          <p:cNvPr id="3" name="Notes Placeholder 2"/>
+          <p:cNvSpPr>
+            <a:spLocks xmlns:a="http://schemas.openxmlformats.org/drawingml/2006/main" noGrp="1"/>
+          </p:cNvSpPr>
+          <p:nvPr>
+            <p:ph type="body" idx="1"/>
+          </p:nvPr>
+        </p:nvSpPr>
+        <p:spPr/>
+        <p:txBody>
+          <a:bodyPr xmlns:a="http://schemas.openxmlformats.org/drawingml/2006/main"/>
+          <a:lstStyle xmlns:a="http://schemas.openxmlformats.org/drawingml/2006/main"/>
+          <a:p xmlns:a="http://schemas.openxmlformats.org/drawingml/2006/main"/>
+        </p:txBody>
+      </p:sp>
+      <p:sp>
+        <p:nvSpPr>
+          <p:cNvPr id="4" name="Slide Number Placeholder 3"/>
+          <p:cNvSpPr>
+            <a:spLocks xmlns:a="http://schemas.openxmlformats.org/drawingml/2006/main" noGrp="1"/>
+          </p:cNvSpPr>
+          <p:nvPr>
+            <p:ph type="sldNum" idx="5"/>
+          </p:nvPr>
+        </p:nvSpPr>
+        <p:spPr/>
+        <p:txBody>
+          <a:bodyPr xmlns:a="http://schemas.openxmlformats.org/drawingml/2006/main"/>
+          <a:lstStyle xmlns:a="http://schemas.openxmlformats.org/drawingml/2006/main"/>
+          <a:p xmlns:a="http://schemas.openxmlformats.org/drawingml/2006/main"/>
+        </p:txBody>
+      </p:sp>
+    </p:spTree>
+  </p:cSld>
+  <p:clrMapOvr>
+    <a:masterClrMapping xmlns:a="http://schemas.openxmlformats.org/drawingml/2006/main"/>
+  </p:clrMapOvr>
+</p:notes>
+</file>
+
+<file path=ppt/notesSlides/notesSlide47.xml><?xml version="1.0" encoding="utf-8"?>
+<p:notes xmlns:p="http://schemas.openxmlformats.org/presentationml/2006/main">
+  <p:cSld>
+    <p:spTree>
+      <p:nvGrpSpPr>
+        <p:cNvPr id="1" name=""/>
+        <p:cNvGrpSpPr/>
+        <p:nvPr/>
+      </p:nvGrpSpPr>
+      <p:grpSpPr>
+        <a:xfrm xmlns:a="http://schemas.openxmlformats.org/drawingml/2006/main"/>
+      </p:grpSpPr>
+      <p:sp>
+        <p:nvSpPr>
+          <p:cNvPr id="2" name="Slide Image Placeholder 1"/>
+          <p:cNvSpPr>
+            <a:spLocks xmlns:a="http://schemas.openxmlformats.org/drawingml/2006/main" noGrp="1"/>
+          </p:cNvSpPr>
+          <p:nvPr>
+            <p:ph type="sldImg" idx="0"/>
+          </p:nvPr>
+        </p:nvSpPr>
+        <p:spPr/>
+      </p:sp>
+      <p:sp>
+        <p:nvSpPr>
+          <p:cNvPr id="3" name="Notes Placeholder 2"/>
+          <p:cNvSpPr>
+            <a:spLocks xmlns:a="http://schemas.openxmlformats.org/drawingml/2006/main" noGrp="1"/>
+          </p:cNvSpPr>
+          <p:nvPr>
+            <p:ph type="body" idx="1"/>
+          </p:nvPr>
+        </p:nvSpPr>
+        <p:spPr/>
+        <p:txBody>
+          <a:bodyPr xmlns:a="http://schemas.openxmlformats.org/drawingml/2006/main"/>
+          <a:lstStyle xmlns:a="http://schemas.openxmlformats.org/drawingml/2006/main"/>
+          <a:p xmlns:a="http://schemas.openxmlformats.org/drawingml/2006/main"/>
+        </p:txBody>
+      </p:sp>
+      <p:sp>
+        <p:nvSpPr>
+          <p:cNvPr id="4" name="Slide Number Placeholder 3"/>
+          <p:cNvSpPr>
+            <a:spLocks xmlns:a="http://schemas.openxmlformats.org/drawingml/2006/main" noGrp="1"/>
+          </p:cNvSpPr>
+          <p:nvPr>
+            <p:ph type="sldNum" idx="5"/>
+          </p:nvPr>
+        </p:nvSpPr>
+        <p:spPr/>
+        <p:txBody>
+          <a:bodyPr xmlns:a="http://schemas.openxmlformats.org/drawingml/2006/main"/>
+          <a:lstStyle xmlns:a="http://schemas.openxmlformats.org/drawingml/2006/main"/>
+          <a:p xmlns:a="http://schemas.openxmlformats.org/drawingml/2006/main"/>
+        </p:txBody>
+      </p:sp>
+    </p:spTree>
+  </p:cSld>
+  <p:clrMapOvr>
+    <a:masterClrMapping xmlns:a="http://schemas.openxmlformats.org/drawingml/2006/main"/>
+  </p:clrMapOvr>
+</p:notes>
+</file>
+
+<file path=ppt/notesSlides/notesSlide48.xml><?xml version="1.0" encoding="utf-8"?>
+<p:notes xmlns:p="http://schemas.openxmlformats.org/presentationml/2006/main">
+  <p:cSld>
+    <p:spTree>
+      <p:nvGrpSpPr>
+        <p:cNvPr id="1" name=""/>
+        <p:cNvGrpSpPr/>
+        <p:nvPr/>
+      </p:nvGrpSpPr>
+      <p:grpSpPr>
+        <a:xfrm xmlns:a="http://schemas.openxmlformats.org/drawingml/2006/main"/>
+      </p:grpSpPr>
+      <p:sp>
+        <p:nvSpPr>
+          <p:cNvPr id="2" name="Slide Image Placeholder 1"/>
+          <p:cNvSpPr>
+            <a:spLocks xmlns:a="http://schemas.openxmlformats.org/drawingml/2006/main" noGrp="1"/>
+          </p:cNvSpPr>
+          <p:nvPr>
+            <p:ph type="sldImg" idx="0"/>
+          </p:nvPr>
+        </p:nvSpPr>
+        <p:spPr/>
+      </p:sp>
+      <p:sp>
+        <p:nvSpPr>
+          <p:cNvPr id="3" name="Notes Placeholder 2"/>
+          <p:cNvSpPr>
+            <a:spLocks xmlns:a="http://schemas.openxmlformats.org/drawingml/2006/main" noGrp="1"/>
+          </p:cNvSpPr>
+          <p:nvPr>
+            <p:ph type="body" idx="1"/>
+          </p:nvPr>
+        </p:nvSpPr>
+        <p:spPr/>
+        <p:txBody>
+          <a:bodyPr xmlns:a="http://schemas.openxmlformats.org/drawingml/2006/main"/>
+          <a:lstStyle xmlns:a="http://schemas.openxmlformats.org/drawingml/2006/main"/>
+          <a:p xmlns:a="http://schemas.openxmlformats.org/drawingml/2006/main"/>
+        </p:txBody>
+      </p:sp>
+      <p:sp>
+        <p:nvSpPr>
+          <p:cNvPr id="4" name="Slide Number Placeholder 3"/>
+          <p:cNvSpPr>
+            <a:spLocks xmlns:a="http://schemas.openxmlformats.org/drawingml/2006/main" noGrp="1"/>
+          </p:cNvSpPr>
+          <p:nvPr>
+            <p:ph type="sldNum" idx="5"/>
+          </p:nvPr>
+        </p:nvSpPr>
+        <p:spPr/>
+        <p:txBody>
+          <a:bodyPr xmlns:a="http://schemas.openxmlformats.org/drawingml/2006/main"/>
+          <a:lstStyle xmlns:a="http://schemas.openxmlformats.org/drawingml/2006/main"/>
+          <a:p xmlns:a="http://schemas.openxmlformats.org/drawingml/2006/main"/>
+        </p:txBody>
+      </p:sp>
+    </p:spTree>
+  </p:cSld>
+  <p:clrMapOvr>
+    <a:masterClrMapping xmlns:a="http://schemas.openxmlformats.org/drawingml/2006/main"/>
+  </p:clrMapOvr>
+</p:notes>
+</file>
+
+<file path=ppt/notesSlides/notesSlide49.xml><?xml version="1.0" encoding="utf-8"?>
+<p:notes xmlns:p="http://schemas.openxmlformats.org/presentationml/2006/main">
+  <p:cSld>
+    <p:spTree>
+      <p:nvGrpSpPr>
+        <p:cNvPr id="1" name=""/>
+        <p:cNvGrpSpPr/>
+        <p:nvPr/>
+      </p:nvGrpSpPr>
+      <p:grpSpPr>
+        <a:xfrm xmlns:a="http://schemas.openxmlformats.org/drawingml/2006/main"/>
+      </p:grpSpPr>
+      <p:sp>
+        <p:nvSpPr>
+          <p:cNvPr id="2" name="Slide Image Placeholder 1"/>
+          <p:cNvSpPr>
+            <a:spLocks xmlns:a="http://schemas.openxmlformats.org/drawingml/2006/main" noGrp="1"/>
+          </p:cNvSpPr>
+          <p:nvPr>
+            <p:ph type="sldImg" idx="0"/>
+          </p:nvPr>
+        </p:nvSpPr>
+        <p:spPr/>
+      </p:sp>
+      <p:sp>
+        <p:nvSpPr>
+          <p:cNvPr id="3" name="Notes Placeholder 2"/>
+          <p:cNvSpPr>
+            <a:spLocks xmlns:a="http://schemas.openxmlformats.org/drawingml/2006/main" noGrp="1"/>
+          </p:cNvSpPr>
+          <p:nvPr>
+            <p:ph type="body" idx="1"/>
+          </p:nvPr>
+        </p:nvSpPr>
+        <p:spPr/>
+        <p:txBody>
+          <a:bodyPr xmlns:a="http://schemas.openxmlformats.org/drawingml/2006/main"/>
+          <a:lstStyle xmlns:a="http://schemas.openxmlformats.org/drawingml/2006/main"/>
+          <a:p xmlns:a="http://schemas.openxmlformats.org/drawingml/2006/main"/>
+        </p:txBody>
+      </p:sp>
+      <p:sp>
+        <p:nvSpPr>
+          <p:cNvPr id="4" name="Slide Number Placeholder 3"/>
+          <p:cNvSpPr>
+            <a:spLocks xmlns:a="http://schemas.openxmlformats.org/drawingml/2006/main" noGrp="1"/>
+          </p:cNvSpPr>
+          <p:nvPr>
+            <p:ph type="sldNum" idx="5"/>
+          </p:nvPr>
+        </p:nvSpPr>
+        <p:spPr/>
+        <p:txBody>
+          <a:bodyPr xmlns:a="http://schemas.openxmlformats.org/drawingml/2006/main"/>
+          <a:lstStyle xmlns:a="http://schemas.openxmlformats.org/drawingml/2006/main"/>
+          <a:p xmlns:a="http://schemas.openxmlformats.org/drawingml/2006/main"/>
+        </p:txBody>
+      </p:sp>
+    </p:spTree>
+  </p:cSld>
+  <p:clrMapOvr>
+    <a:masterClrMapping xmlns:a="http://schemas.openxmlformats.org/drawingml/2006/main"/>
+  </p:clrMapOvr>
+</p:notes>
+</file>
+
 <file path=ppt/notesSlides/notesSlide5.xml><?xml version="1.0" encoding="utf-8"?>
+<p:notes xmlns:p="http://schemas.openxmlformats.org/presentationml/2006/main">
+  <p:cSld>
+    <p:spTree>
+      <p:nvGrpSpPr>
+        <p:cNvPr id="1" name=""/>
+        <p:cNvGrpSpPr/>
+        <p:nvPr/>
+      </p:nvGrpSpPr>
+      <p:grpSpPr>
+        <a:xfrm xmlns:a="http://schemas.openxmlformats.org/drawingml/2006/main"/>
+      </p:grpSpPr>
+      <p:sp>
+        <p:nvSpPr>
+          <p:cNvPr id="2" name="Slide Image Placeholder 1"/>
+          <p:cNvSpPr>
+            <a:spLocks xmlns:a="http://schemas.openxmlformats.org/drawingml/2006/main" noGrp="1"/>
+          </p:cNvSpPr>
+          <p:nvPr>
+            <p:ph type="sldImg" idx="0"/>
+          </p:nvPr>
+        </p:nvSpPr>
+        <p:spPr/>
+      </p:sp>
+      <p:sp>
+        <p:nvSpPr>
+          <p:cNvPr id="3" name="Notes Placeholder 2"/>
+          <p:cNvSpPr>
+            <a:spLocks xmlns:a="http://schemas.openxmlformats.org/drawingml/2006/main" noGrp="1"/>
+          </p:cNvSpPr>
+          <p:nvPr>
+            <p:ph type="body" idx="1"/>
+          </p:nvPr>
+        </p:nvSpPr>
+        <p:spPr/>
+        <p:txBody>
+          <a:bodyPr xmlns:a="http://schemas.openxmlformats.org/drawingml/2006/main"/>
+          <a:lstStyle xmlns:a="http://schemas.openxmlformats.org/drawingml/2006/main"/>
+          <a:p xmlns:a="http://schemas.openxmlformats.org/drawingml/2006/main"/>
+        </p:txBody>
+      </p:sp>
+      <p:sp>
+        <p:nvSpPr>
+          <p:cNvPr id="4" name="Slide Number Placeholder 3"/>
+          <p:cNvSpPr>
+            <a:spLocks xmlns:a="http://schemas.openxmlformats.org/drawingml/2006/main" noGrp="1"/>
+          </p:cNvSpPr>
+          <p:nvPr>
+            <p:ph type="sldNum" idx="5"/>
+          </p:nvPr>
+        </p:nvSpPr>
+        <p:spPr/>
+        <p:txBody>
+          <a:bodyPr xmlns:a="http://schemas.openxmlformats.org/drawingml/2006/main"/>
+          <a:lstStyle xmlns:a="http://schemas.openxmlformats.org/drawingml/2006/main"/>
+          <a:p xmlns:a="http://schemas.openxmlformats.org/drawingml/2006/main"/>
+        </p:txBody>
+      </p:sp>
+    </p:spTree>
+  </p:cSld>
+  <p:clrMapOvr>
+    <a:masterClrMapping xmlns:a="http://schemas.openxmlformats.org/drawingml/2006/main"/>
+  </p:clrMapOvr>
+</p:notes>
+</file>
+
+<file path=ppt/notesSlides/notesSlide50.xml><?xml version="1.0" encoding="utf-8"?>
+<p:notes xmlns:p="http://schemas.openxmlformats.org/presentationml/2006/main">
+  <p:cSld>
+    <p:spTree>
+      <p:nvGrpSpPr>
+        <p:cNvPr id="1" name=""/>
+        <p:cNvGrpSpPr/>
+        <p:nvPr/>
+      </p:nvGrpSpPr>
+      <p:grpSpPr>
+        <a:xfrm xmlns:a="http://schemas.openxmlformats.org/drawingml/2006/main"/>
+      </p:grpSpPr>
+      <p:sp>
+        <p:nvSpPr>
+          <p:cNvPr id="2" name="Slide Image Placeholder 1"/>
+          <p:cNvSpPr>
+            <a:spLocks xmlns:a="http://schemas.openxmlformats.org/drawingml/2006/main" noGrp="1"/>
+          </p:cNvSpPr>
+          <p:nvPr>
+            <p:ph type="sldImg" idx="0"/>
+          </p:nvPr>
+        </p:nvSpPr>
+        <p:spPr/>
+      </p:sp>
+      <p:sp>
+        <p:nvSpPr>
+          <p:cNvPr id="3" name="Notes Placeholder 2"/>
+          <p:cNvSpPr>
+            <a:spLocks xmlns:a="http://schemas.openxmlformats.org/drawingml/2006/main" noGrp="1"/>
+          </p:cNvSpPr>
+          <p:nvPr>
+            <p:ph type="body" idx="1"/>
+          </p:nvPr>
+        </p:nvSpPr>
+        <p:spPr/>
+        <p:txBody>
+          <a:bodyPr xmlns:a="http://schemas.openxmlformats.org/drawingml/2006/main"/>
+          <a:lstStyle xmlns:a="http://schemas.openxmlformats.org/drawingml/2006/main"/>
+          <a:p xmlns:a="http://schemas.openxmlformats.org/drawingml/2006/main"/>
+        </p:txBody>
+      </p:sp>
+      <p:sp>
+        <p:nvSpPr>
+          <p:cNvPr id="4" name="Slide Number Placeholder 3"/>
+          <p:cNvSpPr>
+            <a:spLocks xmlns:a="http://schemas.openxmlformats.org/drawingml/2006/main" noGrp="1"/>
+          </p:cNvSpPr>
+          <p:nvPr>
+            <p:ph type="sldNum" idx="5"/>
+          </p:nvPr>
+        </p:nvSpPr>
+        <p:spPr/>
+        <p:txBody>
+          <a:bodyPr xmlns:a="http://schemas.openxmlformats.org/drawingml/2006/main"/>
+          <a:lstStyle xmlns:a="http://schemas.openxmlformats.org/drawingml/2006/main"/>
+          <a:p xmlns:a="http://schemas.openxmlformats.org/drawingml/2006/main"/>
+        </p:txBody>
+      </p:sp>
+    </p:spTree>
+  </p:cSld>
+  <p:clrMapOvr>
+    <a:masterClrMapping xmlns:a="http://schemas.openxmlformats.org/drawingml/2006/main"/>
+  </p:clrMapOvr>
+</p:notes>
+</file>
+
+<file path=ppt/notesSlides/notesSlide51.xml><?xml version="1.0" encoding="utf-8"?>
 <p:notes xmlns:p="http://schemas.openxmlformats.org/presentationml/2006/main">
   <p:cSld>
     <p:spTree>
@@ -3482,7 +3951,7 @@
   </p:cSld>
   <p:clrMap bg1="lt1" tx1="dk1" bg2="lt2" tx2="dk2" accent1="accent1" accent2="accent2" accent3="accent3" accent4="accent4" accent5="accent5" accent6="accent6" hlink="hlink" folHlink="folHlink"/>
   <p:sldLayoutIdLst>
-    <p:sldLayoutId xmlns:r="http://schemas.openxmlformats.org/officeDocument/2006/relationships" id="2147483649" r:id="Red171e3dfeaf4fcb"/>
+    <p:sldLayoutId xmlns:r="http://schemas.openxmlformats.org/officeDocument/2006/relationships" id="2147483649" r:id="R0e83c9bdbed44839"/>
   </p:sldLayoutIdLst>
   <p:txStyles>
     <p:titleStyle>
@@ -4033,7 +4502,7 @@
           <p:cNvPr id="1" name="">
             <a:extLst xmlns:a="http://schemas.openxmlformats.org/drawingml/2006/main">
               <a:ext uri="{FF2B5EF4-FFF2-40B4-BE49-F238E27FC236}">
-                <a16:creationId xmlns:a16="http://schemas.microsoft.com/office/drawing/2014/main" id="{04B637EE-310A-442C-BADF-B3B76B609D98}"/>
+                <a16:creationId xmlns:a16="http://schemas.microsoft.com/office/drawing/2014/main" id="{73BF4C03-BD24-4994-98F1-D5E936A05EC2}"/>
               </a:ext>
             </a:extLst>
           </p:cNvPr>
@@ -4083,7 +4552,7 @@
           <p:cNvPr id="2" name="">
             <a:extLst xmlns:a="http://schemas.openxmlformats.org/drawingml/2006/main">
               <a:ext uri="{FF2B5EF4-FFF2-40B4-BE49-F238E27FC236}">
-                <a16:creationId xmlns:a16="http://schemas.microsoft.com/office/drawing/2014/main" id="{2F94D857-00CD-4FC1-8AE9-346741F6F871}"/>
+                <a16:creationId xmlns:a16="http://schemas.microsoft.com/office/drawing/2014/main" id="{DCF85215-0EE5-4062-AF9F-F85CC5382ECA}"/>
               </a:ext>
             </a:extLst>
           </p:cNvPr>
@@ -4133,7 +4602,7 @@
           <p:cNvPr id="3" name="">
             <a:extLst xmlns:a="http://schemas.openxmlformats.org/drawingml/2006/main">
               <a:ext uri="{FF2B5EF4-FFF2-40B4-BE49-F238E27FC236}">
-                <a16:creationId xmlns:a16="http://schemas.microsoft.com/office/drawing/2014/main" id="{9BE73AFC-6F6A-4F69-8467-350896CABF93}"/>
+                <a16:creationId xmlns:a16="http://schemas.microsoft.com/office/drawing/2014/main" id="{FF2CE7B3-0B6F-4CA1-B511-83C5723AD3A1}"/>
               </a:ext>
             </a:extLst>
           </p:cNvPr>
@@ -4183,7 +4652,7 @@
           <p:cNvPr id="4" name="">
             <a:extLst xmlns:a="http://schemas.openxmlformats.org/drawingml/2006/main">
               <a:ext uri="{FF2B5EF4-FFF2-40B4-BE49-F238E27FC236}">
-                <a16:creationId xmlns:a16="http://schemas.microsoft.com/office/drawing/2014/main" id="{187BEE30-ABF3-4BF9-AF32-FF75D87FD4C0}"/>
+                <a16:creationId xmlns:a16="http://schemas.microsoft.com/office/drawing/2014/main" id="{EB3F880F-8928-48EF-B63B-24809325D7B7}"/>
               </a:ext>
             </a:extLst>
           </p:cNvPr>
@@ -4214,7 +4683,7 @@
           <p:cNvPr id="5" name="">
             <a:extLst xmlns:a="http://schemas.openxmlformats.org/drawingml/2006/main">
               <a:ext uri="{FF2B5EF4-FFF2-40B4-BE49-F238E27FC236}">
-                <a16:creationId xmlns:a16="http://schemas.microsoft.com/office/drawing/2014/main" id="{3089E26E-8709-4BCA-8815-BA37DC30AEAF}"/>
+                <a16:creationId xmlns:a16="http://schemas.microsoft.com/office/drawing/2014/main" id="{067F2538-0C4B-4CD5-BE5A-01F40E401478}"/>
               </a:ext>
             </a:extLst>
           </p:cNvPr>
@@ -4264,7 +4733,7 @@
           <p:cNvPr id="6" name="">
             <a:extLst xmlns:a="http://schemas.openxmlformats.org/drawingml/2006/main">
               <a:ext uri="{FF2B5EF4-FFF2-40B4-BE49-F238E27FC236}">
-                <a16:creationId xmlns:a16="http://schemas.microsoft.com/office/drawing/2014/main" id="{4AAAA12B-8611-41BB-A551-C9C9DCAE05A2}"/>
+                <a16:creationId xmlns:a16="http://schemas.microsoft.com/office/drawing/2014/main" id="{99D6148D-8CF6-42E7-BC5E-7E943F6DF214}"/>
               </a:ext>
             </a:extLst>
           </p:cNvPr>
@@ -4295,7 +4764,7 @@
           <p:cNvPr id="7" name="">
             <a:extLst xmlns:a="http://schemas.openxmlformats.org/drawingml/2006/main">
               <a:ext uri="{FF2B5EF4-FFF2-40B4-BE49-F238E27FC236}">
-                <a16:creationId xmlns:a16="http://schemas.microsoft.com/office/drawing/2014/main" id="{7502375E-225F-48E1-B7F2-F80CBB780FCC}"/>
+                <a16:creationId xmlns:a16="http://schemas.microsoft.com/office/drawing/2014/main" id="{31C6792C-95FD-4A00-8AFB-C57AC3FF6A74}"/>
               </a:ext>
             </a:extLst>
           </p:cNvPr>
@@ -4345,7 +4814,7 @@
           <p:cNvPr id="8" name="">
             <a:extLst xmlns:a="http://schemas.openxmlformats.org/drawingml/2006/main">
               <a:ext uri="{FF2B5EF4-FFF2-40B4-BE49-F238E27FC236}">
-                <a16:creationId xmlns:a16="http://schemas.microsoft.com/office/drawing/2014/main" id="{E2A53B15-8844-45EE-B046-18963F2C7332}"/>
+                <a16:creationId xmlns:a16="http://schemas.microsoft.com/office/drawing/2014/main" id="{0EB8172D-454A-4429-BD4D-AB0D85910879}"/>
               </a:ext>
             </a:extLst>
           </p:cNvPr>
@@ -4427,7 +4896,7 @@
     </p:spTree>
     <p:extLst>
       <p:ext uri="{BB962C8B-B14F-4D97-AF65-F5344CB8AC3E}">
-        <p14:creationId xmlns:p14="http://schemas.microsoft.com/office/powerpoint/2010/main" val="1762214506"/>
+        <p14:creationId xmlns:p14="http://schemas.microsoft.com/office/powerpoint/2010/main" val="781756819"/>
       </p:ext>
     </p:extLst>
   </p:cSld>
@@ -4458,7 +4927,7 @@
           <p:cNvPr id="1" name="">
             <a:extLst xmlns:a="http://schemas.openxmlformats.org/drawingml/2006/main">
               <a:ext uri="{FF2B5EF4-FFF2-40B4-BE49-F238E27FC236}">
-                <a16:creationId xmlns:a16="http://schemas.microsoft.com/office/drawing/2014/main" id="{3AF821DE-EE5B-4F60-85CC-90DF22F78F56}"/>
+                <a16:creationId xmlns:a16="http://schemas.microsoft.com/office/drawing/2014/main" id="{D6389B64-87DC-42B0-8E94-BD4EA7731CD4}"/>
               </a:ext>
             </a:extLst>
           </p:cNvPr>
@@ -4508,7 +4977,7 @@
           <p:cNvPr id="2" name="">
             <a:extLst xmlns:a="http://schemas.openxmlformats.org/drawingml/2006/main">
               <a:ext uri="{FF2B5EF4-FFF2-40B4-BE49-F238E27FC236}">
-                <a16:creationId xmlns:a16="http://schemas.microsoft.com/office/drawing/2014/main" id="{64A29F68-E7B3-465F-9E39-B5ED433ED32C}"/>
+                <a16:creationId xmlns:a16="http://schemas.microsoft.com/office/drawing/2014/main" id="{FFF3FC38-8E52-4600-8128-890A438B5FF8}"/>
               </a:ext>
             </a:extLst>
           </p:cNvPr>
@@ -4558,7 +5027,7 @@
           <p:cNvPr id="3" name="">
             <a:extLst xmlns:a="http://schemas.openxmlformats.org/drawingml/2006/main">
               <a:ext uri="{FF2B5EF4-FFF2-40B4-BE49-F238E27FC236}">
-                <a16:creationId xmlns:a16="http://schemas.microsoft.com/office/drawing/2014/main" id="{BC627824-B600-4478-9E3F-A47023F4E131}"/>
+                <a16:creationId xmlns:a16="http://schemas.microsoft.com/office/drawing/2014/main" id="{9D45F357-2009-43C3-ACF5-E157B18A12B5}"/>
               </a:ext>
             </a:extLst>
           </p:cNvPr>
@@ -4589,7 +5058,7 @@
           <p:cNvPr id="4" name="">
             <a:extLst xmlns:a="http://schemas.openxmlformats.org/drawingml/2006/main">
               <a:ext uri="{FF2B5EF4-FFF2-40B4-BE49-F238E27FC236}">
-                <a16:creationId xmlns:a16="http://schemas.microsoft.com/office/drawing/2014/main" id="{1341A6A3-C67F-44C2-A13D-4D9F08B7AB56}"/>
+                <a16:creationId xmlns:a16="http://schemas.microsoft.com/office/drawing/2014/main" id="{19CFFBF8-C23A-4113-8A9C-C8B97908D14F}"/>
               </a:ext>
             </a:extLst>
           </p:cNvPr>
@@ -4639,7 +5108,7 @@
           <p:cNvPr id="5" name="">
             <a:extLst xmlns:a="http://schemas.openxmlformats.org/drawingml/2006/main">
               <a:ext uri="{FF2B5EF4-FFF2-40B4-BE49-F238E27FC236}">
-                <a16:creationId xmlns:a16="http://schemas.microsoft.com/office/drawing/2014/main" id="{73EE753E-E7B4-4A54-BD64-A03E260761F6}"/>
+                <a16:creationId xmlns:a16="http://schemas.microsoft.com/office/drawing/2014/main" id="{42C0002A-D51B-46CD-B2F8-ADD982E2731A}"/>
               </a:ext>
             </a:extLst>
           </p:cNvPr>
@@ -4689,7 +5158,7 @@
           <p:cNvPr id="6" name="">
             <a:extLst xmlns:a="http://schemas.openxmlformats.org/drawingml/2006/main">
               <a:ext uri="{FF2B5EF4-FFF2-40B4-BE49-F238E27FC236}">
-                <a16:creationId xmlns:a16="http://schemas.microsoft.com/office/drawing/2014/main" id="{0F311408-5AB4-41C3-94F7-AC1C22344F05}"/>
+                <a16:creationId xmlns:a16="http://schemas.microsoft.com/office/drawing/2014/main" id="{215701BC-6050-4709-8C3E-DCD8071814AB}"/>
               </a:ext>
             </a:extLst>
           </p:cNvPr>
@@ -4739,7 +5208,7 @@
           <p:cNvPr id="7" name="">
             <a:extLst xmlns:a="http://schemas.openxmlformats.org/drawingml/2006/main">
               <a:ext uri="{FF2B5EF4-FFF2-40B4-BE49-F238E27FC236}">
-                <a16:creationId xmlns:a16="http://schemas.microsoft.com/office/drawing/2014/main" id="{26DF8060-391F-45F5-B426-322E15F0FC11}"/>
+                <a16:creationId xmlns:a16="http://schemas.microsoft.com/office/drawing/2014/main" id="{833E4770-E6AF-429E-9A9F-8520B7010F40}"/>
               </a:ext>
             </a:extLst>
           </p:cNvPr>
@@ -4789,7 +5258,7 @@
           <p:cNvPr id="8" name="">
             <a:extLst xmlns:a="http://schemas.openxmlformats.org/drawingml/2006/main">
               <a:ext uri="{FF2B5EF4-FFF2-40B4-BE49-F238E27FC236}">
-                <a16:creationId xmlns:a16="http://schemas.microsoft.com/office/drawing/2014/main" id="{47130E93-D0FB-4963-B796-A7F64F3E8E54}"/>
+                <a16:creationId xmlns:a16="http://schemas.microsoft.com/office/drawing/2014/main" id="{6F122BC7-7883-4144-93F9-AE26FB0FB739}"/>
               </a:ext>
             </a:extLst>
           </p:cNvPr>
@@ -4839,7 +5308,7 @@
           <p:cNvPr id="9" name="">
             <a:extLst xmlns:a="http://schemas.openxmlformats.org/drawingml/2006/main">
               <a:ext uri="{FF2B5EF4-FFF2-40B4-BE49-F238E27FC236}">
-                <a16:creationId xmlns:a16="http://schemas.microsoft.com/office/drawing/2014/main" id="{0B2213A7-C5A1-4791-A9B8-4C4BCB44E4BA}"/>
+                <a16:creationId xmlns:a16="http://schemas.microsoft.com/office/drawing/2014/main" id="{9589DF8F-ED49-4039-99E2-F5793D8DBCD3}"/>
               </a:ext>
             </a:extLst>
           </p:cNvPr>
@@ -4889,7 +5358,7 @@
           <p:cNvPr id="10" name="">
             <a:extLst xmlns:a="http://schemas.openxmlformats.org/drawingml/2006/main">
               <a:ext uri="{FF2B5EF4-FFF2-40B4-BE49-F238E27FC236}">
-                <a16:creationId xmlns:a16="http://schemas.microsoft.com/office/drawing/2014/main" id="{064CE93F-953F-433F-ACCA-41B03022F4C1}"/>
+                <a16:creationId xmlns:a16="http://schemas.microsoft.com/office/drawing/2014/main" id="{00CB41C7-1DD0-4C32-B744-7FF6CF5547D2}"/>
               </a:ext>
             </a:extLst>
           </p:cNvPr>
@@ -4939,7 +5408,7 @@
           <p:cNvPr id="11" name="">
             <a:extLst xmlns:a="http://schemas.openxmlformats.org/drawingml/2006/main">
               <a:ext uri="{FF2B5EF4-FFF2-40B4-BE49-F238E27FC236}">
-                <a16:creationId xmlns:a16="http://schemas.microsoft.com/office/drawing/2014/main" id="{6FC4FBE6-A8FC-4267-8D18-60F25D7312A4}"/>
+                <a16:creationId xmlns:a16="http://schemas.microsoft.com/office/drawing/2014/main" id="{C5B33BC2-FF6F-4962-9341-A31A466FB091}"/>
               </a:ext>
             </a:extLst>
           </p:cNvPr>
@@ -4989,7 +5458,7 @@
           <p:cNvPr id="12" name="">
             <a:extLst xmlns:a="http://schemas.openxmlformats.org/drawingml/2006/main">
               <a:ext uri="{FF2B5EF4-FFF2-40B4-BE49-F238E27FC236}">
-                <a16:creationId xmlns:a16="http://schemas.microsoft.com/office/drawing/2014/main" id="{B6B8696D-AD3B-4F7F-98C8-BA2A72BE1343}"/>
+                <a16:creationId xmlns:a16="http://schemas.microsoft.com/office/drawing/2014/main" id="{AB227A32-22BB-4348-B7A5-7BBE03F510FD}"/>
               </a:ext>
             </a:extLst>
           </p:cNvPr>
@@ -5039,7 +5508,7 @@
           <p:cNvPr id="13" name="">
             <a:extLst xmlns:a="http://schemas.openxmlformats.org/drawingml/2006/main">
               <a:ext uri="{FF2B5EF4-FFF2-40B4-BE49-F238E27FC236}">
-                <a16:creationId xmlns:a16="http://schemas.microsoft.com/office/drawing/2014/main" id="{88CC64C6-884F-4B65-B758-2488675CDD81}"/>
+                <a16:creationId xmlns:a16="http://schemas.microsoft.com/office/drawing/2014/main" id="{99430C4B-EA71-45FE-B340-4FD97AE0F192}"/>
               </a:ext>
             </a:extLst>
           </p:cNvPr>
@@ -5072,7 +5541,7 @@
           <p:cNvPr id="14" name="">
             <a:extLst xmlns:a="http://schemas.openxmlformats.org/drawingml/2006/main">
               <a:ext uri="{FF2B5EF4-FFF2-40B4-BE49-F238E27FC236}">
-                <a16:creationId xmlns:a16="http://schemas.microsoft.com/office/drawing/2014/main" id="{0EAB80C4-CD71-417E-937A-B0324F66FDE7}"/>
+                <a16:creationId xmlns:a16="http://schemas.microsoft.com/office/drawing/2014/main" id="{585E83BE-1607-45F4-A69F-E8947CCB753B}"/>
               </a:ext>
             </a:extLst>
           </p:cNvPr>
@@ -5122,7 +5591,7 @@
           <p:cNvPr id="15" name="">
             <a:extLst xmlns:a="http://schemas.openxmlformats.org/drawingml/2006/main">
               <a:ext uri="{FF2B5EF4-FFF2-40B4-BE49-F238E27FC236}">
-                <a16:creationId xmlns:a16="http://schemas.microsoft.com/office/drawing/2014/main" id="{471D9A0E-2AEA-4711-B3AB-A54563B1A821}"/>
+                <a16:creationId xmlns:a16="http://schemas.microsoft.com/office/drawing/2014/main" id="{A70840A2-F7FE-4673-A070-122072C40616}"/>
               </a:ext>
             </a:extLst>
           </p:cNvPr>
@@ -5170,7 +5639,7 @@
     </p:spTree>
     <p:extLst>
       <p:ext uri="{BB962C8B-B14F-4D97-AF65-F5344CB8AC3E}">
-        <p14:creationId xmlns:p14="http://schemas.microsoft.com/office/powerpoint/2010/main" val="662999225"/>
+        <p14:creationId xmlns:p14="http://schemas.microsoft.com/office/powerpoint/2010/main" val="873616243"/>
       </p:ext>
     </p:extLst>
   </p:cSld>
@@ -5201,7 +5670,7 @@
           <p:cNvPr id="1" name="">
             <a:extLst xmlns:a="http://schemas.openxmlformats.org/drawingml/2006/main">
               <a:ext uri="{FF2B5EF4-FFF2-40B4-BE49-F238E27FC236}">
-                <a16:creationId xmlns:a16="http://schemas.microsoft.com/office/drawing/2014/main" id="{3C629728-B132-470D-AA6D-DDA1AAFD63E3}"/>
+                <a16:creationId xmlns:a16="http://schemas.microsoft.com/office/drawing/2014/main" id="{1010AD27-E036-42BF-B989-B8D569759E9F}"/>
               </a:ext>
             </a:extLst>
           </p:cNvPr>
@@ -5251,7 +5720,7 @@
           <p:cNvPr id="2" name="">
             <a:extLst xmlns:a="http://schemas.openxmlformats.org/drawingml/2006/main">
               <a:ext uri="{FF2B5EF4-FFF2-40B4-BE49-F238E27FC236}">
-                <a16:creationId xmlns:a16="http://schemas.microsoft.com/office/drawing/2014/main" id="{3DB10655-50CC-453E-8CB8-5B14D0429367}"/>
+                <a16:creationId xmlns:a16="http://schemas.microsoft.com/office/drawing/2014/main" id="{6B690CF1-4D1B-4DD5-9F01-8E2791BC8F17}"/>
               </a:ext>
             </a:extLst>
           </p:cNvPr>
@@ -5301,7 +5770,7 @@
           <p:cNvPr id="3" name="">
             <a:extLst xmlns:a="http://schemas.openxmlformats.org/drawingml/2006/main">
               <a:ext uri="{FF2B5EF4-FFF2-40B4-BE49-F238E27FC236}">
-                <a16:creationId xmlns:a16="http://schemas.microsoft.com/office/drawing/2014/main" id="{0F4B74D1-8BA8-404A-B98F-7E936C954A8B}"/>
+                <a16:creationId xmlns:a16="http://schemas.microsoft.com/office/drawing/2014/main" id="{0F4BED90-F5A4-49D5-A41B-3A23358AC5AA}"/>
               </a:ext>
             </a:extLst>
           </p:cNvPr>
@@ -5332,7 +5801,7 @@
           <p:cNvPr id="4" name="">
             <a:extLst xmlns:a="http://schemas.openxmlformats.org/drawingml/2006/main">
               <a:ext uri="{FF2B5EF4-FFF2-40B4-BE49-F238E27FC236}">
-                <a16:creationId xmlns:a16="http://schemas.microsoft.com/office/drawing/2014/main" id="{E04ED98B-908E-4FAE-8495-91560452D16C}"/>
+                <a16:creationId xmlns:a16="http://schemas.microsoft.com/office/drawing/2014/main" id="{A0919E19-1226-4C13-AE76-58EF40BAFA75}"/>
               </a:ext>
             </a:extLst>
           </p:cNvPr>
@@ -5382,7 +5851,7 @@
           <p:cNvPr id="5" name="">
             <a:extLst xmlns:a="http://schemas.openxmlformats.org/drawingml/2006/main">
               <a:ext uri="{FF2B5EF4-FFF2-40B4-BE49-F238E27FC236}">
-                <a16:creationId xmlns:a16="http://schemas.microsoft.com/office/drawing/2014/main" id="{35097D09-E45A-4E11-B7E0-EA8B73A4833D}"/>
+                <a16:creationId xmlns:a16="http://schemas.microsoft.com/office/drawing/2014/main" id="{A8573F9C-1FD2-4C24-9B91-E9BC620E69FD}"/>
               </a:ext>
             </a:extLst>
           </p:cNvPr>
@@ -5413,7 +5882,7 @@
           <p:cNvPr id="6" name="">
             <a:extLst xmlns:a="http://schemas.openxmlformats.org/drawingml/2006/main">
               <a:ext uri="{FF2B5EF4-FFF2-40B4-BE49-F238E27FC236}">
-                <a16:creationId xmlns:a16="http://schemas.microsoft.com/office/drawing/2014/main" id="{9588D3DF-DFD4-43F4-821D-3657164182DF}"/>
+                <a16:creationId xmlns:a16="http://schemas.microsoft.com/office/drawing/2014/main" id="{363025DE-399D-4EC8-AD78-235E7390DA6E}"/>
               </a:ext>
             </a:extLst>
           </p:cNvPr>
@@ -5463,7 +5932,7 @@
           <p:cNvPr id="7" name="">
             <a:extLst xmlns:a="http://schemas.openxmlformats.org/drawingml/2006/main">
               <a:ext uri="{FF2B5EF4-FFF2-40B4-BE49-F238E27FC236}">
-                <a16:creationId xmlns:a16="http://schemas.microsoft.com/office/drawing/2014/main" id="{5D1C9277-E78E-45E7-A7B6-CC8E91C14C1E}"/>
+                <a16:creationId xmlns:a16="http://schemas.microsoft.com/office/drawing/2014/main" id="{3DB273C0-70EF-419D-BA57-1CDAE9507401}"/>
               </a:ext>
             </a:extLst>
           </p:cNvPr>
@@ -5511,7 +5980,7 @@
     </p:spTree>
     <p:extLst>
       <p:ext uri="{BB962C8B-B14F-4D97-AF65-F5344CB8AC3E}">
-        <p14:creationId xmlns:p14="http://schemas.microsoft.com/office/powerpoint/2010/main" val="58722446"/>
+        <p14:creationId xmlns:p14="http://schemas.microsoft.com/office/powerpoint/2010/main" val="10687849"/>
       </p:ext>
     </p:extLst>
   </p:cSld>
@@ -5542,7 +6011,7 @@
           <p:cNvPr id="1" name="">
             <a:extLst xmlns:a="http://schemas.openxmlformats.org/drawingml/2006/main">
               <a:ext uri="{FF2B5EF4-FFF2-40B4-BE49-F238E27FC236}">
-                <a16:creationId xmlns:a16="http://schemas.microsoft.com/office/drawing/2014/main" id="{76622E53-573D-4DCB-AF2A-B93A88820A3D}"/>
+                <a16:creationId xmlns:a16="http://schemas.microsoft.com/office/drawing/2014/main" id="{606CF90D-0196-40D1-AEBC-6BCF604F5D1F}"/>
               </a:ext>
             </a:extLst>
           </p:cNvPr>
@@ -5592,7 +6061,7 @@
           <p:cNvPr id="2" name="">
             <a:extLst xmlns:a="http://schemas.openxmlformats.org/drawingml/2006/main">
               <a:ext uri="{FF2B5EF4-FFF2-40B4-BE49-F238E27FC236}">
-                <a16:creationId xmlns:a16="http://schemas.microsoft.com/office/drawing/2014/main" id="{82F8DA99-913F-453E-A6A1-46B4F5AC4FDB}"/>
+                <a16:creationId xmlns:a16="http://schemas.microsoft.com/office/drawing/2014/main" id="{EEC67A6C-0B16-4FB3-B1D8-8A4E378854D6}"/>
               </a:ext>
             </a:extLst>
           </p:cNvPr>
@@ -5642,7 +6111,7 @@
           <p:cNvPr id="3" name="">
             <a:extLst xmlns:a="http://schemas.openxmlformats.org/drawingml/2006/main">
               <a:ext uri="{FF2B5EF4-FFF2-40B4-BE49-F238E27FC236}">
-                <a16:creationId xmlns:a16="http://schemas.microsoft.com/office/drawing/2014/main" id="{A7D9B78D-EFC4-4C03-8386-1F283B0BC2EC}"/>
+                <a16:creationId xmlns:a16="http://schemas.microsoft.com/office/drawing/2014/main" id="{B091BABD-A7D8-44CC-9B33-BAE19B9530B6}"/>
               </a:ext>
             </a:extLst>
           </p:cNvPr>
@@ -5673,7 +6142,7 @@
           <p:cNvPr id="4" name="">
             <a:extLst xmlns:a="http://schemas.openxmlformats.org/drawingml/2006/main">
               <a:ext uri="{FF2B5EF4-FFF2-40B4-BE49-F238E27FC236}">
-                <a16:creationId xmlns:a16="http://schemas.microsoft.com/office/drawing/2014/main" id="{5C616020-84E9-4957-8B34-5131520BB6E3}"/>
+                <a16:creationId xmlns:a16="http://schemas.microsoft.com/office/drawing/2014/main" id="{C89DCF98-B076-42F8-9100-5BDA86C14502}"/>
               </a:ext>
             </a:extLst>
           </p:cNvPr>
@@ -5706,7 +6175,7 @@
           <p:cNvPr id="5" name="">
             <a:extLst xmlns:a="http://schemas.openxmlformats.org/drawingml/2006/main">
               <a:ext uri="{FF2B5EF4-FFF2-40B4-BE49-F238E27FC236}">
-                <a16:creationId xmlns:a16="http://schemas.microsoft.com/office/drawing/2014/main" id="{F2BF0E76-F4C9-4526-A1C7-1B2D04386098}"/>
+                <a16:creationId xmlns:a16="http://schemas.microsoft.com/office/drawing/2014/main" id="{7A55D2C9-4E54-4D4F-B6F0-52AC6BF732B9}"/>
               </a:ext>
             </a:extLst>
           </p:cNvPr>
@@ -5756,7 +6225,7 @@
           <p:cNvPr id="6" name="">
             <a:extLst xmlns:a="http://schemas.openxmlformats.org/drawingml/2006/main">
               <a:ext uri="{FF2B5EF4-FFF2-40B4-BE49-F238E27FC236}">
-                <a16:creationId xmlns:a16="http://schemas.microsoft.com/office/drawing/2014/main" id="{F411CD99-51DA-4BB8-AD2C-1F077DC6DED6}"/>
+                <a16:creationId xmlns:a16="http://schemas.microsoft.com/office/drawing/2014/main" id="{2006D831-7759-4E0D-80C2-FC3B1717B478}"/>
               </a:ext>
             </a:extLst>
           </p:cNvPr>
@@ -5806,7 +6275,7 @@
           <p:cNvPr id="7" name="">
             <a:extLst xmlns:a="http://schemas.openxmlformats.org/drawingml/2006/main">
               <a:ext uri="{FF2B5EF4-FFF2-40B4-BE49-F238E27FC236}">
-                <a16:creationId xmlns:a16="http://schemas.microsoft.com/office/drawing/2014/main" id="{42068B35-7F74-48F5-8D60-6C574ADED053}"/>
+                <a16:creationId xmlns:a16="http://schemas.microsoft.com/office/drawing/2014/main" id="{0B5D3573-5BD1-4720-89AC-FF9DC0266F5E}"/>
               </a:ext>
             </a:extLst>
           </p:cNvPr>
@@ -5856,7 +6325,7 @@
           <p:cNvPr id="8" name="">
             <a:extLst xmlns:a="http://schemas.openxmlformats.org/drawingml/2006/main">
               <a:ext uri="{FF2B5EF4-FFF2-40B4-BE49-F238E27FC236}">
-                <a16:creationId xmlns:a16="http://schemas.microsoft.com/office/drawing/2014/main" id="{899765F0-2D8C-4DEF-BFAD-010F4ED5A90A}"/>
+                <a16:creationId xmlns:a16="http://schemas.microsoft.com/office/drawing/2014/main" id="{8EE05457-F50B-4361-8B8D-D1AE4E00D11C}"/>
               </a:ext>
             </a:extLst>
           </p:cNvPr>
@@ -5889,7 +6358,7 @@
           <p:cNvPr id="9" name="">
             <a:extLst xmlns:a="http://schemas.openxmlformats.org/drawingml/2006/main">
               <a:ext uri="{FF2B5EF4-FFF2-40B4-BE49-F238E27FC236}">
-                <a16:creationId xmlns:a16="http://schemas.microsoft.com/office/drawing/2014/main" id="{D96DFC72-BE3C-45F2-92E6-036D0D14896F}"/>
+                <a16:creationId xmlns:a16="http://schemas.microsoft.com/office/drawing/2014/main" id="{8E17B78B-AEE1-4E0C-A426-1E334B392A48}"/>
               </a:ext>
             </a:extLst>
           </p:cNvPr>
@@ -5939,7 +6408,7 @@
           <p:cNvPr id="10" name="">
             <a:extLst xmlns:a="http://schemas.openxmlformats.org/drawingml/2006/main">
               <a:ext uri="{FF2B5EF4-FFF2-40B4-BE49-F238E27FC236}">
-                <a16:creationId xmlns:a16="http://schemas.microsoft.com/office/drawing/2014/main" id="{45F366B5-6EAA-4BCD-8C8D-36F43241D999}"/>
+                <a16:creationId xmlns:a16="http://schemas.microsoft.com/office/drawing/2014/main" id="{7D105D80-08D3-4593-B8F2-7E784E2D966C}"/>
               </a:ext>
             </a:extLst>
           </p:cNvPr>
@@ -5989,7 +6458,7 @@
           <p:cNvPr id="11" name="">
             <a:extLst xmlns:a="http://schemas.openxmlformats.org/drawingml/2006/main">
               <a:ext uri="{FF2B5EF4-FFF2-40B4-BE49-F238E27FC236}">
-                <a16:creationId xmlns:a16="http://schemas.microsoft.com/office/drawing/2014/main" id="{EF9583A2-E0BF-4FA0-9F1D-C112FC3E22ED}"/>
+                <a16:creationId xmlns:a16="http://schemas.microsoft.com/office/drawing/2014/main" id="{7145F2E5-788D-4EFC-8F4C-BD7DE47615E3}"/>
               </a:ext>
             </a:extLst>
           </p:cNvPr>
@@ -6039,7 +6508,7 @@
           <p:cNvPr id="12" name="">
             <a:extLst xmlns:a="http://schemas.openxmlformats.org/drawingml/2006/main">
               <a:ext uri="{FF2B5EF4-FFF2-40B4-BE49-F238E27FC236}">
-                <a16:creationId xmlns:a16="http://schemas.microsoft.com/office/drawing/2014/main" id="{2343CCB5-D9C2-48A1-9978-88AAB60AEBAA}"/>
+                <a16:creationId xmlns:a16="http://schemas.microsoft.com/office/drawing/2014/main" id="{653BD306-5E79-41B4-97B1-0DE4D940D2EE}"/>
               </a:ext>
             </a:extLst>
           </p:cNvPr>
@@ -6072,7 +6541,7 @@
           <p:cNvPr id="13" name="">
             <a:extLst xmlns:a="http://schemas.openxmlformats.org/drawingml/2006/main">
               <a:ext uri="{FF2B5EF4-FFF2-40B4-BE49-F238E27FC236}">
-                <a16:creationId xmlns:a16="http://schemas.microsoft.com/office/drawing/2014/main" id="{4AD4083E-2259-432A-8B06-0B6A2E233A95}"/>
+                <a16:creationId xmlns:a16="http://schemas.microsoft.com/office/drawing/2014/main" id="{9F8A48B9-931D-4E40-A4DE-0A128EED9F62}"/>
               </a:ext>
             </a:extLst>
           </p:cNvPr>
@@ -6122,7 +6591,7 @@
           <p:cNvPr id="14" name="">
             <a:extLst xmlns:a="http://schemas.openxmlformats.org/drawingml/2006/main">
               <a:ext uri="{FF2B5EF4-FFF2-40B4-BE49-F238E27FC236}">
-                <a16:creationId xmlns:a16="http://schemas.microsoft.com/office/drawing/2014/main" id="{A8E77677-AF11-484C-B690-A72394F79C2C}"/>
+                <a16:creationId xmlns:a16="http://schemas.microsoft.com/office/drawing/2014/main" id="{86A5C1D0-BC30-455D-B9A4-5D0B2705C2BF}"/>
               </a:ext>
             </a:extLst>
           </p:cNvPr>
@@ -6172,7 +6641,7 @@
           <p:cNvPr id="15" name="">
             <a:extLst xmlns:a="http://schemas.openxmlformats.org/drawingml/2006/main">
               <a:ext uri="{FF2B5EF4-FFF2-40B4-BE49-F238E27FC236}">
-                <a16:creationId xmlns:a16="http://schemas.microsoft.com/office/drawing/2014/main" id="{0728017B-904E-4F80-BB19-D729072CD6DE}"/>
+                <a16:creationId xmlns:a16="http://schemas.microsoft.com/office/drawing/2014/main" id="{3A06339A-4820-45C6-8FAC-8F51BA806D07}"/>
               </a:ext>
             </a:extLst>
           </p:cNvPr>
@@ -6222,7 +6691,7 @@
           <p:cNvPr id="16" name="">
             <a:extLst xmlns:a="http://schemas.openxmlformats.org/drawingml/2006/main">
               <a:ext uri="{FF2B5EF4-FFF2-40B4-BE49-F238E27FC236}">
-                <a16:creationId xmlns:a16="http://schemas.microsoft.com/office/drawing/2014/main" id="{E37B7735-2ABD-4288-B670-4CE7F90A7F34}"/>
+                <a16:creationId xmlns:a16="http://schemas.microsoft.com/office/drawing/2014/main" id="{8A8CA77B-FBC7-495B-BA68-CBF32CDB6133}"/>
               </a:ext>
             </a:extLst>
           </p:cNvPr>
@@ -6255,7 +6724,7 @@
           <p:cNvPr id="17" name="">
             <a:extLst xmlns:a="http://schemas.openxmlformats.org/drawingml/2006/main">
               <a:ext uri="{FF2B5EF4-FFF2-40B4-BE49-F238E27FC236}">
-                <a16:creationId xmlns:a16="http://schemas.microsoft.com/office/drawing/2014/main" id="{A11C02F7-E4A9-45EC-A5B2-741BF93B3649}"/>
+                <a16:creationId xmlns:a16="http://schemas.microsoft.com/office/drawing/2014/main" id="{B27A9CB7-84A9-4520-9ED8-37C284982263}"/>
               </a:ext>
             </a:extLst>
           </p:cNvPr>
@@ -6305,7 +6774,7 @@
           <p:cNvPr id="18" name="">
             <a:extLst xmlns:a="http://schemas.openxmlformats.org/drawingml/2006/main">
               <a:ext uri="{FF2B5EF4-FFF2-40B4-BE49-F238E27FC236}">
-                <a16:creationId xmlns:a16="http://schemas.microsoft.com/office/drawing/2014/main" id="{4B3CC29E-A9AD-42BF-AE9B-625E7C8142DA}"/>
+                <a16:creationId xmlns:a16="http://schemas.microsoft.com/office/drawing/2014/main" id="{EC12F2C7-AA55-4883-B4B1-FB3F707AE53C}"/>
               </a:ext>
             </a:extLst>
           </p:cNvPr>
@@ -6355,7 +6824,7 @@
           <p:cNvPr id="19" name="">
             <a:extLst xmlns:a="http://schemas.openxmlformats.org/drawingml/2006/main">
               <a:ext uri="{FF2B5EF4-FFF2-40B4-BE49-F238E27FC236}">
-                <a16:creationId xmlns:a16="http://schemas.microsoft.com/office/drawing/2014/main" id="{663BC2F7-679B-49EB-957C-087C95AE6AED}"/>
+                <a16:creationId xmlns:a16="http://schemas.microsoft.com/office/drawing/2014/main" id="{5E20D512-D056-4D1C-81A6-6B8B54D7D2AC}"/>
               </a:ext>
             </a:extLst>
           </p:cNvPr>
@@ -6405,7 +6874,7 @@
           <p:cNvPr id="20" name="">
             <a:extLst xmlns:a="http://schemas.openxmlformats.org/drawingml/2006/main">
               <a:ext uri="{FF2B5EF4-FFF2-40B4-BE49-F238E27FC236}">
-                <a16:creationId xmlns:a16="http://schemas.microsoft.com/office/drawing/2014/main" id="{76447F7B-3093-4369-94DA-19224F9D913F}"/>
+                <a16:creationId xmlns:a16="http://schemas.microsoft.com/office/drawing/2014/main" id="{629189A0-F390-43A6-AAE7-88F404D84D85}"/>
               </a:ext>
             </a:extLst>
           </p:cNvPr>
@@ -6453,7 +6922,7 @@
     </p:spTree>
     <p:extLst>
       <p:ext uri="{BB962C8B-B14F-4D97-AF65-F5344CB8AC3E}">
-        <p14:creationId xmlns:p14="http://schemas.microsoft.com/office/powerpoint/2010/main" val="1504317690"/>
+        <p14:creationId xmlns:p14="http://schemas.microsoft.com/office/powerpoint/2010/main" val="1496658906"/>
       </p:ext>
     </p:extLst>
   </p:cSld>
@@ -6484,7 +6953,7 @@
           <p:cNvPr id="1" name="">
             <a:extLst xmlns:a="http://schemas.openxmlformats.org/drawingml/2006/main">
               <a:ext uri="{FF2B5EF4-FFF2-40B4-BE49-F238E27FC236}">
-                <a16:creationId xmlns:a16="http://schemas.microsoft.com/office/drawing/2014/main" id="{5E13CFDE-48B4-4E96-B9CB-9DD6C6825D53}"/>
+                <a16:creationId xmlns:a16="http://schemas.microsoft.com/office/drawing/2014/main" id="{850BE9C2-D48F-46E3-B06F-EF7922C115FB}"/>
               </a:ext>
             </a:extLst>
           </p:cNvPr>
@@ -6534,7 +7003,7 @@
           <p:cNvPr id="2" name="">
             <a:extLst xmlns:a="http://schemas.openxmlformats.org/drawingml/2006/main">
               <a:ext uri="{FF2B5EF4-FFF2-40B4-BE49-F238E27FC236}">
-                <a16:creationId xmlns:a16="http://schemas.microsoft.com/office/drawing/2014/main" id="{B7D52A9A-D6A1-4E06-AC91-0648311B0C63}"/>
+                <a16:creationId xmlns:a16="http://schemas.microsoft.com/office/drawing/2014/main" id="{945C2BFC-D272-44C7-A2B9-13D206070BF3}"/>
               </a:ext>
             </a:extLst>
           </p:cNvPr>
@@ -6584,7 +7053,7 @@
           <p:cNvPr id="3" name="">
             <a:extLst xmlns:a="http://schemas.openxmlformats.org/drawingml/2006/main">
               <a:ext uri="{FF2B5EF4-FFF2-40B4-BE49-F238E27FC236}">
-                <a16:creationId xmlns:a16="http://schemas.microsoft.com/office/drawing/2014/main" id="{B882CA0A-2FB1-4488-A4B1-8D1C452F4931}"/>
+                <a16:creationId xmlns:a16="http://schemas.microsoft.com/office/drawing/2014/main" id="{C07BC903-6DB3-4D3F-8630-82745089B278}"/>
               </a:ext>
             </a:extLst>
           </p:cNvPr>
@@ -6619,7 +7088,7 @@
           <p:nvPr/>
         </p:nvPicPr>
         <p:blipFill>
-          <a:blip xmlns:r="http://schemas.openxmlformats.org/officeDocument/2006/relationships" xmlns:a="http://schemas.openxmlformats.org/drawingml/2006/main" r:embed="Rc795d66439634ea1"/>
+          <a:blip xmlns:r="http://schemas.openxmlformats.org/officeDocument/2006/relationships" xmlns:a="http://schemas.openxmlformats.org/drawingml/2006/main" r:embed="Rae7c1325b57e48e6"/>
           <a:stretch xmlns:a="http://schemas.openxmlformats.org/drawingml/2006/main"/>
         </p:blipFill>
         <p:spPr>
@@ -6637,7 +7106,7 @@
           <p:cNvPr id="5" name="">
             <a:extLst xmlns:a="http://schemas.openxmlformats.org/drawingml/2006/main">
               <a:ext uri="{FF2B5EF4-FFF2-40B4-BE49-F238E27FC236}">
-                <a16:creationId xmlns:a16="http://schemas.microsoft.com/office/drawing/2014/main" id="{5CFF714D-2DFF-4207-9DC2-3F6FC4F773ED}"/>
+                <a16:creationId xmlns:a16="http://schemas.microsoft.com/office/drawing/2014/main" id="{04EA3761-3167-487A-A570-CBB1D1001A03}"/>
               </a:ext>
             </a:extLst>
           </p:cNvPr>
@@ -6687,7 +7156,7 @@
           <p:cNvPr id="6" name="">
             <a:extLst xmlns:a="http://schemas.openxmlformats.org/drawingml/2006/main">
               <a:ext uri="{FF2B5EF4-FFF2-40B4-BE49-F238E27FC236}">
-                <a16:creationId xmlns:a16="http://schemas.microsoft.com/office/drawing/2014/main" id="{FECDFE2F-4995-4868-952F-AE40C5776BC0}"/>
+                <a16:creationId xmlns:a16="http://schemas.microsoft.com/office/drawing/2014/main" id="{FBB48FB9-C562-4FAB-9231-6A9145961190}"/>
               </a:ext>
             </a:extLst>
           </p:cNvPr>
@@ -6735,7 +7204,7 @@
     </p:spTree>
     <p:extLst>
       <p:ext uri="{BB962C8B-B14F-4D97-AF65-F5344CB8AC3E}">
-        <p14:creationId xmlns:p14="http://schemas.microsoft.com/office/powerpoint/2010/main" val="1980704343"/>
+        <p14:creationId xmlns:p14="http://schemas.microsoft.com/office/powerpoint/2010/main" val="1206093628"/>
       </p:ext>
     </p:extLst>
   </p:cSld>
@@ -6766,7 +7235,7 @@
           <p:cNvPr id="1" name="">
             <a:extLst xmlns:a="http://schemas.openxmlformats.org/drawingml/2006/main">
               <a:ext uri="{FF2B5EF4-FFF2-40B4-BE49-F238E27FC236}">
-                <a16:creationId xmlns:a16="http://schemas.microsoft.com/office/drawing/2014/main" id="{ED72F51B-7EEA-43C3-8BED-F61DD66285F4}"/>
+                <a16:creationId xmlns:a16="http://schemas.microsoft.com/office/drawing/2014/main" id="{0D4C2440-2C73-4961-9224-1F5015C0CAAE}"/>
               </a:ext>
             </a:extLst>
           </p:cNvPr>
@@ -6816,7 +7285,7 @@
           <p:cNvPr id="2" name="">
             <a:extLst xmlns:a="http://schemas.openxmlformats.org/drawingml/2006/main">
               <a:ext uri="{FF2B5EF4-FFF2-40B4-BE49-F238E27FC236}">
-                <a16:creationId xmlns:a16="http://schemas.microsoft.com/office/drawing/2014/main" id="{321ED5B3-ED71-4FC4-8B04-68D2EDC92328}"/>
+                <a16:creationId xmlns:a16="http://schemas.microsoft.com/office/drawing/2014/main" id="{0A66C202-AA28-4B62-928F-18C47987D1F6}"/>
               </a:ext>
             </a:extLst>
           </p:cNvPr>
@@ -6866,7 +7335,7 @@
           <p:cNvPr id="3" name="">
             <a:extLst xmlns:a="http://schemas.openxmlformats.org/drawingml/2006/main">
               <a:ext uri="{FF2B5EF4-FFF2-40B4-BE49-F238E27FC236}">
-                <a16:creationId xmlns:a16="http://schemas.microsoft.com/office/drawing/2014/main" id="{B51D9F7F-08F0-4F2A-83F7-5435D2513145}"/>
+                <a16:creationId xmlns:a16="http://schemas.microsoft.com/office/drawing/2014/main" id="{6D3A925E-DDF9-41A3-8412-281D1C6460C7}"/>
               </a:ext>
             </a:extLst>
           </p:cNvPr>
@@ -6901,7 +7370,7 @@
           <p:nvPr/>
         </p:nvPicPr>
         <p:blipFill>
-          <a:blip xmlns:r="http://schemas.openxmlformats.org/officeDocument/2006/relationships" xmlns:a="http://schemas.openxmlformats.org/drawingml/2006/main" r:embed="R1e4d54e9d3964b7e"/>
+          <a:blip xmlns:r="http://schemas.openxmlformats.org/officeDocument/2006/relationships" xmlns:a="http://schemas.openxmlformats.org/drawingml/2006/main" r:embed="R0e0c7e1415544378"/>
           <a:stretch xmlns:a="http://schemas.openxmlformats.org/drawingml/2006/main"/>
         </p:blipFill>
         <p:spPr>
@@ -6919,7 +7388,7 @@
           <p:cNvPr id="5" name="">
             <a:extLst xmlns:a="http://schemas.openxmlformats.org/drawingml/2006/main">
               <a:ext uri="{FF2B5EF4-FFF2-40B4-BE49-F238E27FC236}">
-                <a16:creationId xmlns:a16="http://schemas.microsoft.com/office/drawing/2014/main" id="{435B7621-DAC7-4081-B785-4CFBAD41FBE0}"/>
+                <a16:creationId xmlns:a16="http://schemas.microsoft.com/office/drawing/2014/main" id="{8816F5F6-B55B-4B8E-9EFC-660AC77346EF}"/>
               </a:ext>
             </a:extLst>
           </p:cNvPr>
@@ -6969,7 +7438,7 @@
           <p:cNvPr id="6" name="">
             <a:extLst xmlns:a="http://schemas.openxmlformats.org/drawingml/2006/main">
               <a:ext uri="{FF2B5EF4-FFF2-40B4-BE49-F238E27FC236}">
-                <a16:creationId xmlns:a16="http://schemas.microsoft.com/office/drawing/2014/main" id="{9FB37D3E-CF31-4706-888F-5B6BBDF8A78C}"/>
+                <a16:creationId xmlns:a16="http://schemas.microsoft.com/office/drawing/2014/main" id="{09CE01C1-41AA-4921-B649-2C48663AC5DE}"/>
               </a:ext>
             </a:extLst>
           </p:cNvPr>
@@ -7017,7 +7486,7 @@
     </p:spTree>
     <p:extLst>
       <p:ext uri="{BB962C8B-B14F-4D97-AF65-F5344CB8AC3E}">
-        <p14:creationId xmlns:p14="http://schemas.microsoft.com/office/powerpoint/2010/main" val="222730053"/>
+        <p14:creationId xmlns:p14="http://schemas.microsoft.com/office/powerpoint/2010/main" val="1843842789"/>
       </p:ext>
     </p:extLst>
   </p:cSld>
@@ -7048,7 +7517,7 @@
           <p:cNvPr id="1" name="">
             <a:extLst xmlns:a="http://schemas.openxmlformats.org/drawingml/2006/main">
               <a:ext uri="{FF2B5EF4-FFF2-40B4-BE49-F238E27FC236}">
-                <a16:creationId xmlns:a16="http://schemas.microsoft.com/office/drawing/2014/main" id="{4FEED3E7-AFFA-4E94-B616-E9C09C2E2965}"/>
+                <a16:creationId xmlns:a16="http://schemas.microsoft.com/office/drawing/2014/main" id="{41EA329A-BC63-49D0-8CAE-9F073BAEE502}"/>
               </a:ext>
             </a:extLst>
           </p:cNvPr>
@@ -7098,7 +7567,7 @@
           <p:cNvPr id="2" name="">
             <a:extLst xmlns:a="http://schemas.openxmlformats.org/drawingml/2006/main">
               <a:ext uri="{FF2B5EF4-FFF2-40B4-BE49-F238E27FC236}">
-                <a16:creationId xmlns:a16="http://schemas.microsoft.com/office/drawing/2014/main" id="{BB65618C-967F-472E-A5DE-60E9D9B89800}"/>
+                <a16:creationId xmlns:a16="http://schemas.microsoft.com/office/drawing/2014/main" id="{FAB18ED9-D9D3-4EE9-9344-51FDDD615153}"/>
               </a:ext>
             </a:extLst>
           </p:cNvPr>
@@ -7148,7 +7617,7 @@
           <p:cNvPr id="3" name="">
             <a:extLst xmlns:a="http://schemas.openxmlformats.org/drawingml/2006/main">
               <a:ext uri="{FF2B5EF4-FFF2-40B4-BE49-F238E27FC236}">
-                <a16:creationId xmlns:a16="http://schemas.microsoft.com/office/drawing/2014/main" id="{42867275-D687-430C-AB49-CBB86B7A21A6}"/>
+                <a16:creationId xmlns:a16="http://schemas.microsoft.com/office/drawing/2014/main" id="{E9F11B1D-24CD-4236-A335-60AF61770975}"/>
               </a:ext>
             </a:extLst>
           </p:cNvPr>
@@ -7183,7 +7652,7 @@
           <p:nvPr/>
         </p:nvPicPr>
         <p:blipFill>
-          <a:blip xmlns:r="http://schemas.openxmlformats.org/officeDocument/2006/relationships" xmlns:a="http://schemas.openxmlformats.org/drawingml/2006/main" r:embed="R3cca46e5e38f4451"/>
+          <a:blip xmlns:r="http://schemas.openxmlformats.org/officeDocument/2006/relationships" xmlns:a="http://schemas.openxmlformats.org/drawingml/2006/main" r:embed="Re96412799ef14f7e"/>
           <a:stretch xmlns:a="http://schemas.openxmlformats.org/drawingml/2006/main"/>
         </p:blipFill>
         <p:spPr>
@@ -7205,7 +7674,7 @@
           <p:nvPr/>
         </p:nvPicPr>
         <p:blipFill>
-          <a:blip xmlns:r="http://schemas.openxmlformats.org/officeDocument/2006/relationships" xmlns:a="http://schemas.openxmlformats.org/drawingml/2006/main" r:embed="R6916902710fd42cf"/>
+          <a:blip xmlns:r="http://schemas.openxmlformats.org/officeDocument/2006/relationships" xmlns:a="http://schemas.openxmlformats.org/drawingml/2006/main" r:embed="R1843a3d2b3974738"/>
           <a:stretch xmlns:a="http://schemas.openxmlformats.org/drawingml/2006/main"/>
         </p:blipFill>
         <p:spPr>
@@ -7223,7 +7692,7 @@
           <p:cNvPr id="6" name="">
             <a:extLst xmlns:a="http://schemas.openxmlformats.org/drawingml/2006/main">
               <a:ext uri="{FF2B5EF4-FFF2-40B4-BE49-F238E27FC236}">
-                <a16:creationId xmlns:a16="http://schemas.microsoft.com/office/drawing/2014/main" id="{1EEA9D05-0E74-4878-9C5B-6F86DA7D5D9B}"/>
+                <a16:creationId xmlns:a16="http://schemas.microsoft.com/office/drawing/2014/main" id="{B54DACF2-7D49-4FD4-BC7A-E4EC16377347}"/>
               </a:ext>
             </a:extLst>
           </p:cNvPr>
@@ -7271,7 +7740,7 @@
     </p:spTree>
     <p:extLst>
       <p:ext uri="{BB962C8B-B14F-4D97-AF65-F5344CB8AC3E}">
-        <p14:creationId xmlns:p14="http://schemas.microsoft.com/office/powerpoint/2010/main" val="312915411"/>
+        <p14:creationId xmlns:p14="http://schemas.microsoft.com/office/powerpoint/2010/main" val="1513262559"/>
       </p:ext>
     </p:extLst>
   </p:cSld>
@@ -7302,7 +7771,7 @@
           <p:cNvPr id="1" name="">
             <a:extLst xmlns:a="http://schemas.openxmlformats.org/drawingml/2006/main">
               <a:ext uri="{FF2B5EF4-FFF2-40B4-BE49-F238E27FC236}">
-                <a16:creationId xmlns:a16="http://schemas.microsoft.com/office/drawing/2014/main" id="{31526E9B-1928-48CD-AF30-AB18D61F1492}"/>
+                <a16:creationId xmlns:a16="http://schemas.microsoft.com/office/drawing/2014/main" id="{42B73404-E306-463F-A7C5-2D61B0810973}"/>
               </a:ext>
             </a:extLst>
           </p:cNvPr>
@@ -7352,7 +7821,7 @@
           <p:cNvPr id="2" name="">
             <a:extLst xmlns:a="http://schemas.openxmlformats.org/drawingml/2006/main">
               <a:ext uri="{FF2B5EF4-FFF2-40B4-BE49-F238E27FC236}">
-                <a16:creationId xmlns:a16="http://schemas.microsoft.com/office/drawing/2014/main" id="{F061CD17-56DD-4DE5-B09C-38FDE06DF150}"/>
+                <a16:creationId xmlns:a16="http://schemas.microsoft.com/office/drawing/2014/main" id="{CDB83956-F0EE-4A5C-9485-8883B26CDDF8}"/>
               </a:ext>
             </a:extLst>
           </p:cNvPr>
@@ -7402,7 +7871,7 @@
           <p:cNvPr id="3" name="">
             <a:extLst xmlns:a="http://schemas.openxmlformats.org/drawingml/2006/main">
               <a:ext uri="{FF2B5EF4-FFF2-40B4-BE49-F238E27FC236}">
-                <a16:creationId xmlns:a16="http://schemas.microsoft.com/office/drawing/2014/main" id="{5080F24A-A294-4BE0-B47D-8678FD28769E}"/>
+                <a16:creationId xmlns:a16="http://schemas.microsoft.com/office/drawing/2014/main" id="{32CF0945-F6BB-4BF4-89CC-AA1D633E7488}"/>
               </a:ext>
             </a:extLst>
           </p:cNvPr>
@@ -7437,7 +7906,7 @@
           <p:nvPr/>
         </p:nvPicPr>
         <p:blipFill>
-          <a:blip xmlns:r="http://schemas.openxmlformats.org/officeDocument/2006/relationships" xmlns:a="http://schemas.openxmlformats.org/drawingml/2006/main" r:embed="R9e82a44d8fb04334"/>
+          <a:blip xmlns:r="http://schemas.openxmlformats.org/officeDocument/2006/relationships" xmlns:a="http://schemas.openxmlformats.org/drawingml/2006/main" r:embed="R3fadc83a26394401"/>
           <a:stretch xmlns:a="http://schemas.openxmlformats.org/drawingml/2006/main"/>
         </p:blipFill>
         <p:spPr>
@@ -7455,7 +7924,7 @@
           <p:cNvPr id="5" name="">
             <a:extLst xmlns:a="http://schemas.openxmlformats.org/drawingml/2006/main">
               <a:ext uri="{FF2B5EF4-FFF2-40B4-BE49-F238E27FC236}">
-                <a16:creationId xmlns:a16="http://schemas.microsoft.com/office/drawing/2014/main" id="{9854CBB8-4034-4413-A12E-0B4B5D8AF208}"/>
+                <a16:creationId xmlns:a16="http://schemas.microsoft.com/office/drawing/2014/main" id="{A90F62D5-8FE3-4C08-85A4-98D37C806E46}"/>
               </a:ext>
             </a:extLst>
           </p:cNvPr>
@@ -7505,7 +7974,7 @@
           <p:cNvPr id="6" name="">
             <a:extLst xmlns:a="http://schemas.openxmlformats.org/drawingml/2006/main">
               <a:ext uri="{FF2B5EF4-FFF2-40B4-BE49-F238E27FC236}">
-                <a16:creationId xmlns:a16="http://schemas.microsoft.com/office/drawing/2014/main" id="{BDD40949-E366-4340-9A6F-7571E7A437FC}"/>
+                <a16:creationId xmlns:a16="http://schemas.microsoft.com/office/drawing/2014/main" id="{BBA5C7A4-F43D-478B-B22E-677C3C8B1507}"/>
               </a:ext>
             </a:extLst>
           </p:cNvPr>
@@ -7553,7 +8022,7 @@
     </p:spTree>
     <p:extLst>
       <p:ext uri="{BB962C8B-B14F-4D97-AF65-F5344CB8AC3E}">
-        <p14:creationId xmlns:p14="http://schemas.microsoft.com/office/powerpoint/2010/main" val="1458283383"/>
+        <p14:creationId xmlns:p14="http://schemas.microsoft.com/office/powerpoint/2010/main" val="458707786"/>
       </p:ext>
     </p:extLst>
   </p:cSld>
@@ -7584,7 +8053,7 @@
           <p:cNvPr id="1" name="">
             <a:extLst xmlns:a="http://schemas.openxmlformats.org/drawingml/2006/main">
               <a:ext uri="{FF2B5EF4-FFF2-40B4-BE49-F238E27FC236}">
-                <a16:creationId xmlns:a16="http://schemas.microsoft.com/office/drawing/2014/main" id="{42503439-6AF8-4144-A054-5DC0E55933AC}"/>
+                <a16:creationId xmlns:a16="http://schemas.microsoft.com/office/drawing/2014/main" id="{A4940EED-1616-4C29-880C-8AA9F3BC5E21}"/>
               </a:ext>
             </a:extLst>
           </p:cNvPr>
@@ -7634,7 +8103,7 @@
           <p:cNvPr id="2" name="">
             <a:extLst xmlns:a="http://schemas.openxmlformats.org/drawingml/2006/main">
               <a:ext uri="{FF2B5EF4-FFF2-40B4-BE49-F238E27FC236}">
-                <a16:creationId xmlns:a16="http://schemas.microsoft.com/office/drawing/2014/main" id="{A9C86ACA-CF45-472D-AB62-5AB25C825FDC}"/>
+                <a16:creationId xmlns:a16="http://schemas.microsoft.com/office/drawing/2014/main" id="{A7B14EF5-213D-432D-9273-6CC88D835697}"/>
               </a:ext>
             </a:extLst>
           </p:cNvPr>
@@ -7684,7 +8153,7 @@
           <p:cNvPr id="3" name="">
             <a:extLst xmlns:a="http://schemas.openxmlformats.org/drawingml/2006/main">
               <a:ext uri="{FF2B5EF4-FFF2-40B4-BE49-F238E27FC236}">
-                <a16:creationId xmlns:a16="http://schemas.microsoft.com/office/drawing/2014/main" id="{260ECC2D-D103-453E-A669-5A8683333767}"/>
+                <a16:creationId xmlns:a16="http://schemas.microsoft.com/office/drawing/2014/main" id="{84A09D19-827C-4D58-BDB7-4DDE9D6F0293}"/>
               </a:ext>
             </a:extLst>
           </p:cNvPr>
@@ -7715,7 +8184,7 @@
           <p:cNvPr id="4" name="">
             <a:extLst xmlns:a="http://schemas.openxmlformats.org/drawingml/2006/main">
               <a:ext uri="{FF2B5EF4-FFF2-40B4-BE49-F238E27FC236}">
-                <a16:creationId xmlns:a16="http://schemas.microsoft.com/office/drawing/2014/main" id="{32FDE57C-5A88-40E6-8908-DFF802A9E82B}"/>
+                <a16:creationId xmlns:a16="http://schemas.microsoft.com/office/drawing/2014/main" id="{A8AEFAE0-9DA9-487E-953E-81AC28B61E8C}"/>
               </a:ext>
             </a:extLst>
           </p:cNvPr>
@@ -7765,7 +8234,7 @@
           <p:cNvPr id="5" name="">
             <a:extLst xmlns:a="http://schemas.openxmlformats.org/drawingml/2006/main">
               <a:ext uri="{FF2B5EF4-FFF2-40B4-BE49-F238E27FC236}">
-                <a16:creationId xmlns:a16="http://schemas.microsoft.com/office/drawing/2014/main" id="{D6E8D722-E0F4-4170-B83B-1F81793C3713}"/>
+                <a16:creationId xmlns:a16="http://schemas.microsoft.com/office/drawing/2014/main" id="{80C4635A-0A71-46EB-9417-F04CC6E2C590}"/>
               </a:ext>
             </a:extLst>
           </p:cNvPr>
@@ -7815,7 +8284,7 @@
           <p:cNvPr id="6" name="">
             <a:extLst xmlns:a="http://schemas.openxmlformats.org/drawingml/2006/main">
               <a:ext uri="{FF2B5EF4-FFF2-40B4-BE49-F238E27FC236}">
-                <a16:creationId xmlns:a16="http://schemas.microsoft.com/office/drawing/2014/main" id="{3A16A609-52D3-474D-8092-E5BA8D1E07C3}"/>
+                <a16:creationId xmlns:a16="http://schemas.microsoft.com/office/drawing/2014/main" id="{985E6735-0470-4CC8-8C7F-E591BFFE7C6F}"/>
               </a:ext>
             </a:extLst>
           </p:cNvPr>
@@ -7865,7 +8334,7 @@
           <p:cNvPr id="7" name="">
             <a:extLst xmlns:a="http://schemas.openxmlformats.org/drawingml/2006/main">
               <a:ext uri="{FF2B5EF4-FFF2-40B4-BE49-F238E27FC236}">
-                <a16:creationId xmlns:a16="http://schemas.microsoft.com/office/drawing/2014/main" id="{33FB4B06-59E9-4BEC-A52D-3D6C8BC4F52C}"/>
+                <a16:creationId xmlns:a16="http://schemas.microsoft.com/office/drawing/2014/main" id="{0DB22749-A4D1-4294-AB8A-77DB59BAD1F2}"/>
               </a:ext>
             </a:extLst>
           </p:cNvPr>
@@ -7915,7 +8384,7 @@
           <p:cNvPr id="8" name="">
             <a:extLst xmlns:a="http://schemas.openxmlformats.org/drawingml/2006/main">
               <a:ext uri="{FF2B5EF4-FFF2-40B4-BE49-F238E27FC236}">
-                <a16:creationId xmlns:a16="http://schemas.microsoft.com/office/drawing/2014/main" id="{27A2BC6B-E11C-4E9B-A0D1-D6E61A79FC3E}"/>
+                <a16:creationId xmlns:a16="http://schemas.microsoft.com/office/drawing/2014/main" id="{6FA94680-1B92-46ED-8505-2A5E57456551}"/>
               </a:ext>
             </a:extLst>
           </p:cNvPr>
@@ -7965,7 +8434,7 @@
           <p:cNvPr id="9" name="">
             <a:extLst xmlns:a="http://schemas.openxmlformats.org/drawingml/2006/main">
               <a:ext uri="{FF2B5EF4-FFF2-40B4-BE49-F238E27FC236}">
-                <a16:creationId xmlns:a16="http://schemas.microsoft.com/office/drawing/2014/main" id="{7E305870-BB2E-4082-86C2-E884A5C1936D}"/>
+                <a16:creationId xmlns:a16="http://schemas.microsoft.com/office/drawing/2014/main" id="{0CA019B2-280B-47A1-A9EB-E1700587D9C7}"/>
               </a:ext>
             </a:extLst>
           </p:cNvPr>
@@ -8015,7 +8484,7 @@
           <p:cNvPr id="10" name="">
             <a:extLst xmlns:a="http://schemas.openxmlformats.org/drawingml/2006/main">
               <a:ext uri="{FF2B5EF4-FFF2-40B4-BE49-F238E27FC236}">
-                <a16:creationId xmlns:a16="http://schemas.microsoft.com/office/drawing/2014/main" id="{18942E21-A45B-4F0F-8A77-44081A523EC9}"/>
+                <a16:creationId xmlns:a16="http://schemas.microsoft.com/office/drawing/2014/main" id="{F74360A4-CDA9-45A6-81CE-97692943F1F2}"/>
               </a:ext>
             </a:extLst>
           </p:cNvPr>
@@ -8065,7 +8534,7 @@
           <p:cNvPr id="11" name="">
             <a:extLst xmlns:a="http://schemas.openxmlformats.org/drawingml/2006/main">
               <a:ext uri="{FF2B5EF4-FFF2-40B4-BE49-F238E27FC236}">
-                <a16:creationId xmlns:a16="http://schemas.microsoft.com/office/drawing/2014/main" id="{246DE046-A243-404D-9D41-D05216AC3C27}"/>
+                <a16:creationId xmlns:a16="http://schemas.microsoft.com/office/drawing/2014/main" id="{9DCF7A75-07B9-4E38-9968-1F287A5694AF}"/>
               </a:ext>
             </a:extLst>
           </p:cNvPr>
@@ -8115,7 +8584,7 @@
           <p:cNvPr id="12" name="">
             <a:extLst xmlns:a="http://schemas.openxmlformats.org/drawingml/2006/main">
               <a:ext uri="{FF2B5EF4-FFF2-40B4-BE49-F238E27FC236}">
-                <a16:creationId xmlns:a16="http://schemas.microsoft.com/office/drawing/2014/main" id="{7D7B55C1-EFAF-4F37-A42F-57610BA28B41}"/>
+                <a16:creationId xmlns:a16="http://schemas.microsoft.com/office/drawing/2014/main" id="{B906351E-7227-4265-AD05-D3B1FAF0840A}"/>
               </a:ext>
             </a:extLst>
           </p:cNvPr>
@@ -8163,7 +8632,7 @@
     </p:spTree>
     <p:extLst>
       <p:ext uri="{BB962C8B-B14F-4D97-AF65-F5344CB8AC3E}">
-        <p14:creationId xmlns:p14="http://schemas.microsoft.com/office/powerpoint/2010/main" val="854918231"/>
+        <p14:creationId xmlns:p14="http://schemas.microsoft.com/office/powerpoint/2010/main" val="259309470"/>
       </p:ext>
     </p:extLst>
   </p:cSld>
@@ -8194,7 +8663,7 @@
           <p:cNvPr id="1" name="">
             <a:extLst xmlns:a="http://schemas.openxmlformats.org/drawingml/2006/main">
               <a:ext uri="{FF2B5EF4-FFF2-40B4-BE49-F238E27FC236}">
-                <a16:creationId xmlns:a16="http://schemas.microsoft.com/office/drawing/2014/main" id="{C1DF2860-9A6C-4C22-8058-1D5E86F80F62}"/>
+                <a16:creationId xmlns:a16="http://schemas.microsoft.com/office/drawing/2014/main" id="{51D74188-3DBE-46B1-BBC5-5FEF59157240}"/>
               </a:ext>
             </a:extLst>
           </p:cNvPr>
@@ -8244,7 +8713,7 @@
           <p:cNvPr id="2" name="">
             <a:extLst xmlns:a="http://schemas.openxmlformats.org/drawingml/2006/main">
               <a:ext uri="{FF2B5EF4-FFF2-40B4-BE49-F238E27FC236}">
-                <a16:creationId xmlns:a16="http://schemas.microsoft.com/office/drawing/2014/main" id="{D0EF0B53-96AF-431B-87A4-80DEE0CCE49D}"/>
+                <a16:creationId xmlns:a16="http://schemas.microsoft.com/office/drawing/2014/main" id="{0A2C56C4-9014-4215-9223-023256F587EC}"/>
               </a:ext>
             </a:extLst>
           </p:cNvPr>
@@ -8294,7 +8763,7 @@
           <p:cNvPr id="3" name="">
             <a:extLst xmlns:a="http://schemas.openxmlformats.org/drawingml/2006/main">
               <a:ext uri="{FF2B5EF4-FFF2-40B4-BE49-F238E27FC236}">
-                <a16:creationId xmlns:a16="http://schemas.microsoft.com/office/drawing/2014/main" id="{1023CA16-245C-46B3-8AEF-9FD6D7E4CDC5}"/>
+                <a16:creationId xmlns:a16="http://schemas.microsoft.com/office/drawing/2014/main" id="{96EBD6D3-A989-40D7-A149-4FB7BC9E3698}"/>
               </a:ext>
             </a:extLst>
           </p:cNvPr>
@@ -8325,7 +8794,7 @@
           <p:cNvPr id="4" name="">
             <a:extLst xmlns:a="http://schemas.openxmlformats.org/drawingml/2006/main">
               <a:ext uri="{FF2B5EF4-FFF2-40B4-BE49-F238E27FC236}">
-                <a16:creationId xmlns:a16="http://schemas.microsoft.com/office/drawing/2014/main" id="{4978EBCF-364B-4C5D-A1BD-EBACEAF1EAF0}"/>
+                <a16:creationId xmlns:a16="http://schemas.microsoft.com/office/drawing/2014/main" id="{1985FAD6-E063-4FAB-8A3D-378D579E0D61}"/>
               </a:ext>
             </a:extLst>
           </p:cNvPr>
@@ -8375,7 +8844,7 @@
           <p:cNvPr id="5" name="">
             <a:extLst xmlns:a="http://schemas.openxmlformats.org/drawingml/2006/main">
               <a:ext uri="{FF2B5EF4-FFF2-40B4-BE49-F238E27FC236}">
-                <a16:creationId xmlns:a16="http://schemas.microsoft.com/office/drawing/2014/main" id="{B418070B-7904-4855-8824-3A886736038A}"/>
+                <a16:creationId xmlns:a16="http://schemas.microsoft.com/office/drawing/2014/main" id="{C1F8C3CA-2D6F-4805-ACEC-854390B23E72}"/>
               </a:ext>
             </a:extLst>
           </p:cNvPr>
@@ -8406,7 +8875,7 @@
           <p:cNvPr id="6" name="">
             <a:extLst xmlns:a="http://schemas.openxmlformats.org/drawingml/2006/main">
               <a:ext uri="{FF2B5EF4-FFF2-40B4-BE49-F238E27FC236}">
-                <a16:creationId xmlns:a16="http://schemas.microsoft.com/office/drawing/2014/main" id="{58BF3F91-8E34-4798-A064-8DE03E5261B9}"/>
+                <a16:creationId xmlns:a16="http://schemas.microsoft.com/office/drawing/2014/main" id="{7AE3C1B4-8225-45E0-845B-C3D3159B7256}"/>
               </a:ext>
             </a:extLst>
           </p:cNvPr>
@@ -8456,7 +8925,7 @@
           <p:cNvPr id="7" name="">
             <a:extLst xmlns:a="http://schemas.openxmlformats.org/drawingml/2006/main">
               <a:ext uri="{FF2B5EF4-FFF2-40B4-BE49-F238E27FC236}">
-                <a16:creationId xmlns:a16="http://schemas.microsoft.com/office/drawing/2014/main" id="{449CC3F3-2088-486A-B8FF-DA75A4DD9B35}"/>
+                <a16:creationId xmlns:a16="http://schemas.microsoft.com/office/drawing/2014/main" id="{DA5E8BCB-6D97-419E-B81B-E88148785984}"/>
               </a:ext>
             </a:extLst>
           </p:cNvPr>
@@ -8504,7 +8973,7 @@
     </p:spTree>
     <p:extLst>
       <p:ext uri="{BB962C8B-B14F-4D97-AF65-F5344CB8AC3E}">
-        <p14:creationId xmlns:p14="http://schemas.microsoft.com/office/powerpoint/2010/main" val="432250107"/>
+        <p14:creationId xmlns:p14="http://schemas.microsoft.com/office/powerpoint/2010/main" val="717728893"/>
       </p:ext>
     </p:extLst>
   </p:cSld>
@@ -8535,7 +9004,7 @@
           <p:cNvPr id="1" name="">
             <a:extLst xmlns:a="http://schemas.openxmlformats.org/drawingml/2006/main">
               <a:ext uri="{FF2B5EF4-FFF2-40B4-BE49-F238E27FC236}">
-                <a16:creationId xmlns:a16="http://schemas.microsoft.com/office/drawing/2014/main" id="{CBC4BA0E-07A6-4F16-B347-3896C01A3E80}"/>
+                <a16:creationId xmlns:a16="http://schemas.microsoft.com/office/drawing/2014/main" id="{2BC3D040-2151-4E3C-8E1B-0CD7DF79C148}"/>
               </a:ext>
             </a:extLst>
           </p:cNvPr>
@@ -8585,7 +9054,7 @@
           <p:cNvPr id="2" name="">
             <a:extLst xmlns:a="http://schemas.openxmlformats.org/drawingml/2006/main">
               <a:ext uri="{FF2B5EF4-FFF2-40B4-BE49-F238E27FC236}">
-                <a16:creationId xmlns:a16="http://schemas.microsoft.com/office/drawing/2014/main" id="{A4CD531B-5430-4A59-A09C-4E7ACDC746AB}"/>
+                <a16:creationId xmlns:a16="http://schemas.microsoft.com/office/drawing/2014/main" id="{AE069A43-2BC1-49A5-8B79-A21578673BB1}"/>
               </a:ext>
             </a:extLst>
           </p:cNvPr>
@@ -8635,7 +9104,7 @@
           <p:cNvPr id="3" name="">
             <a:extLst xmlns:a="http://schemas.openxmlformats.org/drawingml/2006/main">
               <a:ext uri="{FF2B5EF4-FFF2-40B4-BE49-F238E27FC236}">
-                <a16:creationId xmlns:a16="http://schemas.microsoft.com/office/drawing/2014/main" id="{A568F2E1-BF42-4D94-938B-50FD969430B0}"/>
+                <a16:creationId xmlns:a16="http://schemas.microsoft.com/office/drawing/2014/main" id="{3E4AFE16-5346-4705-89EE-B395D1D51BC6}"/>
               </a:ext>
             </a:extLst>
           </p:cNvPr>
@@ -8666,7 +9135,7 @@
           <p:cNvPr id="4" name="">
             <a:extLst xmlns:a="http://schemas.openxmlformats.org/drawingml/2006/main">
               <a:ext uri="{FF2B5EF4-FFF2-40B4-BE49-F238E27FC236}">
-                <a16:creationId xmlns:a16="http://schemas.microsoft.com/office/drawing/2014/main" id="{B873BB56-2211-4834-9A27-1F0BD273F402}"/>
+                <a16:creationId xmlns:a16="http://schemas.microsoft.com/office/drawing/2014/main" id="{CEC88AA9-A33E-4B10-846D-2D95F39FA7AA}"/>
               </a:ext>
             </a:extLst>
           </p:cNvPr>
@@ -8699,7 +9168,7 @@
           <p:cNvPr id="5" name="">
             <a:extLst xmlns:a="http://schemas.openxmlformats.org/drawingml/2006/main">
               <a:ext uri="{FF2B5EF4-FFF2-40B4-BE49-F238E27FC236}">
-                <a16:creationId xmlns:a16="http://schemas.microsoft.com/office/drawing/2014/main" id="{D6DBBFDD-7365-4038-ABB3-8B22C915A2AB}"/>
+                <a16:creationId xmlns:a16="http://schemas.microsoft.com/office/drawing/2014/main" id="{B00D9E7D-B301-44BC-9E65-67924BB2C705}"/>
               </a:ext>
             </a:extLst>
           </p:cNvPr>
@@ -8749,7 +9218,7 @@
           <p:cNvPr id="6" name="">
             <a:extLst xmlns:a="http://schemas.openxmlformats.org/drawingml/2006/main">
               <a:ext uri="{FF2B5EF4-FFF2-40B4-BE49-F238E27FC236}">
-                <a16:creationId xmlns:a16="http://schemas.microsoft.com/office/drawing/2014/main" id="{5B322A78-5610-473D-83C3-48C3BBCD2B09}"/>
+                <a16:creationId xmlns:a16="http://schemas.microsoft.com/office/drawing/2014/main" id="{4E95C55B-C26A-43A1-9AA2-3D27D376F422}"/>
               </a:ext>
             </a:extLst>
           </p:cNvPr>
@@ -8799,7 +9268,7 @@
           <p:cNvPr id="7" name="">
             <a:extLst xmlns:a="http://schemas.openxmlformats.org/drawingml/2006/main">
               <a:ext uri="{FF2B5EF4-FFF2-40B4-BE49-F238E27FC236}">
-                <a16:creationId xmlns:a16="http://schemas.microsoft.com/office/drawing/2014/main" id="{B68CE6D2-8024-4D27-B6B1-79C2EA76E9DF}"/>
+                <a16:creationId xmlns:a16="http://schemas.microsoft.com/office/drawing/2014/main" id="{C83DF3CE-9C15-44C0-985E-504ECE66D11D}"/>
               </a:ext>
             </a:extLst>
           </p:cNvPr>
@@ -8849,7 +9318,7 @@
           <p:cNvPr id="8" name="">
             <a:extLst xmlns:a="http://schemas.openxmlformats.org/drawingml/2006/main">
               <a:ext uri="{FF2B5EF4-FFF2-40B4-BE49-F238E27FC236}">
-                <a16:creationId xmlns:a16="http://schemas.microsoft.com/office/drawing/2014/main" id="{67500080-6EB3-49D1-9DFE-9D4FE39E66DA}"/>
+                <a16:creationId xmlns:a16="http://schemas.microsoft.com/office/drawing/2014/main" id="{5236A071-D456-4DF6-ABF7-712D940C8864}"/>
               </a:ext>
             </a:extLst>
           </p:cNvPr>
@@ -8882,7 +9351,7 @@
           <p:cNvPr id="9" name="">
             <a:extLst xmlns:a="http://schemas.openxmlformats.org/drawingml/2006/main">
               <a:ext uri="{FF2B5EF4-FFF2-40B4-BE49-F238E27FC236}">
-                <a16:creationId xmlns:a16="http://schemas.microsoft.com/office/drawing/2014/main" id="{188D230A-A601-435B-880C-B067460CCA16}"/>
+                <a16:creationId xmlns:a16="http://schemas.microsoft.com/office/drawing/2014/main" id="{27531F7A-84DC-45E8-A46F-B3D9687A4F49}"/>
               </a:ext>
             </a:extLst>
           </p:cNvPr>
@@ -8932,7 +9401,7 @@
           <p:cNvPr id="10" name="">
             <a:extLst xmlns:a="http://schemas.openxmlformats.org/drawingml/2006/main">
               <a:ext uri="{FF2B5EF4-FFF2-40B4-BE49-F238E27FC236}">
-                <a16:creationId xmlns:a16="http://schemas.microsoft.com/office/drawing/2014/main" id="{EAAA249D-780D-4EA1-9496-CB9988E0A3CB}"/>
+                <a16:creationId xmlns:a16="http://schemas.microsoft.com/office/drawing/2014/main" id="{3EC07F34-AA6C-40BD-A409-725E45CE7F07}"/>
               </a:ext>
             </a:extLst>
           </p:cNvPr>
@@ -8982,7 +9451,7 @@
           <p:cNvPr id="11" name="">
             <a:extLst xmlns:a="http://schemas.openxmlformats.org/drawingml/2006/main">
               <a:ext uri="{FF2B5EF4-FFF2-40B4-BE49-F238E27FC236}">
-                <a16:creationId xmlns:a16="http://schemas.microsoft.com/office/drawing/2014/main" id="{8FDF15AE-E9FB-4DB2-9167-795ACD557CD3}"/>
+                <a16:creationId xmlns:a16="http://schemas.microsoft.com/office/drawing/2014/main" id="{533F9807-0C71-4BBD-8E8C-CC7ADE236F05}"/>
               </a:ext>
             </a:extLst>
           </p:cNvPr>
@@ -9032,7 +9501,7 @@
           <p:cNvPr id="12" name="">
             <a:extLst xmlns:a="http://schemas.openxmlformats.org/drawingml/2006/main">
               <a:ext uri="{FF2B5EF4-FFF2-40B4-BE49-F238E27FC236}">
-                <a16:creationId xmlns:a16="http://schemas.microsoft.com/office/drawing/2014/main" id="{40DBC703-F4D3-43D2-9382-4D09CE5AB13B}"/>
+                <a16:creationId xmlns:a16="http://schemas.microsoft.com/office/drawing/2014/main" id="{5CCE0517-A686-44D6-AC7C-615E807660BB}"/>
               </a:ext>
             </a:extLst>
           </p:cNvPr>
@@ -9065,7 +9534,7 @@
           <p:cNvPr id="13" name="">
             <a:extLst xmlns:a="http://schemas.openxmlformats.org/drawingml/2006/main">
               <a:ext uri="{FF2B5EF4-FFF2-40B4-BE49-F238E27FC236}">
-                <a16:creationId xmlns:a16="http://schemas.microsoft.com/office/drawing/2014/main" id="{D387E0DB-D784-4BE0-9B41-D6195F2F42BD}"/>
+                <a16:creationId xmlns:a16="http://schemas.microsoft.com/office/drawing/2014/main" id="{D9562B6C-40C6-43BD-BEEA-5E4DBAE7C095}"/>
               </a:ext>
             </a:extLst>
           </p:cNvPr>
@@ -9115,7 +9584,7 @@
           <p:cNvPr id="14" name="">
             <a:extLst xmlns:a="http://schemas.openxmlformats.org/drawingml/2006/main">
               <a:ext uri="{FF2B5EF4-FFF2-40B4-BE49-F238E27FC236}">
-                <a16:creationId xmlns:a16="http://schemas.microsoft.com/office/drawing/2014/main" id="{B46847AD-88F1-4EA7-9F16-26E0EB4FF39B}"/>
+                <a16:creationId xmlns:a16="http://schemas.microsoft.com/office/drawing/2014/main" id="{58712307-8855-4CAD-B847-E5A9571C060D}"/>
               </a:ext>
             </a:extLst>
           </p:cNvPr>
@@ -9165,7 +9634,7 @@
           <p:cNvPr id="15" name="">
             <a:extLst xmlns:a="http://schemas.openxmlformats.org/drawingml/2006/main">
               <a:ext uri="{FF2B5EF4-FFF2-40B4-BE49-F238E27FC236}">
-                <a16:creationId xmlns:a16="http://schemas.microsoft.com/office/drawing/2014/main" id="{9AE69048-AEFA-43BA-B043-861E04992505}"/>
+                <a16:creationId xmlns:a16="http://schemas.microsoft.com/office/drawing/2014/main" id="{08F50A9E-07C7-4280-8A3E-42C23B07F397}"/>
               </a:ext>
             </a:extLst>
           </p:cNvPr>
@@ -9215,7 +9684,7 @@
           <p:cNvPr id="16" name="">
             <a:extLst xmlns:a="http://schemas.openxmlformats.org/drawingml/2006/main">
               <a:ext uri="{FF2B5EF4-FFF2-40B4-BE49-F238E27FC236}">
-                <a16:creationId xmlns:a16="http://schemas.microsoft.com/office/drawing/2014/main" id="{DE02208A-BB7A-4D62-8F31-ABC13660ED65}"/>
+                <a16:creationId xmlns:a16="http://schemas.microsoft.com/office/drawing/2014/main" id="{334F63B1-F2E5-48C8-BA2A-E1690434E2C5}"/>
               </a:ext>
             </a:extLst>
           </p:cNvPr>
@@ -9248,7 +9717,7 @@
           <p:cNvPr id="17" name="">
             <a:extLst xmlns:a="http://schemas.openxmlformats.org/drawingml/2006/main">
               <a:ext uri="{FF2B5EF4-FFF2-40B4-BE49-F238E27FC236}">
-                <a16:creationId xmlns:a16="http://schemas.microsoft.com/office/drawing/2014/main" id="{0A7B614C-BA3E-40FA-B2B3-862C207E36E0}"/>
+                <a16:creationId xmlns:a16="http://schemas.microsoft.com/office/drawing/2014/main" id="{6B02F126-027F-4168-9908-805ACC70546B}"/>
               </a:ext>
             </a:extLst>
           </p:cNvPr>
@@ -9298,7 +9767,7 @@
           <p:cNvPr id="18" name="">
             <a:extLst xmlns:a="http://schemas.openxmlformats.org/drawingml/2006/main">
               <a:ext uri="{FF2B5EF4-FFF2-40B4-BE49-F238E27FC236}">
-                <a16:creationId xmlns:a16="http://schemas.microsoft.com/office/drawing/2014/main" id="{71D0DB1F-6512-4A4D-8806-A608285ED37B}"/>
+                <a16:creationId xmlns:a16="http://schemas.microsoft.com/office/drawing/2014/main" id="{54082775-1D86-48DA-9A4F-B55B1D582196}"/>
               </a:ext>
             </a:extLst>
           </p:cNvPr>
@@ -9348,7 +9817,7 @@
           <p:cNvPr id="19" name="">
             <a:extLst xmlns:a="http://schemas.openxmlformats.org/drawingml/2006/main">
               <a:ext uri="{FF2B5EF4-FFF2-40B4-BE49-F238E27FC236}">
-                <a16:creationId xmlns:a16="http://schemas.microsoft.com/office/drawing/2014/main" id="{5AC4CA38-76DF-4ED4-B373-3FCA15655C93}"/>
+                <a16:creationId xmlns:a16="http://schemas.microsoft.com/office/drawing/2014/main" id="{536F5A6D-4CF8-4A70-BA8C-3651E109F564}"/>
               </a:ext>
             </a:extLst>
           </p:cNvPr>
@@ -9398,7 +9867,7 @@
           <p:cNvPr id="20" name="">
             <a:extLst xmlns:a="http://schemas.openxmlformats.org/drawingml/2006/main">
               <a:ext uri="{FF2B5EF4-FFF2-40B4-BE49-F238E27FC236}">
-                <a16:creationId xmlns:a16="http://schemas.microsoft.com/office/drawing/2014/main" id="{073ECB96-54F1-45CA-8C29-387350C1C500}"/>
+                <a16:creationId xmlns:a16="http://schemas.microsoft.com/office/drawing/2014/main" id="{5FBF71DD-9683-4799-9DE3-3D51746D5D95}"/>
               </a:ext>
             </a:extLst>
           </p:cNvPr>
@@ -9446,7 +9915,7 @@
     </p:spTree>
     <p:extLst>
       <p:ext uri="{BB962C8B-B14F-4D97-AF65-F5344CB8AC3E}">
-        <p14:creationId xmlns:p14="http://schemas.microsoft.com/office/powerpoint/2010/main" val="425738084"/>
+        <p14:creationId xmlns:p14="http://schemas.microsoft.com/office/powerpoint/2010/main" val="1538159355"/>
       </p:ext>
     </p:extLst>
   </p:cSld>
@@ -9477,7 +9946,7 @@
           <p:cNvPr id="1" name="">
             <a:extLst xmlns:a="http://schemas.openxmlformats.org/drawingml/2006/main">
               <a:ext uri="{FF2B5EF4-FFF2-40B4-BE49-F238E27FC236}">
-                <a16:creationId xmlns:a16="http://schemas.microsoft.com/office/drawing/2014/main" id="{4D9A4E12-C928-4E32-89A4-18D1645F407C}"/>
+                <a16:creationId xmlns:a16="http://schemas.microsoft.com/office/drawing/2014/main" id="{B051DA62-0078-49D3-90F3-AA6BF3EC88DD}"/>
               </a:ext>
             </a:extLst>
           </p:cNvPr>
@@ -9527,7 +9996,7 @@
           <p:cNvPr id="2" name="">
             <a:extLst xmlns:a="http://schemas.openxmlformats.org/drawingml/2006/main">
               <a:ext uri="{FF2B5EF4-FFF2-40B4-BE49-F238E27FC236}">
-                <a16:creationId xmlns:a16="http://schemas.microsoft.com/office/drawing/2014/main" id="{16A1F738-D9DB-4291-A770-0AAC7EE7615F}"/>
+                <a16:creationId xmlns:a16="http://schemas.microsoft.com/office/drawing/2014/main" id="{026A51DA-F416-4BF7-9D1A-50BF43D902CE}"/>
               </a:ext>
             </a:extLst>
           </p:cNvPr>
@@ -9577,7 +10046,7 @@
           <p:cNvPr id="3" name="">
             <a:extLst xmlns:a="http://schemas.openxmlformats.org/drawingml/2006/main">
               <a:ext uri="{FF2B5EF4-FFF2-40B4-BE49-F238E27FC236}">
-                <a16:creationId xmlns:a16="http://schemas.microsoft.com/office/drawing/2014/main" id="{FBCBB1B8-1D82-4E81-9FD8-1C577F55607E}"/>
+                <a16:creationId xmlns:a16="http://schemas.microsoft.com/office/drawing/2014/main" id="{3DD4F3C8-A420-4329-B602-ABDC43A2B26B}"/>
               </a:ext>
             </a:extLst>
           </p:cNvPr>
@@ -9608,7 +10077,7 @@
           <p:cNvPr id="4" name="">
             <a:extLst xmlns:a="http://schemas.openxmlformats.org/drawingml/2006/main">
               <a:ext uri="{FF2B5EF4-FFF2-40B4-BE49-F238E27FC236}">
-                <a16:creationId xmlns:a16="http://schemas.microsoft.com/office/drawing/2014/main" id="{87FE992E-17D7-4DAC-BB90-0A9C4C24A565}"/>
+                <a16:creationId xmlns:a16="http://schemas.microsoft.com/office/drawing/2014/main" id="{5994240D-21F9-4855-A1FA-3C4F74B2A793}"/>
               </a:ext>
             </a:extLst>
           </p:cNvPr>
@@ -9658,7 +10127,7 @@
           <p:cNvPr id="5" name="">
             <a:extLst xmlns:a="http://schemas.openxmlformats.org/drawingml/2006/main">
               <a:ext uri="{FF2B5EF4-FFF2-40B4-BE49-F238E27FC236}">
-                <a16:creationId xmlns:a16="http://schemas.microsoft.com/office/drawing/2014/main" id="{A6BEDBEA-E5D8-4F68-906A-A344D974328D}"/>
+                <a16:creationId xmlns:a16="http://schemas.microsoft.com/office/drawing/2014/main" id="{89B72D0C-F37A-4052-91CD-2418C5E966F5}"/>
               </a:ext>
             </a:extLst>
           </p:cNvPr>
@@ -9708,7 +10177,7 @@
           <p:cNvPr id="6" name="">
             <a:extLst xmlns:a="http://schemas.openxmlformats.org/drawingml/2006/main">
               <a:ext uri="{FF2B5EF4-FFF2-40B4-BE49-F238E27FC236}">
-                <a16:creationId xmlns:a16="http://schemas.microsoft.com/office/drawing/2014/main" id="{12741C95-33C9-42A1-A6CE-E7ACBB5FB099}"/>
+                <a16:creationId xmlns:a16="http://schemas.microsoft.com/office/drawing/2014/main" id="{CE2D9FA8-0D09-457E-A5AF-CBC648F0A40B}"/>
               </a:ext>
             </a:extLst>
           </p:cNvPr>
@@ -9758,7 +10227,7 @@
           <p:cNvPr id="7" name="">
             <a:extLst xmlns:a="http://schemas.openxmlformats.org/drawingml/2006/main">
               <a:ext uri="{FF2B5EF4-FFF2-40B4-BE49-F238E27FC236}">
-                <a16:creationId xmlns:a16="http://schemas.microsoft.com/office/drawing/2014/main" id="{4034728E-3D75-403E-AB20-2DB41CC58C46}"/>
+                <a16:creationId xmlns:a16="http://schemas.microsoft.com/office/drawing/2014/main" id="{92507DCF-A5D3-47F0-A383-5D0592511703}"/>
               </a:ext>
             </a:extLst>
           </p:cNvPr>
@@ -9808,7 +10277,7 @@
           <p:cNvPr id="8" name="">
             <a:extLst xmlns:a="http://schemas.openxmlformats.org/drawingml/2006/main">
               <a:ext uri="{FF2B5EF4-FFF2-40B4-BE49-F238E27FC236}">
-                <a16:creationId xmlns:a16="http://schemas.microsoft.com/office/drawing/2014/main" id="{6FD375CC-D490-45D7-AE6C-8EBA80F6CB43}"/>
+                <a16:creationId xmlns:a16="http://schemas.microsoft.com/office/drawing/2014/main" id="{A7060B25-D656-4D00-9933-FFB5387C9166}"/>
               </a:ext>
             </a:extLst>
           </p:cNvPr>
@@ -9858,7 +10327,7 @@
           <p:cNvPr id="9" name="">
             <a:extLst xmlns:a="http://schemas.openxmlformats.org/drawingml/2006/main">
               <a:ext uri="{FF2B5EF4-FFF2-40B4-BE49-F238E27FC236}">
-                <a16:creationId xmlns:a16="http://schemas.microsoft.com/office/drawing/2014/main" id="{C8AFF8B3-F5BD-4DDA-8EFD-DC6390A6F082}"/>
+                <a16:creationId xmlns:a16="http://schemas.microsoft.com/office/drawing/2014/main" id="{1253B2FB-33F0-46F8-9B64-5DDFFB4E703A}"/>
               </a:ext>
             </a:extLst>
           </p:cNvPr>
@@ -9908,7 +10377,7 @@
           <p:cNvPr id="10" name="">
             <a:extLst xmlns:a="http://schemas.openxmlformats.org/drawingml/2006/main">
               <a:ext uri="{FF2B5EF4-FFF2-40B4-BE49-F238E27FC236}">
-                <a16:creationId xmlns:a16="http://schemas.microsoft.com/office/drawing/2014/main" id="{675D1B13-D72A-490B-815A-10E8726D1E79}"/>
+                <a16:creationId xmlns:a16="http://schemas.microsoft.com/office/drawing/2014/main" id="{D07CFB90-0633-4BB2-9899-407FCFDB4B0D}"/>
               </a:ext>
             </a:extLst>
           </p:cNvPr>
@@ -9941,7 +10410,7 @@
           <p:cNvPr id="11" name="">
             <a:extLst xmlns:a="http://schemas.openxmlformats.org/drawingml/2006/main">
               <a:ext uri="{FF2B5EF4-FFF2-40B4-BE49-F238E27FC236}">
-                <a16:creationId xmlns:a16="http://schemas.microsoft.com/office/drawing/2014/main" id="{850A78EE-37DE-4518-8B72-104FACEDAEFF}"/>
+                <a16:creationId xmlns:a16="http://schemas.microsoft.com/office/drawing/2014/main" id="{7E0412AB-C6D4-44EB-9E62-3246EF384B52}"/>
               </a:ext>
             </a:extLst>
           </p:cNvPr>
@@ -9974,7 +10443,7 @@
           <p:cNvPr id="12" name="">
             <a:extLst xmlns:a="http://schemas.openxmlformats.org/drawingml/2006/main">
               <a:ext uri="{FF2B5EF4-FFF2-40B4-BE49-F238E27FC236}">
-                <a16:creationId xmlns:a16="http://schemas.microsoft.com/office/drawing/2014/main" id="{86862725-3CF8-4EB7-9238-0EFBC7865626}"/>
+                <a16:creationId xmlns:a16="http://schemas.microsoft.com/office/drawing/2014/main" id="{06DC9741-A7B4-47D7-81EE-8AFEAA482870}"/>
               </a:ext>
             </a:extLst>
           </p:cNvPr>
@@ -10007,7 +10476,7 @@
           <p:cNvPr id="13" name="">
             <a:extLst xmlns:a="http://schemas.openxmlformats.org/drawingml/2006/main">
               <a:ext uri="{FF2B5EF4-FFF2-40B4-BE49-F238E27FC236}">
-                <a16:creationId xmlns:a16="http://schemas.microsoft.com/office/drawing/2014/main" id="{8863F6EE-09FB-4184-8208-0A0CA25D9FF1}"/>
+                <a16:creationId xmlns:a16="http://schemas.microsoft.com/office/drawing/2014/main" id="{3CF2812E-166E-4D73-84DE-BC8B5CB33B4E}"/>
               </a:ext>
             </a:extLst>
           </p:cNvPr>
@@ -10057,7 +10526,7 @@
           <p:cNvPr id="14" name="">
             <a:extLst xmlns:a="http://schemas.openxmlformats.org/drawingml/2006/main">
               <a:ext uri="{FF2B5EF4-FFF2-40B4-BE49-F238E27FC236}">
-                <a16:creationId xmlns:a16="http://schemas.microsoft.com/office/drawing/2014/main" id="{36EEC72A-4684-47F0-91CC-110C3487D5EB}"/>
+                <a16:creationId xmlns:a16="http://schemas.microsoft.com/office/drawing/2014/main" id="{01C098B5-DFB8-4351-A35D-40FCAEFF41A2}"/>
               </a:ext>
             </a:extLst>
           </p:cNvPr>
@@ -10107,7 +10576,7 @@
           <p:cNvPr id="15" name="">
             <a:extLst xmlns:a="http://schemas.openxmlformats.org/drawingml/2006/main">
               <a:ext uri="{FF2B5EF4-FFF2-40B4-BE49-F238E27FC236}">
-                <a16:creationId xmlns:a16="http://schemas.microsoft.com/office/drawing/2014/main" id="{C2025391-CF1F-48F8-BEEC-ADEAE875CA33}"/>
+                <a16:creationId xmlns:a16="http://schemas.microsoft.com/office/drawing/2014/main" id="{AB31FECA-75CC-499A-B498-E3B2A987280E}"/>
               </a:ext>
             </a:extLst>
           </p:cNvPr>
@@ -10157,7 +10626,7 @@
           <p:cNvPr id="16" name="">
             <a:extLst xmlns:a="http://schemas.openxmlformats.org/drawingml/2006/main">
               <a:ext uri="{FF2B5EF4-FFF2-40B4-BE49-F238E27FC236}">
-                <a16:creationId xmlns:a16="http://schemas.microsoft.com/office/drawing/2014/main" id="{F13781B6-5B2D-4F9C-B0DD-345FF1273E5D}"/>
+                <a16:creationId xmlns:a16="http://schemas.microsoft.com/office/drawing/2014/main" id="{619EBF8B-266C-4B77-B984-2FE442ED4BC8}"/>
               </a:ext>
             </a:extLst>
           </p:cNvPr>
@@ -10205,7 +10674,7 @@
     </p:spTree>
     <p:extLst>
       <p:ext uri="{BB962C8B-B14F-4D97-AF65-F5344CB8AC3E}">
-        <p14:creationId xmlns:p14="http://schemas.microsoft.com/office/powerpoint/2010/main" val="565694605"/>
+        <p14:creationId xmlns:p14="http://schemas.microsoft.com/office/powerpoint/2010/main" val="899663110"/>
       </p:ext>
     </p:extLst>
   </p:cSld>
@@ -10236,7 +10705,7 @@
           <p:cNvPr id="1" name="">
             <a:extLst xmlns:a="http://schemas.openxmlformats.org/drawingml/2006/main">
               <a:ext uri="{FF2B5EF4-FFF2-40B4-BE49-F238E27FC236}">
-                <a16:creationId xmlns:a16="http://schemas.microsoft.com/office/drawing/2014/main" id="{D9EFFC45-F32B-4BD7-8C00-8D434861A296}"/>
+                <a16:creationId xmlns:a16="http://schemas.microsoft.com/office/drawing/2014/main" id="{EA8E4A68-4168-4943-A0E2-6948BE5DE52F}"/>
               </a:ext>
             </a:extLst>
           </p:cNvPr>
@@ -10286,7 +10755,7 @@
           <p:cNvPr id="2" name="">
             <a:extLst xmlns:a="http://schemas.openxmlformats.org/drawingml/2006/main">
               <a:ext uri="{FF2B5EF4-FFF2-40B4-BE49-F238E27FC236}">
-                <a16:creationId xmlns:a16="http://schemas.microsoft.com/office/drawing/2014/main" id="{3054246D-7861-4E92-B901-1AE6B4D26ABE}"/>
+                <a16:creationId xmlns:a16="http://schemas.microsoft.com/office/drawing/2014/main" id="{9EB9C52E-BBC8-46C2-B6D7-39493264A110}"/>
               </a:ext>
             </a:extLst>
           </p:cNvPr>
@@ -10336,7 +10805,7 @@
           <p:cNvPr id="3" name="">
             <a:extLst xmlns:a="http://schemas.openxmlformats.org/drawingml/2006/main">
               <a:ext uri="{FF2B5EF4-FFF2-40B4-BE49-F238E27FC236}">
-                <a16:creationId xmlns:a16="http://schemas.microsoft.com/office/drawing/2014/main" id="{2531E7BB-BC94-4C57-BBF4-956B03EE247C}"/>
+                <a16:creationId xmlns:a16="http://schemas.microsoft.com/office/drawing/2014/main" id="{46178644-C378-4D82-853C-ED1C9C71CCA6}"/>
               </a:ext>
             </a:extLst>
           </p:cNvPr>
@@ -10371,7 +10840,7 @@
           <p:nvPr/>
         </p:nvPicPr>
         <p:blipFill>
-          <a:blip xmlns:r="http://schemas.openxmlformats.org/officeDocument/2006/relationships" xmlns:a="http://schemas.openxmlformats.org/drawingml/2006/main" r:embed="R1f2294088a574f10"/>
+          <a:blip xmlns:r="http://schemas.openxmlformats.org/officeDocument/2006/relationships" xmlns:a="http://schemas.openxmlformats.org/drawingml/2006/main" r:embed="R2ce06a8327944d8d"/>
           <a:stretch xmlns:a="http://schemas.openxmlformats.org/drawingml/2006/main"/>
         </p:blipFill>
         <p:spPr>
@@ -10389,7 +10858,7 @@
           <p:cNvPr id="5" name="">
             <a:extLst xmlns:a="http://schemas.openxmlformats.org/drawingml/2006/main">
               <a:ext uri="{FF2B5EF4-FFF2-40B4-BE49-F238E27FC236}">
-                <a16:creationId xmlns:a16="http://schemas.microsoft.com/office/drawing/2014/main" id="{98E957A5-CA97-43EF-BCD9-57AB511A2587}"/>
+                <a16:creationId xmlns:a16="http://schemas.microsoft.com/office/drawing/2014/main" id="{6731B290-A9F1-4D14-81C5-F96843914407}"/>
               </a:ext>
             </a:extLst>
           </p:cNvPr>
@@ -10439,7 +10908,7 @@
           <p:cNvPr id="6" name="">
             <a:extLst xmlns:a="http://schemas.openxmlformats.org/drawingml/2006/main">
               <a:ext uri="{FF2B5EF4-FFF2-40B4-BE49-F238E27FC236}">
-                <a16:creationId xmlns:a16="http://schemas.microsoft.com/office/drawing/2014/main" id="{E913A0C4-D979-4B11-AFA5-69A7A9A06E75}"/>
+                <a16:creationId xmlns:a16="http://schemas.microsoft.com/office/drawing/2014/main" id="{DB9D348E-7ED4-4154-8735-CCE6BCBB6577}"/>
               </a:ext>
             </a:extLst>
           </p:cNvPr>
@@ -10487,7 +10956,7 @@
     </p:spTree>
     <p:extLst>
       <p:ext uri="{BB962C8B-B14F-4D97-AF65-F5344CB8AC3E}">
-        <p14:creationId xmlns:p14="http://schemas.microsoft.com/office/powerpoint/2010/main" val="1203105165"/>
+        <p14:creationId xmlns:p14="http://schemas.microsoft.com/office/powerpoint/2010/main" val="163273201"/>
       </p:ext>
     </p:extLst>
   </p:cSld>
@@ -10518,7 +10987,7 @@
           <p:cNvPr id="1" name="">
             <a:extLst xmlns:a="http://schemas.openxmlformats.org/drawingml/2006/main">
               <a:ext uri="{FF2B5EF4-FFF2-40B4-BE49-F238E27FC236}">
-                <a16:creationId xmlns:a16="http://schemas.microsoft.com/office/drawing/2014/main" id="{73FD0388-00B2-44BF-AB24-26C297B7A1E8}"/>
+                <a16:creationId xmlns:a16="http://schemas.microsoft.com/office/drawing/2014/main" id="{D6FDC2A4-6D84-472D-95F0-848DEF17E4AB}"/>
               </a:ext>
             </a:extLst>
           </p:cNvPr>
@@ -10568,7 +11037,7 @@
           <p:cNvPr id="2" name="">
             <a:extLst xmlns:a="http://schemas.openxmlformats.org/drawingml/2006/main">
               <a:ext uri="{FF2B5EF4-FFF2-40B4-BE49-F238E27FC236}">
-                <a16:creationId xmlns:a16="http://schemas.microsoft.com/office/drawing/2014/main" id="{4FC38F1A-6111-48E5-9864-E0ED2574C2D4}"/>
+                <a16:creationId xmlns:a16="http://schemas.microsoft.com/office/drawing/2014/main" id="{EEEB559B-2AE9-4843-B172-19794A796A10}"/>
               </a:ext>
             </a:extLst>
           </p:cNvPr>
@@ -10618,7 +11087,7 @@
           <p:cNvPr id="3" name="">
             <a:extLst xmlns:a="http://schemas.openxmlformats.org/drawingml/2006/main">
               <a:ext uri="{FF2B5EF4-FFF2-40B4-BE49-F238E27FC236}">
-                <a16:creationId xmlns:a16="http://schemas.microsoft.com/office/drawing/2014/main" id="{BCE33EE4-9CBD-44D4-8F7C-57E5E88C7D6B}"/>
+                <a16:creationId xmlns:a16="http://schemas.microsoft.com/office/drawing/2014/main" id="{A1D43805-280F-40A8-8CA5-133548CB7197}"/>
               </a:ext>
             </a:extLst>
           </p:cNvPr>
@@ -10653,7 +11122,7 @@
           <p:nvPr/>
         </p:nvPicPr>
         <p:blipFill>
-          <a:blip xmlns:r="http://schemas.openxmlformats.org/officeDocument/2006/relationships" xmlns:a="http://schemas.openxmlformats.org/drawingml/2006/main" r:embed="R684addaa4b2b4307"/>
+          <a:blip xmlns:r="http://schemas.openxmlformats.org/officeDocument/2006/relationships" xmlns:a="http://schemas.openxmlformats.org/drawingml/2006/main" r:embed="R9f0f37ca1c574fa7"/>
           <a:stretch xmlns:a="http://schemas.openxmlformats.org/drawingml/2006/main"/>
         </p:blipFill>
         <p:spPr>
@@ -10675,7 +11144,7 @@
           <p:nvPr/>
         </p:nvPicPr>
         <p:blipFill>
-          <a:blip xmlns:r="http://schemas.openxmlformats.org/officeDocument/2006/relationships" xmlns:a="http://schemas.openxmlformats.org/drawingml/2006/main" r:embed="Rb808c91afa9e4288"/>
+          <a:blip xmlns:r="http://schemas.openxmlformats.org/officeDocument/2006/relationships" xmlns:a="http://schemas.openxmlformats.org/drawingml/2006/main" r:embed="Rb113475db77a43b9"/>
           <a:stretch xmlns:a="http://schemas.openxmlformats.org/drawingml/2006/main"/>
         </p:blipFill>
         <p:spPr>
@@ -10693,7 +11162,7 @@
           <p:cNvPr id="6" name="">
             <a:extLst xmlns:a="http://schemas.openxmlformats.org/drawingml/2006/main">
               <a:ext uri="{FF2B5EF4-FFF2-40B4-BE49-F238E27FC236}">
-                <a16:creationId xmlns:a16="http://schemas.microsoft.com/office/drawing/2014/main" id="{787FA1E5-4B77-4C3D-A24F-1F6EE62AD95A}"/>
+                <a16:creationId xmlns:a16="http://schemas.microsoft.com/office/drawing/2014/main" id="{B1E59FFC-267E-4E30-B1E5-F75679596A16}"/>
               </a:ext>
             </a:extLst>
           </p:cNvPr>
@@ -10741,7 +11210,7 @@
     </p:spTree>
     <p:extLst>
       <p:ext uri="{BB962C8B-B14F-4D97-AF65-F5344CB8AC3E}">
-        <p14:creationId xmlns:p14="http://schemas.microsoft.com/office/powerpoint/2010/main" val="1927927895"/>
+        <p14:creationId xmlns:p14="http://schemas.microsoft.com/office/powerpoint/2010/main" val="1855243384"/>
       </p:ext>
     </p:extLst>
   </p:cSld>
@@ -10772,7 +11241,7 @@
           <p:cNvPr id="1" name="">
             <a:extLst xmlns:a="http://schemas.openxmlformats.org/drawingml/2006/main">
               <a:ext uri="{FF2B5EF4-FFF2-40B4-BE49-F238E27FC236}">
-                <a16:creationId xmlns:a16="http://schemas.microsoft.com/office/drawing/2014/main" id="{4AE726CF-30AD-4A69-80C3-293E0E83BC46}"/>
+                <a16:creationId xmlns:a16="http://schemas.microsoft.com/office/drawing/2014/main" id="{B142FB89-B9EF-4567-B1FF-D1056D4108E4}"/>
               </a:ext>
             </a:extLst>
           </p:cNvPr>
@@ -10822,7 +11291,7 @@
           <p:cNvPr id="2" name="">
             <a:extLst xmlns:a="http://schemas.openxmlformats.org/drawingml/2006/main">
               <a:ext uri="{FF2B5EF4-FFF2-40B4-BE49-F238E27FC236}">
-                <a16:creationId xmlns:a16="http://schemas.microsoft.com/office/drawing/2014/main" id="{6B84ED7E-1F84-4C03-82A0-5BDB1D13530D}"/>
+                <a16:creationId xmlns:a16="http://schemas.microsoft.com/office/drawing/2014/main" id="{B4A5973B-B677-4DC8-BCF3-6D46170624B2}"/>
               </a:ext>
             </a:extLst>
           </p:cNvPr>
@@ -10872,7 +11341,7 @@
           <p:cNvPr id="3" name="">
             <a:extLst xmlns:a="http://schemas.openxmlformats.org/drawingml/2006/main">
               <a:ext uri="{FF2B5EF4-FFF2-40B4-BE49-F238E27FC236}">
-                <a16:creationId xmlns:a16="http://schemas.microsoft.com/office/drawing/2014/main" id="{F01AECB8-2309-4225-B643-C6D33EA290C7}"/>
+                <a16:creationId xmlns:a16="http://schemas.microsoft.com/office/drawing/2014/main" id="{3B9E61F8-D2A4-414D-BA74-F3210437F905}"/>
               </a:ext>
             </a:extLst>
           </p:cNvPr>
@@ -10907,7 +11376,7 @@
           <p:nvPr/>
         </p:nvPicPr>
         <p:blipFill>
-          <a:blip xmlns:r="http://schemas.openxmlformats.org/officeDocument/2006/relationships" xmlns:a="http://schemas.openxmlformats.org/drawingml/2006/main" r:embed="Rd70cf3b1fadf42ed"/>
+          <a:blip xmlns:r="http://schemas.openxmlformats.org/officeDocument/2006/relationships" xmlns:a="http://schemas.openxmlformats.org/drawingml/2006/main" r:embed="R04560ac6b3a4419f"/>
           <a:stretch xmlns:a="http://schemas.openxmlformats.org/drawingml/2006/main"/>
         </p:blipFill>
         <p:spPr>
@@ -10925,7 +11394,7 @@
           <p:cNvPr id="5" name="">
             <a:extLst xmlns:a="http://schemas.openxmlformats.org/drawingml/2006/main">
               <a:ext uri="{FF2B5EF4-FFF2-40B4-BE49-F238E27FC236}">
-                <a16:creationId xmlns:a16="http://schemas.microsoft.com/office/drawing/2014/main" id="{226B9C9A-3994-4583-BDA5-6670B84E5BBD}"/>
+                <a16:creationId xmlns:a16="http://schemas.microsoft.com/office/drawing/2014/main" id="{8AC19505-35D9-4A23-8CC0-B187DC28AB7E}"/>
               </a:ext>
             </a:extLst>
           </p:cNvPr>
@@ -10975,7 +11444,7 @@
           <p:cNvPr id="6" name="">
             <a:extLst xmlns:a="http://schemas.openxmlformats.org/drawingml/2006/main">
               <a:ext uri="{FF2B5EF4-FFF2-40B4-BE49-F238E27FC236}">
-                <a16:creationId xmlns:a16="http://schemas.microsoft.com/office/drawing/2014/main" id="{107B6D2E-7E37-4D3C-A051-D984A4C6D764}"/>
+                <a16:creationId xmlns:a16="http://schemas.microsoft.com/office/drawing/2014/main" id="{082DA92A-8D3B-493C-8070-913B018B5109}"/>
               </a:ext>
             </a:extLst>
           </p:cNvPr>
@@ -11023,7 +11492,7 @@
     </p:spTree>
     <p:extLst>
       <p:ext uri="{BB962C8B-B14F-4D97-AF65-F5344CB8AC3E}">
-        <p14:creationId xmlns:p14="http://schemas.microsoft.com/office/powerpoint/2010/main" val="1512654558"/>
+        <p14:creationId xmlns:p14="http://schemas.microsoft.com/office/powerpoint/2010/main" val="1867763216"/>
       </p:ext>
     </p:extLst>
   </p:cSld>
@@ -11054,7 +11523,7 @@
           <p:cNvPr id="1" name="">
             <a:extLst xmlns:a="http://schemas.openxmlformats.org/drawingml/2006/main">
               <a:ext uri="{FF2B5EF4-FFF2-40B4-BE49-F238E27FC236}">
-                <a16:creationId xmlns:a16="http://schemas.microsoft.com/office/drawing/2014/main" id="{3CABB3BF-0121-415E-A731-D97664DF1CAE}"/>
+                <a16:creationId xmlns:a16="http://schemas.microsoft.com/office/drawing/2014/main" id="{4F47C8BD-B313-46FD-B88A-528E9C6AF3E9}"/>
               </a:ext>
             </a:extLst>
           </p:cNvPr>
@@ -11104,7 +11573,7 @@
           <p:cNvPr id="2" name="">
             <a:extLst xmlns:a="http://schemas.openxmlformats.org/drawingml/2006/main">
               <a:ext uri="{FF2B5EF4-FFF2-40B4-BE49-F238E27FC236}">
-                <a16:creationId xmlns:a16="http://schemas.microsoft.com/office/drawing/2014/main" id="{F5BF59D3-9AFA-4F2A-AA51-83FED8829DCD}"/>
+                <a16:creationId xmlns:a16="http://schemas.microsoft.com/office/drawing/2014/main" id="{68C9C11F-B0A7-4FBB-A42F-E5AC8FAB9C01}"/>
               </a:ext>
             </a:extLst>
           </p:cNvPr>
@@ -11154,7 +11623,7 @@
           <p:cNvPr id="3" name="">
             <a:extLst xmlns:a="http://schemas.openxmlformats.org/drawingml/2006/main">
               <a:ext uri="{FF2B5EF4-FFF2-40B4-BE49-F238E27FC236}">
-                <a16:creationId xmlns:a16="http://schemas.microsoft.com/office/drawing/2014/main" id="{E93A0015-97EA-4F58-B685-5E4A67882A1B}"/>
+                <a16:creationId xmlns:a16="http://schemas.microsoft.com/office/drawing/2014/main" id="{01DC196C-59B7-46B6-B098-2A60A8C16DD5}"/>
               </a:ext>
             </a:extLst>
           </p:cNvPr>
@@ -11185,7 +11654,7 @@
           <p:cNvPr id="4" name="">
             <a:extLst xmlns:a="http://schemas.openxmlformats.org/drawingml/2006/main">
               <a:ext uri="{FF2B5EF4-FFF2-40B4-BE49-F238E27FC236}">
-                <a16:creationId xmlns:a16="http://schemas.microsoft.com/office/drawing/2014/main" id="{7F44E798-F6AD-4019-9939-F9FD32324B75}"/>
+                <a16:creationId xmlns:a16="http://schemas.microsoft.com/office/drawing/2014/main" id="{5658EA7F-FF2E-44CA-B70F-7B19CB57D640}"/>
               </a:ext>
             </a:extLst>
           </p:cNvPr>
@@ -11235,7 +11704,7 @@
           <p:cNvPr id="5" name="">
             <a:extLst xmlns:a="http://schemas.openxmlformats.org/drawingml/2006/main">
               <a:ext uri="{FF2B5EF4-FFF2-40B4-BE49-F238E27FC236}">
-                <a16:creationId xmlns:a16="http://schemas.microsoft.com/office/drawing/2014/main" id="{F2C1C8E4-E07C-4E7E-A982-766F160D0404}"/>
+                <a16:creationId xmlns:a16="http://schemas.microsoft.com/office/drawing/2014/main" id="{11055EA0-47F3-4BF7-B6C8-2285AFDA9836}"/>
               </a:ext>
             </a:extLst>
           </p:cNvPr>
@@ -11285,7 +11754,7 @@
           <p:cNvPr id="6" name="">
             <a:extLst xmlns:a="http://schemas.openxmlformats.org/drawingml/2006/main">
               <a:ext uri="{FF2B5EF4-FFF2-40B4-BE49-F238E27FC236}">
-                <a16:creationId xmlns:a16="http://schemas.microsoft.com/office/drawing/2014/main" id="{5F7879A0-40D9-44D0-983D-34F616C93D50}"/>
+                <a16:creationId xmlns:a16="http://schemas.microsoft.com/office/drawing/2014/main" id="{51EF7A93-3E4D-426E-A893-0E6BFB2AA1F3}"/>
               </a:ext>
             </a:extLst>
           </p:cNvPr>
@@ -11335,7 +11804,7 @@
           <p:cNvPr id="7" name="">
             <a:extLst xmlns:a="http://schemas.openxmlformats.org/drawingml/2006/main">
               <a:ext uri="{FF2B5EF4-FFF2-40B4-BE49-F238E27FC236}">
-                <a16:creationId xmlns:a16="http://schemas.microsoft.com/office/drawing/2014/main" id="{E854EBE8-5B98-4F08-BA58-0A3F471DF2EB}"/>
+                <a16:creationId xmlns:a16="http://schemas.microsoft.com/office/drawing/2014/main" id="{A0F080F1-8DAA-4A6F-BDD3-AAE8B7BD4883}"/>
               </a:ext>
             </a:extLst>
           </p:cNvPr>
@@ -11385,7 +11854,7 @@
           <p:cNvPr id="8" name="">
             <a:extLst xmlns:a="http://schemas.openxmlformats.org/drawingml/2006/main">
               <a:ext uri="{FF2B5EF4-FFF2-40B4-BE49-F238E27FC236}">
-                <a16:creationId xmlns:a16="http://schemas.microsoft.com/office/drawing/2014/main" id="{EAA9297D-5E1C-4127-9C95-8D9B3EF1E463}"/>
+                <a16:creationId xmlns:a16="http://schemas.microsoft.com/office/drawing/2014/main" id="{9F45467C-ECC0-4E6E-A343-7AFA30DE05FD}"/>
               </a:ext>
             </a:extLst>
           </p:cNvPr>
@@ -11435,7 +11904,7 @@
           <p:cNvPr id="9" name="">
             <a:extLst xmlns:a="http://schemas.openxmlformats.org/drawingml/2006/main">
               <a:ext uri="{FF2B5EF4-FFF2-40B4-BE49-F238E27FC236}">
-                <a16:creationId xmlns:a16="http://schemas.microsoft.com/office/drawing/2014/main" id="{A2DA713A-1F17-449A-9C7A-97835646EAEC}"/>
+                <a16:creationId xmlns:a16="http://schemas.microsoft.com/office/drawing/2014/main" id="{F33C3E83-48A8-40B0-AA2F-800AEAA87CB7}"/>
               </a:ext>
             </a:extLst>
           </p:cNvPr>
@@ -11485,7 +11954,7 @@
           <p:cNvPr id="10" name="">
             <a:extLst xmlns:a="http://schemas.openxmlformats.org/drawingml/2006/main">
               <a:ext uri="{FF2B5EF4-FFF2-40B4-BE49-F238E27FC236}">
-                <a16:creationId xmlns:a16="http://schemas.microsoft.com/office/drawing/2014/main" id="{57A95553-9C9A-49C8-859B-40CB14CAD8BC}"/>
+                <a16:creationId xmlns:a16="http://schemas.microsoft.com/office/drawing/2014/main" id="{7ACD1559-5670-4A45-AA72-F4A73FAEABCA}"/>
               </a:ext>
             </a:extLst>
           </p:cNvPr>
@@ -11535,7 +12004,7 @@
           <p:cNvPr id="11" name="">
             <a:extLst xmlns:a="http://schemas.openxmlformats.org/drawingml/2006/main">
               <a:ext uri="{FF2B5EF4-FFF2-40B4-BE49-F238E27FC236}">
-                <a16:creationId xmlns:a16="http://schemas.microsoft.com/office/drawing/2014/main" id="{372112F6-D798-444D-BDA0-F3EB33967B2A}"/>
+                <a16:creationId xmlns:a16="http://schemas.microsoft.com/office/drawing/2014/main" id="{13C1DCEB-389D-4DB9-8FCB-2041D084C277}"/>
               </a:ext>
             </a:extLst>
           </p:cNvPr>
@@ -11585,7 +12054,7 @@
           <p:cNvPr id="12" name="">
             <a:extLst xmlns:a="http://schemas.openxmlformats.org/drawingml/2006/main">
               <a:ext uri="{FF2B5EF4-FFF2-40B4-BE49-F238E27FC236}">
-                <a16:creationId xmlns:a16="http://schemas.microsoft.com/office/drawing/2014/main" id="{BC6D61D4-E805-4E05-8AA1-F74C9A87FAC6}"/>
+                <a16:creationId xmlns:a16="http://schemas.microsoft.com/office/drawing/2014/main" id="{0284E9F2-EBB1-4B12-B38D-E951C784DB28}"/>
               </a:ext>
             </a:extLst>
           </p:cNvPr>
@@ -11633,7 +12102,7 @@
     </p:spTree>
     <p:extLst>
       <p:ext uri="{BB962C8B-B14F-4D97-AF65-F5344CB8AC3E}">
-        <p14:creationId xmlns:p14="http://schemas.microsoft.com/office/powerpoint/2010/main" val="256520782"/>
+        <p14:creationId xmlns:p14="http://schemas.microsoft.com/office/powerpoint/2010/main" val="695005521"/>
       </p:ext>
     </p:extLst>
   </p:cSld>
@@ -11664,7 +12133,7 @@
           <p:cNvPr id="1" name="">
             <a:extLst xmlns:a="http://schemas.openxmlformats.org/drawingml/2006/main">
               <a:ext uri="{FF2B5EF4-FFF2-40B4-BE49-F238E27FC236}">
-                <a16:creationId xmlns:a16="http://schemas.microsoft.com/office/drawing/2014/main" id="{539ECA5A-D3FD-4ECE-ADA5-7C31CDAC8D87}"/>
+                <a16:creationId xmlns:a16="http://schemas.microsoft.com/office/drawing/2014/main" id="{77A4EED8-E7FC-435C-994B-5B4E4D445536}"/>
               </a:ext>
             </a:extLst>
           </p:cNvPr>
@@ -11714,7 +12183,7 @@
           <p:cNvPr id="2" name="">
             <a:extLst xmlns:a="http://schemas.openxmlformats.org/drawingml/2006/main">
               <a:ext uri="{FF2B5EF4-FFF2-40B4-BE49-F238E27FC236}">
-                <a16:creationId xmlns:a16="http://schemas.microsoft.com/office/drawing/2014/main" id="{5AB100CF-CBC2-418B-A9C7-5A48DF701048}"/>
+                <a16:creationId xmlns:a16="http://schemas.microsoft.com/office/drawing/2014/main" id="{D64B2910-3854-4243-90A4-911223AA0A22}"/>
               </a:ext>
             </a:extLst>
           </p:cNvPr>
@@ -11764,7 +12233,7 @@
           <p:cNvPr id="3" name="">
             <a:extLst xmlns:a="http://schemas.openxmlformats.org/drawingml/2006/main">
               <a:ext uri="{FF2B5EF4-FFF2-40B4-BE49-F238E27FC236}">
-                <a16:creationId xmlns:a16="http://schemas.microsoft.com/office/drawing/2014/main" id="{0BE2B5F8-37FF-4205-BF7C-B03C4C686CCE}"/>
+                <a16:creationId xmlns:a16="http://schemas.microsoft.com/office/drawing/2014/main" id="{CEA972AE-8DFC-456D-973E-316902C413B3}"/>
               </a:ext>
             </a:extLst>
           </p:cNvPr>
@@ -11795,7 +12264,7 @@
           <p:cNvPr id="4" name="">
             <a:extLst xmlns:a="http://schemas.openxmlformats.org/drawingml/2006/main">
               <a:ext uri="{FF2B5EF4-FFF2-40B4-BE49-F238E27FC236}">
-                <a16:creationId xmlns:a16="http://schemas.microsoft.com/office/drawing/2014/main" id="{7E28AF09-A74D-4D72-BA15-AA0EED9A302D}"/>
+                <a16:creationId xmlns:a16="http://schemas.microsoft.com/office/drawing/2014/main" id="{3492C897-847D-4694-AF21-1F1F38C7D164}"/>
               </a:ext>
             </a:extLst>
           </p:cNvPr>
@@ -11845,7 +12314,7 @@
           <p:cNvPr id="5" name="">
             <a:extLst xmlns:a="http://schemas.openxmlformats.org/drawingml/2006/main">
               <a:ext uri="{FF2B5EF4-FFF2-40B4-BE49-F238E27FC236}">
-                <a16:creationId xmlns:a16="http://schemas.microsoft.com/office/drawing/2014/main" id="{FAE4C8FA-6A63-4AFC-9EF4-0AC6AC41570B}"/>
+                <a16:creationId xmlns:a16="http://schemas.microsoft.com/office/drawing/2014/main" id="{D43B645F-56D1-4A14-BCAA-4B5C0468BE58}"/>
               </a:ext>
             </a:extLst>
           </p:cNvPr>
@@ -11876,7 +12345,7 @@
           <p:cNvPr id="6" name="">
             <a:extLst xmlns:a="http://schemas.openxmlformats.org/drawingml/2006/main">
               <a:ext uri="{FF2B5EF4-FFF2-40B4-BE49-F238E27FC236}">
-                <a16:creationId xmlns:a16="http://schemas.microsoft.com/office/drawing/2014/main" id="{630AD91B-BF9A-493B-A460-3551C63C50E3}"/>
+                <a16:creationId xmlns:a16="http://schemas.microsoft.com/office/drawing/2014/main" id="{DB229F5C-5E15-44E7-8E9E-04B36207C021}"/>
               </a:ext>
             </a:extLst>
           </p:cNvPr>
@@ -11926,7 +12395,7 @@
           <p:cNvPr id="7" name="">
             <a:extLst xmlns:a="http://schemas.openxmlformats.org/drawingml/2006/main">
               <a:ext uri="{FF2B5EF4-FFF2-40B4-BE49-F238E27FC236}">
-                <a16:creationId xmlns:a16="http://schemas.microsoft.com/office/drawing/2014/main" id="{0FD7B5FB-1B13-49B1-B645-2682C07EA205}"/>
+                <a16:creationId xmlns:a16="http://schemas.microsoft.com/office/drawing/2014/main" id="{72C29BC3-18E4-4920-8BED-53E3B0241729}"/>
               </a:ext>
             </a:extLst>
           </p:cNvPr>
@@ -11974,7 +12443,7 @@
     </p:spTree>
     <p:extLst>
       <p:ext uri="{BB962C8B-B14F-4D97-AF65-F5344CB8AC3E}">
-        <p14:creationId xmlns:p14="http://schemas.microsoft.com/office/powerpoint/2010/main" val="314139023"/>
+        <p14:creationId xmlns:p14="http://schemas.microsoft.com/office/powerpoint/2010/main" val="473681075"/>
       </p:ext>
     </p:extLst>
   </p:cSld>
@@ -12005,7 +12474,7 @@
           <p:cNvPr id="1" name="">
             <a:extLst xmlns:a="http://schemas.openxmlformats.org/drawingml/2006/main">
               <a:ext uri="{FF2B5EF4-FFF2-40B4-BE49-F238E27FC236}">
-                <a16:creationId xmlns:a16="http://schemas.microsoft.com/office/drawing/2014/main" id="{EEECC5C1-BE7D-4C42-BC29-DBD1AAB5A69C}"/>
+                <a16:creationId xmlns:a16="http://schemas.microsoft.com/office/drawing/2014/main" id="{0317D05B-535B-4D2C-B311-21F6AC278CB2}"/>
               </a:ext>
             </a:extLst>
           </p:cNvPr>
@@ -12055,7 +12524,7 @@
           <p:cNvPr id="2" name="">
             <a:extLst xmlns:a="http://schemas.openxmlformats.org/drawingml/2006/main">
               <a:ext uri="{FF2B5EF4-FFF2-40B4-BE49-F238E27FC236}">
-                <a16:creationId xmlns:a16="http://schemas.microsoft.com/office/drawing/2014/main" id="{B5FCCD70-8265-44E1-AD16-6AF32F59ACF8}"/>
+                <a16:creationId xmlns:a16="http://schemas.microsoft.com/office/drawing/2014/main" id="{EF568F1E-BF10-422B-B512-2D198080DA46}"/>
               </a:ext>
             </a:extLst>
           </p:cNvPr>
@@ -12105,7 +12574,7 @@
           <p:cNvPr id="3" name="">
             <a:extLst xmlns:a="http://schemas.openxmlformats.org/drawingml/2006/main">
               <a:ext uri="{FF2B5EF4-FFF2-40B4-BE49-F238E27FC236}">
-                <a16:creationId xmlns:a16="http://schemas.microsoft.com/office/drawing/2014/main" id="{F25EF054-E7E9-4B5E-B6CA-88A8688F542C}"/>
+                <a16:creationId xmlns:a16="http://schemas.microsoft.com/office/drawing/2014/main" id="{DBA7BBFA-90DC-4E95-88E2-43398514B89E}"/>
               </a:ext>
             </a:extLst>
           </p:cNvPr>
@@ -12136,7 +12605,7 @@
           <p:cNvPr id="4" name="">
             <a:extLst xmlns:a="http://schemas.openxmlformats.org/drawingml/2006/main">
               <a:ext uri="{FF2B5EF4-FFF2-40B4-BE49-F238E27FC236}">
-                <a16:creationId xmlns:a16="http://schemas.microsoft.com/office/drawing/2014/main" id="{22ED6D2B-CC3A-43A2-8A4D-6341C4F1698C}"/>
+                <a16:creationId xmlns:a16="http://schemas.microsoft.com/office/drawing/2014/main" id="{6B0C3898-5C3E-4358-B630-A42E07674193}"/>
               </a:ext>
             </a:extLst>
           </p:cNvPr>
@@ -12169,7 +12638,7 @@
           <p:cNvPr id="5" name="">
             <a:extLst xmlns:a="http://schemas.openxmlformats.org/drawingml/2006/main">
               <a:ext uri="{FF2B5EF4-FFF2-40B4-BE49-F238E27FC236}">
-                <a16:creationId xmlns:a16="http://schemas.microsoft.com/office/drawing/2014/main" id="{31D2AD61-1B55-42FA-9065-C8C288EFCE87}"/>
+                <a16:creationId xmlns:a16="http://schemas.microsoft.com/office/drawing/2014/main" id="{63E5ACFB-CD05-4942-98CB-5258BBDFBC68}"/>
               </a:ext>
             </a:extLst>
           </p:cNvPr>
@@ -12219,7 +12688,7 @@
           <p:cNvPr id="6" name="">
             <a:extLst xmlns:a="http://schemas.openxmlformats.org/drawingml/2006/main">
               <a:ext uri="{FF2B5EF4-FFF2-40B4-BE49-F238E27FC236}">
-                <a16:creationId xmlns:a16="http://schemas.microsoft.com/office/drawing/2014/main" id="{CB3914D4-0C45-496A-BCDC-E38B6A5841ED}"/>
+                <a16:creationId xmlns:a16="http://schemas.microsoft.com/office/drawing/2014/main" id="{0CD40973-A8C0-45F4-A9AD-BB45E13BE110}"/>
               </a:ext>
             </a:extLst>
           </p:cNvPr>
@@ -12269,7 +12738,7 @@
           <p:cNvPr id="7" name="">
             <a:extLst xmlns:a="http://schemas.openxmlformats.org/drawingml/2006/main">
               <a:ext uri="{FF2B5EF4-FFF2-40B4-BE49-F238E27FC236}">
-                <a16:creationId xmlns:a16="http://schemas.microsoft.com/office/drawing/2014/main" id="{094E9D71-C81E-46E9-9069-B0277DFF5C02}"/>
+                <a16:creationId xmlns:a16="http://schemas.microsoft.com/office/drawing/2014/main" id="{8A80C1D8-6940-4AC4-A125-FF03F6798B45}"/>
               </a:ext>
             </a:extLst>
           </p:cNvPr>
@@ -12319,7 +12788,7 @@
           <p:cNvPr id="8" name="">
             <a:extLst xmlns:a="http://schemas.openxmlformats.org/drawingml/2006/main">
               <a:ext uri="{FF2B5EF4-FFF2-40B4-BE49-F238E27FC236}">
-                <a16:creationId xmlns:a16="http://schemas.microsoft.com/office/drawing/2014/main" id="{BCFD5651-4C0E-461C-B841-6CDA6EE6B6D7}"/>
+                <a16:creationId xmlns:a16="http://schemas.microsoft.com/office/drawing/2014/main" id="{72AA3795-3F06-49CA-B7AC-6D5D1CACA40D}"/>
               </a:ext>
             </a:extLst>
           </p:cNvPr>
@@ -12352,7 +12821,7 @@
           <p:cNvPr id="9" name="">
             <a:extLst xmlns:a="http://schemas.openxmlformats.org/drawingml/2006/main">
               <a:ext uri="{FF2B5EF4-FFF2-40B4-BE49-F238E27FC236}">
-                <a16:creationId xmlns:a16="http://schemas.microsoft.com/office/drawing/2014/main" id="{E8795E83-1D33-4C68-8C32-04D50D36273C}"/>
+                <a16:creationId xmlns:a16="http://schemas.microsoft.com/office/drawing/2014/main" id="{EFAAFAD1-74FC-4309-B802-A6743464A55A}"/>
               </a:ext>
             </a:extLst>
           </p:cNvPr>
@@ -12402,7 +12871,7 @@
           <p:cNvPr id="10" name="">
             <a:extLst xmlns:a="http://schemas.openxmlformats.org/drawingml/2006/main">
               <a:ext uri="{FF2B5EF4-FFF2-40B4-BE49-F238E27FC236}">
-                <a16:creationId xmlns:a16="http://schemas.microsoft.com/office/drawing/2014/main" id="{AA1C11B5-A51C-4BFC-A6AB-41187959A9D8}"/>
+                <a16:creationId xmlns:a16="http://schemas.microsoft.com/office/drawing/2014/main" id="{C2DFB21A-C619-4533-8E6D-FE1A1A6B93E3}"/>
               </a:ext>
             </a:extLst>
           </p:cNvPr>
@@ -12452,7 +12921,7 @@
           <p:cNvPr id="11" name="">
             <a:extLst xmlns:a="http://schemas.openxmlformats.org/drawingml/2006/main">
               <a:ext uri="{FF2B5EF4-FFF2-40B4-BE49-F238E27FC236}">
-                <a16:creationId xmlns:a16="http://schemas.microsoft.com/office/drawing/2014/main" id="{EC777705-FE9B-4761-94AB-26CA7E47DC6D}"/>
+                <a16:creationId xmlns:a16="http://schemas.microsoft.com/office/drawing/2014/main" id="{CDE42413-EE43-47C0-BB2E-37A98B046A66}"/>
               </a:ext>
             </a:extLst>
           </p:cNvPr>
@@ -12502,7 +12971,7 @@
           <p:cNvPr id="12" name="">
             <a:extLst xmlns:a="http://schemas.openxmlformats.org/drawingml/2006/main">
               <a:ext uri="{FF2B5EF4-FFF2-40B4-BE49-F238E27FC236}">
-                <a16:creationId xmlns:a16="http://schemas.microsoft.com/office/drawing/2014/main" id="{270078FC-0D17-448F-B67D-CF0C2EF58A38}"/>
+                <a16:creationId xmlns:a16="http://schemas.microsoft.com/office/drawing/2014/main" id="{C26C44E0-2E84-43BD-B1A8-75AC08D4BE41}"/>
               </a:ext>
             </a:extLst>
           </p:cNvPr>
@@ -12535,7 +13004,7 @@
           <p:cNvPr id="13" name="">
             <a:extLst xmlns:a="http://schemas.openxmlformats.org/drawingml/2006/main">
               <a:ext uri="{FF2B5EF4-FFF2-40B4-BE49-F238E27FC236}">
-                <a16:creationId xmlns:a16="http://schemas.microsoft.com/office/drawing/2014/main" id="{392D14AA-85EC-4BFB-ABA2-98734C55E75A}"/>
+                <a16:creationId xmlns:a16="http://schemas.microsoft.com/office/drawing/2014/main" id="{004E680A-9974-4D76-8A66-EF417E61E9CF}"/>
               </a:ext>
             </a:extLst>
           </p:cNvPr>
@@ -12585,7 +13054,7 @@
           <p:cNvPr id="14" name="">
             <a:extLst xmlns:a="http://schemas.openxmlformats.org/drawingml/2006/main">
               <a:ext uri="{FF2B5EF4-FFF2-40B4-BE49-F238E27FC236}">
-                <a16:creationId xmlns:a16="http://schemas.microsoft.com/office/drawing/2014/main" id="{6E955D60-4072-490D-8CE9-4A41A8B7BC9E}"/>
+                <a16:creationId xmlns:a16="http://schemas.microsoft.com/office/drawing/2014/main" id="{550B602A-24D8-493B-8F2B-C07389A8A36A}"/>
               </a:ext>
             </a:extLst>
           </p:cNvPr>
@@ -12635,7 +13104,7 @@
           <p:cNvPr id="15" name="">
             <a:extLst xmlns:a="http://schemas.openxmlformats.org/drawingml/2006/main">
               <a:ext uri="{FF2B5EF4-FFF2-40B4-BE49-F238E27FC236}">
-                <a16:creationId xmlns:a16="http://schemas.microsoft.com/office/drawing/2014/main" id="{E14F6EF7-3C02-4E21-93C8-967616E22017}"/>
+                <a16:creationId xmlns:a16="http://schemas.microsoft.com/office/drawing/2014/main" id="{0604CFF1-78C5-4539-8609-3B15E1921A0E}"/>
               </a:ext>
             </a:extLst>
           </p:cNvPr>
@@ -12685,7 +13154,7 @@
           <p:cNvPr id="16" name="">
             <a:extLst xmlns:a="http://schemas.openxmlformats.org/drawingml/2006/main">
               <a:ext uri="{FF2B5EF4-FFF2-40B4-BE49-F238E27FC236}">
-                <a16:creationId xmlns:a16="http://schemas.microsoft.com/office/drawing/2014/main" id="{378BAC0E-81CC-4051-8C3C-3A4470DF24DA}"/>
+                <a16:creationId xmlns:a16="http://schemas.microsoft.com/office/drawing/2014/main" id="{C5A2293B-12B8-4557-B50E-C0C538649026}"/>
               </a:ext>
             </a:extLst>
           </p:cNvPr>
@@ -12718,7 +13187,7 @@
           <p:cNvPr id="17" name="">
             <a:extLst xmlns:a="http://schemas.openxmlformats.org/drawingml/2006/main">
               <a:ext uri="{FF2B5EF4-FFF2-40B4-BE49-F238E27FC236}">
-                <a16:creationId xmlns:a16="http://schemas.microsoft.com/office/drawing/2014/main" id="{993E2033-72C8-4979-A203-6D92B49F7310}"/>
+                <a16:creationId xmlns:a16="http://schemas.microsoft.com/office/drawing/2014/main" id="{DD4DD523-7440-4DAE-9CA5-53FCBDF3DA32}"/>
               </a:ext>
             </a:extLst>
           </p:cNvPr>
@@ -12768,7 +13237,7 @@
           <p:cNvPr id="18" name="">
             <a:extLst xmlns:a="http://schemas.openxmlformats.org/drawingml/2006/main">
               <a:ext uri="{FF2B5EF4-FFF2-40B4-BE49-F238E27FC236}">
-                <a16:creationId xmlns:a16="http://schemas.microsoft.com/office/drawing/2014/main" id="{47FD8333-24AA-47CC-B565-41C4203D81CC}"/>
+                <a16:creationId xmlns:a16="http://schemas.microsoft.com/office/drawing/2014/main" id="{8BFF7467-5446-4A3F-8765-AF9A113C3B98}"/>
               </a:ext>
             </a:extLst>
           </p:cNvPr>
@@ -12818,7 +13287,7 @@
           <p:cNvPr id="19" name="">
             <a:extLst xmlns:a="http://schemas.openxmlformats.org/drawingml/2006/main">
               <a:ext uri="{FF2B5EF4-FFF2-40B4-BE49-F238E27FC236}">
-                <a16:creationId xmlns:a16="http://schemas.microsoft.com/office/drawing/2014/main" id="{2DB840E5-04EA-4325-919A-B92065C37D07}"/>
+                <a16:creationId xmlns:a16="http://schemas.microsoft.com/office/drawing/2014/main" id="{41951CB1-4DD1-4720-B20C-F1E4C29274AB}"/>
               </a:ext>
             </a:extLst>
           </p:cNvPr>
@@ -12868,7 +13337,7 @@
           <p:cNvPr id="20" name="">
             <a:extLst xmlns:a="http://schemas.openxmlformats.org/drawingml/2006/main">
               <a:ext uri="{FF2B5EF4-FFF2-40B4-BE49-F238E27FC236}">
-                <a16:creationId xmlns:a16="http://schemas.microsoft.com/office/drawing/2014/main" id="{AC85894F-208A-46A1-9F0F-7B7D35F9D051}"/>
+                <a16:creationId xmlns:a16="http://schemas.microsoft.com/office/drawing/2014/main" id="{BF294DD2-4F5E-4EF6-873E-1ABDEDE9D79E}"/>
               </a:ext>
             </a:extLst>
           </p:cNvPr>
@@ -12916,7 +13385,7 @@
     </p:spTree>
     <p:extLst>
       <p:ext uri="{BB962C8B-B14F-4D97-AF65-F5344CB8AC3E}">
-        <p14:creationId xmlns:p14="http://schemas.microsoft.com/office/powerpoint/2010/main" val="643742071"/>
+        <p14:creationId xmlns:p14="http://schemas.microsoft.com/office/powerpoint/2010/main" val="1926317966"/>
       </p:ext>
     </p:extLst>
   </p:cSld>
@@ -12947,7 +13416,7 @@
           <p:cNvPr id="1" name="">
             <a:extLst xmlns:a="http://schemas.openxmlformats.org/drawingml/2006/main">
               <a:ext uri="{FF2B5EF4-FFF2-40B4-BE49-F238E27FC236}">
-                <a16:creationId xmlns:a16="http://schemas.microsoft.com/office/drawing/2014/main" id="{254E472E-849E-4B2D-A249-41A24E5D9C6B}"/>
+                <a16:creationId xmlns:a16="http://schemas.microsoft.com/office/drawing/2014/main" id="{5270F3D7-09F4-45AD-BF1D-5F8651513DC2}"/>
               </a:ext>
             </a:extLst>
           </p:cNvPr>
@@ -12997,7 +13466,7 @@
           <p:cNvPr id="2" name="">
             <a:extLst xmlns:a="http://schemas.openxmlformats.org/drawingml/2006/main">
               <a:ext uri="{FF2B5EF4-FFF2-40B4-BE49-F238E27FC236}">
-                <a16:creationId xmlns:a16="http://schemas.microsoft.com/office/drawing/2014/main" id="{7F4A35FC-BCF1-4EF3-AE78-59B77F6BDD13}"/>
+                <a16:creationId xmlns:a16="http://schemas.microsoft.com/office/drawing/2014/main" id="{D4777AE5-F502-4D26-8D16-252C096F4DA7}"/>
               </a:ext>
             </a:extLst>
           </p:cNvPr>
@@ -13047,7 +13516,7 @@
           <p:cNvPr id="3" name="">
             <a:extLst xmlns:a="http://schemas.openxmlformats.org/drawingml/2006/main">
               <a:ext uri="{FF2B5EF4-FFF2-40B4-BE49-F238E27FC236}">
-                <a16:creationId xmlns:a16="http://schemas.microsoft.com/office/drawing/2014/main" id="{EA87EE5D-7EAC-49E5-AF49-D8401AF8AE64}"/>
+                <a16:creationId xmlns:a16="http://schemas.microsoft.com/office/drawing/2014/main" id="{ADFD2A03-0D77-4F49-BB63-AF40CE2FE9A7}"/>
               </a:ext>
             </a:extLst>
           </p:cNvPr>
@@ -13082,7 +13551,7 @@
           <p:nvPr/>
         </p:nvPicPr>
         <p:blipFill>
-          <a:blip xmlns:r="http://schemas.openxmlformats.org/officeDocument/2006/relationships" xmlns:a="http://schemas.openxmlformats.org/drawingml/2006/main" r:embed="Rc6eb5ab0b8974c4f"/>
+          <a:blip xmlns:r="http://schemas.openxmlformats.org/officeDocument/2006/relationships" xmlns:a="http://schemas.openxmlformats.org/drawingml/2006/main" r:embed="R336e960027fd484e"/>
           <a:stretch xmlns:a="http://schemas.openxmlformats.org/drawingml/2006/main"/>
         </p:blipFill>
         <p:spPr>
@@ -13100,7 +13569,7 @@
           <p:cNvPr id="5" name="">
             <a:extLst xmlns:a="http://schemas.openxmlformats.org/drawingml/2006/main">
               <a:ext uri="{FF2B5EF4-FFF2-40B4-BE49-F238E27FC236}">
-                <a16:creationId xmlns:a16="http://schemas.microsoft.com/office/drawing/2014/main" id="{50A5420D-3711-424F-B058-656C69543ADF}"/>
+                <a16:creationId xmlns:a16="http://schemas.microsoft.com/office/drawing/2014/main" id="{78795F33-6BAD-4017-A1BA-48AD6DF72AE4}"/>
               </a:ext>
             </a:extLst>
           </p:cNvPr>
@@ -13150,7 +13619,7 @@
           <p:cNvPr id="6" name="">
             <a:extLst xmlns:a="http://schemas.openxmlformats.org/drawingml/2006/main">
               <a:ext uri="{FF2B5EF4-FFF2-40B4-BE49-F238E27FC236}">
-                <a16:creationId xmlns:a16="http://schemas.microsoft.com/office/drawing/2014/main" id="{C3D0FBA1-0D06-40B4-B762-20CFD9AAB317}"/>
+                <a16:creationId xmlns:a16="http://schemas.microsoft.com/office/drawing/2014/main" id="{CACE54F0-0D58-46F3-8A68-40EE96335F56}"/>
               </a:ext>
             </a:extLst>
           </p:cNvPr>
@@ -13198,7 +13667,7 @@
     </p:spTree>
     <p:extLst>
       <p:ext uri="{BB962C8B-B14F-4D97-AF65-F5344CB8AC3E}">
-        <p14:creationId xmlns:p14="http://schemas.microsoft.com/office/powerpoint/2010/main" val="1116991212"/>
+        <p14:creationId xmlns:p14="http://schemas.microsoft.com/office/powerpoint/2010/main" val="1909510205"/>
       </p:ext>
     </p:extLst>
   </p:cSld>
@@ -13229,7 +13698,7 @@
           <p:cNvPr id="1" name="">
             <a:extLst xmlns:a="http://schemas.openxmlformats.org/drawingml/2006/main">
               <a:ext uri="{FF2B5EF4-FFF2-40B4-BE49-F238E27FC236}">
-                <a16:creationId xmlns:a16="http://schemas.microsoft.com/office/drawing/2014/main" id="{71853458-E5A8-496D-AEFE-FB7FCB6CC4C6}"/>
+                <a16:creationId xmlns:a16="http://schemas.microsoft.com/office/drawing/2014/main" id="{0162155D-0EE1-4FE3-A04D-65096372F7EB}"/>
               </a:ext>
             </a:extLst>
           </p:cNvPr>
@@ -13279,7 +13748,7 @@
           <p:cNvPr id="2" name="">
             <a:extLst xmlns:a="http://schemas.openxmlformats.org/drawingml/2006/main">
               <a:ext uri="{FF2B5EF4-FFF2-40B4-BE49-F238E27FC236}">
-                <a16:creationId xmlns:a16="http://schemas.microsoft.com/office/drawing/2014/main" id="{F778F465-EEFF-49F5-8D69-DB71784FF5E4}"/>
+                <a16:creationId xmlns:a16="http://schemas.microsoft.com/office/drawing/2014/main" id="{ED4F0465-6804-4FFD-BE27-0C8F128B8875}"/>
               </a:ext>
             </a:extLst>
           </p:cNvPr>
@@ -13329,7 +13798,7 @@
           <p:cNvPr id="3" name="">
             <a:extLst xmlns:a="http://schemas.openxmlformats.org/drawingml/2006/main">
               <a:ext uri="{FF2B5EF4-FFF2-40B4-BE49-F238E27FC236}">
-                <a16:creationId xmlns:a16="http://schemas.microsoft.com/office/drawing/2014/main" id="{D15C8AF4-6A11-4D23-8569-CB26877ABC59}"/>
+                <a16:creationId xmlns:a16="http://schemas.microsoft.com/office/drawing/2014/main" id="{BBA78CA0-3E0D-4D76-BEBF-5E3678017BED}"/>
               </a:ext>
             </a:extLst>
           </p:cNvPr>
@@ -13364,7 +13833,7 @@
           <p:nvPr/>
         </p:nvPicPr>
         <p:blipFill>
-          <a:blip xmlns:r="http://schemas.openxmlformats.org/officeDocument/2006/relationships" xmlns:a="http://schemas.openxmlformats.org/drawingml/2006/main" r:embed="Rb3fa32a9afe34c8b"/>
+          <a:blip xmlns:r="http://schemas.openxmlformats.org/officeDocument/2006/relationships" xmlns:a="http://schemas.openxmlformats.org/drawingml/2006/main" r:embed="R2fa7ead47c134642"/>
           <a:stretch xmlns:a="http://schemas.openxmlformats.org/drawingml/2006/main"/>
         </p:blipFill>
         <p:spPr>
@@ -13382,7 +13851,7 @@
           <p:cNvPr id="5" name="">
             <a:extLst xmlns:a="http://schemas.openxmlformats.org/drawingml/2006/main">
               <a:ext uri="{FF2B5EF4-FFF2-40B4-BE49-F238E27FC236}">
-                <a16:creationId xmlns:a16="http://schemas.microsoft.com/office/drawing/2014/main" id="{0B119201-FDD5-41B9-8A8A-44D92CE49302}"/>
+                <a16:creationId xmlns:a16="http://schemas.microsoft.com/office/drawing/2014/main" id="{81DFF30D-C172-473F-828A-2567DDC311BF}"/>
               </a:ext>
             </a:extLst>
           </p:cNvPr>
@@ -13432,7 +13901,7 @@
           <p:cNvPr id="6" name="">
             <a:extLst xmlns:a="http://schemas.openxmlformats.org/drawingml/2006/main">
               <a:ext uri="{FF2B5EF4-FFF2-40B4-BE49-F238E27FC236}">
-                <a16:creationId xmlns:a16="http://schemas.microsoft.com/office/drawing/2014/main" id="{3A69715D-6876-446E-AC28-8E7B3EDE65C3}"/>
+                <a16:creationId xmlns:a16="http://schemas.microsoft.com/office/drawing/2014/main" id="{3F47CC54-6794-4DC5-8280-7D401A019BCD}"/>
               </a:ext>
             </a:extLst>
           </p:cNvPr>
@@ -13480,7 +13949,7 @@
     </p:spTree>
     <p:extLst>
       <p:ext uri="{BB962C8B-B14F-4D97-AF65-F5344CB8AC3E}">
-        <p14:creationId xmlns:p14="http://schemas.microsoft.com/office/powerpoint/2010/main" val="1512508285"/>
+        <p14:creationId xmlns:p14="http://schemas.microsoft.com/office/powerpoint/2010/main" val="2076716016"/>
       </p:ext>
     </p:extLst>
   </p:cSld>
@@ -13511,7 +13980,7 @@
           <p:cNvPr id="1" name="">
             <a:extLst xmlns:a="http://schemas.openxmlformats.org/drawingml/2006/main">
               <a:ext uri="{FF2B5EF4-FFF2-40B4-BE49-F238E27FC236}">
-                <a16:creationId xmlns:a16="http://schemas.microsoft.com/office/drawing/2014/main" id="{3883F3A1-B29B-4071-8706-30C8184818E1}"/>
+                <a16:creationId xmlns:a16="http://schemas.microsoft.com/office/drawing/2014/main" id="{A91F2467-466E-4E9E-95A8-9FCCD27F69BD}"/>
               </a:ext>
             </a:extLst>
           </p:cNvPr>
@@ -13561,7 +14030,7 @@
           <p:cNvPr id="2" name="">
             <a:extLst xmlns:a="http://schemas.openxmlformats.org/drawingml/2006/main">
               <a:ext uri="{FF2B5EF4-FFF2-40B4-BE49-F238E27FC236}">
-                <a16:creationId xmlns:a16="http://schemas.microsoft.com/office/drawing/2014/main" id="{CEE5D7E1-879B-407B-8522-3EA70863520F}"/>
+                <a16:creationId xmlns:a16="http://schemas.microsoft.com/office/drawing/2014/main" id="{1943F59C-97BA-4631-A209-0E1A87BDF908}"/>
               </a:ext>
             </a:extLst>
           </p:cNvPr>
@@ -13611,7 +14080,7 @@
           <p:cNvPr id="3" name="">
             <a:extLst xmlns:a="http://schemas.openxmlformats.org/drawingml/2006/main">
               <a:ext uri="{FF2B5EF4-FFF2-40B4-BE49-F238E27FC236}">
-                <a16:creationId xmlns:a16="http://schemas.microsoft.com/office/drawing/2014/main" id="{523754C9-37D3-4433-80FF-07AAFC891C11}"/>
+                <a16:creationId xmlns:a16="http://schemas.microsoft.com/office/drawing/2014/main" id="{BD5D4B53-D723-441F-9A8E-C38E895E796E}"/>
               </a:ext>
             </a:extLst>
           </p:cNvPr>
@@ -13642,7 +14111,7 @@
           <p:cNvPr id="4" name="">
             <a:extLst xmlns:a="http://schemas.openxmlformats.org/drawingml/2006/main">
               <a:ext uri="{FF2B5EF4-FFF2-40B4-BE49-F238E27FC236}">
-                <a16:creationId xmlns:a16="http://schemas.microsoft.com/office/drawing/2014/main" id="{854EB2CD-4222-4FE1-B313-66237B3711F8}"/>
+                <a16:creationId xmlns:a16="http://schemas.microsoft.com/office/drawing/2014/main" id="{4A843450-F21A-44BF-BE5E-3B8DDF181CC1}"/>
               </a:ext>
             </a:extLst>
           </p:cNvPr>
@@ -13692,7 +14161,7 @@
           <p:cNvPr id="5" name="">
             <a:extLst xmlns:a="http://schemas.openxmlformats.org/drawingml/2006/main">
               <a:ext uri="{FF2B5EF4-FFF2-40B4-BE49-F238E27FC236}">
-                <a16:creationId xmlns:a16="http://schemas.microsoft.com/office/drawing/2014/main" id="{C71FC0AF-EA32-4A91-9F9B-59AE17D76EFA}"/>
+                <a16:creationId xmlns:a16="http://schemas.microsoft.com/office/drawing/2014/main" id="{0A66A8CF-F1FF-4569-BDF8-7088EDC67599}"/>
               </a:ext>
             </a:extLst>
           </p:cNvPr>
@@ -13742,7 +14211,7 @@
           <p:cNvPr id="6" name="">
             <a:extLst xmlns:a="http://schemas.openxmlformats.org/drawingml/2006/main">
               <a:ext uri="{FF2B5EF4-FFF2-40B4-BE49-F238E27FC236}">
-                <a16:creationId xmlns:a16="http://schemas.microsoft.com/office/drawing/2014/main" id="{E827766A-4DD5-4F8C-A3E3-82CA85631D4B}"/>
+                <a16:creationId xmlns:a16="http://schemas.microsoft.com/office/drawing/2014/main" id="{1DCDD1F0-AAC4-49AF-9BE9-68295A988EE2}"/>
               </a:ext>
             </a:extLst>
           </p:cNvPr>
@@ -13792,7 +14261,7 @@
           <p:cNvPr id="7" name="">
             <a:extLst xmlns:a="http://schemas.openxmlformats.org/drawingml/2006/main">
               <a:ext uri="{FF2B5EF4-FFF2-40B4-BE49-F238E27FC236}">
-                <a16:creationId xmlns:a16="http://schemas.microsoft.com/office/drawing/2014/main" id="{DCB2B7D4-6EFF-49C1-A7EB-59D6E6BF128E}"/>
+                <a16:creationId xmlns:a16="http://schemas.microsoft.com/office/drawing/2014/main" id="{D5DABAD3-1132-41AB-9CB2-4DEBDF8263DD}"/>
               </a:ext>
             </a:extLst>
           </p:cNvPr>
@@ -13842,7 +14311,7 @@
           <p:cNvPr id="8" name="">
             <a:extLst xmlns:a="http://schemas.openxmlformats.org/drawingml/2006/main">
               <a:ext uri="{FF2B5EF4-FFF2-40B4-BE49-F238E27FC236}">
-                <a16:creationId xmlns:a16="http://schemas.microsoft.com/office/drawing/2014/main" id="{74C177F2-4ACD-4480-A51F-95ABE27D4F61}"/>
+                <a16:creationId xmlns:a16="http://schemas.microsoft.com/office/drawing/2014/main" id="{C0A67893-97FF-4B9A-BB05-4376D570437E}"/>
               </a:ext>
             </a:extLst>
           </p:cNvPr>
@@ -13892,7 +14361,7 @@
           <p:cNvPr id="9" name="">
             <a:extLst xmlns:a="http://schemas.openxmlformats.org/drawingml/2006/main">
               <a:ext uri="{FF2B5EF4-FFF2-40B4-BE49-F238E27FC236}">
-                <a16:creationId xmlns:a16="http://schemas.microsoft.com/office/drawing/2014/main" id="{CD98EA7D-D5B3-4891-A316-3B0CC4B15479}"/>
+                <a16:creationId xmlns:a16="http://schemas.microsoft.com/office/drawing/2014/main" id="{26CB7415-CAE4-4B86-BB6F-91A32791C8B1}"/>
               </a:ext>
             </a:extLst>
           </p:cNvPr>
@@ -13942,7 +14411,7 @@
           <p:cNvPr id="10" name="">
             <a:extLst xmlns:a="http://schemas.openxmlformats.org/drawingml/2006/main">
               <a:ext uri="{FF2B5EF4-FFF2-40B4-BE49-F238E27FC236}">
-                <a16:creationId xmlns:a16="http://schemas.microsoft.com/office/drawing/2014/main" id="{52141D51-6BBD-40D0-9DFD-1FFEF62BD3A0}"/>
+                <a16:creationId xmlns:a16="http://schemas.microsoft.com/office/drawing/2014/main" id="{4EE513B7-0F41-4589-B514-3C0103644619}"/>
               </a:ext>
             </a:extLst>
           </p:cNvPr>
@@ -13992,7 +14461,7 @@
           <p:cNvPr id="11" name="">
             <a:extLst xmlns:a="http://schemas.openxmlformats.org/drawingml/2006/main">
               <a:ext uri="{FF2B5EF4-FFF2-40B4-BE49-F238E27FC236}">
-                <a16:creationId xmlns:a16="http://schemas.microsoft.com/office/drawing/2014/main" id="{A292502E-2F6E-4C89-BBCC-580A3CC17E75}"/>
+                <a16:creationId xmlns:a16="http://schemas.microsoft.com/office/drawing/2014/main" id="{91DFB1AC-76F9-4A80-A3A3-BAEB0BCA8D33}"/>
               </a:ext>
             </a:extLst>
           </p:cNvPr>
@@ -14042,7 +14511,7 @@
           <p:cNvPr id="12" name="">
             <a:extLst xmlns:a="http://schemas.openxmlformats.org/drawingml/2006/main">
               <a:ext uri="{FF2B5EF4-FFF2-40B4-BE49-F238E27FC236}">
-                <a16:creationId xmlns:a16="http://schemas.microsoft.com/office/drawing/2014/main" id="{4D38562D-5299-4A8A-A7D3-153E7EADF7E3}"/>
+                <a16:creationId xmlns:a16="http://schemas.microsoft.com/office/drawing/2014/main" id="{0A2B9616-C5CB-4009-A9F4-88CB56670594}"/>
               </a:ext>
             </a:extLst>
           </p:cNvPr>
@@ -14090,7 +14559,7 @@
     </p:spTree>
     <p:extLst>
       <p:ext uri="{BB962C8B-B14F-4D97-AF65-F5344CB8AC3E}">
-        <p14:creationId xmlns:p14="http://schemas.microsoft.com/office/powerpoint/2010/main" val="113016124"/>
+        <p14:creationId xmlns:p14="http://schemas.microsoft.com/office/powerpoint/2010/main" val="780901704"/>
       </p:ext>
     </p:extLst>
   </p:cSld>
@@ -14121,7 +14590,7 @@
           <p:cNvPr id="1" name="">
             <a:extLst xmlns:a="http://schemas.openxmlformats.org/drawingml/2006/main">
               <a:ext uri="{FF2B5EF4-FFF2-40B4-BE49-F238E27FC236}">
-                <a16:creationId xmlns:a16="http://schemas.microsoft.com/office/drawing/2014/main" id="{58A0C013-A2C5-4AE9-9617-4F6C0F0B9A31}"/>
+                <a16:creationId xmlns:a16="http://schemas.microsoft.com/office/drawing/2014/main" id="{E73FCC74-7166-42F9-B39E-0AEB4DC979E4}"/>
               </a:ext>
             </a:extLst>
           </p:cNvPr>
@@ -14171,7 +14640,7 @@
           <p:cNvPr id="2" name="">
             <a:extLst xmlns:a="http://schemas.openxmlformats.org/drawingml/2006/main">
               <a:ext uri="{FF2B5EF4-FFF2-40B4-BE49-F238E27FC236}">
-                <a16:creationId xmlns:a16="http://schemas.microsoft.com/office/drawing/2014/main" id="{C72A36F0-7B0A-49E3-9E9F-A95620313CF9}"/>
+                <a16:creationId xmlns:a16="http://schemas.microsoft.com/office/drawing/2014/main" id="{CDA3C5DB-3218-4A7A-A16C-7DC32E7A5089}"/>
               </a:ext>
             </a:extLst>
           </p:cNvPr>
@@ -14221,7 +14690,7 @@
           <p:cNvPr id="3" name="">
             <a:extLst xmlns:a="http://schemas.openxmlformats.org/drawingml/2006/main">
               <a:ext uri="{FF2B5EF4-FFF2-40B4-BE49-F238E27FC236}">
-                <a16:creationId xmlns:a16="http://schemas.microsoft.com/office/drawing/2014/main" id="{337C19BC-880B-48CC-A2EE-977E8FF16FF9}"/>
+                <a16:creationId xmlns:a16="http://schemas.microsoft.com/office/drawing/2014/main" id="{375FA935-E386-4FD6-897F-6FDAF7B3D523}"/>
               </a:ext>
             </a:extLst>
           </p:cNvPr>
@@ -14252,7 +14721,7 @@
           <p:cNvPr id="4" name="">
             <a:extLst xmlns:a="http://schemas.openxmlformats.org/drawingml/2006/main">
               <a:ext uri="{FF2B5EF4-FFF2-40B4-BE49-F238E27FC236}">
-                <a16:creationId xmlns:a16="http://schemas.microsoft.com/office/drawing/2014/main" id="{BF116856-3F4F-45E1-9331-83A2072D09DE}"/>
+                <a16:creationId xmlns:a16="http://schemas.microsoft.com/office/drawing/2014/main" id="{6394DBB9-B16D-4912-9DBE-57C4C27F5A61}"/>
               </a:ext>
             </a:extLst>
           </p:cNvPr>
@@ -14302,7 +14771,7 @@
           <p:cNvPr id="5" name="">
             <a:extLst xmlns:a="http://schemas.openxmlformats.org/drawingml/2006/main">
               <a:ext uri="{FF2B5EF4-FFF2-40B4-BE49-F238E27FC236}">
-                <a16:creationId xmlns:a16="http://schemas.microsoft.com/office/drawing/2014/main" id="{80821C44-3E2E-49D1-B2C7-2C99536B5C51}"/>
+                <a16:creationId xmlns:a16="http://schemas.microsoft.com/office/drawing/2014/main" id="{BD96A8A4-B7F9-45C1-A210-51BF61C6A6CA}"/>
               </a:ext>
             </a:extLst>
           </p:cNvPr>
@@ -14333,7 +14802,7 @@
           <p:cNvPr id="6" name="">
             <a:extLst xmlns:a="http://schemas.openxmlformats.org/drawingml/2006/main">
               <a:ext uri="{FF2B5EF4-FFF2-40B4-BE49-F238E27FC236}">
-                <a16:creationId xmlns:a16="http://schemas.microsoft.com/office/drawing/2014/main" id="{5768A4A3-BBAF-42F3-8C76-EA8AB96CE53D}"/>
+                <a16:creationId xmlns:a16="http://schemas.microsoft.com/office/drawing/2014/main" id="{2F7AB4B6-BC07-47BE-B01B-4BFD61516BFA}"/>
               </a:ext>
             </a:extLst>
           </p:cNvPr>
@@ -14383,7 +14852,7 @@
           <p:cNvPr id="7" name="">
             <a:extLst xmlns:a="http://schemas.openxmlformats.org/drawingml/2006/main">
               <a:ext uri="{FF2B5EF4-FFF2-40B4-BE49-F238E27FC236}">
-                <a16:creationId xmlns:a16="http://schemas.microsoft.com/office/drawing/2014/main" id="{11CAA71E-9179-48B1-BE5E-DAB743A72059}"/>
+                <a16:creationId xmlns:a16="http://schemas.microsoft.com/office/drawing/2014/main" id="{56215CCD-AC71-4590-B647-8862CE11B8B8}"/>
               </a:ext>
             </a:extLst>
           </p:cNvPr>
@@ -14431,7 +14900,7 @@
     </p:spTree>
     <p:extLst>
       <p:ext uri="{BB962C8B-B14F-4D97-AF65-F5344CB8AC3E}">
-        <p14:creationId xmlns:p14="http://schemas.microsoft.com/office/powerpoint/2010/main" val="162819754"/>
+        <p14:creationId xmlns:p14="http://schemas.microsoft.com/office/powerpoint/2010/main" val="2006660420"/>
       </p:ext>
     </p:extLst>
   </p:cSld>
@@ -14462,7 +14931,7 @@
           <p:cNvPr id="1" name="">
             <a:extLst xmlns:a="http://schemas.openxmlformats.org/drawingml/2006/main">
               <a:ext uri="{FF2B5EF4-FFF2-40B4-BE49-F238E27FC236}">
-                <a16:creationId xmlns:a16="http://schemas.microsoft.com/office/drawing/2014/main" id="{EF620562-03CA-45D3-8CF6-FAEA601C3E5C}"/>
+                <a16:creationId xmlns:a16="http://schemas.microsoft.com/office/drawing/2014/main" id="{880E9953-26AB-4E96-9BEA-92BC816544C6}"/>
               </a:ext>
             </a:extLst>
           </p:cNvPr>
@@ -14512,7 +14981,7 @@
           <p:cNvPr id="2" name="">
             <a:extLst xmlns:a="http://schemas.openxmlformats.org/drawingml/2006/main">
               <a:ext uri="{FF2B5EF4-FFF2-40B4-BE49-F238E27FC236}">
-                <a16:creationId xmlns:a16="http://schemas.microsoft.com/office/drawing/2014/main" id="{1DCCFFEF-09D3-4AA1-BD15-E3C99639A1B6}"/>
+                <a16:creationId xmlns:a16="http://schemas.microsoft.com/office/drawing/2014/main" id="{875DFEB2-F44F-494E-811E-B677BC07C7A1}"/>
               </a:ext>
             </a:extLst>
           </p:cNvPr>
@@ -14562,7 +15031,7 @@
           <p:cNvPr id="3" name="">
             <a:extLst xmlns:a="http://schemas.openxmlformats.org/drawingml/2006/main">
               <a:ext uri="{FF2B5EF4-FFF2-40B4-BE49-F238E27FC236}">
-                <a16:creationId xmlns:a16="http://schemas.microsoft.com/office/drawing/2014/main" id="{001D5E59-EA74-4EDF-8DE2-79FB4CEF2F6D}"/>
+                <a16:creationId xmlns:a16="http://schemas.microsoft.com/office/drawing/2014/main" id="{4397013E-5086-4DEA-A025-05DCB3053956}"/>
               </a:ext>
             </a:extLst>
           </p:cNvPr>
@@ -14593,7 +15062,7 @@
           <p:cNvPr id="4" name="">
             <a:extLst xmlns:a="http://schemas.openxmlformats.org/drawingml/2006/main">
               <a:ext uri="{FF2B5EF4-FFF2-40B4-BE49-F238E27FC236}">
-                <a16:creationId xmlns:a16="http://schemas.microsoft.com/office/drawing/2014/main" id="{B363D3C3-65BB-4800-B801-B8723E95B24A}"/>
+                <a16:creationId xmlns:a16="http://schemas.microsoft.com/office/drawing/2014/main" id="{CB37F571-28AB-4D23-A233-18E12765721B}"/>
               </a:ext>
             </a:extLst>
           </p:cNvPr>
@@ -14626,7 +15095,7 @@
           <p:cNvPr id="5" name="">
             <a:extLst xmlns:a="http://schemas.openxmlformats.org/drawingml/2006/main">
               <a:ext uri="{FF2B5EF4-FFF2-40B4-BE49-F238E27FC236}">
-                <a16:creationId xmlns:a16="http://schemas.microsoft.com/office/drawing/2014/main" id="{0BB32136-3434-4217-BA6F-F06323DC8597}"/>
+                <a16:creationId xmlns:a16="http://schemas.microsoft.com/office/drawing/2014/main" id="{48D70D02-7B66-4CDB-9259-5A358BFA7074}"/>
               </a:ext>
             </a:extLst>
           </p:cNvPr>
@@ -14676,7 +15145,7 @@
           <p:cNvPr id="6" name="">
             <a:extLst xmlns:a="http://schemas.openxmlformats.org/drawingml/2006/main">
               <a:ext uri="{FF2B5EF4-FFF2-40B4-BE49-F238E27FC236}">
-                <a16:creationId xmlns:a16="http://schemas.microsoft.com/office/drawing/2014/main" id="{174F96C9-761F-4952-8295-0F945AE67383}"/>
+                <a16:creationId xmlns:a16="http://schemas.microsoft.com/office/drawing/2014/main" id="{BE76E8B1-E3AB-4D1A-89C5-24E57860629D}"/>
               </a:ext>
             </a:extLst>
           </p:cNvPr>
@@ -14726,7 +15195,7 @@
           <p:cNvPr id="7" name="">
             <a:extLst xmlns:a="http://schemas.openxmlformats.org/drawingml/2006/main">
               <a:ext uri="{FF2B5EF4-FFF2-40B4-BE49-F238E27FC236}">
-                <a16:creationId xmlns:a16="http://schemas.microsoft.com/office/drawing/2014/main" id="{4D0C83D3-A90A-4F75-91A5-C8DF85DEA5E1}"/>
+                <a16:creationId xmlns:a16="http://schemas.microsoft.com/office/drawing/2014/main" id="{DE9AF1A3-DA38-4F5E-A164-DBAAE7213EF0}"/>
               </a:ext>
             </a:extLst>
           </p:cNvPr>
@@ -14776,7 +15245,7 @@
           <p:cNvPr id="8" name="">
             <a:extLst xmlns:a="http://schemas.openxmlformats.org/drawingml/2006/main">
               <a:ext uri="{FF2B5EF4-FFF2-40B4-BE49-F238E27FC236}">
-                <a16:creationId xmlns:a16="http://schemas.microsoft.com/office/drawing/2014/main" id="{F41369DA-13A7-44A4-9F68-40EDD4793D1E}"/>
+                <a16:creationId xmlns:a16="http://schemas.microsoft.com/office/drawing/2014/main" id="{82BF61A8-AD51-4775-9C53-64DE4976C0E4}"/>
               </a:ext>
             </a:extLst>
           </p:cNvPr>
@@ -14809,7 +15278,7 @@
           <p:cNvPr id="9" name="">
             <a:extLst xmlns:a="http://schemas.openxmlformats.org/drawingml/2006/main">
               <a:ext uri="{FF2B5EF4-FFF2-40B4-BE49-F238E27FC236}">
-                <a16:creationId xmlns:a16="http://schemas.microsoft.com/office/drawing/2014/main" id="{03480468-3D01-48D6-AB78-22127A24ECF6}"/>
+                <a16:creationId xmlns:a16="http://schemas.microsoft.com/office/drawing/2014/main" id="{1B9FDBCE-2466-455C-8439-06F4CB5704FC}"/>
               </a:ext>
             </a:extLst>
           </p:cNvPr>
@@ -14859,7 +15328,7 @@
           <p:cNvPr id="10" name="">
             <a:extLst xmlns:a="http://schemas.openxmlformats.org/drawingml/2006/main">
               <a:ext uri="{FF2B5EF4-FFF2-40B4-BE49-F238E27FC236}">
-                <a16:creationId xmlns:a16="http://schemas.microsoft.com/office/drawing/2014/main" id="{3ACDF9E7-17A0-4F20-9C46-3730D3BD1C38}"/>
+                <a16:creationId xmlns:a16="http://schemas.microsoft.com/office/drawing/2014/main" id="{972B1D44-A7D5-49A4-BADB-3AD0D266CF7D}"/>
               </a:ext>
             </a:extLst>
           </p:cNvPr>
@@ -14909,7 +15378,7 @@
           <p:cNvPr id="11" name="">
             <a:extLst xmlns:a="http://schemas.openxmlformats.org/drawingml/2006/main">
               <a:ext uri="{FF2B5EF4-FFF2-40B4-BE49-F238E27FC236}">
-                <a16:creationId xmlns:a16="http://schemas.microsoft.com/office/drawing/2014/main" id="{DB5145C7-6E7E-4730-A1CF-325B4D016BAB}"/>
+                <a16:creationId xmlns:a16="http://schemas.microsoft.com/office/drawing/2014/main" id="{F1EB3C3C-FD0C-43C3-9E71-D81269B2B115}"/>
               </a:ext>
             </a:extLst>
           </p:cNvPr>
@@ -14959,7 +15428,7 @@
           <p:cNvPr id="12" name="">
             <a:extLst xmlns:a="http://schemas.openxmlformats.org/drawingml/2006/main">
               <a:ext uri="{FF2B5EF4-FFF2-40B4-BE49-F238E27FC236}">
-                <a16:creationId xmlns:a16="http://schemas.microsoft.com/office/drawing/2014/main" id="{05EB351E-CAB4-43DE-B577-C72FF7E9B7D9}"/>
+                <a16:creationId xmlns:a16="http://schemas.microsoft.com/office/drawing/2014/main" id="{7C01D516-8C38-451F-9554-D9EDC70A42B5}"/>
               </a:ext>
             </a:extLst>
           </p:cNvPr>
@@ -14992,7 +15461,7 @@
           <p:cNvPr id="13" name="">
             <a:extLst xmlns:a="http://schemas.openxmlformats.org/drawingml/2006/main">
               <a:ext uri="{FF2B5EF4-FFF2-40B4-BE49-F238E27FC236}">
-                <a16:creationId xmlns:a16="http://schemas.microsoft.com/office/drawing/2014/main" id="{B1088081-902E-4017-88A0-00969D271DF3}"/>
+                <a16:creationId xmlns:a16="http://schemas.microsoft.com/office/drawing/2014/main" id="{94640905-E2AF-4602-865B-99D8BA473300}"/>
               </a:ext>
             </a:extLst>
           </p:cNvPr>
@@ -15042,7 +15511,7 @@
           <p:cNvPr id="14" name="">
             <a:extLst xmlns:a="http://schemas.openxmlformats.org/drawingml/2006/main">
               <a:ext uri="{FF2B5EF4-FFF2-40B4-BE49-F238E27FC236}">
-                <a16:creationId xmlns:a16="http://schemas.microsoft.com/office/drawing/2014/main" id="{B47E71D5-236B-45C6-93BC-DBA76C64C926}"/>
+                <a16:creationId xmlns:a16="http://schemas.microsoft.com/office/drawing/2014/main" id="{1CF0359B-ACB6-4343-9BC9-FE1E54DF218C}"/>
               </a:ext>
             </a:extLst>
           </p:cNvPr>
@@ -15092,7 +15561,7 @@
           <p:cNvPr id="15" name="">
             <a:extLst xmlns:a="http://schemas.openxmlformats.org/drawingml/2006/main">
               <a:ext uri="{FF2B5EF4-FFF2-40B4-BE49-F238E27FC236}">
-                <a16:creationId xmlns:a16="http://schemas.microsoft.com/office/drawing/2014/main" id="{9AF040BC-3AF9-4667-BED5-2146BC9AF13B}"/>
+                <a16:creationId xmlns:a16="http://schemas.microsoft.com/office/drawing/2014/main" id="{C01EC821-2190-4EA1-B9C1-C683C7892904}"/>
               </a:ext>
             </a:extLst>
           </p:cNvPr>
@@ -15142,7 +15611,7 @@
           <p:cNvPr id="16" name="">
             <a:extLst xmlns:a="http://schemas.openxmlformats.org/drawingml/2006/main">
               <a:ext uri="{FF2B5EF4-FFF2-40B4-BE49-F238E27FC236}">
-                <a16:creationId xmlns:a16="http://schemas.microsoft.com/office/drawing/2014/main" id="{277C303F-135C-406F-B1A5-A5DA71C9E810}"/>
+                <a16:creationId xmlns:a16="http://schemas.microsoft.com/office/drawing/2014/main" id="{1914CE60-9263-49B2-8BC0-DA58FD07FB31}"/>
               </a:ext>
             </a:extLst>
           </p:cNvPr>
@@ -15192,7 +15661,7 @@
           <p:cNvPr id="17" name="">
             <a:extLst xmlns:a="http://schemas.openxmlformats.org/drawingml/2006/main">
               <a:ext uri="{FF2B5EF4-FFF2-40B4-BE49-F238E27FC236}">
-                <a16:creationId xmlns:a16="http://schemas.microsoft.com/office/drawing/2014/main" id="{CC3B1064-5A19-42B5-B85D-9110905D7FB3}"/>
+                <a16:creationId xmlns:a16="http://schemas.microsoft.com/office/drawing/2014/main" id="{9FC8AE28-E213-4758-9C5F-54F702609437}"/>
               </a:ext>
             </a:extLst>
           </p:cNvPr>
@@ -15242,7 +15711,7 @@
           <p:cNvPr id="18" name="">
             <a:extLst xmlns:a="http://schemas.openxmlformats.org/drawingml/2006/main">
               <a:ext uri="{FF2B5EF4-FFF2-40B4-BE49-F238E27FC236}">
-                <a16:creationId xmlns:a16="http://schemas.microsoft.com/office/drawing/2014/main" id="{98E676BE-43A0-487C-A2B0-EF58872E926A}"/>
+                <a16:creationId xmlns:a16="http://schemas.microsoft.com/office/drawing/2014/main" id="{4E859262-391A-431B-9227-6258EC1D55F5}"/>
               </a:ext>
             </a:extLst>
           </p:cNvPr>
@@ -15292,7 +15761,7 @@
           <p:cNvPr id="19" name="">
             <a:extLst xmlns:a="http://schemas.openxmlformats.org/drawingml/2006/main">
               <a:ext uri="{FF2B5EF4-FFF2-40B4-BE49-F238E27FC236}">
-                <a16:creationId xmlns:a16="http://schemas.microsoft.com/office/drawing/2014/main" id="{F8240598-28CA-4E52-B115-C828A8BB5A4B}"/>
+                <a16:creationId xmlns:a16="http://schemas.microsoft.com/office/drawing/2014/main" id="{1B63D8A2-D193-4FF5-94E1-09AB0BDE9EEE}"/>
               </a:ext>
             </a:extLst>
           </p:cNvPr>
@@ -15342,7 +15811,7 @@
           <p:cNvPr id="20" name="">
             <a:extLst xmlns:a="http://schemas.openxmlformats.org/drawingml/2006/main">
               <a:ext uri="{FF2B5EF4-FFF2-40B4-BE49-F238E27FC236}">
-                <a16:creationId xmlns:a16="http://schemas.microsoft.com/office/drawing/2014/main" id="{281B4AEB-2167-481F-B931-52216F1E6AA7}"/>
+                <a16:creationId xmlns:a16="http://schemas.microsoft.com/office/drawing/2014/main" id="{791D8D03-69BA-4071-B6CB-63E4EE4E12D7}"/>
               </a:ext>
             </a:extLst>
           </p:cNvPr>
@@ -15392,7 +15861,7 @@
           <p:cNvPr id="21" name="">
             <a:extLst xmlns:a="http://schemas.openxmlformats.org/drawingml/2006/main">
               <a:ext uri="{FF2B5EF4-FFF2-40B4-BE49-F238E27FC236}">
-                <a16:creationId xmlns:a16="http://schemas.microsoft.com/office/drawing/2014/main" id="{7D3406D9-F776-4920-9266-2B787BF965B8}"/>
+                <a16:creationId xmlns:a16="http://schemas.microsoft.com/office/drawing/2014/main" id="{4B95C7D0-40E0-40AA-8B16-57F5B62A92D8}"/>
               </a:ext>
             </a:extLst>
           </p:cNvPr>
@@ -15442,7 +15911,7 @@
           <p:cNvPr id="22" name="">
             <a:extLst xmlns:a="http://schemas.openxmlformats.org/drawingml/2006/main">
               <a:ext uri="{FF2B5EF4-FFF2-40B4-BE49-F238E27FC236}">
-                <a16:creationId xmlns:a16="http://schemas.microsoft.com/office/drawing/2014/main" id="{CB32852C-17DB-43D3-8E45-23C9E202C4A0}"/>
+                <a16:creationId xmlns:a16="http://schemas.microsoft.com/office/drawing/2014/main" id="{FF31CB42-055D-4C18-B039-62B65EBC2946}"/>
               </a:ext>
             </a:extLst>
           </p:cNvPr>
@@ -15492,7 +15961,7 @@
           <p:cNvPr id="23" name="">
             <a:extLst xmlns:a="http://schemas.openxmlformats.org/drawingml/2006/main">
               <a:ext uri="{FF2B5EF4-FFF2-40B4-BE49-F238E27FC236}">
-                <a16:creationId xmlns:a16="http://schemas.microsoft.com/office/drawing/2014/main" id="{F27329CE-0EE7-4C05-8862-07721824D2BB}"/>
+                <a16:creationId xmlns:a16="http://schemas.microsoft.com/office/drawing/2014/main" id="{3DD8BA6D-ED08-41D0-B8D0-BEDCDAB0579A}"/>
               </a:ext>
             </a:extLst>
           </p:cNvPr>
@@ -15540,7 +16009,7 @@
     </p:spTree>
     <p:extLst>
       <p:ext uri="{BB962C8B-B14F-4D97-AF65-F5344CB8AC3E}">
-        <p14:creationId xmlns:p14="http://schemas.microsoft.com/office/powerpoint/2010/main" val="183733636"/>
+        <p14:creationId xmlns:p14="http://schemas.microsoft.com/office/powerpoint/2010/main" val="1195954872"/>
       </p:ext>
     </p:extLst>
   </p:cSld>
@@ -15571,7 +16040,7 @@
           <p:cNvPr id="1" name="">
             <a:extLst xmlns:a="http://schemas.openxmlformats.org/drawingml/2006/main">
               <a:ext uri="{FF2B5EF4-FFF2-40B4-BE49-F238E27FC236}">
-                <a16:creationId xmlns:a16="http://schemas.microsoft.com/office/drawing/2014/main" id="{BA6F3059-87CE-4D6A-ACCF-1EF0C1E92FF5}"/>
+                <a16:creationId xmlns:a16="http://schemas.microsoft.com/office/drawing/2014/main" id="{6689DE11-3A1A-4554-8570-D5CECBA53162}"/>
               </a:ext>
             </a:extLst>
           </p:cNvPr>
@@ -15621,7 +16090,7 @@
           <p:cNvPr id="2" name="">
             <a:extLst xmlns:a="http://schemas.openxmlformats.org/drawingml/2006/main">
               <a:ext uri="{FF2B5EF4-FFF2-40B4-BE49-F238E27FC236}">
-                <a16:creationId xmlns:a16="http://schemas.microsoft.com/office/drawing/2014/main" id="{D3BF01DD-420E-4082-AF4D-18CDD05C6D7E}"/>
+                <a16:creationId xmlns:a16="http://schemas.microsoft.com/office/drawing/2014/main" id="{5E8E42FD-D711-4EDE-9003-F2800C199EE1}"/>
               </a:ext>
             </a:extLst>
           </p:cNvPr>
@@ -15671,7 +16140,7 @@
           <p:cNvPr id="3" name="">
             <a:extLst xmlns:a="http://schemas.openxmlformats.org/drawingml/2006/main">
               <a:ext uri="{FF2B5EF4-FFF2-40B4-BE49-F238E27FC236}">
-                <a16:creationId xmlns:a16="http://schemas.microsoft.com/office/drawing/2014/main" id="{CCF175DE-D3E2-4400-A1D1-F5A2C1BEF439}"/>
+                <a16:creationId xmlns:a16="http://schemas.microsoft.com/office/drawing/2014/main" id="{5CDDC3E8-F03F-4EB1-8B5B-D20CBE59E28B}"/>
               </a:ext>
             </a:extLst>
           </p:cNvPr>
@@ -15702,7 +16171,7 @@
           <p:cNvPr id="4" name="">
             <a:extLst xmlns:a="http://schemas.openxmlformats.org/drawingml/2006/main">
               <a:ext uri="{FF2B5EF4-FFF2-40B4-BE49-F238E27FC236}">
-                <a16:creationId xmlns:a16="http://schemas.microsoft.com/office/drawing/2014/main" id="{CC2476B1-C38D-4AF0-B200-F1DAFBED469D}"/>
+                <a16:creationId xmlns:a16="http://schemas.microsoft.com/office/drawing/2014/main" id="{64D43CCB-987E-49CA-B230-511CA3D1EDD7}"/>
               </a:ext>
             </a:extLst>
           </p:cNvPr>
@@ -15752,7 +16221,7 @@
           <p:cNvPr id="5" name="">
             <a:extLst xmlns:a="http://schemas.openxmlformats.org/drawingml/2006/main">
               <a:ext uri="{FF2B5EF4-FFF2-40B4-BE49-F238E27FC236}">
-                <a16:creationId xmlns:a16="http://schemas.microsoft.com/office/drawing/2014/main" id="{C4D28927-CE9E-4833-B23F-C3F2CD24683B}"/>
+                <a16:creationId xmlns:a16="http://schemas.microsoft.com/office/drawing/2014/main" id="{7B27616D-F5B4-4B53-B55C-21F4C01201F4}"/>
               </a:ext>
             </a:extLst>
           </p:cNvPr>
@@ -15802,7 +16271,7 @@
           <p:cNvPr id="6" name="">
             <a:extLst xmlns:a="http://schemas.openxmlformats.org/drawingml/2006/main">
               <a:ext uri="{FF2B5EF4-FFF2-40B4-BE49-F238E27FC236}">
-                <a16:creationId xmlns:a16="http://schemas.microsoft.com/office/drawing/2014/main" id="{8DABFDB5-52C6-40CD-A4E3-8E4534A07973}"/>
+                <a16:creationId xmlns:a16="http://schemas.microsoft.com/office/drawing/2014/main" id="{CE1614A4-FF17-4353-8199-C54C06FD5EC9}"/>
               </a:ext>
             </a:extLst>
           </p:cNvPr>
@@ -15833,7 +16302,7 @@
           <p:cNvPr id="7" name="">
             <a:extLst xmlns:a="http://schemas.openxmlformats.org/drawingml/2006/main">
               <a:ext uri="{FF2B5EF4-FFF2-40B4-BE49-F238E27FC236}">
-                <a16:creationId xmlns:a16="http://schemas.microsoft.com/office/drawing/2014/main" id="{1A2B7749-8528-4388-8AFE-7772984B02F5}"/>
+                <a16:creationId xmlns:a16="http://schemas.microsoft.com/office/drawing/2014/main" id="{46D67B65-8761-494D-BBAE-255B69D2011B}"/>
               </a:ext>
             </a:extLst>
           </p:cNvPr>
@@ -15864,7 +16333,7 @@
           <p:cNvPr id="8" name="">
             <a:extLst xmlns:a="http://schemas.openxmlformats.org/drawingml/2006/main">
               <a:ext uri="{FF2B5EF4-FFF2-40B4-BE49-F238E27FC236}">
-                <a16:creationId xmlns:a16="http://schemas.microsoft.com/office/drawing/2014/main" id="{9D545E9B-073E-41B3-AA25-0250F9CB1EB2}"/>
+                <a16:creationId xmlns:a16="http://schemas.microsoft.com/office/drawing/2014/main" id="{20FFF36E-A622-484F-B611-C2A088A86358}"/>
               </a:ext>
             </a:extLst>
           </p:cNvPr>
@@ -15914,7 +16383,7 @@
           <p:cNvPr id="9" name="">
             <a:extLst xmlns:a="http://schemas.openxmlformats.org/drawingml/2006/main">
               <a:ext uri="{FF2B5EF4-FFF2-40B4-BE49-F238E27FC236}">
-                <a16:creationId xmlns:a16="http://schemas.microsoft.com/office/drawing/2014/main" id="{EF4496A3-F27B-4B48-B985-09F3EF90FABE}"/>
+                <a16:creationId xmlns:a16="http://schemas.microsoft.com/office/drawing/2014/main" id="{94A6BF28-5284-4291-8A5F-A3DF9D20288B}"/>
               </a:ext>
             </a:extLst>
           </p:cNvPr>
@@ -15964,7 +16433,7 @@
           <p:cNvPr id="10" name="">
             <a:extLst xmlns:a="http://schemas.openxmlformats.org/drawingml/2006/main">
               <a:ext uri="{FF2B5EF4-FFF2-40B4-BE49-F238E27FC236}">
-                <a16:creationId xmlns:a16="http://schemas.microsoft.com/office/drawing/2014/main" id="{4C95DAA7-CD92-4722-8A94-886E180B642A}"/>
+                <a16:creationId xmlns:a16="http://schemas.microsoft.com/office/drawing/2014/main" id="{98DF9021-448D-420D-97CD-44D436929933}"/>
               </a:ext>
             </a:extLst>
           </p:cNvPr>
@@ -16014,7 +16483,7 @@
           <p:cNvPr id="11" name="">
             <a:extLst xmlns:a="http://schemas.openxmlformats.org/drawingml/2006/main">
               <a:ext uri="{FF2B5EF4-FFF2-40B4-BE49-F238E27FC236}">
-                <a16:creationId xmlns:a16="http://schemas.microsoft.com/office/drawing/2014/main" id="{BF9C52D1-C9BE-44BB-983C-A0AF16049FE1}"/>
+                <a16:creationId xmlns:a16="http://schemas.microsoft.com/office/drawing/2014/main" id="{40B2C0E3-CEEE-4368-AC83-37B9598F477D}"/>
               </a:ext>
             </a:extLst>
           </p:cNvPr>
@@ -16064,7 +16533,7 @@
           <p:cNvPr id="12" name="">
             <a:extLst xmlns:a="http://schemas.openxmlformats.org/drawingml/2006/main">
               <a:ext uri="{FF2B5EF4-FFF2-40B4-BE49-F238E27FC236}">
-                <a16:creationId xmlns:a16="http://schemas.microsoft.com/office/drawing/2014/main" id="{01C732AA-FE28-4869-A11F-95E6D0B1CFE4}"/>
+                <a16:creationId xmlns:a16="http://schemas.microsoft.com/office/drawing/2014/main" id="{7C8D112D-37B2-4A1F-8E23-D07D25F227FE}"/>
               </a:ext>
             </a:extLst>
           </p:cNvPr>
@@ -16114,7 +16583,7 @@
           <p:cNvPr id="13" name="">
             <a:extLst xmlns:a="http://schemas.openxmlformats.org/drawingml/2006/main">
               <a:ext uri="{FF2B5EF4-FFF2-40B4-BE49-F238E27FC236}">
-                <a16:creationId xmlns:a16="http://schemas.microsoft.com/office/drawing/2014/main" id="{2C3D52A9-139B-4C9E-9931-2C10ECAD6CFB}"/>
+                <a16:creationId xmlns:a16="http://schemas.microsoft.com/office/drawing/2014/main" id="{ED8D2C53-FE57-44EA-8F69-D7DBF2106630}"/>
               </a:ext>
             </a:extLst>
           </p:cNvPr>
@@ -16164,7 +16633,7 @@
           <p:cNvPr id="14" name="">
             <a:extLst xmlns:a="http://schemas.openxmlformats.org/drawingml/2006/main">
               <a:ext uri="{FF2B5EF4-FFF2-40B4-BE49-F238E27FC236}">
-                <a16:creationId xmlns:a16="http://schemas.microsoft.com/office/drawing/2014/main" id="{D773A4A1-819E-4717-88B8-97CCC03DAAC6}"/>
+                <a16:creationId xmlns:a16="http://schemas.microsoft.com/office/drawing/2014/main" id="{2CB0FDDC-D649-4734-B15E-E5704361C0BB}"/>
               </a:ext>
             </a:extLst>
           </p:cNvPr>
@@ -16214,7 +16683,7 @@
           <p:cNvPr id="15" name="">
             <a:extLst xmlns:a="http://schemas.openxmlformats.org/drawingml/2006/main">
               <a:ext uri="{FF2B5EF4-FFF2-40B4-BE49-F238E27FC236}">
-                <a16:creationId xmlns:a16="http://schemas.microsoft.com/office/drawing/2014/main" id="{6BEB5BF9-EF71-49C7-BD54-2C38FABC6A18}"/>
+                <a16:creationId xmlns:a16="http://schemas.microsoft.com/office/drawing/2014/main" id="{7762A094-ADB4-4F06-84FA-5DD81DE6B18B}"/>
               </a:ext>
             </a:extLst>
           </p:cNvPr>
@@ -16262,7 +16731,7 @@
     </p:spTree>
     <p:extLst>
       <p:ext uri="{BB962C8B-B14F-4D97-AF65-F5344CB8AC3E}">
-        <p14:creationId xmlns:p14="http://schemas.microsoft.com/office/powerpoint/2010/main" val="1268203400"/>
+        <p14:creationId xmlns:p14="http://schemas.microsoft.com/office/powerpoint/2010/main" val="102928062"/>
       </p:ext>
     </p:extLst>
   </p:cSld>
@@ -16293,7 +16762,7 @@
           <p:cNvPr id="1" name="">
             <a:extLst xmlns:a="http://schemas.openxmlformats.org/drawingml/2006/main">
               <a:ext uri="{FF2B5EF4-FFF2-40B4-BE49-F238E27FC236}">
-                <a16:creationId xmlns:a16="http://schemas.microsoft.com/office/drawing/2014/main" id="{CD248A3D-5F94-4A04-9EF9-4D00E9AF515C}"/>
+                <a16:creationId xmlns:a16="http://schemas.microsoft.com/office/drawing/2014/main" id="{E390913C-2D19-40DC-9B49-E782B0C62E5B}"/>
               </a:ext>
             </a:extLst>
           </p:cNvPr>
@@ -16343,7 +16812,7 @@
           <p:cNvPr id="2" name="">
             <a:extLst xmlns:a="http://schemas.openxmlformats.org/drawingml/2006/main">
               <a:ext uri="{FF2B5EF4-FFF2-40B4-BE49-F238E27FC236}">
-                <a16:creationId xmlns:a16="http://schemas.microsoft.com/office/drawing/2014/main" id="{5D7C6985-9560-41CB-AB54-944AEE7D476A}"/>
+                <a16:creationId xmlns:a16="http://schemas.microsoft.com/office/drawing/2014/main" id="{44C056F5-DA55-4D63-80C7-DEDB45447B91}"/>
               </a:ext>
             </a:extLst>
           </p:cNvPr>
@@ -16393,7 +16862,7 @@
           <p:cNvPr id="3" name="">
             <a:extLst xmlns:a="http://schemas.openxmlformats.org/drawingml/2006/main">
               <a:ext uri="{FF2B5EF4-FFF2-40B4-BE49-F238E27FC236}">
-                <a16:creationId xmlns:a16="http://schemas.microsoft.com/office/drawing/2014/main" id="{5E33CA6F-7380-408C-8CA0-4DA72407E54B}"/>
+                <a16:creationId xmlns:a16="http://schemas.microsoft.com/office/drawing/2014/main" id="{A2F8F45C-4102-4671-A9DF-EB0812039383}"/>
               </a:ext>
             </a:extLst>
           </p:cNvPr>
@@ -16424,7 +16893,7 @@
           <p:cNvPr id="4" name="">
             <a:extLst xmlns:a="http://schemas.openxmlformats.org/drawingml/2006/main">
               <a:ext uri="{FF2B5EF4-FFF2-40B4-BE49-F238E27FC236}">
-                <a16:creationId xmlns:a16="http://schemas.microsoft.com/office/drawing/2014/main" id="{FABB2A9F-80CB-4D31-AE88-7C3C0E374EB9}"/>
+                <a16:creationId xmlns:a16="http://schemas.microsoft.com/office/drawing/2014/main" id="{341C7171-C1CA-40AF-86FB-98749BFFAFA3}"/>
               </a:ext>
             </a:extLst>
           </p:cNvPr>
@@ -16457,7 +16926,7 @@
           <p:cNvPr id="5" name="">
             <a:extLst xmlns:a="http://schemas.openxmlformats.org/drawingml/2006/main">
               <a:ext uri="{FF2B5EF4-FFF2-40B4-BE49-F238E27FC236}">
-                <a16:creationId xmlns:a16="http://schemas.microsoft.com/office/drawing/2014/main" id="{4EA2E3D2-B3B0-4E2D-9876-D68A3C6C5C57}"/>
+                <a16:creationId xmlns:a16="http://schemas.microsoft.com/office/drawing/2014/main" id="{5D625337-3C2A-41CA-8DE9-47A5C0B094EB}"/>
               </a:ext>
             </a:extLst>
           </p:cNvPr>
@@ -16507,7 +16976,7 @@
           <p:cNvPr id="6" name="">
             <a:extLst xmlns:a="http://schemas.openxmlformats.org/drawingml/2006/main">
               <a:ext uri="{FF2B5EF4-FFF2-40B4-BE49-F238E27FC236}">
-                <a16:creationId xmlns:a16="http://schemas.microsoft.com/office/drawing/2014/main" id="{248AE2A1-6BBD-4CD3-BB9E-0FBB5A12124B}"/>
+                <a16:creationId xmlns:a16="http://schemas.microsoft.com/office/drawing/2014/main" id="{9C7E8790-E6A4-45F9-A1EC-A5966E0C8D53}"/>
               </a:ext>
             </a:extLst>
           </p:cNvPr>
@@ -16557,7 +17026,7 @@
           <p:cNvPr id="7" name="">
             <a:extLst xmlns:a="http://schemas.openxmlformats.org/drawingml/2006/main">
               <a:ext uri="{FF2B5EF4-FFF2-40B4-BE49-F238E27FC236}">
-                <a16:creationId xmlns:a16="http://schemas.microsoft.com/office/drawing/2014/main" id="{69085EE5-BD3D-4F75-B79F-830394E63D21}"/>
+                <a16:creationId xmlns:a16="http://schemas.microsoft.com/office/drawing/2014/main" id="{E00F28C5-E5AC-45E6-9B2C-CE016EAE3446}"/>
               </a:ext>
             </a:extLst>
           </p:cNvPr>
@@ -16607,7 +17076,7 @@
           <p:cNvPr id="8" name="">
             <a:extLst xmlns:a="http://schemas.openxmlformats.org/drawingml/2006/main">
               <a:ext uri="{FF2B5EF4-FFF2-40B4-BE49-F238E27FC236}">
-                <a16:creationId xmlns:a16="http://schemas.microsoft.com/office/drawing/2014/main" id="{D5DE64B9-23E8-4552-A243-A29AA9FFEF99}"/>
+                <a16:creationId xmlns:a16="http://schemas.microsoft.com/office/drawing/2014/main" id="{2829BCA9-D85C-45DB-BDE1-81A523B703F1}"/>
               </a:ext>
             </a:extLst>
           </p:cNvPr>
@@ -16640,7 +17109,7 @@
           <p:cNvPr id="9" name="">
             <a:extLst xmlns:a="http://schemas.openxmlformats.org/drawingml/2006/main">
               <a:ext uri="{FF2B5EF4-FFF2-40B4-BE49-F238E27FC236}">
-                <a16:creationId xmlns:a16="http://schemas.microsoft.com/office/drawing/2014/main" id="{447D6848-99BD-4D53-A062-9740AD3E10AF}"/>
+                <a16:creationId xmlns:a16="http://schemas.microsoft.com/office/drawing/2014/main" id="{C69026A6-6B54-40BD-8A04-F0D85FEBC9BA}"/>
               </a:ext>
             </a:extLst>
           </p:cNvPr>
@@ -16690,7 +17159,7 @@
           <p:cNvPr id="10" name="">
             <a:extLst xmlns:a="http://schemas.openxmlformats.org/drawingml/2006/main">
               <a:ext uri="{FF2B5EF4-FFF2-40B4-BE49-F238E27FC236}">
-                <a16:creationId xmlns:a16="http://schemas.microsoft.com/office/drawing/2014/main" id="{53F23226-B731-44D9-B327-1DF2D2D67B08}"/>
+                <a16:creationId xmlns:a16="http://schemas.microsoft.com/office/drawing/2014/main" id="{BADCE9B8-1239-4438-8CD3-47EA5A371DFA}"/>
               </a:ext>
             </a:extLst>
           </p:cNvPr>
@@ -16740,7 +17209,7 @@
           <p:cNvPr id="11" name="">
             <a:extLst xmlns:a="http://schemas.openxmlformats.org/drawingml/2006/main">
               <a:ext uri="{FF2B5EF4-FFF2-40B4-BE49-F238E27FC236}">
-                <a16:creationId xmlns:a16="http://schemas.microsoft.com/office/drawing/2014/main" id="{DE297EE0-B849-4A99-A78F-E190095F94B9}"/>
+                <a16:creationId xmlns:a16="http://schemas.microsoft.com/office/drawing/2014/main" id="{0B2D430D-2C02-4543-A8D0-F658F4D75896}"/>
               </a:ext>
             </a:extLst>
           </p:cNvPr>
@@ -16790,7 +17259,7 @@
           <p:cNvPr id="12" name="">
             <a:extLst xmlns:a="http://schemas.openxmlformats.org/drawingml/2006/main">
               <a:ext uri="{FF2B5EF4-FFF2-40B4-BE49-F238E27FC236}">
-                <a16:creationId xmlns:a16="http://schemas.microsoft.com/office/drawing/2014/main" id="{DD71C8E7-C3BB-4FD5-A31D-A3A1552ABD16}"/>
+                <a16:creationId xmlns:a16="http://schemas.microsoft.com/office/drawing/2014/main" id="{02029832-BA92-4F4D-ACEC-21CF2B79557A}"/>
               </a:ext>
             </a:extLst>
           </p:cNvPr>
@@ -16823,7 +17292,7 @@
           <p:cNvPr id="13" name="">
             <a:extLst xmlns:a="http://schemas.openxmlformats.org/drawingml/2006/main">
               <a:ext uri="{FF2B5EF4-FFF2-40B4-BE49-F238E27FC236}">
-                <a16:creationId xmlns:a16="http://schemas.microsoft.com/office/drawing/2014/main" id="{0EE663A6-79AA-4A27-93F0-3D30535390F7}"/>
+                <a16:creationId xmlns:a16="http://schemas.microsoft.com/office/drawing/2014/main" id="{91C2F3C7-84A2-48B4-B3CC-64869A5C9DCA}"/>
               </a:ext>
             </a:extLst>
           </p:cNvPr>
@@ -16873,7 +17342,7 @@
           <p:cNvPr id="14" name="">
             <a:extLst xmlns:a="http://schemas.openxmlformats.org/drawingml/2006/main">
               <a:ext uri="{FF2B5EF4-FFF2-40B4-BE49-F238E27FC236}">
-                <a16:creationId xmlns:a16="http://schemas.microsoft.com/office/drawing/2014/main" id="{CBFADCA8-ED69-4EB2-A365-6E829147A38E}"/>
+                <a16:creationId xmlns:a16="http://schemas.microsoft.com/office/drawing/2014/main" id="{13DCB806-0DB0-4047-B08B-518D410BD9EB}"/>
               </a:ext>
             </a:extLst>
           </p:cNvPr>
@@ -16923,7 +17392,7 @@
           <p:cNvPr id="15" name="">
             <a:extLst xmlns:a="http://schemas.openxmlformats.org/drawingml/2006/main">
               <a:ext uri="{FF2B5EF4-FFF2-40B4-BE49-F238E27FC236}">
-                <a16:creationId xmlns:a16="http://schemas.microsoft.com/office/drawing/2014/main" id="{1BC63476-1E66-4068-806F-B125BF4B4B5F}"/>
+                <a16:creationId xmlns:a16="http://schemas.microsoft.com/office/drawing/2014/main" id="{409B4244-2E3D-4BB7-A430-071C7126F18B}"/>
               </a:ext>
             </a:extLst>
           </p:cNvPr>
@@ -16973,7 +17442,7 @@
           <p:cNvPr id="16" name="">
             <a:extLst xmlns:a="http://schemas.openxmlformats.org/drawingml/2006/main">
               <a:ext uri="{FF2B5EF4-FFF2-40B4-BE49-F238E27FC236}">
-                <a16:creationId xmlns:a16="http://schemas.microsoft.com/office/drawing/2014/main" id="{A7CA13CB-29E3-4A87-9CE3-DB1E76726448}"/>
+                <a16:creationId xmlns:a16="http://schemas.microsoft.com/office/drawing/2014/main" id="{D60936B4-641D-4EA7-98CC-BD28B2F805A5}"/>
               </a:ext>
             </a:extLst>
           </p:cNvPr>
@@ -17006,7 +17475,7 @@
           <p:cNvPr id="17" name="">
             <a:extLst xmlns:a="http://schemas.openxmlformats.org/drawingml/2006/main">
               <a:ext uri="{FF2B5EF4-FFF2-40B4-BE49-F238E27FC236}">
-                <a16:creationId xmlns:a16="http://schemas.microsoft.com/office/drawing/2014/main" id="{A32074D8-C63B-475F-BD23-E4AA8C2853EC}"/>
+                <a16:creationId xmlns:a16="http://schemas.microsoft.com/office/drawing/2014/main" id="{883B5271-CAED-4EDA-A0AC-3149E025A361}"/>
               </a:ext>
             </a:extLst>
           </p:cNvPr>
@@ -17056,7 +17525,7 @@
           <p:cNvPr id="18" name="">
             <a:extLst xmlns:a="http://schemas.openxmlformats.org/drawingml/2006/main">
               <a:ext uri="{FF2B5EF4-FFF2-40B4-BE49-F238E27FC236}">
-                <a16:creationId xmlns:a16="http://schemas.microsoft.com/office/drawing/2014/main" id="{22D68765-E77F-4789-BBF2-0A18049A788D}"/>
+                <a16:creationId xmlns:a16="http://schemas.microsoft.com/office/drawing/2014/main" id="{B907E6AD-770E-45B4-B809-B6D355DE363F}"/>
               </a:ext>
             </a:extLst>
           </p:cNvPr>
@@ -17106,7 +17575,7 @@
           <p:cNvPr id="19" name="">
             <a:extLst xmlns:a="http://schemas.openxmlformats.org/drawingml/2006/main">
               <a:ext uri="{FF2B5EF4-FFF2-40B4-BE49-F238E27FC236}">
-                <a16:creationId xmlns:a16="http://schemas.microsoft.com/office/drawing/2014/main" id="{B6106C51-98E0-4E92-80FD-69FD0E1040BC}"/>
+                <a16:creationId xmlns:a16="http://schemas.microsoft.com/office/drawing/2014/main" id="{FA0FD8A0-5456-4E26-9444-E8852232BC30}"/>
               </a:ext>
             </a:extLst>
           </p:cNvPr>
@@ -17156,7 +17625,7 @@
           <p:cNvPr id="20" name="">
             <a:extLst xmlns:a="http://schemas.openxmlformats.org/drawingml/2006/main">
               <a:ext uri="{FF2B5EF4-FFF2-40B4-BE49-F238E27FC236}">
-                <a16:creationId xmlns:a16="http://schemas.microsoft.com/office/drawing/2014/main" id="{A6C23F94-C4FB-4F13-8B8A-17E2498584E1}"/>
+                <a16:creationId xmlns:a16="http://schemas.microsoft.com/office/drawing/2014/main" id="{5225435E-96C1-4191-B80F-2EB997B86D07}"/>
               </a:ext>
             </a:extLst>
           </p:cNvPr>
@@ -17204,7 +17673,7 @@
     </p:spTree>
     <p:extLst>
       <p:ext uri="{BB962C8B-B14F-4D97-AF65-F5344CB8AC3E}">
-        <p14:creationId xmlns:p14="http://schemas.microsoft.com/office/powerpoint/2010/main" val="844464864"/>
+        <p14:creationId xmlns:p14="http://schemas.microsoft.com/office/powerpoint/2010/main" val="1652602917"/>
       </p:ext>
     </p:extLst>
   </p:cSld>
@@ -17235,7 +17704,7 @@
           <p:cNvPr id="1" name="">
             <a:extLst xmlns:a="http://schemas.openxmlformats.org/drawingml/2006/main">
               <a:ext uri="{FF2B5EF4-FFF2-40B4-BE49-F238E27FC236}">
-                <a16:creationId xmlns:a16="http://schemas.microsoft.com/office/drawing/2014/main" id="{E473B616-4B68-4DF4-8130-54B8122F6D00}"/>
+                <a16:creationId xmlns:a16="http://schemas.microsoft.com/office/drawing/2014/main" id="{BB85FA8B-A29E-43C3-AB41-3058085C7199}"/>
               </a:ext>
             </a:extLst>
           </p:cNvPr>
@@ -17285,7 +17754,7 @@
           <p:cNvPr id="2" name="">
             <a:extLst xmlns:a="http://schemas.openxmlformats.org/drawingml/2006/main">
               <a:ext uri="{FF2B5EF4-FFF2-40B4-BE49-F238E27FC236}">
-                <a16:creationId xmlns:a16="http://schemas.microsoft.com/office/drawing/2014/main" id="{4EC4E49E-A244-4B1B-B05B-C6C689B74AFC}"/>
+                <a16:creationId xmlns:a16="http://schemas.microsoft.com/office/drawing/2014/main" id="{0F549106-4DCD-49E7-8248-CD0DD1ECABFE}"/>
               </a:ext>
             </a:extLst>
           </p:cNvPr>
@@ -17335,7 +17804,7 @@
           <p:cNvPr id="3" name="">
             <a:extLst xmlns:a="http://schemas.openxmlformats.org/drawingml/2006/main">
               <a:ext uri="{FF2B5EF4-FFF2-40B4-BE49-F238E27FC236}">
-                <a16:creationId xmlns:a16="http://schemas.microsoft.com/office/drawing/2014/main" id="{BADD7D4E-DEBA-46A9-8CCA-B43E3152EC0B}"/>
+                <a16:creationId xmlns:a16="http://schemas.microsoft.com/office/drawing/2014/main" id="{7D97880F-8CA3-4D39-9FBB-20F0097605E7}"/>
               </a:ext>
             </a:extLst>
           </p:cNvPr>
@@ -17370,7 +17839,7 @@
           <p:nvPr/>
         </p:nvPicPr>
         <p:blipFill>
-          <a:blip xmlns:r="http://schemas.openxmlformats.org/officeDocument/2006/relationships" xmlns:a="http://schemas.openxmlformats.org/drawingml/2006/main" r:embed="R6d8dd4c1f02c46c4"/>
+          <a:blip xmlns:r="http://schemas.openxmlformats.org/officeDocument/2006/relationships" xmlns:a="http://schemas.openxmlformats.org/drawingml/2006/main" r:embed="R3a3641633ab94d7d"/>
           <a:stretch xmlns:a="http://schemas.openxmlformats.org/drawingml/2006/main"/>
         </p:blipFill>
         <p:spPr>
@@ -17388,7 +17857,7 @@
           <p:cNvPr id="5" name="">
             <a:extLst xmlns:a="http://schemas.openxmlformats.org/drawingml/2006/main">
               <a:ext uri="{FF2B5EF4-FFF2-40B4-BE49-F238E27FC236}">
-                <a16:creationId xmlns:a16="http://schemas.microsoft.com/office/drawing/2014/main" id="{92692C9A-8668-4BA1-9449-518CBE2F9B2B}"/>
+                <a16:creationId xmlns:a16="http://schemas.microsoft.com/office/drawing/2014/main" id="{82C4070B-8DF2-4666-9410-E267075CAB9E}"/>
               </a:ext>
             </a:extLst>
           </p:cNvPr>
@@ -17438,7 +17907,7 @@
           <p:cNvPr id="6" name="">
             <a:extLst xmlns:a="http://schemas.openxmlformats.org/drawingml/2006/main">
               <a:ext uri="{FF2B5EF4-FFF2-40B4-BE49-F238E27FC236}">
-                <a16:creationId xmlns:a16="http://schemas.microsoft.com/office/drawing/2014/main" id="{0EFE9E31-8BAD-45C5-BC02-701EC737AEA7}"/>
+                <a16:creationId xmlns:a16="http://schemas.microsoft.com/office/drawing/2014/main" id="{66F2BE97-F7D6-478F-B38F-1629C8B01AAC}"/>
               </a:ext>
             </a:extLst>
           </p:cNvPr>
@@ -17486,7 +17955,7 @@
     </p:spTree>
     <p:extLst>
       <p:ext uri="{BB962C8B-B14F-4D97-AF65-F5344CB8AC3E}">
-        <p14:creationId xmlns:p14="http://schemas.microsoft.com/office/powerpoint/2010/main" val="971917695"/>
+        <p14:creationId xmlns:p14="http://schemas.microsoft.com/office/powerpoint/2010/main" val="726087327"/>
       </p:ext>
     </p:extLst>
   </p:cSld>
@@ -17517,7 +17986,7 @@
           <p:cNvPr id="1" name="">
             <a:extLst xmlns:a="http://schemas.openxmlformats.org/drawingml/2006/main">
               <a:ext uri="{FF2B5EF4-FFF2-40B4-BE49-F238E27FC236}">
-                <a16:creationId xmlns:a16="http://schemas.microsoft.com/office/drawing/2014/main" id="{3180426D-32DE-461F-8E3A-5EE8EB73E2C9}"/>
+                <a16:creationId xmlns:a16="http://schemas.microsoft.com/office/drawing/2014/main" id="{4F6BA21E-1CAC-40C7-B95D-27072A1009B3}"/>
               </a:ext>
             </a:extLst>
           </p:cNvPr>
@@ -17567,7 +18036,7 @@
           <p:cNvPr id="2" name="">
             <a:extLst xmlns:a="http://schemas.openxmlformats.org/drawingml/2006/main">
               <a:ext uri="{FF2B5EF4-FFF2-40B4-BE49-F238E27FC236}">
-                <a16:creationId xmlns:a16="http://schemas.microsoft.com/office/drawing/2014/main" id="{0AC320CB-172F-4925-9661-04FE3F360D4F}"/>
+                <a16:creationId xmlns:a16="http://schemas.microsoft.com/office/drawing/2014/main" id="{BB85F7B1-DF32-47BB-93F1-CE46C3CAAC4F}"/>
               </a:ext>
             </a:extLst>
           </p:cNvPr>
@@ -17617,7 +18086,7 @@
           <p:cNvPr id="3" name="">
             <a:extLst xmlns:a="http://schemas.openxmlformats.org/drawingml/2006/main">
               <a:ext uri="{FF2B5EF4-FFF2-40B4-BE49-F238E27FC236}">
-                <a16:creationId xmlns:a16="http://schemas.microsoft.com/office/drawing/2014/main" id="{F2008A9E-345A-4525-ACA1-C24607B0F1C4}"/>
+                <a16:creationId xmlns:a16="http://schemas.microsoft.com/office/drawing/2014/main" id="{D24C9419-BFEA-4B37-B555-8FEF91E1B233}"/>
               </a:ext>
             </a:extLst>
           </p:cNvPr>
@@ -17652,7 +18121,7 @@
           <p:nvPr/>
         </p:nvPicPr>
         <p:blipFill>
-          <a:blip xmlns:r="http://schemas.openxmlformats.org/officeDocument/2006/relationships" xmlns:a="http://schemas.openxmlformats.org/drawingml/2006/main" r:embed="R585258a9f2c64910"/>
+          <a:blip xmlns:r="http://schemas.openxmlformats.org/officeDocument/2006/relationships" xmlns:a="http://schemas.openxmlformats.org/drawingml/2006/main" r:embed="R40f8df65939f46e0"/>
           <a:stretch xmlns:a="http://schemas.openxmlformats.org/drawingml/2006/main"/>
         </p:blipFill>
         <p:spPr>
@@ -17670,7 +18139,7 @@
           <p:cNvPr id="5" name="">
             <a:extLst xmlns:a="http://schemas.openxmlformats.org/drawingml/2006/main">
               <a:ext uri="{FF2B5EF4-FFF2-40B4-BE49-F238E27FC236}">
-                <a16:creationId xmlns:a16="http://schemas.microsoft.com/office/drawing/2014/main" id="{7C5AB4E1-2FD6-4380-BCC7-6D78882CF60C}"/>
+                <a16:creationId xmlns:a16="http://schemas.microsoft.com/office/drawing/2014/main" id="{8B44F4A3-5B7C-44F0-A8E2-62E3BF63E164}"/>
               </a:ext>
             </a:extLst>
           </p:cNvPr>
@@ -17720,7 +18189,7 @@
           <p:cNvPr id="6" name="">
             <a:extLst xmlns:a="http://schemas.openxmlformats.org/drawingml/2006/main">
               <a:ext uri="{FF2B5EF4-FFF2-40B4-BE49-F238E27FC236}">
-                <a16:creationId xmlns:a16="http://schemas.microsoft.com/office/drawing/2014/main" id="{14AD4597-D118-4F71-8AA2-594C2F901AC6}"/>
+                <a16:creationId xmlns:a16="http://schemas.microsoft.com/office/drawing/2014/main" id="{4781E933-01EF-4C45-99D6-0D7F76365912}"/>
               </a:ext>
             </a:extLst>
           </p:cNvPr>
@@ -17768,7 +18237,7 @@
     </p:spTree>
     <p:extLst>
       <p:ext uri="{BB962C8B-B14F-4D97-AF65-F5344CB8AC3E}">
-        <p14:creationId xmlns:p14="http://schemas.microsoft.com/office/powerpoint/2010/main" val="1299845516"/>
+        <p14:creationId xmlns:p14="http://schemas.microsoft.com/office/powerpoint/2010/main" val="951300578"/>
       </p:ext>
     </p:extLst>
   </p:cSld>
@@ -17799,7 +18268,7 @@
           <p:cNvPr id="1" name="">
             <a:extLst xmlns:a="http://schemas.openxmlformats.org/drawingml/2006/main">
               <a:ext uri="{FF2B5EF4-FFF2-40B4-BE49-F238E27FC236}">
-                <a16:creationId xmlns:a16="http://schemas.microsoft.com/office/drawing/2014/main" id="{CF1F455F-1E89-4E1F-88F8-852AEE60D82B}"/>
+                <a16:creationId xmlns:a16="http://schemas.microsoft.com/office/drawing/2014/main" id="{AD695CE7-2A3B-45FD-B36B-267F4999B534}"/>
               </a:ext>
             </a:extLst>
           </p:cNvPr>
@@ -17849,7 +18318,7 @@
           <p:cNvPr id="2" name="">
             <a:extLst xmlns:a="http://schemas.openxmlformats.org/drawingml/2006/main">
               <a:ext uri="{FF2B5EF4-FFF2-40B4-BE49-F238E27FC236}">
-                <a16:creationId xmlns:a16="http://schemas.microsoft.com/office/drawing/2014/main" id="{7D074F94-2FE6-4E63-B2D0-D83579548BE6}"/>
+                <a16:creationId xmlns:a16="http://schemas.microsoft.com/office/drawing/2014/main" id="{B6B978C0-5CC4-407E-84C2-C444F9D0E8CE}"/>
               </a:ext>
             </a:extLst>
           </p:cNvPr>
@@ -17899,7 +18368,7 @@
           <p:cNvPr id="3" name="">
             <a:extLst xmlns:a="http://schemas.openxmlformats.org/drawingml/2006/main">
               <a:ext uri="{FF2B5EF4-FFF2-40B4-BE49-F238E27FC236}">
-                <a16:creationId xmlns:a16="http://schemas.microsoft.com/office/drawing/2014/main" id="{3B7E66A3-E3EB-4429-9250-1B0807F115B9}"/>
+                <a16:creationId xmlns:a16="http://schemas.microsoft.com/office/drawing/2014/main" id="{02793ED2-077A-44A3-8AA2-283D9FB7F619}"/>
               </a:ext>
             </a:extLst>
           </p:cNvPr>
@@ -17934,7 +18403,7 @@
           <p:nvPr/>
         </p:nvPicPr>
         <p:blipFill>
-          <a:blip xmlns:r="http://schemas.openxmlformats.org/officeDocument/2006/relationships" xmlns:a="http://schemas.openxmlformats.org/drawingml/2006/main" r:embed="R8b3138f890084389"/>
+          <a:blip xmlns:r="http://schemas.openxmlformats.org/officeDocument/2006/relationships" xmlns:a="http://schemas.openxmlformats.org/drawingml/2006/main" r:embed="R5c841e9e2c804b29"/>
           <a:stretch xmlns:a="http://schemas.openxmlformats.org/drawingml/2006/main"/>
         </p:blipFill>
         <p:spPr>
@@ -17952,7 +18421,7 @@
           <p:cNvPr id="5" name="">
             <a:extLst xmlns:a="http://schemas.openxmlformats.org/drawingml/2006/main">
               <a:ext uri="{FF2B5EF4-FFF2-40B4-BE49-F238E27FC236}">
-                <a16:creationId xmlns:a16="http://schemas.microsoft.com/office/drawing/2014/main" id="{F7E5AB61-EBC7-4C04-AF51-AB5DBC139CF2}"/>
+                <a16:creationId xmlns:a16="http://schemas.microsoft.com/office/drawing/2014/main" id="{BA8E0AC6-6F37-459F-857D-D3466FF73F21}"/>
               </a:ext>
             </a:extLst>
           </p:cNvPr>
@@ -18002,7 +18471,7 @@
           <p:cNvPr id="6" name="">
             <a:extLst xmlns:a="http://schemas.openxmlformats.org/drawingml/2006/main">
               <a:ext uri="{FF2B5EF4-FFF2-40B4-BE49-F238E27FC236}">
-                <a16:creationId xmlns:a16="http://schemas.microsoft.com/office/drawing/2014/main" id="{A688A090-1530-4FCE-86EE-E7DD304EF3E2}"/>
+                <a16:creationId xmlns:a16="http://schemas.microsoft.com/office/drawing/2014/main" id="{DA2E8BCE-5478-4C36-B689-15894A5CFC84}"/>
               </a:ext>
             </a:extLst>
           </p:cNvPr>
@@ -18050,7 +18519,7 @@
     </p:spTree>
     <p:extLst>
       <p:ext uri="{BB962C8B-B14F-4D97-AF65-F5344CB8AC3E}">
-        <p14:creationId xmlns:p14="http://schemas.microsoft.com/office/powerpoint/2010/main" val="1306313329"/>
+        <p14:creationId xmlns:p14="http://schemas.microsoft.com/office/powerpoint/2010/main" val="508875547"/>
       </p:ext>
     </p:extLst>
   </p:cSld>
@@ -18081,7 +18550,7 @@
           <p:cNvPr id="1" name="">
             <a:extLst xmlns:a="http://schemas.openxmlformats.org/drawingml/2006/main">
               <a:ext uri="{FF2B5EF4-FFF2-40B4-BE49-F238E27FC236}">
-                <a16:creationId xmlns:a16="http://schemas.microsoft.com/office/drawing/2014/main" id="{97B9A805-EDEA-4750-AD52-60948612EB25}"/>
+                <a16:creationId xmlns:a16="http://schemas.microsoft.com/office/drawing/2014/main" id="{5DC75B60-4C3A-47DF-A4FF-D1A1541058A7}"/>
               </a:ext>
             </a:extLst>
           </p:cNvPr>
@@ -18131,7 +18600,7 @@
           <p:cNvPr id="2" name="">
             <a:extLst xmlns:a="http://schemas.openxmlformats.org/drawingml/2006/main">
               <a:ext uri="{FF2B5EF4-FFF2-40B4-BE49-F238E27FC236}">
-                <a16:creationId xmlns:a16="http://schemas.microsoft.com/office/drawing/2014/main" id="{07050216-4340-44A9-AA26-953AE00CD60B}"/>
+                <a16:creationId xmlns:a16="http://schemas.microsoft.com/office/drawing/2014/main" id="{160598B9-4C83-419F-AA3E-AA3A4E440CFD}"/>
               </a:ext>
             </a:extLst>
           </p:cNvPr>
@@ -18181,7 +18650,7 @@
           <p:cNvPr id="3" name="">
             <a:extLst xmlns:a="http://schemas.openxmlformats.org/drawingml/2006/main">
               <a:ext uri="{FF2B5EF4-FFF2-40B4-BE49-F238E27FC236}">
-                <a16:creationId xmlns:a16="http://schemas.microsoft.com/office/drawing/2014/main" id="{B858F7DA-775E-4C62-893A-0A497A7F4E97}"/>
+                <a16:creationId xmlns:a16="http://schemas.microsoft.com/office/drawing/2014/main" id="{7892C8EE-75A8-4644-BACA-8C45375F16D2}"/>
               </a:ext>
             </a:extLst>
           </p:cNvPr>
@@ -18216,7 +18685,7 @@
           <p:nvPr/>
         </p:nvPicPr>
         <p:blipFill>
-          <a:blip xmlns:r="http://schemas.openxmlformats.org/officeDocument/2006/relationships" xmlns:a="http://schemas.openxmlformats.org/drawingml/2006/main" r:embed="R49ea6811c00643ce"/>
+          <a:blip xmlns:r="http://schemas.openxmlformats.org/officeDocument/2006/relationships" xmlns:a="http://schemas.openxmlformats.org/drawingml/2006/main" r:embed="Ra73ec473af54474a"/>
           <a:stretch xmlns:a="http://schemas.openxmlformats.org/drawingml/2006/main"/>
         </p:blipFill>
         <p:spPr>
@@ -18234,7 +18703,7 @@
           <p:cNvPr id="5" name="">
             <a:extLst xmlns:a="http://schemas.openxmlformats.org/drawingml/2006/main">
               <a:ext uri="{FF2B5EF4-FFF2-40B4-BE49-F238E27FC236}">
-                <a16:creationId xmlns:a16="http://schemas.microsoft.com/office/drawing/2014/main" id="{0C9EEBF0-4AD4-4AF2-A2B1-DF966C6009AC}"/>
+                <a16:creationId xmlns:a16="http://schemas.microsoft.com/office/drawing/2014/main" id="{9ACD4280-F7CC-43B0-BE92-890DE2EA5694}"/>
               </a:ext>
             </a:extLst>
           </p:cNvPr>
@@ -18284,7 +18753,7 @@
           <p:cNvPr id="6" name="">
             <a:extLst xmlns:a="http://schemas.openxmlformats.org/drawingml/2006/main">
               <a:ext uri="{FF2B5EF4-FFF2-40B4-BE49-F238E27FC236}">
-                <a16:creationId xmlns:a16="http://schemas.microsoft.com/office/drawing/2014/main" id="{94566D03-B173-4900-A553-790F3D13E278}"/>
+                <a16:creationId xmlns:a16="http://schemas.microsoft.com/office/drawing/2014/main" id="{B146D5FC-C537-41FC-9B19-88C903984440}"/>
               </a:ext>
             </a:extLst>
           </p:cNvPr>
@@ -18332,7 +18801,7 @@
     </p:spTree>
     <p:extLst>
       <p:ext uri="{BB962C8B-B14F-4D97-AF65-F5344CB8AC3E}">
-        <p14:creationId xmlns:p14="http://schemas.microsoft.com/office/powerpoint/2010/main" val="365697834"/>
+        <p14:creationId xmlns:p14="http://schemas.microsoft.com/office/powerpoint/2010/main" val="1896926895"/>
       </p:ext>
     </p:extLst>
   </p:cSld>
@@ -18363,7 +18832,7 @@
           <p:cNvPr id="1" name="">
             <a:extLst xmlns:a="http://schemas.openxmlformats.org/drawingml/2006/main">
               <a:ext uri="{FF2B5EF4-FFF2-40B4-BE49-F238E27FC236}">
-                <a16:creationId xmlns:a16="http://schemas.microsoft.com/office/drawing/2014/main" id="{6EDE9BF6-10D4-4164-8E38-AA110C9DB63B}"/>
+                <a16:creationId xmlns:a16="http://schemas.microsoft.com/office/drawing/2014/main" id="{1F15FDC8-5A97-4D57-B8D8-02258CB0FE7F}"/>
               </a:ext>
             </a:extLst>
           </p:cNvPr>
@@ -18413,7 +18882,7 @@
           <p:cNvPr id="2" name="">
             <a:extLst xmlns:a="http://schemas.openxmlformats.org/drawingml/2006/main">
               <a:ext uri="{FF2B5EF4-FFF2-40B4-BE49-F238E27FC236}">
-                <a16:creationId xmlns:a16="http://schemas.microsoft.com/office/drawing/2014/main" id="{88EBD5B7-717F-4B06-9516-B442DF211563}"/>
+                <a16:creationId xmlns:a16="http://schemas.microsoft.com/office/drawing/2014/main" id="{C2EA5B90-E22C-4751-918B-68B984D9A97D}"/>
               </a:ext>
             </a:extLst>
           </p:cNvPr>
@@ -18463,7 +18932,7 @@
           <p:cNvPr id="3" name="">
             <a:extLst xmlns:a="http://schemas.openxmlformats.org/drawingml/2006/main">
               <a:ext uri="{FF2B5EF4-FFF2-40B4-BE49-F238E27FC236}">
-                <a16:creationId xmlns:a16="http://schemas.microsoft.com/office/drawing/2014/main" id="{62933661-A873-4AB0-84A4-762AC409F69D}"/>
+                <a16:creationId xmlns:a16="http://schemas.microsoft.com/office/drawing/2014/main" id="{8A511F55-6762-45BC-9BCD-E67D546EE12A}"/>
               </a:ext>
             </a:extLst>
           </p:cNvPr>
@@ -18494,7 +18963,7 @@
           <p:cNvPr id="4" name="">
             <a:extLst xmlns:a="http://schemas.openxmlformats.org/drawingml/2006/main">
               <a:ext uri="{FF2B5EF4-FFF2-40B4-BE49-F238E27FC236}">
-                <a16:creationId xmlns:a16="http://schemas.microsoft.com/office/drawing/2014/main" id="{54587C28-D149-495E-A741-538E6EA95F29}"/>
+                <a16:creationId xmlns:a16="http://schemas.microsoft.com/office/drawing/2014/main" id="{5FD89613-1F68-4C61-942C-4349A906333D}"/>
               </a:ext>
             </a:extLst>
           </p:cNvPr>
@@ -18544,7 +19013,7 @@
           <p:cNvPr id="5" name="">
             <a:extLst xmlns:a="http://schemas.openxmlformats.org/drawingml/2006/main">
               <a:ext uri="{FF2B5EF4-FFF2-40B4-BE49-F238E27FC236}">
-                <a16:creationId xmlns:a16="http://schemas.microsoft.com/office/drawing/2014/main" id="{BEFC8EEB-02D0-4942-9998-F8EBD8C91C68}"/>
+                <a16:creationId xmlns:a16="http://schemas.microsoft.com/office/drawing/2014/main" id="{EB6784FF-ED79-4A25-8F3A-009867959411}"/>
               </a:ext>
             </a:extLst>
           </p:cNvPr>
@@ -18594,7 +19063,7 @@
           <p:cNvPr id="6" name="">
             <a:extLst xmlns:a="http://schemas.openxmlformats.org/drawingml/2006/main">
               <a:ext uri="{FF2B5EF4-FFF2-40B4-BE49-F238E27FC236}">
-                <a16:creationId xmlns:a16="http://schemas.microsoft.com/office/drawing/2014/main" id="{D48E3F39-2375-4ABB-BE83-4DA5E953D5F4}"/>
+                <a16:creationId xmlns:a16="http://schemas.microsoft.com/office/drawing/2014/main" id="{7E5E7CA6-7C50-41C1-987C-6FC0586AAECF}"/>
               </a:ext>
             </a:extLst>
           </p:cNvPr>
@@ -18644,7 +19113,7 @@
           <p:cNvPr id="7" name="">
             <a:extLst xmlns:a="http://schemas.openxmlformats.org/drawingml/2006/main">
               <a:ext uri="{FF2B5EF4-FFF2-40B4-BE49-F238E27FC236}">
-                <a16:creationId xmlns:a16="http://schemas.microsoft.com/office/drawing/2014/main" id="{19AADDCE-C664-4225-99D3-C043DCB31A8E}"/>
+                <a16:creationId xmlns:a16="http://schemas.microsoft.com/office/drawing/2014/main" id="{C6A18A2A-EA2F-4138-B6B2-9B96A91CF40A}"/>
               </a:ext>
             </a:extLst>
           </p:cNvPr>
@@ -18694,7 +19163,7 @@
           <p:cNvPr id="8" name="">
             <a:extLst xmlns:a="http://schemas.openxmlformats.org/drawingml/2006/main">
               <a:ext uri="{FF2B5EF4-FFF2-40B4-BE49-F238E27FC236}">
-                <a16:creationId xmlns:a16="http://schemas.microsoft.com/office/drawing/2014/main" id="{55C5E9CA-0579-4340-8066-CDC00EDE984D}"/>
+                <a16:creationId xmlns:a16="http://schemas.microsoft.com/office/drawing/2014/main" id="{6F4C79E0-A6DC-4AC4-94D5-5CDFDFF4E967}"/>
               </a:ext>
             </a:extLst>
           </p:cNvPr>
@@ -18744,7 +19213,7 @@
           <p:cNvPr id="9" name="">
             <a:extLst xmlns:a="http://schemas.openxmlformats.org/drawingml/2006/main">
               <a:ext uri="{FF2B5EF4-FFF2-40B4-BE49-F238E27FC236}">
-                <a16:creationId xmlns:a16="http://schemas.microsoft.com/office/drawing/2014/main" id="{1F60CC61-D119-4AAA-81E5-B702F651EE2D}"/>
+                <a16:creationId xmlns:a16="http://schemas.microsoft.com/office/drawing/2014/main" id="{A5C79040-5629-4378-9BF7-03AB5B46D0B8}"/>
               </a:ext>
             </a:extLst>
           </p:cNvPr>
@@ -18794,7 +19263,7 @@
           <p:cNvPr id="10" name="">
             <a:extLst xmlns:a="http://schemas.openxmlformats.org/drawingml/2006/main">
               <a:ext uri="{FF2B5EF4-FFF2-40B4-BE49-F238E27FC236}">
-                <a16:creationId xmlns:a16="http://schemas.microsoft.com/office/drawing/2014/main" id="{77F07401-EE63-4164-8441-98556E9ED01E}"/>
+                <a16:creationId xmlns:a16="http://schemas.microsoft.com/office/drawing/2014/main" id="{A48E0D8B-6020-4231-A0B0-1973F2AF32C7}"/>
               </a:ext>
             </a:extLst>
           </p:cNvPr>
@@ -18844,7 +19313,7 @@
           <p:cNvPr id="11" name="">
             <a:extLst xmlns:a="http://schemas.openxmlformats.org/drawingml/2006/main">
               <a:ext uri="{FF2B5EF4-FFF2-40B4-BE49-F238E27FC236}">
-                <a16:creationId xmlns:a16="http://schemas.microsoft.com/office/drawing/2014/main" id="{6284E4E5-376A-48C1-9038-A0F00F42E99C}"/>
+                <a16:creationId xmlns:a16="http://schemas.microsoft.com/office/drawing/2014/main" id="{E70BFDE6-71AC-4D3D-8E78-417CEC7992A6}"/>
               </a:ext>
             </a:extLst>
           </p:cNvPr>
@@ -18894,7 +19363,7 @@
           <p:cNvPr id="12" name="">
             <a:extLst xmlns:a="http://schemas.openxmlformats.org/drawingml/2006/main">
               <a:ext uri="{FF2B5EF4-FFF2-40B4-BE49-F238E27FC236}">
-                <a16:creationId xmlns:a16="http://schemas.microsoft.com/office/drawing/2014/main" id="{F05CE5C9-4148-4B19-A27F-A9F16819A58C}"/>
+                <a16:creationId xmlns:a16="http://schemas.microsoft.com/office/drawing/2014/main" id="{86151C7D-5F59-44B0-98AC-3292755AA7A8}"/>
               </a:ext>
             </a:extLst>
           </p:cNvPr>
@@ -18942,7 +19411,7 @@
     </p:spTree>
     <p:extLst>
       <p:ext uri="{BB962C8B-B14F-4D97-AF65-F5344CB8AC3E}">
-        <p14:creationId xmlns:p14="http://schemas.microsoft.com/office/powerpoint/2010/main" val="810159056"/>
+        <p14:creationId xmlns:p14="http://schemas.microsoft.com/office/powerpoint/2010/main" val="120222672"/>
       </p:ext>
     </p:extLst>
   </p:cSld>
@@ -18973,7 +19442,7 @@
           <p:cNvPr id="1" name="">
             <a:extLst xmlns:a="http://schemas.openxmlformats.org/drawingml/2006/main">
               <a:ext uri="{FF2B5EF4-FFF2-40B4-BE49-F238E27FC236}">
-                <a16:creationId xmlns:a16="http://schemas.microsoft.com/office/drawing/2014/main" id="{88945883-830A-4EB6-A914-3DF00966AF7F}"/>
+                <a16:creationId xmlns:a16="http://schemas.microsoft.com/office/drawing/2014/main" id="{7FA13C74-F2F1-4CBD-873E-FBBDDA9C0991}"/>
               </a:ext>
             </a:extLst>
           </p:cNvPr>
@@ -19023,7 +19492,7 @@
           <p:cNvPr id="2" name="">
             <a:extLst xmlns:a="http://schemas.openxmlformats.org/drawingml/2006/main">
               <a:ext uri="{FF2B5EF4-FFF2-40B4-BE49-F238E27FC236}">
-                <a16:creationId xmlns:a16="http://schemas.microsoft.com/office/drawing/2014/main" id="{75DD04B4-A808-4189-95AD-812FD663C682}"/>
+                <a16:creationId xmlns:a16="http://schemas.microsoft.com/office/drawing/2014/main" id="{625646AE-711B-4B5E-B883-9369FD1D8228}"/>
               </a:ext>
             </a:extLst>
           </p:cNvPr>
@@ -19090,7 +19559,7 @@
           <p:cNvPr id="3" name="">
             <a:extLst xmlns:a="http://schemas.openxmlformats.org/drawingml/2006/main">
               <a:ext uri="{FF2B5EF4-FFF2-40B4-BE49-F238E27FC236}">
-                <a16:creationId xmlns:a16="http://schemas.microsoft.com/office/drawing/2014/main" id="{C89606A0-C691-44E6-9C50-B265F8132B7D}"/>
+                <a16:creationId xmlns:a16="http://schemas.microsoft.com/office/drawing/2014/main" id="{02EC301B-B65F-463D-A822-5B2F8113C1A4}"/>
               </a:ext>
             </a:extLst>
           </p:cNvPr>
@@ -19121,7 +19590,7 @@
           <p:cNvPr id="4" name="">
             <a:extLst xmlns:a="http://schemas.openxmlformats.org/drawingml/2006/main">
               <a:ext uri="{FF2B5EF4-FFF2-40B4-BE49-F238E27FC236}">
-                <a16:creationId xmlns:a16="http://schemas.microsoft.com/office/drawing/2014/main" id="{149D5274-E65F-4EB3-8A05-DCC4B261CD3C}"/>
+                <a16:creationId xmlns:a16="http://schemas.microsoft.com/office/drawing/2014/main" id="{196D6C1C-C156-4BF1-934C-D90BEFC153A1}"/>
               </a:ext>
             </a:extLst>
           </p:cNvPr>
@@ -19171,7 +19640,7 @@
           <p:cNvPr id="5" name="">
             <a:extLst xmlns:a="http://schemas.openxmlformats.org/drawingml/2006/main">
               <a:ext uri="{FF2B5EF4-FFF2-40B4-BE49-F238E27FC236}">
-                <a16:creationId xmlns:a16="http://schemas.microsoft.com/office/drawing/2014/main" id="{A578EDC5-6E71-43FD-812C-65A44EE3A467}"/>
+                <a16:creationId xmlns:a16="http://schemas.microsoft.com/office/drawing/2014/main" id="{3033ABA2-D252-428E-8261-8284E6B8F54E}"/>
               </a:ext>
             </a:extLst>
           </p:cNvPr>
@@ -19202,7 +19671,7 @@
           <p:cNvPr id="6" name="">
             <a:extLst xmlns:a="http://schemas.openxmlformats.org/drawingml/2006/main">
               <a:ext uri="{FF2B5EF4-FFF2-40B4-BE49-F238E27FC236}">
-                <a16:creationId xmlns:a16="http://schemas.microsoft.com/office/drawing/2014/main" id="{D8ABF1EA-1D2A-41A4-84C8-4AE617D5811D}"/>
+                <a16:creationId xmlns:a16="http://schemas.microsoft.com/office/drawing/2014/main" id="{B2ED2130-70EF-4DAE-B361-43233D3207C1}"/>
               </a:ext>
             </a:extLst>
           </p:cNvPr>
@@ -19252,7 +19721,7 @@
           <p:cNvPr id="7" name="">
             <a:extLst xmlns:a="http://schemas.openxmlformats.org/drawingml/2006/main">
               <a:ext uri="{FF2B5EF4-FFF2-40B4-BE49-F238E27FC236}">
-                <a16:creationId xmlns:a16="http://schemas.microsoft.com/office/drawing/2014/main" id="{ED963D53-7A8C-49F3-8A8E-62AF5145A0D1}"/>
+                <a16:creationId xmlns:a16="http://schemas.microsoft.com/office/drawing/2014/main" id="{0EE20B3E-9C1F-4057-AC84-6CB42F4FA729}"/>
               </a:ext>
             </a:extLst>
           </p:cNvPr>
@@ -19300,7 +19769,7 @@
     </p:spTree>
     <p:extLst>
       <p:ext uri="{BB962C8B-B14F-4D97-AF65-F5344CB8AC3E}">
-        <p14:creationId xmlns:p14="http://schemas.microsoft.com/office/powerpoint/2010/main" val="609925123"/>
+        <p14:creationId xmlns:p14="http://schemas.microsoft.com/office/powerpoint/2010/main" val="1904367118"/>
       </p:ext>
     </p:extLst>
   </p:cSld>
@@ -19331,7 +19800,7 @@
           <p:cNvPr id="1" name="">
             <a:extLst xmlns:a="http://schemas.openxmlformats.org/drawingml/2006/main">
               <a:ext uri="{FF2B5EF4-FFF2-40B4-BE49-F238E27FC236}">
-                <a16:creationId xmlns:a16="http://schemas.microsoft.com/office/drawing/2014/main" id="{CA96E563-0DA8-484F-9E5A-34FC0C9AAB18}"/>
+                <a16:creationId xmlns:a16="http://schemas.microsoft.com/office/drawing/2014/main" id="{D34DC4B8-BAC8-48E0-88EB-8F0612100185}"/>
               </a:ext>
             </a:extLst>
           </p:cNvPr>
@@ -19381,7 +19850,7 @@
           <p:cNvPr id="2" name="">
             <a:extLst xmlns:a="http://schemas.openxmlformats.org/drawingml/2006/main">
               <a:ext uri="{FF2B5EF4-FFF2-40B4-BE49-F238E27FC236}">
-                <a16:creationId xmlns:a16="http://schemas.microsoft.com/office/drawing/2014/main" id="{EE757313-B8AC-43B7-BA6D-15D8A159D206}"/>
+                <a16:creationId xmlns:a16="http://schemas.microsoft.com/office/drawing/2014/main" id="{9F360E45-4EFC-469D-A11C-A23EDFE3FE6E}"/>
               </a:ext>
             </a:extLst>
           </p:cNvPr>
@@ -19431,7 +19900,7 @@
           <p:cNvPr id="3" name="">
             <a:extLst xmlns:a="http://schemas.openxmlformats.org/drawingml/2006/main">
               <a:ext uri="{FF2B5EF4-FFF2-40B4-BE49-F238E27FC236}">
-                <a16:creationId xmlns:a16="http://schemas.microsoft.com/office/drawing/2014/main" id="{9B20AF24-1019-41E1-B77F-9A027C4B7EE8}"/>
+                <a16:creationId xmlns:a16="http://schemas.microsoft.com/office/drawing/2014/main" id="{6290E952-4682-4654-9AB9-74EF23A8E534}"/>
               </a:ext>
             </a:extLst>
           </p:cNvPr>
@@ -19462,7 +19931,7 @@
           <p:cNvPr id="4" name="">
             <a:extLst xmlns:a="http://schemas.openxmlformats.org/drawingml/2006/main">
               <a:ext uri="{FF2B5EF4-FFF2-40B4-BE49-F238E27FC236}">
-                <a16:creationId xmlns:a16="http://schemas.microsoft.com/office/drawing/2014/main" id="{8B68B1E1-EFDA-4DEB-80D2-34BB839BA623}"/>
+                <a16:creationId xmlns:a16="http://schemas.microsoft.com/office/drawing/2014/main" id="{477F1BA1-45AF-43D3-ABB7-542791248F73}"/>
               </a:ext>
             </a:extLst>
           </p:cNvPr>
@@ -19495,7 +19964,7 @@
           <p:cNvPr id="5" name="">
             <a:extLst xmlns:a="http://schemas.openxmlformats.org/drawingml/2006/main">
               <a:ext uri="{FF2B5EF4-FFF2-40B4-BE49-F238E27FC236}">
-                <a16:creationId xmlns:a16="http://schemas.microsoft.com/office/drawing/2014/main" id="{BB6C15B3-1197-4ABF-BEB7-F85779F9EF77}"/>
+                <a16:creationId xmlns:a16="http://schemas.microsoft.com/office/drawing/2014/main" id="{ADDFC6A6-6FD4-4EB8-9FC0-54830F9FC222}"/>
               </a:ext>
             </a:extLst>
           </p:cNvPr>
@@ -19545,7 +20014,7 @@
           <p:cNvPr id="6" name="">
             <a:extLst xmlns:a="http://schemas.openxmlformats.org/drawingml/2006/main">
               <a:ext uri="{FF2B5EF4-FFF2-40B4-BE49-F238E27FC236}">
-                <a16:creationId xmlns:a16="http://schemas.microsoft.com/office/drawing/2014/main" id="{7770583C-B6FF-4053-A6C8-3EC14C5F4919}"/>
+                <a16:creationId xmlns:a16="http://schemas.microsoft.com/office/drawing/2014/main" id="{76A1D6AD-CFC7-43D5-8BDF-1AC385B46159}"/>
               </a:ext>
             </a:extLst>
           </p:cNvPr>
@@ -19595,7 +20064,7 @@
           <p:cNvPr id="7" name="">
             <a:extLst xmlns:a="http://schemas.openxmlformats.org/drawingml/2006/main">
               <a:ext uri="{FF2B5EF4-FFF2-40B4-BE49-F238E27FC236}">
-                <a16:creationId xmlns:a16="http://schemas.microsoft.com/office/drawing/2014/main" id="{E1BB997E-6775-42D9-83E5-FFCF74B60BB7}"/>
+                <a16:creationId xmlns:a16="http://schemas.microsoft.com/office/drawing/2014/main" id="{92685D76-D6FF-4B3D-BDB2-D378D39A7EC0}"/>
               </a:ext>
             </a:extLst>
           </p:cNvPr>
@@ -19645,7 +20114,7 @@
           <p:cNvPr id="8" name="">
             <a:extLst xmlns:a="http://schemas.openxmlformats.org/drawingml/2006/main">
               <a:ext uri="{FF2B5EF4-FFF2-40B4-BE49-F238E27FC236}">
-                <a16:creationId xmlns:a16="http://schemas.microsoft.com/office/drawing/2014/main" id="{49219E67-B209-491A-8698-BCAEC4F331AC}"/>
+                <a16:creationId xmlns:a16="http://schemas.microsoft.com/office/drawing/2014/main" id="{7663C6F9-13F9-437A-8416-B1894A01443D}"/>
               </a:ext>
             </a:extLst>
           </p:cNvPr>
@@ -19678,7 +20147,7 @@
           <p:cNvPr id="9" name="">
             <a:extLst xmlns:a="http://schemas.openxmlformats.org/drawingml/2006/main">
               <a:ext uri="{FF2B5EF4-FFF2-40B4-BE49-F238E27FC236}">
-                <a16:creationId xmlns:a16="http://schemas.microsoft.com/office/drawing/2014/main" id="{EC47D93E-02BB-4F74-8CBE-884EB9C187F6}"/>
+                <a16:creationId xmlns:a16="http://schemas.microsoft.com/office/drawing/2014/main" id="{BE63328A-8F78-4970-B639-FD86E3BB8D41}"/>
               </a:ext>
             </a:extLst>
           </p:cNvPr>
@@ -19728,7 +20197,7 @@
           <p:cNvPr id="10" name="">
             <a:extLst xmlns:a="http://schemas.openxmlformats.org/drawingml/2006/main">
               <a:ext uri="{FF2B5EF4-FFF2-40B4-BE49-F238E27FC236}">
-                <a16:creationId xmlns:a16="http://schemas.microsoft.com/office/drawing/2014/main" id="{EF83735E-1747-4E1A-80A2-3B59F5A3E816}"/>
+                <a16:creationId xmlns:a16="http://schemas.microsoft.com/office/drawing/2014/main" id="{28561554-CD09-4CBD-8553-C8561F53AC93}"/>
               </a:ext>
             </a:extLst>
           </p:cNvPr>
@@ -19778,7 +20247,7 @@
           <p:cNvPr id="11" name="">
             <a:extLst xmlns:a="http://schemas.openxmlformats.org/drawingml/2006/main">
               <a:ext uri="{FF2B5EF4-FFF2-40B4-BE49-F238E27FC236}">
-                <a16:creationId xmlns:a16="http://schemas.microsoft.com/office/drawing/2014/main" id="{93C2556E-A2B4-40D9-B5AD-94E56298F152}"/>
+                <a16:creationId xmlns:a16="http://schemas.microsoft.com/office/drawing/2014/main" id="{6DD51FCA-C1B8-4F2A-B362-6998C4FC6588}"/>
               </a:ext>
             </a:extLst>
           </p:cNvPr>
@@ -19828,7 +20297,7 @@
           <p:cNvPr id="12" name="">
             <a:extLst xmlns:a="http://schemas.openxmlformats.org/drawingml/2006/main">
               <a:ext uri="{FF2B5EF4-FFF2-40B4-BE49-F238E27FC236}">
-                <a16:creationId xmlns:a16="http://schemas.microsoft.com/office/drawing/2014/main" id="{01A04DE4-DF63-4FB3-BA3B-915BDC7379D3}"/>
+                <a16:creationId xmlns:a16="http://schemas.microsoft.com/office/drawing/2014/main" id="{127C7561-C5BF-4554-937B-507260531D38}"/>
               </a:ext>
             </a:extLst>
           </p:cNvPr>
@@ -19861,7 +20330,7 @@
           <p:cNvPr id="13" name="">
             <a:extLst xmlns:a="http://schemas.openxmlformats.org/drawingml/2006/main">
               <a:ext uri="{FF2B5EF4-FFF2-40B4-BE49-F238E27FC236}">
-                <a16:creationId xmlns:a16="http://schemas.microsoft.com/office/drawing/2014/main" id="{E5B8F069-22DD-48DF-9CCA-937993CD9BDB}"/>
+                <a16:creationId xmlns:a16="http://schemas.microsoft.com/office/drawing/2014/main" id="{06CB6713-D398-455A-A701-987398F50D70}"/>
               </a:ext>
             </a:extLst>
           </p:cNvPr>
@@ -19911,7 +20380,7 @@
           <p:cNvPr id="14" name="">
             <a:extLst xmlns:a="http://schemas.openxmlformats.org/drawingml/2006/main">
               <a:ext uri="{FF2B5EF4-FFF2-40B4-BE49-F238E27FC236}">
-                <a16:creationId xmlns:a16="http://schemas.microsoft.com/office/drawing/2014/main" id="{E0812F28-5F43-46C2-A610-93360FF5C592}"/>
+                <a16:creationId xmlns:a16="http://schemas.microsoft.com/office/drawing/2014/main" id="{30B17FB1-DE00-4227-A17E-23A7633123B6}"/>
               </a:ext>
             </a:extLst>
           </p:cNvPr>
@@ -19961,7 +20430,7 @@
           <p:cNvPr id="15" name="">
             <a:extLst xmlns:a="http://schemas.openxmlformats.org/drawingml/2006/main">
               <a:ext uri="{FF2B5EF4-FFF2-40B4-BE49-F238E27FC236}">
-                <a16:creationId xmlns:a16="http://schemas.microsoft.com/office/drawing/2014/main" id="{5355C725-FB94-440E-8086-957A89922F6B}"/>
+                <a16:creationId xmlns:a16="http://schemas.microsoft.com/office/drawing/2014/main" id="{63496AD8-2528-411D-A84F-8EA5B5F1D88F}"/>
               </a:ext>
             </a:extLst>
           </p:cNvPr>
@@ -20011,7 +20480,7 @@
           <p:cNvPr id="16" name="">
             <a:extLst xmlns:a="http://schemas.openxmlformats.org/drawingml/2006/main">
               <a:ext uri="{FF2B5EF4-FFF2-40B4-BE49-F238E27FC236}">
-                <a16:creationId xmlns:a16="http://schemas.microsoft.com/office/drawing/2014/main" id="{C8B12BD7-B57B-4B9E-92FB-F7B369B3085D}"/>
+                <a16:creationId xmlns:a16="http://schemas.microsoft.com/office/drawing/2014/main" id="{8DD3F40A-0A0E-4BA5-BCD7-78DB2A656775}"/>
               </a:ext>
             </a:extLst>
           </p:cNvPr>
@@ -20044,7 +20513,7 @@
           <p:cNvPr id="17" name="">
             <a:extLst xmlns:a="http://schemas.openxmlformats.org/drawingml/2006/main">
               <a:ext uri="{FF2B5EF4-FFF2-40B4-BE49-F238E27FC236}">
-                <a16:creationId xmlns:a16="http://schemas.microsoft.com/office/drawing/2014/main" id="{D2F86187-170A-40B5-8CA6-A6E9D659E646}"/>
+                <a16:creationId xmlns:a16="http://schemas.microsoft.com/office/drawing/2014/main" id="{7AEB2CAB-B516-4206-8FC7-F621DA447CBD}"/>
               </a:ext>
             </a:extLst>
           </p:cNvPr>
@@ -20094,7 +20563,7 @@
           <p:cNvPr id="18" name="">
             <a:extLst xmlns:a="http://schemas.openxmlformats.org/drawingml/2006/main">
               <a:ext uri="{FF2B5EF4-FFF2-40B4-BE49-F238E27FC236}">
-                <a16:creationId xmlns:a16="http://schemas.microsoft.com/office/drawing/2014/main" id="{3BE8EF51-8AAB-4A74-A816-7DD748ADB581}"/>
+                <a16:creationId xmlns:a16="http://schemas.microsoft.com/office/drawing/2014/main" id="{27DF6E78-D574-4B9B-8EE6-60E893D9B1BD}"/>
               </a:ext>
             </a:extLst>
           </p:cNvPr>
@@ -20144,7 +20613,7 @@
           <p:cNvPr id="19" name="">
             <a:extLst xmlns:a="http://schemas.openxmlformats.org/drawingml/2006/main">
               <a:ext uri="{FF2B5EF4-FFF2-40B4-BE49-F238E27FC236}">
-                <a16:creationId xmlns:a16="http://schemas.microsoft.com/office/drawing/2014/main" id="{7D93BBA6-3B22-4483-8501-DE30F3D04570}"/>
+                <a16:creationId xmlns:a16="http://schemas.microsoft.com/office/drawing/2014/main" id="{45762B65-09FE-4F0D-B630-54617C26807F}"/>
               </a:ext>
             </a:extLst>
           </p:cNvPr>
@@ -20194,7 +20663,7 @@
           <p:cNvPr id="20" name="">
             <a:extLst xmlns:a="http://schemas.openxmlformats.org/drawingml/2006/main">
               <a:ext uri="{FF2B5EF4-FFF2-40B4-BE49-F238E27FC236}">
-                <a16:creationId xmlns:a16="http://schemas.microsoft.com/office/drawing/2014/main" id="{3C5BADC4-C09B-454E-A9B0-CA7DE0D085E6}"/>
+                <a16:creationId xmlns:a16="http://schemas.microsoft.com/office/drawing/2014/main" id="{8D3FC573-950E-42F8-8C75-881D12EE8A77}"/>
               </a:ext>
             </a:extLst>
           </p:cNvPr>
@@ -20242,7 +20711,7 @@
     </p:spTree>
     <p:extLst>
       <p:ext uri="{BB962C8B-B14F-4D97-AF65-F5344CB8AC3E}">
-        <p14:creationId xmlns:p14="http://schemas.microsoft.com/office/powerpoint/2010/main" val="1816698607"/>
+        <p14:creationId xmlns:p14="http://schemas.microsoft.com/office/powerpoint/2010/main" val="2123569167"/>
       </p:ext>
     </p:extLst>
   </p:cSld>
@@ -20273,7 +20742,7 @@
           <p:cNvPr id="1" name="">
             <a:extLst xmlns:a="http://schemas.openxmlformats.org/drawingml/2006/main">
               <a:ext uri="{FF2B5EF4-FFF2-40B4-BE49-F238E27FC236}">
-                <a16:creationId xmlns:a16="http://schemas.microsoft.com/office/drawing/2014/main" id="{650329FA-0AE8-4620-8150-F3B145CB75F0}"/>
+                <a16:creationId xmlns:a16="http://schemas.microsoft.com/office/drawing/2014/main" id="{5AE1FE14-C3F2-4706-A6F0-565BE9884CF2}"/>
               </a:ext>
             </a:extLst>
           </p:cNvPr>
@@ -20323,7 +20792,7 @@
           <p:cNvPr id="2" name="">
             <a:extLst xmlns:a="http://schemas.openxmlformats.org/drawingml/2006/main">
               <a:ext uri="{FF2B5EF4-FFF2-40B4-BE49-F238E27FC236}">
-                <a16:creationId xmlns:a16="http://schemas.microsoft.com/office/drawing/2014/main" id="{411703BE-D16A-4F40-8243-90A624FD6A11}"/>
+                <a16:creationId xmlns:a16="http://schemas.microsoft.com/office/drawing/2014/main" id="{FC4AE384-3A6C-4BCD-9350-AD8BB438C3D2}"/>
               </a:ext>
             </a:extLst>
           </p:cNvPr>
@@ -20373,7 +20842,7 @@
           <p:cNvPr id="3" name="">
             <a:extLst xmlns:a="http://schemas.openxmlformats.org/drawingml/2006/main">
               <a:ext uri="{FF2B5EF4-FFF2-40B4-BE49-F238E27FC236}">
-                <a16:creationId xmlns:a16="http://schemas.microsoft.com/office/drawing/2014/main" id="{0213FE8A-AD91-4315-AC55-63DD760B6E5F}"/>
+                <a16:creationId xmlns:a16="http://schemas.microsoft.com/office/drawing/2014/main" id="{9C06832C-5646-41A1-9B87-5693B60A005A}"/>
               </a:ext>
             </a:extLst>
           </p:cNvPr>
@@ -20404,7 +20873,7 @@
           <p:cNvPr id="4" name="">
             <a:extLst xmlns:a="http://schemas.openxmlformats.org/drawingml/2006/main">
               <a:ext uri="{FF2B5EF4-FFF2-40B4-BE49-F238E27FC236}">
-                <a16:creationId xmlns:a16="http://schemas.microsoft.com/office/drawing/2014/main" id="{A63102B0-B72F-41EF-B932-DEDD190D5542}"/>
+                <a16:creationId xmlns:a16="http://schemas.microsoft.com/office/drawing/2014/main" id="{9B2B11B3-4E31-414E-A1A7-90EA6EE26D76}"/>
               </a:ext>
             </a:extLst>
           </p:cNvPr>
@@ -20437,7 +20906,7 @@
           <p:cNvPr id="5" name="">
             <a:extLst xmlns:a="http://schemas.openxmlformats.org/drawingml/2006/main">
               <a:ext uri="{FF2B5EF4-FFF2-40B4-BE49-F238E27FC236}">
-                <a16:creationId xmlns:a16="http://schemas.microsoft.com/office/drawing/2014/main" id="{83468A26-5C09-49F5-B198-64D1BBE1B1F8}"/>
+                <a16:creationId xmlns:a16="http://schemas.microsoft.com/office/drawing/2014/main" id="{10573712-90B0-4169-8DC3-33236F84EB6B}"/>
               </a:ext>
             </a:extLst>
           </p:cNvPr>
@@ -20487,7 +20956,7 @@
           <p:cNvPr id="6" name="">
             <a:extLst xmlns:a="http://schemas.openxmlformats.org/drawingml/2006/main">
               <a:ext uri="{FF2B5EF4-FFF2-40B4-BE49-F238E27FC236}">
-                <a16:creationId xmlns:a16="http://schemas.microsoft.com/office/drawing/2014/main" id="{B1D26CE9-4A0D-4D9D-B3A3-011625C3F081}"/>
+                <a16:creationId xmlns:a16="http://schemas.microsoft.com/office/drawing/2014/main" id="{796D1646-90D8-497C-87BF-3832786A48D7}"/>
               </a:ext>
             </a:extLst>
           </p:cNvPr>
@@ -20537,7 +21006,7 @@
           <p:cNvPr id="7" name="">
             <a:extLst xmlns:a="http://schemas.openxmlformats.org/drawingml/2006/main">
               <a:ext uri="{FF2B5EF4-FFF2-40B4-BE49-F238E27FC236}">
-                <a16:creationId xmlns:a16="http://schemas.microsoft.com/office/drawing/2014/main" id="{C1DF3E98-229A-43A6-A182-2EE55E639A55}"/>
+                <a16:creationId xmlns:a16="http://schemas.microsoft.com/office/drawing/2014/main" id="{03E84A47-FAFD-4A36-A57A-D82FE140C6AC}"/>
               </a:ext>
             </a:extLst>
           </p:cNvPr>
@@ -20587,7 +21056,7 @@
           <p:cNvPr id="8" name="">
             <a:extLst xmlns:a="http://schemas.openxmlformats.org/drawingml/2006/main">
               <a:ext uri="{FF2B5EF4-FFF2-40B4-BE49-F238E27FC236}">
-                <a16:creationId xmlns:a16="http://schemas.microsoft.com/office/drawing/2014/main" id="{321FFE8A-4662-4C58-BAB8-CB9246C9AB77}"/>
+                <a16:creationId xmlns:a16="http://schemas.microsoft.com/office/drawing/2014/main" id="{90C9AA8C-BBED-4AD9-8DF7-E3A70BF0533D}"/>
               </a:ext>
             </a:extLst>
           </p:cNvPr>
@@ -20620,7 +21089,7 @@
           <p:cNvPr id="9" name="">
             <a:extLst xmlns:a="http://schemas.openxmlformats.org/drawingml/2006/main">
               <a:ext uri="{FF2B5EF4-FFF2-40B4-BE49-F238E27FC236}">
-                <a16:creationId xmlns:a16="http://schemas.microsoft.com/office/drawing/2014/main" id="{AE708642-F742-434E-B987-136B3D3C70B3}"/>
+                <a16:creationId xmlns:a16="http://schemas.microsoft.com/office/drawing/2014/main" id="{E1FFD839-B5FC-4B9A-9515-FB4A8BB6EBA3}"/>
               </a:ext>
             </a:extLst>
           </p:cNvPr>
@@ -20670,7 +21139,7 @@
           <p:cNvPr id="10" name="">
             <a:extLst xmlns:a="http://schemas.openxmlformats.org/drawingml/2006/main">
               <a:ext uri="{FF2B5EF4-FFF2-40B4-BE49-F238E27FC236}">
-                <a16:creationId xmlns:a16="http://schemas.microsoft.com/office/drawing/2014/main" id="{538BE402-6708-44E4-892A-F4C970BFC4D8}"/>
+                <a16:creationId xmlns:a16="http://schemas.microsoft.com/office/drawing/2014/main" id="{08DAB52B-627B-458F-8680-F7F5B7A6B574}"/>
               </a:ext>
             </a:extLst>
           </p:cNvPr>
@@ -20720,7 +21189,7 @@
           <p:cNvPr id="11" name="">
             <a:extLst xmlns:a="http://schemas.openxmlformats.org/drawingml/2006/main">
               <a:ext uri="{FF2B5EF4-FFF2-40B4-BE49-F238E27FC236}">
-                <a16:creationId xmlns:a16="http://schemas.microsoft.com/office/drawing/2014/main" id="{D8EA1247-8CF7-48BA-BA03-8238470B6B98}"/>
+                <a16:creationId xmlns:a16="http://schemas.microsoft.com/office/drawing/2014/main" id="{344CF8C8-8D1C-4436-AB01-3D9A1E71DFC4}"/>
               </a:ext>
             </a:extLst>
           </p:cNvPr>
@@ -20770,7 +21239,7 @@
           <p:cNvPr id="12" name="">
             <a:extLst xmlns:a="http://schemas.openxmlformats.org/drawingml/2006/main">
               <a:ext uri="{FF2B5EF4-FFF2-40B4-BE49-F238E27FC236}">
-                <a16:creationId xmlns:a16="http://schemas.microsoft.com/office/drawing/2014/main" id="{09DFE062-FA0B-4D9B-B471-79EB758E660F}"/>
+                <a16:creationId xmlns:a16="http://schemas.microsoft.com/office/drawing/2014/main" id="{EA54F50D-CD3E-46FB-BE83-28634AAA3D8D}"/>
               </a:ext>
             </a:extLst>
           </p:cNvPr>
@@ -20803,7 +21272,7 @@
           <p:cNvPr id="13" name="">
             <a:extLst xmlns:a="http://schemas.openxmlformats.org/drawingml/2006/main">
               <a:ext uri="{FF2B5EF4-FFF2-40B4-BE49-F238E27FC236}">
-                <a16:creationId xmlns:a16="http://schemas.microsoft.com/office/drawing/2014/main" id="{0B6D31F7-2D42-44BF-B622-9A1A594731B4}"/>
+                <a16:creationId xmlns:a16="http://schemas.microsoft.com/office/drawing/2014/main" id="{724191A1-C321-44ED-A06E-024D35552098}"/>
               </a:ext>
             </a:extLst>
           </p:cNvPr>
@@ -20853,7 +21322,7 @@
           <p:cNvPr id="14" name="">
             <a:extLst xmlns:a="http://schemas.openxmlformats.org/drawingml/2006/main">
               <a:ext uri="{FF2B5EF4-FFF2-40B4-BE49-F238E27FC236}">
-                <a16:creationId xmlns:a16="http://schemas.microsoft.com/office/drawing/2014/main" id="{94D7E4AE-3617-4205-A7E0-4477A0D107E0}"/>
+                <a16:creationId xmlns:a16="http://schemas.microsoft.com/office/drawing/2014/main" id="{909CB921-32FD-4485-8498-66D12A4F0A91}"/>
               </a:ext>
             </a:extLst>
           </p:cNvPr>
@@ -20903,7 +21372,7 @@
           <p:cNvPr id="15" name="">
             <a:extLst xmlns:a="http://schemas.openxmlformats.org/drawingml/2006/main">
               <a:ext uri="{FF2B5EF4-FFF2-40B4-BE49-F238E27FC236}">
-                <a16:creationId xmlns:a16="http://schemas.microsoft.com/office/drawing/2014/main" id="{1ADE1B16-236D-4D40-A448-CEEB4823077E}"/>
+                <a16:creationId xmlns:a16="http://schemas.microsoft.com/office/drawing/2014/main" id="{AB84C874-41DB-46FD-9178-2CB04CFF4E07}"/>
               </a:ext>
             </a:extLst>
           </p:cNvPr>
@@ -20953,7 +21422,7 @@
           <p:cNvPr id="16" name="">
             <a:extLst xmlns:a="http://schemas.openxmlformats.org/drawingml/2006/main">
               <a:ext uri="{FF2B5EF4-FFF2-40B4-BE49-F238E27FC236}">
-                <a16:creationId xmlns:a16="http://schemas.microsoft.com/office/drawing/2014/main" id="{C16E4F18-C1B7-4FD5-852E-BF2CE7183CEE}"/>
+                <a16:creationId xmlns:a16="http://schemas.microsoft.com/office/drawing/2014/main" id="{21EB1DD0-51E7-4011-AD1C-911239290C22}"/>
               </a:ext>
             </a:extLst>
           </p:cNvPr>
@@ -20986,7 +21455,7 @@
           <p:cNvPr id="17" name="">
             <a:extLst xmlns:a="http://schemas.openxmlformats.org/drawingml/2006/main">
               <a:ext uri="{FF2B5EF4-FFF2-40B4-BE49-F238E27FC236}">
-                <a16:creationId xmlns:a16="http://schemas.microsoft.com/office/drawing/2014/main" id="{A101165C-7906-4E45-9906-78843E3DA069}"/>
+                <a16:creationId xmlns:a16="http://schemas.microsoft.com/office/drawing/2014/main" id="{65271C6A-388F-4653-BDE4-8796C5C71F6F}"/>
               </a:ext>
             </a:extLst>
           </p:cNvPr>
@@ -21036,7 +21505,7 @@
           <p:cNvPr id="18" name="">
             <a:extLst xmlns:a="http://schemas.openxmlformats.org/drawingml/2006/main">
               <a:ext uri="{FF2B5EF4-FFF2-40B4-BE49-F238E27FC236}">
-                <a16:creationId xmlns:a16="http://schemas.microsoft.com/office/drawing/2014/main" id="{BB546BDE-8865-4F89-A5BD-2A129BF15019}"/>
+                <a16:creationId xmlns:a16="http://schemas.microsoft.com/office/drawing/2014/main" id="{8663113D-E30C-4F50-A997-AB48B8DC2A9B}"/>
               </a:ext>
             </a:extLst>
           </p:cNvPr>
@@ -21086,7 +21555,7 @@
           <p:cNvPr id="19" name="">
             <a:extLst xmlns:a="http://schemas.openxmlformats.org/drawingml/2006/main">
               <a:ext uri="{FF2B5EF4-FFF2-40B4-BE49-F238E27FC236}">
-                <a16:creationId xmlns:a16="http://schemas.microsoft.com/office/drawing/2014/main" id="{E85D35F0-EE82-40A0-A202-3DD1F59D9F6D}"/>
+                <a16:creationId xmlns:a16="http://schemas.microsoft.com/office/drawing/2014/main" id="{4C8D6F96-DDC4-4A7F-9F95-32526F32B2AA}"/>
               </a:ext>
             </a:extLst>
           </p:cNvPr>
@@ -21136,7 +21605,7 @@
           <p:cNvPr id="20" name="">
             <a:extLst xmlns:a="http://schemas.openxmlformats.org/drawingml/2006/main">
               <a:ext uri="{FF2B5EF4-FFF2-40B4-BE49-F238E27FC236}">
-                <a16:creationId xmlns:a16="http://schemas.microsoft.com/office/drawing/2014/main" id="{A6A3DE28-A8B2-4765-8915-16565523E4F2}"/>
+                <a16:creationId xmlns:a16="http://schemas.microsoft.com/office/drawing/2014/main" id="{821A4C7E-4D32-4283-93A6-B930D6129F44}"/>
               </a:ext>
             </a:extLst>
           </p:cNvPr>
@@ -21184,7 +21653,7 @@
     </p:spTree>
     <p:extLst>
       <p:ext uri="{BB962C8B-B14F-4D97-AF65-F5344CB8AC3E}">
-        <p14:creationId xmlns:p14="http://schemas.microsoft.com/office/powerpoint/2010/main" val="2127008876"/>
+        <p14:creationId xmlns:p14="http://schemas.microsoft.com/office/powerpoint/2010/main" val="1063231072"/>
       </p:ext>
     </p:extLst>
   </p:cSld>
@@ -21215,7 +21684,7 @@
           <p:cNvPr id="1" name="">
             <a:extLst xmlns:a="http://schemas.openxmlformats.org/drawingml/2006/main">
               <a:ext uri="{FF2B5EF4-FFF2-40B4-BE49-F238E27FC236}">
-                <a16:creationId xmlns:a16="http://schemas.microsoft.com/office/drawing/2014/main" id="{B845378A-A60A-4947-B946-85F65174EEDD}"/>
+                <a16:creationId xmlns:a16="http://schemas.microsoft.com/office/drawing/2014/main" id="{546C76AD-DFA3-4B76-B126-DEE41DB8AB7F}"/>
               </a:ext>
             </a:extLst>
           </p:cNvPr>
@@ -21265,7 +21734,7 @@
           <p:cNvPr id="2" name="">
             <a:extLst xmlns:a="http://schemas.openxmlformats.org/drawingml/2006/main">
               <a:ext uri="{FF2B5EF4-FFF2-40B4-BE49-F238E27FC236}">
-                <a16:creationId xmlns:a16="http://schemas.microsoft.com/office/drawing/2014/main" id="{59BF5798-0F4E-4EE9-A6E9-F697021FE4A3}"/>
+                <a16:creationId xmlns:a16="http://schemas.microsoft.com/office/drawing/2014/main" id="{906CA06C-033E-488A-9F15-7B62B5DFFA8A}"/>
               </a:ext>
             </a:extLst>
           </p:cNvPr>
@@ -21315,7 +21784,7 @@
           <p:cNvPr id="3" name="">
             <a:extLst xmlns:a="http://schemas.openxmlformats.org/drawingml/2006/main">
               <a:ext uri="{FF2B5EF4-FFF2-40B4-BE49-F238E27FC236}">
-                <a16:creationId xmlns:a16="http://schemas.microsoft.com/office/drawing/2014/main" id="{939FAD8D-858B-4A8E-9888-F2ECCBE9A1E8}"/>
+                <a16:creationId xmlns:a16="http://schemas.microsoft.com/office/drawing/2014/main" id="{D68D53AC-6FB5-4C6D-B38B-A20C48E15CBF}"/>
               </a:ext>
             </a:extLst>
           </p:cNvPr>
@@ -21350,7 +21819,7 @@
           <p:nvPr/>
         </p:nvPicPr>
         <p:blipFill>
-          <a:blip xmlns:r="http://schemas.openxmlformats.org/officeDocument/2006/relationships" xmlns:a="http://schemas.openxmlformats.org/drawingml/2006/main" r:embed="Rfa94d19f00344773"/>
+          <a:blip xmlns:r="http://schemas.openxmlformats.org/officeDocument/2006/relationships" xmlns:a="http://schemas.openxmlformats.org/drawingml/2006/main" r:embed="Reeb1376e4dae4b58"/>
           <a:stretch xmlns:a="http://schemas.openxmlformats.org/drawingml/2006/main"/>
         </p:blipFill>
         <p:spPr>
@@ -21368,7 +21837,7 @@
           <p:cNvPr id="5" name="">
             <a:extLst xmlns:a="http://schemas.openxmlformats.org/drawingml/2006/main">
               <a:ext uri="{FF2B5EF4-FFF2-40B4-BE49-F238E27FC236}">
-                <a16:creationId xmlns:a16="http://schemas.microsoft.com/office/drawing/2014/main" id="{220763E5-131B-4242-B7A0-33BD6D7B13C7}"/>
+                <a16:creationId xmlns:a16="http://schemas.microsoft.com/office/drawing/2014/main" id="{38713512-8BB4-4105-8A80-6CDAD3866BD1}"/>
               </a:ext>
             </a:extLst>
           </p:cNvPr>
@@ -21418,7 +21887,7 @@
           <p:cNvPr id="6" name="">
             <a:extLst xmlns:a="http://schemas.openxmlformats.org/drawingml/2006/main">
               <a:ext uri="{FF2B5EF4-FFF2-40B4-BE49-F238E27FC236}">
-                <a16:creationId xmlns:a16="http://schemas.microsoft.com/office/drawing/2014/main" id="{DA308196-A671-4268-8689-386599760C6A}"/>
+                <a16:creationId xmlns:a16="http://schemas.microsoft.com/office/drawing/2014/main" id="{D69E3741-8EDB-4067-920A-037A64B16775}"/>
               </a:ext>
             </a:extLst>
           </p:cNvPr>
@@ -21466,7 +21935,7 @@
     </p:spTree>
     <p:extLst>
       <p:ext uri="{BB962C8B-B14F-4D97-AF65-F5344CB8AC3E}">
-        <p14:creationId xmlns:p14="http://schemas.microsoft.com/office/powerpoint/2010/main" val="1872766600"/>
+        <p14:creationId xmlns:p14="http://schemas.microsoft.com/office/powerpoint/2010/main" val="1421035340"/>
       </p:ext>
     </p:extLst>
   </p:cSld>
@@ -21497,7 +21966,7 @@
           <p:cNvPr id="1" name="">
             <a:extLst xmlns:a="http://schemas.openxmlformats.org/drawingml/2006/main">
               <a:ext uri="{FF2B5EF4-FFF2-40B4-BE49-F238E27FC236}">
-                <a16:creationId xmlns:a16="http://schemas.microsoft.com/office/drawing/2014/main" id="{74C3ED63-6CAA-4E90-8FA1-746B5B57AA10}"/>
+                <a16:creationId xmlns:a16="http://schemas.microsoft.com/office/drawing/2014/main" id="{72D2BF1D-4A44-439B-B6F2-600022A7E30E}"/>
               </a:ext>
             </a:extLst>
           </p:cNvPr>
@@ -21547,7 +22016,7 @@
           <p:cNvPr id="2" name="">
             <a:extLst xmlns:a="http://schemas.openxmlformats.org/drawingml/2006/main">
               <a:ext uri="{FF2B5EF4-FFF2-40B4-BE49-F238E27FC236}">
-                <a16:creationId xmlns:a16="http://schemas.microsoft.com/office/drawing/2014/main" id="{56ECFBF5-F2AE-4E2D-8B72-0EB061695904}"/>
+                <a16:creationId xmlns:a16="http://schemas.microsoft.com/office/drawing/2014/main" id="{46F46AEB-CED4-4821-A366-3048AF33B045}"/>
               </a:ext>
             </a:extLst>
           </p:cNvPr>
@@ -21597,7 +22066,7 @@
           <p:cNvPr id="3" name="">
             <a:extLst xmlns:a="http://schemas.openxmlformats.org/drawingml/2006/main">
               <a:ext uri="{FF2B5EF4-FFF2-40B4-BE49-F238E27FC236}">
-                <a16:creationId xmlns:a16="http://schemas.microsoft.com/office/drawing/2014/main" id="{9A154427-C3D4-43F9-A747-E54050B86004}"/>
+                <a16:creationId xmlns:a16="http://schemas.microsoft.com/office/drawing/2014/main" id="{0A125B83-BA09-41A9-8E93-C9C82CBE8CD1}"/>
               </a:ext>
             </a:extLst>
           </p:cNvPr>
@@ -21632,7 +22101,7 @@
           <p:nvPr/>
         </p:nvPicPr>
         <p:blipFill>
-          <a:blip xmlns:r="http://schemas.openxmlformats.org/officeDocument/2006/relationships" xmlns:a="http://schemas.openxmlformats.org/drawingml/2006/main" r:embed="Re01f17434fe74ed0"/>
+          <a:blip xmlns:r="http://schemas.openxmlformats.org/officeDocument/2006/relationships" xmlns:a="http://schemas.openxmlformats.org/drawingml/2006/main" r:embed="Rd2c885c0dee04259"/>
           <a:stretch xmlns:a="http://schemas.openxmlformats.org/drawingml/2006/main"/>
         </p:blipFill>
         <p:spPr>
@@ -21650,7 +22119,7 @@
           <p:cNvPr id="5" name="">
             <a:extLst xmlns:a="http://schemas.openxmlformats.org/drawingml/2006/main">
               <a:ext uri="{FF2B5EF4-FFF2-40B4-BE49-F238E27FC236}">
-                <a16:creationId xmlns:a16="http://schemas.microsoft.com/office/drawing/2014/main" id="{CE3F76BD-1C76-4FC0-9B36-42BF94B13C91}"/>
+                <a16:creationId xmlns:a16="http://schemas.microsoft.com/office/drawing/2014/main" id="{35758EA2-16E1-443C-B92B-030959668C59}"/>
               </a:ext>
             </a:extLst>
           </p:cNvPr>
@@ -21700,7 +22169,7 @@
           <p:cNvPr id="6" name="">
             <a:extLst xmlns:a="http://schemas.openxmlformats.org/drawingml/2006/main">
               <a:ext uri="{FF2B5EF4-FFF2-40B4-BE49-F238E27FC236}">
-                <a16:creationId xmlns:a16="http://schemas.microsoft.com/office/drawing/2014/main" id="{D7C38717-011A-4251-BEB5-45BEE804A359}"/>
+                <a16:creationId xmlns:a16="http://schemas.microsoft.com/office/drawing/2014/main" id="{1FBBDF20-6C27-4701-966E-881FC10D17EF}"/>
               </a:ext>
             </a:extLst>
           </p:cNvPr>
@@ -21748,7 +22217,7 @@
     </p:spTree>
     <p:extLst>
       <p:ext uri="{BB962C8B-B14F-4D97-AF65-F5344CB8AC3E}">
-        <p14:creationId xmlns:p14="http://schemas.microsoft.com/office/powerpoint/2010/main" val="1150251435"/>
+        <p14:creationId xmlns:p14="http://schemas.microsoft.com/office/powerpoint/2010/main" val="1896129120"/>
       </p:ext>
     </p:extLst>
   </p:cSld>
@@ -21779,7 +22248,7 @@
           <p:cNvPr id="1" name="">
             <a:extLst xmlns:a="http://schemas.openxmlformats.org/drawingml/2006/main">
               <a:ext uri="{FF2B5EF4-FFF2-40B4-BE49-F238E27FC236}">
-                <a16:creationId xmlns:a16="http://schemas.microsoft.com/office/drawing/2014/main" id="{45E141F2-38E7-44B4-AB71-CA6049811913}"/>
+                <a16:creationId xmlns:a16="http://schemas.microsoft.com/office/drawing/2014/main" id="{7BB553D5-B230-42BB-A32D-7855152F7D67}"/>
               </a:ext>
             </a:extLst>
           </p:cNvPr>
@@ -21829,7 +22298,7 @@
           <p:cNvPr id="2" name="">
             <a:extLst xmlns:a="http://schemas.openxmlformats.org/drawingml/2006/main">
               <a:ext uri="{FF2B5EF4-FFF2-40B4-BE49-F238E27FC236}">
-                <a16:creationId xmlns:a16="http://schemas.microsoft.com/office/drawing/2014/main" id="{CBEFEE01-1FDF-4E12-BF78-2B944CCFC74E}"/>
+                <a16:creationId xmlns:a16="http://schemas.microsoft.com/office/drawing/2014/main" id="{A0F2C5FE-E765-46F3-9B10-EC8F5C2FD975}"/>
               </a:ext>
             </a:extLst>
           </p:cNvPr>
@@ -21879,7 +22348,7 @@
           <p:cNvPr id="3" name="">
             <a:extLst xmlns:a="http://schemas.openxmlformats.org/drawingml/2006/main">
               <a:ext uri="{FF2B5EF4-FFF2-40B4-BE49-F238E27FC236}">
-                <a16:creationId xmlns:a16="http://schemas.microsoft.com/office/drawing/2014/main" id="{4F8492EF-B825-44E2-8F32-97EDE311456C}"/>
+                <a16:creationId xmlns:a16="http://schemas.microsoft.com/office/drawing/2014/main" id="{86003EEF-DEB4-4214-8DCE-976700C5A35D}"/>
               </a:ext>
             </a:extLst>
           </p:cNvPr>
@@ -21914,7 +22383,7 @@
           <p:nvPr/>
         </p:nvPicPr>
         <p:blipFill>
-          <a:blip xmlns:r="http://schemas.openxmlformats.org/officeDocument/2006/relationships" xmlns:a="http://schemas.openxmlformats.org/drawingml/2006/main" r:embed="R5cc4330ed4064b17"/>
+          <a:blip xmlns:r="http://schemas.openxmlformats.org/officeDocument/2006/relationships" xmlns:a="http://schemas.openxmlformats.org/drawingml/2006/main" r:embed="R1cdef383d3304ef4"/>
           <a:stretch xmlns:a="http://schemas.openxmlformats.org/drawingml/2006/main"/>
         </p:blipFill>
         <p:spPr>
@@ -21932,7 +22401,7 @@
           <p:cNvPr id="5" name="">
             <a:extLst xmlns:a="http://schemas.openxmlformats.org/drawingml/2006/main">
               <a:ext uri="{FF2B5EF4-FFF2-40B4-BE49-F238E27FC236}">
-                <a16:creationId xmlns:a16="http://schemas.microsoft.com/office/drawing/2014/main" id="{AA3529E7-501A-4D9F-9B6E-B2AD1EEDCD57}"/>
+                <a16:creationId xmlns:a16="http://schemas.microsoft.com/office/drawing/2014/main" id="{57162046-E541-4765-86BE-9A353ECA56C9}"/>
               </a:ext>
             </a:extLst>
           </p:cNvPr>
@@ -21982,7 +22451,7 @@
           <p:cNvPr id="6" name="">
             <a:extLst xmlns:a="http://schemas.openxmlformats.org/drawingml/2006/main">
               <a:ext uri="{FF2B5EF4-FFF2-40B4-BE49-F238E27FC236}">
-                <a16:creationId xmlns:a16="http://schemas.microsoft.com/office/drawing/2014/main" id="{896FCA51-0E6E-477C-9510-DAFD9D58E7D4}"/>
+                <a16:creationId xmlns:a16="http://schemas.microsoft.com/office/drawing/2014/main" id="{D3044C54-0BA4-4C2E-9843-129BEE327833}"/>
               </a:ext>
             </a:extLst>
           </p:cNvPr>
@@ -22030,7 +22499,7 @@
     </p:spTree>
     <p:extLst>
       <p:ext uri="{BB962C8B-B14F-4D97-AF65-F5344CB8AC3E}">
-        <p14:creationId xmlns:p14="http://schemas.microsoft.com/office/powerpoint/2010/main" val="917655321"/>
+        <p14:creationId xmlns:p14="http://schemas.microsoft.com/office/powerpoint/2010/main" val="1613942876"/>
       </p:ext>
     </p:extLst>
   </p:cSld>
@@ -22061,7 +22530,7 @@
           <p:cNvPr id="1" name="">
             <a:extLst xmlns:a="http://schemas.openxmlformats.org/drawingml/2006/main">
               <a:ext uri="{FF2B5EF4-FFF2-40B4-BE49-F238E27FC236}">
-                <a16:creationId xmlns:a16="http://schemas.microsoft.com/office/drawing/2014/main" id="{23AC0EEF-B4BB-4340-B47B-09B954BCFE42}"/>
+                <a16:creationId xmlns:a16="http://schemas.microsoft.com/office/drawing/2014/main" id="{B3D16EE8-AD1B-43B3-A4A0-C4AE1C2F3378}"/>
               </a:ext>
             </a:extLst>
           </p:cNvPr>
@@ -22111,7 +22580,7 @@
           <p:cNvPr id="2" name="">
             <a:extLst xmlns:a="http://schemas.openxmlformats.org/drawingml/2006/main">
               <a:ext uri="{FF2B5EF4-FFF2-40B4-BE49-F238E27FC236}">
-                <a16:creationId xmlns:a16="http://schemas.microsoft.com/office/drawing/2014/main" id="{D1B38342-E6FA-488C-8A2C-DD39A9BB1F00}"/>
+                <a16:creationId xmlns:a16="http://schemas.microsoft.com/office/drawing/2014/main" id="{CACFDE79-0B84-4808-A5E1-17FCD58201F6}"/>
               </a:ext>
             </a:extLst>
           </p:cNvPr>
@@ -22161,7 +22630,7 @@
           <p:cNvPr id="3" name="">
             <a:extLst xmlns:a="http://schemas.openxmlformats.org/drawingml/2006/main">
               <a:ext uri="{FF2B5EF4-FFF2-40B4-BE49-F238E27FC236}">
-                <a16:creationId xmlns:a16="http://schemas.microsoft.com/office/drawing/2014/main" id="{3556B95A-A570-4696-A068-BAE6ADD09B36}"/>
+                <a16:creationId xmlns:a16="http://schemas.microsoft.com/office/drawing/2014/main" id="{03719BB5-4F8D-43C0-A9E8-7405E574D732}"/>
               </a:ext>
             </a:extLst>
           </p:cNvPr>
@@ -22196,7 +22665,7 @@
           <p:nvPr/>
         </p:nvPicPr>
         <p:blipFill>
-          <a:blip xmlns:r="http://schemas.openxmlformats.org/officeDocument/2006/relationships" xmlns:a="http://schemas.openxmlformats.org/drawingml/2006/main" r:embed="Rcbfc6e0a9cca4687"/>
+          <a:blip xmlns:r="http://schemas.openxmlformats.org/officeDocument/2006/relationships" xmlns:a="http://schemas.openxmlformats.org/drawingml/2006/main" r:embed="Rcfa3f1c3a7fa47db"/>
           <a:stretch xmlns:a="http://schemas.openxmlformats.org/drawingml/2006/main"/>
         </p:blipFill>
         <p:spPr>
@@ -22214,7 +22683,7 @@
           <p:cNvPr id="5" name="">
             <a:extLst xmlns:a="http://schemas.openxmlformats.org/drawingml/2006/main">
               <a:ext uri="{FF2B5EF4-FFF2-40B4-BE49-F238E27FC236}">
-                <a16:creationId xmlns:a16="http://schemas.microsoft.com/office/drawing/2014/main" id="{3304694F-683E-46D1-A827-2803A12FF223}"/>
+                <a16:creationId xmlns:a16="http://schemas.microsoft.com/office/drawing/2014/main" id="{07294727-D5EC-4F3C-8C70-074A5C649256}"/>
               </a:ext>
             </a:extLst>
           </p:cNvPr>
@@ -22264,7 +22733,7 @@
           <p:cNvPr id="6" name="">
             <a:extLst xmlns:a="http://schemas.openxmlformats.org/drawingml/2006/main">
               <a:ext uri="{FF2B5EF4-FFF2-40B4-BE49-F238E27FC236}">
-                <a16:creationId xmlns:a16="http://schemas.microsoft.com/office/drawing/2014/main" id="{D51DFAA2-DDB9-44BB-AA03-26B66554EBEF}"/>
+                <a16:creationId xmlns:a16="http://schemas.microsoft.com/office/drawing/2014/main" id="{C9AA8B3B-780F-4555-BBBF-6F6E3C902B0B}"/>
               </a:ext>
             </a:extLst>
           </p:cNvPr>
@@ -22312,7 +22781,7 @@
     </p:spTree>
     <p:extLst>
       <p:ext uri="{BB962C8B-B14F-4D97-AF65-F5344CB8AC3E}">
-        <p14:creationId xmlns:p14="http://schemas.microsoft.com/office/powerpoint/2010/main" val="1233322614"/>
+        <p14:creationId xmlns:p14="http://schemas.microsoft.com/office/powerpoint/2010/main" val="1341792444"/>
       </p:ext>
     </p:extLst>
   </p:cSld>
@@ -22343,7 +22812,7 @@
           <p:cNvPr id="1" name="">
             <a:extLst xmlns:a="http://schemas.openxmlformats.org/drawingml/2006/main">
               <a:ext uri="{FF2B5EF4-FFF2-40B4-BE49-F238E27FC236}">
-                <a16:creationId xmlns:a16="http://schemas.microsoft.com/office/drawing/2014/main" id="{82CD7885-C6D3-4B48-B3C1-55959638016D}"/>
+                <a16:creationId xmlns:a16="http://schemas.microsoft.com/office/drawing/2014/main" id="{73F63971-3E52-4146-A068-FC94290E1A53}"/>
               </a:ext>
             </a:extLst>
           </p:cNvPr>
@@ -22393,7 +22862,7 @@
           <p:cNvPr id="2" name="">
             <a:extLst xmlns:a="http://schemas.openxmlformats.org/drawingml/2006/main">
               <a:ext uri="{FF2B5EF4-FFF2-40B4-BE49-F238E27FC236}">
-                <a16:creationId xmlns:a16="http://schemas.microsoft.com/office/drawing/2014/main" id="{8C7567BF-EA7A-4B3D-BEBE-0F27CDEA1152}"/>
+                <a16:creationId xmlns:a16="http://schemas.microsoft.com/office/drawing/2014/main" id="{56CF92DB-E923-4051-A65E-E9634F0FB68C}"/>
               </a:ext>
             </a:extLst>
           </p:cNvPr>
@@ -22443,7 +22912,7 @@
           <p:cNvPr id="3" name="">
             <a:extLst xmlns:a="http://schemas.openxmlformats.org/drawingml/2006/main">
               <a:ext uri="{FF2B5EF4-FFF2-40B4-BE49-F238E27FC236}">
-                <a16:creationId xmlns:a16="http://schemas.microsoft.com/office/drawing/2014/main" id="{CFF9DE9D-D7D2-46DC-9DF1-C8D5DF85D58E}"/>
+                <a16:creationId xmlns:a16="http://schemas.microsoft.com/office/drawing/2014/main" id="{9E7CBFD9-9E0F-48C0-AD68-A0E16381291D}"/>
               </a:ext>
             </a:extLst>
           </p:cNvPr>
@@ -22478,7 +22947,7 @@
           <p:nvPr/>
         </p:nvPicPr>
         <p:blipFill>
-          <a:blip xmlns:r="http://schemas.openxmlformats.org/officeDocument/2006/relationships" xmlns:a="http://schemas.openxmlformats.org/drawingml/2006/main" r:embed="R3314fa8610cb4476"/>
+          <a:blip xmlns:r="http://schemas.openxmlformats.org/officeDocument/2006/relationships" xmlns:a="http://schemas.openxmlformats.org/drawingml/2006/main" r:embed="Rd1db148787054544"/>
           <a:stretch xmlns:a="http://schemas.openxmlformats.org/drawingml/2006/main"/>
         </p:blipFill>
         <p:spPr>
@@ -22496,7 +22965,7 @@
           <p:cNvPr id="5" name="">
             <a:extLst xmlns:a="http://schemas.openxmlformats.org/drawingml/2006/main">
               <a:ext uri="{FF2B5EF4-FFF2-40B4-BE49-F238E27FC236}">
-                <a16:creationId xmlns:a16="http://schemas.microsoft.com/office/drawing/2014/main" id="{DA03751D-7E5E-4603-B6A8-550347A62612}"/>
+                <a16:creationId xmlns:a16="http://schemas.microsoft.com/office/drawing/2014/main" id="{3D524CC8-5FA8-4F4B-AEBD-0A6C0642AEF0}"/>
               </a:ext>
             </a:extLst>
           </p:cNvPr>
@@ -22546,7 +23015,7 @@
           <p:cNvPr id="6" name="">
             <a:extLst xmlns:a="http://schemas.openxmlformats.org/drawingml/2006/main">
               <a:ext uri="{FF2B5EF4-FFF2-40B4-BE49-F238E27FC236}">
-                <a16:creationId xmlns:a16="http://schemas.microsoft.com/office/drawing/2014/main" id="{7CAA214A-CE16-4C18-A85D-E62FAEDB99B6}"/>
+                <a16:creationId xmlns:a16="http://schemas.microsoft.com/office/drawing/2014/main" id="{5552FEF6-EF57-4D69-910B-80C89167CA55}"/>
               </a:ext>
             </a:extLst>
           </p:cNvPr>
@@ -22594,7 +23063,7 @@
     </p:spTree>
     <p:extLst>
       <p:ext uri="{BB962C8B-B14F-4D97-AF65-F5344CB8AC3E}">
-        <p14:creationId xmlns:p14="http://schemas.microsoft.com/office/powerpoint/2010/main" val="1042807169"/>
+        <p14:creationId xmlns:p14="http://schemas.microsoft.com/office/powerpoint/2010/main" val="1078622174"/>
       </p:ext>
     </p:extLst>
   </p:cSld>
@@ -22625,7 +23094,7 @@
           <p:cNvPr id="1" name="">
             <a:extLst xmlns:a="http://schemas.openxmlformats.org/drawingml/2006/main">
               <a:ext uri="{FF2B5EF4-FFF2-40B4-BE49-F238E27FC236}">
-                <a16:creationId xmlns:a16="http://schemas.microsoft.com/office/drawing/2014/main" id="{C2EC06E8-97C4-480C-B01E-7DE12654DE66}"/>
+                <a16:creationId xmlns:a16="http://schemas.microsoft.com/office/drawing/2014/main" id="{DDB4F833-F621-4475-A8F2-47F9F5674852}"/>
               </a:ext>
             </a:extLst>
           </p:cNvPr>
@@ -22675,7 +23144,7 @@
           <p:cNvPr id="2" name="">
             <a:extLst xmlns:a="http://schemas.openxmlformats.org/drawingml/2006/main">
               <a:ext uri="{FF2B5EF4-FFF2-40B4-BE49-F238E27FC236}">
-                <a16:creationId xmlns:a16="http://schemas.microsoft.com/office/drawing/2014/main" id="{C9C54E29-469D-4B36-9C74-AAD2C7172DE2}"/>
+                <a16:creationId xmlns:a16="http://schemas.microsoft.com/office/drawing/2014/main" id="{C99E3C29-8E38-480F-8005-190AA4019D1D}"/>
               </a:ext>
             </a:extLst>
           </p:cNvPr>
@@ -22725,7 +23194,7 @@
           <p:cNvPr id="3" name="">
             <a:extLst xmlns:a="http://schemas.openxmlformats.org/drawingml/2006/main">
               <a:ext uri="{FF2B5EF4-FFF2-40B4-BE49-F238E27FC236}">
-                <a16:creationId xmlns:a16="http://schemas.microsoft.com/office/drawing/2014/main" id="{A0831858-4690-4C85-A388-F489A2D2155D}"/>
+                <a16:creationId xmlns:a16="http://schemas.microsoft.com/office/drawing/2014/main" id="{B16A4CF1-C4EF-4549-8475-79D58B8DC9A7}"/>
               </a:ext>
             </a:extLst>
           </p:cNvPr>
@@ -22756,7 +23225,7 @@
           <p:cNvPr id="4" name="">
             <a:extLst xmlns:a="http://schemas.openxmlformats.org/drawingml/2006/main">
               <a:ext uri="{FF2B5EF4-FFF2-40B4-BE49-F238E27FC236}">
-                <a16:creationId xmlns:a16="http://schemas.microsoft.com/office/drawing/2014/main" id="{1626F601-151A-40C5-B2BE-8FC42147EEFD}"/>
+                <a16:creationId xmlns:a16="http://schemas.microsoft.com/office/drawing/2014/main" id="{9765F4FC-E9FE-4939-8D8B-BA2BECDBB52F}"/>
               </a:ext>
             </a:extLst>
           </p:cNvPr>
@@ -22806,7 +23275,7 @@
           <p:cNvPr id="5" name="">
             <a:extLst xmlns:a="http://schemas.openxmlformats.org/drawingml/2006/main">
               <a:ext uri="{FF2B5EF4-FFF2-40B4-BE49-F238E27FC236}">
-                <a16:creationId xmlns:a16="http://schemas.microsoft.com/office/drawing/2014/main" id="{70F8DF23-9458-482E-8E67-8B244E218DCF}"/>
+                <a16:creationId xmlns:a16="http://schemas.microsoft.com/office/drawing/2014/main" id="{3C4C1034-B727-4E2E-9905-A567B5F5EE42}"/>
               </a:ext>
             </a:extLst>
           </p:cNvPr>
@@ -22856,7 +23325,7 @@
           <p:cNvPr id="6" name="">
             <a:extLst xmlns:a="http://schemas.openxmlformats.org/drawingml/2006/main">
               <a:ext uri="{FF2B5EF4-FFF2-40B4-BE49-F238E27FC236}">
-                <a16:creationId xmlns:a16="http://schemas.microsoft.com/office/drawing/2014/main" id="{12EE7116-B6A3-4F08-9D8B-5AB076C29097}"/>
+                <a16:creationId xmlns:a16="http://schemas.microsoft.com/office/drawing/2014/main" id="{E4CD72F1-9B88-4F17-93D3-2EC9CC6BE794}"/>
               </a:ext>
             </a:extLst>
           </p:cNvPr>
@@ -22906,7 +23375,7 @@
           <p:cNvPr id="7" name="">
             <a:extLst xmlns:a="http://schemas.openxmlformats.org/drawingml/2006/main">
               <a:ext uri="{FF2B5EF4-FFF2-40B4-BE49-F238E27FC236}">
-                <a16:creationId xmlns:a16="http://schemas.microsoft.com/office/drawing/2014/main" id="{018C3DDA-009D-4088-A857-586C8325F88C}"/>
+                <a16:creationId xmlns:a16="http://schemas.microsoft.com/office/drawing/2014/main" id="{FB1C433D-BE12-4E83-85A3-B29D04885021}"/>
               </a:ext>
             </a:extLst>
           </p:cNvPr>
@@ -22956,7 +23425,7 @@
           <p:cNvPr id="8" name="">
             <a:extLst xmlns:a="http://schemas.openxmlformats.org/drawingml/2006/main">
               <a:ext uri="{FF2B5EF4-FFF2-40B4-BE49-F238E27FC236}">
-                <a16:creationId xmlns:a16="http://schemas.microsoft.com/office/drawing/2014/main" id="{344D85A5-7E7C-4A1F-B63C-B2B5831A1A14}"/>
+                <a16:creationId xmlns:a16="http://schemas.microsoft.com/office/drawing/2014/main" id="{2A9B4091-4D73-4F5B-A752-5A8DE74601E6}"/>
               </a:ext>
             </a:extLst>
           </p:cNvPr>
@@ -23006,7 +23475,7 @@
           <p:cNvPr id="9" name="">
             <a:extLst xmlns:a="http://schemas.openxmlformats.org/drawingml/2006/main">
               <a:ext uri="{FF2B5EF4-FFF2-40B4-BE49-F238E27FC236}">
-                <a16:creationId xmlns:a16="http://schemas.microsoft.com/office/drawing/2014/main" id="{DA4D43D3-3A43-4F85-9E91-F37676CCF083}"/>
+                <a16:creationId xmlns:a16="http://schemas.microsoft.com/office/drawing/2014/main" id="{C98250D0-12E0-4BB0-A027-67DA5914BEB5}"/>
               </a:ext>
             </a:extLst>
           </p:cNvPr>
@@ -23056,7 +23525,7 @@
           <p:cNvPr id="10" name="">
             <a:extLst xmlns:a="http://schemas.openxmlformats.org/drawingml/2006/main">
               <a:ext uri="{FF2B5EF4-FFF2-40B4-BE49-F238E27FC236}">
-                <a16:creationId xmlns:a16="http://schemas.microsoft.com/office/drawing/2014/main" id="{21335F33-6C2D-425C-860C-6FFEDCBB46D5}"/>
+                <a16:creationId xmlns:a16="http://schemas.microsoft.com/office/drawing/2014/main" id="{00539A2B-CEF0-428A-BD80-44D28BF3859A}"/>
               </a:ext>
             </a:extLst>
           </p:cNvPr>
@@ -23106,7 +23575,7 @@
           <p:cNvPr id="11" name="">
             <a:extLst xmlns:a="http://schemas.openxmlformats.org/drawingml/2006/main">
               <a:ext uri="{FF2B5EF4-FFF2-40B4-BE49-F238E27FC236}">
-                <a16:creationId xmlns:a16="http://schemas.microsoft.com/office/drawing/2014/main" id="{1AD9D3B5-CD67-4B61-90D7-B2805AFFBE15}"/>
+                <a16:creationId xmlns:a16="http://schemas.microsoft.com/office/drawing/2014/main" id="{BFC28C2C-3255-4071-AD59-1435275EAC55}"/>
               </a:ext>
             </a:extLst>
           </p:cNvPr>
@@ -23156,7 +23625,7 @@
           <p:cNvPr id="12" name="">
             <a:extLst xmlns:a="http://schemas.openxmlformats.org/drawingml/2006/main">
               <a:ext uri="{FF2B5EF4-FFF2-40B4-BE49-F238E27FC236}">
-                <a16:creationId xmlns:a16="http://schemas.microsoft.com/office/drawing/2014/main" id="{1A1B0C11-F7BF-4818-AC77-24EDABB70B41}"/>
+                <a16:creationId xmlns:a16="http://schemas.microsoft.com/office/drawing/2014/main" id="{A7733495-77CA-4E2C-84C9-E1BFA0BE3B06}"/>
               </a:ext>
             </a:extLst>
           </p:cNvPr>
@@ -23204,7 +23673,2796 @@
     </p:spTree>
     <p:extLst>
       <p:ext uri="{BB962C8B-B14F-4D97-AF65-F5344CB8AC3E}">
-        <p14:creationId xmlns:p14="http://schemas.microsoft.com/office/powerpoint/2010/main" val="925440896"/>
+        <p14:creationId xmlns:p14="http://schemas.microsoft.com/office/powerpoint/2010/main" val="384630322"/>
+      </p:ext>
+    </p:extLst>
+  </p:cSld>
+</p:sld>
+</file>
+
+<file path=ppt/slides/slide45.xml><?xml version="1.0" encoding="utf-8"?>
+<p:sld xmlns:p="http://schemas.openxmlformats.org/presentationml/2006/main">
+  <p:cSld>
+    <p:bg>
+      <p:bgPr>
+        <a:solidFill xmlns:a="http://schemas.openxmlformats.org/drawingml/2006/main">
+          <a:srgbClr val="FFFFFF"/>
+        </a:solidFill>
+      </p:bgPr>
+    </p:bg>
+    <p:spTree>
+      <p:nvGrpSpPr>
+        <p:cNvPr id="1" name=""/>
+        <p:cNvGrpSpPr/>
+        <p:nvPr/>
+      </p:nvGrpSpPr>
+      <p:grpSpPr>
+        <a:xfrm xmlns:a="http://schemas.openxmlformats.org/drawingml/2006/main"/>
+      </p:grpSpPr>
+      <p:sp>
+        <p:nvSpPr>
+          <p:cNvPr id="1" name="">
+            <a:extLst xmlns:a="http://schemas.openxmlformats.org/drawingml/2006/main">
+              <a:ext uri="{FF2B5EF4-FFF2-40B4-BE49-F238E27FC236}">
+                <a16:creationId xmlns:a16="http://schemas.microsoft.com/office/drawing/2014/main" id="{10138166-7CDA-4E94-A18D-2377C1EBF5E3}"/>
+              </a:ext>
+            </a:extLst>
+          </p:cNvPr>
+          <p:cNvSpPr>
+            <a:spLocks xmlns:a="http://schemas.openxmlformats.org/drawingml/2006/main" noGrp="1"/>
+          </p:cNvSpPr>
+          <p:nvPr/>
+        </p:nvSpPr>
+        <p:spPr>
+          <a:xfrm xmlns:a="http://schemas.openxmlformats.org/drawingml/2006/main">
+            <a:off x="685800" y="495300"/>
+            <a:ext cx="4762500" cy="419100"/>
+          </a:xfrm>
+          <a:prstGeom xmlns:a="http://schemas.openxmlformats.org/drawingml/2006/main" prst="rect">
+            <a:avLst/>
+          </a:prstGeom>
+          <a:noFill xmlns:a="http://schemas.openxmlformats.org/drawingml/2006/main"/>
+          <a:ln xmlns:a="http://schemas.openxmlformats.org/drawingml/2006/main" w="0">
+            <a:noFill/>
+            <a:prstDash val="solid"/>
+          </a:ln>
+        </p:spPr>
+        <p:txBody>
+          <a:bodyPr xmlns:a="http://schemas.openxmlformats.org/drawingml/2006/main"/>
+          <a:lstStyle xmlns:a="http://schemas.openxmlformats.org/drawingml/2006/main"/>
+          <a:p xmlns:a="http://schemas.openxmlformats.org/drawingml/2006/main">
+            <a:pPr algn="l">
+              <a:defRPr sz="2400" b="1" i="0">
+                <a:solidFill>
+                  <a:srgbClr val="555555"/>
+                </a:solidFill>
+              </a:defRPr>
+            </a:pPr>
+            <a:r>
+              <a:rPr sz="2400" b="1" i="0">
+                <a:solidFill>
+                  <a:srgbClr val="555555"/>
+                </a:solidFill>
+              </a:rPr>
+              <a:t>Transition</a:t>
+            </a:r>
+          </a:p>
+        </p:txBody>
+      </p:sp>
+      <p:sp>
+        <p:nvSpPr>
+          <p:cNvPr id="2" name="">
+            <a:extLst xmlns:a="http://schemas.openxmlformats.org/drawingml/2006/main">
+              <a:ext uri="{FF2B5EF4-FFF2-40B4-BE49-F238E27FC236}">
+                <a16:creationId xmlns:a16="http://schemas.microsoft.com/office/drawing/2014/main" id="{27C258E6-FF74-4C25-B540-D59776B020EA}"/>
+              </a:ext>
+            </a:extLst>
+          </p:cNvPr>
+          <p:cNvSpPr>
+            <a:spLocks xmlns:a="http://schemas.openxmlformats.org/drawingml/2006/main" noGrp="1"/>
+          </p:cNvSpPr>
+          <p:nvPr/>
+        </p:nvSpPr>
+        <p:spPr>
+          <a:xfrm xmlns:a="http://schemas.openxmlformats.org/drawingml/2006/main">
+            <a:off x="685800" y="1562100"/>
+            <a:ext cx="8096250" cy="1066800"/>
+          </a:xfrm>
+          <a:prstGeom xmlns:a="http://schemas.openxmlformats.org/drawingml/2006/main" prst="rect">
+            <a:avLst/>
+          </a:prstGeom>
+          <a:noFill xmlns:a="http://schemas.openxmlformats.org/drawingml/2006/main"/>
+          <a:ln xmlns:a="http://schemas.openxmlformats.org/drawingml/2006/main" w="0">
+            <a:noFill/>
+            <a:prstDash val="solid"/>
+          </a:ln>
+        </p:spPr>
+        <p:txBody>
+          <a:bodyPr xmlns:a="http://schemas.openxmlformats.org/drawingml/2006/main"/>
+          <a:lstStyle xmlns:a="http://schemas.openxmlformats.org/drawingml/2006/main"/>
+          <a:p xmlns:a="http://schemas.openxmlformats.org/drawingml/2006/main">
+            <a:pPr algn="l">
+              <a:defRPr sz="3750" b="1" i="0">
+                <a:solidFill>
+                  <a:srgbClr val="000000"/>
+                </a:solidFill>
+              </a:defRPr>
+            </a:pPr>
+            <a:r>
+              <a:rPr sz="3750" b="1" i="0">
+                <a:solidFill>
+                  <a:srgbClr val="000000"/>
+                </a:solidFill>
+              </a:rPr>
+              <a:t>Now we test what information the model sees</a:t>
+            </a:r>
+          </a:p>
+        </p:txBody>
+      </p:sp>
+      <p:sp>
+        <p:nvSpPr>
+          <p:cNvPr id="3" name="">
+            <a:extLst xmlns:a="http://schemas.openxmlformats.org/drawingml/2006/main">
+              <a:ext uri="{FF2B5EF4-FFF2-40B4-BE49-F238E27FC236}">
+                <a16:creationId xmlns:a16="http://schemas.microsoft.com/office/drawing/2014/main" id="{11CC598A-0D3B-416F-9C67-847ACC5CC111}"/>
+              </a:ext>
+            </a:extLst>
+          </p:cNvPr>
+          <p:cNvSpPr>
+            <a:spLocks xmlns:a="http://schemas.openxmlformats.org/drawingml/2006/main" noGrp="1"/>
+          </p:cNvSpPr>
+          <p:nvPr/>
+        </p:nvSpPr>
+        <p:spPr>
+          <a:xfrm xmlns:a="http://schemas.openxmlformats.org/drawingml/2006/main">
+            <a:off x="723900" y="3105150"/>
+            <a:ext cx="5715000" cy="19050"/>
+          </a:xfrm>
+          <a:prstGeom xmlns:a="http://schemas.openxmlformats.org/drawingml/2006/main" prst="rect">
+            <a:avLst/>
+          </a:prstGeom>
+          <a:solidFill xmlns:a="http://schemas.openxmlformats.org/drawingml/2006/main">
+            <a:srgbClr val="B8BCC4"/>
+          </a:solidFill>
+          <a:ln xmlns:a="http://schemas.openxmlformats.org/drawingml/2006/main" w="0">
+            <a:noFill/>
+            <a:prstDash val="solid"/>
+          </a:ln>
+        </p:spPr>
+      </p:sp>
+      <p:sp>
+        <p:nvSpPr>
+          <p:cNvPr id="4" name="">
+            <a:extLst xmlns:a="http://schemas.openxmlformats.org/drawingml/2006/main">
+              <a:ext uri="{FF2B5EF4-FFF2-40B4-BE49-F238E27FC236}">
+                <a16:creationId xmlns:a16="http://schemas.microsoft.com/office/drawing/2014/main" id="{74689785-7D31-4015-AD54-AAE217162ECE}"/>
+              </a:ext>
+            </a:extLst>
+          </p:cNvPr>
+          <p:cNvSpPr>
+            <a:spLocks xmlns:a="http://schemas.openxmlformats.org/drawingml/2006/main" noGrp="1"/>
+          </p:cNvSpPr>
+          <p:nvPr/>
+        </p:nvSpPr>
+        <p:spPr>
+          <a:xfrm xmlns:a="http://schemas.openxmlformats.org/drawingml/2006/main">
+            <a:off x="723900" y="3467100"/>
+            <a:ext cx="7524750" cy="1066800"/>
+          </a:xfrm>
+          <a:prstGeom xmlns:a="http://schemas.openxmlformats.org/drawingml/2006/main" prst="rect">
+            <a:avLst/>
+          </a:prstGeom>
+          <a:noFill xmlns:a="http://schemas.openxmlformats.org/drawingml/2006/main"/>
+          <a:ln xmlns:a="http://schemas.openxmlformats.org/drawingml/2006/main" w="0">
+            <a:noFill/>
+            <a:prstDash val="solid"/>
+          </a:ln>
+        </p:spPr>
+        <p:txBody>
+          <a:bodyPr xmlns:a="http://schemas.openxmlformats.org/drawingml/2006/main"/>
+          <a:lstStyle xmlns:a="http://schemas.openxmlformats.org/drawingml/2006/main"/>
+          <a:p xmlns:a="http://schemas.openxmlformats.org/drawingml/2006/main">
+            <a:pPr algn="l">
+              <a:defRPr sz="1800" b="0" i="0">
+                <a:solidFill>
+                  <a:srgbClr val="222222"/>
+                </a:solidFill>
+              </a:defRPr>
+            </a:pPr>
+            <a:r>
+              <a:rPr sz="1800" b="0" i="0">
+                <a:solidFill>
+                  <a:srgbClr val="222222"/>
+                </a:solidFill>
+              </a:rPr>
+              <a:t>ML-P3 keeps seeded XGBoost, h1 labels, TRAIN-only threshold selection, annual replay, and benchmark comparison fixed. Only feature-set membership changes.</a:t>
+            </a:r>
+          </a:p>
+        </p:txBody>
+      </p:sp>
+      <p:sp>
+        <p:nvSpPr>
+          <p:cNvPr id="5" name="">
+            <a:extLst xmlns:a="http://schemas.openxmlformats.org/drawingml/2006/main">
+              <a:ext uri="{FF2B5EF4-FFF2-40B4-BE49-F238E27FC236}">
+                <a16:creationId xmlns:a16="http://schemas.microsoft.com/office/drawing/2014/main" id="{8C2FF266-EE0E-4789-A945-5C0F7A167A13}"/>
+              </a:ext>
+            </a:extLst>
+          </p:cNvPr>
+          <p:cNvSpPr>
+            <a:spLocks xmlns:a="http://schemas.openxmlformats.org/drawingml/2006/main" noGrp="1"/>
+          </p:cNvSpPr>
+          <p:nvPr/>
+        </p:nvSpPr>
+        <p:spPr>
+          <a:xfrm xmlns:a="http://schemas.openxmlformats.org/drawingml/2006/main">
+            <a:off x="8801100" y="0"/>
+            <a:ext cx="3390900" cy="6858000"/>
+          </a:xfrm>
+          <a:prstGeom xmlns:a="http://schemas.openxmlformats.org/drawingml/2006/main" prst="rect">
+            <a:avLst/>
+          </a:prstGeom>
+          <a:solidFill xmlns:a="http://schemas.openxmlformats.org/drawingml/2006/main">
+            <a:srgbClr val="EDEDED"/>
+          </a:solidFill>
+          <a:ln xmlns:a="http://schemas.openxmlformats.org/drawingml/2006/main" w="0">
+            <a:noFill/>
+            <a:prstDash val="solid"/>
+          </a:ln>
+        </p:spPr>
+      </p:sp>
+      <p:sp>
+        <p:nvSpPr>
+          <p:cNvPr id="6" name="">
+            <a:extLst xmlns:a="http://schemas.openxmlformats.org/drawingml/2006/main">
+              <a:ext uri="{FF2B5EF4-FFF2-40B4-BE49-F238E27FC236}">
+                <a16:creationId xmlns:a16="http://schemas.microsoft.com/office/drawing/2014/main" id="{A75CA9A1-E33C-4CC3-A9D5-9B2C292CFCCC}"/>
+              </a:ext>
+            </a:extLst>
+          </p:cNvPr>
+          <p:cNvSpPr>
+            <a:spLocks xmlns:a="http://schemas.openxmlformats.org/drawingml/2006/main" noGrp="1"/>
+          </p:cNvSpPr>
+          <p:nvPr/>
+        </p:nvSpPr>
+        <p:spPr>
+          <a:xfrm xmlns:a="http://schemas.openxmlformats.org/drawingml/2006/main">
+            <a:off x="9353550" y="2343150"/>
+            <a:ext cx="2190750" cy="438150"/>
+          </a:xfrm>
+          <a:prstGeom xmlns:a="http://schemas.openxmlformats.org/drawingml/2006/main" prst="rect">
+            <a:avLst/>
+          </a:prstGeom>
+          <a:noFill xmlns:a="http://schemas.openxmlformats.org/drawingml/2006/main"/>
+          <a:ln xmlns:a="http://schemas.openxmlformats.org/drawingml/2006/main" w="0">
+            <a:noFill/>
+            <a:prstDash val="solid"/>
+          </a:ln>
+        </p:spPr>
+        <p:txBody>
+          <a:bodyPr xmlns:a="http://schemas.openxmlformats.org/drawingml/2006/main"/>
+          <a:lstStyle xmlns:a="http://schemas.openxmlformats.org/drawingml/2006/main"/>
+          <a:p xmlns:a="http://schemas.openxmlformats.org/drawingml/2006/main">
+            <a:pPr algn="ctr">
+              <a:defRPr sz="3150" b="1" i="0">
+                <a:solidFill>
+                  <a:srgbClr val="000000"/>
+                </a:solidFill>
+              </a:defRPr>
+            </a:pPr>
+            <a:r>
+              <a:rPr sz="3150" b="1" i="0">
+                <a:solidFill>
+                  <a:srgbClr val="000000"/>
+                </a:solidFill>
+              </a:rPr>
+              <a:t>ML-P3</a:t>
+            </a:r>
+          </a:p>
+        </p:txBody>
+      </p:sp>
+      <p:sp>
+        <p:nvSpPr>
+          <p:cNvPr id="7" name="">
+            <a:extLst xmlns:a="http://schemas.openxmlformats.org/drawingml/2006/main">
+              <a:ext uri="{FF2B5EF4-FFF2-40B4-BE49-F238E27FC236}">
+                <a16:creationId xmlns:a16="http://schemas.microsoft.com/office/drawing/2014/main" id="{E0C77D33-CD97-4F0A-9CE0-6A7CE31607EB}"/>
+              </a:ext>
+            </a:extLst>
+          </p:cNvPr>
+          <p:cNvSpPr>
+            <a:spLocks xmlns:a="http://schemas.openxmlformats.org/drawingml/2006/main" noGrp="1"/>
+          </p:cNvSpPr>
+          <p:nvPr/>
+        </p:nvSpPr>
+        <p:spPr>
+          <a:xfrm xmlns:a="http://schemas.openxmlformats.org/drawingml/2006/main">
+            <a:off x="9067800" y="3067050"/>
+            <a:ext cx="2762250" cy="400050"/>
+          </a:xfrm>
+          <a:prstGeom xmlns:a="http://schemas.openxmlformats.org/drawingml/2006/main" prst="rect">
+            <a:avLst/>
+          </a:prstGeom>
+          <a:noFill xmlns:a="http://schemas.openxmlformats.org/drawingml/2006/main"/>
+          <a:ln xmlns:a="http://schemas.openxmlformats.org/drawingml/2006/main" w="0">
+            <a:noFill/>
+            <a:prstDash val="solid"/>
+          </a:ln>
+        </p:spPr>
+        <p:txBody>
+          <a:bodyPr xmlns:a="http://schemas.openxmlformats.org/drawingml/2006/main"/>
+          <a:lstStyle xmlns:a="http://schemas.openxmlformats.org/drawingml/2006/main"/>
+          <a:p xmlns:a="http://schemas.openxmlformats.org/drawingml/2006/main">
+            <a:pPr algn="ctr">
+              <a:defRPr sz="1875" b="0" i="0">
+                <a:solidFill>
+                  <a:srgbClr val="222222"/>
+                </a:solidFill>
+              </a:defRPr>
+            </a:pPr>
+            <a:r>
+              <a:rPr sz="1875" b="0" i="0">
+                <a:solidFill>
+                  <a:srgbClr val="222222"/>
+                </a:solidFill>
+              </a:rPr>
+              <a:t>Feature sets</a:t>
+            </a:r>
+          </a:p>
+        </p:txBody>
+      </p:sp>
+    </p:spTree>
+    <p:extLst>
+      <p:ext uri="{BB962C8B-B14F-4D97-AF65-F5344CB8AC3E}">
+        <p14:creationId xmlns:p14="http://schemas.microsoft.com/office/powerpoint/2010/main" val="705392121"/>
+      </p:ext>
+    </p:extLst>
+  </p:cSld>
+</p:sld>
+</file>
+
+<file path=ppt/slides/slide46.xml><?xml version="1.0" encoding="utf-8"?>
+<p:sld xmlns:p="http://schemas.openxmlformats.org/presentationml/2006/main">
+  <p:cSld>
+    <p:bg>
+      <p:bgPr>
+        <a:solidFill xmlns:a="http://schemas.openxmlformats.org/drawingml/2006/main">
+          <a:srgbClr val="FFFFFF"/>
+        </a:solidFill>
+      </p:bgPr>
+    </p:bg>
+    <p:spTree>
+      <p:nvGrpSpPr>
+        <p:cNvPr id="1" name=""/>
+        <p:cNvGrpSpPr/>
+        <p:nvPr/>
+      </p:nvGrpSpPr>
+      <p:grpSpPr>
+        <a:xfrm xmlns:a="http://schemas.openxmlformats.org/drawingml/2006/main"/>
+      </p:grpSpPr>
+      <p:sp>
+        <p:nvSpPr>
+          <p:cNvPr id="1" name="">
+            <a:extLst xmlns:a="http://schemas.openxmlformats.org/drawingml/2006/main">
+              <a:ext uri="{FF2B5EF4-FFF2-40B4-BE49-F238E27FC236}">
+                <a16:creationId xmlns:a16="http://schemas.microsoft.com/office/drawing/2014/main" id="{82C25754-4A52-41BE-B33C-08DA04AE844A}"/>
+              </a:ext>
+            </a:extLst>
+          </p:cNvPr>
+          <p:cNvSpPr>
+            <a:spLocks xmlns:a="http://schemas.openxmlformats.org/drawingml/2006/main" noGrp="1"/>
+          </p:cNvSpPr>
+          <p:nvPr/>
+        </p:nvSpPr>
+        <p:spPr>
+          <a:xfrm xmlns:a="http://schemas.openxmlformats.org/drawingml/2006/main">
+            <a:off x="685800" y="400050"/>
+            <a:ext cx="8572500" cy="247650"/>
+          </a:xfrm>
+          <a:prstGeom xmlns:a="http://schemas.openxmlformats.org/drawingml/2006/main" prst="rect">
+            <a:avLst/>
+          </a:prstGeom>
+          <a:noFill xmlns:a="http://schemas.openxmlformats.org/drawingml/2006/main"/>
+          <a:ln xmlns:a="http://schemas.openxmlformats.org/drawingml/2006/main" w="0">
+            <a:noFill/>
+            <a:prstDash val="solid"/>
+          </a:ln>
+        </p:spPr>
+        <p:txBody>
+          <a:bodyPr xmlns:a="http://schemas.openxmlformats.org/drawingml/2006/main"/>
+          <a:lstStyle xmlns:a="http://schemas.openxmlformats.org/drawingml/2006/main"/>
+          <a:p xmlns:a="http://schemas.openxmlformats.org/drawingml/2006/main">
+            <a:pPr algn="l">
+              <a:defRPr sz="975" b="1" i="0">
+                <a:solidFill>
+                  <a:srgbClr val="555555"/>
+                </a:solidFill>
+              </a:defRPr>
+            </a:pPr>
+            <a:r>
+              <a:rPr sz="975" b="1" i="0">
+                <a:solidFill>
+                  <a:srgbClr val="555555"/>
+                </a:solidFill>
+              </a:rPr>
+              <a:t>GEN5.4 ML DECISION ENGINE</a:t>
+            </a:r>
+          </a:p>
+        </p:txBody>
+      </p:sp>
+      <p:sp>
+        <p:nvSpPr>
+          <p:cNvPr id="2" name="">
+            <a:extLst xmlns:a="http://schemas.openxmlformats.org/drawingml/2006/main">
+              <a:ext uri="{FF2B5EF4-FFF2-40B4-BE49-F238E27FC236}">
+                <a16:creationId xmlns:a16="http://schemas.microsoft.com/office/drawing/2014/main" id="{C9181A4B-5166-4533-B187-878A15C22F5A}"/>
+              </a:ext>
+            </a:extLst>
+          </p:cNvPr>
+          <p:cNvSpPr>
+            <a:spLocks xmlns:a="http://schemas.openxmlformats.org/drawingml/2006/main" noGrp="1"/>
+          </p:cNvSpPr>
+          <p:nvPr/>
+        </p:nvSpPr>
+        <p:spPr>
+          <a:xfrm xmlns:a="http://schemas.openxmlformats.org/drawingml/2006/main">
+            <a:off x="685800" y="723900"/>
+            <a:ext cx="10287000" cy="876300"/>
+          </a:xfrm>
+          <a:prstGeom xmlns:a="http://schemas.openxmlformats.org/drawingml/2006/main" prst="rect">
+            <a:avLst/>
+          </a:prstGeom>
+          <a:noFill xmlns:a="http://schemas.openxmlformats.org/drawingml/2006/main"/>
+          <a:ln xmlns:a="http://schemas.openxmlformats.org/drawingml/2006/main" w="0">
+            <a:noFill/>
+            <a:prstDash val="solid"/>
+          </a:ln>
+        </p:spPr>
+        <p:txBody>
+          <a:bodyPr xmlns:a="http://schemas.openxmlformats.org/drawingml/2006/main"/>
+          <a:lstStyle xmlns:a="http://schemas.openxmlformats.org/drawingml/2006/main"/>
+          <a:p xmlns:a="http://schemas.openxmlformats.org/drawingml/2006/main">
+            <a:pPr algn="l">
+              <a:defRPr sz="2850" b="1" i="0">
+                <a:solidFill>
+                  <a:srgbClr val="000000"/>
+                </a:solidFill>
+              </a:defRPr>
+            </a:pPr>
+            <a:r>
+              <a:rPr sz="2850" b="1" i="0">
+                <a:solidFill>
+                  <a:srgbClr val="000000"/>
+                </a:solidFill>
+              </a:rPr>
+              <a:t>The four feature sets ask a ladder of questions</a:t>
+            </a:r>
+          </a:p>
+        </p:txBody>
+      </p:sp>
+      <p:sp>
+        <p:nvSpPr>
+          <p:cNvPr id="3" name="">
+            <a:extLst xmlns:a="http://schemas.openxmlformats.org/drawingml/2006/main">
+              <a:ext uri="{FF2B5EF4-FFF2-40B4-BE49-F238E27FC236}">
+                <a16:creationId xmlns:a16="http://schemas.microsoft.com/office/drawing/2014/main" id="{9ADC1060-A605-417A-81A3-AB6D6F541634}"/>
+              </a:ext>
+            </a:extLst>
+          </p:cNvPr>
+          <p:cNvSpPr>
+            <a:spLocks xmlns:a="http://schemas.openxmlformats.org/drawingml/2006/main" noGrp="1"/>
+          </p:cNvSpPr>
+          <p:nvPr/>
+        </p:nvSpPr>
+        <p:spPr>
+          <a:xfrm xmlns:a="http://schemas.openxmlformats.org/drawingml/2006/main">
+            <a:off x="685800" y="1657350"/>
+            <a:ext cx="10820400" cy="19050"/>
+          </a:xfrm>
+          <a:prstGeom xmlns:a="http://schemas.openxmlformats.org/drawingml/2006/main" prst="rect">
+            <a:avLst/>
+          </a:prstGeom>
+          <a:solidFill xmlns:a="http://schemas.openxmlformats.org/drawingml/2006/main">
+            <a:srgbClr val="B8BCC4"/>
+          </a:solidFill>
+          <a:ln xmlns:a="http://schemas.openxmlformats.org/drawingml/2006/main" w="0">
+            <a:noFill/>
+            <a:prstDash val="solid"/>
+          </a:ln>
+        </p:spPr>
+      </p:sp>
+      <p:sp>
+        <p:nvSpPr>
+          <p:cNvPr id="4" name="">
+            <a:extLst xmlns:a="http://schemas.openxmlformats.org/drawingml/2006/main">
+              <a:ext uri="{FF2B5EF4-FFF2-40B4-BE49-F238E27FC236}">
+                <a16:creationId xmlns:a16="http://schemas.microsoft.com/office/drawing/2014/main" id="{E74A70F6-C6B1-4E1D-966B-DDB23695822B}"/>
+              </a:ext>
+            </a:extLst>
+          </p:cNvPr>
+          <p:cNvSpPr>
+            <a:spLocks xmlns:a="http://schemas.openxmlformats.org/drawingml/2006/main" noGrp="1"/>
+          </p:cNvSpPr>
+          <p:nvPr/>
+        </p:nvSpPr>
+        <p:spPr>
+          <a:xfrm xmlns:a="http://schemas.openxmlformats.org/drawingml/2006/main">
+            <a:off x="704850" y="2152650"/>
+            <a:ext cx="2333625" cy="1428750"/>
+          </a:xfrm>
+          <a:prstGeom xmlns:a="http://schemas.openxmlformats.org/drawingml/2006/main" prst="rect">
+            <a:avLst/>
+          </a:prstGeom>
+          <a:solidFill xmlns:a="http://schemas.openxmlformats.org/drawingml/2006/main">
+            <a:srgbClr val="EDEDED"/>
+          </a:solidFill>
+          <a:ln xmlns:a="http://schemas.openxmlformats.org/drawingml/2006/main" w="9525">
+            <a:solidFill>
+              <a:srgbClr val="B8BCC4"/>
+            </a:solidFill>
+            <a:prstDash val="solid"/>
+          </a:ln>
+        </p:spPr>
+      </p:sp>
+      <p:sp>
+        <p:nvSpPr>
+          <p:cNvPr id="5" name="">
+            <a:extLst xmlns:a="http://schemas.openxmlformats.org/drawingml/2006/main">
+              <a:ext uri="{FF2B5EF4-FFF2-40B4-BE49-F238E27FC236}">
+                <a16:creationId xmlns:a16="http://schemas.microsoft.com/office/drawing/2014/main" id="{539CD7B5-0FCE-47C0-9F52-244037B31600}"/>
+              </a:ext>
+            </a:extLst>
+          </p:cNvPr>
+          <p:cNvSpPr>
+            <a:spLocks xmlns:a="http://schemas.openxmlformats.org/drawingml/2006/main" noGrp="1"/>
+          </p:cNvSpPr>
+          <p:nvPr/>
+        </p:nvSpPr>
+        <p:spPr>
+          <a:xfrm xmlns:a="http://schemas.openxmlformats.org/drawingml/2006/main">
+            <a:off x="876300" y="2305050"/>
+            <a:ext cx="1990725" cy="171450"/>
+          </a:xfrm>
+          <a:prstGeom xmlns:a="http://schemas.openxmlformats.org/drawingml/2006/main" prst="rect">
+            <a:avLst/>
+          </a:prstGeom>
+          <a:noFill xmlns:a="http://schemas.openxmlformats.org/drawingml/2006/main"/>
+          <a:ln xmlns:a="http://schemas.openxmlformats.org/drawingml/2006/main" w="0">
+            <a:noFill/>
+            <a:prstDash val="solid"/>
+          </a:ln>
+        </p:spPr>
+        <p:txBody>
+          <a:bodyPr xmlns:a="http://schemas.openxmlformats.org/drawingml/2006/main"/>
+          <a:lstStyle xmlns:a="http://schemas.openxmlformats.org/drawingml/2006/main"/>
+          <a:p xmlns:a="http://schemas.openxmlformats.org/drawingml/2006/main">
+            <a:pPr algn="l">
+              <a:defRPr sz="900" b="1" i="0">
+                <a:solidFill>
+                  <a:srgbClr val="555555"/>
+                </a:solidFill>
+              </a:defRPr>
+            </a:pPr>
+            <a:r>
+              <a:rPr sz="900" b="1" i="0">
+                <a:solidFill>
+                  <a:srgbClr val="555555"/>
+                </a:solidFill>
+              </a:rPr>
+              <a:t>GUARDRAILS</a:t>
+            </a:r>
+          </a:p>
+        </p:txBody>
+      </p:sp>
+      <p:sp>
+        <p:nvSpPr>
+          <p:cNvPr id="6" name="">
+            <a:extLst xmlns:a="http://schemas.openxmlformats.org/drawingml/2006/main">
+              <a:ext uri="{FF2B5EF4-FFF2-40B4-BE49-F238E27FC236}">
+                <a16:creationId xmlns:a16="http://schemas.microsoft.com/office/drawing/2014/main" id="{4A5F13DD-0E38-466B-8640-E3E283358425}"/>
+              </a:ext>
+            </a:extLst>
+          </p:cNvPr>
+          <p:cNvSpPr>
+            <a:spLocks xmlns:a="http://schemas.openxmlformats.org/drawingml/2006/main" noGrp="1"/>
+          </p:cNvSpPr>
+          <p:nvPr/>
+        </p:nvSpPr>
+        <p:spPr>
+          <a:xfrm xmlns:a="http://schemas.openxmlformats.org/drawingml/2006/main">
+            <a:off x="876300" y="2552700"/>
+            <a:ext cx="1990725" cy="361950"/>
+          </a:xfrm>
+          <a:prstGeom xmlns:a="http://schemas.openxmlformats.org/drawingml/2006/main" prst="rect">
+            <a:avLst/>
+          </a:prstGeom>
+          <a:noFill xmlns:a="http://schemas.openxmlformats.org/drawingml/2006/main"/>
+          <a:ln xmlns:a="http://schemas.openxmlformats.org/drawingml/2006/main" w="0">
+            <a:noFill/>
+            <a:prstDash val="solid"/>
+          </a:ln>
+        </p:spPr>
+        <p:txBody>
+          <a:bodyPr xmlns:a="http://schemas.openxmlformats.org/drawingml/2006/main"/>
+          <a:lstStyle xmlns:a="http://schemas.openxmlformats.org/drawingml/2006/main"/>
+          <a:p xmlns:a="http://schemas.openxmlformats.org/drawingml/2006/main">
+            <a:pPr algn="l">
+              <a:defRPr sz="2250" b="1" i="0">
+                <a:solidFill>
+                  <a:srgbClr val="000000"/>
+                </a:solidFill>
+              </a:defRPr>
+            </a:pPr>
+            <a:r>
+              <a:rPr sz="2250" b="1" i="0">
+                <a:solidFill>
+                  <a:srgbClr val="000000"/>
+                </a:solidFill>
+              </a:rPr>
+              <a:t>All PASS</a:t>
+            </a:r>
+          </a:p>
+        </p:txBody>
+      </p:sp>
+      <p:sp>
+        <p:nvSpPr>
+          <p:cNvPr id="7" name="">
+            <a:extLst xmlns:a="http://schemas.openxmlformats.org/drawingml/2006/main">
+              <a:ext uri="{FF2B5EF4-FFF2-40B4-BE49-F238E27FC236}">
+                <a16:creationId xmlns:a16="http://schemas.microsoft.com/office/drawing/2014/main" id="{D0257F34-0D1D-4288-A034-C896F099CE25}"/>
+              </a:ext>
+            </a:extLst>
+          </p:cNvPr>
+          <p:cNvSpPr>
+            <a:spLocks xmlns:a="http://schemas.openxmlformats.org/drawingml/2006/main" noGrp="1"/>
+          </p:cNvSpPr>
+          <p:nvPr/>
+        </p:nvSpPr>
+        <p:spPr>
+          <a:xfrm xmlns:a="http://schemas.openxmlformats.org/drawingml/2006/main">
+            <a:off x="876300" y="2971800"/>
+            <a:ext cx="1990725" cy="552450"/>
+          </a:xfrm>
+          <a:prstGeom xmlns:a="http://schemas.openxmlformats.org/drawingml/2006/main" prst="rect">
+            <a:avLst/>
+          </a:prstGeom>
+          <a:noFill xmlns:a="http://schemas.openxmlformats.org/drawingml/2006/main"/>
+          <a:ln xmlns:a="http://schemas.openxmlformats.org/drawingml/2006/main" w="0">
+            <a:noFill/>
+            <a:prstDash val="solid"/>
+          </a:ln>
+        </p:spPr>
+        <p:txBody>
+          <a:bodyPr xmlns:a="http://schemas.openxmlformats.org/drawingml/2006/main"/>
+          <a:lstStyle xmlns:a="http://schemas.openxmlformats.org/drawingml/2006/main"/>
+          <a:p xmlns:a="http://schemas.openxmlformats.org/drawingml/2006/main">
+            <a:pPr algn="l">
+              <a:defRPr sz="1125" b="0" i="0">
+                <a:solidFill>
+                  <a:srgbClr val="555555"/>
+                </a:solidFill>
+              </a:defRPr>
+            </a:pPr>
+            <a:r>
+              <a:rPr sz="1125" b="0" i="0">
+                <a:solidFill>
+                  <a:srgbClr val="555555"/>
+                </a:solidFill>
+              </a:rPr>
+              <a:t>Model, label, replay, and policy are fixed.</a:t>
+            </a:r>
+          </a:p>
+        </p:txBody>
+      </p:sp>
+      <p:sp>
+        <p:nvSpPr>
+          <p:cNvPr id="8" name="">
+            <a:extLst xmlns:a="http://schemas.openxmlformats.org/drawingml/2006/main">
+              <a:ext uri="{FF2B5EF4-FFF2-40B4-BE49-F238E27FC236}">
+                <a16:creationId xmlns:a16="http://schemas.microsoft.com/office/drawing/2014/main" id="{B5CBE3AF-7E15-4CA8-8D61-732649BCB49D}"/>
+              </a:ext>
+            </a:extLst>
+          </p:cNvPr>
+          <p:cNvSpPr>
+            <a:spLocks xmlns:a="http://schemas.openxmlformats.org/drawingml/2006/main" noGrp="1"/>
+          </p:cNvSpPr>
+          <p:nvPr/>
+        </p:nvSpPr>
+        <p:spPr>
+          <a:xfrm xmlns:a="http://schemas.openxmlformats.org/drawingml/2006/main">
+            <a:off x="3409950" y="2152650"/>
+            <a:ext cx="2333625" cy="1428750"/>
+          </a:xfrm>
+          <a:prstGeom xmlns:a="http://schemas.openxmlformats.org/drawingml/2006/main" prst="rect">
+            <a:avLst/>
+          </a:prstGeom>
+          <a:solidFill xmlns:a="http://schemas.openxmlformats.org/drawingml/2006/main">
+            <a:srgbClr val="EDEDED"/>
+          </a:solidFill>
+          <a:ln xmlns:a="http://schemas.openxmlformats.org/drawingml/2006/main" w="9525">
+            <a:solidFill>
+              <a:srgbClr val="B8BCC4"/>
+            </a:solidFill>
+            <a:prstDash val="solid"/>
+          </a:ln>
+        </p:spPr>
+      </p:sp>
+      <p:sp>
+        <p:nvSpPr>
+          <p:cNvPr id="9" name="">
+            <a:extLst xmlns:a="http://schemas.openxmlformats.org/drawingml/2006/main">
+              <a:ext uri="{FF2B5EF4-FFF2-40B4-BE49-F238E27FC236}">
+                <a16:creationId xmlns:a16="http://schemas.microsoft.com/office/drawing/2014/main" id="{2E283414-BA95-4B12-9C77-E55C08B405D0}"/>
+              </a:ext>
+            </a:extLst>
+          </p:cNvPr>
+          <p:cNvSpPr>
+            <a:spLocks xmlns:a="http://schemas.openxmlformats.org/drawingml/2006/main" noGrp="1"/>
+          </p:cNvSpPr>
+          <p:nvPr/>
+        </p:nvSpPr>
+        <p:spPr>
+          <a:xfrm xmlns:a="http://schemas.openxmlformats.org/drawingml/2006/main">
+            <a:off x="3581400" y="2305050"/>
+            <a:ext cx="1990725" cy="171450"/>
+          </a:xfrm>
+          <a:prstGeom xmlns:a="http://schemas.openxmlformats.org/drawingml/2006/main" prst="rect">
+            <a:avLst/>
+          </a:prstGeom>
+          <a:noFill xmlns:a="http://schemas.openxmlformats.org/drawingml/2006/main"/>
+          <a:ln xmlns:a="http://schemas.openxmlformats.org/drawingml/2006/main" w="0">
+            <a:noFill/>
+            <a:prstDash val="solid"/>
+          </a:ln>
+        </p:spPr>
+        <p:txBody>
+          <a:bodyPr xmlns:a="http://schemas.openxmlformats.org/drawingml/2006/main"/>
+          <a:lstStyle xmlns:a="http://schemas.openxmlformats.org/drawingml/2006/main"/>
+          <a:p xmlns:a="http://schemas.openxmlformats.org/drawingml/2006/main">
+            <a:pPr algn="l">
+              <a:defRPr sz="900" b="1" i="0">
+                <a:solidFill>
+                  <a:srgbClr val="555555"/>
+                </a:solidFill>
+              </a:defRPr>
+            </a:pPr>
+            <a:r>
+              <a:rPr sz="900" b="1" i="0">
+                <a:solidFill>
+                  <a:srgbClr val="555555"/>
+                </a:solidFill>
+              </a:rPr>
+              <a:t>ASSET ONLY</a:t>
+            </a:r>
+          </a:p>
+        </p:txBody>
+      </p:sp>
+      <p:sp>
+        <p:nvSpPr>
+          <p:cNvPr id="10" name="">
+            <a:extLst xmlns:a="http://schemas.openxmlformats.org/drawingml/2006/main">
+              <a:ext uri="{FF2B5EF4-FFF2-40B4-BE49-F238E27FC236}">
+                <a16:creationId xmlns:a16="http://schemas.microsoft.com/office/drawing/2014/main" id="{9519C078-65B5-472A-B617-E0BBE69519B8}"/>
+              </a:ext>
+            </a:extLst>
+          </p:cNvPr>
+          <p:cNvSpPr>
+            <a:spLocks xmlns:a="http://schemas.openxmlformats.org/drawingml/2006/main" noGrp="1"/>
+          </p:cNvSpPr>
+          <p:nvPr/>
+        </p:nvSpPr>
+        <p:spPr>
+          <a:xfrm xmlns:a="http://schemas.openxmlformats.org/drawingml/2006/main">
+            <a:off x="3581400" y="2552700"/>
+            <a:ext cx="1990725" cy="361950"/>
+          </a:xfrm>
+          <a:prstGeom xmlns:a="http://schemas.openxmlformats.org/drawingml/2006/main" prst="rect">
+            <a:avLst/>
+          </a:prstGeom>
+          <a:noFill xmlns:a="http://schemas.openxmlformats.org/drawingml/2006/main"/>
+          <a:ln xmlns:a="http://schemas.openxmlformats.org/drawingml/2006/main" w="0">
+            <a:noFill/>
+            <a:prstDash val="solid"/>
+          </a:ln>
+        </p:spPr>
+        <p:txBody>
+          <a:bodyPr xmlns:a="http://schemas.openxmlformats.org/drawingml/2006/main"/>
+          <a:lstStyle xmlns:a="http://schemas.openxmlformats.org/drawingml/2006/main"/>
+          <a:p xmlns:a="http://schemas.openxmlformats.org/drawingml/2006/main">
+            <a:pPr algn="l">
+              <a:defRPr sz="2250" b="1" i="0">
+                <a:solidFill>
+                  <a:srgbClr val="000000"/>
+                </a:solidFill>
+              </a:defRPr>
+            </a:pPr>
+            <a:r>
+              <a:rPr sz="2250" b="1" i="0">
+                <a:solidFill>
+                  <a:srgbClr val="000000"/>
+                </a:solidFill>
+              </a:rPr>
+              <a:t>37</a:t>
+            </a:r>
+          </a:p>
+        </p:txBody>
+      </p:sp>
+      <p:sp>
+        <p:nvSpPr>
+          <p:cNvPr id="11" name="">
+            <a:extLst xmlns:a="http://schemas.openxmlformats.org/drawingml/2006/main">
+              <a:ext uri="{FF2B5EF4-FFF2-40B4-BE49-F238E27FC236}">
+                <a16:creationId xmlns:a16="http://schemas.microsoft.com/office/drawing/2014/main" id="{F210FC08-EF7D-4E86-82AA-6CC5A6BB0EED}"/>
+              </a:ext>
+            </a:extLst>
+          </p:cNvPr>
+          <p:cNvSpPr>
+            <a:spLocks xmlns:a="http://schemas.openxmlformats.org/drawingml/2006/main" noGrp="1"/>
+          </p:cNvSpPr>
+          <p:nvPr/>
+        </p:nvSpPr>
+        <p:spPr>
+          <a:xfrm xmlns:a="http://schemas.openxmlformats.org/drawingml/2006/main">
+            <a:off x="3581400" y="2971800"/>
+            <a:ext cx="1990725" cy="552450"/>
+          </a:xfrm>
+          <a:prstGeom xmlns:a="http://schemas.openxmlformats.org/drawingml/2006/main" prst="rect">
+            <a:avLst/>
+          </a:prstGeom>
+          <a:noFill xmlns:a="http://schemas.openxmlformats.org/drawingml/2006/main"/>
+          <a:ln xmlns:a="http://schemas.openxmlformats.org/drawingml/2006/main" w="0">
+            <a:noFill/>
+            <a:prstDash val="solid"/>
+          </a:ln>
+        </p:spPr>
+        <p:txBody>
+          <a:bodyPr xmlns:a="http://schemas.openxmlformats.org/drawingml/2006/main"/>
+          <a:lstStyle xmlns:a="http://schemas.openxmlformats.org/drawingml/2006/main"/>
+          <a:p xmlns:a="http://schemas.openxmlformats.org/drawingml/2006/main">
+            <a:pPr algn="l">
+              <a:defRPr sz="1125" b="0" i="0">
+                <a:solidFill>
+                  <a:srgbClr val="555555"/>
+                </a:solidFill>
+              </a:defRPr>
+            </a:pPr>
+            <a:r>
+              <a:rPr sz="1125" b="0" i="0">
+                <a:solidFill>
+                  <a:srgbClr val="555555"/>
+                </a:solidFill>
+              </a:rPr>
+              <a:t>Own-tape OHLCV features only.</a:t>
+            </a:r>
+          </a:p>
+        </p:txBody>
+      </p:sp>
+      <p:sp>
+        <p:nvSpPr>
+          <p:cNvPr id="12" name="">
+            <a:extLst xmlns:a="http://schemas.openxmlformats.org/drawingml/2006/main">
+              <a:ext uri="{FF2B5EF4-FFF2-40B4-BE49-F238E27FC236}">
+                <a16:creationId xmlns:a16="http://schemas.microsoft.com/office/drawing/2014/main" id="{5E3A5BB7-F34B-421B-A6A7-43A7B5B01FD3}"/>
+              </a:ext>
+            </a:extLst>
+          </p:cNvPr>
+          <p:cNvSpPr>
+            <a:spLocks xmlns:a="http://schemas.openxmlformats.org/drawingml/2006/main" noGrp="1"/>
+          </p:cNvSpPr>
+          <p:nvPr/>
+        </p:nvSpPr>
+        <p:spPr>
+          <a:xfrm xmlns:a="http://schemas.openxmlformats.org/drawingml/2006/main">
+            <a:off x="6115050" y="2152650"/>
+            <a:ext cx="2333625" cy="1428750"/>
+          </a:xfrm>
+          <a:prstGeom xmlns:a="http://schemas.openxmlformats.org/drawingml/2006/main" prst="rect">
+            <a:avLst/>
+          </a:prstGeom>
+          <a:solidFill xmlns:a="http://schemas.openxmlformats.org/drawingml/2006/main">
+            <a:srgbClr val="EDEDED"/>
+          </a:solidFill>
+          <a:ln xmlns:a="http://schemas.openxmlformats.org/drawingml/2006/main" w="9525">
+            <a:solidFill>
+              <a:srgbClr val="B8BCC4"/>
+            </a:solidFill>
+            <a:prstDash val="solid"/>
+          </a:ln>
+        </p:spPr>
+      </p:sp>
+      <p:sp>
+        <p:nvSpPr>
+          <p:cNvPr id="13" name="">
+            <a:extLst xmlns:a="http://schemas.openxmlformats.org/drawingml/2006/main">
+              <a:ext uri="{FF2B5EF4-FFF2-40B4-BE49-F238E27FC236}">
+                <a16:creationId xmlns:a16="http://schemas.microsoft.com/office/drawing/2014/main" id="{DD5D0A2E-9568-4646-9394-CE6FF84069F7}"/>
+              </a:ext>
+            </a:extLst>
+          </p:cNvPr>
+          <p:cNvSpPr>
+            <a:spLocks xmlns:a="http://schemas.openxmlformats.org/drawingml/2006/main" noGrp="1"/>
+          </p:cNvSpPr>
+          <p:nvPr/>
+        </p:nvSpPr>
+        <p:spPr>
+          <a:xfrm xmlns:a="http://schemas.openxmlformats.org/drawingml/2006/main">
+            <a:off x="6286500" y="2305050"/>
+            <a:ext cx="1990725" cy="171450"/>
+          </a:xfrm>
+          <a:prstGeom xmlns:a="http://schemas.openxmlformats.org/drawingml/2006/main" prst="rect">
+            <a:avLst/>
+          </a:prstGeom>
+          <a:noFill xmlns:a="http://schemas.openxmlformats.org/drawingml/2006/main"/>
+          <a:ln xmlns:a="http://schemas.openxmlformats.org/drawingml/2006/main" w="0">
+            <a:noFill/>
+            <a:prstDash val="solid"/>
+          </a:ln>
+        </p:spPr>
+        <p:txBody>
+          <a:bodyPr xmlns:a="http://schemas.openxmlformats.org/drawingml/2006/main"/>
+          <a:lstStyle xmlns:a="http://schemas.openxmlformats.org/drawingml/2006/main"/>
+          <a:p xmlns:a="http://schemas.openxmlformats.org/drawingml/2006/main">
+            <a:pPr algn="l">
+              <a:defRPr sz="900" b="1" i="0">
+                <a:solidFill>
+                  <a:srgbClr val="555555"/>
+                </a:solidFill>
+              </a:defRPr>
+            </a:pPr>
+            <a:r>
+              <a:rPr sz="900" b="1" i="0">
+                <a:solidFill>
+                  <a:srgbClr val="555555"/>
+                </a:solidFill>
+              </a:rPr>
+              <a:t>RELATIVE</a:t>
+            </a:r>
+          </a:p>
+        </p:txBody>
+      </p:sp>
+      <p:sp>
+        <p:nvSpPr>
+          <p:cNvPr id="14" name="">
+            <a:extLst xmlns:a="http://schemas.openxmlformats.org/drawingml/2006/main">
+              <a:ext uri="{FF2B5EF4-FFF2-40B4-BE49-F238E27FC236}">
+                <a16:creationId xmlns:a16="http://schemas.microsoft.com/office/drawing/2014/main" id="{A555194D-A851-479A-B9A2-281A45274815}"/>
+              </a:ext>
+            </a:extLst>
+          </p:cNvPr>
+          <p:cNvSpPr>
+            <a:spLocks xmlns:a="http://schemas.openxmlformats.org/drawingml/2006/main" noGrp="1"/>
+          </p:cNvSpPr>
+          <p:nvPr/>
+        </p:nvSpPr>
+        <p:spPr>
+          <a:xfrm xmlns:a="http://schemas.openxmlformats.org/drawingml/2006/main">
+            <a:off x="6286500" y="2552700"/>
+            <a:ext cx="1990725" cy="361950"/>
+          </a:xfrm>
+          <a:prstGeom xmlns:a="http://schemas.openxmlformats.org/drawingml/2006/main" prst="rect">
+            <a:avLst/>
+          </a:prstGeom>
+          <a:noFill xmlns:a="http://schemas.openxmlformats.org/drawingml/2006/main"/>
+          <a:ln xmlns:a="http://schemas.openxmlformats.org/drawingml/2006/main" w="0">
+            <a:noFill/>
+            <a:prstDash val="solid"/>
+          </a:ln>
+        </p:spPr>
+        <p:txBody>
+          <a:bodyPr xmlns:a="http://schemas.openxmlformats.org/drawingml/2006/main"/>
+          <a:lstStyle xmlns:a="http://schemas.openxmlformats.org/drawingml/2006/main"/>
+          <a:p xmlns:a="http://schemas.openxmlformats.org/drawingml/2006/main">
+            <a:pPr algn="l">
+              <a:defRPr sz="2250" b="1" i="0">
+                <a:solidFill>
+                  <a:srgbClr val="000000"/>
+                </a:solidFill>
+              </a:defRPr>
+            </a:pPr>
+            <a:r>
+              <a:rPr sz="2250" b="1" i="0">
+                <a:solidFill>
+                  <a:srgbClr val="000000"/>
+                </a:solidFill>
+              </a:rPr>
+              <a:t>40</a:t>
+            </a:r>
+          </a:p>
+        </p:txBody>
+      </p:sp>
+      <p:sp>
+        <p:nvSpPr>
+          <p:cNvPr id="15" name="">
+            <a:extLst xmlns:a="http://schemas.openxmlformats.org/drawingml/2006/main">
+              <a:ext uri="{FF2B5EF4-FFF2-40B4-BE49-F238E27FC236}">
+                <a16:creationId xmlns:a16="http://schemas.microsoft.com/office/drawing/2014/main" id="{B0787D34-E84B-4AB3-9D22-17CB2979E16B}"/>
+              </a:ext>
+            </a:extLst>
+          </p:cNvPr>
+          <p:cNvSpPr>
+            <a:spLocks xmlns:a="http://schemas.openxmlformats.org/drawingml/2006/main" noGrp="1"/>
+          </p:cNvSpPr>
+          <p:nvPr/>
+        </p:nvSpPr>
+        <p:spPr>
+          <a:xfrm xmlns:a="http://schemas.openxmlformats.org/drawingml/2006/main">
+            <a:off x="6286500" y="2971800"/>
+            <a:ext cx="1990725" cy="552450"/>
+          </a:xfrm>
+          <a:prstGeom xmlns:a="http://schemas.openxmlformats.org/drawingml/2006/main" prst="rect">
+            <a:avLst/>
+          </a:prstGeom>
+          <a:noFill xmlns:a="http://schemas.openxmlformats.org/drawingml/2006/main"/>
+          <a:ln xmlns:a="http://schemas.openxmlformats.org/drawingml/2006/main" w="0">
+            <a:noFill/>
+            <a:prstDash val="solid"/>
+          </a:ln>
+        </p:spPr>
+        <p:txBody>
+          <a:bodyPr xmlns:a="http://schemas.openxmlformats.org/drawingml/2006/main"/>
+          <a:lstStyle xmlns:a="http://schemas.openxmlformats.org/drawingml/2006/main"/>
+          <a:p xmlns:a="http://schemas.openxmlformats.org/drawingml/2006/main">
+            <a:pPr algn="l">
+              <a:defRPr sz="1125" b="0" i="0">
+                <a:solidFill>
+                  <a:srgbClr val="555555"/>
+                </a:solidFill>
+              </a:defRPr>
+            </a:pPr>
+            <a:r>
+              <a:rPr sz="1125" b="0" i="0">
+                <a:solidFill>
+                  <a:srgbClr val="555555"/>
+                </a:solidFill>
+              </a:rPr>
+              <a:t>Asset plus context-relative returns.</a:t>
+            </a:r>
+          </a:p>
+        </p:txBody>
+      </p:sp>
+      <p:sp>
+        <p:nvSpPr>
+          <p:cNvPr id="16" name="">
+            <a:extLst xmlns:a="http://schemas.openxmlformats.org/drawingml/2006/main">
+              <a:ext uri="{FF2B5EF4-FFF2-40B4-BE49-F238E27FC236}">
+                <a16:creationId xmlns:a16="http://schemas.microsoft.com/office/drawing/2014/main" id="{A4040B70-8FDC-445C-B0C0-C465D87CCF81}"/>
+              </a:ext>
+            </a:extLst>
+          </p:cNvPr>
+          <p:cNvSpPr>
+            <a:spLocks xmlns:a="http://schemas.openxmlformats.org/drawingml/2006/main" noGrp="1"/>
+          </p:cNvSpPr>
+          <p:nvPr/>
+        </p:nvSpPr>
+        <p:spPr>
+          <a:xfrm xmlns:a="http://schemas.openxmlformats.org/drawingml/2006/main">
+            <a:off x="8820150" y="2152650"/>
+            <a:ext cx="2333625" cy="1428750"/>
+          </a:xfrm>
+          <a:prstGeom xmlns:a="http://schemas.openxmlformats.org/drawingml/2006/main" prst="rect">
+            <a:avLst/>
+          </a:prstGeom>
+          <a:solidFill xmlns:a="http://schemas.openxmlformats.org/drawingml/2006/main">
+            <a:srgbClr val="EDEDED"/>
+          </a:solidFill>
+          <a:ln xmlns:a="http://schemas.openxmlformats.org/drawingml/2006/main" w="9525">
+            <a:solidFill>
+              <a:srgbClr val="B8BCC4"/>
+            </a:solidFill>
+            <a:prstDash val="solid"/>
+          </a:ln>
+        </p:spPr>
+      </p:sp>
+      <p:sp>
+        <p:nvSpPr>
+          <p:cNvPr id="17" name="">
+            <a:extLst xmlns:a="http://schemas.openxmlformats.org/drawingml/2006/main">
+              <a:ext uri="{FF2B5EF4-FFF2-40B4-BE49-F238E27FC236}">
+                <a16:creationId xmlns:a16="http://schemas.microsoft.com/office/drawing/2014/main" id="{7531065C-1934-4A08-AE04-5AD880578653}"/>
+              </a:ext>
+            </a:extLst>
+          </p:cNvPr>
+          <p:cNvSpPr>
+            <a:spLocks xmlns:a="http://schemas.openxmlformats.org/drawingml/2006/main" noGrp="1"/>
+          </p:cNvSpPr>
+          <p:nvPr/>
+        </p:nvSpPr>
+        <p:spPr>
+          <a:xfrm xmlns:a="http://schemas.openxmlformats.org/drawingml/2006/main">
+            <a:off x="8991600" y="2305050"/>
+            <a:ext cx="1990725" cy="171450"/>
+          </a:xfrm>
+          <a:prstGeom xmlns:a="http://schemas.openxmlformats.org/drawingml/2006/main" prst="rect">
+            <a:avLst/>
+          </a:prstGeom>
+          <a:noFill xmlns:a="http://schemas.openxmlformats.org/drawingml/2006/main"/>
+          <a:ln xmlns:a="http://schemas.openxmlformats.org/drawingml/2006/main" w="0">
+            <a:noFill/>
+            <a:prstDash val="solid"/>
+          </a:ln>
+        </p:spPr>
+        <p:txBody>
+          <a:bodyPr xmlns:a="http://schemas.openxmlformats.org/drawingml/2006/main"/>
+          <a:lstStyle xmlns:a="http://schemas.openxmlformats.org/drawingml/2006/main"/>
+          <a:p xmlns:a="http://schemas.openxmlformats.org/drawingml/2006/main">
+            <a:pPr algn="l">
+              <a:defRPr sz="900" b="1" i="0">
+                <a:solidFill>
+                  <a:srgbClr val="555555"/>
+                </a:solidFill>
+              </a:defRPr>
+            </a:pPr>
+            <a:r>
+              <a:rPr sz="900" b="1" i="0">
+                <a:solidFill>
+                  <a:srgbClr val="555555"/>
+                </a:solidFill>
+              </a:rPr>
+              <a:t>FULL COMPACT</a:t>
+            </a:r>
+          </a:p>
+        </p:txBody>
+      </p:sp>
+      <p:sp>
+        <p:nvSpPr>
+          <p:cNvPr id="18" name="">
+            <a:extLst xmlns:a="http://schemas.openxmlformats.org/drawingml/2006/main">
+              <a:ext uri="{FF2B5EF4-FFF2-40B4-BE49-F238E27FC236}">
+                <a16:creationId xmlns:a16="http://schemas.microsoft.com/office/drawing/2014/main" id="{5E6AAD29-98BC-4371-9920-B2A8466C4BE8}"/>
+              </a:ext>
+            </a:extLst>
+          </p:cNvPr>
+          <p:cNvSpPr>
+            <a:spLocks xmlns:a="http://schemas.openxmlformats.org/drawingml/2006/main" noGrp="1"/>
+          </p:cNvSpPr>
+          <p:nvPr/>
+        </p:nvSpPr>
+        <p:spPr>
+          <a:xfrm xmlns:a="http://schemas.openxmlformats.org/drawingml/2006/main">
+            <a:off x="8991600" y="2552700"/>
+            <a:ext cx="1990725" cy="361950"/>
+          </a:xfrm>
+          <a:prstGeom xmlns:a="http://schemas.openxmlformats.org/drawingml/2006/main" prst="rect">
+            <a:avLst/>
+          </a:prstGeom>
+          <a:noFill xmlns:a="http://schemas.openxmlformats.org/drawingml/2006/main"/>
+          <a:ln xmlns:a="http://schemas.openxmlformats.org/drawingml/2006/main" w="0">
+            <a:noFill/>
+            <a:prstDash val="solid"/>
+          </a:ln>
+        </p:spPr>
+        <p:txBody>
+          <a:bodyPr xmlns:a="http://schemas.openxmlformats.org/drawingml/2006/main"/>
+          <a:lstStyle xmlns:a="http://schemas.openxmlformats.org/drawingml/2006/main"/>
+          <a:p xmlns:a="http://schemas.openxmlformats.org/drawingml/2006/main">
+            <a:pPr algn="l">
+              <a:defRPr sz="2250" b="1" i="0">
+                <a:solidFill>
+                  <a:srgbClr val="000000"/>
+                </a:solidFill>
+              </a:defRPr>
+            </a:pPr>
+            <a:r>
+              <a:rPr sz="2250" b="1" i="0">
+                <a:solidFill>
+                  <a:srgbClr val="000000"/>
+                </a:solidFill>
+              </a:rPr>
+              <a:t>76</a:t>
+            </a:r>
+          </a:p>
+        </p:txBody>
+      </p:sp>
+      <p:sp>
+        <p:nvSpPr>
+          <p:cNvPr id="19" name="">
+            <a:extLst xmlns:a="http://schemas.openxmlformats.org/drawingml/2006/main">
+              <a:ext uri="{FF2B5EF4-FFF2-40B4-BE49-F238E27FC236}">
+                <a16:creationId xmlns:a16="http://schemas.microsoft.com/office/drawing/2014/main" id="{0C06CC8B-C91E-4B1F-819A-5F3458186ACB}"/>
+              </a:ext>
+            </a:extLst>
+          </p:cNvPr>
+          <p:cNvSpPr>
+            <a:spLocks xmlns:a="http://schemas.openxmlformats.org/drawingml/2006/main" noGrp="1"/>
+          </p:cNvSpPr>
+          <p:nvPr/>
+        </p:nvSpPr>
+        <p:spPr>
+          <a:xfrm xmlns:a="http://schemas.openxmlformats.org/drawingml/2006/main">
+            <a:off x="8991600" y="2971800"/>
+            <a:ext cx="1990725" cy="552450"/>
+          </a:xfrm>
+          <a:prstGeom xmlns:a="http://schemas.openxmlformats.org/drawingml/2006/main" prst="rect">
+            <a:avLst/>
+          </a:prstGeom>
+          <a:noFill xmlns:a="http://schemas.openxmlformats.org/drawingml/2006/main"/>
+          <a:ln xmlns:a="http://schemas.openxmlformats.org/drawingml/2006/main" w="0">
+            <a:noFill/>
+            <a:prstDash val="solid"/>
+          </a:ln>
+        </p:spPr>
+        <p:txBody>
+          <a:bodyPr xmlns:a="http://schemas.openxmlformats.org/drawingml/2006/main"/>
+          <a:lstStyle xmlns:a="http://schemas.openxmlformats.org/drawingml/2006/main"/>
+          <a:p xmlns:a="http://schemas.openxmlformats.org/drawingml/2006/main">
+            <a:pPr algn="l">
+              <a:defRPr sz="1125" b="0" i="0">
+                <a:solidFill>
+                  <a:srgbClr val="555555"/>
+                </a:solidFill>
+              </a:defRPr>
+            </a:pPr>
+            <a:r>
+              <a:rPr sz="1125" b="0" i="0">
+                <a:solidFill>
+                  <a:srgbClr val="555555"/>
+                </a:solidFill>
+              </a:rPr>
+              <a:t>Own tape plus direct context plus relative strength.</a:t>
+            </a:r>
+          </a:p>
+        </p:txBody>
+      </p:sp>
+      <p:sp>
+        <p:nvSpPr>
+          <p:cNvPr id="20" name="">
+            <a:extLst xmlns:a="http://schemas.openxmlformats.org/drawingml/2006/main">
+              <a:ext uri="{FF2B5EF4-FFF2-40B4-BE49-F238E27FC236}">
+                <a16:creationId xmlns:a16="http://schemas.microsoft.com/office/drawing/2014/main" id="{2C348D46-4A50-4152-9FDF-4E1FAD6A789C}"/>
+              </a:ext>
+            </a:extLst>
+          </p:cNvPr>
+          <p:cNvSpPr>
+            <a:spLocks xmlns:a="http://schemas.openxmlformats.org/drawingml/2006/main" noGrp="1"/>
+          </p:cNvSpPr>
+          <p:nvPr/>
+        </p:nvSpPr>
+        <p:spPr>
+          <a:xfrm xmlns:a="http://schemas.openxmlformats.org/drawingml/2006/main">
+            <a:off x="1066800" y="4095750"/>
+            <a:ext cx="9334500" cy="914400"/>
+          </a:xfrm>
+          <a:prstGeom xmlns:a="http://schemas.openxmlformats.org/drawingml/2006/main" prst="rect">
+            <a:avLst/>
+          </a:prstGeom>
+          <a:noFill xmlns:a="http://schemas.openxmlformats.org/drawingml/2006/main"/>
+          <a:ln xmlns:a="http://schemas.openxmlformats.org/drawingml/2006/main" w="0">
+            <a:noFill/>
+            <a:prstDash val="solid"/>
+          </a:ln>
+        </p:spPr>
+        <p:txBody>
+          <a:bodyPr xmlns:a="http://schemas.openxmlformats.org/drawingml/2006/main"/>
+          <a:lstStyle xmlns:a="http://schemas.openxmlformats.org/drawingml/2006/main"/>
+          <a:p xmlns:a="http://schemas.openxmlformats.org/drawingml/2006/main">
+            <a:pPr algn="ctr">
+              <a:defRPr sz="2100" b="1" i="0">
+                <a:solidFill>
+                  <a:srgbClr val="000000"/>
+                </a:solidFill>
+              </a:defRPr>
+            </a:pPr>
+            <a:r>
+              <a:rPr sz="2100" b="1" i="0">
+                <a:solidFill>
+                  <a:srgbClr val="000000"/>
+                </a:solidFill>
+              </a:rPr>
+              <a:t>The point is not to add features for their own sake. The point is to ask whether direct market context, relative strength, or compact combined context improves replay and ranking together.</a:t>
+            </a:r>
+          </a:p>
+        </p:txBody>
+      </p:sp>
+    </p:spTree>
+    <p:extLst>
+      <p:ext uri="{BB962C8B-B14F-4D97-AF65-F5344CB8AC3E}">
+        <p14:creationId xmlns:p14="http://schemas.microsoft.com/office/powerpoint/2010/main" val="66104702"/>
+      </p:ext>
+    </p:extLst>
+  </p:cSld>
+</p:sld>
+</file>
+
+<file path=ppt/slides/slide47.xml><?xml version="1.0" encoding="utf-8"?>
+<p:sld xmlns:p="http://schemas.openxmlformats.org/presentationml/2006/main">
+  <p:cSld>
+    <p:bg>
+      <p:bgPr>
+        <a:solidFill xmlns:a="http://schemas.openxmlformats.org/drawingml/2006/main">
+          <a:srgbClr val="FFFFFF"/>
+        </a:solidFill>
+      </p:bgPr>
+    </p:bg>
+    <p:spTree>
+      <p:nvGrpSpPr>
+        <p:cNvPr id="1" name=""/>
+        <p:cNvGrpSpPr/>
+        <p:nvPr/>
+      </p:nvGrpSpPr>
+      <p:grpSpPr>
+        <a:xfrm xmlns:a="http://schemas.openxmlformats.org/drawingml/2006/main"/>
+      </p:grpSpPr>
+      <p:sp>
+        <p:nvSpPr>
+          <p:cNvPr id="1" name="">
+            <a:extLst xmlns:a="http://schemas.openxmlformats.org/drawingml/2006/main">
+              <a:ext uri="{FF2B5EF4-FFF2-40B4-BE49-F238E27FC236}">
+                <a16:creationId xmlns:a16="http://schemas.microsoft.com/office/drawing/2014/main" id="{A439ED4B-FEAF-412A-AB5D-FEA5FBA9DB2C}"/>
+              </a:ext>
+            </a:extLst>
+          </p:cNvPr>
+          <p:cNvSpPr>
+            <a:spLocks xmlns:a="http://schemas.openxmlformats.org/drawingml/2006/main" noGrp="1"/>
+          </p:cNvSpPr>
+          <p:nvPr/>
+        </p:nvSpPr>
+        <p:spPr>
+          <a:xfrm xmlns:a="http://schemas.openxmlformats.org/drawingml/2006/main">
+            <a:off x="685800" y="400050"/>
+            <a:ext cx="8572500" cy="247650"/>
+          </a:xfrm>
+          <a:prstGeom xmlns:a="http://schemas.openxmlformats.org/drawingml/2006/main" prst="rect">
+            <a:avLst/>
+          </a:prstGeom>
+          <a:noFill xmlns:a="http://schemas.openxmlformats.org/drawingml/2006/main"/>
+          <a:ln xmlns:a="http://schemas.openxmlformats.org/drawingml/2006/main" w="0">
+            <a:noFill/>
+            <a:prstDash val="solid"/>
+          </a:ln>
+        </p:spPr>
+        <p:txBody>
+          <a:bodyPr xmlns:a="http://schemas.openxmlformats.org/drawingml/2006/main"/>
+          <a:lstStyle xmlns:a="http://schemas.openxmlformats.org/drawingml/2006/main"/>
+          <a:p xmlns:a="http://schemas.openxmlformats.org/drawingml/2006/main">
+            <a:pPr algn="l">
+              <a:defRPr sz="975" b="1" i="0">
+                <a:solidFill>
+                  <a:srgbClr val="555555"/>
+                </a:solidFill>
+              </a:defRPr>
+            </a:pPr>
+            <a:r>
+              <a:rPr sz="975" b="1" i="0">
+                <a:solidFill>
+                  <a:srgbClr val="555555"/>
+                </a:solidFill>
+              </a:rPr>
+              <a:t>GEN5.4 ML DECISION ENGINE</a:t>
+            </a:r>
+          </a:p>
+        </p:txBody>
+      </p:sp>
+      <p:sp>
+        <p:nvSpPr>
+          <p:cNvPr id="2" name="">
+            <a:extLst xmlns:a="http://schemas.openxmlformats.org/drawingml/2006/main">
+              <a:ext uri="{FF2B5EF4-FFF2-40B4-BE49-F238E27FC236}">
+                <a16:creationId xmlns:a16="http://schemas.microsoft.com/office/drawing/2014/main" id="{7C257D94-8591-4DBA-B8B3-F3990A2745AA}"/>
+              </a:ext>
+            </a:extLst>
+          </p:cNvPr>
+          <p:cNvSpPr>
+            <a:spLocks xmlns:a="http://schemas.openxmlformats.org/drawingml/2006/main" noGrp="1"/>
+          </p:cNvSpPr>
+          <p:nvPr/>
+        </p:nvSpPr>
+        <p:spPr>
+          <a:xfrm xmlns:a="http://schemas.openxmlformats.org/drawingml/2006/main">
+            <a:off x="685800" y="723900"/>
+            <a:ext cx="10287000" cy="876300"/>
+          </a:xfrm>
+          <a:prstGeom xmlns:a="http://schemas.openxmlformats.org/drawingml/2006/main" prst="rect">
+            <a:avLst/>
+          </a:prstGeom>
+          <a:noFill xmlns:a="http://schemas.openxmlformats.org/drawingml/2006/main"/>
+          <a:ln xmlns:a="http://schemas.openxmlformats.org/drawingml/2006/main" w="0">
+            <a:noFill/>
+            <a:prstDash val="solid"/>
+          </a:ln>
+        </p:spPr>
+        <p:txBody>
+          <a:bodyPr xmlns:a="http://schemas.openxmlformats.org/drawingml/2006/main"/>
+          <a:lstStyle xmlns:a="http://schemas.openxmlformats.org/drawingml/2006/main"/>
+          <a:p xmlns:a="http://schemas.openxmlformats.org/drawingml/2006/main">
+            <a:pPr algn="l">
+              <a:defRPr sz="2850" b="1" i="0">
+                <a:solidFill>
+                  <a:srgbClr val="000000"/>
+                </a:solidFill>
+              </a:defRPr>
+            </a:pPr>
+            <a:r>
+              <a:rPr sz="2850" b="1" i="0">
+                <a:solidFill>
+                  <a:srgbClr val="000000"/>
+                </a:solidFill>
+              </a:rPr>
+              <a:t>Relative strength still led 2020 replay; asset-only defended 2022 best</a:t>
+            </a:r>
+          </a:p>
+        </p:txBody>
+      </p:sp>
+      <p:sp>
+        <p:nvSpPr>
+          <p:cNvPr id="3" name="">
+            <a:extLst xmlns:a="http://schemas.openxmlformats.org/drawingml/2006/main">
+              <a:ext uri="{FF2B5EF4-FFF2-40B4-BE49-F238E27FC236}">
+                <a16:creationId xmlns:a16="http://schemas.microsoft.com/office/drawing/2014/main" id="{5AF63DA8-F02E-479F-9348-22E2B690E7E1}"/>
+              </a:ext>
+            </a:extLst>
+          </p:cNvPr>
+          <p:cNvSpPr>
+            <a:spLocks xmlns:a="http://schemas.openxmlformats.org/drawingml/2006/main" noGrp="1"/>
+          </p:cNvSpPr>
+          <p:nvPr/>
+        </p:nvSpPr>
+        <p:spPr>
+          <a:xfrm xmlns:a="http://schemas.openxmlformats.org/drawingml/2006/main">
+            <a:off x="685800" y="1657350"/>
+            <a:ext cx="10820400" cy="19050"/>
+          </a:xfrm>
+          <a:prstGeom xmlns:a="http://schemas.openxmlformats.org/drawingml/2006/main" prst="rect">
+            <a:avLst/>
+          </a:prstGeom>
+          <a:solidFill xmlns:a="http://schemas.openxmlformats.org/drawingml/2006/main">
+            <a:srgbClr val="B8BCC4"/>
+          </a:solidFill>
+          <a:ln xmlns:a="http://schemas.openxmlformats.org/drawingml/2006/main" w="0">
+            <a:noFill/>
+            <a:prstDash val="solid"/>
+          </a:ln>
+        </p:spPr>
+      </p:sp>
+      <p:sp>
+        <p:nvSpPr>
+          <p:cNvPr id="4" name="">
+            <a:extLst xmlns:a="http://schemas.openxmlformats.org/drawingml/2006/main">
+              <a:ext uri="{FF2B5EF4-FFF2-40B4-BE49-F238E27FC236}">
+                <a16:creationId xmlns:a16="http://schemas.microsoft.com/office/drawing/2014/main" id="{48F0D330-3B47-4385-9C19-290DA3DBE433}"/>
+              </a:ext>
+            </a:extLst>
+          </p:cNvPr>
+          <p:cNvSpPr>
+            <a:spLocks xmlns:a="http://schemas.openxmlformats.org/drawingml/2006/main" noGrp="1"/>
+          </p:cNvSpPr>
+          <p:nvPr/>
+        </p:nvSpPr>
+        <p:spPr>
+          <a:xfrm xmlns:a="http://schemas.openxmlformats.org/drawingml/2006/main">
+            <a:off x="704850" y="2152650"/>
+            <a:ext cx="2333625" cy="1428750"/>
+          </a:xfrm>
+          <a:prstGeom xmlns:a="http://schemas.openxmlformats.org/drawingml/2006/main" prst="rect">
+            <a:avLst/>
+          </a:prstGeom>
+          <a:solidFill xmlns:a="http://schemas.openxmlformats.org/drawingml/2006/main">
+            <a:srgbClr val="EDEDED"/>
+          </a:solidFill>
+          <a:ln xmlns:a="http://schemas.openxmlformats.org/drawingml/2006/main" w="9525">
+            <a:solidFill>
+              <a:srgbClr val="B8BCC4"/>
+            </a:solidFill>
+            <a:prstDash val="solid"/>
+          </a:ln>
+        </p:spPr>
+      </p:sp>
+      <p:sp>
+        <p:nvSpPr>
+          <p:cNvPr id="5" name="">
+            <a:extLst xmlns:a="http://schemas.openxmlformats.org/drawingml/2006/main">
+              <a:ext uri="{FF2B5EF4-FFF2-40B4-BE49-F238E27FC236}">
+                <a16:creationId xmlns:a16="http://schemas.microsoft.com/office/drawing/2014/main" id="{B838CBA9-B5D9-4C1E-9370-238E452E840F}"/>
+              </a:ext>
+            </a:extLst>
+          </p:cNvPr>
+          <p:cNvSpPr>
+            <a:spLocks xmlns:a="http://schemas.openxmlformats.org/drawingml/2006/main" noGrp="1"/>
+          </p:cNvSpPr>
+          <p:nvPr/>
+        </p:nvSpPr>
+        <p:spPr>
+          <a:xfrm xmlns:a="http://schemas.openxmlformats.org/drawingml/2006/main">
+            <a:off x="876300" y="2305050"/>
+            <a:ext cx="1990725" cy="171450"/>
+          </a:xfrm>
+          <a:prstGeom xmlns:a="http://schemas.openxmlformats.org/drawingml/2006/main" prst="rect">
+            <a:avLst/>
+          </a:prstGeom>
+          <a:noFill xmlns:a="http://schemas.openxmlformats.org/drawingml/2006/main"/>
+          <a:ln xmlns:a="http://schemas.openxmlformats.org/drawingml/2006/main" w="0">
+            <a:noFill/>
+            <a:prstDash val="solid"/>
+          </a:ln>
+        </p:spPr>
+        <p:txBody>
+          <a:bodyPr xmlns:a="http://schemas.openxmlformats.org/drawingml/2006/main"/>
+          <a:lstStyle xmlns:a="http://schemas.openxmlformats.org/drawingml/2006/main"/>
+          <a:p xmlns:a="http://schemas.openxmlformats.org/drawingml/2006/main">
+            <a:pPr algn="l">
+              <a:defRPr sz="900" b="1" i="0">
+                <a:solidFill>
+                  <a:srgbClr val="555555"/>
+                </a:solidFill>
+              </a:defRPr>
+            </a:pPr>
+            <a:r>
+              <a:rPr sz="900" b="1" i="0">
+                <a:solidFill>
+                  <a:srgbClr val="555555"/>
+                </a:solidFill>
+              </a:rPr>
+              <a:t>2020 RELATIVE</a:t>
+            </a:r>
+          </a:p>
+        </p:txBody>
+      </p:sp>
+      <p:sp>
+        <p:nvSpPr>
+          <p:cNvPr id="6" name="">
+            <a:extLst xmlns:a="http://schemas.openxmlformats.org/drawingml/2006/main">
+              <a:ext uri="{FF2B5EF4-FFF2-40B4-BE49-F238E27FC236}">
+                <a16:creationId xmlns:a16="http://schemas.microsoft.com/office/drawing/2014/main" id="{C7EFC696-825F-4B76-9D77-1CAF976C0348}"/>
+              </a:ext>
+            </a:extLst>
+          </p:cNvPr>
+          <p:cNvSpPr>
+            <a:spLocks xmlns:a="http://schemas.openxmlformats.org/drawingml/2006/main" noGrp="1"/>
+          </p:cNvSpPr>
+          <p:nvPr/>
+        </p:nvSpPr>
+        <p:spPr>
+          <a:xfrm xmlns:a="http://schemas.openxmlformats.org/drawingml/2006/main">
+            <a:off x="876300" y="2552700"/>
+            <a:ext cx="1990725" cy="361950"/>
+          </a:xfrm>
+          <a:prstGeom xmlns:a="http://schemas.openxmlformats.org/drawingml/2006/main" prst="rect">
+            <a:avLst/>
+          </a:prstGeom>
+          <a:noFill xmlns:a="http://schemas.openxmlformats.org/drawingml/2006/main"/>
+          <a:ln xmlns:a="http://schemas.openxmlformats.org/drawingml/2006/main" w="0">
+            <a:noFill/>
+            <a:prstDash val="solid"/>
+          </a:ln>
+        </p:spPr>
+        <p:txBody>
+          <a:bodyPr xmlns:a="http://schemas.openxmlformats.org/drawingml/2006/main"/>
+          <a:lstStyle xmlns:a="http://schemas.openxmlformats.org/drawingml/2006/main"/>
+          <a:p xmlns:a="http://schemas.openxmlformats.org/drawingml/2006/main">
+            <a:pPr algn="l">
+              <a:defRPr sz="2250" b="1" i="0">
+                <a:solidFill>
+                  <a:srgbClr val="000000"/>
+                </a:solidFill>
+              </a:defRPr>
+            </a:pPr>
+            <a:r>
+              <a:rPr sz="2250" b="1" i="0">
+                <a:solidFill>
+                  <a:srgbClr val="000000"/>
+                </a:solidFill>
+              </a:rPr>
+              <a:t>108.9%</a:t>
+            </a:r>
+          </a:p>
+        </p:txBody>
+      </p:sp>
+      <p:sp>
+        <p:nvSpPr>
+          <p:cNvPr id="7" name="">
+            <a:extLst xmlns:a="http://schemas.openxmlformats.org/drawingml/2006/main">
+              <a:ext uri="{FF2B5EF4-FFF2-40B4-BE49-F238E27FC236}">
+                <a16:creationId xmlns:a16="http://schemas.microsoft.com/office/drawing/2014/main" id="{7494D814-CED5-4934-94C0-B7733D4EC419}"/>
+              </a:ext>
+            </a:extLst>
+          </p:cNvPr>
+          <p:cNvSpPr>
+            <a:spLocks xmlns:a="http://schemas.openxmlformats.org/drawingml/2006/main" noGrp="1"/>
+          </p:cNvSpPr>
+          <p:nvPr/>
+        </p:nvSpPr>
+        <p:spPr>
+          <a:xfrm xmlns:a="http://schemas.openxmlformats.org/drawingml/2006/main">
+            <a:off x="876300" y="2971800"/>
+            <a:ext cx="1990725" cy="552450"/>
+          </a:xfrm>
+          <a:prstGeom xmlns:a="http://schemas.openxmlformats.org/drawingml/2006/main" prst="rect">
+            <a:avLst/>
+          </a:prstGeom>
+          <a:noFill xmlns:a="http://schemas.openxmlformats.org/drawingml/2006/main"/>
+          <a:ln xmlns:a="http://schemas.openxmlformats.org/drawingml/2006/main" w="0">
+            <a:noFill/>
+            <a:prstDash val="solid"/>
+          </a:ln>
+        </p:spPr>
+        <p:txBody>
+          <a:bodyPr xmlns:a="http://schemas.openxmlformats.org/drawingml/2006/main"/>
+          <a:lstStyle xmlns:a="http://schemas.openxmlformats.org/drawingml/2006/main"/>
+          <a:p xmlns:a="http://schemas.openxmlformats.org/drawingml/2006/main">
+            <a:pPr algn="l">
+              <a:defRPr sz="1125" b="0" i="0">
+                <a:solidFill>
+                  <a:srgbClr val="555555"/>
+                </a:solidFill>
+              </a:defRPr>
+            </a:pPr>
+            <a:r>
+              <a:rPr sz="1125" b="0" i="0">
+                <a:solidFill>
+                  <a:srgbClr val="555555"/>
+                </a:solidFill>
+              </a:rPr>
+              <a:t>Basket hold was 225.2%.</a:t>
+            </a:r>
+          </a:p>
+        </p:txBody>
+      </p:sp>
+      <p:sp>
+        <p:nvSpPr>
+          <p:cNvPr id="8" name="">
+            <a:extLst xmlns:a="http://schemas.openxmlformats.org/drawingml/2006/main">
+              <a:ext uri="{FF2B5EF4-FFF2-40B4-BE49-F238E27FC236}">
+                <a16:creationId xmlns:a16="http://schemas.microsoft.com/office/drawing/2014/main" id="{493FD41B-E1C6-4B19-B370-D86DC278B810}"/>
+              </a:ext>
+            </a:extLst>
+          </p:cNvPr>
+          <p:cNvSpPr>
+            <a:spLocks xmlns:a="http://schemas.openxmlformats.org/drawingml/2006/main" noGrp="1"/>
+          </p:cNvSpPr>
+          <p:nvPr/>
+        </p:nvSpPr>
+        <p:spPr>
+          <a:xfrm xmlns:a="http://schemas.openxmlformats.org/drawingml/2006/main">
+            <a:off x="3409950" y="2152650"/>
+            <a:ext cx="2333625" cy="1428750"/>
+          </a:xfrm>
+          <a:prstGeom xmlns:a="http://schemas.openxmlformats.org/drawingml/2006/main" prst="rect">
+            <a:avLst/>
+          </a:prstGeom>
+          <a:solidFill xmlns:a="http://schemas.openxmlformats.org/drawingml/2006/main">
+            <a:srgbClr val="EDEDED"/>
+          </a:solidFill>
+          <a:ln xmlns:a="http://schemas.openxmlformats.org/drawingml/2006/main" w="9525">
+            <a:solidFill>
+              <a:srgbClr val="B8BCC4"/>
+            </a:solidFill>
+            <a:prstDash val="solid"/>
+          </a:ln>
+        </p:spPr>
+      </p:sp>
+      <p:sp>
+        <p:nvSpPr>
+          <p:cNvPr id="9" name="">
+            <a:extLst xmlns:a="http://schemas.openxmlformats.org/drawingml/2006/main">
+              <a:ext uri="{FF2B5EF4-FFF2-40B4-BE49-F238E27FC236}">
+                <a16:creationId xmlns:a16="http://schemas.microsoft.com/office/drawing/2014/main" id="{81930094-E5E1-49CC-B22F-736EF6B82109}"/>
+              </a:ext>
+            </a:extLst>
+          </p:cNvPr>
+          <p:cNvSpPr>
+            <a:spLocks xmlns:a="http://schemas.openxmlformats.org/drawingml/2006/main" noGrp="1"/>
+          </p:cNvSpPr>
+          <p:nvPr/>
+        </p:nvSpPr>
+        <p:spPr>
+          <a:xfrm xmlns:a="http://schemas.openxmlformats.org/drawingml/2006/main">
+            <a:off x="3581400" y="2305050"/>
+            <a:ext cx="1990725" cy="171450"/>
+          </a:xfrm>
+          <a:prstGeom xmlns:a="http://schemas.openxmlformats.org/drawingml/2006/main" prst="rect">
+            <a:avLst/>
+          </a:prstGeom>
+          <a:noFill xmlns:a="http://schemas.openxmlformats.org/drawingml/2006/main"/>
+          <a:ln xmlns:a="http://schemas.openxmlformats.org/drawingml/2006/main" w="0">
+            <a:noFill/>
+            <a:prstDash val="solid"/>
+          </a:ln>
+        </p:spPr>
+        <p:txBody>
+          <a:bodyPr xmlns:a="http://schemas.openxmlformats.org/drawingml/2006/main"/>
+          <a:lstStyle xmlns:a="http://schemas.openxmlformats.org/drawingml/2006/main"/>
+          <a:p xmlns:a="http://schemas.openxmlformats.org/drawingml/2006/main">
+            <a:pPr algn="l">
+              <a:defRPr sz="900" b="1" i="0">
+                <a:solidFill>
+                  <a:srgbClr val="555555"/>
+                </a:solidFill>
+              </a:defRPr>
+            </a:pPr>
+            <a:r>
+              <a:rPr sz="900" b="1" i="0">
+                <a:solidFill>
+                  <a:srgbClr val="555555"/>
+                </a:solidFill>
+              </a:rPr>
+              <a:t>2020 ASSET-ONLY</a:t>
+            </a:r>
+          </a:p>
+        </p:txBody>
+      </p:sp>
+      <p:sp>
+        <p:nvSpPr>
+          <p:cNvPr id="10" name="">
+            <a:extLst xmlns:a="http://schemas.openxmlformats.org/drawingml/2006/main">
+              <a:ext uri="{FF2B5EF4-FFF2-40B4-BE49-F238E27FC236}">
+                <a16:creationId xmlns:a16="http://schemas.microsoft.com/office/drawing/2014/main" id="{718FF1F4-8F0C-48B7-AFFD-A3C77EEE775C}"/>
+              </a:ext>
+            </a:extLst>
+          </p:cNvPr>
+          <p:cNvSpPr>
+            <a:spLocks xmlns:a="http://schemas.openxmlformats.org/drawingml/2006/main" noGrp="1"/>
+          </p:cNvSpPr>
+          <p:nvPr/>
+        </p:nvSpPr>
+        <p:spPr>
+          <a:xfrm xmlns:a="http://schemas.openxmlformats.org/drawingml/2006/main">
+            <a:off x="3581400" y="2552700"/>
+            <a:ext cx="1990725" cy="361950"/>
+          </a:xfrm>
+          <a:prstGeom xmlns:a="http://schemas.openxmlformats.org/drawingml/2006/main" prst="rect">
+            <a:avLst/>
+          </a:prstGeom>
+          <a:noFill xmlns:a="http://schemas.openxmlformats.org/drawingml/2006/main"/>
+          <a:ln xmlns:a="http://schemas.openxmlformats.org/drawingml/2006/main" w="0">
+            <a:noFill/>
+            <a:prstDash val="solid"/>
+          </a:ln>
+        </p:spPr>
+        <p:txBody>
+          <a:bodyPr xmlns:a="http://schemas.openxmlformats.org/drawingml/2006/main"/>
+          <a:lstStyle xmlns:a="http://schemas.openxmlformats.org/drawingml/2006/main"/>
+          <a:p xmlns:a="http://schemas.openxmlformats.org/drawingml/2006/main">
+            <a:pPr algn="l">
+              <a:defRPr sz="2250" b="1" i="0">
+                <a:solidFill>
+                  <a:srgbClr val="000000"/>
+                </a:solidFill>
+              </a:defRPr>
+            </a:pPr>
+            <a:r>
+              <a:rPr sz="2250" b="1" i="0">
+                <a:solidFill>
+                  <a:srgbClr val="000000"/>
+                </a:solidFill>
+              </a:rPr>
+              <a:t>81.1%</a:t>
+            </a:r>
+          </a:p>
+        </p:txBody>
+      </p:sp>
+      <p:sp>
+        <p:nvSpPr>
+          <p:cNvPr id="11" name="">
+            <a:extLst xmlns:a="http://schemas.openxmlformats.org/drawingml/2006/main">
+              <a:ext uri="{FF2B5EF4-FFF2-40B4-BE49-F238E27FC236}">
+                <a16:creationId xmlns:a16="http://schemas.microsoft.com/office/drawing/2014/main" id="{798E33BF-2935-48B1-9CBA-C09070C644CF}"/>
+              </a:ext>
+            </a:extLst>
+          </p:cNvPr>
+          <p:cNvSpPr>
+            <a:spLocks xmlns:a="http://schemas.openxmlformats.org/drawingml/2006/main" noGrp="1"/>
+          </p:cNvSpPr>
+          <p:nvPr/>
+        </p:nvSpPr>
+        <p:spPr>
+          <a:xfrm xmlns:a="http://schemas.openxmlformats.org/drawingml/2006/main">
+            <a:off x="3581400" y="2971800"/>
+            <a:ext cx="1990725" cy="552450"/>
+          </a:xfrm>
+          <a:prstGeom xmlns:a="http://schemas.openxmlformats.org/drawingml/2006/main" prst="rect">
+            <a:avLst/>
+          </a:prstGeom>
+          <a:noFill xmlns:a="http://schemas.openxmlformats.org/drawingml/2006/main"/>
+          <a:ln xmlns:a="http://schemas.openxmlformats.org/drawingml/2006/main" w="0">
+            <a:noFill/>
+            <a:prstDash val="solid"/>
+          </a:ln>
+        </p:spPr>
+        <p:txBody>
+          <a:bodyPr xmlns:a="http://schemas.openxmlformats.org/drawingml/2006/main"/>
+          <a:lstStyle xmlns:a="http://schemas.openxmlformats.org/drawingml/2006/main"/>
+          <a:p xmlns:a="http://schemas.openxmlformats.org/drawingml/2006/main">
+            <a:pPr algn="l">
+              <a:defRPr sz="1125" b="0" i="0">
+                <a:solidFill>
+                  <a:srgbClr val="555555"/>
+                </a:solidFill>
+              </a:defRPr>
+            </a:pPr>
+            <a:r>
+              <a:rPr sz="1125" b="0" i="0">
+                <a:solidFill>
+                  <a:srgbClr val="555555"/>
+                </a:solidFill>
+              </a:rPr>
+              <a:t>Relative-strength was 108.9%.</a:t>
+            </a:r>
+          </a:p>
+        </p:txBody>
+      </p:sp>
+      <p:sp>
+        <p:nvSpPr>
+          <p:cNvPr id="12" name="">
+            <a:extLst xmlns:a="http://schemas.openxmlformats.org/drawingml/2006/main">
+              <a:ext uri="{FF2B5EF4-FFF2-40B4-BE49-F238E27FC236}">
+                <a16:creationId xmlns:a16="http://schemas.microsoft.com/office/drawing/2014/main" id="{3C03C860-DA7A-42AD-A61F-24E3C95142B3}"/>
+              </a:ext>
+            </a:extLst>
+          </p:cNvPr>
+          <p:cNvSpPr>
+            <a:spLocks xmlns:a="http://schemas.openxmlformats.org/drawingml/2006/main" noGrp="1"/>
+          </p:cNvSpPr>
+          <p:nvPr/>
+        </p:nvSpPr>
+        <p:spPr>
+          <a:xfrm xmlns:a="http://schemas.openxmlformats.org/drawingml/2006/main">
+            <a:off x="6115050" y="2152650"/>
+            <a:ext cx="2333625" cy="1428750"/>
+          </a:xfrm>
+          <a:prstGeom xmlns:a="http://schemas.openxmlformats.org/drawingml/2006/main" prst="rect">
+            <a:avLst/>
+          </a:prstGeom>
+          <a:solidFill xmlns:a="http://schemas.openxmlformats.org/drawingml/2006/main">
+            <a:srgbClr val="EDEDED"/>
+          </a:solidFill>
+          <a:ln xmlns:a="http://schemas.openxmlformats.org/drawingml/2006/main" w="9525">
+            <a:solidFill>
+              <a:srgbClr val="B8BCC4"/>
+            </a:solidFill>
+            <a:prstDash val="solid"/>
+          </a:ln>
+        </p:spPr>
+      </p:sp>
+      <p:sp>
+        <p:nvSpPr>
+          <p:cNvPr id="13" name="">
+            <a:extLst xmlns:a="http://schemas.openxmlformats.org/drawingml/2006/main">
+              <a:ext uri="{FF2B5EF4-FFF2-40B4-BE49-F238E27FC236}">
+                <a16:creationId xmlns:a16="http://schemas.microsoft.com/office/drawing/2014/main" id="{0BD1B6B6-8130-4BA8-8B85-0D7C870298E3}"/>
+              </a:ext>
+            </a:extLst>
+          </p:cNvPr>
+          <p:cNvSpPr>
+            <a:spLocks xmlns:a="http://schemas.openxmlformats.org/drawingml/2006/main" noGrp="1"/>
+          </p:cNvSpPr>
+          <p:nvPr/>
+        </p:nvSpPr>
+        <p:spPr>
+          <a:xfrm xmlns:a="http://schemas.openxmlformats.org/drawingml/2006/main">
+            <a:off x="6286500" y="2305050"/>
+            <a:ext cx="1990725" cy="171450"/>
+          </a:xfrm>
+          <a:prstGeom xmlns:a="http://schemas.openxmlformats.org/drawingml/2006/main" prst="rect">
+            <a:avLst/>
+          </a:prstGeom>
+          <a:noFill xmlns:a="http://schemas.openxmlformats.org/drawingml/2006/main"/>
+          <a:ln xmlns:a="http://schemas.openxmlformats.org/drawingml/2006/main" w="0">
+            <a:noFill/>
+            <a:prstDash val="solid"/>
+          </a:ln>
+        </p:spPr>
+        <p:txBody>
+          <a:bodyPr xmlns:a="http://schemas.openxmlformats.org/drawingml/2006/main"/>
+          <a:lstStyle xmlns:a="http://schemas.openxmlformats.org/drawingml/2006/main"/>
+          <a:p xmlns:a="http://schemas.openxmlformats.org/drawingml/2006/main">
+            <a:pPr algn="l">
+              <a:defRPr sz="900" b="1" i="0">
+                <a:solidFill>
+                  <a:srgbClr val="555555"/>
+                </a:solidFill>
+              </a:defRPr>
+            </a:pPr>
+            <a:r>
+              <a:rPr sz="900" b="1" i="0">
+                <a:solidFill>
+                  <a:srgbClr val="555555"/>
+                </a:solidFill>
+              </a:rPr>
+              <a:t>2022 ASSET-ONLY</a:t>
+            </a:r>
+          </a:p>
+        </p:txBody>
+      </p:sp>
+      <p:sp>
+        <p:nvSpPr>
+          <p:cNvPr id="14" name="">
+            <a:extLst xmlns:a="http://schemas.openxmlformats.org/drawingml/2006/main">
+              <a:ext uri="{FF2B5EF4-FFF2-40B4-BE49-F238E27FC236}">
+                <a16:creationId xmlns:a16="http://schemas.microsoft.com/office/drawing/2014/main" id="{376AC52D-D137-405A-9B63-B681B25D9860}"/>
+              </a:ext>
+            </a:extLst>
+          </p:cNvPr>
+          <p:cNvSpPr>
+            <a:spLocks xmlns:a="http://schemas.openxmlformats.org/drawingml/2006/main" noGrp="1"/>
+          </p:cNvSpPr>
+          <p:nvPr/>
+        </p:nvSpPr>
+        <p:spPr>
+          <a:xfrm xmlns:a="http://schemas.openxmlformats.org/drawingml/2006/main">
+            <a:off x="6286500" y="2552700"/>
+            <a:ext cx="1990725" cy="361950"/>
+          </a:xfrm>
+          <a:prstGeom xmlns:a="http://schemas.openxmlformats.org/drawingml/2006/main" prst="rect">
+            <a:avLst/>
+          </a:prstGeom>
+          <a:noFill xmlns:a="http://schemas.openxmlformats.org/drawingml/2006/main"/>
+          <a:ln xmlns:a="http://schemas.openxmlformats.org/drawingml/2006/main" w="0">
+            <a:noFill/>
+            <a:prstDash val="solid"/>
+          </a:ln>
+        </p:spPr>
+        <p:txBody>
+          <a:bodyPr xmlns:a="http://schemas.openxmlformats.org/drawingml/2006/main"/>
+          <a:lstStyle xmlns:a="http://schemas.openxmlformats.org/drawingml/2006/main"/>
+          <a:p xmlns:a="http://schemas.openxmlformats.org/drawingml/2006/main">
+            <a:pPr algn="l">
+              <a:defRPr sz="2250" b="1" i="0">
+                <a:solidFill>
+                  <a:srgbClr val="000000"/>
+                </a:solidFill>
+              </a:defRPr>
+            </a:pPr>
+            <a:r>
+              <a:rPr sz="2250" b="1" i="0">
+                <a:solidFill>
+                  <a:srgbClr val="000000"/>
+                </a:solidFill>
+              </a:rPr>
+              <a:t>-33.2%</a:t>
+            </a:r>
+          </a:p>
+        </p:txBody>
+      </p:sp>
+      <p:sp>
+        <p:nvSpPr>
+          <p:cNvPr id="15" name="">
+            <a:extLst xmlns:a="http://schemas.openxmlformats.org/drawingml/2006/main">
+              <a:ext uri="{FF2B5EF4-FFF2-40B4-BE49-F238E27FC236}">
+                <a16:creationId xmlns:a16="http://schemas.microsoft.com/office/drawing/2014/main" id="{FD787590-5CE4-4B3A-92A1-08A7765FD586}"/>
+              </a:ext>
+            </a:extLst>
+          </p:cNvPr>
+          <p:cNvSpPr>
+            <a:spLocks xmlns:a="http://schemas.openxmlformats.org/drawingml/2006/main" noGrp="1"/>
+          </p:cNvSpPr>
+          <p:nvPr/>
+        </p:nvSpPr>
+        <p:spPr>
+          <a:xfrm xmlns:a="http://schemas.openxmlformats.org/drawingml/2006/main">
+            <a:off x="6286500" y="2971800"/>
+            <a:ext cx="1990725" cy="552450"/>
+          </a:xfrm>
+          <a:prstGeom xmlns:a="http://schemas.openxmlformats.org/drawingml/2006/main" prst="rect">
+            <a:avLst/>
+          </a:prstGeom>
+          <a:noFill xmlns:a="http://schemas.openxmlformats.org/drawingml/2006/main"/>
+          <a:ln xmlns:a="http://schemas.openxmlformats.org/drawingml/2006/main" w="0">
+            <a:noFill/>
+            <a:prstDash val="solid"/>
+          </a:ln>
+        </p:spPr>
+        <p:txBody>
+          <a:bodyPr xmlns:a="http://schemas.openxmlformats.org/drawingml/2006/main"/>
+          <a:lstStyle xmlns:a="http://schemas.openxmlformats.org/drawingml/2006/main"/>
+          <a:p xmlns:a="http://schemas.openxmlformats.org/drawingml/2006/main">
+            <a:pPr algn="l">
+              <a:defRPr sz="1125" b="0" i="0">
+                <a:solidFill>
+                  <a:srgbClr val="555555"/>
+                </a:solidFill>
+              </a:defRPr>
+            </a:pPr>
+            <a:r>
+              <a:rPr sz="1125" b="0" i="0">
+                <a:solidFill>
+                  <a:srgbClr val="555555"/>
+                </a:solidFill>
+              </a:rPr>
+              <a:t>Basket hold was -53.3%.</a:t>
+            </a:r>
+          </a:p>
+        </p:txBody>
+      </p:sp>
+      <p:sp>
+        <p:nvSpPr>
+          <p:cNvPr id="16" name="">
+            <a:extLst xmlns:a="http://schemas.openxmlformats.org/drawingml/2006/main">
+              <a:ext uri="{FF2B5EF4-FFF2-40B4-BE49-F238E27FC236}">
+                <a16:creationId xmlns:a16="http://schemas.microsoft.com/office/drawing/2014/main" id="{B5649404-EB1F-455E-8432-556ABD1B5A9C}"/>
+              </a:ext>
+            </a:extLst>
+          </p:cNvPr>
+          <p:cNvSpPr>
+            <a:spLocks xmlns:a="http://schemas.openxmlformats.org/drawingml/2006/main" noGrp="1"/>
+          </p:cNvSpPr>
+          <p:nvPr/>
+        </p:nvSpPr>
+        <p:spPr>
+          <a:xfrm xmlns:a="http://schemas.openxmlformats.org/drawingml/2006/main">
+            <a:off x="8820150" y="2152650"/>
+            <a:ext cx="2333625" cy="1428750"/>
+          </a:xfrm>
+          <a:prstGeom xmlns:a="http://schemas.openxmlformats.org/drawingml/2006/main" prst="rect">
+            <a:avLst/>
+          </a:prstGeom>
+          <a:solidFill xmlns:a="http://schemas.openxmlformats.org/drawingml/2006/main">
+            <a:srgbClr val="EDEDED"/>
+          </a:solidFill>
+          <a:ln xmlns:a="http://schemas.openxmlformats.org/drawingml/2006/main" w="9525">
+            <a:solidFill>
+              <a:srgbClr val="B8BCC4"/>
+            </a:solidFill>
+            <a:prstDash val="solid"/>
+          </a:ln>
+        </p:spPr>
+      </p:sp>
+      <p:sp>
+        <p:nvSpPr>
+          <p:cNvPr id="17" name="">
+            <a:extLst xmlns:a="http://schemas.openxmlformats.org/drawingml/2006/main">
+              <a:ext uri="{FF2B5EF4-FFF2-40B4-BE49-F238E27FC236}">
+                <a16:creationId xmlns:a16="http://schemas.microsoft.com/office/drawing/2014/main" id="{B0724DE1-F2F5-4DAF-A12B-68D07C7A2CA9}"/>
+              </a:ext>
+            </a:extLst>
+          </p:cNvPr>
+          <p:cNvSpPr>
+            <a:spLocks xmlns:a="http://schemas.openxmlformats.org/drawingml/2006/main" noGrp="1"/>
+          </p:cNvSpPr>
+          <p:nvPr/>
+        </p:nvSpPr>
+        <p:spPr>
+          <a:xfrm xmlns:a="http://schemas.openxmlformats.org/drawingml/2006/main">
+            <a:off x="8991600" y="2305050"/>
+            <a:ext cx="1990725" cy="171450"/>
+          </a:xfrm>
+          <a:prstGeom xmlns:a="http://schemas.openxmlformats.org/drawingml/2006/main" prst="rect">
+            <a:avLst/>
+          </a:prstGeom>
+          <a:noFill xmlns:a="http://schemas.openxmlformats.org/drawingml/2006/main"/>
+          <a:ln xmlns:a="http://schemas.openxmlformats.org/drawingml/2006/main" w="0">
+            <a:noFill/>
+            <a:prstDash val="solid"/>
+          </a:ln>
+        </p:spPr>
+        <p:txBody>
+          <a:bodyPr xmlns:a="http://schemas.openxmlformats.org/drawingml/2006/main"/>
+          <a:lstStyle xmlns:a="http://schemas.openxmlformats.org/drawingml/2006/main"/>
+          <a:p xmlns:a="http://schemas.openxmlformats.org/drawingml/2006/main">
+            <a:pPr algn="l">
+              <a:defRPr sz="900" b="1" i="0">
+                <a:solidFill>
+                  <a:srgbClr val="555555"/>
+                </a:solidFill>
+              </a:defRPr>
+            </a:pPr>
+            <a:r>
+              <a:rPr sz="900" b="1" i="0">
+                <a:solidFill>
+                  <a:srgbClr val="555555"/>
+                </a:solidFill>
+              </a:rPr>
+              <a:t>2022 RELATIVE</a:t>
+            </a:r>
+          </a:p>
+        </p:txBody>
+      </p:sp>
+      <p:sp>
+        <p:nvSpPr>
+          <p:cNvPr id="18" name="">
+            <a:extLst xmlns:a="http://schemas.openxmlformats.org/drawingml/2006/main">
+              <a:ext uri="{FF2B5EF4-FFF2-40B4-BE49-F238E27FC236}">
+                <a16:creationId xmlns:a16="http://schemas.microsoft.com/office/drawing/2014/main" id="{17A2E054-4A39-44A5-8FA6-D221136E12F2}"/>
+              </a:ext>
+            </a:extLst>
+          </p:cNvPr>
+          <p:cNvSpPr>
+            <a:spLocks xmlns:a="http://schemas.openxmlformats.org/drawingml/2006/main" noGrp="1"/>
+          </p:cNvSpPr>
+          <p:nvPr/>
+        </p:nvSpPr>
+        <p:spPr>
+          <a:xfrm xmlns:a="http://schemas.openxmlformats.org/drawingml/2006/main">
+            <a:off x="8991600" y="2552700"/>
+            <a:ext cx="1990725" cy="361950"/>
+          </a:xfrm>
+          <a:prstGeom xmlns:a="http://schemas.openxmlformats.org/drawingml/2006/main" prst="rect">
+            <a:avLst/>
+          </a:prstGeom>
+          <a:noFill xmlns:a="http://schemas.openxmlformats.org/drawingml/2006/main"/>
+          <a:ln xmlns:a="http://schemas.openxmlformats.org/drawingml/2006/main" w="0">
+            <a:noFill/>
+            <a:prstDash val="solid"/>
+          </a:ln>
+        </p:spPr>
+        <p:txBody>
+          <a:bodyPr xmlns:a="http://schemas.openxmlformats.org/drawingml/2006/main"/>
+          <a:lstStyle xmlns:a="http://schemas.openxmlformats.org/drawingml/2006/main"/>
+          <a:p xmlns:a="http://schemas.openxmlformats.org/drawingml/2006/main">
+            <a:pPr algn="l">
+              <a:defRPr sz="2250" b="1" i="0">
+                <a:solidFill>
+                  <a:srgbClr val="000000"/>
+                </a:solidFill>
+              </a:defRPr>
+            </a:pPr>
+            <a:r>
+              <a:rPr sz="2250" b="1" i="0">
+                <a:solidFill>
+                  <a:srgbClr val="000000"/>
+                </a:solidFill>
+              </a:rPr>
+              <a:t>-37.8%</a:t>
+            </a:r>
+          </a:p>
+        </p:txBody>
+      </p:sp>
+      <p:sp>
+        <p:nvSpPr>
+          <p:cNvPr id="19" name="">
+            <a:extLst xmlns:a="http://schemas.openxmlformats.org/drawingml/2006/main">
+              <a:ext uri="{FF2B5EF4-FFF2-40B4-BE49-F238E27FC236}">
+                <a16:creationId xmlns:a16="http://schemas.microsoft.com/office/drawing/2014/main" id="{E35090A4-7FA3-4B21-AE9D-283065626BB9}"/>
+              </a:ext>
+            </a:extLst>
+          </p:cNvPr>
+          <p:cNvSpPr>
+            <a:spLocks xmlns:a="http://schemas.openxmlformats.org/drawingml/2006/main" noGrp="1"/>
+          </p:cNvSpPr>
+          <p:nvPr/>
+        </p:nvSpPr>
+        <p:spPr>
+          <a:xfrm xmlns:a="http://schemas.openxmlformats.org/drawingml/2006/main">
+            <a:off x="8991600" y="2971800"/>
+            <a:ext cx="1990725" cy="552450"/>
+          </a:xfrm>
+          <a:prstGeom xmlns:a="http://schemas.openxmlformats.org/drawingml/2006/main" prst="rect">
+            <a:avLst/>
+          </a:prstGeom>
+          <a:noFill xmlns:a="http://schemas.openxmlformats.org/drawingml/2006/main"/>
+          <a:ln xmlns:a="http://schemas.openxmlformats.org/drawingml/2006/main" w="0">
+            <a:noFill/>
+            <a:prstDash val="solid"/>
+          </a:ln>
+        </p:spPr>
+        <p:txBody>
+          <a:bodyPr xmlns:a="http://schemas.openxmlformats.org/drawingml/2006/main"/>
+          <a:lstStyle xmlns:a="http://schemas.openxmlformats.org/drawingml/2006/main"/>
+          <a:p xmlns:a="http://schemas.openxmlformats.org/drawingml/2006/main">
+            <a:pPr algn="l">
+              <a:defRPr sz="1125" b="0" i="0">
+                <a:solidFill>
+                  <a:srgbClr val="555555"/>
+                </a:solidFill>
+              </a:defRPr>
+            </a:pPr>
+            <a:r>
+              <a:rPr sz="1125" b="0" i="0">
+                <a:solidFill>
+                  <a:srgbClr val="555555"/>
+                </a:solidFill>
+              </a:rPr>
+              <a:t>Asset-only was -33.2%.</a:t>
+            </a:r>
+          </a:p>
+        </p:txBody>
+      </p:sp>
+      <p:sp>
+        <p:nvSpPr>
+          <p:cNvPr id="20" name="">
+            <a:extLst xmlns:a="http://schemas.openxmlformats.org/drawingml/2006/main">
+              <a:ext uri="{FF2B5EF4-FFF2-40B4-BE49-F238E27FC236}">
+                <a16:creationId xmlns:a16="http://schemas.microsoft.com/office/drawing/2014/main" id="{D435BF64-BC28-4548-BEDC-D7AB19D51D52}"/>
+              </a:ext>
+            </a:extLst>
+          </p:cNvPr>
+          <p:cNvSpPr>
+            <a:spLocks xmlns:a="http://schemas.openxmlformats.org/drawingml/2006/main" noGrp="1"/>
+          </p:cNvSpPr>
+          <p:nvPr/>
+        </p:nvSpPr>
+        <p:spPr>
+          <a:xfrm xmlns:a="http://schemas.openxmlformats.org/drawingml/2006/main">
+            <a:off x="1066800" y="4095750"/>
+            <a:ext cx="9334500" cy="914400"/>
+          </a:xfrm>
+          <a:prstGeom xmlns:a="http://schemas.openxmlformats.org/drawingml/2006/main" prst="rect">
+            <a:avLst/>
+          </a:prstGeom>
+          <a:noFill xmlns:a="http://schemas.openxmlformats.org/drawingml/2006/main"/>
+          <a:ln xmlns:a="http://schemas.openxmlformats.org/drawingml/2006/main" w="0">
+            <a:noFill/>
+            <a:prstDash val="solid"/>
+          </a:ln>
+        </p:spPr>
+        <p:txBody>
+          <a:bodyPr xmlns:a="http://schemas.openxmlformats.org/drawingml/2006/main"/>
+          <a:lstStyle xmlns:a="http://schemas.openxmlformats.org/drawingml/2006/main"/>
+          <a:p xmlns:a="http://schemas.openxmlformats.org/drawingml/2006/main">
+            <a:pPr algn="ctr">
+              <a:defRPr sz="2100" b="1" i="0">
+                <a:solidFill>
+                  <a:srgbClr val="000000"/>
+                </a:solidFill>
+              </a:defRPr>
+            </a:pPr>
+            <a:r>
+              <a:rPr sz="2100" b="1" i="0">
+                <a:solidFill>
+                  <a:srgbClr val="000000"/>
+                </a:solidFill>
+              </a:rPr>
+              <a:t>This is an informative split: relative strength captures more upside in the bull window, while asset-only sheds more damage in the bear window. Direct context did not improve replay in this first slice.</a:t>
+            </a:r>
+          </a:p>
+        </p:txBody>
+      </p:sp>
+    </p:spTree>
+    <p:extLst>
+      <p:ext uri="{BB962C8B-B14F-4D97-AF65-F5344CB8AC3E}">
+        <p14:creationId xmlns:p14="http://schemas.microsoft.com/office/powerpoint/2010/main" val="1209233603"/>
+      </p:ext>
+    </p:extLst>
+  </p:cSld>
+</p:sld>
+</file>
+
+<file path=ppt/slides/slide48.xml><?xml version="1.0" encoding="utf-8"?>
+<p:sld xmlns:p="http://schemas.openxmlformats.org/presentationml/2006/main">
+  <p:cSld>
+    <p:bg>
+      <p:bgPr>
+        <a:solidFill xmlns:a="http://schemas.openxmlformats.org/drawingml/2006/main">
+          <a:srgbClr val="FFFFFF"/>
+        </a:solidFill>
+      </p:bgPr>
+    </p:bg>
+    <p:spTree>
+      <p:nvGrpSpPr>
+        <p:cNvPr id="1" name=""/>
+        <p:cNvGrpSpPr/>
+        <p:nvPr/>
+      </p:nvGrpSpPr>
+      <p:grpSpPr>
+        <a:xfrm xmlns:a="http://schemas.openxmlformats.org/drawingml/2006/main"/>
+      </p:grpSpPr>
+      <p:sp>
+        <p:nvSpPr>
+          <p:cNvPr id="1" name="">
+            <a:extLst xmlns:a="http://schemas.openxmlformats.org/drawingml/2006/main">
+              <a:ext uri="{FF2B5EF4-FFF2-40B4-BE49-F238E27FC236}">
+                <a16:creationId xmlns:a16="http://schemas.microsoft.com/office/drawing/2014/main" id="{A97635BE-631B-43AC-A7BA-7519873252E2}"/>
+              </a:ext>
+            </a:extLst>
+          </p:cNvPr>
+          <p:cNvSpPr>
+            <a:spLocks xmlns:a="http://schemas.openxmlformats.org/drawingml/2006/main" noGrp="1"/>
+          </p:cNvSpPr>
+          <p:nvPr/>
+        </p:nvSpPr>
+        <p:spPr>
+          <a:xfrm xmlns:a="http://schemas.openxmlformats.org/drawingml/2006/main">
+            <a:off x="685800" y="400050"/>
+            <a:ext cx="8572500" cy="247650"/>
+          </a:xfrm>
+          <a:prstGeom xmlns:a="http://schemas.openxmlformats.org/drawingml/2006/main" prst="rect">
+            <a:avLst/>
+          </a:prstGeom>
+          <a:noFill xmlns:a="http://schemas.openxmlformats.org/drawingml/2006/main"/>
+          <a:ln xmlns:a="http://schemas.openxmlformats.org/drawingml/2006/main" w="0">
+            <a:noFill/>
+            <a:prstDash val="solid"/>
+          </a:ln>
+        </p:spPr>
+        <p:txBody>
+          <a:bodyPr xmlns:a="http://schemas.openxmlformats.org/drawingml/2006/main"/>
+          <a:lstStyle xmlns:a="http://schemas.openxmlformats.org/drawingml/2006/main"/>
+          <a:p xmlns:a="http://schemas.openxmlformats.org/drawingml/2006/main">
+            <a:pPr algn="l">
+              <a:defRPr sz="975" b="1" i="0">
+                <a:solidFill>
+                  <a:srgbClr val="555555"/>
+                </a:solidFill>
+              </a:defRPr>
+            </a:pPr>
+            <a:r>
+              <a:rPr sz="975" b="1" i="0">
+                <a:solidFill>
+                  <a:srgbClr val="555555"/>
+                </a:solidFill>
+              </a:rPr>
+              <a:t>GEN5.4 ML DECISION ENGINE</a:t>
+            </a:r>
+          </a:p>
+        </p:txBody>
+      </p:sp>
+      <p:sp>
+        <p:nvSpPr>
+          <p:cNvPr id="2" name="">
+            <a:extLst xmlns:a="http://schemas.openxmlformats.org/drawingml/2006/main">
+              <a:ext uri="{FF2B5EF4-FFF2-40B4-BE49-F238E27FC236}">
+                <a16:creationId xmlns:a16="http://schemas.microsoft.com/office/drawing/2014/main" id="{E090218D-169E-4819-95AD-0FB38234FF96}"/>
+              </a:ext>
+            </a:extLst>
+          </p:cNvPr>
+          <p:cNvSpPr>
+            <a:spLocks xmlns:a="http://schemas.openxmlformats.org/drawingml/2006/main" noGrp="1"/>
+          </p:cNvSpPr>
+          <p:nvPr/>
+        </p:nvSpPr>
+        <p:spPr>
+          <a:xfrm xmlns:a="http://schemas.openxmlformats.org/drawingml/2006/main">
+            <a:off x="685800" y="723900"/>
+            <a:ext cx="10287000" cy="876300"/>
+          </a:xfrm>
+          <a:prstGeom xmlns:a="http://schemas.openxmlformats.org/drawingml/2006/main" prst="rect">
+            <a:avLst/>
+          </a:prstGeom>
+          <a:noFill xmlns:a="http://schemas.openxmlformats.org/drawingml/2006/main"/>
+          <a:ln xmlns:a="http://schemas.openxmlformats.org/drawingml/2006/main" w="0">
+            <a:noFill/>
+            <a:prstDash val="solid"/>
+          </a:ln>
+        </p:spPr>
+        <p:txBody>
+          <a:bodyPr xmlns:a="http://schemas.openxmlformats.org/drawingml/2006/main"/>
+          <a:lstStyle xmlns:a="http://schemas.openxmlformats.org/drawingml/2006/main"/>
+          <a:p xmlns:a="http://schemas.openxmlformats.org/drawingml/2006/main">
+            <a:pPr algn="l">
+              <a:defRPr sz="2850" b="1" i="0">
+                <a:solidFill>
+                  <a:srgbClr val="000000"/>
+                </a:solidFill>
+              </a:defRPr>
+            </a:pPr>
+            <a:r>
+              <a:rPr sz="2850" b="1" i="0">
+                <a:solidFill>
+                  <a:srgbClr val="000000"/>
+                </a:solidFill>
+              </a:rPr>
+              <a:t>The equity curves show context can add noise before it adds edge</a:t>
+            </a:r>
+          </a:p>
+        </p:txBody>
+      </p:sp>
+      <p:sp>
+        <p:nvSpPr>
+          <p:cNvPr id="3" name="">
+            <a:extLst xmlns:a="http://schemas.openxmlformats.org/drawingml/2006/main">
+              <a:ext uri="{FF2B5EF4-FFF2-40B4-BE49-F238E27FC236}">
+                <a16:creationId xmlns:a16="http://schemas.microsoft.com/office/drawing/2014/main" id="{A5A0B387-BC9C-43F7-A3F1-9FDD69C17A3C}"/>
+              </a:ext>
+            </a:extLst>
+          </p:cNvPr>
+          <p:cNvSpPr>
+            <a:spLocks xmlns:a="http://schemas.openxmlformats.org/drawingml/2006/main" noGrp="1"/>
+          </p:cNvSpPr>
+          <p:nvPr/>
+        </p:nvSpPr>
+        <p:spPr>
+          <a:xfrm xmlns:a="http://schemas.openxmlformats.org/drawingml/2006/main">
+            <a:off x="685800" y="1657350"/>
+            <a:ext cx="10820400" cy="19050"/>
+          </a:xfrm>
+          <a:prstGeom xmlns:a="http://schemas.openxmlformats.org/drawingml/2006/main" prst="rect">
+            <a:avLst/>
+          </a:prstGeom>
+          <a:solidFill xmlns:a="http://schemas.openxmlformats.org/drawingml/2006/main">
+            <a:srgbClr val="B8BCC4"/>
+          </a:solidFill>
+          <a:ln xmlns:a="http://schemas.openxmlformats.org/drawingml/2006/main" w="0">
+            <a:noFill/>
+            <a:prstDash val="solid"/>
+          </a:ln>
+        </p:spPr>
+      </p:sp>
+      <p:pic>
+        <p:nvPicPr>
+          <p:cNvPr id="10" name=""/>
+          <p:cNvPicPr>
+            <a:picLocks xmlns:a="http://schemas.openxmlformats.org/drawingml/2006/main" noChangeAspect="1"/>
+          </p:cNvPicPr>
+          <p:nvPr/>
+        </p:nvPicPr>
+        <p:blipFill>
+          <a:blip xmlns:r="http://schemas.openxmlformats.org/officeDocument/2006/relationships" xmlns:a="http://schemas.openxmlformats.org/drawingml/2006/main" r:embed="R355e000301f74d3c"/>
+          <a:stretch xmlns:a="http://schemas.openxmlformats.org/drawingml/2006/main"/>
+        </p:blipFill>
+        <p:spPr>
+          <a:xfrm xmlns:a="http://schemas.openxmlformats.org/drawingml/2006/main">
+            <a:off x="806824" y="2000250"/>
+            <a:ext cx="6958853" cy="3943350"/>
+          </a:xfrm>
+          <a:prstGeom xmlns:a="http://schemas.openxmlformats.org/drawingml/2006/main" prst="rect">
+            <a:avLst/>
+          </a:prstGeom>
+        </p:spPr>
+      </p:pic>
+      <p:sp>
+        <p:nvSpPr>
+          <p:cNvPr id="5" name="">
+            <a:extLst xmlns:a="http://schemas.openxmlformats.org/drawingml/2006/main">
+              <a:ext uri="{FF2B5EF4-FFF2-40B4-BE49-F238E27FC236}">
+                <a16:creationId xmlns:a16="http://schemas.microsoft.com/office/drawing/2014/main" id="{A6E6FC54-2DFD-4192-8B97-6C0A5A8094E8}"/>
+              </a:ext>
+            </a:extLst>
+          </p:cNvPr>
+          <p:cNvSpPr>
+            <a:spLocks xmlns:a="http://schemas.openxmlformats.org/drawingml/2006/main" noGrp="1"/>
+          </p:cNvSpPr>
+          <p:nvPr/>
+        </p:nvSpPr>
+        <p:spPr>
+          <a:xfrm xmlns:a="http://schemas.openxmlformats.org/drawingml/2006/main">
+            <a:off x="8477250" y="2133600"/>
+            <a:ext cx="2571750" cy="304800"/>
+          </a:xfrm>
+          <a:prstGeom xmlns:a="http://schemas.openxmlformats.org/drawingml/2006/main" prst="rect">
+            <a:avLst/>
+          </a:prstGeom>
+          <a:noFill xmlns:a="http://schemas.openxmlformats.org/drawingml/2006/main"/>
+          <a:ln xmlns:a="http://schemas.openxmlformats.org/drawingml/2006/main" w="0">
+            <a:noFill/>
+            <a:prstDash val="solid"/>
+          </a:ln>
+        </p:spPr>
+        <p:txBody>
+          <a:bodyPr xmlns:a="http://schemas.openxmlformats.org/drawingml/2006/main"/>
+          <a:lstStyle xmlns:a="http://schemas.openxmlformats.org/drawingml/2006/main"/>
+          <a:p xmlns:a="http://schemas.openxmlformats.org/drawingml/2006/main">
+            <a:pPr algn="l">
+              <a:defRPr sz="1950" b="1" i="0">
+                <a:solidFill>
+                  <a:srgbClr val="222222"/>
+                </a:solidFill>
+              </a:defRPr>
+            </a:pPr>
+            <a:r>
+              <a:rPr sz="1950" b="1" i="0">
+                <a:solidFill>
+                  <a:srgbClr val="222222"/>
+                </a:solidFill>
+              </a:rPr>
+              <a:t>What changed</a:t>
+            </a:r>
+          </a:p>
+        </p:txBody>
+      </p:sp>
+      <p:sp>
+        <p:nvSpPr>
+          <p:cNvPr id="6" name="">
+            <a:extLst xmlns:a="http://schemas.openxmlformats.org/drawingml/2006/main">
+              <a:ext uri="{FF2B5EF4-FFF2-40B4-BE49-F238E27FC236}">
+                <a16:creationId xmlns:a16="http://schemas.microsoft.com/office/drawing/2014/main" id="{B07B14A5-646B-4164-B368-36E9F8EA8AB0}"/>
+              </a:ext>
+            </a:extLst>
+          </p:cNvPr>
+          <p:cNvSpPr>
+            <a:spLocks xmlns:a="http://schemas.openxmlformats.org/drawingml/2006/main" noGrp="1"/>
+          </p:cNvSpPr>
+          <p:nvPr/>
+        </p:nvSpPr>
+        <p:spPr>
+          <a:xfrm xmlns:a="http://schemas.openxmlformats.org/drawingml/2006/main">
+            <a:off x="8477250" y="2705100"/>
+            <a:ext cx="2705100" cy="2381250"/>
+          </a:xfrm>
+          <a:prstGeom xmlns:a="http://schemas.openxmlformats.org/drawingml/2006/main" prst="rect">
+            <a:avLst/>
+          </a:prstGeom>
+          <a:noFill xmlns:a="http://schemas.openxmlformats.org/drawingml/2006/main"/>
+          <a:ln xmlns:a="http://schemas.openxmlformats.org/drawingml/2006/main" w="0">
+            <a:noFill/>
+            <a:prstDash val="solid"/>
+          </a:ln>
+        </p:spPr>
+        <p:txBody>
+          <a:bodyPr xmlns:a="http://schemas.openxmlformats.org/drawingml/2006/main"/>
+          <a:lstStyle xmlns:a="http://schemas.openxmlformats.org/drawingml/2006/main"/>
+          <a:p xmlns:a="http://schemas.openxmlformats.org/drawingml/2006/main">
+            <a:pPr algn="l">
+              <a:defRPr sz="1650" b="0" i="0">
+                <a:solidFill>
+                  <a:srgbClr val="222222"/>
+                </a:solidFill>
+              </a:defRPr>
+            </a:pPr>
+            <a:r>
+              <a:rPr sz="1650" b="0" i="0">
+                <a:solidFill>
+                  <a:srgbClr val="222222"/>
+                </a:solidFill>
+              </a:rPr>
+              <a:t>Direct market context returned 49.3% in 2020, and full compact returned 51.9%. Both lagged relative strength at 108.9%. In 2022, asset-only was the best defender at -33.2%.</a:t>
+            </a:r>
+          </a:p>
+        </p:txBody>
+      </p:sp>
+    </p:spTree>
+    <p:extLst>
+      <p:ext uri="{BB962C8B-B14F-4D97-AF65-F5344CB8AC3E}">
+        <p14:creationId xmlns:p14="http://schemas.microsoft.com/office/powerpoint/2010/main" val="314533298"/>
+      </p:ext>
+    </p:extLst>
+  </p:cSld>
+</p:sld>
+</file>
+
+<file path=ppt/slides/slide49.xml><?xml version="1.0" encoding="utf-8"?>
+<p:sld xmlns:p="http://schemas.openxmlformats.org/presentationml/2006/main">
+  <p:cSld>
+    <p:bg>
+      <p:bgPr>
+        <a:solidFill xmlns:a="http://schemas.openxmlformats.org/drawingml/2006/main">
+          <a:srgbClr val="FFFFFF"/>
+        </a:solidFill>
+      </p:bgPr>
+    </p:bg>
+    <p:spTree>
+      <p:nvGrpSpPr>
+        <p:cNvPr id="1" name=""/>
+        <p:cNvGrpSpPr/>
+        <p:nvPr/>
+      </p:nvGrpSpPr>
+      <p:grpSpPr>
+        <a:xfrm xmlns:a="http://schemas.openxmlformats.org/drawingml/2006/main"/>
+      </p:grpSpPr>
+      <p:sp>
+        <p:nvSpPr>
+          <p:cNvPr id="1" name="">
+            <a:extLst xmlns:a="http://schemas.openxmlformats.org/drawingml/2006/main">
+              <a:ext uri="{FF2B5EF4-FFF2-40B4-BE49-F238E27FC236}">
+                <a16:creationId xmlns:a16="http://schemas.microsoft.com/office/drawing/2014/main" id="{1695CC9C-4A5A-4BDC-8001-C1085DBA17EC}"/>
+              </a:ext>
+            </a:extLst>
+          </p:cNvPr>
+          <p:cNvSpPr>
+            <a:spLocks xmlns:a="http://schemas.openxmlformats.org/drawingml/2006/main" noGrp="1"/>
+          </p:cNvSpPr>
+          <p:nvPr/>
+        </p:nvSpPr>
+        <p:spPr>
+          <a:xfrm xmlns:a="http://schemas.openxmlformats.org/drawingml/2006/main">
+            <a:off x="685800" y="400050"/>
+            <a:ext cx="8572500" cy="247650"/>
+          </a:xfrm>
+          <a:prstGeom xmlns:a="http://schemas.openxmlformats.org/drawingml/2006/main" prst="rect">
+            <a:avLst/>
+          </a:prstGeom>
+          <a:noFill xmlns:a="http://schemas.openxmlformats.org/drawingml/2006/main"/>
+          <a:ln xmlns:a="http://schemas.openxmlformats.org/drawingml/2006/main" w="0">
+            <a:noFill/>
+            <a:prstDash val="solid"/>
+          </a:ln>
+        </p:spPr>
+        <p:txBody>
+          <a:bodyPr xmlns:a="http://schemas.openxmlformats.org/drawingml/2006/main"/>
+          <a:lstStyle xmlns:a="http://schemas.openxmlformats.org/drawingml/2006/main"/>
+          <a:p xmlns:a="http://schemas.openxmlformats.org/drawingml/2006/main">
+            <a:pPr algn="l">
+              <a:defRPr sz="975" b="1" i="0">
+                <a:solidFill>
+                  <a:srgbClr val="555555"/>
+                </a:solidFill>
+              </a:defRPr>
+            </a:pPr>
+            <a:r>
+              <a:rPr sz="975" b="1" i="0">
+                <a:solidFill>
+                  <a:srgbClr val="555555"/>
+                </a:solidFill>
+              </a:rPr>
+              <a:t>GEN5.4 ML DECISION ENGINE</a:t>
+            </a:r>
+          </a:p>
+        </p:txBody>
+      </p:sp>
+      <p:sp>
+        <p:nvSpPr>
+          <p:cNvPr id="2" name="">
+            <a:extLst xmlns:a="http://schemas.openxmlformats.org/drawingml/2006/main">
+              <a:ext uri="{FF2B5EF4-FFF2-40B4-BE49-F238E27FC236}">
+                <a16:creationId xmlns:a16="http://schemas.microsoft.com/office/drawing/2014/main" id="{4D0020A9-ABB5-455F-8411-C4D096C29798}"/>
+              </a:ext>
+            </a:extLst>
+          </p:cNvPr>
+          <p:cNvSpPr>
+            <a:spLocks xmlns:a="http://schemas.openxmlformats.org/drawingml/2006/main" noGrp="1"/>
+          </p:cNvSpPr>
+          <p:nvPr/>
+        </p:nvSpPr>
+        <p:spPr>
+          <a:xfrm xmlns:a="http://schemas.openxmlformats.org/drawingml/2006/main">
+            <a:off x="685800" y="723900"/>
+            <a:ext cx="10287000" cy="876300"/>
+          </a:xfrm>
+          <a:prstGeom xmlns:a="http://schemas.openxmlformats.org/drawingml/2006/main" prst="rect">
+            <a:avLst/>
+          </a:prstGeom>
+          <a:noFill xmlns:a="http://schemas.openxmlformats.org/drawingml/2006/main"/>
+          <a:ln xmlns:a="http://schemas.openxmlformats.org/drawingml/2006/main" w="0">
+            <a:noFill/>
+            <a:prstDash val="solid"/>
+          </a:ln>
+        </p:spPr>
+        <p:txBody>
+          <a:bodyPr xmlns:a="http://schemas.openxmlformats.org/drawingml/2006/main"/>
+          <a:lstStyle xmlns:a="http://schemas.openxmlformats.org/drawingml/2006/main"/>
+          <a:p xmlns:a="http://schemas.openxmlformats.org/drawingml/2006/main">
+            <a:pPr algn="l">
+              <a:defRPr sz="2850" b="1" i="0">
+                <a:solidFill>
+                  <a:srgbClr val="000000"/>
+                </a:solidFill>
+              </a:defRPr>
+            </a:pPr>
+            <a:r>
+              <a:rPr sz="2850" b="1" i="0">
+                <a:solidFill>
+                  <a:srgbClr val="000000"/>
+                </a:solidFill>
+              </a:rPr>
+              <a:t>Ranking improved a little in 2020, but replay did not follow</a:t>
+            </a:r>
+          </a:p>
+        </p:txBody>
+      </p:sp>
+      <p:sp>
+        <p:nvSpPr>
+          <p:cNvPr id="3" name="">
+            <a:extLst xmlns:a="http://schemas.openxmlformats.org/drawingml/2006/main">
+              <a:ext uri="{FF2B5EF4-FFF2-40B4-BE49-F238E27FC236}">
+                <a16:creationId xmlns:a16="http://schemas.microsoft.com/office/drawing/2014/main" id="{E0590454-B41C-4C2B-A2C9-7B7A80D48ABF}"/>
+              </a:ext>
+            </a:extLst>
+          </p:cNvPr>
+          <p:cNvSpPr>
+            <a:spLocks xmlns:a="http://schemas.openxmlformats.org/drawingml/2006/main" noGrp="1"/>
+          </p:cNvSpPr>
+          <p:nvPr/>
+        </p:nvSpPr>
+        <p:spPr>
+          <a:xfrm xmlns:a="http://schemas.openxmlformats.org/drawingml/2006/main">
+            <a:off x="685800" y="1657350"/>
+            <a:ext cx="10820400" cy="19050"/>
+          </a:xfrm>
+          <a:prstGeom xmlns:a="http://schemas.openxmlformats.org/drawingml/2006/main" prst="rect">
+            <a:avLst/>
+          </a:prstGeom>
+          <a:solidFill xmlns:a="http://schemas.openxmlformats.org/drawingml/2006/main">
+            <a:srgbClr val="B8BCC4"/>
+          </a:solidFill>
+          <a:ln xmlns:a="http://schemas.openxmlformats.org/drawingml/2006/main" w="0">
+            <a:noFill/>
+            <a:prstDash val="solid"/>
+          </a:ln>
+        </p:spPr>
+      </p:sp>
+      <p:pic>
+        <p:nvPicPr>
+          <p:cNvPr id="10" name=""/>
+          <p:cNvPicPr>
+            <a:picLocks xmlns:a="http://schemas.openxmlformats.org/drawingml/2006/main" noChangeAspect="1"/>
+          </p:cNvPicPr>
+          <p:nvPr/>
+        </p:nvPicPr>
+        <p:blipFill>
+          <a:blip xmlns:r="http://schemas.openxmlformats.org/officeDocument/2006/relationships" xmlns:a="http://schemas.openxmlformats.org/drawingml/2006/main" r:embed="R8b5faa4a0d7b42eb"/>
+          <a:stretch xmlns:a="http://schemas.openxmlformats.org/drawingml/2006/main"/>
+        </p:blipFill>
+        <p:spPr>
+          <a:xfrm xmlns:a="http://schemas.openxmlformats.org/drawingml/2006/main">
+            <a:off x="704850" y="2119993"/>
+            <a:ext cx="5715000" cy="3265714"/>
+          </a:xfrm>
+          <a:prstGeom xmlns:a="http://schemas.openxmlformats.org/drawingml/2006/main" prst="rect">
+            <a:avLst/>
+          </a:prstGeom>
+        </p:spPr>
+      </p:pic>
+      <p:sp>
+        <p:nvSpPr>
+          <p:cNvPr id="5" name="">
+            <a:extLst xmlns:a="http://schemas.openxmlformats.org/drawingml/2006/main">
+              <a:ext uri="{FF2B5EF4-FFF2-40B4-BE49-F238E27FC236}">
+                <a16:creationId xmlns:a16="http://schemas.microsoft.com/office/drawing/2014/main" id="{BBDAAF10-2CD0-439E-855E-E7C3BAAB5C24}"/>
+              </a:ext>
+            </a:extLst>
+          </p:cNvPr>
+          <p:cNvSpPr>
+            <a:spLocks xmlns:a="http://schemas.openxmlformats.org/drawingml/2006/main" noGrp="1"/>
+          </p:cNvSpPr>
+          <p:nvPr/>
+        </p:nvSpPr>
+        <p:spPr>
+          <a:xfrm xmlns:a="http://schemas.openxmlformats.org/drawingml/2006/main">
+            <a:off x="7105650" y="2133600"/>
+            <a:ext cx="2857500" cy="323850"/>
+          </a:xfrm>
+          <a:prstGeom xmlns:a="http://schemas.openxmlformats.org/drawingml/2006/main" prst="rect">
+            <a:avLst/>
+          </a:prstGeom>
+          <a:noFill xmlns:a="http://schemas.openxmlformats.org/drawingml/2006/main"/>
+          <a:ln xmlns:a="http://schemas.openxmlformats.org/drawingml/2006/main" w="0">
+            <a:noFill/>
+            <a:prstDash val="solid"/>
+          </a:ln>
+        </p:spPr>
+        <p:txBody>
+          <a:bodyPr xmlns:a="http://schemas.openxmlformats.org/drawingml/2006/main"/>
+          <a:lstStyle xmlns:a="http://schemas.openxmlformats.org/drawingml/2006/main"/>
+          <a:p xmlns:a="http://schemas.openxmlformats.org/drawingml/2006/main">
+            <a:pPr algn="l">
+              <a:defRPr sz="1950" b="1" i="0">
+                <a:solidFill>
+                  <a:srgbClr val="222222"/>
+                </a:solidFill>
+              </a:defRPr>
+            </a:pPr>
+            <a:r>
+              <a:rPr sz="1950" b="1" i="0">
+                <a:solidFill>
+                  <a:srgbClr val="222222"/>
+                </a:solidFill>
+              </a:rPr>
+              <a:t>Readout</a:t>
+            </a:r>
+          </a:p>
+        </p:txBody>
+      </p:sp>
+      <p:sp>
+        <p:nvSpPr>
+          <p:cNvPr id="6" name="">
+            <a:extLst xmlns:a="http://schemas.openxmlformats.org/drawingml/2006/main">
+              <a:ext uri="{FF2B5EF4-FFF2-40B4-BE49-F238E27FC236}">
+                <a16:creationId xmlns:a16="http://schemas.microsoft.com/office/drawing/2014/main" id="{C35C9DD5-2332-4DF1-B233-67B651B9710B}"/>
+              </a:ext>
+            </a:extLst>
+          </p:cNvPr>
+          <p:cNvSpPr>
+            <a:spLocks xmlns:a="http://schemas.openxmlformats.org/drawingml/2006/main" noGrp="1"/>
+          </p:cNvSpPr>
+          <p:nvPr/>
+        </p:nvSpPr>
+        <p:spPr>
+          <a:xfrm xmlns:a="http://schemas.openxmlformats.org/drawingml/2006/main">
+            <a:off x="7105650" y="2743200"/>
+            <a:ext cx="3333750" cy="2190750"/>
+          </a:xfrm>
+          <a:prstGeom xmlns:a="http://schemas.openxmlformats.org/drawingml/2006/main" prst="rect">
+            <a:avLst/>
+          </a:prstGeom>
+          <a:noFill xmlns:a="http://schemas.openxmlformats.org/drawingml/2006/main"/>
+          <a:ln xmlns:a="http://schemas.openxmlformats.org/drawingml/2006/main" w="0">
+            <a:noFill/>
+            <a:prstDash val="solid"/>
+          </a:ln>
+        </p:spPr>
+        <p:txBody>
+          <a:bodyPr xmlns:a="http://schemas.openxmlformats.org/drawingml/2006/main"/>
+          <a:lstStyle xmlns:a="http://schemas.openxmlformats.org/drawingml/2006/main"/>
+          <a:p xmlns:a="http://schemas.openxmlformats.org/drawingml/2006/main">
+            <a:pPr algn="l">
+              <a:defRPr sz="1650" b="0" i="0">
+                <a:solidFill>
+                  <a:srgbClr val="222222"/>
+                </a:solidFill>
+              </a:defRPr>
+            </a:pPr>
+            <a:r>
+              <a:rPr sz="1650" b="0" i="0">
+                <a:solidFill>
+                  <a:srgbClr val="222222"/>
+                </a:solidFill>
+              </a:rPr>
+              <a:t>The best 2020 AUC was 0.530 from full context compact. But 2022 AUC stayed below 0.50 for all sets, and top-minus-bottom separation remained negative in 2022.</a:t>
+            </a:r>
+          </a:p>
+        </p:txBody>
+      </p:sp>
+    </p:spTree>
+    <p:extLst>
+      <p:ext uri="{BB962C8B-B14F-4D97-AF65-F5344CB8AC3E}">
+        <p14:creationId xmlns:p14="http://schemas.microsoft.com/office/powerpoint/2010/main" val="1100678453"/>
       </p:ext>
     </p:extLst>
   </p:cSld>
@@ -23235,7 +26493,7 @@
           <p:cNvPr id="1" name="">
             <a:extLst xmlns:a="http://schemas.openxmlformats.org/drawingml/2006/main">
               <a:ext uri="{FF2B5EF4-FFF2-40B4-BE49-F238E27FC236}">
-                <a16:creationId xmlns:a16="http://schemas.microsoft.com/office/drawing/2014/main" id="{6B8230F1-10F4-430C-87F5-BFC67A8EE056}"/>
+                <a16:creationId xmlns:a16="http://schemas.microsoft.com/office/drawing/2014/main" id="{DCD77CB2-AD94-4BFF-857A-75D69745E86D}"/>
               </a:ext>
             </a:extLst>
           </p:cNvPr>
@@ -23285,7 +26543,7 @@
           <p:cNvPr id="2" name="">
             <a:extLst xmlns:a="http://schemas.openxmlformats.org/drawingml/2006/main">
               <a:ext uri="{FF2B5EF4-FFF2-40B4-BE49-F238E27FC236}">
-                <a16:creationId xmlns:a16="http://schemas.microsoft.com/office/drawing/2014/main" id="{AC5E0CEE-0EB1-4AB1-A534-8F4C73EB7161}"/>
+                <a16:creationId xmlns:a16="http://schemas.microsoft.com/office/drawing/2014/main" id="{9D9BA919-642A-47FE-B389-5BF9332A023E}"/>
               </a:ext>
             </a:extLst>
           </p:cNvPr>
@@ -23335,7 +26593,7 @@
           <p:cNvPr id="3" name="">
             <a:extLst xmlns:a="http://schemas.openxmlformats.org/drawingml/2006/main">
               <a:ext uri="{FF2B5EF4-FFF2-40B4-BE49-F238E27FC236}">
-                <a16:creationId xmlns:a16="http://schemas.microsoft.com/office/drawing/2014/main" id="{8028B47E-3B23-4666-ABC6-DF85FE76B55D}"/>
+                <a16:creationId xmlns:a16="http://schemas.microsoft.com/office/drawing/2014/main" id="{47605D45-9C81-450A-BA38-671C9B8DBE73}"/>
               </a:ext>
             </a:extLst>
           </p:cNvPr>
@@ -23370,7 +26628,7 @@
           <p:nvPr/>
         </p:nvPicPr>
         <p:blipFill>
-          <a:blip xmlns:r="http://schemas.openxmlformats.org/officeDocument/2006/relationships" xmlns:a="http://schemas.openxmlformats.org/drawingml/2006/main" r:embed="Rbe623fb0054b4f1a"/>
+          <a:blip xmlns:r="http://schemas.openxmlformats.org/officeDocument/2006/relationships" xmlns:a="http://schemas.openxmlformats.org/drawingml/2006/main" r:embed="R835fad294cf74209"/>
           <a:stretch xmlns:a="http://schemas.openxmlformats.org/drawingml/2006/main"/>
         </p:blipFill>
         <p:spPr>
@@ -23388,7 +26646,7 @@
           <p:cNvPr id="5" name="">
             <a:extLst xmlns:a="http://schemas.openxmlformats.org/drawingml/2006/main">
               <a:ext uri="{FF2B5EF4-FFF2-40B4-BE49-F238E27FC236}">
-                <a16:creationId xmlns:a16="http://schemas.microsoft.com/office/drawing/2014/main" id="{5B3BD13B-B94C-4E48-A22C-5FF203D54184}"/>
+                <a16:creationId xmlns:a16="http://schemas.microsoft.com/office/drawing/2014/main" id="{98174AAD-DE5F-46CB-AF5E-563A16244ED6}"/>
               </a:ext>
             </a:extLst>
           </p:cNvPr>
@@ -23438,7 +26696,7 @@
           <p:cNvPr id="6" name="">
             <a:extLst xmlns:a="http://schemas.openxmlformats.org/drawingml/2006/main">
               <a:ext uri="{FF2B5EF4-FFF2-40B4-BE49-F238E27FC236}">
-                <a16:creationId xmlns:a16="http://schemas.microsoft.com/office/drawing/2014/main" id="{BD50FDA9-2531-49C0-AF63-F1F20DB44181}"/>
+                <a16:creationId xmlns:a16="http://schemas.microsoft.com/office/drawing/2014/main" id="{0AF67B6D-3E0B-4722-A483-C98D863942F9}"/>
               </a:ext>
             </a:extLst>
           </p:cNvPr>
@@ -23488,7 +26746,7 @@
           <p:cNvPr id="7" name="">
             <a:extLst xmlns:a="http://schemas.openxmlformats.org/drawingml/2006/main">
               <a:ext uri="{FF2B5EF4-FFF2-40B4-BE49-F238E27FC236}">
-                <a16:creationId xmlns:a16="http://schemas.microsoft.com/office/drawing/2014/main" id="{1118BD3F-A287-446D-A23E-A06017C6D063}"/>
+                <a16:creationId xmlns:a16="http://schemas.microsoft.com/office/drawing/2014/main" id="{CFC1E4FE-92EC-449F-9A71-446E37362BBA}"/>
               </a:ext>
             </a:extLst>
           </p:cNvPr>
@@ -23538,7 +26796,7 @@
           <p:cNvPr id="8" name="">
             <a:extLst xmlns:a="http://schemas.openxmlformats.org/drawingml/2006/main">
               <a:ext uri="{FF2B5EF4-FFF2-40B4-BE49-F238E27FC236}">
-                <a16:creationId xmlns:a16="http://schemas.microsoft.com/office/drawing/2014/main" id="{EB1CED3C-B243-4128-8DA4-F39193489558}"/>
+                <a16:creationId xmlns:a16="http://schemas.microsoft.com/office/drawing/2014/main" id="{58FCC655-A606-42AE-911F-178F42940444}"/>
               </a:ext>
             </a:extLst>
           </p:cNvPr>
@@ -23588,7 +26846,7 @@
           <p:cNvPr id="9" name="">
             <a:extLst xmlns:a="http://schemas.openxmlformats.org/drawingml/2006/main">
               <a:ext uri="{FF2B5EF4-FFF2-40B4-BE49-F238E27FC236}">
-                <a16:creationId xmlns:a16="http://schemas.microsoft.com/office/drawing/2014/main" id="{BFFB5CCC-6A25-4E32-841A-82BF21F616EC}"/>
+                <a16:creationId xmlns:a16="http://schemas.microsoft.com/office/drawing/2014/main" id="{84F63483-69BF-46EC-8A58-886612A7B5B8}"/>
               </a:ext>
             </a:extLst>
           </p:cNvPr>
@@ -23636,7 +26894,899 @@
     </p:spTree>
     <p:extLst>
       <p:ext uri="{BB962C8B-B14F-4D97-AF65-F5344CB8AC3E}">
-        <p14:creationId xmlns:p14="http://schemas.microsoft.com/office/powerpoint/2010/main" val="911779749"/>
+        <p14:creationId xmlns:p14="http://schemas.microsoft.com/office/powerpoint/2010/main" val="1778690547"/>
+      </p:ext>
+    </p:extLst>
+  </p:cSld>
+</p:sld>
+</file>
+
+<file path=ppt/slides/slide50.xml><?xml version="1.0" encoding="utf-8"?>
+<p:sld xmlns:p="http://schemas.openxmlformats.org/presentationml/2006/main">
+  <p:cSld>
+    <p:bg>
+      <p:bgPr>
+        <a:solidFill xmlns:a="http://schemas.openxmlformats.org/drawingml/2006/main">
+          <a:srgbClr val="FFFFFF"/>
+        </a:solidFill>
+      </p:bgPr>
+    </p:bg>
+    <p:spTree>
+      <p:nvGrpSpPr>
+        <p:cNvPr id="1" name=""/>
+        <p:cNvGrpSpPr/>
+        <p:nvPr/>
+      </p:nvGrpSpPr>
+      <p:grpSpPr>
+        <a:xfrm xmlns:a="http://schemas.openxmlformats.org/drawingml/2006/main"/>
+      </p:grpSpPr>
+      <p:sp>
+        <p:nvSpPr>
+          <p:cNvPr id="1" name="">
+            <a:extLst xmlns:a="http://schemas.openxmlformats.org/drawingml/2006/main">
+              <a:ext uri="{FF2B5EF4-FFF2-40B4-BE49-F238E27FC236}">
+                <a16:creationId xmlns:a16="http://schemas.microsoft.com/office/drawing/2014/main" id="{4F1A79DE-8C6E-4A26-9B06-709AE4FFD4A4}"/>
+              </a:ext>
+            </a:extLst>
+          </p:cNvPr>
+          <p:cNvSpPr>
+            <a:spLocks xmlns:a="http://schemas.openxmlformats.org/drawingml/2006/main" noGrp="1"/>
+          </p:cNvSpPr>
+          <p:nvPr/>
+        </p:nvSpPr>
+        <p:spPr>
+          <a:xfrm xmlns:a="http://schemas.openxmlformats.org/drawingml/2006/main">
+            <a:off x="685800" y="400050"/>
+            <a:ext cx="8572500" cy="247650"/>
+          </a:xfrm>
+          <a:prstGeom xmlns:a="http://schemas.openxmlformats.org/drawingml/2006/main" prst="rect">
+            <a:avLst/>
+          </a:prstGeom>
+          <a:noFill xmlns:a="http://schemas.openxmlformats.org/drawingml/2006/main"/>
+          <a:ln xmlns:a="http://schemas.openxmlformats.org/drawingml/2006/main" w="0">
+            <a:noFill/>
+            <a:prstDash val="solid"/>
+          </a:ln>
+        </p:spPr>
+        <p:txBody>
+          <a:bodyPr xmlns:a="http://schemas.openxmlformats.org/drawingml/2006/main"/>
+          <a:lstStyle xmlns:a="http://schemas.openxmlformats.org/drawingml/2006/main"/>
+          <a:p xmlns:a="http://schemas.openxmlformats.org/drawingml/2006/main">
+            <a:pPr algn="l">
+              <a:defRPr sz="975" b="1" i="0">
+                <a:solidFill>
+                  <a:srgbClr val="555555"/>
+                </a:solidFill>
+              </a:defRPr>
+            </a:pPr>
+            <a:r>
+              <a:rPr sz="975" b="1" i="0">
+                <a:solidFill>
+                  <a:srgbClr val="555555"/>
+                </a:solidFill>
+              </a:rPr>
+              <a:t>GEN5.4 ML DECISION ENGINE</a:t>
+            </a:r>
+          </a:p>
+        </p:txBody>
+      </p:sp>
+      <p:sp>
+        <p:nvSpPr>
+          <p:cNvPr id="2" name="">
+            <a:extLst xmlns:a="http://schemas.openxmlformats.org/drawingml/2006/main">
+              <a:ext uri="{FF2B5EF4-FFF2-40B4-BE49-F238E27FC236}">
+                <a16:creationId xmlns:a16="http://schemas.microsoft.com/office/drawing/2014/main" id="{D041C90C-EF67-41BC-BDC6-600A31A7DE24}"/>
+              </a:ext>
+            </a:extLst>
+          </p:cNvPr>
+          <p:cNvSpPr>
+            <a:spLocks xmlns:a="http://schemas.openxmlformats.org/drawingml/2006/main" noGrp="1"/>
+          </p:cNvSpPr>
+          <p:nvPr/>
+        </p:nvSpPr>
+        <p:spPr>
+          <a:xfrm xmlns:a="http://schemas.openxmlformats.org/drawingml/2006/main">
+            <a:off x="685800" y="723900"/>
+            <a:ext cx="10287000" cy="876300"/>
+          </a:xfrm>
+          <a:prstGeom xmlns:a="http://schemas.openxmlformats.org/drawingml/2006/main" prst="rect">
+            <a:avLst/>
+          </a:prstGeom>
+          <a:noFill xmlns:a="http://schemas.openxmlformats.org/drawingml/2006/main"/>
+          <a:ln xmlns:a="http://schemas.openxmlformats.org/drawingml/2006/main" w="0">
+            <a:noFill/>
+            <a:prstDash val="solid"/>
+          </a:ln>
+        </p:spPr>
+        <p:txBody>
+          <a:bodyPr xmlns:a="http://schemas.openxmlformats.org/drawingml/2006/main"/>
+          <a:lstStyle xmlns:a="http://schemas.openxmlformats.org/drawingml/2006/main"/>
+          <a:p xmlns:a="http://schemas.openxmlformats.org/drawingml/2006/main">
+            <a:pPr algn="l">
+              <a:defRPr sz="2850" b="1" i="0">
+                <a:solidFill>
+                  <a:srgbClr val="000000"/>
+                </a:solidFill>
+              </a:defRPr>
+            </a:pPr>
+            <a:r>
+              <a:rPr sz="2850" b="1" i="0">
+                <a:solidFill>
+                  <a:srgbClr val="000000"/>
+                </a:solidFill>
+              </a:rPr>
+              <a:t>Probability tapes remain the human sanity check</a:t>
+            </a:r>
+          </a:p>
+        </p:txBody>
+      </p:sp>
+      <p:sp>
+        <p:nvSpPr>
+          <p:cNvPr id="3" name="">
+            <a:extLst xmlns:a="http://schemas.openxmlformats.org/drawingml/2006/main">
+              <a:ext uri="{FF2B5EF4-FFF2-40B4-BE49-F238E27FC236}">
+                <a16:creationId xmlns:a16="http://schemas.microsoft.com/office/drawing/2014/main" id="{9BF166CE-FC88-41E3-B27F-C850ED073B7F}"/>
+              </a:ext>
+            </a:extLst>
+          </p:cNvPr>
+          <p:cNvSpPr>
+            <a:spLocks xmlns:a="http://schemas.openxmlformats.org/drawingml/2006/main" noGrp="1"/>
+          </p:cNvSpPr>
+          <p:nvPr/>
+        </p:nvSpPr>
+        <p:spPr>
+          <a:xfrm xmlns:a="http://schemas.openxmlformats.org/drawingml/2006/main">
+            <a:off x="685800" y="1657350"/>
+            <a:ext cx="10820400" cy="19050"/>
+          </a:xfrm>
+          <a:prstGeom xmlns:a="http://schemas.openxmlformats.org/drawingml/2006/main" prst="rect">
+            <a:avLst/>
+          </a:prstGeom>
+          <a:solidFill xmlns:a="http://schemas.openxmlformats.org/drawingml/2006/main">
+            <a:srgbClr val="B8BCC4"/>
+          </a:solidFill>
+          <a:ln xmlns:a="http://schemas.openxmlformats.org/drawingml/2006/main" w="0">
+            <a:noFill/>
+            <a:prstDash val="solid"/>
+          </a:ln>
+        </p:spPr>
+      </p:sp>
+      <p:pic>
+        <p:nvPicPr>
+          <p:cNvPr id="10" name=""/>
+          <p:cNvPicPr>
+            <a:picLocks xmlns:a="http://schemas.openxmlformats.org/drawingml/2006/main" noChangeAspect="1"/>
+          </p:cNvPicPr>
+          <p:nvPr/>
+        </p:nvPicPr>
+        <p:blipFill>
+          <a:blip xmlns:r="http://schemas.openxmlformats.org/officeDocument/2006/relationships" xmlns:a="http://schemas.openxmlformats.org/drawingml/2006/main" r:embed="R1352b98b1dbf4f72"/>
+          <a:stretch xmlns:a="http://schemas.openxmlformats.org/drawingml/2006/main"/>
+        </p:blipFill>
+        <p:spPr>
+          <a:xfrm xmlns:a="http://schemas.openxmlformats.org/drawingml/2006/main">
+            <a:off x="1000125" y="2000250"/>
+            <a:ext cx="6572250" cy="3943350"/>
+          </a:xfrm>
+          <a:prstGeom xmlns:a="http://schemas.openxmlformats.org/drawingml/2006/main" prst="rect">
+            <a:avLst/>
+          </a:prstGeom>
+        </p:spPr>
+      </p:pic>
+      <p:sp>
+        <p:nvSpPr>
+          <p:cNvPr id="5" name="">
+            <a:extLst xmlns:a="http://schemas.openxmlformats.org/drawingml/2006/main">
+              <a:ext uri="{FF2B5EF4-FFF2-40B4-BE49-F238E27FC236}">
+                <a16:creationId xmlns:a16="http://schemas.microsoft.com/office/drawing/2014/main" id="{9D88E4DD-AFFD-4251-853A-DB8AAC103035}"/>
+              </a:ext>
+            </a:extLst>
+          </p:cNvPr>
+          <p:cNvSpPr>
+            <a:spLocks xmlns:a="http://schemas.openxmlformats.org/drawingml/2006/main" noGrp="1"/>
+          </p:cNvSpPr>
+          <p:nvPr/>
+        </p:nvSpPr>
+        <p:spPr>
+          <a:xfrm xmlns:a="http://schemas.openxmlformats.org/drawingml/2006/main">
+            <a:off x="8477250" y="2133600"/>
+            <a:ext cx="2571750" cy="304800"/>
+          </a:xfrm>
+          <a:prstGeom xmlns:a="http://schemas.openxmlformats.org/drawingml/2006/main" prst="rect">
+            <a:avLst/>
+          </a:prstGeom>
+          <a:noFill xmlns:a="http://schemas.openxmlformats.org/drawingml/2006/main"/>
+          <a:ln xmlns:a="http://schemas.openxmlformats.org/drawingml/2006/main" w="0">
+            <a:noFill/>
+            <a:prstDash val="solid"/>
+          </a:ln>
+        </p:spPr>
+        <p:txBody>
+          <a:bodyPr xmlns:a="http://schemas.openxmlformats.org/drawingml/2006/main"/>
+          <a:lstStyle xmlns:a="http://schemas.openxmlformats.org/drawingml/2006/main"/>
+          <a:p xmlns:a="http://schemas.openxmlformats.org/drawingml/2006/main">
+            <a:pPr algn="l">
+              <a:defRPr sz="1950" b="1" i="0">
+                <a:solidFill>
+                  <a:srgbClr val="222222"/>
+                </a:solidFill>
+              </a:defRPr>
+            </a:pPr>
+            <a:r>
+              <a:rPr sz="1950" b="1" i="0">
+                <a:solidFill>
+                  <a:srgbClr val="222222"/>
+                </a:solidFill>
+              </a:rPr>
+              <a:t>What to inspect</a:t>
+            </a:r>
+          </a:p>
+        </p:txBody>
+      </p:sp>
+      <p:sp>
+        <p:nvSpPr>
+          <p:cNvPr id="6" name="">
+            <a:extLst xmlns:a="http://schemas.openxmlformats.org/drawingml/2006/main">
+              <a:ext uri="{FF2B5EF4-FFF2-40B4-BE49-F238E27FC236}">
+                <a16:creationId xmlns:a16="http://schemas.microsoft.com/office/drawing/2014/main" id="{C56D834F-6208-42A9-9EAC-44C9DF0A80E6}"/>
+              </a:ext>
+            </a:extLst>
+          </p:cNvPr>
+          <p:cNvSpPr>
+            <a:spLocks xmlns:a="http://schemas.openxmlformats.org/drawingml/2006/main" noGrp="1"/>
+          </p:cNvSpPr>
+          <p:nvPr/>
+        </p:nvSpPr>
+        <p:spPr>
+          <a:xfrm xmlns:a="http://schemas.openxmlformats.org/drawingml/2006/main">
+            <a:off x="8477250" y="2705100"/>
+            <a:ext cx="2705100" cy="2286000"/>
+          </a:xfrm>
+          <a:prstGeom xmlns:a="http://schemas.openxmlformats.org/drawingml/2006/main" prst="rect">
+            <a:avLst/>
+          </a:prstGeom>
+          <a:noFill xmlns:a="http://schemas.openxmlformats.org/drawingml/2006/main"/>
+          <a:ln xmlns:a="http://schemas.openxmlformats.org/drawingml/2006/main" w="0">
+            <a:noFill/>
+            <a:prstDash val="solid"/>
+          </a:ln>
+        </p:spPr>
+        <p:txBody>
+          <a:bodyPr xmlns:a="http://schemas.openxmlformats.org/drawingml/2006/main"/>
+          <a:lstStyle xmlns:a="http://schemas.openxmlformats.org/drawingml/2006/main"/>
+          <a:p xmlns:a="http://schemas.openxmlformats.org/drawingml/2006/main">
+            <a:pPr algn="l">
+              <a:defRPr sz="1650" b="0" i="0">
+                <a:solidFill>
+                  <a:srgbClr val="222222"/>
+                </a:solidFill>
+              </a:defRPr>
+            </a:pPr>
+            <a:r>
+              <a:rPr sz="1650" b="0" i="0">
+                <a:solidFill>
+                  <a:srgbClr val="222222"/>
+                </a:solidFill>
+              </a:rPr>
+              <a:t>The tapes show whether a feature set changes entries in market-intuitive places, or merely changes probability texture near the threshold. For now, more context did not automatically mean better trade behavior.</a:t>
+            </a:r>
+          </a:p>
+        </p:txBody>
+      </p:sp>
+    </p:spTree>
+    <p:extLst>
+      <p:ext uri="{BB962C8B-B14F-4D97-AF65-F5344CB8AC3E}">
+        <p14:creationId xmlns:p14="http://schemas.microsoft.com/office/powerpoint/2010/main" val="757975291"/>
+      </p:ext>
+    </p:extLst>
+  </p:cSld>
+</p:sld>
+</file>
+
+<file path=ppt/slides/slide51.xml><?xml version="1.0" encoding="utf-8"?>
+<p:sld xmlns:p="http://schemas.openxmlformats.org/presentationml/2006/main">
+  <p:cSld>
+    <p:bg>
+      <p:bgPr>
+        <a:solidFill xmlns:a="http://schemas.openxmlformats.org/drawingml/2006/main">
+          <a:srgbClr val="FFFFFF"/>
+        </a:solidFill>
+      </p:bgPr>
+    </p:bg>
+    <p:spTree>
+      <p:nvGrpSpPr>
+        <p:cNvPr id="1" name=""/>
+        <p:cNvGrpSpPr/>
+        <p:nvPr/>
+      </p:nvGrpSpPr>
+      <p:grpSpPr>
+        <a:xfrm xmlns:a="http://schemas.openxmlformats.org/drawingml/2006/main"/>
+      </p:grpSpPr>
+      <p:sp>
+        <p:nvSpPr>
+          <p:cNvPr id="1" name="">
+            <a:extLst xmlns:a="http://schemas.openxmlformats.org/drawingml/2006/main">
+              <a:ext uri="{FF2B5EF4-FFF2-40B4-BE49-F238E27FC236}">
+                <a16:creationId xmlns:a16="http://schemas.microsoft.com/office/drawing/2014/main" id="{19632D08-073B-42B5-950B-D62A1241ECBC}"/>
+              </a:ext>
+            </a:extLst>
+          </p:cNvPr>
+          <p:cNvSpPr>
+            <a:spLocks xmlns:a="http://schemas.openxmlformats.org/drawingml/2006/main" noGrp="1"/>
+          </p:cNvSpPr>
+          <p:nvPr/>
+        </p:nvSpPr>
+        <p:spPr>
+          <a:xfrm xmlns:a="http://schemas.openxmlformats.org/drawingml/2006/main">
+            <a:off x="685800" y="400050"/>
+            <a:ext cx="8572500" cy="247650"/>
+          </a:xfrm>
+          <a:prstGeom xmlns:a="http://schemas.openxmlformats.org/drawingml/2006/main" prst="rect">
+            <a:avLst/>
+          </a:prstGeom>
+          <a:noFill xmlns:a="http://schemas.openxmlformats.org/drawingml/2006/main"/>
+          <a:ln xmlns:a="http://schemas.openxmlformats.org/drawingml/2006/main" w="0">
+            <a:noFill/>
+            <a:prstDash val="solid"/>
+          </a:ln>
+        </p:spPr>
+        <p:txBody>
+          <a:bodyPr xmlns:a="http://schemas.openxmlformats.org/drawingml/2006/main"/>
+          <a:lstStyle xmlns:a="http://schemas.openxmlformats.org/drawingml/2006/main"/>
+          <a:p xmlns:a="http://schemas.openxmlformats.org/drawingml/2006/main">
+            <a:pPr algn="l">
+              <a:defRPr sz="975" b="1" i="0">
+                <a:solidFill>
+                  <a:srgbClr val="555555"/>
+                </a:solidFill>
+              </a:defRPr>
+            </a:pPr>
+            <a:r>
+              <a:rPr sz="975" b="1" i="0">
+                <a:solidFill>
+                  <a:srgbClr val="555555"/>
+                </a:solidFill>
+              </a:rPr>
+              <a:t>GEN5.4 ML DECISION ENGINE</a:t>
+            </a:r>
+          </a:p>
+        </p:txBody>
+      </p:sp>
+      <p:sp>
+        <p:nvSpPr>
+          <p:cNvPr id="2" name="">
+            <a:extLst xmlns:a="http://schemas.openxmlformats.org/drawingml/2006/main">
+              <a:ext uri="{FF2B5EF4-FFF2-40B4-BE49-F238E27FC236}">
+                <a16:creationId xmlns:a16="http://schemas.microsoft.com/office/drawing/2014/main" id="{69D2948E-19BE-4BE7-8F7E-0F2970C23EF8}"/>
+              </a:ext>
+            </a:extLst>
+          </p:cNvPr>
+          <p:cNvSpPr>
+            <a:spLocks xmlns:a="http://schemas.openxmlformats.org/drawingml/2006/main" noGrp="1"/>
+          </p:cNvSpPr>
+          <p:nvPr/>
+        </p:nvSpPr>
+        <p:spPr>
+          <a:xfrm xmlns:a="http://schemas.openxmlformats.org/drawingml/2006/main">
+            <a:off x="685800" y="723900"/>
+            <a:ext cx="10287000" cy="876300"/>
+          </a:xfrm>
+          <a:prstGeom xmlns:a="http://schemas.openxmlformats.org/drawingml/2006/main" prst="rect">
+            <a:avLst/>
+          </a:prstGeom>
+          <a:noFill xmlns:a="http://schemas.openxmlformats.org/drawingml/2006/main"/>
+          <a:ln xmlns:a="http://schemas.openxmlformats.org/drawingml/2006/main" w="0">
+            <a:noFill/>
+            <a:prstDash val="solid"/>
+          </a:ln>
+        </p:spPr>
+        <p:txBody>
+          <a:bodyPr xmlns:a="http://schemas.openxmlformats.org/drawingml/2006/main"/>
+          <a:lstStyle xmlns:a="http://schemas.openxmlformats.org/drawingml/2006/main"/>
+          <a:p xmlns:a="http://schemas.openxmlformats.org/drawingml/2006/main">
+            <a:pPr algn="l">
+              <a:defRPr sz="2850" b="1" i="0">
+                <a:solidFill>
+                  <a:srgbClr val="000000"/>
+                </a:solidFill>
+              </a:defRPr>
+            </a:pPr>
+            <a:r>
+              <a:rPr sz="2850" b="1" i="0">
+                <a:solidFill>
+                  <a:srgbClr val="000000"/>
+                </a:solidFill>
+              </a:rPr>
+              <a:t>The next feature slice should be smaller, not wider</a:t>
+            </a:r>
+          </a:p>
+        </p:txBody>
+      </p:sp>
+      <p:sp>
+        <p:nvSpPr>
+          <p:cNvPr id="3" name="">
+            <a:extLst xmlns:a="http://schemas.openxmlformats.org/drawingml/2006/main">
+              <a:ext uri="{FF2B5EF4-FFF2-40B4-BE49-F238E27FC236}">
+                <a16:creationId xmlns:a16="http://schemas.microsoft.com/office/drawing/2014/main" id="{9D475FA1-BFDE-4589-8DF3-7683F74E66E6}"/>
+              </a:ext>
+            </a:extLst>
+          </p:cNvPr>
+          <p:cNvSpPr>
+            <a:spLocks xmlns:a="http://schemas.openxmlformats.org/drawingml/2006/main" noGrp="1"/>
+          </p:cNvSpPr>
+          <p:nvPr/>
+        </p:nvSpPr>
+        <p:spPr>
+          <a:xfrm xmlns:a="http://schemas.openxmlformats.org/drawingml/2006/main">
+            <a:off x="685800" y="1657350"/>
+            <a:ext cx="10820400" cy="19050"/>
+          </a:xfrm>
+          <a:prstGeom xmlns:a="http://schemas.openxmlformats.org/drawingml/2006/main" prst="rect">
+            <a:avLst/>
+          </a:prstGeom>
+          <a:solidFill xmlns:a="http://schemas.openxmlformats.org/drawingml/2006/main">
+            <a:srgbClr val="B8BCC4"/>
+          </a:solidFill>
+          <a:ln xmlns:a="http://schemas.openxmlformats.org/drawingml/2006/main" w="0">
+            <a:noFill/>
+            <a:prstDash val="solid"/>
+          </a:ln>
+        </p:spPr>
+      </p:sp>
+      <p:sp>
+        <p:nvSpPr>
+          <p:cNvPr id="4" name="">
+            <a:extLst xmlns:a="http://schemas.openxmlformats.org/drawingml/2006/main">
+              <a:ext uri="{FF2B5EF4-FFF2-40B4-BE49-F238E27FC236}">
+                <a16:creationId xmlns:a16="http://schemas.microsoft.com/office/drawing/2014/main" id="{CBE127EE-E763-4064-9038-6D29D095CD31}"/>
+              </a:ext>
+            </a:extLst>
+          </p:cNvPr>
+          <p:cNvSpPr>
+            <a:spLocks xmlns:a="http://schemas.openxmlformats.org/drawingml/2006/main" noGrp="1"/>
+          </p:cNvSpPr>
+          <p:nvPr/>
+        </p:nvSpPr>
+        <p:spPr>
+          <a:xfrm xmlns:a="http://schemas.openxmlformats.org/drawingml/2006/main">
+            <a:off x="876300" y="2133600"/>
+            <a:ext cx="9334500" cy="1009650"/>
+          </a:xfrm>
+          <a:prstGeom xmlns:a="http://schemas.openxmlformats.org/drawingml/2006/main" prst="rect">
+            <a:avLst/>
+          </a:prstGeom>
+          <a:noFill xmlns:a="http://schemas.openxmlformats.org/drawingml/2006/main"/>
+          <a:ln xmlns:a="http://schemas.openxmlformats.org/drawingml/2006/main" w="0">
+            <a:noFill/>
+            <a:prstDash val="solid"/>
+          </a:ln>
+        </p:spPr>
+        <p:txBody>
+          <a:bodyPr xmlns:a="http://schemas.openxmlformats.org/drawingml/2006/main"/>
+          <a:lstStyle xmlns:a="http://schemas.openxmlformats.org/drawingml/2006/main"/>
+          <a:p xmlns:a="http://schemas.openxmlformats.org/drawingml/2006/main">
+            <a:pPr algn="l">
+              <a:defRPr sz="2250" b="1" i="0">
+                <a:solidFill>
+                  <a:srgbClr val="000000"/>
+                </a:solidFill>
+              </a:defRPr>
+            </a:pPr>
+            <a:r>
+              <a:rPr sz="2250" b="1" i="0">
+                <a:solidFill>
+                  <a:srgbClr val="000000"/>
+                </a:solidFill>
+              </a:rPr>
+              <a:t>ML-P3 says the current relative-strength feature surface remains useful, but direct context features are not yet cleanly tradeable. The next feature-engineering step should explain why context helped ranking a little without improving replay.</a:t>
+            </a:r>
+          </a:p>
+        </p:txBody>
+      </p:sp>
+      <p:sp>
+        <p:nvSpPr>
+          <p:cNvPr id="5" name="">
+            <a:extLst xmlns:a="http://schemas.openxmlformats.org/drawingml/2006/main">
+              <a:ext uri="{FF2B5EF4-FFF2-40B4-BE49-F238E27FC236}">
+                <a16:creationId xmlns:a16="http://schemas.microsoft.com/office/drawing/2014/main" id="{CD0101F4-94B2-4ED5-9268-4C7D622805E5}"/>
+              </a:ext>
+            </a:extLst>
+          </p:cNvPr>
+          <p:cNvSpPr>
+            <a:spLocks xmlns:a="http://schemas.openxmlformats.org/drawingml/2006/main" noGrp="1"/>
+          </p:cNvSpPr>
+          <p:nvPr/>
+        </p:nvSpPr>
+        <p:spPr>
+          <a:xfrm xmlns:a="http://schemas.openxmlformats.org/drawingml/2006/main">
+            <a:off x="1219200" y="3667125"/>
+            <a:ext cx="190500" cy="247650"/>
+          </a:xfrm>
+          <a:prstGeom xmlns:a="http://schemas.openxmlformats.org/drawingml/2006/main" prst="rect">
+            <a:avLst/>
+          </a:prstGeom>
+          <a:noFill xmlns:a="http://schemas.openxmlformats.org/drawingml/2006/main"/>
+          <a:ln xmlns:a="http://schemas.openxmlformats.org/drawingml/2006/main" w="0">
+            <a:noFill/>
+            <a:prstDash val="solid"/>
+          </a:ln>
+        </p:spPr>
+        <p:txBody>
+          <a:bodyPr xmlns:a="http://schemas.openxmlformats.org/drawingml/2006/main"/>
+          <a:lstStyle xmlns:a="http://schemas.openxmlformats.org/drawingml/2006/main"/>
+          <a:p xmlns:a="http://schemas.openxmlformats.org/drawingml/2006/main">
+            <a:pPr algn="l">
+              <a:defRPr sz="1575" b="1" i="0">
+                <a:solidFill>
+                  <a:srgbClr val="FF6B35"/>
+                </a:solidFill>
+              </a:defRPr>
+            </a:pPr>
+            <a:r>
+              <a:rPr sz="1575" b="1" i="0">
+                <a:solidFill>
+                  <a:srgbClr val="FF6B35"/>
+                </a:solidFill>
+              </a:rPr>
+              <a:t>-</a:t>
+            </a:r>
+          </a:p>
+        </p:txBody>
+      </p:sp>
+      <p:sp>
+        <p:nvSpPr>
+          <p:cNvPr id="6" name="">
+            <a:extLst xmlns:a="http://schemas.openxmlformats.org/drawingml/2006/main">
+              <a:ext uri="{FF2B5EF4-FFF2-40B4-BE49-F238E27FC236}">
+                <a16:creationId xmlns:a16="http://schemas.microsoft.com/office/drawing/2014/main" id="{E2FE5CD1-64AC-4E62-B9EF-E5B42B283E2B}"/>
+              </a:ext>
+            </a:extLst>
+          </p:cNvPr>
+          <p:cNvSpPr>
+            <a:spLocks xmlns:a="http://schemas.openxmlformats.org/drawingml/2006/main" noGrp="1"/>
+          </p:cNvSpPr>
+          <p:nvPr/>
+        </p:nvSpPr>
+        <p:spPr>
+          <a:xfrm xmlns:a="http://schemas.openxmlformats.org/drawingml/2006/main">
+            <a:off x="1485900" y="3657600"/>
+            <a:ext cx="7162800" cy="514350"/>
+          </a:xfrm>
+          <a:prstGeom xmlns:a="http://schemas.openxmlformats.org/drawingml/2006/main" prst="rect">
+            <a:avLst/>
+          </a:prstGeom>
+          <a:noFill xmlns:a="http://schemas.openxmlformats.org/drawingml/2006/main"/>
+          <a:ln xmlns:a="http://schemas.openxmlformats.org/drawingml/2006/main" w="0">
+            <a:noFill/>
+            <a:prstDash val="solid"/>
+          </a:ln>
+        </p:spPr>
+        <p:txBody>
+          <a:bodyPr xmlns:a="http://schemas.openxmlformats.org/drawingml/2006/main"/>
+          <a:lstStyle xmlns:a="http://schemas.openxmlformats.org/drawingml/2006/main"/>
+          <a:p xmlns:a="http://schemas.openxmlformats.org/drawingml/2006/main">
+            <a:pPr algn="l">
+              <a:defRPr sz="1575" b="0" i="0">
+                <a:solidFill>
+                  <a:srgbClr val="222222"/>
+                </a:solidFill>
+              </a:defRPr>
+            </a:pPr>
+            <a:r>
+              <a:rPr sz="1575" b="0" i="0">
+                <a:solidFill>
+                  <a:srgbClr val="222222"/>
+                </a:solidFill>
+              </a:rPr>
+              <a:t>Keep relative strength as the control feature set for the next ML slice.</a:t>
+            </a:r>
+          </a:p>
+        </p:txBody>
+      </p:sp>
+      <p:sp>
+        <p:nvSpPr>
+          <p:cNvPr id="7" name="">
+            <a:extLst xmlns:a="http://schemas.openxmlformats.org/drawingml/2006/main">
+              <a:ext uri="{FF2B5EF4-FFF2-40B4-BE49-F238E27FC236}">
+                <a16:creationId xmlns:a16="http://schemas.microsoft.com/office/drawing/2014/main" id="{ABB02647-1217-488D-850F-429440AE6E00}"/>
+              </a:ext>
+            </a:extLst>
+          </p:cNvPr>
+          <p:cNvSpPr>
+            <a:spLocks xmlns:a="http://schemas.openxmlformats.org/drawingml/2006/main" noGrp="1"/>
+          </p:cNvSpPr>
+          <p:nvPr/>
+        </p:nvSpPr>
+        <p:spPr>
+          <a:xfrm xmlns:a="http://schemas.openxmlformats.org/drawingml/2006/main">
+            <a:off x="1219200" y="4333875"/>
+            <a:ext cx="190500" cy="247650"/>
+          </a:xfrm>
+          <a:prstGeom xmlns:a="http://schemas.openxmlformats.org/drawingml/2006/main" prst="rect">
+            <a:avLst/>
+          </a:prstGeom>
+          <a:noFill xmlns:a="http://schemas.openxmlformats.org/drawingml/2006/main"/>
+          <a:ln xmlns:a="http://schemas.openxmlformats.org/drawingml/2006/main" w="0">
+            <a:noFill/>
+            <a:prstDash val="solid"/>
+          </a:ln>
+        </p:spPr>
+        <p:txBody>
+          <a:bodyPr xmlns:a="http://schemas.openxmlformats.org/drawingml/2006/main"/>
+          <a:lstStyle xmlns:a="http://schemas.openxmlformats.org/drawingml/2006/main"/>
+          <a:p xmlns:a="http://schemas.openxmlformats.org/drawingml/2006/main">
+            <a:pPr algn="l">
+              <a:defRPr sz="1575" b="1" i="0">
+                <a:solidFill>
+                  <a:srgbClr val="FF6B35"/>
+                </a:solidFill>
+              </a:defRPr>
+            </a:pPr>
+            <a:r>
+              <a:rPr sz="1575" b="1" i="0">
+                <a:solidFill>
+                  <a:srgbClr val="FF6B35"/>
+                </a:solidFill>
+              </a:rPr>
+              <a:t>-</a:t>
+            </a:r>
+          </a:p>
+        </p:txBody>
+      </p:sp>
+      <p:sp>
+        <p:nvSpPr>
+          <p:cNvPr id="8" name="">
+            <a:extLst xmlns:a="http://schemas.openxmlformats.org/drawingml/2006/main">
+              <a:ext uri="{FF2B5EF4-FFF2-40B4-BE49-F238E27FC236}">
+                <a16:creationId xmlns:a16="http://schemas.microsoft.com/office/drawing/2014/main" id="{1D1D3E83-389C-493F-A8F2-22DBDE7B2E02}"/>
+              </a:ext>
+            </a:extLst>
+          </p:cNvPr>
+          <p:cNvSpPr>
+            <a:spLocks xmlns:a="http://schemas.openxmlformats.org/drawingml/2006/main" noGrp="1"/>
+          </p:cNvSpPr>
+          <p:nvPr/>
+        </p:nvSpPr>
+        <p:spPr>
+          <a:xfrm xmlns:a="http://schemas.openxmlformats.org/drawingml/2006/main">
+            <a:off x="1485900" y="4324350"/>
+            <a:ext cx="7162800" cy="514350"/>
+          </a:xfrm>
+          <a:prstGeom xmlns:a="http://schemas.openxmlformats.org/drawingml/2006/main" prst="rect">
+            <a:avLst/>
+          </a:prstGeom>
+          <a:noFill xmlns:a="http://schemas.openxmlformats.org/drawingml/2006/main"/>
+          <a:ln xmlns:a="http://schemas.openxmlformats.org/drawingml/2006/main" w="0">
+            <a:noFill/>
+            <a:prstDash val="solid"/>
+          </a:ln>
+        </p:spPr>
+        <p:txBody>
+          <a:bodyPr xmlns:a="http://schemas.openxmlformats.org/drawingml/2006/main"/>
+          <a:lstStyle xmlns:a="http://schemas.openxmlformats.org/drawingml/2006/main"/>
+          <a:p xmlns:a="http://schemas.openxmlformats.org/drawingml/2006/main">
+            <a:pPr algn="l">
+              <a:defRPr sz="1575" b="0" i="0">
+                <a:solidFill>
+                  <a:srgbClr val="222222"/>
+                </a:solidFill>
+              </a:defRPr>
+            </a:pPr>
+            <a:r>
+              <a:rPr sz="1575" b="0" i="0">
+                <a:solidFill>
+                  <a:srgbClr val="222222"/>
+                </a:solidFill>
+              </a:rPr>
+              <a:t>Test context features one family at a time: trend, volatility/stress, drawdown, or breadth.</a:t>
+            </a:r>
+          </a:p>
+        </p:txBody>
+      </p:sp>
+      <p:sp>
+        <p:nvSpPr>
+          <p:cNvPr id="9" name="">
+            <a:extLst xmlns:a="http://schemas.openxmlformats.org/drawingml/2006/main">
+              <a:ext uri="{FF2B5EF4-FFF2-40B4-BE49-F238E27FC236}">
+                <a16:creationId xmlns:a16="http://schemas.microsoft.com/office/drawing/2014/main" id="{1C206CE6-0A86-4E0F-B93A-C2F42536073A}"/>
+              </a:ext>
+            </a:extLst>
+          </p:cNvPr>
+          <p:cNvSpPr>
+            <a:spLocks xmlns:a="http://schemas.openxmlformats.org/drawingml/2006/main" noGrp="1"/>
+          </p:cNvSpPr>
+          <p:nvPr/>
+        </p:nvSpPr>
+        <p:spPr>
+          <a:xfrm xmlns:a="http://schemas.openxmlformats.org/drawingml/2006/main">
+            <a:off x="1219200" y="5000625"/>
+            <a:ext cx="190500" cy="247650"/>
+          </a:xfrm>
+          <a:prstGeom xmlns:a="http://schemas.openxmlformats.org/drawingml/2006/main" prst="rect">
+            <a:avLst/>
+          </a:prstGeom>
+          <a:noFill xmlns:a="http://schemas.openxmlformats.org/drawingml/2006/main"/>
+          <a:ln xmlns:a="http://schemas.openxmlformats.org/drawingml/2006/main" w="0">
+            <a:noFill/>
+            <a:prstDash val="solid"/>
+          </a:ln>
+        </p:spPr>
+        <p:txBody>
+          <a:bodyPr xmlns:a="http://schemas.openxmlformats.org/drawingml/2006/main"/>
+          <a:lstStyle xmlns:a="http://schemas.openxmlformats.org/drawingml/2006/main"/>
+          <a:p xmlns:a="http://schemas.openxmlformats.org/drawingml/2006/main">
+            <a:pPr algn="l">
+              <a:defRPr sz="1575" b="1" i="0">
+                <a:solidFill>
+                  <a:srgbClr val="FF6B35"/>
+                </a:solidFill>
+              </a:defRPr>
+            </a:pPr>
+            <a:r>
+              <a:rPr sz="1575" b="1" i="0">
+                <a:solidFill>
+                  <a:srgbClr val="FF6B35"/>
+                </a:solidFill>
+              </a:rPr>
+              <a:t>-</a:t>
+            </a:r>
+          </a:p>
+        </p:txBody>
+      </p:sp>
+      <p:sp>
+        <p:nvSpPr>
+          <p:cNvPr id="10" name="">
+            <a:extLst xmlns:a="http://schemas.openxmlformats.org/drawingml/2006/main">
+              <a:ext uri="{FF2B5EF4-FFF2-40B4-BE49-F238E27FC236}">
+                <a16:creationId xmlns:a16="http://schemas.microsoft.com/office/drawing/2014/main" id="{9BF78D36-86CC-4DA1-BE48-0A72AE37CFAC}"/>
+              </a:ext>
+            </a:extLst>
+          </p:cNvPr>
+          <p:cNvSpPr>
+            <a:spLocks xmlns:a="http://schemas.openxmlformats.org/drawingml/2006/main" noGrp="1"/>
+          </p:cNvSpPr>
+          <p:nvPr/>
+        </p:nvSpPr>
+        <p:spPr>
+          <a:xfrm xmlns:a="http://schemas.openxmlformats.org/drawingml/2006/main">
+            <a:off x="1485900" y="4991100"/>
+            <a:ext cx="7162800" cy="514350"/>
+          </a:xfrm>
+          <a:prstGeom xmlns:a="http://schemas.openxmlformats.org/drawingml/2006/main" prst="rect">
+            <a:avLst/>
+          </a:prstGeom>
+          <a:noFill xmlns:a="http://schemas.openxmlformats.org/drawingml/2006/main"/>
+          <a:ln xmlns:a="http://schemas.openxmlformats.org/drawingml/2006/main" w="0">
+            <a:noFill/>
+            <a:prstDash val="solid"/>
+          </a:ln>
+        </p:spPr>
+        <p:txBody>
+          <a:bodyPr xmlns:a="http://schemas.openxmlformats.org/drawingml/2006/main"/>
+          <a:lstStyle xmlns:a="http://schemas.openxmlformats.org/drawingml/2006/main"/>
+          <a:p xmlns:a="http://schemas.openxmlformats.org/drawingml/2006/main">
+            <a:pPr algn="l">
+              <a:defRPr sz="1575" b="0" i="0">
+                <a:solidFill>
+                  <a:srgbClr val="222222"/>
+                </a:solidFill>
+              </a:defRPr>
+            </a:pPr>
+            <a:r>
+              <a:rPr sz="1575" b="0" i="0">
+                <a:solidFill>
+                  <a:srgbClr val="222222"/>
+                </a:solidFill>
+              </a:rPr>
+              <a:t>Alternatively test a label/policy calibration slice if the operator wants to focus on threshold behavior.</a:t>
+            </a:r>
+          </a:p>
+        </p:txBody>
+      </p:sp>
+      <p:sp>
+        <p:nvSpPr>
+          <p:cNvPr id="11" name="">
+            <a:extLst xmlns:a="http://schemas.openxmlformats.org/drawingml/2006/main">
+              <a:ext uri="{FF2B5EF4-FFF2-40B4-BE49-F238E27FC236}">
+                <a16:creationId xmlns:a16="http://schemas.microsoft.com/office/drawing/2014/main" id="{1AB22EDB-537A-4266-8E8B-4B10A363CDFB}"/>
+              </a:ext>
+            </a:extLst>
+          </p:cNvPr>
+          <p:cNvSpPr>
+            <a:spLocks xmlns:a="http://schemas.openxmlformats.org/drawingml/2006/main" noGrp="1"/>
+          </p:cNvSpPr>
+          <p:nvPr/>
+        </p:nvSpPr>
+        <p:spPr>
+          <a:xfrm xmlns:a="http://schemas.openxmlformats.org/drawingml/2006/main">
+            <a:off x="1219200" y="5667375"/>
+            <a:ext cx="190500" cy="247650"/>
+          </a:xfrm>
+          <a:prstGeom xmlns:a="http://schemas.openxmlformats.org/drawingml/2006/main" prst="rect">
+            <a:avLst/>
+          </a:prstGeom>
+          <a:noFill xmlns:a="http://schemas.openxmlformats.org/drawingml/2006/main"/>
+          <a:ln xmlns:a="http://schemas.openxmlformats.org/drawingml/2006/main" w="0">
+            <a:noFill/>
+            <a:prstDash val="solid"/>
+          </a:ln>
+        </p:spPr>
+        <p:txBody>
+          <a:bodyPr xmlns:a="http://schemas.openxmlformats.org/drawingml/2006/main"/>
+          <a:lstStyle xmlns:a="http://schemas.openxmlformats.org/drawingml/2006/main"/>
+          <a:p xmlns:a="http://schemas.openxmlformats.org/drawingml/2006/main">
+            <a:pPr algn="l">
+              <a:defRPr sz="1575" b="1" i="0">
+                <a:solidFill>
+                  <a:srgbClr val="FF6B35"/>
+                </a:solidFill>
+              </a:defRPr>
+            </a:pPr>
+            <a:r>
+              <a:rPr sz="1575" b="1" i="0">
+                <a:solidFill>
+                  <a:srgbClr val="FF6B35"/>
+                </a:solidFill>
+              </a:rPr>
+              <a:t>-</a:t>
+            </a:r>
+          </a:p>
+        </p:txBody>
+      </p:sp>
+      <p:sp>
+        <p:nvSpPr>
+          <p:cNvPr id="12" name="">
+            <a:extLst xmlns:a="http://schemas.openxmlformats.org/drawingml/2006/main">
+              <a:ext uri="{FF2B5EF4-FFF2-40B4-BE49-F238E27FC236}">
+                <a16:creationId xmlns:a16="http://schemas.microsoft.com/office/drawing/2014/main" id="{FF63D9B1-855B-4BE5-8C5A-2CEC4B5507E8}"/>
+              </a:ext>
+            </a:extLst>
+          </p:cNvPr>
+          <p:cNvSpPr>
+            <a:spLocks xmlns:a="http://schemas.openxmlformats.org/drawingml/2006/main" noGrp="1"/>
+          </p:cNvSpPr>
+          <p:nvPr/>
+        </p:nvSpPr>
+        <p:spPr>
+          <a:xfrm xmlns:a="http://schemas.openxmlformats.org/drawingml/2006/main">
+            <a:off x="1485900" y="5657850"/>
+            <a:ext cx="7162800" cy="514350"/>
+          </a:xfrm>
+          <a:prstGeom xmlns:a="http://schemas.openxmlformats.org/drawingml/2006/main" prst="rect">
+            <a:avLst/>
+          </a:prstGeom>
+          <a:noFill xmlns:a="http://schemas.openxmlformats.org/drawingml/2006/main"/>
+          <a:ln xmlns:a="http://schemas.openxmlformats.org/drawingml/2006/main" w="0">
+            <a:noFill/>
+            <a:prstDash val="solid"/>
+          </a:ln>
+        </p:spPr>
+        <p:txBody>
+          <a:bodyPr xmlns:a="http://schemas.openxmlformats.org/drawingml/2006/main"/>
+          <a:lstStyle xmlns:a="http://schemas.openxmlformats.org/drawingml/2006/main"/>
+          <a:p xmlns:a="http://schemas.openxmlformats.org/drawingml/2006/main">
+            <a:pPr algn="l">
+              <a:defRPr sz="1575" b="0" i="0">
+                <a:solidFill>
+                  <a:srgbClr val="222222"/>
+                </a:solidFill>
+              </a:defRPr>
+            </a:pPr>
+            <a:r>
+              <a:rPr sz="1575" b="0" i="0">
+                <a:solidFill>
+                  <a:srgbClr val="222222"/>
+                </a:solidFill>
+              </a:rPr>
+              <a:t>Do not promote direct context broadly until it improves replay and ranking together.</a:t>
+            </a:r>
+          </a:p>
+        </p:txBody>
+      </p:sp>
+    </p:spTree>
+    <p:extLst>
+      <p:ext uri="{BB962C8B-B14F-4D97-AF65-F5344CB8AC3E}">
+        <p14:creationId xmlns:p14="http://schemas.microsoft.com/office/powerpoint/2010/main" val="280172791"/>
       </p:ext>
     </p:extLst>
   </p:cSld>
@@ -23667,7 +27817,7 @@
           <p:cNvPr id="1" name="">
             <a:extLst xmlns:a="http://schemas.openxmlformats.org/drawingml/2006/main">
               <a:ext uri="{FF2B5EF4-FFF2-40B4-BE49-F238E27FC236}">
-                <a16:creationId xmlns:a16="http://schemas.microsoft.com/office/drawing/2014/main" id="{620948D8-21F8-4FCD-AECD-AA880B1D3A64}"/>
+                <a16:creationId xmlns:a16="http://schemas.microsoft.com/office/drawing/2014/main" id="{1E8CD7A8-F9B5-4052-83B1-2261CF2CF2C8}"/>
               </a:ext>
             </a:extLst>
           </p:cNvPr>
@@ -23717,7 +27867,7 @@
           <p:cNvPr id="2" name="">
             <a:extLst xmlns:a="http://schemas.openxmlformats.org/drawingml/2006/main">
               <a:ext uri="{FF2B5EF4-FFF2-40B4-BE49-F238E27FC236}">
-                <a16:creationId xmlns:a16="http://schemas.microsoft.com/office/drawing/2014/main" id="{DB1EE0DF-BDCD-4B57-B66E-D03748811CD0}"/>
+                <a16:creationId xmlns:a16="http://schemas.microsoft.com/office/drawing/2014/main" id="{8DE20E3B-A739-4D52-A4E8-096DA63E3AE2}"/>
               </a:ext>
             </a:extLst>
           </p:cNvPr>
@@ -23767,7 +27917,7 @@
           <p:cNvPr id="3" name="">
             <a:extLst xmlns:a="http://schemas.openxmlformats.org/drawingml/2006/main">
               <a:ext uri="{FF2B5EF4-FFF2-40B4-BE49-F238E27FC236}">
-                <a16:creationId xmlns:a16="http://schemas.microsoft.com/office/drawing/2014/main" id="{CB00B4F7-D646-4E9D-9473-738539BDDE0C}"/>
+                <a16:creationId xmlns:a16="http://schemas.microsoft.com/office/drawing/2014/main" id="{7D09E001-39EE-4F47-9FD5-137AF0781EC3}"/>
               </a:ext>
             </a:extLst>
           </p:cNvPr>
@@ -23802,7 +27952,7 @@
           <p:nvPr/>
         </p:nvPicPr>
         <p:blipFill>
-          <a:blip xmlns:r="http://schemas.openxmlformats.org/officeDocument/2006/relationships" xmlns:a="http://schemas.openxmlformats.org/drawingml/2006/main" r:embed="Rd8e35880de154a8a"/>
+          <a:blip xmlns:r="http://schemas.openxmlformats.org/officeDocument/2006/relationships" xmlns:a="http://schemas.openxmlformats.org/drawingml/2006/main" r:embed="Ra1a1a673d5424efd"/>
           <a:stretch xmlns:a="http://schemas.openxmlformats.org/drawingml/2006/main"/>
         </p:blipFill>
         <p:spPr>
@@ -23824,7 +27974,7 @@
           <p:nvPr/>
         </p:nvPicPr>
         <p:blipFill>
-          <a:blip xmlns:r="http://schemas.openxmlformats.org/officeDocument/2006/relationships" xmlns:a="http://schemas.openxmlformats.org/drawingml/2006/main" r:embed="Rc67bbc1ca3e84add"/>
+          <a:blip xmlns:r="http://schemas.openxmlformats.org/officeDocument/2006/relationships" xmlns:a="http://schemas.openxmlformats.org/drawingml/2006/main" r:embed="R809da0fa37bd47ed"/>
           <a:stretch xmlns:a="http://schemas.openxmlformats.org/drawingml/2006/main"/>
         </p:blipFill>
         <p:spPr>
@@ -23842,7 +27992,7 @@
           <p:cNvPr id="6" name="">
             <a:extLst xmlns:a="http://schemas.openxmlformats.org/drawingml/2006/main">
               <a:ext uri="{FF2B5EF4-FFF2-40B4-BE49-F238E27FC236}">
-                <a16:creationId xmlns:a16="http://schemas.microsoft.com/office/drawing/2014/main" id="{2E7B304E-A5C1-4B6F-8665-2BEA40C2ECC6}"/>
+                <a16:creationId xmlns:a16="http://schemas.microsoft.com/office/drawing/2014/main" id="{EA58B527-67BD-4D1F-986E-FBC723A73B84}"/>
               </a:ext>
             </a:extLst>
           </p:cNvPr>
@@ -23890,7 +28040,7 @@
     </p:spTree>
     <p:extLst>
       <p:ext uri="{BB962C8B-B14F-4D97-AF65-F5344CB8AC3E}">
-        <p14:creationId xmlns:p14="http://schemas.microsoft.com/office/powerpoint/2010/main" val="302194327"/>
+        <p14:creationId xmlns:p14="http://schemas.microsoft.com/office/powerpoint/2010/main" val="613197620"/>
       </p:ext>
     </p:extLst>
   </p:cSld>
@@ -23921,7 +28071,7 @@
           <p:cNvPr id="1" name="">
             <a:extLst xmlns:a="http://schemas.openxmlformats.org/drawingml/2006/main">
               <a:ext uri="{FF2B5EF4-FFF2-40B4-BE49-F238E27FC236}">
-                <a16:creationId xmlns:a16="http://schemas.microsoft.com/office/drawing/2014/main" id="{6B162F28-5104-440C-9CE4-01225EF3523E}"/>
+                <a16:creationId xmlns:a16="http://schemas.microsoft.com/office/drawing/2014/main" id="{5938C52A-1023-435D-8B76-12EC8FB4BD05}"/>
               </a:ext>
             </a:extLst>
           </p:cNvPr>
@@ -23971,7 +28121,7 @@
           <p:cNvPr id="2" name="">
             <a:extLst xmlns:a="http://schemas.openxmlformats.org/drawingml/2006/main">
               <a:ext uri="{FF2B5EF4-FFF2-40B4-BE49-F238E27FC236}">
-                <a16:creationId xmlns:a16="http://schemas.microsoft.com/office/drawing/2014/main" id="{7F48B1AD-15DA-4BEF-BB58-A1691995D3DF}"/>
+                <a16:creationId xmlns:a16="http://schemas.microsoft.com/office/drawing/2014/main" id="{83CC8A93-FB34-4C42-8A31-7414069FE021}"/>
               </a:ext>
             </a:extLst>
           </p:cNvPr>
@@ -24021,7 +28171,7 @@
           <p:cNvPr id="3" name="">
             <a:extLst xmlns:a="http://schemas.openxmlformats.org/drawingml/2006/main">
               <a:ext uri="{FF2B5EF4-FFF2-40B4-BE49-F238E27FC236}">
-                <a16:creationId xmlns:a16="http://schemas.microsoft.com/office/drawing/2014/main" id="{B98F5BE9-F138-4275-9DFA-2FB669EF21E0}"/>
+                <a16:creationId xmlns:a16="http://schemas.microsoft.com/office/drawing/2014/main" id="{15384D67-1E51-47BF-B9E0-FFFC83AB37D6}"/>
               </a:ext>
             </a:extLst>
           </p:cNvPr>
@@ -24056,7 +28206,7 @@
           <p:nvPr/>
         </p:nvPicPr>
         <p:blipFill>
-          <a:blip xmlns:r="http://schemas.openxmlformats.org/officeDocument/2006/relationships" xmlns:a="http://schemas.openxmlformats.org/drawingml/2006/main" r:embed="Rabc0dbb3b7c04c69"/>
+          <a:blip xmlns:r="http://schemas.openxmlformats.org/officeDocument/2006/relationships" xmlns:a="http://schemas.openxmlformats.org/drawingml/2006/main" r:embed="R4667f45df3284620"/>
           <a:stretch xmlns:a="http://schemas.openxmlformats.org/drawingml/2006/main"/>
         </p:blipFill>
         <p:spPr>
@@ -24074,7 +28224,7 @@
           <p:cNvPr id="5" name="">
             <a:extLst xmlns:a="http://schemas.openxmlformats.org/drawingml/2006/main">
               <a:ext uri="{FF2B5EF4-FFF2-40B4-BE49-F238E27FC236}">
-                <a16:creationId xmlns:a16="http://schemas.microsoft.com/office/drawing/2014/main" id="{F93396A5-067A-4A2D-B4CC-5F539CD47328}"/>
+                <a16:creationId xmlns:a16="http://schemas.microsoft.com/office/drawing/2014/main" id="{18F567D1-2553-43AA-804F-3AE3A965E7D5}"/>
               </a:ext>
             </a:extLst>
           </p:cNvPr>
@@ -24124,7 +28274,7 @@
           <p:cNvPr id="6" name="">
             <a:extLst xmlns:a="http://schemas.openxmlformats.org/drawingml/2006/main">
               <a:ext uri="{FF2B5EF4-FFF2-40B4-BE49-F238E27FC236}">
-                <a16:creationId xmlns:a16="http://schemas.microsoft.com/office/drawing/2014/main" id="{8E761C31-C217-4C56-8EEF-47C9A82BE1AF}"/>
+                <a16:creationId xmlns:a16="http://schemas.microsoft.com/office/drawing/2014/main" id="{A5CDCC82-6680-422B-955C-3FFC686D5E4C}"/>
               </a:ext>
             </a:extLst>
           </p:cNvPr>
@@ -24172,7 +28322,7 @@
     </p:spTree>
     <p:extLst>
       <p:ext uri="{BB962C8B-B14F-4D97-AF65-F5344CB8AC3E}">
-        <p14:creationId xmlns:p14="http://schemas.microsoft.com/office/powerpoint/2010/main" val="2142258102"/>
+        <p14:creationId xmlns:p14="http://schemas.microsoft.com/office/powerpoint/2010/main" val="1036844262"/>
       </p:ext>
     </p:extLst>
   </p:cSld>
@@ -24203,7 +28353,7 @@
           <p:cNvPr id="1" name="">
             <a:extLst xmlns:a="http://schemas.openxmlformats.org/drawingml/2006/main">
               <a:ext uri="{FF2B5EF4-FFF2-40B4-BE49-F238E27FC236}">
-                <a16:creationId xmlns:a16="http://schemas.microsoft.com/office/drawing/2014/main" id="{8FCDDD88-F573-4AE8-A876-0C0F693CC247}"/>
+                <a16:creationId xmlns:a16="http://schemas.microsoft.com/office/drawing/2014/main" id="{BB31CC5E-FB45-4A24-8A18-8F37C7CE8213}"/>
               </a:ext>
             </a:extLst>
           </p:cNvPr>
@@ -24253,7 +28403,7 @@
           <p:cNvPr id="2" name="">
             <a:extLst xmlns:a="http://schemas.openxmlformats.org/drawingml/2006/main">
               <a:ext uri="{FF2B5EF4-FFF2-40B4-BE49-F238E27FC236}">
-                <a16:creationId xmlns:a16="http://schemas.microsoft.com/office/drawing/2014/main" id="{35D00195-DA8A-4E45-9375-FFA689028096}"/>
+                <a16:creationId xmlns:a16="http://schemas.microsoft.com/office/drawing/2014/main" id="{6DBF4F4D-F0C4-410F-B618-F8AF0BF63CF1}"/>
               </a:ext>
             </a:extLst>
           </p:cNvPr>
@@ -24303,7 +28453,7 @@
           <p:cNvPr id="3" name="">
             <a:extLst xmlns:a="http://schemas.openxmlformats.org/drawingml/2006/main">
               <a:ext uri="{FF2B5EF4-FFF2-40B4-BE49-F238E27FC236}">
-                <a16:creationId xmlns:a16="http://schemas.microsoft.com/office/drawing/2014/main" id="{3E9D7C28-C59A-4DA4-AEBB-2857D1B5D3F6}"/>
+                <a16:creationId xmlns:a16="http://schemas.microsoft.com/office/drawing/2014/main" id="{DF2484B9-A7FB-4039-93AE-943F6A741E57}"/>
               </a:ext>
             </a:extLst>
           </p:cNvPr>
@@ -24338,7 +28488,7 @@
           <p:nvPr/>
         </p:nvPicPr>
         <p:blipFill>
-          <a:blip xmlns:r="http://schemas.openxmlformats.org/officeDocument/2006/relationships" xmlns:a="http://schemas.openxmlformats.org/drawingml/2006/main" r:embed="R669d7a7cd07b4038"/>
+          <a:blip xmlns:r="http://schemas.openxmlformats.org/officeDocument/2006/relationships" xmlns:a="http://schemas.openxmlformats.org/drawingml/2006/main" r:embed="Rb29973fd3ff94760"/>
           <a:stretch xmlns:a="http://schemas.openxmlformats.org/drawingml/2006/main"/>
         </p:blipFill>
         <p:spPr>
@@ -24356,7 +28506,7 @@
           <p:cNvPr id="5" name="">
             <a:extLst xmlns:a="http://schemas.openxmlformats.org/drawingml/2006/main">
               <a:ext uri="{FF2B5EF4-FFF2-40B4-BE49-F238E27FC236}">
-                <a16:creationId xmlns:a16="http://schemas.microsoft.com/office/drawing/2014/main" id="{766C4CA2-F9F6-41EB-969A-8AFDA5B8BCB4}"/>
+                <a16:creationId xmlns:a16="http://schemas.microsoft.com/office/drawing/2014/main" id="{E727786E-C389-4580-88AD-A38C39C47AC7}"/>
               </a:ext>
             </a:extLst>
           </p:cNvPr>
@@ -24406,7 +28556,7 @@
           <p:cNvPr id="6" name="">
             <a:extLst xmlns:a="http://schemas.openxmlformats.org/drawingml/2006/main">
               <a:ext uri="{FF2B5EF4-FFF2-40B4-BE49-F238E27FC236}">
-                <a16:creationId xmlns:a16="http://schemas.microsoft.com/office/drawing/2014/main" id="{4AF8F483-373C-4C44-A737-C3326A3C6B47}"/>
+                <a16:creationId xmlns:a16="http://schemas.microsoft.com/office/drawing/2014/main" id="{5994ED17-3904-4932-9DE2-1C607870BC98}"/>
               </a:ext>
             </a:extLst>
           </p:cNvPr>
@@ -24454,7 +28604,7 @@
     </p:spTree>
     <p:extLst>
       <p:ext uri="{BB962C8B-B14F-4D97-AF65-F5344CB8AC3E}">
-        <p14:creationId xmlns:p14="http://schemas.microsoft.com/office/powerpoint/2010/main" val="429744616"/>
+        <p14:creationId xmlns:p14="http://schemas.microsoft.com/office/powerpoint/2010/main" val="235697198"/>
       </p:ext>
     </p:extLst>
   </p:cSld>
@@ -24485,7 +28635,7 @@
           <p:cNvPr id="1" name="">
             <a:extLst xmlns:a="http://schemas.openxmlformats.org/drawingml/2006/main">
               <a:ext uri="{FF2B5EF4-FFF2-40B4-BE49-F238E27FC236}">
-                <a16:creationId xmlns:a16="http://schemas.microsoft.com/office/drawing/2014/main" id="{712E7A0E-4694-4076-9CE6-8441BB10DA93}"/>
+                <a16:creationId xmlns:a16="http://schemas.microsoft.com/office/drawing/2014/main" id="{EC7757B3-84DA-4DF5-B0AB-2A66882EC283}"/>
               </a:ext>
             </a:extLst>
           </p:cNvPr>
@@ -24535,7 +28685,7 @@
           <p:cNvPr id="2" name="">
             <a:extLst xmlns:a="http://schemas.openxmlformats.org/drawingml/2006/main">
               <a:ext uri="{FF2B5EF4-FFF2-40B4-BE49-F238E27FC236}">
-                <a16:creationId xmlns:a16="http://schemas.microsoft.com/office/drawing/2014/main" id="{7B324BFE-B4B4-412B-A743-B737D1497363}"/>
+                <a16:creationId xmlns:a16="http://schemas.microsoft.com/office/drawing/2014/main" id="{CA0F6676-FBF4-4FD2-8C78-1EBAA12DD977}"/>
               </a:ext>
             </a:extLst>
           </p:cNvPr>
@@ -24585,7 +28735,7 @@
           <p:cNvPr id="3" name="">
             <a:extLst xmlns:a="http://schemas.openxmlformats.org/drawingml/2006/main">
               <a:ext uri="{FF2B5EF4-FFF2-40B4-BE49-F238E27FC236}">
-                <a16:creationId xmlns:a16="http://schemas.microsoft.com/office/drawing/2014/main" id="{707059F2-2638-4124-B7D1-2A0DF9E1FA2A}"/>
+                <a16:creationId xmlns:a16="http://schemas.microsoft.com/office/drawing/2014/main" id="{8FD02964-F6CC-485A-972A-D18D2E7DA41B}"/>
               </a:ext>
             </a:extLst>
           </p:cNvPr>
@@ -24620,7 +28770,7 @@
           <p:nvPr/>
         </p:nvPicPr>
         <p:blipFill>
-          <a:blip xmlns:r="http://schemas.openxmlformats.org/officeDocument/2006/relationships" xmlns:a="http://schemas.openxmlformats.org/drawingml/2006/main" r:embed="R27cb88a2704546ea"/>
+          <a:blip xmlns:r="http://schemas.openxmlformats.org/officeDocument/2006/relationships" xmlns:a="http://schemas.openxmlformats.org/drawingml/2006/main" r:embed="R1213996a7ca44f5b"/>
           <a:stretch xmlns:a="http://schemas.openxmlformats.org/drawingml/2006/main"/>
         </p:blipFill>
         <p:spPr>
@@ -24638,7 +28788,7 @@
           <p:cNvPr id="5" name="">
             <a:extLst xmlns:a="http://schemas.openxmlformats.org/drawingml/2006/main">
               <a:ext uri="{FF2B5EF4-FFF2-40B4-BE49-F238E27FC236}">
-                <a16:creationId xmlns:a16="http://schemas.microsoft.com/office/drawing/2014/main" id="{47477263-6F30-418C-83FE-42ACE9F0EBC7}"/>
+                <a16:creationId xmlns:a16="http://schemas.microsoft.com/office/drawing/2014/main" id="{B17B37E4-EE0F-4D53-9AD2-210BBCA88733}"/>
               </a:ext>
             </a:extLst>
           </p:cNvPr>
@@ -24688,7 +28838,7 @@
           <p:cNvPr id="6" name="">
             <a:extLst xmlns:a="http://schemas.openxmlformats.org/drawingml/2006/main">
               <a:ext uri="{FF2B5EF4-FFF2-40B4-BE49-F238E27FC236}">
-                <a16:creationId xmlns:a16="http://schemas.microsoft.com/office/drawing/2014/main" id="{162EDD20-1B29-4173-A706-DA7712CC921A}"/>
+                <a16:creationId xmlns:a16="http://schemas.microsoft.com/office/drawing/2014/main" id="{6E6C2E8D-D534-43CC-866E-6800C55EB5DB}"/>
               </a:ext>
             </a:extLst>
           </p:cNvPr>
@@ -24736,7 +28886,7 @@
     </p:spTree>
     <p:extLst>
       <p:ext uri="{BB962C8B-B14F-4D97-AF65-F5344CB8AC3E}">
-        <p14:creationId xmlns:p14="http://schemas.microsoft.com/office/powerpoint/2010/main" val="1665068041"/>
+        <p14:creationId xmlns:p14="http://schemas.microsoft.com/office/powerpoint/2010/main" val="787303"/>
       </p:ext>
     </p:extLst>
   </p:cSld>

--- a/presentations/gen5_4_ml_decision_engine_incremental_build.pptx
+++ b/presentations/gen5_4_ml_decision_engine_incremental_build.pptx
@@ -2,63 +2,70 @@
 <file path=ppt/presentation.xml><?xml version="1.0" encoding="utf-8"?>
 <p:presentation xmlns:p="http://schemas.openxmlformats.org/presentationml/2006/main">
   <p:sldMasterIdLst>
-    <p:sldMasterId xmlns:r="http://schemas.openxmlformats.org/officeDocument/2006/relationships" id="2147483648" r:id="R3f684466c9e840aa"/>
+    <p:sldMasterId xmlns:r="http://schemas.openxmlformats.org/officeDocument/2006/relationships" id="2147483648" r:id="R0882d2dfb9eb43c7"/>
   </p:sldMasterIdLst>
   <p:notesMasterIdLst>
-    <p:notesMasterId xmlns:r="http://schemas.openxmlformats.org/officeDocument/2006/relationships" r:id="R52db4ce83235481e"/>
+    <p:notesMasterId xmlns:r="http://schemas.openxmlformats.org/officeDocument/2006/relationships" r:id="R5deeeb7b71154521"/>
   </p:notesMasterIdLst>
   <p:sldIdLst>
-    <p:sldId xmlns:r="http://schemas.openxmlformats.org/officeDocument/2006/relationships" id="256" r:id="R94d91f2e97fe47bf"/>
-    <p:sldId xmlns:r="http://schemas.openxmlformats.org/officeDocument/2006/relationships" id="257" r:id="Ra1ae0c47b7154608"/>
-    <p:sldId xmlns:r="http://schemas.openxmlformats.org/officeDocument/2006/relationships" id="258" r:id="R1cc5f711f4734a93"/>
-    <p:sldId xmlns:r="http://schemas.openxmlformats.org/officeDocument/2006/relationships" id="259" r:id="R6b43c550d0e04a7c"/>
-    <p:sldId xmlns:r="http://schemas.openxmlformats.org/officeDocument/2006/relationships" id="260" r:id="Raec188caf01449f8"/>
-    <p:sldId xmlns:r="http://schemas.openxmlformats.org/officeDocument/2006/relationships" id="261" r:id="Re6a015fba0d74549"/>
-    <p:sldId xmlns:r="http://schemas.openxmlformats.org/officeDocument/2006/relationships" id="262" r:id="R39913c7e4f5e46de"/>
-    <p:sldId xmlns:r="http://schemas.openxmlformats.org/officeDocument/2006/relationships" id="263" r:id="R75dd6cca027d4b6d"/>
-    <p:sldId xmlns:r="http://schemas.openxmlformats.org/officeDocument/2006/relationships" id="264" r:id="R9201f71b1d674a65"/>
-    <p:sldId xmlns:r="http://schemas.openxmlformats.org/officeDocument/2006/relationships" id="265" r:id="Ra32856bb2d1140fa"/>
-    <p:sldId xmlns:r="http://schemas.openxmlformats.org/officeDocument/2006/relationships" id="266" r:id="Ra21fed5597a44b8c"/>
-    <p:sldId xmlns:r="http://schemas.openxmlformats.org/officeDocument/2006/relationships" id="267" r:id="Rbc8acae96cf947ca"/>
-    <p:sldId xmlns:r="http://schemas.openxmlformats.org/officeDocument/2006/relationships" id="268" r:id="R96ec5f7e83de4615"/>
-    <p:sldId xmlns:r="http://schemas.openxmlformats.org/officeDocument/2006/relationships" id="269" r:id="R7229dfeced1747d9"/>
-    <p:sldId xmlns:r="http://schemas.openxmlformats.org/officeDocument/2006/relationships" id="270" r:id="Reaf774c6fb8e41af"/>
-    <p:sldId xmlns:r="http://schemas.openxmlformats.org/officeDocument/2006/relationships" id="271" r:id="Rf45a32e722644895"/>
-    <p:sldId xmlns:r="http://schemas.openxmlformats.org/officeDocument/2006/relationships" id="272" r:id="R090f9d2f451d494a"/>
-    <p:sldId xmlns:r="http://schemas.openxmlformats.org/officeDocument/2006/relationships" id="273" r:id="Rf6fef13860b943df"/>
-    <p:sldId xmlns:r="http://schemas.openxmlformats.org/officeDocument/2006/relationships" id="274" r:id="R7af29b6bccd5471b"/>
-    <p:sldId xmlns:r="http://schemas.openxmlformats.org/officeDocument/2006/relationships" id="275" r:id="R9a46c45ed74b423b"/>
-    <p:sldId xmlns:r="http://schemas.openxmlformats.org/officeDocument/2006/relationships" id="276" r:id="R3ff93f4e7d2b44aa"/>
-    <p:sldId xmlns:r="http://schemas.openxmlformats.org/officeDocument/2006/relationships" id="277" r:id="Rc1c5fc61aec74cce"/>
-    <p:sldId xmlns:r="http://schemas.openxmlformats.org/officeDocument/2006/relationships" id="278" r:id="R44a84de1316246b5"/>
-    <p:sldId xmlns:r="http://schemas.openxmlformats.org/officeDocument/2006/relationships" id="279" r:id="Rd344651f9ed4461a"/>
-    <p:sldId xmlns:r="http://schemas.openxmlformats.org/officeDocument/2006/relationships" id="280" r:id="R7b62ac24610f477b"/>
-    <p:sldId xmlns:r="http://schemas.openxmlformats.org/officeDocument/2006/relationships" id="281" r:id="R5ed11e64bbf94c58"/>
-    <p:sldId xmlns:r="http://schemas.openxmlformats.org/officeDocument/2006/relationships" id="282" r:id="Rde21a90d34af4c6e"/>
-    <p:sldId xmlns:r="http://schemas.openxmlformats.org/officeDocument/2006/relationships" id="283" r:id="Rea828b55391b4d4d"/>
-    <p:sldId xmlns:r="http://schemas.openxmlformats.org/officeDocument/2006/relationships" id="284" r:id="Rd801122eba0f4f43"/>
-    <p:sldId xmlns:r="http://schemas.openxmlformats.org/officeDocument/2006/relationships" id="285" r:id="Rc13b61a82e904a3f"/>
-    <p:sldId xmlns:r="http://schemas.openxmlformats.org/officeDocument/2006/relationships" id="286" r:id="Rb081869922e941b5"/>
-    <p:sldId xmlns:r="http://schemas.openxmlformats.org/officeDocument/2006/relationships" id="287" r:id="Rf328b9e1f7564e40"/>
-    <p:sldId xmlns:r="http://schemas.openxmlformats.org/officeDocument/2006/relationships" id="288" r:id="R74389726932f4b74"/>
-    <p:sldId xmlns:r="http://schemas.openxmlformats.org/officeDocument/2006/relationships" id="289" r:id="R5bb0f5ba44854f1b"/>
-    <p:sldId xmlns:r="http://schemas.openxmlformats.org/officeDocument/2006/relationships" id="290" r:id="R65734b4347b84da7"/>
-    <p:sldId xmlns:r="http://schemas.openxmlformats.org/officeDocument/2006/relationships" id="291" r:id="R717cc95563664d21"/>
-    <p:sldId xmlns:r="http://schemas.openxmlformats.org/officeDocument/2006/relationships" id="292" r:id="R188e52f5dc4e4a1f"/>
-    <p:sldId xmlns:r="http://schemas.openxmlformats.org/officeDocument/2006/relationships" id="293" r:id="R58be17a119cb491e"/>
-    <p:sldId xmlns:r="http://schemas.openxmlformats.org/officeDocument/2006/relationships" id="294" r:id="Rf9e602428fcf4e86"/>
-    <p:sldId xmlns:r="http://schemas.openxmlformats.org/officeDocument/2006/relationships" id="295" r:id="R14af1a7c291e4c3c"/>
-    <p:sldId xmlns:r="http://schemas.openxmlformats.org/officeDocument/2006/relationships" id="296" r:id="Rb4ac169bc91c4549"/>
-    <p:sldId xmlns:r="http://schemas.openxmlformats.org/officeDocument/2006/relationships" id="297" r:id="Rf3afa1b27ce049bd"/>
-    <p:sldId xmlns:r="http://schemas.openxmlformats.org/officeDocument/2006/relationships" id="298" r:id="R09cd7e17d69c4f69"/>
-    <p:sldId xmlns:r="http://schemas.openxmlformats.org/officeDocument/2006/relationships" id="299" r:id="Rfa9f942021d84720"/>
-    <p:sldId xmlns:r="http://schemas.openxmlformats.org/officeDocument/2006/relationships" id="300" r:id="R79ad6ee8a8d64252"/>
-    <p:sldId xmlns:r="http://schemas.openxmlformats.org/officeDocument/2006/relationships" id="301" r:id="R591167883be44158"/>
-    <p:sldId xmlns:r="http://schemas.openxmlformats.org/officeDocument/2006/relationships" id="302" r:id="R9a0a39b991cf4cff"/>
-    <p:sldId xmlns:r="http://schemas.openxmlformats.org/officeDocument/2006/relationships" id="303" r:id="Re432580fba8c496f"/>
-    <p:sldId xmlns:r="http://schemas.openxmlformats.org/officeDocument/2006/relationships" id="304" r:id="R235849ce18aa4f56"/>
-    <p:sldId xmlns:r="http://schemas.openxmlformats.org/officeDocument/2006/relationships" id="305" r:id="Rf5f6fae617194543"/>
-    <p:sldId xmlns:r="http://schemas.openxmlformats.org/officeDocument/2006/relationships" id="306" r:id="Rf1463e18cb704f40"/>
+    <p:sldId xmlns:r="http://schemas.openxmlformats.org/officeDocument/2006/relationships" id="256" r:id="Rbedb1a9380304c8f"/>
+    <p:sldId xmlns:r="http://schemas.openxmlformats.org/officeDocument/2006/relationships" id="257" r:id="Rd5bc6fe3ad6e4426"/>
+    <p:sldId xmlns:r="http://schemas.openxmlformats.org/officeDocument/2006/relationships" id="258" r:id="Rb275c1b1fa134e69"/>
+    <p:sldId xmlns:r="http://schemas.openxmlformats.org/officeDocument/2006/relationships" id="259" r:id="R9aa3a2e0e9d447dc"/>
+    <p:sldId xmlns:r="http://schemas.openxmlformats.org/officeDocument/2006/relationships" id="260" r:id="R2a6e0c0d19444daa"/>
+    <p:sldId xmlns:r="http://schemas.openxmlformats.org/officeDocument/2006/relationships" id="261" r:id="R3dfeb8a9b3ff4799"/>
+    <p:sldId xmlns:r="http://schemas.openxmlformats.org/officeDocument/2006/relationships" id="262" r:id="R77e0b72a150e4a18"/>
+    <p:sldId xmlns:r="http://schemas.openxmlformats.org/officeDocument/2006/relationships" id="263" r:id="Rdd072a9c11ef4c84"/>
+    <p:sldId xmlns:r="http://schemas.openxmlformats.org/officeDocument/2006/relationships" id="264" r:id="R212d6d7908b147e9"/>
+    <p:sldId xmlns:r="http://schemas.openxmlformats.org/officeDocument/2006/relationships" id="265" r:id="R527bcef0a4c84cb2"/>
+    <p:sldId xmlns:r="http://schemas.openxmlformats.org/officeDocument/2006/relationships" id="266" r:id="R72009ef9b71742d9"/>
+    <p:sldId xmlns:r="http://schemas.openxmlformats.org/officeDocument/2006/relationships" id="267" r:id="Re77ef5e36f3a4c8d"/>
+    <p:sldId xmlns:r="http://schemas.openxmlformats.org/officeDocument/2006/relationships" id="268" r:id="R065982f4d6714ff8"/>
+    <p:sldId xmlns:r="http://schemas.openxmlformats.org/officeDocument/2006/relationships" id="269" r:id="R691722f019aa410a"/>
+    <p:sldId xmlns:r="http://schemas.openxmlformats.org/officeDocument/2006/relationships" id="270" r:id="Rab11557e24a74ae8"/>
+    <p:sldId xmlns:r="http://schemas.openxmlformats.org/officeDocument/2006/relationships" id="271" r:id="R3d9b8ff183884523"/>
+    <p:sldId xmlns:r="http://schemas.openxmlformats.org/officeDocument/2006/relationships" id="272" r:id="R64c7b6dd500c409e"/>
+    <p:sldId xmlns:r="http://schemas.openxmlformats.org/officeDocument/2006/relationships" id="273" r:id="Rf6b5b9600b994b57"/>
+    <p:sldId xmlns:r="http://schemas.openxmlformats.org/officeDocument/2006/relationships" id="274" r:id="R66dbb50d07054b8a"/>
+    <p:sldId xmlns:r="http://schemas.openxmlformats.org/officeDocument/2006/relationships" id="275" r:id="R448937d1687242ad"/>
+    <p:sldId xmlns:r="http://schemas.openxmlformats.org/officeDocument/2006/relationships" id="276" r:id="Ra46c63925d9b49dd"/>
+    <p:sldId xmlns:r="http://schemas.openxmlformats.org/officeDocument/2006/relationships" id="277" r:id="R0e37778dac8b40e6"/>
+    <p:sldId xmlns:r="http://schemas.openxmlformats.org/officeDocument/2006/relationships" id="278" r:id="R09b4663a71984cfa"/>
+    <p:sldId xmlns:r="http://schemas.openxmlformats.org/officeDocument/2006/relationships" id="279" r:id="R0f4b2437fe334bad"/>
+    <p:sldId xmlns:r="http://schemas.openxmlformats.org/officeDocument/2006/relationships" id="280" r:id="Raa57ccdeb3af4d83"/>
+    <p:sldId xmlns:r="http://schemas.openxmlformats.org/officeDocument/2006/relationships" id="281" r:id="R343cfbfd56e1495b"/>
+    <p:sldId xmlns:r="http://schemas.openxmlformats.org/officeDocument/2006/relationships" id="282" r:id="Rb1ec885d6bb14f90"/>
+    <p:sldId xmlns:r="http://schemas.openxmlformats.org/officeDocument/2006/relationships" id="283" r:id="Re64c461ba25b4ac6"/>
+    <p:sldId xmlns:r="http://schemas.openxmlformats.org/officeDocument/2006/relationships" id="284" r:id="R4710417c7d3b43f5"/>
+    <p:sldId xmlns:r="http://schemas.openxmlformats.org/officeDocument/2006/relationships" id="285" r:id="R753043d7c653472f"/>
+    <p:sldId xmlns:r="http://schemas.openxmlformats.org/officeDocument/2006/relationships" id="286" r:id="R40d27d50c94b4897"/>
+    <p:sldId xmlns:r="http://schemas.openxmlformats.org/officeDocument/2006/relationships" id="287" r:id="R0c3a43b31711425e"/>
+    <p:sldId xmlns:r="http://schemas.openxmlformats.org/officeDocument/2006/relationships" id="288" r:id="R454bd6fc9f5b4260"/>
+    <p:sldId xmlns:r="http://schemas.openxmlformats.org/officeDocument/2006/relationships" id="289" r:id="R56bc22b26d8a4252"/>
+    <p:sldId xmlns:r="http://schemas.openxmlformats.org/officeDocument/2006/relationships" id="290" r:id="R1d60d3a6f49a4622"/>
+    <p:sldId xmlns:r="http://schemas.openxmlformats.org/officeDocument/2006/relationships" id="291" r:id="Ra69e5e3aa94a4ed0"/>
+    <p:sldId xmlns:r="http://schemas.openxmlformats.org/officeDocument/2006/relationships" id="292" r:id="Rc3ec3d25838a4108"/>
+    <p:sldId xmlns:r="http://schemas.openxmlformats.org/officeDocument/2006/relationships" id="293" r:id="R9c706b8c17054834"/>
+    <p:sldId xmlns:r="http://schemas.openxmlformats.org/officeDocument/2006/relationships" id="294" r:id="Rba28ac6f361a4549"/>
+    <p:sldId xmlns:r="http://schemas.openxmlformats.org/officeDocument/2006/relationships" id="295" r:id="R04ce3f82ff504953"/>
+    <p:sldId xmlns:r="http://schemas.openxmlformats.org/officeDocument/2006/relationships" id="296" r:id="Rb5bc344c134b43b9"/>
+    <p:sldId xmlns:r="http://schemas.openxmlformats.org/officeDocument/2006/relationships" id="297" r:id="Re583643681734acd"/>
+    <p:sldId xmlns:r="http://schemas.openxmlformats.org/officeDocument/2006/relationships" id="298" r:id="R775987a390e74ddf"/>
+    <p:sldId xmlns:r="http://schemas.openxmlformats.org/officeDocument/2006/relationships" id="299" r:id="R133f4c403a8348ef"/>
+    <p:sldId xmlns:r="http://schemas.openxmlformats.org/officeDocument/2006/relationships" id="300" r:id="R84aaa2d70acf4171"/>
+    <p:sldId xmlns:r="http://schemas.openxmlformats.org/officeDocument/2006/relationships" id="301" r:id="Rbf2bf91f62f1493c"/>
+    <p:sldId xmlns:r="http://schemas.openxmlformats.org/officeDocument/2006/relationships" id="302" r:id="R3d6cb6e9f5fc48ad"/>
+    <p:sldId xmlns:r="http://schemas.openxmlformats.org/officeDocument/2006/relationships" id="303" r:id="Rb9cac2b06c014824"/>
+    <p:sldId xmlns:r="http://schemas.openxmlformats.org/officeDocument/2006/relationships" id="304" r:id="Ra4020e0b5620492d"/>
+    <p:sldId xmlns:r="http://schemas.openxmlformats.org/officeDocument/2006/relationships" id="305" r:id="R65c1be915e7c41cd"/>
+    <p:sldId xmlns:r="http://schemas.openxmlformats.org/officeDocument/2006/relationships" id="306" r:id="Rff75a2b729744109"/>
+    <p:sldId xmlns:r="http://schemas.openxmlformats.org/officeDocument/2006/relationships" id="307" r:id="Rdea0162f5a1249bf"/>
+    <p:sldId xmlns:r="http://schemas.openxmlformats.org/officeDocument/2006/relationships" id="308" r:id="R768fb5f4d4d94296"/>
+    <p:sldId xmlns:r="http://schemas.openxmlformats.org/officeDocument/2006/relationships" id="309" r:id="R4120dc184f3448a1"/>
+    <p:sldId xmlns:r="http://schemas.openxmlformats.org/officeDocument/2006/relationships" id="310" r:id="Rd40abc51a7d041a0"/>
+    <p:sldId xmlns:r="http://schemas.openxmlformats.org/officeDocument/2006/relationships" id="311" r:id="R85577f08de5a4f86"/>
+    <p:sldId xmlns:r="http://schemas.openxmlformats.org/officeDocument/2006/relationships" id="312" r:id="Rea2a55615e0a4db1"/>
+    <p:sldId xmlns:r="http://schemas.openxmlformats.org/officeDocument/2006/relationships" id="313" r:id="R51cffd5d731747df"/>
   </p:sldIdLst>
   <p:sldSz cx="12192000" cy="6858000"/>
   <p:notesSz cx="6858000" cy="9144000"/>
@@ -3649,6 +3656,468 @@
 </p:notes>
 </file>
 
+<file path=ppt/notesSlides/notesSlide52.xml><?xml version="1.0" encoding="utf-8"?>
+<p:notes xmlns:p="http://schemas.openxmlformats.org/presentationml/2006/main">
+  <p:cSld>
+    <p:spTree>
+      <p:nvGrpSpPr>
+        <p:cNvPr id="1" name=""/>
+        <p:cNvGrpSpPr/>
+        <p:nvPr/>
+      </p:nvGrpSpPr>
+      <p:grpSpPr>
+        <a:xfrm xmlns:a="http://schemas.openxmlformats.org/drawingml/2006/main"/>
+      </p:grpSpPr>
+      <p:sp>
+        <p:nvSpPr>
+          <p:cNvPr id="2" name="Slide Image Placeholder 1"/>
+          <p:cNvSpPr>
+            <a:spLocks xmlns:a="http://schemas.openxmlformats.org/drawingml/2006/main" noGrp="1"/>
+          </p:cNvSpPr>
+          <p:nvPr>
+            <p:ph type="sldImg" idx="0"/>
+          </p:nvPr>
+        </p:nvSpPr>
+        <p:spPr/>
+      </p:sp>
+      <p:sp>
+        <p:nvSpPr>
+          <p:cNvPr id="3" name="Notes Placeholder 2"/>
+          <p:cNvSpPr>
+            <a:spLocks xmlns:a="http://schemas.openxmlformats.org/drawingml/2006/main" noGrp="1"/>
+          </p:cNvSpPr>
+          <p:nvPr>
+            <p:ph type="body" idx="1"/>
+          </p:nvPr>
+        </p:nvSpPr>
+        <p:spPr/>
+        <p:txBody>
+          <a:bodyPr xmlns:a="http://schemas.openxmlformats.org/drawingml/2006/main"/>
+          <a:lstStyle xmlns:a="http://schemas.openxmlformats.org/drawingml/2006/main"/>
+          <a:p xmlns:a="http://schemas.openxmlformats.org/drawingml/2006/main"/>
+        </p:txBody>
+      </p:sp>
+      <p:sp>
+        <p:nvSpPr>
+          <p:cNvPr id="4" name="Slide Number Placeholder 3"/>
+          <p:cNvSpPr>
+            <a:spLocks xmlns:a="http://schemas.openxmlformats.org/drawingml/2006/main" noGrp="1"/>
+          </p:cNvSpPr>
+          <p:nvPr>
+            <p:ph type="sldNum" idx="5"/>
+          </p:nvPr>
+        </p:nvSpPr>
+        <p:spPr/>
+        <p:txBody>
+          <a:bodyPr xmlns:a="http://schemas.openxmlformats.org/drawingml/2006/main"/>
+          <a:lstStyle xmlns:a="http://schemas.openxmlformats.org/drawingml/2006/main"/>
+          <a:p xmlns:a="http://schemas.openxmlformats.org/drawingml/2006/main"/>
+        </p:txBody>
+      </p:sp>
+    </p:spTree>
+  </p:cSld>
+  <p:clrMapOvr>
+    <a:masterClrMapping xmlns:a="http://schemas.openxmlformats.org/drawingml/2006/main"/>
+  </p:clrMapOvr>
+</p:notes>
+</file>
+
+<file path=ppt/notesSlides/notesSlide53.xml><?xml version="1.0" encoding="utf-8"?>
+<p:notes xmlns:p="http://schemas.openxmlformats.org/presentationml/2006/main">
+  <p:cSld>
+    <p:spTree>
+      <p:nvGrpSpPr>
+        <p:cNvPr id="1" name=""/>
+        <p:cNvGrpSpPr/>
+        <p:nvPr/>
+      </p:nvGrpSpPr>
+      <p:grpSpPr>
+        <a:xfrm xmlns:a="http://schemas.openxmlformats.org/drawingml/2006/main"/>
+      </p:grpSpPr>
+      <p:sp>
+        <p:nvSpPr>
+          <p:cNvPr id="2" name="Slide Image Placeholder 1"/>
+          <p:cNvSpPr>
+            <a:spLocks xmlns:a="http://schemas.openxmlformats.org/drawingml/2006/main" noGrp="1"/>
+          </p:cNvSpPr>
+          <p:nvPr>
+            <p:ph type="sldImg" idx="0"/>
+          </p:nvPr>
+        </p:nvSpPr>
+        <p:spPr/>
+      </p:sp>
+      <p:sp>
+        <p:nvSpPr>
+          <p:cNvPr id="3" name="Notes Placeholder 2"/>
+          <p:cNvSpPr>
+            <a:spLocks xmlns:a="http://schemas.openxmlformats.org/drawingml/2006/main" noGrp="1"/>
+          </p:cNvSpPr>
+          <p:nvPr>
+            <p:ph type="body" idx="1"/>
+          </p:nvPr>
+        </p:nvSpPr>
+        <p:spPr/>
+        <p:txBody>
+          <a:bodyPr xmlns:a="http://schemas.openxmlformats.org/drawingml/2006/main"/>
+          <a:lstStyle xmlns:a="http://schemas.openxmlformats.org/drawingml/2006/main"/>
+          <a:p xmlns:a="http://schemas.openxmlformats.org/drawingml/2006/main"/>
+        </p:txBody>
+      </p:sp>
+      <p:sp>
+        <p:nvSpPr>
+          <p:cNvPr id="4" name="Slide Number Placeholder 3"/>
+          <p:cNvSpPr>
+            <a:spLocks xmlns:a="http://schemas.openxmlformats.org/drawingml/2006/main" noGrp="1"/>
+          </p:cNvSpPr>
+          <p:nvPr>
+            <p:ph type="sldNum" idx="5"/>
+          </p:nvPr>
+        </p:nvSpPr>
+        <p:spPr/>
+        <p:txBody>
+          <a:bodyPr xmlns:a="http://schemas.openxmlformats.org/drawingml/2006/main"/>
+          <a:lstStyle xmlns:a="http://schemas.openxmlformats.org/drawingml/2006/main"/>
+          <a:p xmlns:a="http://schemas.openxmlformats.org/drawingml/2006/main"/>
+        </p:txBody>
+      </p:sp>
+    </p:spTree>
+  </p:cSld>
+  <p:clrMapOvr>
+    <a:masterClrMapping xmlns:a="http://schemas.openxmlformats.org/drawingml/2006/main"/>
+  </p:clrMapOvr>
+</p:notes>
+</file>
+
+<file path=ppt/notesSlides/notesSlide54.xml><?xml version="1.0" encoding="utf-8"?>
+<p:notes xmlns:p="http://schemas.openxmlformats.org/presentationml/2006/main">
+  <p:cSld>
+    <p:spTree>
+      <p:nvGrpSpPr>
+        <p:cNvPr id="1" name=""/>
+        <p:cNvGrpSpPr/>
+        <p:nvPr/>
+      </p:nvGrpSpPr>
+      <p:grpSpPr>
+        <a:xfrm xmlns:a="http://schemas.openxmlformats.org/drawingml/2006/main"/>
+      </p:grpSpPr>
+      <p:sp>
+        <p:nvSpPr>
+          <p:cNvPr id="2" name="Slide Image Placeholder 1"/>
+          <p:cNvSpPr>
+            <a:spLocks xmlns:a="http://schemas.openxmlformats.org/drawingml/2006/main" noGrp="1"/>
+          </p:cNvSpPr>
+          <p:nvPr>
+            <p:ph type="sldImg" idx="0"/>
+          </p:nvPr>
+        </p:nvSpPr>
+        <p:spPr/>
+      </p:sp>
+      <p:sp>
+        <p:nvSpPr>
+          <p:cNvPr id="3" name="Notes Placeholder 2"/>
+          <p:cNvSpPr>
+            <a:spLocks xmlns:a="http://schemas.openxmlformats.org/drawingml/2006/main" noGrp="1"/>
+          </p:cNvSpPr>
+          <p:nvPr>
+            <p:ph type="body" idx="1"/>
+          </p:nvPr>
+        </p:nvSpPr>
+        <p:spPr/>
+        <p:txBody>
+          <a:bodyPr xmlns:a="http://schemas.openxmlformats.org/drawingml/2006/main"/>
+          <a:lstStyle xmlns:a="http://schemas.openxmlformats.org/drawingml/2006/main"/>
+          <a:p xmlns:a="http://schemas.openxmlformats.org/drawingml/2006/main"/>
+        </p:txBody>
+      </p:sp>
+      <p:sp>
+        <p:nvSpPr>
+          <p:cNvPr id="4" name="Slide Number Placeholder 3"/>
+          <p:cNvSpPr>
+            <a:spLocks xmlns:a="http://schemas.openxmlformats.org/drawingml/2006/main" noGrp="1"/>
+          </p:cNvSpPr>
+          <p:nvPr>
+            <p:ph type="sldNum" idx="5"/>
+          </p:nvPr>
+        </p:nvSpPr>
+        <p:spPr/>
+        <p:txBody>
+          <a:bodyPr xmlns:a="http://schemas.openxmlformats.org/drawingml/2006/main"/>
+          <a:lstStyle xmlns:a="http://schemas.openxmlformats.org/drawingml/2006/main"/>
+          <a:p xmlns:a="http://schemas.openxmlformats.org/drawingml/2006/main"/>
+        </p:txBody>
+      </p:sp>
+    </p:spTree>
+  </p:cSld>
+  <p:clrMapOvr>
+    <a:masterClrMapping xmlns:a="http://schemas.openxmlformats.org/drawingml/2006/main"/>
+  </p:clrMapOvr>
+</p:notes>
+</file>
+
+<file path=ppt/notesSlides/notesSlide55.xml><?xml version="1.0" encoding="utf-8"?>
+<p:notes xmlns:p="http://schemas.openxmlformats.org/presentationml/2006/main">
+  <p:cSld>
+    <p:spTree>
+      <p:nvGrpSpPr>
+        <p:cNvPr id="1" name=""/>
+        <p:cNvGrpSpPr/>
+        <p:nvPr/>
+      </p:nvGrpSpPr>
+      <p:grpSpPr>
+        <a:xfrm xmlns:a="http://schemas.openxmlformats.org/drawingml/2006/main"/>
+      </p:grpSpPr>
+      <p:sp>
+        <p:nvSpPr>
+          <p:cNvPr id="2" name="Slide Image Placeholder 1"/>
+          <p:cNvSpPr>
+            <a:spLocks xmlns:a="http://schemas.openxmlformats.org/drawingml/2006/main" noGrp="1"/>
+          </p:cNvSpPr>
+          <p:nvPr>
+            <p:ph type="sldImg" idx="0"/>
+          </p:nvPr>
+        </p:nvSpPr>
+        <p:spPr/>
+      </p:sp>
+      <p:sp>
+        <p:nvSpPr>
+          <p:cNvPr id="3" name="Notes Placeholder 2"/>
+          <p:cNvSpPr>
+            <a:spLocks xmlns:a="http://schemas.openxmlformats.org/drawingml/2006/main" noGrp="1"/>
+          </p:cNvSpPr>
+          <p:nvPr>
+            <p:ph type="body" idx="1"/>
+          </p:nvPr>
+        </p:nvSpPr>
+        <p:spPr/>
+        <p:txBody>
+          <a:bodyPr xmlns:a="http://schemas.openxmlformats.org/drawingml/2006/main"/>
+          <a:lstStyle xmlns:a="http://schemas.openxmlformats.org/drawingml/2006/main"/>
+          <a:p xmlns:a="http://schemas.openxmlformats.org/drawingml/2006/main"/>
+        </p:txBody>
+      </p:sp>
+      <p:sp>
+        <p:nvSpPr>
+          <p:cNvPr id="4" name="Slide Number Placeholder 3"/>
+          <p:cNvSpPr>
+            <a:spLocks xmlns:a="http://schemas.openxmlformats.org/drawingml/2006/main" noGrp="1"/>
+          </p:cNvSpPr>
+          <p:nvPr>
+            <p:ph type="sldNum" idx="5"/>
+          </p:nvPr>
+        </p:nvSpPr>
+        <p:spPr/>
+        <p:txBody>
+          <a:bodyPr xmlns:a="http://schemas.openxmlformats.org/drawingml/2006/main"/>
+          <a:lstStyle xmlns:a="http://schemas.openxmlformats.org/drawingml/2006/main"/>
+          <a:p xmlns:a="http://schemas.openxmlformats.org/drawingml/2006/main"/>
+        </p:txBody>
+      </p:sp>
+    </p:spTree>
+  </p:cSld>
+  <p:clrMapOvr>
+    <a:masterClrMapping xmlns:a="http://schemas.openxmlformats.org/drawingml/2006/main"/>
+  </p:clrMapOvr>
+</p:notes>
+</file>
+
+<file path=ppt/notesSlides/notesSlide56.xml><?xml version="1.0" encoding="utf-8"?>
+<p:notes xmlns:p="http://schemas.openxmlformats.org/presentationml/2006/main">
+  <p:cSld>
+    <p:spTree>
+      <p:nvGrpSpPr>
+        <p:cNvPr id="1" name=""/>
+        <p:cNvGrpSpPr/>
+        <p:nvPr/>
+      </p:nvGrpSpPr>
+      <p:grpSpPr>
+        <a:xfrm xmlns:a="http://schemas.openxmlformats.org/drawingml/2006/main"/>
+      </p:grpSpPr>
+      <p:sp>
+        <p:nvSpPr>
+          <p:cNvPr id="2" name="Slide Image Placeholder 1"/>
+          <p:cNvSpPr>
+            <a:spLocks xmlns:a="http://schemas.openxmlformats.org/drawingml/2006/main" noGrp="1"/>
+          </p:cNvSpPr>
+          <p:nvPr>
+            <p:ph type="sldImg" idx="0"/>
+          </p:nvPr>
+        </p:nvSpPr>
+        <p:spPr/>
+      </p:sp>
+      <p:sp>
+        <p:nvSpPr>
+          <p:cNvPr id="3" name="Notes Placeholder 2"/>
+          <p:cNvSpPr>
+            <a:spLocks xmlns:a="http://schemas.openxmlformats.org/drawingml/2006/main" noGrp="1"/>
+          </p:cNvSpPr>
+          <p:nvPr>
+            <p:ph type="body" idx="1"/>
+          </p:nvPr>
+        </p:nvSpPr>
+        <p:spPr/>
+        <p:txBody>
+          <a:bodyPr xmlns:a="http://schemas.openxmlformats.org/drawingml/2006/main"/>
+          <a:lstStyle xmlns:a="http://schemas.openxmlformats.org/drawingml/2006/main"/>
+          <a:p xmlns:a="http://schemas.openxmlformats.org/drawingml/2006/main"/>
+        </p:txBody>
+      </p:sp>
+      <p:sp>
+        <p:nvSpPr>
+          <p:cNvPr id="4" name="Slide Number Placeholder 3"/>
+          <p:cNvSpPr>
+            <a:spLocks xmlns:a="http://schemas.openxmlformats.org/drawingml/2006/main" noGrp="1"/>
+          </p:cNvSpPr>
+          <p:nvPr>
+            <p:ph type="sldNum" idx="5"/>
+          </p:nvPr>
+        </p:nvSpPr>
+        <p:spPr/>
+        <p:txBody>
+          <a:bodyPr xmlns:a="http://schemas.openxmlformats.org/drawingml/2006/main"/>
+          <a:lstStyle xmlns:a="http://schemas.openxmlformats.org/drawingml/2006/main"/>
+          <a:p xmlns:a="http://schemas.openxmlformats.org/drawingml/2006/main"/>
+        </p:txBody>
+      </p:sp>
+    </p:spTree>
+  </p:cSld>
+  <p:clrMapOvr>
+    <a:masterClrMapping xmlns:a="http://schemas.openxmlformats.org/drawingml/2006/main"/>
+  </p:clrMapOvr>
+</p:notes>
+</file>
+
+<file path=ppt/notesSlides/notesSlide57.xml><?xml version="1.0" encoding="utf-8"?>
+<p:notes xmlns:p="http://schemas.openxmlformats.org/presentationml/2006/main">
+  <p:cSld>
+    <p:spTree>
+      <p:nvGrpSpPr>
+        <p:cNvPr id="1" name=""/>
+        <p:cNvGrpSpPr/>
+        <p:nvPr/>
+      </p:nvGrpSpPr>
+      <p:grpSpPr>
+        <a:xfrm xmlns:a="http://schemas.openxmlformats.org/drawingml/2006/main"/>
+      </p:grpSpPr>
+      <p:sp>
+        <p:nvSpPr>
+          <p:cNvPr id="2" name="Slide Image Placeholder 1"/>
+          <p:cNvSpPr>
+            <a:spLocks xmlns:a="http://schemas.openxmlformats.org/drawingml/2006/main" noGrp="1"/>
+          </p:cNvSpPr>
+          <p:nvPr>
+            <p:ph type="sldImg" idx="0"/>
+          </p:nvPr>
+        </p:nvSpPr>
+        <p:spPr/>
+      </p:sp>
+      <p:sp>
+        <p:nvSpPr>
+          <p:cNvPr id="3" name="Notes Placeholder 2"/>
+          <p:cNvSpPr>
+            <a:spLocks xmlns:a="http://schemas.openxmlformats.org/drawingml/2006/main" noGrp="1"/>
+          </p:cNvSpPr>
+          <p:nvPr>
+            <p:ph type="body" idx="1"/>
+          </p:nvPr>
+        </p:nvSpPr>
+        <p:spPr/>
+        <p:txBody>
+          <a:bodyPr xmlns:a="http://schemas.openxmlformats.org/drawingml/2006/main"/>
+          <a:lstStyle xmlns:a="http://schemas.openxmlformats.org/drawingml/2006/main"/>
+          <a:p xmlns:a="http://schemas.openxmlformats.org/drawingml/2006/main"/>
+        </p:txBody>
+      </p:sp>
+      <p:sp>
+        <p:nvSpPr>
+          <p:cNvPr id="4" name="Slide Number Placeholder 3"/>
+          <p:cNvSpPr>
+            <a:spLocks xmlns:a="http://schemas.openxmlformats.org/drawingml/2006/main" noGrp="1"/>
+          </p:cNvSpPr>
+          <p:nvPr>
+            <p:ph type="sldNum" idx="5"/>
+          </p:nvPr>
+        </p:nvSpPr>
+        <p:spPr/>
+        <p:txBody>
+          <a:bodyPr xmlns:a="http://schemas.openxmlformats.org/drawingml/2006/main"/>
+          <a:lstStyle xmlns:a="http://schemas.openxmlformats.org/drawingml/2006/main"/>
+          <a:p xmlns:a="http://schemas.openxmlformats.org/drawingml/2006/main"/>
+        </p:txBody>
+      </p:sp>
+    </p:spTree>
+  </p:cSld>
+  <p:clrMapOvr>
+    <a:masterClrMapping xmlns:a="http://schemas.openxmlformats.org/drawingml/2006/main"/>
+  </p:clrMapOvr>
+</p:notes>
+</file>
+
+<file path=ppt/notesSlides/notesSlide58.xml><?xml version="1.0" encoding="utf-8"?>
+<p:notes xmlns:p="http://schemas.openxmlformats.org/presentationml/2006/main">
+  <p:cSld>
+    <p:spTree>
+      <p:nvGrpSpPr>
+        <p:cNvPr id="1" name=""/>
+        <p:cNvGrpSpPr/>
+        <p:nvPr/>
+      </p:nvGrpSpPr>
+      <p:grpSpPr>
+        <a:xfrm xmlns:a="http://schemas.openxmlformats.org/drawingml/2006/main"/>
+      </p:grpSpPr>
+      <p:sp>
+        <p:nvSpPr>
+          <p:cNvPr id="2" name="Slide Image Placeholder 1"/>
+          <p:cNvSpPr>
+            <a:spLocks xmlns:a="http://schemas.openxmlformats.org/drawingml/2006/main" noGrp="1"/>
+          </p:cNvSpPr>
+          <p:nvPr>
+            <p:ph type="sldImg" idx="0"/>
+          </p:nvPr>
+        </p:nvSpPr>
+        <p:spPr/>
+      </p:sp>
+      <p:sp>
+        <p:nvSpPr>
+          <p:cNvPr id="3" name="Notes Placeholder 2"/>
+          <p:cNvSpPr>
+            <a:spLocks xmlns:a="http://schemas.openxmlformats.org/drawingml/2006/main" noGrp="1"/>
+          </p:cNvSpPr>
+          <p:nvPr>
+            <p:ph type="body" idx="1"/>
+          </p:nvPr>
+        </p:nvSpPr>
+        <p:spPr/>
+        <p:txBody>
+          <a:bodyPr xmlns:a="http://schemas.openxmlformats.org/drawingml/2006/main"/>
+          <a:lstStyle xmlns:a="http://schemas.openxmlformats.org/drawingml/2006/main"/>
+          <a:p xmlns:a="http://schemas.openxmlformats.org/drawingml/2006/main"/>
+        </p:txBody>
+      </p:sp>
+      <p:sp>
+        <p:nvSpPr>
+          <p:cNvPr id="4" name="Slide Number Placeholder 3"/>
+          <p:cNvSpPr>
+            <a:spLocks xmlns:a="http://schemas.openxmlformats.org/drawingml/2006/main" noGrp="1"/>
+          </p:cNvSpPr>
+          <p:nvPr>
+            <p:ph type="sldNum" idx="5"/>
+          </p:nvPr>
+        </p:nvSpPr>
+        <p:spPr/>
+        <p:txBody>
+          <a:bodyPr xmlns:a="http://schemas.openxmlformats.org/drawingml/2006/main"/>
+          <a:lstStyle xmlns:a="http://schemas.openxmlformats.org/drawingml/2006/main"/>
+          <a:p xmlns:a="http://schemas.openxmlformats.org/drawingml/2006/main"/>
+        </p:txBody>
+      </p:sp>
+    </p:spTree>
+  </p:cSld>
+  <p:clrMapOvr>
+    <a:masterClrMapping xmlns:a="http://schemas.openxmlformats.org/drawingml/2006/main"/>
+  </p:clrMapOvr>
+</p:notes>
+</file>
+
 <file path=ppt/notesSlides/notesSlide6.xml><?xml version="1.0" encoding="utf-8"?>
 <p:notes xmlns:p="http://schemas.openxmlformats.org/presentationml/2006/main">
   <p:cSld>
@@ -3951,7 +4420,7 @@
   </p:cSld>
   <p:clrMap bg1="lt1" tx1="dk1" bg2="lt2" tx2="dk2" accent1="accent1" accent2="accent2" accent3="accent3" accent4="accent4" accent5="accent5" accent6="accent6" hlink="hlink" folHlink="folHlink"/>
   <p:sldLayoutIdLst>
-    <p:sldLayoutId xmlns:r="http://schemas.openxmlformats.org/officeDocument/2006/relationships" id="2147483649" r:id="R0e83c9bdbed44839"/>
+    <p:sldLayoutId xmlns:r="http://schemas.openxmlformats.org/officeDocument/2006/relationships" id="2147483649" r:id="R4a807c54dac74ea5"/>
   </p:sldLayoutIdLst>
   <p:txStyles>
     <p:titleStyle>
@@ -4502,7 +4971,7 @@
           <p:cNvPr id="1" name="">
             <a:extLst xmlns:a="http://schemas.openxmlformats.org/drawingml/2006/main">
               <a:ext uri="{FF2B5EF4-FFF2-40B4-BE49-F238E27FC236}">
-                <a16:creationId xmlns:a16="http://schemas.microsoft.com/office/drawing/2014/main" id="{73BF4C03-BD24-4994-98F1-D5E936A05EC2}"/>
+                <a16:creationId xmlns:a16="http://schemas.microsoft.com/office/drawing/2014/main" id="{CFB2843F-F617-4221-8E21-A420332C9007}"/>
               </a:ext>
             </a:extLst>
           </p:cNvPr>
@@ -4552,7 +5021,7 @@
           <p:cNvPr id="2" name="">
             <a:extLst xmlns:a="http://schemas.openxmlformats.org/drawingml/2006/main">
               <a:ext uri="{FF2B5EF4-FFF2-40B4-BE49-F238E27FC236}">
-                <a16:creationId xmlns:a16="http://schemas.microsoft.com/office/drawing/2014/main" id="{DCF85215-0EE5-4062-AF9F-F85CC5382ECA}"/>
+                <a16:creationId xmlns:a16="http://schemas.microsoft.com/office/drawing/2014/main" id="{DF6BBC0A-1509-41A0-877A-C45F8FBEAACE}"/>
               </a:ext>
             </a:extLst>
           </p:cNvPr>
@@ -4602,7 +5071,7 @@
           <p:cNvPr id="3" name="">
             <a:extLst xmlns:a="http://schemas.openxmlformats.org/drawingml/2006/main">
               <a:ext uri="{FF2B5EF4-FFF2-40B4-BE49-F238E27FC236}">
-                <a16:creationId xmlns:a16="http://schemas.microsoft.com/office/drawing/2014/main" id="{FF2CE7B3-0B6F-4CA1-B511-83C5723AD3A1}"/>
+                <a16:creationId xmlns:a16="http://schemas.microsoft.com/office/drawing/2014/main" id="{A7DE4C64-65A5-42CD-B321-1D5B299AC234}"/>
               </a:ext>
             </a:extLst>
           </p:cNvPr>
@@ -4652,7 +5121,7 @@
           <p:cNvPr id="4" name="">
             <a:extLst xmlns:a="http://schemas.openxmlformats.org/drawingml/2006/main">
               <a:ext uri="{FF2B5EF4-FFF2-40B4-BE49-F238E27FC236}">
-                <a16:creationId xmlns:a16="http://schemas.microsoft.com/office/drawing/2014/main" id="{EB3F880F-8928-48EF-B63B-24809325D7B7}"/>
+                <a16:creationId xmlns:a16="http://schemas.microsoft.com/office/drawing/2014/main" id="{EF36AE39-0A7B-4060-92E3-716BC86F56F7}"/>
               </a:ext>
             </a:extLst>
           </p:cNvPr>
@@ -4683,7 +5152,7 @@
           <p:cNvPr id="5" name="">
             <a:extLst xmlns:a="http://schemas.openxmlformats.org/drawingml/2006/main">
               <a:ext uri="{FF2B5EF4-FFF2-40B4-BE49-F238E27FC236}">
-                <a16:creationId xmlns:a16="http://schemas.microsoft.com/office/drawing/2014/main" id="{067F2538-0C4B-4CD5-BE5A-01F40E401478}"/>
+                <a16:creationId xmlns:a16="http://schemas.microsoft.com/office/drawing/2014/main" id="{DB1EDE20-C9CA-4E59-A794-EBDB48BCDBDF}"/>
               </a:ext>
             </a:extLst>
           </p:cNvPr>
@@ -4733,7 +5202,7 @@
           <p:cNvPr id="6" name="">
             <a:extLst xmlns:a="http://schemas.openxmlformats.org/drawingml/2006/main">
               <a:ext uri="{FF2B5EF4-FFF2-40B4-BE49-F238E27FC236}">
-                <a16:creationId xmlns:a16="http://schemas.microsoft.com/office/drawing/2014/main" id="{99D6148D-8CF6-42E7-BC5E-7E943F6DF214}"/>
+                <a16:creationId xmlns:a16="http://schemas.microsoft.com/office/drawing/2014/main" id="{D27CC79D-2C35-476B-8904-135629AB4F59}"/>
               </a:ext>
             </a:extLst>
           </p:cNvPr>
@@ -4764,7 +5233,7 @@
           <p:cNvPr id="7" name="">
             <a:extLst xmlns:a="http://schemas.openxmlformats.org/drawingml/2006/main">
               <a:ext uri="{FF2B5EF4-FFF2-40B4-BE49-F238E27FC236}">
-                <a16:creationId xmlns:a16="http://schemas.microsoft.com/office/drawing/2014/main" id="{31C6792C-95FD-4A00-8AFB-C57AC3FF6A74}"/>
+                <a16:creationId xmlns:a16="http://schemas.microsoft.com/office/drawing/2014/main" id="{C44095F6-2238-4EB2-9455-3078919CC86A}"/>
               </a:ext>
             </a:extLst>
           </p:cNvPr>
@@ -4814,7 +5283,7 @@
           <p:cNvPr id="8" name="">
             <a:extLst xmlns:a="http://schemas.openxmlformats.org/drawingml/2006/main">
               <a:ext uri="{FF2B5EF4-FFF2-40B4-BE49-F238E27FC236}">
-                <a16:creationId xmlns:a16="http://schemas.microsoft.com/office/drawing/2014/main" id="{0EB8172D-454A-4429-BD4D-AB0D85910879}"/>
+                <a16:creationId xmlns:a16="http://schemas.microsoft.com/office/drawing/2014/main" id="{7C65A6E6-BAF2-4277-801F-736DDE8F3CE3}"/>
               </a:ext>
             </a:extLst>
           </p:cNvPr>
@@ -4896,7 +5365,7 @@
     </p:spTree>
     <p:extLst>
       <p:ext uri="{BB962C8B-B14F-4D97-AF65-F5344CB8AC3E}">
-        <p14:creationId xmlns:p14="http://schemas.microsoft.com/office/powerpoint/2010/main" val="781756819"/>
+        <p14:creationId xmlns:p14="http://schemas.microsoft.com/office/powerpoint/2010/main" val="187323191"/>
       </p:ext>
     </p:extLst>
   </p:cSld>
@@ -4927,7 +5396,7 @@
           <p:cNvPr id="1" name="">
             <a:extLst xmlns:a="http://schemas.openxmlformats.org/drawingml/2006/main">
               <a:ext uri="{FF2B5EF4-FFF2-40B4-BE49-F238E27FC236}">
-                <a16:creationId xmlns:a16="http://schemas.microsoft.com/office/drawing/2014/main" id="{D6389B64-87DC-42B0-8E94-BD4EA7731CD4}"/>
+                <a16:creationId xmlns:a16="http://schemas.microsoft.com/office/drawing/2014/main" id="{A05F532F-F478-42EC-A51F-4FCC7891A02B}"/>
               </a:ext>
             </a:extLst>
           </p:cNvPr>
@@ -4977,7 +5446,7 @@
           <p:cNvPr id="2" name="">
             <a:extLst xmlns:a="http://schemas.openxmlformats.org/drawingml/2006/main">
               <a:ext uri="{FF2B5EF4-FFF2-40B4-BE49-F238E27FC236}">
-                <a16:creationId xmlns:a16="http://schemas.microsoft.com/office/drawing/2014/main" id="{FFF3FC38-8E52-4600-8128-890A438B5FF8}"/>
+                <a16:creationId xmlns:a16="http://schemas.microsoft.com/office/drawing/2014/main" id="{0EB16179-8BC8-439D-B77F-8E078CE5BDDF}"/>
               </a:ext>
             </a:extLst>
           </p:cNvPr>
@@ -5027,7 +5496,7 @@
           <p:cNvPr id="3" name="">
             <a:extLst xmlns:a="http://schemas.openxmlformats.org/drawingml/2006/main">
               <a:ext uri="{FF2B5EF4-FFF2-40B4-BE49-F238E27FC236}">
-                <a16:creationId xmlns:a16="http://schemas.microsoft.com/office/drawing/2014/main" id="{9D45F357-2009-43C3-ACF5-E157B18A12B5}"/>
+                <a16:creationId xmlns:a16="http://schemas.microsoft.com/office/drawing/2014/main" id="{7ACB1B6E-F137-468D-B1C2-256AF53BCAEC}"/>
               </a:ext>
             </a:extLst>
           </p:cNvPr>
@@ -5058,7 +5527,7 @@
           <p:cNvPr id="4" name="">
             <a:extLst xmlns:a="http://schemas.openxmlformats.org/drawingml/2006/main">
               <a:ext uri="{FF2B5EF4-FFF2-40B4-BE49-F238E27FC236}">
-                <a16:creationId xmlns:a16="http://schemas.microsoft.com/office/drawing/2014/main" id="{19CFFBF8-C23A-4113-8A9C-C8B97908D14F}"/>
+                <a16:creationId xmlns:a16="http://schemas.microsoft.com/office/drawing/2014/main" id="{2027988B-9BED-4FEF-9C7E-163E6B607680}"/>
               </a:ext>
             </a:extLst>
           </p:cNvPr>
@@ -5108,7 +5577,7 @@
           <p:cNvPr id="5" name="">
             <a:extLst xmlns:a="http://schemas.openxmlformats.org/drawingml/2006/main">
               <a:ext uri="{FF2B5EF4-FFF2-40B4-BE49-F238E27FC236}">
-                <a16:creationId xmlns:a16="http://schemas.microsoft.com/office/drawing/2014/main" id="{42C0002A-D51B-46CD-B2F8-ADD982E2731A}"/>
+                <a16:creationId xmlns:a16="http://schemas.microsoft.com/office/drawing/2014/main" id="{C0363BEE-B5C3-4761-BADC-378E928CC2F2}"/>
               </a:ext>
             </a:extLst>
           </p:cNvPr>
@@ -5158,7 +5627,7 @@
           <p:cNvPr id="6" name="">
             <a:extLst xmlns:a="http://schemas.openxmlformats.org/drawingml/2006/main">
               <a:ext uri="{FF2B5EF4-FFF2-40B4-BE49-F238E27FC236}">
-                <a16:creationId xmlns:a16="http://schemas.microsoft.com/office/drawing/2014/main" id="{215701BC-6050-4709-8C3E-DCD8071814AB}"/>
+                <a16:creationId xmlns:a16="http://schemas.microsoft.com/office/drawing/2014/main" id="{58444BAF-2AB4-4692-846E-424C70FCC6ED}"/>
               </a:ext>
             </a:extLst>
           </p:cNvPr>
@@ -5208,7 +5677,7 @@
           <p:cNvPr id="7" name="">
             <a:extLst xmlns:a="http://schemas.openxmlformats.org/drawingml/2006/main">
               <a:ext uri="{FF2B5EF4-FFF2-40B4-BE49-F238E27FC236}">
-                <a16:creationId xmlns:a16="http://schemas.microsoft.com/office/drawing/2014/main" id="{833E4770-E6AF-429E-9A9F-8520B7010F40}"/>
+                <a16:creationId xmlns:a16="http://schemas.microsoft.com/office/drawing/2014/main" id="{1FF2E3C3-7FB7-4E4D-ACB6-272EF79ACB03}"/>
               </a:ext>
             </a:extLst>
           </p:cNvPr>
@@ -5258,7 +5727,7 @@
           <p:cNvPr id="8" name="">
             <a:extLst xmlns:a="http://schemas.openxmlformats.org/drawingml/2006/main">
               <a:ext uri="{FF2B5EF4-FFF2-40B4-BE49-F238E27FC236}">
-                <a16:creationId xmlns:a16="http://schemas.microsoft.com/office/drawing/2014/main" id="{6F122BC7-7883-4144-93F9-AE26FB0FB739}"/>
+                <a16:creationId xmlns:a16="http://schemas.microsoft.com/office/drawing/2014/main" id="{C04C153D-EF4A-4A34-AF93-74592989807C}"/>
               </a:ext>
             </a:extLst>
           </p:cNvPr>
@@ -5308,7 +5777,7 @@
           <p:cNvPr id="9" name="">
             <a:extLst xmlns:a="http://schemas.openxmlformats.org/drawingml/2006/main">
               <a:ext uri="{FF2B5EF4-FFF2-40B4-BE49-F238E27FC236}">
-                <a16:creationId xmlns:a16="http://schemas.microsoft.com/office/drawing/2014/main" id="{9589DF8F-ED49-4039-99E2-F5793D8DBCD3}"/>
+                <a16:creationId xmlns:a16="http://schemas.microsoft.com/office/drawing/2014/main" id="{7903EB53-E2C9-40D0-AB46-9FEFD9D122F0}"/>
               </a:ext>
             </a:extLst>
           </p:cNvPr>
@@ -5358,7 +5827,7 @@
           <p:cNvPr id="10" name="">
             <a:extLst xmlns:a="http://schemas.openxmlformats.org/drawingml/2006/main">
               <a:ext uri="{FF2B5EF4-FFF2-40B4-BE49-F238E27FC236}">
-                <a16:creationId xmlns:a16="http://schemas.microsoft.com/office/drawing/2014/main" id="{00CB41C7-1DD0-4C32-B744-7FF6CF5547D2}"/>
+                <a16:creationId xmlns:a16="http://schemas.microsoft.com/office/drawing/2014/main" id="{5470C5FB-0699-47B2-8F0A-636521A85804}"/>
               </a:ext>
             </a:extLst>
           </p:cNvPr>
@@ -5408,7 +5877,7 @@
           <p:cNvPr id="11" name="">
             <a:extLst xmlns:a="http://schemas.openxmlformats.org/drawingml/2006/main">
               <a:ext uri="{FF2B5EF4-FFF2-40B4-BE49-F238E27FC236}">
-                <a16:creationId xmlns:a16="http://schemas.microsoft.com/office/drawing/2014/main" id="{C5B33BC2-FF6F-4962-9341-A31A466FB091}"/>
+                <a16:creationId xmlns:a16="http://schemas.microsoft.com/office/drawing/2014/main" id="{75876AD4-649A-41AE-83E4-E1EECB9E7A3B}"/>
               </a:ext>
             </a:extLst>
           </p:cNvPr>
@@ -5458,7 +5927,7 @@
           <p:cNvPr id="12" name="">
             <a:extLst xmlns:a="http://schemas.openxmlformats.org/drawingml/2006/main">
               <a:ext uri="{FF2B5EF4-FFF2-40B4-BE49-F238E27FC236}">
-                <a16:creationId xmlns:a16="http://schemas.microsoft.com/office/drawing/2014/main" id="{AB227A32-22BB-4348-B7A5-7BBE03F510FD}"/>
+                <a16:creationId xmlns:a16="http://schemas.microsoft.com/office/drawing/2014/main" id="{A7E1817E-66C3-4710-B26A-F5CA7CD083B7}"/>
               </a:ext>
             </a:extLst>
           </p:cNvPr>
@@ -5508,7 +5977,7 @@
           <p:cNvPr id="13" name="">
             <a:extLst xmlns:a="http://schemas.openxmlformats.org/drawingml/2006/main">
               <a:ext uri="{FF2B5EF4-FFF2-40B4-BE49-F238E27FC236}">
-                <a16:creationId xmlns:a16="http://schemas.microsoft.com/office/drawing/2014/main" id="{99430C4B-EA71-45FE-B340-4FD97AE0F192}"/>
+                <a16:creationId xmlns:a16="http://schemas.microsoft.com/office/drawing/2014/main" id="{4FFADB5B-4105-4D7B-A5E1-CA71C3A91361}"/>
               </a:ext>
             </a:extLst>
           </p:cNvPr>
@@ -5541,7 +6010,7 @@
           <p:cNvPr id="14" name="">
             <a:extLst xmlns:a="http://schemas.openxmlformats.org/drawingml/2006/main">
               <a:ext uri="{FF2B5EF4-FFF2-40B4-BE49-F238E27FC236}">
-                <a16:creationId xmlns:a16="http://schemas.microsoft.com/office/drawing/2014/main" id="{585E83BE-1607-45F4-A69F-E8947CCB753B}"/>
+                <a16:creationId xmlns:a16="http://schemas.microsoft.com/office/drawing/2014/main" id="{FA478E5F-DFBF-4166-A200-B967B018DFAF}"/>
               </a:ext>
             </a:extLst>
           </p:cNvPr>
@@ -5591,7 +6060,7 @@
           <p:cNvPr id="15" name="">
             <a:extLst xmlns:a="http://schemas.openxmlformats.org/drawingml/2006/main">
               <a:ext uri="{FF2B5EF4-FFF2-40B4-BE49-F238E27FC236}">
-                <a16:creationId xmlns:a16="http://schemas.microsoft.com/office/drawing/2014/main" id="{A70840A2-F7FE-4673-A070-122072C40616}"/>
+                <a16:creationId xmlns:a16="http://schemas.microsoft.com/office/drawing/2014/main" id="{F44CAE50-970A-4468-A2F2-87B545C9AFAA}"/>
               </a:ext>
             </a:extLst>
           </p:cNvPr>
@@ -5639,7 +6108,7 @@
     </p:spTree>
     <p:extLst>
       <p:ext uri="{BB962C8B-B14F-4D97-AF65-F5344CB8AC3E}">
-        <p14:creationId xmlns:p14="http://schemas.microsoft.com/office/powerpoint/2010/main" val="873616243"/>
+        <p14:creationId xmlns:p14="http://schemas.microsoft.com/office/powerpoint/2010/main" val="423034175"/>
       </p:ext>
     </p:extLst>
   </p:cSld>
@@ -5670,7 +6139,7 @@
           <p:cNvPr id="1" name="">
             <a:extLst xmlns:a="http://schemas.openxmlformats.org/drawingml/2006/main">
               <a:ext uri="{FF2B5EF4-FFF2-40B4-BE49-F238E27FC236}">
-                <a16:creationId xmlns:a16="http://schemas.microsoft.com/office/drawing/2014/main" id="{1010AD27-E036-42BF-B989-B8D569759E9F}"/>
+                <a16:creationId xmlns:a16="http://schemas.microsoft.com/office/drawing/2014/main" id="{6CC82100-C3AF-416C-B756-1E10CD964757}"/>
               </a:ext>
             </a:extLst>
           </p:cNvPr>
@@ -5720,7 +6189,7 @@
           <p:cNvPr id="2" name="">
             <a:extLst xmlns:a="http://schemas.openxmlformats.org/drawingml/2006/main">
               <a:ext uri="{FF2B5EF4-FFF2-40B4-BE49-F238E27FC236}">
-                <a16:creationId xmlns:a16="http://schemas.microsoft.com/office/drawing/2014/main" id="{6B690CF1-4D1B-4DD5-9F01-8E2791BC8F17}"/>
+                <a16:creationId xmlns:a16="http://schemas.microsoft.com/office/drawing/2014/main" id="{91A5F9B4-1911-4144-8C2A-94BFF0637C39}"/>
               </a:ext>
             </a:extLst>
           </p:cNvPr>
@@ -5770,7 +6239,7 @@
           <p:cNvPr id="3" name="">
             <a:extLst xmlns:a="http://schemas.openxmlformats.org/drawingml/2006/main">
               <a:ext uri="{FF2B5EF4-FFF2-40B4-BE49-F238E27FC236}">
-                <a16:creationId xmlns:a16="http://schemas.microsoft.com/office/drawing/2014/main" id="{0F4BED90-F5A4-49D5-A41B-3A23358AC5AA}"/>
+                <a16:creationId xmlns:a16="http://schemas.microsoft.com/office/drawing/2014/main" id="{2F20EDDB-9C5D-4A8B-939B-1DEE66830795}"/>
               </a:ext>
             </a:extLst>
           </p:cNvPr>
@@ -5801,7 +6270,7 @@
           <p:cNvPr id="4" name="">
             <a:extLst xmlns:a="http://schemas.openxmlformats.org/drawingml/2006/main">
               <a:ext uri="{FF2B5EF4-FFF2-40B4-BE49-F238E27FC236}">
-                <a16:creationId xmlns:a16="http://schemas.microsoft.com/office/drawing/2014/main" id="{A0919E19-1226-4C13-AE76-58EF40BAFA75}"/>
+                <a16:creationId xmlns:a16="http://schemas.microsoft.com/office/drawing/2014/main" id="{1C6DD615-3F03-4635-B5CA-E79FEFD19BB7}"/>
               </a:ext>
             </a:extLst>
           </p:cNvPr>
@@ -5851,7 +6320,7 @@
           <p:cNvPr id="5" name="">
             <a:extLst xmlns:a="http://schemas.openxmlformats.org/drawingml/2006/main">
               <a:ext uri="{FF2B5EF4-FFF2-40B4-BE49-F238E27FC236}">
-                <a16:creationId xmlns:a16="http://schemas.microsoft.com/office/drawing/2014/main" id="{A8573F9C-1FD2-4C24-9B91-E9BC620E69FD}"/>
+                <a16:creationId xmlns:a16="http://schemas.microsoft.com/office/drawing/2014/main" id="{3843E9E2-5DA1-4B88-A994-62865FAB7165}"/>
               </a:ext>
             </a:extLst>
           </p:cNvPr>
@@ -5882,7 +6351,7 @@
           <p:cNvPr id="6" name="">
             <a:extLst xmlns:a="http://schemas.openxmlformats.org/drawingml/2006/main">
               <a:ext uri="{FF2B5EF4-FFF2-40B4-BE49-F238E27FC236}">
-                <a16:creationId xmlns:a16="http://schemas.microsoft.com/office/drawing/2014/main" id="{363025DE-399D-4EC8-AD78-235E7390DA6E}"/>
+                <a16:creationId xmlns:a16="http://schemas.microsoft.com/office/drawing/2014/main" id="{3D999B94-3387-44D0-B809-CA9AEC02BC0C}"/>
               </a:ext>
             </a:extLst>
           </p:cNvPr>
@@ -5932,7 +6401,7 @@
           <p:cNvPr id="7" name="">
             <a:extLst xmlns:a="http://schemas.openxmlformats.org/drawingml/2006/main">
               <a:ext uri="{FF2B5EF4-FFF2-40B4-BE49-F238E27FC236}">
-                <a16:creationId xmlns:a16="http://schemas.microsoft.com/office/drawing/2014/main" id="{3DB273C0-70EF-419D-BA57-1CDAE9507401}"/>
+                <a16:creationId xmlns:a16="http://schemas.microsoft.com/office/drawing/2014/main" id="{D51E6C94-5B57-4729-A1E5-007BD66F906A}"/>
               </a:ext>
             </a:extLst>
           </p:cNvPr>
@@ -5980,7 +6449,7 @@
     </p:spTree>
     <p:extLst>
       <p:ext uri="{BB962C8B-B14F-4D97-AF65-F5344CB8AC3E}">
-        <p14:creationId xmlns:p14="http://schemas.microsoft.com/office/powerpoint/2010/main" val="10687849"/>
+        <p14:creationId xmlns:p14="http://schemas.microsoft.com/office/powerpoint/2010/main" val="984583940"/>
       </p:ext>
     </p:extLst>
   </p:cSld>
@@ -6011,7 +6480,7 @@
           <p:cNvPr id="1" name="">
             <a:extLst xmlns:a="http://schemas.openxmlformats.org/drawingml/2006/main">
               <a:ext uri="{FF2B5EF4-FFF2-40B4-BE49-F238E27FC236}">
-                <a16:creationId xmlns:a16="http://schemas.microsoft.com/office/drawing/2014/main" id="{606CF90D-0196-40D1-AEBC-6BCF604F5D1F}"/>
+                <a16:creationId xmlns:a16="http://schemas.microsoft.com/office/drawing/2014/main" id="{F21A657C-7EDD-4C7E-AC47-86BCE029F07E}"/>
               </a:ext>
             </a:extLst>
           </p:cNvPr>
@@ -6061,7 +6530,7 @@
           <p:cNvPr id="2" name="">
             <a:extLst xmlns:a="http://schemas.openxmlformats.org/drawingml/2006/main">
               <a:ext uri="{FF2B5EF4-FFF2-40B4-BE49-F238E27FC236}">
-                <a16:creationId xmlns:a16="http://schemas.microsoft.com/office/drawing/2014/main" id="{EEC67A6C-0B16-4FB3-B1D8-8A4E378854D6}"/>
+                <a16:creationId xmlns:a16="http://schemas.microsoft.com/office/drawing/2014/main" id="{D548DB41-0CBE-4781-93E8-9D5EB3DFB057}"/>
               </a:ext>
             </a:extLst>
           </p:cNvPr>
@@ -6111,7 +6580,7 @@
           <p:cNvPr id="3" name="">
             <a:extLst xmlns:a="http://schemas.openxmlformats.org/drawingml/2006/main">
               <a:ext uri="{FF2B5EF4-FFF2-40B4-BE49-F238E27FC236}">
-                <a16:creationId xmlns:a16="http://schemas.microsoft.com/office/drawing/2014/main" id="{B091BABD-A7D8-44CC-9B33-BAE19B9530B6}"/>
+                <a16:creationId xmlns:a16="http://schemas.microsoft.com/office/drawing/2014/main" id="{BBFBE68F-E0C8-4C82-8492-776DF8E70513}"/>
               </a:ext>
             </a:extLst>
           </p:cNvPr>
@@ -6142,7 +6611,7 @@
           <p:cNvPr id="4" name="">
             <a:extLst xmlns:a="http://schemas.openxmlformats.org/drawingml/2006/main">
               <a:ext uri="{FF2B5EF4-FFF2-40B4-BE49-F238E27FC236}">
-                <a16:creationId xmlns:a16="http://schemas.microsoft.com/office/drawing/2014/main" id="{C89DCF98-B076-42F8-9100-5BDA86C14502}"/>
+                <a16:creationId xmlns:a16="http://schemas.microsoft.com/office/drawing/2014/main" id="{A7602FFD-C794-432B-8EA4-C5B345F0F71D}"/>
               </a:ext>
             </a:extLst>
           </p:cNvPr>
@@ -6175,7 +6644,7 @@
           <p:cNvPr id="5" name="">
             <a:extLst xmlns:a="http://schemas.openxmlformats.org/drawingml/2006/main">
               <a:ext uri="{FF2B5EF4-FFF2-40B4-BE49-F238E27FC236}">
-                <a16:creationId xmlns:a16="http://schemas.microsoft.com/office/drawing/2014/main" id="{7A55D2C9-4E54-4D4F-B6F0-52AC6BF732B9}"/>
+                <a16:creationId xmlns:a16="http://schemas.microsoft.com/office/drawing/2014/main" id="{9C64161C-6EB2-4E09-96C1-7253B9ACA1FF}"/>
               </a:ext>
             </a:extLst>
           </p:cNvPr>
@@ -6225,7 +6694,7 @@
           <p:cNvPr id="6" name="">
             <a:extLst xmlns:a="http://schemas.openxmlformats.org/drawingml/2006/main">
               <a:ext uri="{FF2B5EF4-FFF2